--- a/Tlamatini_eXtended_Artificial_Intelligence_Humanly_Tempered.pptx
+++ b/Tlamatini_eXtended_Artificial_Intelligence_Humanly_Tempered.pptx
@@ -3228,7 +3228,7 @@
         <p:spPr>
           <a:xfrm>
             <a:off x="411480" y="713232"/>
-            <a:ext cx="10789920" cy="411480"/>
+            <a:ext cx="10881360" cy="411480"/>
           </a:xfrm>
           <a:prstGeom prst="rect">
             <a:avLst/>
@@ -3241,7 +3241,6 @@
           </a:bodyPr>
           <a:lstStyle/>
           <a:p>
-            <a:pPr algn="l"/>
             <a:r>
               <a:rPr b="1" sz="2550">
                 <a:solidFill>
@@ -3283,7 +3282,7 @@
                 </a:solidFill>
                 <a:latin typeface="Segoe UI"/>
               </a:rPr>
-              <a:t>Code-verified deck rebuilt from the current source tree, the refreshed README, the current PDF extraction, and focused April 1, 2026 test runs.</a:t>
+              <a:t>Code-verified deck rebuilt from the current source tree, the refreshed README, the refreshed PDF, and focused April 3, 2026 test runs.</a:t>
             </a:r>
           </a:p>
         </p:txBody>
@@ -3360,7 +3359,7 @@
                 </a:solidFill>
                 <a:latin typeface="Segoe UI"/>
               </a:rPr>
-              <a:t>Tlamatini | April 1, 2026 | 29f081e23748</a:t>
+              <a:t>Tlamatini | April 3, 2026 | 4fd33b480086</a:t>
             </a:r>
           </a:p>
         </p:txBody>
@@ -3474,7 +3473,7 @@
                 </a:solidFill>
                 <a:latin typeface="Segoe UI"/>
               </a:rPr>
-              <a:t>HEAD 29f081e23748</a:t>
+              <a:t>HEAD 4fd33b480086</a:t>
             </a:r>
           </a:p>
           <a:p>
@@ -3572,7 +3571,7 @@
                 </a:solidFill>
                 <a:latin typeface="Segoe UI"/>
               </a:rPr>
-              <a:t>Why this refresh exists</a:t>
+              <a:t>Previous docs anchor</a:t>
             </a:r>
           </a:p>
           <a:p>
@@ -3591,7 +3590,7 @@
                 </a:solidFill>
                 <a:latin typeface="Segoe UI"/>
               </a:rPr>
-              <a:t>Previous deck anchor: e3d77576b0c9</a:t>
+              <a:t>Previous deck/PDF anchor: 29f081e23748</a:t>
             </a:r>
           </a:p>
           <a:p>
@@ -3610,7 +3609,7 @@
                 </a:solidFill>
                 <a:latin typeface="Segoe UI"/>
               </a:rPr>
-              <a:t>Previous PDF anchor: 47e19f6f45d3</a:t>
+              <a:t>April 1 documentation snapshot</a:t>
             </a:r>
           </a:p>
           <a:p>
@@ -3629,7 +3628,7 @@
                 </a:solidFill>
                 <a:latin typeface="Segoe UI"/>
               </a:rPr>
-              <a:t>The April 1 chat runtime layer was not present in the old deck.</a:t>
+              <a:t>Recent commits changed ACP behavior and packaging details.</a:t>
             </a:r>
           </a:p>
         </p:txBody>
@@ -3708,7 +3707,7 @@
                 </a:solidFill>
                 <a:latin typeface="Segoe UI"/>
               </a:rPr>
-              <a:t>Current codebase and last commit diff</a:t>
+              <a:t>Current codebase and commit range</a:t>
             </a:r>
           </a:p>
           <a:p>
@@ -3727,7 +3726,7 @@
                 </a:solidFill>
                 <a:latin typeface="Segoe UI"/>
               </a:rPr>
-              <a:t>Refreshed README.md and current PDF text</a:t>
+              <a:t>Refreshed README.md and refreshed PDF text</a:t>
             </a:r>
           </a:p>
           <a:p>
@@ -3800,13 +3799,13 @@
               </a:spcAft>
             </a:pPr>
             <a:r>
-              <a:rPr sz="2000" b="1">
+              <a:rPr sz="1950" b="1">
                 <a:solidFill>
                   <a:srgbClr val="173B6C"/>
                 </a:solidFill>
                 <a:latin typeface="Segoe UI"/>
               </a:rPr>
-              <a:t>This version replaces a March 29 narrative with an April 1 one</a:t>
+              <a:t>This version replaces an April 1 documentation pass with an April 3 one</a:t>
             </a:r>
           </a:p>
           <a:p>
@@ -3825,26 +3824,7 @@
                 </a:solidFill>
                 <a:latin typeface="Segoe UI"/>
               </a:rPr>
-              <a:t>The deck now centers the new main-chat multi-turn executor, the wrapped chat-agent runtime layer, ChatAgentRun persistence, ACP isolation from __chat_runs__, and the recomputed 324 / 194 / 24 / 55 / 102 / 13 repository shape.</a:t>
-            </a:r>
-          </a:p>
-          <a:p>
-            <a:pPr algn="l">
-              <a:spcBef>
-                <a:spcPts val="0"/>
-              </a:spcBef>
-              <a:spcAft>
-                <a:spcPts val="0"/>
-              </a:spcAft>
-            </a:pPr>
-            <a:r>
-              <a:rPr sz="1500">
-                <a:solidFill>
-                  <a:srgbClr val="364557"/>
-                </a:solidFill>
-                <a:latin typeface="Segoe UI"/>
-              </a:rPr>
-              <a:t>Every count on this deck comes from the live tree, not from the previous PowerPoint.</a:t>
+              <a:t>The deck now preserves the April 1 main-chat runtime layer but adds the April 2-3 ACP description/context-menu work, Parametrizer nested mapping, packaging/install hardening, updated line totals, and the current 28-test status.</a:t>
             </a:r>
           </a:p>
         </p:txBody>
@@ -3987,7 +3967,7 @@
         <p:spPr>
           <a:xfrm>
             <a:off x="411480" y="713232"/>
-            <a:ext cx="10789920" cy="411480"/>
+            <a:ext cx="10881360" cy="411480"/>
           </a:xfrm>
           <a:prstGeom prst="rect">
             <a:avLst/>
@@ -4000,7 +3980,6 @@
           </a:bodyPr>
           <a:lstStyle/>
           <a:p>
-            <a:pPr algn="l"/>
             <a:r>
               <a:rPr b="1" sz="2550">
                 <a:solidFill>
@@ -4008,7 +3987,7 @@
                 </a:solidFill>
                 <a:latin typeface="Segoe UI"/>
               </a:rPr>
-              <a:t>Agentic Control Panel / Flow Designer</a:t>
+              <a:t>Descriptions, tooltips, and instance context menus</a:t>
             </a:r>
           </a:p>
         </p:txBody>
@@ -4042,7 +4021,7 @@
                 </a:solidFill>
                 <a:latin typeface="Segoe UI"/>
               </a:rPr>
-              <a:t>The ACP remains the defining differentiator: a real drag-and-drop orchestration surface backed by routes, pools, logs, and deployment artifacts.</a:t>
+              <a:t>The most visible April 2 change is that the ACP now turns README agent-purpose text into live UI content.</a:t>
             </a:r>
           </a:p>
         </p:txBody>
@@ -4119,7 +4098,7 @@
                 </a:solidFill>
                 <a:latin typeface="Segoe UI"/>
               </a:rPr>
-              <a:t>Tlamatini | April 1, 2026 | 29f081e23748</a:t>
+              <a:t>Tlamatini | April 3, 2026 | 4fd33b480086</a:t>
             </a:r>
           </a:p>
         </p:txBody>
@@ -4168,7 +4147,86 @@
         <p:spPr>
           <a:xfrm>
             <a:off x="411480" y="1828800"/>
-            <a:ext cx="3648456" cy="1508760"/>
+            <a:ext cx="3648456" cy="1874519"/>
+          </a:xfrm>
+          <a:prstGeom prst="roundRect">
+            <a:avLst/>
+          </a:prstGeom>
+          <a:solidFill>
+            <a:srgbClr val="E8F0F8"/>
+          </a:solidFill>
+          <a:ln w="17780">
+            <a:solidFill>
+              <a:srgbClr val="173B6C"/>
+            </a:solidFill>
+          </a:ln>
+        </p:spPr>
+        <p:style>
+          <a:lnRef idx="1">
+            <a:schemeClr val="accent1"/>
+          </a:lnRef>
+          <a:fillRef idx="3">
+            <a:schemeClr val="accent1"/>
+          </a:fillRef>
+          <a:effectRef idx="2">
+            <a:schemeClr val="accent1"/>
+          </a:effectRef>
+          <a:fontRef idx="minor">
+            <a:schemeClr val="lt1"/>
+          </a:fontRef>
+        </p:style>
+        <p:txBody>
+          <a:bodyPr rtlCol="0" anchor="t" wrap="square" lIns="152400" rIns="152400" tIns="127000" bIns="101600">
+            <a:normAutofit/>
+          </a:bodyPr>
+          <a:lstStyle/>
+          <a:p>
+            <a:pPr algn="l">
+              <a:spcAft>
+                <a:spcPts val="200"/>
+              </a:spcAft>
+            </a:pPr>
+            <a:r>
+              <a:rPr sz="1800" b="1">
+                <a:solidFill>
+                  <a:srgbClr val="173B6C"/>
+                </a:solidFill>
+                <a:latin typeface="Segoe UI"/>
+              </a:rPr>
+              <a:t>Purpose source</a:t>
+            </a:r>
+          </a:p>
+          <a:p>
+            <a:pPr algn="l">
+              <a:spcBef>
+                <a:spcPts val="0"/>
+              </a:spcBef>
+              <a:spcAft>
+                <a:spcPts val="0"/>
+              </a:spcAft>
+            </a:pPr>
+            <a:r>
+              <a:rPr sz="1240">
+                <a:solidFill>
+                  <a:srgbClr val="364557"/>
+                </a:solidFill>
+                <a:latin typeface="Segoe UI"/>
+              </a:rPr>
+              <a:t>views.py parses the Workflow Agents Purpose column from README.md into agent_purpose_map and injects it into agentic_control_panel.html.</a:t>
+            </a:r>
+          </a:p>
+        </p:txBody>
+      </p:sp>
+      <p:sp>
+        <p:nvSpPr>
+          <p:cNvPr id="10" name="CARD_9"/>
+          <p:cNvSpPr/>
+          <p:nvPr/>
+        </p:nvSpPr>
+        <p:spPr>
+          <a:xfrm>
+            <a:off x="4270248" y="1828800"/>
+            <a:ext cx="3648456" cy="1874519"/>
           </a:xfrm>
           <a:prstGeom prst="roundRect">
             <a:avLst/>
@@ -4214,124 +4272,64 @@
                 </a:solidFill>
                 <a:latin typeface="Segoe UI"/>
               </a:rPr>
-              <a:t>Canvas behavior</a:t>
-            </a:r>
-          </a:p>
-          <a:p>
-            <a:pPr algn="l">
-              <a:spcBef>
-                <a:spcPts val="0"/>
-              </a:spcBef>
-              <a:spcAft>
-                <a:spcPts val="0"/>
-              </a:spcAft>
-            </a:pPr>
-            <a:r>
-              <a:rPr sz="1250">
-                <a:solidFill>
-                  <a:srgbClr val="364557"/>
-                </a:solidFill>
-                <a:latin typeface="Segoe UI"/>
-              </a:rPr>
-              <a:t>Drag-and-drop agent placement, connection wiring, .flw save/load, undo/redo, logs, LEDs, and restart controls.</a:t>
-            </a:r>
-          </a:p>
-        </p:txBody>
-      </p:sp>
-      <p:sp>
-        <p:nvSpPr>
-          <p:cNvPr id="10" name="CARD_9"/>
-          <p:cNvSpPr/>
-          <p:nvPr/>
-        </p:nvSpPr>
-        <p:spPr>
-          <a:xfrm>
-            <a:off x="4270248" y="1828800"/>
-            <a:ext cx="3648456" cy="1508760"/>
-          </a:xfrm>
-          <a:prstGeom prst="roundRect">
-            <a:avLst/>
-          </a:prstGeom>
-          <a:solidFill>
-            <a:srgbClr val="E8F0F8"/>
-          </a:solidFill>
-          <a:ln w="17780">
-            <a:solidFill>
-              <a:srgbClr val="173B6C"/>
-            </a:solidFill>
-          </a:ln>
-        </p:spPr>
-        <p:style>
-          <a:lnRef idx="1">
-            <a:schemeClr val="accent1"/>
-          </a:lnRef>
-          <a:fillRef idx="3">
-            <a:schemeClr val="accent1"/>
-          </a:fillRef>
-          <a:effectRef idx="2">
-            <a:schemeClr val="accent1"/>
-          </a:effectRef>
-          <a:fontRef idx="minor">
-            <a:schemeClr val="lt1"/>
-          </a:fontRef>
-        </p:style>
-        <p:txBody>
-          <a:bodyPr rtlCol="0" anchor="t" wrap="square" lIns="152400" rIns="152400" tIns="127000" bIns="101600">
-            <a:normAutofit/>
-          </a:bodyPr>
-          <a:lstStyle/>
-          <a:p>
-            <a:pPr algn="l">
-              <a:spcAft>
-                <a:spcPts val="200"/>
-              </a:spcAft>
-            </a:pPr>
-            <a:r>
-              <a:rPr sz="1800" b="1">
-                <a:solidFill>
-                  <a:srgbClr val="173B6C"/>
-                </a:solidFill>
-                <a:latin typeface="Segoe UI"/>
-              </a:rPr>
-              <a:t>Backend surface</a:t>
-            </a:r>
-          </a:p>
-          <a:p>
-            <a:pPr algn="l">
-              <a:spcBef>
-                <a:spcPts val="0"/>
-              </a:spcBef>
-              <a:spcAft>
-                <a:spcPts val="0"/>
-              </a:spcAft>
-            </a:pPr>
-            <a:r>
-              <a:rPr sz="1250">
-                <a:solidFill>
-                  <a:srgbClr val="364557"/>
-                </a:solidFill>
-                <a:latin typeface="Segoe UI"/>
-              </a:rPr>
-              <a:t>52 update_* routes drive canvas auto-configuration.</a:t>
-            </a:r>
-          </a:p>
-          <a:p>
-            <a:pPr algn="l">
-              <a:spcBef>
-                <a:spcPts val="0"/>
-              </a:spcBef>
-              <a:spcAft>
-                <a:spcPts val="0"/>
-              </a:spcAft>
-            </a:pPr>
-            <a:r>
-              <a:rPr sz="1250">
-                <a:solidFill>
-                  <a:srgbClr val="364557"/>
-                </a:solidFill>
-                <a:latin typeface="Segoe UI"/>
-              </a:rPr>
-              <a:t>Pause, reanimation, validation, and session management are all real views, not frontend-only affordances.</a:t>
+              <a:t>User-facing ACP behavior</a:t>
+            </a:r>
+          </a:p>
+          <a:p>
+            <a:pPr algn="l">
+              <a:spcBef>
+                <a:spcPts val="0"/>
+              </a:spcBef>
+              <a:spcAft>
+                <a:spcPts val="0"/>
+              </a:spcAft>
+            </a:pPr>
+            <a:r>
+              <a:rPr sz="1210">
+                <a:solidFill>
+                  <a:srgbClr val="364557"/>
+                </a:solidFill>
+                <a:latin typeface="Segoe UI"/>
+              </a:rPr>
+              <a:t>Sidebar hover tooltips show purpose text.</a:t>
+            </a:r>
+          </a:p>
+          <a:p>
+            <a:pPr algn="l">
+              <a:spcBef>
+                <a:spcPts val="0"/>
+              </a:spcBef>
+              <a:spcAft>
+                <a:spcPts val="0"/>
+              </a:spcAft>
+            </a:pPr>
+            <a:r>
+              <a:rPr sz="1210">
+                <a:solidFill>
+                  <a:srgbClr val="364557"/>
+                </a:solidFill>
+                <a:latin typeface="Segoe UI"/>
+              </a:rPr>
+              <a:t>Right-click Description opens a draggable modal.</a:t>
+            </a:r>
+          </a:p>
+          <a:p>
+            <a:pPr algn="l">
+              <a:spcBef>
+                <a:spcPts val="0"/>
+              </a:spcBef>
+              <a:spcAft>
+                <a:spcPts val="0"/>
+              </a:spcAft>
+            </a:pPr>
+            <a:r>
+              <a:rPr sz="1210">
+                <a:solidFill>
+                  <a:srgbClr val="364557"/>
+                </a:solidFill>
+                <a:latin typeface="Segoe UI"/>
+              </a:rPr>
+              <a:t>The same frontend renderer formats simple bold, code, and line breaks.</a:t>
             </a:r>
           </a:p>
         </p:txBody>
@@ -4345,7 +4343,7 @@
         <p:spPr>
           <a:xfrm>
             <a:off x="8129016" y="1828800"/>
-            <a:ext cx="3648456" cy="1508760"/>
+            <a:ext cx="3648456" cy="1874519"/>
           </a:xfrm>
           <a:prstGeom prst="roundRect">
             <a:avLst/>
@@ -4391,26 +4389,64 @@
                 </a:solidFill>
                 <a:latin typeface="Segoe UI"/>
               </a:rPr>
-              <a:t>Deployed runtime</a:t>
-            </a:r>
-          </a:p>
-          <a:p>
-            <a:pPr algn="l">
-              <a:spcBef>
-                <a:spcPts val="0"/>
-              </a:spcBef>
-              <a:spcAft>
-                <a:spcPts val="0"/>
-              </a:spcAft>
-            </a:pPr>
-            <a:r>
-              <a:rPr sz="1250">
-                <a:solidFill>
-                  <a:srgbClr val="364557"/>
-                </a:solidFill>
-                <a:latin typeface="Segoe UI"/>
-              </a:rPr>
-              <a:t>Flows deploy into per-session pools with logs, pid files, reanimation artifacts, and agent-local config state.</a:t>
+              <a:t>Instance actions</a:t>
+            </a:r>
+          </a:p>
+          <a:p>
+            <a:pPr algn="l">
+              <a:spcBef>
+                <a:spcPts val="0"/>
+              </a:spcBef>
+              <a:spcAft>
+                <a:spcPts val="0"/>
+              </a:spcAft>
+            </a:pPr>
+            <a:r>
+              <a:rPr sz="1200">
+                <a:solidFill>
+                  <a:srgbClr val="364557"/>
+                </a:solidFill>
+                <a:latin typeface="Segoe UI"/>
+              </a:rPr>
+              <a:t>Explore dir opens Explorer in the deployed instance directory.</a:t>
+            </a:r>
+          </a:p>
+          <a:p>
+            <a:pPr algn="l">
+              <a:spcBef>
+                <a:spcPts val="0"/>
+              </a:spcBef>
+              <a:spcAft>
+                <a:spcPts val="0"/>
+              </a:spcAft>
+            </a:pPr>
+            <a:r>
+              <a:rPr sz="1200">
+                <a:solidFill>
+                  <a:srgbClr val="364557"/>
+                </a:solidFill>
+                <a:latin typeface="Segoe UI"/>
+              </a:rPr>
+              <a:t>Open cmd opens cmd.exe with cwd set to that deployed instance directory.</a:t>
+            </a:r>
+          </a:p>
+          <a:p>
+            <a:pPr algn="l">
+              <a:spcBef>
+                <a:spcPts val="0"/>
+              </a:spcBef>
+              <a:spcAft>
+                <a:spcPts val="0"/>
+              </a:spcAft>
+            </a:pPr>
+            <a:r>
+              <a:rPr sz="1200">
+                <a:solidFill>
+                  <a:srgbClr val="364557"/>
+                </a:solidFill>
+                <a:latin typeface="Segoe UI"/>
+              </a:rPr>
+              <a:t>open_in_app now resolves agent_name with strict pool-path validation.</a:t>
             </a:r>
           </a:p>
         </p:txBody>
@@ -4423,8 +4459,8 @@
         </p:nvSpPr>
         <p:spPr>
           <a:xfrm>
-            <a:off x="411480" y="3703320"/>
-            <a:ext cx="11365992" cy="1691640"/>
+            <a:off x="411480" y="4023360"/>
+            <a:ext cx="11365992" cy="1325880"/>
           </a:xfrm>
           <a:prstGeom prst="roundRect">
             <a:avLst/>
@@ -4464,32 +4500,32 @@
               </a:spcAft>
             </a:pPr>
             <a:r>
-              <a:rPr sz="1900" b="1">
+              <a:rPr sz="1800" b="1">
                 <a:solidFill>
                   <a:srgbClr val="173B6C"/>
                 </a:solidFill>
                 <a:latin typeface="Segoe UI"/>
               </a:rPr>
-              <a:t>Operational reading</a:t>
-            </a:r>
-          </a:p>
-          <a:p>
-            <a:pPr algn="l">
-              <a:spcBef>
-                <a:spcPts val="0"/>
-              </a:spcBef>
-              <a:spcAft>
-                <a:spcPts val="0"/>
-              </a:spcAft>
-            </a:pPr>
-            <a:r>
-              <a:rPr sz="1400">
-                <a:solidFill>
-                  <a:srgbClr val="364557"/>
-                </a:solidFill>
-                <a:latin typeface="Segoe UI"/>
-              </a:rPr>
-              <a:t>The ACP is not a conceptual diagrammer. It is the runtime control surface for long-running agent graphs, with stateful deployment, process management, and topology validation behind each visible action.</a:t>
+              <a:t>Operational implication</a:t>
+            </a:r>
+          </a:p>
+          <a:p>
+            <a:pPr algn="l">
+              <a:spcBef>
+                <a:spcPts val="0"/>
+              </a:spcBef>
+              <a:spcAft>
+                <a:spcPts val="0"/>
+              </a:spcAft>
+            </a:pPr>
+            <a:r>
+              <a:rPr sz="1340">
+                <a:solidFill>
+                  <a:srgbClr val="364557"/>
+                </a:solidFill>
+                <a:latin typeface="Segoe UI"/>
+              </a:rPr>
+              <a:t>README agent-purpose text is now both documentation and runtime UI copy. That makes documentation drift in the Workflow Agents tables immediately visible to users in the ACP.</a:t>
             </a:r>
           </a:p>
         </p:txBody>
@@ -4632,7 +4668,7 @@
         <p:spPr>
           <a:xfrm>
             <a:off x="411480" y="713232"/>
-            <a:ext cx="10789920" cy="411480"/>
+            <a:ext cx="10881360" cy="411480"/>
           </a:xfrm>
           <a:prstGeom prst="rect">
             <a:avLst/>
@@ -4645,7 +4681,6 @@
           </a:bodyPr>
           <a:lstStyle/>
           <a:p>
-            <a:pPr algn="l"/>
             <a:r>
               <a:rPr b="1" sz="2550">
                 <a:solidFill>
@@ -4687,7 +4722,7 @@
                 </a:solidFill>
                 <a:latin typeface="Segoe UI"/>
               </a:rPr>
-              <a:t>The correct behavior is derived from the current ACP code path and the refreshed README, not from older documentation snapshots.</a:t>
+              <a:t>The core pause/stop/reanimation behavior remains as documented on April 1, and it still matters because Pause is the cost-control action for long-running non-deterministic flows.</a:t>
             </a:r>
           </a:p>
         </p:txBody>
@@ -4764,7 +4799,7 @@
                 </a:solidFill>
                 <a:latin typeface="Segoe UI"/>
               </a:rPr>
-              <a:t>Tlamatini | April 1, 2026 | 29f081e23748</a:t>
+              <a:t>Tlamatini | April 3, 2026 | 4fd33b480086</a:t>
             </a:r>
           </a:p>
         </p:txBody>
@@ -5223,13 +5258,13 @@
               </a:spcAft>
             </a:pPr>
             <a:r>
-              <a:rPr sz="1340">
-                <a:solidFill>
-                  <a:srgbClr val="364557"/>
-                </a:solidFill>
-                <a:latin typeface="Segoe UI"/>
-              </a:rPr>
-              <a:t>LEDs are green for running, yellow blinking for paused, gray for stopped/idle, and red when a node expected to be running is not alive. Pause saves further model/API spend while preserving the flow's reanimation path; Stop ends that path.</a:t>
+              <a:rPr sz="1330">
+                <a:solidFill>
+                  <a:srgbClr val="364557"/>
+                </a:solidFill>
+                <a:latin typeface="Segoe UI"/>
+              </a:rPr>
+              <a:t>LEDs are green for running, yellow blinking for paused, gray for stopped/idle, and red when a node expected to be running is not alive. Pause preserves resume state; Stop exits the reanimation path.</a:t>
             </a:r>
           </a:p>
         </p:txBody>
@@ -5372,7 +5407,7 @@
         <p:spPr>
           <a:xfrm>
             <a:off x="411480" y="713232"/>
-            <a:ext cx="10789920" cy="411480"/>
+            <a:ext cx="10881360" cy="411480"/>
           </a:xfrm>
           <a:prstGeom prst="rect">
             <a:avLst/>
@@ -5385,7 +5420,6 @@
           </a:bodyPr>
           <a:lstStyle/>
           <a:p>
-            <a:pPr algn="l"/>
             <a:r>
               <a:rPr b="1" sz="2550">
                 <a:solidFill>
@@ -5427,7 +5461,7 @@
                 </a:solidFill>
                 <a:latin typeface="Segoe UI"/>
               </a:rPr>
-              <a:t>The current canvas implements stricter topology rules and now includes a real synchronization node.</a:t>
+              <a:t>The current canvas still implements the stricter topology rules and synchronization surface documented in the April 1 refresh.</a:t>
             </a:r>
           </a:p>
         </p:txBody>
@@ -5504,7 +5538,7 @@
                 </a:solidFill>
                 <a:latin typeface="Segoe UI"/>
               </a:rPr>
-              <a:t>Tlamatini | April 1, 2026 | 29f081e23748</a:t>
+              <a:t>Tlamatini | April 3, 2026 | 4fd33b480086</a:t>
             </a:r>
           </a:p>
         </p:txBody>
@@ -5811,7 +5845,7 @@
                 </a:solidFill>
                 <a:latin typeface="Segoe UI"/>
               </a:rPr>
-              <a:t>FlowBacker formalizes return/recycle logic near the end of a flow and is now part of validation rules rather than an undocumented add-on.</a:t>
+              <a:t>FlowBacker formalizes return/recycle logic near the end of a flow and remains part of the validation rules.</a:t>
             </a:r>
           </a:p>
         </p:txBody>
@@ -5954,7 +5988,7 @@
         <p:spPr>
           <a:xfrm>
             <a:off x="411480" y="713232"/>
-            <a:ext cx="10789920" cy="411480"/>
+            <a:ext cx="10881360" cy="411480"/>
           </a:xfrm>
           <a:prstGeom prst="rect">
             <a:avLst/>
@@ -5967,7 +6001,6 @@
           </a:bodyPr>
           <a:lstStyle/>
           <a:p>
-            <a:pPr algn="l"/>
             <a:r>
               <a:rPr b="1" sz="2550">
                 <a:solidFill>
@@ -6086,7 +6119,7 @@
                 </a:solidFill>
                 <a:latin typeface="Segoe UI"/>
               </a:rPr>
-              <a:t>Tlamatini | April 1, 2026 | 29f081e23748</a:t>
+              <a:t>Tlamatini | April 3, 2026 | 4fd33b480086</a:t>
             </a:r>
           </a:p>
         </p:txBody>
@@ -6672,7 +6705,7 @@
         <p:spPr>
           <a:xfrm>
             <a:off x="411480" y="713232"/>
-            <a:ext cx="10789920" cy="411480"/>
+            <a:ext cx="10881360" cy="411480"/>
           </a:xfrm>
           <a:prstGeom prst="rect">
             <a:avLst/>
@@ -6685,7 +6718,6 @@
           </a:bodyPr>
           <a:lstStyle/>
           <a:p>
-            <a:pPr algn="l"/>
             <a:r>
               <a:rPr b="1" sz="2550">
                 <a:solidFill>
@@ -6804,7 +6836,7 @@
                 </a:solidFill>
                 <a:latin typeface="Segoe UI"/>
               </a:rPr>
-              <a:t>Tlamatini | April 1, 2026 | 29f081e23748</a:t>
+              <a:t>Tlamatini | April 3, 2026 | 4fd33b480086</a:t>
             </a:r>
           </a:p>
         </p:txBody>
@@ -7244,13 +7276,13 @@
               </a:spcAft>
             </a:pPr>
             <a:r>
-              <a:rPr sz="1340">
-                <a:solidFill>
-                  <a:srgbClr val="364557"/>
-                </a:solidFill>
-                <a:latin typeface="Segoe UI"/>
-              </a:rPr>
-              <a:t>The current tree exposes 55 templates, while the main chat wraps a selected subset of 32 of them for isolated runtime launch from the conversational surface.</a:t>
+              <a:rPr sz="1320">
+                <a:solidFill>
+                  <a:srgbClr val="364557"/>
+                </a:solidFill>
+                <a:latin typeface="Segoe UI"/>
+              </a:rPr>
+              <a:t>The current tree still exposes 55 templates, while the main chat wraps a selected subset of 32 of them for isolated runtime launch from the conversational surface.</a:t>
             </a:r>
           </a:p>
         </p:txBody>
@@ -7393,7 +7425,7 @@
         <p:spPr>
           <a:xfrm>
             <a:off x="411480" y="713232"/>
-            <a:ext cx="10789920" cy="411480"/>
+            <a:ext cx="10881360" cy="411480"/>
           </a:xfrm>
           <a:prstGeom prst="rect">
             <a:avLst/>
@@ -7406,7 +7438,6 @@
           </a:bodyPr>
           <a:lstStyle/>
           <a:p>
-            <a:pPr algn="l"/>
             <a:r>
               <a:rPr b="1" sz="2550">
                 <a:solidFill>
@@ -7414,7 +7445,7 @@
                 </a:solidFill>
                 <a:latin typeface="Segoe UI"/>
               </a:rPr>
-              <a:t>Structured-output wiring as a first-class runtime feature</a:t>
+              <a:t>Structured-output wiring now reaches nested target config keys</a:t>
             </a:r>
           </a:p>
         </p:txBody>
@@ -7448,7 +7479,7 @@
                 </a:solidFill>
                 <a:latin typeface="Segoe UI"/>
               </a:rPr>
-              <a:t>README, code, and deck now align on Parametrizer's actual parser surface and deployment behavior.</a:t>
+              <a:t>The April 1 Parametrizer story is still correct, but April 2 added an important implementation detail: nested target config mapping.</a:t>
             </a:r>
           </a:p>
         </p:txBody>
@@ -7525,7 +7556,7 @@
                 </a:solidFill>
                 <a:latin typeface="Segoe UI"/>
               </a:rPr>
-              <a:t>Tlamatini | April 1, 2026 | 29f081e23748</a:t>
+              <a:t>Tlamatini | April 3, 2026 | 4fd33b480086</a:t>
             </a:r>
           </a:p>
         </p:txBody>
@@ -7633,7 +7664,7 @@
               </a:spcAft>
             </a:pPr>
             <a:r>
-              <a:rPr sz="1340">
+              <a:rPr sz="1330">
                 <a:solidFill>
                   <a:srgbClr val="364557"/>
                 </a:solidFill>
@@ -7835,64 +7866,64 @@
                 </a:solidFill>
                 <a:latin typeface="Segoe UI"/>
               </a:rPr>
-              <a:t>Important code nuance</a:t>
-            </a:r>
-          </a:p>
-          <a:p>
-            <a:pPr algn="l">
-              <a:spcBef>
-                <a:spcPts val="0"/>
-              </a:spcBef>
-              <a:spcAft>
-                <a:spcPts val="0"/>
-              </a:spcAft>
-            </a:pPr>
-            <a:r>
-              <a:rPr sz="1220">
-                <a:solidFill>
-                  <a:srgbClr val="364557"/>
-                </a:solidFill>
-                <a:latin typeface="Segoe UI"/>
-              </a:rPr>
-              <a:t>The interconnection-scheme.csv is saved for the deployed Parametrizer pool instance.</a:t>
-            </a:r>
-          </a:p>
-          <a:p>
-            <a:pPr algn="l">
-              <a:spcBef>
-                <a:spcPts val="0"/>
-              </a:spcBef>
-              <a:spcAft>
-                <a:spcPts val="0"/>
-              </a:spcAft>
-            </a:pPr>
-            <a:r>
-              <a:rPr sz="1220">
-                <a:solidFill>
-                  <a:srgbClr val="364557"/>
-                </a:solidFill>
-                <a:latin typeface="Segoe UI"/>
-              </a:rPr>
-              <a:t>It is not shipped as a static template file inside agents/parametrizer/.</a:t>
-            </a:r>
-          </a:p>
-          <a:p>
-            <a:pPr algn="l">
-              <a:spcBef>
-                <a:spcPts val="0"/>
-              </a:spcBef>
-              <a:spcAft>
-                <a:spcPts val="0"/>
-              </a:spcAft>
-            </a:pPr>
-            <a:r>
-              <a:rPr sz="1220">
-                <a:solidFill>
-                  <a:srgbClr val="364557"/>
-                </a:solidFill>
-                <a:latin typeface="Segoe UI"/>
-              </a:rPr>
-              <a:t>That distinction matters when auditing live flow behavior versus template directories.</a:t>
+              <a:t>New nested-mapping nuance</a:t>
+            </a:r>
+          </a:p>
+          <a:p>
+            <a:pPr algn="l">
+              <a:spcBef>
+                <a:spcPts val="0"/>
+              </a:spcBef>
+              <a:spcAft>
+                <a:spcPts val="0"/>
+              </a:spcAft>
+            </a:pPr>
+            <a:r>
+              <a:rPr sz="1210">
+                <a:solidFill>
+                  <a:srgbClr val="364557"/>
+                </a:solidFill>
+                <a:latin typeface="Segoe UI"/>
+              </a:rPr>
+              <a:t>The dialog now flattens nested target config dictionaries into dot-notation keys.</a:t>
+            </a:r>
+          </a:p>
+          <a:p>
+            <a:pPr algn="l">
+              <a:spcBef>
+                <a:spcPts val="0"/>
+              </a:spcBef>
+              <a:spcAft>
+                <a:spcPts val="0"/>
+              </a:spcAft>
+            </a:pPr>
+            <a:r>
+              <a:rPr sz="1210">
+                <a:solidFill>
+                  <a:srgbClr val="364557"/>
+                </a:solidFill>
+                <a:latin typeface="Segoe UI"/>
+              </a:rPr>
+              <a:t>Runtime mapping now creates/traverses nested dictionaries when target_param contains dots.</a:t>
+            </a:r>
+          </a:p>
+          <a:p>
+            <a:pPr algn="l">
+              <a:spcBef>
+                <a:spcPts val="0"/>
+              </a:spcBef>
+              <a:spcAft>
+                <a:spcPts val="0"/>
+              </a:spcAft>
+            </a:pPr>
+            <a:r>
+              <a:rPr sz="1210">
+                <a:solidFill>
+                  <a:srgbClr val="364557"/>
+                </a:solidFill>
+                <a:latin typeface="Segoe UI"/>
+              </a:rPr>
+              <a:t>Example shape: response_body -&gt; target.smtp.username</a:t>
             </a:r>
           </a:p>
         </p:txBody>
@@ -8035,7 +8066,7 @@
         <p:spPr>
           <a:xfrm>
             <a:off x="411480" y="713232"/>
-            <a:ext cx="10789920" cy="411480"/>
+            <a:ext cx="10881360" cy="411480"/>
           </a:xfrm>
           <a:prstGeom prst="rect">
             <a:avLst/>
@@ -8048,7 +8079,6 @@
           </a:bodyPr>
           <a:lstStyle/>
           <a:p>
-            <a:pPr algn="l"/>
             <a:r>
               <a:rPr b="1" sz="2550">
                 <a:solidFill>
@@ -8056,7 +8086,7 @@
                 </a:solidFill>
                 <a:latin typeface="Segoe UI"/>
               </a:rPr>
-              <a:t>Persistence, session behavior, and runtime artifacts</a:t>
+              <a:t>Persistence, isolation, and current controls</a:t>
             </a:r>
           </a:p>
         </p:txBody>
@@ -8167,7 +8197,7 @@
                 </a:solidFill>
                 <a:latin typeface="Segoe UI"/>
               </a:rPr>
-              <a:t>Tlamatini | April 1, 2026 | 29f081e23748</a:t>
+              <a:t>Tlamatini | April 3, 2026 | 4fd33b480086</a:t>
             </a:r>
           </a:p>
         </p:txBody>
@@ -8534,7 +8564,7 @@
                 </a:solidFill>
                 <a:latin typeface="Segoe UI"/>
               </a:rPr>
-              <a:t>Session and startup behavior</a:t>
+              <a:t>Controls and caveats</a:t>
             </a:r>
           </a:p>
           <a:p>
@@ -8553,7 +8583,7 @@
                 </a:solidFill>
                 <a:latin typeface="Segoe UI"/>
               </a:rPr>
-              <a:t>Authenticated WebSocket plus session-restored flow</a:t>
+              <a:t>secure_get / secure_post around critical views</a:t>
             </a:r>
           </a:p>
           <a:p>
@@ -8572,7 +8602,7 @@
                 </a:solidFill>
                 <a:latin typeface="Segoe UI"/>
               </a:rPr>
-              <a:t>17 explicit client control messages</a:t>
+              <a:t>Path guards and validation on tool/runtime inputs</a:t>
             </a:r>
           </a:p>
           <a:p>
@@ -8591,7 +8621,26 @@
                 </a:solidFill>
                 <a:latin typeface="Segoe UI"/>
               </a:rPr>
-              <a:t>App startup clears AgentProcess and ChatAgentRun and repopulates Agent metadata from the live template tree</a:t>
+              <a:t>ACP status/kill scans skip __chat_runs__</a:t>
+            </a:r>
+          </a:p>
+          <a:p>
+            <a:pPr algn="l">
+              <a:spcBef>
+                <a:spcPts val="0"/>
+              </a:spcBef>
+              <a:spcAft>
+                <a:spcPts val="0"/>
+              </a:spcAft>
+            </a:pPr>
+            <a:r>
+              <a:rPr sz="1200">
+                <a:solidFill>
+                  <a:srgbClr val="364557"/>
+                </a:solidFill>
+                <a:latin typeface="Segoe UI"/>
+              </a:rPr>
+              <a:t>The focused suite is still not fully green</a:t>
             </a:r>
           </a:p>
         </p:txBody>
@@ -8674,7 +8723,7 @@
         <p:spPr>
           <a:xfrm>
             <a:off x="411480" y="292608"/>
-            <a:ext cx="1719072" cy="310896"/>
+            <a:ext cx="1499616" cy="310896"/>
           </a:xfrm>
           <a:prstGeom prst="roundRect">
             <a:avLst/>
@@ -8720,7 +8769,7 @@
                 </a:solidFill>
                 <a:latin typeface="Segoe UI"/>
               </a:rPr>
-              <a:t>HARDENING</a:t>
+              <a:t>RELEASE</a:t>
             </a:r>
           </a:p>
         </p:txBody>
@@ -8734,7 +8783,7 @@
         <p:spPr>
           <a:xfrm>
             <a:off x="411480" y="713232"/>
-            <a:ext cx="10789920" cy="411480"/>
+            <a:ext cx="10881360" cy="411480"/>
           </a:xfrm>
           <a:prstGeom prst="rect">
             <a:avLst/>
@@ -8747,7 +8796,6 @@
           </a:bodyPr>
           <a:lstStyle/>
           <a:p>
-            <a:pPr algn="l"/>
             <a:r>
               <a:rPr b="1" sz="2550">
                 <a:solidFill>
@@ -8755,7 +8803,7 @@
                 </a:solidFill>
                 <a:latin typeface="Segoe UI"/>
               </a:rPr>
-              <a:t>Security posture, isolation, and current caveats</a:t>
+              <a:t>Packaging, installer behavior, and jd-cli delivery</a:t>
             </a:r>
           </a:p>
         </p:txBody>
@@ -8789,7 +8837,7 @@
                 </a:solidFill>
                 <a:latin typeface="Segoe UI"/>
               </a:rPr>
-              <a:t>The correct narrative is neither 'wide open' nor 'fully closed': the code has real controls, but the focused test run still shows concrete issues.</a:t>
+              <a:t>The release pipeline is more defensive than the April 1 deck said.</a:t>
             </a:r>
           </a:p>
         </p:txBody>
@@ -8866,7 +8914,7 @@
                 </a:solidFill>
                 <a:latin typeface="Segoe UI"/>
               </a:rPr>
-              <a:t>Tlamatini | April 1, 2026 | 29f081e23748</a:t>
+              <a:t>Tlamatini | April 3, 2026 | 4fd33b480086</a:t>
             </a:r>
           </a:p>
         </p:txBody>
@@ -8915,143 +8963,7 @@
         <p:spPr>
           <a:xfrm>
             <a:off x="411480" y="1828800"/>
-            <a:ext cx="3648456" cy="3291840"/>
-          </a:xfrm>
-          <a:prstGeom prst="roundRect">
-            <a:avLst/>
-          </a:prstGeom>
-          <a:solidFill>
-            <a:srgbClr val="E7F4EA"/>
-          </a:solidFill>
-          <a:ln w="17780">
-            <a:solidFill>
-              <a:srgbClr val="173B6C"/>
-            </a:solidFill>
-          </a:ln>
-        </p:spPr>
-        <p:style>
-          <a:lnRef idx="1">
-            <a:schemeClr val="accent1"/>
-          </a:lnRef>
-          <a:fillRef idx="3">
-            <a:schemeClr val="accent1"/>
-          </a:fillRef>
-          <a:effectRef idx="2">
-            <a:schemeClr val="accent1"/>
-          </a:effectRef>
-          <a:fontRef idx="minor">
-            <a:schemeClr val="lt1"/>
-          </a:fontRef>
-        </p:style>
-        <p:txBody>
-          <a:bodyPr rtlCol="0" anchor="t" wrap="square" lIns="152400" rIns="152400" tIns="127000" bIns="101600">
-            <a:normAutofit/>
-          </a:bodyPr>
-          <a:lstStyle/>
-          <a:p>
-            <a:pPr algn="l">
-              <a:spcAft>
-                <a:spcPts val="200"/>
-              </a:spcAft>
-            </a:pPr>
-            <a:r>
-              <a:rPr sz="1800" b="1">
-                <a:solidFill>
-                  <a:srgbClr val="173B6C"/>
-                </a:solidFill>
-                <a:latin typeface="Segoe UI"/>
-              </a:rPr>
-              <a:t>Controls present</a:t>
-            </a:r>
-          </a:p>
-          <a:p>
-            <a:pPr algn="l">
-              <a:spcBef>
-                <a:spcPts val="0"/>
-              </a:spcBef>
-              <a:spcAft>
-                <a:spcPts val="0"/>
-              </a:spcAft>
-            </a:pPr>
-            <a:r>
-              <a:rPr sz="1210">
-                <a:solidFill>
-                  <a:srgbClr val="364557"/>
-                </a:solidFill>
-                <a:latin typeface="Segoe UI"/>
-              </a:rPr>
-              <a:t>secure_get / secure_post around critical views</a:t>
-            </a:r>
-          </a:p>
-          <a:p>
-            <a:pPr algn="l">
-              <a:spcBef>
-                <a:spcPts val="0"/>
-              </a:spcBef>
-              <a:spcAft>
-                <a:spcPts val="0"/>
-              </a:spcAft>
-            </a:pPr>
-            <a:r>
-              <a:rPr sz="1210">
-                <a:solidFill>
-                  <a:srgbClr val="364557"/>
-                </a:solidFill>
-                <a:latin typeface="Segoe UI"/>
-              </a:rPr>
-              <a:t>Authenticated WebSocket consumer</a:t>
-            </a:r>
-          </a:p>
-          <a:p>
-            <a:pPr algn="l">
-              <a:spcBef>
-                <a:spcPts val="0"/>
-              </a:spcBef>
-              <a:spcAft>
-                <a:spcPts val="0"/>
-              </a:spcAft>
-            </a:pPr>
-            <a:r>
-              <a:rPr sz="1210">
-                <a:solidFill>
-                  <a:srgbClr val="364557"/>
-                </a:solidFill>
-                <a:latin typeface="Segoe UI"/>
-              </a:rPr>
-              <a:t>Path guards and validation on tool/runtime inputs</a:t>
-            </a:r>
-          </a:p>
-          <a:p>
-            <a:pPr algn="l">
-              <a:spcBef>
-                <a:spcPts val="0"/>
-              </a:spcBef>
-              <a:spcAft>
-                <a:spcPts val="0"/>
-              </a:spcAft>
-            </a:pPr>
-            <a:r>
-              <a:rPr sz="1210">
-                <a:solidFill>
-                  <a:srgbClr val="364557"/>
-                </a:solidFill>
-                <a:latin typeface="Segoe UI"/>
-              </a:rPr>
-              <a:t>Prompt-level wrapped-agent security hints in rag/interface.py</a:t>
-            </a:r>
-          </a:p>
-        </p:txBody>
-      </p:sp>
-      <p:sp>
-        <p:nvSpPr>
-          <p:cNvPr id="10" name="CARD_9"/>
-          <p:cNvSpPr/>
-          <p:nvPr/>
-        </p:nvSpPr>
-        <p:spPr>
-          <a:xfrm>
-            <a:off x="4270248" y="1828800"/>
-            <a:ext cx="3648456" cy="3291840"/>
+            <a:ext cx="3648456" cy="3383280"/>
           </a:xfrm>
           <a:prstGeom prst="roundRect">
             <a:avLst/>
@@ -9097,64 +9009,181 @@
                 </a:solidFill>
                 <a:latin typeface="Segoe UI"/>
               </a:rPr>
-              <a:t>Isolation present</a:t>
-            </a:r>
-          </a:p>
-          <a:p>
-            <a:pPr algn="l">
-              <a:spcBef>
-                <a:spcPts val="0"/>
-              </a:spcBef>
-              <a:spcAft>
-                <a:spcPts val="0"/>
-              </a:spcAft>
-            </a:pPr>
-            <a:r>
-              <a:rPr sz="1240">
-                <a:solidFill>
-                  <a:srgbClr val="364557"/>
-                </a:solidFill>
-                <a:latin typeface="Segoe UI"/>
-              </a:rPr>
-              <a:t>Per-session flow pools</a:t>
-            </a:r>
-          </a:p>
-          <a:p>
-            <a:pPr algn="l">
-              <a:spcBef>
-                <a:spcPts val="0"/>
-              </a:spcBef>
-              <a:spcAft>
-                <a:spcPts val="0"/>
-              </a:spcAft>
-            </a:pPr>
-            <a:r>
-              <a:rPr sz="1240">
-                <a:solidFill>
-                  <a:srgbClr val="364557"/>
-                </a:solidFill>
-                <a:latin typeface="Segoe UI"/>
-              </a:rPr>
-              <a:t>Wrapped runtime copies instead of template mutation</a:t>
-            </a:r>
-          </a:p>
-          <a:p>
-            <a:pPr algn="l">
-              <a:spcBef>
-                <a:spcPts val="0"/>
-              </a:spcBef>
-              <a:spcAft>
-                <a:spcPts val="0"/>
-              </a:spcAft>
-            </a:pPr>
-            <a:r>
-              <a:rPr sz="1240">
-                <a:solidFill>
-                  <a:srgbClr val="364557"/>
-                </a:solidFill>
-                <a:latin typeface="Segoe UI"/>
-              </a:rPr>
-              <a:t>ACP status/kill scans intentionally skip __chat_runs__</a:t>
+              <a:t>build.py now requires</a:t>
+            </a:r>
+          </a:p>
+          <a:p>
+            <a:pPr algn="l">
+              <a:spcBef>
+                <a:spcPts val="0"/>
+              </a:spcBef>
+              <a:spcAft>
+                <a:spcPts val="0"/>
+              </a:spcAft>
+            </a:pPr>
+            <a:r>
+              <a:rPr sz="1220">
+                <a:solidFill>
+                  <a:srgbClr val="364557"/>
+                </a:solidFill>
+                <a:latin typeface="Segoe UI"/>
+              </a:rPr>
+              <a:t>README.md in the installed application root</a:t>
+            </a:r>
+          </a:p>
+          <a:p>
+            <a:pPr algn="l">
+              <a:spcBef>
+                <a:spcPts val="0"/>
+              </a:spcBef>
+              <a:spcAft>
+                <a:spcPts val="0"/>
+              </a:spcAft>
+            </a:pPr>
+            <a:r>
+              <a:rPr sz="1220">
+                <a:solidFill>
+                  <a:srgbClr val="364557"/>
+                </a:solidFill>
+                <a:latin typeface="Segoe UI"/>
+              </a:rPr>
+              <a:t>jd-cli as a required payload, not optional</a:t>
+            </a:r>
+          </a:p>
+          <a:p>
+            <a:pPr algn="l">
+              <a:spcBef>
+                <a:spcPts val="0"/>
+              </a:spcBef>
+              <a:spcAft>
+                <a:spcPts val="0"/>
+              </a:spcAft>
+            </a:pPr>
+            <a:r>
+              <a:rPr sz="1220">
+                <a:solidFill>
+                  <a:srgbClr val="364557"/>
+                </a:solidFill>
+                <a:latin typeface="Segoe UI"/>
+              </a:rPr>
+              <a:t>jd-cli.bat verification before packaging</a:t>
+            </a:r>
+          </a:p>
+        </p:txBody>
+      </p:sp>
+      <p:sp>
+        <p:nvSpPr>
+          <p:cNvPr id="10" name="CARD_9"/>
+          <p:cNvSpPr/>
+          <p:nvPr/>
+        </p:nvSpPr>
+        <p:spPr>
+          <a:xfrm>
+            <a:off x="4270248" y="1828800"/>
+            <a:ext cx="3648456" cy="3383280"/>
+          </a:xfrm>
+          <a:prstGeom prst="roundRect">
+            <a:avLst/>
+          </a:prstGeom>
+          <a:solidFill>
+            <a:srgbClr val="FFFFFF"/>
+          </a:solidFill>
+          <a:ln w="17780">
+            <a:solidFill>
+              <a:srgbClr val="C7D4E0"/>
+            </a:solidFill>
+          </a:ln>
+        </p:spPr>
+        <p:style>
+          <a:lnRef idx="1">
+            <a:schemeClr val="accent1"/>
+          </a:lnRef>
+          <a:fillRef idx="3">
+            <a:schemeClr val="accent1"/>
+          </a:fillRef>
+          <a:effectRef idx="2">
+            <a:schemeClr val="accent1"/>
+          </a:effectRef>
+          <a:fontRef idx="minor">
+            <a:schemeClr val="lt1"/>
+          </a:fontRef>
+        </p:style>
+        <p:txBody>
+          <a:bodyPr rtlCol="0" anchor="t" wrap="square" lIns="152400" rIns="152400" tIns="127000" bIns="101600">
+            <a:normAutofit/>
+          </a:bodyPr>
+          <a:lstStyle/>
+          <a:p>
+            <a:pPr algn="l">
+              <a:spcAft>
+                <a:spcPts val="200"/>
+              </a:spcAft>
+            </a:pPr>
+            <a:r>
+              <a:rPr sz="1800" b="1">
+                <a:solidFill>
+                  <a:srgbClr val="173B6C"/>
+                </a:solidFill>
+                <a:latin typeface="Segoe UI"/>
+              </a:rPr>
+              <a:t>Installer behavior</a:t>
+            </a:r>
+          </a:p>
+          <a:p>
+            <a:pPr algn="l">
+              <a:spcBef>
+                <a:spcPts val="0"/>
+              </a:spcBef>
+              <a:spcAft>
+                <a:spcPts val="0"/>
+              </a:spcAft>
+            </a:pPr>
+            <a:r>
+              <a:rPr sz="1200">
+                <a:solidFill>
+                  <a:srgbClr val="364557"/>
+                </a:solidFill>
+                <a:latin typeface="Segoe UI"/>
+              </a:rPr>
+              <a:t>install.py now strips PyInstaller bundle paths from helper subprocess environments.</a:t>
+            </a:r>
+          </a:p>
+          <a:p>
+            <a:pPr algn="l">
+              <a:spcBef>
+                <a:spcPts val="0"/>
+              </a:spcBef>
+              <a:spcAft>
+                <a:spcPts val="0"/>
+              </a:spcAft>
+            </a:pPr>
+            <a:r>
+              <a:rPr sz="1200">
+                <a:solidFill>
+                  <a:srgbClr val="364557"/>
+                </a:solidFill>
+                <a:latin typeface="Segoe UI"/>
+              </a:rPr>
+              <a:t>That cleaned environment is also used when restarting explorer.exe.</a:t>
+            </a:r>
+          </a:p>
+          <a:p>
+            <a:pPr algn="l">
+              <a:spcBef>
+                <a:spcPts val="0"/>
+              </a:spcBef>
+              <a:spcAft>
+                <a:spcPts val="0"/>
+              </a:spcAft>
+            </a:pPr>
+            <a:r>
+              <a:rPr sz="1200">
+                <a:solidFill>
+                  <a:srgbClr val="364557"/>
+                </a:solidFill>
+                <a:latin typeface="Segoe UI"/>
+              </a:rPr>
+              <a:t>The intent is to reduce frozen-installer stalls on locked DLL paths.</a:t>
             </a:r>
           </a:p>
         </p:txBody>
@@ -9168,13 +9197,13 @@
         <p:spPr>
           <a:xfrm>
             <a:off x="8129016" y="1828800"/>
-            <a:ext cx="3648456" cy="3291840"/>
+            <a:ext cx="3648456" cy="3383280"/>
           </a:xfrm>
           <a:prstGeom prst="roundRect">
             <a:avLst/>
           </a:prstGeom>
           <a:solidFill>
-            <a:srgbClr val="FBE7E7"/>
+            <a:srgbClr val="FAEDE5"/>
           </a:solidFill>
           <a:ln w="17780">
             <a:solidFill>
@@ -9214,64 +9243,45 @@
                 </a:solidFill>
                 <a:latin typeface="Segoe UI"/>
               </a:rPr>
-              <a:t>Caveat posture</a:t>
-            </a:r>
-          </a:p>
-          <a:p>
-            <a:pPr algn="l">
-              <a:spcBef>
-                <a:spcPts val="0"/>
-              </a:spcBef>
-              <a:spcAft>
-                <a:spcPts val="0"/>
-              </a:spcAft>
-            </a:pPr>
-            <a:r>
-              <a:rPr sz="1210">
-                <a:solidFill>
-                  <a:srgbClr val="364557"/>
-                </a:solidFill>
-                <a:latin typeface="Segoe UI"/>
-              </a:rPr>
-              <a:t>The focused suite is not fully green.</a:t>
-            </a:r>
-          </a:p>
-          <a:p>
-            <a:pPr algn="l">
-              <a:spcBef>
-                <a:spcPts val="0"/>
-              </a:spcBef>
-              <a:spcAft>
-                <a:spcPts val="0"/>
-              </a:spcAft>
-            </a:pPr>
-            <a:r>
-              <a:rPr sz="1210">
-                <a:solidFill>
-                  <a:srgbClr val="364557"/>
-                </a:solidFill>
-                <a:latin typeface="Segoe UI"/>
-              </a:rPr>
-              <a:t>One WebSocket event-loop failure remains.</a:t>
-            </a:r>
-          </a:p>
-          <a:p>
-            <a:pPr algn="l">
-              <a:spcBef>
-                <a:spcPts val="0"/>
-              </a:spcBef>
-              <a:spcAft>
-                <a:spcPts val="0"/>
-              </a:spcAft>
-            </a:pPr>
-            <a:r>
-              <a:rPr sz="1210">
-                <a:solidFill>
-                  <a:srgbClr val="364557"/>
-                </a:solidFill>
-                <a:latin typeface="Segoe UI"/>
-              </a:rPr>
-              <a:t>Default CP1252 console runs still hit UnicodeEncodeError in rag/interface.py debug output.</a:t>
+              <a:t>J-Decompiler nuance</a:t>
+            </a:r>
+          </a:p>
+          <a:p>
+            <a:pPr algn="l">
+              <a:spcBef>
+                <a:spcPts val="0"/>
+              </a:spcBef>
+              <a:spcAft>
+                <a:spcPts val="0"/>
+              </a:spcAft>
+            </a:pPr>
+            <a:r>
+              <a:rPr sz="1200">
+                <a:solidFill>
+                  <a:srgbClr val="364557"/>
+                </a:solidFill>
+                <a:latin typeface="Segoe UI"/>
+              </a:rPr>
+              <a:t>Dev-mode jd-cli path resolution now climbs one more directory level before locating the project-root jd-cli payload.</a:t>
+            </a:r>
+          </a:p>
+          <a:p>
+            <a:pPr algn="l">
+              <a:spcBef>
+                <a:spcPts val="0"/>
+              </a:spcBef>
+              <a:spcAft>
+                <a:spcPts val="0"/>
+              </a:spcAft>
+            </a:pPr>
+            <a:r>
+              <a:rPr sz="1200">
+                <a:solidFill>
+                  <a:srgbClr val="364557"/>
+                </a:solidFill>
+                <a:latin typeface="Segoe UI"/>
+              </a:rPr>
+              <a:t>That keeps local-source runs aligned with the packaged jd-cli delivery story.</a:t>
             </a:r>
           </a:p>
         </p:txBody>
@@ -9354,7 +9364,7 @@
         <p:spPr>
           <a:xfrm>
             <a:off x="411480" y="292608"/>
-            <a:ext cx="1499616" cy="310896"/>
+            <a:ext cx="1719072" cy="310896"/>
           </a:xfrm>
           <a:prstGeom prst="roundRect">
             <a:avLst/>
@@ -9400,7 +9410,7 @@
                 </a:solidFill>
                 <a:latin typeface="Segoe UI"/>
               </a:rPr>
-              <a:t>RELEASE</a:t>
+              <a:t>ALIGNMENT</a:t>
             </a:r>
           </a:p>
         </p:txBody>
@@ -9414,7 +9424,7 @@
         <p:spPr>
           <a:xfrm>
             <a:off x="411480" y="713232"/>
-            <a:ext cx="10789920" cy="411480"/>
+            <a:ext cx="10881360" cy="411480"/>
           </a:xfrm>
           <a:prstGeom prst="rect">
             <a:avLst/>
@@ -9427,7 +9437,6 @@
           </a:bodyPr>
           <a:lstStyle/>
           <a:p>
-            <a:pPr algn="l"/>
             <a:r>
               <a:rPr b="1" sz="2550">
                 <a:solidFill>
@@ -9435,7 +9444,7 @@
                 </a:solidFill>
                 <a:latin typeface="Segoe UI"/>
               </a:rPr>
-              <a:t>Configuration, packaging, and desktop distribution</a:t>
+              <a:t>README, PDF, and deck after the April 3 refresh</a:t>
             </a:r>
           </a:p>
         </p:txBody>
@@ -9469,7 +9478,7 @@
                 </a:solidFill>
                 <a:latin typeface="Segoe UI"/>
               </a:rPr>
-              <a:t>Tlamatini is built to run locally and can be packaged for Windows distribution; it is not only a development-time repository.</a:t>
+              <a:t>The goal of this pass is not optimism; it is documentary honesty across all three artifacts.</a:t>
             </a:r>
           </a:p>
         </p:txBody>
@@ -9546,7 +9555,7 @@
                 </a:solidFill>
                 <a:latin typeface="Segoe UI"/>
               </a:rPr>
-              <a:t>Tlamatini | April 1, 2026 | 29f081e23748</a:t>
+              <a:t>Tlamatini | April 3, 2026 | 4fd33b480086</a:t>
             </a:r>
           </a:p>
         </p:txBody>
@@ -9595,7 +9604,143 @@
         <p:spPr>
           <a:xfrm>
             <a:off x="411480" y="1828800"/>
-            <a:ext cx="3648456" cy="3383280"/>
+            <a:ext cx="3648456" cy="3337560"/>
+          </a:xfrm>
+          <a:prstGeom prst="roundRect">
+            <a:avLst/>
+          </a:prstGeom>
+          <a:solidFill>
+            <a:srgbClr val="E7F4EA"/>
+          </a:solidFill>
+          <a:ln w="17780">
+            <a:solidFill>
+              <a:srgbClr val="173B6C"/>
+            </a:solidFill>
+          </a:ln>
+        </p:spPr>
+        <p:style>
+          <a:lnRef idx="1">
+            <a:schemeClr val="accent1"/>
+          </a:lnRef>
+          <a:fillRef idx="3">
+            <a:schemeClr val="accent1"/>
+          </a:fillRef>
+          <a:effectRef idx="2">
+            <a:schemeClr val="accent1"/>
+          </a:effectRef>
+          <a:fontRef idx="minor">
+            <a:schemeClr val="lt1"/>
+          </a:fontRef>
+        </p:style>
+        <p:txBody>
+          <a:bodyPr rtlCol="0" anchor="t" wrap="square" lIns="152400" rIns="152400" tIns="127000" bIns="101600">
+            <a:normAutofit/>
+          </a:bodyPr>
+          <a:lstStyle/>
+          <a:p>
+            <a:pPr algn="l">
+              <a:spcAft>
+                <a:spcPts val="200"/>
+              </a:spcAft>
+            </a:pPr>
+            <a:r>
+              <a:rPr sz="1800" b="1">
+                <a:solidFill>
+                  <a:srgbClr val="173B6C"/>
+                </a:solidFill>
+                <a:latin typeface="Segoe UI"/>
+              </a:rPr>
+              <a:t>README now aligned</a:t>
+            </a:r>
+          </a:p>
+          <a:p>
+            <a:pPr algn="l">
+              <a:spcBef>
+                <a:spcPts val="0"/>
+              </a:spcBef>
+              <a:spcAft>
+                <a:spcPts val="0"/>
+              </a:spcAft>
+            </a:pPr>
+            <a:r>
+              <a:rPr sz="1190">
+                <a:solidFill>
+                  <a:srgbClr val="364557"/>
+                </a:solidFill>
+                <a:latin typeface="Segoe UI"/>
+              </a:rPr>
+              <a:t>Documents ACP descriptions and context-menu actions</a:t>
+            </a:r>
+          </a:p>
+          <a:p>
+            <a:pPr algn="l">
+              <a:spcBef>
+                <a:spcPts val="0"/>
+              </a:spcBef>
+              <a:spcAft>
+                <a:spcPts val="0"/>
+              </a:spcAft>
+            </a:pPr>
+            <a:r>
+              <a:rPr sz="1190">
+                <a:solidFill>
+                  <a:srgbClr val="364557"/>
+                </a:solidFill>
+                <a:latin typeface="Segoe UI"/>
+              </a:rPr>
+              <a:t>Documents nested Parametrizer target mapping</a:t>
+            </a:r>
+          </a:p>
+          <a:p>
+            <a:pPr algn="l">
+              <a:spcBef>
+                <a:spcPts val="0"/>
+              </a:spcBef>
+              <a:spcAft>
+                <a:spcPts val="0"/>
+              </a:spcAft>
+            </a:pPr>
+            <a:r>
+              <a:rPr sz="1190">
+                <a:solidFill>
+                  <a:srgbClr val="364557"/>
+                </a:solidFill>
+                <a:latin typeface="Segoe UI"/>
+              </a:rPr>
+              <a:t>Documents stricter build/install behavior</a:t>
+            </a:r>
+          </a:p>
+          <a:p>
+            <a:pPr algn="l">
+              <a:spcBef>
+                <a:spcPts val="0"/>
+              </a:spcBef>
+              <a:spcAft>
+                <a:spcPts val="0"/>
+              </a:spcAft>
+            </a:pPr>
+            <a:r>
+              <a:rPr sz="1190">
+                <a:solidFill>
+                  <a:srgbClr val="364557"/>
+                </a:solidFill>
+                <a:latin typeface="Segoe UI"/>
+              </a:rPr>
+              <a:t>Reports the current 28-test rerun status</a:t>
+            </a:r>
+          </a:p>
+        </p:txBody>
+      </p:sp>
+      <p:sp>
+        <p:nvSpPr>
+          <p:cNvPr id="10" name="CARD_9"/>
+          <p:cNvSpPr/>
+          <p:nvPr/>
+        </p:nvSpPr>
+        <p:spPr>
+          <a:xfrm>
+            <a:off x="4270248" y="1828800"/>
+            <a:ext cx="3648456" cy="3337560"/>
           </a:xfrm>
           <a:prstGeom prst="roundRect">
             <a:avLst/>
@@ -9641,181 +9786,45 @@
                 </a:solidFill>
                 <a:latin typeface="Segoe UI"/>
               </a:rPr>
-              <a:t>Configuration posture</a:t>
-            </a:r>
-          </a:p>
-          <a:p>
-            <a:pPr algn="l">
-              <a:spcBef>
-                <a:spcPts val="0"/>
-              </a:spcBef>
-              <a:spcAft>
-                <a:spcPts val="0"/>
-              </a:spcAft>
-            </a:pPr>
-            <a:r>
-              <a:rPr sz="1210">
-                <a:solidFill>
-                  <a:srgbClr val="364557"/>
-                </a:solidFill>
-                <a:latin typeface="Segoe UI"/>
-              </a:rPr>
-              <a:t>config.json centralizes models, retrieval, tool, and connector defaults.</a:t>
-            </a:r>
-          </a:p>
-          <a:p>
-            <a:pPr algn="l">
-              <a:spcBef>
-                <a:spcPts val="0"/>
-              </a:spcBef>
-              <a:spcAft>
-                <a:spcPts val="0"/>
-              </a:spcAft>
-            </a:pPr>
-            <a:r>
-              <a:rPr sz="1210">
-                <a:solidFill>
-                  <a:srgbClr val="364557"/>
-                </a:solidFill>
-                <a:latin typeface="Segoe UI"/>
-              </a:rPr>
-              <a:t>MCP system metrics use a local WebSocket service and file search uses local gRPC.</a:t>
-            </a:r>
-          </a:p>
-          <a:p>
-            <a:pPr algn="l">
-              <a:spcBef>
-                <a:spcPts val="0"/>
-              </a:spcBef>
-              <a:spcAft>
-                <a:spcPts val="0"/>
-              </a:spcAft>
-            </a:pPr>
-            <a:r>
-              <a:rPr sz="1210">
-                <a:solidFill>
-                  <a:srgbClr val="364557"/>
-                </a:solidFill>
-                <a:latin typeface="Segoe UI"/>
-              </a:rPr>
-              <a:t>Current checked-in model ids still point several runtime roles at cloud identifiers.</a:t>
-            </a:r>
-          </a:p>
-        </p:txBody>
-      </p:sp>
-      <p:sp>
-        <p:nvSpPr>
-          <p:cNvPr id="10" name="CARD_9"/>
-          <p:cNvSpPr/>
-          <p:nvPr/>
-        </p:nvSpPr>
-        <p:spPr>
-          <a:xfrm>
-            <a:off x="4270248" y="1828800"/>
-            <a:ext cx="3648456" cy="3383280"/>
-          </a:xfrm>
-          <a:prstGeom prst="roundRect">
-            <a:avLst/>
-          </a:prstGeom>
-          <a:solidFill>
-            <a:srgbClr val="FFFFFF"/>
-          </a:solidFill>
-          <a:ln w="17780">
-            <a:solidFill>
-              <a:srgbClr val="C7D4E0"/>
-            </a:solidFill>
-          </a:ln>
-        </p:spPr>
-        <p:style>
-          <a:lnRef idx="1">
-            <a:schemeClr val="accent1"/>
-          </a:lnRef>
-          <a:fillRef idx="3">
-            <a:schemeClr val="accent1"/>
-          </a:fillRef>
-          <a:effectRef idx="2">
-            <a:schemeClr val="accent1"/>
-          </a:effectRef>
-          <a:fontRef idx="minor">
-            <a:schemeClr val="lt1"/>
-          </a:fontRef>
-        </p:style>
-        <p:txBody>
-          <a:bodyPr rtlCol="0" anchor="t" wrap="square" lIns="152400" rIns="152400" tIns="127000" bIns="101600">
-            <a:normAutofit/>
-          </a:bodyPr>
-          <a:lstStyle/>
-          <a:p>
-            <a:pPr algn="l">
-              <a:spcAft>
-                <a:spcPts val="200"/>
-              </a:spcAft>
-            </a:pPr>
-            <a:r>
-              <a:rPr sz="1800" b="1">
-                <a:solidFill>
-                  <a:srgbClr val="173B6C"/>
-                </a:solidFill>
-                <a:latin typeface="Segoe UI"/>
-              </a:rPr>
-              <a:t>Windows packaging</a:t>
-            </a:r>
-          </a:p>
-          <a:p>
-            <a:pPr algn="l">
-              <a:spcBef>
-                <a:spcPts val="0"/>
-              </a:spcBef>
-              <a:spcAft>
-                <a:spcPts val="0"/>
-              </a:spcAft>
-            </a:pPr>
-            <a:r>
-              <a:rPr sz="1260">
-                <a:solidFill>
-                  <a:srgbClr val="364557"/>
-                </a:solidFill>
-                <a:latin typeface="Segoe UI"/>
-              </a:rPr>
-              <a:t>build.py creates pkg.zip</a:t>
-            </a:r>
-          </a:p>
-          <a:p>
-            <a:pPr algn="l">
-              <a:spcBef>
-                <a:spcPts val="0"/>
-              </a:spcBef>
-              <a:spcAft>
-                <a:spcPts val="0"/>
-              </a:spcAft>
-            </a:pPr>
-            <a:r>
-              <a:rPr sz="1260">
-                <a:solidFill>
-                  <a:srgbClr val="364557"/>
-                </a:solidFill>
-                <a:latin typeface="Segoe UI"/>
-              </a:rPr>
-              <a:t>build_uninstaller.py creates Uninstaller.exe</a:t>
-            </a:r>
-          </a:p>
-          <a:p>
-            <a:pPr algn="l">
-              <a:spcBef>
-                <a:spcPts val="0"/>
-              </a:spcBef>
-              <a:spcAft>
-                <a:spcPts val="0"/>
-              </a:spcAft>
-            </a:pPr>
-            <a:r>
-              <a:rPr sz="1260">
-                <a:solidFill>
-                  <a:srgbClr val="364557"/>
-                </a:solidFill>
-                <a:latin typeface="Segoe UI"/>
-              </a:rPr>
-              <a:t>build_installer.py assembles dist/Tlamatini_Release</a:t>
+              <a:t>PDF and deck now aligned</a:t>
+            </a:r>
+          </a:p>
+          <a:p>
+            <a:pPr algn="l">
+              <a:spcBef>
+                <a:spcPts val="0"/>
+              </a:spcBef>
+              <a:spcAft>
+                <a:spcPts val="0"/>
+              </a:spcAft>
+            </a:pPr>
+            <a:r>
+              <a:rPr sz="1190">
+                <a:solidFill>
+                  <a:srgbClr val="364557"/>
+                </a:solidFill>
+                <a:latin typeface="Segoe UI"/>
+              </a:rPr>
+              <a:t>Both artifacts are being regenerated from this same April 3 fact bundle.</a:t>
+            </a:r>
+          </a:p>
+          <a:p>
+            <a:pPr algn="l">
+              <a:spcBef>
+                <a:spcPts val="0"/>
+              </a:spcBef>
+              <a:spcAft>
+                <a:spcPts val="0"/>
+              </a:spcAft>
+            </a:pPr>
+            <a:r>
+              <a:rPr sz="1190">
+                <a:solidFill>
+                  <a:srgbClr val="364557"/>
+                </a:solidFill>
+                <a:latin typeface="Segoe UI"/>
+              </a:rPr>
+              <a:t>Both replaced the previous 29f081e23748 snapshot rather than extending it in place.</a:t>
             </a:r>
           </a:p>
         </p:txBody>
@@ -9829,7 +9838,7 @@
         <p:spPr>
           <a:xfrm>
             <a:off x="8129016" y="1828800"/>
-            <a:ext cx="3648456" cy="3383280"/>
+            <a:ext cx="3648456" cy="3337560"/>
           </a:xfrm>
           <a:prstGeom prst="roundRect">
             <a:avLst/>
@@ -9875,45 +9884,64 @@
                 </a:solidFill>
                 <a:latin typeface="Segoe UI"/>
               </a:rPr>
-              <a:t>Desktop-facing surfaces</a:t>
-            </a:r>
-          </a:p>
-          <a:p>
-            <a:pPr algn="l">
-              <a:spcBef>
-                <a:spcPts val="0"/>
-              </a:spcBef>
-              <a:spcAft>
-                <a:spcPts val="0"/>
-              </a:spcAft>
-            </a:pPr>
-            <a:r>
-              <a:rPr sz="1200">
-                <a:solidFill>
-                  <a:srgbClr val="364557"/>
-                </a:solidFill>
-                <a:latin typeface="Segoe UI"/>
-              </a:rPr>
-              <a:t>detect_installed_apps and open_in_app support local tool handoff.</a:t>
-            </a:r>
-          </a:p>
-          <a:p>
-            <a:pPr algn="l">
-              <a:spcBef>
-                <a:spcPts val="0"/>
-              </a:spcBef>
-              <a:spcAft>
-                <a:spcPts val="0"/>
-              </a:spcAft>
-            </a:pPr>
-            <a:r>
-              <a:rPr sz="1200">
-                <a:solidFill>
-                  <a:srgbClr val="364557"/>
-                </a:solidFill>
-                <a:latin typeface="Segoe UI"/>
-              </a:rPr>
-              <a:t>The web interface therefore coordinates local files, local processes, and packaged desktop distribution together.</a:t>
+              <a:t>Remaining metadata mismatches</a:t>
+            </a:r>
+          </a:p>
+          <a:p>
+            <a:pPr algn="l">
+              <a:spcBef>
+                <a:spcPts val="0"/>
+              </a:spcBef>
+              <a:spcAft>
+                <a:spcPts val="0"/>
+              </a:spcAft>
+            </a:pPr>
+            <a:r>
+              <a:rPr sz="1150">
+                <a:solidFill>
+                  <a:srgbClr val="364557"/>
+                </a:solidFill>
+                <a:latin typeface="Segoe UI"/>
+              </a:rPr>
+              <a:t>README and LICENSE still describe GPLv3 while package.json still says ISC.</a:t>
+            </a:r>
+          </a:p>
+          <a:p>
+            <a:pPr algn="l">
+              <a:spcBef>
+                <a:spcPts val="0"/>
+              </a:spcBef>
+              <a:spcAft>
+                <a:spcPts val="0"/>
+              </a:spcAft>
+            </a:pPr>
+            <a:r>
+              <a:rPr sz="1150">
+                <a:solidFill>
+                  <a:srgbClr val="364557"/>
+                </a:solidFill>
+                <a:latin typeface="Segoe UI"/>
+              </a:rPr>
+              <a:t>README clone instructions still point at github.com/XAIHT/Tlamatini while package.json points at git+https://github.com/angelahack1/Tlamatini.git.</a:t>
+            </a:r>
+          </a:p>
+          <a:p>
+            <a:pPr algn="l">
+              <a:spcBef>
+                <a:spcPts val="0"/>
+              </a:spcBef>
+              <a:spcAft>
+                <a:spcPts val="0"/>
+              </a:spcAft>
+            </a:pPr>
+            <a:r>
+              <a:rPr sz="1150">
+                <a:solidFill>
+                  <a:srgbClr val="364557"/>
+                </a:solidFill>
+                <a:latin typeface="Segoe UI"/>
+              </a:rPr>
+              <a:t>Historical changelog bullets should not be treated as current-state inventory.</a:t>
             </a:r>
           </a:p>
         </p:txBody>
@@ -9996,7 +10024,7 @@
         <p:spPr>
           <a:xfrm>
             <a:off x="411480" y="292608"/>
-            <a:ext cx="1719072" cy="310896"/>
+            <a:ext cx="1499616" cy="310896"/>
           </a:xfrm>
           <a:prstGeom prst="roundRect">
             <a:avLst/>
@@ -10042,7 +10070,7 @@
                 </a:solidFill>
                 <a:latin typeface="Segoe UI"/>
               </a:rPr>
-              <a:t>ALIGNMENT</a:t>
+              <a:t>QUALITY</a:t>
             </a:r>
           </a:p>
         </p:txBody>
@@ -10056,7 +10084,7 @@
         <p:spPr>
           <a:xfrm>
             <a:off x="411480" y="713232"/>
-            <a:ext cx="10789920" cy="411480"/>
+            <a:ext cx="10881360" cy="411480"/>
           </a:xfrm>
           <a:prstGeom prst="rect">
             <a:avLst/>
@@ -10069,7 +10097,6 @@
           </a:bodyPr>
           <a:lstStyle/>
           <a:p>
-            <a:pPr algn="l"/>
             <a:r>
               <a:rPr b="1" sz="2550">
                 <a:solidFill>
@@ -10077,7 +10104,7 @@
                 </a:solidFill>
                 <a:latin typeface="Segoe UI"/>
               </a:rPr>
-              <a:t>README, PDF, and deck after the April 1 refresh</a:t>
+              <a:t>Focused tests and current open issues</a:t>
             </a:r>
           </a:p>
         </p:txBody>
@@ -10111,7 +10138,7 @@
                 </a:solidFill>
                 <a:latin typeface="Segoe UI"/>
               </a:rPr>
-              <a:t>The goal of this pass is not optimism; it is documentary honesty across all three artifacts.</a:t>
+              <a:t>The refreshed artifacts report the known issues directly instead of hiding them behind a generic success narrative.</a:t>
             </a:r>
           </a:p>
         </p:txBody>
@@ -10188,7 +10215,7 @@
                 </a:solidFill>
                 <a:latin typeface="Segoe UI"/>
               </a:rPr>
-              <a:t>Tlamatini | April 1, 2026 | 29f081e23748</a:t>
+              <a:t>Tlamatini | April 3, 2026 | 4fd33b480086</a:t>
             </a:r>
           </a:p>
         </p:txBody>
@@ -10237,7 +10264,7 @@
         <p:spPr>
           <a:xfrm>
             <a:off x="411480" y="1828800"/>
-            <a:ext cx="3648456" cy="3337560"/>
+            <a:ext cx="5559552" cy="1965960"/>
           </a:xfrm>
           <a:prstGeom prst="roundRect">
             <a:avLst/>
@@ -10283,83 +10310,64 @@
                 </a:solidFill>
                 <a:latin typeface="Segoe UI"/>
               </a:rPr>
-              <a:t>README now aligned</a:t>
-            </a:r>
-          </a:p>
-          <a:p>
-            <a:pPr algn="l">
-              <a:spcBef>
-                <a:spcPts val="0"/>
-              </a:spcBef>
-              <a:spcAft>
-                <a:spcPts val="0"/>
-              </a:spcAft>
-            </a:pPr>
-            <a:r>
-              <a:rPr sz="1200">
-                <a:solidFill>
-                  <a:srgbClr val="364557"/>
-                </a:solidFill>
-                <a:latin typeface="Segoe UI"/>
-              </a:rPr>
-              <a:t>Documents MultiTurnToolAgentExecutor</a:t>
-            </a:r>
-          </a:p>
-          <a:p>
-            <a:pPr algn="l">
-              <a:spcBef>
-                <a:spcPts val="0"/>
-              </a:spcBef>
-              <a:spcAft>
-                <a:spcPts val="0"/>
-              </a:spcAft>
-            </a:pPr>
-            <a:r>
-              <a:rPr sz="1200">
-                <a:solidFill>
-                  <a:srgbClr val="364557"/>
-                </a:solidFill>
-                <a:latin typeface="Segoe UI"/>
-              </a:rPr>
-              <a:t>Documents wrapped chat-agent runtime tools</a:t>
-            </a:r>
-          </a:p>
-          <a:p>
-            <a:pPr algn="l">
-              <a:spcBef>
-                <a:spcPts val="0"/>
-              </a:spcBef>
-              <a:spcAft>
-                <a:spcPts val="0"/>
-              </a:spcAft>
-            </a:pPr>
-            <a:r>
-              <a:rPr sz="1200">
-                <a:solidFill>
-                  <a:srgbClr val="364557"/>
-                </a:solidFill>
-                <a:latin typeface="Segoe UI"/>
-              </a:rPr>
-              <a:t>Uses current 55 / 102 / 13 counts</a:t>
-            </a:r>
-          </a:p>
-          <a:p>
-            <a:pPr algn="l">
-              <a:spcBef>
-                <a:spcPts val="0"/>
-              </a:spcBef>
-              <a:spcAft>
-                <a:spcPts val="0"/>
-              </a:spcAft>
-            </a:pPr>
-            <a:r>
-              <a:rPr sz="1200">
-                <a:solidFill>
-                  <a:srgbClr val="364557"/>
-                </a:solidFill>
-                <a:latin typeface="Segoe UI"/>
-              </a:rPr>
-              <a:t>Uses current WebSocket message names and Parametrizer parser surface</a:t>
+              <a:t>UTF-8 console rerun</a:t>
+            </a:r>
+          </a:p>
+          <a:p>
+            <a:pPr algn="l">
+              <a:spcBef>
+                <a:spcPts val="0"/>
+              </a:spcBef>
+              <a:spcAft>
+                <a:spcPts val="0"/>
+              </a:spcAft>
+            </a:pPr>
+            <a:r>
+              <a:rPr sz="1300">
+                <a:solidFill>
+                  <a:srgbClr val="364557"/>
+                </a:solidFill>
+                <a:latin typeface="Segoe UI"/>
+              </a:rPr>
+              <a:t>28 tests, 27 passed, 1 error.</a:t>
+            </a:r>
+          </a:p>
+          <a:p>
+            <a:pPr algn="l">
+              <a:spcBef>
+                <a:spcPts val="0"/>
+              </a:spcBef>
+              <a:spcAft>
+                <a:spcPts val="0"/>
+              </a:spcAft>
+            </a:pPr>
+            <a:r>
+              <a:rPr sz="1300">
+                <a:solidFill>
+                  <a:srgbClr val="364557"/>
+                </a:solidFill>
+                <a:latin typeface="Segoe UI"/>
+              </a:rPr>
+              <a:t>Remaining failure: test_anonymous_websocket_connection_is_rejected</a:t>
+            </a:r>
+          </a:p>
+          <a:p>
+            <a:pPr algn="l">
+              <a:spcBef>
+                <a:spcPts val="0"/>
+              </a:spcBef>
+              <a:spcAft>
+                <a:spcPts val="0"/>
+              </a:spcAft>
+            </a:pPr>
+            <a:r>
+              <a:rPr sz="1300">
+                <a:solidFill>
+                  <a:srgbClr val="364557"/>
+                </a:solidFill>
+                <a:latin typeface="Segoe UI"/>
+              </a:rPr>
+              <a:t>Error: RuntimeError: no running event loop</a:t>
             </a:r>
           </a:p>
         </p:txBody>
@@ -10372,131 +10380,14 @@
         </p:nvSpPr>
         <p:spPr>
           <a:xfrm>
-            <a:off x="4270248" y="1828800"/>
-            <a:ext cx="3648456" cy="3337560"/>
+            <a:off x="6217920" y="1828800"/>
+            <a:ext cx="5559552" cy="1965960"/>
           </a:xfrm>
           <a:prstGeom prst="roundRect">
             <a:avLst/>
           </a:prstGeom>
           <a:solidFill>
-            <a:srgbClr val="E8F0F8"/>
-          </a:solidFill>
-          <a:ln w="17780">
-            <a:solidFill>
-              <a:srgbClr val="173B6C"/>
-            </a:solidFill>
-          </a:ln>
-        </p:spPr>
-        <p:style>
-          <a:lnRef idx="1">
-            <a:schemeClr val="accent1"/>
-          </a:lnRef>
-          <a:fillRef idx="3">
-            <a:schemeClr val="accent1"/>
-          </a:fillRef>
-          <a:effectRef idx="2">
-            <a:schemeClr val="accent1"/>
-          </a:effectRef>
-          <a:fontRef idx="minor">
-            <a:schemeClr val="lt1"/>
-          </a:fontRef>
-        </p:style>
-        <p:txBody>
-          <a:bodyPr rtlCol="0" anchor="t" wrap="square" lIns="152400" rIns="152400" tIns="127000" bIns="101600">
-            <a:normAutofit/>
-          </a:bodyPr>
-          <a:lstStyle/>
-          <a:p>
-            <a:pPr algn="l">
-              <a:spcAft>
-                <a:spcPts val="200"/>
-              </a:spcAft>
-            </a:pPr>
-            <a:r>
-              <a:rPr sz="1800" b="1">
-                <a:solidFill>
-                  <a:srgbClr val="173B6C"/>
-                </a:solidFill>
-                <a:latin typeface="Segoe UI"/>
-              </a:rPr>
-              <a:t>PDF now aligned</a:t>
-            </a:r>
-          </a:p>
-          <a:p>
-            <a:pPr algn="l">
-              <a:spcBef>
-                <a:spcPts val="0"/>
-              </a:spcBef>
-              <a:spcAft>
-                <a:spcPts val="0"/>
-              </a:spcAft>
-            </a:pPr>
-            <a:r>
-              <a:rPr sz="1200">
-                <a:solidFill>
-                  <a:srgbClr val="364557"/>
-                </a:solidFill>
-                <a:latin typeface="Segoe UI"/>
-              </a:rPr>
-              <a:t>Current PDF is an April 1 code-verified summary</a:t>
-            </a:r>
-          </a:p>
-          <a:p>
-            <a:pPr algn="l">
-              <a:spcBef>
-                <a:spcPts val="0"/>
-              </a:spcBef>
-              <a:spcAft>
-                <a:spcPts val="0"/>
-              </a:spcAft>
-            </a:pPr>
-            <a:r>
-              <a:rPr sz="1200">
-                <a:solidFill>
-                  <a:srgbClr val="364557"/>
-                </a:solidFill>
-                <a:latin typeface="Segoe UI"/>
-              </a:rPr>
-              <a:t>It records the new chat runtime layer and the current repository shape</a:t>
-            </a:r>
-          </a:p>
-          <a:p>
-            <a:pPr algn="l">
-              <a:spcBef>
-                <a:spcPts val="0"/>
-              </a:spcBef>
-              <a:spcAft>
-                <a:spcPts val="0"/>
-              </a:spcAft>
-            </a:pPr>
-            <a:r>
-              <a:rPr sz="1200">
-                <a:solidFill>
-                  <a:srgbClr val="364557"/>
-                </a:solidFill>
-                <a:latin typeface="Segoe UI"/>
-              </a:rPr>
-              <a:t>It superseded the prior PDF anchor 47e19f6f45d3</a:t>
-            </a:r>
-          </a:p>
-        </p:txBody>
-      </p:sp>
-      <p:sp>
-        <p:nvSpPr>
-          <p:cNvPr id="11" name="CARD_10"/>
-          <p:cNvSpPr/>
-          <p:nvPr/>
-        </p:nvSpPr>
-        <p:spPr>
-          <a:xfrm>
-            <a:off x="8129016" y="1828800"/>
-            <a:ext cx="3648456" cy="3337560"/>
-          </a:xfrm>
-          <a:prstGeom prst="roundRect">
-            <a:avLst/>
-          </a:prstGeom>
-          <a:solidFill>
-            <a:srgbClr val="FAEDE5"/>
+            <a:srgbClr val="FBE7E7"/>
           </a:solidFill>
           <a:ln w="17780">
             <a:solidFill>
@@ -10536,64 +10427,143 @@
                 </a:solidFill>
                 <a:latin typeface="Segoe UI"/>
               </a:rPr>
-              <a:t>Remaining metadata mismatches</a:t>
-            </a:r>
-          </a:p>
-          <a:p>
-            <a:pPr algn="l">
-              <a:spcBef>
-                <a:spcPts val="0"/>
-              </a:spcBef>
-              <a:spcAft>
-                <a:spcPts val="0"/>
-              </a:spcAft>
-            </a:pPr>
-            <a:r>
-              <a:rPr sz="1190">
-                <a:solidFill>
-                  <a:srgbClr val="364557"/>
-                </a:solidFill>
-                <a:latin typeface="Segoe UI"/>
-              </a:rPr>
-              <a:t>README and LICENSE describe GPLv3 while package.json still says ISC.</a:t>
-            </a:r>
-          </a:p>
-          <a:p>
-            <a:pPr algn="l">
-              <a:spcBef>
-                <a:spcPts val="0"/>
-              </a:spcBef>
-              <a:spcAft>
-                <a:spcPts val="0"/>
-              </a:spcAft>
-            </a:pPr>
-            <a:r>
-              <a:rPr sz="1190">
-                <a:solidFill>
-                  <a:srgbClr val="364557"/>
-                </a:solidFill>
-                <a:latin typeface="Segoe UI"/>
-              </a:rPr>
-              <a:t>README clone instructions point at github.com/XAIHT/Tlamatini while package.json still points at angelahack1/Tlamatini.</a:t>
-            </a:r>
-          </a:p>
-          <a:p>
-            <a:pPr algn="l">
-              <a:spcBef>
-                <a:spcPts val="0"/>
-              </a:spcBef>
-              <a:spcAft>
-                <a:spcPts val="0"/>
-              </a:spcAft>
-            </a:pPr>
-            <a:r>
-              <a:rPr sz="1190">
-                <a:solidFill>
-                  <a:srgbClr val="364557"/>
-                </a:solidFill>
-                <a:latin typeface="Segoe UI"/>
-              </a:rPr>
-              <a:t>Historical changelog bullets should not be treated as current-state inventory.</a:t>
+              <a:t>Default console rerun</a:t>
+            </a:r>
+          </a:p>
+          <a:p>
+            <a:pPr algn="l">
+              <a:spcBef>
+                <a:spcPts val="0"/>
+              </a:spcBef>
+              <a:spcAft>
+                <a:spcPts val="0"/>
+              </a:spcAft>
+            </a:pPr>
+            <a:r>
+              <a:rPr sz="1300">
+                <a:solidFill>
+                  <a:srgbClr val="364557"/>
+                </a:solidFill>
+                <a:latin typeface="Segoe UI"/>
+              </a:rPr>
+              <a:t>28 tests, 24 passed, 4 errors.</a:t>
+            </a:r>
+          </a:p>
+          <a:p>
+            <a:pPr algn="l">
+              <a:spcBef>
+                <a:spcPts val="0"/>
+              </a:spcBef>
+              <a:spcAft>
+                <a:spcPts val="0"/>
+              </a:spcAft>
+            </a:pPr>
+            <a:r>
+              <a:rPr sz="1300">
+                <a:solidFill>
+                  <a:srgbClr val="364557"/>
+                </a:solidFill>
+                <a:latin typeface="Segoe UI"/>
+              </a:rPr>
+              <a:t>Same WebSocket event-loop failure remains.</a:t>
+            </a:r>
+          </a:p>
+          <a:p>
+            <a:pPr algn="l">
+              <a:spcBef>
+                <a:spcPts val="0"/>
+              </a:spcBef>
+              <a:spcAft>
+                <a:spcPts val="0"/>
+              </a:spcAft>
+            </a:pPr>
+            <a:r>
+              <a:rPr sz="1300">
+                <a:solidFill>
+                  <a:srgbClr val="364557"/>
+                </a:solidFill>
+                <a:latin typeface="Segoe UI"/>
+              </a:rPr>
+              <a:t>Three extra failures are CP1252 UnicodeEncodeError cases from rag/interface.py debug prints.</a:t>
+            </a:r>
+          </a:p>
+        </p:txBody>
+      </p:sp>
+      <p:sp>
+        <p:nvSpPr>
+          <p:cNvPr id="11" name="CARD_10"/>
+          <p:cNvSpPr/>
+          <p:nvPr/>
+        </p:nvSpPr>
+        <p:spPr>
+          <a:xfrm>
+            <a:off x="411480" y="4160520"/>
+            <a:ext cx="11365992" cy="1188720"/>
+          </a:xfrm>
+          <a:prstGeom prst="roundRect">
+            <a:avLst/>
+          </a:prstGeom>
+          <a:solidFill>
+            <a:srgbClr val="FFFFFF"/>
+          </a:solidFill>
+          <a:ln w="17780">
+            <a:solidFill>
+              <a:srgbClr val="C7D4E0"/>
+            </a:solidFill>
+          </a:ln>
+        </p:spPr>
+        <p:style>
+          <a:lnRef idx="1">
+            <a:schemeClr val="accent1"/>
+          </a:lnRef>
+          <a:fillRef idx="3">
+            <a:schemeClr val="accent1"/>
+          </a:fillRef>
+          <a:effectRef idx="2">
+            <a:schemeClr val="accent1"/>
+          </a:effectRef>
+          <a:fontRef idx="minor">
+            <a:schemeClr val="lt1"/>
+          </a:fontRef>
+        </p:style>
+        <p:txBody>
+          <a:bodyPr rtlCol="0" anchor="t" wrap="square" lIns="152400" rIns="152400" tIns="127000" bIns="101600">
+            <a:normAutofit/>
+          </a:bodyPr>
+          <a:lstStyle/>
+          <a:p>
+            <a:pPr algn="l">
+              <a:spcAft>
+                <a:spcPts val="200"/>
+              </a:spcAft>
+            </a:pPr>
+            <a:r>
+              <a:rPr sz="1800" b="1">
+                <a:solidFill>
+                  <a:srgbClr val="173B6C"/>
+                </a:solidFill>
+                <a:latin typeface="Segoe UI"/>
+              </a:rPr>
+              <a:t>Interpretation</a:t>
+            </a:r>
+          </a:p>
+          <a:p>
+            <a:pPr algn="l">
+              <a:spcBef>
+                <a:spcPts val="0"/>
+              </a:spcBef>
+              <a:spcAft>
+                <a:spcPts val="0"/>
+              </a:spcAft>
+            </a:pPr>
+            <a:r>
+              <a:rPr sz="1340">
+                <a:solidFill>
+                  <a:srgbClr val="364557"/>
+                </a:solidFill>
+                <a:latin typeface="Segoe UI"/>
+              </a:rPr>
+              <a:t>These failures are part of runtime hardening and console behavior, not proof that the ACP or the April 2-3 changes are absent or nonfunctional.</a:t>
             </a:r>
           </a:p>
         </p:txBody>
@@ -10736,7 +10706,7 @@
         <p:spPr>
           <a:xfrm>
             <a:off x="411480" y="713232"/>
-            <a:ext cx="10789920" cy="411480"/>
+            <a:ext cx="10881360" cy="411480"/>
           </a:xfrm>
           <a:prstGeom prst="rect">
             <a:avLst/>
@@ -10749,7 +10719,6 @@
           </a:bodyPr>
           <a:lstStyle/>
           <a:p>
-            <a:pPr algn="l"/>
             <a:r>
               <a:rPr b="1" sz="2550">
                 <a:solidFill>
@@ -10791,7 +10760,7 @@
                 </a:solidFill>
                 <a:latin typeface="Segoe UI"/>
               </a:rPr>
-              <a:t>The narrative moves from evidence anchors into product surface, architecture, ACP behavior, agent inventory, and current caveats.</a:t>
+              <a:t>The narrative moves from evidence anchors into product surface, recent commit delta, architecture, ACP behavior, agent inventory, and current caveats.</a:t>
             </a:r>
           </a:p>
         </p:txBody>
@@ -10868,7 +10837,7 @@
                 </a:solidFill>
                 <a:latin typeface="Segoe UI"/>
               </a:rPr>
-              <a:t>Tlamatini | April 1, 2026 | 29f081e23748</a:t>
+              <a:t>Tlamatini | April 3, 2026 | 4fd33b480086</a:t>
             </a:r>
           </a:p>
         </p:txBody>
@@ -11001,7 +10970,7 @@
                 </a:solidFill>
                 <a:latin typeface="Segoe UI"/>
               </a:rPr>
-              <a:t>and what changed in the</a:t>
+              <a:t>and what changed after</a:t>
             </a:r>
           </a:p>
           <a:p>
@@ -11020,7 +10989,7 @@
                 </a:solidFill>
                 <a:latin typeface="Segoe UI"/>
               </a:rPr>
-              <a:t>April 1 commit.</a:t>
+              <a:t>the April 1 docs pass.</a:t>
             </a:r>
           </a:p>
         </p:txBody>
@@ -11216,7 +11185,7 @@
                 </a:solidFill>
                 <a:latin typeface="Segoe UI"/>
               </a:rPr>
-              <a:t>Architecture, RAG, config,</a:t>
+              <a:t>Architecture, control</a:t>
             </a:r>
           </a:p>
           <a:p>
@@ -11235,7 +11204,7 @@
                 </a:solidFill>
                 <a:latin typeface="Segoe UI"/>
               </a:rPr>
-              <a:t>WebSocket control plane,</a:t>
+              <a:t>surface, and the April 1</a:t>
             </a:r>
           </a:p>
           <a:p>
@@ -11254,7 +11223,7 @@
                 </a:solidFill>
                 <a:latin typeface="Segoe UI"/>
               </a:rPr>
-              <a:t>and tool behavior.</a:t>
+              <a:t>chat-runtime layer.</a:t>
             </a:r>
           </a:p>
         </p:txBody>
@@ -11314,7 +11283,7 @@
                 </a:solidFill>
                 <a:latin typeface="Segoe UI"/>
               </a:rPr>
-              <a:t>04 Main Chat</a:t>
+              <a:t>04 ACP</a:t>
             </a:r>
           </a:p>
           <a:p>
@@ -11333,7 +11302,7 @@
                 </a:solidFill>
                 <a:latin typeface="Segoe UI"/>
               </a:rPr>
-              <a:t>MultiTurnToolAgentExecutor</a:t>
+              <a:t>Descriptions, context</a:t>
             </a:r>
           </a:p>
           <a:p>
@@ -11352,7 +11321,7 @@
                 </a:solidFill>
                 <a:latin typeface="Segoe UI"/>
               </a:rPr>
-              <a:t>and the wrapped chat-agent</a:t>
+              <a:t>menus, pause logic,</a:t>
             </a:r>
           </a:p>
           <a:p>
@@ -11371,7 +11340,7 @@
                 </a:solidFill>
                 <a:latin typeface="Segoe UI"/>
               </a:rPr>
-              <a:t>runtime layer.</a:t>
+              <a:t>and validation.</a:t>
             </a:r>
           </a:p>
         </p:txBody>
@@ -11431,7 +11400,7 @@
                 </a:solidFill>
                 <a:latin typeface="Segoe UI"/>
               </a:rPr>
-              <a:t>05 ACP</a:t>
+              <a:t>05 Operations</a:t>
             </a:r>
           </a:p>
           <a:p>
@@ -11450,7 +11419,7 @@
                 </a:solidFill>
                 <a:latin typeface="Segoe UI"/>
               </a:rPr>
-              <a:t>Canvas, pause/stop/</a:t>
+              <a:t>Parametrizer, packaging,</a:t>
             </a:r>
           </a:p>
           <a:p>
@@ -11469,7 +11438,7 @@
                 </a:solidFill>
                 <a:latin typeface="Segoe UI"/>
               </a:rPr>
-              <a:t>reanimation, validation,</a:t>
+              <a:t>installer behavior,</a:t>
             </a:r>
           </a:p>
           <a:p>
@@ -11488,7 +11457,7 @@
                 </a:solidFill>
                 <a:latin typeface="Segoe UI"/>
               </a:rPr>
-              <a:t>Barrier, and FlowBacker.</a:t>
+              <a:t>and remaining drift.</a:t>
             </a:r>
           </a:p>
         </p:txBody>
@@ -11548,7 +11517,7 @@
                 </a:solidFill>
                 <a:latin typeface="Segoe UI"/>
               </a:rPr>
-              <a:t>06 Alignment</a:t>
+              <a:t>06 Status</a:t>
             </a:r>
           </a:p>
           <a:p>
@@ -11567,7 +11536,7 @@
                 </a:solidFill>
                 <a:latin typeface="Segoe UI"/>
               </a:rPr>
-              <a:t>README/PDF/deck status,</a:t>
+              <a:t>Focused tests, known</a:t>
             </a:r>
           </a:p>
           <a:p>
@@ -11586,7 +11555,7 @@
                 </a:solidFill>
                 <a:latin typeface="Segoe UI"/>
               </a:rPr>
-              <a:t>focused tests, and open</a:t>
+              <a:t>issues, and final</a:t>
             </a:r>
           </a:p>
           <a:p>
@@ -11605,7 +11574,7 @@
                 </a:solidFill>
                 <a:latin typeface="Segoe UI"/>
               </a:rPr>
-              <a:t>metadata mismatches.</a:t>
+              <a:t>XAIHT reading.</a:t>
             </a:r>
           </a:p>
         </p:txBody>
@@ -11734,7 +11703,7 @@
                 </a:solidFill>
                 <a:latin typeface="Segoe UI"/>
               </a:rPr>
-              <a:t>QUALITY</a:t>
+              <a:t>READING</a:t>
             </a:r>
           </a:p>
         </p:txBody>
@@ -11748,7 +11717,7 @@
         <p:spPr>
           <a:xfrm>
             <a:off x="411480" y="713232"/>
-            <a:ext cx="10789920" cy="411480"/>
+            <a:ext cx="10881360" cy="411480"/>
           </a:xfrm>
           <a:prstGeom prst="rect">
             <a:avLst/>
@@ -11761,7 +11730,6 @@
           </a:bodyPr>
           <a:lstStyle/>
           <a:p>
-            <a:pPr algn="l"/>
             <a:r>
               <a:rPr b="1" sz="2550">
                 <a:solidFill>
@@ -11769,7 +11737,7 @@
                 </a:solidFill>
                 <a:latin typeface="Segoe UI"/>
               </a:rPr>
-              <a:t>Focused tests and current open issues</a:t>
+              <a:t>What the April 2-3 changes mean operationally</a:t>
             </a:r>
           </a:p>
         </p:txBody>
@@ -11803,7 +11771,7 @@
                 </a:solidFill>
                 <a:latin typeface="Segoe UI"/>
               </a:rPr>
-              <a:t>The refreshed artifacts report the known issues directly instead of hiding them behind a generic success narrative.</a:t>
+              <a:t>The recent commits make Tlamatini more explicit about control and safer about delivery, without changing its top-level product identity.</a:t>
             </a:r>
           </a:p>
         </p:txBody>
@@ -11880,7 +11848,7 @@
                 </a:solidFill>
                 <a:latin typeface="Segoe UI"/>
               </a:rPr>
-              <a:t>Tlamatini | April 1, 2026 | 29f081e23748</a:t>
+              <a:t>Tlamatini | April 3, 2026 | 4fd33b480086</a:t>
             </a:r>
           </a:p>
         </p:txBody>
@@ -11929,13 +11897,13 @@
         <p:spPr>
           <a:xfrm>
             <a:off x="411480" y="1828800"/>
-            <a:ext cx="5559552" cy="1965960"/>
+            <a:ext cx="3648456" cy="3291840"/>
           </a:xfrm>
           <a:prstGeom prst="roundRect">
             <a:avLst/>
           </a:prstGeom>
           <a:solidFill>
-            <a:srgbClr val="E7F4EA"/>
+            <a:srgbClr val="E8F0F8"/>
           </a:solidFill>
           <a:ln w="17780">
             <a:solidFill>
@@ -11975,64 +11943,26 @@
                 </a:solidFill>
                 <a:latin typeface="Segoe UI"/>
               </a:rPr>
-              <a:t>UTF-8 console rerun</a:t>
-            </a:r>
-          </a:p>
-          <a:p>
-            <a:pPr algn="l">
-              <a:spcBef>
-                <a:spcPts val="0"/>
-              </a:spcBef>
-              <a:spcAft>
-                <a:spcPts val="0"/>
-              </a:spcAft>
-            </a:pPr>
-            <a:r>
-              <a:rPr sz="1300">
-                <a:solidFill>
-                  <a:srgbClr val="364557"/>
-                </a:solidFill>
-                <a:latin typeface="Segoe UI"/>
-              </a:rPr>
-              <a:t>26 tests, 25 passed, 1 error.</a:t>
-            </a:r>
-          </a:p>
-          <a:p>
-            <a:pPr algn="l">
-              <a:spcBef>
-                <a:spcPts val="0"/>
-              </a:spcBef>
-              <a:spcAft>
-                <a:spcPts val="0"/>
-              </a:spcAft>
-            </a:pPr>
-            <a:r>
-              <a:rPr sz="1300">
-                <a:solidFill>
-                  <a:srgbClr val="364557"/>
-                </a:solidFill>
-                <a:latin typeface="Segoe UI"/>
-              </a:rPr>
-              <a:t>Remaining failure: test_anonymous_websocket_connection_is_rejected</a:t>
-            </a:r>
-          </a:p>
-          <a:p>
-            <a:pPr algn="l">
-              <a:spcBef>
-                <a:spcPts val="0"/>
-              </a:spcBef>
-              <a:spcAft>
-                <a:spcPts val="0"/>
-              </a:spcAft>
-            </a:pPr>
-            <a:r>
-              <a:rPr sz="1300">
-                <a:solidFill>
-                  <a:srgbClr val="364557"/>
-                </a:solidFill>
-                <a:latin typeface="Segoe UI"/>
-              </a:rPr>
-              <a:t>Error: RuntimeError: no running event loop</a:t>
+              <a:t>More explicit control</a:t>
+            </a:r>
+          </a:p>
+          <a:p>
+            <a:pPr algn="l">
+              <a:spcBef>
+                <a:spcPts val="0"/>
+              </a:spcBef>
+              <a:spcAft>
+                <a:spcPts val="0"/>
+              </a:spcAft>
+            </a:pPr>
+            <a:r>
+              <a:rPr sz="1260">
+                <a:solidFill>
+                  <a:srgbClr val="364557"/>
+                </a:solidFill>
+                <a:latin typeface="Segoe UI"/>
+              </a:rPr>
+              <a:t>ACP users now see README-backed purpose text directly in the workflow designer and can navigate into live deployed instance directories from the canvas.</a:t>
             </a:r>
           </a:p>
         </p:txBody>
@@ -12045,125 +11975,8 @@
         </p:nvSpPr>
         <p:spPr>
           <a:xfrm>
-            <a:off x="6217920" y="1828800"/>
-            <a:ext cx="5559552" cy="1965960"/>
-          </a:xfrm>
-          <a:prstGeom prst="roundRect">
-            <a:avLst/>
-          </a:prstGeom>
-          <a:solidFill>
-            <a:srgbClr val="FBE7E7"/>
-          </a:solidFill>
-          <a:ln w="17780">
-            <a:solidFill>
-              <a:srgbClr val="BF6635"/>
-            </a:solidFill>
-          </a:ln>
-        </p:spPr>
-        <p:style>
-          <a:lnRef idx="1">
-            <a:schemeClr val="accent1"/>
-          </a:lnRef>
-          <a:fillRef idx="3">
-            <a:schemeClr val="accent1"/>
-          </a:fillRef>
-          <a:effectRef idx="2">
-            <a:schemeClr val="accent1"/>
-          </a:effectRef>
-          <a:fontRef idx="minor">
-            <a:schemeClr val="lt1"/>
-          </a:fontRef>
-        </p:style>
-        <p:txBody>
-          <a:bodyPr rtlCol="0" anchor="t" wrap="square" lIns="152400" rIns="152400" tIns="127000" bIns="101600">
-            <a:normAutofit/>
-          </a:bodyPr>
-          <a:lstStyle/>
-          <a:p>
-            <a:pPr algn="l">
-              <a:spcAft>
-                <a:spcPts val="200"/>
-              </a:spcAft>
-            </a:pPr>
-            <a:r>
-              <a:rPr sz="1800" b="1">
-                <a:solidFill>
-                  <a:srgbClr val="173B6C"/>
-                </a:solidFill>
-                <a:latin typeface="Segoe UI"/>
-              </a:rPr>
-              <a:t>Default console rerun</a:t>
-            </a:r>
-          </a:p>
-          <a:p>
-            <a:pPr algn="l">
-              <a:spcBef>
-                <a:spcPts val="0"/>
-              </a:spcBef>
-              <a:spcAft>
-                <a:spcPts val="0"/>
-              </a:spcAft>
-            </a:pPr>
-            <a:r>
-              <a:rPr sz="1300">
-                <a:solidFill>
-                  <a:srgbClr val="364557"/>
-                </a:solidFill>
-                <a:latin typeface="Segoe UI"/>
-              </a:rPr>
-              <a:t>26 tests, 22 passed, 4 errors.</a:t>
-            </a:r>
-          </a:p>
-          <a:p>
-            <a:pPr algn="l">
-              <a:spcBef>
-                <a:spcPts val="0"/>
-              </a:spcBef>
-              <a:spcAft>
-                <a:spcPts val="0"/>
-              </a:spcAft>
-            </a:pPr>
-            <a:r>
-              <a:rPr sz="1300">
-                <a:solidFill>
-                  <a:srgbClr val="364557"/>
-                </a:solidFill>
-                <a:latin typeface="Segoe UI"/>
-              </a:rPr>
-              <a:t>Same WebSocket event-loop failure remains.</a:t>
-            </a:r>
-          </a:p>
-          <a:p>
-            <a:pPr algn="l">
-              <a:spcBef>
-                <a:spcPts val="0"/>
-              </a:spcBef>
-              <a:spcAft>
-                <a:spcPts val="0"/>
-              </a:spcAft>
-            </a:pPr>
-            <a:r>
-              <a:rPr sz="1300">
-                <a:solidFill>
-                  <a:srgbClr val="364557"/>
-                </a:solidFill>
-                <a:latin typeface="Segoe UI"/>
-              </a:rPr>
-              <a:t>Three extra failures are CP1252 UnicodeEncodeError cases from rag/interface.py debug prints.</a:t>
-            </a:r>
-          </a:p>
-        </p:txBody>
-      </p:sp>
-      <p:sp>
-        <p:nvSpPr>
-          <p:cNvPr id="11" name="CARD_10"/>
-          <p:cNvSpPr/>
-          <p:nvPr/>
-        </p:nvSpPr>
-        <p:spPr>
-          <a:xfrm>
-            <a:off x="411480" y="4160520"/>
-            <a:ext cx="11365992" cy="1188720"/>
+            <a:off x="4270248" y="1828800"/>
+            <a:ext cx="3648456" cy="3291840"/>
           </a:xfrm>
           <a:prstGeom prst="roundRect">
             <a:avLst/>
@@ -12209,26 +12022,105 @@
                 </a:solidFill>
                 <a:latin typeface="Segoe UI"/>
               </a:rPr>
-              <a:t>Interpretation</a:t>
-            </a:r>
-          </a:p>
-          <a:p>
-            <a:pPr algn="l">
-              <a:spcBef>
-                <a:spcPts val="0"/>
-              </a:spcBef>
-              <a:spcAft>
-                <a:spcPts val="0"/>
-              </a:spcAft>
-            </a:pPr>
-            <a:r>
-              <a:rPr sz="1340">
-                <a:solidFill>
-                  <a:srgbClr val="364557"/>
-                </a:solidFill>
-                <a:latin typeface="Segoe UI"/>
-              </a:rPr>
-              <a:t>These failures are part of runtime hardening and console behavior, not proof that the ACP or the April 1 wrapped chat-agent runtime layer is absent or nonfunctional.</a:t>
+              <a:t>More expressive wiring</a:t>
+            </a:r>
+          </a:p>
+          <a:p>
+            <a:pPr algn="l">
+              <a:spcBef>
+                <a:spcPts val="0"/>
+              </a:spcBef>
+              <a:spcAft>
+                <a:spcPts val="0"/>
+              </a:spcAft>
+            </a:pPr>
+            <a:r>
+              <a:rPr sz="1260">
+                <a:solidFill>
+                  <a:srgbClr val="364557"/>
+                </a:solidFill>
+                <a:latin typeface="Segoe UI"/>
+              </a:rPr>
+              <a:t>Parametrizer can now populate nested sub-config entries instead of only top-level target keys, which matters for more complex agents.</a:t>
+            </a:r>
+          </a:p>
+        </p:txBody>
+      </p:sp>
+      <p:sp>
+        <p:nvSpPr>
+          <p:cNvPr id="11" name="CARD_10"/>
+          <p:cNvSpPr/>
+          <p:nvPr/>
+        </p:nvSpPr>
+        <p:spPr>
+          <a:xfrm>
+            <a:off x="8129016" y="1828800"/>
+            <a:ext cx="3648456" cy="3291840"/>
+          </a:xfrm>
+          <a:prstGeom prst="roundRect">
+            <a:avLst/>
+          </a:prstGeom>
+          <a:solidFill>
+            <a:srgbClr val="FAEDE5"/>
+          </a:solidFill>
+          <a:ln w="17780">
+            <a:solidFill>
+              <a:srgbClr val="BF6635"/>
+            </a:solidFill>
+          </a:ln>
+        </p:spPr>
+        <p:style>
+          <a:lnRef idx="1">
+            <a:schemeClr val="accent1"/>
+          </a:lnRef>
+          <a:fillRef idx="3">
+            <a:schemeClr val="accent1"/>
+          </a:fillRef>
+          <a:effectRef idx="2">
+            <a:schemeClr val="accent1"/>
+          </a:effectRef>
+          <a:fontRef idx="minor">
+            <a:schemeClr val="lt1"/>
+          </a:fontRef>
+        </p:style>
+        <p:txBody>
+          <a:bodyPr rtlCol="0" anchor="t" wrap="square" lIns="152400" rIns="152400" tIns="127000" bIns="101600">
+            <a:normAutofit/>
+          </a:bodyPr>
+          <a:lstStyle/>
+          <a:p>
+            <a:pPr algn="l">
+              <a:spcAft>
+                <a:spcPts val="200"/>
+              </a:spcAft>
+            </a:pPr>
+            <a:r>
+              <a:rPr sz="1800" b="1">
+                <a:solidFill>
+                  <a:srgbClr val="173B6C"/>
+                </a:solidFill>
+                <a:latin typeface="Segoe UI"/>
+              </a:rPr>
+              <a:t>More defensive release flow</a:t>
+            </a:r>
+          </a:p>
+          <a:p>
+            <a:pPr algn="l">
+              <a:spcBef>
+                <a:spcPts val="0"/>
+              </a:spcBef>
+              <a:spcAft>
+                <a:spcPts val="0"/>
+              </a:spcAft>
+            </a:pPr>
+            <a:r>
+              <a:rPr sz="1230">
+                <a:solidFill>
+                  <a:srgbClr val="364557"/>
+                </a:solidFill>
+                <a:latin typeface="Segoe UI"/>
+              </a:rPr>
+              <a:t>The packaging chain is less willing to ship a partial build and the installer is less likely to stall on frozen-helper environment leakage.</a:t>
             </a:r>
           </a:p>
         </p:txBody>
@@ -12371,7 +12263,7 @@
         <p:spPr>
           <a:xfrm>
             <a:off x="411480" y="713232"/>
-            <a:ext cx="10789920" cy="411480"/>
+            <a:ext cx="10881360" cy="411480"/>
           </a:xfrm>
           <a:prstGeom prst="rect">
             <a:avLst/>
@@ -12384,7 +12276,6 @@
           </a:bodyPr>
           <a:lstStyle/>
           <a:p>
-            <a:pPr algn="l"/>
             <a:r>
               <a:rPr b="1" sz="2550">
                 <a:solidFill>
@@ -12426,7 +12317,7 @@
                 </a:solidFill>
                 <a:latin typeface="Segoe UI"/>
               </a:rPr>
-              <a:t>The clearest reading of the product comes from its explicit control surfaces rather than from slogans.</a:t>
+              <a:t>The clearest reading of the product still comes from its explicit control surfaces rather than from slogans.</a:t>
             </a:r>
           </a:p>
         </p:txBody>
@@ -12503,7 +12394,7 @@
                 </a:solidFill>
                 <a:latin typeface="Segoe UI"/>
               </a:rPr>
-              <a:t>Tlamatini | April 1, 2026 | 29f081e23748</a:t>
+              <a:t>Tlamatini | April 3, 2026 | 4fd33b480086</a:t>
             </a:r>
           </a:p>
         </p:txBody>
@@ -12690,13 +12581,13 @@
               </a:spcAft>
             </a:pPr>
             <a:r>
-              <a:rPr sz="1280">
-                <a:solidFill>
-                  <a:srgbClr val="364557"/>
-                </a:solidFill>
-                <a:latin typeface="Segoe UI"/>
-              </a:rPr>
-              <a:t>Context selection, tool enablement, workflow wiring, validation, pause, stop, resume, and packaging are all user-visible control surfaces.</a:t>
+              <a:rPr sz="1260">
+                <a:solidFill>
+                  <a:srgbClr val="364557"/>
+                </a:solidFill>
+                <a:latin typeface="Segoe UI"/>
+              </a:rPr>
+              <a:t>Context selection, tool enablement, workflow wiring, descriptions, validation, pause, stop, resume, and packaging are all user-visible control surfaces.</a:t>
             </a:r>
           </a:p>
         </p:txBody>
@@ -12769,13 +12660,13 @@
               </a:spcAft>
             </a:pPr>
             <a:r>
-              <a:rPr sz="1260">
-                <a:solidFill>
-                  <a:srgbClr val="364557"/>
-                </a:solidFill>
-                <a:latin typeface="Segoe UI"/>
-              </a:rPr>
-              <a:t>The platform is real, larger, and more agentic than the old deck showed, but it still carries test and metadata caveats that documentation should continue to report honestly.</a:t>
+              <a:rPr sz="1250">
+                <a:solidFill>
+                  <a:srgbClr val="364557"/>
+                </a:solidFill>
+                <a:latin typeface="Segoe UI"/>
+              </a:rPr>
+              <a:t>The platform is real, larger, and more explicit than older decks showed, but it still carries test and metadata caveats that documentation should continue to report honestly.</a:t>
             </a:r>
           </a:p>
         </p:txBody>
@@ -12918,7 +12809,7 @@
         <p:spPr>
           <a:xfrm>
             <a:off x="411480" y="713232"/>
-            <a:ext cx="10789920" cy="411480"/>
+            <a:ext cx="10881360" cy="411480"/>
           </a:xfrm>
           <a:prstGeom prst="rect">
             <a:avLst/>
@@ -12931,7 +12822,6 @@
           </a:bodyPr>
           <a:lstStyle/>
           <a:p>
-            <a:pPr algn="l"/>
             <a:r>
               <a:rPr b="1" sz="2550">
                 <a:solidFill>
@@ -12973,7 +12863,7 @@
                 </a:solidFill>
                 <a:latin typeface="Segoe UI"/>
               </a:rPr>
-              <a:t>Code, README, PDF extraction, and the previous deck were all audited before rebuilding the narrative.</a:t>
+              <a:t>Code, README, prior PDF extraction, and the prior deck were all audited before rebuilding the narrative.</a:t>
             </a:r>
           </a:p>
         </p:txBody>
@@ -13050,7 +12940,7 @@
                 </a:solidFill>
                 <a:latin typeface="Segoe UI"/>
               </a:rPr>
-              <a:t>Tlamatini | April 1, 2026 | 29f081e23748</a:t>
+              <a:t>Tlamatini | April 3, 2026 | 4fd33b480086</a:t>
             </a:r>
           </a:p>
         </p:txBody>
@@ -13164,7 +13054,7 @@
                 </a:solidFill>
                 <a:latin typeface="Segoe UI"/>
               </a:rPr>
-              <a:t>HEAD 29f081e23748</a:t>
+              <a:t>HEAD 4fd33b480086</a:t>
             </a:r>
           </a:p>
           <a:p>
@@ -13262,7 +13152,7 @@
                 </a:solidFill>
                 <a:latin typeface="Segoe UI"/>
               </a:rPr>
-              <a:t>Current PDF before deck refresh</a:t>
+              <a:t>Previous PDF before overwrite</a:t>
             </a:r>
           </a:p>
           <a:p>
@@ -13281,7 +13171,7 @@
                 </a:solidFill>
                 <a:latin typeface="Segoe UI"/>
               </a:rPr>
-              <a:t>Anchor extracted: 47e19f6f45d3</a:t>
+              <a:t>Anchor extracted: 29f081e23748</a:t>
             </a:r>
           </a:p>
           <a:p>
@@ -13300,7 +13190,7 @@
                 </a:solidFill>
                 <a:latin typeface="Segoe UI"/>
               </a:rPr>
-              <a:t>Already refreshed to April 1 facts</a:t>
+              <a:t>April 1 snapshot</a:t>
             </a:r>
           </a:p>
           <a:p>
@@ -13319,7 +13209,7 @@
                 </a:solidFill>
                 <a:latin typeface="Segoe UI"/>
               </a:rPr>
-              <a:t>Used as an audit input, not as source authority over code</a:t>
+              <a:t>Did not include the April 2-3 ACP and packaging changes</a:t>
             </a:r>
           </a:p>
         </p:txBody>
@@ -13398,7 +13288,7 @@
                 </a:solidFill>
                 <a:latin typeface="Segoe UI"/>
               </a:rPr>
-              <a:t>Anchor audited: e3d77576b0c9</a:t>
+              <a:t>Anchor audited: 29f081e23748</a:t>
             </a:r>
           </a:p>
           <a:p>
@@ -13417,7 +13307,7 @@
                 </a:solidFill>
                 <a:latin typeface="Segoe UI"/>
               </a:rPr>
-              <a:t>Still March 29 narrative</a:t>
+              <a:t>Still April 1 narrative</a:t>
             </a:r>
           </a:p>
           <a:p>
@@ -13436,7 +13326,7 @@
                 </a:solidFill>
                 <a:latin typeface="Segoe UI"/>
               </a:rPr>
-              <a:t>Did not cover the April 1 chat-runtime additions</a:t>
+              <a:t>Did not include the April 2-3 ACP and packaging changes</a:t>
             </a:r>
           </a:p>
         </p:txBody>
@@ -13496,45 +13386,26 @@
                 </a:solidFill>
                 <a:latin typeface="Segoe UI"/>
               </a:rPr>
-              <a:t>The April 1 commit changed the chat surface more than the ACP</a:t>
-            </a:r>
-          </a:p>
-          <a:p>
-            <a:pPr algn="l">
-              <a:spcBef>
-                <a:spcPts val="0"/>
-              </a:spcBef>
-              <a:spcAft>
-                <a:spcPts val="0"/>
-              </a:spcAft>
-            </a:pPr>
-            <a:r>
-              <a:rPr sz="1400">
-                <a:solidFill>
-                  <a:srgbClr val="364557"/>
-                </a:solidFill>
-                <a:latin typeface="Segoe UI"/>
-              </a:rPr>
-              <a:t>Last commit title: Implemented the multi-turn agentic loop in main chat, I hope it works so, so, by angelahack1</a:t>
-            </a:r>
-          </a:p>
-          <a:p>
-            <a:pPr algn="l">
-              <a:spcBef>
-                <a:spcPts val="0"/>
-              </a:spcBef>
-              <a:spcAft>
-                <a:spcPts val="0"/>
-              </a:spcAft>
-            </a:pPr>
-            <a:r>
-              <a:rPr sz="1400">
-                <a:solidFill>
-                  <a:srgbClr val="364557"/>
-                </a:solidFill>
-                <a:latin typeface="Segoe UI"/>
-              </a:rPr>
-              <a:t>The new truth set is the source tree plus focused verification, then README, PDF, and deck are updated to match that truth set.</a:t>
+              <a:t>Current commit line behind the refresh</a:t>
+            </a:r>
+          </a:p>
+          <a:p>
+            <a:pPr algn="l">
+              <a:spcBef>
+                <a:spcPts val="0"/>
+              </a:spcBef>
+              <a:spcAft>
+                <a:spcPts val="0"/>
+              </a:spcAft>
+            </a:pPr>
+            <a:r>
+              <a:rPr sz="1340">
+                <a:solidFill>
+                  <a:srgbClr val="364557"/>
+                </a:solidFill>
+                <a:latin typeface="Segoe UI"/>
+              </a:rPr>
+              <a:t>Recent commits: 4fd33b4 Fixing build.py, by angelahack1 | 2682efb Improving cinatextual menu of agents once placed in the canvas, by angelahack1 | 2125ead Adding contextual description for agents, once placed in the canvas, and even in the Agent's bar, by angelahack1 | 1c4c324 FIxing Installing process so it doesn't get stalled, j_decompiler to fix the routes, parametrizer to propagate to sun-conf entries, and core to parametrize well, by angelahack1</a:t>
             </a:r>
           </a:p>
         </p:txBody>
@@ -13677,7 +13548,7 @@
         <p:spPr>
           <a:xfrm>
             <a:off x="411480" y="713232"/>
-            <a:ext cx="10789920" cy="411480"/>
+            <a:ext cx="10881360" cy="411480"/>
           </a:xfrm>
           <a:prstGeom prst="rect">
             <a:avLst/>
@@ -13690,7 +13561,6 @@
           </a:bodyPr>
           <a:lstStyle/>
           <a:p>
-            <a:pPr algn="l"/>
             <a:r>
               <a:rPr b="1" sz="2550">
                 <a:solidFill>
@@ -13809,7 +13679,7 @@
                 </a:solidFill>
                 <a:latin typeface="Segoe UI"/>
               </a:rPr>
-              <a:t>Tlamatini | April 1, 2026 | 29f081e23748</a:t>
+              <a:t>Tlamatini | April 3, 2026 | 4fd33b480086</a:t>
             </a:r>
           </a:p>
         </p:txBody>
@@ -14021,7 +13891,7 @@
                 </a:solidFill>
                 <a:latin typeface="Segoe UI"/>
               </a:rPr>
-              <a:t>56,511 lines</a:t>
+              <a:t>56,939 lines</a:t>
             </a:r>
           </a:p>
         </p:txBody>
@@ -14119,7 +13989,7 @@
                 </a:solidFill>
                 <a:latin typeface="Segoe UI"/>
               </a:rPr>
-              <a:t>11,866 lines</a:t>
+              <a:t>12,205 lines</a:t>
             </a:r>
           </a:p>
         </p:txBody>
@@ -14179,7 +14049,7 @@
                 </a:solidFill>
                 <a:latin typeface="Segoe UI"/>
               </a:rPr>
-              <a:t>Agent templates</a:t>
+              <a:t>CSS footprint</a:t>
             </a:r>
           </a:p>
           <a:p>
@@ -14198,7 +14068,7 @@
                 </a:solidFill>
                 <a:latin typeface="Segoe UI"/>
               </a:rPr>
-              <a:t>55 verified</a:t>
+              <a:t>5 files</a:t>
             </a:r>
           </a:p>
           <a:p>
@@ -14217,7 +14087,7 @@
                 </a:solidFill>
                 <a:latin typeface="Segoe UI"/>
               </a:rPr>
-              <a:t>excluding pools/__pycache__</a:t>
+              <a:t>2,948 lines</a:t>
             </a:r>
           </a:p>
         </p:txBody>
@@ -14277,7 +14147,7 @@
                 </a:solidFill>
                 <a:latin typeface="Segoe UI"/>
               </a:rPr>
-              <a:t>Routing surface</a:t>
+              <a:t>Agent templates</a:t>
             </a:r>
           </a:p>
           <a:p>
@@ -14296,7 +14166,7 @@
                 </a:solidFill>
                 <a:latin typeface="Segoe UI"/>
               </a:rPr>
-              <a:t>102 app</a:t>
+              <a:t>55 verified</a:t>
             </a:r>
           </a:p>
           <a:p>
@@ -14315,7 +14185,7 @@
                 </a:solidFill>
                 <a:latin typeface="Segoe UI"/>
               </a:rPr>
-              <a:t>3 project + 1 WS</a:t>
+              <a:t>excluding pools/__pycache__</a:t>
             </a:r>
           </a:p>
         </p:txBody>
@@ -14375,7 +14245,7 @@
                 </a:solidFill>
                 <a:latin typeface="Segoe UI"/>
               </a:rPr>
-              <a:t>Database models</a:t>
+              <a:t>Routing and models</a:t>
             </a:r>
           </a:p>
           <a:p>
@@ -14394,7 +14264,7 @@
                 </a:solidFill>
                 <a:latin typeface="Segoe UI"/>
               </a:rPr>
-              <a:t>13 models</a:t>
+              <a:t>102 app + 3 project + 1 WS</a:t>
             </a:r>
           </a:p>
           <a:p>
@@ -14413,7 +14283,7 @@
                 </a:solidFill>
                 <a:latin typeface="Segoe UI"/>
               </a:rPr>
-              <a:t>including ChatAgentRun</a:t>
+              <a:t>13 Django models</a:t>
             </a:r>
           </a:p>
         </p:txBody>
@@ -14486,13 +14356,13 @@
               </a:spcAft>
             </a:pPr>
             <a:r>
-              <a:rPr sz="1350">
-                <a:solidFill>
-                  <a:srgbClr val="364557"/>
-                </a:solidFill>
-                <a:latin typeface="Segoe UI"/>
-              </a:rPr>
-              <a:t>The repo is now materially larger than the deck it replaced: more files, more agents, more routes, and a new chat runtime layer that changes how the main UI actually behaves.</a:t>
+              <a:rPr sz="1340">
+                <a:solidFill>
+                  <a:srgbClr val="364557"/>
+                </a:solidFill>
+                <a:latin typeface="Segoe UI"/>
+              </a:rPr>
+              <a:t>Counts are stable versus April 1 at the top-line level, but source lines and user-visible behavior changed in the ACP and release flow after that documentation pass.</a:t>
             </a:r>
           </a:p>
         </p:txBody>
@@ -14575,7 +14445,7 @@
         <p:spPr>
           <a:xfrm>
             <a:off x="411480" y="292608"/>
-            <a:ext cx="1499616" cy="310896"/>
+            <a:ext cx="1280160" cy="310896"/>
           </a:xfrm>
           <a:prstGeom prst="roundRect">
             <a:avLst/>
@@ -14621,7 +14491,7 @@
                 </a:solidFill>
                 <a:latin typeface="Segoe UI"/>
               </a:rPr>
-              <a:t>PRODUCT</a:t>
+              <a:t>DELTA</a:t>
             </a:r>
           </a:p>
         </p:txBody>
@@ -14635,7 +14505,7 @@
         <p:spPr>
           <a:xfrm>
             <a:off x="411480" y="713232"/>
-            <a:ext cx="10789920" cy="411480"/>
+            <a:ext cx="10881360" cy="411480"/>
           </a:xfrm>
           <a:prstGeom prst="rect">
             <a:avLst/>
@@ -14648,7 +14518,6 @@
           </a:bodyPr>
           <a:lstStyle/>
           <a:p>
-            <a:pPr algn="l"/>
             <a:r>
               <a:rPr b="1" sz="2550">
                 <a:solidFill>
@@ -14656,7 +14525,7 @@
                 </a:solidFill>
                 <a:latin typeface="Segoe UI"/>
               </a:rPr>
-              <a:t>What Tlamatini is and where users touch it</a:t>
+              <a:t>What changed after the April 1 documentation pass</a:t>
             </a:r>
           </a:p>
         </p:txBody>
@@ -14690,7 +14559,7 @@
                 </a:solidFill>
                 <a:latin typeface="Segoe UI"/>
               </a:rPr>
-              <a:t>The application is no longer describable as only a chat UI; it is a local-first technical platform with both conversational and visual automation surfaces.</a:t>
+              <a:t>The recent commits are mostly behavior and release-flow commits, not new-topology-count commits.</a:t>
             </a:r>
           </a:p>
         </p:txBody>
@@ -14767,7 +14636,7 @@
                 </a:solidFill>
                 <a:latin typeface="Segoe UI"/>
               </a:rPr>
-              <a:t>Tlamatini | April 1, 2026 | 29f081e23748</a:t>
+              <a:t>Tlamatini | April 3, 2026 | 4fd33b480086</a:t>
             </a:r>
           </a:p>
         </p:txBody>
@@ -14816,7 +14685,7 @@
         <p:spPr>
           <a:xfrm>
             <a:off x="411480" y="1828800"/>
-            <a:ext cx="5559552" cy="1600200"/>
+            <a:ext cx="3648456" cy="1325880"/>
           </a:xfrm>
           <a:prstGeom prst="roundRect">
             <a:avLst/>
@@ -14862,45 +14731,64 @@
                 </a:solidFill>
                 <a:latin typeface="Segoe UI"/>
               </a:rPr>
-              <a:t>Definition</a:t>
-            </a:r>
-          </a:p>
-          <a:p>
-            <a:pPr algn="l">
-              <a:spcBef>
-                <a:spcPts val="0"/>
-              </a:spcBef>
-              <a:spcAft>
-                <a:spcPts val="0"/>
-              </a:spcAft>
-            </a:pPr>
-            <a:r>
-              <a:rPr sz="1250">
-                <a:solidFill>
-                  <a:srgbClr val="364557"/>
-                </a:solidFill>
-                <a:latin typeface="Segoe UI"/>
-              </a:rPr>
-              <a:t>Django + Channels application for technical assistance, code-aware retrieval, tool use, visual workflow orchestration, and Windows-local operation.</a:t>
-            </a:r>
-          </a:p>
-          <a:p>
-            <a:pPr algn="l">
-              <a:spcBef>
-                <a:spcPts val="0"/>
-              </a:spcBef>
-              <a:spcAft>
-                <a:spcPts val="0"/>
-              </a:spcAft>
-            </a:pPr>
-            <a:r>
-              <a:rPr sz="1250">
-                <a:solidFill>
-                  <a:srgbClr val="364557"/>
-                </a:solidFill>
-                <a:latin typeface="Segoe UI"/>
-              </a:rPr>
-              <a:t>It combines authenticated chat, persistent context, workflow agents, RAG, MCP integrations, and packaging tooling in one product.</a:t>
+              <a:t>ACP descriptions</a:t>
+            </a:r>
+          </a:p>
+          <a:p>
+            <a:pPr algn="l">
+              <a:spcBef>
+                <a:spcPts val="0"/>
+              </a:spcBef>
+              <a:spcAft>
+                <a:spcPts val="0"/>
+              </a:spcAft>
+            </a:pPr>
+            <a:r>
+              <a:rPr sz="1160">
+                <a:solidFill>
+                  <a:srgbClr val="364557"/>
+                </a:solidFill>
+                <a:latin typeface="Segoe UI"/>
+              </a:rPr>
+              <a:t>README-backed purpose tooltips</a:t>
+            </a:r>
+          </a:p>
+          <a:p>
+            <a:pPr algn="l">
+              <a:spcBef>
+                <a:spcPts val="0"/>
+              </a:spcBef>
+              <a:spcAft>
+                <a:spcPts val="0"/>
+              </a:spcAft>
+            </a:pPr>
+            <a:r>
+              <a:rPr sz="1160">
+                <a:solidFill>
+                  <a:srgbClr val="364557"/>
+                </a:solidFill>
+                <a:latin typeface="Segoe UI"/>
+              </a:rPr>
+              <a:t>and a Description modal</a:t>
+            </a:r>
+          </a:p>
+          <a:p>
+            <a:pPr algn="l">
+              <a:spcBef>
+                <a:spcPts val="0"/>
+              </a:spcBef>
+              <a:spcAft>
+                <a:spcPts val="0"/>
+              </a:spcAft>
+            </a:pPr>
+            <a:r>
+              <a:rPr sz="1160">
+                <a:solidFill>
+                  <a:srgbClr val="364557"/>
+                </a:solidFill>
+                <a:latin typeface="Segoe UI"/>
+              </a:rPr>
+              <a:t>landed in the ACP.</a:t>
             </a:r>
           </a:p>
         </p:txBody>
@@ -14913,8 +14801,8 @@
         </p:nvSpPr>
         <p:spPr>
           <a:xfrm>
-            <a:off x="6217920" y="1828800"/>
-            <a:ext cx="5559552" cy="1600200"/>
+            <a:off x="4270248" y="1828800"/>
+            <a:ext cx="3648456" cy="1325880"/>
           </a:xfrm>
           <a:prstGeom prst="roundRect">
             <a:avLst/>
@@ -14960,64 +14848,64 @@
                 </a:solidFill>
                 <a:latin typeface="Segoe UI"/>
               </a:rPr>
-              <a:t>Visible user surfaces</a:t>
-            </a:r>
-          </a:p>
-          <a:p>
-            <a:pPr algn="l">
-              <a:spcBef>
-                <a:spcPts val="0"/>
-              </a:spcBef>
-              <a:spcAft>
-                <a:spcPts val="0"/>
-              </a:spcAft>
-            </a:pPr>
-            <a:r>
-              <a:rPr sz="1250">
-                <a:solidFill>
-                  <a:srgbClr val="364557"/>
-                </a:solidFill>
-                <a:latin typeface="Segoe UI"/>
-              </a:rPr>
-              <a:t>Authenticated chat and canvas</a:t>
-            </a:r>
-          </a:p>
-          <a:p>
-            <a:pPr algn="l">
-              <a:spcBef>
-                <a:spcPts val="0"/>
-              </a:spcBef>
-              <a:spcAft>
-                <a:spcPts val="0"/>
-              </a:spcAft>
-            </a:pPr>
-            <a:r>
-              <a:rPr sz="1250">
-                <a:solidFill>
-                  <a:srgbClr val="364557"/>
-                </a:solidFill>
-                <a:latin typeface="Segoe UI"/>
-              </a:rPr>
-              <a:t>Agentic Control Panel / Flow Designer</a:t>
-            </a:r>
-          </a:p>
-          <a:p>
-            <a:pPr algn="l">
-              <a:spcBef>
-                <a:spcPts val="0"/>
-              </a:spcBef>
-              <a:spcAft>
-                <a:spcPts val="0"/>
-              </a:spcAft>
-            </a:pPr>
-            <a:r>
-              <a:rPr sz="1250">
-                <a:solidFill>
-                  <a:srgbClr val="364557"/>
-                </a:solidFill>
-                <a:latin typeface="Segoe UI"/>
-              </a:rPr>
-              <a:t>Open in... desktop integrations and packaged Windows release flow</a:t>
+              <a:t>Context menu</a:t>
+            </a:r>
+          </a:p>
+          <a:p>
+            <a:pPr algn="l">
+              <a:spcBef>
+                <a:spcPts val="0"/>
+              </a:spcBef>
+              <a:spcAft>
+                <a:spcPts val="0"/>
+              </a:spcAft>
+            </a:pPr>
+            <a:r>
+              <a:rPr sz="1160">
+                <a:solidFill>
+                  <a:srgbClr val="364557"/>
+                </a:solidFill>
+                <a:latin typeface="Segoe UI"/>
+              </a:rPr>
+              <a:t>Explore dir and Open cmd</a:t>
+            </a:r>
+          </a:p>
+          <a:p>
+            <a:pPr algn="l">
+              <a:spcBef>
+                <a:spcPts val="0"/>
+              </a:spcBef>
+              <a:spcAft>
+                <a:spcPts val="0"/>
+              </a:spcAft>
+            </a:pPr>
+            <a:r>
+              <a:rPr sz="1160">
+                <a:solidFill>
+                  <a:srgbClr val="364557"/>
+                </a:solidFill>
+                <a:latin typeface="Segoe UI"/>
+              </a:rPr>
+              <a:t>now target deployed agent</a:t>
+            </a:r>
+          </a:p>
+          <a:p>
+            <a:pPr algn="l">
+              <a:spcBef>
+                <a:spcPts val="0"/>
+              </a:spcBef>
+              <a:spcAft>
+                <a:spcPts val="0"/>
+              </a:spcAft>
+            </a:pPr>
+            <a:r>
+              <a:rPr sz="1160">
+                <a:solidFill>
+                  <a:srgbClr val="364557"/>
+                </a:solidFill>
+                <a:latin typeface="Segoe UI"/>
+              </a:rPr>
+              <a:t>instances in the current pool.</a:t>
             </a:r>
           </a:p>
         </p:txBody>
@@ -15030,18 +14918,18 @@
         </p:nvSpPr>
         <p:spPr>
           <a:xfrm>
-            <a:off x="411480" y="3703320"/>
-            <a:ext cx="5559552" cy="1417320"/>
+            <a:off x="8129015" y="1828800"/>
+            <a:ext cx="3648456" cy="1325880"/>
           </a:xfrm>
           <a:prstGeom prst="roundRect">
             <a:avLst/>
           </a:prstGeom>
           <a:solidFill>
-            <a:srgbClr val="E8F0F8"/>
+            <a:srgbClr val="FFFFFF"/>
           </a:solidFill>
           <a:ln w="17780">
             <a:solidFill>
-              <a:srgbClr val="173B6C"/>
+              <a:srgbClr val="C7D4E0"/>
             </a:solidFill>
           </a:ln>
         </p:spPr>
@@ -15077,26 +14965,64 @@
                 </a:solidFill>
                 <a:latin typeface="Segoe UI"/>
               </a:rPr>
-              <a:t>Primary users</a:t>
-            </a:r>
-          </a:p>
-          <a:p>
-            <a:pPr algn="l">
-              <a:spcBef>
-                <a:spcPts val="0"/>
-              </a:spcBef>
-              <a:spcAft>
-                <a:spcPts val="0"/>
-              </a:spcAft>
-            </a:pPr>
-            <a:r>
-              <a:rPr sz="1250">
-                <a:solidFill>
-                  <a:srgbClr val="364557"/>
-                </a:solidFill>
-                <a:latin typeface="Segoe UI"/>
-              </a:rPr>
-              <a:t>Developers, operators, analysts, and technical users who need local context, file control, repeatable automation, and explicit supervision surfaces.</a:t>
+              <a:t>Parametrizer</a:t>
+            </a:r>
+          </a:p>
+          <a:p>
+            <a:pPr algn="l">
+              <a:spcBef>
+                <a:spcPts val="0"/>
+              </a:spcBef>
+              <a:spcAft>
+                <a:spcPts val="0"/>
+              </a:spcAft>
+            </a:pPr>
+            <a:r>
+              <a:rPr sz="1160">
+                <a:solidFill>
+                  <a:srgbClr val="364557"/>
+                </a:solidFill>
+                <a:latin typeface="Segoe UI"/>
+              </a:rPr>
+              <a:t>Nested target keys are now</a:t>
+            </a:r>
+          </a:p>
+          <a:p>
+            <a:pPr algn="l">
+              <a:spcBef>
+                <a:spcPts val="0"/>
+              </a:spcBef>
+              <a:spcAft>
+                <a:spcPts val="0"/>
+              </a:spcAft>
+            </a:pPr>
+            <a:r>
+              <a:rPr sz="1160">
+                <a:solidFill>
+                  <a:srgbClr val="364557"/>
+                </a:solidFill>
+                <a:latin typeface="Segoe UI"/>
+              </a:rPr>
+              <a:t>flattened and written back</a:t>
+            </a:r>
+          </a:p>
+          <a:p>
+            <a:pPr algn="l">
+              <a:spcBef>
+                <a:spcPts val="0"/>
+              </a:spcBef>
+              <a:spcAft>
+                <a:spcPts val="0"/>
+              </a:spcAft>
+            </a:pPr>
+            <a:r>
+              <a:rPr sz="1160">
+                <a:solidFill>
+                  <a:srgbClr val="364557"/>
+                </a:solidFill>
+                <a:latin typeface="Segoe UI"/>
+              </a:rPr>
+              <a:t>through dot notation.</a:t>
             </a:r>
           </a:p>
         </p:txBody>
@@ -15109,18 +15035,18 @@
         </p:nvSpPr>
         <p:spPr>
           <a:xfrm>
-            <a:off x="6217920" y="3703320"/>
-            <a:ext cx="5559552" cy="1417320"/>
+            <a:off x="411480" y="3474720"/>
+            <a:ext cx="3648456" cy="1325880"/>
           </a:xfrm>
           <a:prstGeom prst="roundRect">
             <a:avLst/>
           </a:prstGeom>
           <a:solidFill>
-            <a:srgbClr val="FAEDE5"/>
+            <a:srgbClr val="FFFFFF"/>
           </a:solidFill>
           <a:ln w="17780">
             <a:solidFill>
-              <a:srgbClr val="BF6635"/>
+              <a:srgbClr val="C7D4E0"/>
             </a:solidFill>
           </a:ln>
         </p:spPr>
@@ -15156,26 +15082,298 @@
                 </a:solidFill>
                 <a:latin typeface="Segoe UI"/>
               </a:rPr>
-              <a:t>Value proposition</a:t>
-            </a:r>
-          </a:p>
-          <a:p>
-            <a:pPr algn="l">
-              <a:spcBef>
-                <a:spcPts val="0"/>
-              </a:spcBef>
-              <a:spcAft>
-                <a:spcPts val="0"/>
-              </a:spcAft>
-            </a:pPr>
-            <a:r>
-              <a:rPr sz="1250">
-                <a:solidFill>
-                  <a:srgbClr val="364557"/>
-                </a:solidFill>
-                <a:latin typeface="Segoe UI"/>
-              </a:rPr>
-              <a:t>RAG aware of local code and files, a chat surface that can use tools, and a workflow canvas that externalizes long-running automation into visible agent graphs.</a:t>
+              <a:t>Packaging</a:t>
+            </a:r>
+          </a:p>
+          <a:p>
+            <a:pPr algn="l">
+              <a:spcBef>
+                <a:spcPts val="0"/>
+              </a:spcBef>
+              <a:spcAft>
+                <a:spcPts val="0"/>
+              </a:spcAft>
+            </a:pPr>
+            <a:r>
+              <a:rPr sz="1160">
+                <a:solidFill>
+                  <a:srgbClr val="364557"/>
+                </a:solidFill>
+                <a:latin typeface="Segoe UI"/>
+              </a:rPr>
+              <a:t>build.py now requires README.md</a:t>
+            </a:r>
+          </a:p>
+          <a:p>
+            <a:pPr algn="l">
+              <a:spcBef>
+                <a:spcPts val="0"/>
+              </a:spcBef>
+              <a:spcAft>
+                <a:spcPts val="0"/>
+              </a:spcAft>
+            </a:pPr>
+            <a:r>
+              <a:rPr sz="1160">
+                <a:solidFill>
+                  <a:srgbClr val="364557"/>
+                </a:solidFill>
+                <a:latin typeface="Segoe UI"/>
+              </a:rPr>
+              <a:t>and jd-cli, then verifies</a:t>
+            </a:r>
+          </a:p>
+          <a:p>
+            <a:pPr algn="l">
+              <a:spcBef>
+                <a:spcPts val="0"/>
+              </a:spcBef>
+              <a:spcAft>
+                <a:spcPts val="0"/>
+              </a:spcAft>
+            </a:pPr>
+            <a:r>
+              <a:rPr sz="1160">
+                <a:solidFill>
+                  <a:srgbClr val="364557"/>
+                </a:solidFill>
+                <a:latin typeface="Segoe UI"/>
+              </a:rPr>
+              <a:t>jd-cli.bat before release.</a:t>
+            </a:r>
+          </a:p>
+        </p:txBody>
+      </p:sp>
+      <p:sp>
+        <p:nvSpPr>
+          <p:cNvPr id="13" name="CARD_12"/>
+          <p:cNvSpPr/>
+          <p:nvPr/>
+        </p:nvSpPr>
+        <p:spPr>
+          <a:xfrm>
+            <a:off x="4270248" y="3474720"/>
+            <a:ext cx="3648456" cy="1325880"/>
+          </a:xfrm>
+          <a:prstGeom prst="roundRect">
+            <a:avLst/>
+          </a:prstGeom>
+          <a:solidFill>
+            <a:srgbClr val="FFFFFF"/>
+          </a:solidFill>
+          <a:ln w="17780">
+            <a:solidFill>
+              <a:srgbClr val="C7D4E0"/>
+            </a:solidFill>
+          </a:ln>
+        </p:spPr>
+        <p:style>
+          <a:lnRef idx="1">
+            <a:schemeClr val="accent1"/>
+          </a:lnRef>
+          <a:fillRef idx="3">
+            <a:schemeClr val="accent1"/>
+          </a:fillRef>
+          <a:effectRef idx="2">
+            <a:schemeClr val="accent1"/>
+          </a:effectRef>
+          <a:fontRef idx="minor">
+            <a:schemeClr val="lt1"/>
+          </a:fontRef>
+        </p:style>
+        <p:txBody>
+          <a:bodyPr rtlCol="0" anchor="t" wrap="square" lIns="152400" rIns="152400" tIns="127000" bIns="101600">
+            <a:normAutofit/>
+          </a:bodyPr>
+          <a:lstStyle/>
+          <a:p>
+            <a:pPr algn="l">
+              <a:spcAft>
+                <a:spcPts val="200"/>
+              </a:spcAft>
+            </a:pPr>
+            <a:r>
+              <a:rPr sz="1800" b="1">
+                <a:solidFill>
+                  <a:srgbClr val="173B6C"/>
+                </a:solidFill>
+                <a:latin typeface="Segoe UI"/>
+              </a:rPr>
+              <a:t>Installer</a:t>
+            </a:r>
+          </a:p>
+          <a:p>
+            <a:pPr algn="l">
+              <a:spcBef>
+                <a:spcPts val="0"/>
+              </a:spcBef>
+              <a:spcAft>
+                <a:spcPts val="0"/>
+              </a:spcAft>
+            </a:pPr>
+            <a:r>
+              <a:rPr sz="1160">
+                <a:solidFill>
+                  <a:srgbClr val="364557"/>
+                </a:solidFill>
+                <a:latin typeface="Segoe UI"/>
+              </a:rPr>
+              <a:t>Helper subprocesses now use</a:t>
+            </a:r>
+          </a:p>
+          <a:p>
+            <a:pPr algn="l">
+              <a:spcBef>
+                <a:spcPts val="0"/>
+              </a:spcBef>
+              <a:spcAft>
+                <a:spcPts val="0"/>
+              </a:spcAft>
+            </a:pPr>
+            <a:r>
+              <a:rPr sz="1160">
+                <a:solidFill>
+                  <a:srgbClr val="364557"/>
+                </a:solidFill>
+                <a:latin typeface="Segoe UI"/>
+              </a:rPr>
+              <a:t>a cleaned environment to</a:t>
+            </a:r>
+          </a:p>
+          <a:p>
+            <a:pPr algn="l">
+              <a:spcBef>
+                <a:spcPts val="0"/>
+              </a:spcBef>
+              <a:spcAft>
+                <a:spcPts val="0"/>
+              </a:spcAft>
+            </a:pPr>
+            <a:r>
+              <a:rPr sz="1160">
+                <a:solidFill>
+                  <a:srgbClr val="364557"/>
+                </a:solidFill>
+                <a:latin typeface="Segoe UI"/>
+              </a:rPr>
+              <a:t>reduce frozen-install stalls.</a:t>
+            </a:r>
+          </a:p>
+        </p:txBody>
+      </p:sp>
+      <p:sp>
+        <p:nvSpPr>
+          <p:cNvPr id="14" name="CARD_13"/>
+          <p:cNvSpPr/>
+          <p:nvPr/>
+        </p:nvSpPr>
+        <p:spPr>
+          <a:xfrm>
+            <a:off x="8129015" y="3474720"/>
+            <a:ext cx="3648456" cy="1325880"/>
+          </a:xfrm>
+          <a:prstGeom prst="roundRect">
+            <a:avLst/>
+          </a:prstGeom>
+          <a:solidFill>
+            <a:srgbClr val="FFFFFF"/>
+          </a:solidFill>
+          <a:ln w="17780">
+            <a:solidFill>
+              <a:srgbClr val="C7D4E0"/>
+            </a:solidFill>
+          </a:ln>
+        </p:spPr>
+        <p:style>
+          <a:lnRef idx="1">
+            <a:schemeClr val="accent1"/>
+          </a:lnRef>
+          <a:fillRef idx="3">
+            <a:schemeClr val="accent1"/>
+          </a:fillRef>
+          <a:effectRef idx="2">
+            <a:schemeClr val="accent1"/>
+          </a:effectRef>
+          <a:fontRef idx="minor">
+            <a:schemeClr val="lt1"/>
+          </a:fontRef>
+        </p:style>
+        <p:txBody>
+          <a:bodyPr rtlCol="0" anchor="t" wrap="square" lIns="152400" rIns="152400" tIns="127000" bIns="101600">
+            <a:normAutofit/>
+          </a:bodyPr>
+          <a:lstStyle/>
+          <a:p>
+            <a:pPr algn="l">
+              <a:spcAft>
+                <a:spcPts val="200"/>
+              </a:spcAft>
+            </a:pPr>
+            <a:r>
+              <a:rPr sz="1800" b="1">
+                <a:solidFill>
+                  <a:srgbClr val="173B6C"/>
+                </a:solidFill>
+                <a:latin typeface="Segoe UI"/>
+              </a:rPr>
+              <a:t>Query hardening</a:t>
+            </a:r>
+          </a:p>
+          <a:p>
+            <a:pPr algn="l">
+              <a:spcBef>
+                <a:spcPts val="0"/>
+              </a:spcBef>
+              <a:spcAft>
+                <a:spcPts val="0"/>
+              </a:spcAft>
+            </a:pPr>
+            <a:r>
+              <a:rPr sz="1160">
+                <a:solidFill>
+                  <a:srgbClr val="364557"/>
+                </a:solidFill>
+                <a:latin typeface="Segoe UI"/>
+              </a:rPr>
+              <a:t>Extension-query regexes</a:t>
+            </a:r>
+          </a:p>
+          <a:p>
+            <a:pPr algn="l">
+              <a:spcBef>
+                <a:spcPts val="0"/>
+              </a:spcBef>
+              <a:spcAft>
+                <a:spcPts val="0"/>
+              </a:spcAft>
+            </a:pPr>
+            <a:r>
+              <a:rPr sz="1160">
+                <a:solidFill>
+                  <a:srgbClr val="364557"/>
+                </a:solidFill>
+                <a:latin typeface="Segoe UI"/>
+              </a:rPr>
+              <a:t>were tightened to avoid</a:t>
+            </a:r>
+          </a:p>
+          <a:p>
+            <a:pPr algn="l">
+              <a:spcBef>
+                <a:spcPts val="0"/>
+              </a:spcBef>
+              <a:spcAft>
+                <a:spcPts val="0"/>
+              </a:spcAft>
+            </a:pPr>
+            <a:r>
+              <a:rPr sz="1160">
+                <a:solidFill>
+                  <a:srgbClr val="364557"/>
+                </a:solidFill>
+                <a:latin typeface="Segoe UI"/>
+              </a:rPr>
+              <a:t>dotted-token false positives.</a:t>
             </a:r>
           </a:p>
         </p:txBody>
@@ -15258,7 +15456,7 @@
         <p:spPr>
           <a:xfrm>
             <a:off x="411480" y="292608"/>
-            <a:ext cx="2048256" cy="310896"/>
+            <a:ext cx="1499616" cy="310896"/>
           </a:xfrm>
           <a:prstGeom prst="roundRect">
             <a:avLst/>
@@ -15304,7 +15502,7 @@
                 </a:solidFill>
                 <a:latin typeface="Segoe UI"/>
               </a:rPr>
-              <a:t>ARCHITECTURE</a:t>
+              <a:t>PRODUCT</a:t>
             </a:r>
           </a:p>
         </p:txBody>
@@ -15318,7 +15516,7 @@
         <p:spPr>
           <a:xfrm>
             <a:off x="411480" y="713232"/>
-            <a:ext cx="10789920" cy="411480"/>
+            <a:ext cx="10881360" cy="411480"/>
           </a:xfrm>
           <a:prstGeom prst="rect">
             <a:avLst/>
@@ -15331,7 +15529,6 @@
           </a:bodyPr>
           <a:lstStyle/>
           <a:p>
-            <a:pPr algn="l"/>
             <a:r>
               <a:rPr b="1" sz="2550">
                 <a:solidFill>
@@ -15339,7 +15536,7 @@
                 </a:solidFill>
                 <a:latin typeface="Segoe UI"/>
               </a:rPr>
-              <a:t>Layers and request path</a:t>
+              <a:t>What Tlamatini is and where users touch it</a:t>
             </a:r>
           </a:p>
         </p:txBody>
@@ -15373,7 +15570,7 @@
                 </a:solidFill>
                 <a:latin typeface="Segoe UI"/>
               </a:rPr>
-              <a:t>The runtime spans browser UI, Django/Channels state, the retrieval subsystem, tool-enabled chat, and per-session workflow pools.</a:t>
+              <a:t>The application remains a local-first technical platform rather than only a chat shell.</a:t>
             </a:r>
           </a:p>
         </p:txBody>
@@ -15450,7 +15647,7 @@
                 </a:solidFill>
                 <a:latin typeface="Segoe UI"/>
               </a:rPr>
-              <a:t>Tlamatini | April 1, 2026 | 29f081e23748</a:t>
+              <a:t>Tlamatini | April 3, 2026 | 4fd33b480086</a:t>
             </a:r>
           </a:p>
         </p:txBody>
@@ -15499,7 +15696,7 @@
         <p:spPr>
           <a:xfrm>
             <a:off x="411480" y="1828800"/>
-            <a:ext cx="2121408" cy="1417320"/>
+            <a:ext cx="5559552" cy="1600200"/>
           </a:xfrm>
           <a:prstGeom prst="roundRect">
             <a:avLst/>
@@ -15533,7 +15730,7 @@
           </a:bodyPr>
           <a:lstStyle/>
           <a:p>
-            <a:pPr algn="ctr">
+            <a:pPr algn="l">
               <a:spcAft>
                 <a:spcPts val="200"/>
               </a:spcAft>
@@ -15545,45 +15742,45 @@
                 </a:solidFill>
                 <a:latin typeface="Segoe UI"/>
               </a:rPr>
-              <a:t>Browser</a:t>
-            </a:r>
-          </a:p>
-          <a:p>
-            <a:pPr algn="ctr">
-              <a:spcBef>
-                <a:spcPts val="0"/>
-              </a:spcBef>
-              <a:spcAft>
-                <a:spcPts val="0"/>
-              </a:spcAft>
-            </a:pPr>
-            <a:r>
-              <a:rPr sz="1150">
-                <a:solidFill>
-                  <a:srgbClr val="364557"/>
-                </a:solidFill>
-                <a:latin typeface="Segoe UI"/>
-              </a:rPr>
-              <a:t>Chat UI, canvas,</a:t>
-            </a:r>
-          </a:p>
-          <a:p>
-            <a:pPr algn="ctr">
-              <a:spcBef>
-                <a:spcPts val="0"/>
-              </a:spcBef>
-              <a:spcAft>
-                <a:spcPts val="0"/>
-              </a:spcAft>
-            </a:pPr>
-            <a:r>
-              <a:rPr sz="1150">
-                <a:solidFill>
-                  <a:srgbClr val="364557"/>
-                </a:solidFill>
-                <a:latin typeface="Segoe UI"/>
-              </a:rPr>
-              <a:t>ACP, Open in...</a:t>
+              <a:t>Definition</a:t>
+            </a:r>
+          </a:p>
+          <a:p>
+            <a:pPr algn="l">
+              <a:spcBef>
+                <a:spcPts val="0"/>
+              </a:spcBef>
+              <a:spcAft>
+                <a:spcPts val="0"/>
+              </a:spcAft>
+            </a:pPr>
+            <a:r>
+              <a:rPr sz="1250">
+                <a:solidFill>
+                  <a:srgbClr val="364557"/>
+                </a:solidFill>
+                <a:latin typeface="Segoe UI"/>
+              </a:rPr>
+              <a:t>Django + Channels application for technical assistance, code-aware retrieval, tool use, visual workflow orchestration, and Windows-local operation.</a:t>
+            </a:r>
+          </a:p>
+          <a:p>
+            <a:pPr algn="l">
+              <a:spcBef>
+                <a:spcPts val="0"/>
+              </a:spcBef>
+              <a:spcAft>
+                <a:spcPts val="0"/>
+              </a:spcAft>
+            </a:pPr>
+            <a:r>
+              <a:rPr sz="1250">
+                <a:solidFill>
+                  <a:srgbClr val="364557"/>
+                </a:solidFill>
+                <a:latin typeface="Segoe UI"/>
+              </a:rPr>
+              <a:t>It combines authenticated chat, persistent context, workflow agents, RAG, MCP integrations, and packaging tooling in one product.</a:t>
             </a:r>
           </a:p>
         </p:txBody>
@@ -15596,8 +15793,8 @@
         </p:nvSpPr>
         <p:spPr>
           <a:xfrm>
-            <a:off x="2660904" y="1828800"/>
-            <a:ext cx="2121408" cy="1417320"/>
+            <a:off x="6217920" y="1828800"/>
+            <a:ext cx="5559552" cy="1600200"/>
           </a:xfrm>
           <a:prstGeom prst="roundRect">
             <a:avLst/>
@@ -15631,7 +15828,7 @@
           </a:bodyPr>
           <a:lstStyle/>
           <a:p>
-            <a:pPr algn="ctr">
+            <a:pPr algn="l">
               <a:spcAft>
                 <a:spcPts val="200"/>
               </a:spcAft>
@@ -15643,64 +15840,64 @@
                 </a:solidFill>
                 <a:latin typeface="Segoe UI"/>
               </a:rPr>
-              <a:t>Django + Channels</a:t>
-            </a:r>
-          </a:p>
-          <a:p>
-            <a:pPr algn="ctr">
-              <a:spcBef>
-                <a:spcPts val="0"/>
-              </a:spcBef>
-              <a:spcAft>
-                <a:spcPts val="0"/>
-              </a:spcAft>
-            </a:pPr>
-            <a:r>
-              <a:rPr sz="1150">
-                <a:solidFill>
-                  <a:srgbClr val="364557"/>
-                </a:solidFill>
-                <a:latin typeface="Segoe UI"/>
-              </a:rPr>
-              <a:t>views.py, urls.py,</a:t>
-            </a:r>
-          </a:p>
-          <a:p>
-            <a:pPr algn="ctr">
-              <a:spcBef>
-                <a:spcPts val="0"/>
-              </a:spcBef>
-              <a:spcAft>
-                <a:spcPts val="0"/>
-              </a:spcAft>
-            </a:pPr>
-            <a:r>
-              <a:rPr sz="1150">
-                <a:solidFill>
-                  <a:srgbClr val="364557"/>
-                </a:solidFill>
-                <a:latin typeface="Segoe UI"/>
-              </a:rPr>
-              <a:t>AgentConsumer,</a:t>
-            </a:r>
-          </a:p>
-          <a:p>
-            <a:pPr algn="ctr">
-              <a:spcBef>
-                <a:spcPts val="0"/>
-              </a:spcBef>
-              <a:spcAft>
-                <a:spcPts val="0"/>
-              </a:spcAft>
-            </a:pPr>
-            <a:r>
-              <a:rPr sz="1150">
-                <a:solidFill>
-                  <a:srgbClr val="364557"/>
-                </a:solidFill>
-                <a:latin typeface="Segoe UI"/>
-              </a:rPr>
-              <a:t>SessionState</a:t>
+              <a:t>Visible user surfaces</a:t>
+            </a:r>
+          </a:p>
+          <a:p>
+            <a:pPr algn="l">
+              <a:spcBef>
+                <a:spcPts val="0"/>
+              </a:spcBef>
+              <a:spcAft>
+                <a:spcPts val="0"/>
+              </a:spcAft>
+            </a:pPr>
+            <a:r>
+              <a:rPr sz="1250">
+                <a:solidFill>
+                  <a:srgbClr val="364557"/>
+                </a:solidFill>
+                <a:latin typeface="Segoe UI"/>
+              </a:rPr>
+              <a:t>Authenticated chat and canvas</a:t>
+            </a:r>
+          </a:p>
+          <a:p>
+            <a:pPr algn="l">
+              <a:spcBef>
+                <a:spcPts val="0"/>
+              </a:spcBef>
+              <a:spcAft>
+                <a:spcPts val="0"/>
+              </a:spcAft>
+            </a:pPr>
+            <a:r>
+              <a:rPr sz="1250">
+                <a:solidFill>
+                  <a:srgbClr val="364557"/>
+                </a:solidFill>
+                <a:latin typeface="Segoe UI"/>
+              </a:rPr>
+              <a:t>Agentic Control Panel / Flow Designer</a:t>
+            </a:r>
+          </a:p>
+          <a:p>
+            <a:pPr algn="l">
+              <a:spcBef>
+                <a:spcPts val="0"/>
+              </a:spcBef>
+              <a:spcAft>
+                <a:spcPts val="0"/>
+              </a:spcAft>
+            </a:pPr>
+            <a:r>
+              <a:rPr sz="1250">
+                <a:solidFill>
+                  <a:srgbClr val="364557"/>
+                </a:solidFill>
+                <a:latin typeface="Segoe UI"/>
+              </a:rPr>
+              <a:t>Open in... desktop integrations and packaged Windows release flow</a:t>
             </a:r>
           </a:p>
         </p:txBody>
@@ -15713,18 +15910,18 @@
         </p:nvSpPr>
         <p:spPr>
           <a:xfrm>
-            <a:off x="4910328" y="1828800"/>
-            <a:ext cx="2121408" cy="1417320"/>
+            <a:off x="411480" y="3703320"/>
+            <a:ext cx="5559552" cy="1417320"/>
           </a:xfrm>
           <a:prstGeom prst="roundRect">
             <a:avLst/>
           </a:prstGeom>
           <a:solidFill>
-            <a:srgbClr val="FFFFFF"/>
+            <a:srgbClr val="E8F0F8"/>
           </a:solidFill>
           <a:ln w="17780">
             <a:solidFill>
-              <a:srgbClr val="C7D4E0"/>
+              <a:srgbClr val="173B6C"/>
             </a:solidFill>
           </a:ln>
         </p:spPr>
@@ -15748,7 +15945,7 @@
           </a:bodyPr>
           <a:lstStyle/>
           <a:p>
-            <a:pPr algn="ctr">
+            <a:pPr algn="l">
               <a:spcAft>
                 <a:spcPts val="200"/>
               </a:spcAft>
@@ -15760,64 +15957,26 @@
                 </a:solidFill>
                 <a:latin typeface="Segoe UI"/>
               </a:rPr>
-              <a:t>RAG</a:t>
-            </a:r>
-          </a:p>
-          <a:p>
-            <a:pPr algn="ctr">
-              <a:spcBef>
-                <a:spcPts val="0"/>
-              </a:spcBef>
-              <a:spcAft>
-                <a:spcPts val="0"/>
-              </a:spcAft>
-            </a:pPr>
-            <a:r>
-              <a:rPr sz="1150">
-                <a:solidFill>
-                  <a:srgbClr val="364557"/>
-                </a:solidFill>
-                <a:latin typeface="Segoe UI"/>
-              </a:rPr>
-              <a:t>Loaders, FAISS,</a:t>
-            </a:r>
-          </a:p>
-          <a:p>
-            <a:pPr algn="ctr">
-              <a:spcBef>
-                <a:spcPts val="0"/>
-              </a:spcBef>
-              <a:spcAft>
-                <a:spcPts val="0"/>
-              </a:spcAft>
-            </a:pPr>
-            <a:r>
-              <a:rPr sz="1150">
-                <a:solidFill>
-                  <a:srgbClr val="364557"/>
-                </a:solidFill>
-                <a:latin typeface="Segoe UI"/>
-              </a:rPr>
-              <a:t>BM25, RRF,</a:t>
-            </a:r>
-          </a:p>
-          <a:p>
-            <a:pPr algn="ctr">
-              <a:spcBef>
-                <a:spcPts val="0"/>
-              </a:spcBef>
-              <a:spcAft>
-                <a:spcPts val="0"/>
-              </a:spcAft>
-            </a:pPr>
-            <a:r>
-              <a:rPr sz="1150">
-                <a:solidFill>
-                  <a:srgbClr val="364557"/>
-                </a:solidFill>
-                <a:latin typeface="Segoe UI"/>
-              </a:rPr>
-              <a:t>budgeting</a:t>
+              <a:t>Primary users</a:t>
+            </a:r>
+          </a:p>
+          <a:p>
+            <a:pPr algn="l">
+              <a:spcBef>
+                <a:spcPts val="0"/>
+              </a:spcBef>
+              <a:spcAft>
+                <a:spcPts val="0"/>
+              </a:spcAft>
+            </a:pPr>
+            <a:r>
+              <a:rPr sz="1250">
+                <a:solidFill>
+                  <a:srgbClr val="364557"/>
+                </a:solidFill>
+                <a:latin typeface="Segoe UI"/>
+              </a:rPr>
+              <a:t>Developers, operators, analysts, and technical users who need local context, file control, repeatable automation, and explicit supervision surfaces.</a:t>
             </a:r>
           </a:p>
         </p:txBody>
@@ -15830,18 +15989,18 @@
         </p:nvSpPr>
         <p:spPr>
           <a:xfrm>
-            <a:off x="7159752" y="1828800"/>
-            <a:ext cx="2121408" cy="1417320"/>
+            <a:off x="6217920" y="3703320"/>
+            <a:ext cx="5559552" cy="1417320"/>
           </a:xfrm>
           <a:prstGeom prst="roundRect">
             <a:avLst/>
           </a:prstGeom>
           <a:solidFill>
-            <a:srgbClr val="FFFFFF"/>
+            <a:srgbClr val="FAEDE5"/>
           </a:solidFill>
           <a:ln w="17780">
             <a:solidFill>
-              <a:srgbClr val="C7D4E0"/>
+              <a:srgbClr val="BF6635"/>
             </a:solidFill>
           </a:ln>
         </p:spPr>
@@ -15865,7 +16024,7 @@
           </a:bodyPr>
           <a:lstStyle/>
           <a:p>
-            <a:pPr algn="ctr">
+            <a:pPr algn="l">
               <a:spcAft>
                 <a:spcPts val="200"/>
               </a:spcAft>
@@ -15877,336 +16036,26 @@
                 </a:solidFill>
                 <a:latin typeface="Segoe UI"/>
               </a:rPr>
-              <a:t>Unified chat</a:t>
-            </a:r>
-          </a:p>
-          <a:p>
-            <a:pPr algn="ctr">
-              <a:spcBef>
-                <a:spcPts val="0"/>
-              </a:spcBef>
-              <a:spcAft>
-                <a:spcPts val="0"/>
-              </a:spcAft>
-            </a:pPr>
-            <a:r>
-              <a:rPr sz="1150">
-                <a:solidFill>
-                  <a:srgbClr val="364557"/>
-                </a:solidFill>
-                <a:latin typeface="Segoe UI"/>
-              </a:rPr>
-              <a:t>Tool calling,</a:t>
-            </a:r>
-          </a:p>
-          <a:p>
-            <a:pPr algn="ctr">
-              <a:spcBef>
-                <a:spcPts val="0"/>
-              </a:spcBef>
-              <a:spcAft>
-                <a:spcPts val="0"/>
-              </a:spcAft>
-            </a:pPr>
-            <a:r>
-              <a:rPr sz="1150">
-                <a:solidFill>
-                  <a:srgbClr val="364557"/>
-                </a:solidFill>
-                <a:latin typeface="Segoe UI"/>
-              </a:rPr>
-              <a:t>MultiTurnToolAgentExecutor,</a:t>
-            </a:r>
-          </a:p>
-          <a:p>
-            <a:pPr algn="ctr">
-              <a:spcBef>
-                <a:spcPts val="0"/>
-              </a:spcBef>
-              <a:spcAft>
-                <a:spcPts val="0"/>
-              </a:spcAft>
-            </a:pPr>
-            <a:r>
-              <a:rPr sz="1150">
-                <a:solidFill>
-                  <a:srgbClr val="364557"/>
-                </a:solidFill>
-                <a:latin typeface="Segoe UI"/>
-              </a:rPr>
-              <a:t>MCP surface</a:t>
-            </a:r>
-          </a:p>
-        </p:txBody>
-      </p:sp>
-      <p:sp>
-        <p:nvSpPr>
-          <p:cNvPr id="13" name="CARD_12"/>
-          <p:cNvSpPr/>
-          <p:nvPr/>
-        </p:nvSpPr>
-        <p:spPr>
-          <a:xfrm>
-            <a:off x="9409176" y="1828800"/>
-            <a:ext cx="2121408" cy="1417320"/>
-          </a:xfrm>
-          <a:prstGeom prst="roundRect">
-            <a:avLst/>
-          </a:prstGeom>
-          <a:solidFill>
-            <a:srgbClr val="FFFFFF"/>
-          </a:solidFill>
-          <a:ln w="17780">
-            <a:solidFill>
-              <a:srgbClr val="C7D4E0"/>
-            </a:solidFill>
-          </a:ln>
-        </p:spPr>
-        <p:style>
-          <a:lnRef idx="1">
-            <a:schemeClr val="accent1"/>
-          </a:lnRef>
-          <a:fillRef idx="3">
-            <a:schemeClr val="accent1"/>
-          </a:fillRef>
-          <a:effectRef idx="2">
-            <a:schemeClr val="accent1"/>
-          </a:effectRef>
-          <a:fontRef idx="minor">
-            <a:schemeClr val="lt1"/>
-          </a:fontRef>
-        </p:style>
-        <p:txBody>
-          <a:bodyPr rtlCol="0" anchor="t" wrap="square" lIns="152400" rIns="152400" tIns="127000" bIns="101600">
-            <a:normAutofit/>
-          </a:bodyPr>
-          <a:lstStyle/>
-          <a:p>
-            <a:pPr algn="ctr">
-              <a:spcAft>
-                <a:spcPts val="200"/>
-              </a:spcAft>
-            </a:pPr>
-            <a:r>
-              <a:rPr sz="1800" b="1">
-                <a:solidFill>
-                  <a:srgbClr val="173B6C"/>
-                </a:solidFill>
-                <a:latin typeface="Segoe UI"/>
-              </a:rPr>
-              <a:t>Workflow runtime</a:t>
-            </a:r>
-          </a:p>
-          <a:p>
-            <a:pPr algn="ctr">
-              <a:spcBef>
-                <a:spcPts val="0"/>
-              </a:spcBef>
-              <a:spcAft>
-                <a:spcPts val="0"/>
-              </a:spcAft>
-            </a:pPr>
-            <a:r>
-              <a:rPr sz="1150">
-                <a:solidFill>
-                  <a:srgbClr val="364557"/>
-                </a:solidFill>
-                <a:latin typeface="Segoe UI"/>
-              </a:rPr>
-              <a:t>Pools, logs, pids,</a:t>
-            </a:r>
-          </a:p>
-          <a:p>
-            <a:pPr algn="ctr">
-              <a:spcBef>
-                <a:spcPts val="0"/>
-              </a:spcBef>
-              <a:spcAft>
-                <a:spcPts val="0"/>
-              </a:spcAft>
-            </a:pPr>
-            <a:r>
-              <a:rPr sz="1150">
-                <a:solidFill>
-                  <a:srgbClr val="364557"/>
-                </a:solidFill>
-                <a:latin typeface="Segoe UI"/>
-              </a:rPr>
-              <a:t>reanim files,</a:t>
-            </a:r>
-          </a:p>
-          <a:p>
-            <a:pPr algn="ctr">
-              <a:spcBef>
-                <a:spcPts val="0"/>
-              </a:spcBef>
-              <a:spcAft>
-                <a:spcPts val="0"/>
-              </a:spcAft>
-            </a:pPr>
-            <a:r>
-              <a:rPr sz="1150">
-                <a:solidFill>
-                  <a:srgbClr val="364557"/>
-                </a:solidFill>
-                <a:latin typeface="Segoe UI"/>
-              </a:rPr>
-              <a:t>__chat_runs__</a:t>
-            </a:r>
-          </a:p>
-        </p:txBody>
-      </p:sp>
-      <p:sp>
-        <p:nvSpPr>
-          <p:cNvPr id="14" name="CARD_13"/>
-          <p:cNvSpPr/>
-          <p:nvPr/>
-        </p:nvSpPr>
-        <p:spPr>
-          <a:xfrm>
-            <a:off x="411480" y="3611880"/>
-            <a:ext cx="11365992" cy="1783080"/>
-          </a:xfrm>
-          <a:prstGeom prst="roundRect">
-            <a:avLst/>
-          </a:prstGeom>
-          <a:solidFill>
-            <a:srgbClr val="FFFFFF"/>
-          </a:solidFill>
-          <a:ln w="17780">
-            <a:solidFill>
-              <a:srgbClr val="C7D4E0"/>
-            </a:solidFill>
-          </a:ln>
-        </p:spPr>
-        <p:style>
-          <a:lnRef idx="1">
-            <a:schemeClr val="accent1"/>
-          </a:lnRef>
-          <a:fillRef idx="3">
-            <a:schemeClr val="accent1"/>
-          </a:fillRef>
-          <a:effectRef idx="2">
-            <a:schemeClr val="accent1"/>
-          </a:effectRef>
-          <a:fontRef idx="minor">
-            <a:schemeClr val="lt1"/>
-          </a:fontRef>
-        </p:style>
-        <p:txBody>
-          <a:bodyPr rtlCol="0" anchor="t" wrap="square" lIns="152400" rIns="152400" tIns="127000" bIns="101600">
-            <a:normAutofit/>
-          </a:bodyPr>
-          <a:lstStyle/>
-          <a:p>
-            <a:pPr algn="l">
-              <a:spcAft>
-                <a:spcPts val="200"/>
-              </a:spcAft>
-            </a:pPr>
-            <a:r>
-              <a:rPr sz="1850" b="1">
-                <a:solidFill>
-                  <a:srgbClr val="173B6C"/>
-                </a:solidFill>
-                <a:latin typeface="Segoe UI"/>
-              </a:rPr>
-              <a:t>Real request path</a:t>
-            </a:r>
-          </a:p>
-          <a:p>
-            <a:pPr algn="l">
-              <a:spcBef>
-                <a:spcPts val="0"/>
-              </a:spcBef>
-              <a:spcAft>
-                <a:spcPts val="0"/>
-              </a:spcAft>
-            </a:pPr>
-            <a:r>
-              <a:rPr sz="1320">
-                <a:solidFill>
-                  <a:srgbClr val="364557"/>
-                </a:solidFill>
-                <a:latin typeface="Segoe UI"/>
-              </a:rPr>
-              <a:t>1. Authenticated WebSocket request enters AgentConsumer.</a:t>
-            </a:r>
-          </a:p>
-          <a:p>
-            <a:pPr algn="l">
-              <a:spcBef>
-                <a:spcPts val="0"/>
-              </a:spcBef>
-              <a:spcAft>
-                <a:spcPts val="0"/>
-              </a:spcAft>
-            </a:pPr>
-            <a:r>
-              <a:rPr sz="1320">
-                <a:solidFill>
-                  <a:srgbClr val="364557"/>
-                </a:solidFill>
-                <a:latin typeface="Segoe UI"/>
-              </a:rPr>
-              <a:t>2. Prior session context and UI-selected files/directories are restored if present.</a:t>
-            </a:r>
-          </a:p>
-          <a:p>
-            <a:pPr algn="l">
-              <a:spcBef>
-                <a:spcPts val="0"/>
-              </a:spcBef>
-              <a:spcAft>
-                <a:spcPts val="0"/>
-              </a:spcAft>
-            </a:pPr>
-            <a:r>
-              <a:rPr sz="1320">
-                <a:solidFill>
-                  <a:srgbClr val="364557"/>
-                </a:solidFill>
-                <a:latin typeface="Segoe UI"/>
-              </a:rPr>
-              <a:t>3. The system chooses a chain and may run hybrid retrieval before inference.</a:t>
-            </a:r>
-          </a:p>
-          <a:p>
-            <a:pPr algn="l">
-              <a:spcBef>
-                <a:spcPts val="0"/>
-              </a:spcBef>
-              <a:spcAft>
-                <a:spcPts val="0"/>
-              </a:spcAft>
-            </a:pPr>
-            <a:r>
-              <a:rPr sz="1320">
-                <a:solidFill>
-                  <a:srgbClr val="364557"/>
-                </a:solidFill>
-                <a:latin typeface="Segoe UI"/>
-              </a:rPr>
-              <a:t>4. The unified chat path can invoke tools across multiple turns instead of a single pass.</a:t>
-            </a:r>
-          </a:p>
-          <a:p>
-            <a:pPr algn="l">
-              <a:spcBef>
-                <a:spcPts val="0"/>
-              </a:spcBef>
-              <a:spcAft>
-                <a:spcPts val="0"/>
-              </a:spcAft>
-            </a:pPr>
-            <a:r>
-              <a:rPr sz="1320">
-                <a:solidFill>
-                  <a:srgbClr val="364557"/>
-                </a:solidFill>
-                <a:latin typeface="Segoe UI"/>
-              </a:rPr>
-              <a:t>5. Results, status, and persisted side effects return through the same UI surface.</a:t>
+              <a:t>Value proposition</a:t>
+            </a:r>
+          </a:p>
+          <a:p>
+            <a:pPr algn="l">
+              <a:spcBef>
+                <a:spcPts val="0"/>
+              </a:spcBef>
+              <a:spcAft>
+                <a:spcPts val="0"/>
+              </a:spcAft>
+            </a:pPr>
+            <a:r>
+              <a:rPr sz="1250">
+                <a:solidFill>
+                  <a:srgbClr val="364557"/>
+                </a:solidFill>
+                <a:latin typeface="Segoe UI"/>
+              </a:rPr>
+              <a:t>RAG aware of local code and files, a chat surface that can use tools, and a workflow canvas that externalizes long-running automation into visible agent graphs.</a:t>
             </a:r>
           </a:p>
         </p:txBody>
@@ -16289,7 +16138,7 @@
         <p:spPr>
           <a:xfrm>
             <a:off x="411480" y="292608"/>
-            <a:ext cx="1499616" cy="310896"/>
+            <a:ext cx="2048256" cy="310896"/>
           </a:xfrm>
           <a:prstGeom prst="roundRect">
             <a:avLst/>
@@ -16335,7 +16184,7 @@
                 </a:solidFill>
                 <a:latin typeface="Segoe UI"/>
               </a:rPr>
-              <a:t>RUNTIME</a:t>
+              <a:t>ARCHITECTURE</a:t>
             </a:r>
           </a:p>
         </p:txBody>
@@ -16349,7 +16198,7 @@
         <p:spPr>
           <a:xfrm>
             <a:off x="411480" y="713232"/>
-            <a:ext cx="10789920" cy="411480"/>
+            <a:ext cx="10881360" cy="411480"/>
           </a:xfrm>
           <a:prstGeom prst="rect">
             <a:avLst/>
@@ -16362,7 +16211,6 @@
           </a:bodyPr>
           <a:lstStyle/>
           <a:p>
-            <a:pPr algn="l"/>
             <a:r>
               <a:rPr b="1" sz="2550">
                 <a:solidFill>
@@ -16370,7 +16218,7 @@
                 </a:solidFill>
                 <a:latin typeface="Segoe UI"/>
               </a:rPr>
-              <a:t>Checked-in defaults and control surface</a:t>
+              <a:t>Layers and request path</a:t>
             </a:r>
           </a:p>
         </p:txBody>
@@ -16404,7 +16252,7 @@
                 </a:solidFill>
                 <a:latin typeface="Segoe UI"/>
               </a:rPr>
-              <a:t>The repo is local-first in posture, but the checked-in model identifiers show a mixed cloud/local runtime stance today.</a:t>
+              <a:t>The runtime spans browser UI, Django/Channels state, retrieval, tool-enabled chat, and per-session workflow pools.</a:t>
             </a:r>
           </a:p>
         </p:txBody>
@@ -16481,7 +16329,7 @@
                 </a:solidFill>
                 <a:latin typeface="Segoe UI"/>
               </a:rPr>
-              <a:t>Tlamatini | April 1, 2026 | 29f081e23748</a:t>
+              <a:t>Tlamatini | April 3, 2026 | 4fd33b480086</a:t>
             </a:r>
           </a:p>
         </p:txBody>
@@ -16530,162 +16378,7 @@
         <p:spPr>
           <a:xfrm>
             <a:off x="411480" y="1828800"/>
-            <a:ext cx="3657600" cy="3246120"/>
-          </a:xfrm>
-          <a:prstGeom prst="roundRect">
-            <a:avLst/>
-          </a:prstGeom>
-          <a:solidFill>
-            <a:srgbClr val="E8F0F8"/>
-          </a:solidFill>
-          <a:ln w="17780">
-            <a:solidFill>
-              <a:srgbClr val="173B6C"/>
-            </a:solidFill>
-          </a:ln>
-        </p:spPr>
-        <p:style>
-          <a:lnRef idx="1">
-            <a:schemeClr val="accent1"/>
-          </a:lnRef>
-          <a:fillRef idx="3">
-            <a:schemeClr val="accent1"/>
-          </a:fillRef>
-          <a:effectRef idx="2">
-            <a:schemeClr val="accent1"/>
-          </a:effectRef>
-          <a:fontRef idx="minor">
-            <a:schemeClr val="lt1"/>
-          </a:fontRef>
-        </p:style>
-        <p:txBody>
-          <a:bodyPr rtlCol="0" anchor="t" wrap="square" lIns="152400" rIns="152400" tIns="127000" bIns="101600">
-            <a:normAutofit/>
-          </a:bodyPr>
-          <a:lstStyle/>
-          <a:p>
-            <a:pPr algn="l">
-              <a:spcAft>
-                <a:spcPts val="200"/>
-              </a:spcAft>
-            </a:pPr>
-            <a:r>
-              <a:rPr sz="1800" b="1">
-                <a:solidFill>
-                  <a:srgbClr val="173B6C"/>
-                </a:solidFill>
-                <a:latin typeface="Segoe UI"/>
-              </a:rPr>
-              <a:t>Current model defaults</a:t>
-            </a:r>
-          </a:p>
-          <a:p>
-            <a:pPr algn="l">
-              <a:spcBef>
-                <a:spcPts val="0"/>
-              </a:spcBef>
-              <a:spcAft>
-                <a:spcPts val="0"/>
-              </a:spcAft>
-            </a:pPr>
-            <a:r>
-              <a:rPr sz="1250">
-                <a:solidFill>
-                  <a:srgbClr val="364557"/>
-                </a:solidFill>
-                <a:latin typeface="Segoe UI"/>
-              </a:rPr>
-              <a:t>embeding-model: qwen3-embedding:8b</a:t>
-            </a:r>
-          </a:p>
-          <a:p>
-            <a:pPr algn="l">
-              <a:spcBef>
-                <a:spcPts val="0"/>
-              </a:spcBef>
-              <a:spcAft>
-                <a:spcPts val="0"/>
-              </a:spcAft>
-            </a:pPr>
-            <a:r>
-              <a:rPr sz="1250">
-                <a:solidFill>
-                  <a:srgbClr val="364557"/>
-                </a:solidFill>
-                <a:latin typeface="Segoe UI"/>
-              </a:rPr>
-              <a:t>chained-model: glm-5:cloud</a:t>
-            </a:r>
-          </a:p>
-          <a:p>
-            <a:pPr algn="l">
-              <a:spcBef>
-                <a:spcPts val="0"/>
-              </a:spcBef>
-              <a:spcAft>
-                <a:spcPts val="0"/>
-              </a:spcAft>
-            </a:pPr>
-            <a:r>
-              <a:rPr sz="1250">
-                <a:solidFill>
-                  <a:srgbClr val="364557"/>
-                </a:solidFill>
-                <a:latin typeface="Segoe UI"/>
-              </a:rPr>
-              <a:t>unified_agent_model: glm-5:cloud</a:t>
-            </a:r>
-          </a:p>
-          <a:p>
-            <a:pPr algn="l">
-              <a:spcBef>
-                <a:spcPts val="0"/>
-              </a:spcBef>
-              <a:spcAft>
-                <a:spcPts val="0"/>
-              </a:spcAft>
-            </a:pPr>
-            <a:r>
-              <a:rPr sz="1250">
-                <a:solidFill>
-                  <a:srgbClr val="364557"/>
-                </a:solidFill>
-                <a:latin typeface="Segoe UI"/>
-              </a:rPr>
-              <a:t>image_interpreter_model: qwen3.5:cloud</a:t>
-            </a:r>
-          </a:p>
-          <a:p>
-            <a:pPr algn="l">
-              <a:spcBef>
-                <a:spcPts val="0"/>
-              </a:spcBef>
-              <a:spcAft>
-                <a:spcPts val="0"/>
-              </a:spcAft>
-            </a:pPr>
-            <a:r>
-              <a:rPr sz="1250">
-                <a:solidFill>
-                  <a:srgbClr val="364557"/>
-                </a:solidFill>
-                <a:latin typeface="Segoe UI"/>
-              </a:rPr>
-              <a:t>internet/web/mcp search: glm-5:cloud</a:t>
-            </a:r>
-          </a:p>
-        </p:txBody>
-      </p:sp>
-      <p:sp>
-        <p:nvSpPr>
-          <p:cNvPr id="10" name="CARD_9"/>
-          <p:cNvSpPr/>
-          <p:nvPr/>
-        </p:nvSpPr>
-        <p:spPr>
-          <a:xfrm>
-            <a:off x="4270248" y="1828800"/>
-            <a:ext cx="3657600" cy="3246120"/>
+            <a:ext cx="2121408" cy="1417320"/>
           </a:xfrm>
           <a:prstGeom prst="roundRect">
             <a:avLst/>
@@ -16719,7 +16412,7 @@
           </a:bodyPr>
           <a:lstStyle/>
           <a:p>
-            <a:pPr algn="l">
+            <a:pPr algn="ctr">
               <a:spcAft>
                 <a:spcPts val="200"/>
               </a:spcAft>
@@ -16731,107 +16424,69 @@
                 </a:solidFill>
                 <a:latin typeface="Segoe UI"/>
               </a:rPr>
-              <a:t>HTTP and route families</a:t>
-            </a:r>
-          </a:p>
-          <a:p>
-            <a:pPr algn="l">
-              <a:spcBef>
-                <a:spcPts val="0"/>
-              </a:spcBef>
-              <a:spcAft>
-                <a:spcPts val="0"/>
-              </a:spcAft>
-            </a:pPr>
-            <a:r>
-              <a:rPr sz="1250">
-                <a:solidFill>
-                  <a:srgbClr val="364557"/>
-                </a:solidFill>
-                <a:latin typeface="Segoe UI"/>
-              </a:rPr>
-              <a:t>102 app routes, 3 project routes, 1 WebSocket route</a:t>
-            </a:r>
-          </a:p>
-          <a:p>
-            <a:pPr algn="l">
-              <a:spcBef>
-                <a:spcPts val="0"/>
-              </a:spcBef>
-              <a:spcAft>
-                <a:spcPts val="0"/>
-              </a:spcAft>
-            </a:pPr>
-            <a:r>
-              <a:rPr sz="1250">
-                <a:solidFill>
-                  <a:srgbClr val="364557"/>
-                </a:solidFill>
-                <a:latin typeface="Segoe UI"/>
-              </a:rPr>
-              <a:t>update_* 52 | load_* 9 | check_* 6</a:t>
-            </a:r>
-          </a:p>
-          <a:p>
-            <a:pPr algn="l">
-              <a:spcBef>
-                <a:spcPts val="0"/>
-              </a:spcBef>
-              <a:spcAft>
-                <a:spcPts val="0"/>
-              </a:spcAft>
-            </a:pPr>
-            <a:r>
-              <a:rPr sz="1250">
-                <a:solidFill>
-                  <a:srgbClr val="364557"/>
-                </a:solidFill>
-                <a:latin typeface="Segoe UI"/>
-              </a:rPr>
-              <a:t>execute_* 4 | save_* 4 | clear_* 4</a:t>
-            </a:r>
-          </a:p>
-          <a:p>
-            <a:pPr algn="l">
-              <a:spcBef>
-                <a:spcPts val="0"/>
-              </a:spcBef>
-              <a:spcAft>
-                <a:spcPts val="0"/>
-              </a:spcAft>
-            </a:pPr>
-            <a:r>
-              <a:rPr sz="1250">
-                <a:solidFill>
-                  <a:srgbClr val="364557"/>
-                </a:solidFill>
-                <a:latin typeface="Segoe UI"/>
-              </a:rPr>
-              <a:t>delete_* 2 | detect_* 1 | open_* 1</a:t>
-            </a:r>
-          </a:p>
-        </p:txBody>
-      </p:sp>
-      <p:sp>
-        <p:nvSpPr>
-          <p:cNvPr id="11" name="CARD_10"/>
+              <a:t>Browser</a:t>
+            </a:r>
+          </a:p>
+          <a:p>
+            <a:pPr algn="ctr">
+              <a:spcBef>
+                <a:spcPts val="0"/>
+              </a:spcBef>
+              <a:spcAft>
+                <a:spcPts val="0"/>
+              </a:spcAft>
+            </a:pPr>
+            <a:r>
+              <a:rPr sz="1150">
+                <a:solidFill>
+                  <a:srgbClr val="364557"/>
+                </a:solidFill>
+                <a:latin typeface="Segoe UI"/>
+              </a:rPr>
+              <a:t>Chat UI, canvas,</a:t>
+            </a:r>
+          </a:p>
+          <a:p>
+            <a:pPr algn="ctr">
+              <a:spcBef>
+                <a:spcPts val="0"/>
+              </a:spcBef>
+              <a:spcAft>
+                <a:spcPts val="0"/>
+              </a:spcAft>
+            </a:pPr>
+            <a:r>
+              <a:rPr sz="1150">
+                <a:solidFill>
+                  <a:srgbClr val="364557"/>
+                </a:solidFill>
+                <a:latin typeface="Segoe UI"/>
+              </a:rPr>
+              <a:t>ACP, Open in...</a:t>
+            </a:r>
+          </a:p>
+        </p:txBody>
+      </p:sp>
+      <p:sp>
+        <p:nvSpPr>
+          <p:cNvPr id="10" name="CARD_9"/>
           <p:cNvSpPr/>
           <p:nvPr/>
         </p:nvSpPr>
         <p:spPr>
           <a:xfrm>
-            <a:off x="8129016" y="1828800"/>
-            <a:ext cx="3648456" cy="3246120"/>
+            <a:off x="2660904" y="1828800"/>
+            <a:ext cx="2121408" cy="1417320"/>
           </a:xfrm>
           <a:prstGeom prst="roundRect">
             <a:avLst/>
           </a:prstGeom>
           <a:solidFill>
-            <a:srgbClr val="FAEDE5"/>
+            <a:srgbClr val="FFFFFF"/>
           </a:solidFill>
           <a:ln w="17780">
             <a:solidFill>
-              <a:srgbClr val="BF6635"/>
+              <a:srgbClr val="C7D4E0"/>
             </a:solidFill>
           </a:ln>
         </p:spPr>
@@ -16855,7 +16510,7 @@
           </a:bodyPr>
           <a:lstStyle/>
           <a:p>
-            <a:pPr algn="l">
+            <a:pPr algn="ctr">
               <a:spcAft>
                 <a:spcPts val="200"/>
               </a:spcAft>
@@ -16867,102 +16522,570 @@
                 </a:solidFill>
                 <a:latin typeface="Segoe UI"/>
               </a:rPr>
-              <a:t>WebSocket client control plane</a:t>
-            </a:r>
-          </a:p>
-          <a:p>
-            <a:pPr algn="l">
-              <a:spcBef>
-                <a:spcPts val="0"/>
-              </a:spcBef>
-              <a:spcAft>
-                <a:spcPts val="0"/>
-              </a:spcAft>
-            </a:pPr>
-            <a:r>
-              <a:rPr sz="1210">
-                <a:solidFill>
-                  <a:srgbClr val="364557"/>
-                </a:solidFill>
-                <a:latin typeface="Segoe UI"/>
-              </a:rPr>
-              <a:t>17 explicit client message types</a:t>
-            </a:r>
-          </a:p>
-          <a:p>
-            <a:pPr algn="l">
-              <a:spcBef>
-                <a:spcPts val="0"/>
-              </a:spcBef>
-              <a:spcAft>
-                <a:spcPts val="0"/>
-              </a:spcAft>
-            </a:pPr>
-            <a:r>
-              <a:rPr sz="1210">
-                <a:solidFill>
-                  <a:srgbClr val="364557"/>
-                </a:solidFill>
-                <a:latin typeface="Segoe UI"/>
-              </a:rPr>
-              <a:t>Context: set/unset canvas, directory, and file context</a:t>
-            </a:r>
-          </a:p>
-          <a:p>
-            <a:pPr algn="l">
-              <a:spcBef>
-                <a:spcPts val="0"/>
-              </a:spcBef>
-              <a:spcAft>
-                <a:spcPts val="0"/>
-              </a:spcAft>
-            </a:pPr>
-            <a:r>
-              <a:rPr sz="1210">
-                <a:solidFill>
-                  <a:srgbClr val="364557"/>
-                </a:solidFill>
-                <a:latin typeface="Segoe UI"/>
-              </a:rPr>
-              <a:t>Runtime: cancel-current, reconnect, clean-history-and-reconnect, cancel-all</a:t>
-            </a:r>
-          </a:p>
-          <a:p>
-            <a:pPr algn="l">
-              <a:spcBef>
-                <a:spcPts val="0"/>
-              </a:spcBef>
-              <a:spcAft>
-                <a:spcPts val="0"/>
-              </a:spcAft>
-            </a:pPr>
-            <a:r>
-              <a:rPr sz="1210">
-                <a:solidFill>
-                  <a:srgbClr val="364557"/>
-                </a:solidFill>
-                <a:latin typeface="Segoe UI"/>
-              </a:rPr>
-              <a:t>Config: set-file-omissions, set-mcps, set-tools, set-agents</a:t>
-            </a:r>
-          </a:p>
-          <a:p>
-            <a:pPr algn="l">
-              <a:spcBef>
-                <a:spcPts val="0"/>
-              </a:spcBef>
-              <a:spcAft>
-                <a:spcPts val="0"/>
-              </a:spcAft>
-            </a:pPr>
-            <a:r>
-              <a:rPr sz="1210">
-                <a:solidFill>
-                  <a:srgbClr val="364557"/>
-                </a:solidFill>
-                <a:latin typeface="Segoe UI"/>
-              </a:rPr>
-              <a:t>Other: save-files-from-db, view-context-dir-in-canvas, internet on/off</a:t>
+              <a:t>Django + Channels</a:t>
+            </a:r>
+          </a:p>
+          <a:p>
+            <a:pPr algn="ctr">
+              <a:spcBef>
+                <a:spcPts val="0"/>
+              </a:spcBef>
+              <a:spcAft>
+                <a:spcPts val="0"/>
+              </a:spcAft>
+            </a:pPr>
+            <a:r>
+              <a:rPr sz="1150">
+                <a:solidFill>
+                  <a:srgbClr val="364557"/>
+                </a:solidFill>
+                <a:latin typeface="Segoe UI"/>
+              </a:rPr>
+              <a:t>views.py, urls.py,</a:t>
+            </a:r>
+          </a:p>
+          <a:p>
+            <a:pPr algn="ctr">
+              <a:spcBef>
+                <a:spcPts val="0"/>
+              </a:spcBef>
+              <a:spcAft>
+                <a:spcPts val="0"/>
+              </a:spcAft>
+            </a:pPr>
+            <a:r>
+              <a:rPr sz="1150">
+                <a:solidFill>
+                  <a:srgbClr val="364557"/>
+                </a:solidFill>
+                <a:latin typeface="Segoe UI"/>
+              </a:rPr>
+              <a:t>AgentConsumer,</a:t>
+            </a:r>
+          </a:p>
+          <a:p>
+            <a:pPr algn="ctr">
+              <a:spcBef>
+                <a:spcPts val="0"/>
+              </a:spcBef>
+              <a:spcAft>
+                <a:spcPts val="0"/>
+              </a:spcAft>
+            </a:pPr>
+            <a:r>
+              <a:rPr sz="1150">
+                <a:solidFill>
+                  <a:srgbClr val="364557"/>
+                </a:solidFill>
+                <a:latin typeface="Segoe UI"/>
+              </a:rPr>
+              <a:t>SessionState</a:t>
+            </a:r>
+          </a:p>
+        </p:txBody>
+      </p:sp>
+      <p:sp>
+        <p:nvSpPr>
+          <p:cNvPr id="11" name="CARD_10"/>
+          <p:cNvSpPr/>
+          <p:nvPr/>
+        </p:nvSpPr>
+        <p:spPr>
+          <a:xfrm>
+            <a:off x="4910328" y="1828800"/>
+            <a:ext cx="2121408" cy="1417320"/>
+          </a:xfrm>
+          <a:prstGeom prst="roundRect">
+            <a:avLst/>
+          </a:prstGeom>
+          <a:solidFill>
+            <a:srgbClr val="FFFFFF"/>
+          </a:solidFill>
+          <a:ln w="17780">
+            <a:solidFill>
+              <a:srgbClr val="C7D4E0"/>
+            </a:solidFill>
+          </a:ln>
+        </p:spPr>
+        <p:style>
+          <a:lnRef idx="1">
+            <a:schemeClr val="accent1"/>
+          </a:lnRef>
+          <a:fillRef idx="3">
+            <a:schemeClr val="accent1"/>
+          </a:fillRef>
+          <a:effectRef idx="2">
+            <a:schemeClr val="accent1"/>
+          </a:effectRef>
+          <a:fontRef idx="minor">
+            <a:schemeClr val="lt1"/>
+          </a:fontRef>
+        </p:style>
+        <p:txBody>
+          <a:bodyPr rtlCol="0" anchor="t" wrap="square" lIns="152400" rIns="152400" tIns="127000" bIns="101600">
+            <a:normAutofit/>
+          </a:bodyPr>
+          <a:lstStyle/>
+          <a:p>
+            <a:pPr algn="ctr">
+              <a:spcAft>
+                <a:spcPts val="200"/>
+              </a:spcAft>
+            </a:pPr>
+            <a:r>
+              <a:rPr sz="1800" b="1">
+                <a:solidFill>
+                  <a:srgbClr val="173B6C"/>
+                </a:solidFill>
+                <a:latin typeface="Segoe UI"/>
+              </a:rPr>
+              <a:t>RAG</a:t>
+            </a:r>
+          </a:p>
+          <a:p>
+            <a:pPr algn="ctr">
+              <a:spcBef>
+                <a:spcPts val="0"/>
+              </a:spcBef>
+              <a:spcAft>
+                <a:spcPts val="0"/>
+              </a:spcAft>
+            </a:pPr>
+            <a:r>
+              <a:rPr sz="1150">
+                <a:solidFill>
+                  <a:srgbClr val="364557"/>
+                </a:solidFill>
+                <a:latin typeface="Segoe UI"/>
+              </a:rPr>
+              <a:t>Loaders, FAISS,</a:t>
+            </a:r>
+          </a:p>
+          <a:p>
+            <a:pPr algn="ctr">
+              <a:spcBef>
+                <a:spcPts val="0"/>
+              </a:spcBef>
+              <a:spcAft>
+                <a:spcPts val="0"/>
+              </a:spcAft>
+            </a:pPr>
+            <a:r>
+              <a:rPr sz="1150">
+                <a:solidFill>
+                  <a:srgbClr val="364557"/>
+                </a:solidFill>
+                <a:latin typeface="Segoe UI"/>
+              </a:rPr>
+              <a:t>BM25, RRF,</a:t>
+            </a:r>
+          </a:p>
+          <a:p>
+            <a:pPr algn="ctr">
+              <a:spcBef>
+                <a:spcPts val="0"/>
+              </a:spcBef>
+              <a:spcAft>
+                <a:spcPts val="0"/>
+              </a:spcAft>
+            </a:pPr>
+            <a:r>
+              <a:rPr sz="1150">
+                <a:solidFill>
+                  <a:srgbClr val="364557"/>
+                </a:solidFill>
+                <a:latin typeface="Segoe UI"/>
+              </a:rPr>
+              <a:t>budgeting</a:t>
+            </a:r>
+          </a:p>
+        </p:txBody>
+      </p:sp>
+      <p:sp>
+        <p:nvSpPr>
+          <p:cNvPr id="12" name="CARD_11"/>
+          <p:cNvSpPr/>
+          <p:nvPr/>
+        </p:nvSpPr>
+        <p:spPr>
+          <a:xfrm>
+            <a:off x="7159752" y="1828800"/>
+            <a:ext cx="2121408" cy="1417320"/>
+          </a:xfrm>
+          <a:prstGeom prst="roundRect">
+            <a:avLst/>
+          </a:prstGeom>
+          <a:solidFill>
+            <a:srgbClr val="FFFFFF"/>
+          </a:solidFill>
+          <a:ln w="17780">
+            <a:solidFill>
+              <a:srgbClr val="C7D4E0"/>
+            </a:solidFill>
+          </a:ln>
+        </p:spPr>
+        <p:style>
+          <a:lnRef idx="1">
+            <a:schemeClr val="accent1"/>
+          </a:lnRef>
+          <a:fillRef idx="3">
+            <a:schemeClr val="accent1"/>
+          </a:fillRef>
+          <a:effectRef idx="2">
+            <a:schemeClr val="accent1"/>
+          </a:effectRef>
+          <a:fontRef idx="minor">
+            <a:schemeClr val="lt1"/>
+          </a:fontRef>
+        </p:style>
+        <p:txBody>
+          <a:bodyPr rtlCol="0" anchor="t" wrap="square" lIns="152400" rIns="152400" tIns="127000" bIns="101600">
+            <a:normAutofit/>
+          </a:bodyPr>
+          <a:lstStyle/>
+          <a:p>
+            <a:pPr algn="ctr">
+              <a:spcAft>
+                <a:spcPts val="200"/>
+              </a:spcAft>
+            </a:pPr>
+            <a:r>
+              <a:rPr sz="1800" b="1">
+                <a:solidFill>
+                  <a:srgbClr val="173B6C"/>
+                </a:solidFill>
+                <a:latin typeface="Segoe UI"/>
+              </a:rPr>
+              <a:t>Unified chat</a:t>
+            </a:r>
+          </a:p>
+          <a:p>
+            <a:pPr algn="ctr">
+              <a:spcBef>
+                <a:spcPts val="0"/>
+              </a:spcBef>
+              <a:spcAft>
+                <a:spcPts val="0"/>
+              </a:spcAft>
+            </a:pPr>
+            <a:r>
+              <a:rPr sz="1150">
+                <a:solidFill>
+                  <a:srgbClr val="364557"/>
+                </a:solidFill>
+                <a:latin typeface="Segoe UI"/>
+              </a:rPr>
+              <a:t>Tool calling,</a:t>
+            </a:r>
+          </a:p>
+          <a:p>
+            <a:pPr algn="ctr">
+              <a:spcBef>
+                <a:spcPts val="0"/>
+              </a:spcBef>
+              <a:spcAft>
+                <a:spcPts val="0"/>
+              </a:spcAft>
+            </a:pPr>
+            <a:r>
+              <a:rPr sz="1150">
+                <a:solidFill>
+                  <a:srgbClr val="364557"/>
+                </a:solidFill>
+                <a:latin typeface="Segoe UI"/>
+              </a:rPr>
+              <a:t>MultiTurnToolAgentExecutor,</a:t>
+            </a:r>
+          </a:p>
+          <a:p>
+            <a:pPr algn="ctr">
+              <a:spcBef>
+                <a:spcPts val="0"/>
+              </a:spcBef>
+              <a:spcAft>
+                <a:spcPts val="0"/>
+              </a:spcAft>
+            </a:pPr>
+            <a:r>
+              <a:rPr sz="1150">
+                <a:solidFill>
+                  <a:srgbClr val="364557"/>
+                </a:solidFill>
+                <a:latin typeface="Segoe UI"/>
+              </a:rPr>
+              <a:t>MCP surface</a:t>
+            </a:r>
+          </a:p>
+        </p:txBody>
+      </p:sp>
+      <p:sp>
+        <p:nvSpPr>
+          <p:cNvPr id="13" name="CARD_12"/>
+          <p:cNvSpPr/>
+          <p:nvPr/>
+        </p:nvSpPr>
+        <p:spPr>
+          <a:xfrm>
+            <a:off x="9409176" y="1828800"/>
+            <a:ext cx="2121408" cy="1417320"/>
+          </a:xfrm>
+          <a:prstGeom prst="roundRect">
+            <a:avLst/>
+          </a:prstGeom>
+          <a:solidFill>
+            <a:srgbClr val="FFFFFF"/>
+          </a:solidFill>
+          <a:ln w="17780">
+            <a:solidFill>
+              <a:srgbClr val="C7D4E0"/>
+            </a:solidFill>
+          </a:ln>
+        </p:spPr>
+        <p:style>
+          <a:lnRef idx="1">
+            <a:schemeClr val="accent1"/>
+          </a:lnRef>
+          <a:fillRef idx="3">
+            <a:schemeClr val="accent1"/>
+          </a:fillRef>
+          <a:effectRef idx="2">
+            <a:schemeClr val="accent1"/>
+          </a:effectRef>
+          <a:fontRef idx="minor">
+            <a:schemeClr val="lt1"/>
+          </a:fontRef>
+        </p:style>
+        <p:txBody>
+          <a:bodyPr rtlCol="0" anchor="t" wrap="square" lIns="152400" rIns="152400" tIns="127000" bIns="101600">
+            <a:normAutofit/>
+          </a:bodyPr>
+          <a:lstStyle/>
+          <a:p>
+            <a:pPr algn="ctr">
+              <a:spcAft>
+                <a:spcPts val="200"/>
+              </a:spcAft>
+            </a:pPr>
+            <a:r>
+              <a:rPr sz="1800" b="1">
+                <a:solidFill>
+                  <a:srgbClr val="173B6C"/>
+                </a:solidFill>
+                <a:latin typeface="Segoe UI"/>
+              </a:rPr>
+              <a:t>Workflow runtime</a:t>
+            </a:r>
+          </a:p>
+          <a:p>
+            <a:pPr algn="ctr">
+              <a:spcBef>
+                <a:spcPts val="0"/>
+              </a:spcBef>
+              <a:spcAft>
+                <a:spcPts val="0"/>
+              </a:spcAft>
+            </a:pPr>
+            <a:r>
+              <a:rPr sz="1150">
+                <a:solidFill>
+                  <a:srgbClr val="364557"/>
+                </a:solidFill>
+                <a:latin typeface="Segoe UI"/>
+              </a:rPr>
+              <a:t>Pools, logs, pids,</a:t>
+            </a:r>
+          </a:p>
+          <a:p>
+            <a:pPr algn="ctr">
+              <a:spcBef>
+                <a:spcPts val="0"/>
+              </a:spcBef>
+              <a:spcAft>
+                <a:spcPts val="0"/>
+              </a:spcAft>
+            </a:pPr>
+            <a:r>
+              <a:rPr sz="1150">
+                <a:solidFill>
+                  <a:srgbClr val="364557"/>
+                </a:solidFill>
+                <a:latin typeface="Segoe UI"/>
+              </a:rPr>
+              <a:t>reanim files,</a:t>
+            </a:r>
+          </a:p>
+          <a:p>
+            <a:pPr algn="ctr">
+              <a:spcBef>
+                <a:spcPts val="0"/>
+              </a:spcBef>
+              <a:spcAft>
+                <a:spcPts val="0"/>
+              </a:spcAft>
+            </a:pPr>
+            <a:r>
+              <a:rPr sz="1150">
+                <a:solidFill>
+                  <a:srgbClr val="364557"/>
+                </a:solidFill>
+                <a:latin typeface="Segoe UI"/>
+              </a:rPr>
+              <a:t>__chat_runs__</a:t>
+            </a:r>
+          </a:p>
+        </p:txBody>
+      </p:sp>
+      <p:sp>
+        <p:nvSpPr>
+          <p:cNvPr id="14" name="CARD_13"/>
+          <p:cNvSpPr/>
+          <p:nvPr/>
+        </p:nvSpPr>
+        <p:spPr>
+          <a:xfrm>
+            <a:off x="411480" y="3611880"/>
+            <a:ext cx="11365992" cy="1783080"/>
+          </a:xfrm>
+          <a:prstGeom prst="roundRect">
+            <a:avLst/>
+          </a:prstGeom>
+          <a:solidFill>
+            <a:srgbClr val="FFFFFF"/>
+          </a:solidFill>
+          <a:ln w="17780">
+            <a:solidFill>
+              <a:srgbClr val="C7D4E0"/>
+            </a:solidFill>
+          </a:ln>
+        </p:spPr>
+        <p:style>
+          <a:lnRef idx="1">
+            <a:schemeClr val="accent1"/>
+          </a:lnRef>
+          <a:fillRef idx="3">
+            <a:schemeClr val="accent1"/>
+          </a:fillRef>
+          <a:effectRef idx="2">
+            <a:schemeClr val="accent1"/>
+          </a:effectRef>
+          <a:fontRef idx="minor">
+            <a:schemeClr val="lt1"/>
+          </a:fontRef>
+        </p:style>
+        <p:txBody>
+          <a:bodyPr rtlCol="0" anchor="t" wrap="square" lIns="152400" rIns="152400" tIns="127000" bIns="101600">
+            <a:normAutofit/>
+          </a:bodyPr>
+          <a:lstStyle/>
+          <a:p>
+            <a:pPr algn="l">
+              <a:spcAft>
+                <a:spcPts val="200"/>
+              </a:spcAft>
+            </a:pPr>
+            <a:r>
+              <a:rPr sz="1850" b="1">
+                <a:solidFill>
+                  <a:srgbClr val="173B6C"/>
+                </a:solidFill>
+                <a:latin typeface="Segoe UI"/>
+              </a:rPr>
+              <a:t>Real request path</a:t>
+            </a:r>
+          </a:p>
+          <a:p>
+            <a:pPr algn="l">
+              <a:spcBef>
+                <a:spcPts val="0"/>
+              </a:spcBef>
+              <a:spcAft>
+                <a:spcPts val="0"/>
+              </a:spcAft>
+            </a:pPr>
+            <a:r>
+              <a:rPr sz="1310">
+                <a:solidFill>
+                  <a:srgbClr val="364557"/>
+                </a:solidFill>
+                <a:latin typeface="Segoe UI"/>
+              </a:rPr>
+              <a:t>1. Authenticated WebSocket request enters AgentConsumer.</a:t>
+            </a:r>
+          </a:p>
+          <a:p>
+            <a:pPr algn="l">
+              <a:spcBef>
+                <a:spcPts val="0"/>
+              </a:spcBef>
+              <a:spcAft>
+                <a:spcPts val="0"/>
+              </a:spcAft>
+            </a:pPr>
+            <a:r>
+              <a:rPr sz="1310">
+                <a:solidFill>
+                  <a:srgbClr val="364557"/>
+                </a:solidFill>
+                <a:latin typeface="Segoe UI"/>
+              </a:rPr>
+              <a:t>2. Prior session context and UI-selected files/directories are restored if present.</a:t>
+            </a:r>
+          </a:p>
+          <a:p>
+            <a:pPr algn="l">
+              <a:spcBef>
+                <a:spcPts val="0"/>
+              </a:spcBef>
+              <a:spcAft>
+                <a:spcPts val="0"/>
+              </a:spcAft>
+            </a:pPr>
+            <a:r>
+              <a:rPr sz="1310">
+                <a:solidFill>
+                  <a:srgbClr val="364557"/>
+                </a:solidFill>
+                <a:latin typeface="Segoe UI"/>
+              </a:rPr>
+              <a:t>3. The system chooses a chain and may run hybrid retrieval before inference.</a:t>
+            </a:r>
+          </a:p>
+          <a:p>
+            <a:pPr algn="l">
+              <a:spcBef>
+                <a:spcPts val="0"/>
+              </a:spcBef>
+              <a:spcAft>
+                <a:spcPts val="0"/>
+              </a:spcAft>
+            </a:pPr>
+            <a:r>
+              <a:rPr sz="1310">
+                <a:solidFill>
+                  <a:srgbClr val="364557"/>
+                </a:solidFill>
+                <a:latin typeface="Segoe UI"/>
+              </a:rPr>
+              <a:t>4. The unified chat path can invoke tools across multiple turns instead of a single pass.</a:t>
+            </a:r>
+          </a:p>
+          <a:p>
+            <a:pPr algn="l">
+              <a:spcBef>
+                <a:spcPts val="0"/>
+              </a:spcBef>
+              <a:spcAft>
+                <a:spcPts val="0"/>
+              </a:spcAft>
+            </a:pPr>
+            <a:r>
+              <a:rPr sz="1310">
+                <a:solidFill>
+                  <a:srgbClr val="364557"/>
+                </a:solidFill>
+                <a:latin typeface="Segoe UI"/>
+              </a:rPr>
+              <a:t>5. Results, status, and persisted side effects return through the same UI surface.</a:t>
             </a:r>
           </a:p>
         </p:txBody>
@@ -17045,7 +17168,7 @@
         <p:spPr>
           <a:xfrm>
             <a:off x="411480" y="292608"/>
-            <a:ext cx="1719072" cy="310896"/>
+            <a:ext cx="1499616" cy="310896"/>
           </a:xfrm>
           <a:prstGeom prst="roundRect">
             <a:avLst/>
@@ -17091,7 +17214,7 @@
                 </a:solidFill>
                 <a:latin typeface="Segoe UI"/>
               </a:rPr>
-              <a:t>MAIN CHAT</a:t>
+              <a:t>RUNTIME</a:t>
             </a:r>
           </a:p>
         </p:txBody>
@@ -17105,7 +17228,7 @@
         <p:spPr>
           <a:xfrm>
             <a:off x="411480" y="713232"/>
-            <a:ext cx="10789920" cy="411480"/>
+            <a:ext cx="10881360" cy="411480"/>
           </a:xfrm>
           <a:prstGeom prst="rect">
             <a:avLst/>
@@ -17118,7 +17241,6 @@
           </a:bodyPr>
           <a:lstStyle/>
           <a:p>
-            <a:pPr algn="l"/>
             <a:r>
               <a:rPr b="1" sz="2550">
                 <a:solidFill>
@@ -17126,7 +17248,7 @@
                 </a:solidFill>
                 <a:latin typeface="Segoe UI"/>
               </a:rPr>
-              <a:t>The multi-turn tool loop added in the April 1 commit</a:t>
+              <a:t>Checked-in defaults and control surface</a:t>
             </a:r>
           </a:p>
         </p:txBody>
@@ -17160,7 +17282,7 @@
                 </a:solidFill>
                 <a:latin typeface="Segoe UI"/>
               </a:rPr>
-              <a:t>The chat backend now acts more like an explicit agent runtime and less like a single opaque prompt-response call.</a:t>
+              <a:t>The repo is local-first in posture, but the checked-in model identifiers still show a mixed cloud/local runtime stance.</a:t>
             </a:r>
           </a:p>
         </p:txBody>
@@ -17237,7 +17359,7 @@
                 </a:solidFill>
                 <a:latin typeface="Segoe UI"/>
               </a:rPr>
-              <a:t>Tlamatini | April 1, 2026 | 29f081e23748</a:t>
+              <a:t>Tlamatini | April 3, 2026 | 4fd33b480086</a:t>
             </a:r>
           </a:p>
         </p:txBody>
@@ -17286,7 +17408,162 @@
         <p:spPr>
           <a:xfrm>
             <a:off x="411480" y="1828800"/>
-            <a:ext cx="2121408" cy="1371600"/>
+            <a:ext cx="3657600" cy="3246120"/>
+          </a:xfrm>
+          <a:prstGeom prst="roundRect">
+            <a:avLst/>
+          </a:prstGeom>
+          <a:solidFill>
+            <a:srgbClr val="E8F0F8"/>
+          </a:solidFill>
+          <a:ln w="17780">
+            <a:solidFill>
+              <a:srgbClr val="173B6C"/>
+            </a:solidFill>
+          </a:ln>
+        </p:spPr>
+        <p:style>
+          <a:lnRef idx="1">
+            <a:schemeClr val="accent1"/>
+          </a:lnRef>
+          <a:fillRef idx="3">
+            <a:schemeClr val="accent1"/>
+          </a:fillRef>
+          <a:effectRef idx="2">
+            <a:schemeClr val="accent1"/>
+          </a:effectRef>
+          <a:fontRef idx="minor">
+            <a:schemeClr val="lt1"/>
+          </a:fontRef>
+        </p:style>
+        <p:txBody>
+          <a:bodyPr rtlCol="0" anchor="t" wrap="square" lIns="152400" rIns="152400" tIns="127000" bIns="101600">
+            <a:normAutofit/>
+          </a:bodyPr>
+          <a:lstStyle/>
+          <a:p>
+            <a:pPr algn="l">
+              <a:spcAft>
+                <a:spcPts val="200"/>
+              </a:spcAft>
+            </a:pPr>
+            <a:r>
+              <a:rPr sz="1800" b="1">
+                <a:solidFill>
+                  <a:srgbClr val="173B6C"/>
+                </a:solidFill>
+                <a:latin typeface="Segoe UI"/>
+              </a:rPr>
+              <a:t>Current model defaults</a:t>
+            </a:r>
+          </a:p>
+          <a:p>
+            <a:pPr algn="l">
+              <a:spcBef>
+                <a:spcPts val="0"/>
+              </a:spcBef>
+              <a:spcAft>
+                <a:spcPts val="0"/>
+              </a:spcAft>
+            </a:pPr>
+            <a:r>
+              <a:rPr sz="1250">
+                <a:solidFill>
+                  <a:srgbClr val="364557"/>
+                </a:solidFill>
+                <a:latin typeface="Segoe UI"/>
+              </a:rPr>
+              <a:t>embeding-model: qwen3-embedding:8b</a:t>
+            </a:r>
+          </a:p>
+          <a:p>
+            <a:pPr algn="l">
+              <a:spcBef>
+                <a:spcPts val="0"/>
+              </a:spcBef>
+              <a:spcAft>
+                <a:spcPts val="0"/>
+              </a:spcAft>
+            </a:pPr>
+            <a:r>
+              <a:rPr sz="1250">
+                <a:solidFill>
+                  <a:srgbClr val="364557"/>
+                </a:solidFill>
+                <a:latin typeface="Segoe UI"/>
+              </a:rPr>
+              <a:t>chained-model: glm-5:cloud</a:t>
+            </a:r>
+          </a:p>
+          <a:p>
+            <a:pPr algn="l">
+              <a:spcBef>
+                <a:spcPts val="0"/>
+              </a:spcBef>
+              <a:spcAft>
+                <a:spcPts val="0"/>
+              </a:spcAft>
+            </a:pPr>
+            <a:r>
+              <a:rPr sz="1250">
+                <a:solidFill>
+                  <a:srgbClr val="364557"/>
+                </a:solidFill>
+                <a:latin typeface="Segoe UI"/>
+              </a:rPr>
+              <a:t>unified_agent_model: glm-5:cloud</a:t>
+            </a:r>
+          </a:p>
+          <a:p>
+            <a:pPr algn="l">
+              <a:spcBef>
+                <a:spcPts val="0"/>
+              </a:spcBef>
+              <a:spcAft>
+                <a:spcPts val="0"/>
+              </a:spcAft>
+            </a:pPr>
+            <a:r>
+              <a:rPr sz="1250">
+                <a:solidFill>
+                  <a:srgbClr val="364557"/>
+                </a:solidFill>
+                <a:latin typeface="Segoe UI"/>
+              </a:rPr>
+              <a:t>image_interpreter_model: qwen3.5:cloud</a:t>
+            </a:r>
+          </a:p>
+          <a:p>
+            <a:pPr algn="l">
+              <a:spcBef>
+                <a:spcPts val="0"/>
+              </a:spcBef>
+              <a:spcAft>
+                <a:spcPts val="0"/>
+              </a:spcAft>
+            </a:pPr>
+            <a:r>
+              <a:rPr sz="1250">
+                <a:solidFill>
+                  <a:srgbClr val="364557"/>
+                </a:solidFill>
+                <a:latin typeface="Segoe UI"/>
+              </a:rPr>
+              <a:t>internet/web/mcp search: glm-5:cloud</a:t>
+            </a:r>
+          </a:p>
+        </p:txBody>
+      </p:sp>
+      <p:sp>
+        <p:nvSpPr>
+          <p:cNvPr id="10" name="CARD_9"/>
+          <p:cNvSpPr/>
+          <p:nvPr/>
+        </p:nvSpPr>
+        <p:spPr>
+          <a:xfrm>
+            <a:off x="4270248" y="1828800"/>
+            <a:ext cx="3657600" cy="3246120"/>
           </a:xfrm>
           <a:prstGeom prst="roundRect">
             <a:avLst/>
@@ -17320,7 +17597,7 @@
           </a:bodyPr>
           <a:lstStyle/>
           <a:p>
-            <a:pPr algn="ctr">
+            <a:pPr algn="l">
               <a:spcAft>
                 <a:spcPts val="200"/>
               </a:spcAft>
@@ -17332,162 +17609,83 @@
                 </a:solidFill>
                 <a:latin typeface="Segoe UI"/>
               </a:rPr>
-              <a:t>1 Build</a:t>
-            </a:r>
-          </a:p>
-          <a:p>
-            <a:pPr algn="ctr">
-              <a:spcBef>
-                <a:spcPts val="0"/>
-              </a:spcBef>
-              <a:spcAft>
-                <a:spcPts val="0"/>
-              </a:spcAft>
-            </a:pPr>
-            <a:r>
-              <a:rPr sz="1120">
-                <a:solidFill>
-                  <a:srgbClr val="364557"/>
-                </a:solidFill>
-                <a:latin typeface="Segoe UI"/>
-              </a:rPr>
-              <a:t>Enabled tools come</a:t>
-            </a:r>
-          </a:p>
-          <a:p>
-            <a:pPr algn="ctr">
-              <a:spcBef>
-                <a:spcPts val="0"/>
-              </a:spcBef>
-              <a:spcAft>
-                <a:spcPts val="0"/>
-              </a:spcAft>
-            </a:pPr>
-            <a:r>
-              <a:rPr sz="1120">
-                <a:solidFill>
-                  <a:srgbClr val="364557"/>
-                </a:solidFill>
-                <a:latin typeface="Segoe UI"/>
-              </a:rPr>
-              <a:t>from get_mcp_tools().</a:t>
-            </a:r>
-          </a:p>
-        </p:txBody>
-      </p:sp>
-      <p:sp>
-        <p:nvSpPr>
-          <p:cNvPr id="10" name="CARD_9"/>
-          <p:cNvSpPr/>
-          <p:nvPr/>
-        </p:nvSpPr>
-        <p:spPr>
-          <a:xfrm>
-            <a:off x="2660904" y="1828800"/>
-            <a:ext cx="2121408" cy="1371600"/>
-          </a:xfrm>
-          <a:prstGeom prst="roundRect">
-            <a:avLst/>
-          </a:prstGeom>
-          <a:solidFill>
-            <a:srgbClr val="FFFFFF"/>
-          </a:solidFill>
-          <a:ln w="17780">
-            <a:solidFill>
-              <a:srgbClr val="C7D4E0"/>
-            </a:solidFill>
-          </a:ln>
-        </p:spPr>
-        <p:style>
-          <a:lnRef idx="1">
-            <a:schemeClr val="accent1"/>
-          </a:lnRef>
-          <a:fillRef idx="3">
-            <a:schemeClr val="accent1"/>
-          </a:fillRef>
-          <a:effectRef idx="2">
-            <a:schemeClr val="accent1"/>
-          </a:effectRef>
-          <a:fontRef idx="minor">
-            <a:schemeClr val="lt1"/>
-          </a:fontRef>
-        </p:style>
-        <p:txBody>
-          <a:bodyPr rtlCol="0" anchor="t" wrap="square" lIns="152400" rIns="152400" tIns="127000" bIns="101600">
-            <a:normAutofit/>
-          </a:bodyPr>
-          <a:lstStyle/>
-          <a:p>
-            <a:pPr algn="ctr">
-              <a:spcAft>
-                <a:spcPts val="200"/>
-              </a:spcAft>
-            </a:pPr>
-            <a:r>
-              <a:rPr sz="1800" b="1">
-                <a:solidFill>
-                  <a:srgbClr val="173B6C"/>
-                </a:solidFill>
-                <a:latin typeface="Segoe UI"/>
-              </a:rPr>
-              <a:t>2 Bind</a:t>
-            </a:r>
-          </a:p>
-          <a:p>
-            <a:pPr algn="ctr">
-              <a:spcBef>
-                <a:spcPts val="0"/>
-              </a:spcBef>
-              <a:spcAft>
-                <a:spcPts val="0"/>
-              </a:spcAft>
-            </a:pPr>
-            <a:r>
-              <a:rPr sz="1120">
-                <a:solidFill>
-                  <a:srgbClr val="364557"/>
-                </a:solidFill>
-                <a:latin typeface="Segoe UI"/>
-              </a:rPr>
-              <a:t>The configured</a:t>
-            </a:r>
-          </a:p>
-          <a:p>
-            <a:pPr algn="ctr">
-              <a:spcBef>
-                <a:spcPts val="0"/>
-              </a:spcBef>
-              <a:spcAft>
-                <a:spcPts val="0"/>
-              </a:spcAft>
-            </a:pPr>
-            <a:r>
-              <a:rPr sz="1120">
-                <a:solidFill>
-                  <a:srgbClr val="364557"/>
-                </a:solidFill>
-                <a:latin typeface="Segoe UI"/>
-              </a:rPr>
-              <a:t>chat model is bound</a:t>
-            </a:r>
-          </a:p>
-          <a:p>
-            <a:pPr algn="ctr">
-              <a:spcBef>
-                <a:spcPts val="0"/>
-              </a:spcBef>
-              <a:spcAft>
-                <a:spcPts val="0"/>
-              </a:spcAft>
-            </a:pPr>
-            <a:r>
-              <a:rPr sz="1120">
-                <a:solidFill>
-                  <a:srgbClr val="364557"/>
-                </a:solidFill>
-                <a:latin typeface="Segoe UI"/>
-              </a:rPr>
-              <a:t>to the tool surface.</a:t>
+              <a:t>HTTP and route families</a:t>
+            </a:r>
+          </a:p>
+          <a:p>
+            <a:pPr algn="l">
+              <a:spcBef>
+                <a:spcPts val="0"/>
+              </a:spcBef>
+              <a:spcAft>
+                <a:spcPts val="0"/>
+              </a:spcAft>
+            </a:pPr>
+            <a:r>
+              <a:rPr sz="1250">
+                <a:solidFill>
+                  <a:srgbClr val="364557"/>
+                </a:solidFill>
+                <a:latin typeface="Segoe UI"/>
+              </a:rPr>
+              <a:t>102 app routes, 3 project routes, 1 WebSocket route</a:t>
+            </a:r>
+          </a:p>
+          <a:p>
+            <a:pPr algn="l">
+              <a:spcBef>
+                <a:spcPts val="0"/>
+              </a:spcBef>
+              <a:spcAft>
+                <a:spcPts val="0"/>
+              </a:spcAft>
+            </a:pPr>
+            <a:r>
+              <a:rPr sz="1250">
+                <a:solidFill>
+                  <a:srgbClr val="364557"/>
+                </a:solidFill>
+                <a:latin typeface="Segoe UI"/>
+              </a:rPr>
+              <a:t>update_* 52 | load_* 10 | check_* 6</a:t>
+            </a:r>
+          </a:p>
+          <a:p>
+            <a:pPr algn="l">
+              <a:spcBef>
+                <a:spcPts val="0"/>
+              </a:spcBef>
+              <a:spcAft>
+                <a:spcPts val="0"/>
+              </a:spcAft>
+            </a:pPr>
+            <a:r>
+              <a:rPr sz="1250">
+                <a:solidFill>
+                  <a:srgbClr val="364557"/>
+                </a:solidFill>
+                <a:latin typeface="Segoe UI"/>
+              </a:rPr>
+              <a:t>execute_* 4 | save_* 4 | clear_* 4</a:t>
+            </a:r>
+          </a:p>
+          <a:p>
+            <a:pPr algn="l">
+              <a:spcBef>
+                <a:spcPts val="0"/>
+              </a:spcBef>
+              <a:spcAft>
+                <a:spcPts val="0"/>
+              </a:spcAft>
+            </a:pPr>
+            <a:r>
+              <a:rPr sz="1250">
+                <a:solidFill>
+                  <a:srgbClr val="364557"/>
+                </a:solidFill>
+                <a:latin typeface="Segoe UI"/>
+              </a:rPr>
+              <a:t>delete_* 2 | detect_* 1 | open_* 1</a:t>
             </a:r>
           </a:p>
         </p:txBody>
@@ -17500,476 +17698,8 @@
         </p:nvSpPr>
         <p:spPr>
           <a:xfrm>
-            <a:off x="4910328" y="1828800"/>
-            <a:ext cx="2121408" cy="1371600"/>
-          </a:xfrm>
-          <a:prstGeom prst="roundRect">
-            <a:avLst/>
-          </a:prstGeom>
-          <a:solidFill>
-            <a:srgbClr val="FFFFFF"/>
-          </a:solidFill>
-          <a:ln w="17780">
-            <a:solidFill>
-              <a:srgbClr val="C7D4E0"/>
-            </a:solidFill>
-          </a:ln>
-        </p:spPr>
-        <p:style>
-          <a:lnRef idx="1">
-            <a:schemeClr val="accent1"/>
-          </a:lnRef>
-          <a:fillRef idx="3">
-            <a:schemeClr val="accent1"/>
-          </a:fillRef>
-          <a:effectRef idx="2">
-            <a:schemeClr val="accent1"/>
-          </a:effectRef>
-          <a:fontRef idx="minor">
-            <a:schemeClr val="lt1"/>
-          </a:fontRef>
-        </p:style>
-        <p:txBody>
-          <a:bodyPr rtlCol="0" anchor="t" wrap="square" lIns="152400" rIns="152400" tIns="127000" bIns="101600">
-            <a:normAutofit/>
-          </a:bodyPr>
-          <a:lstStyle/>
-          <a:p>
-            <a:pPr algn="ctr">
-              <a:spcAft>
-                <a:spcPts val="200"/>
-              </a:spcAft>
-            </a:pPr>
-            <a:r>
-              <a:rPr sz="1800" b="1">
-                <a:solidFill>
-                  <a:srgbClr val="173B6C"/>
-                </a:solidFill>
-                <a:latin typeface="Segoe UI"/>
-              </a:rPr>
-              <a:t>3 Invoke</a:t>
-            </a:r>
-          </a:p>
-          <a:p>
-            <a:pPr algn="ctr">
-              <a:spcBef>
-                <a:spcPts val="0"/>
-              </a:spcBef>
-              <a:spcAft>
-                <a:spcPts val="0"/>
-              </a:spcAft>
-            </a:pPr>
-            <a:r>
-              <a:rPr sz="1120">
-                <a:solidFill>
-                  <a:srgbClr val="364557"/>
-                </a:solidFill>
-                <a:latin typeface="Segoe UI"/>
-              </a:rPr>
-              <a:t>The model sees the</a:t>
-            </a:r>
-          </a:p>
-          <a:p>
-            <a:pPr algn="ctr">
-              <a:spcBef>
-                <a:spcPts val="0"/>
-              </a:spcBef>
-              <a:spcAft>
-                <a:spcPts val="0"/>
-              </a:spcAft>
-            </a:pPr>
-            <a:r>
-              <a:rPr sz="1120">
-                <a:solidFill>
-                  <a:srgbClr val="364557"/>
-                </a:solidFill>
-                <a:latin typeface="Segoe UI"/>
-              </a:rPr>
-              <a:t>user request plus the</a:t>
-            </a:r>
-          </a:p>
-          <a:p>
-            <a:pPr algn="ctr">
-              <a:spcBef>
-                <a:spcPts val="0"/>
-              </a:spcBef>
-              <a:spcAft>
-                <a:spcPts val="0"/>
-              </a:spcAft>
-            </a:pPr>
-            <a:r>
-              <a:rPr sz="1120">
-                <a:solidFill>
-                  <a:srgbClr val="364557"/>
-                </a:solidFill>
-                <a:latin typeface="Segoe UI"/>
-              </a:rPr>
-              <a:t>system prompt.</a:t>
-            </a:r>
-          </a:p>
-        </p:txBody>
-      </p:sp>
-      <p:sp>
-        <p:nvSpPr>
-          <p:cNvPr id="12" name="CARD_11"/>
-          <p:cNvSpPr/>
-          <p:nvPr/>
-        </p:nvSpPr>
-        <p:spPr>
-          <a:xfrm>
-            <a:off x="7159752" y="1828800"/>
-            <a:ext cx="2121408" cy="1371600"/>
-          </a:xfrm>
-          <a:prstGeom prst="roundRect">
-            <a:avLst/>
-          </a:prstGeom>
-          <a:solidFill>
-            <a:srgbClr val="FFFFFF"/>
-          </a:solidFill>
-          <a:ln w="17780">
-            <a:solidFill>
-              <a:srgbClr val="C7D4E0"/>
-            </a:solidFill>
-          </a:ln>
-        </p:spPr>
-        <p:style>
-          <a:lnRef idx="1">
-            <a:schemeClr val="accent1"/>
-          </a:lnRef>
-          <a:fillRef idx="3">
-            <a:schemeClr val="accent1"/>
-          </a:fillRef>
-          <a:effectRef idx="2">
-            <a:schemeClr val="accent1"/>
-          </a:effectRef>
-          <a:fontRef idx="minor">
-            <a:schemeClr val="lt1"/>
-          </a:fontRef>
-        </p:style>
-        <p:txBody>
-          <a:bodyPr rtlCol="0" anchor="t" wrap="square" lIns="152400" rIns="152400" tIns="127000" bIns="101600">
-            <a:normAutofit/>
-          </a:bodyPr>
-          <a:lstStyle/>
-          <a:p>
-            <a:pPr algn="ctr">
-              <a:spcAft>
-                <a:spcPts val="200"/>
-              </a:spcAft>
-            </a:pPr>
-            <a:r>
-              <a:rPr sz="1800" b="1">
-                <a:solidFill>
-                  <a:srgbClr val="173B6C"/>
-                </a:solidFill>
-                <a:latin typeface="Segoe UI"/>
-              </a:rPr>
-              <a:t>4 Execute</a:t>
-            </a:r>
-          </a:p>
-          <a:p>
-            <a:pPr algn="ctr">
-              <a:spcBef>
-                <a:spcPts val="0"/>
-              </a:spcBef>
-              <a:spcAft>
-                <a:spcPts val="0"/>
-              </a:spcAft>
-            </a:pPr>
-            <a:r>
-              <a:rPr sz="1120">
-                <a:solidFill>
-                  <a:srgbClr val="364557"/>
-                </a:solidFill>
-                <a:latin typeface="Segoe UI"/>
-              </a:rPr>
-              <a:t>tool_calls are run</a:t>
-            </a:r>
-          </a:p>
-          <a:p>
-            <a:pPr algn="ctr">
-              <a:spcBef>
-                <a:spcPts val="0"/>
-              </a:spcBef>
-              <a:spcAft>
-                <a:spcPts val="0"/>
-              </a:spcAft>
-            </a:pPr>
-            <a:r>
-              <a:rPr sz="1120">
-                <a:solidFill>
-                  <a:srgbClr val="364557"/>
-                </a:solidFill>
-                <a:latin typeface="Segoe UI"/>
-              </a:rPr>
-              <a:t>in-process and appended</a:t>
-            </a:r>
-          </a:p>
-          <a:p>
-            <a:pPr algn="ctr">
-              <a:spcBef>
-                <a:spcPts val="0"/>
-              </a:spcBef>
-              <a:spcAft>
-                <a:spcPts val="0"/>
-              </a:spcAft>
-            </a:pPr>
-            <a:r>
-              <a:rPr sz="1120">
-                <a:solidFill>
-                  <a:srgbClr val="364557"/>
-                </a:solidFill>
-                <a:latin typeface="Segoe UI"/>
-              </a:rPr>
-              <a:t>as ToolMessage results.</a:t>
-            </a:r>
-          </a:p>
-        </p:txBody>
-      </p:sp>
-      <p:sp>
-        <p:nvSpPr>
-          <p:cNvPr id="13" name="CARD_12"/>
-          <p:cNvSpPr/>
-          <p:nvPr/>
-        </p:nvSpPr>
-        <p:spPr>
-          <a:xfrm>
-            <a:off x="9409176" y="1828800"/>
-            <a:ext cx="2121408" cy="1371600"/>
-          </a:xfrm>
-          <a:prstGeom prst="roundRect">
-            <a:avLst/>
-          </a:prstGeom>
-          <a:solidFill>
-            <a:srgbClr val="FFFFFF"/>
-          </a:solidFill>
-          <a:ln w="17780">
-            <a:solidFill>
-              <a:srgbClr val="C7D4E0"/>
-            </a:solidFill>
-          </a:ln>
-        </p:spPr>
-        <p:style>
-          <a:lnRef idx="1">
-            <a:schemeClr val="accent1"/>
-          </a:lnRef>
-          <a:fillRef idx="3">
-            <a:schemeClr val="accent1"/>
-          </a:fillRef>
-          <a:effectRef idx="2">
-            <a:schemeClr val="accent1"/>
-          </a:effectRef>
-          <a:fontRef idx="minor">
-            <a:schemeClr val="lt1"/>
-          </a:fontRef>
-        </p:style>
-        <p:txBody>
-          <a:bodyPr rtlCol="0" anchor="t" wrap="square" lIns="152400" rIns="152400" tIns="127000" bIns="101600">
-            <a:normAutofit/>
-          </a:bodyPr>
-          <a:lstStyle/>
-          <a:p>
-            <a:pPr algn="ctr">
-              <a:spcAft>
-                <a:spcPts val="200"/>
-              </a:spcAft>
-            </a:pPr>
-            <a:r>
-              <a:rPr sz="1800" b="1">
-                <a:solidFill>
-                  <a:srgbClr val="173B6C"/>
-                </a:solidFill>
-                <a:latin typeface="Segoe UI"/>
-              </a:rPr>
-              <a:t>5 Finish</a:t>
-            </a:r>
-          </a:p>
-          <a:p>
-            <a:pPr algn="ctr">
-              <a:spcBef>
-                <a:spcPts val="0"/>
-              </a:spcBef>
-              <a:spcAft>
-                <a:spcPts val="0"/>
-              </a:spcAft>
-            </a:pPr>
-            <a:r>
-              <a:rPr sz="1120">
-                <a:solidFill>
-                  <a:srgbClr val="364557"/>
-                </a:solidFill>
-                <a:latin typeface="Segoe UI"/>
-              </a:rPr>
-              <a:t>The loop stops at</a:t>
-            </a:r>
-          </a:p>
-          <a:p>
-            <a:pPr algn="ctr">
-              <a:spcBef>
-                <a:spcPts val="0"/>
-              </a:spcBef>
-              <a:spcAft>
-                <a:spcPts val="0"/>
-              </a:spcAft>
-            </a:pPr>
-            <a:r>
-              <a:rPr sz="1120">
-                <a:solidFill>
-                  <a:srgbClr val="364557"/>
-                </a:solidFill>
-                <a:latin typeface="Segoe UI"/>
-              </a:rPr>
-              <a:t>a final answer or the</a:t>
-            </a:r>
-          </a:p>
-          <a:p>
-            <a:pPr algn="ctr">
-              <a:spcBef>
-                <a:spcPts val="0"/>
-              </a:spcBef>
-              <a:spcAft>
-                <a:spcPts val="0"/>
-              </a:spcAft>
-            </a:pPr>
-            <a:r>
-              <a:rPr sz="1120">
-                <a:solidFill>
-                  <a:srgbClr val="364557"/>
-                </a:solidFill>
-                <a:latin typeface="Segoe UI"/>
-              </a:rPr>
-              <a:t>iteration cap.</a:t>
-            </a:r>
-          </a:p>
-        </p:txBody>
-      </p:sp>
-      <p:sp>
-        <p:nvSpPr>
-          <p:cNvPr id="14" name="CARD_13"/>
-          <p:cNvSpPr/>
-          <p:nvPr/>
-        </p:nvSpPr>
-        <p:spPr>
-          <a:xfrm>
-            <a:off x="411480" y="3611880"/>
-            <a:ext cx="5559552" cy="1645920"/>
-          </a:xfrm>
-          <a:prstGeom prst="roundRect">
-            <a:avLst/>
-          </a:prstGeom>
-          <a:solidFill>
-            <a:srgbClr val="E8F0F8"/>
-          </a:solidFill>
-          <a:ln w="17780">
-            <a:solidFill>
-              <a:srgbClr val="173B6C"/>
-            </a:solidFill>
-          </a:ln>
-        </p:spPr>
-        <p:style>
-          <a:lnRef idx="1">
-            <a:schemeClr val="accent1"/>
-          </a:lnRef>
-          <a:fillRef idx="3">
-            <a:schemeClr val="accent1"/>
-          </a:fillRef>
-          <a:effectRef idx="2">
-            <a:schemeClr val="accent1"/>
-          </a:effectRef>
-          <a:fontRef idx="minor">
-            <a:schemeClr val="lt1"/>
-          </a:fontRef>
-        </p:style>
-        <p:txBody>
-          <a:bodyPr rtlCol="0" anchor="t" wrap="square" lIns="152400" rIns="152400" tIns="127000" bIns="101600">
-            <a:normAutofit/>
-          </a:bodyPr>
-          <a:lstStyle/>
-          <a:p>
-            <a:pPr algn="l">
-              <a:spcAft>
-                <a:spcPts val="200"/>
-              </a:spcAft>
-            </a:pPr>
-            <a:r>
-              <a:rPr sz="1800" b="1">
-                <a:solidFill>
-                  <a:srgbClr val="173B6C"/>
-                </a:solidFill>
-                <a:latin typeface="Segoe UI"/>
-              </a:rPr>
-              <a:t>Current code details</a:t>
-            </a:r>
-          </a:p>
-          <a:p>
-            <a:pPr algn="l">
-              <a:spcBef>
-                <a:spcPts val="0"/>
-              </a:spcBef>
-              <a:spcAft>
-                <a:spcPts val="0"/>
-              </a:spcAft>
-            </a:pPr>
-            <a:r>
-              <a:rPr sz="1250">
-                <a:solidFill>
-                  <a:srgbClr val="364557"/>
-                </a:solidFill>
-                <a:latin typeface="Segoe UI"/>
-              </a:rPr>
-              <a:t>create_unified_agent() now builds MultiTurnToolAgentExecutor.</a:t>
-            </a:r>
-          </a:p>
-          <a:p>
-            <a:pPr algn="l">
-              <a:spcBef>
-                <a:spcPts val="0"/>
-              </a:spcBef>
-              <a:spcAft>
-                <a:spcPts val="0"/>
-              </a:spcAft>
-            </a:pPr>
-            <a:r>
-              <a:rPr sz="1250">
-                <a:solidFill>
-                  <a:srgbClr val="364557"/>
-                </a:solidFill>
-                <a:latin typeface="Segoe UI"/>
-              </a:rPr>
-              <a:t>The default cap is 20 turns unless unified_agent_max_iterations is configured.</a:t>
-            </a:r>
-          </a:p>
-          <a:p>
-            <a:pPr algn="l">
-              <a:spcBef>
-                <a:spcPts val="0"/>
-              </a:spcBef>
-              <a:spcAft>
-                <a:spcPts val="0"/>
-              </a:spcAft>
-            </a:pPr>
-            <a:r>
-              <a:rPr sz="1250">
-                <a:solidFill>
-                  <a:srgbClr val="364557"/>
-                </a:solidFill>
-                <a:latin typeface="Segoe UI"/>
-              </a:rPr>
-              <a:t>The prompt contract explicitly tells the model to poll wrapped runtime state by run_id instead of inventing success.</a:t>
-            </a:r>
-          </a:p>
-        </p:txBody>
-      </p:sp>
-      <p:sp>
-        <p:nvSpPr>
-          <p:cNvPr id="15" name="CARD_14"/>
-          <p:cNvSpPr/>
-          <p:nvPr/>
-        </p:nvSpPr>
-        <p:spPr>
-          <a:xfrm>
-            <a:off x="6217920" y="3611880"/>
-            <a:ext cx="5559552" cy="1645920"/>
+            <a:off x="8129016" y="1828800"/>
+            <a:ext cx="3648456" cy="3246120"/>
           </a:xfrm>
           <a:prstGeom prst="roundRect">
             <a:avLst/>
@@ -18015,26 +17745,102 @@
                 </a:solidFill>
                 <a:latin typeface="Segoe UI"/>
               </a:rPr>
-              <a:t>Why this matters</a:t>
-            </a:r>
-          </a:p>
-          <a:p>
-            <a:pPr algn="l">
-              <a:spcBef>
-                <a:spcPts val="0"/>
-              </a:spcBef>
-              <a:spcAft>
-                <a:spcPts val="0"/>
-              </a:spcAft>
-            </a:pPr>
-            <a:r>
-              <a:rPr sz="1250">
-                <a:solidFill>
-                  <a:srgbClr val="364557"/>
-                </a:solidFill>
-                <a:latin typeface="Segoe UI"/>
-              </a:rPr>
-              <a:t>The main chat can now perform longer tool-mediated work, including launching wrapped workflow-agent runtimes and revisiting them through follow-up status/log/stop tools inside the same conversation.</a:t>
+              <a:t>WebSocket client control plane</a:t>
+            </a:r>
+          </a:p>
+          <a:p>
+            <a:pPr algn="l">
+              <a:spcBef>
+                <a:spcPts val="0"/>
+              </a:spcBef>
+              <a:spcAft>
+                <a:spcPts val="0"/>
+              </a:spcAft>
+            </a:pPr>
+            <a:r>
+              <a:rPr sz="1205">
+                <a:solidFill>
+                  <a:srgbClr val="364557"/>
+                </a:solidFill>
+                <a:latin typeface="Segoe UI"/>
+              </a:rPr>
+              <a:t>17 explicit client message types</a:t>
+            </a:r>
+          </a:p>
+          <a:p>
+            <a:pPr algn="l">
+              <a:spcBef>
+                <a:spcPts val="0"/>
+              </a:spcBef>
+              <a:spcAft>
+                <a:spcPts val="0"/>
+              </a:spcAft>
+            </a:pPr>
+            <a:r>
+              <a:rPr sz="1205">
+                <a:solidFill>
+                  <a:srgbClr val="364557"/>
+                </a:solidFill>
+                <a:latin typeface="Segoe UI"/>
+              </a:rPr>
+              <a:t>Context: set/unset canvas, directory, and file context</a:t>
+            </a:r>
+          </a:p>
+          <a:p>
+            <a:pPr algn="l">
+              <a:spcBef>
+                <a:spcPts val="0"/>
+              </a:spcBef>
+              <a:spcAft>
+                <a:spcPts val="0"/>
+              </a:spcAft>
+            </a:pPr>
+            <a:r>
+              <a:rPr sz="1205">
+                <a:solidFill>
+                  <a:srgbClr val="364557"/>
+                </a:solidFill>
+                <a:latin typeface="Segoe UI"/>
+              </a:rPr>
+              <a:t>Runtime: cancel-current, reconnect, clean-history-and-reconnect, cancel-all</a:t>
+            </a:r>
+          </a:p>
+          <a:p>
+            <a:pPr algn="l">
+              <a:spcBef>
+                <a:spcPts val="0"/>
+              </a:spcBef>
+              <a:spcAft>
+                <a:spcPts val="0"/>
+              </a:spcAft>
+            </a:pPr>
+            <a:r>
+              <a:rPr sz="1205">
+                <a:solidFill>
+                  <a:srgbClr val="364557"/>
+                </a:solidFill>
+                <a:latin typeface="Segoe UI"/>
+              </a:rPr>
+              <a:t>Config: set-file-omissions, set-mcps, set-tools, set-agents</a:t>
+            </a:r>
+          </a:p>
+          <a:p>
+            <a:pPr algn="l">
+              <a:spcBef>
+                <a:spcPts val="0"/>
+              </a:spcBef>
+              <a:spcAft>
+                <a:spcPts val="0"/>
+              </a:spcAft>
+            </a:pPr>
+            <a:r>
+              <a:rPr sz="1205">
+                <a:solidFill>
+                  <a:srgbClr val="364557"/>
+                </a:solidFill>
+                <a:latin typeface="Segoe UI"/>
+              </a:rPr>
+              <a:t>Other: save-files-from-db, view-context-dir-in-canvas, internet on/off</a:t>
             </a:r>
           </a:p>
         </p:txBody>
@@ -18117,7 +17923,7 @@
         <p:spPr>
           <a:xfrm>
             <a:off x="411480" y="292608"/>
-            <a:ext cx="2377439" cy="310896"/>
+            <a:ext cx="1719072" cy="310896"/>
           </a:xfrm>
           <a:prstGeom prst="roundRect">
             <a:avLst/>
@@ -18163,7 +17969,7 @@
                 </a:solidFill>
                 <a:latin typeface="Segoe UI"/>
               </a:rPr>
-              <a:t>WRAPPED RUNTIME</a:t>
+              <a:t>MAIN CHAT</a:t>
             </a:r>
           </a:p>
         </p:txBody>
@@ -18177,7 +17983,7 @@
         <p:spPr>
           <a:xfrm>
             <a:off x="411480" y="713232"/>
-            <a:ext cx="10789920" cy="411480"/>
+            <a:ext cx="10881360" cy="411480"/>
           </a:xfrm>
           <a:prstGeom prst="rect">
             <a:avLst/>
@@ -18190,7 +17996,6 @@
           </a:bodyPr>
           <a:lstStyle/>
           <a:p>
-            <a:pPr algn="l"/>
             <a:r>
               <a:rPr b="1" sz="2550">
                 <a:solidFill>
@@ -18198,7 +18003,7 @@
                 </a:solidFill>
                 <a:latin typeface="Segoe UI"/>
               </a:rPr>
-              <a:t>How chat launches isolated workflow-agent copies</a:t>
+              <a:t>The April 1 multi-turn runtime layer still defines the chat surface</a:t>
             </a:r>
           </a:p>
         </p:txBody>
@@ -18232,7 +18037,7 @@
                 </a:solidFill>
                 <a:latin typeface="Segoe UI"/>
               </a:rPr>
-              <a:t>The new runtime layer lets the chat surface launch selected agent templates without mutating the templates in place.</a:t>
+              <a:t>The recent April 2-3 changes sit on top of the April 1 runtime layer rather than replacing it.</a:t>
             </a:r>
           </a:p>
         </p:txBody>
@@ -18309,7 +18114,7 @@
                 </a:solidFill>
                 <a:latin typeface="Segoe UI"/>
               </a:rPr>
-              <a:t>Tlamatini | April 1, 2026 | 29f081e23748</a:t>
+              <a:t>Tlamatini | April 3, 2026 | 4fd33b480086</a:t>
             </a:r>
           </a:p>
         </p:txBody>
@@ -18404,7 +18209,7 @@
                 </a:solidFill>
                 <a:latin typeface="Segoe UI"/>
               </a:rPr>
-              <a:t>Launcher call</a:t>
+              <a:t>1 Build</a:t>
             </a:r>
           </a:p>
           <a:p>
@@ -18417,13 +18222,13 @@
               </a:spcAft>
             </a:pPr>
             <a:r>
-              <a:rPr sz="1110">
-                <a:solidFill>
-                  <a:srgbClr val="364557"/>
-                </a:solidFill>
-                <a:latin typeface="Segoe UI"/>
-              </a:rPr>
-              <a:t>User request reaches a</a:t>
+              <a:rPr sz="1120">
+                <a:solidFill>
+                  <a:srgbClr val="364557"/>
+                </a:solidFill>
+                <a:latin typeface="Segoe UI"/>
+              </a:rPr>
+              <a:t>Enabled tools come</a:t>
             </a:r>
           </a:p>
           <a:p>
@@ -18436,13 +18241,13 @@
               </a:spcAft>
             </a:pPr>
             <a:r>
-              <a:rPr sz="1110">
-                <a:solidFill>
-                  <a:srgbClr val="364557"/>
-                </a:solidFill>
-                <a:latin typeface="Segoe UI"/>
-              </a:rPr>
-              <a:t>chat_agent_* tool.</a:t>
+              <a:rPr sz="1120">
+                <a:solidFill>
+                  <a:srgbClr val="364557"/>
+                </a:solidFill>
+                <a:latin typeface="Segoe UI"/>
+              </a:rPr>
+              <a:t>from get_mcp_tools().</a:t>
             </a:r>
           </a:p>
         </p:txBody>
@@ -18502,7 +18307,7 @@
                 </a:solidFill>
                 <a:latin typeface="Segoe UI"/>
               </a:rPr>
-              <a:t>Copy</a:t>
+              <a:t>2 Bind</a:t>
             </a:r>
           </a:p>
           <a:p>
@@ -18515,13 +18320,13 @@
               </a:spcAft>
             </a:pPr>
             <a:r>
-              <a:rPr sz="1110">
-                <a:solidFill>
-                  <a:srgbClr val="364557"/>
-                </a:solidFill>
-                <a:latin typeface="Segoe UI"/>
-              </a:rPr>
-              <a:t>Template agent is copied</a:t>
+              <a:rPr sz="1120">
+                <a:solidFill>
+                  <a:srgbClr val="364557"/>
+                </a:solidFill>
+                <a:latin typeface="Segoe UI"/>
+              </a:rPr>
+              <a:t>The configured</a:t>
             </a:r>
           </a:p>
           <a:p>
@@ -18534,13 +18339,32 @@
               </a:spcAft>
             </a:pPr>
             <a:r>
-              <a:rPr sz="1110">
-                <a:solidFill>
-                  <a:srgbClr val="364557"/>
-                </a:solidFill>
-                <a:latin typeface="Segoe UI"/>
-              </a:rPr>
-              <a:t>under __chat_runs__.</a:t>
+              <a:rPr sz="1120">
+                <a:solidFill>
+                  <a:srgbClr val="364557"/>
+                </a:solidFill>
+                <a:latin typeface="Segoe UI"/>
+              </a:rPr>
+              <a:t>chat model is bound</a:t>
+            </a:r>
+          </a:p>
+          <a:p>
+            <a:pPr algn="ctr">
+              <a:spcBef>
+                <a:spcPts val="0"/>
+              </a:spcBef>
+              <a:spcAft>
+                <a:spcPts val="0"/>
+              </a:spcAft>
+            </a:pPr>
+            <a:r>
+              <a:rPr sz="1120">
+                <a:solidFill>
+                  <a:srgbClr val="364557"/>
+                </a:solidFill>
+                <a:latin typeface="Segoe UI"/>
+              </a:rPr>
+              <a:t>to the tool surface.</a:t>
             </a:r>
           </a:p>
         </p:txBody>
@@ -18600,7 +18424,7 @@
                 </a:solidFill>
                 <a:latin typeface="Segoe UI"/>
               </a:rPr>
-              <a:t>Apply config</a:t>
+              <a:t>3 Invoke</a:t>
             </a:r>
           </a:p>
           <a:p>
@@ -18613,13 +18437,13 @@
               </a:spcAft>
             </a:pPr>
             <a:r>
-              <a:rPr sz="1110">
-                <a:solidFill>
-                  <a:srgbClr val="364557"/>
-                </a:solidFill>
-                <a:latin typeface="Segoe UI"/>
-              </a:rPr>
-              <a:t>Natural-language key=value</a:t>
+              <a:rPr sz="1120">
+                <a:solidFill>
+                  <a:srgbClr val="364557"/>
+                </a:solidFill>
+                <a:latin typeface="Segoe UI"/>
+              </a:rPr>
+              <a:t>The model sees the</a:t>
             </a:r>
           </a:p>
           <a:p>
@@ -18632,13 +18456,32 @@
               </a:spcAft>
             </a:pPr>
             <a:r>
-              <a:rPr sz="1110">
-                <a:solidFill>
-                  <a:srgbClr val="364557"/>
-                </a:solidFill>
-                <a:latin typeface="Segoe UI"/>
-              </a:rPr>
-              <a:t>assignments patch config.yaml.</a:t>
+              <a:rPr sz="1120">
+                <a:solidFill>
+                  <a:srgbClr val="364557"/>
+                </a:solidFill>
+                <a:latin typeface="Segoe UI"/>
+              </a:rPr>
+              <a:t>user request plus the</a:t>
+            </a:r>
+          </a:p>
+          <a:p>
+            <a:pPr algn="ctr">
+              <a:spcBef>
+                <a:spcPts val="0"/>
+              </a:spcBef>
+              <a:spcAft>
+                <a:spcPts val="0"/>
+              </a:spcAft>
+            </a:pPr>
+            <a:r>
+              <a:rPr sz="1120">
+                <a:solidFill>
+                  <a:srgbClr val="364557"/>
+                </a:solidFill>
+                <a:latin typeface="Segoe UI"/>
+              </a:rPr>
+              <a:t>system prompt.</a:t>
             </a:r>
           </a:p>
         </p:txBody>
@@ -18698,7 +18541,7 @@
                 </a:solidFill>
                 <a:latin typeface="Segoe UI"/>
               </a:rPr>
-              <a:t>Spawn</a:t>
+              <a:t>4 Execute</a:t>
             </a:r>
           </a:p>
           <a:p>
@@ -18711,13 +18554,13 @@
               </a:spcAft>
             </a:pPr>
             <a:r>
-              <a:rPr sz="1110">
-                <a:solidFill>
-                  <a:srgbClr val="364557"/>
-                </a:solidFill>
-                <a:latin typeface="Segoe UI"/>
-              </a:rPr>
-              <a:t>Detached subprocess starts</a:t>
+              <a:rPr sz="1120">
+                <a:solidFill>
+                  <a:srgbClr val="364557"/>
+                </a:solidFill>
+                <a:latin typeface="Segoe UI"/>
+              </a:rPr>
+              <a:t>tool_calls are run</a:t>
             </a:r>
           </a:p>
           <a:p>
@@ -18730,13 +18573,32 @@
               </a:spcAft>
             </a:pPr>
             <a:r>
-              <a:rPr sz="1110">
-                <a:solidFill>
-                  <a:srgbClr val="364557"/>
-                </a:solidFill>
-                <a:latin typeface="Segoe UI"/>
-              </a:rPr>
-              <a:t>from the runtime copy.</a:t>
+              <a:rPr sz="1120">
+                <a:solidFill>
+                  <a:srgbClr val="364557"/>
+                </a:solidFill>
+                <a:latin typeface="Segoe UI"/>
+              </a:rPr>
+              <a:t>in-process and appended</a:t>
+            </a:r>
+          </a:p>
+          <a:p>
+            <a:pPr algn="ctr">
+              <a:spcBef>
+                <a:spcPts val="0"/>
+              </a:spcBef>
+              <a:spcAft>
+                <a:spcPts val="0"/>
+              </a:spcAft>
+            </a:pPr>
+            <a:r>
+              <a:rPr sz="1120">
+                <a:solidFill>
+                  <a:srgbClr val="364557"/>
+                </a:solidFill>
+                <a:latin typeface="Segoe UI"/>
+              </a:rPr>
+              <a:t>as ToolMessage results.</a:t>
             </a:r>
           </a:p>
         </p:txBody>
@@ -18796,7 +18658,7 @@
                 </a:solidFill>
                 <a:latin typeface="Segoe UI"/>
               </a:rPr>
-              <a:t>Persist</a:t>
+              <a:t>5 Finish</a:t>
             </a:r>
           </a:p>
           <a:p>
@@ -18809,13 +18671,13 @@
               </a:spcAft>
             </a:pPr>
             <a:r>
-              <a:rPr sz="1110">
-                <a:solidFill>
-                  <a:srgbClr val="364557"/>
-                </a:solidFill>
-                <a:latin typeface="Segoe UI"/>
-              </a:rPr>
-              <a:t>ChatAgentRun stores run_id,</a:t>
+              <a:rPr sz="1120">
+                <a:solidFill>
+                  <a:srgbClr val="364557"/>
+                </a:solidFill>
+                <a:latin typeface="Segoe UI"/>
+              </a:rPr>
+              <a:t>The loop stops at</a:t>
             </a:r>
           </a:p>
           <a:p>
@@ -18828,13 +18690,32 @@
               </a:spcAft>
             </a:pPr>
             <a:r>
-              <a:rPr sz="1110">
-                <a:solidFill>
-                  <a:srgbClr val="364557"/>
-                </a:solidFill>
-                <a:latin typeface="Segoe UI"/>
-              </a:rPr>
-              <a:t>paths, pid, and status.</a:t>
+              <a:rPr sz="1120">
+                <a:solidFill>
+                  <a:srgbClr val="364557"/>
+                </a:solidFill>
+                <a:latin typeface="Segoe UI"/>
+              </a:rPr>
+              <a:t>a final answer or the</a:t>
+            </a:r>
+          </a:p>
+          <a:p>
+            <a:pPr algn="ctr">
+              <a:spcBef>
+                <a:spcPts val="0"/>
+              </a:spcBef>
+              <a:spcAft>
+                <a:spcPts val="0"/>
+              </a:spcAft>
+            </a:pPr>
+            <a:r>
+              <a:rPr sz="1120">
+                <a:solidFill>
+                  <a:srgbClr val="364557"/>
+                </a:solidFill>
+                <a:latin typeface="Segoe UI"/>
+              </a:rPr>
+              <a:t>iteration cap.</a:t>
             </a:r>
           </a:p>
         </p:txBody>
@@ -18848,7 +18729,7 @@
         <p:spPr>
           <a:xfrm>
             <a:off x="411480" y="3611880"/>
-            <a:ext cx="5559552" cy="1783080"/>
+            <a:ext cx="5559552" cy="1645920"/>
           </a:xfrm>
           <a:prstGeom prst="roundRect">
             <a:avLst/>
@@ -18894,7 +18775,7 @@
                 </a:solidFill>
                 <a:latin typeface="Segoe UI"/>
               </a:rPr>
-              <a:t>Surface area</a:t>
+              <a:t>Current code details</a:t>
             </a:r>
           </a:p>
           <a:p>
@@ -18913,7 +18794,7 @@
                 </a:solidFill>
                 <a:latin typeface="Segoe UI"/>
               </a:rPr>
-              <a:t>32 wrapped chat-agent launchers now exist.</a:t>
+              <a:t>create_unified_agent() still builds MultiTurnToolAgentExecutor.</a:t>
             </a:r>
           </a:p>
           <a:p>
@@ -18932,7 +18813,7 @@
                 </a:solidFill>
                 <a:latin typeface="Segoe UI"/>
               </a:rPr>
-              <a:t>4 are flagged long-running in the registry.</a:t>
+              <a:t>The default cap remains 20 turns unless unified_agent_max_iterations is configured.</a:t>
             </a:r>
           </a:p>
           <a:p>
@@ -18951,7 +18832,7 @@
                 </a:solidFill>
                 <a:latin typeface="Segoe UI"/>
               </a:rPr>
-              <a:t>Families cover execution, DevOps, data access, files, comms, crawling, monitoring, prompting, and Kyber operations.</a:t>
+              <a:t>The prompt contract still tells the model to poll wrapped runtime state by run_id instead of inventing success.</a:t>
             </a:r>
           </a:p>
         </p:txBody>
@@ -18965,7 +18846,7 @@
         <p:spPr>
           <a:xfrm>
             <a:off x="6217920" y="3611880"/>
-            <a:ext cx="5559552" cy="1783080"/>
+            <a:ext cx="5559552" cy="1645920"/>
           </a:xfrm>
           <a:prstGeom prst="roundRect">
             <a:avLst/>
@@ -19011,7 +18892,7 @@
                 </a:solidFill>
                 <a:latin typeface="Segoe UI"/>
               </a:rPr>
-              <a:t>Lifecycle follow-up tools</a:t>
+              <a:t>Wrapped runtime layer still current</a:t>
             </a:r>
           </a:p>
           <a:p>
@@ -19030,83 +18911,7 @@
                 </a:solidFill>
                 <a:latin typeface="Segoe UI"/>
               </a:rPr>
-              <a:t>chat_agent_run_list</a:t>
-            </a:r>
-          </a:p>
-          <a:p>
-            <a:pPr algn="l">
-              <a:spcBef>
-                <a:spcPts val="0"/>
-              </a:spcBef>
-              <a:spcAft>
-                <a:spcPts val="0"/>
-              </a:spcAft>
-            </a:pPr>
-            <a:r>
-              <a:rPr sz="1250">
-                <a:solidFill>
-                  <a:srgbClr val="364557"/>
-                </a:solidFill>
-                <a:latin typeface="Segoe UI"/>
-              </a:rPr>
-              <a:t>chat_agent_run_status</a:t>
-            </a:r>
-          </a:p>
-          <a:p>
-            <a:pPr algn="l">
-              <a:spcBef>
-                <a:spcPts val="0"/>
-              </a:spcBef>
-              <a:spcAft>
-                <a:spcPts val="0"/>
-              </a:spcAft>
-            </a:pPr>
-            <a:r>
-              <a:rPr sz="1250">
-                <a:solidFill>
-                  <a:srgbClr val="364557"/>
-                </a:solidFill>
-                <a:latin typeface="Segoe UI"/>
-              </a:rPr>
-              <a:t>chat_agent_run_log</a:t>
-            </a:r>
-          </a:p>
-          <a:p>
-            <a:pPr algn="l">
-              <a:spcBef>
-                <a:spcPts val="0"/>
-              </a:spcBef>
-              <a:spcAft>
-                <a:spcPts val="0"/>
-              </a:spcAft>
-            </a:pPr>
-            <a:r>
-              <a:rPr sz="1250">
-                <a:solidFill>
-                  <a:srgbClr val="364557"/>
-                </a:solidFill>
-                <a:latin typeface="Segoe UI"/>
-              </a:rPr>
-              <a:t>chat_agent_run_stop</a:t>
-            </a:r>
-          </a:p>
-          <a:p>
-            <a:pPr algn="l">
-              <a:spcBef>
-                <a:spcPts val="0"/>
-              </a:spcBef>
-              <a:spcAft>
-                <a:spcPts val="0"/>
-              </a:spcAft>
-            </a:pPr>
-            <a:r>
-              <a:rPr sz="1250">
-                <a:solidFill>
-                  <a:srgbClr val="364557"/>
-                </a:solidFill>
-                <a:latin typeface="Segoe UI"/>
-              </a:rPr>
-              <a:t>Returned JSON includes run_id, status, runtime_dir, log_path, and log_excerpt.</a:t>
+              <a:t>32 launchers, 4 flagged long-running, and the same ChatAgentRun-based lifecycle tools remain part of the truthful story at HEAD 4fd33b480086.</a:t>
             </a:r>
           </a:p>
         </p:txBody>

--- a/Tlamatini_eXtended_Artificial_Intelligence_Humanly_Tempered.pptx
+++ b/Tlamatini_eXtended_Artificial_Intelligence_Humanly_Tempered.pptx
@@ -15,8 +15,6 @@
     <p:sldId id="263" r:id="rId14"/>
     <p:sldId id="264" r:id="rId15"/>
     <p:sldId id="265" r:id="rId16"/>
-    <p:sldId id="266" r:id="rId17"/>
-    <p:sldId id="267" r:id="rId18"/>
   </p:sldIdLst>
   <p:sldSz cx="12191695" cy="6858000" type="screen4x3"/>
   <p:notesSz cx="6858000" cy="9144000"/>
@@ -3095,7 +3093,7 @@
     <p:bg>
       <p:bgPr>
         <a:solidFill>
-          <a:srgbClr val="0C1623"/>
+          <a:srgbClr val="F8FAFC"/>
         </a:solidFill>
         <a:effectLst/>
       </p:bgPr>
@@ -3109,23 +3107,83 @@
       <p:grpSpPr/>
       <p:sp>
         <p:nvSpPr>
-          <p:cNvPr id="2" name="Rectangle 1"/>
+          <p:cNvPr id="2" name="Title 1"/>
+          <p:cNvSpPr>
+            <a:spLocks noGrp="1"/>
+          </p:cNvSpPr>
+          <p:nvPr>
+            <p:ph type="ctrTitle"/>
+          </p:nvPr>
+        </p:nvSpPr>
+        <p:spPr/>
+        <p:txBody>
+          <a:bodyPr/>
+          <a:lstStyle/>
+          <a:p>
+            <a:pPr>
+              <a:defRPr b="1" sz="2800">
+                <a:solidFill>
+                  <a:srgbClr val="0F172A"/>
+                </a:solidFill>
+                <a:latin typeface="Aptos Display"/>
+              </a:defRPr>
+            </a:pPr>
+            <a:r>
+              <a:t>Tlamatini: eXtended Artificial Intelligence Humanly Tempered</a:t>
+            </a:r>
+          </a:p>
+        </p:txBody>
+      </p:sp>
+      <p:sp>
+        <p:nvSpPr>
+          <p:cNvPr id="3" name="Subtitle 2"/>
+          <p:cNvSpPr>
+            <a:spLocks noGrp="1"/>
+          </p:cNvSpPr>
+          <p:nvPr>
+            <p:ph type="subTitle" idx="1"/>
+          </p:nvPr>
+        </p:nvSpPr>
+        <p:spPr/>
+        <p:txBody>
+          <a:bodyPr/>
+          <a:lstStyle/>
+          <a:p>
+            <a:pPr>
+              <a:defRPr sz="1600">
+                <a:solidFill>
+                  <a:srgbClr val="475569"/>
+                </a:solidFill>
+                <a:latin typeface="Aptos"/>
+              </a:defRPr>
+            </a:pPr>
+            <a:r>
+              <a:t>Current workspace refresh for Multi-Turn orchestration and Parametrizer outcome preservation</a:t>
+            </a:r>
+          </a:p>
+        </p:txBody>
+      </p:sp>
+      <p:sp>
+        <p:nvSpPr>
+          <p:cNvPr id="4" name="Rounded Rectangle 3"/>
           <p:cNvSpPr/>
           <p:nvPr/>
         </p:nvSpPr>
         <p:spPr>
           <a:xfrm>
-            <a:off x="0" y="0"/>
-            <a:ext cx="12191695" cy="411480"/>
-          </a:xfrm>
-          <a:prstGeom prst="rect">
+            <a:off x="731520" y="2011680"/>
+            <a:ext cx="1783080" cy="914400"/>
+          </a:xfrm>
+          <a:prstGeom prst="roundRect">
             <a:avLst/>
           </a:prstGeom>
           <a:solidFill>
-            <a:srgbClr val="184366"/>
+            <a:srgbClr val="FFFFFF"/>
           </a:solidFill>
           <a:ln>
-            <a:noFill/>
+            <a:solidFill>
+              <a:srgbClr val="CBD5E1"/>
+            </a:solidFill>
           </a:ln>
         </p:spPr>
         <p:style>
@@ -3143,29 +3201,52 @@
           </a:fontRef>
         </p:style>
         <p:txBody>
-          <a:bodyPr rtlCol="0" anchor="ctr"/>
-          <a:lstStyle/>
-          <a:p>
-            <a:pPr algn="ctr"/>
-          </a:p>
-        </p:txBody>
-      </p:sp>
-      <p:sp>
-        <p:nvSpPr>
-          <p:cNvPr id="3" name="Rectangle 2"/>
+          <a:bodyPr rtlCol="0" anchor="ctr" lIns="201168" tIns="109728"/>
+          <a:lstStyle/>
+          <a:p>
+            <a:pPr algn="ctr">
+              <a:defRPr b="1" sz="2000">
+                <a:solidFill>
+                  <a:srgbClr val="0F172A"/>
+                </a:solidFill>
+                <a:latin typeface="Aptos Display"/>
+              </a:defRPr>
+            </a:pPr>
+            <a:r>
+              <a:t>352</a:t>
+            </a:r>
+          </a:p>
+          <a:p>
+            <a:pPr>
+              <a:defRPr sz="1100">
+                <a:solidFill>
+                  <a:srgbClr val="475569"/>
+                </a:solidFill>
+                <a:latin typeface="Aptos"/>
+              </a:defRPr>
+            </a:pPr>
+            <a:r>
+              <a:t>Tracked files</a:t>
+            </a:r>
+          </a:p>
+        </p:txBody>
+      </p:sp>
+      <p:sp>
+        <p:nvSpPr>
+          <p:cNvPr id="5" name="Rectangle 4"/>
           <p:cNvSpPr/>
           <p:nvPr/>
         </p:nvSpPr>
         <p:spPr>
           <a:xfrm>
-            <a:off x="411480" y="713232"/>
-            <a:ext cx="164592" cy="5394960"/>
+            <a:off x="731520" y="2011680"/>
+            <a:ext cx="109728" cy="914400"/>
           </a:xfrm>
           <a:prstGeom prst="rect">
             <a:avLst/>
           </a:prstGeom>
           <a:solidFill>
-            <a:srgbClr val="E0B04A"/>
+            <a:srgbClr val="0D9488"/>
           </a:solidFill>
           <a:ln>
             <a:noFill/>
@@ -3195,168 +3276,24 @@
       </p:sp>
       <p:sp>
         <p:nvSpPr>
-          <p:cNvPr id="4" name="TextBox 3"/>
-          <p:cNvSpPr txBox="1"/>
-          <p:nvPr/>
-        </p:nvSpPr>
-        <p:spPr>
-          <a:xfrm>
-            <a:off x="749808" y="658368"/>
-            <a:ext cx="10607040" cy="658368"/>
-          </a:xfrm>
-          <a:prstGeom prst="rect">
-            <a:avLst/>
-          </a:prstGeom>
-          <a:noFill/>
-        </p:spPr>
-        <p:txBody>
-          <a:bodyPr wrap="none">
-            <a:spAutoFit/>
-          </a:bodyPr>
-          <a:lstStyle/>
-          <a:p>
-            <a:pPr>
-              <a:defRPr b="1" sz="2400">
-                <a:solidFill>
-                  <a:srgbClr val="F4F8FB"/>
-                </a:solidFill>
-                <a:latin typeface="Aptos Display"/>
-              </a:defRPr>
-            </a:pPr>
-            <a:r>
-              <a:t>Tlamatini: eXtended Artificial Intelligence Humanly Tempered</a:t>
-            </a:r>
-          </a:p>
-        </p:txBody>
-      </p:sp>
-      <p:sp>
-        <p:nvSpPr>
-          <p:cNvPr id="5" name="TextBox 4"/>
-          <p:cNvSpPr txBox="1"/>
-          <p:nvPr/>
-        </p:nvSpPr>
-        <p:spPr>
-          <a:xfrm>
-            <a:off x="768096" y="1261872"/>
-            <a:ext cx="10424160" cy="457200"/>
-          </a:xfrm>
-          <a:prstGeom prst="rect">
-            <a:avLst/>
-          </a:prstGeom>
-          <a:noFill/>
-        </p:spPr>
-        <p:txBody>
-          <a:bodyPr wrap="none">
-            <a:spAutoFit/>
-          </a:bodyPr>
-          <a:lstStyle/>
-          <a:p>
-            <a:pPr>
-              <a:defRPr sz="1100">
-                <a:solidFill>
-                  <a:srgbClr val="B9CFE0"/>
-                </a:solidFill>
-                <a:latin typeface="Aptos"/>
-              </a:defRPr>
-            </a:pPr>
-            <a:r>
-              <a:t>Multi-Turn architecture refresh grounded in the current repository, current README, and the April 6 verification rerun.</a:t>
-            </a:r>
-          </a:p>
-        </p:txBody>
-      </p:sp>
-      <p:sp>
-        <p:nvSpPr>
-          <p:cNvPr id="6" name="TextBox 5"/>
-          <p:cNvSpPr txBox="1"/>
-          <p:nvPr/>
-        </p:nvSpPr>
-        <p:spPr>
-          <a:xfrm>
-            <a:off x="768096" y="6446520"/>
-            <a:ext cx="10789920" cy="228600"/>
-          </a:xfrm>
-          <a:prstGeom prst="rect">
-            <a:avLst/>
-          </a:prstGeom>
-          <a:noFill/>
-        </p:spPr>
-        <p:txBody>
-          <a:bodyPr wrap="none">
-            <a:spAutoFit/>
-          </a:bodyPr>
-          <a:lstStyle/>
-          <a:p>
-            <a:pPr>
-              <a:defRPr sz="900">
-                <a:solidFill>
-                  <a:srgbClr val="9DB4C7"/>
-                </a:solidFill>
-                <a:latin typeface="Aptos"/>
-              </a:defRPr>
-            </a:pPr>
-            <a:r>
-              <a:t>Tlamatini | April 6, 2026 | bd06b4680877</a:t>
-            </a:r>
-          </a:p>
-        </p:txBody>
-      </p:sp>
-      <p:sp>
-        <p:nvSpPr>
-          <p:cNvPr id="7" name="TextBox 6"/>
-          <p:cNvSpPr txBox="1"/>
-          <p:nvPr/>
-        </p:nvSpPr>
-        <p:spPr>
-          <a:xfrm>
-            <a:off x="11338560" y="6400800"/>
-            <a:ext cx="457200" cy="274320"/>
-          </a:xfrm>
-          <a:prstGeom prst="rect">
-            <a:avLst/>
-          </a:prstGeom>
-          <a:noFill/>
-        </p:spPr>
-        <p:txBody>
-          <a:bodyPr wrap="none">
-            <a:spAutoFit/>
-          </a:bodyPr>
-          <a:lstStyle/>
-          <a:p>
-            <a:pPr algn="r">
-              <a:defRPr sz="900">
-                <a:solidFill>
-                  <a:srgbClr val="D4DEE7"/>
-                </a:solidFill>
-                <a:latin typeface="Aptos"/>
-              </a:defRPr>
-            </a:pPr>
-            <a:r>
-              <a:t>1</a:t>
-            </a:r>
-          </a:p>
-        </p:txBody>
-      </p:sp>
-      <p:sp>
-        <p:nvSpPr>
-          <p:cNvPr id="8" name="Rounded Rectangle 7"/>
+          <p:cNvPr id="6" name="Rounded Rectangle 5"/>
           <p:cNvSpPr/>
           <p:nvPr/>
         </p:nvSpPr>
         <p:spPr>
           <a:xfrm>
-            <a:off x="868680" y="1920240"/>
-            <a:ext cx="2148840" cy="1170432"/>
+            <a:off x="2743200" y="2011680"/>
+            <a:ext cx="1783080" cy="914400"/>
           </a:xfrm>
           <a:prstGeom prst="roundRect">
             <a:avLst/>
           </a:prstGeom>
           <a:solidFill>
-            <a:srgbClr val="13273D"/>
+            <a:srgbClr val="FFFFFF"/>
           </a:solidFill>
           <a:ln>
             <a:solidFill>
-              <a:srgbClr val="497699"/>
+              <a:srgbClr val="CBD5E1"/>
             </a:solidFill>
           </a:ln>
         </p:spPr>
@@ -3375,83 +3312,55 @@
           </a:fontRef>
         </p:style>
         <p:txBody>
-          <a:bodyPr rtlCol="0" anchor="ctr"/>
-          <a:lstStyle/>
-          <a:p>
-            <a:pPr algn="ctr"/>
-          </a:p>
-        </p:txBody>
-      </p:sp>
-      <p:sp>
-        <p:nvSpPr>
-          <p:cNvPr id="9" name="TextBox 8"/>
-          <p:cNvSpPr txBox="1"/>
-          <p:nvPr/>
-        </p:nvSpPr>
-        <p:spPr>
-          <a:xfrm>
-            <a:off x="1033272" y="2066544"/>
-            <a:ext cx="1819656" cy="731520"/>
+          <a:bodyPr rtlCol="0" anchor="ctr" lIns="201168" tIns="109728"/>
+          <a:lstStyle/>
+          <a:p>
+            <a:pPr algn="ctr">
+              <a:defRPr b="1" sz="2000">
+                <a:solidFill>
+                  <a:srgbClr val="0F172A"/>
+                </a:solidFill>
+                <a:latin typeface="Aptos Display"/>
+              </a:defRPr>
+            </a:pPr>
+            <a:r>
+              <a:t>57</a:t>
+            </a:r>
+          </a:p>
+          <a:p>
+            <a:pPr>
+              <a:defRPr sz="1100">
+                <a:solidFill>
+                  <a:srgbClr val="475569"/>
+                </a:solidFill>
+                <a:latin typeface="Aptos"/>
+              </a:defRPr>
+            </a:pPr>
+            <a:r>
+              <a:t>Template-agent dirs</a:t>
+            </a:r>
+          </a:p>
+        </p:txBody>
+      </p:sp>
+      <p:sp>
+        <p:nvSpPr>
+          <p:cNvPr id="7" name="Rectangle 6"/>
+          <p:cNvSpPr/>
+          <p:nvPr/>
+        </p:nvSpPr>
+        <p:spPr>
+          <a:xfrm>
+            <a:off x="2743200" y="2011680"/>
+            <a:ext cx="109728" cy="914400"/>
           </a:xfrm>
           <a:prstGeom prst="rect">
             <a:avLst/>
           </a:prstGeom>
-          <a:noFill/>
-        </p:spPr>
-        <p:txBody>
-          <a:bodyPr wrap="none">
-            <a:spAutoFit/>
-          </a:bodyPr>
-          <a:lstStyle/>
-          <a:p>
-            <a:pPr>
-              <a:defRPr b="1" sz="2200">
-                <a:solidFill>
-                  <a:srgbClr val="F4F8FB"/>
-                </a:solidFill>
-                <a:latin typeface="Aptos Display"/>
-              </a:defRPr>
-            </a:pPr>
-            <a:r>
-              <a:t>352</a:t>
-            </a:r>
-          </a:p>
-          <a:p>
-            <a:pPr>
-              <a:defRPr sz="1000">
-                <a:solidFill>
-                  <a:srgbClr val="A5BFD2"/>
-                </a:solidFill>
-                <a:latin typeface="Aptos"/>
-              </a:defRPr>
-            </a:pPr>
-            <a:r>
-              <a:t>Tracked files</a:t>
-            </a:r>
-          </a:p>
-        </p:txBody>
-      </p:sp>
-      <p:sp>
-        <p:nvSpPr>
-          <p:cNvPr id="10" name="Rounded Rectangle 9"/>
-          <p:cNvSpPr/>
-          <p:nvPr/>
-        </p:nvSpPr>
-        <p:spPr>
-          <a:xfrm>
-            <a:off x="3218688" y="1920240"/>
-            <a:ext cx="2148840" cy="1170432"/>
-          </a:xfrm>
-          <a:prstGeom prst="roundRect">
-            <a:avLst/>
-          </a:prstGeom>
           <a:solidFill>
-            <a:srgbClr val="13273D"/>
+            <a:srgbClr val="EA580C"/>
           </a:solidFill>
           <a:ln>
-            <a:solidFill>
-              <a:srgbClr val="497699"/>
-            </a:solidFill>
+            <a:noFill/>
           </a:ln>
         </p:spPr>
         <p:style>
@@ -3478,73 +3387,24 @@
       </p:sp>
       <p:sp>
         <p:nvSpPr>
-          <p:cNvPr id="11" name="TextBox 10"/>
-          <p:cNvSpPr txBox="1"/>
-          <p:nvPr/>
-        </p:nvSpPr>
-        <p:spPr>
-          <a:xfrm>
-            <a:off x="3383280" y="2066544"/>
-            <a:ext cx="1819656" cy="731520"/>
-          </a:xfrm>
-          <a:prstGeom prst="rect">
-            <a:avLst/>
-          </a:prstGeom>
-          <a:noFill/>
-        </p:spPr>
-        <p:txBody>
-          <a:bodyPr wrap="none">
-            <a:spAutoFit/>
-          </a:bodyPr>
-          <a:lstStyle/>
-          <a:p>
-            <a:pPr>
-              <a:defRPr b="1" sz="2200">
-                <a:solidFill>
-                  <a:srgbClr val="F4F8FB"/>
-                </a:solidFill>
-                <a:latin typeface="Aptos Display"/>
-              </a:defRPr>
-            </a:pPr>
-            <a:r>
-              <a:t>56</a:t>
-            </a:r>
-          </a:p>
-          <a:p>
-            <a:pPr>
-              <a:defRPr sz="1000">
-                <a:solidFill>
-                  <a:srgbClr val="A5BFD2"/>
-                </a:solidFill>
-                <a:latin typeface="Aptos"/>
-              </a:defRPr>
-            </a:pPr>
-            <a:r>
-              <a:t>Templates</a:t>
-            </a:r>
-          </a:p>
-        </p:txBody>
-      </p:sp>
-      <p:sp>
-        <p:nvSpPr>
-          <p:cNvPr id="12" name="Rounded Rectangle 11"/>
+          <p:cNvPr id="8" name="Rounded Rectangle 7"/>
           <p:cNvSpPr/>
           <p:nvPr/>
         </p:nvSpPr>
         <p:spPr>
           <a:xfrm>
-            <a:off x="5568696" y="1920240"/>
-            <a:ext cx="2148840" cy="1170432"/>
+            <a:off x="4754880" y="2011680"/>
+            <a:ext cx="1783080" cy="914400"/>
           </a:xfrm>
           <a:prstGeom prst="roundRect">
             <a:avLst/>
           </a:prstGeom>
           <a:solidFill>
-            <a:srgbClr val="13273D"/>
+            <a:srgbClr val="FFFFFF"/>
           </a:solidFill>
           <a:ln>
             <a:solidFill>
-              <a:srgbClr val="497699"/>
+              <a:srgbClr val="CBD5E1"/>
             </a:solidFill>
           </a:ln>
         </p:spPr>
@@ -3563,83 +3423,55 @@
           </a:fontRef>
         </p:style>
         <p:txBody>
-          <a:bodyPr rtlCol="0" anchor="ctr"/>
-          <a:lstStyle/>
-          <a:p>
-            <a:pPr algn="ctr"/>
-          </a:p>
-        </p:txBody>
-      </p:sp>
-      <p:sp>
-        <p:nvSpPr>
-          <p:cNvPr id="13" name="TextBox 12"/>
-          <p:cNvSpPr txBox="1"/>
-          <p:nvPr/>
-        </p:nvSpPr>
-        <p:spPr>
-          <a:xfrm>
-            <a:off x="5733288" y="2066544"/>
-            <a:ext cx="1819656" cy="731520"/>
+          <a:bodyPr rtlCol="0" anchor="ctr" lIns="201168" tIns="109728"/>
+          <a:lstStyle/>
+          <a:p>
+            <a:pPr algn="ctr">
+              <a:defRPr b="1" sz="2000">
+                <a:solidFill>
+                  <a:srgbClr val="0F172A"/>
+                </a:solidFill>
+                <a:latin typeface="Aptos Display"/>
+              </a:defRPr>
+            </a:pPr>
+            <a:r>
+              <a:t>46</a:t>
+            </a:r>
+          </a:p>
+          <a:p>
+            <a:pPr>
+              <a:defRPr sz="1100">
+                <a:solidFill>
+                  <a:srgbClr val="475569"/>
+                </a:solidFill>
+                <a:latin typeface="Aptos"/>
+              </a:defRPr>
+            </a:pPr>
+            <a:r>
+              <a:t>Tool surface</a:t>
+            </a:r>
+          </a:p>
+        </p:txBody>
+      </p:sp>
+      <p:sp>
+        <p:nvSpPr>
+          <p:cNvPr id="9" name="Rectangle 8"/>
+          <p:cNvSpPr/>
+          <p:nvPr/>
+        </p:nvSpPr>
+        <p:spPr>
+          <a:xfrm>
+            <a:off x="4754880" y="2011680"/>
+            <a:ext cx="109728" cy="914400"/>
           </a:xfrm>
           <a:prstGeom prst="rect">
             <a:avLst/>
           </a:prstGeom>
-          <a:noFill/>
-        </p:spPr>
-        <p:txBody>
-          <a:bodyPr wrap="none">
-            <a:spAutoFit/>
-          </a:bodyPr>
-          <a:lstStyle/>
-          <a:p>
-            <a:pPr>
-              <a:defRPr b="1" sz="2200">
-                <a:solidFill>
-                  <a:srgbClr val="F4F8FB"/>
-                </a:solidFill>
-                <a:latin typeface="Aptos Display"/>
-              </a:defRPr>
-            </a:pPr>
-            <a:r>
-              <a:t>49</a:t>
-            </a:r>
-          </a:p>
-          <a:p>
-            <a:pPr>
-              <a:defRPr sz="1000">
-                <a:solidFill>
-                  <a:srgbClr val="A5BFD2"/>
-                </a:solidFill>
-                <a:latin typeface="Aptos"/>
-              </a:defRPr>
-            </a:pPr>
-            <a:r>
-              <a:t>Tools</a:t>
-            </a:r>
-          </a:p>
-        </p:txBody>
-      </p:sp>
-      <p:sp>
-        <p:nvSpPr>
-          <p:cNvPr id="14" name="Rounded Rectangle 13"/>
-          <p:cNvSpPr/>
-          <p:nvPr/>
-        </p:nvSpPr>
-        <p:spPr>
-          <a:xfrm>
-            <a:off x="7918704" y="1920240"/>
-            <a:ext cx="2148840" cy="1170432"/>
-          </a:xfrm>
-          <a:prstGeom prst="roundRect">
-            <a:avLst/>
-          </a:prstGeom>
           <a:solidFill>
-            <a:srgbClr val="13273D"/>
+            <a:srgbClr val="0D9488"/>
           </a:solidFill>
           <a:ln>
-            <a:solidFill>
-              <a:srgbClr val="497699"/>
-            </a:solidFill>
+            <a:noFill/>
           </a:ln>
         </p:spPr>
         <p:style>
@@ -3666,14 +3498,612 @@
       </p:sp>
       <p:sp>
         <p:nvSpPr>
-          <p:cNvPr id="15" name="TextBox 14"/>
+          <p:cNvPr id="10" name="Rounded Rectangle 9"/>
+          <p:cNvSpPr/>
+          <p:nvPr/>
+        </p:nvSpPr>
+        <p:spPr>
+          <a:xfrm>
+            <a:off x="6766560" y="2011680"/>
+            <a:ext cx="1783080" cy="914400"/>
+          </a:xfrm>
+          <a:prstGeom prst="roundRect">
+            <a:avLst/>
+          </a:prstGeom>
+          <a:solidFill>
+            <a:srgbClr val="FFFFFF"/>
+          </a:solidFill>
+          <a:ln>
+            <a:solidFill>
+              <a:srgbClr val="CBD5E1"/>
+            </a:solidFill>
+          </a:ln>
+        </p:spPr>
+        <p:style>
+          <a:lnRef idx="1">
+            <a:schemeClr val="accent1"/>
+          </a:lnRef>
+          <a:fillRef idx="3">
+            <a:schemeClr val="accent1"/>
+          </a:fillRef>
+          <a:effectRef idx="2">
+            <a:schemeClr val="accent1"/>
+          </a:effectRef>
+          <a:fontRef idx="minor">
+            <a:schemeClr val="lt1"/>
+          </a:fontRef>
+        </p:style>
+        <p:txBody>
+          <a:bodyPr rtlCol="0" anchor="ctr" lIns="201168" tIns="109728"/>
+          <a:lstStyle/>
+          <a:p>
+            <a:pPr algn="ctr">
+              <a:defRPr b="1" sz="2000">
+                <a:solidFill>
+                  <a:srgbClr val="0F172A"/>
+                </a:solidFill>
+                <a:latin typeface="Aptos Display"/>
+              </a:defRPr>
+            </a:pPr>
+            <a:r>
+              <a:t>31</a:t>
+            </a:r>
+          </a:p>
+          <a:p>
+            <a:pPr>
+              <a:defRPr sz="1100">
+                <a:solidFill>
+                  <a:srgbClr val="475569"/>
+                </a:solidFill>
+                <a:latin typeface="Aptos"/>
+              </a:defRPr>
+            </a:pPr>
+            <a:r>
+              <a:t>Wrapped launchers</a:t>
+            </a:r>
+          </a:p>
+        </p:txBody>
+      </p:sp>
+      <p:sp>
+        <p:nvSpPr>
+          <p:cNvPr id="11" name="Rectangle 10"/>
+          <p:cNvSpPr/>
+          <p:nvPr/>
+        </p:nvSpPr>
+        <p:spPr>
+          <a:xfrm>
+            <a:off x="6766560" y="2011680"/>
+            <a:ext cx="109728" cy="914400"/>
+          </a:xfrm>
+          <a:prstGeom prst="rect">
+            <a:avLst/>
+          </a:prstGeom>
+          <a:solidFill>
+            <a:srgbClr val="EA580C"/>
+          </a:solidFill>
+          <a:ln>
+            <a:noFill/>
+          </a:ln>
+        </p:spPr>
+        <p:style>
+          <a:lnRef idx="1">
+            <a:schemeClr val="accent1"/>
+          </a:lnRef>
+          <a:fillRef idx="3">
+            <a:schemeClr val="accent1"/>
+          </a:fillRef>
+          <a:effectRef idx="2">
+            <a:schemeClr val="accent1"/>
+          </a:effectRef>
+          <a:fontRef idx="minor">
+            <a:schemeClr val="lt1"/>
+          </a:fontRef>
+        </p:style>
+        <p:txBody>
+          <a:bodyPr rtlCol="0" anchor="ctr"/>
+          <a:lstStyle/>
+          <a:p>
+            <a:pPr algn="ctr"/>
+          </a:p>
+        </p:txBody>
+      </p:sp>
+      <p:sp>
+        <p:nvSpPr>
+          <p:cNvPr id="12" name="Rounded Rectangle 11"/>
+          <p:cNvSpPr/>
+          <p:nvPr/>
+        </p:nvSpPr>
+        <p:spPr>
+          <a:xfrm>
+            <a:off x="731520" y="3246120"/>
+            <a:ext cx="1783080" cy="914400"/>
+          </a:xfrm>
+          <a:prstGeom prst="roundRect">
+            <a:avLst/>
+          </a:prstGeom>
+          <a:solidFill>
+            <a:srgbClr val="FFFFFF"/>
+          </a:solidFill>
+          <a:ln>
+            <a:solidFill>
+              <a:srgbClr val="CBD5E1"/>
+            </a:solidFill>
+          </a:ln>
+        </p:spPr>
+        <p:style>
+          <a:lnRef idx="1">
+            <a:schemeClr val="accent1"/>
+          </a:lnRef>
+          <a:fillRef idx="3">
+            <a:schemeClr val="accent1"/>
+          </a:fillRef>
+          <a:effectRef idx="2">
+            <a:schemeClr val="accent1"/>
+          </a:effectRef>
+          <a:fontRef idx="minor">
+            <a:schemeClr val="lt1"/>
+          </a:fontRef>
+        </p:style>
+        <p:txBody>
+          <a:bodyPr rtlCol="0" anchor="ctr" lIns="201168" tIns="109728"/>
+          <a:lstStyle/>
+          <a:p>
+            <a:pPr algn="ctr">
+              <a:defRPr b="1" sz="2000">
+                <a:solidFill>
+                  <a:srgbClr val="0F172A"/>
+                </a:solidFill>
+                <a:latin typeface="Aptos Display"/>
+              </a:defRPr>
+            </a:pPr>
+            <a:r>
+              <a:t>4</a:t>
+            </a:r>
+          </a:p>
+          <a:p>
+            <a:pPr>
+              <a:defRPr sz="1100">
+                <a:solidFill>
+                  <a:srgbClr val="475569"/>
+                </a:solidFill>
+                <a:latin typeface="Aptos"/>
+              </a:defRPr>
+            </a:pPr>
+            <a:r>
+              <a:t>Long-running wrapped</a:t>
+            </a:r>
+          </a:p>
+        </p:txBody>
+      </p:sp>
+      <p:sp>
+        <p:nvSpPr>
+          <p:cNvPr id="13" name="Rectangle 12"/>
+          <p:cNvSpPr/>
+          <p:nvPr/>
+        </p:nvSpPr>
+        <p:spPr>
+          <a:xfrm>
+            <a:off x="731520" y="3246120"/>
+            <a:ext cx="109728" cy="914400"/>
+          </a:xfrm>
+          <a:prstGeom prst="rect">
+            <a:avLst/>
+          </a:prstGeom>
+          <a:solidFill>
+            <a:srgbClr val="EA580C"/>
+          </a:solidFill>
+          <a:ln>
+            <a:noFill/>
+          </a:ln>
+        </p:spPr>
+        <p:style>
+          <a:lnRef idx="1">
+            <a:schemeClr val="accent1"/>
+          </a:lnRef>
+          <a:fillRef idx="3">
+            <a:schemeClr val="accent1"/>
+          </a:fillRef>
+          <a:effectRef idx="2">
+            <a:schemeClr val="accent1"/>
+          </a:effectRef>
+          <a:fontRef idx="minor">
+            <a:schemeClr val="lt1"/>
+          </a:fontRef>
+        </p:style>
+        <p:txBody>
+          <a:bodyPr rtlCol="0" anchor="ctr"/>
+          <a:lstStyle/>
+          <a:p>
+            <a:pPr algn="ctr"/>
+          </a:p>
+        </p:txBody>
+      </p:sp>
+      <p:sp>
+        <p:nvSpPr>
+          <p:cNvPr id="14" name="Rounded Rectangle 13"/>
+          <p:cNvSpPr/>
+          <p:nvPr/>
+        </p:nvSpPr>
+        <p:spPr>
+          <a:xfrm>
+            <a:off x="2743200" y="3246120"/>
+            <a:ext cx="1783080" cy="914400"/>
+          </a:xfrm>
+          <a:prstGeom prst="roundRect">
+            <a:avLst/>
+          </a:prstGeom>
+          <a:solidFill>
+            <a:srgbClr val="FFFFFF"/>
+          </a:solidFill>
+          <a:ln>
+            <a:solidFill>
+              <a:srgbClr val="CBD5E1"/>
+            </a:solidFill>
+          </a:ln>
+        </p:spPr>
+        <p:style>
+          <a:lnRef idx="1">
+            <a:schemeClr val="accent1"/>
+          </a:lnRef>
+          <a:fillRef idx="3">
+            <a:schemeClr val="accent1"/>
+          </a:fillRef>
+          <a:effectRef idx="2">
+            <a:schemeClr val="accent1"/>
+          </a:effectRef>
+          <a:fontRef idx="minor">
+            <a:schemeClr val="lt1"/>
+          </a:fontRef>
+        </p:style>
+        <p:txBody>
+          <a:bodyPr rtlCol="0" anchor="ctr" lIns="201168" tIns="109728"/>
+          <a:lstStyle/>
+          <a:p>
+            <a:pPr algn="ctr">
+              <a:defRPr b="1" sz="2000">
+                <a:solidFill>
+                  <a:srgbClr val="0F172A"/>
+                </a:solidFill>
+                <a:latin typeface="Aptos Display"/>
+              </a:defRPr>
+            </a:pPr>
+            <a:r>
+              <a:t>103 / 3</a:t>
+            </a:r>
+          </a:p>
+          <a:p>
+            <a:pPr>
+              <a:defRPr sz="1100">
+                <a:solidFill>
+                  <a:srgbClr val="475569"/>
+                </a:solidFill>
+                <a:latin typeface="Aptos"/>
+              </a:defRPr>
+            </a:pPr>
+            <a:r>
+              <a:t>App / project routes</a:t>
+            </a:r>
+          </a:p>
+        </p:txBody>
+      </p:sp>
+      <p:sp>
+        <p:nvSpPr>
+          <p:cNvPr id="15" name="Rectangle 14"/>
+          <p:cNvSpPr/>
+          <p:nvPr/>
+        </p:nvSpPr>
+        <p:spPr>
+          <a:xfrm>
+            <a:off x="2743200" y="3246120"/>
+            <a:ext cx="109728" cy="914400"/>
+          </a:xfrm>
+          <a:prstGeom prst="rect">
+            <a:avLst/>
+          </a:prstGeom>
+          <a:solidFill>
+            <a:srgbClr val="0D9488"/>
+          </a:solidFill>
+          <a:ln>
+            <a:noFill/>
+          </a:ln>
+        </p:spPr>
+        <p:style>
+          <a:lnRef idx="1">
+            <a:schemeClr val="accent1"/>
+          </a:lnRef>
+          <a:fillRef idx="3">
+            <a:schemeClr val="accent1"/>
+          </a:fillRef>
+          <a:effectRef idx="2">
+            <a:schemeClr val="accent1"/>
+          </a:effectRef>
+          <a:fontRef idx="minor">
+            <a:schemeClr val="lt1"/>
+          </a:fontRef>
+        </p:style>
+        <p:txBody>
+          <a:bodyPr rtlCol="0" anchor="ctr"/>
+          <a:lstStyle/>
+          <a:p>
+            <a:pPr algn="ctr"/>
+          </a:p>
+        </p:txBody>
+      </p:sp>
+      <p:sp>
+        <p:nvSpPr>
+          <p:cNvPr id="16" name="Rounded Rectangle 15"/>
+          <p:cNvSpPr/>
+          <p:nvPr/>
+        </p:nvSpPr>
+        <p:spPr>
+          <a:xfrm>
+            <a:off x="4754880" y="3246120"/>
+            <a:ext cx="1783080" cy="914400"/>
+          </a:xfrm>
+          <a:prstGeom prst="roundRect">
+            <a:avLst/>
+          </a:prstGeom>
+          <a:solidFill>
+            <a:srgbClr val="FFFFFF"/>
+          </a:solidFill>
+          <a:ln>
+            <a:solidFill>
+              <a:srgbClr val="CBD5E1"/>
+            </a:solidFill>
+          </a:ln>
+        </p:spPr>
+        <p:style>
+          <a:lnRef idx="1">
+            <a:schemeClr val="accent1"/>
+          </a:lnRef>
+          <a:fillRef idx="3">
+            <a:schemeClr val="accent1"/>
+          </a:fillRef>
+          <a:effectRef idx="2">
+            <a:schemeClr val="accent1"/>
+          </a:effectRef>
+          <a:fontRef idx="minor">
+            <a:schemeClr val="lt1"/>
+          </a:fontRef>
+        </p:style>
+        <p:txBody>
+          <a:bodyPr rtlCol="0" anchor="ctr" lIns="201168" tIns="109728"/>
+          <a:lstStyle/>
+          <a:p>
+            <a:pPr algn="ctr">
+              <a:defRPr b="1" sz="2000">
+                <a:solidFill>
+                  <a:srgbClr val="0F172A"/>
+                </a:solidFill>
+                <a:latin typeface="Aptos Display"/>
+              </a:defRPr>
+            </a:pPr>
+            <a:r>
+              <a:t>70/70 pass</a:t>
+            </a:r>
+          </a:p>
+          <a:p>
+            <a:pPr>
+              <a:defRPr sz="1100">
+                <a:solidFill>
+                  <a:srgbClr val="475569"/>
+                </a:solidFill>
+                <a:latin typeface="Aptos"/>
+              </a:defRPr>
+            </a:pPr>
+            <a:r>
+              <a:t>agent.tests</a:t>
+            </a:r>
+          </a:p>
+        </p:txBody>
+      </p:sp>
+      <p:sp>
+        <p:nvSpPr>
+          <p:cNvPr id="17" name="Rectangle 16"/>
+          <p:cNvSpPr/>
+          <p:nvPr/>
+        </p:nvSpPr>
+        <p:spPr>
+          <a:xfrm>
+            <a:off x="4754880" y="3246120"/>
+            <a:ext cx="109728" cy="914400"/>
+          </a:xfrm>
+          <a:prstGeom prst="rect">
+            <a:avLst/>
+          </a:prstGeom>
+          <a:solidFill>
+            <a:srgbClr val="EA580C"/>
+          </a:solidFill>
+          <a:ln>
+            <a:noFill/>
+          </a:ln>
+        </p:spPr>
+        <p:style>
+          <a:lnRef idx="1">
+            <a:schemeClr val="accent1"/>
+          </a:lnRef>
+          <a:fillRef idx="3">
+            <a:schemeClr val="accent1"/>
+          </a:fillRef>
+          <a:effectRef idx="2">
+            <a:schemeClr val="accent1"/>
+          </a:effectRef>
+          <a:fontRef idx="minor">
+            <a:schemeClr val="lt1"/>
+          </a:fontRef>
+        </p:style>
+        <p:txBody>
+          <a:bodyPr rtlCol="0" anchor="ctr"/>
+          <a:lstStyle/>
+          <a:p>
+            <a:pPr algn="ctr"/>
+          </a:p>
+        </p:txBody>
+      </p:sp>
+      <p:sp>
+        <p:nvSpPr>
+          <p:cNvPr id="18" name="Rounded Rectangle 17"/>
+          <p:cNvSpPr/>
+          <p:nvPr/>
+        </p:nvSpPr>
+        <p:spPr>
+          <a:xfrm>
+            <a:off x="6766560" y="3246120"/>
+            <a:ext cx="1783080" cy="914400"/>
+          </a:xfrm>
+          <a:prstGeom prst="roundRect">
+            <a:avLst/>
+          </a:prstGeom>
+          <a:solidFill>
+            <a:srgbClr val="FFFFFF"/>
+          </a:solidFill>
+          <a:ln>
+            <a:solidFill>
+              <a:srgbClr val="CBD5E1"/>
+            </a:solidFill>
+          </a:ln>
+        </p:spPr>
+        <p:style>
+          <a:lnRef idx="1">
+            <a:schemeClr val="accent1"/>
+          </a:lnRef>
+          <a:fillRef idx="3">
+            <a:schemeClr val="accent1"/>
+          </a:fillRef>
+          <a:effectRef idx="2">
+            <a:schemeClr val="accent1"/>
+          </a:effectRef>
+          <a:fontRef idx="minor">
+            <a:schemeClr val="lt1"/>
+          </a:fontRef>
+        </p:style>
+        <p:txBody>
+          <a:bodyPr rtlCol="0" anchor="ctr" lIns="201168" tIns="109728"/>
+          <a:lstStyle/>
+          <a:p>
+            <a:pPr algn="ctr">
+              <a:defRPr b="1" sz="2000">
+                <a:solidFill>
+                  <a:srgbClr val="0F172A"/>
+                </a:solidFill>
+                <a:latin typeface="Aptos Display"/>
+              </a:defRPr>
+            </a:pPr>
+            <a:r>
+              <a:t>clean</a:t>
+            </a:r>
+          </a:p>
+          <a:p>
+            <a:pPr>
+              <a:defRPr sz="1100">
+                <a:solidFill>
+                  <a:srgbClr val="475569"/>
+                </a:solidFill>
+                <a:latin typeface="Aptos"/>
+              </a:defRPr>
+            </a:pPr>
+            <a:r>
+              <a:t>Ruff</a:t>
+            </a:r>
+          </a:p>
+        </p:txBody>
+      </p:sp>
+      <p:sp>
+        <p:nvSpPr>
+          <p:cNvPr id="19" name="Rectangle 18"/>
+          <p:cNvSpPr/>
+          <p:nvPr/>
+        </p:nvSpPr>
+        <p:spPr>
+          <a:xfrm>
+            <a:off x="6766560" y="3246120"/>
+            <a:ext cx="109728" cy="914400"/>
+          </a:xfrm>
+          <a:prstGeom prst="rect">
+            <a:avLst/>
+          </a:prstGeom>
+          <a:solidFill>
+            <a:srgbClr val="0D9488"/>
+          </a:solidFill>
+          <a:ln>
+            <a:noFill/>
+          </a:ln>
+        </p:spPr>
+        <p:style>
+          <a:lnRef idx="1">
+            <a:schemeClr val="accent1"/>
+          </a:lnRef>
+          <a:fillRef idx="3">
+            <a:schemeClr val="accent1"/>
+          </a:fillRef>
+          <a:effectRef idx="2">
+            <a:schemeClr val="accent1"/>
+          </a:effectRef>
+          <a:fontRef idx="minor">
+            <a:schemeClr val="lt1"/>
+          </a:fontRef>
+        </p:style>
+        <p:txBody>
+          <a:bodyPr rtlCol="0" anchor="ctr"/>
+          <a:lstStyle/>
+          <a:p>
+            <a:pPr algn="ctr"/>
+          </a:p>
+        </p:txBody>
+      </p:sp>
+      <p:sp>
+        <p:nvSpPr>
+          <p:cNvPr id="20" name="Rectangle 19"/>
+          <p:cNvSpPr/>
+          <p:nvPr/>
+        </p:nvSpPr>
+        <p:spPr>
+          <a:xfrm>
+            <a:off x="411480" y="6309360"/>
+            <a:ext cx="11384280" cy="18288"/>
+          </a:xfrm>
+          <a:prstGeom prst="rect">
+            <a:avLst/>
+          </a:prstGeom>
+          <a:solidFill>
+            <a:srgbClr val="CBD5E1"/>
+          </a:solidFill>
+          <a:ln>
+            <a:noFill/>
+          </a:ln>
+        </p:spPr>
+        <p:style>
+          <a:lnRef idx="1">
+            <a:schemeClr val="accent1"/>
+          </a:lnRef>
+          <a:fillRef idx="3">
+            <a:schemeClr val="accent1"/>
+          </a:fillRef>
+          <a:effectRef idx="2">
+            <a:schemeClr val="accent1"/>
+          </a:effectRef>
+          <a:fontRef idx="minor">
+            <a:schemeClr val="lt1"/>
+          </a:fontRef>
+        </p:style>
+        <p:txBody>
+          <a:bodyPr rtlCol="0" anchor="ctr"/>
+          <a:lstStyle/>
+          <a:p>
+            <a:pPr algn="ctr"/>
+          </a:p>
+        </p:txBody>
+      </p:sp>
+      <p:sp>
+        <p:nvSpPr>
+          <p:cNvPr id="21" name="TextBox 20"/>
           <p:cNvSpPr txBox="1"/>
           <p:nvPr/>
         </p:nvSpPr>
         <p:spPr>
           <a:xfrm>
-            <a:off x="8083296" y="2066544"/>
-            <a:ext cx="1819656" cy="731520"/>
+            <a:off x="457200" y="6355080"/>
+            <a:ext cx="6400800" cy="228600"/>
           </a:xfrm>
           <a:prstGeom prst="rect">
             <a:avLst/>
@@ -3687,42 +4117,29 @@
           <a:lstStyle/>
           <a:p>
             <a:pPr>
-              <a:defRPr b="1" sz="2200">
-                <a:solidFill>
-                  <a:srgbClr val="F4F8FB"/>
-                </a:solidFill>
-                <a:latin typeface="Aptos Display"/>
-              </a:defRPr>
-            </a:pPr>
-            <a:r>
-              <a:t>63/63</a:t>
-            </a:r>
-          </a:p>
-          <a:p>
-            <a:pPr>
-              <a:defRPr sz="1000">
-                <a:solidFill>
-                  <a:srgbClr val="A5BFD2"/>
-                </a:solidFill>
-                <a:latin typeface="Aptos"/>
-              </a:defRPr>
-            </a:pPr>
-            <a:r>
-              <a:t>Tests</a:t>
-            </a:r>
-          </a:p>
-        </p:txBody>
-      </p:sp>
-      <p:sp>
-        <p:nvSpPr>
-          <p:cNvPr id="16" name="TextBox 15"/>
+              <a:defRPr sz="900">
+                <a:solidFill>
+                  <a:srgbClr val="475569"/>
+                </a:solidFill>
+                <a:latin typeface="Aptos"/>
+              </a:defRPr>
+            </a:pPr>
+            <a:r>
+              <a:t>Current workspace snapshot | April 8, 2026</a:t>
+            </a:r>
+          </a:p>
+        </p:txBody>
+      </p:sp>
+      <p:sp>
+        <p:nvSpPr>
+          <p:cNvPr id="22" name="TextBox 21"/>
           <p:cNvSpPr txBox="1"/>
           <p:nvPr/>
         </p:nvSpPr>
         <p:spPr>
           <a:xfrm>
-            <a:off x="896112" y="3840480"/>
-            <a:ext cx="10241280" cy="1325880"/>
+            <a:off x="10972800" y="6327648"/>
+            <a:ext cx="548640" cy="228600"/>
           </a:xfrm>
           <a:prstGeom prst="rect">
             <a:avLst/>
@@ -3735,16 +4152,16 @@
           </a:bodyPr>
           <a:lstStyle/>
           <a:p>
-            <a:pPr>
-              <a:defRPr sz="1700">
-                <a:solidFill>
-                  <a:srgbClr val="EAF0F5"/>
-                </a:solidFill>
-                <a:latin typeface="Aptos"/>
-              </a:defRPr>
-            </a:pPr>
-            <a:r>
-              <a:t>This deck replaces the earlier April 4 documentation story with the current Phase 1 to Phase 3 Multi-Turn implementation and validation state.</a:t>
+            <a:pPr algn="r">
+              <a:defRPr sz="900">
+                <a:solidFill>
+                  <a:srgbClr val="475569"/>
+                </a:solidFill>
+                <a:latin typeface="Aptos"/>
+              </a:defRPr>
+            </a:pPr>
+            <a:r>
+              <a:t>1</a:t>
             </a:r>
           </a:p>
         </p:txBody>
@@ -3763,7 +4180,7 @@
     <p:bg>
       <p:bgPr>
         <a:solidFill>
-          <a:srgbClr val="0C1623"/>
+          <a:srgbClr val="F8FAFC"/>
         </a:solidFill>
         <a:effectLst/>
       </p:bgPr>
@@ -3777,23 +4194,90 @@
       <p:grpSpPr/>
       <p:sp>
         <p:nvSpPr>
-          <p:cNvPr id="2" name="Rectangle 1"/>
+          <p:cNvPr id="2" name="Title 1"/>
+          <p:cNvSpPr>
+            <a:spLocks noGrp="1"/>
+          </p:cNvSpPr>
+          <p:nvPr>
+            <p:ph type="title"/>
+          </p:nvPr>
+        </p:nvSpPr>
+        <p:spPr/>
+        <p:txBody>
+          <a:bodyPr/>
+          <a:lstStyle/>
+          <a:p>
+            <a:pPr>
+              <a:defRPr b="1" sz="2600">
+                <a:solidFill>
+                  <a:srgbClr val="0F172A"/>
+                </a:solidFill>
+                <a:latin typeface="Aptos Display"/>
+              </a:defRPr>
+            </a:pPr>
+            <a:r>
+              <a:t>Verification status in this workspace</a:t>
+            </a:r>
+          </a:p>
+        </p:txBody>
+      </p:sp>
+      <p:sp>
+        <p:nvSpPr>
+          <p:cNvPr id="3" name="TextBox 2"/>
+          <p:cNvSpPr txBox="1"/>
+          <p:nvPr/>
+        </p:nvSpPr>
+        <p:spPr>
+          <a:xfrm>
+            <a:off x="640080" y="960120"/>
+            <a:ext cx="10789920" cy="502920"/>
+          </a:xfrm>
+          <a:prstGeom prst="rect">
+            <a:avLst/>
+          </a:prstGeom>
+          <a:noFill/>
+        </p:spPr>
+        <p:txBody>
+          <a:bodyPr wrap="square">
+            <a:spAutoFit/>
+          </a:bodyPr>
+          <a:lstStyle/>
+          <a:p>
+            <a:pPr>
+              <a:defRPr sz="1400">
+                <a:solidFill>
+                  <a:srgbClr val="475569"/>
+                </a:solidFill>
+                <a:latin typeface="Aptos"/>
+              </a:defRPr>
+            </a:pPr>
+            <a:r>
+              <a:t>The refreshed PDF and deck are backed by current checks, not by stale slide text.</a:t>
+            </a:r>
+          </a:p>
+        </p:txBody>
+      </p:sp>
+      <p:sp>
+        <p:nvSpPr>
+          <p:cNvPr id="4" name="Rounded Rectangle 3"/>
           <p:cNvSpPr/>
           <p:nvPr/>
         </p:nvSpPr>
         <p:spPr>
           <a:xfrm>
-            <a:off x="0" y="0"/>
-            <a:ext cx="12191695" cy="411480"/>
-          </a:xfrm>
-          <a:prstGeom prst="rect">
+            <a:off x="640080" y="1737360"/>
+            <a:ext cx="10241280" cy="2651760"/>
+          </a:xfrm>
+          <a:prstGeom prst="roundRect">
             <a:avLst/>
           </a:prstGeom>
           <a:solidFill>
-            <a:srgbClr val="184366"/>
+            <a:srgbClr val="FFFFFF"/>
           </a:solidFill>
           <a:ln>
-            <a:noFill/>
+            <a:solidFill>
+              <a:srgbClr val="CBD5E1"/>
+            </a:solidFill>
           </a:ln>
         </p:spPr>
         <p:style>
@@ -3811,29 +4295,140 @@
           </a:fontRef>
         </p:style>
         <p:txBody>
-          <a:bodyPr rtlCol="0" anchor="ctr"/>
-          <a:lstStyle/>
-          <a:p>
-            <a:pPr algn="ctr"/>
-          </a:p>
-        </p:txBody>
-      </p:sp>
-      <p:sp>
-        <p:nvSpPr>
-          <p:cNvPr id="3" name="Rectangle 2"/>
+          <a:bodyPr rtlCol="0" anchor="t" wrap="square" lIns="164592" rIns="128016" tIns="91440" bIns="73152">
+            <a:normAutofit/>
+          </a:bodyPr>
+          <a:lstStyle/>
+          <a:p>
+            <a:pPr algn="ctr">
+              <a:spcAft>
+                <a:spcPts val="700"/>
+              </a:spcAft>
+              <a:defRPr sz="1600">
+                <a:solidFill>
+                  <a:srgbClr val="0F172A"/>
+                </a:solidFill>
+                <a:latin typeface="Aptos"/>
+              </a:defRPr>
+            </a:pPr>
+            <a:r>
+              <a:rPr sz="1400">
+                <a:latin typeface="Aptos"/>
+              </a:rPr>
+              <a:t>- python Tlamatini/manage.py test agent.tests --verbosity 1 completed with 70 passing tests.</a:t>
+            </a:r>
+          </a:p>
+          <a:p>
+            <a:pPr>
+              <a:spcAft>
+                <a:spcPts val="700"/>
+              </a:spcAft>
+              <a:defRPr sz="1600">
+                <a:solidFill>
+                  <a:srgbClr val="0F172A"/>
+                </a:solidFill>
+                <a:latin typeface="Aptos"/>
+              </a:defRPr>
+            </a:pPr>
+            <a:r>
+              <a:rPr sz="1400">
+                <a:latin typeface="Aptos"/>
+              </a:rPr>
+              <a:t>- The current test tree contains 18 test classes and 70 test methods.</a:t>
+            </a:r>
+          </a:p>
+          <a:p>
+            <a:pPr>
+              <a:spcAft>
+                <a:spcPts val="700"/>
+              </a:spcAft>
+              <a:defRPr sz="1600">
+                <a:solidFill>
+                  <a:srgbClr val="0F172A"/>
+                </a:solidFill>
+                <a:latin typeface="Aptos"/>
+              </a:defRPr>
+            </a:pPr>
+            <a:r>
+              <a:rPr sz="1400">
+                <a:latin typeface="Aptos"/>
+              </a:rPr>
+              <a:t>- python -m ruff check completed cleanly after the latest Parametrizer changes.</a:t>
+            </a:r>
+          </a:p>
+          <a:p>
+            <a:pPr>
+              <a:spcAft>
+                <a:spcPts val="700"/>
+              </a:spcAft>
+              <a:defRPr sz="1600">
+                <a:solidFill>
+                  <a:srgbClr val="0F172A"/>
+                </a:solidFill>
+                <a:latin typeface="Aptos"/>
+              </a:defRPr>
+            </a:pPr>
+            <a:r>
+              <a:rPr sz="1400">
+                <a:latin typeface="Aptos"/>
+              </a:rPr>
+              <a:t>- The PDF and PPTX were regenerated from the same current fact set so the documentation artifacts now agree with the current README.</a:t>
+            </a:r>
+          </a:p>
+        </p:txBody>
+      </p:sp>
+      <p:sp>
+        <p:nvSpPr>
+          <p:cNvPr id="5" name="TextBox 4"/>
+          <p:cNvSpPr txBox="1"/>
+          <p:nvPr/>
+        </p:nvSpPr>
+        <p:spPr>
+          <a:xfrm>
+            <a:off x="868680" y="4663440"/>
+            <a:ext cx="9966960" cy="777240"/>
+          </a:xfrm>
+          <a:prstGeom prst="rect">
+            <a:avLst/>
+          </a:prstGeom>
+          <a:noFill/>
+        </p:spPr>
+        <p:txBody>
+          <a:bodyPr wrap="square">
+            <a:spAutoFit/>
+          </a:bodyPr>
+          <a:lstStyle/>
+          <a:p>
+            <a:pPr>
+              <a:defRPr sz="1800" b="1">
+                <a:solidFill>
+                  <a:srgbClr val="0F172A"/>
+                </a:solidFill>
+                <a:latin typeface="Aptos Display"/>
+              </a:defRPr>
+            </a:pPr>
+            <a:r>
+              <a:t>Current reading: checked Multi-Turn is the request-scoped orchestration path; unchecked Multi-Turn is still intentionally legacy; Parametrizer now preserves each finished target outcome as a numbered segment log.</a:t>
+            </a:r>
+          </a:p>
+        </p:txBody>
+      </p:sp>
+      <p:sp>
+        <p:nvSpPr>
+          <p:cNvPr id="6" name="Rectangle 5"/>
           <p:cNvSpPr/>
           <p:nvPr/>
         </p:nvSpPr>
         <p:spPr>
           <a:xfrm>
-            <a:off x="411480" y="713232"/>
-            <a:ext cx="164592" cy="5394960"/>
+            <a:off x="411480" y="6309360"/>
+            <a:ext cx="11384280" cy="18288"/>
           </a:xfrm>
           <a:prstGeom prst="rect">
             <a:avLst/>
           </a:prstGeom>
           <a:solidFill>
-            <a:srgbClr val="E0B04A"/>
+            <a:srgbClr val="CBD5E1"/>
           </a:solidFill>
           <a:ln>
             <a:noFill/>
@@ -3863,14 +4458,14 @@
       </p:sp>
       <p:sp>
         <p:nvSpPr>
-          <p:cNvPr id="4" name="TextBox 3"/>
+          <p:cNvPr id="7" name="TextBox 6"/>
           <p:cNvSpPr txBox="1"/>
           <p:nvPr/>
         </p:nvSpPr>
         <p:spPr>
           <a:xfrm>
-            <a:off x="749808" y="658368"/>
-            <a:ext cx="10607040" cy="658368"/>
+            <a:off x="457200" y="6355080"/>
+            <a:ext cx="6400800" cy="228600"/>
           </a:xfrm>
           <a:prstGeom prst="rect">
             <a:avLst/>
@@ -3884,29 +4479,29 @@
           <a:lstStyle/>
           <a:p>
             <a:pPr>
-              <a:defRPr b="1" sz="2400">
-                <a:solidFill>
-                  <a:srgbClr val="F4F8FB"/>
-                </a:solidFill>
-                <a:latin typeface="Aptos Display"/>
-              </a:defRPr>
-            </a:pPr>
-            <a:r>
-              <a:t>Legacy guarantee and frozen-mode behavior</a:t>
-            </a:r>
-          </a:p>
-        </p:txBody>
-      </p:sp>
-      <p:sp>
-        <p:nvSpPr>
-          <p:cNvPr id="5" name="TextBox 4"/>
+              <a:defRPr sz="900">
+                <a:solidFill>
+                  <a:srgbClr val="475569"/>
+                </a:solidFill>
+                <a:latin typeface="Aptos"/>
+              </a:defRPr>
+            </a:pPr>
+            <a:r>
+              <a:t>Current workspace snapshot | April 8, 2026</a:t>
+            </a:r>
+          </a:p>
+        </p:txBody>
+      </p:sp>
+      <p:sp>
+        <p:nvSpPr>
+          <p:cNvPr id="8" name="TextBox 7"/>
           <p:cNvSpPr txBox="1"/>
           <p:nvPr/>
         </p:nvSpPr>
         <p:spPr>
           <a:xfrm>
-            <a:off x="768096" y="1261872"/>
-            <a:ext cx="10424160" cy="457200"/>
+            <a:off x="10972800" y="6327648"/>
+            <a:ext cx="548640" cy="228600"/>
           </a:xfrm>
           <a:prstGeom prst="rect">
             <a:avLst/>
@@ -3919,861 +4514,16 @@
           </a:bodyPr>
           <a:lstStyle/>
           <a:p>
-            <a:pPr>
-              <a:defRPr sz="1100">
-                <a:solidFill>
-                  <a:srgbClr val="B9CFE0"/>
-                </a:solidFill>
-                <a:latin typeface="Aptos"/>
-              </a:defRPr>
-            </a:pPr>
-            <a:r>
-              <a:t>The implementation matters because it is explicit about what changes and what must not change.</a:t>
-            </a:r>
-          </a:p>
-        </p:txBody>
-      </p:sp>
-      <p:sp>
-        <p:nvSpPr>
-          <p:cNvPr id="6" name="TextBox 5"/>
-          <p:cNvSpPr txBox="1"/>
-          <p:nvPr/>
-        </p:nvSpPr>
-        <p:spPr>
-          <a:xfrm>
-            <a:off x="768096" y="6446520"/>
-            <a:ext cx="10789920" cy="228600"/>
-          </a:xfrm>
-          <a:prstGeom prst="rect">
-            <a:avLst/>
-          </a:prstGeom>
-          <a:noFill/>
-        </p:spPr>
-        <p:txBody>
-          <a:bodyPr wrap="none">
-            <a:spAutoFit/>
-          </a:bodyPr>
-          <a:lstStyle/>
-          <a:p>
-            <a:pPr>
-              <a:defRPr sz="900">
-                <a:solidFill>
-                  <a:srgbClr val="9DB4C7"/>
-                </a:solidFill>
-                <a:latin typeface="Aptos"/>
-              </a:defRPr>
-            </a:pPr>
-            <a:r>
-              <a:t>Tlamatini | April 6, 2026 | bd06b4680877</a:t>
-            </a:r>
-          </a:p>
-        </p:txBody>
-      </p:sp>
-      <p:sp>
-        <p:nvSpPr>
-          <p:cNvPr id="7" name="TextBox 6"/>
-          <p:cNvSpPr txBox="1"/>
-          <p:nvPr/>
-        </p:nvSpPr>
-        <p:spPr>
-          <a:xfrm>
-            <a:off x="11338560" y="6400800"/>
-            <a:ext cx="457200" cy="274320"/>
-          </a:xfrm>
-          <a:prstGeom prst="rect">
-            <a:avLst/>
-          </a:prstGeom>
-          <a:noFill/>
-        </p:spPr>
-        <p:txBody>
-          <a:bodyPr wrap="none">
-            <a:spAutoFit/>
-          </a:bodyPr>
-          <a:lstStyle/>
-          <a:p>
             <a:pPr algn="r">
               <a:defRPr sz="900">
                 <a:solidFill>
-                  <a:srgbClr val="D4DEE7"/>
+                  <a:srgbClr val="475569"/>
                 </a:solidFill>
                 <a:latin typeface="Aptos"/>
               </a:defRPr>
             </a:pPr>
             <a:r>
               <a:t>10</a:t>
-            </a:r>
-          </a:p>
-        </p:txBody>
-      </p:sp>
-      <p:sp>
-        <p:nvSpPr>
-          <p:cNvPr id="8" name="TextBox 7"/>
-          <p:cNvSpPr txBox="1"/>
-          <p:nvPr/>
-        </p:nvSpPr>
-        <p:spPr>
-          <a:xfrm>
-            <a:off x="868680" y="1783080"/>
-            <a:ext cx="10469880" cy="4389120"/>
-          </a:xfrm>
-          <a:prstGeom prst="rect">
-            <a:avLst/>
-          </a:prstGeom>
-          <a:noFill/>
-        </p:spPr>
-        <p:txBody>
-          <a:bodyPr wrap="square" lIns="0" rIns="0" tIns="0" anchor="t">
-            <a:spAutoFit/>
-          </a:bodyPr>
-          <a:lstStyle/>
-          <a:p>
-            <a:pPr>
-              <a:spcAft>
-                <a:spcPts val="800"/>
-              </a:spcAft>
-              <a:defRPr sz="1800">
-                <a:solidFill>
-                  <a:srgbClr val="EAF0F5"/>
-                </a:solidFill>
-                <a:latin typeface="Aptos"/>
-              </a:defRPr>
-            </a:pPr>
-            <a:r>
-              <a:t>• Unchecked Multi-Turn requests keep the original prompt validation, legacy prefetch behavior, legacy full-tool binding, and legacy visible-console launches.</a:t>
-            </a:r>
-          </a:p>
-          <a:p>
-            <a:pPr>
-              <a:spcAft>
-                <a:spcPts val="800"/>
-              </a:spcAft>
-              <a:defRPr sz="1800">
-                <a:solidFill>
-                  <a:srgbClr val="EAF0F5"/>
-                </a:solidFill>
-                <a:latin typeface="Aptos"/>
-              </a:defRPr>
-            </a:pPr>
-            <a:r>
-              <a:t>• config_loader.py resolves CONFIG_PATH, executable-local config.json, then module-local config.json.</a:t>
-            </a:r>
-          </a:p>
-          <a:p>
-            <a:pPr>
-              <a:spcAft>
-                <a:spcPts val="800"/>
-              </a:spcAft>
-              <a:defRPr sz="1800">
-                <a:solidFill>
-                  <a:srgbClr val="EAF0F5"/>
-                </a:solidFill>
-                <a:latin typeface="Aptos"/>
-              </a:defRPr>
-            </a:pPr>
-            <a:r>
-              <a:t>• FileSearchRAGChain now resolves its default config from the executable directory in frozen mode.</a:t>
-            </a:r>
-          </a:p>
-          <a:p>
-            <a:pPr>
-              <a:spcAft>
-                <a:spcPts val="800"/>
-              </a:spcAft>
-              <a:defRPr sz="1800">
-                <a:solidFill>
-                  <a:srgbClr val="EAF0F5"/>
-                </a:solidFill>
-                <a:latin typeface="Aptos"/>
-              </a:defRPr>
-            </a:pPr>
-            <a:r>
-              <a:t>• Template-agent discovery supports both install-root agents/ and nested Tlamatini/agent/agents layouts in packaged builds.</a:t>
-            </a:r>
-          </a:p>
-        </p:txBody>
-      </p:sp>
-    </p:spTree>
-  </p:cSld>
-  <p:clrMapOvr>
-    <a:masterClrMapping/>
-  </p:clrMapOvr>
-</p:sld>
-</file>
-
-<file path=ppt/slides/slide11.xml><?xml version="1.0" encoding="utf-8"?>
-<p:sld xmlns:a="http://schemas.openxmlformats.org/drawingml/2006/main" xmlns:p="http://schemas.openxmlformats.org/presentationml/2006/main" xmlns:r="http://schemas.openxmlformats.org/officeDocument/2006/relationships">
-  <p:cSld>
-    <p:bg>
-      <p:bgPr>
-        <a:solidFill>
-          <a:srgbClr val="0C1623"/>
-        </a:solidFill>
-        <a:effectLst/>
-      </p:bgPr>
-    </p:bg>
-    <p:spTree>
-      <p:nvGrpSpPr>
-        <p:cNvPr id="1" name=""/>
-        <p:cNvGrpSpPr/>
-        <p:nvPr/>
-      </p:nvGrpSpPr>
-      <p:grpSpPr/>
-      <p:sp>
-        <p:nvSpPr>
-          <p:cNvPr id="2" name="Rectangle 1"/>
-          <p:cNvSpPr/>
-          <p:nvPr/>
-        </p:nvSpPr>
-        <p:spPr>
-          <a:xfrm>
-            <a:off x="0" y="0"/>
-            <a:ext cx="12191695" cy="411480"/>
-          </a:xfrm>
-          <a:prstGeom prst="rect">
-            <a:avLst/>
-          </a:prstGeom>
-          <a:solidFill>
-            <a:srgbClr val="184366"/>
-          </a:solidFill>
-          <a:ln>
-            <a:noFill/>
-          </a:ln>
-        </p:spPr>
-        <p:style>
-          <a:lnRef idx="1">
-            <a:schemeClr val="accent1"/>
-          </a:lnRef>
-          <a:fillRef idx="3">
-            <a:schemeClr val="accent1"/>
-          </a:fillRef>
-          <a:effectRef idx="2">
-            <a:schemeClr val="accent1"/>
-          </a:effectRef>
-          <a:fontRef idx="minor">
-            <a:schemeClr val="lt1"/>
-          </a:fontRef>
-        </p:style>
-        <p:txBody>
-          <a:bodyPr rtlCol="0" anchor="ctr"/>
-          <a:lstStyle/>
-          <a:p>
-            <a:pPr algn="ctr"/>
-          </a:p>
-        </p:txBody>
-      </p:sp>
-      <p:sp>
-        <p:nvSpPr>
-          <p:cNvPr id="3" name="Rectangle 2"/>
-          <p:cNvSpPr/>
-          <p:nvPr/>
-        </p:nvSpPr>
-        <p:spPr>
-          <a:xfrm>
-            <a:off x="411480" y="713232"/>
-            <a:ext cx="164592" cy="5394960"/>
-          </a:xfrm>
-          <a:prstGeom prst="rect">
-            <a:avLst/>
-          </a:prstGeom>
-          <a:solidFill>
-            <a:srgbClr val="E0B04A"/>
-          </a:solidFill>
-          <a:ln>
-            <a:noFill/>
-          </a:ln>
-        </p:spPr>
-        <p:style>
-          <a:lnRef idx="1">
-            <a:schemeClr val="accent1"/>
-          </a:lnRef>
-          <a:fillRef idx="3">
-            <a:schemeClr val="accent1"/>
-          </a:fillRef>
-          <a:effectRef idx="2">
-            <a:schemeClr val="accent1"/>
-          </a:effectRef>
-          <a:fontRef idx="minor">
-            <a:schemeClr val="lt1"/>
-          </a:fontRef>
-        </p:style>
-        <p:txBody>
-          <a:bodyPr rtlCol="0" anchor="ctr"/>
-          <a:lstStyle/>
-          <a:p>
-            <a:pPr algn="ctr"/>
-          </a:p>
-        </p:txBody>
-      </p:sp>
-      <p:sp>
-        <p:nvSpPr>
-          <p:cNvPr id="4" name="TextBox 3"/>
-          <p:cNvSpPr txBox="1"/>
-          <p:nvPr/>
-        </p:nvSpPr>
-        <p:spPr>
-          <a:xfrm>
-            <a:off x="749808" y="658368"/>
-            <a:ext cx="10607040" cy="658368"/>
-          </a:xfrm>
-          <a:prstGeom prst="rect">
-            <a:avLst/>
-          </a:prstGeom>
-          <a:noFill/>
-        </p:spPr>
-        <p:txBody>
-          <a:bodyPr wrap="none">
-            <a:spAutoFit/>
-          </a:bodyPr>
-          <a:lstStyle/>
-          <a:p>
-            <a:pPr>
-              <a:defRPr b="1" sz="2400">
-                <a:solidFill>
-                  <a:srgbClr val="F4F8FB"/>
-                </a:solidFill>
-                <a:latin typeface="Aptos Display"/>
-              </a:defRPr>
-            </a:pPr>
-            <a:r>
-              <a:t>Files that now define the Multi-Turn truth surface</a:t>
-            </a:r>
-          </a:p>
-        </p:txBody>
-      </p:sp>
-      <p:sp>
-        <p:nvSpPr>
-          <p:cNvPr id="5" name="TextBox 4"/>
-          <p:cNvSpPr txBox="1"/>
-          <p:nvPr/>
-        </p:nvSpPr>
-        <p:spPr>
-          <a:xfrm>
-            <a:off x="768096" y="1261872"/>
-            <a:ext cx="10424160" cy="457200"/>
-          </a:xfrm>
-          <a:prstGeom prst="rect">
-            <a:avLst/>
-          </a:prstGeom>
-          <a:noFill/>
-        </p:spPr>
-        <p:txBody>
-          <a:bodyPr wrap="none">
-            <a:spAutoFit/>
-          </a:bodyPr>
-          <a:lstStyle/>
-          <a:p>
-            <a:pPr>
-              <a:defRPr sz="1100">
-                <a:solidFill>
-                  <a:srgbClr val="B9CFE0"/>
-                </a:solidFill>
-                <a:latin typeface="Aptos"/>
-              </a:defRPr>
-            </a:pPr>
-            <a:r>
-              <a:t>These modules should be read together when auditing the feature.</a:t>
-            </a:r>
-          </a:p>
-        </p:txBody>
-      </p:sp>
-      <p:sp>
-        <p:nvSpPr>
-          <p:cNvPr id="6" name="TextBox 5"/>
-          <p:cNvSpPr txBox="1"/>
-          <p:nvPr/>
-        </p:nvSpPr>
-        <p:spPr>
-          <a:xfrm>
-            <a:off x="768096" y="6446520"/>
-            <a:ext cx="10789920" cy="228600"/>
-          </a:xfrm>
-          <a:prstGeom prst="rect">
-            <a:avLst/>
-          </a:prstGeom>
-          <a:noFill/>
-        </p:spPr>
-        <p:txBody>
-          <a:bodyPr wrap="none">
-            <a:spAutoFit/>
-          </a:bodyPr>
-          <a:lstStyle/>
-          <a:p>
-            <a:pPr>
-              <a:defRPr sz="900">
-                <a:solidFill>
-                  <a:srgbClr val="9DB4C7"/>
-                </a:solidFill>
-                <a:latin typeface="Aptos"/>
-              </a:defRPr>
-            </a:pPr>
-            <a:r>
-              <a:t>Tlamatini | April 6, 2026 | bd06b4680877</a:t>
-            </a:r>
-          </a:p>
-        </p:txBody>
-      </p:sp>
-      <p:sp>
-        <p:nvSpPr>
-          <p:cNvPr id="7" name="TextBox 6"/>
-          <p:cNvSpPr txBox="1"/>
-          <p:nvPr/>
-        </p:nvSpPr>
-        <p:spPr>
-          <a:xfrm>
-            <a:off x="11338560" y="6400800"/>
-            <a:ext cx="457200" cy="274320"/>
-          </a:xfrm>
-          <a:prstGeom prst="rect">
-            <a:avLst/>
-          </a:prstGeom>
-          <a:noFill/>
-        </p:spPr>
-        <p:txBody>
-          <a:bodyPr wrap="none">
-            <a:spAutoFit/>
-          </a:bodyPr>
-          <a:lstStyle/>
-          <a:p>
-            <a:pPr algn="r">
-              <a:defRPr sz="900">
-                <a:solidFill>
-                  <a:srgbClr val="D4DEE7"/>
-                </a:solidFill>
-                <a:latin typeface="Aptos"/>
-              </a:defRPr>
-            </a:pPr>
-            <a:r>
-              <a:t>11</a:t>
-            </a:r>
-          </a:p>
-        </p:txBody>
-      </p:sp>
-      <p:sp>
-        <p:nvSpPr>
-          <p:cNvPr id="8" name="TextBox 7"/>
-          <p:cNvSpPr txBox="1"/>
-          <p:nvPr/>
-        </p:nvSpPr>
-        <p:spPr>
-          <a:xfrm>
-            <a:off x="868680" y="1783080"/>
-            <a:ext cx="10469880" cy="4389120"/>
-          </a:xfrm>
-          <a:prstGeom prst="rect">
-            <a:avLst/>
-          </a:prstGeom>
-          <a:noFill/>
-        </p:spPr>
-        <p:txBody>
-          <a:bodyPr wrap="square" lIns="0" rIns="0" tIns="0" anchor="t">
-            <a:spAutoFit/>
-          </a:bodyPr>
-          <a:lstStyle/>
-          <a:p>
-            <a:pPr>
-              <a:spcAft>
-                <a:spcPts val="800"/>
-              </a:spcAft>
-              <a:defRPr sz="1800">
-                <a:solidFill>
-                  <a:srgbClr val="EAF0F5"/>
-                </a:solidFill>
-                <a:latin typeface="Aptos"/>
-              </a:defRPr>
-            </a:pPr>
-            <a:r>
-              <a:t>• README.md: public contract, current architecture narrative, and changelog.</a:t>
-            </a:r>
-          </a:p>
-          <a:p>
-            <a:pPr>
-              <a:spcAft>
-                <a:spcPts val="800"/>
-              </a:spcAft>
-              <a:defRPr sz="1800">
-                <a:solidFill>
-                  <a:srgbClr val="EAF0F5"/>
-                </a:solidFill>
-                <a:latin typeface="Aptos"/>
-              </a:defRPr>
-            </a:pPr>
-            <a:r>
-              <a:t>• agent/capability_registry.py: scoring and selection layer for tools, wrapped agents, and MCP contexts.</a:t>
-            </a:r>
-          </a:p>
-          <a:p>
-            <a:pPr>
-              <a:spcAft>
-                <a:spcPts val="800"/>
-              </a:spcAft>
-              <a:defRPr sz="1800">
-                <a:solidFill>
-                  <a:srgbClr val="EAF0F5"/>
-                </a:solidFill>
-                <a:latin typeface="Aptos"/>
-              </a:defRPr>
-            </a:pPr>
-            <a:r>
-              <a:t>• agent/global_execution_planner.py: request-scoped DAG and execution modes.</a:t>
-            </a:r>
-          </a:p>
-          <a:p>
-            <a:pPr>
-              <a:spcAft>
-                <a:spcPts val="800"/>
-              </a:spcAft>
-              <a:defRPr sz="1800">
-                <a:solidFill>
-                  <a:srgbClr val="EAF0F5"/>
-                </a:solidFill>
-                <a:latin typeface="Aptos"/>
-              </a:defRPr>
-            </a:pPr>
-            <a:r>
-              <a:t>• agent/mcp_agent.py plus rag/factory.py plus rag/chains/unified.py: planner forwarding, dynamic binding, and execution loop.</a:t>
-            </a:r>
-          </a:p>
-          <a:p>
-            <a:pPr>
-              <a:spcAft>
-                <a:spcPts val="800"/>
-              </a:spcAft>
-              <a:defRPr sz="1800">
-                <a:solidFill>
-                  <a:srgbClr val="EAF0F5"/>
-                </a:solidFill>
-                <a:latin typeface="Aptos"/>
-              </a:defRPr>
-            </a:pPr>
-            <a:r>
-              <a:t>• agent/chain_files_search_lcel.py, agent/tools.py, and agent/global_state.py: runtime hardening, file narrowing, frozen paths, and console suppression.</a:t>
-            </a:r>
-          </a:p>
-        </p:txBody>
-      </p:sp>
-    </p:spTree>
-  </p:cSld>
-  <p:clrMapOvr>
-    <a:masterClrMapping/>
-  </p:clrMapOvr>
-</p:sld>
-</file>
-
-<file path=ppt/slides/slide12.xml><?xml version="1.0" encoding="utf-8"?>
-<p:sld xmlns:a="http://schemas.openxmlformats.org/drawingml/2006/main" xmlns:p="http://schemas.openxmlformats.org/presentationml/2006/main" xmlns:r="http://schemas.openxmlformats.org/officeDocument/2006/relationships">
-  <p:cSld>
-    <p:bg>
-      <p:bgPr>
-        <a:solidFill>
-          <a:srgbClr val="0C1623"/>
-        </a:solidFill>
-        <a:effectLst/>
-      </p:bgPr>
-    </p:bg>
-    <p:spTree>
-      <p:nvGrpSpPr>
-        <p:cNvPr id="1" name=""/>
-        <p:cNvGrpSpPr/>
-        <p:nvPr/>
-      </p:nvGrpSpPr>
-      <p:grpSpPr/>
-      <p:sp>
-        <p:nvSpPr>
-          <p:cNvPr id="2" name="Rectangle 1"/>
-          <p:cNvSpPr/>
-          <p:nvPr/>
-        </p:nvSpPr>
-        <p:spPr>
-          <a:xfrm>
-            <a:off x="0" y="0"/>
-            <a:ext cx="12191695" cy="411480"/>
-          </a:xfrm>
-          <a:prstGeom prst="rect">
-            <a:avLst/>
-          </a:prstGeom>
-          <a:solidFill>
-            <a:srgbClr val="184366"/>
-          </a:solidFill>
-          <a:ln>
-            <a:noFill/>
-          </a:ln>
-        </p:spPr>
-        <p:style>
-          <a:lnRef idx="1">
-            <a:schemeClr val="accent1"/>
-          </a:lnRef>
-          <a:fillRef idx="3">
-            <a:schemeClr val="accent1"/>
-          </a:fillRef>
-          <a:effectRef idx="2">
-            <a:schemeClr val="accent1"/>
-          </a:effectRef>
-          <a:fontRef idx="minor">
-            <a:schemeClr val="lt1"/>
-          </a:fontRef>
-        </p:style>
-        <p:txBody>
-          <a:bodyPr rtlCol="0" anchor="ctr"/>
-          <a:lstStyle/>
-          <a:p>
-            <a:pPr algn="ctr"/>
-          </a:p>
-        </p:txBody>
-      </p:sp>
-      <p:sp>
-        <p:nvSpPr>
-          <p:cNvPr id="3" name="Rectangle 2"/>
-          <p:cNvSpPr/>
-          <p:nvPr/>
-        </p:nvSpPr>
-        <p:spPr>
-          <a:xfrm>
-            <a:off x="411480" y="713232"/>
-            <a:ext cx="164592" cy="5394960"/>
-          </a:xfrm>
-          <a:prstGeom prst="rect">
-            <a:avLst/>
-          </a:prstGeom>
-          <a:solidFill>
-            <a:srgbClr val="E0B04A"/>
-          </a:solidFill>
-          <a:ln>
-            <a:noFill/>
-          </a:ln>
-        </p:spPr>
-        <p:style>
-          <a:lnRef idx="1">
-            <a:schemeClr val="accent1"/>
-          </a:lnRef>
-          <a:fillRef idx="3">
-            <a:schemeClr val="accent1"/>
-          </a:fillRef>
-          <a:effectRef idx="2">
-            <a:schemeClr val="accent1"/>
-          </a:effectRef>
-          <a:fontRef idx="minor">
-            <a:schemeClr val="lt1"/>
-          </a:fontRef>
-        </p:style>
-        <p:txBody>
-          <a:bodyPr rtlCol="0" anchor="ctr"/>
-          <a:lstStyle/>
-          <a:p>
-            <a:pPr algn="ctr"/>
-          </a:p>
-        </p:txBody>
-      </p:sp>
-      <p:sp>
-        <p:nvSpPr>
-          <p:cNvPr id="4" name="TextBox 3"/>
-          <p:cNvSpPr txBox="1"/>
-          <p:nvPr/>
-        </p:nvSpPr>
-        <p:spPr>
-          <a:xfrm>
-            <a:off x="749808" y="658368"/>
-            <a:ext cx="10607040" cy="658368"/>
-          </a:xfrm>
-          <a:prstGeom prst="rect">
-            <a:avLst/>
-          </a:prstGeom>
-          <a:noFill/>
-        </p:spPr>
-        <p:txBody>
-          <a:bodyPr wrap="none">
-            <a:spAutoFit/>
-          </a:bodyPr>
-          <a:lstStyle/>
-          <a:p>
-            <a:pPr>
-              <a:defRPr b="1" sz="2400">
-                <a:solidFill>
-                  <a:srgbClr val="F4F8FB"/>
-                </a:solidFill>
-                <a:latin typeface="Aptos Display"/>
-              </a:defRPr>
-            </a:pPr>
-            <a:r>
-              <a:t>Verification and current reading</a:t>
-            </a:r>
-          </a:p>
-        </p:txBody>
-      </p:sp>
-      <p:sp>
-        <p:nvSpPr>
-          <p:cNvPr id="5" name="TextBox 4"/>
-          <p:cNvSpPr txBox="1"/>
-          <p:nvPr/>
-        </p:nvSpPr>
-        <p:spPr>
-          <a:xfrm>
-            <a:off x="768096" y="1261872"/>
-            <a:ext cx="10424160" cy="457200"/>
-          </a:xfrm>
-          <a:prstGeom prst="rect">
-            <a:avLst/>
-          </a:prstGeom>
-          <a:noFill/>
-        </p:spPr>
-        <p:txBody>
-          <a:bodyPr wrap="none">
-            <a:spAutoFit/>
-          </a:bodyPr>
-          <a:lstStyle/>
-          <a:p>
-            <a:pPr>
-              <a:defRPr sz="1100">
-                <a:solidFill>
-                  <a:srgbClr val="B9CFE0"/>
-                </a:solidFill>
-                <a:latin typeface="Aptos"/>
-              </a:defRPr>
-            </a:pPr>
-            <a:r>
-              <a:t>The refreshed documentation is backed by test results, not by optimistic paraphrase.</a:t>
-            </a:r>
-          </a:p>
-        </p:txBody>
-      </p:sp>
-      <p:sp>
-        <p:nvSpPr>
-          <p:cNvPr id="6" name="TextBox 5"/>
-          <p:cNvSpPr txBox="1"/>
-          <p:nvPr/>
-        </p:nvSpPr>
-        <p:spPr>
-          <a:xfrm>
-            <a:off x="768096" y="6446520"/>
-            <a:ext cx="10789920" cy="228600"/>
-          </a:xfrm>
-          <a:prstGeom prst="rect">
-            <a:avLst/>
-          </a:prstGeom>
-          <a:noFill/>
-        </p:spPr>
-        <p:txBody>
-          <a:bodyPr wrap="none">
-            <a:spAutoFit/>
-          </a:bodyPr>
-          <a:lstStyle/>
-          <a:p>
-            <a:pPr>
-              <a:defRPr sz="900">
-                <a:solidFill>
-                  <a:srgbClr val="9DB4C7"/>
-                </a:solidFill>
-                <a:latin typeface="Aptos"/>
-              </a:defRPr>
-            </a:pPr>
-            <a:r>
-              <a:t>Tlamatini | April 6, 2026 | bd06b4680877</a:t>
-            </a:r>
-          </a:p>
-        </p:txBody>
-      </p:sp>
-      <p:sp>
-        <p:nvSpPr>
-          <p:cNvPr id="7" name="TextBox 6"/>
-          <p:cNvSpPr txBox="1"/>
-          <p:nvPr/>
-        </p:nvSpPr>
-        <p:spPr>
-          <a:xfrm>
-            <a:off x="11338560" y="6400800"/>
-            <a:ext cx="457200" cy="274320"/>
-          </a:xfrm>
-          <a:prstGeom prst="rect">
-            <a:avLst/>
-          </a:prstGeom>
-          <a:noFill/>
-        </p:spPr>
-        <p:txBody>
-          <a:bodyPr wrap="none">
-            <a:spAutoFit/>
-          </a:bodyPr>
-          <a:lstStyle/>
-          <a:p>
-            <a:pPr algn="r">
-              <a:defRPr sz="900">
-                <a:solidFill>
-                  <a:srgbClr val="D4DEE7"/>
-                </a:solidFill>
-                <a:latin typeface="Aptos"/>
-              </a:defRPr>
-            </a:pPr>
-            <a:r>
-              <a:t>12</a:t>
-            </a:r>
-          </a:p>
-        </p:txBody>
-      </p:sp>
-      <p:sp>
-        <p:nvSpPr>
-          <p:cNvPr id="8" name="TextBox 7"/>
-          <p:cNvSpPr txBox="1"/>
-          <p:nvPr/>
-        </p:nvSpPr>
-        <p:spPr>
-          <a:xfrm>
-            <a:off x="868680" y="1783080"/>
-            <a:ext cx="10469880" cy="4389120"/>
-          </a:xfrm>
-          <a:prstGeom prst="rect">
-            <a:avLst/>
-          </a:prstGeom>
-          <a:noFill/>
-        </p:spPr>
-        <p:txBody>
-          <a:bodyPr wrap="square" lIns="0" rIns="0" tIns="0" anchor="t">
-            <a:spAutoFit/>
-          </a:bodyPr>
-          <a:lstStyle/>
-          <a:p>
-            <a:pPr>
-              <a:spcAft>
-                <a:spcPts val="800"/>
-              </a:spcAft>
-              <a:defRPr sz="1800">
-                <a:solidFill>
-                  <a:srgbClr val="EAF0F5"/>
-                </a:solidFill>
-                <a:latin typeface="Aptos"/>
-              </a:defRPr>
-            </a:pPr>
-            <a:r>
-              <a:t>• python Tlamatini/manage.py test agent.tests --verbosity 1 completed with 63/63 passing tests in this workspace.</a:t>
-            </a:r>
-          </a:p>
-          <a:p>
-            <a:pPr>
-              <a:spcAft>
-                <a:spcPts val="800"/>
-              </a:spcAft>
-              <a:defRPr sz="1800">
-                <a:solidFill>
-                  <a:srgbClr val="EAF0F5"/>
-                </a:solidFill>
-                <a:latin typeface="Aptos"/>
-              </a:defRPr>
-            </a:pPr>
-            <a:r>
-              <a:t>• Focused regression coverage now includes planner creation, context gating, prompt bypass scope, background launch suppression, and frozen-mode compatibility.</a:t>
-            </a:r>
-          </a:p>
-          <a:p>
-            <a:pPr>
-              <a:spcAft>
-                <a:spcPts val="800"/>
-              </a:spcAft>
-              <a:defRPr sz="1800">
-                <a:solidFill>
-                  <a:srgbClr val="EAF0F5"/>
-                </a:solidFill>
-                <a:latin typeface="Aptos"/>
-              </a:defRPr>
-            </a:pPr>
-            <a:r>
-              <a:t>• The strongest reading of the current product is this: Multi-Turn is now a real opt-in orchestration mode, and the legacy chat path is still preserved exactly when the checkbox is off.</a:t>
             </a:r>
           </a:p>
         </p:txBody>
@@ -4792,7 +4542,7 @@
     <p:bg>
       <p:bgPr>
         <a:solidFill>
-          <a:srgbClr val="0C1623"/>
+          <a:srgbClr val="F8FAFC"/>
         </a:solidFill>
         <a:effectLst/>
       </p:bgPr>
@@ -4806,23 +4556,90 @@
       <p:grpSpPr/>
       <p:sp>
         <p:nvSpPr>
-          <p:cNvPr id="2" name="Rectangle 1"/>
+          <p:cNvPr id="2" name="Title 1"/>
+          <p:cNvSpPr>
+            <a:spLocks noGrp="1"/>
+          </p:cNvSpPr>
+          <p:nvPr>
+            <p:ph type="title"/>
+          </p:nvPr>
+        </p:nvSpPr>
+        <p:spPr/>
+        <p:txBody>
+          <a:bodyPr/>
+          <a:lstStyle/>
+          <a:p>
+            <a:pPr>
+              <a:defRPr b="1" sz="2600">
+                <a:solidFill>
+                  <a:srgbClr val="0F172A"/>
+                </a:solidFill>
+                <a:latin typeface="Aptos Display"/>
+              </a:defRPr>
+            </a:pPr>
+            <a:r>
+              <a:t>Why the documentation set needed a rebuild</a:t>
+            </a:r>
+          </a:p>
+        </p:txBody>
+      </p:sp>
+      <p:sp>
+        <p:nvSpPr>
+          <p:cNvPr id="3" name="TextBox 2"/>
+          <p:cNvSpPr txBox="1"/>
+          <p:nvPr/>
+        </p:nvSpPr>
+        <p:spPr>
+          <a:xfrm>
+            <a:off x="640080" y="960120"/>
+            <a:ext cx="10789920" cy="502920"/>
+          </a:xfrm>
+          <a:prstGeom prst="rect">
+            <a:avLst/>
+          </a:prstGeom>
+          <a:noFill/>
+        </p:spPr>
+        <p:txBody>
+          <a:bodyPr wrap="square">
+            <a:spAutoFit/>
+          </a:bodyPr>
+          <a:lstStyle/>
+          <a:p>
+            <a:pPr>
+              <a:defRPr sz="1400">
+                <a:solidFill>
+                  <a:srgbClr val="475569"/>
+                </a:solidFill>
+                <a:latin typeface="Aptos"/>
+              </a:defRPr>
+            </a:pPr>
+            <a:r>
+              <a:t>The earlier PDF and deck stopped at the April 6 reading and did not include the latest Parametrizer target-log preservation behavior or the current verified counts.</a:t>
+            </a:r>
+          </a:p>
+        </p:txBody>
+      </p:sp>
+      <p:sp>
+        <p:nvSpPr>
+          <p:cNvPr id="4" name="Rounded Rectangle 3"/>
           <p:cNvSpPr/>
           <p:nvPr/>
         </p:nvSpPr>
         <p:spPr>
           <a:xfrm>
-            <a:off x="0" y="0"/>
-            <a:ext cx="12191695" cy="411480"/>
-          </a:xfrm>
-          <a:prstGeom prst="rect">
+            <a:off x="640080" y="1554480"/>
+            <a:ext cx="5212080" cy="3474720"/>
+          </a:xfrm>
+          <a:prstGeom prst="roundRect">
             <a:avLst/>
           </a:prstGeom>
           <a:solidFill>
-            <a:srgbClr val="184366"/>
+            <a:srgbClr val="FFFFFF"/>
           </a:solidFill>
           <a:ln>
-            <a:noFill/>
+            <a:solidFill>
+              <a:srgbClr val="CBD5E1"/>
+            </a:solidFill>
           </a:ln>
         </p:spPr>
         <p:style>
@@ -4840,32 +4657,109 @@
           </a:fontRef>
         </p:style>
         <p:txBody>
-          <a:bodyPr rtlCol="0" anchor="ctr"/>
-          <a:lstStyle/>
-          <a:p>
-            <a:pPr algn="ctr"/>
-          </a:p>
-        </p:txBody>
-      </p:sp>
-      <p:sp>
-        <p:nvSpPr>
-          <p:cNvPr id="3" name="Rectangle 2"/>
+          <a:bodyPr rtlCol="0" anchor="t" wrap="square" lIns="164592" rIns="128016" tIns="91440" bIns="73152">
+            <a:normAutofit/>
+          </a:bodyPr>
+          <a:lstStyle/>
+          <a:p>
+            <a:pPr algn="ctr">
+              <a:spcAft>
+                <a:spcPts val="700"/>
+              </a:spcAft>
+              <a:defRPr sz="1600">
+                <a:solidFill>
+                  <a:srgbClr val="0F172A"/>
+                </a:solidFill>
+                <a:latin typeface="Aptos"/>
+              </a:defRPr>
+            </a:pPr>
+            <a:r>
+              <a:rPr sz="1400">
+                <a:latin typeface="Aptos"/>
+              </a:rPr>
+              <a:t>- The old artifacts still carried stale counts such as 56 template-agent directories and 32 wrapped launchers.</a:t>
+            </a:r>
+          </a:p>
+          <a:p>
+            <a:pPr>
+              <a:spcAft>
+                <a:spcPts val="700"/>
+              </a:spcAft>
+              <a:defRPr sz="1600">
+                <a:solidFill>
+                  <a:srgbClr val="0F172A"/>
+                </a:solidFill>
+                <a:latin typeface="Aptos"/>
+              </a:defRPr>
+            </a:pPr>
+            <a:r>
+              <a:rPr sz="1400">
+                <a:latin typeface="Aptos"/>
+              </a:rPr>
+              <a:t>- The current workspace now has 57 template-agent directories, 31 wrapped launchers, 70 test methods, and a clean Ruff run.</a:t>
+            </a:r>
+          </a:p>
+          <a:p>
+            <a:pPr>
+              <a:spcAft>
+                <a:spcPts val="700"/>
+              </a:spcAft>
+              <a:defRPr sz="1600">
+                <a:solidFill>
+                  <a:srgbClr val="0F172A"/>
+                </a:solidFill>
+                <a:latin typeface="Aptos"/>
+              </a:defRPr>
+            </a:pPr>
+            <a:r>
+              <a:rPr sz="1400">
+                <a:latin typeface="Aptos"/>
+              </a:rPr>
+              <a:t>- The latest Parametrizer change preserves each finished target log by segment number, which materially changes the operational story.</a:t>
+            </a:r>
+          </a:p>
+          <a:p>
+            <a:pPr>
+              <a:spcAft>
+                <a:spcPts val="700"/>
+              </a:spcAft>
+              <a:defRPr sz="1600">
+                <a:solidFill>
+                  <a:srgbClr val="0F172A"/>
+                </a:solidFill>
+                <a:latin typeface="Aptos"/>
+              </a:defRPr>
+            </a:pPr>
+            <a:r>
+              <a:rPr sz="1400">
+                <a:latin typeface="Aptos"/>
+              </a:rPr>
+              <a:t>- The refreshed artifacts therefore had to be regenerated from the current workspace instead of patched by hand.</a:t>
+            </a:r>
+          </a:p>
+        </p:txBody>
+      </p:sp>
+      <p:sp>
+        <p:nvSpPr>
+          <p:cNvPr id="5" name="Rounded Rectangle 4"/>
           <p:cNvSpPr/>
           <p:nvPr/>
         </p:nvSpPr>
         <p:spPr>
           <a:xfrm>
-            <a:off x="411480" y="713232"/>
-            <a:ext cx="164592" cy="5394960"/>
-          </a:xfrm>
-          <a:prstGeom prst="rect">
+            <a:off x="6126480" y="1554480"/>
+            <a:ext cx="4846320" cy="3474720"/>
+          </a:xfrm>
+          <a:prstGeom prst="roundRect">
             <a:avLst/>
           </a:prstGeom>
           <a:solidFill>
-            <a:srgbClr val="E0B04A"/>
+            <a:srgbClr val="F1F5F9"/>
           </a:solidFill>
           <a:ln>
-            <a:noFill/>
+            <a:solidFill>
+              <a:srgbClr val="CBD5E1"/>
+            </a:solidFill>
           </a:ln>
         </p:spPr>
         <p:style>
@@ -4883,6 +4777,124 @@
           </a:fontRef>
         </p:style>
         <p:txBody>
+          <a:bodyPr rtlCol="0" anchor="t" wrap="square" lIns="164592" rIns="128016" tIns="91440" bIns="73152">
+            <a:normAutofit/>
+          </a:bodyPr>
+          <a:lstStyle/>
+          <a:p>
+            <a:pPr algn="ctr">
+              <a:spcAft>
+                <a:spcPts val="700"/>
+              </a:spcAft>
+              <a:defRPr sz="1600">
+                <a:solidFill>
+                  <a:srgbClr val="0F172A"/>
+                </a:solidFill>
+                <a:latin typeface="Aptos"/>
+              </a:defRPr>
+            </a:pPr>
+            <a:r>
+              <a:rPr sz="1400">
+                <a:latin typeface="Aptos"/>
+              </a:rPr>
+              <a:t>- Checked Multi-Turn is still the request-scoped orchestration path.</a:t>
+            </a:r>
+          </a:p>
+          <a:p>
+            <a:pPr>
+              <a:spcAft>
+                <a:spcPts val="700"/>
+              </a:spcAft>
+              <a:defRPr sz="1600">
+                <a:solidFill>
+                  <a:srgbClr val="0F172A"/>
+                </a:solidFill>
+                <a:latin typeface="Aptos"/>
+              </a:defRPr>
+            </a:pPr>
+            <a:r>
+              <a:rPr sz="1400">
+                <a:latin typeface="Aptos"/>
+              </a:rPr>
+              <a:t>- Unchecked Multi-Turn still preserves the legacy one-shot behavior by design.</a:t>
+            </a:r>
+          </a:p>
+          <a:p>
+            <a:pPr>
+              <a:spcAft>
+                <a:spcPts val="700"/>
+              </a:spcAft>
+              <a:defRPr sz="1600">
+                <a:solidFill>
+                  <a:srgbClr val="0F172A"/>
+                </a:solidFill>
+                <a:latin typeface="Aptos"/>
+              </a:defRPr>
+            </a:pPr>
+            <a:r>
+              <a:rPr sz="1400">
+                <a:latin typeface="Aptos"/>
+              </a:rPr>
+              <a:t>- Parametrizer now preserves config state, cursor state, and target run logs per segment.</a:t>
+            </a:r>
+          </a:p>
+          <a:p>
+            <a:pPr>
+              <a:spcAft>
+                <a:spcPts val="700"/>
+              </a:spcAft>
+              <a:defRPr sz="1600">
+                <a:solidFill>
+                  <a:srgbClr val="0F172A"/>
+                </a:solidFill>
+                <a:latin typeface="Aptos"/>
+              </a:defRPr>
+            </a:pPr>
+            <a:r>
+              <a:rPr sz="1400">
+                <a:latin typeface="Aptos"/>
+              </a:rPr>
+              <a:t>- The refreshed narrative is grounded in the current README, current tests, and current lint status.</a:t>
+            </a:r>
+          </a:p>
+        </p:txBody>
+      </p:sp>
+      <p:sp>
+        <p:nvSpPr>
+          <p:cNvPr id="6" name="Rectangle 5"/>
+          <p:cNvSpPr/>
+          <p:nvPr/>
+        </p:nvSpPr>
+        <p:spPr>
+          <a:xfrm>
+            <a:off x="411480" y="6309360"/>
+            <a:ext cx="11384280" cy="18288"/>
+          </a:xfrm>
+          <a:prstGeom prst="rect">
+            <a:avLst/>
+          </a:prstGeom>
+          <a:solidFill>
+            <a:srgbClr val="CBD5E1"/>
+          </a:solidFill>
+          <a:ln>
+            <a:noFill/>
+          </a:ln>
+        </p:spPr>
+        <p:style>
+          <a:lnRef idx="1">
+            <a:schemeClr val="accent1"/>
+          </a:lnRef>
+          <a:fillRef idx="3">
+            <a:schemeClr val="accent1"/>
+          </a:fillRef>
+          <a:effectRef idx="2">
+            <a:schemeClr val="accent1"/>
+          </a:effectRef>
+          <a:fontRef idx="minor">
+            <a:schemeClr val="lt1"/>
+          </a:fontRef>
+        </p:style>
+        <p:txBody>
           <a:bodyPr rtlCol="0" anchor="ctr"/>
           <a:lstStyle/>
           <a:p>
@@ -4892,14 +4904,14 @@
       </p:sp>
       <p:sp>
         <p:nvSpPr>
-          <p:cNvPr id="4" name="TextBox 3"/>
+          <p:cNvPr id="7" name="TextBox 6"/>
           <p:cNvSpPr txBox="1"/>
           <p:nvPr/>
         </p:nvSpPr>
         <p:spPr>
           <a:xfrm>
-            <a:off x="749808" y="658368"/>
-            <a:ext cx="10607040" cy="658368"/>
+            <a:off x="457200" y="6355080"/>
+            <a:ext cx="6400800" cy="228600"/>
           </a:xfrm>
           <a:prstGeom prst="rect">
             <a:avLst/>
@@ -4913,29 +4925,29 @@
           <a:lstStyle/>
           <a:p>
             <a:pPr>
-              <a:defRPr b="1" sz="2400">
-                <a:solidFill>
-                  <a:srgbClr val="F4F8FB"/>
-                </a:solidFill>
-                <a:latin typeface="Aptos Display"/>
-              </a:defRPr>
-            </a:pPr>
-            <a:r>
-              <a:t>Why the doc set needed a rebuild</a:t>
-            </a:r>
-          </a:p>
-        </p:txBody>
-      </p:sp>
-      <p:sp>
-        <p:nvSpPr>
-          <p:cNvPr id="5" name="TextBox 4"/>
+              <a:defRPr sz="900">
+                <a:solidFill>
+                  <a:srgbClr val="475569"/>
+                </a:solidFill>
+                <a:latin typeface="Aptos"/>
+              </a:defRPr>
+            </a:pPr>
+            <a:r>
+              <a:t>Current workspace snapshot | April 8, 2026</a:t>
+            </a:r>
+          </a:p>
+        </p:txBody>
+      </p:sp>
+      <p:sp>
+        <p:nvSpPr>
+          <p:cNvPr id="8" name="TextBox 7"/>
           <p:cNvSpPr txBox="1"/>
           <p:nvPr/>
         </p:nvSpPr>
         <p:spPr>
           <a:xfrm>
-            <a:off x="768096" y="1261872"/>
-            <a:ext cx="10424160" cy="457200"/>
+            <a:off x="10972800" y="6327648"/>
+            <a:ext cx="548640" cy="228600"/>
           </a:xfrm>
           <a:prstGeom prst="rect">
             <a:avLst/>
@@ -4948,175 +4960,16 @@
           </a:bodyPr>
           <a:lstStyle/>
           <a:p>
-            <a:pPr>
-              <a:defRPr sz="1100">
-                <a:solidFill>
-                  <a:srgbClr val="B9CFE0"/>
-                </a:solidFill>
-                <a:latin typeface="Aptos"/>
-              </a:defRPr>
-            </a:pPr>
-            <a:r>
-              <a:t>The current chat surface is no longer just an explicit loop. It is now an opt-in orchestrated path with preserved legacy behavior when unchecked.</a:t>
-            </a:r>
-          </a:p>
-        </p:txBody>
-      </p:sp>
-      <p:sp>
-        <p:nvSpPr>
-          <p:cNvPr id="6" name="TextBox 5"/>
-          <p:cNvSpPr txBox="1"/>
-          <p:nvPr/>
-        </p:nvSpPr>
-        <p:spPr>
-          <a:xfrm>
-            <a:off x="768096" y="6446520"/>
-            <a:ext cx="10789920" cy="228600"/>
-          </a:xfrm>
-          <a:prstGeom prst="rect">
-            <a:avLst/>
-          </a:prstGeom>
-          <a:noFill/>
-        </p:spPr>
-        <p:txBody>
-          <a:bodyPr wrap="none">
-            <a:spAutoFit/>
-          </a:bodyPr>
-          <a:lstStyle/>
-          <a:p>
-            <a:pPr>
-              <a:defRPr sz="900">
-                <a:solidFill>
-                  <a:srgbClr val="9DB4C7"/>
-                </a:solidFill>
-                <a:latin typeface="Aptos"/>
-              </a:defRPr>
-            </a:pPr>
-            <a:r>
-              <a:t>Tlamatini | April 6, 2026 | bd06b4680877</a:t>
-            </a:r>
-          </a:p>
-        </p:txBody>
-      </p:sp>
-      <p:sp>
-        <p:nvSpPr>
-          <p:cNvPr id="7" name="TextBox 6"/>
-          <p:cNvSpPr txBox="1"/>
-          <p:nvPr/>
-        </p:nvSpPr>
-        <p:spPr>
-          <a:xfrm>
-            <a:off x="11338560" y="6400800"/>
-            <a:ext cx="457200" cy="274320"/>
-          </a:xfrm>
-          <a:prstGeom prst="rect">
-            <a:avLst/>
-          </a:prstGeom>
-          <a:noFill/>
-        </p:spPr>
-        <p:txBody>
-          <a:bodyPr wrap="none">
-            <a:spAutoFit/>
-          </a:bodyPr>
-          <a:lstStyle/>
-          <a:p>
             <a:pPr algn="r">
               <a:defRPr sz="900">
                 <a:solidFill>
-                  <a:srgbClr val="D4DEE7"/>
+                  <a:srgbClr val="475569"/>
                 </a:solidFill>
                 <a:latin typeface="Aptos"/>
               </a:defRPr>
             </a:pPr>
             <a:r>
               <a:t>2</a:t>
-            </a:r>
-          </a:p>
-        </p:txBody>
-      </p:sp>
-      <p:sp>
-        <p:nvSpPr>
-          <p:cNvPr id="8" name="TextBox 7"/>
-          <p:cNvSpPr txBox="1"/>
-          <p:nvPr/>
-        </p:nvSpPr>
-        <p:spPr>
-          <a:xfrm>
-            <a:off x="868680" y="1783080"/>
-            <a:ext cx="10469880" cy="4389120"/>
-          </a:xfrm>
-          <a:prstGeom prst="rect">
-            <a:avLst/>
-          </a:prstGeom>
-          <a:noFill/>
-        </p:spPr>
-        <p:txBody>
-          <a:bodyPr wrap="square" lIns="0" rIns="0" tIns="0" anchor="t">
-            <a:spAutoFit/>
-          </a:bodyPr>
-          <a:lstStyle/>
-          <a:p>
-            <a:pPr>
-              <a:spcAft>
-                <a:spcPts val="800"/>
-              </a:spcAft>
-              <a:defRPr sz="1800">
-                <a:solidFill>
-                  <a:srgbClr val="EAF0F5"/>
-                </a:solidFill>
-                <a:latin typeface="Aptos"/>
-              </a:defRPr>
-            </a:pPr>
-            <a:r>
-              <a:t>• The toolbar now exposes Multi-Turn as a user-visible execution mode beside Clear history.</a:t>
-            </a:r>
-          </a:p>
-          <a:p>
-            <a:pPr>
-              <a:spcAft>
-                <a:spcPts val="800"/>
-              </a:spcAft>
-              <a:defRPr sz="1800">
-                <a:solidFill>
-                  <a:srgbClr val="EAF0F5"/>
-                </a:solidFill>
-                <a:latin typeface="Aptos"/>
-              </a:defRPr>
-            </a:pPr>
-            <a:r>
-              <a:t>• Checked mode adds capability selection, context selection, and a request-scoped execution DAG.</a:t>
-            </a:r>
-          </a:p>
-          <a:p>
-            <a:pPr>
-              <a:spcAft>
-                <a:spcPts val="800"/>
-              </a:spcAft>
-              <a:defRPr sz="1800">
-                <a:solidFill>
-                  <a:srgbClr val="EAF0F5"/>
-                </a:solidFill>
-                <a:latin typeface="Aptos"/>
-              </a:defRPr>
-            </a:pPr>
-            <a:r>
-              <a:t>• Unchecked mode stays intentionally legacy: original prompt validation, legacy prefetch, full-tool binding, visible console launches.</a:t>
-            </a:r>
-          </a:p>
-          <a:p>
-            <a:pPr>
-              <a:spcAft>
-                <a:spcPts val="800"/>
-              </a:spcAft>
-              <a:defRPr sz="1800">
-                <a:solidFill>
-                  <a:srgbClr val="EAF0F5"/>
-                </a:solidFill>
-                <a:latin typeface="Aptos"/>
-              </a:defRPr>
-            </a:pPr>
-            <a:r>
-              <a:t>• The PDF and the deck had to be rebuilt because the old narrative no longer matched how the chat system actually behaves.</a:t>
             </a:r>
           </a:p>
         </p:txBody>
@@ -5135,7 +4988,7 @@
     <p:bg>
       <p:bgPr>
         <a:solidFill>
-          <a:srgbClr val="0C1623"/>
+          <a:srgbClr val="F8FAFC"/>
         </a:solidFill>
         <a:effectLst/>
       </p:bgPr>
@@ -5149,20 +5002,85 @@
       <p:grpSpPr/>
       <p:sp>
         <p:nvSpPr>
-          <p:cNvPr id="2" name="Rectangle 1"/>
+          <p:cNvPr id="2" name="Title 1"/>
+          <p:cNvSpPr>
+            <a:spLocks noGrp="1"/>
+          </p:cNvSpPr>
+          <p:nvPr>
+            <p:ph type="title"/>
+          </p:nvPr>
+        </p:nvSpPr>
+        <p:spPr/>
+        <p:txBody>
+          <a:bodyPr/>
+          <a:lstStyle/>
+          <a:p>
+            <a:pPr>
+              <a:defRPr b="1" sz="2600">
+                <a:solidFill>
+                  <a:srgbClr val="0F172A"/>
+                </a:solidFill>
+                <a:latin typeface="Aptos Display"/>
+              </a:defRPr>
+            </a:pPr>
+            <a:r>
+              <a:t>Current chat execution model</a:t>
+            </a:r>
+          </a:p>
+        </p:txBody>
+      </p:sp>
+      <p:sp>
+        <p:nvSpPr>
+          <p:cNvPr id="3" name="TextBox 2"/>
+          <p:cNvSpPr txBox="1"/>
+          <p:nvPr/>
+        </p:nvSpPr>
+        <p:spPr>
+          <a:xfrm>
+            <a:off x="640080" y="960120"/>
+            <a:ext cx="10789920" cy="502920"/>
+          </a:xfrm>
+          <a:prstGeom prst="rect">
+            <a:avLst/>
+          </a:prstGeom>
+          <a:noFill/>
+        </p:spPr>
+        <p:txBody>
+          <a:bodyPr wrap="square">
+            <a:spAutoFit/>
+          </a:bodyPr>
+          <a:lstStyle/>
+          <a:p>
+            <a:pPr>
+              <a:defRPr sz="1400">
+                <a:solidFill>
+                  <a:srgbClr val="475569"/>
+                </a:solidFill>
+                <a:latin typeface="Aptos"/>
+              </a:defRPr>
+            </a:pPr>
+            <a:r>
+              <a:t>The chat surface now exposes two explicit execution modes selected from the toolbar.</a:t>
+            </a:r>
+          </a:p>
+        </p:txBody>
+      </p:sp>
+      <p:sp>
+        <p:nvSpPr>
+          <p:cNvPr id="4" name="Rectangle 3"/>
           <p:cNvSpPr/>
           <p:nvPr/>
         </p:nvSpPr>
         <p:spPr>
           <a:xfrm>
-            <a:off x="0" y="0"/>
-            <a:ext cx="12191695" cy="411480"/>
+            <a:off x="640080" y="1508760"/>
+            <a:ext cx="128016" cy="329184"/>
           </a:xfrm>
           <a:prstGeom prst="rect">
             <a:avLst/>
           </a:prstGeom>
           <a:solidFill>
-            <a:srgbClr val="184366"/>
+            <a:srgbClr val="0D9488"/>
           </a:solidFill>
           <a:ln>
             <a:noFill/>
@@ -5192,23 +5110,61 @@
       </p:sp>
       <p:sp>
         <p:nvSpPr>
-          <p:cNvPr id="3" name="Rectangle 2"/>
+          <p:cNvPr id="5" name="TextBox 4"/>
+          <p:cNvSpPr txBox="1"/>
+          <p:nvPr/>
+        </p:nvSpPr>
+        <p:spPr>
+          <a:xfrm>
+            <a:off x="841248" y="1490472"/>
+            <a:ext cx="5303520" cy="365760"/>
+          </a:xfrm>
+          <a:prstGeom prst="rect">
+            <a:avLst/>
+          </a:prstGeom>
+          <a:noFill/>
+        </p:spPr>
+        <p:txBody>
+          <a:bodyPr wrap="none">
+            <a:spAutoFit/>
+          </a:bodyPr>
+          <a:lstStyle/>
+          <a:p>
+            <a:pPr>
+              <a:defRPr b="1" sz="1800">
+                <a:solidFill>
+                  <a:srgbClr val="0F172A"/>
+                </a:solidFill>
+                <a:latin typeface="Aptos Display"/>
+              </a:defRPr>
+            </a:pPr>
+            <a:r>
+              <a:t>Checked Multi-Turn</a:t>
+            </a:r>
+          </a:p>
+        </p:txBody>
+      </p:sp>
+      <p:sp>
+        <p:nvSpPr>
+          <p:cNvPr id="6" name="Rounded Rectangle 5"/>
           <p:cNvSpPr/>
           <p:nvPr/>
         </p:nvSpPr>
         <p:spPr>
           <a:xfrm>
-            <a:off x="411480" y="713232"/>
-            <a:ext cx="164592" cy="5394960"/>
-          </a:xfrm>
-          <a:prstGeom prst="rect">
+            <a:off x="640080" y="1828800"/>
+            <a:ext cx="5212080" cy="2926080"/>
+          </a:xfrm>
+          <a:prstGeom prst="roundRect">
             <a:avLst/>
           </a:prstGeom>
           <a:solidFill>
-            <a:srgbClr val="E0B04A"/>
+            <a:srgbClr val="FFFFFF"/>
           </a:solidFill>
           <a:ln>
-            <a:noFill/>
+            <a:solidFill>
+              <a:srgbClr val="CBD5E1"/>
+            </a:solidFill>
           </a:ln>
         </p:spPr>
         <p:style>
@@ -5226,178 +5182,107 @@
           </a:fontRef>
         </p:style>
         <p:txBody>
-          <a:bodyPr rtlCol="0" anchor="ctr"/>
-          <a:lstStyle/>
-          <a:p>
-            <a:pPr algn="ctr"/>
-          </a:p>
-        </p:txBody>
-      </p:sp>
-      <p:sp>
-        <p:nvSpPr>
-          <p:cNvPr id="4" name="TextBox 3"/>
-          <p:cNvSpPr txBox="1"/>
-          <p:nvPr/>
-        </p:nvSpPr>
-        <p:spPr>
-          <a:xfrm>
-            <a:off x="749808" y="658368"/>
-            <a:ext cx="10607040" cy="658368"/>
+          <a:bodyPr rtlCol="0" anchor="t" wrap="square" lIns="164592" rIns="128016" tIns="91440" bIns="73152">
+            <a:normAutofit/>
+          </a:bodyPr>
+          <a:lstStyle/>
+          <a:p>
+            <a:pPr algn="ctr">
+              <a:spcAft>
+                <a:spcPts val="700"/>
+              </a:spcAft>
+              <a:defRPr sz="1600">
+                <a:solidFill>
+                  <a:srgbClr val="0F172A"/>
+                </a:solidFill>
+                <a:latin typeface="Aptos"/>
+              </a:defRPr>
+            </a:pPr>
+            <a:r>
+              <a:rPr sz="1400">
+                <a:latin typeface="Aptos"/>
+              </a:rPr>
+              <a:t>- Scores tools, wrapped agents, and MCP-backed contexts per request.</a:t>
+            </a:r>
+          </a:p>
+          <a:p>
+            <a:pPr>
+              <a:spcAft>
+                <a:spcPts val="700"/>
+              </a:spcAft>
+              <a:defRPr sz="1600">
+                <a:solidFill>
+                  <a:srgbClr val="0F172A"/>
+                </a:solidFill>
+                <a:latin typeface="Aptos"/>
+              </a:defRPr>
+            </a:pPr>
+            <a:r>
+              <a:rPr sz="1400">
+                <a:latin typeface="Aptos"/>
+              </a:rPr>
+              <a:t>- Builds a request-scoped execution DAG with prefetch, execute, monitor, and answer stages.</a:t>
+            </a:r>
+          </a:p>
+          <a:p>
+            <a:pPr>
+              <a:spcAft>
+                <a:spcPts val="700"/>
+              </a:spcAft>
+              <a:defRPr sz="1600">
+                <a:solidFill>
+                  <a:srgbClr val="0F172A"/>
+                </a:solidFill>
+                <a:latin typeface="Aptos"/>
+              </a:defRPr>
+            </a:pPr>
+            <a:r>
+              <a:rPr sz="1400">
+                <a:latin typeface="Aptos"/>
+              </a:rPr>
+              <a:t>- Can prefetch file and system context before tool execution.</a:t>
+            </a:r>
+          </a:p>
+          <a:p>
+            <a:pPr>
+              <a:spcAft>
+                <a:spcPts val="700"/>
+              </a:spcAft>
+              <a:defRPr sz="1600">
+                <a:solidFill>
+                  <a:srgbClr val="0F172A"/>
+                </a:solidFill>
+                <a:latin typeface="Aptos"/>
+              </a:defRPr>
+            </a:pPr>
+            <a:r>
+              <a:rPr sz="1400">
+                <a:latin typeface="Aptos"/>
+              </a:rPr>
+              <a:t>- Uses runtime follow-up tools to inspect or stop wrapped runs when needed.</a:t>
+            </a:r>
+          </a:p>
+        </p:txBody>
+      </p:sp>
+      <p:sp>
+        <p:nvSpPr>
+          <p:cNvPr id="7" name="Rectangle 6"/>
+          <p:cNvSpPr/>
+          <p:nvPr/>
+        </p:nvSpPr>
+        <p:spPr>
+          <a:xfrm>
+            <a:off x="6126480" y="1508760"/>
+            <a:ext cx="128016" cy="329184"/>
           </a:xfrm>
           <a:prstGeom prst="rect">
             <a:avLst/>
           </a:prstGeom>
-          <a:noFill/>
-        </p:spPr>
-        <p:txBody>
-          <a:bodyPr wrap="none">
-            <a:spAutoFit/>
-          </a:bodyPr>
-          <a:lstStyle/>
-          <a:p>
-            <a:pPr>
-              <a:defRPr b="1" sz="2400">
-                <a:solidFill>
-                  <a:srgbClr val="F4F8FB"/>
-                </a:solidFill>
-                <a:latin typeface="Aptos Display"/>
-              </a:defRPr>
-            </a:pPr>
-            <a:r>
-              <a:t>Current verified repository shape</a:t>
-            </a:r>
-          </a:p>
-        </p:txBody>
-      </p:sp>
-      <p:sp>
-        <p:nvSpPr>
-          <p:cNvPr id="5" name="TextBox 4"/>
-          <p:cNvSpPr txBox="1"/>
-          <p:nvPr/>
-        </p:nvSpPr>
-        <p:spPr>
-          <a:xfrm>
-            <a:off x="768096" y="1261872"/>
-            <a:ext cx="10424160" cy="457200"/>
-          </a:xfrm>
-          <a:prstGeom prst="rect">
-            <a:avLst/>
-          </a:prstGeom>
-          <a:noFill/>
-        </p:spPr>
-        <p:txBody>
-          <a:bodyPr wrap="none">
-            <a:spAutoFit/>
-          </a:bodyPr>
-          <a:lstStyle/>
-          <a:p>
-            <a:pPr>
-              <a:defRPr sz="1100">
-                <a:solidFill>
-                  <a:srgbClr val="B9CFE0"/>
-                </a:solidFill>
-                <a:latin typeface="Aptos"/>
-              </a:defRPr>
-            </a:pPr>
-            <a:r>
-              <a:t>These numbers were recomputed before regenerating the artifacts.</a:t>
-            </a:r>
-          </a:p>
-        </p:txBody>
-      </p:sp>
-      <p:sp>
-        <p:nvSpPr>
-          <p:cNvPr id="6" name="TextBox 5"/>
-          <p:cNvSpPr txBox="1"/>
-          <p:nvPr/>
-        </p:nvSpPr>
-        <p:spPr>
-          <a:xfrm>
-            <a:off x="768096" y="6446520"/>
-            <a:ext cx="10789920" cy="228600"/>
-          </a:xfrm>
-          <a:prstGeom prst="rect">
-            <a:avLst/>
-          </a:prstGeom>
-          <a:noFill/>
-        </p:spPr>
-        <p:txBody>
-          <a:bodyPr wrap="none">
-            <a:spAutoFit/>
-          </a:bodyPr>
-          <a:lstStyle/>
-          <a:p>
-            <a:pPr>
-              <a:defRPr sz="900">
-                <a:solidFill>
-                  <a:srgbClr val="9DB4C7"/>
-                </a:solidFill>
-                <a:latin typeface="Aptos"/>
-              </a:defRPr>
-            </a:pPr>
-            <a:r>
-              <a:t>Tlamatini | April 6, 2026 | bd06b4680877</a:t>
-            </a:r>
-          </a:p>
-        </p:txBody>
-      </p:sp>
-      <p:sp>
-        <p:nvSpPr>
-          <p:cNvPr id="7" name="TextBox 6"/>
-          <p:cNvSpPr txBox="1"/>
-          <p:nvPr/>
-        </p:nvSpPr>
-        <p:spPr>
-          <a:xfrm>
-            <a:off x="11338560" y="6400800"/>
-            <a:ext cx="457200" cy="274320"/>
-          </a:xfrm>
-          <a:prstGeom prst="rect">
-            <a:avLst/>
-          </a:prstGeom>
-          <a:noFill/>
-        </p:spPr>
-        <p:txBody>
-          <a:bodyPr wrap="none">
-            <a:spAutoFit/>
-          </a:bodyPr>
-          <a:lstStyle/>
-          <a:p>
-            <a:pPr algn="r">
-              <a:defRPr sz="900">
-                <a:solidFill>
-                  <a:srgbClr val="D4DEE7"/>
-                </a:solidFill>
-                <a:latin typeface="Aptos"/>
-              </a:defRPr>
-            </a:pPr>
-            <a:r>
-              <a:t>3</a:t>
-            </a:r>
-          </a:p>
-        </p:txBody>
-      </p:sp>
-      <p:sp>
-        <p:nvSpPr>
-          <p:cNvPr id="8" name="Rounded Rectangle 7"/>
-          <p:cNvSpPr/>
-          <p:nvPr/>
-        </p:nvSpPr>
-        <p:spPr>
-          <a:xfrm>
-            <a:off x="868680" y="1920240"/>
-            <a:ext cx="2148840" cy="1170432"/>
-          </a:xfrm>
-          <a:prstGeom prst="roundRect">
-            <a:avLst/>
-          </a:prstGeom>
           <a:solidFill>
-            <a:srgbClr val="13273D"/>
+            <a:srgbClr val="EA580C"/>
           </a:solidFill>
           <a:ln>
-            <a:solidFill>
-              <a:srgbClr val="497699"/>
-            </a:solidFill>
+            <a:noFill/>
           </a:ln>
         </p:spPr>
         <p:style>
@@ -5424,14 +5309,14 @@
       </p:sp>
       <p:sp>
         <p:nvSpPr>
-          <p:cNvPr id="9" name="TextBox 8"/>
+          <p:cNvPr id="8" name="TextBox 7"/>
           <p:cNvSpPr txBox="1"/>
           <p:nvPr/>
         </p:nvSpPr>
         <p:spPr>
           <a:xfrm>
-            <a:off x="1033272" y="2066544"/>
-            <a:ext cx="1819656" cy="731520"/>
+            <a:off x="6327648" y="1490472"/>
+            <a:ext cx="5303520" cy="365760"/>
           </a:xfrm>
           <a:prstGeom prst="rect">
             <a:avLst/>
@@ -5445,52 +5330,39 @@
           <a:lstStyle/>
           <a:p>
             <a:pPr>
-              <a:defRPr b="1" sz="2200">
-                <a:solidFill>
-                  <a:srgbClr val="F4F8FB"/>
+              <a:defRPr b="1" sz="1800">
+                <a:solidFill>
+                  <a:srgbClr val="0F172A"/>
                 </a:solidFill>
                 <a:latin typeface="Aptos Display"/>
               </a:defRPr>
             </a:pPr>
             <a:r>
-              <a:t>bd06b4680877</a:t>
-            </a:r>
-          </a:p>
-          <a:p>
-            <a:pPr>
-              <a:defRPr sz="1000">
-                <a:solidFill>
-                  <a:srgbClr val="A5BFD2"/>
-                </a:solidFill>
-                <a:latin typeface="Aptos"/>
-              </a:defRPr>
-            </a:pPr>
-            <a:r>
-              <a:t>HEAD</a:t>
-            </a:r>
-          </a:p>
-        </p:txBody>
-      </p:sp>
-      <p:sp>
-        <p:nvSpPr>
-          <p:cNvPr id="10" name="Rounded Rectangle 9"/>
+              <a:t>Unchecked path guarantee</a:t>
+            </a:r>
+          </a:p>
+        </p:txBody>
+      </p:sp>
+      <p:sp>
+        <p:nvSpPr>
+          <p:cNvPr id="9" name="Rounded Rectangle 8"/>
           <p:cNvSpPr/>
           <p:nvPr/>
         </p:nvSpPr>
         <p:spPr>
           <a:xfrm>
-            <a:off x="3218688" y="1920240"/>
-            <a:ext cx="2148840" cy="1170432"/>
+            <a:off x="6126480" y="1828800"/>
+            <a:ext cx="4846320" cy="2926080"/>
           </a:xfrm>
           <a:prstGeom prst="roundRect">
             <a:avLst/>
           </a:prstGeom>
           <a:solidFill>
-            <a:srgbClr val="13273D"/>
+            <a:srgbClr val="FFFFFF"/>
           </a:solidFill>
           <a:ln>
             <a:solidFill>
-              <a:srgbClr val="497699"/>
+              <a:srgbClr val="CBD5E1"/>
             </a:solidFill>
           </a:ln>
         </p:spPr>
@@ -5509,83 +5381,107 @@
           </a:fontRef>
         </p:style>
         <p:txBody>
-          <a:bodyPr rtlCol="0" anchor="ctr"/>
-          <a:lstStyle/>
-          <a:p>
-            <a:pPr algn="ctr"/>
-          </a:p>
-        </p:txBody>
-      </p:sp>
-      <p:sp>
-        <p:nvSpPr>
-          <p:cNvPr id="11" name="TextBox 10"/>
-          <p:cNvSpPr txBox="1"/>
-          <p:nvPr/>
-        </p:nvSpPr>
-        <p:spPr>
-          <a:xfrm>
-            <a:off x="3383280" y="2066544"/>
-            <a:ext cx="1819656" cy="731520"/>
+          <a:bodyPr rtlCol="0" anchor="t" wrap="square" lIns="164592" rIns="128016" tIns="91440" bIns="73152">
+            <a:normAutofit/>
+          </a:bodyPr>
+          <a:lstStyle/>
+          <a:p>
+            <a:pPr algn="ctr">
+              <a:spcAft>
+                <a:spcPts val="700"/>
+              </a:spcAft>
+              <a:defRPr sz="1600">
+                <a:solidFill>
+                  <a:srgbClr val="0F172A"/>
+                </a:solidFill>
+                <a:latin typeface="Aptos"/>
+              </a:defRPr>
+            </a:pPr>
+            <a:r>
+              <a:rPr sz="1400">
+                <a:latin typeface="Aptos"/>
+              </a:rPr>
+              <a:t>- Keeps the original prompt-shape validation behavior.</a:t>
+            </a:r>
+          </a:p>
+          <a:p>
+            <a:pPr>
+              <a:spcAft>
+                <a:spcPts val="700"/>
+              </a:spcAft>
+              <a:defRPr sz="1600">
+                <a:solidFill>
+                  <a:srgbClr val="0F172A"/>
+                </a:solidFill>
+                <a:latin typeface="Aptos"/>
+              </a:defRPr>
+            </a:pPr>
+            <a:r>
+              <a:rPr sz="1400">
+                <a:latin typeface="Aptos"/>
+              </a:rPr>
+              <a:t>- Keeps the legacy MCP prefetch behavior.</a:t>
+            </a:r>
+          </a:p>
+          <a:p>
+            <a:pPr>
+              <a:spcAft>
+                <a:spcPts val="700"/>
+              </a:spcAft>
+              <a:defRPr sz="1600">
+                <a:solidFill>
+                  <a:srgbClr val="0F172A"/>
+                </a:solidFill>
+                <a:latin typeface="Aptos"/>
+              </a:defRPr>
+            </a:pPr>
+            <a:r>
+              <a:rPr sz="1400">
+                <a:latin typeface="Aptos"/>
+              </a:rPr>
+              <a:t>- Keeps the legacy broad tool-binding surface.</a:t>
+            </a:r>
+          </a:p>
+          <a:p>
+            <a:pPr>
+              <a:spcAft>
+                <a:spcPts val="700"/>
+              </a:spcAft>
+              <a:defRPr sz="1600">
+                <a:solidFill>
+                  <a:srgbClr val="0F172A"/>
+                </a:solidFill>
+                <a:latin typeface="Aptos"/>
+              </a:defRPr>
+            </a:pPr>
+            <a:r>
+              <a:rPr sz="1400">
+                <a:latin typeface="Aptos"/>
+              </a:rPr>
+              <a:t>- Keeps the legacy visible-console launch behavior for wrapped runs.</a:t>
+            </a:r>
+          </a:p>
+        </p:txBody>
+      </p:sp>
+      <p:sp>
+        <p:nvSpPr>
+          <p:cNvPr id="10" name="Rectangle 9"/>
+          <p:cNvSpPr/>
+          <p:nvPr/>
+        </p:nvSpPr>
+        <p:spPr>
+          <a:xfrm>
+            <a:off x="411480" y="6309360"/>
+            <a:ext cx="11384280" cy="18288"/>
           </a:xfrm>
           <a:prstGeom prst="rect">
             <a:avLst/>
           </a:prstGeom>
-          <a:noFill/>
-        </p:spPr>
-        <p:txBody>
-          <a:bodyPr wrap="none">
-            <a:spAutoFit/>
-          </a:bodyPr>
-          <a:lstStyle/>
-          <a:p>
-            <a:pPr>
-              <a:defRPr b="1" sz="2200">
-                <a:solidFill>
-                  <a:srgbClr val="F4F8FB"/>
-                </a:solidFill>
-                <a:latin typeface="Aptos Display"/>
-              </a:defRPr>
-            </a:pPr>
-            <a:r>
-              <a:t>103</a:t>
-            </a:r>
-          </a:p>
-          <a:p>
-            <a:pPr>
-              <a:defRPr sz="1000">
-                <a:solidFill>
-                  <a:srgbClr val="A5BFD2"/>
-                </a:solidFill>
-                <a:latin typeface="Aptos"/>
-              </a:defRPr>
-            </a:pPr>
-            <a:r>
-              <a:t>App routes</a:t>
-            </a:r>
-          </a:p>
-        </p:txBody>
-      </p:sp>
-      <p:sp>
-        <p:nvSpPr>
-          <p:cNvPr id="12" name="Rounded Rectangle 11"/>
-          <p:cNvSpPr/>
-          <p:nvPr/>
-        </p:nvSpPr>
-        <p:spPr>
-          <a:xfrm>
-            <a:off x="5568696" y="1920240"/>
-            <a:ext cx="2148840" cy="1170432"/>
-          </a:xfrm>
-          <a:prstGeom prst="roundRect">
-            <a:avLst/>
-          </a:prstGeom>
           <a:solidFill>
-            <a:srgbClr val="13273D"/>
+            <a:srgbClr val="CBD5E1"/>
           </a:solidFill>
           <a:ln>
-            <a:solidFill>
-              <a:srgbClr val="497699"/>
-            </a:solidFill>
+            <a:noFill/>
           </a:ln>
         </p:spPr>
         <p:style>
@@ -5612,14 +5508,14 @@
       </p:sp>
       <p:sp>
         <p:nvSpPr>
-          <p:cNvPr id="13" name="TextBox 12"/>
+          <p:cNvPr id="11" name="TextBox 10"/>
           <p:cNvSpPr txBox="1"/>
           <p:nvPr/>
         </p:nvSpPr>
         <p:spPr>
           <a:xfrm>
-            <a:off x="5733288" y="2066544"/>
-            <a:ext cx="1819656" cy="731520"/>
+            <a:off x="457200" y="6355080"/>
+            <a:ext cx="6400800" cy="228600"/>
           </a:xfrm>
           <a:prstGeom prst="rect">
             <a:avLst/>
@@ -5633,87 +5529,29 @@
           <a:lstStyle/>
           <a:p>
             <a:pPr>
-              <a:defRPr b="1" sz="2200">
-                <a:solidFill>
-                  <a:srgbClr val="F4F8FB"/>
-                </a:solidFill>
-                <a:latin typeface="Aptos Display"/>
-              </a:defRPr>
-            </a:pPr>
-            <a:r>
-              <a:t>3</a:t>
-            </a:r>
-          </a:p>
-          <a:p>
-            <a:pPr>
-              <a:defRPr sz="1000">
-                <a:solidFill>
-                  <a:srgbClr val="A5BFD2"/>
-                </a:solidFill>
-                <a:latin typeface="Aptos"/>
-              </a:defRPr>
-            </a:pPr>
-            <a:r>
-              <a:t>Project routes</a:t>
-            </a:r>
-          </a:p>
-        </p:txBody>
-      </p:sp>
-      <p:sp>
-        <p:nvSpPr>
-          <p:cNvPr id="14" name="Rounded Rectangle 13"/>
-          <p:cNvSpPr/>
-          <p:nvPr/>
-        </p:nvSpPr>
-        <p:spPr>
-          <a:xfrm>
-            <a:off x="7918704" y="1920240"/>
-            <a:ext cx="2148840" cy="1170432"/>
-          </a:xfrm>
-          <a:prstGeom prst="roundRect">
-            <a:avLst/>
-          </a:prstGeom>
-          <a:solidFill>
-            <a:srgbClr val="13273D"/>
-          </a:solidFill>
-          <a:ln>
-            <a:solidFill>
-              <a:srgbClr val="497699"/>
-            </a:solidFill>
-          </a:ln>
-        </p:spPr>
-        <p:style>
-          <a:lnRef idx="1">
-            <a:schemeClr val="accent1"/>
-          </a:lnRef>
-          <a:fillRef idx="3">
-            <a:schemeClr val="accent1"/>
-          </a:fillRef>
-          <a:effectRef idx="2">
-            <a:schemeClr val="accent1"/>
-          </a:effectRef>
-          <a:fontRef idx="minor">
-            <a:schemeClr val="lt1"/>
-          </a:fontRef>
-        </p:style>
-        <p:txBody>
-          <a:bodyPr rtlCol="0" anchor="ctr"/>
-          <a:lstStyle/>
-          <a:p>
-            <a:pPr algn="ctr"/>
-          </a:p>
-        </p:txBody>
-      </p:sp>
-      <p:sp>
-        <p:nvSpPr>
-          <p:cNvPr id="15" name="TextBox 14"/>
+              <a:defRPr sz="900">
+                <a:solidFill>
+                  <a:srgbClr val="475569"/>
+                </a:solidFill>
+                <a:latin typeface="Aptos"/>
+              </a:defRPr>
+            </a:pPr>
+            <a:r>
+              <a:t>Current workspace snapshot | April 8, 2026</a:t>
+            </a:r>
+          </a:p>
+        </p:txBody>
+      </p:sp>
+      <p:sp>
+        <p:nvSpPr>
+          <p:cNvPr id="12" name="TextBox 11"/>
           <p:cNvSpPr txBox="1"/>
           <p:nvPr/>
         </p:nvSpPr>
         <p:spPr>
           <a:xfrm>
-            <a:off x="8083296" y="2066544"/>
-            <a:ext cx="1819656" cy="731520"/>
+            <a:off x="10972800" y="6327648"/>
+            <a:ext cx="548640" cy="228600"/>
           </a:xfrm>
           <a:prstGeom prst="rect">
             <a:avLst/>
@@ -5726,405 +5564,16 @@
           </a:bodyPr>
           <a:lstStyle/>
           <a:p>
-            <a:pPr>
-              <a:defRPr b="1" sz="2200">
-                <a:solidFill>
-                  <a:srgbClr val="F4F8FB"/>
-                </a:solidFill>
-                <a:latin typeface="Aptos Display"/>
-              </a:defRPr>
-            </a:pPr>
-            <a:r>
-              <a:t>32</a:t>
-            </a:r>
-          </a:p>
-          <a:p>
-            <a:pPr>
-              <a:defRPr sz="1000">
-                <a:solidFill>
-                  <a:srgbClr val="A5BFD2"/>
-                </a:solidFill>
-                <a:latin typeface="Aptos"/>
-              </a:defRPr>
-            </a:pPr>
-            <a:r>
-              <a:t>Wrapped launchers</a:t>
-            </a:r>
-          </a:p>
-        </p:txBody>
-      </p:sp>
-      <p:sp>
-        <p:nvSpPr>
-          <p:cNvPr id="16" name="Rounded Rectangle 15"/>
-          <p:cNvSpPr/>
-          <p:nvPr/>
-        </p:nvSpPr>
-        <p:spPr>
-          <a:xfrm>
-            <a:off x="868680" y="3346704"/>
-            <a:ext cx="2148840" cy="1170432"/>
-          </a:xfrm>
-          <a:prstGeom prst="roundRect">
-            <a:avLst/>
-          </a:prstGeom>
-          <a:solidFill>
-            <a:srgbClr val="13273D"/>
-          </a:solidFill>
-          <a:ln>
-            <a:solidFill>
-              <a:srgbClr val="497699"/>
-            </a:solidFill>
-          </a:ln>
-        </p:spPr>
-        <p:style>
-          <a:lnRef idx="1">
-            <a:schemeClr val="accent1"/>
-          </a:lnRef>
-          <a:fillRef idx="3">
-            <a:schemeClr val="accent1"/>
-          </a:fillRef>
-          <a:effectRef idx="2">
-            <a:schemeClr val="accent1"/>
-          </a:effectRef>
-          <a:fontRef idx="minor">
-            <a:schemeClr val="lt1"/>
-          </a:fontRef>
-        </p:style>
-        <p:txBody>
-          <a:bodyPr rtlCol="0" anchor="ctr"/>
-          <a:lstStyle/>
-          <a:p>
-            <a:pPr algn="ctr"/>
-          </a:p>
-        </p:txBody>
-      </p:sp>
-      <p:sp>
-        <p:nvSpPr>
-          <p:cNvPr id="17" name="TextBox 16"/>
-          <p:cNvSpPr txBox="1"/>
-          <p:nvPr/>
-        </p:nvSpPr>
-        <p:spPr>
-          <a:xfrm>
-            <a:off x="1033272" y="3493008"/>
-            <a:ext cx="1819656" cy="731520"/>
-          </a:xfrm>
-          <a:prstGeom prst="rect">
-            <a:avLst/>
-          </a:prstGeom>
-          <a:noFill/>
-        </p:spPr>
-        <p:txBody>
-          <a:bodyPr wrap="none">
-            <a:spAutoFit/>
-          </a:bodyPr>
-          <a:lstStyle/>
-          <a:p>
-            <a:pPr>
-              <a:defRPr b="1" sz="2200">
-                <a:solidFill>
-                  <a:srgbClr val="F4F8FB"/>
-                </a:solidFill>
-                <a:latin typeface="Aptos Display"/>
-              </a:defRPr>
-            </a:pPr>
-            <a:r>
-              <a:t>4</a:t>
-            </a:r>
-          </a:p>
-          <a:p>
-            <a:pPr>
-              <a:defRPr sz="1000">
-                <a:solidFill>
-                  <a:srgbClr val="A5BFD2"/>
-                </a:solidFill>
-                <a:latin typeface="Aptos"/>
-              </a:defRPr>
-            </a:pPr>
-            <a:r>
-              <a:t>Long-running wrapped</a:t>
-            </a:r>
-          </a:p>
-        </p:txBody>
-      </p:sp>
-      <p:sp>
-        <p:nvSpPr>
-          <p:cNvPr id="18" name="Rounded Rectangle 17"/>
-          <p:cNvSpPr/>
-          <p:nvPr/>
-        </p:nvSpPr>
-        <p:spPr>
-          <a:xfrm>
-            <a:off x="3218688" y="3346704"/>
-            <a:ext cx="2148840" cy="1170432"/>
-          </a:xfrm>
-          <a:prstGeom prst="roundRect">
-            <a:avLst/>
-          </a:prstGeom>
-          <a:solidFill>
-            <a:srgbClr val="13273D"/>
-          </a:solidFill>
-          <a:ln>
-            <a:solidFill>
-              <a:srgbClr val="497699"/>
-            </a:solidFill>
-          </a:ln>
-        </p:spPr>
-        <p:style>
-          <a:lnRef idx="1">
-            <a:schemeClr val="accent1"/>
-          </a:lnRef>
-          <a:fillRef idx="3">
-            <a:schemeClr val="accent1"/>
-          </a:fillRef>
-          <a:effectRef idx="2">
-            <a:schemeClr val="accent1"/>
-          </a:effectRef>
-          <a:fontRef idx="minor">
-            <a:schemeClr val="lt1"/>
-          </a:fontRef>
-        </p:style>
-        <p:txBody>
-          <a:bodyPr rtlCol="0" anchor="ctr"/>
-          <a:lstStyle/>
-          <a:p>
-            <a:pPr algn="ctr"/>
-          </a:p>
-        </p:txBody>
-      </p:sp>
-      <p:sp>
-        <p:nvSpPr>
-          <p:cNvPr id="19" name="TextBox 18"/>
-          <p:cNvSpPr txBox="1"/>
-          <p:nvPr/>
-        </p:nvSpPr>
-        <p:spPr>
-          <a:xfrm>
-            <a:off x="3383280" y="3493008"/>
-            <a:ext cx="1819656" cy="731520"/>
-          </a:xfrm>
-          <a:prstGeom prst="rect">
-            <a:avLst/>
-          </a:prstGeom>
-          <a:noFill/>
-        </p:spPr>
-        <p:txBody>
-          <a:bodyPr wrap="none">
-            <a:spAutoFit/>
-          </a:bodyPr>
-          <a:lstStyle/>
-          <a:p>
-            <a:pPr>
-              <a:defRPr b="1" sz="2200">
-                <a:solidFill>
-                  <a:srgbClr val="F4F8FB"/>
-                </a:solidFill>
-                <a:latin typeface="Aptos Display"/>
-              </a:defRPr>
-            </a:pPr>
-            <a:r>
-              <a:t>56</a:t>
-            </a:r>
-          </a:p>
-          <a:p>
-            <a:pPr>
-              <a:defRPr sz="1000">
-                <a:solidFill>
-                  <a:srgbClr val="A5BFD2"/>
-                </a:solidFill>
-                <a:latin typeface="Aptos"/>
-              </a:defRPr>
-            </a:pPr>
-            <a:r>
-              <a:t>Template agents</a:t>
-            </a:r>
-          </a:p>
-        </p:txBody>
-      </p:sp>
-      <p:sp>
-        <p:nvSpPr>
-          <p:cNvPr id="20" name="Rounded Rectangle 19"/>
-          <p:cNvSpPr/>
-          <p:nvPr/>
-        </p:nvSpPr>
-        <p:spPr>
-          <a:xfrm>
-            <a:off x="5568696" y="3346704"/>
-            <a:ext cx="2148840" cy="1170432"/>
-          </a:xfrm>
-          <a:prstGeom prst="roundRect">
-            <a:avLst/>
-          </a:prstGeom>
-          <a:solidFill>
-            <a:srgbClr val="13273D"/>
-          </a:solidFill>
-          <a:ln>
-            <a:solidFill>
-              <a:srgbClr val="497699"/>
-            </a:solidFill>
-          </a:ln>
-        </p:spPr>
-        <p:style>
-          <a:lnRef idx="1">
-            <a:schemeClr val="accent1"/>
-          </a:lnRef>
-          <a:fillRef idx="3">
-            <a:schemeClr val="accent1"/>
-          </a:fillRef>
-          <a:effectRef idx="2">
-            <a:schemeClr val="accent1"/>
-          </a:effectRef>
-          <a:fontRef idx="minor">
-            <a:schemeClr val="lt1"/>
-          </a:fontRef>
-        </p:style>
-        <p:txBody>
-          <a:bodyPr rtlCol="0" anchor="ctr"/>
-          <a:lstStyle/>
-          <a:p>
-            <a:pPr algn="ctr"/>
-          </a:p>
-        </p:txBody>
-      </p:sp>
-      <p:sp>
-        <p:nvSpPr>
-          <p:cNvPr id="21" name="TextBox 20"/>
-          <p:cNvSpPr txBox="1"/>
-          <p:nvPr/>
-        </p:nvSpPr>
-        <p:spPr>
-          <a:xfrm>
-            <a:off x="5733288" y="3493008"/>
-            <a:ext cx="1819656" cy="731520"/>
-          </a:xfrm>
-          <a:prstGeom prst="rect">
-            <a:avLst/>
-          </a:prstGeom>
-          <a:noFill/>
-        </p:spPr>
-        <p:txBody>
-          <a:bodyPr wrap="none">
-            <a:spAutoFit/>
-          </a:bodyPr>
-          <a:lstStyle/>
-          <a:p>
-            <a:pPr>
-              <a:defRPr b="1" sz="2200">
-                <a:solidFill>
-                  <a:srgbClr val="F4F8FB"/>
-                </a:solidFill>
-                <a:latin typeface="Aptos Display"/>
-              </a:defRPr>
-            </a:pPr>
-            <a:r>
-              <a:t>16</a:t>
-            </a:r>
-          </a:p>
-          <a:p>
-            <a:pPr>
-              <a:defRPr sz="1000">
-                <a:solidFill>
-                  <a:srgbClr val="A5BFD2"/>
-                </a:solidFill>
-                <a:latin typeface="Aptos"/>
-              </a:defRPr>
-            </a:pPr>
-            <a:r>
-              <a:t>Test classes</a:t>
-            </a:r>
-          </a:p>
-        </p:txBody>
-      </p:sp>
-      <p:sp>
-        <p:nvSpPr>
-          <p:cNvPr id="22" name="Rounded Rectangle 21"/>
-          <p:cNvSpPr/>
-          <p:nvPr/>
-        </p:nvSpPr>
-        <p:spPr>
-          <a:xfrm>
-            <a:off x="7918704" y="3346704"/>
-            <a:ext cx="2148840" cy="1170432"/>
-          </a:xfrm>
-          <a:prstGeom prst="roundRect">
-            <a:avLst/>
-          </a:prstGeom>
-          <a:solidFill>
-            <a:srgbClr val="13273D"/>
-          </a:solidFill>
-          <a:ln>
-            <a:solidFill>
-              <a:srgbClr val="497699"/>
-            </a:solidFill>
-          </a:ln>
-        </p:spPr>
-        <p:style>
-          <a:lnRef idx="1">
-            <a:schemeClr val="accent1"/>
-          </a:lnRef>
-          <a:fillRef idx="3">
-            <a:schemeClr val="accent1"/>
-          </a:fillRef>
-          <a:effectRef idx="2">
-            <a:schemeClr val="accent1"/>
-          </a:effectRef>
-          <a:fontRef idx="minor">
-            <a:schemeClr val="lt1"/>
-          </a:fontRef>
-        </p:style>
-        <p:txBody>
-          <a:bodyPr rtlCol="0" anchor="ctr"/>
-          <a:lstStyle/>
-          <a:p>
-            <a:pPr algn="ctr"/>
-          </a:p>
-        </p:txBody>
-      </p:sp>
-      <p:sp>
-        <p:nvSpPr>
-          <p:cNvPr id="23" name="TextBox 22"/>
-          <p:cNvSpPr txBox="1"/>
-          <p:nvPr/>
-        </p:nvSpPr>
-        <p:spPr>
-          <a:xfrm>
-            <a:off x="8083296" y="3493008"/>
-            <a:ext cx="1819656" cy="731520"/>
-          </a:xfrm>
-          <a:prstGeom prst="rect">
-            <a:avLst/>
-          </a:prstGeom>
-          <a:noFill/>
-        </p:spPr>
-        <p:txBody>
-          <a:bodyPr wrap="none">
-            <a:spAutoFit/>
-          </a:bodyPr>
-          <a:lstStyle/>
-          <a:p>
-            <a:pPr>
-              <a:defRPr b="1" sz="2200">
-                <a:solidFill>
-                  <a:srgbClr val="F4F8FB"/>
-                </a:solidFill>
-                <a:latin typeface="Aptos Display"/>
-              </a:defRPr>
-            </a:pPr>
-            <a:r>
-              <a:t>63</a:t>
-            </a:r>
-          </a:p>
-          <a:p>
-            <a:pPr>
-              <a:defRPr sz="1000">
-                <a:solidFill>
-                  <a:srgbClr val="A5BFD2"/>
-                </a:solidFill>
-                <a:latin typeface="Aptos"/>
-              </a:defRPr>
-            </a:pPr>
-            <a:r>
-              <a:t>Test methods</a:t>
+            <a:pPr algn="r">
+              <a:defRPr sz="900">
+                <a:solidFill>
+                  <a:srgbClr val="475569"/>
+                </a:solidFill>
+                <a:latin typeface="Aptos"/>
+              </a:defRPr>
+            </a:pPr>
+            <a:r>
+              <a:t>3</a:t>
             </a:r>
           </a:p>
         </p:txBody>
@@ -6143,7 +5592,7 @@
     <p:bg>
       <p:bgPr>
         <a:solidFill>
-          <a:srgbClr val="0C1623"/>
+          <a:srgbClr val="F8FAFC"/>
         </a:solidFill>
         <a:effectLst/>
       </p:bgPr>
@@ -6157,23 +5606,90 @@
       <p:grpSpPr/>
       <p:sp>
         <p:nvSpPr>
-          <p:cNvPr id="2" name="Rectangle 1"/>
+          <p:cNvPr id="2" name="Title 1"/>
+          <p:cNvSpPr>
+            <a:spLocks noGrp="1"/>
+          </p:cNvSpPr>
+          <p:nvPr>
+            <p:ph type="title"/>
+          </p:nvPr>
+        </p:nvSpPr>
+        <p:spPr/>
+        <p:txBody>
+          <a:bodyPr/>
+          <a:lstStyle/>
+          <a:p>
+            <a:pPr>
+              <a:defRPr b="1" sz="2600">
+                <a:solidFill>
+                  <a:srgbClr val="0F172A"/>
+                </a:solidFill>
+                <a:latin typeface="Aptos Display"/>
+              </a:defRPr>
+            </a:pPr>
+            <a:r>
+              <a:t>Phase 1 to Phase 3 orchestration stack</a:t>
+            </a:r>
+          </a:p>
+        </p:txBody>
+      </p:sp>
+      <p:sp>
+        <p:nvSpPr>
+          <p:cNvPr id="3" name="TextBox 2"/>
+          <p:cNvSpPr txBox="1"/>
+          <p:nvPr/>
+        </p:nvSpPr>
+        <p:spPr>
+          <a:xfrm>
+            <a:off x="640080" y="960120"/>
+            <a:ext cx="10789920" cy="502920"/>
+          </a:xfrm>
+          <a:prstGeom prst="rect">
+            <a:avLst/>
+          </a:prstGeom>
+          <a:noFill/>
+        </p:spPr>
+        <p:txBody>
+          <a:bodyPr wrap="square">
+            <a:spAutoFit/>
+          </a:bodyPr>
+          <a:lstStyle/>
+          <a:p>
+            <a:pPr>
+              <a:defRPr sz="1400">
+                <a:solidFill>
+                  <a:srgbClr val="475569"/>
+                </a:solidFill>
+                <a:latin typeface="Aptos"/>
+              </a:defRPr>
+            </a:pPr>
+            <a:r>
+              <a:t>The checked path is best read as three stacked layers rather than as one giant tool bundle.</a:t>
+            </a:r>
+          </a:p>
+        </p:txBody>
+      </p:sp>
+      <p:sp>
+        <p:nvSpPr>
+          <p:cNvPr id="4" name="Rounded Rectangle 3"/>
           <p:cNvSpPr/>
           <p:nvPr/>
         </p:nvSpPr>
         <p:spPr>
           <a:xfrm>
-            <a:off x="0" y="0"/>
-            <a:ext cx="12191695" cy="411480"/>
-          </a:xfrm>
-          <a:prstGeom prst="rect">
+            <a:off x="822960" y="1645920"/>
+            <a:ext cx="3200400" cy="1051560"/>
+          </a:xfrm>
+          <a:prstGeom prst="roundRect">
             <a:avLst/>
           </a:prstGeom>
           <a:solidFill>
-            <a:srgbClr val="184366"/>
+            <a:srgbClr val="FFFFFF"/>
           </a:solidFill>
           <a:ln>
-            <a:noFill/>
+            <a:solidFill>
+              <a:srgbClr val="CBD5E1"/>
+            </a:solidFill>
           </a:ln>
         </p:spPr>
         <p:style>
@@ -6191,29 +5707,52 @@
           </a:fontRef>
         </p:style>
         <p:txBody>
-          <a:bodyPr rtlCol="0" anchor="ctr"/>
-          <a:lstStyle/>
-          <a:p>
-            <a:pPr algn="ctr"/>
-          </a:p>
-        </p:txBody>
-      </p:sp>
-      <p:sp>
-        <p:nvSpPr>
-          <p:cNvPr id="3" name="Rectangle 2"/>
+          <a:bodyPr rtlCol="0" anchor="ctr" lIns="201168" tIns="109728"/>
+          <a:lstStyle/>
+          <a:p>
+            <a:pPr algn="ctr">
+              <a:defRPr b="1" sz="2000">
+                <a:solidFill>
+                  <a:srgbClr val="0F172A"/>
+                </a:solidFill>
+                <a:latin typeface="Aptos Display"/>
+              </a:defRPr>
+            </a:pPr>
+            <a:r>
+              <a:t>Phase 1</a:t>
+            </a:r>
+          </a:p>
+          <a:p>
+            <a:pPr>
+              <a:defRPr sz="1100">
+                <a:solidFill>
+                  <a:srgbClr val="475569"/>
+                </a:solidFill>
+                <a:latin typeface="Aptos"/>
+              </a:defRPr>
+            </a:pPr>
+            <a:r>
+              <a:t>Capability selection</a:t>
+            </a:r>
+          </a:p>
+        </p:txBody>
+      </p:sp>
+      <p:sp>
+        <p:nvSpPr>
+          <p:cNvPr id="5" name="Rectangle 4"/>
           <p:cNvSpPr/>
           <p:nvPr/>
         </p:nvSpPr>
         <p:spPr>
           <a:xfrm>
-            <a:off x="411480" y="713232"/>
-            <a:ext cx="164592" cy="5394960"/>
+            <a:off x="822960" y="1645920"/>
+            <a:ext cx="109728" cy="1051560"/>
           </a:xfrm>
           <a:prstGeom prst="rect">
             <a:avLst/>
           </a:prstGeom>
           <a:solidFill>
-            <a:srgbClr val="E0B04A"/>
+            <a:srgbClr val="0D9488"/>
           </a:solidFill>
           <a:ln>
             <a:noFill/>
@@ -6243,14 +5782,399 @@
       </p:sp>
       <p:sp>
         <p:nvSpPr>
-          <p:cNvPr id="4" name="TextBox 3"/>
+          <p:cNvPr id="6" name="Rounded Rectangle 5"/>
+          <p:cNvSpPr/>
+          <p:nvPr/>
+        </p:nvSpPr>
+        <p:spPr>
+          <a:xfrm>
+            <a:off x="4434840" y="1645920"/>
+            <a:ext cx="3200400" cy="1051560"/>
+          </a:xfrm>
+          <a:prstGeom prst="roundRect">
+            <a:avLst/>
+          </a:prstGeom>
+          <a:solidFill>
+            <a:srgbClr val="FFFFFF"/>
+          </a:solidFill>
+          <a:ln>
+            <a:solidFill>
+              <a:srgbClr val="CBD5E1"/>
+            </a:solidFill>
+          </a:ln>
+        </p:spPr>
+        <p:style>
+          <a:lnRef idx="1">
+            <a:schemeClr val="accent1"/>
+          </a:lnRef>
+          <a:fillRef idx="3">
+            <a:schemeClr val="accent1"/>
+          </a:fillRef>
+          <a:effectRef idx="2">
+            <a:schemeClr val="accent1"/>
+          </a:effectRef>
+          <a:fontRef idx="minor">
+            <a:schemeClr val="lt1"/>
+          </a:fontRef>
+        </p:style>
+        <p:txBody>
+          <a:bodyPr rtlCol="0" anchor="ctr" lIns="201168" tIns="109728"/>
+          <a:lstStyle/>
+          <a:p>
+            <a:pPr algn="ctr">
+              <a:defRPr b="1" sz="2000">
+                <a:solidFill>
+                  <a:srgbClr val="0F172A"/>
+                </a:solidFill>
+                <a:latin typeface="Aptos Display"/>
+              </a:defRPr>
+            </a:pPr>
+            <a:r>
+              <a:t>Phase 2</a:t>
+            </a:r>
+          </a:p>
+          <a:p>
+            <a:pPr>
+              <a:defRPr sz="1100">
+                <a:solidFill>
+                  <a:srgbClr val="475569"/>
+                </a:solidFill>
+                <a:latin typeface="Aptos"/>
+              </a:defRPr>
+            </a:pPr>
+            <a:r>
+              <a:t>Context selection</a:t>
+            </a:r>
+          </a:p>
+        </p:txBody>
+      </p:sp>
+      <p:sp>
+        <p:nvSpPr>
+          <p:cNvPr id="7" name="Rectangle 6"/>
+          <p:cNvSpPr/>
+          <p:nvPr/>
+        </p:nvSpPr>
+        <p:spPr>
+          <a:xfrm>
+            <a:off x="4434840" y="1645920"/>
+            <a:ext cx="109728" cy="1051560"/>
+          </a:xfrm>
+          <a:prstGeom prst="rect">
+            <a:avLst/>
+          </a:prstGeom>
+          <a:solidFill>
+            <a:srgbClr val="EA580C"/>
+          </a:solidFill>
+          <a:ln>
+            <a:noFill/>
+          </a:ln>
+        </p:spPr>
+        <p:style>
+          <a:lnRef idx="1">
+            <a:schemeClr val="accent1"/>
+          </a:lnRef>
+          <a:fillRef idx="3">
+            <a:schemeClr val="accent1"/>
+          </a:fillRef>
+          <a:effectRef idx="2">
+            <a:schemeClr val="accent1"/>
+          </a:effectRef>
+          <a:fontRef idx="minor">
+            <a:schemeClr val="lt1"/>
+          </a:fontRef>
+        </p:style>
+        <p:txBody>
+          <a:bodyPr rtlCol="0" anchor="ctr"/>
+          <a:lstStyle/>
+          <a:p>
+            <a:pPr algn="ctr"/>
+          </a:p>
+        </p:txBody>
+      </p:sp>
+      <p:sp>
+        <p:nvSpPr>
+          <p:cNvPr id="8" name="Rounded Rectangle 7"/>
+          <p:cNvSpPr/>
+          <p:nvPr/>
+        </p:nvSpPr>
+        <p:spPr>
+          <a:xfrm>
+            <a:off x="8046720" y="1645920"/>
+            <a:ext cx="2743200" cy="1051560"/>
+          </a:xfrm>
+          <a:prstGeom prst="roundRect">
+            <a:avLst/>
+          </a:prstGeom>
+          <a:solidFill>
+            <a:srgbClr val="FFFFFF"/>
+          </a:solidFill>
+          <a:ln>
+            <a:solidFill>
+              <a:srgbClr val="CBD5E1"/>
+            </a:solidFill>
+          </a:ln>
+        </p:spPr>
+        <p:style>
+          <a:lnRef idx="1">
+            <a:schemeClr val="accent1"/>
+          </a:lnRef>
+          <a:fillRef idx="3">
+            <a:schemeClr val="accent1"/>
+          </a:fillRef>
+          <a:effectRef idx="2">
+            <a:schemeClr val="accent1"/>
+          </a:effectRef>
+          <a:fontRef idx="minor">
+            <a:schemeClr val="lt1"/>
+          </a:fontRef>
+        </p:style>
+        <p:txBody>
+          <a:bodyPr rtlCol="0" anchor="ctr" lIns="201168" tIns="109728"/>
+          <a:lstStyle/>
+          <a:p>
+            <a:pPr algn="ctr">
+              <a:defRPr b="1" sz="2000">
+                <a:solidFill>
+                  <a:srgbClr val="0F172A"/>
+                </a:solidFill>
+                <a:latin typeface="Aptos Display"/>
+              </a:defRPr>
+            </a:pPr>
+            <a:r>
+              <a:t>Phase 3</a:t>
+            </a:r>
+          </a:p>
+          <a:p>
+            <a:pPr>
+              <a:defRPr sz="1100">
+                <a:solidFill>
+                  <a:srgbClr val="475569"/>
+                </a:solidFill>
+                <a:latin typeface="Aptos"/>
+              </a:defRPr>
+            </a:pPr>
+            <a:r>
+              <a:t>Global execution planner</a:t>
+            </a:r>
+          </a:p>
+        </p:txBody>
+      </p:sp>
+      <p:sp>
+        <p:nvSpPr>
+          <p:cNvPr id="9" name="Rectangle 8"/>
+          <p:cNvSpPr/>
+          <p:nvPr/>
+        </p:nvSpPr>
+        <p:spPr>
+          <a:xfrm>
+            <a:off x="8046720" y="1645920"/>
+            <a:ext cx="109728" cy="1051560"/>
+          </a:xfrm>
+          <a:prstGeom prst="rect">
+            <a:avLst/>
+          </a:prstGeom>
+          <a:solidFill>
+            <a:srgbClr val="0D9488"/>
+          </a:solidFill>
+          <a:ln>
+            <a:noFill/>
+          </a:ln>
+        </p:spPr>
+        <p:style>
+          <a:lnRef idx="1">
+            <a:schemeClr val="accent1"/>
+          </a:lnRef>
+          <a:fillRef idx="3">
+            <a:schemeClr val="accent1"/>
+          </a:fillRef>
+          <a:effectRef idx="2">
+            <a:schemeClr val="accent1"/>
+          </a:effectRef>
+          <a:fontRef idx="minor">
+            <a:schemeClr val="lt1"/>
+          </a:fontRef>
+        </p:style>
+        <p:txBody>
+          <a:bodyPr rtlCol="0" anchor="ctr"/>
+          <a:lstStyle/>
+          <a:p>
+            <a:pPr algn="ctr"/>
+          </a:p>
+        </p:txBody>
+      </p:sp>
+      <p:sp>
+        <p:nvSpPr>
+          <p:cNvPr id="10" name="Rounded Rectangle 9"/>
+          <p:cNvSpPr/>
+          <p:nvPr/>
+        </p:nvSpPr>
+        <p:spPr>
+          <a:xfrm>
+            <a:off x="822960" y="2926080"/>
+            <a:ext cx="9966960" cy="2057400"/>
+          </a:xfrm>
+          <a:prstGeom prst="roundRect">
+            <a:avLst/>
+          </a:prstGeom>
+          <a:solidFill>
+            <a:srgbClr val="FFFFFF"/>
+          </a:solidFill>
+          <a:ln>
+            <a:solidFill>
+              <a:srgbClr val="CBD5E1"/>
+            </a:solidFill>
+          </a:ln>
+        </p:spPr>
+        <p:style>
+          <a:lnRef idx="1">
+            <a:schemeClr val="accent1"/>
+          </a:lnRef>
+          <a:fillRef idx="3">
+            <a:schemeClr val="accent1"/>
+          </a:fillRef>
+          <a:effectRef idx="2">
+            <a:schemeClr val="accent1"/>
+          </a:effectRef>
+          <a:fontRef idx="minor">
+            <a:schemeClr val="lt1"/>
+          </a:fontRef>
+        </p:style>
+        <p:txBody>
+          <a:bodyPr rtlCol="0" anchor="t" wrap="square" lIns="164592" rIns="128016" tIns="91440" bIns="73152">
+            <a:normAutofit/>
+          </a:bodyPr>
+          <a:lstStyle/>
+          <a:p>
+            <a:pPr algn="ctr">
+              <a:spcAft>
+                <a:spcPts val="700"/>
+              </a:spcAft>
+              <a:defRPr sz="1600">
+                <a:solidFill>
+                  <a:srgbClr val="0F172A"/>
+                </a:solidFill>
+                <a:latin typeface="Aptos"/>
+              </a:defRPr>
+            </a:pPr>
+            <a:r>
+              <a:rPr sz="1400">
+                <a:latin typeface="Aptos"/>
+              </a:rPr>
+              <a:t>- Phase 1 narrows the request-specific capability surface across plain tools, wrapped launchers, and run-control helpers.</a:t>
+            </a:r>
+          </a:p>
+          <a:p>
+            <a:pPr>
+              <a:spcAft>
+                <a:spcPts val="700"/>
+              </a:spcAft>
+              <a:defRPr sz="1600">
+                <a:solidFill>
+                  <a:srgbClr val="0F172A"/>
+                </a:solidFill>
+                <a:latin typeface="Aptos"/>
+              </a:defRPr>
+            </a:pPr>
+            <a:r>
+              <a:rPr sz="1400">
+                <a:latin typeface="Aptos"/>
+              </a:rPr>
+              <a:t>- Phase 2 narrows MCP-backed context prefetch instead of always fanning out to every context source.</a:t>
+            </a:r>
+          </a:p>
+          <a:p>
+            <a:pPr>
+              <a:spcAft>
+                <a:spcPts val="700"/>
+              </a:spcAft>
+              <a:defRPr sz="1600">
+                <a:solidFill>
+                  <a:srgbClr val="0F172A"/>
+                </a:solidFill>
+                <a:latin typeface="Aptos"/>
+              </a:defRPr>
+            </a:pPr>
+            <a:r>
+              <a:rPr sz="1400">
+                <a:latin typeface="Aptos"/>
+              </a:rPr>
+              <a:t>- Phase 3 emits an explicit execution mode such as direct_model, context_only, or tool_augmented, then orders the prefetch, execute, monitor, and answer nodes.</a:t>
+            </a:r>
+          </a:p>
+          <a:p>
+            <a:pPr>
+              <a:spcAft>
+                <a:spcPts val="700"/>
+              </a:spcAft>
+              <a:defRPr sz="1600">
+                <a:solidFill>
+                  <a:srgbClr val="0F172A"/>
+                </a:solidFill>
+                <a:latin typeface="Aptos"/>
+              </a:defRPr>
+            </a:pPr>
+            <a:r>
+              <a:rPr sz="1400">
+                <a:latin typeface="Aptos"/>
+              </a:rPr>
+              <a:t>- The executor follows the planner summary only when Multi-Turn is checked; unchecked mode does not switch into this orchestration stack.</a:t>
+            </a:r>
+          </a:p>
+        </p:txBody>
+      </p:sp>
+      <p:sp>
+        <p:nvSpPr>
+          <p:cNvPr id="11" name="Rectangle 10"/>
+          <p:cNvSpPr/>
+          <p:nvPr/>
+        </p:nvSpPr>
+        <p:spPr>
+          <a:xfrm>
+            <a:off x="411480" y="6309360"/>
+            <a:ext cx="11384280" cy="18288"/>
+          </a:xfrm>
+          <a:prstGeom prst="rect">
+            <a:avLst/>
+          </a:prstGeom>
+          <a:solidFill>
+            <a:srgbClr val="CBD5E1"/>
+          </a:solidFill>
+          <a:ln>
+            <a:noFill/>
+          </a:ln>
+        </p:spPr>
+        <p:style>
+          <a:lnRef idx="1">
+            <a:schemeClr val="accent1"/>
+          </a:lnRef>
+          <a:fillRef idx="3">
+            <a:schemeClr val="accent1"/>
+          </a:fillRef>
+          <a:effectRef idx="2">
+            <a:schemeClr val="accent1"/>
+          </a:effectRef>
+          <a:fontRef idx="minor">
+            <a:schemeClr val="lt1"/>
+          </a:fontRef>
+        </p:style>
+        <p:txBody>
+          <a:bodyPr rtlCol="0" anchor="ctr"/>
+          <a:lstStyle/>
+          <a:p>
+            <a:pPr algn="ctr"/>
+          </a:p>
+        </p:txBody>
+      </p:sp>
+      <p:sp>
+        <p:nvSpPr>
+          <p:cNvPr id="12" name="TextBox 11"/>
           <p:cNvSpPr txBox="1"/>
           <p:nvPr/>
         </p:nvSpPr>
         <p:spPr>
           <a:xfrm>
-            <a:off x="749808" y="658368"/>
-            <a:ext cx="10607040" cy="658368"/>
+            <a:off x="457200" y="6355080"/>
+            <a:ext cx="6400800" cy="228600"/>
           </a:xfrm>
           <a:prstGeom prst="rect">
             <a:avLst/>
@@ -6264,29 +6188,29 @@
           <a:lstStyle/>
           <a:p>
             <a:pPr>
-              <a:defRPr b="1" sz="2400">
-                <a:solidFill>
-                  <a:srgbClr val="F4F8FB"/>
-                </a:solidFill>
-                <a:latin typeface="Aptos Display"/>
-              </a:defRPr>
-            </a:pPr>
-            <a:r>
-              <a:t>User-visible Multi-Turn control surface</a:t>
-            </a:r>
-          </a:p>
-        </p:txBody>
-      </p:sp>
-      <p:sp>
-        <p:nvSpPr>
-          <p:cNvPr id="5" name="TextBox 4"/>
+              <a:defRPr sz="900">
+                <a:solidFill>
+                  <a:srgbClr val="475569"/>
+                </a:solidFill>
+                <a:latin typeface="Aptos"/>
+              </a:defRPr>
+            </a:pPr>
+            <a:r>
+              <a:t>Current workspace snapshot | April 8, 2026</a:t>
+            </a:r>
+          </a:p>
+        </p:txBody>
+      </p:sp>
+      <p:sp>
+        <p:nvSpPr>
+          <p:cNvPr id="13" name="TextBox 12"/>
           <p:cNvSpPr txBox="1"/>
           <p:nvPr/>
         </p:nvSpPr>
         <p:spPr>
           <a:xfrm>
-            <a:off x="768096" y="1261872"/>
-            <a:ext cx="10424160" cy="457200"/>
+            <a:off x="10972800" y="6327648"/>
+            <a:ext cx="548640" cy="228600"/>
           </a:xfrm>
           <a:prstGeom prst="rect">
             <a:avLst/>
@@ -6299,175 +6223,16 @@
           </a:bodyPr>
           <a:lstStyle/>
           <a:p>
-            <a:pPr>
-              <a:defRPr sz="1100">
-                <a:solidFill>
-                  <a:srgbClr val="B9CFE0"/>
-                </a:solidFill>
-                <a:latin typeface="Aptos"/>
-              </a:defRPr>
-            </a:pPr>
-            <a:r>
-              <a:t>The feature is exposed as a mode switch, not as an invisible backend fork.</a:t>
-            </a:r>
-          </a:p>
-        </p:txBody>
-      </p:sp>
-      <p:sp>
-        <p:nvSpPr>
-          <p:cNvPr id="6" name="TextBox 5"/>
-          <p:cNvSpPr txBox="1"/>
-          <p:nvPr/>
-        </p:nvSpPr>
-        <p:spPr>
-          <a:xfrm>
-            <a:off x="768096" y="6446520"/>
-            <a:ext cx="10789920" cy="228600"/>
-          </a:xfrm>
-          <a:prstGeom prst="rect">
-            <a:avLst/>
-          </a:prstGeom>
-          <a:noFill/>
-        </p:spPr>
-        <p:txBody>
-          <a:bodyPr wrap="none">
-            <a:spAutoFit/>
-          </a:bodyPr>
-          <a:lstStyle/>
-          <a:p>
-            <a:pPr>
-              <a:defRPr sz="900">
-                <a:solidFill>
-                  <a:srgbClr val="9DB4C7"/>
-                </a:solidFill>
-                <a:latin typeface="Aptos"/>
-              </a:defRPr>
-            </a:pPr>
-            <a:r>
-              <a:t>Tlamatini | April 6, 2026 | bd06b4680877</a:t>
-            </a:r>
-          </a:p>
-        </p:txBody>
-      </p:sp>
-      <p:sp>
-        <p:nvSpPr>
-          <p:cNvPr id="7" name="TextBox 6"/>
-          <p:cNvSpPr txBox="1"/>
-          <p:nvPr/>
-        </p:nvSpPr>
-        <p:spPr>
-          <a:xfrm>
-            <a:off x="11338560" y="6400800"/>
-            <a:ext cx="457200" cy="274320"/>
-          </a:xfrm>
-          <a:prstGeom prst="rect">
-            <a:avLst/>
-          </a:prstGeom>
-          <a:noFill/>
-        </p:spPr>
-        <p:txBody>
-          <a:bodyPr wrap="none">
-            <a:spAutoFit/>
-          </a:bodyPr>
-          <a:lstStyle/>
-          <a:p>
             <a:pPr algn="r">
               <a:defRPr sz="900">
                 <a:solidFill>
-                  <a:srgbClr val="D4DEE7"/>
+                  <a:srgbClr val="475569"/>
                 </a:solidFill>
                 <a:latin typeface="Aptos"/>
               </a:defRPr>
             </a:pPr>
             <a:r>
               <a:t>4</a:t>
-            </a:r>
-          </a:p>
-        </p:txBody>
-      </p:sp>
-      <p:sp>
-        <p:nvSpPr>
-          <p:cNvPr id="8" name="TextBox 7"/>
-          <p:cNvSpPr txBox="1"/>
-          <p:nvPr/>
-        </p:nvSpPr>
-        <p:spPr>
-          <a:xfrm>
-            <a:off x="868680" y="1783080"/>
-            <a:ext cx="10469880" cy="4389120"/>
-          </a:xfrm>
-          <a:prstGeom prst="rect">
-            <a:avLst/>
-          </a:prstGeom>
-          <a:noFill/>
-        </p:spPr>
-        <p:txBody>
-          <a:bodyPr wrap="square" lIns="0" rIns="0" tIns="0" anchor="t">
-            <a:spAutoFit/>
-          </a:bodyPr>
-          <a:lstStyle/>
-          <a:p>
-            <a:pPr>
-              <a:spcAft>
-                <a:spcPts val="800"/>
-              </a:spcAft>
-              <a:defRPr sz="1800">
-                <a:solidFill>
-                  <a:srgbClr val="EAF0F5"/>
-                </a:solidFill>
-                <a:latin typeface="Aptos"/>
-              </a:defRPr>
-            </a:pPr>
-            <a:r>
-              <a:t>• A dedicated Multi-Turn checkbox now lives beside Clear history in the main chat toolbar.</a:t>
-            </a:r>
-          </a:p>
-          <a:p>
-            <a:pPr>
-              <a:spcAft>
-                <a:spcPts val="800"/>
-              </a:spcAft>
-              <a:defRPr sz="1800">
-                <a:solidFill>
-                  <a:srgbClr val="EAF0F5"/>
-                </a:solidFill>
-                <a:latin typeface="Aptos"/>
-              </a:defRPr>
-            </a:pPr>
-            <a:r>
-              <a:t>• The Add internet context checkbox now uses the same visual style and sits directly after Multi-Turn.</a:t>
-            </a:r>
-          </a:p>
-          <a:p>
-            <a:pPr>
-              <a:spcAft>
-                <a:spcPts val="800"/>
-              </a:spcAft>
-              <a:defRPr sz="1800">
-                <a:solidFill>
-                  <a:srgbClr val="EAF0F5"/>
-                </a:solidFill>
-                <a:latin typeface="Aptos"/>
-              </a:defRPr>
-            </a:pPr>
-            <a:r>
-              <a:t>• The frontend persists the Multi-Turn choice per browser session and sends multi_turn_enabled with each plain chat request.</a:t>
-            </a:r>
-          </a:p>
-          <a:p>
-            <a:pPr>
-              <a:spcAft>
-                <a:spcPts val="800"/>
-              </a:spcAft>
-              <a:defRPr sz="1800">
-                <a:solidFill>
-                  <a:srgbClr val="EAF0F5"/>
-                </a:solidFill>
-                <a:latin typeface="Aptos"/>
-              </a:defRPr>
-            </a:pPr>
-            <a:r>
-              <a:t>• The system therefore supports controlled experimentation: checked requests use the new planner path, unchecked requests stay old-style.</a:t>
             </a:r>
           </a:p>
         </p:txBody>
@@ -6486,7 +6251,7 @@
     <p:bg>
       <p:bgPr>
         <a:solidFill>
-          <a:srgbClr val="0C1623"/>
+          <a:srgbClr val="F8FAFC"/>
         </a:solidFill>
         <a:effectLst/>
       </p:bgPr>
@@ -6500,23 +6265,90 @@
       <p:grpSpPr/>
       <p:sp>
         <p:nvSpPr>
-          <p:cNvPr id="2" name="Rectangle 1"/>
+          <p:cNvPr id="2" name="Title 1"/>
+          <p:cNvSpPr>
+            <a:spLocks noGrp="1"/>
+          </p:cNvSpPr>
+          <p:nvPr>
+            <p:ph type="title"/>
+          </p:nvPr>
+        </p:nvSpPr>
+        <p:spPr/>
+        <p:txBody>
+          <a:bodyPr/>
+          <a:lstStyle/>
+          <a:p>
+            <a:pPr>
+              <a:defRPr b="1" sz="2600">
+                <a:solidFill>
+                  <a:srgbClr val="0F172A"/>
+                </a:solidFill>
+                <a:latin typeface="Aptos Display"/>
+              </a:defRPr>
+            </a:pPr>
+            <a:r>
+              <a:t>Parametrizer is now a strict sequential queue</a:t>
+            </a:r>
+          </a:p>
+        </p:txBody>
+      </p:sp>
+      <p:sp>
+        <p:nvSpPr>
+          <p:cNvPr id="3" name="TextBox 2"/>
+          <p:cNvSpPr txBox="1"/>
+          <p:nvPr/>
+        </p:nvSpPr>
+        <p:spPr>
+          <a:xfrm>
+            <a:off x="640080" y="960120"/>
+            <a:ext cx="10789920" cy="502920"/>
+          </a:xfrm>
+          <a:prstGeom prst="rect">
+            <a:avLst/>
+          </a:prstGeom>
+          <a:noFill/>
+        </p:spPr>
+        <p:txBody>
+          <a:bodyPr wrap="square">
+            <a:spAutoFit/>
+          </a:bodyPr>
+          <a:lstStyle/>
+          <a:p>
+            <a:pPr>
+              <a:defRPr sz="1400">
+                <a:solidFill>
+                  <a:srgbClr val="475569"/>
+                </a:solidFill>
+                <a:latin typeface="Aptos"/>
+              </a:defRPr>
+            </a:pPr>
+            <a:r>
+              <a:t>One source, one target, one complete segment at a time, with no worker-thread fan-out.</a:t>
+            </a:r>
+          </a:p>
+        </p:txBody>
+      </p:sp>
+      <p:sp>
+        <p:nvSpPr>
+          <p:cNvPr id="4" name="Rounded Rectangle 3"/>
           <p:cNvSpPr/>
           <p:nvPr/>
         </p:nvSpPr>
         <p:spPr>
           <a:xfrm>
-            <a:off x="0" y="0"/>
-            <a:ext cx="12191695" cy="411480"/>
-          </a:xfrm>
-          <a:prstGeom prst="rect">
+            <a:off x="640080" y="1600200"/>
+            <a:ext cx="10332720" cy="3611880"/>
+          </a:xfrm>
+          <a:prstGeom prst="roundRect">
             <a:avLst/>
           </a:prstGeom>
           <a:solidFill>
-            <a:srgbClr val="184366"/>
+            <a:srgbClr val="FFFFFF"/>
           </a:solidFill>
           <a:ln>
-            <a:noFill/>
+            <a:solidFill>
+              <a:srgbClr val="CBD5E1"/>
+            </a:solidFill>
           </a:ln>
         </p:spPr>
         <p:style>
@@ -6534,29 +6366,123 @@
           </a:fontRef>
         </p:style>
         <p:txBody>
-          <a:bodyPr rtlCol="0" anchor="ctr"/>
-          <a:lstStyle/>
-          <a:p>
-            <a:pPr algn="ctr"/>
-          </a:p>
-        </p:txBody>
-      </p:sp>
-      <p:sp>
-        <p:nvSpPr>
-          <p:cNvPr id="3" name="Rectangle 2"/>
+          <a:bodyPr rtlCol="0" anchor="t" wrap="square" lIns="164592" rIns="128016" tIns="91440" bIns="73152">
+            <a:normAutofit/>
+          </a:bodyPr>
+          <a:lstStyle/>
+          <a:p>
+            <a:pPr algn="ctr">
+              <a:spcAft>
+                <a:spcPts val="700"/>
+              </a:spcAft>
+              <a:defRPr sz="1600">
+                <a:solidFill>
+                  <a:srgbClr val="0F172A"/>
+                </a:solidFill>
+                <a:latin typeface="Aptos"/>
+              </a:defRPr>
+            </a:pPr>
+            <a:r>
+              <a:rPr sz="1400">
+                <a:latin typeface="Aptos"/>
+              </a:rPr>
+              <a:t>- The source log is the queue. Each complete structured output segment is one queue item.</a:t>
+            </a:r>
+          </a:p>
+          <a:p>
+            <a:pPr>
+              <a:spcAft>
+                <a:spcPts val="700"/>
+              </a:spcAft>
+              <a:defRPr sz="1600">
+                <a:solidFill>
+                  <a:srgbClr val="0F172A"/>
+                </a:solidFill>
+                <a:latin typeface="Aptos"/>
+              </a:defRPr>
+            </a:pPr>
+            <a:r>
+              <a:rPr sz="1400">
+                <a:latin typeface="Aptos"/>
+              </a:rPr>
+              <a:t>- Parametrizer reads only the next unread complete segment, never the whole backlog as one batch.</a:t>
+            </a:r>
+          </a:p>
+          <a:p>
+            <a:pPr>
+              <a:spcAft>
+                <a:spcPts val="700"/>
+              </a:spcAft>
+              <a:defRPr sz="1600">
+                <a:solidFill>
+                  <a:srgbClr val="0F172A"/>
+                </a:solidFill>
+                <a:latin typeface="Aptos"/>
+              </a:defRPr>
+            </a:pPr>
+            <a:r>
+              <a:rPr sz="1400">
+                <a:latin typeface="Aptos"/>
+              </a:rPr>
+              <a:t>- For each segment it waits the target stopped, backs up config.yaml, applies mappings, starts the target, waits for the target to finish, archives the target log, restores the config backup, and only then commits the source cursor.</a:t>
+            </a:r>
+          </a:p>
+          <a:p>
+            <a:pPr>
+              <a:spcAft>
+                <a:spcPts val="700"/>
+              </a:spcAft>
+              <a:defRPr sz="1600">
+                <a:solidFill>
+                  <a:srgbClr val="0F172A"/>
+                </a:solidFill>
+                <a:latin typeface="Aptos"/>
+              </a:defRPr>
+            </a:pPr>
+            <a:r>
+              <a:rPr sz="1400">
+                <a:latin typeface="Aptos"/>
+              </a:rPr>
+              <a:t>- If the source emits A, B, C, and D very quickly, Parametrizer still processes A then B then C then D in strict order.</a:t>
+            </a:r>
+          </a:p>
+          <a:p>
+            <a:pPr>
+              <a:spcAft>
+                <a:spcPts val="700"/>
+              </a:spcAft>
+              <a:defRPr sz="1600">
+                <a:solidFill>
+                  <a:srgbClr val="0F172A"/>
+                </a:solidFill>
+                <a:latin typeface="Aptos"/>
+              </a:defRPr>
+            </a:pPr>
+            <a:r>
+              <a:rPr sz="1400">
+                <a:latin typeface="Aptos"/>
+              </a:rPr>
+              <a:t>- This design avoids race conditions on the target config file and keeps the runtime easy to reason about during pause and resume.</a:t>
+            </a:r>
+          </a:p>
+        </p:txBody>
+      </p:sp>
+      <p:sp>
+        <p:nvSpPr>
+          <p:cNvPr id="5" name="Rectangle 4"/>
           <p:cNvSpPr/>
           <p:nvPr/>
         </p:nvSpPr>
         <p:spPr>
           <a:xfrm>
-            <a:off x="411480" y="713232"/>
-            <a:ext cx="164592" cy="5394960"/>
+            <a:off x="411480" y="6309360"/>
+            <a:ext cx="11384280" cy="18288"/>
           </a:xfrm>
           <a:prstGeom prst="rect">
             <a:avLst/>
           </a:prstGeom>
           <a:solidFill>
-            <a:srgbClr val="E0B04A"/>
+            <a:srgbClr val="CBD5E1"/>
           </a:solidFill>
           <a:ln>
             <a:noFill/>
@@ -6586,14 +6512,14 @@
       </p:sp>
       <p:sp>
         <p:nvSpPr>
-          <p:cNvPr id="4" name="TextBox 3"/>
+          <p:cNvPr id="6" name="TextBox 5"/>
           <p:cNvSpPr txBox="1"/>
           <p:nvPr/>
         </p:nvSpPr>
         <p:spPr>
           <a:xfrm>
-            <a:off x="749808" y="658368"/>
-            <a:ext cx="10607040" cy="658368"/>
+            <a:off x="457200" y="6355080"/>
+            <a:ext cx="6400800" cy="228600"/>
           </a:xfrm>
           <a:prstGeom prst="rect">
             <a:avLst/>
@@ -6607,29 +6533,29 @@
           <a:lstStyle/>
           <a:p>
             <a:pPr>
-              <a:defRPr b="1" sz="2400">
-                <a:solidFill>
-                  <a:srgbClr val="F4F8FB"/>
-                </a:solidFill>
-                <a:latin typeface="Aptos Display"/>
-              </a:defRPr>
-            </a:pPr>
-            <a:r>
-              <a:t>Checked request lifecycle</a:t>
-            </a:r>
-          </a:p>
-        </p:txBody>
-      </p:sp>
-      <p:sp>
-        <p:nvSpPr>
-          <p:cNvPr id="5" name="TextBox 4"/>
+              <a:defRPr sz="900">
+                <a:solidFill>
+                  <a:srgbClr val="475569"/>
+                </a:solidFill>
+                <a:latin typeface="Aptos"/>
+              </a:defRPr>
+            </a:pPr>
+            <a:r>
+              <a:t>Current workspace snapshot | April 8, 2026</a:t>
+            </a:r>
+          </a:p>
+        </p:txBody>
+      </p:sp>
+      <p:sp>
+        <p:nvSpPr>
+          <p:cNvPr id="7" name="TextBox 6"/>
           <p:cNvSpPr txBox="1"/>
           <p:nvPr/>
         </p:nvSpPr>
         <p:spPr>
           <a:xfrm>
-            <a:off x="768096" y="1261872"/>
-            <a:ext cx="10424160" cy="457200"/>
+            <a:off x="10972800" y="6327648"/>
+            <a:ext cx="548640" cy="228600"/>
           </a:xfrm>
           <a:prstGeom prst="rect">
             <a:avLst/>
@@ -6642,191 +6568,16 @@
           </a:bodyPr>
           <a:lstStyle/>
           <a:p>
-            <a:pPr>
-              <a:defRPr sz="1100">
-                <a:solidFill>
-                  <a:srgbClr val="B9CFE0"/>
-                </a:solidFill>
-                <a:latin typeface="Aptos"/>
-              </a:defRPr>
-            </a:pPr>
-            <a:r>
-              <a:t>The current request path is a staged orchestration flow rather than a single tool exposure bundle.</a:t>
-            </a:r>
-          </a:p>
-        </p:txBody>
-      </p:sp>
-      <p:sp>
-        <p:nvSpPr>
-          <p:cNvPr id="6" name="TextBox 5"/>
-          <p:cNvSpPr txBox="1"/>
-          <p:nvPr/>
-        </p:nvSpPr>
-        <p:spPr>
-          <a:xfrm>
-            <a:off x="768096" y="6446520"/>
-            <a:ext cx="10789920" cy="228600"/>
-          </a:xfrm>
-          <a:prstGeom prst="rect">
-            <a:avLst/>
-          </a:prstGeom>
-          <a:noFill/>
-        </p:spPr>
-        <p:txBody>
-          <a:bodyPr wrap="none">
-            <a:spAutoFit/>
-          </a:bodyPr>
-          <a:lstStyle/>
-          <a:p>
-            <a:pPr>
-              <a:defRPr sz="900">
-                <a:solidFill>
-                  <a:srgbClr val="9DB4C7"/>
-                </a:solidFill>
-                <a:latin typeface="Aptos"/>
-              </a:defRPr>
-            </a:pPr>
-            <a:r>
-              <a:t>Tlamatini | April 6, 2026 | bd06b4680877</a:t>
-            </a:r>
-          </a:p>
-        </p:txBody>
-      </p:sp>
-      <p:sp>
-        <p:nvSpPr>
-          <p:cNvPr id="7" name="TextBox 6"/>
-          <p:cNvSpPr txBox="1"/>
-          <p:nvPr/>
-        </p:nvSpPr>
-        <p:spPr>
-          <a:xfrm>
-            <a:off x="11338560" y="6400800"/>
-            <a:ext cx="457200" cy="274320"/>
-          </a:xfrm>
-          <a:prstGeom prst="rect">
-            <a:avLst/>
-          </a:prstGeom>
-          <a:noFill/>
-        </p:spPr>
-        <p:txBody>
-          <a:bodyPr wrap="none">
-            <a:spAutoFit/>
-          </a:bodyPr>
-          <a:lstStyle/>
-          <a:p>
             <a:pPr algn="r">
               <a:defRPr sz="900">
                 <a:solidFill>
-                  <a:srgbClr val="D4DEE7"/>
+                  <a:srgbClr val="475569"/>
                 </a:solidFill>
                 <a:latin typeface="Aptos"/>
               </a:defRPr>
             </a:pPr>
             <a:r>
               <a:t>5</a:t>
-            </a:r>
-          </a:p>
-        </p:txBody>
-      </p:sp>
-      <p:sp>
-        <p:nvSpPr>
-          <p:cNvPr id="8" name="TextBox 7"/>
-          <p:cNvSpPr txBox="1"/>
-          <p:nvPr/>
-        </p:nvSpPr>
-        <p:spPr>
-          <a:xfrm>
-            <a:off x="868680" y="1783080"/>
-            <a:ext cx="10469880" cy="4389120"/>
-          </a:xfrm>
-          <a:prstGeom prst="rect">
-            <a:avLst/>
-          </a:prstGeom>
-          <a:noFill/>
-        </p:spPr>
-        <p:txBody>
-          <a:bodyPr wrap="square" lIns="0" rIns="0" tIns="0" anchor="t">
-            <a:spAutoFit/>
-          </a:bodyPr>
-          <a:lstStyle/>
-          <a:p>
-            <a:pPr>
-              <a:spcAft>
-                <a:spcPts val="800"/>
-              </a:spcAft>
-              <a:defRPr sz="1800">
-                <a:solidFill>
-                  <a:srgbClr val="EAF0F5"/>
-                </a:solidFill>
-                <a:latin typeface="Aptos"/>
-              </a:defRPr>
-            </a:pPr>
-            <a:r>
-              <a:t>• 1. Prompt enters ask_rag() with multi_turn_enabled=true.</a:t>
-            </a:r>
-          </a:p>
-          <a:p>
-            <a:pPr>
-              <a:spcAft>
-                <a:spcPts val="800"/>
-              </a:spcAft>
-              <a:defRPr sz="1800">
-                <a:solidFill>
-                  <a:srgbClr val="EAF0F5"/>
-                </a:solidFill>
-                <a:latin typeface="Aptos"/>
-              </a:defRPr>
-            </a:pPr>
-            <a:r>
-              <a:t>• 2. Prompt-shape validation is bypassed only for this mode; broader access validation still applies.</a:t>
-            </a:r>
-          </a:p>
-          <a:p>
-            <a:pPr>
-              <a:spcAft>
-                <a:spcPts val="800"/>
-              </a:spcAft>
-              <a:defRPr sz="1800">
-                <a:solidFill>
-                  <a:srgbClr val="EAF0F5"/>
-                </a:solidFill>
-                <a:latin typeface="Aptos"/>
-              </a:defRPr>
-            </a:pPr>
-            <a:r>
-              <a:t>• 3. rag/factory.py builds a request-scoped global execution plan and prefetches only the selected MCP contexts.</a:t>
-            </a:r>
-          </a:p>
-          <a:p>
-            <a:pPr>
-              <a:spcAft>
-                <a:spcPts val="800"/>
-              </a:spcAft>
-              <a:defRPr sz="1800">
-                <a:solidFill>
-                  <a:srgbClr val="EAF0F5"/>
-                </a:solidFill>
-                <a:latin typeface="Aptos"/>
-              </a:defRPr>
-            </a:pPr>
-            <a:r>
-              <a:t>• 4. The executor binds only the relevant planned tool subset or, for context-only requests, no tools at all.</a:t>
-            </a:r>
-          </a:p>
-          <a:p>
-            <a:pPr>
-              <a:spcAft>
-                <a:spcPts val="800"/>
-              </a:spcAft>
-              <a:defRPr sz="1800">
-                <a:solidFill>
-                  <a:srgbClr val="EAF0F5"/>
-                </a:solidFill>
-                <a:latin typeface="Aptos"/>
-              </a:defRPr>
-            </a:pPr>
-            <a:r>
-              <a:t>• 5. The final answer is synthesized from prefetched context, tool results, and any monitored wrapped-run observations.</a:t>
             </a:r>
           </a:p>
         </p:txBody>
@@ -6845,7 +6596,7 @@
     <p:bg>
       <p:bgPr>
         <a:solidFill>
-          <a:srgbClr val="0C1623"/>
+          <a:srgbClr val="F8FAFC"/>
         </a:solidFill>
         <a:effectLst/>
       </p:bgPr>
@@ -6859,20 +6610,85 @@
       <p:grpSpPr/>
       <p:sp>
         <p:nvSpPr>
-          <p:cNvPr id="2" name="Rectangle 1"/>
+          <p:cNvPr id="2" name="Title 1"/>
+          <p:cNvSpPr>
+            <a:spLocks noGrp="1"/>
+          </p:cNvSpPr>
+          <p:nvPr>
+            <p:ph type="title"/>
+          </p:nvPr>
+        </p:nvSpPr>
+        <p:spPr/>
+        <p:txBody>
+          <a:bodyPr/>
+          <a:lstStyle/>
+          <a:p>
+            <a:pPr>
+              <a:defRPr b="1" sz="2600">
+                <a:solidFill>
+                  <a:srgbClr val="0F172A"/>
+                </a:solidFill>
+                <a:latin typeface="Aptos Display"/>
+              </a:defRPr>
+            </a:pPr>
+            <a:r>
+              <a:t>Parametrizer now preserves each target outcome log</a:t>
+            </a:r>
+          </a:p>
+        </p:txBody>
+      </p:sp>
+      <p:sp>
+        <p:nvSpPr>
+          <p:cNvPr id="3" name="TextBox 2"/>
+          <p:cNvSpPr txBox="1"/>
+          <p:nvPr/>
+        </p:nvSpPr>
+        <p:spPr>
+          <a:xfrm>
+            <a:off x="640080" y="960120"/>
+            <a:ext cx="10789920" cy="502920"/>
+          </a:xfrm>
+          <a:prstGeom prst="rect">
+            <a:avLst/>
+          </a:prstGeom>
+          <a:noFill/>
+        </p:spPr>
+        <p:txBody>
+          <a:bodyPr wrap="square">
+            <a:spAutoFit/>
+          </a:bodyPr>
+          <a:lstStyle/>
+          <a:p>
+            <a:pPr>
+              <a:defRPr sz="1400">
+                <a:solidFill>
+                  <a:srgbClr val="475569"/>
+                </a:solidFill>
+                <a:latin typeface="Aptos"/>
+              </a:defRPr>
+            </a:pPr>
+            <a:r>
+              <a:t>The latest improvement prevents later target runs from overwriting earlier segment results.</a:t>
+            </a:r>
+          </a:p>
+        </p:txBody>
+      </p:sp>
+      <p:sp>
+        <p:nvSpPr>
+          <p:cNvPr id="4" name="Rectangle 3"/>
           <p:cNvSpPr/>
           <p:nvPr/>
         </p:nvSpPr>
         <p:spPr>
           <a:xfrm>
-            <a:off x="0" y="0"/>
-            <a:ext cx="12191695" cy="411480"/>
+            <a:off x="640080" y="1536192"/>
+            <a:ext cx="128016" cy="329184"/>
           </a:xfrm>
           <a:prstGeom prst="rect">
             <a:avLst/>
           </a:prstGeom>
           <a:solidFill>
-            <a:srgbClr val="184366"/>
+            <a:srgbClr val="EA580C"/>
           </a:solidFill>
           <a:ln>
             <a:noFill/>
@@ -6902,23 +6718,61 @@
       </p:sp>
       <p:sp>
         <p:nvSpPr>
-          <p:cNvPr id="3" name="Rectangle 2"/>
+          <p:cNvPr id="5" name="TextBox 4"/>
+          <p:cNvSpPr txBox="1"/>
+          <p:nvPr/>
+        </p:nvSpPr>
+        <p:spPr>
+          <a:xfrm>
+            <a:off x="841248" y="1517904"/>
+            <a:ext cx="5303520" cy="365760"/>
+          </a:xfrm>
+          <a:prstGeom prst="rect">
+            <a:avLst/>
+          </a:prstGeom>
+          <a:noFill/>
+        </p:spPr>
+        <p:txBody>
+          <a:bodyPr wrap="none">
+            <a:spAutoFit/>
+          </a:bodyPr>
+          <a:lstStyle/>
+          <a:p>
+            <a:pPr>
+              <a:defRPr b="1" sz="1800">
+                <a:solidFill>
+                  <a:srgbClr val="0F172A"/>
+                </a:solidFill>
+                <a:latin typeface="Aptos Display"/>
+              </a:defRPr>
+            </a:pPr>
+            <a:r>
+              <a:t>Current preserved artifacts</a:t>
+            </a:r>
+          </a:p>
+        </p:txBody>
+      </p:sp>
+      <p:sp>
+        <p:nvSpPr>
+          <p:cNvPr id="6" name="Rounded Rectangle 5"/>
           <p:cNvSpPr/>
           <p:nvPr/>
         </p:nvSpPr>
         <p:spPr>
           <a:xfrm>
-            <a:off x="411480" y="713232"/>
-            <a:ext cx="164592" cy="5394960"/>
-          </a:xfrm>
-          <a:prstGeom prst="rect">
+            <a:off x="640080" y="1828800"/>
+            <a:ext cx="4937760" cy="3154680"/>
+          </a:xfrm>
+          <a:prstGeom prst="roundRect">
             <a:avLst/>
           </a:prstGeom>
           <a:solidFill>
-            <a:srgbClr val="E0B04A"/>
+            <a:srgbClr val="FFFFFF"/>
           </a:solidFill>
           <a:ln>
-            <a:noFill/>
+            <a:solidFill>
+              <a:srgbClr val="CBD5E1"/>
+            </a:solidFill>
           </a:ln>
         </p:spPr>
         <p:style>
@@ -6936,6 +6790,105 @@
           </a:fontRef>
         </p:style>
         <p:txBody>
+          <a:bodyPr rtlCol="0" anchor="t" wrap="square" lIns="164592" rIns="128016" tIns="91440" bIns="73152">
+            <a:normAutofit/>
+          </a:bodyPr>
+          <a:lstStyle/>
+          <a:p>
+            <a:pPr algn="ctr">
+              <a:spcAft>
+                <a:spcPts val="700"/>
+              </a:spcAft>
+              <a:defRPr sz="1600">
+                <a:solidFill>
+                  <a:srgbClr val="0F172A"/>
+                </a:solidFill>
+                <a:latin typeface="Aptos"/>
+              </a:defRPr>
+            </a:pPr>
+            <a:r>
+              <a:rPr sz="1400">
+                <a:latin typeface="Aptos"/>
+              </a:rPr>
+              <a:t>- config.yaml.bck - temporary target-config backup for the current segment.</a:t>
+            </a:r>
+          </a:p>
+          <a:p>
+            <a:pPr>
+              <a:spcAft>
+                <a:spcPts val="700"/>
+              </a:spcAft>
+              <a:defRPr sz="1600">
+                <a:solidFill>
+                  <a:srgbClr val="0F172A"/>
+                </a:solidFill>
+                <a:latin typeface="Aptos"/>
+              </a:defRPr>
+            </a:pPr>
+            <a:r>
+              <a:rPr sz="1400">
+                <a:latin typeface="Aptos"/>
+              </a:rPr>
+              <a:t>- reanim_&lt;source&gt;.pos - committed byte offset, processed count, stage, and in-flight boundary.</a:t>
+            </a:r>
+          </a:p>
+          <a:p>
+            <a:pPr>
+              <a:spcAft>
+                <a:spcPts val="700"/>
+              </a:spcAft>
+              <a:defRPr sz="1600">
+                <a:solidFill>
+                  <a:srgbClr val="0F172A"/>
+                </a:solidFill>
+                <a:latin typeface="Aptos"/>
+              </a:defRPr>
+            </a:pPr>
+            <a:r>
+              <a:rPr sz="1400">
+                <a:latin typeface="Aptos"/>
+              </a:rPr>
+              <a:t>- &lt;target_agent&gt;_segment_&lt;n&gt;.log - archived target log snapshot for each finished segment.</a:t>
+            </a:r>
+          </a:p>
+        </p:txBody>
+      </p:sp>
+      <p:sp>
+        <p:nvSpPr>
+          <p:cNvPr id="7" name="Rectangle 6"/>
+          <p:cNvSpPr/>
+          <p:nvPr/>
+        </p:nvSpPr>
+        <p:spPr>
+          <a:xfrm>
+            <a:off x="5943600" y="1536192"/>
+            <a:ext cx="128016" cy="329184"/>
+          </a:xfrm>
+          <a:prstGeom prst="rect">
+            <a:avLst/>
+          </a:prstGeom>
+          <a:solidFill>
+            <a:srgbClr val="0D9488"/>
+          </a:solidFill>
+          <a:ln>
+            <a:noFill/>
+          </a:ln>
+        </p:spPr>
+        <p:style>
+          <a:lnRef idx="1">
+            <a:schemeClr val="accent1"/>
+          </a:lnRef>
+          <a:fillRef idx="3">
+            <a:schemeClr val="accent1"/>
+          </a:fillRef>
+          <a:effectRef idx="2">
+            <a:schemeClr val="accent1"/>
+          </a:effectRef>
+          <a:fontRef idx="minor">
+            <a:schemeClr val="lt1"/>
+          </a:fontRef>
+        </p:style>
+        <p:txBody>
           <a:bodyPr rtlCol="0" anchor="ctr"/>
           <a:lstStyle/>
           <a:p>
@@ -6945,14 +6898,14 @@
       </p:sp>
       <p:sp>
         <p:nvSpPr>
-          <p:cNvPr id="4" name="TextBox 3"/>
+          <p:cNvPr id="8" name="TextBox 7"/>
           <p:cNvSpPr txBox="1"/>
           <p:nvPr/>
         </p:nvSpPr>
         <p:spPr>
           <a:xfrm>
-            <a:off x="749808" y="658368"/>
-            <a:ext cx="10607040" cy="658368"/>
+            <a:off x="6144768" y="1517904"/>
+            <a:ext cx="5303520" cy="365760"/>
           </a:xfrm>
           <a:prstGeom prst="rect">
             <a:avLst/>
@@ -6966,29 +6919,211 @@
           <a:lstStyle/>
           <a:p>
             <a:pPr>
-              <a:defRPr b="1" sz="2400">
-                <a:solidFill>
-                  <a:srgbClr val="F4F8FB"/>
+              <a:defRPr b="1" sz="1800">
+                <a:solidFill>
+                  <a:srgbClr val="0F172A"/>
                 </a:solidFill>
                 <a:latin typeface="Aptos Display"/>
               </a:defRPr>
             </a:pPr>
             <a:r>
-              <a:t>Phase 1: capability selection</a:t>
-            </a:r>
-          </a:p>
-        </p:txBody>
-      </p:sp>
-      <p:sp>
-        <p:nvSpPr>
-          <p:cNvPr id="5" name="TextBox 4"/>
+              <a:t>Examples</a:t>
+            </a:r>
+          </a:p>
+        </p:txBody>
+      </p:sp>
+      <p:sp>
+        <p:nvSpPr>
+          <p:cNvPr id="9" name="Rounded Rectangle 8"/>
+          <p:cNvSpPr/>
+          <p:nvPr/>
+        </p:nvSpPr>
+        <p:spPr>
+          <a:xfrm>
+            <a:off x="5943600" y="1828800"/>
+            <a:ext cx="4937760" cy="3154680"/>
+          </a:xfrm>
+          <a:prstGeom prst="roundRect">
+            <a:avLst/>
+          </a:prstGeom>
+          <a:solidFill>
+            <a:srgbClr val="F1F5F9"/>
+          </a:solidFill>
+          <a:ln>
+            <a:solidFill>
+              <a:srgbClr val="CBD5E1"/>
+            </a:solidFill>
+          </a:ln>
+        </p:spPr>
+        <p:style>
+          <a:lnRef idx="1">
+            <a:schemeClr val="accent1"/>
+          </a:lnRef>
+          <a:fillRef idx="3">
+            <a:schemeClr val="accent1"/>
+          </a:fillRef>
+          <a:effectRef idx="2">
+            <a:schemeClr val="accent1"/>
+          </a:effectRef>
+          <a:fontRef idx="minor">
+            <a:schemeClr val="lt1"/>
+          </a:fontRef>
+        </p:style>
+        <p:txBody>
+          <a:bodyPr rtlCol="0" anchor="t" wrap="square" lIns="164592" rIns="128016" tIns="91440" bIns="73152">
+            <a:normAutofit/>
+          </a:bodyPr>
+          <a:lstStyle/>
+          <a:p>
+            <a:pPr algn="ctr">
+              <a:spcAft>
+                <a:spcPts val="700"/>
+              </a:spcAft>
+              <a:defRPr sz="1600">
+                <a:solidFill>
+                  <a:srgbClr val="0F172A"/>
+                </a:solidFill>
+                <a:latin typeface="Aptos"/>
+              </a:defRPr>
+            </a:pPr>
+            <a:r>
+              <a:rPr sz="1400">
+                <a:latin typeface="Aptos"/>
+              </a:rPr>
+              <a:t>- prompter_1_segment_1.log</a:t>
+            </a:r>
+          </a:p>
+          <a:p>
+            <a:pPr>
+              <a:spcAft>
+                <a:spcPts val="700"/>
+              </a:spcAft>
+              <a:defRPr sz="1600">
+                <a:solidFill>
+                  <a:srgbClr val="0F172A"/>
+                </a:solidFill>
+                <a:latin typeface="Aptos"/>
+              </a:defRPr>
+            </a:pPr>
+            <a:r>
+              <a:rPr sz="1400">
+                <a:latin typeface="Aptos"/>
+              </a:rPr>
+              <a:t>- prompter_1_segment_2.log</a:t>
+            </a:r>
+          </a:p>
+          <a:p>
+            <a:pPr>
+              <a:spcAft>
+                <a:spcPts val="700"/>
+              </a:spcAft>
+              <a:defRPr sz="1600">
+                <a:solidFill>
+                  <a:srgbClr val="0F172A"/>
+                </a:solidFill>
+                <a:latin typeface="Aptos"/>
+              </a:defRPr>
+            </a:pPr>
+            <a:r>
+              <a:rPr sz="1400">
+                <a:latin typeface="Aptos"/>
+              </a:rPr>
+              <a:t>- crawler_2_segment_1.log</a:t>
+            </a:r>
+          </a:p>
+          <a:p>
+            <a:pPr>
+              <a:spcAft>
+                <a:spcPts val="700"/>
+              </a:spcAft>
+              <a:defRPr sz="1600">
+                <a:solidFill>
+                  <a:srgbClr val="0F172A"/>
+                </a:solidFill>
+                <a:latin typeface="Aptos"/>
+              </a:defRPr>
+            </a:pPr>
+            <a:r>
+              <a:rPr sz="1400">
+                <a:latin typeface="Aptos"/>
+              </a:rPr>
+              <a:t>- crawler_2_segment_2.log</a:t>
+            </a:r>
+          </a:p>
+          <a:p>
+            <a:pPr>
+              <a:spcAft>
+                <a:spcPts val="700"/>
+              </a:spcAft>
+              <a:defRPr sz="1600">
+                <a:solidFill>
+                  <a:srgbClr val="0F172A"/>
+                </a:solidFill>
+                <a:latin typeface="Aptos"/>
+              </a:defRPr>
+            </a:pPr>
+            <a:r>
+              <a:rPr sz="1400">
+                <a:latin typeface="Aptos"/>
+              </a:rPr>
+              <a:t>- These files are copied from the target agent live log immediately after each finished segment.</a:t>
+            </a:r>
+          </a:p>
+        </p:txBody>
+      </p:sp>
+      <p:sp>
+        <p:nvSpPr>
+          <p:cNvPr id="10" name="Rectangle 9"/>
+          <p:cNvSpPr/>
+          <p:nvPr/>
+        </p:nvSpPr>
+        <p:spPr>
+          <a:xfrm>
+            <a:off x="411480" y="6309360"/>
+            <a:ext cx="11384280" cy="18288"/>
+          </a:xfrm>
+          <a:prstGeom prst="rect">
+            <a:avLst/>
+          </a:prstGeom>
+          <a:solidFill>
+            <a:srgbClr val="CBD5E1"/>
+          </a:solidFill>
+          <a:ln>
+            <a:noFill/>
+          </a:ln>
+        </p:spPr>
+        <p:style>
+          <a:lnRef idx="1">
+            <a:schemeClr val="accent1"/>
+          </a:lnRef>
+          <a:fillRef idx="3">
+            <a:schemeClr val="accent1"/>
+          </a:fillRef>
+          <a:effectRef idx="2">
+            <a:schemeClr val="accent1"/>
+          </a:effectRef>
+          <a:fontRef idx="minor">
+            <a:schemeClr val="lt1"/>
+          </a:fontRef>
+        </p:style>
+        <p:txBody>
+          <a:bodyPr rtlCol="0" anchor="ctr"/>
+          <a:lstStyle/>
+          <a:p>
+            <a:pPr algn="ctr"/>
+          </a:p>
+        </p:txBody>
+      </p:sp>
+      <p:sp>
+        <p:nvSpPr>
+          <p:cNvPr id="11" name="TextBox 10"/>
           <p:cNvSpPr txBox="1"/>
           <p:nvPr/>
         </p:nvSpPr>
         <p:spPr>
           <a:xfrm>
-            <a:off x="768096" y="1261872"/>
-            <a:ext cx="10424160" cy="457200"/>
+            <a:off x="457200" y="6355080"/>
+            <a:ext cx="6400800" cy="228600"/>
           </a:xfrm>
           <a:prstGeom prst="rect">
             <a:avLst/>
@@ -7002,29 +7137,29 @@
           <a:lstStyle/>
           <a:p>
             <a:pPr>
-              <a:defRPr sz="1100">
-                <a:solidFill>
-                  <a:srgbClr val="B9CFE0"/>
-                </a:solidFill>
-                <a:latin typeface="Aptos"/>
-              </a:defRPr>
-            </a:pPr>
-            <a:r>
-              <a:t>capability_registry.py turns a flat tool list into a scored request-specific capability surface.</a:t>
-            </a:r>
-          </a:p>
-        </p:txBody>
-      </p:sp>
-      <p:sp>
-        <p:nvSpPr>
-          <p:cNvPr id="6" name="TextBox 5"/>
+              <a:defRPr sz="900">
+                <a:solidFill>
+                  <a:srgbClr val="475569"/>
+                </a:solidFill>
+                <a:latin typeface="Aptos"/>
+              </a:defRPr>
+            </a:pPr>
+            <a:r>
+              <a:t>Current workspace snapshot | April 8, 2026</a:t>
+            </a:r>
+          </a:p>
+        </p:txBody>
+      </p:sp>
+      <p:sp>
+        <p:nvSpPr>
+          <p:cNvPr id="12" name="TextBox 11"/>
           <p:cNvSpPr txBox="1"/>
           <p:nvPr/>
         </p:nvSpPr>
         <p:spPr>
           <a:xfrm>
-            <a:off x="768096" y="6446520"/>
-            <a:ext cx="10789920" cy="228600"/>
+            <a:off x="10972800" y="6327648"/>
+            <a:ext cx="548640" cy="228600"/>
           </a:xfrm>
           <a:prstGeom prst="rect">
             <a:avLst/>
@@ -7037,139 +7172,16 @@
           </a:bodyPr>
           <a:lstStyle/>
           <a:p>
-            <a:pPr>
-              <a:defRPr sz="900">
-                <a:solidFill>
-                  <a:srgbClr val="9DB4C7"/>
-                </a:solidFill>
-                <a:latin typeface="Aptos"/>
-              </a:defRPr>
-            </a:pPr>
-            <a:r>
-              <a:t>Tlamatini | April 6, 2026 | bd06b4680877</a:t>
-            </a:r>
-          </a:p>
-        </p:txBody>
-      </p:sp>
-      <p:sp>
-        <p:nvSpPr>
-          <p:cNvPr id="7" name="TextBox 6"/>
-          <p:cNvSpPr txBox="1"/>
-          <p:nvPr/>
-        </p:nvSpPr>
-        <p:spPr>
-          <a:xfrm>
-            <a:off x="11338560" y="6400800"/>
-            <a:ext cx="457200" cy="274320"/>
-          </a:xfrm>
-          <a:prstGeom prst="rect">
-            <a:avLst/>
-          </a:prstGeom>
-          <a:noFill/>
-        </p:spPr>
-        <p:txBody>
-          <a:bodyPr wrap="none">
-            <a:spAutoFit/>
-          </a:bodyPr>
-          <a:lstStyle/>
-          <a:p>
             <a:pPr algn="r">
               <a:defRPr sz="900">
                 <a:solidFill>
-                  <a:srgbClr val="D4DEE7"/>
+                  <a:srgbClr val="475569"/>
                 </a:solidFill>
                 <a:latin typeface="Aptos"/>
               </a:defRPr>
             </a:pPr>
             <a:r>
               <a:t>6</a:t>
-            </a:r>
-          </a:p>
-        </p:txBody>
-      </p:sp>
-      <p:sp>
-        <p:nvSpPr>
-          <p:cNvPr id="8" name="TextBox 7"/>
-          <p:cNvSpPr txBox="1"/>
-          <p:nvPr/>
-        </p:nvSpPr>
-        <p:spPr>
-          <a:xfrm>
-            <a:off x="868680" y="1783080"/>
-            <a:ext cx="10469880" cy="4389120"/>
-          </a:xfrm>
-          <a:prstGeom prst="rect">
-            <a:avLst/>
-          </a:prstGeom>
-          <a:noFill/>
-        </p:spPr>
-        <p:txBody>
-          <a:bodyPr wrap="square" lIns="0" rIns="0" tIns="0" anchor="t">
-            <a:spAutoFit/>
-          </a:bodyPr>
-          <a:lstStyle/>
-          <a:p>
-            <a:pPr>
-              <a:spcAft>
-                <a:spcPts val="800"/>
-              </a:spcAft>
-              <a:defRPr sz="1800">
-                <a:solidFill>
-                  <a:srgbClr val="EAF0F5"/>
-                </a:solidFill>
-                <a:latin typeface="Aptos"/>
-              </a:defRPr>
-            </a:pPr>
-            <a:r>
-              <a:t>• Normal tools, template-agent tools, wrapped chat-agent launchers, and run-control tools are all scored against the request.</a:t>
-            </a:r>
-          </a:p>
-          <a:p>
-            <a:pPr>
-              <a:spcAft>
-                <a:spcPts val="800"/>
-              </a:spcAft>
-              <a:defRPr sz="1800">
-                <a:solidFill>
-                  <a:srgbClr val="EAF0F5"/>
-                </a:solidFill>
-                <a:latin typeface="Aptos"/>
-              </a:defRPr>
-            </a:pPr>
-            <a:r>
-              <a:t>• Selection uses aliases, example requests, token overlap, and security-hint phrases.</a:t>
-            </a:r>
-          </a:p>
-          <a:p>
-            <a:pPr>
-              <a:spcAft>
-                <a:spcPts val="800"/>
-              </a:spcAft>
-              <a:defRPr sz="1800">
-                <a:solidFill>
-                  <a:srgbClr val="EAF0F5"/>
-                </a:solidFill>
-                <a:latin typeface="Aptos"/>
-              </a:defRPr>
-            </a:pPr>
-            <a:r>
-              <a:t>• If wrapped agents or run ids are implied, follow-up monitoring tools are added automatically.</a:t>
-            </a:r>
-          </a:p>
-          <a:p>
-            <a:pPr>
-              <a:spcAft>
-                <a:spcPts val="800"/>
-              </a:spcAft>
-              <a:defRPr sz="1800">
-                <a:solidFill>
-                  <a:srgbClr val="EAF0F5"/>
-                </a:solidFill>
-                <a:latin typeface="Aptos"/>
-              </a:defRPr>
-            </a:pPr>
-            <a:r>
-              <a:t>• The practical effect is smaller prompt/tool clutter and more precise action surfaces for checked requests.</a:t>
             </a:r>
           </a:p>
         </p:txBody>
@@ -7188,7 +7200,7 @@
     <p:bg>
       <p:bgPr>
         <a:solidFill>
-          <a:srgbClr val="0C1623"/>
+          <a:srgbClr val="F8FAFC"/>
         </a:solidFill>
         <a:effectLst/>
       </p:bgPr>
@@ -7202,23 +7214,90 @@
       <p:grpSpPr/>
       <p:sp>
         <p:nvSpPr>
-          <p:cNvPr id="2" name="Rectangle 1"/>
+          <p:cNvPr id="2" name="Title 1"/>
+          <p:cNvSpPr>
+            <a:spLocks noGrp="1"/>
+          </p:cNvSpPr>
+          <p:nvPr>
+            <p:ph type="title"/>
+          </p:nvPr>
+        </p:nvSpPr>
+        <p:spPr/>
+        <p:txBody>
+          <a:bodyPr/>
+          <a:lstStyle/>
+          <a:p>
+            <a:pPr>
+              <a:defRPr b="1" sz="2600">
+                <a:solidFill>
+                  <a:srgbClr val="0F172A"/>
+                </a:solidFill>
+                <a:latin typeface="Aptos Display"/>
+              </a:defRPr>
+            </a:pPr>
+            <a:r>
+              <a:t>Pause and resume semantics remain explicit</a:t>
+            </a:r>
+          </a:p>
+        </p:txBody>
+      </p:sp>
+      <p:sp>
+        <p:nvSpPr>
+          <p:cNvPr id="3" name="TextBox 2"/>
+          <p:cNvSpPr txBox="1"/>
+          <p:nvPr/>
+        </p:nvSpPr>
+        <p:spPr>
+          <a:xfrm>
+            <a:off x="640080" y="960120"/>
+            <a:ext cx="10789920" cy="502920"/>
+          </a:xfrm>
+          <a:prstGeom prst="rect">
+            <a:avLst/>
+          </a:prstGeom>
+          <a:noFill/>
+        </p:spPr>
+        <p:txBody>
+          <a:bodyPr wrap="square">
+            <a:spAutoFit/>
+          </a:bodyPr>
+          <a:lstStyle/>
+          <a:p>
+            <a:pPr>
+              <a:defRPr sz="1400">
+                <a:solidFill>
+                  <a:srgbClr val="475569"/>
+                </a:solidFill>
+                <a:latin typeface="Aptos"/>
+              </a:defRPr>
+            </a:pPr>
+            <a:r>
+              <a:t>The current recovery contract is now documented together with the new segment-log archive step.</a:t>
+            </a:r>
+          </a:p>
+        </p:txBody>
+      </p:sp>
+      <p:sp>
+        <p:nvSpPr>
+          <p:cNvPr id="4" name="Rounded Rectangle 3"/>
           <p:cNvSpPr/>
           <p:nvPr/>
         </p:nvSpPr>
         <p:spPr>
           <a:xfrm>
-            <a:off x="0" y="0"/>
-            <a:ext cx="12191695" cy="411480"/>
-          </a:xfrm>
-          <a:prstGeom prst="rect">
+            <a:off x="640080" y="1645920"/>
+            <a:ext cx="10241280" cy="3566160"/>
+          </a:xfrm>
+          <a:prstGeom prst="roundRect">
             <a:avLst/>
           </a:prstGeom>
           <a:solidFill>
-            <a:srgbClr val="184366"/>
+            <a:srgbClr val="FFFFFF"/>
           </a:solidFill>
           <a:ln>
-            <a:noFill/>
+            <a:solidFill>
+              <a:srgbClr val="CBD5E1"/>
+            </a:solidFill>
           </a:ln>
         </p:spPr>
         <p:style>
@@ -7236,29 +7315,104 @@
           </a:fontRef>
         </p:style>
         <p:txBody>
-          <a:bodyPr rtlCol="0" anchor="ctr"/>
-          <a:lstStyle/>
-          <a:p>
-            <a:pPr algn="ctr"/>
-          </a:p>
-        </p:txBody>
-      </p:sp>
-      <p:sp>
-        <p:nvSpPr>
-          <p:cNvPr id="3" name="Rectangle 2"/>
+          <a:bodyPr rtlCol="0" anchor="t" wrap="square" lIns="164592" rIns="128016" tIns="91440" bIns="73152">
+            <a:normAutofit/>
+          </a:bodyPr>
+          <a:lstStyle/>
+          <a:p>
+            <a:pPr algn="ctr">
+              <a:spcAft>
+                <a:spcPts val="700"/>
+              </a:spcAft>
+              <a:defRPr sz="1600">
+                <a:solidFill>
+                  <a:srgbClr val="0F172A"/>
+                </a:solidFill>
+                <a:latin typeface="Aptos"/>
+              </a:defRPr>
+            </a:pPr>
+            <a:r>
+              <a:rPr sz="1400">
+                <a:latin typeface="Aptos"/>
+              </a:rPr>
+              <a:t>- If pause happens before the target finishes, Parametrizer restores config.yaml.bck and retries that same segment from the last committed cursor.</a:t>
+            </a:r>
+          </a:p>
+          <a:p>
+            <a:pPr>
+              <a:spcAft>
+                <a:spcPts val="700"/>
+              </a:spcAft>
+              <a:defRPr sz="1600">
+                <a:solidFill>
+                  <a:srgbClr val="0F172A"/>
+                </a:solidFill>
+                <a:latin typeface="Aptos"/>
+              </a:defRPr>
+            </a:pPr>
+            <a:r>
+              <a:rPr sz="1400">
+                <a:latin typeface="Aptos"/>
+              </a:rPr>
+              <a:t>- If pause happens after the target finished but before the source cursor commit, Parametrizer archives that finished target log, restores the backup, advances the cursor, and avoids replaying the already completed target run.</a:t>
+            </a:r>
+          </a:p>
+          <a:p>
+            <a:pPr>
+              <a:spcAft>
+                <a:spcPts val="700"/>
+              </a:spcAft>
+              <a:defRPr sz="1600">
+                <a:solidFill>
+                  <a:srgbClr val="0F172A"/>
+                </a:solidFill>
+                <a:latin typeface="Aptos"/>
+              </a:defRPr>
+            </a:pPr>
+            <a:r>
+              <a:rPr sz="1400">
+                <a:latin typeface="Aptos"/>
+              </a:rPr>
+              <a:t>- Parametrizer stops itself only when the source agent is no longer running and the source log has no more complete unread segments after the last committed offset.</a:t>
+            </a:r>
+          </a:p>
+          <a:p>
+            <a:pPr>
+              <a:spcAft>
+                <a:spcPts val="700"/>
+              </a:spcAft>
+              <a:defRPr sz="1600">
+                <a:solidFill>
+                  <a:srgbClr val="0F172A"/>
+                </a:solidFill>
+                <a:latin typeface="Aptos"/>
+              </a:defRPr>
+            </a:pPr>
+            <a:r>
+              <a:rPr sz="1400">
+                <a:latin typeface="Aptos"/>
+              </a:rPr>
+              <a:t>- The monitoring prompt now treats queue progress, recovery markers, and archived segment-log messages as normal Parametrizer behavior.</a:t>
+            </a:r>
+          </a:p>
+        </p:txBody>
+      </p:sp>
+      <p:sp>
+        <p:nvSpPr>
+          <p:cNvPr id="5" name="Rectangle 4"/>
           <p:cNvSpPr/>
           <p:nvPr/>
         </p:nvSpPr>
         <p:spPr>
           <a:xfrm>
-            <a:off x="411480" y="713232"/>
-            <a:ext cx="164592" cy="5394960"/>
+            <a:off x="411480" y="6309360"/>
+            <a:ext cx="11384280" cy="18288"/>
           </a:xfrm>
           <a:prstGeom prst="rect">
             <a:avLst/>
           </a:prstGeom>
           <a:solidFill>
-            <a:srgbClr val="E0B04A"/>
+            <a:srgbClr val="CBD5E1"/>
           </a:solidFill>
           <a:ln>
             <a:noFill/>
@@ -7288,14 +7442,14 @@
       </p:sp>
       <p:sp>
         <p:nvSpPr>
-          <p:cNvPr id="4" name="TextBox 3"/>
+          <p:cNvPr id="6" name="TextBox 5"/>
           <p:cNvSpPr txBox="1"/>
           <p:nvPr/>
         </p:nvSpPr>
         <p:spPr>
           <a:xfrm>
-            <a:off x="749808" y="658368"/>
-            <a:ext cx="10607040" cy="658368"/>
+            <a:off x="457200" y="6355080"/>
+            <a:ext cx="6400800" cy="228600"/>
           </a:xfrm>
           <a:prstGeom prst="rect">
             <a:avLst/>
@@ -7309,29 +7463,29 @@
           <a:lstStyle/>
           <a:p>
             <a:pPr>
-              <a:defRPr b="1" sz="2400">
-                <a:solidFill>
-                  <a:srgbClr val="F4F8FB"/>
-                </a:solidFill>
-                <a:latin typeface="Aptos Display"/>
-              </a:defRPr>
-            </a:pPr>
-            <a:r>
-              <a:t>Phase 2: context capability selection</a:t>
-            </a:r>
-          </a:p>
-        </p:txBody>
-      </p:sp>
-      <p:sp>
-        <p:nvSpPr>
-          <p:cNvPr id="5" name="TextBox 4"/>
+              <a:defRPr sz="900">
+                <a:solidFill>
+                  <a:srgbClr val="475569"/>
+                </a:solidFill>
+                <a:latin typeface="Aptos"/>
+              </a:defRPr>
+            </a:pPr>
+            <a:r>
+              <a:t>Current workspace snapshot | April 8, 2026</a:t>
+            </a:r>
+          </a:p>
+        </p:txBody>
+      </p:sp>
+      <p:sp>
+        <p:nvSpPr>
+          <p:cNvPr id="7" name="TextBox 6"/>
           <p:cNvSpPr txBox="1"/>
           <p:nvPr/>
         </p:nvSpPr>
         <p:spPr>
           <a:xfrm>
-            <a:off x="768096" y="1261872"/>
-            <a:ext cx="10424160" cy="457200"/>
+            <a:off x="10972800" y="6327648"/>
+            <a:ext cx="548640" cy="228600"/>
           </a:xfrm>
           <a:prstGeom prst="rect">
             <a:avLst/>
@@ -7344,175 +7498,16 @@
           </a:bodyPr>
           <a:lstStyle/>
           <a:p>
-            <a:pPr>
-              <a:defRPr sz="1100">
-                <a:solidFill>
-                  <a:srgbClr val="B9CFE0"/>
-                </a:solidFill>
-                <a:latin typeface="Aptos"/>
-              </a:defRPr>
-            </a:pPr>
-            <a:r>
-              <a:t>The current context selector narrows MCP prefetch instead of always fanning out.</a:t>
-            </a:r>
-          </a:p>
-        </p:txBody>
-      </p:sp>
-      <p:sp>
-        <p:nvSpPr>
-          <p:cNvPr id="6" name="TextBox 5"/>
-          <p:cNvSpPr txBox="1"/>
-          <p:nvPr/>
-        </p:nvSpPr>
-        <p:spPr>
-          <a:xfrm>
-            <a:off x="768096" y="6446520"/>
-            <a:ext cx="10789920" cy="228600"/>
-          </a:xfrm>
-          <a:prstGeom prst="rect">
-            <a:avLst/>
-          </a:prstGeom>
-          <a:noFill/>
-        </p:spPr>
-        <p:txBody>
-          <a:bodyPr wrap="none">
-            <a:spAutoFit/>
-          </a:bodyPr>
-          <a:lstStyle/>
-          <a:p>
-            <a:pPr>
-              <a:defRPr sz="900">
-                <a:solidFill>
-                  <a:srgbClr val="9DB4C7"/>
-                </a:solidFill>
-                <a:latin typeface="Aptos"/>
-              </a:defRPr>
-            </a:pPr>
-            <a:r>
-              <a:t>Tlamatini | April 6, 2026 | bd06b4680877</a:t>
-            </a:r>
-          </a:p>
-        </p:txBody>
-      </p:sp>
-      <p:sp>
-        <p:nvSpPr>
-          <p:cNvPr id="7" name="TextBox 6"/>
-          <p:cNvSpPr txBox="1"/>
-          <p:nvPr/>
-        </p:nvSpPr>
-        <p:spPr>
-          <a:xfrm>
-            <a:off x="11338560" y="6400800"/>
-            <a:ext cx="457200" cy="274320"/>
-          </a:xfrm>
-          <a:prstGeom prst="rect">
-            <a:avLst/>
-          </a:prstGeom>
-          <a:noFill/>
-        </p:spPr>
-        <p:txBody>
-          <a:bodyPr wrap="none">
-            <a:spAutoFit/>
-          </a:bodyPr>
-          <a:lstStyle/>
-          <a:p>
             <a:pPr algn="r">
               <a:defRPr sz="900">
                 <a:solidFill>
-                  <a:srgbClr val="D4DEE7"/>
+                  <a:srgbClr val="475569"/>
                 </a:solidFill>
                 <a:latin typeface="Aptos"/>
               </a:defRPr>
             </a:pPr>
             <a:r>
               <a:t>7</a:t>
-            </a:r>
-          </a:p>
-        </p:txBody>
-      </p:sp>
-      <p:sp>
-        <p:nvSpPr>
-          <p:cNvPr id="8" name="TextBox 7"/>
-          <p:cNvSpPr txBox="1"/>
-          <p:nvPr/>
-        </p:nvSpPr>
-        <p:spPr>
-          <a:xfrm>
-            <a:off x="868680" y="1783080"/>
-            <a:ext cx="10469880" cy="4389120"/>
-          </a:xfrm>
-          <a:prstGeom prst="rect">
-            <a:avLst/>
-          </a:prstGeom>
-          <a:noFill/>
-        </p:spPr>
-        <p:txBody>
-          <a:bodyPr wrap="square" lIns="0" rIns="0" tIns="0" anchor="t">
-            <a:spAutoFit/>
-          </a:bodyPr>
-          <a:lstStyle/>
-          <a:p>
-            <a:pPr>
-              <a:spcAft>
-                <a:spcPts val="800"/>
-              </a:spcAft>
-              <a:defRPr sz="1800">
-                <a:solidFill>
-                  <a:srgbClr val="EAF0F5"/>
-                </a:solidFill>
-                <a:latin typeface="Aptos"/>
-              </a:defRPr>
-            </a:pPr>
-            <a:r>
-              <a:t>• system_context is selected for host-state, usage, performance, process, and network questions.</a:t>
-            </a:r>
-          </a:p>
-          <a:p>
-            <a:pPr>
-              <a:spcAft>
-                <a:spcPts val="800"/>
-              </a:spcAft>
-              <a:defRPr sz="1800">
-                <a:solidFill>
-                  <a:srgbClr val="EAF0F5"/>
-                </a:solidFill>
-                <a:latin typeface="Aptos"/>
-              </a:defRPr>
-            </a:pPr>
-            <a:r>
-              <a:t>• files_context is selected for project, path, file, repository, and code-content questions.</a:t>
-            </a:r>
-          </a:p>
-          <a:p>
-            <a:pPr>
-              <a:spcAft>
-                <a:spcPts val="800"/>
-              </a:spcAft>
-              <a:defRPr sz="1800">
-                <a:solidFill>
-                  <a:srgbClr val="EAF0F5"/>
-                </a:solidFill>
-                <a:latin typeface="Aptos"/>
-              </a:defRPr>
-            </a:pPr>
-            <a:r>
-              <a:t>• Project-home file prompts such as root README.md requests are now narrowed more deterministically.</a:t>
-            </a:r>
-          </a:p>
-          <a:p>
-            <a:pPr>
-              <a:spcAft>
-                <a:spcPts val="800"/>
-              </a:spcAft>
-              <a:defRPr sz="1800">
-                <a:solidFill>
-                  <a:srgbClr val="EAF0F5"/>
-                </a:solidFill>
-                <a:latin typeface="Aptos"/>
-              </a:defRPr>
-            </a:pPr>
-            <a:r>
-              <a:t>• Exact single-file reads in checked mode no longer dump the whole file manifest unless the request is truly a listing request.</a:t>
             </a:r>
           </a:p>
         </p:txBody>
@@ -7531,7 +7526,7 @@
     <p:bg>
       <p:bgPr>
         <a:solidFill>
-          <a:srgbClr val="0C1623"/>
+          <a:srgbClr val="F8FAFC"/>
         </a:solidFill>
         <a:effectLst/>
       </p:bgPr>
@@ -7545,23 +7540,90 @@
       <p:grpSpPr/>
       <p:sp>
         <p:nvSpPr>
-          <p:cNvPr id="2" name="Rectangle 1"/>
+          <p:cNvPr id="2" name="Title 1"/>
+          <p:cNvSpPr>
+            <a:spLocks noGrp="1"/>
+          </p:cNvSpPr>
+          <p:nvPr>
+            <p:ph type="title"/>
+          </p:nvPr>
+        </p:nvSpPr>
+        <p:spPr/>
+        <p:txBody>
+          <a:bodyPr/>
+          <a:lstStyle/>
+          <a:p>
+            <a:pPr>
+              <a:defRPr b="1" sz="2600">
+                <a:solidFill>
+                  <a:srgbClr val="0F172A"/>
+                </a:solidFill>
+                <a:latin typeface="Aptos Display"/>
+              </a:defRPr>
+            </a:pPr>
+            <a:r>
+              <a:t>Current verified repository shape</a:t>
+            </a:r>
+          </a:p>
+        </p:txBody>
+      </p:sp>
+      <p:sp>
+        <p:nvSpPr>
+          <p:cNvPr id="3" name="TextBox 2"/>
+          <p:cNvSpPr txBox="1"/>
+          <p:nvPr/>
+        </p:nvSpPr>
+        <p:spPr>
+          <a:xfrm>
+            <a:off x="640080" y="960120"/>
+            <a:ext cx="10789920" cy="502920"/>
+          </a:xfrm>
+          <a:prstGeom prst="rect">
+            <a:avLst/>
+          </a:prstGeom>
+          <a:noFill/>
+        </p:spPr>
+        <p:txBody>
+          <a:bodyPr wrap="square">
+            <a:spAutoFit/>
+          </a:bodyPr>
+          <a:lstStyle/>
+          <a:p>
+            <a:pPr>
+              <a:defRPr sz="1400">
+                <a:solidFill>
+                  <a:srgbClr val="475569"/>
+                </a:solidFill>
+                <a:latin typeface="Aptos"/>
+              </a:defRPr>
+            </a:pPr>
+            <a:r>
+              <a:t>These values were recomputed from the current workspace before regenerating the artifacts.</a:t>
+            </a:r>
+          </a:p>
+        </p:txBody>
+      </p:sp>
+      <p:sp>
+        <p:nvSpPr>
+          <p:cNvPr id="4" name="Rounded Rectangle 3"/>
           <p:cNvSpPr/>
           <p:nvPr/>
         </p:nvSpPr>
         <p:spPr>
           <a:xfrm>
-            <a:off x="0" y="0"/>
-            <a:ext cx="12191695" cy="411480"/>
-          </a:xfrm>
-          <a:prstGeom prst="rect">
+            <a:off x="731520" y="1645920"/>
+            <a:ext cx="1828800" cy="914400"/>
+          </a:xfrm>
+          <a:prstGeom prst="roundRect">
             <a:avLst/>
           </a:prstGeom>
           <a:solidFill>
-            <a:srgbClr val="184366"/>
+            <a:srgbClr val="FFFFFF"/>
           </a:solidFill>
           <a:ln>
-            <a:noFill/>
+            <a:solidFill>
+              <a:srgbClr val="CBD5E1"/>
+            </a:solidFill>
           </a:ln>
         </p:spPr>
         <p:style>
@@ -7579,29 +7641,52 @@
           </a:fontRef>
         </p:style>
         <p:txBody>
-          <a:bodyPr rtlCol="0" anchor="ctr"/>
-          <a:lstStyle/>
-          <a:p>
-            <a:pPr algn="ctr"/>
-          </a:p>
-        </p:txBody>
-      </p:sp>
-      <p:sp>
-        <p:nvSpPr>
-          <p:cNvPr id="3" name="Rectangle 2"/>
+          <a:bodyPr rtlCol="0" anchor="ctr" lIns="201168" tIns="109728"/>
+          <a:lstStyle/>
+          <a:p>
+            <a:pPr algn="ctr">
+              <a:defRPr b="1" sz="2000">
+                <a:solidFill>
+                  <a:srgbClr val="0F172A"/>
+                </a:solidFill>
+                <a:latin typeface="Aptos Display"/>
+              </a:defRPr>
+            </a:pPr>
+            <a:r>
+              <a:t>352</a:t>
+            </a:r>
+          </a:p>
+          <a:p>
+            <a:pPr>
+              <a:defRPr sz="1100">
+                <a:solidFill>
+                  <a:srgbClr val="475569"/>
+                </a:solidFill>
+                <a:latin typeface="Aptos"/>
+              </a:defRPr>
+            </a:pPr>
+            <a:r>
+              <a:t>Tracked files</a:t>
+            </a:r>
+          </a:p>
+        </p:txBody>
+      </p:sp>
+      <p:sp>
+        <p:nvSpPr>
+          <p:cNvPr id="5" name="Rectangle 4"/>
           <p:cNvSpPr/>
           <p:nvPr/>
         </p:nvSpPr>
         <p:spPr>
           <a:xfrm>
-            <a:off x="411480" y="713232"/>
-            <a:ext cx="164592" cy="5394960"/>
+            <a:off x="731520" y="1645920"/>
+            <a:ext cx="109728" cy="914400"/>
           </a:xfrm>
           <a:prstGeom prst="rect">
             <a:avLst/>
           </a:prstGeom>
           <a:solidFill>
-            <a:srgbClr val="E0B04A"/>
+            <a:srgbClr val="0D9488"/>
           </a:solidFill>
           <a:ln>
             <a:noFill/>
@@ -7631,14 +7716,908 @@
       </p:sp>
       <p:sp>
         <p:nvSpPr>
-          <p:cNvPr id="4" name="TextBox 3"/>
+          <p:cNvPr id="6" name="Rounded Rectangle 5"/>
+          <p:cNvSpPr/>
+          <p:nvPr/>
+        </p:nvSpPr>
+        <p:spPr>
+          <a:xfrm>
+            <a:off x="2834640" y="1645920"/>
+            <a:ext cx="1828800" cy="914400"/>
+          </a:xfrm>
+          <a:prstGeom prst="roundRect">
+            <a:avLst/>
+          </a:prstGeom>
+          <a:solidFill>
+            <a:srgbClr val="FFFFFF"/>
+          </a:solidFill>
+          <a:ln>
+            <a:solidFill>
+              <a:srgbClr val="CBD5E1"/>
+            </a:solidFill>
+          </a:ln>
+        </p:spPr>
+        <p:style>
+          <a:lnRef idx="1">
+            <a:schemeClr val="accent1"/>
+          </a:lnRef>
+          <a:fillRef idx="3">
+            <a:schemeClr val="accent1"/>
+          </a:fillRef>
+          <a:effectRef idx="2">
+            <a:schemeClr val="accent1"/>
+          </a:effectRef>
+          <a:fontRef idx="minor">
+            <a:schemeClr val="lt1"/>
+          </a:fontRef>
+        </p:style>
+        <p:txBody>
+          <a:bodyPr rtlCol="0" anchor="ctr" lIns="201168" tIns="109728"/>
+          <a:lstStyle/>
+          <a:p>
+            <a:pPr algn="ctr">
+              <a:defRPr b="1" sz="2000">
+                <a:solidFill>
+                  <a:srgbClr val="0F172A"/>
+                </a:solidFill>
+                <a:latin typeface="Aptos Display"/>
+              </a:defRPr>
+            </a:pPr>
+            <a:r>
+              <a:t>57</a:t>
+            </a:r>
+          </a:p>
+          <a:p>
+            <a:pPr>
+              <a:defRPr sz="1100">
+                <a:solidFill>
+                  <a:srgbClr val="475569"/>
+                </a:solidFill>
+                <a:latin typeface="Aptos"/>
+              </a:defRPr>
+            </a:pPr>
+            <a:r>
+              <a:t>Template-agent dirs</a:t>
+            </a:r>
+          </a:p>
+        </p:txBody>
+      </p:sp>
+      <p:sp>
+        <p:nvSpPr>
+          <p:cNvPr id="7" name="Rectangle 6"/>
+          <p:cNvSpPr/>
+          <p:nvPr/>
+        </p:nvSpPr>
+        <p:spPr>
+          <a:xfrm>
+            <a:off x="2834640" y="1645920"/>
+            <a:ext cx="109728" cy="914400"/>
+          </a:xfrm>
+          <a:prstGeom prst="rect">
+            <a:avLst/>
+          </a:prstGeom>
+          <a:solidFill>
+            <a:srgbClr val="0D9488"/>
+          </a:solidFill>
+          <a:ln>
+            <a:noFill/>
+          </a:ln>
+        </p:spPr>
+        <p:style>
+          <a:lnRef idx="1">
+            <a:schemeClr val="accent1"/>
+          </a:lnRef>
+          <a:fillRef idx="3">
+            <a:schemeClr val="accent1"/>
+          </a:fillRef>
+          <a:effectRef idx="2">
+            <a:schemeClr val="accent1"/>
+          </a:effectRef>
+          <a:fontRef idx="minor">
+            <a:schemeClr val="lt1"/>
+          </a:fontRef>
+        </p:style>
+        <p:txBody>
+          <a:bodyPr rtlCol="0" anchor="ctr"/>
+          <a:lstStyle/>
+          <a:p>
+            <a:pPr algn="ctr"/>
+          </a:p>
+        </p:txBody>
+      </p:sp>
+      <p:sp>
+        <p:nvSpPr>
+          <p:cNvPr id="8" name="Rounded Rectangle 7"/>
+          <p:cNvSpPr/>
+          <p:nvPr/>
+        </p:nvSpPr>
+        <p:spPr>
+          <a:xfrm>
+            <a:off x="4937760" y="1645920"/>
+            <a:ext cx="1828800" cy="914400"/>
+          </a:xfrm>
+          <a:prstGeom prst="roundRect">
+            <a:avLst/>
+          </a:prstGeom>
+          <a:solidFill>
+            <a:srgbClr val="FFFFFF"/>
+          </a:solidFill>
+          <a:ln>
+            <a:solidFill>
+              <a:srgbClr val="CBD5E1"/>
+            </a:solidFill>
+          </a:ln>
+        </p:spPr>
+        <p:style>
+          <a:lnRef idx="1">
+            <a:schemeClr val="accent1"/>
+          </a:lnRef>
+          <a:fillRef idx="3">
+            <a:schemeClr val="accent1"/>
+          </a:fillRef>
+          <a:effectRef idx="2">
+            <a:schemeClr val="accent1"/>
+          </a:effectRef>
+          <a:fontRef idx="minor">
+            <a:schemeClr val="lt1"/>
+          </a:fontRef>
+        </p:style>
+        <p:txBody>
+          <a:bodyPr rtlCol="0" anchor="ctr" lIns="201168" tIns="109728"/>
+          <a:lstStyle/>
+          <a:p>
+            <a:pPr algn="ctr">
+              <a:defRPr b="1" sz="2000">
+                <a:solidFill>
+                  <a:srgbClr val="0F172A"/>
+                </a:solidFill>
+                <a:latin typeface="Aptos Display"/>
+              </a:defRPr>
+            </a:pPr>
+            <a:r>
+              <a:t>46</a:t>
+            </a:r>
+          </a:p>
+          <a:p>
+            <a:pPr>
+              <a:defRPr sz="1100">
+                <a:solidFill>
+                  <a:srgbClr val="475569"/>
+                </a:solidFill>
+                <a:latin typeface="Aptos"/>
+              </a:defRPr>
+            </a:pPr>
+            <a:r>
+              <a:t>Tool surface</a:t>
+            </a:r>
+          </a:p>
+        </p:txBody>
+      </p:sp>
+      <p:sp>
+        <p:nvSpPr>
+          <p:cNvPr id="9" name="Rectangle 8"/>
+          <p:cNvSpPr/>
+          <p:nvPr/>
+        </p:nvSpPr>
+        <p:spPr>
+          <a:xfrm>
+            <a:off x="4937760" y="1645920"/>
+            <a:ext cx="109728" cy="914400"/>
+          </a:xfrm>
+          <a:prstGeom prst="rect">
+            <a:avLst/>
+          </a:prstGeom>
+          <a:solidFill>
+            <a:srgbClr val="EA580C"/>
+          </a:solidFill>
+          <a:ln>
+            <a:noFill/>
+          </a:ln>
+        </p:spPr>
+        <p:style>
+          <a:lnRef idx="1">
+            <a:schemeClr val="accent1"/>
+          </a:lnRef>
+          <a:fillRef idx="3">
+            <a:schemeClr val="accent1"/>
+          </a:fillRef>
+          <a:effectRef idx="2">
+            <a:schemeClr val="accent1"/>
+          </a:effectRef>
+          <a:fontRef idx="minor">
+            <a:schemeClr val="lt1"/>
+          </a:fontRef>
+        </p:style>
+        <p:txBody>
+          <a:bodyPr rtlCol="0" anchor="ctr"/>
+          <a:lstStyle/>
+          <a:p>
+            <a:pPr algn="ctr"/>
+          </a:p>
+        </p:txBody>
+      </p:sp>
+      <p:sp>
+        <p:nvSpPr>
+          <p:cNvPr id="10" name="Rounded Rectangle 9"/>
+          <p:cNvSpPr/>
+          <p:nvPr/>
+        </p:nvSpPr>
+        <p:spPr>
+          <a:xfrm>
+            <a:off x="7040880" y="1645920"/>
+            <a:ext cx="1828800" cy="914400"/>
+          </a:xfrm>
+          <a:prstGeom prst="roundRect">
+            <a:avLst/>
+          </a:prstGeom>
+          <a:solidFill>
+            <a:srgbClr val="FFFFFF"/>
+          </a:solidFill>
+          <a:ln>
+            <a:solidFill>
+              <a:srgbClr val="CBD5E1"/>
+            </a:solidFill>
+          </a:ln>
+        </p:spPr>
+        <p:style>
+          <a:lnRef idx="1">
+            <a:schemeClr val="accent1"/>
+          </a:lnRef>
+          <a:fillRef idx="3">
+            <a:schemeClr val="accent1"/>
+          </a:fillRef>
+          <a:effectRef idx="2">
+            <a:schemeClr val="accent1"/>
+          </a:effectRef>
+          <a:fontRef idx="minor">
+            <a:schemeClr val="lt1"/>
+          </a:fontRef>
+        </p:style>
+        <p:txBody>
+          <a:bodyPr rtlCol="0" anchor="ctr" lIns="201168" tIns="109728"/>
+          <a:lstStyle/>
+          <a:p>
+            <a:pPr algn="ctr">
+              <a:defRPr b="1" sz="2000">
+                <a:solidFill>
+                  <a:srgbClr val="0F172A"/>
+                </a:solidFill>
+                <a:latin typeface="Aptos Display"/>
+              </a:defRPr>
+            </a:pPr>
+            <a:r>
+              <a:t>31</a:t>
+            </a:r>
+          </a:p>
+          <a:p>
+            <a:pPr>
+              <a:defRPr sz="1100">
+                <a:solidFill>
+                  <a:srgbClr val="475569"/>
+                </a:solidFill>
+                <a:latin typeface="Aptos"/>
+              </a:defRPr>
+            </a:pPr>
+            <a:r>
+              <a:t>Wrapped launchers</a:t>
+            </a:r>
+          </a:p>
+        </p:txBody>
+      </p:sp>
+      <p:sp>
+        <p:nvSpPr>
+          <p:cNvPr id="11" name="Rectangle 10"/>
+          <p:cNvSpPr/>
+          <p:nvPr/>
+        </p:nvSpPr>
+        <p:spPr>
+          <a:xfrm>
+            <a:off x="7040880" y="1645920"/>
+            <a:ext cx="109728" cy="914400"/>
+          </a:xfrm>
+          <a:prstGeom prst="rect">
+            <a:avLst/>
+          </a:prstGeom>
+          <a:solidFill>
+            <a:srgbClr val="EA580C"/>
+          </a:solidFill>
+          <a:ln>
+            <a:noFill/>
+          </a:ln>
+        </p:spPr>
+        <p:style>
+          <a:lnRef idx="1">
+            <a:schemeClr val="accent1"/>
+          </a:lnRef>
+          <a:fillRef idx="3">
+            <a:schemeClr val="accent1"/>
+          </a:fillRef>
+          <a:effectRef idx="2">
+            <a:schemeClr val="accent1"/>
+          </a:effectRef>
+          <a:fontRef idx="minor">
+            <a:schemeClr val="lt1"/>
+          </a:fontRef>
+        </p:style>
+        <p:txBody>
+          <a:bodyPr rtlCol="0" anchor="ctr"/>
+          <a:lstStyle/>
+          <a:p>
+            <a:pPr algn="ctr"/>
+          </a:p>
+        </p:txBody>
+      </p:sp>
+      <p:sp>
+        <p:nvSpPr>
+          <p:cNvPr id="12" name="Rounded Rectangle 11"/>
+          <p:cNvSpPr/>
+          <p:nvPr/>
+        </p:nvSpPr>
+        <p:spPr>
+          <a:xfrm>
+            <a:off x="9144000" y="1645920"/>
+            <a:ext cx="1828800" cy="914400"/>
+          </a:xfrm>
+          <a:prstGeom prst="roundRect">
+            <a:avLst/>
+          </a:prstGeom>
+          <a:solidFill>
+            <a:srgbClr val="FFFFFF"/>
+          </a:solidFill>
+          <a:ln>
+            <a:solidFill>
+              <a:srgbClr val="CBD5E1"/>
+            </a:solidFill>
+          </a:ln>
+        </p:spPr>
+        <p:style>
+          <a:lnRef idx="1">
+            <a:schemeClr val="accent1"/>
+          </a:lnRef>
+          <a:fillRef idx="3">
+            <a:schemeClr val="accent1"/>
+          </a:fillRef>
+          <a:effectRef idx="2">
+            <a:schemeClr val="accent1"/>
+          </a:effectRef>
+          <a:fontRef idx="minor">
+            <a:schemeClr val="lt1"/>
+          </a:fontRef>
+        </p:style>
+        <p:txBody>
+          <a:bodyPr rtlCol="0" anchor="ctr" lIns="201168" tIns="109728"/>
+          <a:lstStyle/>
+          <a:p>
+            <a:pPr algn="ctr">
+              <a:defRPr b="1" sz="2000">
+                <a:solidFill>
+                  <a:srgbClr val="0F172A"/>
+                </a:solidFill>
+                <a:latin typeface="Aptos Display"/>
+              </a:defRPr>
+            </a:pPr>
+            <a:r>
+              <a:t>4</a:t>
+            </a:r>
+          </a:p>
+          <a:p>
+            <a:pPr>
+              <a:defRPr sz="1100">
+                <a:solidFill>
+                  <a:srgbClr val="475569"/>
+                </a:solidFill>
+                <a:latin typeface="Aptos"/>
+              </a:defRPr>
+            </a:pPr>
+            <a:r>
+              <a:t>Long-running wrapped</a:t>
+            </a:r>
+          </a:p>
+        </p:txBody>
+      </p:sp>
+      <p:sp>
+        <p:nvSpPr>
+          <p:cNvPr id="13" name="Rectangle 12"/>
+          <p:cNvSpPr/>
+          <p:nvPr/>
+        </p:nvSpPr>
+        <p:spPr>
+          <a:xfrm>
+            <a:off x="9144000" y="1645920"/>
+            <a:ext cx="109728" cy="914400"/>
+          </a:xfrm>
+          <a:prstGeom prst="rect">
+            <a:avLst/>
+          </a:prstGeom>
+          <a:solidFill>
+            <a:srgbClr val="EA580C"/>
+          </a:solidFill>
+          <a:ln>
+            <a:noFill/>
+          </a:ln>
+        </p:spPr>
+        <p:style>
+          <a:lnRef idx="1">
+            <a:schemeClr val="accent1"/>
+          </a:lnRef>
+          <a:fillRef idx="3">
+            <a:schemeClr val="accent1"/>
+          </a:fillRef>
+          <a:effectRef idx="2">
+            <a:schemeClr val="accent1"/>
+          </a:effectRef>
+          <a:fontRef idx="minor">
+            <a:schemeClr val="lt1"/>
+          </a:fontRef>
+        </p:style>
+        <p:txBody>
+          <a:bodyPr rtlCol="0" anchor="ctr"/>
+          <a:lstStyle/>
+          <a:p>
+            <a:pPr algn="ctr"/>
+          </a:p>
+        </p:txBody>
+      </p:sp>
+      <p:sp>
+        <p:nvSpPr>
+          <p:cNvPr id="14" name="Rounded Rectangle 13"/>
+          <p:cNvSpPr/>
+          <p:nvPr/>
+        </p:nvSpPr>
+        <p:spPr>
+          <a:xfrm>
+            <a:off x="731520" y="2926080"/>
+            <a:ext cx="1828800" cy="914400"/>
+          </a:xfrm>
+          <a:prstGeom prst="roundRect">
+            <a:avLst/>
+          </a:prstGeom>
+          <a:solidFill>
+            <a:srgbClr val="FFFFFF"/>
+          </a:solidFill>
+          <a:ln>
+            <a:solidFill>
+              <a:srgbClr val="CBD5E1"/>
+            </a:solidFill>
+          </a:ln>
+        </p:spPr>
+        <p:style>
+          <a:lnRef idx="1">
+            <a:schemeClr val="accent1"/>
+          </a:lnRef>
+          <a:fillRef idx="3">
+            <a:schemeClr val="accent1"/>
+          </a:fillRef>
+          <a:effectRef idx="2">
+            <a:schemeClr val="accent1"/>
+          </a:effectRef>
+          <a:fontRef idx="minor">
+            <a:schemeClr val="lt1"/>
+          </a:fontRef>
+        </p:style>
+        <p:txBody>
+          <a:bodyPr rtlCol="0" anchor="ctr" lIns="201168" tIns="109728"/>
+          <a:lstStyle/>
+          <a:p>
+            <a:pPr algn="ctr">
+              <a:defRPr b="1" sz="2000">
+                <a:solidFill>
+                  <a:srgbClr val="0F172A"/>
+                </a:solidFill>
+                <a:latin typeface="Aptos Display"/>
+              </a:defRPr>
+            </a:pPr>
+            <a:r>
+              <a:t>103 / 3</a:t>
+            </a:r>
+          </a:p>
+          <a:p>
+            <a:pPr>
+              <a:defRPr sz="1100">
+                <a:solidFill>
+                  <a:srgbClr val="475569"/>
+                </a:solidFill>
+                <a:latin typeface="Aptos"/>
+              </a:defRPr>
+            </a:pPr>
+            <a:r>
+              <a:t>App / project routes</a:t>
+            </a:r>
+          </a:p>
+        </p:txBody>
+      </p:sp>
+      <p:sp>
+        <p:nvSpPr>
+          <p:cNvPr id="15" name="Rectangle 14"/>
+          <p:cNvSpPr/>
+          <p:nvPr/>
+        </p:nvSpPr>
+        <p:spPr>
+          <a:xfrm>
+            <a:off x="731520" y="2926080"/>
+            <a:ext cx="109728" cy="914400"/>
+          </a:xfrm>
+          <a:prstGeom prst="rect">
+            <a:avLst/>
+          </a:prstGeom>
+          <a:solidFill>
+            <a:srgbClr val="0D9488"/>
+          </a:solidFill>
+          <a:ln>
+            <a:noFill/>
+          </a:ln>
+        </p:spPr>
+        <p:style>
+          <a:lnRef idx="1">
+            <a:schemeClr val="accent1"/>
+          </a:lnRef>
+          <a:fillRef idx="3">
+            <a:schemeClr val="accent1"/>
+          </a:fillRef>
+          <a:effectRef idx="2">
+            <a:schemeClr val="accent1"/>
+          </a:effectRef>
+          <a:fontRef idx="minor">
+            <a:schemeClr val="lt1"/>
+          </a:fontRef>
+        </p:style>
+        <p:txBody>
+          <a:bodyPr rtlCol="0" anchor="ctr"/>
+          <a:lstStyle/>
+          <a:p>
+            <a:pPr algn="ctr"/>
+          </a:p>
+        </p:txBody>
+      </p:sp>
+      <p:sp>
+        <p:nvSpPr>
+          <p:cNvPr id="16" name="Rounded Rectangle 15"/>
+          <p:cNvSpPr/>
+          <p:nvPr/>
+        </p:nvSpPr>
+        <p:spPr>
+          <a:xfrm>
+            <a:off x="2834640" y="2926080"/>
+            <a:ext cx="1828800" cy="914400"/>
+          </a:xfrm>
+          <a:prstGeom prst="roundRect">
+            <a:avLst/>
+          </a:prstGeom>
+          <a:solidFill>
+            <a:srgbClr val="FFFFFF"/>
+          </a:solidFill>
+          <a:ln>
+            <a:solidFill>
+              <a:srgbClr val="CBD5E1"/>
+            </a:solidFill>
+          </a:ln>
+        </p:spPr>
+        <p:style>
+          <a:lnRef idx="1">
+            <a:schemeClr val="accent1"/>
+          </a:lnRef>
+          <a:fillRef idx="3">
+            <a:schemeClr val="accent1"/>
+          </a:fillRef>
+          <a:effectRef idx="2">
+            <a:schemeClr val="accent1"/>
+          </a:effectRef>
+          <a:fontRef idx="minor">
+            <a:schemeClr val="lt1"/>
+          </a:fontRef>
+        </p:style>
+        <p:txBody>
+          <a:bodyPr rtlCol="0" anchor="ctr" lIns="201168" tIns="109728"/>
+          <a:lstStyle/>
+          <a:p>
+            <a:pPr algn="ctr">
+              <a:defRPr b="1" sz="2000">
+                <a:solidFill>
+                  <a:srgbClr val="0F172A"/>
+                </a:solidFill>
+                <a:latin typeface="Aptos Display"/>
+              </a:defRPr>
+            </a:pPr>
+            <a:r>
+              <a:t>70/70 pass</a:t>
+            </a:r>
+          </a:p>
+          <a:p>
+            <a:pPr>
+              <a:defRPr sz="1100">
+                <a:solidFill>
+                  <a:srgbClr val="475569"/>
+                </a:solidFill>
+                <a:latin typeface="Aptos"/>
+              </a:defRPr>
+            </a:pPr>
+            <a:r>
+              <a:t>agent.tests</a:t>
+            </a:r>
+          </a:p>
+        </p:txBody>
+      </p:sp>
+      <p:sp>
+        <p:nvSpPr>
+          <p:cNvPr id="17" name="Rectangle 16"/>
+          <p:cNvSpPr/>
+          <p:nvPr/>
+        </p:nvSpPr>
+        <p:spPr>
+          <a:xfrm>
+            <a:off x="2834640" y="2926080"/>
+            <a:ext cx="109728" cy="914400"/>
+          </a:xfrm>
+          <a:prstGeom prst="rect">
+            <a:avLst/>
+          </a:prstGeom>
+          <a:solidFill>
+            <a:srgbClr val="0D9488"/>
+          </a:solidFill>
+          <a:ln>
+            <a:noFill/>
+          </a:ln>
+        </p:spPr>
+        <p:style>
+          <a:lnRef idx="1">
+            <a:schemeClr val="accent1"/>
+          </a:lnRef>
+          <a:fillRef idx="3">
+            <a:schemeClr val="accent1"/>
+          </a:fillRef>
+          <a:effectRef idx="2">
+            <a:schemeClr val="accent1"/>
+          </a:effectRef>
+          <a:fontRef idx="minor">
+            <a:schemeClr val="lt1"/>
+          </a:fontRef>
+        </p:style>
+        <p:txBody>
+          <a:bodyPr rtlCol="0" anchor="ctr"/>
+          <a:lstStyle/>
+          <a:p>
+            <a:pPr algn="ctr"/>
+          </a:p>
+        </p:txBody>
+      </p:sp>
+      <p:sp>
+        <p:nvSpPr>
+          <p:cNvPr id="18" name="Rounded Rectangle 17"/>
+          <p:cNvSpPr/>
+          <p:nvPr/>
+        </p:nvSpPr>
+        <p:spPr>
+          <a:xfrm>
+            <a:off x="4937760" y="2926080"/>
+            <a:ext cx="1828800" cy="914400"/>
+          </a:xfrm>
+          <a:prstGeom prst="roundRect">
+            <a:avLst/>
+          </a:prstGeom>
+          <a:solidFill>
+            <a:srgbClr val="FFFFFF"/>
+          </a:solidFill>
+          <a:ln>
+            <a:solidFill>
+              <a:srgbClr val="CBD5E1"/>
+            </a:solidFill>
+          </a:ln>
+        </p:spPr>
+        <p:style>
+          <a:lnRef idx="1">
+            <a:schemeClr val="accent1"/>
+          </a:lnRef>
+          <a:fillRef idx="3">
+            <a:schemeClr val="accent1"/>
+          </a:fillRef>
+          <a:effectRef idx="2">
+            <a:schemeClr val="accent1"/>
+          </a:effectRef>
+          <a:fontRef idx="minor">
+            <a:schemeClr val="lt1"/>
+          </a:fontRef>
+        </p:style>
+        <p:txBody>
+          <a:bodyPr rtlCol="0" anchor="ctr" lIns="201168" tIns="109728"/>
+          <a:lstStyle/>
+          <a:p>
+            <a:pPr algn="ctr">
+              <a:defRPr b="1" sz="2000">
+                <a:solidFill>
+                  <a:srgbClr val="0F172A"/>
+                </a:solidFill>
+                <a:latin typeface="Aptos Display"/>
+              </a:defRPr>
+            </a:pPr>
+            <a:r>
+              <a:t>clean</a:t>
+            </a:r>
+          </a:p>
+          <a:p>
+            <a:pPr>
+              <a:defRPr sz="1100">
+                <a:solidFill>
+                  <a:srgbClr val="475569"/>
+                </a:solidFill>
+                <a:latin typeface="Aptos"/>
+              </a:defRPr>
+            </a:pPr>
+            <a:r>
+              <a:t>Ruff</a:t>
+            </a:r>
+          </a:p>
+        </p:txBody>
+      </p:sp>
+      <p:sp>
+        <p:nvSpPr>
+          <p:cNvPr id="19" name="Rectangle 18"/>
+          <p:cNvSpPr/>
+          <p:nvPr/>
+        </p:nvSpPr>
+        <p:spPr>
+          <a:xfrm>
+            <a:off x="4937760" y="2926080"/>
+            <a:ext cx="109728" cy="914400"/>
+          </a:xfrm>
+          <a:prstGeom prst="rect">
+            <a:avLst/>
+          </a:prstGeom>
+          <a:solidFill>
+            <a:srgbClr val="0D9488"/>
+          </a:solidFill>
+          <a:ln>
+            <a:noFill/>
+          </a:ln>
+        </p:spPr>
+        <p:style>
+          <a:lnRef idx="1">
+            <a:schemeClr val="accent1"/>
+          </a:lnRef>
+          <a:fillRef idx="3">
+            <a:schemeClr val="accent1"/>
+          </a:fillRef>
+          <a:effectRef idx="2">
+            <a:schemeClr val="accent1"/>
+          </a:effectRef>
+          <a:fontRef idx="minor">
+            <a:schemeClr val="lt1"/>
+          </a:fontRef>
+        </p:style>
+        <p:txBody>
+          <a:bodyPr rtlCol="0" anchor="ctr"/>
+          <a:lstStyle/>
+          <a:p>
+            <a:pPr algn="ctr"/>
+          </a:p>
+        </p:txBody>
+      </p:sp>
+      <p:sp>
+        <p:nvSpPr>
+          <p:cNvPr id="20" name="Rounded Rectangle 19"/>
+          <p:cNvSpPr/>
+          <p:nvPr/>
+        </p:nvSpPr>
+        <p:spPr>
+          <a:xfrm>
+            <a:off x="7086600" y="2926080"/>
+            <a:ext cx="3886200" cy="914400"/>
+          </a:xfrm>
+          <a:prstGeom prst="roundRect">
+            <a:avLst/>
+          </a:prstGeom>
+          <a:solidFill>
+            <a:srgbClr val="FFFFFF"/>
+          </a:solidFill>
+          <a:ln>
+            <a:solidFill>
+              <a:srgbClr val="CBD5E1"/>
+            </a:solidFill>
+          </a:ln>
+        </p:spPr>
+        <p:style>
+          <a:lnRef idx="1">
+            <a:schemeClr val="accent1"/>
+          </a:lnRef>
+          <a:fillRef idx="3">
+            <a:schemeClr val="accent1"/>
+          </a:fillRef>
+          <a:effectRef idx="2">
+            <a:schemeClr val="accent1"/>
+          </a:effectRef>
+          <a:fontRef idx="minor">
+            <a:schemeClr val="lt1"/>
+          </a:fontRef>
+        </p:style>
+        <p:txBody>
+          <a:bodyPr rtlCol="0" anchor="t" wrap="square" lIns="164592" rIns="128016" tIns="91440" bIns="73152"/>
+          <a:lstStyle/>
+          <a:p>
+            <a:pPr algn="ctr">
+              <a:spcAft>
+                <a:spcPts val="700"/>
+              </a:spcAft>
+              <a:defRPr sz="1600">
+                <a:solidFill>
+                  <a:srgbClr val="0F172A"/>
+                </a:solidFill>
+                <a:latin typeface="Aptos"/>
+              </a:defRPr>
+            </a:pPr>
+            <a:r>
+              <a:t>- Test classes: 18</a:t>
+            </a:r>
+          </a:p>
+          <a:p>
+            <a:pPr>
+              <a:spcAft>
+                <a:spcPts val="700"/>
+              </a:spcAft>
+              <a:defRPr sz="1600">
+                <a:solidFill>
+                  <a:srgbClr val="0F172A"/>
+                </a:solidFill>
+                <a:latin typeface="Aptos"/>
+              </a:defRPr>
+            </a:pPr>
+            <a:r>
+              <a:t>- Route counts were recomputed from the current URL modules.</a:t>
+            </a:r>
+          </a:p>
+        </p:txBody>
+      </p:sp>
+      <p:sp>
+        <p:nvSpPr>
+          <p:cNvPr id="21" name="Rectangle 20"/>
+          <p:cNvSpPr/>
+          <p:nvPr/>
+        </p:nvSpPr>
+        <p:spPr>
+          <a:xfrm>
+            <a:off x="411480" y="6309360"/>
+            <a:ext cx="11384280" cy="18288"/>
+          </a:xfrm>
+          <a:prstGeom prst="rect">
+            <a:avLst/>
+          </a:prstGeom>
+          <a:solidFill>
+            <a:srgbClr val="CBD5E1"/>
+          </a:solidFill>
+          <a:ln>
+            <a:noFill/>
+          </a:ln>
+        </p:spPr>
+        <p:style>
+          <a:lnRef idx="1">
+            <a:schemeClr val="accent1"/>
+          </a:lnRef>
+          <a:fillRef idx="3">
+            <a:schemeClr val="accent1"/>
+          </a:fillRef>
+          <a:effectRef idx="2">
+            <a:schemeClr val="accent1"/>
+          </a:effectRef>
+          <a:fontRef idx="minor">
+            <a:schemeClr val="lt1"/>
+          </a:fontRef>
+        </p:style>
+        <p:txBody>
+          <a:bodyPr rtlCol="0" anchor="ctr"/>
+          <a:lstStyle/>
+          <a:p>
+            <a:pPr algn="ctr"/>
+          </a:p>
+        </p:txBody>
+      </p:sp>
+      <p:sp>
+        <p:nvSpPr>
+          <p:cNvPr id="22" name="TextBox 21"/>
           <p:cNvSpPr txBox="1"/>
           <p:nvPr/>
         </p:nvSpPr>
         <p:spPr>
           <a:xfrm>
-            <a:off x="749808" y="658368"/>
-            <a:ext cx="10607040" cy="658368"/>
+            <a:off x="457200" y="6355080"/>
+            <a:ext cx="6400800" cy="228600"/>
           </a:xfrm>
           <a:prstGeom prst="rect">
             <a:avLst/>
@@ -7652,29 +8631,29 @@
           <a:lstStyle/>
           <a:p>
             <a:pPr>
-              <a:defRPr b="1" sz="2400">
-                <a:solidFill>
-                  <a:srgbClr val="F4F8FB"/>
-                </a:solidFill>
-                <a:latin typeface="Aptos Display"/>
-              </a:defRPr>
-            </a:pPr>
-            <a:r>
-              <a:t>Phase 3: global execution planner</a:t>
-            </a:r>
-          </a:p>
-        </p:txBody>
-      </p:sp>
-      <p:sp>
-        <p:nvSpPr>
-          <p:cNvPr id="5" name="TextBox 4"/>
+              <a:defRPr sz="900">
+                <a:solidFill>
+                  <a:srgbClr val="475569"/>
+                </a:solidFill>
+                <a:latin typeface="Aptos"/>
+              </a:defRPr>
+            </a:pPr>
+            <a:r>
+              <a:t>Current workspace snapshot | April 8, 2026</a:t>
+            </a:r>
+          </a:p>
+        </p:txBody>
+      </p:sp>
+      <p:sp>
+        <p:nvSpPr>
+          <p:cNvPr id="23" name="TextBox 22"/>
           <p:cNvSpPr txBox="1"/>
           <p:nvPr/>
         </p:nvSpPr>
         <p:spPr>
           <a:xfrm>
-            <a:off x="768096" y="1261872"/>
-            <a:ext cx="10424160" cy="457200"/>
+            <a:off x="10972800" y="6327648"/>
+            <a:ext cx="548640" cy="228600"/>
           </a:xfrm>
           <a:prstGeom prst="rect">
             <a:avLst/>
@@ -7687,175 +8666,16 @@
           </a:bodyPr>
           <a:lstStyle/>
           <a:p>
-            <a:pPr>
-              <a:defRPr sz="1100">
-                <a:solidFill>
-                  <a:srgbClr val="B9CFE0"/>
-                </a:solidFill>
-                <a:latin typeface="Aptos"/>
-              </a:defRPr>
-            </a:pPr>
-            <a:r>
-              <a:t>global_execution_planner.py now provides a real request-scoped DAG.</a:t>
-            </a:r>
-          </a:p>
-        </p:txBody>
-      </p:sp>
-      <p:sp>
-        <p:nvSpPr>
-          <p:cNvPr id="6" name="TextBox 5"/>
-          <p:cNvSpPr txBox="1"/>
-          <p:nvPr/>
-        </p:nvSpPr>
-        <p:spPr>
-          <a:xfrm>
-            <a:off x="768096" y="6446520"/>
-            <a:ext cx="10789920" cy="228600"/>
-          </a:xfrm>
-          <a:prstGeom prst="rect">
-            <a:avLst/>
-          </a:prstGeom>
-          <a:noFill/>
-        </p:spPr>
-        <p:txBody>
-          <a:bodyPr wrap="none">
-            <a:spAutoFit/>
-          </a:bodyPr>
-          <a:lstStyle/>
-          <a:p>
-            <a:pPr>
-              <a:defRPr sz="900">
-                <a:solidFill>
-                  <a:srgbClr val="9DB4C7"/>
-                </a:solidFill>
-                <a:latin typeface="Aptos"/>
-              </a:defRPr>
-            </a:pPr>
-            <a:r>
-              <a:t>Tlamatini | April 6, 2026 | bd06b4680877</a:t>
-            </a:r>
-          </a:p>
-        </p:txBody>
-      </p:sp>
-      <p:sp>
-        <p:nvSpPr>
-          <p:cNvPr id="7" name="TextBox 6"/>
-          <p:cNvSpPr txBox="1"/>
-          <p:nvPr/>
-        </p:nvSpPr>
-        <p:spPr>
-          <a:xfrm>
-            <a:off x="11338560" y="6400800"/>
-            <a:ext cx="457200" cy="274320"/>
-          </a:xfrm>
-          <a:prstGeom prst="rect">
-            <a:avLst/>
-          </a:prstGeom>
-          <a:noFill/>
-        </p:spPr>
-        <p:txBody>
-          <a:bodyPr wrap="none">
-            <a:spAutoFit/>
-          </a:bodyPr>
-          <a:lstStyle/>
-          <a:p>
             <a:pPr algn="r">
               <a:defRPr sz="900">
                 <a:solidFill>
-                  <a:srgbClr val="D4DEE7"/>
+                  <a:srgbClr val="475569"/>
                 </a:solidFill>
                 <a:latin typeface="Aptos"/>
               </a:defRPr>
             </a:pPr>
             <a:r>
               <a:t>8</a:t>
-            </a:r>
-          </a:p>
-        </p:txBody>
-      </p:sp>
-      <p:sp>
-        <p:nvSpPr>
-          <p:cNvPr id="8" name="TextBox 7"/>
-          <p:cNvSpPr txBox="1"/>
-          <p:nvPr/>
-        </p:nvSpPr>
-        <p:spPr>
-          <a:xfrm>
-            <a:off x="868680" y="1783080"/>
-            <a:ext cx="10469880" cy="4389120"/>
-          </a:xfrm>
-          <a:prstGeom prst="rect">
-            <a:avLst/>
-          </a:prstGeom>
-          <a:noFill/>
-        </p:spPr>
-        <p:txBody>
-          <a:bodyPr wrap="square" lIns="0" rIns="0" tIns="0" anchor="t">
-            <a:spAutoFit/>
-          </a:bodyPr>
-          <a:lstStyle/>
-          <a:p>
-            <a:pPr>
-              <a:spcAft>
-                <a:spcPts val="800"/>
-              </a:spcAft>
-              <a:defRPr sz="1800">
-                <a:solidFill>
-                  <a:srgbClr val="EAF0F5"/>
-                </a:solidFill>
-                <a:latin typeface="Aptos"/>
-              </a:defRPr>
-            </a:pPr>
-            <a:r>
-              <a:t>• The planner emits execution modes: direct_model, context_only, or tool_augmented.</a:t>
-            </a:r>
-          </a:p>
-          <a:p>
-            <a:pPr>
-              <a:spcAft>
-                <a:spcPts val="800"/>
-              </a:spcAft>
-              <a:defRPr sz="1800">
-                <a:solidFill>
-                  <a:srgbClr val="EAF0F5"/>
-                </a:solidFill>
-                <a:latin typeface="Aptos"/>
-              </a:defRPr>
-            </a:pPr>
-            <a:r>
-              <a:t>• Node stages are explicit: prefetch, execute, monitor, and answer.</a:t>
-            </a:r>
-          </a:p>
-          <a:p>
-            <a:pPr>
-              <a:spcAft>
-                <a:spcPts val="800"/>
-              </a:spcAft>
-              <a:defRPr sz="1800">
-                <a:solidFill>
-                  <a:srgbClr val="EAF0F5"/>
-                </a:solidFill>
-                <a:latin typeface="Aptos"/>
-              </a:defRPr>
-            </a:pPr>
-            <a:r>
-              <a:t>• A planner summary is injected back into the executor so the model follows the selected path instead of rediscovering it.</a:t>
-            </a:r>
-          </a:p>
-          <a:p>
-            <a:pPr>
-              <a:spcAft>
-                <a:spcPts val="800"/>
-              </a:spcAft>
-              <a:defRPr sz="1800">
-                <a:solidFill>
-                  <a:srgbClr val="EAF0F5"/>
-                </a:solidFill>
-                <a:latin typeface="Aptos"/>
-              </a:defRPr>
-            </a:pPr>
-            <a:r>
-              <a:t>• This is the architectural step that turns checked Multi-Turn requests into a real orchestration flow rather than just a better heuristic selector.</a:t>
             </a:r>
           </a:p>
         </p:txBody>
@@ -7874,7 +8694,7 @@
     <p:bg>
       <p:bgPr>
         <a:solidFill>
-          <a:srgbClr val="0C1623"/>
+          <a:srgbClr val="F8FAFC"/>
         </a:solidFill>
         <a:effectLst/>
       </p:bgPr>
@@ -7888,23 +8708,90 @@
       <p:grpSpPr/>
       <p:sp>
         <p:nvSpPr>
-          <p:cNvPr id="2" name="Rectangle 1"/>
+          <p:cNvPr id="2" name="Title 1"/>
+          <p:cNvSpPr>
+            <a:spLocks noGrp="1"/>
+          </p:cNvSpPr>
+          <p:nvPr>
+            <p:ph type="title"/>
+          </p:nvPr>
+        </p:nvSpPr>
+        <p:spPr/>
+        <p:txBody>
+          <a:bodyPr/>
+          <a:lstStyle/>
+          <a:p>
+            <a:pPr>
+              <a:defRPr b="1" sz="2600">
+                <a:solidFill>
+                  <a:srgbClr val="0F172A"/>
+                </a:solidFill>
+                <a:latin typeface="Aptos Display"/>
+              </a:defRPr>
+            </a:pPr>
+            <a:r>
+              <a:t>Files that define the current truth surface</a:t>
+            </a:r>
+          </a:p>
+        </p:txBody>
+      </p:sp>
+      <p:sp>
+        <p:nvSpPr>
+          <p:cNvPr id="3" name="TextBox 2"/>
+          <p:cNvSpPr txBox="1"/>
+          <p:nvPr/>
+        </p:nvSpPr>
+        <p:spPr>
+          <a:xfrm>
+            <a:off x="640080" y="960120"/>
+            <a:ext cx="10789920" cy="502920"/>
+          </a:xfrm>
+          <a:prstGeom prst="rect">
+            <a:avLst/>
+          </a:prstGeom>
+          <a:noFill/>
+        </p:spPr>
+        <p:txBody>
+          <a:bodyPr wrap="square">
+            <a:spAutoFit/>
+          </a:bodyPr>
+          <a:lstStyle/>
+          <a:p>
+            <a:pPr>
+              <a:defRPr sz="1400">
+                <a:solidFill>
+                  <a:srgbClr val="475569"/>
+                </a:solidFill>
+                <a:latin typeface="Aptos"/>
+              </a:defRPr>
+            </a:pPr>
+            <a:r>
+              <a:t>These files should be read together when auditing the current Multi-Turn and Parametrizer behavior.</a:t>
+            </a:r>
+          </a:p>
+        </p:txBody>
+      </p:sp>
+      <p:sp>
+        <p:nvSpPr>
+          <p:cNvPr id="4" name="Rounded Rectangle 3"/>
           <p:cNvSpPr/>
           <p:nvPr/>
         </p:nvSpPr>
         <p:spPr>
           <a:xfrm>
-            <a:off x="0" y="0"/>
-            <a:ext cx="12191695" cy="411480"/>
-          </a:xfrm>
-          <a:prstGeom prst="rect">
+            <a:off x="640080" y="1645920"/>
+            <a:ext cx="10241280" cy="3611880"/>
+          </a:xfrm>
+          <a:prstGeom prst="roundRect">
             <a:avLst/>
           </a:prstGeom>
           <a:solidFill>
-            <a:srgbClr val="184366"/>
+            <a:srgbClr val="FFFFFF"/>
           </a:solidFill>
           <a:ln>
-            <a:noFill/>
+            <a:solidFill>
+              <a:srgbClr val="CBD5E1"/>
+            </a:solidFill>
           </a:ln>
         </p:spPr>
         <p:style>
@@ -7922,29 +8809,142 @@
           </a:fontRef>
         </p:style>
         <p:txBody>
-          <a:bodyPr rtlCol="0" anchor="ctr"/>
-          <a:lstStyle/>
-          <a:p>
-            <a:pPr algn="ctr"/>
-          </a:p>
-        </p:txBody>
-      </p:sp>
-      <p:sp>
-        <p:nvSpPr>
-          <p:cNvPr id="3" name="Rectangle 2"/>
+          <a:bodyPr rtlCol="0" anchor="t" wrap="square" lIns="164592" rIns="128016" tIns="91440" bIns="73152">
+            <a:normAutofit/>
+          </a:bodyPr>
+          <a:lstStyle/>
+          <a:p>
+            <a:pPr algn="ctr">
+              <a:spcAft>
+                <a:spcPts val="700"/>
+              </a:spcAft>
+              <a:defRPr sz="1600">
+                <a:solidFill>
+                  <a:srgbClr val="0F172A"/>
+                </a:solidFill>
+                <a:latin typeface="Aptos"/>
+              </a:defRPr>
+            </a:pPr>
+            <a:r>
+              <a:rPr sz="1400">
+                <a:latin typeface="Aptos"/>
+              </a:rPr>
+              <a:t>- README.md - current public contract, including the updated Parametrizer section.</a:t>
+            </a:r>
+          </a:p>
+          <a:p>
+            <a:pPr>
+              <a:spcAft>
+                <a:spcPts val="700"/>
+              </a:spcAft>
+              <a:defRPr sz="1600">
+                <a:solidFill>
+                  <a:srgbClr val="0F172A"/>
+                </a:solidFill>
+                <a:latin typeface="Aptos"/>
+              </a:defRPr>
+            </a:pPr>
+            <a:r>
+              <a:rPr sz="1400">
+                <a:latin typeface="Aptos"/>
+              </a:rPr>
+              <a:t>- agent/global_execution_planner.py - checked-mode request DAG and execution modes.</a:t>
+            </a:r>
+          </a:p>
+          <a:p>
+            <a:pPr>
+              <a:spcAft>
+                <a:spcPts val="700"/>
+              </a:spcAft>
+              <a:defRPr sz="1600">
+                <a:solidFill>
+                  <a:srgbClr val="0F172A"/>
+                </a:solidFill>
+                <a:latin typeface="Aptos"/>
+              </a:defRPr>
+            </a:pPr>
+            <a:r>
+              <a:rPr sz="1400">
+                <a:latin typeface="Aptos"/>
+              </a:rPr>
+              <a:t>- agent/capability_registry.py - capability and context selection layer.</a:t>
+            </a:r>
+          </a:p>
+          <a:p>
+            <a:pPr>
+              <a:spcAft>
+                <a:spcPts val="700"/>
+              </a:spcAft>
+              <a:defRPr sz="1600">
+                <a:solidFill>
+                  <a:srgbClr val="0F172A"/>
+                </a:solidFill>
+                <a:latin typeface="Aptos"/>
+              </a:defRPr>
+            </a:pPr>
+            <a:r>
+              <a:rPr sz="1400">
+                <a:latin typeface="Aptos"/>
+              </a:rPr>
+              <a:t>- agent/mcp_agent.py - planner-aware executor and unchecked legacy fallback.</a:t>
+            </a:r>
+          </a:p>
+          <a:p>
+            <a:pPr>
+              <a:spcAft>
+                <a:spcPts val="700"/>
+              </a:spcAft>
+              <a:defRPr sz="1600">
+                <a:solidFill>
+                  <a:srgbClr val="0F172A"/>
+                </a:solidFill>
+                <a:latin typeface="Aptos"/>
+              </a:defRPr>
+            </a:pPr>
+            <a:r>
+              <a:rPr sz="1400">
+                <a:latin typeface="Aptos"/>
+              </a:rPr>
+              <a:t>- agent/agents/parametrizer/parametrizer.py - sequential queue, reanimation recovery, and target segment-log archiving.</a:t>
+            </a:r>
+          </a:p>
+          <a:p>
+            <a:pPr>
+              <a:spcAft>
+                <a:spcPts val="700"/>
+              </a:spcAft>
+              <a:defRPr sz="1600">
+                <a:solidFill>
+                  <a:srgbClr val="0F172A"/>
+                </a:solidFill>
+                <a:latin typeface="Aptos"/>
+              </a:defRPr>
+            </a:pPr>
+            <a:r>
+              <a:rPr sz="1400">
+                <a:latin typeface="Aptos"/>
+              </a:rPr>
+              <a:t>- agent/agents/flowcreator/agentic_skill.md and agent/agents/flowhypervisor/monitoring-prompt.pmt - current design and monitoring interpretation of Parametrizer.</a:t>
+            </a:r>
+          </a:p>
+        </p:txBody>
+      </p:sp>
+      <p:sp>
+        <p:nvSpPr>
+          <p:cNvPr id="5" name="Rectangle 4"/>
           <p:cNvSpPr/>
           <p:nvPr/>
         </p:nvSpPr>
         <p:spPr>
           <a:xfrm>
-            <a:off x="411480" y="713232"/>
-            <a:ext cx="164592" cy="5394960"/>
+            <a:off x="411480" y="6309360"/>
+            <a:ext cx="11384280" cy="18288"/>
           </a:xfrm>
           <a:prstGeom prst="rect">
             <a:avLst/>
           </a:prstGeom>
           <a:solidFill>
-            <a:srgbClr val="E0B04A"/>
+            <a:srgbClr val="CBD5E1"/>
           </a:solidFill>
           <a:ln>
             <a:noFill/>
@@ -7974,14 +8974,14 @@
       </p:sp>
       <p:sp>
         <p:nvSpPr>
-          <p:cNvPr id="4" name="TextBox 3"/>
+          <p:cNvPr id="6" name="TextBox 5"/>
           <p:cNvSpPr txBox="1"/>
           <p:nvPr/>
         </p:nvSpPr>
         <p:spPr>
           <a:xfrm>
-            <a:off x="749808" y="658368"/>
-            <a:ext cx="10607040" cy="658368"/>
+            <a:off x="457200" y="6355080"/>
+            <a:ext cx="6400800" cy="228600"/>
           </a:xfrm>
           <a:prstGeom prst="rect">
             <a:avLst/>
@@ -7995,29 +8995,29 @@
           <a:lstStyle/>
           <a:p>
             <a:pPr>
-              <a:defRPr b="1" sz="2400">
-                <a:solidFill>
-                  <a:srgbClr val="F4F8FB"/>
-                </a:solidFill>
-                <a:latin typeface="Aptos Display"/>
-              </a:defRPr>
-            </a:pPr>
-            <a:r>
-              <a:t>Wrapped runtimes and runtime hardening</a:t>
-            </a:r>
-          </a:p>
-        </p:txBody>
-      </p:sp>
-      <p:sp>
-        <p:nvSpPr>
-          <p:cNvPr id="5" name="TextBox 4"/>
+              <a:defRPr sz="900">
+                <a:solidFill>
+                  <a:srgbClr val="475569"/>
+                </a:solidFill>
+                <a:latin typeface="Aptos"/>
+              </a:defRPr>
+            </a:pPr>
+            <a:r>
+              <a:t>Current workspace snapshot | April 8, 2026</a:t>
+            </a:r>
+          </a:p>
+        </p:txBody>
+      </p:sp>
+      <p:sp>
+        <p:nvSpPr>
+          <p:cNvPr id="7" name="TextBox 6"/>
           <p:cNvSpPr txBox="1"/>
           <p:nvPr/>
         </p:nvSpPr>
         <p:spPr>
           <a:xfrm>
-            <a:off x="768096" y="1261872"/>
-            <a:ext cx="10424160" cy="457200"/>
+            <a:off x="10972800" y="6327648"/>
+            <a:ext cx="548640" cy="228600"/>
           </a:xfrm>
           <a:prstGeom prst="rect">
             <a:avLst/>
@@ -8030,175 +9030,16 @@
           </a:bodyPr>
           <a:lstStyle/>
           <a:p>
-            <a:pPr>
-              <a:defRPr sz="1100">
-                <a:solidFill>
-                  <a:srgbClr val="B9CFE0"/>
-                </a:solidFill>
-                <a:latin typeface="Aptos"/>
-              </a:defRPr>
-            </a:pPr>
-            <a:r>
-              <a:t>The wrapped chat-agent layer remains central, but its checked-mode behavior is now smoother.</a:t>
-            </a:r>
-          </a:p>
-        </p:txBody>
-      </p:sp>
-      <p:sp>
-        <p:nvSpPr>
-          <p:cNvPr id="6" name="TextBox 5"/>
-          <p:cNvSpPr txBox="1"/>
-          <p:nvPr/>
-        </p:nvSpPr>
-        <p:spPr>
-          <a:xfrm>
-            <a:off x="768096" y="6446520"/>
-            <a:ext cx="10789920" cy="228600"/>
-          </a:xfrm>
-          <a:prstGeom prst="rect">
-            <a:avLst/>
-          </a:prstGeom>
-          <a:noFill/>
-        </p:spPr>
-        <p:txBody>
-          <a:bodyPr wrap="none">
-            <a:spAutoFit/>
-          </a:bodyPr>
-          <a:lstStyle/>
-          <a:p>
-            <a:pPr>
-              <a:defRPr sz="900">
-                <a:solidFill>
-                  <a:srgbClr val="9DB4C7"/>
-                </a:solidFill>
-                <a:latin typeface="Aptos"/>
-              </a:defRPr>
-            </a:pPr>
-            <a:r>
-              <a:t>Tlamatini | April 6, 2026 | bd06b4680877</a:t>
-            </a:r>
-          </a:p>
-        </p:txBody>
-      </p:sp>
-      <p:sp>
-        <p:nvSpPr>
-          <p:cNvPr id="7" name="TextBox 6"/>
-          <p:cNvSpPr txBox="1"/>
-          <p:nvPr/>
-        </p:nvSpPr>
-        <p:spPr>
-          <a:xfrm>
-            <a:off x="11338560" y="6400800"/>
-            <a:ext cx="457200" cy="274320"/>
-          </a:xfrm>
-          <a:prstGeom prst="rect">
-            <a:avLst/>
-          </a:prstGeom>
-          <a:noFill/>
-        </p:spPr>
-        <p:txBody>
-          <a:bodyPr wrap="none">
-            <a:spAutoFit/>
-          </a:bodyPr>
-          <a:lstStyle/>
-          <a:p>
             <a:pPr algn="r">
               <a:defRPr sz="900">
                 <a:solidFill>
-                  <a:srgbClr val="D4DEE7"/>
+                  <a:srgbClr val="475569"/>
                 </a:solidFill>
                 <a:latin typeface="Aptos"/>
               </a:defRPr>
             </a:pPr>
             <a:r>
               <a:t>9</a:t>
-            </a:r>
-          </a:p>
-        </p:txBody>
-      </p:sp>
-      <p:sp>
-        <p:nvSpPr>
-          <p:cNvPr id="8" name="TextBox 7"/>
-          <p:cNvSpPr txBox="1"/>
-          <p:nvPr/>
-        </p:nvSpPr>
-        <p:spPr>
-          <a:xfrm>
-            <a:off x="868680" y="1783080"/>
-            <a:ext cx="10469880" cy="4389120"/>
-          </a:xfrm>
-          <a:prstGeom prst="rect">
-            <a:avLst/>
-          </a:prstGeom>
-          <a:noFill/>
-        </p:spPr>
-        <p:txBody>
-          <a:bodyPr wrap="square" lIns="0" rIns="0" tIns="0" anchor="t">
-            <a:spAutoFit/>
-          </a:bodyPr>
-          <a:lstStyle/>
-          <a:p>
-            <a:pPr>
-              <a:spcAft>
-                <a:spcPts val="800"/>
-              </a:spcAft>
-              <a:defRPr sz="1800">
-                <a:solidFill>
-                  <a:srgbClr val="EAF0F5"/>
-                </a:solidFill>
-                <a:latin typeface="Aptos"/>
-              </a:defRPr>
-            </a:pPr>
-            <a:r>
-              <a:t>• The chat surface still exposes 32 wrapped launchers plus 4 runtime follow-up tools.</a:t>
-            </a:r>
-          </a:p>
-          <a:p>
-            <a:pPr>
-              <a:spcAft>
-                <a:spcPts val="800"/>
-              </a:spcAft>
-              <a:defRPr sz="1800">
-                <a:solidFill>
-                  <a:srgbClr val="EAF0F5"/>
-                </a:solidFill>
-                <a:latin typeface="Aptos"/>
-              </a:defRPr>
-            </a:pPr>
-            <a:r>
-              <a:t>• Wrapped runs remain isolated in __chat_runs__ and are still separated from ACP flow pause/kill logic.</a:t>
-            </a:r>
-          </a:p>
-          <a:p>
-            <a:pPr>
-              <a:spcAft>
-                <a:spcPts val="800"/>
-              </a:spcAft>
-              <a:defRPr sz="1800">
-                <a:solidFill>
-                  <a:srgbClr val="EAF0F5"/>
-                </a:solidFill>
-                <a:latin typeface="Aptos"/>
-              </a:defRPr>
-            </a:pPr>
-            <a:r>
-              <a:t>• Checked Multi-Turn launches now suppress visible console windows through request-scoped state flags and detached/headless subprocess settings.</a:t>
-            </a:r>
-          </a:p>
-          <a:p>
-            <a:pPr>
-              <a:spcAft>
-                <a:spcPts val="800"/>
-              </a:spcAft>
-              <a:defRPr sz="1800">
-                <a:solidFill>
-                  <a:srgbClr val="EAF0F5"/>
-                </a:solidFill>
-                <a:latin typeface="Aptos"/>
-              </a:defRPr>
-            </a:pPr>
-            <a:r>
-              <a:t>• That change removes one of the most visible rough edges of using the richer chat execution path on Windows.</a:t>
             </a:r>
           </a:p>
         </p:txBody>

--- a/Tlamatini_eXtended_Artificial_Intelligence_Humanly_Tempered.pptx
+++ b/Tlamatini_eXtended_Artificial_Intelligence_Humanly_Tempered.pptx
@@ -3346,7 +3346,7 @@
                 </a:solidFill>
                 <a:latin typeface="Aptos"/>
               </a:rPr>
-              <a:t>Complete operator guide: what the system is, how to run it from source, how to install Ollama and pull the required models, how to use chat and the Agentic Control Panel, how to build release executables, and how to extend the platform with new agents and MCP-backed capabilities.</a:t>
+              <a:t>Complete operator guide: what Tlamatini is, how to run it from source, how to install Ollama and pull the required models, how to use chat and the Agentic Control Panel, how to build release executables, and how to extend the platform with new agents and MCP-backed capabilities.</a:t>
             </a:r>
           </a:p>
         </p:txBody>
@@ -11770,16 +11770,16 @@
         <p:spPr>
           <a:xfrm>
             <a:off x="640080" y="1188720"/>
-            <a:ext cx="10972800" cy="4389120"/>
-          </a:xfrm>
-          <a:prstGeom prst="rect">
-            <a:avLst/>
-          </a:prstGeom>
-          <a:noFill/>
-        </p:spPr>
-        <p:txBody>
-          <a:bodyPr wrap="square">
-            <a:spAutoFit/>
+            <a:ext cx="6350000" cy="5200000"/>
+          </a:xfrm>
+          <a:prstGeom prst="rect">
+            <a:avLst/>
+          </a:prstGeom>
+          <a:noFill/>
+        </p:spPr>
+        <p:txBody>
+          <a:bodyPr wrap="square">
+            <a:normAutofit/>
           </a:bodyPr>
           <a:lstStyle/>
           <a:p>
@@ -11789,7 +11789,7 @@
               </a:spcAft>
             </a:pPr>
             <a:r>
-              <a:rPr sz="2000">
+              <a:rPr sz="1800">
                 <a:solidFill>
                   <a:srgbClr val="111827"/>
                 </a:solidFill>
@@ -11805,7 +11805,7 @@
               </a:spcAft>
             </a:pPr>
             <a:r>
-              <a:rPr sz="2000">
+              <a:rPr sz="1800">
                 <a:solidFill>
                   <a:srgbClr val="111827"/>
                 </a:solidFill>
@@ -11821,7 +11821,7 @@
               </a:spcAft>
             </a:pPr>
             <a:r>
-              <a:rPr sz="2000">
+              <a:rPr sz="1800">
                 <a:solidFill>
                   <a:srgbClr val="111827"/>
                 </a:solidFill>
@@ -11837,7 +11837,7 @@
               </a:spcAft>
             </a:pPr>
             <a:r>
-              <a:rPr sz="2000">
+              <a:rPr sz="1800">
                 <a:solidFill>
                   <a:srgbClr val="111827"/>
                 </a:solidFill>
@@ -11853,7 +11853,7 @@
               </a:spcAft>
             </a:pPr>
             <a:r>
-              <a:rPr sz="2000">
+              <a:rPr sz="1800">
                 <a:solidFill>
                   <a:srgbClr val="111827"/>
                 </a:solidFill>
@@ -11869,7 +11869,7 @@
               </a:spcAft>
             </a:pPr>
             <a:r>
-              <a:rPr sz="2000">
+              <a:rPr sz="1800">
                 <a:solidFill>
                   <a:srgbClr val="111827"/>
                 </a:solidFill>
@@ -11994,7 +11994,7 @@
                 </a:solidFill>
                 <a:latin typeface="Aptos"/>
               </a:rPr>
-              <a:t>Slides 3-5: understand the system.</a:t>
+              <a:t>Slides 3-5: understand Tlamatini.</a:t>
             </a:r>
           </a:p>
           <a:p>
@@ -16243,7 +16243,7 @@
         <p:spPr>
           <a:xfrm>
             <a:off x="5897880" y="1234440"/>
-            <a:ext cx="4983480" cy="2651760"/>
+            <a:ext cx="4983480" cy="3250000"/>
           </a:xfrm>
           <a:prstGeom prst="rect">
             <a:avLst/>
@@ -16323,16 +16323,16 @@
         <p:spPr>
           <a:xfrm>
             <a:off x="6016752" y="1783080"/>
-            <a:ext cx="4572000" cy="1828800"/>
-          </a:xfrm>
-          <a:prstGeom prst="rect">
-            <a:avLst/>
-          </a:prstGeom>
-          <a:noFill/>
-        </p:spPr>
-        <p:txBody>
-          <a:bodyPr wrap="square">
-            <a:spAutoFit/>
+            <a:ext cx="4572000" cy="2400000"/>
+          </a:xfrm>
+          <a:prstGeom prst="rect">
+            <a:avLst/>
+          </a:prstGeom>
+          <a:noFill/>
+        </p:spPr>
+        <p:txBody>
+          <a:bodyPr wrap="square">
+            <a:normAutofit/>
           </a:bodyPr>
           <a:lstStyle/>
           <a:p>
@@ -16342,7 +16342,7 @@
               </a:spcAft>
             </a:pPr>
             <a:r>
-              <a:rPr sz="1600">
+              <a:rPr sz="1500">
                 <a:solidFill>
                   <a:srgbClr val="111827"/>
                 </a:solidFill>
@@ -16358,13 +16358,13 @@
               </a:spcAft>
             </a:pPr>
             <a:r>
-              <a:rPr sz="1600">
+              <a:rPr sz="1500">
                 <a:solidFill>
                   <a:srgbClr val="111827"/>
                 </a:solidFill>
                 <a:latin typeface="Aptos"/>
               </a:rPr>
-              <a:t>The checked-in README and CLAUDE guide agree that the current system exposes 57 workflow-agent directories.</a:t>
+              <a:t>The checked-in README and CLAUDE guide agree that Tlamatini currently exposes 57 workflow-agent directories.</a:t>
             </a:r>
           </a:p>
           <a:p>
@@ -16374,7 +16374,7 @@
               </a:spcAft>
             </a:pPr>
             <a:r>
-              <a:rPr sz="1600">
+              <a:rPr sz="1500">
                 <a:solidFill>
                   <a:srgbClr val="111827"/>
                 </a:solidFill>
@@ -16393,8 +16393,8 @@
         </p:nvSpPr>
         <p:spPr>
           <a:xfrm>
-            <a:off x="5989320" y="4187952"/>
-            <a:ext cx="1508760" cy="713232"/>
+            <a:off x="5989320" y="4837952"/>
+            <a:ext cx="1508760" cy="920000"/>
           </a:xfrm>
           <a:prstGeom prst="rect">
             <a:avLst/>
@@ -16438,17 +16438,17 @@
         </p:nvSpPr>
         <p:spPr>
           <a:xfrm>
-            <a:off x="6099048" y="4261104"/>
-            <a:ext cx="1289304" cy="219456"/>
-          </a:xfrm>
-          <a:prstGeom prst="rect">
-            <a:avLst/>
-          </a:prstGeom>
-          <a:noFill/>
-        </p:spPr>
-        <p:txBody>
-          <a:bodyPr wrap="square">
-            <a:spAutoFit/>
+            <a:off x="6099048" y="4900000"/>
+            <a:ext cx="1289304" cy="210000"/>
+          </a:xfrm>
+          <a:prstGeom prst="rect">
+            <a:avLst/>
+          </a:prstGeom>
+          <a:noFill/>
+        </p:spPr>
+        <p:txBody>
+          <a:bodyPr wrap="square">
+            <a:normAutofit/>
           </a:bodyPr>
           <a:lstStyle/>
           <a:p>
@@ -16473,23 +16473,23 @@
         </p:nvSpPr>
         <p:spPr>
           <a:xfrm>
-            <a:off x="6099048" y="4443984"/>
-            <a:ext cx="1289304" cy="310896"/>
-          </a:xfrm>
-          <a:prstGeom prst="rect">
-            <a:avLst/>
-          </a:prstGeom>
-          <a:noFill/>
-        </p:spPr>
-        <p:txBody>
-          <a:bodyPr wrap="square">
-            <a:spAutoFit/>
+            <a:off x="6099048" y="5120000"/>
+            <a:ext cx="1289304" cy="420000"/>
+          </a:xfrm>
+          <a:prstGeom prst="rect">
+            <a:avLst/>
+          </a:prstGeom>
+          <a:noFill/>
+        </p:spPr>
+        <p:txBody>
+          <a:bodyPr wrap="square">
+            <a:normAutofit/>
           </a:bodyPr>
           <a:lstStyle/>
           <a:p>
             <a:pPr algn="l"/>
             <a:r>
-              <a:rPr sz="2000" b="1">
+              <a:rPr sz="1700" b="1">
                 <a:solidFill>
                   <a:srgbClr val="FFFFFF"/>
                 </a:solidFill>
@@ -16508,8 +16508,8 @@
         </p:nvSpPr>
         <p:spPr>
           <a:xfrm>
-            <a:off x="7726679" y="4187952"/>
-            <a:ext cx="1508760" cy="713232"/>
+            <a:off x="7726679" y="4837952"/>
+            <a:ext cx="1508760" cy="920000"/>
           </a:xfrm>
           <a:prstGeom prst="rect">
             <a:avLst/>
@@ -16553,17 +16553,17 @@
         </p:nvSpPr>
         <p:spPr>
           <a:xfrm>
-            <a:off x="7836407" y="4261104"/>
-            <a:ext cx="1289304" cy="219456"/>
-          </a:xfrm>
-          <a:prstGeom prst="rect">
-            <a:avLst/>
-          </a:prstGeom>
-          <a:noFill/>
-        </p:spPr>
-        <p:txBody>
-          <a:bodyPr wrap="square">
-            <a:spAutoFit/>
+            <a:off x="7836407" y="4900000"/>
+            <a:ext cx="1289304" cy="210000"/>
+          </a:xfrm>
+          <a:prstGeom prst="rect">
+            <a:avLst/>
+          </a:prstGeom>
+          <a:noFill/>
+        </p:spPr>
+        <p:txBody>
+          <a:bodyPr wrap="square">
+            <a:normAutofit/>
           </a:bodyPr>
           <a:lstStyle/>
           <a:p>
@@ -16588,23 +16588,23 @@
         </p:nvSpPr>
         <p:spPr>
           <a:xfrm>
-            <a:off x="7836407" y="4443984"/>
-            <a:ext cx="1289304" cy="310896"/>
-          </a:xfrm>
-          <a:prstGeom prst="rect">
-            <a:avLst/>
-          </a:prstGeom>
-          <a:noFill/>
-        </p:spPr>
-        <p:txBody>
-          <a:bodyPr wrap="square">
-            <a:spAutoFit/>
+            <a:off x="7836407" y="5120000"/>
+            <a:ext cx="1289304" cy="420000"/>
+          </a:xfrm>
+          <a:prstGeom prst="rect">
+            <a:avLst/>
+          </a:prstGeom>
+          <a:noFill/>
+        </p:spPr>
+        <p:txBody>
+          <a:bodyPr wrap="none" lIns="0" rIns="0">
+            <a:normAutofit/>
           </a:bodyPr>
           <a:lstStyle/>
           <a:p>
             <a:pPr algn="l"/>
             <a:r>
-              <a:rPr sz="2000" b="1">
+              <a:rPr sz="1200" b="1">
                 <a:solidFill>
                   <a:srgbClr val="FFFFFF"/>
                 </a:solidFill>
@@ -16623,8 +16623,8 @@
         </p:nvSpPr>
         <p:spPr>
           <a:xfrm>
-            <a:off x="9464040" y="4187952"/>
-            <a:ext cx="1325880" cy="713232"/>
+            <a:off x="9464040" y="4837952"/>
+            <a:ext cx="1325880" cy="920000"/>
           </a:xfrm>
           <a:prstGeom prst="rect">
             <a:avLst/>
@@ -16668,17 +16668,17 @@
         </p:nvSpPr>
         <p:spPr>
           <a:xfrm>
-            <a:off x="9573768" y="4261104"/>
-            <a:ext cx="1106424" cy="219456"/>
-          </a:xfrm>
-          <a:prstGeom prst="rect">
-            <a:avLst/>
-          </a:prstGeom>
-          <a:noFill/>
-        </p:spPr>
-        <p:txBody>
-          <a:bodyPr wrap="square">
-            <a:spAutoFit/>
+            <a:off x="9573768" y="4900000"/>
+            <a:ext cx="1106424" cy="210000"/>
+          </a:xfrm>
+          <a:prstGeom prst="rect">
+            <a:avLst/>
+          </a:prstGeom>
+          <a:noFill/>
+        </p:spPr>
+        <p:txBody>
+          <a:bodyPr wrap="square">
+            <a:normAutofit/>
           </a:bodyPr>
           <a:lstStyle/>
           <a:p>
@@ -16703,23 +16703,23 @@
         </p:nvSpPr>
         <p:spPr>
           <a:xfrm>
-            <a:off x="9573768" y="4443984"/>
-            <a:ext cx="1106424" cy="310896"/>
-          </a:xfrm>
-          <a:prstGeom prst="rect">
-            <a:avLst/>
-          </a:prstGeom>
-          <a:noFill/>
-        </p:spPr>
-        <p:txBody>
-          <a:bodyPr wrap="square">
-            <a:spAutoFit/>
+            <a:off x="9573768" y="5120000"/>
+            <a:ext cx="1106424" cy="420000"/>
+          </a:xfrm>
+          <a:prstGeom prst="rect">
+            <a:avLst/>
+          </a:prstGeom>
+          <a:noFill/>
+        </p:spPr>
+        <p:txBody>
+          <a:bodyPr wrap="square">
+            <a:normAutofit/>
           </a:bodyPr>
           <a:lstStyle/>
           <a:p>
             <a:pPr algn="l"/>
             <a:r>
-              <a:rPr sz="2000" b="1">
+              <a:rPr sz="1500" b="1">
                 <a:solidFill>
                   <a:srgbClr val="FFFFFF"/>
                 </a:solidFill>
@@ -16868,7 +16868,7 @@
                 </a:solidFill>
                 <a:latin typeface="Aptos"/>
               </a:rPr>
-              <a:t>System model</a:t>
+              <a:t>Tlamatini model</a:t>
             </a:r>
           </a:p>
         </p:txBody>

--- a/Tlamatini_eXtended_Artificial_Intelligence_Humanly_Tempered.pptx
+++ b/Tlamatini_eXtended_Artificial_Intelligence_Humanly_Tempered.pptx
@@ -5,39 +5,40 @@
     <p:sldMasterId id="2147483648" r:id="rId1"/>
   </p:sldMasterIdLst>
   <p:sldIdLst>
-    <p:sldId id="256" r:id="rId2"/>
-    <p:sldId id="257" r:id="rId3"/>
-    <p:sldId id="258" r:id="rId4"/>
-    <p:sldId id="259" r:id="rId5"/>
-    <p:sldId id="260" r:id="rId6"/>
-    <p:sldId id="261" r:id="rId7"/>
-    <p:sldId id="262" r:id="rId8"/>
-    <p:sldId id="263" r:id="rId9"/>
-    <p:sldId id="264" r:id="rId10"/>
-    <p:sldId id="265" r:id="rId11"/>
-    <p:sldId id="266" r:id="rId12"/>
-    <p:sldId id="267" r:id="rId13"/>
-    <p:sldId id="268" r:id="rId14"/>
-    <p:sldId id="269" r:id="rId15"/>
-    <p:sldId id="270" r:id="rId16"/>
-    <p:sldId id="271" r:id="rId17"/>
-    <p:sldId id="272" r:id="rId18"/>
-    <p:sldId id="273" r:id="rId19"/>
-    <p:sldId id="274" r:id="rId20"/>
-    <p:sldId id="275" r:id="rId21"/>
-    <p:sldId id="276" r:id="rId22"/>
-    <p:sldId id="277" r:id="rId23"/>
-    <p:sldId id="278" r:id="rId24"/>
-    <p:sldId id="279" r:id="rId25"/>
-    <p:sldId id="280" r:id="rId26"/>
-    <p:sldId id="281" r:id="rId27"/>
-    <p:sldId id="282" r:id="rId28"/>
-    <p:sldId id="283" r:id="rId29"/>
-    <p:sldId id="284" r:id="rId30"/>
-    <p:sldId id="285" r:id="rId31"/>
-    <p:sldId id="286" r:id="rId32"/>
+    <p:sldId id="256" r:id="rId7"/>
+    <p:sldId id="257" r:id="rId8"/>
+    <p:sldId id="258" r:id="rId9"/>
+    <p:sldId id="259" r:id="rId10"/>
+    <p:sldId id="260" r:id="rId11"/>
+    <p:sldId id="261" r:id="rId12"/>
+    <p:sldId id="262" r:id="rId13"/>
+    <p:sldId id="263" r:id="rId14"/>
+    <p:sldId id="264" r:id="rId15"/>
+    <p:sldId id="265" r:id="rId16"/>
+    <p:sldId id="266" r:id="rId17"/>
+    <p:sldId id="267" r:id="rId18"/>
+    <p:sldId id="268" r:id="rId19"/>
+    <p:sldId id="269" r:id="rId20"/>
+    <p:sldId id="270" r:id="rId21"/>
+    <p:sldId id="271" r:id="rId22"/>
+    <p:sldId id="272" r:id="rId23"/>
+    <p:sldId id="273" r:id="rId24"/>
+    <p:sldId id="274" r:id="rId25"/>
+    <p:sldId id="275" r:id="rId26"/>
+    <p:sldId id="276" r:id="rId27"/>
+    <p:sldId id="277" r:id="rId28"/>
+    <p:sldId id="278" r:id="rId29"/>
+    <p:sldId id="279" r:id="rId30"/>
+    <p:sldId id="280" r:id="rId31"/>
+    <p:sldId id="281" r:id="rId32"/>
+    <p:sldId id="282" r:id="rId33"/>
+    <p:sldId id="283" r:id="rId34"/>
+    <p:sldId id="284" r:id="rId35"/>
+    <p:sldId id="285" r:id="rId36"/>
+    <p:sldId id="286" r:id="rId37"/>
+    <p:sldId id="287" r:id="rId38"/>
   </p:sldIdLst>
-  <p:sldSz cx="12192000" cy="6858000"/>
+  <p:sldSz cx="12191695" cy="6858000" type="screen4x3"/>
   <p:notesSz cx="6858000" cy="9144000"/>
   <p:defaultTextStyle>
     <a:defPPr>
@@ -134,22 +135,6 @@
       </a:defRPr>
     </a:lvl9pPr>
   </p:defaultTextStyle>
-  <p:extLst>
-    <p:ext uri="{EFAFB233-063F-42B5-8137-9DF3F51BA10A}">
-      <p15:sldGuideLst xmlns:p15="http://schemas.microsoft.com/office/powerpoint/2012/main">
-        <p15:guide id="1" orient="horz" pos="2160">
-          <p15:clr>
-            <a:srgbClr val="A4A3A4"/>
-          </p15:clr>
-        </p15:guide>
-        <p15:guide id="2" pos="2880">
-          <p15:clr>
-            <a:srgbClr val="A4A3A4"/>
-          </p15:clr>
-        </p15:guide>
-      </p15:sldGuideLst>
-    </p:ext>
-  </p:extLst>
 </p:presentation>
 </file>
 
@@ -191,9 +176,10 @@
           <a:lstStyle/>
           <a:p>
             <a:r>
-              <a:rPr lang="en-US"/>
+              <a:rPr lang="en-US" smtClean="0"/>
               <a:t>Click to edit Master title style</a:t>
             </a:r>
+            <a:endParaRPr lang="en-US"/>
           </a:p>
         </p:txBody>
       </p:sp>
@@ -309,9 +295,10 @@
           </a:lstStyle>
           <a:p>
             <a:r>
-              <a:rPr lang="en-US"/>
+              <a:rPr lang="en-US" smtClean="0"/>
               <a:t>Click to edit Master subtitle style</a:t>
             </a:r>
+            <a:endParaRPr lang="en-US"/>
           </a:p>
         </p:txBody>
       </p:sp>
@@ -332,7 +319,7 @@
           <a:p>
             <a:fld id="{5BCAD085-E8A6-8845-BD4E-CB4CCA059FC4}" type="datetimeFigureOut">
               <a:rPr lang="en-US" smtClean="0"/>
-              <a:t>4/17/2026</a:t>
+              <a:t>1/27/13</a:t>
             </a:fld>
             <a:endParaRPr lang="en-US"/>
           </a:p>
@@ -426,9 +413,10 @@
           <a:lstStyle/>
           <a:p>
             <a:r>
-              <a:rPr lang="en-US"/>
+              <a:rPr lang="en-US" smtClean="0"/>
               <a:t>Click to edit Master title style</a:t>
             </a:r>
+            <a:endParaRPr lang="en-US"/>
           </a:p>
         </p:txBody>
       </p:sp>
@@ -449,37 +437,38 @@
           <a:p>
             <a:pPr lvl="0"/>
             <a:r>
-              <a:rPr lang="en-US"/>
+              <a:rPr lang="en-US" smtClean="0"/>
               <a:t>Click to edit Master text styles</a:t>
             </a:r>
           </a:p>
           <a:p>
             <a:pPr lvl="1"/>
             <a:r>
-              <a:rPr lang="en-US"/>
+              <a:rPr lang="en-US" smtClean="0"/>
               <a:t>Second level</a:t>
             </a:r>
           </a:p>
           <a:p>
             <a:pPr lvl="2"/>
             <a:r>
-              <a:rPr lang="en-US"/>
+              <a:rPr lang="en-US" smtClean="0"/>
               <a:t>Third level</a:t>
             </a:r>
           </a:p>
           <a:p>
             <a:pPr lvl="3"/>
             <a:r>
-              <a:rPr lang="en-US"/>
+              <a:rPr lang="en-US" smtClean="0"/>
               <a:t>Fourth level</a:t>
             </a:r>
           </a:p>
           <a:p>
             <a:pPr lvl="4"/>
             <a:r>
-              <a:rPr lang="en-US"/>
+              <a:rPr lang="en-US" smtClean="0"/>
               <a:t>Fifth level</a:t>
             </a:r>
+            <a:endParaRPr lang="en-US"/>
           </a:p>
         </p:txBody>
       </p:sp>
@@ -500,7 +489,7 @@
           <a:p>
             <a:fld id="{5BCAD085-E8A6-8845-BD4E-CB4CCA059FC4}" type="datetimeFigureOut">
               <a:rPr lang="en-US" smtClean="0"/>
-              <a:t>4/17/2026</a:t>
+              <a:t>1/27/13</a:t>
             </a:fld>
             <a:endParaRPr lang="en-US"/>
           </a:p>
@@ -599,9 +588,10 @@
           <a:lstStyle/>
           <a:p>
             <a:r>
-              <a:rPr lang="en-US"/>
+              <a:rPr lang="en-US" smtClean="0"/>
               <a:t>Click to edit Master title style</a:t>
             </a:r>
+            <a:endParaRPr lang="en-US"/>
           </a:p>
         </p:txBody>
       </p:sp>
@@ -627,37 +617,38 @@
           <a:p>
             <a:pPr lvl="0"/>
             <a:r>
-              <a:rPr lang="en-US"/>
+              <a:rPr lang="en-US" smtClean="0"/>
               <a:t>Click to edit Master text styles</a:t>
             </a:r>
           </a:p>
           <a:p>
             <a:pPr lvl="1"/>
             <a:r>
-              <a:rPr lang="en-US"/>
+              <a:rPr lang="en-US" smtClean="0"/>
               <a:t>Second level</a:t>
             </a:r>
           </a:p>
           <a:p>
             <a:pPr lvl="2"/>
             <a:r>
-              <a:rPr lang="en-US"/>
+              <a:rPr lang="en-US" smtClean="0"/>
               <a:t>Third level</a:t>
             </a:r>
           </a:p>
           <a:p>
             <a:pPr lvl="3"/>
             <a:r>
-              <a:rPr lang="en-US"/>
+              <a:rPr lang="en-US" smtClean="0"/>
               <a:t>Fourth level</a:t>
             </a:r>
           </a:p>
           <a:p>
             <a:pPr lvl="4"/>
             <a:r>
-              <a:rPr lang="en-US"/>
+              <a:rPr lang="en-US" smtClean="0"/>
               <a:t>Fifth level</a:t>
             </a:r>
+            <a:endParaRPr lang="en-US"/>
           </a:p>
         </p:txBody>
       </p:sp>
@@ -678,7 +669,7 @@
           <a:p>
             <a:fld id="{5BCAD085-E8A6-8845-BD4E-CB4CCA059FC4}" type="datetimeFigureOut">
               <a:rPr lang="en-US" smtClean="0"/>
-              <a:t>4/17/2026</a:t>
+              <a:t>1/27/13</a:t>
             </a:fld>
             <a:endParaRPr lang="en-US"/>
           </a:p>
@@ -772,9 +763,10 @@
           <a:lstStyle/>
           <a:p>
             <a:r>
-              <a:rPr lang="en-US"/>
+              <a:rPr lang="en-US" smtClean="0"/>
               <a:t>Click to edit Master title style</a:t>
             </a:r>
+            <a:endParaRPr lang="en-US"/>
           </a:p>
         </p:txBody>
       </p:sp>
@@ -795,37 +787,38 @@
           <a:p>
             <a:pPr lvl="0"/>
             <a:r>
-              <a:rPr lang="en-US"/>
+              <a:rPr lang="en-US" smtClean="0"/>
               <a:t>Click to edit Master text styles</a:t>
             </a:r>
           </a:p>
           <a:p>
             <a:pPr lvl="1"/>
             <a:r>
-              <a:rPr lang="en-US"/>
+              <a:rPr lang="en-US" smtClean="0"/>
               <a:t>Second level</a:t>
             </a:r>
           </a:p>
           <a:p>
             <a:pPr lvl="2"/>
             <a:r>
-              <a:rPr lang="en-US"/>
+              <a:rPr lang="en-US" smtClean="0"/>
               <a:t>Third level</a:t>
             </a:r>
           </a:p>
           <a:p>
             <a:pPr lvl="3"/>
             <a:r>
-              <a:rPr lang="en-US"/>
+              <a:rPr lang="en-US" smtClean="0"/>
               <a:t>Fourth level</a:t>
             </a:r>
           </a:p>
           <a:p>
             <a:pPr lvl="4"/>
             <a:r>
-              <a:rPr lang="en-US"/>
+              <a:rPr lang="en-US" smtClean="0"/>
               <a:t>Fifth level</a:t>
             </a:r>
+            <a:endParaRPr lang="en-US"/>
           </a:p>
         </p:txBody>
       </p:sp>
@@ -846,7 +839,7 @@
           <a:p>
             <a:fld id="{5BCAD085-E8A6-8845-BD4E-CB4CCA059FC4}" type="datetimeFigureOut">
               <a:rPr lang="en-US" smtClean="0"/>
-              <a:t>4/17/2026</a:t>
+              <a:t>1/27/13</a:t>
             </a:fld>
             <a:endParaRPr lang="en-US"/>
           </a:p>
@@ -949,9 +942,10 @@
           </a:lstStyle>
           <a:p>
             <a:r>
-              <a:rPr lang="en-US"/>
+              <a:rPr lang="en-US" smtClean="0"/>
               <a:t>Click to edit Master title style</a:t>
             </a:r>
+            <a:endParaRPr lang="en-US"/>
           </a:p>
         </p:txBody>
       </p:sp>
@@ -1068,7 +1062,7 @@
           <a:p>
             <a:pPr lvl="0"/>
             <a:r>
-              <a:rPr lang="en-US"/>
+              <a:rPr lang="en-US" smtClean="0"/>
               <a:t>Click to edit Master text styles</a:t>
             </a:r>
           </a:p>
@@ -1091,7 +1085,7 @@
           <a:p>
             <a:fld id="{5BCAD085-E8A6-8845-BD4E-CB4CCA059FC4}" type="datetimeFigureOut">
               <a:rPr lang="en-US" smtClean="0"/>
-              <a:t>4/17/2026</a:t>
+              <a:t>1/27/13</a:t>
             </a:fld>
             <a:endParaRPr lang="en-US"/>
           </a:p>
@@ -1185,9 +1179,10 @@
           <a:lstStyle/>
           <a:p>
             <a:r>
-              <a:rPr lang="en-US"/>
+              <a:rPr lang="en-US" smtClean="0"/>
               <a:t>Click to edit Master title style</a:t>
             </a:r>
+            <a:endParaRPr lang="en-US"/>
           </a:p>
         </p:txBody>
       </p:sp>
@@ -1241,37 +1236,38 @@
           <a:p>
             <a:pPr lvl="0"/>
             <a:r>
-              <a:rPr lang="en-US"/>
+              <a:rPr lang="en-US" smtClean="0"/>
               <a:t>Click to edit Master text styles</a:t>
             </a:r>
           </a:p>
           <a:p>
             <a:pPr lvl="1"/>
             <a:r>
-              <a:rPr lang="en-US"/>
+              <a:rPr lang="en-US" smtClean="0"/>
               <a:t>Second level</a:t>
             </a:r>
           </a:p>
           <a:p>
             <a:pPr lvl="2"/>
             <a:r>
-              <a:rPr lang="en-US"/>
+              <a:rPr lang="en-US" smtClean="0"/>
               <a:t>Third level</a:t>
             </a:r>
           </a:p>
           <a:p>
             <a:pPr lvl="3"/>
             <a:r>
-              <a:rPr lang="en-US"/>
+              <a:rPr lang="en-US" smtClean="0"/>
               <a:t>Fourth level</a:t>
             </a:r>
           </a:p>
           <a:p>
             <a:pPr lvl="4"/>
             <a:r>
-              <a:rPr lang="en-US"/>
+              <a:rPr lang="en-US" smtClean="0"/>
               <a:t>Fifth level</a:t>
             </a:r>
+            <a:endParaRPr lang="en-US"/>
           </a:p>
         </p:txBody>
       </p:sp>
@@ -1325,37 +1321,38 @@
           <a:p>
             <a:pPr lvl="0"/>
             <a:r>
-              <a:rPr lang="en-US"/>
+              <a:rPr lang="en-US" smtClean="0"/>
               <a:t>Click to edit Master text styles</a:t>
             </a:r>
           </a:p>
           <a:p>
             <a:pPr lvl="1"/>
             <a:r>
-              <a:rPr lang="en-US"/>
+              <a:rPr lang="en-US" smtClean="0"/>
               <a:t>Second level</a:t>
             </a:r>
           </a:p>
           <a:p>
             <a:pPr lvl="2"/>
             <a:r>
-              <a:rPr lang="en-US"/>
+              <a:rPr lang="en-US" smtClean="0"/>
               <a:t>Third level</a:t>
             </a:r>
           </a:p>
           <a:p>
             <a:pPr lvl="3"/>
             <a:r>
-              <a:rPr lang="en-US"/>
+              <a:rPr lang="en-US" smtClean="0"/>
               <a:t>Fourth level</a:t>
             </a:r>
           </a:p>
           <a:p>
             <a:pPr lvl="4"/>
             <a:r>
-              <a:rPr lang="en-US"/>
+              <a:rPr lang="en-US" smtClean="0"/>
               <a:t>Fifth level</a:t>
             </a:r>
+            <a:endParaRPr lang="en-US"/>
           </a:p>
         </p:txBody>
       </p:sp>
@@ -1376,7 +1373,7 @@
           <a:p>
             <a:fld id="{5BCAD085-E8A6-8845-BD4E-CB4CCA059FC4}" type="datetimeFigureOut">
               <a:rPr lang="en-US" smtClean="0"/>
-              <a:t>4/17/2026</a:t>
+              <a:t>1/27/13</a:t>
             </a:fld>
             <a:endParaRPr lang="en-US"/>
           </a:p>
@@ -1474,9 +1471,10 @@
           </a:lstStyle>
           <a:p>
             <a:r>
-              <a:rPr lang="en-US"/>
+              <a:rPr lang="en-US" smtClean="0"/>
               <a:t>Click to edit Master title style</a:t>
             </a:r>
+            <a:endParaRPr lang="en-US"/>
           </a:p>
         </p:txBody>
       </p:sp>
@@ -1539,7 +1537,7 @@
           <a:p>
             <a:pPr lvl="0"/>
             <a:r>
-              <a:rPr lang="en-US"/>
+              <a:rPr lang="en-US" smtClean="0"/>
               <a:t>Click to edit Master text styles</a:t>
             </a:r>
           </a:p>
@@ -1595,37 +1593,38 @@
           <a:p>
             <a:pPr lvl="0"/>
             <a:r>
-              <a:rPr lang="en-US"/>
+              <a:rPr lang="en-US" smtClean="0"/>
               <a:t>Click to edit Master text styles</a:t>
             </a:r>
           </a:p>
           <a:p>
             <a:pPr lvl="1"/>
             <a:r>
-              <a:rPr lang="en-US"/>
+              <a:rPr lang="en-US" smtClean="0"/>
               <a:t>Second level</a:t>
             </a:r>
           </a:p>
           <a:p>
             <a:pPr lvl="2"/>
             <a:r>
-              <a:rPr lang="en-US"/>
+              <a:rPr lang="en-US" smtClean="0"/>
               <a:t>Third level</a:t>
             </a:r>
           </a:p>
           <a:p>
             <a:pPr lvl="3"/>
             <a:r>
-              <a:rPr lang="en-US"/>
+              <a:rPr lang="en-US" smtClean="0"/>
               <a:t>Fourth level</a:t>
             </a:r>
           </a:p>
           <a:p>
             <a:pPr lvl="4"/>
             <a:r>
-              <a:rPr lang="en-US"/>
+              <a:rPr lang="en-US" smtClean="0"/>
               <a:t>Fifth level</a:t>
             </a:r>
+            <a:endParaRPr lang="en-US"/>
           </a:p>
         </p:txBody>
       </p:sp>
@@ -1688,7 +1687,7 @@
           <a:p>
             <a:pPr lvl="0"/>
             <a:r>
-              <a:rPr lang="en-US"/>
+              <a:rPr lang="en-US" smtClean="0"/>
               <a:t>Click to edit Master text styles</a:t>
             </a:r>
           </a:p>
@@ -1744,37 +1743,38 @@
           <a:p>
             <a:pPr lvl="0"/>
             <a:r>
-              <a:rPr lang="en-US"/>
+              <a:rPr lang="en-US" smtClean="0"/>
               <a:t>Click to edit Master text styles</a:t>
             </a:r>
           </a:p>
           <a:p>
             <a:pPr lvl="1"/>
             <a:r>
-              <a:rPr lang="en-US"/>
+              <a:rPr lang="en-US" smtClean="0"/>
               <a:t>Second level</a:t>
             </a:r>
           </a:p>
           <a:p>
             <a:pPr lvl="2"/>
             <a:r>
-              <a:rPr lang="en-US"/>
+              <a:rPr lang="en-US" smtClean="0"/>
               <a:t>Third level</a:t>
             </a:r>
           </a:p>
           <a:p>
             <a:pPr lvl="3"/>
             <a:r>
-              <a:rPr lang="en-US"/>
+              <a:rPr lang="en-US" smtClean="0"/>
               <a:t>Fourth level</a:t>
             </a:r>
           </a:p>
           <a:p>
             <a:pPr lvl="4"/>
             <a:r>
-              <a:rPr lang="en-US"/>
+              <a:rPr lang="en-US" smtClean="0"/>
               <a:t>Fifth level</a:t>
             </a:r>
+            <a:endParaRPr lang="en-US"/>
           </a:p>
         </p:txBody>
       </p:sp>
@@ -1795,7 +1795,7 @@
           <a:p>
             <a:fld id="{5BCAD085-E8A6-8845-BD4E-CB4CCA059FC4}" type="datetimeFigureOut">
               <a:rPr lang="en-US" smtClean="0"/>
-              <a:t>4/17/2026</a:t>
+              <a:t>1/27/13</a:t>
             </a:fld>
             <a:endParaRPr lang="en-US"/>
           </a:p>
@@ -1889,9 +1889,10 @@
           <a:lstStyle/>
           <a:p>
             <a:r>
-              <a:rPr lang="en-US"/>
+              <a:rPr lang="en-US" smtClean="0"/>
               <a:t>Click to edit Master title style</a:t>
             </a:r>
+            <a:endParaRPr lang="en-US"/>
           </a:p>
         </p:txBody>
       </p:sp>
@@ -1912,7 +1913,7 @@
           <a:p>
             <a:fld id="{5BCAD085-E8A6-8845-BD4E-CB4CCA059FC4}" type="datetimeFigureOut">
               <a:rPr lang="en-US" smtClean="0"/>
-              <a:t>4/17/2026</a:t>
+              <a:t>1/27/13</a:t>
             </a:fld>
             <a:endParaRPr lang="en-US"/>
           </a:p>
@@ -2007,7 +2008,7 @@
           <a:p>
             <a:fld id="{5BCAD085-E8A6-8845-BD4E-CB4CCA059FC4}" type="datetimeFigureOut">
               <a:rPr lang="en-US" smtClean="0"/>
-              <a:t>4/17/2026</a:t>
+              <a:t>1/27/13</a:t>
             </a:fld>
             <a:endParaRPr lang="en-US"/>
           </a:p>
@@ -2110,9 +2111,10 @@
           </a:lstStyle>
           <a:p>
             <a:r>
-              <a:rPr lang="en-US"/>
+              <a:rPr lang="en-US" smtClean="0"/>
               <a:t>Click to edit Master title style</a:t>
             </a:r>
+            <a:endParaRPr lang="en-US"/>
           </a:p>
         </p:txBody>
       </p:sp>
@@ -2166,37 +2168,38 @@
           <a:p>
             <a:pPr lvl="0"/>
             <a:r>
-              <a:rPr lang="en-US"/>
+              <a:rPr lang="en-US" smtClean="0"/>
               <a:t>Click to edit Master text styles</a:t>
             </a:r>
           </a:p>
           <a:p>
             <a:pPr lvl="1"/>
             <a:r>
-              <a:rPr lang="en-US"/>
+              <a:rPr lang="en-US" smtClean="0"/>
               <a:t>Second level</a:t>
             </a:r>
           </a:p>
           <a:p>
             <a:pPr lvl="2"/>
             <a:r>
-              <a:rPr lang="en-US"/>
+              <a:rPr lang="en-US" smtClean="0"/>
               <a:t>Third level</a:t>
             </a:r>
           </a:p>
           <a:p>
             <a:pPr lvl="3"/>
             <a:r>
-              <a:rPr lang="en-US"/>
+              <a:rPr lang="en-US" smtClean="0"/>
               <a:t>Fourth level</a:t>
             </a:r>
           </a:p>
           <a:p>
             <a:pPr lvl="4"/>
             <a:r>
-              <a:rPr lang="en-US"/>
+              <a:rPr lang="en-US" smtClean="0"/>
               <a:t>Fifth level</a:t>
             </a:r>
+            <a:endParaRPr lang="en-US"/>
           </a:p>
         </p:txBody>
       </p:sp>
@@ -2259,7 +2262,7 @@
           <a:p>
             <a:pPr lvl="0"/>
             <a:r>
-              <a:rPr lang="en-US"/>
+              <a:rPr lang="en-US" smtClean="0"/>
               <a:t>Click to edit Master text styles</a:t>
             </a:r>
           </a:p>
@@ -2282,7 +2285,7 @@
           <a:p>
             <a:fld id="{5BCAD085-E8A6-8845-BD4E-CB4CCA059FC4}" type="datetimeFigureOut">
               <a:rPr lang="en-US" smtClean="0"/>
-              <a:t>4/17/2026</a:t>
+              <a:t>1/27/13</a:t>
             </a:fld>
             <a:endParaRPr lang="en-US"/>
           </a:p>
@@ -2385,9 +2388,10 @@
           </a:lstStyle>
           <a:p>
             <a:r>
-              <a:rPr lang="en-US"/>
+              <a:rPr lang="en-US" smtClean="0"/>
               <a:t>Click to edit Master title style</a:t>
             </a:r>
+            <a:endParaRPr lang="en-US"/>
           </a:p>
         </p:txBody>
       </p:sp>
@@ -2511,7 +2515,7 @@
           <a:p>
             <a:pPr lvl="0"/>
             <a:r>
-              <a:rPr lang="en-US"/>
+              <a:rPr lang="en-US" smtClean="0"/>
               <a:t>Click to edit Master text styles</a:t>
             </a:r>
           </a:p>
@@ -2534,7 +2538,7 @@
           <a:p>
             <a:fld id="{5BCAD085-E8A6-8845-BD4E-CB4CCA059FC4}" type="datetimeFigureOut">
               <a:rPr lang="en-US" smtClean="0"/>
-              <a:t>4/17/2026</a:t>
+              <a:t>1/27/13</a:t>
             </a:fld>
             <a:endParaRPr lang="en-US"/>
           </a:p>
@@ -2643,9 +2647,10 @@
           <a:lstStyle/>
           <a:p>
             <a:r>
-              <a:rPr lang="en-US"/>
+              <a:rPr lang="en-US" smtClean="0"/>
               <a:t>Click to edit Master title style</a:t>
             </a:r>
+            <a:endParaRPr lang="en-US"/>
           </a:p>
         </p:txBody>
       </p:sp>
@@ -2676,37 +2681,38 @@
           <a:p>
             <a:pPr lvl="0"/>
             <a:r>
-              <a:rPr lang="en-US"/>
+              <a:rPr lang="en-US" smtClean="0"/>
               <a:t>Click to edit Master text styles</a:t>
             </a:r>
           </a:p>
           <a:p>
             <a:pPr lvl="1"/>
             <a:r>
-              <a:rPr lang="en-US"/>
+              <a:rPr lang="en-US" smtClean="0"/>
               <a:t>Second level</a:t>
             </a:r>
           </a:p>
           <a:p>
             <a:pPr lvl="2"/>
             <a:r>
-              <a:rPr lang="en-US"/>
+              <a:rPr lang="en-US" smtClean="0"/>
               <a:t>Third level</a:t>
             </a:r>
           </a:p>
           <a:p>
             <a:pPr lvl="3"/>
             <a:r>
-              <a:rPr lang="en-US"/>
+              <a:rPr lang="en-US" smtClean="0"/>
               <a:t>Fourth level</a:t>
             </a:r>
           </a:p>
           <a:p>
             <a:pPr lvl="4"/>
             <a:r>
-              <a:rPr lang="en-US"/>
+              <a:rPr lang="en-US" smtClean="0"/>
               <a:t>Fifth level</a:t>
             </a:r>
+            <a:endParaRPr lang="en-US"/>
           </a:p>
         </p:txBody>
       </p:sp>
@@ -2745,7 +2751,7 @@
           <a:p>
             <a:fld id="{5BCAD085-E8A6-8845-BD4E-CB4CCA059FC4}" type="datetimeFigureOut">
               <a:rPr lang="en-US" smtClean="0"/>
-              <a:t>4/17/2026</a:t>
+              <a:t>1/27/13</a:t>
             </a:fld>
             <a:endParaRPr lang="en-US"/>
           </a:p>
@@ -3104,7 +3110,7 @@
 </file>
 
 <file path=ppt/slides/slide1.xml><?xml version="1.0" encoding="utf-8"?>
-<p:sld xmlns:a="http://schemas.openxmlformats.org/drawingml/2006/main" xmlns:r="http://schemas.openxmlformats.org/officeDocument/2006/relationships" xmlns:p="http://schemas.openxmlformats.org/presentationml/2006/main">
+<p:sld xmlns:a="http://schemas.openxmlformats.org/drawingml/2006/main" xmlns:p="http://schemas.openxmlformats.org/presentationml/2006/main" xmlns:r="http://schemas.openxmlformats.org/officeDocument/2006/relationships">
   <p:cSld>
     <p:spTree>
       <p:nvGrpSpPr>
@@ -3112,14 +3118,7 @@
         <p:cNvGrpSpPr/>
         <p:nvPr/>
       </p:nvGrpSpPr>
-      <p:grpSpPr>
-        <a:xfrm>
-          <a:off x="0" y="0"/>
-          <a:ext cx="0" cy="0"/>
-          <a:chOff x="0" y="0"/>
-          <a:chExt cx="0" cy="0"/>
-        </a:xfrm>
-      </p:grpSpPr>
+      <p:grpSpPr/>
       <p:pic>
         <p:nvPicPr>
           <p:cNvPr id="2" name="Picture 1" descr="image-1-1.png"/>
@@ -3184,7 +3183,6 @@
           <a:lstStyle/>
           <a:p>
             <a:pPr algn="ctr"/>
-            <a:endParaRPr/>
           </a:p>
         </p:txBody>
       </p:sp>
@@ -3228,7 +3226,6 @@
           <a:lstStyle/>
           <a:p>
             <a:pPr algn="ctr"/>
-            <a:endParaRPr/>
           </a:p>
         </p:txBody>
       </p:sp>
@@ -3272,7 +3269,6 @@
           <a:lstStyle/>
           <a:p>
             <a:pPr algn="ctr"/>
-            <a:endParaRPr/>
           </a:p>
         </p:txBody>
       </p:sp>
@@ -3316,7 +3312,6 @@
           <a:lstStyle/>
           <a:p>
             <a:pPr algn="ctr"/>
-            <a:endParaRPr/>
           </a:p>
         </p:txBody>
       </p:sp>
@@ -3360,7 +3355,6 @@
           <a:lstStyle/>
           <a:p>
             <a:pPr algn="ctr"/>
-            <a:endParaRPr/>
           </a:p>
         </p:txBody>
       </p:sp>
@@ -3394,7 +3388,7 @@
                 </a:solidFill>
                 <a:latin typeface="Aptos"/>
               </a:rPr>
-              <a:t>COMPLETE PROJECT DOSSIER</a:t>
+              <a:t>COMPLETE PROJECT DOSSIER: WHAT IT DOES, HOW IT WORKS, HOW TO USE IT</a:t>
             </a:r>
           </a:p>
         </p:txBody>
@@ -3443,7 +3437,7 @@
         <p:spPr>
           <a:xfrm>
             <a:off x="822960" y="1828800"/>
-            <a:ext cx="8319786" cy="461665"/>
+            <a:ext cx="5029200" cy="548640"/>
           </a:xfrm>
           <a:prstGeom prst="rect">
             <a:avLst/>
@@ -3458,38 +3452,14 @@
           <a:p>
             <a:pPr algn="l"/>
             <a:r>
-              <a:rPr lang="en-US" sz="2400" b="0" dirty="0">
+              <a:rPr sz="2400" b="0">
                 <a:solidFill>
                   <a:srgbClr val="E8E8DE"/>
                 </a:solidFill>
                 <a:latin typeface="Aptos Display"/>
               </a:rPr>
-              <a:t>XAIHT (</a:t>
-            </a:r>
-            <a:r>
-              <a:rPr lang="en-US" sz="2400" b="0" dirty="0" err="1">
-                <a:solidFill>
-                  <a:srgbClr val="E8E8DE"/>
-                </a:solidFill>
-                <a:latin typeface="Aptos Display"/>
-              </a:rPr>
-              <a:t>eXtended</a:t>
-            </a:r>
-            <a:r>
-              <a:rPr lang="en-US" sz="2400" b="0" dirty="0">
-                <a:solidFill>
-                  <a:srgbClr val="E8E8DE"/>
-                </a:solidFill>
-                <a:latin typeface="Aptos Display"/>
-              </a:rPr>
-              <a:t> Artificial Intelligence Humanly Tempered)</a:t>
-            </a:r>
-            <a:endParaRPr sz="2400" b="0" dirty="0">
-              <a:solidFill>
-                <a:srgbClr val="E8E8DE"/>
-              </a:solidFill>
-              <a:latin typeface="Aptos Display"/>
-            </a:endParaRPr>
+              <a:t>El Saber Cosmico del Desarrollo</a:t>
+            </a:r>
           </a:p>
         </p:txBody>
       </p:sp>
@@ -3570,7 +3540,6 @@
           <a:lstStyle/>
           <a:p>
             <a:pPr algn="ctr"/>
-            <a:endParaRPr/>
           </a:p>
         </p:txBody>
       </p:sp>
@@ -3639,7 +3608,7 @@
                 </a:solidFill>
                 <a:latin typeface="Aptos"/>
               </a:rPr>
-              <a:t>343</a:t>
+              <a:t>347</a:t>
             </a:r>
           </a:p>
         </p:txBody>
@@ -3686,7 +3655,6 @@
           <a:lstStyle/>
           <a:p>
             <a:pPr algn="ctr"/>
-            <a:endParaRPr/>
           </a:p>
         </p:txBody>
       </p:sp>
@@ -3802,7 +3770,6 @@
           <a:lstStyle/>
           <a:p>
             <a:pPr algn="ctr"/>
-            <a:endParaRPr/>
           </a:p>
         </p:txBody>
       </p:sp>
@@ -3815,7 +3782,7 @@
         <p:spPr>
           <a:xfrm>
             <a:off x="4535424" y="4023360"/>
-            <a:ext cx="1630682" cy="215444"/>
+            <a:ext cx="1490472" cy="219456"/>
           </a:xfrm>
           <a:prstGeom prst="rect">
             <a:avLst/>
@@ -3830,7 +3797,7 @@
           <a:p>
             <a:pPr algn="l"/>
             <a:r>
-              <a:rPr sz="800" b="1" dirty="0">
+              <a:rPr sz="800" b="1">
                 <a:solidFill>
                   <a:srgbClr val="E0AB5D"/>
                 </a:solidFill>
@@ -3838,21 +3805,6 @@
               </a:rPr>
               <a:t>EFFECTIVE</a:t>
             </a:r>
-            <a:r>
-              <a:rPr lang="en-US" sz="800" b="1" dirty="0">
-                <a:solidFill>
-                  <a:srgbClr val="E0AB5D"/>
-                </a:solidFill>
-                <a:latin typeface="Aptos"/>
-              </a:rPr>
-              <a:t> NUMBER OF LINES</a:t>
-            </a:r>
-            <a:endParaRPr sz="800" b="1" dirty="0">
-              <a:solidFill>
-                <a:srgbClr val="E0AB5D"/>
-              </a:solidFill>
-              <a:latin typeface="Aptos"/>
-            </a:endParaRPr>
           </a:p>
         </p:txBody>
       </p:sp>
@@ -3886,7 +3838,7 @@
                 </a:solidFill>
                 <a:latin typeface="Aptos"/>
               </a:rPr>
-              <a:t>69,062</a:t>
+              <a:t>71,382</a:t>
             </a:r>
           </a:p>
         </p:txBody>
@@ -3921,7 +3873,7 @@
                 </a:solidFill>
                 <a:latin typeface="Aptos"/>
               </a:rPr>
-              <a:t>Generated April 17, 2026 01:46 PM UTC-0600 at HEAD d7a8e66</a:t>
+              <a:t>Generated April 17, 2026 11:50 PM UTC-0600 at HEAD 3b6eb8e</a:t>
             </a:r>
           </a:p>
         </p:txBody>
@@ -3935,7 +3887,7 @@
 </file>
 
 <file path=ppt/slides/slide10.xml><?xml version="1.0" encoding="utf-8"?>
-<p:sld xmlns:a="http://schemas.openxmlformats.org/drawingml/2006/main" xmlns:r="http://schemas.openxmlformats.org/officeDocument/2006/relationships" xmlns:p="http://schemas.openxmlformats.org/presentationml/2006/main">
+<p:sld xmlns:a="http://schemas.openxmlformats.org/drawingml/2006/main" xmlns:p="http://schemas.openxmlformats.org/presentationml/2006/main" xmlns:r="http://schemas.openxmlformats.org/officeDocument/2006/relationships">
   <p:cSld>
     <p:spTree>
       <p:nvGrpSpPr>
@@ -3943,14 +3895,7 @@
         <p:cNvGrpSpPr/>
         <p:nvPr/>
       </p:nvGrpSpPr>
-      <p:grpSpPr>
-        <a:xfrm>
-          <a:off x="0" y="0"/>
-          <a:ext cx="0" cy="0"/>
-          <a:chOff x="0" y="0"/>
-          <a:chExt cx="0" cy="0"/>
-        </a:xfrm>
-      </p:grpSpPr>
+      <p:grpSpPr/>
       <p:sp>
         <p:nvSpPr>
           <p:cNvPr id="2" name="Rectangle 1"/>
@@ -3991,7 +3936,6 @@
           <a:lstStyle/>
           <a:p>
             <a:pPr algn="ctr"/>
-            <a:endParaRPr/>
           </a:p>
         </p:txBody>
       </p:sp>
@@ -4035,7 +3979,6 @@
           <a:lstStyle/>
           <a:p>
             <a:pPr algn="ctr"/>
-            <a:endParaRPr/>
           </a:p>
         </p:txBody>
       </p:sp>
@@ -4079,7 +4022,6 @@
           <a:lstStyle/>
           <a:p>
             <a:pPr algn="ctr"/>
-            <a:endParaRPr/>
           </a:p>
         </p:txBody>
       </p:sp>
@@ -4123,7 +4065,6 @@
           <a:lstStyle/>
           <a:p>
             <a:pPr algn="ctr"/>
-            <a:endParaRPr/>
           </a:p>
         </p:txBody>
       </p:sp>
@@ -4167,7 +4108,6 @@
           <a:lstStyle/>
           <a:p>
             <a:pPr algn="ctr"/>
-            <a:endParaRPr/>
           </a:p>
         </p:txBody>
       </p:sp>
@@ -4283,7 +4223,6 @@
           <a:lstStyle/>
           <a:p>
             <a:pPr algn="ctr"/>
-            <a:endParaRPr/>
           </a:p>
         </p:txBody>
       </p:sp>
@@ -4327,7 +4266,6 @@
           <a:lstStyle/>
           <a:p>
             <a:pPr algn="ctr"/>
-            <a:endParaRPr/>
           </a:p>
         </p:txBody>
       </p:sp>
@@ -4383,7 +4321,7 @@
           <a:noFill/>
         </p:spPr>
         <p:txBody>
-          <a:bodyPr wrap="square" lIns="38100" tIns="25400" rIns="38100" bIns="25400" anchor="t">
+          <a:bodyPr wrap="square" anchor="t" lIns="38100" rIns="38100" tIns="25400" bIns="25400">
             <a:noAutofit/>
           </a:bodyPr>
           <a:lstStyle/>
@@ -4405,6 +4343,9 @@
               </a:rPr>
               <a:t>Run from source: create a virtual environment, install requirements, migrate, create a superuser, collect static files, and start Django.</a:t>
             </a:r>
+            <a:endParaRPr sz="1500" b="0" i="0">
+              <a:latin typeface="Calibri"/>
+            </a:endParaRPr>
           </a:p>
           <a:p>
             <a:pPr>
@@ -4424,6 +4365,9 @@
               </a:rPr>
               <a:t>Open `/agent/` for chat. Load a file or directory context before asking codebase-specific questions.</a:t>
             </a:r>
+            <a:endParaRPr sz="1500" b="0" i="0">
+              <a:latin typeface="Calibri"/>
+            </a:endParaRPr>
           </a:p>
           <a:p>
             <a:pPr>
@@ -4443,6 +4387,9 @@
               </a:rPr>
               <a:t>Keep Multi-Turn unchecked for direct Q&amp;A; enable Multi-Turn for tasks that need tools, wrapped agents, monitoring, or workflow seeding.</a:t>
             </a:r>
+            <a:endParaRPr sz="1500" b="0" i="0">
+              <a:latin typeface="Calibri"/>
+            </a:endParaRPr>
           </a:p>
         </p:txBody>
       </p:sp>
@@ -4488,7 +4435,6 @@
           <a:lstStyle/>
           <a:p>
             <a:pPr algn="ctr"/>
-            <a:endParaRPr/>
           </a:p>
         </p:txBody>
       </p:sp>
@@ -4532,7 +4478,6 @@
           <a:lstStyle/>
           <a:p>
             <a:pPr algn="ctr"/>
-            <a:endParaRPr/>
           </a:p>
         </p:txBody>
       </p:sp>
@@ -4588,7 +4533,7 @@
           <a:noFill/>
         </p:spPr>
         <p:txBody>
-          <a:bodyPr wrap="square" lIns="38100" tIns="25400" rIns="38100" bIns="25400" anchor="t">
+          <a:bodyPr wrap="square" anchor="t" lIns="38100" rIns="38100" tIns="25400" bIns="25400">
             <a:noAutofit/>
           </a:bodyPr>
           <a:lstStyle/>
@@ -4610,6 +4555,9 @@
               </a:rPr>
               <a:t>Open `/agentic_control_panel/` to drag agents, connect them, configure each node, validate, start, pause/resume, stop, and save `.flw` workflows.</a:t>
             </a:r>
+            <a:endParaRPr sz="1500" b="0" i="0">
+              <a:latin typeface="Calibri"/>
+            </a:endParaRPr>
           </a:p>
           <a:p>
             <a:pPr>
@@ -4629,6 +4577,9 @@
               </a:rPr>
               <a:t>Use `python build.py`, `python build_uninstaller.py`, and `python build_installer.py` only when producing a packaged Windows release.</a:t>
             </a:r>
+            <a:endParaRPr sz="1500" b="0" i="0">
+              <a:latin typeface="Calibri"/>
+            </a:endParaRPr>
           </a:p>
         </p:txBody>
       </p:sp>
@@ -4641,7 +4592,7 @@
 </file>
 
 <file path=ppt/slides/slide11.xml><?xml version="1.0" encoding="utf-8"?>
-<p:sld xmlns:a="http://schemas.openxmlformats.org/drawingml/2006/main" xmlns:r="http://schemas.openxmlformats.org/officeDocument/2006/relationships" xmlns:p="http://schemas.openxmlformats.org/presentationml/2006/main">
+<p:sld xmlns:a="http://schemas.openxmlformats.org/drawingml/2006/main" xmlns:p="http://schemas.openxmlformats.org/presentationml/2006/main" xmlns:r="http://schemas.openxmlformats.org/officeDocument/2006/relationships">
   <p:cSld>
     <p:spTree>
       <p:nvGrpSpPr>
@@ -4649,14 +4600,7 @@
         <p:cNvGrpSpPr/>
         <p:nvPr/>
       </p:nvGrpSpPr>
-      <p:grpSpPr>
-        <a:xfrm>
-          <a:off x="0" y="0"/>
-          <a:ext cx="0" cy="0"/>
-          <a:chOff x="0" y="0"/>
-          <a:chExt cx="0" cy="0"/>
-        </a:xfrm>
-      </p:grpSpPr>
+      <p:grpSpPr/>
       <p:sp>
         <p:nvSpPr>
           <p:cNvPr id="2" name="Rectangle 1"/>
@@ -4697,7 +4641,6 @@
           <a:lstStyle/>
           <a:p>
             <a:pPr algn="ctr"/>
-            <a:endParaRPr/>
           </a:p>
         </p:txBody>
       </p:sp>
@@ -4741,7 +4684,6 @@
           <a:lstStyle/>
           <a:p>
             <a:pPr algn="ctr"/>
-            <a:endParaRPr/>
           </a:p>
         </p:txBody>
       </p:sp>
@@ -4785,7 +4727,6 @@
           <a:lstStyle/>
           <a:p>
             <a:pPr algn="ctr"/>
-            <a:endParaRPr/>
           </a:p>
         </p:txBody>
       </p:sp>
@@ -4829,7 +4770,6 @@
           <a:lstStyle/>
           <a:p>
             <a:pPr algn="ctr"/>
-            <a:endParaRPr/>
           </a:p>
         </p:txBody>
       </p:sp>
@@ -4873,7 +4813,6 @@
           <a:lstStyle/>
           <a:p>
             <a:pPr algn="ctr"/>
-            <a:endParaRPr/>
           </a:p>
         </p:txBody>
       </p:sp>
@@ -5030,7 +4969,6 @@
           <a:lstStyle/>
           <a:p>
             <a:pPr algn="ctr"/>
-            <a:endParaRPr/>
           </a:p>
         </p:txBody>
       </p:sp>
@@ -5074,7 +5012,6 @@
           <a:lstStyle/>
           <a:p>
             <a:pPr algn="ctr"/>
-            <a:endParaRPr/>
           </a:p>
         </p:txBody>
       </p:sp>
@@ -5130,7 +5067,7 @@
           <a:noFill/>
         </p:spPr>
         <p:txBody>
-          <a:bodyPr wrap="square" lIns="38100" tIns="25400" rIns="38100" bIns="25400" anchor="t">
+          <a:bodyPr wrap="square" anchor="t" lIns="38100" rIns="38100" tIns="25400" bIns="25400">
             <a:noAutofit/>
           </a:bodyPr>
           <a:lstStyle/>
@@ -5152,6 +5089,9 @@
               </a:rPr>
               <a:t>Open the browser, log in with your source-mode superuser, load a context path, and decide whether the task needs Multi-Turn.</a:t>
             </a:r>
+            <a:endParaRPr sz="1400" b="0" i="0">
+              <a:latin typeface="Calibri"/>
+            </a:endParaRPr>
           </a:p>
         </p:txBody>
       </p:sp>
@@ -5164,7 +5104,7 @@
 </file>
 
 <file path=ppt/slides/slide12.xml><?xml version="1.0" encoding="utf-8"?>
-<p:sld xmlns:a="http://schemas.openxmlformats.org/drawingml/2006/main" xmlns:r="http://schemas.openxmlformats.org/officeDocument/2006/relationships" xmlns:p="http://schemas.openxmlformats.org/presentationml/2006/main">
+<p:sld xmlns:a="http://schemas.openxmlformats.org/drawingml/2006/main" xmlns:p="http://schemas.openxmlformats.org/presentationml/2006/main" xmlns:r="http://schemas.openxmlformats.org/officeDocument/2006/relationships">
   <p:cSld>
     <p:spTree>
       <p:nvGrpSpPr>
@@ -5172,14 +5112,7 @@
         <p:cNvGrpSpPr/>
         <p:nvPr/>
       </p:nvGrpSpPr>
-      <p:grpSpPr>
-        <a:xfrm>
-          <a:off x="0" y="0"/>
-          <a:ext cx="0" cy="0"/>
-          <a:chOff x="0" y="0"/>
-          <a:chExt cx="0" cy="0"/>
-        </a:xfrm>
-      </p:grpSpPr>
+      <p:grpSpPr/>
       <p:sp>
         <p:nvSpPr>
           <p:cNvPr id="2" name="Rectangle 1"/>
@@ -5220,7 +5153,6 @@
           <a:lstStyle/>
           <a:p>
             <a:pPr algn="ctr"/>
-            <a:endParaRPr/>
           </a:p>
         </p:txBody>
       </p:sp>
@@ -5264,7 +5196,6 @@
           <a:lstStyle/>
           <a:p>
             <a:pPr algn="ctr"/>
-            <a:endParaRPr/>
           </a:p>
         </p:txBody>
       </p:sp>
@@ -5308,7 +5239,6 @@
           <a:lstStyle/>
           <a:p>
             <a:pPr algn="ctr"/>
-            <a:endParaRPr/>
           </a:p>
         </p:txBody>
       </p:sp>
@@ -5352,7 +5282,6 @@
           <a:lstStyle/>
           <a:p>
             <a:pPr algn="ctr"/>
-            <a:endParaRPr/>
           </a:p>
         </p:txBody>
       </p:sp>
@@ -5396,7 +5325,6 @@
           <a:lstStyle/>
           <a:p>
             <a:pPr algn="ctr"/>
-            <a:endParaRPr/>
           </a:p>
         </p:txBody>
       </p:sp>
@@ -5512,7 +5440,6 @@
           <a:lstStyle/>
           <a:p>
             <a:pPr algn="ctr"/>
-            <a:endParaRPr/>
           </a:p>
         </p:txBody>
       </p:sp>
@@ -5628,7 +5555,6 @@
           <a:lstStyle/>
           <a:p>
             <a:pPr algn="ctr"/>
-            <a:endParaRPr/>
           </a:p>
         </p:txBody>
       </p:sp>
@@ -5744,7 +5670,6 @@
           <a:lstStyle/>
           <a:p>
             <a:pPr algn="ctr"/>
-            <a:endParaRPr/>
           </a:p>
         </p:txBody>
       </p:sp>
@@ -5860,7 +5785,6 @@
           <a:lstStyle/>
           <a:p>
             <a:pPr algn="ctr"/>
-            <a:endParaRPr/>
           </a:p>
         </p:txBody>
       </p:sp>
@@ -5976,7 +5900,6 @@
           <a:lstStyle/>
           <a:p>
             <a:pPr algn="ctr"/>
-            <a:endParaRPr/>
           </a:p>
         </p:txBody>
       </p:sp>
@@ -6092,7 +6015,6 @@
           <a:lstStyle/>
           <a:p>
             <a:pPr algn="ctr"/>
-            <a:endParaRPr/>
           </a:p>
         </p:txBody>
       </p:sp>
@@ -6173,7 +6095,6 @@
           <a:lstStyle/>
           <a:p>
             <a:pPr algn="ctr"/>
-            <a:endParaRPr/>
           </a:p>
         </p:txBody>
       </p:sp>
@@ -6217,7 +6138,6 @@
           <a:lstStyle/>
           <a:p>
             <a:pPr algn="ctr"/>
-            <a:endParaRPr/>
           </a:p>
         </p:txBody>
       </p:sp>
@@ -6273,7 +6193,7 @@
           <a:noFill/>
         </p:spPr>
         <p:txBody>
-          <a:bodyPr wrap="square" lIns="38100" tIns="25400" rIns="38100" bIns="25400" anchor="t">
+          <a:bodyPr wrap="square" anchor="t" lIns="38100" rIns="38100" tIns="25400" bIns="25400">
             <a:noAutofit/>
           </a:bodyPr>
           <a:lstStyle/>
@@ -6295,6 +6215,9 @@
               </a:rPr>
               <a:t>Run packaging only when preparing a Windows distribution.</a:t>
             </a:r>
+            <a:endParaRPr sz="1600" b="0" i="0">
+              <a:latin typeface="Calibri"/>
+            </a:endParaRPr>
           </a:p>
           <a:p>
             <a:pPr>
@@ -6314,6 +6237,9 @@
               </a:rPr>
               <a:t>The final distributable is the full `dist/Tlamatini_Release/` folder, not one executable copied out of context.</a:t>
             </a:r>
+            <a:endParaRPr sz="1600" b="0" i="0">
+              <a:latin typeface="Calibri"/>
+            </a:endParaRPr>
           </a:p>
           <a:p>
             <a:pPr>
@@ -6333,6 +6259,9 @@
               </a:rPr>
               <a:t>Installer scripts register shortcuts and `.flw` file associations and place the uninstaller next to the app.</a:t>
             </a:r>
+            <a:endParaRPr sz="1600" b="0" i="0">
+              <a:latin typeface="Calibri"/>
+            </a:endParaRPr>
           </a:p>
         </p:txBody>
       </p:sp>
@@ -6345,7 +6274,7 @@
 </file>
 
 <file path=ppt/slides/slide13.xml><?xml version="1.0" encoding="utf-8"?>
-<p:sld xmlns:a="http://schemas.openxmlformats.org/drawingml/2006/main" xmlns:r="http://schemas.openxmlformats.org/officeDocument/2006/relationships" xmlns:p="http://schemas.openxmlformats.org/presentationml/2006/main">
+<p:sld xmlns:a="http://schemas.openxmlformats.org/drawingml/2006/main" xmlns:p="http://schemas.openxmlformats.org/presentationml/2006/main" xmlns:r="http://schemas.openxmlformats.org/officeDocument/2006/relationships">
   <p:cSld>
     <p:spTree>
       <p:nvGrpSpPr>
@@ -6353,14 +6282,7 @@
         <p:cNvGrpSpPr/>
         <p:nvPr/>
       </p:nvGrpSpPr>
-      <p:grpSpPr>
-        <a:xfrm>
-          <a:off x="0" y="0"/>
-          <a:ext cx="0" cy="0"/>
-          <a:chOff x="0" y="0"/>
-          <a:chExt cx="0" cy="0"/>
-        </a:xfrm>
-      </p:grpSpPr>
+      <p:grpSpPr/>
       <p:sp>
         <p:nvSpPr>
           <p:cNvPr id="2" name="Rectangle 1"/>
@@ -6401,7 +6323,6 @@
           <a:lstStyle/>
           <a:p>
             <a:pPr algn="ctr"/>
-            <a:endParaRPr/>
           </a:p>
         </p:txBody>
       </p:sp>
@@ -6445,7 +6366,6 @@
           <a:lstStyle/>
           <a:p>
             <a:pPr algn="ctr"/>
-            <a:endParaRPr/>
           </a:p>
         </p:txBody>
       </p:sp>
@@ -6489,7 +6409,6 @@
           <a:lstStyle/>
           <a:p>
             <a:pPr algn="ctr"/>
-            <a:endParaRPr/>
           </a:p>
         </p:txBody>
       </p:sp>
@@ -6533,7 +6452,6 @@
           <a:lstStyle/>
           <a:p>
             <a:pPr algn="ctr"/>
-            <a:endParaRPr/>
           </a:p>
         </p:txBody>
       </p:sp>
@@ -6577,7 +6495,6 @@
           <a:lstStyle/>
           <a:p>
             <a:pPr algn="ctr"/>
-            <a:endParaRPr/>
           </a:p>
         </p:txBody>
       </p:sp>
@@ -6693,7 +6610,6 @@
           <a:lstStyle/>
           <a:p>
             <a:pPr algn="ctr"/>
-            <a:endParaRPr/>
           </a:p>
         </p:txBody>
       </p:sp>
@@ -6762,7 +6678,7 @@
                 </a:solidFill>
                 <a:latin typeface="Aptos"/>
               </a:rPr>
-              <a:t>343</a:t>
+              <a:t>347</a:t>
             </a:r>
           </a:p>
         </p:txBody>
@@ -6809,7 +6725,6 @@
           <a:lstStyle/>
           <a:p>
             <a:pPr algn="ctr"/>
-            <a:endParaRPr/>
           </a:p>
         </p:txBody>
       </p:sp>
@@ -6925,7 +6840,6 @@
           <a:lstStyle/>
           <a:p>
             <a:pPr algn="ctr"/>
-            <a:endParaRPr/>
           </a:p>
         </p:txBody>
       </p:sp>
@@ -7041,7 +6955,6 @@
           <a:lstStyle/>
           <a:p>
             <a:pPr algn="ctr"/>
-            <a:endParaRPr/>
           </a:p>
         </p:txBody>
       </p:sp>
@@ -7157,7 +7070,6 @@
           <a:lstStyle/>
           <a:p>
             <a:pPr algn="ctr"/>
-            <a:endParaRPr/>
           </a:p>
         </p:txBody>
       </p:sp>
@@ -7273,7 +7185,6 @@
           <a:lstStyle/>
           <a:p>
             <a:pPr algn="ctr"/>
-            <a:endParaRPr/>
           </a:p>
         </p:txBody>
       </p:sp>
@@ -7389,7 +7300,6 @@
           <a:lstStyle/>
           <a:p>
             <a:pPr algn="ctr"/>
-            <a:endParaRPr/>
           </a:p>
         </p:txBody>
       </p:sp>
@@ -7433,7 +7343,6 @@
           <a:lstStyle/>
           <a:p>
             <a:pPr algn="ctr"/>
-            <a:endParaRPr/>
           </a:p>
         </p:txBody>
       </p:sp>
@@ -7489,7 +7398,7 @@
           <a:noFill/>
         </p:spPr>
         <p:txBody>
-          <a:bodyPr wrap="square" lIns="38100" tIns="25400" rIns="38100" bIns="25400" anchor="t">
+          <a:bodyPr wrap="square" anchor="t" lIns="38100" rIns="38100" tIns="25400" bIns="25400">
             <a:noAutofit/>
           </a:bodyPr>
           <a:lstStyle/>
@@ -7509,8 +7418,11 @@
               <a:rPr sz="1500" b="0" i="0">
                 <a:latin typeface="Calibri"/>
               </a:rPr>
-              <a:t>d7a8e66 - Update documentation with the laatest fixings, by angelahack1</a:t>
-            </a:r>
+              <a:t>3b6eb8e - Way too improving the execution chain with now "Exec report"!!, by angelahack1</a:t>
+            </a:r>
+            <a:endParaRPr sz="1500" b="0" i="0">
+              <a:latin typeface="Calibri"/>
+            </a:endParaRPr>
           </a:p>
           <a:p>
             <a:pPr>
@@ -7528,8 +7440,11 @@
               <a:rPr sz="1500" b="0" i="0">
                 <a:latin typeface="Calibri"/>
               </a:rPr>
-              <a:t>Generated on April 17, 2026 01:46 PM UTC-0600</a:t>
-            </a:r>
+              <a:t>Generated on April 17, 2026 11:50 PM UTC-0600</a:t>
+            </a:r>
+            <a:endParaRPr sz="1500" b="0" i="0">
+              <a:latin typeface="Calibri"/>
+            </a:endParaRPr>
           </a:p>
           <a:p>
             <a:pPr>
@@ -7549,6 +7464,9 @@
               </a:rPr>
               <a:t>Python requirements: 62; binary or asset tracked files skipped from line count: 13</a:t>
             </a:r>
+            <a:endParaRPr sz="1500" b="0" i="0">
+              <a:latin typeface="Calibri"/>
+            </a:endParaRPr>
           </a:p>
         </p:txBody>
       </p:sp>
@@ -7561,7 +7479,7 @@
 </file>
 
 <file path=ppt/slides/slide14.xml><?xml version="1.0" encoding="utf-8"?>
-<p:sld xmlns:a="http://schemas.openxmlformats.org/drawingml/2006/main" xmlns:r="http://schemas.openxmlformats.org/officeDocument/2006/relationships" xmlns:p="http://schemas.openxmlformats.org/presentationml/2006/main">
+<p:sld xmlns:a="http://schemas.openxmlformats.org/drawingml/2006/main" xmlns:p="http://schemas.openxmlformats.org/presentationml/2006/main" xmlns:r="http://schemas.openxmlformats.org/officeDocument/2006/relationships">
   <p:cSld>
     <p:spTree>
       <p:nvGrpSpPr>
@@ -7569,14 +7487,7 @@
         <p:cNvGrpSpPr/>
         <p:nvPr/>
       </p:nvGrpSpPr>
-      <p:grpSpPr>
-        <a:xfrm>
-          <a:off x="0" y="0"/>
-          <a:ext cx="0" cy="0"/>
-          <a:chOff x="0" y="0"/>
-          <a:chExt cx="0" cy="0"/>
-        </a:xfrm>
-      </p:grpSpPr>
+      <p:grpSpPr/>
       <p:sp>
         <p:nvSpPr>
           <p:cNvPr id="2" name="Rectangle 1"/>
@@ -7617,7 +7528,6 @@
           <a:lstStyle/>
           <a:p>
             <a:pPr algn="ctr"/>
-            <a:endParaRPr/>
           </a:p>
         </p:txBody>
       </p:sp>
@@ -7661,7 +7571,6 @@
           <a:lstStyle/>
           <a:p>
             <a:pPr algn="ctr"/>
-            <a:endParaRPr/>
           </a:p>
         </p:txBody>
       </p:sp>
@@ -7705,7 +7614,6 @@
           <a:lstStyle/>
           <a:p>
             <a:pPr algn="ctr"/>
-            <a:endParaRPr/>
           </a:p>
         </p:txBody>
       </p:sp>
@@ -7749,7 +7657,6 @@
           <a:lstStyle/>
           <a:p>
             <a:pPr algn="ctr"/>
-            <a:endParaRPr/>
           </a:p>
         </p:txBody>
       </p:sp>
@@ -7793,7 +7700,6 @@
           <a:lstStyle/>
           <a:p>
             <a:pPr algn="ctr"/>
-            <a:endParaRPr/>
           </a:p>
         </p:txBody>
       </p:sp>
@@ -7909,7 +7815,6 @@
           <a:lstStyle/>
           <a:p>
             <a:pPr algn="ctr"/>
-            <a:endParaRPr/>
           </a:p>
         </p:txBody>
       </p:sp>
@@ -7978,7 +7883,7 @@
                 </a:solidFill>
                 <a:latin typeface="Aptos"/>
               </a:rPr>
-              <a:t>69,062</a:t>
+              <a:t>71,382</a:t>
             </a:r>
           </a:p>
         </p:txBody>
@@ -8025,7 +7930,6 @@
           <a:lstStyle/>
           <a:p>
             <a:pPr algn="ctr"/>
-            <a:endParaRPr/>
           </a:p>
         </p:txBody>
       </p:sp>
@@ -8094,7 +7998,7 @@
                 </a:solidFill>
                 <a:latin typeface="Aptos"/>
               </a:rPr>
-              <a:t>93,779</a:t>
+              <a:t>96,784</a:t>
             </a:r>
           </a:p>
         </p:txBody>
@@ -8141,7 +8045,6 @@
           <a:lstStyle/>
           <a:p>
             <a:pPr algn="ctr"/>
-            <a:endParaRPr/>
           </a:p>
         </p:txBody>
       </p:sp>
@@ -8246,17 +8149,17 @@
                 <a:latin typeface="Cascadia Mono"/>
               </a:rPr>
               <a:t>LANGUAGE                 FILES   EFFECTIVE      TOTAL   SHARE
-Python                   206      44,868     62,701  65.0%
-JavaScript                24      10,366     13,096  15.0%
-Markdown                  11       7,887      9,908  11.4%
-CSS                        5       2,427      3,022   3.5%
+Python                   208      46,433     64,687  65.0%
+JavaScript                24      10,412     13,187  14.6%
+Markdown                  13       8,375     10,568  11.7%
+CSS                        5       2,644      3,286   3.7%
 Other text                 3         778        955   1.1%
 YAML                      59         753      1,709   1.1%
-HTML                       4         588        606   0.9%
+HTML                       4         592        610   0.8%
 PowerShell                 5         408        616   0.6%
 JavaScript module          1         323        390   0.5%
 Prompt template            2         272        341   0.4%
-JSON                       4         244        244   0.4%
+JSON                       4         244        244   0.3%
 Text                       4         115        134   0.2%
 Protocol Buffers           1          20         33   0.0%
 Batch                      1          13         24   0.0%</a:t>
@@ -8273,7 +8176,7 @@
 </file>
 
 <file path=ppt/slides/slide15.xml><?xml version="1.0" encoding="utf-8"?>
-<p:sld xmlns:a="http://schemas.openxmlformats.org/drawingml/2006/main" xmlns:r="http://schemas.openxmlformats.org/officeDocument/2006/relationships" xmlns:p="http://schemas.openxmlformats.org/presentationml/2006/main">
+<p:sld xmlns:a="http://schemas.openxmlformats.org/drawingml/2006/main" xmlns:p="http://schemas.openxmlformats.org/presentationml/2006/main" xmlns:r="http://schemas.openxmlformats.org/officeDocument/2006/relationships">
   <p:cSld>
     <p:spTree>
       <p:nvGrpSpPr>
@@ -8281,14 +8184,7 @@
         <p:cNvGrpSpPr/>
         <p:nvPr/>
       </p:nvGrpSpPr>
-      <p:grpSpPr>
-        <a:xfrm>
-          <a:off x="0" y="0"/>
-          <a:ext cx="0" cy="0"/>
-          <a:chOff x="0" y="0"/>
-          <a:chExt cx="0" cy="0"/>
-        </a:xfrm>
-      </p:grpSpPr>
+      <p:grpSpPr/>
       <p:sp>
         <p:nvSpPr>
           <p:cNvPr id="2" name="Rectangle 1"/>
@@ -8329,7 +8225,6 @@
           <a:lstStyle/>
           <a:p>
             <a:pPr algn="ctr"/>
-            <a:endParaRPr/>
           </a:p>
         </p:txBody>
       </p:sp>
@@ -8373,7 +8268,6 @@
           <a:lstStyle/>
           <a:p>
             <a:pPr algn="ctr"/>
-            <a:endParaRPr/>
           </a:p>
         </p:txBody>
       </p:sp>
@@ -8417,7 +8311,6 @@
           <a:lstStyle/>
           <a:p>
             <a:pPr algn="ctr"/>
-            <a:endParaRPr/>
           </a:p>
         </p:txBody>
       </p:sp>
@@ -8461,7 +8354,6 @@
           <a:lstStyle/>
           <a:p>
             <a:pPr algn="ctr"/>
-            <a:endParaRPr/>
           </a:p>
         </p:txBody>
       </p:sp>
@@ -8505,7 +8397,6 @@
           <a:lstStyle/>
           <a:p>
             <a:pPr algn="ctr"/>
-            <a:endParaRPr/>
           </a:p>
         </p:txBody>
       </p:sp>
@@ -8611,19 +8502,19 @@
               </a:rPr>
               <a:t>PATH                                                     LANGUAGE     EFFECTIVE   TOTAL
 Tlamatini/agent/views.py                                Python         5,862   8,411
-README.md                                               Markdown       3,409   4,282
+README.md                                               Markdown       3,550   4,471
 Tlamatini/agent/tools.py                                Python         1,841   2,483
 Tlamatini/agent/agents/flowcreator/agentic_skill.md     Markdown       1,694   1,889
+Tlamatini/agent/tests.py                                Python         1,574   1,927
 ...ini/agent/static/agent/css/agentic_control_panel.css CSS            1,551   2,018
-Tlamatini/agent/tests.py                                Python         1,364   1,638
 Tlamatini/agent/static/agent/js/acp-canvas-core.js      JavaScript     1,235   1,529
-Tlamatini/agent/consumers.py                            Python         1,079   1,286
+Tlamatini/agent/consumers.py                            Python         1,092   1,300
+Tlamatini/agent/doc_generation/complete_project_docs.py Python         1,040   1,191
 Tlamatini/agent/static/agent/js/acp-agent-connectors.js JavaScript     1,019   1,154
 Tlamatini/agent/static/agent/js/acp-control-buttons.js  JavaScript     1,000   1,301
+Tlamatini/agent/static/agent/css/agent_page.css         CSS              942   1,091
 Tlamatini/agent/static/agent/js/canvas_item_dialog.js   JavaScript       896   1,163
-Tlamatini/agent/agents/crawler/crawler.py               Python           881   1,261
-Tlamatini/agent/static/agent/js/agent_page_chat.js      JavaScript       798   1,066
-Tlamatini/agent/agents/parametrizer/parametrizer.py     Python           791   1,115</a:t>
+Tlamatini/agent/agents/crawler/crawler.py               Python           881   1,261</a:t>
             </a:r>
           </a:p>
         </p:txBody>
@@ -8637,7 +8528,7 @@
 </file>
 
 <file path=ppt/slides/slide16.xml><?xml version="1.0" encoding="utf-8"?>
-<p:sld xmlns:a="http://schemas.openxmlformats.org/drawingml/2006/main" xmlns:r="http://schemas.openxmlformats.org/officeDocument/2006/relationships" xmlns:p="http://schemas.openxmlformats.org/presentationml/2006/main">
+<p:sld xmlns:a="http://schemas.openxmlformats.org/drawingml/2006/main" xmlns:p="http://schemas.openxmlformats.org/presentationml/2006/main" xmlns:r="http://schemas.openxmlformats.org/officeDocument/2006/relationships">
   <p:cSld>
     <p:spTree>
       <p:nvGrpSpPr>
@@ -8645,14 +8536,7 @@
         <p:cNvGrpSpPr/>
         <p:nvPr/>
       </p:nvGrpSpPr>
-      <p:grpSpPr>
-        <a:xfrm>
-          <a:off x="0" y="0"/>
-          <a:ext cx="0" cy="0"/>
-          <a:chOff x="0" y="0"/>
-          <a:chExt cx="0" cy="0"/>
-        </a:xfrm>
-      </p:grpSpPr>
+      <p:grpSpPr/>
       <p:sp>
         <p:nvSpPr>
           <p:cNvPr id="2" name="Rectangle 1"/>
@@ -8693,7 +8577,6 @@
           <a:lstStyle/>
           <a:p>
             <a:pPr algn="ctr"/>
-            <a:endParaRPr/>
           </a:p>
         </p:txBody>
       </p:sp>
@@ -8737,7 +8620,6 @@
           <a:lstStyle/>
           <a:p>
             <a:pPr algn="ctr"/>
-            <a:endParaRPr/>
           </a:p>
         </p:txBody>
       </p:sp>
@@ -8781,7 +8663,6 @@
           <a:lstStyle/>
           <a:p>
             <a:pPr algn="ctr"/>
-            <a:endParaRPr/>
           </a:p>
         </p:txBody>
       </p:sp>
@@ -8825,7 +8706,6 @@
           <a:lstStyle/>
           <a:p>
             <a:pPr algn="ctr"/>
-            <a:endParaRPr/>
           </a:p>
         </p:txBody>
       </p:sp>
@@ -8869,7 +8749,6 @@
           <a:lstStyle/>
           <a:p>
             <a:pPr algn="ctr"/>
-            <a:endParaRPr/>
           </a:p>
         </p:txBody>
       </p:sp>
@@ -8985,7 +8864,6 @@
           <a:lstStyle/>
           <a:p>
             <a:pPr algn="ctr"/>
-            <a:endParaRPr/>
           </a:p>
         </p:txBody>
       </p:sp>
@@ -9029,7 +8907,6 @@
           <a:lstStyle/>
           <a:p>
             <a:pPr algn="ctr"/>
-            <a:endParaRPr/>
           </a:p>
         </p:txBody>
       </p:sp>
@@ -9085,7 +8962,7 @@
           <a:noFill/>
         </p:spPr>
         <p:txBody>
-          <a:bodyPr wrap="square" lIns="38100" tIns="25400" rIns="38100" bIns="25400" anchor="t">
+          <a:bodyPr wrap="square" anchor="t" lIns="38100" rIns="38100" tIns="25400" bIns="25400">
             <a:noAutofit/>
           </a:bodyPr>
           <a:lstStyle/>
@@ -9105,8 +8982,11 @@
               <a:rPr sz="1300" b="0" i="0">
                 <a:latin typeface="Calibri"/>
               </a:rPr>
-              <a:t>2026-04-17 | d7a8e66 | Update documentation with the laatest fixings, by angelahack1</a:t>
-            </a:r>
+              <a:t>2026-04-17 | 3b6eb8e | Way too improving the execution chain with now "Exec report"!!, by angelahack1</a:t>
+            </a:r>
+            <a:endParaRPr sz="1300" b="0" i="0">
+              <a:latin typeface="Calibri"/>
+            </a:endParaRPr>
           </a:p>
           <a:p>
             <a:pPr>
@@ -9124,8 +9004,11 @@
               <a:rPr sz="1300" b="0" i="0">
                 <a:latin typeface="Calibri"/>
               </a:rPr>
-              <a:t>2026-04-16 | 0249c76 | Improving multiturn, tested for installing assets, and added a new video, by angelahack1</a:t>
-            </a:r>
+              <a:t>2026-04-17 | d46ddbb | Fixing some drawbacks in frozen Tlamatini's runtime execution.</a:t>
+            </a:r>
+            <a:endParaRPr sz="1300" b="0" i="0">
+              <a:latin typeface="Calibri"/>
+            </a:endParaRPr>
           </a:p>
           <a:p>
             <a:pPr>
@@ -9143,8 +9026,11 @@
               <a:rPr sz="1300" b="0" i="0">
                 <a:latin typeface="Calibri"/>
               </a:rPr>
-              <a:t>2026-04-15 | 9abade4 | Adding video links to README.md, by angelahack1</a:t>
-            </a:r>
+              <a:t>2026-04-17 | 17d5760 | Updating to a more graphical documentation</a:t>
+            </a:r>
+            <a:endParaRPr sz="1300" b="0" i="0">
+              <a:latin typeface="Calibri"/>
+            </a:endParaRPr>
           </a:p>
           <a:p>
             <a:pPr>
@@ -9162,8 +9048,11 @@
               <a:rPr sz="1300" b="0" i="0">
                 <a:latin typeface="Calibri"/>
               </a:rPr>
-              <a:t>2026-04-15 | c678d64 | Just linting code, by angelahack1</a:t>
-            </a:r>
+              <a:t>2026-04-17 | d7a8e66 | Update documentation with the laatest fixings, by angelahack1</a:t>
+            </a:r>
+            <a:endParaRPr sz="1300" b="0" i="0">
+              <a:latin typeface="Calibri"/>
+            </a:endParaRPr>
           </a:p>
           <a:p>
             <a:pPr>
@@ -9181,8 +9070,11 @@
               <a:rPr sz="1300" b="0" i="0">
                 <a:latin typeface="Calibri"/>
               </a:rPr>
-              <a:t>2026-04-15 | 576fd61 | Adding a proper log file for the entire appllication (tlamatini.log), some linting, and updated the documentation, by angelahack1</a:t>
-            </a:r>
+              <a:t>2026-04-16 | 0249c76 | Improving multiturn, tested for installing assets, and added a new video, by angelahack1</a:t>
+            </a:r>
+            <a:endParaRPr sz="1300" b="0" i="0">
+              <a:latin typeface="Calibri"/>
+            </a:endParaRPr>
           </a:p>
           <a:p>
             <a:pPr>
@@ -9200,8 +9092,11 @@
               <a:rPr sz="1300" b="0" i="0">
                 <a:latin typeface="Calibri"/>
               </a:rPr>
-              <a:t>2026-04-15 | 12892f4 | Just linting some code, by angelahack1</a:t>
-            </a:r>
+              <a:t>2026-04-15 | 9abade4 | Adding video links to README.md, by angelahack1</a:t>
+            </a:r>
+            <a:endParaRPr sz="1300" b="0" i="0">
+              <a:latin typeface="Calibri"/>
+            </a:endParaRPr>
           </a:p>
         </p:txBody>
       </p:sp>
@@ -9214,7 +9109,7 @@
 </file>
 
 <file path=ppt/slides/slide17.xml><?xml version="1.0" encoding="utf-8"?>
-<p:sld xmlns:a="http://schemas.openxmlformats.org/drawingml/2006/main" xmlns:r="http://schemas.openxmlformats.org/officeDocument/2006/relationships" xmlns:p="http://schemas.openxmlformats.org/presentationml/2006/main">
+<p:sld xmlns:a="http://schemas.openxmlformats.org/drawingml/2006/main" xmlns:p="http://schemas.openxmlformats.org/presentationml/2006/main" xmlns:r="http://schemas.openxmlformats.org/officeDocument/2006/relationships">
   <p:cSld>
     <p:spTree>
       <p:nvGrpSpPr>
@@ -9222,14 +9117,7 @@
         <p:cNvGrpSpPr/>
         <p:nvPr/>
       </p:nvGrpSpPr>
-      <p:grpSpPr>
-        <a:xfrm>
-          <a:off x="0" y="0"/>
-          <a:ext cx="0" cy="0"/>
-          <a:chOff x="0" y="0"/>
-          <a:chExt cx="0" cy="0"/>
-        </a:xfrm>
-      </p:grpSpPr>
+      <p:grpSpPr/>
       <p:sp>
         <p:nvSpPr>
           <p:cNvPr id="2" name="Rectangle 1"/>
@@ -9270,7 +9158,6 @@
           <a:lstStyle/>
           <a:p>
             <a:pPr algn="ctr"/>
-            <a:endParaRPr/>
           </a:p>
         </p:txBody>
       </p:sp>
@@ -9314,7 +9201,6 @@
           <a:lstStyle/>
           <a:p>
             <a:pPr algn="ctr"/>
-            <a:endParaRPr/>
           </a:p>
         </p:txBody>
       </p:sp>
@@ -9358,7 +9244,6 @@
           <a:lstStyle/>
           <a:p>
             <a:pPr algn="ctr"/>
-            <a:endParaRPr/>
           </a:p>
         </p:txBody>
       </p:sp>
@@ -9402,7 +9287,6 @@
           <a:lstStyle/>
           <a:p>
             <a:pPr algn="ctr"/>
-            <a:endParaRPr/>
           </a:p>
         </p:txBody>
       </p:sp>
@@ -9446,7 +9330,6 @@
           <a:lstStyle/>
           <a:p>
             <a:pPr algn="ctr"/>
-            <a:endParaRPr/>
           </a:p>
         </p:txBody>
       </p:sp>
@@ -9480,7 +9363,7 @@
                 </a:solidFill>
                 <a:latin typeface="Aptos"/>
               </a:rPr>
-              <a:t>COMPLETE TRACKED REPOSITORY TREE</a:t>
+              <a:t>COMPLETE TRACKED FILE TREE, NO TRACKED FILE OMITTED</a:t>
             </a:r>
           </a:p>
         </p:txBody>
@@ -9515,7 +9398,7 @@
                 </a:solidFill>
                 <a:latin typeface="Aptos Display"/>
               </a:rPr>
-              <a:t>File Tree Appendix 1/14</a:t>
+              <a:t>Tracked File Tree Appendix 1/15</a:t>
             </a:r>
           </a:p>
         </p:txBody>
@@ -9578,9 +9461,9 @@
 |-- trigger_jenkins.py
 |-- uninstall.py
 |-- unregister_flw.ps1
-`-- Tlamatini/
-    |-- cat_art.py
-    |-- manage.py</a:t>
+|-- .codex/
+|   `-- skills/
+|       |-- full-project-pdf-dossier/</a:t>
             </a:r>
           </a:p>
         </p:txBody>
@@ -9594,7 +9477,7 @@
 </file>
 
 <file path=ppt/slides/slide18.xml><?xml version="1.0" encoding="utf-8"?>
-<p:sld xmlns:a="http://schemas.openxmlformats.org/drawingml/2006/main" xmlns:r="http://schemas.openxmlformats.org/officeDocument/2006/relationships" xmlns:p="http://schemas.openxmlformats.org/presentationml/2006/main">
+<p:sld xmlns:a="http://schemas.openxmlformats.org/drawingml/2006/main" xmlns:p="http://schemas.openxmlformats.org/presentationml/2006/main" xmlns:r="http://schemas.openxmlformats.org/officeDocument/2006/relationships">
   <p:cSld>
     <p:spTree>
       <p:nvGrpSpPr>
@@ -9602,14 +9485,7 @@
         <p:cNvGrpSpPr/>
         <p:nvPr/>
       </p:nvGrpSpPr>
-      <p:grpSpPr>
-        <a:xfrm>
-          <a:off x="0" y="0"/>
-          <a:ext cx="0" cy="0"/>
-          <a:chOff x="0" y="0"/>
-          <a:chExt cx="0" cy="0"/>
-        </a:xfrm>
-      </p:grpSpPr>
+      <p:grpSpPr/>
       <p:sp>
         <p:nvSpPr>
           <p:cNvPr id="2" name="Rectangle 1"/>
@@ -9650,7 +9526,6 @@
           <a:lstStyle/>
           <a:p>
             <a:pPr algn="ctr"/>
-            <a:endParaRPr/>
           </a:p>
         </p:txBody>
       </p:sp>
@@ -9694,7 +9569,6 @@
           <a:lstStyle/>
           <a:p>
             <a:pPr algn="ctr"/>
-            <a:endParaRPr/>
           </a:p>
         </p:txBody>
       </p:sp>
@@ -9738,7 +9612,6 @@
           <a:lstStyle/>
           <a:p>
             <a:pPr algn="ctr"/>
-            <a:endParaRPr/>
           </a:p>
         </p:txBody>
       </p:sp>
@@ -9782,7 +9655,6 @@
           <a:lstStyle/>
           <a:p>
             <a:pPr algn="ctr"/>
-            <a:endParaRPr/>
           </a:p>
         </p:txBody>
       </p:sp>
@@ -9826,7 +9698,6 @@
           <a:lstStyle/>
           <a:p>
             <a:pPr algn="ctr"/>
-            <a:endParaRPr/>
           </a:p>
         </p:txBody>
       </p:sp>
@@ -9860,7 +9731,7 @@
                 </a:solidFill>
                 <a:latin typeface="Aptos"/>
               </a:rPr>
-              <a:t>COMPLETE TRACKED REPOSITORY TREE</a:t>
+              <a:t>COMPLETE TRACKED FILE TREE, NO TRACKED FILE OMITTED</a:t>
             </a:r>
           </a:p>
         </p:txBody>
@@ -9895,7 +9766,7 @@
                 </a:solidFill>
                 <a:latin typeface="Aptos Display"/>
               </a:rPr>
-              <a:t>File Tree Appendix 2/14</a:t>
+              <a:t>Tracked File Tree Appendix 2/15</a:t>
             </a:r>
           </a:p>
         </p:txBody>
@@ -9930,7 +9801,15 @@
                 </a:solidFill>
                 <a:latin typeface="Cascadia Mono"/>
               </a:rPr>
-              <a:t>    |-- .agents/
+              <a:t>|       |   `-- SKILL.md
+|       `-- overlap-safe-pptx-dossier/
+|           `-- SKILL.md
+|-- pyinstaller_hooks/
+|   `-- hook-numpy.py
+`-- Tlamatini/
+    |-- cat_art.py
+    |-- manage.py
+    |-- .agents/
     |   `-- workflows/
     |       `-- create_new_agent.md
     |-- .mcps/
@@ -9952,15 +9831,7 @@
     |   |-- consumers.py
     |   |-- filesearch.proto
     |   |-- filesearch_pb2.py
-    |   |-- filesearch_pb2_grpc.py
-    |   |-- global_execution_planner.py
-    |   |-- global_state.py
-    |   |-- inet_determiner.py
-    |   |-- mcp_agent.py
-    |   |-- mcp_files_search_client.py
-    |   |-- mcp_files_search_server.py
-    |   |-- mcp_system_client.py
-    |   |-- mcp_system_server.py</a:t>
+    |   |-- filesearch_pb2_grpc.py</a:t>
             </a:r>
           </a:p>
         </p:txBody>
@@ -9974,7 +9845,7 @@
 </file>
 
 <file path=ppt/slides/slide19.xml><?xml version="1.0" encoding="utf-8"?>
-<p:sld xmlns:a="http://schemas.openxmlformats.org/drawingml/2006/main" xmlns:r="http://schemas.openxmlformats.org/officeDocument/2006/relationships" xmlns:p="http://schemas.openxmlformats.org/presentationml/2006/main">
+<p:sld xmlns:a="http://schemas.openxmlformats.org/drawingml/2006/main" xmlns:p="http://schemas.openxmlformats.org/presentationml/2006/main" xmlns:r="http://schemas.openxmlformats.org/officeDocument/2006/relationships">
   <p:cSld>
     <p:spTree>
       <p:nvGrpSpPr>
@@ -9982,14 +9853,7 @@
         <p:cNvGrpSpPr/>
         <p:nvPr/>
       </p:nvGrpSpPr>
-      <p:grpSpPr>
-        <a:xfrm>
-          <a:off x="0" y="0"/>
-          <a:ext cx="0" cy="0"/>
-          <a:chOff x="0" y="0"/>
-          <a:chExt cx="0" cy="0"/>
-        </a:xfrm>
-      </p:grpSpPr>
+      <p:grpSpPr/>
       <p:sp>
         <p:nvSpPr>
           <p:cNvPr id="2" name="Rectangle 1"/>
@@ -10030,7 +9894,6 @@
           <a:lstStyle/>
           <a:p>
             <a:pPr algn="ctr"/>
-            <a:endParaRPr/>
           </a:p>
         </p:txBody>
       </p:sp>
@@ -10074,7 +9937,6 @@
           <a:lstStyle/>
           <a:p>
             <a:pPr algn="ctr"/>
-            <a:endParaRPr/>
           </a:p>
         </p:txBody>
       </p:sp>
@@ -10118,7 +9980,6 @@
           <a:lstStyle/>
           <a:p>
             <a:pPr algn="ctr"/>
-            <a:endParaRPr/>
           </a:p>
         </p:txBody>
       </p:sp>
@@ -10162,7 +10023,6 @@
           <a:lstStyle/>
           <a:p>
             <a:pPr algn="ctr"/>
-            <a:endParaRPr/>
           </a:p>
         </p:txBody>
       </p:sp>
@@ -10206,7 +10066,6 @@
           <a:lstStyle/>
           <a:p>
             <a:pPr algn="ctr"/>
-            <a:endParaRPr/>
           </a:p>
         </p:txBody>
       </p:sp>
@@ -10240,7 +10099,7 @@
                 </a:solidFill>
                 <a:latin typeface="Aptos"/>
               </a:rPr>
-              <a:t>COMPLETE TRACKED REPOSITORY TREE</a:t>
+              <a:t>COMPLETE TRACKED FILE TREE, NO TRACKED FILE OMITTED</a:t>
             </a:r>
           </a:p>
         </p:txBody>
@@ -10275,7 +10134,7 @@
                 </a:solidFill>
                 <a:latin typeface="Aptos Display"/>
               </a:rPr>
-              <a:t>File Tree Appendix 3/14</a:t>
+              <a:t>Tracked File Tree Appendix 3/15</a:t>
             </a:r>
           </a:p>
         </p:txBody>
@@ -10310,7 +10169,15 @@
                 </a:solidFill>
                 <a:latin typeface="Cascadia Mono"/>
               </a:rPr>
-              <a:t>    |   |-- models.py
+              <a:t>    |   |-- global_execution_planner.py
+    |   |-- global_state.py
+    |   |-- inet_determiner.py
+    |   |-- mcp_agent.py
+    |   |-- mcp_files_search_client.py
+    |   |-- mcp_files_search_server.py
+    |   |-- mcp_system_client.py
+    |   |-- mcp_system_server.py
+    |   |-- models.py
     |   |-- path_guard.py
     |   |-- prompt.pmt
     |   |-- rag_enhancements.py
@@ -10332,15 +10199,7 @@
     |   |   |   `-- config.yaml
     |   |   |-- barrier/
     |   |   |   |-- barrier.py
-    |   |   |   |-- config.yaml
-    |   |   |   `-- test_barrier.py
-    |   |   |-- cleaner/
-    |   |   |   |-- __init__.py
-    |   |   |   |-- cleaner.py
-    |   |   |   `-- config.yaml
-    |   |   |-- counter/
-    |   |   |   |-- config.yaml
-    |   |   |   `-- counter.py</a:t>
+    |   |   |   |-- config.yaml</a:t>
             </a:r>
           </a:p>
         </p:txBody>
@@ -10354,7 +10213,7 @@
 </file>
 
 <file path=ppt/slides/slide2.xml><?xml version="1.0" encoding="utf-8"?>
-<p:sld xmlns:a="http://schemas.openxmlformats.org/drawingml/2006/main" xmlns:r="http://schemas.openxmlformats.org/officeDocument/2006/relationships" xmlns:p="http://schemas.openxmlformats.org/presentationml/2006/main">
+<p:sld xmlns:a="http://schemas.openxmlformats.org/drawingml/2006/main" xmlns:p="http://schemas.openxmlformats.org/presentationml/2006/main" xmlns:r="http://schemas.openxmlformats.org/officeDocument/2006/relationships">
   <p:cSld>
     <p:spTree>
       <p:nvGrpSpPr>
@@ -10362,14 +10221,7 @@
         <p:cNvGrpSpPr/>
         <p:nvPr/>
       </p:nvGrpSpPr>
-      <p:grpSpPr>
-        <a:xfrm>
-          <a:off x="0" y="0"/>
-          <a:ext cx="0" cy="0"/>
-          <a:chOff x="0" y="0"/>
-          <a:chExt cx="0" cy="0"/>
-        </a:xfrm>
-      </p:grpSpPr>
+      <p:grpSpPr/>
       <p:sp>
         <p:nvSpPr>
           <p:cNvPr id="2" name="Rectangle 1"/>
@@ -10410,7 +10262,6 @@
           <a:lstStyle/>
           <a:p>
             <a:pPr algn="ctr"/>
-            <a:endParaRPr/>
           </a:p>
         </p:txBody>
       </p:sp>
@@ -10454,7 +10305,6 @@
           <a:lstStyle/>
           <a:p>
             <a:pPr algn="ctr"/>
-            <a:endParaRPr/>
           </a:p>
         </p:txBody>
       </p:sp>
@@ -10498,7 +10348,6 @@
           <a:lstStyle/>
           <a:p>
             <a:pPr algn="ctr"/>
-            <a:endParaRPr/>
           </a:p>
         </p:txBody>
       </p:sp>
@@ -10542,7 +10391,6 @@
           <a:lstStyle/>
           <a:p>
             <a:pPr algn="ctr"/>
-            <a:endParaRPr/>
           </a:p>
         </p:txBody>
       </p:sp>
@@ -10586,7 +10434,6 @@
           <a:lstStyle/>
           <a:p>
             <a:pPr algn="ctr"/>
-            <a:endParaRPr/>
           </a:p>
         </p:txBody>
       </p:sp>
@@ -10702,7 +10549,6 @@
           <a:lstStyle/>
           <a:p>
             <a:pPr algn="ctr"/>
-            <a:endParaRPr/>
           </a:p>
         </p:txBody>
       </p:sp>
@@ -10746,7 +10592,6 @@
           <a:lstStyle/>
           <a:p>
             <a:pPr algn="ctr"/>
-            <a:endParaRPr/>
           </a:p>
         </p:txBody>
       </p:sp>
@@ -10802,7 +10647,7 @@
           <a:noFill/>
         </p:spPr>
         <p:txBody>
-          <a:bodyPr wrap="square" lIns="38100" tIns="25400" rIns="38100" bIns="25400" anchor="t">
+          <a:bodyPr wrap="square" anchor="t" lIns="38100" rIns="38100" tIns="25400" bIns="25400">
             <a:noAutofit/>
           </a:bodyPr>
           <a:lstStyle/>
@@ -10824,6 +10669,9 @@
               </a:rPr>
               <a:t>Tlamatini is a local-first AI developer assistant built with Django, Django Channels, LangChain, LangGraph, FAISS/BM25 retrieval, and a large in-repository agent application.</a:t>
             </a:r>
+            <a:endParaRPr sz="1600" b="0" i="0">
+              <a:latin typeface="Calibri"/>
+            </a:endParaRPr>
           </a:p>
           <a:p>
             <a:pPr>
@@ -10843,6 +10691,9 @@
               </a:rPr>
               <a:t>It combines a browser chat surface, a Retrieval-Augmented Generation stack, a Multi-Turn tool executor, MCP-backed context providers, wrapped chat-agent runtimes, and a visual Agentic Control Panel for workflow design.</a:t>
             </a:r>
+            <a:endParaRPr sz="1600" b="0" i="0">
+              <a:latin typeface="Calibri"/>
+            </a:endParaRPr>
           </a:p>
           <a:p>
             <a:pPr>
@@ -10862,6 +10713,9 @@
               </a:rPr>
               <a:t>The platform is designed for development operations: codebase analysis, file and directory context, command execution, Python execution, screenshots, web/search helpers, notifications, DevOps tools, local model operation, and Windows packaging.</a:t>
             </a:r>
+            <a:endParaRPr sz="1600" b="0" i="0">
+              <a:latin typeface="Calibri"/>
+            </a:endParaRPr>
           </a:p>
         </p:txBody>
       </p:sp>
@@ -10907,7 +10761,6 @@
           <a:lstStyle/>
           <a:p>
             <a:pPr algn="ctr"/>
-            <a:endParaRPr/>
           </a:p>
         </p:txBody>
       </p:sp>
@@ -10951,7 +10804,6 @@
           <a:lstStyle/>
           <a:p>
             <a:pPr algn="ctr"/>
-            <a:endParaRPr/>
           </a:p>
         </p:txBody>
       </p:sp>
@@ -11007,7 +10859,7 @@
           <a:noFill/>
         </p:spPr>
         <p:txBody>
-          <a:bodyPr wrap="square" lIns="38100" tIns="25400" rIns="38100" bIns="25400" anchor="t">
+          <a:bodyPr wrap="square" anchor="t" lIns="38100" rIns="38100" tIns="25400" bIns="25400">
             <a:noAutofit/>
           </a:bodyPr>
           <a:lstStyle/>
@@ -11029,6 +10881,9 @@
               </a:rPr>
               <a:t>Chat page at `/agent/` for context-grounded Q&amp;A, code generation, tool calls, and Multi-Turn execution.</a:t>
             </a:r>
+            <a:endParaRPr sz="1600" b="0" i="0">
+              <a:latin typeface="Calibri"/>
+            </a:endParaRPr>
           </a:p>
           <a:p>
             <a:pPr>
@@ -11048,6 +10903,9 @@
               </a:rPr>
               <a:t>Agentic Control Panel at `/agentic_control_panel/` for visual workflow design.</a:t>
             </a:r>
+            <a:endParaRPr sz="1600" b="0" i="0">
+              <a:latin typeface="Calibri"/>
+            </a:endParaRPr>
           </a:p>
           <a:p>
             <a:pPr>
@@ -11067,6 +10925,9 @@
               </a:rPr>
               <a:t>Django admin and config dialogs for MCPs, tools, agents, users, and persistent settings.</a:t>
             </a:r>
+            <a:endParaRPr sz="1600" b="0" i="0">
+              <a:latin typeface="Calibri"/>
+            </a:endParaRPr>
           </a:p>
         </p:txBody>
       </p:sp>
@@ -11079,7 +10940,7 @@
 </file>
 
 <file path=ppt/slides/slide20.xml><?xml version="1.0" encoding="utf-8"?>
-<p:sld xmlns:a="http://schemas.openxmlformats.org/drawingml/2006/main" xmlns:r="http://schemas.openxmlformats.org/officeDocument/2006/relationships" xmlns:p="http://schemas.openxmlformats.org/presentationml/2006/main">
+<p:sld xmlns:a="http://schemas.openxmlformats.org/drawingml/2006/main" xmlns:p="http://schemas.openxmlformats.org/presentationml/2006/main" xmlns:r="http://schemas.openxmlformats.org/officeDocument/2006/relationships">
   <p:cSld>
     <p:spTree>
       <p:nvGrpSpPr>
@@ -11087,14 +10948,7 @@
         <p:cNvGrpSpPr/>
         <p:nvPr/>
       </p:nvGrpSpPr>
-      <p:grpSpPr>
-        <a:xfrm>
-          <a:off x="0" y="0"/>
-          <a:ext cx="0" cy="0"/>
-          <a:chOff x="0" y="0"/>
-          <a:chExt cx="0" cy="0"/>
-        </a:xfrm>
-      </p:grpSpPr>
+      <p:grpSpPr/>
       <p:sp>
         <p:nvSpPr>
           <p:cNvPr id="2" name="Rectangle 1"/>
@@ -11135,7 +10989,6 @@
           <a:lstStyle/>
           <a:p>
             <a:pPr algn="ctr"/>
-            <a:endParaRPr/>
           </a:p>
         </p:txBody>
       </p:sp>
@@ -11179,7 +11032,6 @@
           <a:lstStyle/>
           <a:p>
             <a:pPr algn="ctr"/>
-            <a:endParaRPr/>
           </a:p>
         </p:txBody>
       </p:sp>
@@ -11223,7 +11075,6 @@
           <a:lstStyle/>
           <a:p>
             <a:pPr algn="ctr"/>
-            <a:endParaRPr/>
           </a:p>
         </p:txBody>
       </p:sp>
@@ -11267,7 +11118,6 @@
           <a:lstStyle/>
           <a:p>
             <a:pPr algn="ctr"/>
-            <a:endParaRPr/>
           </a:p>
         </p:txBody>
       </p:sp>
@@ -11311,7 +11161,6 @@
           <a:lstStyle/>
           <a:p>
             <a:pPr algn="ctr"/>
-            <a:endParaRPr/>
           </a:p>
         </p:txBody>
       </p:sp>
@@ -11345,7 +11194,7 @@
                 </a:solidFill>
                 <a:latin typeface="Aptos"/>
               </a:rPr>
-              <a:t>COMPLETE TRACKED REPOSITORY TREE</a:t>
+              <a:t>COMPLETE TRACKED FILE TREE, NO TRACKED FILE OMITTED</a:t>
             </a:r>
           </a:p>
         </p:txBody>
@@ -11380,7 +11229,7 @@
                 </a:solidFill>
                 <a:latin typeface="Aptos Display"/>
               </a:rPr>
-              <a:t>File Tree Appendix 4/14</a:t>
+              <a:t>Tracked File Tree Appendix 4/15</a:t>
             </a:r>
           </a:p>
         </p:txBody>
@@ -11415,7 +11264,15 @@
                 </a:solidFill>
                 <a:latin typeface="Cascadia Mono"/>
               </a:rPr>
-              <a:t>    |   |   |-- crawler/
+              <a:t>    |   |   |   `-- test_barrier.py
+    |   |   |-- cleaner/
+    |   |   |   |-- __init__.py
+    |   |   |   |-- cleaner.py
+    |   |   |   `-- config.yaml
+    |   |   |-- counter/
+    |   |   |   |-- config.yaml
+    |   |   |   `-- counter.py
+    |   |   |-- crawler/
     |   |   |   |-- config.yaml
     |   |   |   `-- crawler.py
     |   |   |-- croner/
@@ -11437,15 +11294,7 @@
     |   |   |   |-- config.yaml
     |   |   |   `-- executer.py
     |   |   |-- file_creator/
-    |   |   |   |-- config.yaml
-    |   |   |   `-- file_creator.py
-    |   |   |-- file_extractor/
-    |   |   |   |-- config.yaml
-    |   |   |   `-- file_extractor.py
-    |   |   |-- file_interpreter/
-    |   |   |   |-- config.yaml
-    |   |   |   `-- file_interpreter.py
-    |   |   |-- flowbacker/</a:t>
+    |   |   |   |-- config.yaml</a:t>
             </a:r>
           </a:p>
         </p:txBody>
@@ -11459,7 +11308,7 @@
 </file>
 
 <file path=ppt/slides/slide21.xml><?xml version="1.0" encoding="utf-8"?>
-<p:sld xmlns:a="http://schemas.openxmlformats.org/drawingml/2006/main" xmlns:r="http://schemas.openxmlformats.org/officeDocument/2006/relationships" xmlns:p="http://schemas.openxmlformats.org/presentationml/2006/main">
+<p:sld xmlns:a="http://schemas.openxmlformats.org/drawingml/2006/main" xmlns:p="http://schemas.openxmlformats.org/presentationml/2006/main" xmlns:r="http://schemas.openxmlformats.org/officeDocument/2006/relationships">
   <p:cSld>
     <p:spTree>
       <p:nvGrpSpPr>
@@ -11467,14 +11316,7 @@
         <p:cNvGrpSpPr/>
         <p:nvPr/>
       </p:nvGrpSpPr>
-      <p:grpSpPr>
-        <a:xfrm>
-          <a:off x="0" y="0"/>
-          <a:ext cx="0" cy="0"/>
-          <a:chOff x="0" y="0"/>
-          <a:chExt cx="0" cy="0"/>
-        </a:xfrm>
-      </p:grpSpPr>
+      <p:grpSpPr/>
       <p:sp>
         <p:nvSpPr>
           <p:cNvPr id="2" name="Rectangle 1"/>
@@ -11515,7 +11357,6 @@
           <a:lstStyle/>
           <a:p>
             <a:pPr algn="ctr"/>
-            <a:endParaRPr/>
           </a:p>
         </p:txBody>
       </p:sp>
@@ -11559,7 +11400,6 @@
           <a:lstStyle/>
           <a:p>
             <a:pPr algn="ctr"/>
-            <a:endParaRPr/>
           </a:p>
         </p:txBody>
       </p:sp>
@@ -11603,7 +11443,6 @@
           <a:lstStyle/>
           <a:p>
             <a:pPr algn="ctr"/>
-            <a:endParaRPr/>
           </a:p>
         </p:txBody>
       </p:sp>
@@ -11647,7 +11486,6 @@
           <a:lstStyle/>
           <a:p>
             <a:pPr algn="ctr"/>
-            <a:endParaRPr/>
           </a:p>
         </p:txBody>
       </p:sp>
@@ -11691,7 +11529,6 @@
           <a:lstStyle/>
           <a:p>
             <a:pPr algn="ctr"/>
-            <a:endParaRPr/>
           </a:p>
         </p:txBody>
       </p:sp>
@@ -11725,7 +11562,7 @@
                 </a:solidFill>
                 <a:latin typeface="Aptos"/>
               </a:rPr>
-              <a:t>COMPLETE TRACKED REPOSITORY TREE</a:t>
+              <a:t>COMPLETE TRACKED FILE TREE, NO TRACKED FILE OMITTED</a:t>
             </a:r>
           </a:p>
         </p:txBody>
@@ -11760,7 +11597,7 @@
                 </a:solidFill>
                 <a:latin typeface="Aptos Display"/>
               </a:rPr>
-              <a:t>File Tree Appendix 5/14</a:t>
+              <a:t>Tracked File Tree Appendix 5/15</a:t>
             </a:r>
           </a:p>
         </p:txBody>
@@ -11795,7 +11632,15 @@
                 </a:solidFill>
                 <a:latin typeface="Cascadia Mono"/>
               </a:rPr>
-              <a:t>    |   |   |   |-- config.yaml
+              <a:t>    |   |   |   `-- file_creator.py
+    |   |   |-- file_extractor/
+    |   |   |   |-- config.yaml
+    |   |   |   `-- file_extractor.py
+    |   |   |-- file_interpreter/
+    |   |   |   |-- config.yaml
+    |   |   |   `-- file_interpreter.py
+    |   |   |-- flowbacker/
+    |   |   |   |-- config.yaml
     |   |   |   `-- flowbacker.py
     |   |   |-- flowcreator/
     |   |   |   |-- agentic_skill.md
@@ -11817,15 +11662,7 @@
     |   |   |   |-- config.yaml
     |   |   |   |-- gatewayer.md
     |   |   |   |-- gatewayer.py
-    |   |   |   `-- gatewayer_explanation.md
-    |   |   |-- gitter/
-    |   |   |   |-- config.yaml
-    |   |   |   `-- gitter.py
-    |   |   |-- googler/
-    |   |   |   |-- config.yaml
-    |   |   |   `-- googler.py
-    |   |   |-- image_interpreter/
-    |   |   |   |-- config.yaml</a:t>
+    |   |   |   `-- gatewayer_explanation.md</a:t>
             </a:r>
           </a:p>
         </p:txBody>
@@ -11839,7 +11676,7 @@
 </file>
 
 <file path=ppt/slides/slide22.xml><?xml version="1.0" encoding="utf-8"?>
-<p:sld xmlns:a="http://schemas.openxmlformats.org/drawingml/2006/main" xmlns:r="http://schemas.openxmlformats.org/officeDocument/2006/relationships" xmlns:p="http://schemas.openxmlformats.org/presentationml/2006/main">
+<p:sld xmlns:a="http://schemas.openxmlformats.org/drawingml/2006/main" xmlns:p="http://schemas.openxmlformats.org/presentationml/2006/main" xmlns:r="http://schemas.openxmlformats.org/officeDocument/2006/relationships">
   <p:cSld>
     <p:spTree>
       <p:nvGrpSpPr>
@@ -11847,14 +11684,7 @@
         <p:cNvGrpSpPr/>
         <p:nvPr/>
       </p:nvGrpSpPr>
-      <p:grpSpPr>
-        <a:xfrm>
-          <a:off x="0" y="0"/>
-          <a:ext cx="0" cy="0"/>
-          <a:chOff x="0" y="0"/>
-          <a:chExt cx="0" cy="0"/>
-        </a:xfrm>
-      </p:grpSpPr>
+      <p:grpSpPr/>
       <p:sp>
         <p:nvSpPr>
           <p:cNvPr id="2" name="Rectangle 1"/>
@@ -11895,7 +11725,6 @@
           <a:lstStyle/>
           <a:p>
             <a:pPr algn="ctr"/>
-            <a:endParaRPr/>
           </a:p>
         </p:txBody>
       </p:sp>
@@ -11939,7 +11768,6 @@
           <a:lstStyle/>
           <a:p>
             <a:pPr algn="ctr"/>
-            <a:endParaRPr/>
           </a:p>
         </p:txBody>
       </p:sp>
@@ -11983,7 +11811,6 @@
           <a:lstStyle/>
           <a:p>
             <a:pPr algn="ctr"/>
-            <a:endParaRPr/>
           </a:p>
         </p:txBody>
       </p:sp>
@@ -12027,7 +11854,6 @@
           <a:lstStyle/>
           <a:p>
             <a:pPr algn="ctr"/>
-            <a:endParaRPr/>
           </a:p>
         </p:txBody>
       </p:sp>
@@ -12071,7 +11897,6 @@
           <a:lstStyle/>
           <a:p>
             <a:pPr algn="ctr"/>
-            <a:endParaRPr/>
           </a:p>
         </p:txBody>
       </p:sp>
@@ -12105,7 +11930,7 @@
                 </a:solidFill>
                 <a:latin typeface="Aptos"/>
               </a:rPr>
-              <a:t>COMPLETE TRACKED REPOSITORY TREE</a:t>
+              <a:t>COMPLETE TRACKED FILE TREE, NO TRACKED FILE OMITTED</a:t>
             </a:r>
           </a:p>
         </p:txBody>
@@ -12140,7 +11965,7 @@
                 </a:solidFill>
                 <a:latin typeface="Aptos Display"/>
               </a:rPr>
-              <a:t>File Tree Appendix 6/14</a:t>
+              <a:t>Tracked File Tree Appendix 6/15</a:t>
             </a:r>
           </a:p>
         </p:txBody>
@@ -12175,7 +12000,15 @@
                 </a:solidFill>
                 <a:latin typeface="Cascadia Mono"/>
               </a:rPr>
-              <a:t>    |   |   |   `-- image_interpreter.py
+              <a:t>    |   |   |-- gitter/
+    |   |   |   |-- config.yaml
+    |   |   |   `-- gitter.py
+    |   |   |-- googler/
+    |   |   |   |-- config.yaml
+    |   |   |   `-- googler.py
+    |   |   |-- image_interpreter/
+    |   |   |   |-- config.yaml
+    |   |   |   `-- image_interpreter.py
     |   |   |-- j_decompiler/
     |   |   |   |-- config.yaml
     |   |   |   `-- j_decompiler.py
@@ -12197,15 +12030,7 @@
     |   |   |-- kyber_keygen/
     |   |   |   |-- config.yaml
     |   |   |   `-- kyber_keygen.py
-    |   |   |-- mongoxer/
-    |   |   |   |-- config.yaml
-    |   |   |   `-- mongoxer.py
-    |   |   |-- monitor_log/
-    |   |   |   |-- config.yaml
-    |   |   |   `-- monitor_log.py
-    |   |   |-- monitor_netstat/
-    |   |   |   |-- config.yaml
-    |   |   |   `-- monitor_netstat.py</a:t>
+    |   |   |-- mongoxer/</a:t>
             </a:r>
           </a:p>
         </p:txBody>
@@ -12219,7 +12044,7 @@
 </file>
 
 <file path=ppt/slides/slide23.xml><?xml version="1.0" encoding="utf-8"?>
-<p:sld xmlns:a="http://schemas.openxmlformats.org/drawingml/2006/main" xmlns:r="http://schemas.openxmlformats.org/officeDocument/2006/relationships" xmlns:p="http://schemas.openxmlformats.org/presentationml/2006/main">
+<p:sld xmlns:a="http://schemas.openxmlformats.org/drawingml/2006/main" xmlns:p="http://schemas.openxmlformats.org/presentationml/2006/main" xmlns:r="http://schemas.openxmlformats.org/officeDocument/2006/relationships">
   <p:cSld>
     <p:spTree>
       <p:nvGrpSpPr>
@@ -12227,14 +12052,7 @@
         <p:cNvGrpSpPr/>
         <p:nvPr/>
       </p:nvGrpSpPr>
-      <p:grpSpPr>
-        <a:xfrm>
-          <a:off x="0" y="0"/>
-          <a:ext cx="0" cy="0"/>
-          <a:chOff x="0" y="0"/>
-          <a:chExt cx="0" cy="0"/>
-        </a:xfrm>
-      </p:grpSpPr>
+      <p:grpSpPr/>
       <p:sp>
         <p:nvSpPr>
           <p:cNvPr id="2" name="Rectangle 1"/>
@@ -12275,7 +12093,6 @@
           <a:lstStyle/>
           <a:p>
             <a:pPr algn="ctr"/>
-            <a:endParaRPr/>
           </a:p>
         </p:txBody>
       </p:sp>
@@ -12319,7 +12136,6 @@
           <a:lstStyle/>
           <a:p>
             <a:pPr algn="ctr"/>
-            <a:endParaRPr/>
           </a:p>
         </p:txBody>
       </p:sp>
@@ -12363,7 +12179,6 @@
           <a:lstStyle/>
           <a:p>
             <a:pPr algn="ctr"/>
-            <a:endParaRPr/>
           </a:p>
         </p:txBody>
       </p:sp>
@@ -12407,7 +12222,6 @@
           <a:lstStyle/>
           <a:p>
             <a:pPr algn="ctr"/>
-            <a:endParaRPr/>
           </a:p>
         </p:txBody>
       </p:sp>
@@ -12451,7 +12265,6 @@
           <a:lstStyle/>
           <a:p>
             <a:pPr algn="ctr"/>
-            <a:endParaRPr/>
           </a:p>
         </p:txBody>
       </p:sp>
@@ -12485,7 +12298,7 @@
                 </a:solidFill>
                 <a:latin typeface="Aptos"/>
               </a:rPr>
-              <a:t>COMPLETE TRACKED REPOSITORY TREE</a:t>
+              <a:t>COMPLETE TRACKED FILE TREE, NO TRACKED FILE OMITTED</a:t>
             </a:r>
           </a:p>
         </p:txBody>
@@ -12520,7 +12333,7 @@
                 </a:solidFill>
                 <a:latin typeface="Aptos Display"/>
               </a:rPr>
-              <a:t>File Tree Appendix 7/14</a:t>
+              <a:t>Tracked File Tree Appendix 7/15</a:t>
             </a:r>
           </a:p>
         </p:txBody>
@@ -12555,7 +12368,15 @@
                 </a:solidFill>
                 <a:latin typeface="Cascadia Mono"/>
               </a:rPr>
-              <a:t>    |   |   |-- mouser/
+              <a:t>    |   |   |   |-- config.yaml
+    |   |   |   `-- mongoxer.py
+    |   |   |-- monitor_log/
+    |   |   |   |-- config.yaml
+    |   |   |   `-- monitor_log.py
+    |   |   |-- monitor_netstat/
+    |   |   |   |-- config.yaml
+    |   |   |   `-- monitor_netstat.py
+    |   |   |-- mouser/
     |   |   |   |-- config.yaml
     |   |   |   `-- mouser.py
     |   |   |-- mover/
@@ -12577,15 +12398,7 @@
     |   |   |   |-- config.yaml
     |   |   |   `-- parametrizer.py
     |   |   |-- prompter/
-    |   |   |   |-- config.yaml
-    |   |   |   `-- prompter.py
-    |   |   |-- pser/
-    |   |   |   |-- config.yaml
-    |   |   |   `-- pser.py
-    |   |   |-- pythonxer/
-    |   |   |   |-- config.yaml
-    |   |   |   `-- pythonxer.py
-    |   |   |-- raiser/</a:t>
+    |   |   |   |-- config.yaml</a:t>
             </a:r>
           </a:p>
         </p:txBody>
@@ -12599,7 +12412,7 @@
 </file>
 
 <file path=ppt/slides/slide24.xml><?xml version="1.0" encoding="utf-8"?>
-<p:sld xmlns:a="http://schemas.openxmlformats.org/drawingml/2006/main" xmlns:r="http://schemas.openxmlformats.org/officeDocument/2006/relationships" xmlns:p="http://schemas.openxmlformats.org/presentationml/2006/main">
+<p:sld xmlns:a="http://schemas.openxmlformats.org/drawingml/2006/main" xmlns:p="http://schemas.openxmlformats.org/presentationml/2006/main" xmlns:r="http://schemas.openxmlformats.org/officeDocument/2006/relationships">
   <p:cSld>
     <p:spTree>
       <p:nvGrpSpPr>
@@ -12607,14 +12420,7 @@
         <p:cNvGrpSpPr/>
         <p:nvPr/>
       </p:nvGrpSpPr>
-      <p:grpSpPr>
-        <a:xfrm>
-          <a:off x="0" y="0"/>
-          <a:ext cx="0" cy="0"/>
-          <a:chOff x="0" y="0"/>
-          <a:chExt cx="0" cy="0"/>
-        </a:xfrm>
-      </p:grpSpPr>
+      <p:grpSpPr/>
       <p:sp>
         <p:nvSpPr>
           <p:cNvPr id="2" name="Rectangle 1"/>
@@ -12655,7 +12461,6 @@
           <a:lstStyle/>
           <a:p>
             <a:pPr algn="ctr"/>
-            <a:endParaRPr/>
           </a:p>
         </p:txBody>
       </p:sp>
@@ -12699,7 +12504,6 @@
           <a:lstStyle/>
           <a:p>
             <a:pPr algn="ctr"/>
-            <a:endParaRPr/>
           </a:p>
         </p:txBody>
       </p:sp>
@@ -12743,7 +12547,6 @@
           <a:lstStyle/>
           <a:p>
             <a:pPr algn="ctr"/>
-            <a:endParaRPr/>
           </a:p>
         </p:txBody>
       </p:sp>
@@ -12787,7 +12590,6 @@
           <a:lstStyle/>
           <a:p>
             <a:pPr algn="ctr"/>
-            <a:endParaRPr/>
           </a:p>
         </p:txBody>
       </p:sp>
@@ -12831,7 +12633,6 @@
           <a:lstStyle/>
           <a:p>
             <a:pPr algn="ctr"/>
-            <a:endParaRPr/>
           </a:p>
         </p:txBody>
       </p:sp>
@@ -12865,7 +12666,7 @@
                 </a:solidFill>
                 <a:latin typeface="Aptos"/>
               </a:rPr>
-              <a:t>COMPLETE TRACKED REPOSITORY TREE</a:t>
+              <a:t>COMPLETE TRACKED FILE TREE, NO TRACKED FILE OMITTED</a:t>
             </a:r>
           </a:p>
         </p:txBody>
@@ -12900,7 +12701,7 @@
                 </a:solidFill>
                 <a:latin typeface="Aptos Display"/>
               </a:rPr>
-              <a:t>File Tree Appendix 8/14</a:t>
+              <a:t>Tracked File Tree Appendix 8/15</a:t>
             </a:r>
           </a:p>
         </p:txBody>
@@ -12935,7 +12736,15 @@
                 </a:solidFill>
                 <a:latin typeface="Cascadia Mono"/>
               </a:rPr>
-              <a:t>    |   |   |   |-- config.yaml
+              <a:t>    |   |   |   `-- prompter.py
+    |   |   |-- pser/
+    |   |   |   |-- config.yaml
+    |   |   |   `-- pser.py
+    |   |   |-- pythonxer/
+    |   |   |   |-- config.yaml
+    |   |   |   `-- pythonxer.py
+    |   |   |-- raiser/
+    |   |   |   |-- config.yaml
     |   |   |   `-- raiser.py
     |   |   |-- recmailer/
     |   |   |   |-- config.yaml
@@ -12957,15 +12766,7 @@
     |   |   |   `-- ssher.py
     |   |   |-- starter/
     |   |   |   |-- config.yaml
-    |   |   |   `-- starter.py
-    |   |   |-- stopper/
-    |   |   |   |-- config.yaml
-    |   |   |   `-- stopper.py
-    |   |   |-- summarizer/
-    |   |   |   |-- config.yaml
-    |   |   |   `-- summarizer.py
-    |   |   |-- telegramer/
-    |   |   |   |-- config.yaml</a:t>
+    |   |   |   `-- starter.py</a:t>
             </a:r>
           </a:p>
         </p:txBody>
@@ -12979,7 +12780,7 @@
 </file>
 
 <file path=ppt/slides/slide25.xml><?xml version="1.0" encoding="utf-8"?>
-<p:sld xmlns:a="http://schemas.openxmlformats.org/drawingml/2006/main" xmlns:r="http://schemas.openxmlformats.org/officeDocument/2006/relationships" xmlns:p="http://schemas.openxmlformats.org/presentationml/2006/main">
+<p:sld xmlns:a="http://schemas.openxmlformats.org/drawingml/2006/main" xmlns:p="http://schemas.openxmlformats.org/presentationml/2006/main" xmlns:r="http://schemas.openxmlformats.org/officeDocument/2006/relationships">
   <p:cSld>
     <p:spTree>
       <p:nvGrpSpPr>
@@ -12987,14 +12788,7 @@
         <p:cNvGrpSpPr/>
         <p:nvPr/>
       </p:nvGrpSpPr>
-      <p:grpSpPr>
-        <a:xfrm>
-          <a:off x="0" y="0"/>
-          <a:ext cx="0" cy="0"/>
-          <a:chOff x="0" y="0"/>
-          <a:chExt cx="0" cy="0"/>
-        </a:xfrm>
-      </p:grpSpPr>
+      <p:grpSpPr/>
       <p:sp>
         <p:nvSpPr>
           <p:cNvPr id="2" name="Rectangle 1"/>
@@ -13035,7 +12829,6 @@
           <a:lstStyle/>
           <a:p>
             <a:pPr algn="ctr"/>
-            <a:endParaRPr/>
           </a:p>
         </p:txBody>
       </p:sp>
@@ -13079,7 +12872,6 @@
           <a:lstStyle/>
           <a:p>
             <a:pPr algn="ctr"/>
-            <a:endParaRPr/>
           </a:p>
         </p:txBody>
       </p:sp>
@@ -13123,7 +12915,6 @@
           <a:lstStyle/>
           <a:p>
             <a:pPr algn="ctr"/>
-            <a:endParaRPr/>
           </a:p>
         </p:txBody>
       </p:sp>
@@ -13167,7 +12958,6 @@
           <a:lstStyle/>
           <a:p>
             <a:pPr algn="ctr"/>
-            <a:endParaRPr/>
           </a:p>
         </p:txBody>
       </p:sp>
@@ -13211,7 +13001,6 @@
           <a:lstStyle/>
           <a:p>
             <a:pPr algn="ctr"/>
-            <a:endParaRPr/>
           </a:p>
         </p:txBody>
       </p:sp>
@@ -13245,7 +13034,7 @@
                 </a:solidFill>
                 <a:latin typeface="Aptos"/>
               </a:rPr>
-              <a:t>COMPLETE TRACKED REPOSITORY TREE</a:t>
+              <a:t>COMPLETE TRACKED FILE TREE, NO TRACKED FILE OMITTED</a:t>
             </a:r>
           </a:p>
         </p:txBody>
@@ -13280,7 +13069,7 @@
                 </a:solidFill>
                 <a:latin typeface="Aptos Display"/>
               </a:rPr>
-              <a:t>File Tree Appendix 9/14</a:t>
+              <a:t>Tracked File Tree Appendix 9/15</a:t>
             </a:r>
           </a:p>
         </p:txBody>
@@ -13315,7 +13104,15 @@
                 </a:solidFill>
                 <a:latin typeface="Cascadia Mono"/>
               </a:rPr>
-              <a:t>    |   |   |   `-- telegramer.py
+              <a:t>    |   |   |-- stopper/
+    |   |   |   |-- config.yaml
+    |   |   |   `-- stopper.py
+    |   |   |-- summarizer/
+    |   |   |   |-- config.yaml
+    |   |   |   `-- summarizer.py
+    |   |   |-- telegramer/
+    |   |   |   |-- config.yaml
+    |   |   |   `-- telegramer.py
     |   |   |-- telegramrx/
     |   |   |   |-- config.yaml
     |   |   |   `-- telegramrx.py
@@ -13323,6 +13120,7 @@
     |   |       |-- config.yaml
     |   |       `-- whatsapper.py
     |   |-- doc_generation/
+    |   |   |-- complete_project_docs.py
     |   |   |-- mardown_to_pdf.py
     |   |   |-- refresh_project_docs.py
     |   |   `-- test_output.pdf
@@ -13336,16 +13134,7 @@
     |   |   `-- screenshot.py
     |   |-- management/
     |   |   |-- __init__.py
-    |   |   `-- commands/
-    |   |       `-- startserver.py
-    |   |-- migrations/
-    |   |   |-- 0001_initial.py
-    |   |   |-- 0002_populate_db.py
-    |   |   |-- 0003_add_cleaner.py
-    |   |   |-- 0004_add_deleter.py
-    |   |   |-- 0005_add_executer.py
-    |   |   |-- 0006_add_notifier.py
-    |   |   |-- 0007_add_stopper.py</a:t>
+    |   |   `-- commands/</a:t>
             </a:r>
           </a:p>
         </p:txBody>
@@ -13359,7 +13148,7 @@
 </file>
 
 <file path=ppt/slides/slide26.xml><?xml version="1.0" encoding="utf-8"?>
-<p:sld xmlns:a="http://schemas.openxmlformats.org/drawingml/2006/main" xmlns:r="http://schemas.openxmlformats.org/officeDocument/2006/relationships" xmlns:p="http://schemas.openxmlformats.org/presentationml/2006/main">
+<p:sld xmlns:a="http://schemas.openxmlformats.org/drawingml/2006/main" xmlns:p="http://schemas.openxmlformats.org/presentationml/2006/main" xmlns:r="http://schemas.openxmlformats.org/officeDocument/2006/relationships">
   <p:cSld>
     <p:spTree>
       <p:nvGrpSpPr>
@@ -13367,14 +13156,7 @@
         <p:cNvGrpSpPr/>
         <p:nvPr/>
       </p:nvGrpSpPr>
-      <p:grpSpPr>
-        <a:xfrm>
-          <a:off x="0" y="0"/>
-          <a:ext cx="0" cy="0"/>
-          <a:chOff x="0" y="0"/>
-          <a:chExt cx="0" cy="0"/>
-        </a:xfrm>
-      </p:grpSpPr>
+      <p:grpSpPr/>
       <p:sp>
         <p:nvSpPr>
           <p:cNvPr id="2" name="Rectangle 1"/>
@@ -13415,7 +13197,6 @@
           <a:lstStyle/>
           <a:p>
             <a:pPr algn="ctr"/>
-            <a:endParaRPr/>
           </a:p>
         </p:txBody>
       </p:sp>
@@ -13459,7 +13240,6 @@
           <a:lstStyle/>
           <a:p>
             <a:pPr algn="ctr"/>
-            <a:endParaRPr/>
           </a:p>
         </p:txBody>
       </p:sp>
@@ -13503,7 +13283,6 @@
           <a:lstStyle/>
           <a:p>
             <a:pPr algn="ctr"/>
-            <a:endParaRPr/>
           </a:p>
         </p:txBody>
       </p:sp>
@@ -13547,7 +13326,6 @@
           <a:lstStyle/>
           <a:p>
             <a:pPr algn="ctr"/>
-            <a:endParaRPr/>
           </a:p>
         </p:txBody>
       </p:sp>
@@ -13591,7 +13369,6 @@
           <a:lstStyle/>
           <a:p>
             <a:pPr algn="ctr"/>
-            <a:endParaRPr/>
           </a:p>
         </p:txBody>
       </p:sp>
@@ -13625,7 +13402,7 @@
                 </a:solidFill>
                 <a:latin typeface="Aptos"/>
               </a:rPr>
-              <a:t>COMPLETE TRACKED REPOSITORY TREE</a:t>
+              <a:t>COMPLETE TRACKED FILE TREE, NO TRACKED FILE OMITTED</a:t>
             </a:r>
           </a:p>
         </p:txBody>
@@ -13660,7 +13437,7 @@
                 </a:solidFill>
                 <a:latin typeface="Aptos Display"/>
               </a:rPr>
-              <a:t>File Tree Appendix 10/14</a:t>
+              <a:t>Tracked File Tree Appendix 10/15</a:t>
             </a:r>
           </a:p>
         </p:txBody>
@@ -13695,7 +13472,16 @@
                 </a:solidFill>
                 <a:latin typeface="Cascadia Mono"/>
               </a:rPr>
-              <a:t>    |   |   |-- 0008_add_recmailer.py
+              <a:t>    |   |       `-- startserver.py
+    |   |-- migrations/
+    |   |   |-- 0001_initial.py
+    |   |   |-- 0002_populate_db.py
+    |   |   |-- 0003_add_cleaner.py
+    |   |   |-- 0004_add_deleter.py
+    |   |   |-- 0005_add_executer.py
+    |   |   |-- 0006_add_notifier.py
+    |   |   |-- 0007_add_stopper.py
+    |   |   |-- 0008_add_recmailer.py
     |   |   |-- 0009_add_whatsapper.py
     |   |   |-- 0010_add_pythonxer.py
     |   |   |-- 0011_add_asker.py
@@ -13716,16 +13502,7 @@
     |   |   |-- 0026_repopulate_all_agents.py
     |   |   |-- 0027_add_sqler.py
     |   |   |-- 0028_repopulate_all_agents.py
-    |   |   |-- 0029_add_prompter.py
-    |   |   |-- 0030_repopulate_all_agents.py
-    |   |   |-- 0031_add_flowcreator.py
-    |   |   |-- 0032_repopulate_all_agents.py
-    |   |   |-- 0033_add_gitter.py
-    |   |   |-- 0034_add_dockerer.py
-    |   |   |-- 0035_add_pser.py
-    |   |   |-- 0036_add_kuberneter.py
-    |   |   |-- 0037_add_apirer.py
-    |   |   |-- 0038_add_jenkinser.py</a:t>
+    |   |   |-- 0029_add_prompter.py</a:t>
             </a:r>
           </a:p>
         </p:txBody>
@@ -13739,7 +13516,7 @@
 </file>
 
 <file path=ppt/slides/slide27.xml><?xml version="1.0" encoding="utf-8"?>
-<p:sld xmlns:a="http://schemas.openxmlformats.org/drawingml/2006/main" xmlns:r="http://schemas.openxmlformats.org/officeDocument/2006/relationships" xmlns:p="http://schemas.openxmlformats.org/presentationml/2006/main">
+<p:sld xmlns:a="http://schemas.openxmlformats.org/drawingml/2006/main" xmlns:p="http://schemas.openxmlformats.org/presentationml/2006/main" xmlns:r="http://schemas.openxmlformats.org/officeDocument/2006/relationships">
   <p:cSld>
     <p:spTree>
       <p:nvGrpSpPr>
@@ -13747,14 +13524,7 @@
         <p:cNvGrpSpPr/>
         <p:nvPr/>
       </p:nvGrpSpPr>
-      <p:grpSpPr>
-        <a:xfrm>
-          <a:off x="0" y="0"/>
-          <a:ext cx="0" cy="0"/>
-          <a:chOff x="0" y="0"/>
-          <a:chExt cx="0" cy="0"/>
-        </a:xfrm>
-      </p:grpSpPr>
+      <p:grpSpPr/>
       <p:sp>
         <p:nvSpPr>
           <p:cNvPr id="2" name="Rectangle 1"/>
@@ -13795,7 +13565,6 @@
           <a:lstStyle/>
           <a:p>
             <a:pPr algn="ctr"/>
-            <a:endParaRPr/>
           </a:p>
         </p:txBody>
       </p:sp>
@@ -13839,7 +13608,6 @@
           <a:lstStyle/>
           <a:p>
             <a:pPr algn="ctr"/>
-            <a:endParaRPr/>
           </a:p>
         </p:txBody>
       </p:sp>
@@ -13883,7 +13651,6 @@
           <a:lstStyle/>
           <a:p>
             <a:pPr algn="ctr"/>
-            <a:endParaRPr/>
           </a:p>
         </p:txBody>
       </p:sp>
@@ -13927,7 +13694,6 @@
           <a:lstStyle/>
           <a:p>
             <a:pPr algn="ctr"/>
-            <a:endParaRPr/>
           </a:p>
         </p:txBody>
       </p:sp>
@@ -13971,7 +13737,6 @@
           <a:lstStyle/>
           <a:p>
             <a:pPr algn="ctr"/>
-            <a:endParaRPr/>
           </a:p>
         </p:txBody>
       </p:sp>
@@ -14005,7 +13770,7 @@
                 </a:solidFill>
                 <a:latin typeface="Aptos"/>
               </a:rPr>
-              <a:t>COMPLETE TRACKED REPOSITORY TREE</a:t>
+              <a:t>COMPLETE TRACKED FILE TREE, NO TRACKED FILE OMITTED</a:t>
             </a:r>
           </a:p>
         </p:txBody>
@@ -14040,7 +13805,7 @@
                 </a:solidFill>
                 <a:latin typeface="Aptos Display"/>
               </a:rPr>
-              <a:t>File Tree Appendix 11/14</a:t>
+              <a:t>Tracked File Tree Appendix 11/15</a:t>
             </a:r>
           </a:p>
         </p:txBody>
@@ -14075,7 +13840,16 @@
                 </a:solidFill>
                 <a:latin typeface="Cascadia Mono"/>
               </a:rPr>
-              <a:t>    |   |   |-- 0039_add_crawler.py
+              <a:t>    |   |   |-- 0030_repopulate_all_agents.py
+    |   |   |-- 0031_add_flowcreator.py
+    |   |   |-- 0032_repopulate_all_agents.py
+    |   |   |-- 0033_add_gitter.py
+    |   |   |-- 0034_add_dockerer.py
+    |   |   |-- 0035_add_pser.py
+    |   |   |-- 0036_add_kuberneter.py
+    |   |   |-- 0037_add_apirer.py
+    |   |   |-- 0038_add_jenkinser.py
+    |   |   |-- 0039_add_crawler.py
     |   |   |-- 0040_add_summarizer.py
     |   |   |-- 0041_add_flowhypervisor.py
     |   |   |-- 0042_add_mouser.py
@@ -14096,16 +13870,7 @@
     |   |   |-- 0057_add_flowbacker.py
     |   |   |-- 0058_add_barrier.py
     |   |   |-- 0059_add_j_decompiler.py
-    |   |   |-- 0060_add_agent_parametrizer_tool.py
-    |   |   |-- 0061_add_agent_starter_tool.py
-    |   |   |-- 0062_sync_agent_control_tools_and_prompts.py
-    |   |   |-- 0063_add_agent_parametrizer_prompt.py
-    |   |   |-- 0064_add_chat_agent_run_model.py
-    |   |   |-- 0065_add_chat_wrapped_agent_tools.py
-    |   |   |-- 0066_add_keyboarder.py
-    |   |   |-- 0067_add_multi_turn_demo_prompts.py
-    |   |   |-- 0068_add_googler_tool.py
-    |   |   |-- 0069_add_googler_agent.py</a:t>
+    |   |   |-- 0060_add_agent_parametrizer_tool.py</a:t>
             </a:r>
           </a:p>
         </p:txBody>
@@ -14119,7 +13884,7 @@
 </file>
 
 <file path=ppt/slides/slide28.xml><?xml version="1.0" encoding="utf-8"?>
-<p:sld xmlns:a="http://schemas.openxmlformats.org/drawingml/2006/main" xmlns:r="http://schemas.openxmlformats.org/officeDocument/2006/relationships" xmlns:p="http://schemas.openxmlformats.org/presentationml/2006/main">
+<p:sld xmlns:a="http://schemas.openxmlformats.org/drawingml/2006/main" xmlns:p="http://schemas.openxmlformats.org/presentationml/2006/main" xmlns:r="http://schemas.openxmlformats.org/officeDocument/2006/relationships">
   <p:cSld>
     <p:spTree>
       <p:nvGrpSpPr>
@@ -14127,14 +13892,7 @@
         <p:cNvGrpSpPr/>
         <p:nvPr/>
       </p:nvGrpSpPr>
-      <p:grpSpPr>
-        <a:xfrm>
-          <a:off x="0" y="0"/>
-          <a:ext cx="0" cy="0"/>
-          <a:chOff x="0" y="0"/>
-          <a:chExt cx="0" cy="0"/>
-        </a:xfrm>
-      </p:grpSpPr>
+      <p:grpSpPr/>
       <p:sp>
         <p:nvSpPr>
           <p:cNvPr id="2" name="Rectangle 1"/>
@@ -14175,7 +13933,6 @@
           <a:lstStyle/>
           <a:p>
             <a:pPr algn="ctr"/>
-            <a:endParaRPr/>
           </a:p>
         </p:txBody>
       </p:sp>
@@ -14219,7 +13976,6 @@
           <a:lstStyle/>
           <a:p>
             <a:pPr algn="ctr"/>
-            <a:endParaRPr/>
           </a:p>
         </p:txBody>
       </p:sp>
@@ -14263,7 +14019,6 @@
           <a:lstStyle/>
           <a:p>
             <a:pPr algn="ctr"/>
-            <a:endParaRPr/>
           </a:p>
         </p:txBody>
       </p:sp>
@@ -14307,7 +14062,6 @@
           <a:lstStyle/>
           <a:p>
             <a:pPr algn="ctr"/>
-            <a:endParaRPr/>
           </a:p>
         </p:txBody>
       </p:sp>
@@ -14351,7 +14105,6 @@
           <a:lstStyle/>
           <a:p>
             <a:pPr algn="ctr"/>
-            <a:endParaRPr/>
           </a:p>
         </p:txBody>
       </p:sp>
@@ -14385,7 +14138,7 @@
                 </a:solidFill>
                 <a:latin typeface="Aptos"/>
               </a:rPr>
-              <a:t>COMPLETE TRACKED REPOSITORY TREE</a:t>
+              <a:t>COMPLETE TRACKED FILE TREE, NO TRACKED FILE OMITTED</a:t>
             </a:r>
           </a:p>
         </p:txBody>
@@ -14420,7 +14173,7 @@
                 </a:solidFill>
                 <a:latin typeface="Aptos Display"/>
               </a:rPr>
-              <a:t>File Tree Appendix 12/14</a:t>
+              <a:t>Tracked File Tree Appendix 12/15</a:t>
             </a:r>
           </a:p>
         </p:txBody>
@@ -14455,7 +14208,16 @@
                 </a:solidFill>
                 <a:latin typeface="Cascadia Mono"/>
               </a:rPr>
-              <a:t>    |   |   `-- __init__.py
+              <a:t>    |   |   |-- 0061_add_agent_starter_tool.py
+    |   |   |-- 0062_sync_agent_control_tools_and_prompts.py
+    |   |   |-- 0063_add_agent_parametrizer_prompt.py
+    |   |   |-- 0064_add_chat_agent_run_model.py
+    |   |   |-- 0065_add_chat_wrapped_agent_tools.py
+    |   |   |-- 0066_add_keyboarder.py
+    |   |   |-- 0067_add_multi_turn_demo_prompts.py
+    |   |   |-- 0068_add_googler_tool.py
+    |   |   |-- 0069_add_googler_agent.py
+    |   |   `-- __init__.py
     |   |-- monitors/
     |   |   `-- monitor_sql.py
     |   |-- opus_client/
@@ -14476,16 +14238,7 @@
     |   |   `-- chains/
     |   |       |-- base.py
     |   |       |-- basic.py
-    |   |       |-- history_aware.py
-    |   |       `-- unified.py
-    |   |-- services/
-    |   |   |-- __init__.py
-    |   |   |-- answer_analizer.py
-    |   |   |-- filesystem.py
-    |   |   `-- response_parser.py
-    |   |-- static/
-    |   |   `-- agent/
-    |   |       |-- css/</a:t>
+    |   |       |-- history_aware.py</a:t>
             </a:r>
           </a:p>
         </p:txBody>
@@ -14499,7 +14252,7 @@
 </file>
 
 <file path=ppt/slides/slide29.xml><?xml version="1.0" encoding="utf-8"?>
-<p:sld xmlns:a="http://schemas.openxmlformats.org/drawingml/2006/main" xmlns:r="http://schemas.openxmlformats.org/officeDocument/2006/relationships" xmlns:p="http://schemas.openxmlformats.org/presentationml/2006/main">
+<p:sld xmlns:a="http://schemas.openxmlformats.org/drawingml/2006/main" xmlns:p="http://schemas.openxmlformats.org/presentationml/2006/main" xmlns:r="http://schemas.openxmlformats.org/officeDocument/2006/relationships">
   <p:cSld>
     <p:spTree>
       <p:nvGrpSpPr>
@@ -14507,14 +14260,7 @@
         <p:cNvGrpSpPr/>
         <p:nvPr/>
       </p:nvGrpSpPr>
-      <p:grpSpPr>
-        <a:xfrm>
-          <a:off x="0" y="0"/>
-          <a:ext cx="0" cy="0"/>
-          <a:chOff x="0" y="0"/>
-          <a:chExt cx="0" cy="0"/>
-        </a:xfrm>
-      </p:grpSpPr>
+      <p:grpSpPr/>
       <p:sp>
         <p:nvSpPr>
           <p:cNvPr id="2" name="Rectangle 1"/>
@@ -14555,7 +14301,6 @@
           <a:lstStyle/>
           <a:p>
             <a:pPr algn="ctr"/>
-            <a:endParaRPr/>
           </a:p>
         </p:txBody>
       </p:sp>
@@ -14599,7 +14344,6 @@
           <a:lstStyle/>
           <a:p>
             <a:pPr algn="ctr"/>
-            <a:endParaRPr/>
           </a:p>
         </p:txBody>
       </p:sp>
@@ -14643,7 +14387,6 @@
           <a:lstStyle/>
           <a:p>
             <a:pPr algn="ctr"/>
-            <a:endParaRPr/>
           </a:p>
         </p:txBody>
       </p:sp>
@@ -14687,7 +14430,6 @@
           <a:lstStyle/>
           <a:p>
             <a:pPr algn="ctr"/>
-            <a:endParaRPr/>
           </a:p>
         </p:txBody>
       </p:sp>
@@ -14731,7 +14473,6 @@
           <a:lstStyle/>
           <a:p>
             <a:pPr algn="ctr"/>
-            <a:endParaRPr/>
           </a:p>
         </p:txBody>
       </p:sp>
@@ -14765,7 +14506,7 @@
                 </a:solidFill>
                 <a:latin typeface="Aptos"/>
               </a:rPr>
-              <a:t>COMPLETE TRACKED REPOSITORY TREE</a:t>
+              <a:t>COMPLETE TRACKED FILE TREE, NO TRACKED FILE OMITTED</a:t>
             </a:r>
           </a:p>
         </p:txBody>
@@ -14800,7 +14541,7 @@
                 </a:solidFill>
                 <a:latin typeface="Aptos Display"/>
               </a:rPr>
-              <a:t>File Tree Appendix 13/14</a:t>
+              <a:t>Tracked File Tree Appendix 13/15</a:t>
             </a:r>
           </a:p>
         </p:txBody>
@@ -14835,7 +14576,16 @@
                 </a:solidFill>
                 <a:latin typeface="Cascadia Mono"/>
               </a:rPr>
-              <a:t>    |   |       |   |-- agent_page.css
+              <a:t>    |   |       `-- unified.py
+    |   |-- services/
+    |   |   |-- __init__.py
+    |   |   |-- answer_analizer.py
+    |   |   |-- filesystem.py
+    |   |   `-- response_parser.py
+    |   |-- static/
+    |   |   `-- agent/
+    |   |       |-- css/
+    |   |       |   |-- agent_page.css
     |   |       |   |-- agentic_control_panel.css
     |   |       |   |-- login.css
     |   |       |   |-- tools_dialog.css
@@ -14856,16 +14606,7 @@
     |   |       |   |-- acp-undo-manager.js
     |   |       |   |-- acp-validate.js
     |   |       |   |-- agent_page_canvas.js
-    |   |       |   |-- agent_page_chat.js
-    |   |       |   |-- agent_page_context.js
-    |   |       |   |-- agent_page_dialogs.js
-    |   |       |   |-- agent_page_init.js
-    |   |       |   |-- agent_page_layout.js
-    |   |       |   |-- agent_page_state.js
-    |   |       |   |-- agent_page_ui.js
-    |   |       |   |-- agentic_control_panel.js
-    |   |       |   |-- canvas_item_dialog.js
-    |   |       |   |-- contextual_menus.js</a:t>
+    |   |       |   |-- agent_page_chat.js</a:t>
             </a:r>
           </a:p>
         </p:txBody>
@@ -14879,7 +14620,7 @@
 </file>
 
 <file path=ppt/slides/slide3.xml><?xml version="1.0" encoding="utf-8"?>
-<p:sld xmlns:a="http://schemas.openxmlformats.org/drawingml/2006/main" xmlns:r="http://schemas.openxmlformats.org/officeDocument/2006/relationships" xmlns:p="http://schemas.openxmlformats.org/presentationml/2006/main">
+<p:sld xmlns:a="http://schemas.openxmlformats.org/drawingml/2006/main" xmlns:p="http://schemas.openxmlformats.org/presentationml/2006/main" xmlns:r="http://schemas.openxmlformats.org/officeDocument/2006/relationships">
   <p:cSld>
     <p:spTree>
       <p:nvGrpSpPr>
@@ -14887,14 +14628,7 @@
         <p:cNvGrpSpPr/>
         <p:nvPr/>
       </p:nvGrpSpPr>
-      <p:grpSpPr>
-        <a:xfrm>
-          <a:off x="0" y="0"/>
-          <a:ext cx="0" cy="0"/>
-          <a:chOff x="0" y="0"/>
-          <a:chExt cx="0" cy="0"/>
-        </a:xfrm>
-      </p:grpSpPr>
+      <p:grpSpPr/>
       <p:sp>
         <p:nvSpPr>
           <p:cNvPr id="2" name="Rectangle 1"/>
@@ -14935,7 +14669,6 @@
           <a:lstStyle/>
           <a:p>
             <a:pPr algn="ctr"/>
-            <a:endParaRPr/>
           </a:p>
         </p:txBody>
       </p:sp>
@@ -14979,7 +14712,6 @@
           <a:lstStyle/>
           <a:p>
             <a:pPr algn="ctr"/>
-            <a:endParaRPr/>
           </a:p>
         </p:txBody>
       </p:sp>
@@ -15023,7 +14755,6 @@
           <a:lstStyle/>
           <a:p>
             <a:pPr algn="ctr"/>
-            <a:endParaRPr/>
           </a:p>
         </p:txBody>
       </p:sp>
@@ -15067,7 +14798,6 @@
           <a:lstStyle/>
           <a:p>
             <a:pPr algn="ctr"/>
-            <a:endParaRPr/>
           </a:p>
         </p:txBody>
       </p:sp>
@@ -15111,7 +14841,6 @@
           <a:lstStyle/>
           <a:p>
             <a:pPr algn="ctr"/>
-            <a:endParaRPr/>
           </a:p>
         </p:txBody>
       </p:sp>
@@ -15227,7 +14956,6 @@
           <a:lstStyle/>
           <a:p>
             <a:pPr algn="ctr"/>
-            <a:endParaRPr/>
           </a:p>
         </p:txBody>
       </p:sp>
@@ -15271,7 +14999,6 @@
           <a:lstStyle/>
           <a:p>
             <a:pPr algn="ctr"/>
-            <a:endParaRPr/>
           </a:p>
         </p:txBody>
       </p:sp>
@@ -15327,7 +15054,7 @@
           <a:noFill/>
         </p:spPr>
         <p:txBody>
-          <a:bodyPr wrap="square" lIns="38100" tIns="25400" rIns="38100" bIns="25400" anchor="t">
+          <a:bodyPr wrap="square" anchor="t" lIns="38100" rIns="38100" tIns="25400" bIns="25400">
             <a:noAutofit/>
           </a:bodyPr>
           <a:lstStyle/>
@@ -15349,6 +15076,9 @@
               </a:rPr>
               <a:t>Answers codebase questions with loaded file or directory context.</a:t>
             </a:r>
+            <a:endParaRPr sz="1500" b="0" i="0">
+              <a:latin typeface="Calibri"/>
+            </a:endParaRPr>
           </a:p>
           <a:p>
             <a:pPr>
@@ -15368,6 +15098,9 @@
               </a:rPr>
               <a:t>Uses hybrid retrieval to extract metadata, split content, rank source chunks, and respect context budgets.</a:t>
             </a:r>
+            <a:endParaRPr sz="1500" b="0" i="0">
+              <a:latin typeface="Calibri"/>
+            </a:endParaRPr>
           </a:p>
           <a:p>
             <a:pPr>
@@ -15387,6 +15120,9 @@
               </a:rPr>
               <a:t>Runs checked Multi-Turn requests through request-scoped planning, capability selection, tool calls, observations, monitoring, and final synthesis.</a:t>
             </a:r>
+            <a:endParaRPr sz="1500" b="0" i="0">
+              <a:latin typeface="Calibri"/>
+            </a:endParaRPr>
           </a:p>
         </p:txBody>
       </p:sp>
@@ -15432,7 +15168,6 @@
           <a:lstStyle/>
           <a:p>
             <a:pPr algn="ctr"/>
-            <a:endParaRPr/>
           </a:p>
         </p:txBody>
       </p:sp>
@@ -15476,7 +15211,6 @@
           <a:lstStyle/>
           <a:p>
             <a:pPr algn="ctr"/>
-            <a:endParaRPr/>
           </a:p>
         </p:txBody>
       </p:sp>
@@ -15532,7 +15266,7 @@
           <a:noFill/>
         </p:spPr>
         <p:txBody>
-          <a:bodyPr wrap="square" lIns="38100" tIns="25400" rIns="38100" bIns="25400" anchor="t">
+          <a:bodyPr wrap="square" anchor="t" lIns="38100" rIns="38100" tIns="25400" bIns="25400">
             <a:noAutofit/>
           </a:bodyPr>
           <a:lstStyle/>
@@ -15554,6 +15288,9 @@
               </a:rPr>
               <a:t>Launches wrapped copies of selected workflow agents in isolated runtime folders without mutating templates.</a:t>
             </a:r>
+            <a:endParaRPr sz="1500" b="0" i="0">
+              <a:latin typeface="Calibri"/>
+            </a:endParaRPr>
           </a:p>
           <a:p>
             <a:pPr>
@@ -15573,6 +15310,9 @@
               </a:rPr>
               <a:t>Lets users design, validate, save, pause, resume, and stop visual workflows through the Agentic Control Panel.</a:t>
             </a:r>
+            <a:endParaRPr sz="1500" b="0" i="0">
+              <a:latin typeface="Calibri"/>
+            </a:endParaRPr>
           </a:p>
         </p:txBody>
       </p:sp>
@@ -15618,7 +15358,6 @@
           <a:lstStyle/>
           <a:p>
             <a:pPr algn="ctr"/>
-            <a:endParaRPr/>
           </a:p>
         </p:txBody>
       </p:sp>
@@ -15662,7 +15401,6 @@
           <a:lstStyle/>
           <a:p>
             <a:pPr algn="ctr"/>
-            <a:endParaRPr/>
           </a:p>
         </p:txBody>
       </p:sp>
@@ -15718,7 +15456,7 @@
           <a:noFill/>
         </p:spPr>
         <p:txBody>
-          <a:bodyPr wrap="square" lIns="38100" tIns="25400" rIns="38100" bIns="25400" anchor="t">
+          <a:bodyPr wrap="square" anchor="t" lIns="38100" rIns="38100" tIns="25400" bIns="25400">
             <a:noAutofit/>
           </a:bodyPr>
           <a:lstStyle/>
@@ -15740,6 +15478,9 @@
               </a:rPr>
               <a:t>Turns successful Multi-Turn tool executions into starter `.flw` workflows that can be inspected and validated in ACP.</a:t>
             </a:r>
+            <a:endParaRPr sz="1500" b="0" i="0">
+              <a:latin typeface="Calibri"/>
+            </a:endParaRPr>
           </a:p>
           <a:p>
             <a:pPr>
@@ -15759,6 +15500,9 @@
               </a:rPr>
               <a:t>Packages the project into a distributable Windows release with installer and uninstaller tooling.</a:t>
             </a:r>
+            <a:endParaRPr sz="1500" b="0" i="0">
+              <a:latin typeface="Calibri"/>
+            </a:endParaRPr>
           </a:p>
         </p:txBody>
       </p:sp>
@@ -15771,7 +15515,7 @@
 </file>
 
 <file path=ppt/slides/slide30.xml><?xml version="1.0" encoding="utf-8"?>
-<p:sld xmlns:a="http://schemas.openxmlformats.org/drawingml/2006/main" xmlns:r="http://schemas.openxmlformats.org/officeDocument/2006/relationships" xmlns:p="http://schemas.openxmlformats.org/presentationml/2006/main">
+<p:sld xmlns:a="http://schemas.openxmlformats.org/drawingml/2006/main" xmlns:p="http://schemas.openxmlformats.org/presentationml/2006/main" xmlns:r="http://schemas.openxmlformats.org/officeDocument/2006/relationships">
   <p:cSld>
     <p:spTree>
       <p:nvGrpSpPr>
@@ -15779,14 +15523,7 @@
         <p:cNvGrpSpPr/>
         <p:nvPr/>
       </p:nvGrpSpPr>
-      <p:grpSpPr>
-        <a:xfrm>
-          <a:off x="0" y="0"/>
-          <a:ext cx="0" cy="0"/>
-          <a:chOff x="0" y="0"/>
-          <a:chExt cx="0" cy="0"/>
-        </a:xfrm>
-      </p:grpSpPr>
+      <p:grpSpPr/>
       <p:sp>
         <p:nvSpPr>
           <p:cNvPr id="2" name="Rectangle 1"/>
@@ -15827,7 +15564,6 @@
           <a:lstStyle/>
           <a:p>
             <a:pPr algn="ctr"/>
-            <a:endParaRPr/>
           </a:p>
         </p:txBody>
       </p:sp>
@@ -15871,7 +15607,6 @@
           <a:lstStyle/>
           <a:p>
             <a:pPr algn="ctr"/>
-            <a:endParaRPr/>
           </a:p>
         </p:txBody>
       </p:sp>
@@ -15915,7 +15650,6 @@
           <a:lstStyle/>
           <a:p>
             <a:pPr algn="ctr"/>
-            <a:endParaRPr/>
           </a:p>
         </p:txBody>
       </p:sp>
@@ -15959,7 +15693,6 @@
           <a:lstStyle/>
           <a:p>
             <a:pPr algn="ctr"/>
-            <a:endParaRPr/>
           </a:p>
         </p:txBody>
       </p:sp>
@@ -16003,7 +15736,6 @@
           <a:lstStyle/>
           <a:p>
             <a:pPr algn="ctr"/>
-            <a:endParaRPr/>
           </a:p>
         </p:txBody>
       </p:sp>
@@ -16037,7 +15769,7 @@
                 </a:solidFill>
                 <a:latin typeface="Aptos"/>
               </a:rPr>
-              <a:t>COMPLETE TRACKED REPOSITORY TREE</a:t>
+              <a:t>COMPLETE TRACKED FILE TREE, NO TRACKED FILE OMITTED</a:t>
             </a:r>
           </a:p>
         </p:txBody>
@@ -16072,7 +15804,7 @@
                 </a:solidFill>
                 <a:latin typeface="Aptos Display"/>
               </a:rPr>
-              <a:t>File Tree Appendix 14/14</a:t>
+              <a:t>Tracked File Tree Appendix 14/15</a:t>
             </a:r>
           </a:p>
         </p:txBody>
@@ -16107,7 +15839,16 @@
                 </a:solidFill>
                 <a:latin typeface="Cascadia Mono"/>
               </a:rPr>
-              <a:t>    |   |       |   `-- tools_dialog.js
+              <a:t>    |   |       |   |-- agent_page_context.js
+    |   |       |   |-- agent_page_dialogs.js
+    |   |       |   |-- agent_page_init.js
+    |   |       |   |-- agent_page_layout.js
+    |   |       |   |-- agent_page_state.js
+    |   |       |   |-- agent_page_ui.js
+    |   |       |   |-- agentic_control_panel.js
+    |   |       |   |-- canvas_item_dialog.js
+    |   |       |   |-- contextual_menus.js
+    |   |       |   `-- tools_dialog.js
     |   |       |-- sounds/
     |   |       |   |-- hypervisor_alert.wav
     |   |       |   `-- notification.wav
@@ -16128,12 +15869,7 @@
     |   `-- jd-cli.jar
     `-- tlamatini/
         |-- __init__.py
-        |-- asgi.py
-        |-- context_processors.py
-        |-- middleware.py
-        |-- settings.py
-        |-- urls.py
-        `-- wsgi.py</a:t>
+        |-- asgi.py</a:t>
             </a:r>
           </a:p>
         </p:txBody>
@@ -16147,7 +15883,7 @@
 </file>
 
 <file path=ppt/slides/slide31.xml><?xml version="1.0" encoding="utf-8"?>
-<p:sld xmlns:a="http://schemas.openxmlformats.org/drawingml/2006/main" xmlns:r="http://schemas.openxmlformats.org/officeDocument/2006/relationships" xmlns:p="http://schemas.openxmlformats.org/presentationml/2006/main">
+<p:sld xmlns:a="http://schemas.openxmlformats.org/drawingml/2006/main" xmlns:p="http://schemas.openxmlformats.org/presentationml/2006/main" xmlns:r="http://schemas.openxmlformats.org/officeDocument/2006/relationships">
   <p:cSld>
     <p:spTree>
       <p:nvGrpSpPr>
@@ -16155,14 +15891,7 @@
         <p:cNvGrpSpPr/>
         <p:nvPr/>
       </p:nvGrpSpPr>
-      <p:grpSpPr>
-        <a:xfrm>
-          <a:off x="0" y="0"/>
-          <a:ext cx="0" cy="0"/>
-          <a:chOff x="0" y="0"/>
-          <a:chExt cx="0" cy="0"/>
-        </a:xfrm>
-      </p:grpSpPr>
+      <p:grpSpPr/>
       <p:sp>
         <p:nvSpPr>
           <p:cNvPr id="2" name="Rectangle 1"/>
@@ -16203,7 +15932,6 @@
           <a:lstStyle/>
           <a:p>
             <a:pPr algn="ctr"/>
-            <a:endParaRPr/>
           </a:p>
         </p:txBody>
       </p:sp>
@@ -16222,7 +15950,7 @@
             <a:avLst/>
           </a:prstGeom>
           <a:solidFill>
-            <a:srgbClr val="C48052"/>
+            <a:srgbClr val="48BF8F"/>
           </a:solidFill>
           <a:ln>
             <a:noFill/>
@@ -16247,7 +15975,6 @@
           <a:lstStyle/>
           <a:p>
             <a:pPr algn="ctr"/>
-            <a:endParaRPr/>
           </a:p>
         </p:txBody>
       </p:sp>
@@ -16266,7 +15993,7 @@
             <a:avLst/>
           </a:prstGeom>
           <a:solidFill>
-            <a:srgbClr val="C48052"/>
+            <a:srgbClr val="48BF8F"/>
           </a:solidFill>
           <a:ln>
             <a:noFill/>
@@ -16291,7 +16018,6 @@
           <a:lstStyle/>
           <a:p>
             <a:pPr algn="ctr"/>
-            <a:endParaRPr/>
           </a:p>
         </p:txBody>
       </p:sp>
@@ -16310,7 +16036,7 @@
             <a:avLst/>
           </a:prstGeom>
           <a:solidFill>
-            <a:srgbClr val="C48052"/>
+            <a:srgbClr val="48BF8F"/>
           </a:solidFill>
           <a:ln>
             <a:noFill/>
@@ -16335,7 +16061,6 @@
           <a:lstStyle/>
           <a:p>
             <a:pPr algn="ctr"/>
-            <a:endParaRPr/>
           </a:p>
         </p:txBody>
       </p:sp>
@@ -16354,7 +16079,7 @@
             <a:avLst/>
           </a:prstGeom>
           <a:solidFill>
-            <a:srgbClr val="C48052"/>
+            <a:srgbClr val="48BF8F"/>
           </a:solidFill>
           <a:ln>
             <a:noFill/>
@@ -16379,7 +16104,6 @@
           <a:lstStyle/>
           <a:p>
             <a:pPr algn="ctr"/>
-            <a:endParaRPr/>
           </a:p>
         </p:txBody>
       </p:sp>
@@ -16409,11 +16133,11 @@
             <a:r>
               <a:rPr sz="1000" b="1">
                 <a:solidFill>
-                  <a:srgbClr val="C48052"/>
+                  <a:srgbClr val="48BF8F"/>
                 </a:solidFill>
                 <a:latin typeface="Aptos"/>
               </a:rPr>
-              <a:t>FUTURE REFRESH DISCIPLINE</a:t>
+              <a:t>COMPLETE TRACKED FILE TREE, NO TRACKED FILE OMITTED</a:t>
             </a:r>
           </a:p>
         </p:txBody>
@@ -16448,6 +16172,348 @@
                 </a:solidFill>
                 <a:latin typeface="Aptos Display"/>
               </a:rPr>
+              <a:t>Tracked File Tree Appendix 15/15</a:t>
+            </a:r>
+          </a:p>
+        </p:txBody>
+      </p:sp>
+      <p:sp>
+        <p:nvSpPr>
+          <p:cNvPr id="9" name="TextBox 8"/>
+          <p:cNvSpPr txBox="1"/>
+          <p:nvPr/>
+        </p:nvSpPr>
+        <p:spPr>
+          <a:xfrm>
+            <a:off x="658368" y="1426464"/>
+            <a:ext cx="10927080" cy="4956048"/>
+          </a:xfrm>
+          <a:prstGeom prst="rect">
+            <a:avLst/>
+          </a:prstGeom>
+          <a:noFill/>
+        </p:spPr>
+        <p:txBody>
+          <a:bodyPr wrap="square" anchor="t">
+            <a:spAutoFit/>
+          </a:bodyPr>
+          <a:lstStyle/>
+          <a:p>
+            <a:pPr algn="l"/>
+            <a:r>
+              <a:rPr sz="700" b="0">
+                <a:solidFill>
+                  <a:srgbClr val="E8E8DE"/>
+                </a:solidFill>
+                <a:latin typeface="Cascadia Mono"/>
+              </a:rPr>
+              <a:t>        |-- context_processors.py
+        |-- middleware.py
+        |-- settings.py
+        |-- urls.py
+        `-- wsgi.py</a:t>
+            </a:r>
+          </a:p>
+        </p:txBody>
+      </p:sp>
+    </p:spTree>
+  </p:cSld>
+  <p:clrMapOvr>
+    <a:masterClrMapping/>
+  </p:clrMapOvr>
+</p:sld>
+</file>
+
+<file path=ppt/slides/slide32.xml><?xml version="1.0" encoding="utf-8"?>
+<p:sld xmlns:a="http://schemas.openxmlformats.org/drawingml/2006/main" xmlns:p="http://schemas.openxmlformats.org/presentationml/2006/main" xmlns:r="http://schemas.openxmlformats.org/officeDocument/2006/relationships">
+  <p:cSld>
+    <p:spTree>
+      <p:nvGrpSpPr>
+        <p:cNvPr id="1" name=""/>
+        <p:cNvGrpSpPr/>
+        <p:nvPr/>
+      </p:nvGrpSpPr>
+      <p:grpSpPr/>
+      <p:sp>
+        <p:nvSpPr>
+          <p:cNvPr id="2" name="Rectangle 1"/>
+          <p:cNvSpPr/>
+          <p:nvPr/>
+        </p:nvSpPr>
+        <p:spPr>
+          <a:xfrm>
+            <a:off x="0" y="0"/>
+            <a:ext cx="12191695" cy="6858000"/>
+          </a:xfrm>
+          <a:prstGeom prst="rect">
+            <a:avLst/>
+          </a:prstGeom>
+          <a:solidFill>
+            <a:srgbClr val="080D0D"/>
+          </a:solidFill>
+          <a:ln>
+            <a:noFill/>
+          </a:ln>
+        </p:spPr>
+        <p:style>
+          <a:lnRef idx="1">
+            <a:schemeClr val="accent1"/>
+          </a:lnRef>
+          <a:fillRef idx="3">
+            <a:schemeClr val="accent1"/>
+          </a:fillRef>
+          <a:effectRef idx="2">
+            <a:schemeClr val="accent1"/>
+          </a:effectRef>
+          <a:fontRef idx="minor">
+            <a:schemeClr val="lt1"/>
+          </a:fontRef>
+        </p:style>
+        <p:txBody>
+          <a:bodyPr rtlCol="0" anchor="ctr"/>
+          <a:lstStyle/>
+          <a:p>
+            <a:pPr algn="ctr"/>
+          </a:p>
+        </p:txBody>
+      </p:sp>
+      <p:sp>
+        <p:nvSpPr>
+          <p:cNvPr id="3" name="Rectangle 2"/>
+          <p:cNvSpPr/>
+          <p:nvPr/>
+        </p:nvSpPr>
+        <p:spPr>
+          <a:xfrm>
+            <a:off x="320040" y="384048"/>
+            <a:ext cx="36576" cy="6080760"/>
+          </a:xfrm>
+          <a:prstGeom prst="rect">
+            <a:avLst/>
+          </a:prstGeom>
+          <a:solidFill>
+            <a:srgbClr val="C48052"/>
+          </a:solidFill>
+          <a:ln>
+            <a:noFill/>
+          </a:ln>
+        </p:spPr>
+        <p:style>
+          <a:lnRef idx="1">
+            <a:schemeClr val="accent1"/>
+          </a:lnRef>
+          <a:fillRef idx="3">
+            <a:schemeClr val="accent1"/>
+          </a:fillRef>
+          <a:effectRef idx="2">
+            <a:schemeClr val="accent1"/>
+          </a:effectRef>
+          <a:fontRef idx="minor">
+            <a:schemeClr val="lt1"/>
+          </a:fontRef>
+        </p:style>
+        <p:txBody>
+          <a:bodyPr rtlCol="0" anchor="ctr"/>
+          <a:lstStyle/>
+          <a:p>
+            <a:pPr algn="ctr"/>
+          </a:p>
+        </p:txBody>
+      </p:sp>
+      <p:sp>
+        <p:nvSpPr>
+          <p:cNvPr id="4" name="Rectangle 3"/>
+          <p:cNvSpPr/>
+          <p:nvPr/>
+        </p:nvSpPr>
+        <p:spPr>
+          <a:xfrm>
+            <a:off x="11716207" y="384048"/>
+            <a:ext cx="36576" cy="6080760"/>
+          </a:xfrm>
+          <a:prstGeom prst="rect">
+            <a:avLst/>
+          </a:prstGeom>
+          <a:solidFill>
+            <a:srgbClr val="C48052"/>
+          </a:solidFill>
+          <a:ln>
+            <a:noFill/>
+          </a:ln>
+        </p:spPr>
+        <p:style>
+          <a:lnRef idx="1">
+            <a:schemeClr val="accent1"/>
+          </a:lnRef>
+          <a:fillRef idx="3">
+            <a:schemeClr val="accent1"/>
+          </a:fillRef>
+          <a:effectRef idx="2">
+            <a:schemeClr val="accent1"/>
+          </a:effectRef>
+          <a:fontRef idx="minor">
+            <a:schemeClr val="lt1"/>
+          </a:fontRef>
+        </p:style>
+        <p:txBody>
+          <a:bodyPr rtlCol="0" anchor="ctr"/>
+          <a:lstStyle/>
+          <a:p>
+            <a:pPr algn="ctr"/>
+          </a:p>
+        </p:txBody>
+      </p:sp>
+      <p:sp>
+        <p:nvSpPr>
+          <p:cNvPr id="5" name="Rectangle 4"/>
+          <p:cNvSpPr/>
+          <p:nvPr/>
+        </p:nvSpPr>
+        <p:spPr>
+          <a:xfrm>
+            <a:off x="502920" y="384048"/>
+            <a:ext cx="11155680" cy="27432"/>
+          </a:xfrm>
+          <a:prstGeom prst="rect">
+            <a:avLst/>
+          </a:prstGeom>
+          <a:solidFill>
+            <a:srgbClr val="C48052"/>
+          </a:solidFill>
+          <a:ln>
+            <a:noFill/>
+          </a:ln>
+        </p:spPr>
+        <p:style>
+          <a:lnRef idx="1">
+            <a:schemeClr val="accent1"/>
+          </a:lnRef>
+          <a:fillRef idx="3">
+            <a:schemeClr val="accent1"/>
+          </a:fillRef>
+          <a:effectRef idx="2">
+            <a:schemeClr val="accent1"/>
+          </a:effectRef>
+          <a:fontRef idx="minor">
+            <a:schemeClr val="lt1"/>
+          </a:fontRef>
+        </p:style>
+        <p:txBody>
+          <a:bodyPr rtlCol="0" anchor="ctr"/>
+          <a:lstStyle/>
+          <a:p>
+            <a:pPr algn="ctr"/>
+          </a:p>
+        </p:txBody>
+      </p:sp>
+      <p:sp>
+        <p:nvSpPr>
+          <p:cNvPr id="6" name="Rectangle 5"/>
+          <p:cNvSpPr/>
+          <p:nvPr/>
+        </p:nvSpPr>
+        <p:spPr>
+          <a:xfrm>
+            <a:off x="502920" y="6437376"/>
+            <a:ext cx="11155680" cy="27432"/>
+          </a:xfrm>
+          <a:prstGeom prst="rect">
+            <a:avLst/>
+          </a:prstGeom>
+          <a:solidFill>
+            <a:srgbClr val="C48052"/>
+          </a:solidFill>
+          <a:ln>
+            <a:noFill/>
+          </a:ln>
+        </p:spPr>
+        <p:style>
+          <a:lnRef idx="1">
+            <a:schemeClr val="accent1"/>
+          </a:lnRef>
+          <a:fillRef idx="3">
+            <a:schemeClr val="accent1"/>
+          </a:fillRef>
+          <a:effectRef idx="2">
+            <a:schemeClr val="accent1"/>
+          </a:effectRef>
+          <a:fontRef idx="minor">
+            <a:schemeClr val="lt1"/>
+          </a:fontRef>
+        </p:style>
+        <p:txBody>
+          <a:bodyPr rtlCol="0" anchor="ctr"/>
+          <a:lstStyle/>
+          <a:p>
+            <a:pPr algn="ctr"/>
+          </a:p>
+        </p:txBody>
+      </p:sp>
+      <p:sp>
+        <p:nvSpPr>
+          <p:cNvPr id="7" name="TextBox 6"/>
+          <p:cNvSpPr txBox="1"/>
+          <p:nvPr/>
+        </p:nvSpPr>
+        <p:spPr>
+          <a:xfrm>
+            <a:off x="713232" y="548640"/>
+            <a:ext cx="10698480" cy="301752"/>
+          </a:xfrm>
+          <a:prstGeom prst="rect">
+            <a:avLst/>
+          </a:prstGeom>
+          <a:noFill/>
+        </p:spPr>
+        <p:txBody>
+          <a:bodyPr wrap="square" anchor="t">
+            <a:spAutoFit/>
+          </a:bodyPr>
+          <a:lstStyle/>
+          <a:p>
+            <a:pPr algn="l"/>
+            <a:r>
+              <a:rPr sz="1000" b="1">
+                <a:solidFill>
+                  <a:srgbClr val="C48052"/>
+                </a:solidFill>
+                <a:latin typeface="Aptos"/>
+              </a:rPr>
+              <a:t>FUTURE REFRESH DISCIPLINE</a:t>
+            </a:r>
+          </a:p>
+        </p:txBody>
+      </p:sp>
+      <p:sp>
+        <p:nvSpPr>
+          <p:cNvPr id="8" name="TextBox 7"/>
+          <p:cNvSpPr txBox="1"/>
+          <p:nvPr/>
+        </p:nvSpPr>
+        <p:spPr>
+          <a:xfrm>
+            <a:off x="694944" y="850392"/>
+            <a:ext cx="10881360" cy="566928"/>
+          </a:xfrm>
+          <a:prstGeom prst="rect">
+            <a:avLst/>
+          </a:prstGeom>
+          <a:noFill/>
+        </p:spPr>
+        <p:txBody>
+          <a:bodyPr wrap="square" anchor="t">
+            <a:spAutoFit/>
+          </a:bodyPr>
+          <a:lstStyle/>
+          <a:p>
+            <a:pPr algn="l"/>
+            <a:r>
+              <a:rPr sz="2700" b="0">
+                <a:solidFill>
+                  <a:srgbClr val="E8E8DE"/>
+                </a:solidFill>
+                <a:latin typeface="Aptos Display"/>
+              </a:rPr>
               <a:t>How To Keep Docs Excellent</a:t>
             </a:r>
           </a:p>
@@ -16495,7 +16561,6 @@
           <a:lstStyle/>
           <a:p>
             <a:pPr algn="ctr"/>
-            <a:endParaRPr/>
           </a:p>
         </p:txBody>
       </p:sp>
@@ -16539,7 +16604,6 @@
           <a:lstStyle/>
           <a:p>
             <a:pPr algn="ctr"/>
-            <a:endParaRPr/>
           </a:p>
         </p:txBody>
       </p:sp>
@@ -16595,7 +16659,7 @@
           <a:noFill/>
         </p:spPr>
         <p:txBody>
-          <a:bodyPr wrap="square" lIns="38100" tIns="25400" rIns="38100" bIns="25400" anchor="t">
+          <a:bodyPr wrap="square" anchor="t" lIns="38100" rIns="38100" tIns="25400" bIns="25400">
             <a:noAutofit/>
           </a:bodyPr>
           <a:lstStyle/>
@@ -16617,6 +16681,9 @@
               </a:rPr>
               <a:t>Regenerate the PDF and deck whenever README, architecture, agent catalog, line inventory, or packaging behavior changes.</a:t>
             </a:r>
+            <a:endParaRPr sz="1700" b="0" i="0">
+              <a:latin typeface="Calibri"/>
+            </a:endParaRPr>
           </a:p>
           <a:p>
             <a:pPr>
@@ -16636,6 +16703,9 @@
               </a:rPr>
               <a:t>Keep the PDF exhaustive and evidence-heavy; keep the PPT visual, split dense appendices, and audit geometry before delivery.</a:t>
             </a:r>
+            <a:endParaRPr sz="1700" b="0" i="0">
+              <a:latin typeface="Calibri"/>
+            </a:endParaRPr>
           </a:p>
           <a:p>
             <a:pPr>
@@ -16655,6 +16725,9 @@
               </a:rPr>
               <a:t>Use the new Skills in `.codex/skills/` so future refreshes follow the same no-overlap and full-dossier rules.</a:t>
             </a:r>
+            <a:endParaRPr sz="1700" b="0" i="0">
+              <a:latin typeface="Calibri"/>
+            </a:endParaRPr>
           </a:p>
         </p:txBody>
       </p:sp>
@@ -16667,7 +16740,7 @@
 </file>
 
 <file path=ppt/slides/slide4.xml><?xml version="1.0" encoding="utf-8"?>
-<p:sld xmlns:a="http://schemas.openxmlformats.org/drawingml/2006/main" xmlns:r="http://schemas.openxmlformats.org/officeDocument/2006/relationships" xmlns:p="http://schemas.openxmlformats.org/presentationml/2006/main">
+<p:sld xmlns:a="http://schemas.openxmlformats.org/drawingml/2006/main" xmlns:p="http://schemas.openxmlformats.org/presentationml/2006/main" xmlns:r="http://schemas.openxmlformats.org/officeDocument/2006/relationships">
   <p:cSld>
     <p:spTree>
       <p:nvGrpSpPr>
@@ -16675,14 +16748,7 @@
         <p:cNvGrpSpPr/>
         <p:nvPr/>
       </p:nvGrpSpPr>
-      <p:grpSpPr>
-        <a:xfrm>
-          <a:off x="0" y="0"/>
-          <a:ext cx="0" cy="0"/>
-          <a:chOff x="0" y="0"/>
-          <a:chExt cx="0" cy="0"/>
-        </a:xfrm>
-      </p:grpSpPr>
+      <p:grpSpPr/>
       <p:sp>
         <p:nvSpPr>
           <p:cNvPr id="2" name="Rectangle 1"/>
@@ -16723,7 +16789,6 @@
           <a:lstStyle/>
           <a:p>
             <a:pPr algn="ctr"/>
-            <a:endParaRPr/>
           </a:p>
         </p:txBody>
       </p:sp>
@@ -16767,7 +16832,6 @@
           <a:lstStyle/>
           <a:p>
             <a:pPr algn="ctr"/>
-            <a:endParaRPr/>
           </a:p>
         </p:txBody>
       </p:sp>
@@ -16811,7 +16875,6 @@
           <a:lstStyle/>
           <a:p>
             <a:pPr algn="ctr"/>
-            <a:endParaRPr/>
           </a:p>
         </p:txBody>
       </p:sp>
@@ -16855,7 +16918,6 @@
           <a:lstStyle/>
           <a:p>
             <a:pPr algn="ctr"/>
-            <a:endParaRPr/>
           </a:p>
         </p:txBody>
       </p:sp>
@@ -16899,7 +16961,6 @@
           <a:lstStyle/>
           <a:p>
             <a:pPr algn="ctr"/>
-            <a:endParaRPr/>
           </a:p>
         </p:txBody>
       </p:sp>
@@ -17015,7 +17076,6 @@
           <a:lstStyle/>
           <a:p>
             <a:pPr algn="ctr"/>
-            <a:endParaRPr/>
           </a:p>
         </p:txBody>
       </p:sp>
@@ -17131,7 +17191,6 @@
           <a:lstStyle/>
           <a:p>
             <a:pPr algn="ctr"/>
-            <a:endParaRPr/>
           </a:p>
         </p:txBody>
       </p:sp>
@@ -17247,7 +17306,6 @@
           <a:lstStyle/>
           <a:p>
             <a:pPr algn="ctr"/>
-            <a:endParaRPr/>
           </a:p>
         </p:txBody>
       </p:sp>
@@ -17363,7 +17421,6 @@
           <a:lstStyle/>
           <a:p>
             <a:pPr algn="ctr"/>
-            <a:endParaRPr/>
           </a:p>
         </p:txBody>
       </p:sp>
@@ -17479,7 +17536,6 @@
           <a:lstStyle/>
           <a:p>
             <a:pPr algn="ctr"/>
-            <a:endParaRPr/>
           </a:p>
         </p:txBody>
       </p:sp>
@@ -17595,7 +17651,6 @@
           <a:lstStyle/>
           <a:p>
             <a:pPr algn="ctr"/>
-            <a:endParaRPr/>
           </a:p>
         </p:txBody>
       </p:sp>
@@ -17676,7 +17731,6 @@
           <a:lstStyle/>
           <a:p>
             <a:pPr algn="ctr"/>
-            <a:endParaRPr/>
           </a:p>
         </p:txBody>
       </p:sp>
@@ -17720,7 +17774,6 @@
           <a:lstStyle/>
           <a:p>
             <a:pPr algn="ctr"/>
-            <a:endParaRPr/>
           </a:p>
         </p:txBody>
       </p:sp>
@@ -17776,7 +17829,7 @@
           <a:noFill/>
         </p:spPr>
         <p:txBody>
-          <a:bodyPr wrap="square" lIns="38100" tIns="25400" rIns="38100" bIns="25400" anchor="t">
+          <a:bodyPr wrap="square" anchor="t" lIns="38100" rIns="38100" tIns="25400" bIns="25400">
             <a:noAutofit/>
           </a:bodyPr>
           <a:lstStyle/>
@@ -17798,6 +17851,9 @@
               </a:rPr>
               <a:t>Browser UI sends chat and workflow requests through Django views and Channels WebSockets.</a:t>
             </a:r>
+            <a:endParaRPr sz="1500" b="0" i="0">
+              <a:latin typeface="Calibri"/>
+            </a:endParaRPr>
           </a:p>
           <a:p>
             <a:pPr>
@@ -17817,6 +17873,9 @@
               </a:rPr>
               <a:t>RAG chains load selected file/directory context, retrieve relevant chunks, and build answer prompts.</a:t>
             </a:r>
+            <a:endParaRPr sz="1500" b="0" i="0">
+              <a:latin typeface="Calibri"/>
+            </a:endParaRPr>
           </a:p>
           <a:p>
             <a:pPr>
@@ -17836,6 +17895,9 @@
               </a:rPr>
               <a:t>When Multi-Turn is enabled, the global planner selects context and tool stages before the executor binds only the relevant tools.</a:t>
             </a:r>
+            <a:endParaRPr sz="1500" b="0" i="0">
+              <a:latin typeface="Calibri"/>
+            </a:endParaRPr>
           </a:p>
         </p:txBody>
       </p:sp>
@@ -17881,7 +17943,6 @@
           <a:lstStyle/>
           <a:p>
             <a:pPr algn="ctr"/>
-            <a:endParaRPr/>
           </a:p>
         </p:txBody>
       </p:sp>
@@ -17925,7 +17986,6 @@
           <a:lstStyle/>
           <a:p>
             <a:pPr algn="ctr"/>
-            <a:endParaRPr/>
           </a:p>
         </p:txBody>
       </p:sp>
@@ -17981,7 +18041,7 @@
           <a:noFill/>
         </p:spPr>
         <p:txBody>
-          <a:bodyPr wrap="square" lIns="38100" tIns="25400" rIns="38100" bIns="25400" anchor="t">
+          <a:bodyPr wrap="square" anchor="t" lIns="38100" rIns="38100" tIns="25400" bIns="25400">
             <a:noAutofit/>
           </a:bodyPr>
           <a:lstStyle/>
@@ -18003,6 +18063,9 @@
               </a:rPr>
               <a:t>Tool calls execute in the backend, append observations, and may create wrapped runtime copies under `agent/agents/pools/_chat_runs_/`.</a:t>
             </a:r>
+            <a:endParaRPr sz="1500" b="0" i="0">
+              <a:latin typeface="Calibri"/>
+            </a:endParaRPr>
           </a:p>
           <a:p>
             <a:pPr>
@@ -18022,6 +18085,9 @@
               </a:rPr>
               <a:t>ACP flows deploy session-scoped pool instances, wire config values, validate NxN graph rules, and execute through Starter-driven flow semantics.</a:t>
             </a:r>
+            <a:endParaRPr sz="1500" b="0" i="0">
+              <a:latin typeface="Calibri"/>
+            </a:endParaRPr>
           </a:p>
           <a:p>
             <a:pPr>
@@ -18041,6 +18107,9 @@
               </a:rPr>
               <a:t>Build scripts collect static assets, bundle Django/Python resources, add agent templates, and assemble `pkg.zip`, `Uninstaller.exe`, and `dist/Tlamatini_Release/`.</a:t>
             </a:r>
+            <a:endParaRPr sz="1500" b="0" i="0">
+              <a:latin typeface="Calibri"/>
+            </a:endParaRPr>
           </a:p>
         </p:txBody>
       </p:sp>
@@ -18053,7 +18122,7 @@
 </file>
 
 <file path=ppt/slides/slide5.xml><?xml version="1.0" encoding="utf-8"?>
-<p:sld xmlns:a="http://schemas.openxmlformats.org/drawingml/2006/main" xmlns:r="http://schemas.openxmlformats.org/officeDocument/2006/relationships" xmlns:p="http://schemas.openxmlformats.org/presentationml/2006/main">
+<p:sld xmlns:a="http://schemas.openxmlformats.org/drawingml/2006/main" xmlns:p="http://schemas.openxmlformats.org/presentationml/2006/main" xmlns:r="http://schemas.openxmlformats.org/officeDocument/2006/relationships">
   <p:cSld>
     <p:spTree>
       <p:nvGrpSpPr>
@@ -18061,14 +18130,7 @@
         <p:cNvGrpSpPr/>
         <p:nvPr/>
       </p:nvGrpSpPr>
-      <p:grpSpPr>
-        <a:xfrm>
-          <a:off x="0" y="0"/>
-          <a:ext cx="0" cy="0"/>
-          <a:chOff x="0" y="0"/>
-          <a:chExt cx="0" cy="0"/>
-        </a:xfrm>
-      </p:grpSpPr>
+      <p:grpSpPr/>
       <p:sp>
         <p:nvSpPr>
           <p:cNvPr id="2" name="Rectangle 1"/>
@@ -18109,7 +18171,6 @@
           <a:lstStyle/>
           <a:p>
             <a:pPr algn="ctr"/>
-            <a:endParaRPr/>
           </a:p>
         </p:txBody>
       </p:sp>
@@ -18153,7 +18214,6 @@
           <a:lstStyle/>
           <a:p>
             <a:pPr algn="ctr"/>
-            <a:endParaRPr/>
           </a:p>
         </p:txBody>
       </p:sp>
@@ -18197,7 +18257,6 @@
           <a:lstStyle/>
           <a:p>
             <a:pPr algn="ctr"/>
-            <a:endParaRPr/>
           </a:p>
         </p:txBody>
       </p:sp>
@@ -18241,7 +18300,6 @@
           <a:lstStyle/>
           <a:p>
             <a:pPr algn="ctr"/>
-            <a:endParaRPr/>
           </a:p>
         </p:txBody>
       </p:sp>
@@ -18285,7 +18343,6 @@
           <a:lstStyle/>
           <a:p>
             <a:pPr algn="ctr"/>
-            <a:endParaRPr/>
           </a:p>
         </p:txBody>
       </p:sp>
@@ -18401,7 +18458,6 @@
           <a:lstStyle/>
           <a:p>
             <a:pPr algn="ctr"/>
-            <a:endParaRPr/>
           </a:p>
         </p:txBody>
       </p:sp>
@@ -18445,7 +18501,6 @@
           <a:lstStyle/>
           <a:p>
             <a:pPr algn="ctr"/>
-            <a:endParaRPr/>
           </a:p>
         </p:txBody>
       </p:sp>
@@ -18501,7 +18556,7 @@
           <a:noFill/>
         </p:spPr>
         <p:txBody>
-          <a:bodyPr wrap="square" lIns="38100" tIns="25400" rIns="38100" bIns="25400" anchor="t">
+          <a:bodyPr wrap="square" anchor="t" lIns="38100" rIns="38100" tIns="25400" bIns="25400">
             <a:noAutofit/>
           </a:bodyPr>
           <a:lstStyle/>
@@ -18523,6 +18578,9 @@
               </a:rPr>
               <a:t>Load selected file or directory context from the chat interface.</a:t>
             </a:r>
+            <a:endParaRPr sz="1500" b="0" i="0">
+              <a:latin typeface="Calibri"/>
+            </a:endParaRPr>
           </a:p>
           <a:p>
             <a:pPr>
@@ -18542,6 +18600,9 @@
               </a:rPr>
               <a:t>Extract metadata, split text, rank chunks with hybrid retrieval, and respect context budgets.</a:t>
             </a:r>
+            <a:endParaRPr sz="1500" b="0" i="0">
+              <a:latin typeface="Calibri"/>
+            </a:endParaRPr>
           </a:p>
           <a:p>
             <a:pPr>
@@ -18561,6 +18622,9 @@
               </a:rPr>
               <a:t>Fallback to explicit loaded files when retrieval cannot provide enough memory.</a:t>
             </a:r>
+            <a:endParaRPr sz="1500" b="0" i="0">
+              <a:latin typeface="Calibri"/>
+            </a:endParaRPr>
           </a:p>
           <a:p>
             <a:pPr>
@@ -18580,6 +18644,9 @@
               </a:rPr>
               <a:t>Preserve the difference between direct one-shot chat and checked Multi-Turn orchestration.</a:t>
             </a:r>
+            <a:endParaRPr sz="1500" b="0" i="0">
+              <a:latin typeface="Calibri"/>
+            </a:endParaRPr>
           </a:p>
         </p:txBody>
       </p:sp>
@@ -18625,7 +18692,6 @@
           <a:lstStyle/>
           <a:p>
             <a:pPr algn="ctr"/>
-            <a:endParaRPr/>
           </a:p>
         </p:txBody>
       </p:sp>
@@ -18669,7 +18735,6 @@
           <a:lstStyle/>
           <a:p>
             <a:pPr algn="ctr"/>
-            <a:endParaRPr/>
           </a:p>
         </p:txBody>
       </p:sp>
@@ -18725,7 +18790,7 @@
           <a:noFill/>
         </p:spPr>
         <p:txBody>
-          <a:bodyPr wrap="square" lIns="38100" tIns="25400" rIns="38100" bIns="25400" anchor="t">
+          <a:bodyPr wrap="square" anchor="t" lIns="38100" rIns="38100" tIns="25400" bIns="25400">
             <a:noAutofit/>
           </a:bodyPr>
           <a:lstStyle/>
@@ -18747,6 +18812,9 @@
               </a:rPr>
               <a:t>The assistant answers from project evidence instead of generic memory.</a:t>
             </a:r>
+            <a:endParaRPr sz="1600" b="0" i="0">
+              <a:latin typeface="Calibri"/>
+            </a:endParaRPr>
           </a:p>
           <a:p>
             <a:pPr>
@@ -18766,6 +18834,9 @@
               </a:rPr>
               <a:t>Large codebases remain navigable without injecting the whole repository into every prompt.</a:t>
             </a:r>
+            <a:endParaRPr sz="1600" b="0" i="0">
+              <a:latin typeface="Calibri"/>
+            </a:endParaRPr>
           </a:p>
           <a:p>
             <a:pPr>
@@ -18785,6 +18856,9 @@
               </a:rPr>
               <a:t>Multi-Turn can prefetch only the contexts required by the current execution plan.</a:t>
             </a:r>
+            <a:endParaRPr sz="1600" b="0" i="0">
+              <a:latin typeface="Calibri"/>
+            </a:endParaRPr>
           </a:p>
         </p:txBody>
       </p:sp>
@@ -18797,7 +18871,7 @@
 </file>
 
 <file path=ppt/slides/slide6.xml><?xml version="1.0" encoding="utf-8"?>
-<p:sld xmlns:a="http://schemas.openxmlformats.org/drawingml/2006/main" xmlns:r="http://schemas.openxmlformats.org/officeDocument/2006/relationships" xmlns:p="http://schemas.openxmlformats.org/presentationml/2006/main">
+<p:sld xmlns:a="http://schemas.openxmlformats.org/drawingml/2006/main" xmlns:p="http://schemas.openxmlformats.org/presentationml/2006/main" xmlns:r="http://schemas.openxmlformats.org/officeDocument/2006/relationships">
   <p:cSld>
     <p:spTree>
       <p:nvGrpSpPr>
@@ -18805,14 +18879,7 @@
         <p:cNvGrpSpPr/>
         <p:nvPr/>
       </p:nvGrpSpPr>
-      <p:grpSpPr>
-        <a:xfrm>
-          <a:off x="0" y="0"/>
-          <a:ext cx="0" cy="0"/>
-          <a:chOff x="0" y="0"/>
-          <a:chExt cx="0" cy="0"/>
-        </a:xfrm>
-      </p:grpSpPr>
+      <p:grpSpPr/>
       <p:sp>
         <p:nvSpPr>
           <p:cNvPr id="2" name="Rectangle 1"/>
@@ -18853,7 +18920,6 @@
           <a:lstStyle/>
           <a:p>
             <a:pPr algn="ctr"/>
-            <a:endParaRPr/>
           </a:p>
         </p:txBody>
       </p:sp>
@@ -18897,7 +18963,6 @@
           <a:lstStyle/>
           <a:p>
             <a:pPr algn="ctr"/>
-            <a:endParaRPr/>
           </a:p>
         </p:txBody>
       </p:sp>
@@ -18941,7 +19006,6 @@
           <a:lstStyle/>
           <a:p>
             <a:pPr algn="ctr"/>
-            <a:endParaRPr/>
           </a:p>
         </p:txBody>
       </p:sp>
@@ -18985,7 +19049,6 @@
           <a:lstStyle/>
           <a:p>
             <a:pPr algn="ctr"/>
-            <a:endParaRPr/>
           </a:p>
         </p:txBody>
       </p:sp>
@@ -19029,7 +19092,6 @@
           <a:lstStyle/>
           <a:p>
             <a:pPr algn="ctr"/>
-            <a:endParaRPr/>
           </a:p>
         </p:txBody>
       </p:sp>
@@ -19145,7 +19207,6 @@
           <a:lstStyle/>
           <a:p>
             <a:pPr algn="ctr"/>
-            <a:endParaRPr/>
           </a:p>
         </p:txBody>
       </p:sp>
@@ -19189,7 +19250,6 @@
           <a:lstStyle/>
           <a:p>
             <a:pPr algn="ctr"/>
-            <a:endParaRPr/>
           </a:p>
         </p:txBody>
       </p:sp>
@@ -19245,7 +19305,7 @@
           <a:noFill/>
         </p:spPr>
         <p:txBody>
-          <a:bodyPr wrap="square" lIns="38100" tIns="25400" rIns="38100" bIns="25400" anchor="t">
+          <a:bodyPr wrap="square" anchor="t" lIns="38100" rIns="38100" tIns="25400" bIns="25400">
             <a:noAutofit/>
           </a:bodyPr>
           <a:lstStyle/>
@@ -19267,6 +19327,9 @@
               </a:rPr>
               <a:t>Capability registry scores context providers, tools, and wrapped agents for the current request.</a:t>
             </a:r>
+            <a:endParaRPr sz="1500" b="0" i="0">
+              <a:latin typeface="Calibri"/>
+            </a:endParaRPr>
           </a:p>
           <a:p>
             <a:pPr>
@@ -19286,6 +19349,9 @@
               </a:rPr>
               <a:t>Global planner builds prefetch, execute, monitor, and answer stages.</a:t>
             </a:r>
+            <a:endParaRPr sz="1500" b="0" i="0">
+              <a:latin typeface="Calibri"/>
+            </a:endParaRPr>
           </a:p>
           <a:p>
             <a:pPr>
@@ -19305,6 +19371,9 @@
               </a:rPr>
               <a:t>Explicit tool loop runs tool calls, appends observations, and asks again until final answer or limit.</a:t>
             </a:r>
+            <a:endParaRPr sz="1500" b="0" i="0">
+              <a:latin typeface="Calibri"/>
+            </a:endParaRPr>
           </a:p>
           <a:p>
             <a:pPr>
@@ -19324,6 +19393,9 @@
               </a:rPr>
               <a:t>Answer Analizer classifies success so the UI can expose Create Flow only when useful.</a:t>
             </a:r>
+            <a:endParaRPr sz="1500" b="0" i="0">
+              <a:latin typeface="Calibri"/>
+            </a:endParaRPr>
           </a:p>
         </p:txBody>
       </p:sp>
@@ -19369,7 +19441,6 @@
           <a:lstStyle/>
           <a:p>
             <a:pPr algn="ctr"/>
-            <a:endParaRPr/>
           </a:p>
         </p:txBody>
       </p:sp>
@@ -19413,7 +19484,6 @@
           <a:lstStyle/>
           <a:p>
             <a:pPr algn="ctr"/>
-            <a:endParaRPr/>
           </a:p>
         </p:txBody>
       </p:sp>
@@ -19469,7 +19539,7 @@
           <a:noFill/>
         </p:spPr>
         <p:txBody>
-          <a:bodyPr wrap="square" lIns="38100" tIns="25400" rIns="38100" bIns="25400" anchor="t">
+          <a:bodyPr wrap="square" anchor="t" lIns="38100" rIns="38100" tIns="25400" bIns="25400">
             <a:noAutofit/>
           </a:bodyPr>
           <a:lstStyle/>
@@ -19491,6 +19561,9 @@
               </a:rPr>
               <a:t>Keeps the original prompt validation and legacy prefetch behavior.</a:t>
             </a:r>
+            <a:endParaRPr sz="1600" b="0" i="0">
+              <a:latin typeface="Calibri"/>
+            </a:endParaRPr>
           </a:p>
           <a:p>
             <a:pPr>
@@ -19510,6 +19583,9 @@
               </a:rPr>
               <a:t>Maintains compatibility for fast Q&amp;A and simple context-grounded answers.</a:t>
             </a:r>
+            <a:endParaRPr sz="1600" b="0" i="0">
+              <a:latin typeface="Calibri"/>
+            </a:endParaRPr>
           </a:p>
           <a:p>
             <a:pPr>
@@ -19529,6 +19605,9 @@
               </a:rPr>
               <a:t>Avoids forcing every chat request into agentic execution.</a:t>
             </a:r>
+            <a:endParaRPr sz="1600" b="0" i="0">
+              <a:latin typeface="Calibri"/>
+            </a:endParaRPr>
           </a:p>
         </p:txBody>
       </p:sp>
@@ -19541,7 +19620,7 @@
 </file>
 
 <file path=ppt/slides/slide7.xml><?xml version="1.0" encoding="utf-8"?>
-<p:sld xmlns:a="http://schemas.openxmlformats.org/drawingml/2006/main" xmlns:r="http://schemas.openxmlformats.org/officeDocument/2006/relationships" xmlns:p="http://schemas.openxmlformats.org/presentationml/2006/main">
+<p:sld xmlns:a="http://schemas.openxmlformats.org/drawingml/2006/main" xmlns:p="http://schemas.openxmlformats.org/presentationml/2006/main" xmlns:r="http://schemas.openxmlformats.org/officeDocument/2006/relationships">
   <p:cSld>
     <p:spTree>
       <p:nvGrpSpPr>
@@ -19549,14 +19628,7 @@
         <p:cNvGrpSpPr/>
         <p:nvPr/>
       </p:nvGrpSpPr>
-      <p:grpSpPr>
-        <a:xfrm>
-          <a:off x="0" y="0"/>
-          <a:ext cx="0" cy="0"/>
-          <a:chOff x="0" y="0"/>
-          <a:chExt cx="0" cy="0"/>
-        </a:xfrm>
-      </p:grpSpPr>
+      <p:grpSpPr/>
       <p:sp>
         <p:nvSpPr>
           <p:cNvPr id="2" name="Rectangle 1"/>
@@ -19597,7 +19669,6 @@
           <a:lstStyle/>
           <a:p>
             <a:pPr algn="ctr"/>
-            <a:endParaRPr/>
           </a:p>
         </p:txBody>
       </p:sp>
@@ -19641,7 +19712,6 @@
           <a:lstStyle/>
           <a:p>
             <a:pPr algn="ctr"/>
-            <a:endParaRPr/>
           </a:p>
         </p:txBody>
       </p:sp>
@@ -19685,7 +19755,6 @@
           <a:lstStyle/>
           <a:p>
             <a:pPr algn="ctr"/>
-            <a:endParaRPr/>
           </a:p>
         </p:txBody>
       </p:sp>
@@ -19729,7 +19798,6 @@
           <a:lstStyle/>
           <a:p>
             <a:pPr algn="ctr"/>
-            <a:endParaRPr/>
           </a:p>
         </p:txBody>
       </p:sp>
@@ -19773,7 +19841,6 @@
           <a:lstStyle/>
           <a:p>
             <a:pPr algn="ctr"/>
-            <a:endParaRPr/>
           </a:p>
         </p:txBody>
       </p:sp>
@@ -19889,7 +19956,6 @@
           <a:lstStyle/>
           <a:p>
             <a:pPr algn="ctr"/>
-            <a:endParaRPr/>
           </a:p>
         </p:txBody>
       </p:sp>
@@ -19933,7 +19999,6 @@
           <a:lstStyle/>
           <a:p>
             <a:pPr algn="ctr"/>
-            <a:endParaRPr/>
           </a:p>
         </p:txBody>
       </p:sp>
@@ -19989,7 +20054,7 @@
           <a:noFill/>
         </p:spPr>
         <p:txBody>
-          <a:bodyPr wrap="square" lIns="38100" tIns="25400" rIns="38100" bIns="25400" anchor="t">
+          <a:bodyPr wrap="square" anchor="t" lIns="38100" rIns="38100" tIns="25400" bIns="25400">
             <a:noAutofit/>
           </a:bodyPr>
           <a:lstStyle/>
@@ -20011,6 +20076,9 @@
               </a:rPr>
               <a:t>Drag prebuilt agents onto the canvas and connect them visually.</a:t>
             </a:r>
+            <a:endParaRPr sz="1500" b="0" i="0">
+              <a:latin typeface="Calibri"/>
+            </a:endParaRPr>
           </a:p>
           <a:p>
             <a:pPr>
@@ -20030,6 +20098,9 @@
               </a:rPr>
               <a:t>Configure deployed pool instances, not only static template folders.</a:t>
             </a:r>
+            <a:endParaRPr sz="1500" b="0" i="0">
+              <a:latin typeface="Calibri"/>
+            </a:endParaRPr>
           </a:p>
           <a:p>
             <a:pPr>
@@ -20049,6 +20120,9 @@
               </a:rPr>
               <a:t>Validate structural rules before execution.</a:t>
             </a:r>
+            <a:endParaRPr sz="1500" b="0" i="0">
+              <a:latin typeface="Calibri"/>
+            </a:endParaRPr>
           </a:p>
           <a:p>
             <a:pPr>
@@ -20068,6 +20142,9 @@
               </a:rPr>
               <a:t>Start through Starter, pause/resume through reanimation state, and stop through Ender semantics.</a:t>
             </a:r>
+            <a:endParaRPr sz="1500" b="0" i="0">
+              <a:latin typeface="Calibri"/>
+            </a:endParaRPr>
           </a:p>
         </p:txBody>
       </p:sp>
@@ -20113,7 +20190,6 @@
           <a:lstStyle/>
           <a:p>
             <a:pPr algn="ctr"/>
-            <a:endParaRPr/>
           </a:p>
         </p:txBody>
       </p:sp>
@@ -20157,7 +20233,6 @@
           <a:lstStyle/>
           <a:p>
             <a:pPr algn="ctr"/>
-            <a:endParaRPr/>
           </a:p>
         </p:txBody>
       </p:sp>
@@ -20213,7 +20288,7 @@
           <a:noFill/>
         </p:spPr>
         <p:txBody>
-          <a:bodyPr wrap="square" lIns="38100" tIns="25400" rIns="38100" bIns="25400" anchor="t">
+          <a:bodyPr wrap="square" anchor="t" lIns="38100" rIns="38100" tIns="25400" bIns="25400">
             <a:noAutofit/>
           </a:bodyPr>
           <a:lstStyle/>
@@ -20235,6 +20310,9 @@
               </a:rPr>
               <a:t>Workflows save and load as `.flw` files.</a:t>
             </a:r>
+            <a:endParaRPr sz="1600" b="0" i="0">
+              <a:latin typeface="Calibri"/>
+            </a:endParaRPr>
           </a:p>
           <a:p>
             <a:pPr>
@@ -20254,6 +20332,9 @@
               </a:rPr>
               <a:t>Generated flows from chat are starter drafts, not a replacement for ACP validation.</a:t>
             </a:r>
+            <a:endParaRPr sz="1600" b="0" i="0">
+              <a:latin typeface="Calibri"/>
+            </a:endParaRPr>
           </a:p>
           <a:p>
             <a:pPr>
@@ -20273,6 +20354,9 @@
               </a:rPr>
               <a:t>LED indicators and logs show runtime health across the session pool.</a:t>
             </a:r>
+            <a:endParaRPr sz="1600" b="0" i="0">
+              <a:latin typeface="Calibri"/>
+            </a:endParaRPr>
           </a:p>
         </p:txBody>
       </p:sp>
@@ -20285,7 +20369,7 @@
 </file>
 
 <file path=ppt/slides/slide8.xml><?xml version="1.0" encoding="utf-8"?>
-<p:sld xmlns:a="http://schemas.openxmlformats.org/drawingml/2006/main" xmlns:r="http://schemas.openxmlformats.org/officeDocument/2006/relationships" xmlns:p="http://schemas.openxmlformats.org/presentationml/2006/main">
+<p:sld xmlns:a="http://schemas.openxmlformats.org/drawingml/2006/main" xmlns:p="http://schemas.openxmlformats.org/presentationml/2006/main" xmlns:r="http://schemas.openxmlformats.org/officeDocument/2006/relationships">
   <p:cSld>
     <p:spTree>
       <p:nvGrpSpPr>
@@ -20293,14 +20377,7 @@
         <p:cNvGrpSpPr/>
         <p:nvPr/>
       </p:nvGrpSpPr>
-      <p:grpSpPr>
-        <a:xfrm>
-          <a:off x="0" y="0"/>
-          <a:ext cx="0" cy="0"/>
-          <a:chOff x="0" y="0"/>
-          <a:chExt cx="0" cy="0"/>
-        </a:xfrm>
-      </p:grpSpPr>
+      <p:grpSpPr/>
       <p:sp>
         <p:nvSpPr>
           <p:cNvPr id="2" name="Rectangle 1"/>
@@ -20341,7 +20418,6 @@
           <a:lstStyle/>
           <a:p>
             <a:pPr algn="ctr"/>
-            <a:endParaRPr/>
           </a:p>
         </p:txBody>
       </p:sp>
@@ -20385,7 +20461,6 @@
           <a:lstStyle/>
           <a:p>
             <a:pPr algn="ctr"/>
-            <a:endParaRPr/>
           </a:p>
         </p:txBody>
       </p:sp>
@@ -20429,7 +20504,6 @@
           <a:lstStyle/>
           <a:p>
             <a:pPr algn="ctr"/>
-            <a:endParaRPr/>
           </a:p>
         </p:txBody>
       </p:sp>
@@ -20473,7 +20547,6 @@
           <a:lstStyle/>
           <a:p>
             <a:pPr algn="ctr"/>
-            <a:endParaRPr/>
           </a:p>
         </p:txBody>
       </p:sp>
@@ -20517,7 +20590,6 @@
           <a:lstStyle/>
           <a:p>
             <a:pPr algn="ctr"/>
-            <a:endParaRPr/>
           </a:p>
         </p:txBody>
       </p:sp>
@@ -20633,7 +20705,6 @@
           <a:lstStyle/>
           <a:p>
             <a:pPr algn="ctr"/>
-            <a:endParaRPr/>
           </a:p>
         </p:txBody>
       </p:sp>
@@ -20677,7 +20748,6 @@
           <a:lstStyle/>
           <a:p>
             <a:pPr algn="ctr"/>
-            <a:endParaRPr/>
           </a:p>
         </p:txBody>
       </p:sp>
@@ -20733,7 +20803,7 @@
           <a:noFill/>
         </p:spPr>
         <p:txBody>
-          <a:bodyPr wrap="square" lIns="38100" tIns="25400" rIns="38100" bIns="25400" anchor="t">
+          <a:bodyPr wrap="square" anchor="t" lIns="38100" rIns="38100" tIns="25400" bIns="25400">
             <a:noAutofit/>
           </a:bodyPr>
           <a:lstStyle/>
@@ -20755,6 +20825,9 @@
               </a:rPr>
               <a:t>Control: starter, ender, stopper, cleaner, barrier, flowbacker</a:t>
             </a:r>
+            <a:endParaRPr sz="1300" b="0" i="0">
+              <a:latin typeface="Calibri"/>
+            </a:endParaRPr>
           </a:p>
           <a:p>
             <a:pPr>
@@ -20774,6 +20847,9 @@
               </a:rPr>
               <a:t>Execution and files: executer, pythonxer, pser, file_creator, file_extractor, file_interpreter, mover, deleter</a:t>
             </a:r>
+            <a:endParaRPr sz="1300" b="0" i="0">
+              <a:latin typeface="Calibri"/>
+            </a:endParaRPr>
           </a:p>
           <a:p>
             <a:pPr>
@@ -20793,6 +20869,9 @@
               </a:rPr>
               <a:t>DevOps and infra: gitter, dockerer, kuberneter, jenkinser, ssher, scper</a:t>
             </a:r>
+            <a:endParaRPr sz="1300" b="0" i="0">
+              <a:latin typeface="Calibri"/>
+            </a:endParaRPr>
           </a:p>
           <a:p>
             <a:pPr>
@@ -20812,6 +20891,9 @@
               </a:rPr>
               <a:t>Data and APIs: sqler, mongoxer, apirer, crawler, googler</a:t>
             </a:r>
+            <a:endParaRPr sz="1300" b="0" i="0">
+              <a:latin typeface="Calibri"/>
+            </a:endParaRPr>
           </a:p>
         </p:txBody>
       </p:sp>
@@ -20857,7 +20939,6 @@
           <a:lstStyle/>
           <a:p>
             <a:pPr algn="ctr"/>
-            <a:endParaRPr/>
           </a:p>
         </p:txBody>
       </p:sp>
@@ -20901,7 +20982,6 @@
           <a:lstStyle/>
           <a:p>
             <a:pPr algn="ctr"/>
-            <a:endParaRPr/>
           </a:p>
         </p:txBody>
       </p:sp>
@@ -20957,7 +21037,7 @@
           <a:noFill/>
         </p:spPr>
         <p:txBody>
-          <a:bodyPr wrap="square" lIns="38100" tIns="25400" rIns="38100" bIns="25400" anchor="t">
+          <a:bodyPr wrap="square" anchor="t" lIns="38100" rIns="38100" tIns="25400" bIns="25400">
             <a:noAutofit/>
           </a:bodyPr>
           <a:lstStyle/>
@@ -20979,6 +21059,9 @@
               </a:rPr>
               <a:t>Monitoring and routing: monitor_log, monitor_netstat, flowhypervisor, forker, asker, counter, and, or</a:t>
             </a:r>
+            <a:endParaRPr sz="1300" b="0" i="0">
+              <a:latin typeface="Calibri"/>
+            </a:endParaRPr>
           </a:p>
           <a:p>
             <a:pPr>
@@ -20998,6 +21081,9 @@
               </a:rPr>
               <a:t>Communication: notifier, emailer, recmailer, telegramer, telegramrx, whatsapper</a:t>
             </a:r>
+            <a:endParaRPr sz="1300" b="0" i="0">
+              <a:latin typeface="Calibri"/>
+            </a:endParaRPr>
           </a:p>
           <a:p>
             <a:pPr>
@@ -21017,6 +21103,9 @@
               </a:rPr>
               <a:t>Security and media: kyber_keygen, kyber_cipher, kyber_decipher, image_interpreter, shoter, j_decompiler</a:t>
             </a:r>
+            <a:endParaRPr sz="1300" b="0" i="0">
+              <a:latin typeface="Calibri"/>
+            </a:endParaRPr>
           </a:p>
           <a:p>
             <a:pPr>
@@ -21036,6 +21125,9 @@
               </a:rPr>
               <a:t>Workflow intelligence: flowcreator, gatewayer, gateway_relayer, node_manager, parametrizer, prompter, summarizer</a:t>
             </a:r>
+            <a:endParaRPr sz="1300" b="0" i="0">
+              <a:latin typeface="Calibri"/>
+            </a:endParaRPr>
           </a:p>
         </p:txBody>
       </p:sp>
@@ -21048,7 +21140,7 @@
 </file>
 
 <file path=ppt/slides/slide9.xml><?xml version="1.0" encoding="utf-8"?>
-<p:sld xmlns:a="http://schemas.openxmlformats.org/drawingml/2006/main" xmlns:r="http://schemas.openxmlformats.org/officeDocument/2006/relationships" xmlns:p="http://schemas.openxmlformats.org/presentationml/2006/main">
+<p:sld xmlns:a="http://schemas.openxmlformats.org/drawingml/2006/main" xmlns:p="http://schemas.openxmlformats.org/presentationml/2006/main" xmlns:r="http://schemas.openxmlformats.org/officeDocument/2006/relationships">
   <p:cSld>
     <p:spTree>
       <p:nvGrpSpPr>
@@ -21056,14 +21148,7 @@
         <p:cNvGrpSpPr/>
         <p:nvPr/>
       </p:nvGrpSpPr>
-      <p:grpSpPr>
-        <a:xfrm>
-          <a:off x="0" y="0"/>
-          <a:ext cx="0" cy="0"/>
-          <a:chOff x="0" y="0"/>
-          <a:chExt cx="0" cy="0"/>
-        </a:xfrm>
-      </p:grpSpPr>
+      <p:grpSpPr/>
       <p:sp>
         <p:nvSpPr>
           <p:cNvPr id="2" name="Rectangle 1"/>
@@ -21104,7 +21189,6 @@
           <a:lstStyle/>
           <a:p>
             <a:pPr algn="ctr"/>
-            <a:endParaRPr/>
           </a:p>
         </p:txBody>
       </p:sp>
@@ -21148,7 +21232,6 @@
           <a:lstStyle/>
           <a:p>
             <a:pPr algn="ctr"/>
-            <a:endParaRPr/>
           </a:p>
         </p:txBody>
       </p:sp>
@@ -21192,7 +21275,6 @@
           <a:lstStyle/>
           <a:p>
             <a:pPr algn="ctr"/>
-            <a:endParaRPr/>
           </a:p>
         </p:txBody>
       </p:sp>
@@ -21236,7 +21318,6 @@
           <a:lstStyle/>
           <a:p>
             <a:pPr algn="ctr"/>
-            <a:endParaRPr/>
           </a:p>
         </p:txBody>
       </p:sp>
@@ -21280,7 +21361,6 @@
           <a:lstStyle/>
           <a:p>
             <a:pPr algn="ctr"/>
-            <a:endParaRPr/>
           </a:p>
         </p:txBody>
       </p:sp>
@@ -21396,7 +21476,6 @@
           <a:lstStyle/>
           <a:p>
             <a:pPr algn="ctr"/>
-            <a:endParaRPr/>
           </a:p>
         </p:txBody>
       </p:sp>
@@ -21440,7 +21519,6 @@
           <a:lstStyle/>
           <a:p>
             <a:pPr algn="ctr"/>
-            <a:endParaRPr/>
           </a:p>
         </p:txBody>
       </p:sp>
@@ -21496,7 +21574,7 @@
           <a:noFill/>
         </p:spPr>
         <p:txBody>
-          <a:bodyPr wrap="square" lIns="38100" tIns="25400" rIns="38100" bIns="25400" anchor="t">
+          <a:bodyPr wrap="square" anchor="t" lIns="38100" rIns="38100" tIns="25400" bIns="25400">
             <a:noAutofit/>
           </a:bodyPr>
           <a:lstStyle/>
@@ -21518,6 +21596,9 @@
               </a:rPr>
               <a:t>Receives HTTP webhook events or optional folder-drop files.</a:t>
             </a:r>
+            <a:endParaRPr sz="1500" b="0" i="0">
+              <a:latin typeface="Calibri"/>
+            </a:endParaRPr>
           </a:p>
           <a:p>
             <a:pPr>
@@ -21537,6 +21618,9 @@
               </a:rPr>
               <a:t>Normalizes, persists, queues, and dispatches events into downstream workflow agents.</a:t>
             </a:r>
+            <a:endParaRPr sz="1500" b="0" i="0">
+              <a:latin typeface="Calibri"/>
+            </a:endParaRPr>
           </a:p>
           <a:p>
             <a:pPr>
@@ -21556,6 +21640,9 @@
               </a:rPr>
               <a:t>Supports bearer/HMAC-style auth patterns, IP allowlists, dedup files, and crash recovery state.</a:t>
             </a:r>
+            <a:endParaRPr sz="1500" b="0" i="0">
+              <a:latin typeface="Calibri"/>
+            </a:endParaRPr>
           </a:p>
         </p:txBody>
       </p:sp>
@@ -21601,7 +21688,6 @@
           <a:lstStyle/>
           <a:p>
             <a:pPr algn="ctr"/>
-            <a:endParaRPr/>
           </a:p>
         </p:txBody>
       </p:sp>
@@ -21645,7 +21731,6 @@
           <a:lstStyle/>
           <a:p>
             <a:pPr algn="ctr"/>
-            <a:endParaRPr/>
           </a:p>
         </p:txBody>
       </p:sp>
@@ -21701,7 +21786,7 @@
           <a:noFill/>
         </p:spPr>
         <p:txBody>
-          <a:bodyPr wrap="square" lIns="38100" tIns="25400" rIns="38100" bIns="25400" anchor="t">
+          <a:bodyPr wrap="square" anchor="t" lIns="38100" rIns="38100" tIns="25400" bIns="25400">
             <a:noAutofit/>
           </a:bodyPr>
           <a:lstStyle/>
@@ -21723,6 +21808,9 @@
               </a:rPr>
               <a:t>Gatewayer is a workflow trigger, not a chat-router clone.</a:t>
             </a:r>
+            <a:endParaRPr sz="1600" b="0" i="0">
+              <a:latin typeface="Calibri"/>
+            </a:endParaRPr>
           </a:p>
           <a:p>
             <a:pPr>
@@ -21742,6 +21830,9 @@
               </a:rPr>
               <a:t>Declared config fields are now documented with clear caveats where enforcement is not complete.</a:t>
             </a:r>
+            <a:endParaRPr sz="1600" b="0" i="0">
+              <a:latin typeface="Calibri"/>
+            </a:endParaRPr>
           </a:p>
           <a:p>
             <a:pPr>
@@ -21761,6 +21852,9 @@
               </a:rPr>
               <a:t>Stable log markers let Monitor Log and Summarizer watch gateway health.</a:t>
             </a:r>
+            <a:endParaRPr sz="1600" b="0" i="0">
+              <a:latin typeface="Calibri"/>
+            </a:endParaRPr>
           </a:p>
         </p:txBody>
       </p:sp>

--- a/Tlamatini_eXtended_Artificial_Intelligence_Humanly_Tempered.pptx
+++ b/Tlamatini_eXtended_Artificial_Intelligence_Humanly_Tempered.pptx
@@ -5,40 +5,40 @@
     <p:sldMasterId id="2147483648" r:id="rId1"/>
   </p:sldMasterIdLst>
   <p:sldIdLst>
-    <p:sldId id="256" r:id="rId7"/>
-    <p:sldId id="257" r:id="rId8"/>
-    <p:sldId id="258" r:id="rId9"/>
-    <p:sldId id="259" r:id="rId10"/>
-    <p:sldId id="260" r:id="rId11"/>
-    <p:sldId id="261" r:id="rId12"/>
-    <p:sldId id="262" r:id="rId13"/>
-    <p:sldId id="263" r:id="rId14"/>
-    <p:sldId id="264" r:id="rId15"/>
-    <p:sldId id="265" r:id="rId16"/>
-    <p:sldId id="266" r:id="rId17"/>
-    <p:sldId id="267" r:id="rId18"/>
-    <p:sldId id="268" r:id="rId19"/>
-    <p:sldId id="269" r:id="rId20"/>
-    <p:sldId id="270" r:id="rId21"/>
-    <p:sldId id="271" r:id="rId22"/>
-    <p:sldId id="272" r:id="rId23"/>
-    <p:sldId id="273" r:id="rId24"/>
-    <p:sldId id="274" r:id="rId25"/>
-    <p:sldId id="275" r:id="rId26"/>
-    <p:sldId id="276" r:id="rId27"/>
-    <p:sldId id="277" r:id="rId28"/>
-    <p:sldId id="278" r:id="rId29"/>
-    <p:sldId id="279" r:id="rId30"/>
-    <p:sldId id="280" r:id="rId31"/>
-    <p:sldId id="281" r:id="rId32"/>
-    <p:sldId id="282" r:id="rId33"/>
-    <p:sldId id="283" r:id="rId34"/>
-    <p:sldId id="284" r:id="rId35"/>
-    <p:sldId id="285" r:id="rId36"/>
-    <p:sldId id="286" r:id="rId37"/>
-    <p:sldId id="287" r:id="rId38"/>
+    <p:sldId id="256" r:id="rId2"/>
+    <p:sldId id="257" r:id="rId3"/>
+    <p:sldId id="258" r:id="rId4"/>
+    <p:sldId id="259" r:id="rId5"/>
+    <p:sldId id="260" r:id="rId6"/>
+    <p:sldId id="261" r:id="rId7"/>
+    <p:sldId id="262" r:id="rId8"/>
+    <p:sldId id="263" r:id="rId9"/>
+    <p:sldId id="264" r:id="rId10"/>
+    <p:sldId id="265" r:id="rId11"/>
+    <p:sldId id="266" r:id="rId12"/>
+    <p:sldId id="267" r:id="rId13"/>
+    <p:sldId id="268" r:id="rId14"/>
+    <p:sldId id="269" r:id="rId15"/>
+    <p:sldId id="270" r:id="rId16"/>
+    <p:sldId id="271" r:id="rId17"/>
+    <p:sldId id="272" r:id="rId18"/>
+    <p:sldId id="273" r:id="rId19"/>
+    <p:sldId id="274" r:id="rId20"/>
+    <p:sldId id="275" r:id="rId21"/>
+    <p:sldId id="276" r:id="rId22"/>
+    <p:sldId id="277" r:id="rId23"/>
+    <p:sldId id="278" r:id="rId24"/>
+    <p:sldId id="279" r:id="rId25"/>
+    <p:sldId id="280" r:id="rId26"/>
+    <p:sldId id="281" r:id="rId27"/>
+    <p:sldId id="282" r:id="rId28"/>
+    <p:sldId id="283" r:id="rId29"/>
+    <p:sldId id="284" r:id="rId30"/>
+    <p:sldId id="285" r:id="rId31"/>
+    <p:sldId id="286" r:id="rId32"/>
+    <p:sldId id="287" r:id="rId33"/>
   </p:sldIdLst>
-  <p:sldSz cx="12191695" cy="6858000" type="screen4x3"/>
+  <p:sldSz cx="12192000" cy="6858000"/>
   <p:notesSz cx="6858000" cy="9144000"/>
   <p:defaultTextStyle>
     <a:defPPr>
@@ -135,6 +135,22 @@
       </a:defRPr>
     </a:lvl9pPr>
   </p:defaultTextStyle>
+  <p:extLst>
+    <p:ext uri="{EFAFB233-063F-42B5-8137-9DF3F51BA10A}">
+      <p15:sldGuideLst xmlns:p15="http://schemas.microsoft.com/office/powerpoint/2012/main">
+        <p15:guide id="1" orient="horz" pos="2160">
+          <p15:clr>
+            <a:srgbClr val="A4A3A4"/>
+          </p15:clr>
+        </p15:guide>
+        <p15:guide id="2" pos="2880">
+          <p15:clr>
+            <a:srgbClr val="A4A3A4"/>
+          </p15:clr>
+        </p15:guide>
+      </p15:sldGuideLst>
+    </p:ext>
+  </p:extLst>
 </p:presentation>
 </file>
 
@@ -176,10 +192,9 @@
           <a:lstStyle/>
           <a:p>
             <a:r>
-              <a:rPr lang="en-US" smtClean="0"/>
+              <a:rPr lang="en-US"/>
               <a:t>Click to edit Master title style</a:t>
             </a:r>
-            <a:endParaRPr lang="en-US"/>
           </a:p>
         </p:txBody>
       </p:sp>
@@ -295,10 +310,9 @@
           </a:lstStyle>
           <a:p>
             <a:r>
-              <a:rPr lang="en-US" smtClean="0"/>
+              <a:rPr lang="en-US"/>
               <a:t>Click to edit Master subtitle style</a:t>
             </a:r>
-            <a:endParaRPr lang="en-US"/>
           </a:p>
         </p:txBody>
       </p:sp>
@@ -319,7 +333,7 @@
           <a:p>
             <a:fld id="{5BCAD085-E8A6-8845-BD4E-CB4CCA059FC4}" type="datetimeFigureOut">
               <a:rPr lang="en-US" smtClean="0"/>
-              <a:t>1/27/13</a:t>
+              <a:t>4/18/2026</a:t>
             </a:fld>
             <a:endParaRPr lang="en-US"/>
           </a:p>
@@ -413,10 +427,9 @@
           <a:lstStyle/>
           <a:p>
             <a:r>
-              <a:rPr lang="en-US" smtClean="0"/>
+              <a:rPr lang="en-US"/>
               <a:t>Click to edit Master title style</a:t>
             </a:r>
-            <a:endParaRPr lang="en-US"/>
           </a:p>
         </p:txBody>
       </p:sp>
@@ -437,38 +450,37 @@
           <a:p>
             <a:pPr lvl="0"/>
             <a:r>
-              <a:rPr lang="en-US" smtClean="0"/>
+              <a:rPr lang="en-US"/>
               <a:t>Click to edit Master text styles</a:t>
             </a:r>
           </a:p>
           <a:p>
             <a:pPr lvl="1"/>
             <a:r>
-              <a:rPr lang="en-US" smtClean="0"/>
+              <a:rPr lang="en-US"/>
               <a:t>Second level</a:t>
             </a:r>
           </a:p>
           <a:p>
             <a:pPr lvl="2"/>
             <a:r>
-              <a:rPr lang="en-US" smtClean="0"/>
+              <a:rPr lang="en-US"/>
               <a:t>Third level</a:t>
             </a:r>
           </a:p>
           <a:p>
             <a:pPr lvl="3"/>
             <a:r>
-              <a:rPr lang="en-US" smtClean="0"/>
+              <a:rPr lang="en-US"/>
               <a:t>Fourth level</a:t>
             </a:r>
           </a:p>
           <a:p>
             <a:pPr lvl="4"/>
             <a:r>
-              <a:rPr lang="en-US" smtClean="0"/>
+              <a:rPr lang="en-US"/>
               <a:t>Fifth level</a:t>
             </a:r>
-            <a:endParaRPr lang="en-US"/>
           </a:p>
         </p:txBody>
       </p:sp>
@@ -489,7 +501,7 @@
           <a:p>
             <a:fld id="{5BCAD085-E8A6-8845-BD4E-CB4CCA059FC4}" type="datetimeFigureOut">
               <a:rPr lang="en-US" smtClean="0"/>
-              <a:t>1/27/13</a:t>
+              <a:t>4/18/2026</a:t>
             </a:fld>
             <a:endParaRPr lang="en-US"/>
           </a:p>
@@ -588,10 +600,9 @@
           <a:lstStyle/>
           <a:p>
             <a:r>
-              <a:rPr lang="en-US" smtClean="0"/>
+              <a:rPr lang="en-US"/>
               <a:t>Click to edit Master title style</a:t>
             </a:r>
-            <a:endParaRPr lang="en-US"/>
           </a:p>
         </p:txBody>
       </p:sp>
@@ -617,38 +628,37 @@
           <a:p>
             <a:pPr lvl="0"/>
             <a:r>
-              <a:rPr lang="en-US" smtClean="0"/>
+              <a:rPr lang="en-US"/>
               <a:t>Click to edit Master text styles</a:t>
             </a:r>
           </a:p>
           <a:p>
             <a:pPr lvl="1"/>
             <a:r>
-              <a:rPr lang="en-US" smtClean="0"/>
+              <a:rPr lang="en-US"/>
               <a:t>Second level</a:t>
             </a:r>
           </a:p>
           <a:p>
             <a:pPr lvl="2"/>
             <a:r>
-              <a:rPr lang="en-US" smtClean="0"/>
+              <a:rPr lang="en-US"/>
               <a:t>Third level</a:t>
             </a:r>
           </a:p>
           <a:p>
             <a:pPr lvl="3"/>
             <a:r>
-              <a:rPr lang="en-US" smtClean="0"/>
+              <a:rPr lang="en-US"/>
               <a:t>Fourth level</a:t>
             </a:r>
           </a:p>
           <a:p>
             <a:pPr lvl="4"/>
             <a:r>
-              <a:rPr lang="en-US" smtClean="0"/>
+              <a:rPr lang="en-US"/>
               <a:t>Fifth level</a:t>
             </a:r>
-            <a:endParaRPr lang="en-US"/>
           </a:p>
         </p:txBody>
       </p:sp>
@@ -669,7 +679,7 @@
           <a:p>
             <a:fld id="{5BCAD085-E8A6-8845-BD4E-CB4CCA059FC4}" type="datetimeFigureOut">
               <a:rPr lang="en-US" smtClean="0"/>
-              <a:t>1/27/13</a:t>
+              <a:t>4/18/2026</a:t>
             </a:fld>
             <a:endParaRPr lang="en-US"/>
           </a:p>
@@ -763,10 +773,9 @@
           <a:lstStyle/>
           <a:p>
             <a:r>
-              <a:rPr lang="en-US" smtClean="0"/>
+              <a:rPr lang="en-US"/>
               <a:t>Click to edit Master title style</a:t>
             </a:r>
-            <a:endParaRPr lang="en-US"/>
           </a:p>
         </p:txBody>
       </p:sp>
@@ -787,38 +796,37 @@
           <a:p>
             <a:pPr lvl="0"/>
             <a:r>
-              <a:rPr lang="en-US" smtClean="0"/>
+              <a:rPr lang="en-US"/>
               <a:t>Click to edit Master text styles</a:t>
             </a:r>
           </a:p>
           <a:p>
             <a:pPr lvl="1"/>
             <a:r>
-              <a:rPr lang="en-US" smtClean="0"/>
+              <a:rPr lang="en-US"/>
               <a:t>Second level</a:t>
             </a:r>
           </a:p>
           <a:p>
             <a:pPr lvl="2"/>
             <a:r>
-              <a:rPr lang="en-US" smtClean="0"/>
+              <a:rPr lang="en-US"/>
               <a:t>Third level</a:t>
             </a:r>
           </a:p>
           <a:p>
             <a:pPr lvl="3"/>
             <a:r>
-              <a:rPr lang="en-US" smtClean="0"/>
+              <a:rPr lang="en-US"/>
               <a:t>Fourth level</a:t>
             </a:r>
           </a:p>
           <a:p>
             <a:pPr lvl="4"/>
             <a:r>
-              <a:rPr lang="en-US" smtClean="0"/>
+              <a:rPr lang="en-US"/>
               <a:t>Fifth level</a:t>
             </a:r>
-            <a:endParaRPr lang="en-US"/>
           </a:p>
         </p:txBody>
       </p:sp>
@@ -839,7 +847,7 @@
           <a:p>
             <a:fld id="{5BCAD085-E8A6-8845-BD4E-CB4CCA059FC4}" type="datetimeFigureOut">
               <a:rPr lang="en-US" smtClean="0"/>
-              <a:t>1/27/13</a:t>
+              <a:t>4/18/2026</a:t>
             </a:fld>
             <a:endParaRPr lang="en-US"/>
           </a:p>
@@ -942,10 +950,9 @@
           </a:lstStyle>
           <a:p>
             <a:r>
-              <a:rPr lang="en-US" smtClean="0"/>
+              <a:rPr lang="en-US"/>
               <a:t>Click to edit Master title style</a:t>
             </a:r>
-            <a:endParaRPr lang="en-US"/>
           </a:p>
         </p:txBody>
       </p:sp>
@@ -1062,7 +1069,7 @@
           <a:p>
             <a:pPr lvl="0"/>
             <a:r>
-              <a:rPr lang="en-US" smtClean="0"/>
+              <a:rPr lang="en-US"/>
               <a:t>Click to edit Master text styles</a:t>
             </a:r>
           </a:p>
@@ -1085,7 +1092,7 @@
           <a:p>
             <a:fld id="{5BCAD085-E8A6-8845-BD4E-CB4CCA059FC4}" type="datetimeFigureOut">
               <a:rPr lang="en-US" smtClean="0"/>
-              <a:t>1/27/13</a:t>
+              <a:t>4/18/2026</a:t>
             </a:fld>
             <a:endParaRPr lang="en-US"/>
           </a:p>
@@ -1179,10 +1186,9 @@
           <a:lstStyle/>
           <a:p>
             <a:r>
-              <a:rPr lang="en-US" smtClean="0"/>
+              <a:rPr lang="en-US"/>
               <a:t>Click to edit Master title style</a:t>
             </a:r>
-            <a:endParaRPr lang="en-US"/>
           </a:p>
         </p:txBody>
       </p:sp>
@@ -1236,38 +1242,37 @@
           <a:p>
             <a:pPr lvl="0"/>
             <a:r>
-              <a:rPr lang="en-US" smtClean="0"/>
+              <a:rPr lang="en-US"/>
               <a:t>Click to edit Master text styles</a:t>
             </a:r>
           </a:p>
           <a:p>
             <a:pPr lvl="1"/>
             <a:r>
-              <a:rPr lang="en-US" smtClean="0"/>
+              <a:rPr lang="en-US"/>
               <a:t>Second level</a:t>
             </a:r>
           </a:p>
           <a:p>
             <a:pPr lvl="2"/>
             <a:r>
-              <a:rPr lang="en-US" smtClean="0"/>
+              <a:rPr lang="en-US"/>
               <a:t>Third level</a:t>
             </a:r>
           </a:p>
           <a:p>
             <a:pPr lvl="3"/>
             <a:r>
-              <a:rPr lang="en-US" smtClean="0"/>
+              <a:rPr lang="en-US"/>
               <a:t>Fourth level</a:t>
             </a:r>
           </a:p>
           <a:p>
             <a:pPr lvl="4"/>
             <a:r>
-              <a:rPr lang="en-US" smtClean="0"/>
+              <a:rPr lang="en-US"/>
               <a:t>Fifth level</a:t>
             </a:r>
-            <a:endParaRPr lang="en-US"/>
           </a:p>
         </p:txBody>
       </p:sp>
@@ -1321,38 +1326,37 @@
           <a:p>
             <a:pPr lvl="0"/>
             <a:r>
-              <a:rPr lang="en-US" smtClean="0"/>
+              <a:rPr lang="en-US"/>
               <a:t>Click to edit Master text styles</a:t>
             </a:r>
           </a:p>
           <a:p>
             <a:pPr lvl="1"/>
             <a:r>
-              <a:rPr lang="en-US" smtClean="0"/>
+              <a:rPr lang="en-US"/>
               <a:t>Second level</a:t>
             </a:r>
           </a:p>
           <a:p>
             <a:pPr lvl="2"/>
             <a:r>
-              <a:rPr lang="en-US" smtClean="0"/>
+              <a:rPr lang="en-US"/>
               <a:t>Third level</a:t>
             </a:r>
           </a:p>
           <a:p>
             <a:pPr lvl="3"/>
             <a:r>
-              <a:rPr lang="en-US" smtClean="0"/>
+              <a:rPr lang="en-US"/>
               <a:t>Fourth level</a:t>
             </a:r>
           </a:p>
           <a:p>
             <a:pPr lvl="4"/>
             <a:r>
-              <a:rPr lang="en-US" smtClean="0"/>
+              <a:rPr lang="en-US"/>
               <a:t>Fifth level</a:t>
             </a:r>
-            <a:endParaRPr lang="en-US"/>
           </a:p>
         </p:txBody>
       </p:sp>
@@ -1373,7 +1377,7 @@
           <a:p>
             <a:fld id="{5BCAD085-E8A6-8845-BD4E-CB4CCA059FC4}" type="datetimeFigureOut">
               <a:rPr lang="en-US" smtClean="0"/>
-              <a:t>1/27/13</a:t>
+              <a:t>4/18/2026</a:t>
             </a:fld>
             <a:endParaRPr lang="en-US"/>
           </a:p>
@@ -1471,10 +1475,9 @@
           </a:lstStyle>
           <a:p>
             <a:r>
-              <a:rPr lang="en-US" smtClean="0"/>
+              <a:rPr lang="en-US"/>
               <a:t>Click to edit Master title style</a:t>
             </a:r>
-            <a:endParaRPr lang="en-US"/>
           </a:p>
         </p:txBody>
       </p:sp>
@@ -1537,7 +1540,7 @@
           <a:p>
             <a:pPr lvl="0"/>
             <a:r>
-              <a:rPr lang="en-US" smtClean="0"/>
+              <a:rPr lang="en-US"/>
               <a:t>Click to edit Master text styles</a:t>
             </a:r>
           </a:p>
@@ -1593,38 +1596,37 @@
           <a:p>
             <a:pPr lvl="0"/>
             <a:r>
-              <a:rPr lang="en-US" smtClean="0"/>
+              <a:rPr lang="en-US"/>
               <a:t>Click to edit Master text styles</a:t>
             </a:r>
           </a:p>
           <a:p>
             <a:pPr lvl="1"/>
             <a:r>
-              <a:rPr lang="en-US" smtClean="0"/>
+              <a:rPr lang="en-US"/>
               <a:t>Second level</a:t>
             </a:r>
           </a:p>
           <a:p>
             <a:pPr lvl="2"/>
             <a:r>
-              <a:rPr lang="en-US" smtClean="0"/>
+              <a:rPr lang="en-US"/>
               <a:t>Third level</a:t>
             </a:r>
           </a:p>
           <a:p>
             <a:pPr lvl="3"/>
             <a:r>
-              <a:rPr lang="en-US" smtClean="0"/>
+              <a:rPr lang="en-US"/>
               <a:t>Fourth level</a:t>
             </a:r>
           </a:p>
           <a:p>
             <a:pPr lvl="4"/>
             <a:r>
-              <a:rPr lang="en-US" smtClean="0"/>
+              <a:rPr lang="en-US"/>
               <a:t>Fifth level</a:t>
             </a:r>
-            <a:endParaRPr lang="en-US"/>
           </a:p>
         </p:txBody>
       </p:sp>
@@ -1687,7 +1689,7 @@
           <a:p>
             <a:pPr lvl="0"/>
             <a:r>
-              <a:rPr lang="en-US" smtClean="0"/>
+              <a:rPr lang="en-US"/>
               <a:t>Click to edit Master text styles</a:t>
             </a:r>
           </a:p>
@@ -1743,38 +1745,37 @@
           <a:p>
             <a:pPr lvl="0"/>
             <a:r>
-              <a:rPr lang="en-US" smtClean="0"/>
+              <a:rPr lang="en-US"/>
               <a:t>Click to edit Master text styles</a:t>
             </a:r>
           </a:p>
           <a:p>
             <a:pPr lvl="1"/>
             <a:r>
-              <a:rPr lang="en-US" smtClean="0"/>
+              <a:rPr lang="en-US"/>
               <a:t>Second level</a:t>
             </a:r>
           </a:p>
           <a:p>
             <a:pPr lvl="2"/>
             <a:r>
-              <a:rPr lang="en-US" smtClean="0"/>
+              <a:rPr lang="en-US"/>
               <a:t>Third level</a:t>
             </a:r>
           </a:p>
           <a:p>
             <a:pPr lvl="3"/>
             <a:r>
-              <a:rPr lang="en-US" smtClean="0"/>
+              <a:rPr lang="en-US"/>
               <a:t>Fourth level</a:t>
             </a:r>
           </a:p>
           <a:p>
             <a:pPr lvl="4"/>
             <a:r>
-              <a:rPr lang="en-US" smtClean="0"/>
+              <a:rPr lang="en-US"/>
               <a:t>Fifth level</a:t>
             </a:r>
-            <a:endParaRPr lang="en-US"/>
           </a:p>
         </p:txBody>
       </p:sp>
@@ -1795,7 +1796,7 @@
           <a:p>
             <a:fld id="{5BCAD085-E8A6-8845-BD4E-CB4CCA059FC4}" type="datetimeFigureOut">
               <a:rPr lang="en-US" smtClean="0"/>
-              <a:t>1/27/13</a:t>
+              <a:t>4/18/2026</a:t>
             </a:fld>
             <a:endParaRPr lang="en-US"/>
           </a:p>
@@ -1889,10 +1890,9 @@
           <a:lstStyle/>
           <a:p>
             <a:r>
-              <a:rPr lang="en-US" smtClean="0"/>
+              <a:rPr lang="en-US"/>
               <a:t>Click to edit Master title style</a:t>
             </a:r>
-            <a:endParaRPr lang="en-US"/>
           </a:p>
         </p:txBody>
       </p:sp>
@@ -1913,7 +1913,7 @@
           <a:p>
             <a:fld id="{5BCAD085-E8A6-8845-BD4E-CB4CCA059FC4}" type="datetimeFigureOut">
               <a:rPr lang="en-US" smtClean="0"/>
-              <a:t>1/27/13</a:t>
+              <a:t>4/18/2026</a:t>
             </a:fld>
             <a:endParaRPr lang="en-US"/>
           </a:p>
@@ -2008,7 +2008,7 @@
           <a:p>
             <a:fld id="{5BCAD085-E8A6-8845-BD4E-CB4CCA059FC4}" type="datetimeFigureOut">
               <a:rPr lang="en-US" smtClean="0"/>
-              <a:t>1/27/13</a:t>
+              <a:t>4/18/2026</a:t>
             </a:fld>
             <a:endParaRPr lang="en-US"/>
           </a:p>
@@ -2111,10 +2111,9 @@
           </a:lstStyle>
           <a:p>
             <a:r>
-              <a:rPr lang="en-US" smtClean="0"/>
+              <a:rPr lang="en-US"/>
               <a:t>Click to edit Master title style</a:t>
             </a:r>
-            <a:endParaRPr lang="en-US"/>
           </a:p>
         </p:txBody>
       </p:sp>
@@ -2168,38 +2167,37 @@
           <a:p>
             <a:pPr lvl="0"/>
             <a:r>
-              <a:rPr lang="en-US" smtClean="0"/>
+              <a:rPr lang="en-US"/>
               <a:t>Click to edit Master text styles</a:t>
             </a:r>
           </a:p>
           <a:p>
             <a:pPr lvl="1"/>
             <a:r>
-              <a:rPr lang="en-US" smtClean="0"/>
+              <a:rPr lang="en-US"/>
               <a:t>Second level</a:t>
             </a:r>
           </a:p>
           <a:p>
             <a:pPr lvl="2"/>
             <a:r>
-              <a:rPr lang="en-US" smtClean="0"/>
+              <a:rPr lang="en-US"/>
               <a:t>Third level</a:t>
             </a:r>
           </a:p>
           <a:p>
             <a:pPr lvl="3"/>
             <a:r>
-              <a:rPr lang="en-US" smtClean="0"/>
+              <a:rPr lang="en-US"/>
               <a:t>Fourth level</a:t>
             </a:r>
           </a:p>
           <a:p>
             <a:pPr lvl="4"/>
             <a:r>
-              <a:rPr lang="en-US" smtClean="0"/>
+              <a:rPr lang="en-US"/>
               <a:t>Fifth level</a:t>
             </a:r>
-            <a:endParaRPr lang="en-US"/>
           </a:p>
         </p:txBody>
       </p:sp>
@@ -2262,7 +2260,7 @@
           <a:p>
             <a:pPr lvl="0"/>
             <a:r>
-              <a:rPr lang="en-US" smtClean="0"/>
+              <a:rPr lang="en-US"/>
               <a:t>Click to edit Master text styles</a:t>
             </a:r>
           </a:p>
@@ -2285,7 +2283,7 @@
           <a:p>
             <a:fld id="{5BCAD085-E8A6-8845-BD4E-CB4CCA059FC4}" type="datetimeFigureOut">
               <a:rPr lang="en-US" smtClean="0"/>
-              <a:t>1/27/13</a:t>
+              <a:t>4/18/2026</a:t>
             </a:fld>
             <a:endParaRPr lang="en-US"/>
           </a:p>
@@ -2388,10 +2386,9 @@
           </a:lstStyle>
           <a:p>
             <a:r>
-              <a:rPr lang="en-US" smtClean="0"/>
+              <a:rPr lang="en-US"/>
               <a:t>Click to edit Master title style</a:t>
             </a:r>
-            <a:endParaRPr lang="en-US"/>
           </a:p>
         </p:txBody>
       </p:sp>
@@ -2515,7 +2512,7 @@
           <a:p>
             <a:pPr lvl="0"/>
             <a:r>
-              <a:rPr lang="en-US" smtClean="0"/>
+              <a:rPr lang="en-US"/>
               <a:t>Click to edit Master text styles</a:t>
             </a:r>
           </a:p>
@@ -2538,7 +2535,7 @@
           <a:p>
             <a:fld id="{5BCAD085-E8A6-8845-BD4E-CB4CCA059FC4}" type="datetimeFigureOut">
               <a:rPr lang="en-US" smtClean="0"/>
-              <a:t>1/27/13</a:t>
+              <a:t>4/18/2026</a:t>
             </a:fld>
             <a:endParaRPr lang="en-US"/>
           </a:p>
@@ -2647,10 +2644,9 @@
           <a:lstStyle/>
           <a:p>
             <a:r>
-              <a:rPr lang="en-US" smtClean="0"/>
+              <a:rPr lang="en-US"/>
               <a:t>Click to edit Master title style</a:t>
             </a:r>
-            <a:endParaRPr lang="en-US"/>
           </a:p>
         </p:txBody>
       </p:sp>
@@ -2681,38 +2677,37 @@
           <a:p>
             <a:pPr lvl="0"/>
             <a:r>
-              <a:rPr lang="en-US" smtClean="0"/>
+              <a:rPr lang="en-US"/>
               <a:t>Click to edit Master text styles</a:t>
             </a:r>
           </a:p>
           <a:p>
             <a:pPr lvl="1"/>
             <a:r>
-              <a:rPr lang="en-US" smtClean="0"/>
+              <a:rPr lang="en-US"/>
               <a:t>Second level</a:t>
             </a:r>
           </a:p>
           <a:p>
             <a:pPr lvl="2"/>
             <a:r>
-              <a:rPr lang="en-US" smtClean="0"/>
+              <a:rPr lang="en-US"/>
               <a:t>Third level</a:t>
             </a:r>
           </a:p>
           <a:p>
             <a:pPr lvl="3"/>
             <a:r>
-              <a:rPr lang="en-US" smtClean="0"/>
+              <a:rPr lang="en-US"/>
               <a:t>Fourth level</a:t>
             </a:r>
           </a:p>
           <a:p>
             <a:pPr lvl="4"/>
             <a:r>
-              <a:rPr lang="en-US" smtClean="0"/>
+              <a:rPr lang="en-US"/>
               <a:t>Fifth level</a:t>
             </a:r>
-            <a:endParaRPr lang="en-US"/>
           </a:p>
         </p:txBody>
       </p:sp>
@@ -2751,7 +2746,7 @@
           <a:p>
             <a:fld id="{5BCAD085-E8A6-8845-BD4E-CB4CCA059FC4}" type="datetimeFigureOut">
               <a:rPr lang="en-US" smtClean="0"/>
-              <a:t>1/27/13</a:t>
+              <a:t>4/18/2026</a:t>
             </a:fld>
             <a:endParaRPr lang="en-US"/>
           </a:p>
@@ -3110,7 +3105,7 @@
 </file>
 
 <file path=ppt/slides/slide1.xml><?xml version="1.0" encoding="utf-8"?>
-<p:sld xmlns:a="http://schemas.openxmlformats.org/drawingml/2006/main" xmlns:p="http://schemas.openxmlformats.org/presentationml/2006/main" xmlns:r="http://schemas.openxmlformats.org/officeDocument/2006/relationships">
+<p:sld xmlns:a="http://schemas.openxmlformats.org/drawingml/2006/main" xmlns:r="http://schemas.openxmlformats.org/officeDocument/2006/relationships" xmlns:p="http://schemas.openxmlformats.org/presentationml/2006/main">
   <p:cSld>
     <p:spTree>
       <p:nvGrpSpPr>
@@ -3118,7 +3113,14 @@
         <p:cNvGrpSpPr/>
         <p:nvPr/>
       </p:nvGrpSpPr>
-      <p:grpSpPr/>
+      <p:grpSpPr>
+        <a:xfrm>
+          <a:off x="0" y="0"/>
+          <a:ext cx="0" cy="0"/>
+          <a:chOff x="0" y="0"/>
+          <a:chExt cx="0" cy="0"/>
+        </a:xfrm>
+      </p:grpSpPr>
       <p:pic>
         <p:nvPicPr>
           <p:cNvPr id="2" name="Picture 1" descr="image-1-1.png"/>
@@ -3183,6 +3185,7 @@
           <a:lstStyle/>
           <a:p>
             <a:pPr algn="ctr"/>
+            <a:endParaRPr/>
           </a:p>
         </p:txBody>
       </p:sp>
@@ -3226,6 +3229,7 @@
           <a:lstStyle/>
           <a:p>
             <a:pPr algn="ctr"/>
+            <a:endParaRPr/>
           </a:p>
         </p:txBody>
       </p:sp>
@@ -3269,6 +3273,7 @@
           <a:lstStyle/>
           <a:p>
             <a:pPr algn="ctr"/>
+            <a:endParaRPr/>
           </a:p>
         </p:txBody>
       </p:sp>
@@ -3312,6 +3317,7 @@
           <a:lstStyle/>
           <a:p>
             <a:pPr algn="ctr"/>
+            <a:endParaRPr/>
           </a:p>
         </p:txBody>
       </p:sp>
@@ -3355,6 +3361,7 @@
           <a:lstStyle/>
           <a:p>
             <a:pPr algn="ctr"/>
+            <a:endParaRPr/>
           </a:p>
         </p:txBody>
       </p:sp>
@@ -3540,6 +3547,7 @@
           <a:lstStyle/>
           <a:p>
             <a:pPr algn="ctr"/>
+            <a:endParaRPr/>
           </a:p>
         </p:txBody>
       </p:sp>
@@ -3655,6 +3663,7 @@
           <a:lstStyle/>
           <a:p>
             <a:pPr algn="ctr"/>
+            <a:endParaRPr/>
           </a:p>
         </p:txBody>
       </p:sp>
@@ -3770,6 +3779,7 @@
           <a:lstStyle/>
           <a:p>
             <a:pPr algn="ctr"/>
+            <a:endParaRPr/>
           </a:p>
         </p:txBody>
       </p:sp>
@@ -3887,7 +3897,7 @@
 </file>
 
 <file path=ppt/slides/slide10.xml><?xml version="1.0" encoding="utf-8"?>
-<p:sld xmlns:a="http://schemas.openxmlformats.org/drawingml/2006/main" xmlns:p="http://schemas.openxmlformats.org/presentationml/2006/main" xmlns:r="http://schemas.openxmlformats.org/officeDocument/2006/relationships">
+<p:sld xmlns:a="http://schemas.openxmlformats.org/drawingml/2006/main" xmlns:r="http://schemas.openxmlformats.org/officeDocument/2006/relationships" xmlns:p="http://schemas.openxmlformats.org/presentationml/2006/main">
   <p:cSld>
     <p:spTree>
       <p:nvGrpSpPr>
@@ -3895,7 +3905,14 @@
         <p:cNvGrpSpPr/>
         <p:nvPr/>
       </p:nvGrpSpPr>
-      <p:grpSpPr/>
+      <p:grpSpPr>
+        <a:xfrm>
+          <a:off x="0" y="0"/>
+          <a:ext cx="0" cy="0"/>
+          <a:chOff x="0" y="0"/>
+          <a:chExt cx="0" cy="0"/>
+        </a:xfrm>
+      </p:grpSpPr>
       <p:sp>
         <p:nvSpPr>
           <p:cNvPr id="2" name="Rectangle 1"/>
@@ -3936,6 +3953,7 @@
           <a:lstStyle/>
           <a:p>
             <a:pPr algn="ctr"/>
+            <a:endParaRPr/>
           </a:p>
         </p:txBody>
       </p:sp>
@@ -3979,6 +3997,7 @@
           <a:lstStyle/>
           <a:p>
             <a:pPr algn="ctr"/>
+            <a:endParaRPr/>
           </a:p>
         </p:txBody>
       </p:sp>
@@ -4022,6 +4041,7 @@
           <a:lstStyle/>
           <a:p>
             <a:pPr algn="ctr"/>
+            <a:endParaRPr/>
           </a:p>
         </p:txBody>
       </p:sp>
@@ -4065,6 +4085,7 @@
           <a:lstStyle/>
           <a:p>
             <a:pPr algn="ctr"/>
+            <a:endParaRPr/>
           </a:p>
         </p:txBody>
       </p:sp>
@@ -4108,6 +4129,7 @@
           <a:lstStyle/>
           <a:p>
             <a:pPr algn="ctr"/>
+            <a:endParaRPr/>
           </a:p>
         </p:txBody>
       </p:sp>
@@ -4223,6 +4245,7 @@
           <a:lstStyle/>
           <a:p>
             <a:pPr algn="ctr"/>
+            <a:endParaRPr/>
           </a:p>
         </p:txBody>
       </p:sp>
@@ -4266,6 +4289,7 @@
           <a:lstStyle/>
           <a:p>
             <a:pPr algn="ctr"/>
+            <a:endParaRPr/>
           </a:p>
         </p:txBody>
       </p:sp>
@@ -4321,7 +4345,7 @@
           <a:noFill/>
         </p:spPr>
         <p:txBody>
-          <a:bodyPr wrap="square" anchor="t" lIns="38100" rIns="38100" tIns="25400" bIns="25400">
+          <a:bodyPr wrap="square" lIns="38100" tIns="25400" rIns="38100" bIns="25400" anchor="t">
             <a:noAutofit/>
           </a:bodyPr>
           <a:lstStyle/>
@@ -4343,9 +4367,6 @@
               </a:rPr>
               <a:t>Run from source: create a virtual environment, install requirements, migrate, create a superuser, collect static files, and start Django.</a:t>
             </a:r>
-            <a:endParaRPr sz="1500" b="0" i="0">
-              <a:latin typeface="Calibri"/>
-            </a:endParaRPr>
           </a:p>
           <a:p>
             <a:pPr>
@@ -4365,9 +4386,6 @@
               </a:rPr>
               <a:t>Open `/agent/` for chat. Load a file or directory context before asking codebase-specific questions.</a:t>
             </a:r>
-            <a:endParaRPr sz="1500" b="0" i="0">
-              <a:latin typeface="Calibri"/>
-            </a:endParaRPr>
           </a:p>
           <a:p>
             <a:pPr>
@@ -4387,9 +4405,6 @@
               </a:rPr>
               <a:t>Keep Multi-Turn unchecked for direct Q&amp;A; enable Multi-Turn for tasks that need tools, wrapped agents, monitoring, or workflow seeding.</a:t>
             </a:r>
-            <a:endParaRPr sz="1500" b="0" i="0">
-              <a:latin typeface="Calibri"/>
-            </a:endParaRPr>
           </a:p>
         </p:txBody>
       </p:sp>
@@ -4435,6 +4450,7 @@
           <a:lstStyle/>
           <a:p>
             <a:pPr algn="ctr"/>
+            <a:endParaRPr/>
           </a:p>
         </p:txBody>
       </p:sp>
@@ -4478,6 +4494,7 @@
           <a:lstStyle/>
           <a:p>
             <a:pPr algn="ctr"/>
+            <a:endParaRPr/>
           </a:p>
         </p:txBody>
       </p:sp>
@@ -4533,7 +4550,7 @@
           <a:noFill/>
         </p:spPr>
         <p:txBody>
-          <a:bodyPr wrap="square" anchor="t" lIns="38100" rIns="38100" tIns="25400" bIns="25400">
+          <a:bodyPr wrap="square" lIns="38100" tIns="25400" rIns="38100" bIns="25400" anchor="t">
             <a:noAutofit/>
           </a:bodyPr>
           <a:lstStyle/>
@@ -4555,9 +4572,6 @@
               </a:rPr>
               <a:t>Open `/agentic_control_panel/` to drag agents, connect them, configure each node, validate, start, pause/resume, stop, and save `.flw` workflows.</a:t>
             </a:r>
-            <a:endParaRPr sz="1500" b="0" i="0">
-              <a:latin typeface="Calibri"/>
-            </a:endParaRPr>
           </a:p>
           <a:p>
             <a:pPr>
@@ -4577,9 +4591,6 @@
               </a:rPr>
               <a:t>Use `python build.py`, `python build_uninstaller.py`, and `python build_installer.py` only when producing a packaged Windows release.</a:t>
             </a:r>
-            <a:endParaRPr sz="1500" b="0" i="0">
-              <a:latin typeface="Calibri"/>
-            </a:endParaRPr>
           </a:p>
         </p:txBody>
       </p:sp>
@@ -4592,7 +4603,7 @@
 </file>
 
 <file path=ppt/slides/slide11.xml><?xml version="1.0" encoding="utf-8"?>
-<p:sld xmlns:a="http://schemas.openxmlformats.org/drawingml/2006/main" xmlns:p="http://schemas.openxmlformats.org/presentationml/2006/main" xmlns:r="http://schemas.openxmlformats.org/officeDocument/2006/relationships">
+<p:sld xmlns:a="http://schemas.openxmlformats.org/drawingml/2006/main" xmlns:r="http://schemas.openxmlformats.org/officeDocument/2006/relationships" xmlns:p="http://schemas.openxmlformats.org/presentationml/2006/main">
   <p:cSld>
     <p:spTree>
       <p:nvGrpSpPr>
@@ -4600,7 +4611,14 @@
         <p:cNvGrpSpPr/>
         <p:nvPr/>
       </p:nvGrpSpPr>
-      <p:grpSpPr/>
+      <p:grpSpPr>
+        <a:xfrm>
+          <a:off x="0" y="0"/>
+          <a:ext cx="0" cy="0"/>
+          <a:chOff x="0" y="0"/>
+          <a:chExt cx="0" cy="0"/>
+        </a:xfrm>
+      </p:grpSpPr>
       <p:sp>
         <p:nvSpPr>
           <p:cNvPr id="2" name="Rectangle 1"/>
@@ -4641,6 +4659,7 @@
           <a:lstStyle/>
           <a:p>
             <a:pPr algn="ctr"/>
+            <a:endParaRPr/>
           </a:p>
         </p:txBody>
       </p:sp>
@@ -4684,6 +4703,7 @@
           <a:lstStyle/>
           <a:p>
             <a:pPr algn="ctr"/>
+            <a:endParaRPr/>
           </a:p>
         </p:txBody>
       </p:sp>
@@ -4727,6 +4747,7 @@
           <a:lstStyle/>
           <a:p>
             <a:pPr algn="ctr"/>
+            <a:endParaRPr/>
           </a:p>
         </p:txBody>
       </p:sp>
@@ -4770,6 +4791,7 @@
           <a:lstStyle/>
           <a:p>
             <a:pPr algn="ctr"/>
+            <a:endParaRPr/>
           </a:p>
         </p:txBody>
       </p:sp>
@@ -4813,6 +4835,7 @@
           <a:lstStyle/>
           <a:p>
             <a:pPr algn="ctr"/>
+            <a:endParaRPr/>
           </a:p>
         </p:txBody>
       </p:sp>
@@ -4969,6 +4992,7 @@
           <a:lstStyle/>
           <a:p>
             <a:pPr algn="ctr"/>
+            <a:endParaRPr/>
           </a:p>
         </p:txBody>
       </p:sp>
@@ -5012,6 +5036,7 @@
           <a:lstStyle/>
           <a:p>
             <a:pPr algn="ctr"/>
+            <a:endParaRPr/>
           </a:p>
         </p:txBody>
       </p:sp>
@@ -5067,7 +5092,7 @@
           <a:noFill/>
         </p:spPr>
         <p:txBody>
-          <a:bodyPr wrap="square" anchor="t" lIns="38100" rIns="38100" tIns="25400" bIns="25400">
+          <a:bodyPr wrap="square" lIns="38100" tIns="25400" rIns="38100" bIns="25400" anchor="t">
             <a:noAutofit/>
           </a:bodyPr>
           <a:lstStyle/>
@@ -5089,9 +5114,6 @@
               </a:rPr>
               <a:t>Open the browser, log in with your source-mode superuser, load a context path, and decide whether the task needs Multi-Turn.</a:t>
             </a:r>
-            <a:endParaRPr sz="1400" b="0" i="0">
-              <a:latin typeface="Calibri"/>
-            </a:endParaRPr>
           </a:p>
         </p:txBody>
       </p:sp>
@@ -5104,7 +5126,7 @@
 </file>
 
 <file path=ppt/slides/slide12.xml><?xml version="1.0" encoding="utf-8"?>
-<p:sld xmlns:a="http://schemas.openxmlformats.org/drawingml/2006/main" xmlns:p="http://schemas.openxmlformats.org/presentationml/2006/main" xmlns:r="http://schemas.openxmlformats.org/officeDocument/2006/relationships">
+<p:sld xmlns:a="http://schemas.openxmlformats.org/drawingml/2006/main" xmlns:r="http://schemas.openxmlformats.org/officeDocument/2006/relationships" xmlns:p="http://schemas.openxmlformats.org/presentationml/2006/main">
   <p:cSld>
     <p:spTree>
       <p:nvGrpSpPr>
@@ -5112,7 +5134,14 @@
         <p:cNvGrpSpPr/>
         <p:nvPr/>
       </p:nvGrpSpPr>
-      <p:grpSpPr/>
+      <p:grpSpPr>
+        <a:xfrm>
+          <a:off x="0" y="0"/>
+          <a:ext cx="0" cy="0"/>
+          <a:chOff x="0" y="0"/>
+          <a:chExt cx="0" cy="0"/>
+        </a:xfrm>
+      </p:grpSpPr>
       <p:sp>
         <p:nvSpPr>
           <p:cNvPr id="2" name="Rectangle 1"/>
@@ -5153,6 +5182,7 @@
           <a:lstStyle/>
           <a:p>
             <a:pPr algn="ctr"/>
+            <a:endParaRPr/>
           </a:p>
         </p:txBody>
       </p:sp>
@@ -5196,6 +5226,7 @@
           <a:lstStyle/>
           <a:p>
             <a:pPr algn="ctr"/>
+            <a:endParaRPr/>
           </a:p>
         </p:txBody>
       </p:sp>
@@ -5239,6 +5270,7 @@
           <a:lstStyle/>
           <a:p>
             <a:pPr algn="ctr"/>
+            <a:endParaRPr/>
           </a:p>
         </p:txBody>
       </p:sp>
@@ -5282,6 +5314,7 @@
           <a:lstStyle/>
           <a:p>
             <a:pPr algn="ctr"/>
+            <a:endParaRPr/>
           </a:p>
         </p:txBody>
       </p:sp>
@@ -5325,6 +5358,7 @@
           <a:lstStyle/>
           <a:p>
             <a:pPr algn="ctr"/>
+            <a:endParaRPr/>
           </a:p>
         </p:txBody>
       </p:sp>
@@ -5440,6 +5474,7 @@
           <a:lstStyle/>
           <a:p>
             <a:pPr algn="ctr"/>
+            <a:endParaRPr/>
           </a:p>
         </p:txBody>
       </p:sp>
@@ -5555,6 +5590,7 @@
           <a:lstStyle/>
           <a:p>
             <a:pPr algn="ctr"/>
+            <a:endParaRPr/>
           </a:p>
         </p:txBody>
       </p:sp>
@@ -5670,6 +5706,7 @@
           <a:lstStyle/>
           <a:p>
             <a:pPr algn="ctr"/>
+            <a:endParaRPr/>
           </a:p>
         </p:txBody>
       </p:sp>
@@ -5785,6 +5822,7 @@
           <a:lstStyle/>
           <a:p>
             <a:pPr algn="ctr"/>
+            <a:endParaRPr/>
           </a:p>
         </p:txBody>
       </p:sp>
@@ -5900,6 +5938,7 @@
           <a:lstStyle/>
           <a:p>
             <a:pPr algn="ctr"/>
+            <a:endParaRPr/>
           </a:p>
         </p:txBody>
       </p:sp>
@@ -6015,6 +6054,7 @@
           <a:lstStyle/>
           <a:p>
             <a:pPr algn="ctr"/>
+            <a:endParaRPr/>
           </a:p>
         </p:txBody>
       </p:sp>
@@ -6095,6 +6135,7 @@
           <a:lstStyle/>
           <a:p>
             <a:pPr algn="ctr"/>
+            <a:endParaRPr/>
           </a:p>
         </p:txBody>
       </p:sp>
@@ -6138,6 +6179,7 @@
           <a:lstStyle/>
           <a:p>
             <a:pPr algn="ctr"/>
+            <a:endParaRPr/>
           </a:p>
         </p:txBody>
       </p:sp>
@@ -6193,7 +6235,7 @@
           <a:noFill/>
         </p:spPr>
         <p:txBody>
-          <a:bodyPr wrap="square" anchor="t" lIns="38100" rIns="38100" tIns="25400" bIns="25400">
+          <a:bodyPr wrap="square" lIns="38100" tIns="25400" rIns="38100" bIns="25400" anchor="t">
             <a:noAutofit/>
           </a:bodyPr>
           <a:lstStyle/>
@@ -6215,9 +6257,6 @@
               </a:rPr>
               <a:t>Run packaging only when preparing a Windows distribution.</a:t>
             </a:r>
-            <a:endParaRPr sz="1600" b="0" i="0">
-              <a:latin typeface="Calibri"/>
-            </a:endParaRPr>
           </a:p>
           <a:p>
             <a:pPr>
@@ -6237,9 +6276,6 @@
               </a:rPr>
               <a:t>The final distributable is the full `dist/Tlamatini_Release/` folder, not one executable copied out of context.</a:t>
             </a:r>
-            <a:endParaRPr sz="1600" b="0" i="0">
-              <a:latin typeface="Calibri"/>
-            </a:endParaRPr>
           </a:p>
           <a:p>
             <a:pPr>
@@ -6259,9 +6295,6 @@
               </a:rPr>
               <a:t>Installer scripts register shortcuts and `.flw` file associations and place the uninstaller next to the app.</a:t>
             </a:r>
-            <a:endParaRPr sz="1600" b="0" i="0">
-              <a:latin typeface="Calibri"/>
-            </a:endParaRPr>
           </a:p>
         </p:txBody>
       </p:sp>
@@ -6274,7 +6307,7 @@
 </file>
 
 <file path=ppt/slides/slide13.xml><?xml version="1.0" encoding="utf-8"?>
-<p:sld xmlns:a="http://schemas.openxmlformats.org/drawingml/2006/main" xmlns:p="http://schemas.openxmlformats.org/presentationml/2006/main" xmlns:r="http://schemas.openxmlformats.org/officeDocument/2006/relationships">
+<p:sld xmlns:a="http://schemas.openxmlformats.org/drawingml/2006/main" xmlns:r="http://schemas.openxmlformats.org/officeDocument/2006/relationships" xmlns:p="http://schemas.openxmlformats.org/presentationml/2006/main">
   <p:cSld>
     <p:spTree>
       <p:nvGrpSpPr>
@@ -6282,7 +6315,14 @@
         <p:cNvGrpSpPr/>
         <p:nvPr/>
       </p:nvGrpSpPr>
-      <p:grpSpPr/>
+      <p:grpSpPr>
+        <a:xfrm>
+          <a:off x="0" y="0"/>
+          <a:ext cx="0" cy="0"/>
+          <a:chOff x="0" y="0"/>
+          <a:chExt cx="0" cy="0"/>
+        </a:xfrm>
+      </p:grpSpPr>
       <p:sp>
         <p:nvSpPr>
           <p:cNvPr id="2" name="Rectangle 1"/>
@@ -6323,6 +6363,7 @@
           <a:lstStyle/>
           <a:p>
             <a:pPr algn="ctr"/>
+            <a:endParaRPr/>
           </a:p>
         </p:txBody>
       </p:sp>
@@ -6366,6 +6407,7 @@
           <a:lstStyle/>
           <a:p>
             <a:pPr algn="ctr"/>
+            <a:endParaRPr/>
           </a:p>
         </p:txBody>
       </p:sp>
@@ -6409,6 +6451,7 @@
           <a:lstStyle/>
           <a:p>
             <a:pPr algn="ctr"/>
+            <a:endParaRPr/>
           </a:p>
         </p:txBody>
       </p:sp>
@@ -6452,6 +6495,7 @@
           <a:lstStyle/>
           <a:p>
             <a:pPr algn="ctr"/>
+            <a:endParaRPr/>
           </a:p>
         </p:txBody>
       </p:sp>
@@ -6495,6 +6539,7 @@
           <a:lstStyle/>
           <a:p>
             <a:pPr algn="ctr"/>
+            <a:endParaRPr/>
           </a:p>
         </p:txBody>
       </p:sp>
@@ -6610,6 +6655,7 @@
           <a:lstStyle/>
           <a:p>
             <a:pPr algn="ctr"/>
+            <a:endParaRPr/>
           </a:p>
         </p:txBody>
       </p:sp>
@@ -6725,6 +6771,7 @@
           <a:lstStyle/>
           <a:p>
             <a:pPr algn="ctr"/>
+            <a:endParaRPr/>
           </a:p>
         </p:txBody>
       </p:sp>
@@ -6840,6 +6887,7 @@
           <a:lstStyle/>
           <a:p>
             <a:pPr algn="ctr"/>
+            <a:endParaRPr/>
           </a:p>
         </p:txBody>
       </p:sp>
@@ -6955,6 +7003,7 @@
           <a:lstStyle/>
           <a:p>
             <a:pPr algn="ctr"/>
+            <a:endParaRPr/>
           </a:p>
         </p:txBody>
       </p:sp>
@@ -7070,6 +7119,7 @@
           <a:lstStyle/>
           <a:p>
             <a:pPr algn="ctr"/>
+            <a:endParaRPr/>
           </a:p>
         </p:txBody>
       </p:sp>
@@ -7185,6 +7235,7 @@
           <a:lstStyle/>
           <a:p>
             <a:pPr algn="ctr"/>
+            <a:endParaRPr/>
           </a:p>
         </p:txBody>
       </p:sp>
@@ -7300,6 +7351,7 @@
           <a:lstStyle/>
           <a:p>
             <a:pPr algn="ctr"/>
+            <a:endParaRPr/>
           </a:p>
         </p:txBody>
       </p:sp>
@@ -7343,6 +7395,7 @@
           <a:lstStyle/>
           <a:p>
             <a:pPr algn="ctr"/>
+            <a:endParaRPr/>
           </a:p>
         </p:txBody>
       </p:sp>
@@ -7398,7 +7451,7 @@
           <a:noFill/>
         </p:spPr>
         <p:txBody>
-          <a:bodyPr wrap="square" anchor="t" lIns="38100" rIns="38100" tIns="25400" bIns="25400">
+          <a:bodyPr wrap="square" lIns="38100" tIns="25400" rIns="38100" bIns="25400" anchor="t">
             <a:noAutofit/>
           </a:bodyPr>
           <a:lstStyle/>
@@ -7420,9 +7473,6 @@
               </a:rPr>
               <a:t>3b6eb8e - Way too improving the execution chain with now "Exec report"!!, by angelahack1</a:t>
             </a:r>
-            <a:endParaRPr sz="1500" b="0" i="0">
-              <a:latin typeface="Calibri"/>
-            </a:endParaRPr>
           </a:p>
           <a:p>
             <a:pPr>
@@ -7442,9 +7492,6 @@
               </a:rPr>
               <a:t>Generated on April 17, 2026 11:50 PM UTC-0600</a:t>
             </a:r>
-            <a:endParaRPr sz="1500" b="0" i="0">
-              <a:latin typeface="Calibri"/>
-            </a:endParaRPr>
           </a:p>
           <a:p>
             <a:pPr>
@@ -7464,9 +7511,6 @@
               </a:rPr>
               <a:t>Python requirements: 62; binary or asset tracked files skipped from line count: 13</a:t>
             </a:r>
-            <a:endParaRPr sz="1500" b="0" i="0">
-              <a:latin typeface="Calibri"/>
-            </a:endParaRPr>
           </a:p>
         </p:txBody>
       </p:sp>
@@ -7479,7 +7523,7 @@
 </file>
 
 <file path=ppt/slides/slide14.xml><?xml version="1.0" encoding="utf-8"?>
-<p:sld xmlns:a="http://schemas.openxmlformats.org/drawingml/2006/main" xmlns:p="http://schemas.openxmlformats.org/presentationml/2006/main" xmlns:r="http://schemas.openxmlformats.org/officeDocument/2006/relationships">
+<p:sld xmlns:a="http://schemas.openxmlformats.org/drawingml/2006/main" xmlns:r="http://schemas.openxmlformats.org/officeDocument/2006/relationships" xmlns:p="http://schemas.openxmlformats.org/presentationml/2006/main">
   <p:cSld>
     <p:spTree>
       <p:nvGrpSpPr>
@@ -7487,7 +7531,14 @@
         <p:cNvGrpSpPr/>
         <p:nvPr/>
       </p:nvGrpSpPr>
-      <p:grpSpPr/>
+      <p:grpSpPr>
+        <a:xfrm>
+          <a:off x="0" y="0"/>
+          <a:ext cx="0" cy="0"/>
+          <a:chOff x="0" y="0"/>
+          <a:chExt cx="0" cy="0"/>
+        </a:xfrm>
+      </p:grpSpPr>
       <p:sp>
         <p:nvSpPr>
           <p:cNvPr id="2" name="Rectangle 1"/>
@@ -7528,6 +7579,7 @@
           <a:lstStyle/>
           <a:p>
             <a:pPr algn="ctr"/>
+            <a:endParaRPr/>
           </a:p>
         </p:txBody>
       </p:sp>
@@ -7571,6 +7623,7 @@
           <a:lstStyle/>
           <a:p>
             <a:pPr algn="ctr"/>
+            <a:endParaRPr/>
           </a:p>
         </p:txBody>
       </p:sp>
@@ -7614,6 +7667,7 @@
           <a:lstStyle/>
           <a:p>
             <a:pPr algn="ctr"/>
+            <a:endParaRPr/>
           </a:p>
         </p:txBody>
       </p:sp>
@@ -7657,6 +7711,7 @@
           <a:lstStyle/>
           <a:p>
             <a:pPr algn="ctr"/>
+            <a:endParaRPr/>
           </a:p>
         </p:txBody>
       </p:sp>
@@ -7700,6 +7755,7 @@
           <a:lstStyle/>
           <a:p>
             <a:pPr algn="ctr"/>
+            <a:endParaRPr/>
           </a:p>
         </p:txBody>
       </p:sp>
@@ -7815,6 +7871,7 @@
           <a:lstStyle/>
           <a:p>
             <a:pPr algn="ctr"/>
+            <a:endParaRPr/>
           </a:p>
         </p:txBody>
       </p:sp>
@@ -7930,6 +7987,7 @@
           <a:lstStyle/>
           <a:p>
             <a:pPr algn="ctr"/>
+            <a:endParaRPr/>
           </a:p>
         </p:txBody>
       </p:sp>
@@ -8045,6 +8103,7 @@
           <a:lstStyle/>
           <a:p>
             <a:pPr algn="ctr"/>
+            <a:endParaRPr/>
           </a:p>
         </p:txBody>
       </p:sp>
@@ -8176,7 +8235,7 @@
 </file>
 
 <file path=ppt/slides/slide15.xml><?xml version="1.0" encoding="utf-8"?>
-<p:sld xmlns:a="http://schemas.openxmlformats.org/drawingml/2006/main" xmlns:p="http://schemas.openxmlformats.org/presentationml/2006/main" xmlns:r="http://schemas.openxmlformats.org/officeDocument/2006/relationships">
+<p:sld xmlns:a="http://schemas.openxmlformats.org/drawingml/2006/main" xmlns:r="http://schemas.openxmlformats.org/officeDocument/2006/relationships" xmlns:p="http://schemas.openxmlformats.org/presentationml/2006/main">
   <p:cSld>
     <p:spTree>
       <p:nvGrpSpPr>
@@ -8184,7 +8243,14 @@
         <p:cNvGrpSpPr/>
         <p:nvPr/>
       </p:nvGrpSpPr>
-      <p:grpSpPr/>
+      <p:grpSpPr>
+        <a:xfrm>
+          <a:off x="0" y="0"/>
+          <a:ext cx="0" cy="0"/>
+          <a:chOff x="0" y="0"/>
+          <a:chExt cx="0" cy="0"/>
+        </a:xfrm>
+      </p:grpSpPr>
       <p:sp>
         <p:nvSpPr>
           <p:cNvPr id="2" name="Rectangle 1"/>
@@ -8225,6 +8291,7 @@
           <a:lstStyle/>
           <a:p>
             <a:pPr algn="ctr"/>
+            <a:endParaRPr/>
           </a:p>
         </p:txBody>
       </p:sp>
@@ -8268,6 +8335,7 @@
           <a:lstStyle/>
           <a:p>
             <a:pPr algn="ctr"/>
+            <a:endParaRPr/>
           </a:p>
         </p:txBody>
       </p:sp>
@@ -8311,6 +8379,7 @@
           <a:lstStyle/>
           <a:p>
             <a:pPr algn="ctr"/>
+            <a:endParaRPr/>
           </a:p>
         </p:txBody>
       </p:sp>
@@ -8354,6 +8423,7 @@
           <a:lstStyle/>
           <a:p>
             <a:pPr algn="ctr"/>
+            <a:endParaRPr/>
           </a:p>
         </p:txBody>
       </p:sp>
@@ -8397,6 +8467,7 @@
           <a:lstStyle/>
           <a:p>
             <a:pPr algn="ctr"/>
+            <a:endParaRPr/>
           </a:p>
         </p:txBody>
       </p:sp>
@@ -8528,7 +8599,7 @@
 </file>
 
 <file path=ppt/slides/slide16.xml><?xml version="1.0" encoding="utf-8"?>
-<p:sld xmlns:a="http://schemas.openxmlformats.org/drawingml/2006/main" xmlns:p="http://schemas.openxmlformats.org/presentationml/2006/main" xmlns:r="http://schemas.openxmlformats.org/officeDocument/2006/relationships">
+<p:sld xmlns:a="http://schemas.openxmlformats.org/drawingml/2006/main" xmlns:r="http://schemas.openxmlformats.org/officeDocument/2006/relationships" xmlns:p="http://schemas.openxmlformats.org/presentationml/2006/main">
   <p:cSld>
     <p:spTree>
       <p:nvGrpSpPr>
@@ -8536,7 +8607,14 @@
         <p:cNvGrpSpPr/>
         <p:nvPr/>
       </p:nvGrpSpPr>
-      <p:grpSpPr/>
+      <p:grpSpPr>
+        <a:xfrm>
+          <a:off x="0" y="0"/>
+          <a:ext cx="0" cy="0"/>
+          <a:chOff x="0" y="0"/>
+          <a:chExt cx="0" cy="0"/>
+        </a:xfrm>
+      </p:grpSpPr>
       <p:sp>
         <p:nvSpPr>
           <p:cNvPr id="2" name="Rectangle 1"/>
@@ -8577,6 +8655,7 @@
           <a:lstStyle/>
           <a:p>
             <a:pPr algn="ctr"/>
+            <a:endParaRPr/>
           </a:p>
         </p:txBody>
       </p:sp>
@@ -8620,6 +8699,7 @@
           <a:lstStyle/>
           <a:p>
             <a:pPr algn="ctr"/>
+            <a:endParaRPr/>
           </a:p>
         </p:txBody>
       </p:sp>
@@ -8663,6 +8743,7 @@
           <a:lstStyle/>
           <a:p>
             <a:pPr algn="ctr"/>
+            <a:endParaRPr/>
           </a:p>
         </p:txBody>
       </p:sp>
@@ -8706,6 +8787,7 @@
           <a:lstStyle/>
           <a:p>
             <a:pPr algn="ctr"/>
+            <a:endParaRPr/>
           </a:p>
         </p:txBody>
       </p:sp>
@@ -8749,6 +8831,7 @@
           <a:lstStyle/>
           <a:p>
             <a:pPr algn="ctr"/>
+            <a:endParaRPr/>
           </a:p>
         </p:txBody>
       </p:sp>
@@ -8864,6 +8947,7 @@
           <a:lstStyle/>
           <a:p>
             <a:pPr algn="ctr"/>
+            <a:endParaRPr/>
           </a:p>
         </p:txBody>
       </p:sp>
@@ -8907,6 +8991,7 @@
           <a:lstStyle/>
           <a:p>
             <a:pPr algn="ctr"/>
+            <a:endParaRPr/>
           </a:p>
         </p:txBody>
       </p:sp>
@@ -8962,7 +9047,7 @@
           <a:noFill/>
         </p:spPr>
         <p:txBody>
-          <a:bodyPr wrap="square" anchor="t" lIns="38100" rIns="38100" tIns="25400" bIns="25400">
+          <a:bodyPr wrap="square" lIns="38100" tIns="25400" rIns="38100" bIns="25400" anchor="t">
             <a:noAutofit/>
           </a:bodyPr>
           <a:lstStyle/>
@@ -8984,9 +9069,6 @@
               </a:rPr>
               <a:t>2026-04-17 | 3b6eb8e | Way too improving the execution chain with now "Exec report"!!, by angelahack1</a:t>
             </a:r>
-            <a:endParaRPr sz="1300" b="0" i="0">
-              <a:latin typeface="Calibri"/>
-            </a:endParaRPr>
           </a:p>
           <a:p>
             <a:pPr>
@@ -9006,9 +9088,6 @@
               </a:rPr>
               <a:t>2026-04-17 | d46ddbb | Fixing some drawbacks in frozen Tlamatini's runtime execution.</a:t>
             </a:r>
-            <a:endParaRPr sz="1300" b="0" i="0">
-              <a:latin typeface="Calibri"/>
-            </a:endParaRPr>
           </a:p>
           <a:p>
             <a:pPr>
@@ -9028,9 +9107,6 @@
               </a:rPr>
               <a:t>2026-04-17 | 17d5760 | Updating to a more graphical documentation</a:t>
             </a:r>
-            <a:endParaRPr sz="1300" b="0" i="0">
-              <a:latin typeface="Calibri"/>
-            </a:endParaRPr>
           </a:p>
           <a:p>
             <a:pPr>
@@ -9050,9 +9126,6 @@
               </a:rPr>
               <a:t>2026-04-17 | d7a8e66 | Update documentation with the laatest fixings, by angelahack1</a:t>
             </a:r>
-            <a:endParaRPr sz="1300" b="0" i="0">
-              <a:latin typeface="Calibri"/>
-            </a:endParaRPr>
           </a:p>
           <a:p>
             <a:pPr>
@@ -9072,9 +9145,6 @@
               </a:rPr>
               <a:t>2026-04-16 | 0249c76 | Improving multiturn, tested for installing assets, and added a new video, by angelahack1</a:t>
             </a:r>
-            <a:endParaRPr sz="1300" b="0" i="0">
-              <a:latin typeface="Calibri"/>
-            </a:endParaRPr>
           </a:p>
           <a:p>
             <a:pPr>
@@ -9094,9 +9164,6 @@
               </a:rPr>
               <a:t>2026-04-15 | 9abade4 | Adding video links to README.md, by angelahack1</a:t>
             </a:r>
-            <a:endParaRPr sz="1300" b="0" i="0">
-              <a:latin typeface="Calibri"/>
-            </a:endParaRPr>
           </a:p>
         </p:txBody>
       </p:sp>
@@ -9109,7 +9176,7 @@
 </file>
 
 <file path=ppt/slides/slide17.xml><?xml version="1.0" encoding="utf-8"?>
-<p:sld xmlns:a="http://schemas.openxmlformats.org/drawingml/2006/main" xmlns:p="http://schemas.openxmlformats.org/presentationml/2006/main" xmlns:r="http://schemas.openxmlformats.org/officeDocument/2006/relationships">
+<p:sld xmlns:a="http://schemas.openxmlformats.org/drawingml/2006/main" xmlns:r="http://schemas.openxmlformats.org/officeDocument/2006/relationships" xmlns:p="http://schemas.openxmlformats.org/presentationml/2006/main">
   <p:cSld>
     <p:spTree>
       <p:nvGrpSpPr>
@@ -9117,7 +9184,14 @@
         <p:cNvGrpSpPr/>
         <p:nvPr/>
       </p:nvGrpSpPr>
-      <p:grpSpPr/>
+      <p:grpSpPr>
+        <a:xfrm>
+          <a:off x="0" y="0"/>
+          <a:ext cx="0" cy="0"/>
+          <a:chOff x="0" y="0"/>
+          <a:chExt cx="0" cy="0"/>
+        </a:xfrm>
+      </p:grpSpPr>
       <p:sp>
         <p:nvSpPr>
           <p:cNvPr id="2" name="Rectangle 1"/>
@@ -9158,6 +9232,7 @@
           <a:lstStyle/>
           <a:p>
             <a:pPr algn="ctr"/>
+            <a:endParaRPr/>
           </a:p>
         </p:txBody>
       </p:sp>
@@ -9201,6 +9276,7 @@
           <a:lstStyle/>
           <a:p>
             <a:pPr algn="ctr"/>
+            <a:endParaRPr/>
           </a:p>
         </p:txBody>
       </p:sp>
@@ -9244,6 +9320,7 @@
           <a:lstStyle/>
           <a:p>
             <a:pPr algn="ctr"/>
+            <a:endParaRPr/>
           </a:p>
         </p:txBody>
       </p:sp>
@@ -9287,6 +9364,7 @@
           <a:lstStyle/>
           <a:p>
             <a:pPr algn="ctr"/>
+            <a:endParaRPr/>
           </a:p>
         </p:txBody>
       </p:sp>
@@ -9330,6 +9408,7 @@
           <a:lstStyle/>
           <a:p>
             <a:pPr algn="ctr"/>
+            <a:endParaRPr/>
           </a:p>
         </p:txBody>
       </p:sp>
@@ -9477,7 +9556,7 @@
 </file>
 
 <file path=ppt/slides/slide18.xml><?xml version="1.0" encoding="utf-8"?>
-<p:sld xmlns:a="http://schemas.openxmlformats.org/drawingml/2006/main" xmlns:p="http://schemas.openxmlformats.org/presentationml/2006/main" xmlns:r="http://schemas.openxmlformats.org/officeDocument/2006/relationships">
+<p:sld xmlns:a="http://schemas.openxmlformats.org/drawingml/2006/main" xmlns:r="http://schemas.openxmlformats.org/officeDocument/2006/relationships" xmlns:p="http://schemas.openxmlformats.org/presentationml/2006/main">
   <p:cSld>
     <p:spTree>
       <p:nvGrpSpPr>
@@ -9485,7 +9564,14 @@
         <p:cNvGrpSpPr/>
         <p:nvPr/>
       </p:nvGrpSpPr>
-      <p:grpSpPr/>
+      <p:grpSpPr>
+        <a:xfrm>
+          <a:off x="0" y="0"/>
+          <a:ext cx="0" cy="0"/>
+          <a:chOff x="0" y="0"/>
+          <a:chExt cx="0" cy="0"/>
+        </a:xfrm>
+      </p:grpSpPr>
       <p:sp>
         <p:nvSpPr>
           <p:cNvPr id="2" name="Rectangle 1"/>
@@ -9526,6 +9612,7 @@
           <a:lstStyle/>
           <a:p>
             <a:pPr algn="ctr"/>
+            <a:endParaRPr/>
           </a:p>
         </p:txBody>
       </p:sp>
@@ -9569,6 +9656,7 @@
           <a:lstStyle/>
           <a:p>
             <a:pPr algn="ctr"/>
+            <a:endParaRPr/>
           </a:p>
         </p:txBody>
       </p:sp>
@@ -9612,6 +9700,7 @@
           <a:lstStyle/>
           <a:p>
             <a:pPr algn="ctr"/>
+            <a:endParaRPr/>
           </a:p>
         </p:txBody>
       </p:sp>
@@ -9655,6 +9744,7 @@
           <a:lstStyle/>
           <a:p>
             <a:pPr algn="ctr"/>
+            <a:endParaRPr/>
           </a:p>
         </p:txBody>
       </p:sp>
@@ -9698,6 +9788,7 @@
           <a:lstStyle/>
           <a:p>
             <a:pPr algn="ctr"/>
+            <a:endParaRPr/>
           </a:p>
         </p:txBody>
       </p:sp>
@@ -9845,7 +9936,7 @@
 </file>
 
 <file path=ppt/slides/slide19.xml><?xml version="1.0" encoding="utf-8"?>
-<p:sld xmlns:a="http://schemas.openxmlformats.org/drawingml/2006/main" xmlns:p="http://schemas.openxmlformats.org/presentationml/2006/main" xmlns:r="http://schemas.openxmlformats.org/officeDocument/2006/relationships">
+<p:sld xmlns:a="http://schemas.openxmlformats.org/drawingml/2006/main" xmlns:r="http://schemas.openxmlformats.org/officeDocument/2006/relationships" xmlns:p="http://schemas.openxmlformats.org/presentationml/2006/main">
   <p:cSld>
     <p:spTree>
       <p:nvGrpSpPr>
@@ -9853,7 +9944,14 @@
         <p:cNvGrpSpPr/>
         <p:nvPr/>
       </p:nvGrpSpPr>
-      <p:grpSpPr/>
+      <p:grpSpPr>
+        <a:xfrm>
+          <a:off x="0" y="0"/>
+          <a:ext cx="0" cy="0"/>
+          <a:chOff x="0" y="0"/>
+          <a:chExt cx="0" cy="0"/>
+        </a:xfrm>
+      </p:grpSpPr>
       <p:sp>
         <p:nvSpPr>
           <p:cNvPr id="2" name="Rectangle 1"/>
@@ -9894,6 +9992,7 @@
           <a:lstStyle/>
           <a:p>
             <a:pPr algn="ctr"/>
+            <a:endParaRPr/>
           </a:p>
         </p:txBody>
       </p:sp>
@@ -9937,6 +10036,7 @@
           <a:lstStyle/>
           <a:p>
             <a:pPr algn="ctr"/>
+            <a:endParaRPr/>
           </a:p>
         </p:txBody>
       </p:sp>
@@ -9980,6 +10080,7 @@
           <a:lstStyle/>
           <a:p>
             <a:pPr algn="ctr"/>
+            <a:endParaRPr/>
           </a:p>
         </p:txBody>
       </p:sp>
@@ -10023,6 +10124,7 @@
           <a:lstStyle/>
           <a:p>
             <a:pPr algn="ctr"/>
+            <a:endParaRPr/>
           </a:p>
         </p:txBody>
       </p:sp>
@@ -10066,6 +10168,7 @@
           <a:lstStyle/>
           <a:p>
             <a:pPr algn="ctr"/>
+            <a:endParaRPr/>
           </a:p>
         </p:txBody>
       </p:sp>
@@ -10213,7 +10316,7 @@
 </file>
 
 <file path=ppt/slides/slide2.xml><?xml version="1.0" encoding="utf-8"?>
-<p:sld xmlns:a="http://schemas.openxmlformats.org/drawingml/2006/main" xmlns:p="http://schemas.openxmlformats.org/presentationml/2006/main" xmlns:r="http://schemas.openxmlformats.org/officeDocument/2006/relationships">
+<p:sld xmlns:a="http://schemas.openxmlformats.org/drawingml/2006/main" xmlns:r="http://schemas.openxmlformats.org/officeDocument/2006/relationships" xmlns:p="http://schemas.openxmlformats.org/presentationml/2006/main">
   <p:cSld>
     <p:spTree>
       <p:nvGrpSpPr>
@@ -10221,7 +10324,14 @@
         <p:cNvGrpSpPr/>
         <p:nvPr/>
       </p:nvGrpSpPr>
-      <p:grpSpPr/>
+      <p:grpSpPr>
+        <a:xfrm>
+          <a:off x="0" y="0"/>
+          <a:ext cx="0" cy="0"/>
+          <a:chOff x="0" y="0"/>
+          <a:chExt cx="0" cy="0"/>
+        </a:xfrm>
+      </p:grpSpPr>
       <p:sp>
         <p:nvSpPr>
           <p:cNvPr id="2" name="Rectangle 1"/>
@@ -10262,6 +10372,7 @@
           <a:lstStyle/>
           <a:p>
             <a:pPr algn="ctr"/>
+            <a:endParaRPr/>
           </a:p>
         </p:txBody>
       </p:sp>
@@ -10305,6 +10416,7 @@
           <a:lstStyle/>
           <a:p>
             <a:pPr algn="ctr"/>
+            <a:endParaRPr/>
           </a:p>
         </p:txBody>
       </p:sp>
@@ -10348,6 +10460,7 @@
           <a:lstStyle/>
           <a:p>
             <a:pPr algn="ctr"/>
+            <a:endParaRPr/>
           </a:p>
         </p:txBody>
       </p:sp>
@@ -10391,6 +10504,7 @@
           <a:lstStyle/>
           <a:p>
             <a:pPr algn="ctr"/>
+            <a:endParaRPr/>
           </a:p>
         </p:txBody>
       </p:sp>
@@ -10434,6 +10548,7 @@
           <a:lstStyle/>
           <a:p>
             <a:pPr algn="ctr"/>
+            <a:endParaRPr/>
           </a:p>
         </p:txBody>
       </p:sp>
@@ -10549,6 +10664,7 @@
           <a:lstStyle/>
           <a:p>
             <a:pPr algn="ctr"/>
+            <a:endParaRPr/>
           </a:p>
         </p:txBody>
       </p:sp>
@@ -10592,6 +10708,7 @@
           <a:lstStyle/>
           <a:p>
             <a:pPr algn="ctr"/>
+            <a:endParaRPr/>
           </a:p>
         </p:txBody>
       </p:sp>
@@ -10647,7 +10764,7 @@
           <a:noFill/>
         </p:spPr>
         <p:txBody>
-          <a:bodyPr wrap="square" anchor="t" lIns="38100" rIns="38100" tIns="25400" bIns="25400">
+          <a:bodyPr wrap="square" lIns="38100" tIns="25400" rIns="38100" bIns="25400" anchor="t">
             <a:noAutofit/>
           </a:bodyPr>
           <a:lstStyle/>
@@ -10669,9 +10786,6 @@
               </a:rPr>
               <a:t>Tlamatini is a local-first AI developer assistant built with Django, Django Channels, LangChain, LangGraph, FAISS/BM25 retrieval, and a large in-repository agent application.</a:t>
             </a:r>
-            <a:endParaRPr sz="1600" b="0" i="0">
-              <a:latin typeface="Calibri"/>
-            </a:endParaRPr>
           </a:p>
           <a:p>
             <a:pPr>
@@ -10691,9 +10805,6 @@
               </a:rPr>
               <a:t>It combines a browser chat surface, a Retrieval-Augmented Generation stack, a Multi-Turn tool executor, MCP-backed context providers, wrapped chat-agent runtimes, and a visual Agentic Control Panel for workflow design.</a:t>
             </a:r>
-            <a:endParaRPr sz="1600" b="0" i="0">
-              <a:latin typeface="Calibri"/>
-            </a:endParaRPr>
           </a:p>
           <a:p>
             <a:pPr>
@@ -10713,9 +10824,6 @@
               </a:rPr>
               <a:t>The platform is designed for development operations: codebase analysis, file and directory context, command execution, Python execution, screenshots, web/search helpers, notifications, DevOps tools, local model operation, and Windows packaging.</a:t>
             </a:r>
-            <a:endParaRPr sz="1600" b="0" i="0">
-              <a:latin typeface="Calibri"/>
-            </a:endParaRPr>
           </a:p>
         </p:txBody>
       </p:sp>
@@ -10761,6 +10869,7 @@
           <a:lstStyle/>
           <a:p>
             <a:pPr algn="ctr"/>
+            <a:endParaRPr/>
           </a:p>
         </p:txBody>
       </p:sp>
@@ -10804,6 +10913,7 @@
           <a:lstStyle/>
           <a:p>
             <a:pPr algn="ctr"/>
+            <a:endParaRPr/>
           </a:p>
         </p:txBody>
       </p:sp>
@@ -10859,7 +10969,7 @@
           <a:noFill/>
         </p:spPr>
         <p:txBody>
-          <a:bodyPr wrap="square" anchor="t" lIns="38100" rIns="38100" tIns="25400" bIns="25400">
+          <a:bodyPr wrap="square" lIns="38100" tIns="25400" rIns="38100" bIns="25400" anchor="t">
             <a:noAutofit/>
           </a:bodyPr>
           <a:lstStyle/>
@@ -10881,9 +10991,6 @@
               </a:rPr>
               <a:t>Chat page at `/agent/` for context-grounded Q&amp;A, code generation, tool calls, and Multi-Turn execution.</a:t>
             </a:r>
-            <a:endParaRPr sz="1600" b="0" i="0">
-              <a:latin typeface="Calibri"/>
-            </a:endParaRPr>
           </a:p>
           <a:p>
             <a:pPr>
@@ -10903,9 +11010,6 @@
               </a:rPr>
               <a:t>Agentic Control Panel at `/agentic_control_panel/` for visual workflow design.</a:t>
             </a:r>
-            <a:endParaRPr sz="1600" b="0" i="0">
-              <a:latin typeface="Calibri"/>
-            </a:endParaRPr>
           </a:p>
           <a:p>
             <a:pPr>
@@ -10925,9 +11029,6 @@
               </a:rPr>
               <a:t>Django admin and config dialogs for MCPs, tools, agents, users, and persistent settings.</a:t>
             </a:r>
-            <a:endParaRPr sz="1600" b="0" i="0">
-              <a:latin typeface="Calibri"/>
-            </a:endParaRPr>
           </a:p>
         </p:txBody>
       </p:sp>
@@ -10940,7 +11041,7 @@
 </file>
 
 <file path=ppt/slides/slide20.xml><?xml version="1.0" encoding="utf-8"?>
-<p:sld xmlns:a="http://schemas.openxmlformats.org/drawingml/2006/main" xmlns:p="http://schemas.openxmlformats.org/presentationml/2006/main" xmlns:r="http://schemas.openxmlformats.org/officeDocument/2006/relationships">
+<p:sld xmlns:a="http://schemas.openxmlformats.org/drawingml/2006/main" xmlns:r="http://schemas.openxmlformats.org/officeDocument/2006/relationships" xmlns:p="http://schemas.openxmlformats.org/presentationml/2006/main">
   <p:cSld>
     <p:spTree>
       <p:nvGrpSpPr>
@@ -10948,7 +11049,14 @@
         <p:cNvGrpSpPr/>
         <p:nvPr/>
       </p:nvGrpSpPr>
-      <p:grpSpPr/>
+      <p:grpSpPr>
+        <a:xfrm>
+          <a:off x="0" y="0"/>
+          <a:ext cx="0" cy="0"/>
+          <a:chOff x="0" y="0"/>
+          <a:chExt cx="0" cy="0"/>
+        </a:xfrm>
+      </p:grpSpPr>
       <p:sp>
         <p:nvSpPr>
           <p:cNvPr id="2" name="Rectangle 1"/>
@@ -10989,6 +11097,7 @@
           <a:lstStyle/>
           <a:p>
             <a:pPr algn="ctr"/>
+            <a:endParaRPr/>
           </a:p>
         </p:txBody>
       </p:sp>
@@ -11032,6 +11141,7 @@
           <a:lstStyle/>
           <a:p>
             <a:pPr algn="ctr"/>
+            <a:endParaRPr/>
           </a:p>
         </p:txBody>
       </p:sp>
@@ -11075,6 +11185,7 @@
           <a:lstStyle/>
           <a:p>
             <a:pPr algn="ctr"/>
+            <a:endParaRPr/>
           </a:p>
         </p:txBody>
       </p:sp>
@@ -11118,6 +11229,7 @@
           <a:lstStyle/>
           <a:p>
             <a:pPr algn="ctr"/>
+            <a:endParaRPr/>
           </a:p>
         </p:txBody>
       </p:sp>
@@ -11161,6 +11273,7 @@
           <a:lstStyle/>
           <a:p>
             <a:pPr algn="ctr"/>
+            <a:endParaRPr/>
           </a:p>
         </p:txBody>
       </p:sp>
@@ -11308,7 +11421,7 @@
 </file>
 
 <file path=ppt/slides/slide21.xml><?xml version="1.0" encoding="utf-8"?>
-<p:sld xmlns:a="http://schemas.openxmlformats.org/drawingml/2006/main" xmlns:p="http://schemas.openxmlformats.org/presentationml/2006/main" xmlns:r="http://schemas.openxmlformats.org/officeDocument/2006/relationships">
+<p:sld xmlns:a="http://schemas.openxmlformats.org/drawingml/2006/main" xmlns:r="http://schemas.openxmlformats.org/officeDocument/2006/relationships" xmlns:p="http://schemas.openxmlformats.org/presentationml/2006/main">
   <p:cSld>
     <p:spTree>
       <p:nvGrpSpPr>
@@ -11316,7 +11429,14 @@
         <p:cNvGrpSpPr/>
         <p:nvPr/>
       </p:nvGrpSpPr>
-      <p:grpSpPr/>
+      <p:grpSpPr>
+        <a:xfrm>
+          <a:off x="0" y="0"/>
+          <a:ext cx="0" cy="0"/>
+          <a:chOff x="0" y="0"/>
+          <a:chExt cx="0" cy="0"/>
+        </a:xfrm>
+      </p:grpSpPr>
       <p:sp>
         <p:nvSpPr>
           <p:cNvPr id="2" name="Rectangle 1"/>
@@ -11357,6 +11477,7 @@
           <a:lstStyle/>
           <a:p>
             <a:pPr algn="ctr"/>
+            <a:endParaRPr/>
           </a:p>
         </p:txBody>
       </p:sp>
@@ -11400,6 +11521,7 @@
           <a:lstStyle/>
           <a:p>
             <a:pPr algn="ctr"/>
+            <a:endParaRPr/>
           </a:p>
         </p:txBody>
       </p:sp>
@@ -11443,6 +11565,7 @@
           <a:lstStyle/>
           <a:p>
             <a:pPr algn="ctr"/>
+            <a:endParaRPr/>
           </a:p>
         </p:txBody>
       </p:sp>
@@ -11486,6 +11609,7 @@
           <a:lstStyle/>
           <a:p>
             <a:pPr algn="ctr"/>
+            <a:endParaRPr/>
           </a:p>
         </p:txBody>
       </p:sp>
@@ -11529,6 +11653,7 @@
           <a:lstStyle/>
           <a:p>
             <a:pPr algn="ctr"/>
+            <a:endParaRPr/>
           </a:p>
         </p:txBody>
       </p:sp>
@@ -11676,7 +11801,7 @@
 </file>
 
 <file path=ppt/slides/slide22.xml><?xml version="1.0" encoding="utf-8"?>
-<p:sld xmlns:a="http://schemas.openxmlformats.org/drawingml/2006/main" xmlns:p="http://schemas.openxmlformats.org/presentationml/2006/main" xmlns:r="http://schemas.openxmlformats.org/officeDocument/2006/relationships">
+<p:sld xmlns:a="http://schemas.openxmlformats.org/drawingml/2006/main" xmlns:r="http://schemas.openxmlformats.org/officeDocument/2006/relationships" xmlns:p="http://schemas.openxmlformats.org/presentationml/2006/main">
   <p:cSld>
     <p:spTree>
       <p:nvGrpSpPr>
@@ -11684,7 +11809,14 @@
         <p:cNvGrpSpPr/>
         <p:nvPr/>
       </p:nvGrpSpPr>
-      <p:grpSpPr/>
+      <p:grpSpPr>
+        <a:xfrm>
+          <a:off x="0" y="0"/>
+          <a:ext cx="0" cy="0"/>
+          <a:chOff x="0" y="0"/>
+          <a:chExt cx="0" cy="0"/>
+        </a:xfrm>
+      </p:grpSpPr>
       <p:sp>
         <p:nvSpPr>
           <p:cNvPr id="2" name="Rectangle 1"/>
@@ -11725,6 +11857,7 @@
           <a:lstStyle/>
           <a:p>
             <a:pPr algn="ctr"/>
+            <a:endParaRPr/>
           </a:p>
         </p:txBody>
       </p:sp>
@@ -11768,6 +11901,7 @@
           <a:lstStyle/>
           <a:p>
             <a:pPr algn="ctr"/>
+            <a:endParaRPr/>
           </a:p>
         </p:txBody>
       </p:sp>
@@ -11811,6 +11945,7 @@
           <a:lstStyle/>
           <a:p>
             <a:pPr algn="ctr"/>
+            <a:endParaRPr/>
           </a:p>
         </p:txBody>
       </p:sp>
@@ -11854,6 +11989,7 @@
           <a:lstStyle/>
           <a:p>
             <a:pPr algn="ctr"/>
+            <a:endParaRPr/>
           </a:p>
         </p:txBody>
       </p:sp>
@@ -11897,6 +12033,7 @@
           <a:lstStyle/>
           <a:p>
             <a:pPr algn="ctr"/>
+            <a:endParaRPr/>
           </a:p>
         </p:txBody>
       </p:sp>
@@ -12044,7 +12181,7 @@
 </file>
 
 <file path=ppt/slides/slide23.xml><?xml version="1.0" encoding="utf-8"?>
-<p:sld xmlns:a="http://schemas.openxmlformats.org/drawingml/2006/main" xmlns:p="http://schemas.openxmlformats.org/presentationml/2006/main" xmlns:r="http://schemas.openxmlformats.org/officeDocument/2006/relationships">
+<p:sld xmlns:a="http://schemas.openxmlformats.org/drawingml/2006/main" xmlns:r="http://schemas.openxmlformats.org/officeDocument/2006/relationships" xmlns:p="http://schemas.openxmlformats.org/presentationml/2006/main">
   <p:cSld>
     <p:spTree>
       <p:nvGrpSpPr>
@@ -12052,7 +12189,14 @@
         <p:cNvGrpSpPr/>
         <p:nvPr/>
       </p:nvGrpSpPr>
-      <p:grpSpPr/>
+      <p:grpSpPr>
+        <a:xfrm>
+          <a:off x="0" y="0"/>
+          <a:ext cx="0" cy="0"/>
+          <a:chOff x="0" y="0"/>
+          <a:chExt cx="0" cy="0"/>
+        </a:xfrm>
+      </p:grpSpPr>
       <p:sp>
         <p:nvSpPr>
           <p:cNvPr id="2" name="Rectangle 1"/>
@@ -12093,6 +12237,7 @@
           <a:lstStyle/>
           <a:p>
             <a:pPr algn="ctr"/>
+            <a:endParaRPr/>
           </a:p>
         </p:txBody>
       </p:sp>
@@ -12136,6 +12281,7 @@
           <a:lstStyle/>
           <a:p>
             <a:pPr algn="ctr"/>
+            <a:endParaRPr/>
           </a:p>
         </p:txBody>
       </p:sp>
@@ -12179,6 +12325,7 @@
           <a:lstStyle/>
           <a:p>
             <a:pPr algn="ctr"/>
+            <a:endParaRPr/>
           </a:p>
         </p:txBody>
       </p:sp>
@@ -12222,6 +12369,7 @@
           <a:lstStyle/>
           <a:p>
             <a:pPr algn="ctr"/>
+            <a:endParaRPr/>
           </a:p>
         </p:txBody>
       </p:sp>
@@ -12265,6 +12413,7 @@
           <a:lstStyle/>
           <a:p>
             <a:pPr algn="ctr"/>
+            <a:endParaRPr/>
           </a:p>
         </p:txBody>
       </p:sp>
@@ -12412,7 +12561,7 @@
 </file>
 
 <file path=ppt/slides/slide24.xml><?xml version="1.0" encoding="utf-8"?>
-<p:sld xmlns:a="http://schemas.openxmlformats.org/drawingml/2006/main" xmlns:p="http://schemas.openxmlformats.org/presentationml/2006/main" xmlns:r="http://schemas.openxmlformats.org/officeDocument/2006/relationships">
+<p:sld xmlns:a="http://schemas.openxmlformats.org/drawingml/2006/main" xmlns:r="http://schemas.openxmlformats.org/officeDocument/2006/relationships" xmlns:p="http://schemas.openxmlformats.org/presentationml/2006/main">
   <p:cSld>
     <p:spTree>
       <p:nvGrpSpPr>
@@ -12420,7 +12569,14 @@
         <p:cNvGrpSpPr/>
         <p:nvPr/>
       </p:nvGrpSpPr>
-      <p:grpSpPr/>
+      <p:grpSpPr>
+        <a:xfrm>
+          <a:off x="0" y="0"/>
+          <a:ext cx="0" cy="0"/>
+          <a:chOff x="0" y="0"/>
+          <a:chExt cx="0" cy="0"/>
+        </a:xfrm>
+      </p:grpSpPr>
       <p:sp>
         <p:nvSpPr>
           <p:cNvPr id="2" name="Rectangle 1"/>
@@ -12461,6 +12617,7 @@
           <a:lstStyle/>
           <a:p>
             <a:pPr algn="ctr"/>
+            <a:endParaRPr/>
           </a:p>
         </p:txBody>
       </p:sp>
@@ -12504,6 +12661,7 @@
           <a:lstStyle/>
           <a:p>
             <a:pPr algn="ctr"/>
+            <a:endParaRPr/>
           </a:p>
         </p:txBody>
       </p:sp>
@@ -12547,6 +12705,7 @@
           <a:lstStyle/>
           <a:p>
             <a:pPr algn="ctr"/>
+            <a:endParaRPr/>
           </a:p>
         </p:txBody>
       </p:sp>
@@ -12590,6 +12749,7 @@
           <a:lstStyle/>
           <a:p>
             <a:pPr algn="ctr"/>
+            <a:endParaRPr/>
           </a:p>
         </p:txBody>
       </p:sp>
@@ -12633,6 +12793,7 @@
           <a:lstStyle/>
           <a:p>
             <a:pPr algn="ctr"/>
+            <a:endParaRPr/>
           </a:p>
         </p:txBody>
       </p:sp>
@@ -12780,7 +12941,7 @@
 </file>
 
 <file path=ppt/slides/slide25.xml><?xml version="1.0" encoding="utf-8"?>
-<p:sld xmlns:a="http://schemas.openxmlformats.org/drawingml/2006/main" xmlns:p="http://schemas.openxmlformats.org/presentationml/2006/main" xmlns:r="http://schemas.openxmlformats.org/officeDocument/2006/relationships">
+<p:sld xmlns:a="http://schemas.openxmlformats.org/drawingml/2006/main" xmlns:r="http://schemas.openxmlformats.org/officeDocument/2006/relationships" xmlns:p="http://schemas.openxmlformats.org/presentationml/2006/main">
   <p:cSld>
     <p:spTree>
       <p:nvGrpSpPr>
@@ -12788,7 +12949,14 @@
         <p:cNvGrpSpPr/>
         <p:nvPr/>
       </p:nvGrpSpPr>
-      <p:grpSpPr/>
+      <p:grpSpPr>
+        <a:xfrm>
+          <a:off x="0" y="0"/>
+          <a:ext cx="0" cy="0"/>
+          <a:chOff x="0" y="0"/>
+          <a:chExt cx="0" cy="0"/>
+        </a:xfrm>
+      </p:grpSpPr>
       <p:sp>
         <p:nvSpPr>
           <p:cNvPr id="2" name="Rectangle 1"/>
@@ -12829,6 +12997,7 @@
           <a:lstStyle/>
           <a:p>
             <a:pPr algn="ctr"/>
+            <a:endParaRPr/>
           </a:p>
         </p:txBody>
       </p:sp>
@@ -12872,6 +13041,7 @@
           <a:lstStyle/>
           <a:p>
             <a:pPr algn="ctr"/>
+            <a:endParaRPr/>
           </a:p>
         </p:txBody>
       </p:sp>
@@ -12915,6 +13085,7 @@
           <a:lstStyle/>
           <a:p>
             <a:pPr algn="ctr"/>
+            <a:endParaRPr/>
           </a:p>
         </p:txBody>
       </p:sp>
@@ -12958,6 +13129,7 @@
           <a:lstStyle/>
           <a:p>
             <a:pPr algn="ctr"/>
+            <a:endParaRPr/>
           </a:p>
         </p:txBody>
       </p:sp>
@@ -13001,6 +13173,7 @@
           <a:lstStyle/>
           <a:p>
             <a:pPr algn="ctr"/>
+            <a:endParaRPr/>
           </a:p>
         </p:txBody>
       </p:sp>
@@ -13148,7 +13321,7 @@
 </file>
 
 <file path=ppt/slides/slide26.xml><?xml version="1.0" encoding="utf-8"?>
-<p:sld xmlns:a="http://schemas.openxmlformats.org/drawingml/2006/main" xmlns:p="http://schemas.openxmlformats.org/presentationml/2006/main" xmlns:r="http://schemas.openxmlformats.org/officeDocument/2006/relationships">
+<p:sld xmlns:a="http://schemas.openxmlformats.org/drawingml/2006/main" xmlns:r="http://schemas.openxmlformats.org/officeDocument/2006/relationships" xmlns:p="http://schemas.openxmlformats.org/presentationml/2006/main">
   <p:cSld>
     <p:spTree>
       <p:nvGrpSpPr>
@@ -13156,7 +13329,14 @@
         <p:cNvGrpSpPr/>
         <p:nvPr/>
       </p:nvGrpSpPr>
-      <p:grpSpPr/>
+      <p:grpSpPr>
+        <a:xfrm>
+          <a:off x="0" y="0"/>
+          <a:ext cx="0" cy="0"/>
+          <a:chOff x="0" y="0"/>
+          <a:chExt cx="0" cy="0"/>
+        </a:xfrm>
+      </p:grpSpPr>
       <p:sp>
         <p:nvSpPr>
           <p:cNvPr id="2" name="Rectangle 1"/>
@@ -13197,6 +13377,7 @@
           <a:lstStyle/>
           <a:p>
             <a:pPr algn="ctr"/>
+            <a:endParaRPr/>
           </a:p>
         </p:txBody>
       </p:sp>
@@ -13240,6 +13421,7 @@
           <a:lstStyle/>
           <a:p>
             <a:pPr algn="ctr"/>
+            <a:endParaRPr/>
           </a:p>
         </p:txBody>
       </p:sp>
@@ -13283,6 +13465,7 @@
           <a:lstStyle/>
           <a:p>
             <a:pPr algn="ctr"/>
+            <a:endParaRPr/>
           </a:p>
         </p:txBody>
       </p:sp>
@@ -13326,6 +13509,7 @@
           <a:lstStyle/>
           <a:p>
             <a:pPr algn="ctr"/>
+            <a:endParaRPr/>
           </a:p>
         </p:txBody>
       </p:sp>
@@ -13369,6 +13553,7 @@
           <a:lstStyle/>
           <a:p>
             <a:pPr algn="ctr"/>
+            <a:endParaRPr/>
           </a:p>
         </p:txBody>
       </p:sp>
@@ -13516,7 +13701,7 @@
 </file>
 
 <file path=ppt/slides/slide27.xml><?xml version="1.0" encoding="utf-8"?>
-<p:sld xmlns:a="http://schemas.openxmlformats.org/drawingml/2006/main" xmlns:p="http://schemas.openxmlformats.org/presentationml/2006/main" xmlns:r="http://schemas.openxmlformats.org/officeDocument/2006/relationships">
+<p:sld xmlns:a="http://schemas.openxmlformats.org/drawingml/2006/main" xmlns:r="http://schemas.openxmlformats.org/officeDocument/2006/relationships" xmlns:p="http://schemas.openxmlformats.org/presentationml/2006/main">
   <p:cSld>
     <p:spTree>
       <p:nvGrpSpPr>
@@ -13524,7 +13709,14 @@
         <p:cNvGrpSpPr/>
         <p:nvPr/>
       </p:nvGrpSpPr>
-      <p:grpSpPr/>
+      <p:grpSpPr>
+        <a:xfrm>
+          <a:off x="0" y="0"/>
+          <a:ext cx="0" cy="0"/>
+          <a:chOff x="0" y="0"/>
+          <a:chExt cx="0" cy="0"/>
+        </a:xfrm>
+      </p:grpSpPr>
       <p:sp>
         <p:nvSpPr>
           <p:cNvPr id="2" name="Rectangle 1"/>
@@ -13565,6 +13757,7 @@
           <a:lstStyle/>
           <a:p>
             <a:pPr algn="ctr"/>
+            <a:endParaRPr/>
           </a:p>
         </p:txBody>
       </p:sp>
@@ -13608,6 +13801,7 @@
           <a:lstStyle/>
           <a:p>
             <a:pPr algn="ctr"/>
+            <a:endParaRPr/>
           </a:p>
         </p:txBody>
       </p:sp>
@@ -13651,6 +13845,7 @@
           <a:lstStyle/>
           <a:p>
             <a:pPr algn="ctr"/>
+            <a:endParaRPr/>
           </a:p>
         </p:txBody>
       </p:sp>
@@ -13694,6 +13889,7 @@
           <a:lstStyle/>
           <a:p>
             <a:pPr algn="ctr"/>
+            <a:endParaRPr/>
           </a:p>
         </p:txBody>
       </p:sp>
@@ -13737,6 +13933,7 @@
           <a:lstStyle/>
           <a:p>
             <a:pPr algn="ctr"/>
+            <a:endParaRPr/>
           </a:p>
         </p:txBody>
       </p:sp>
@@ -13884,7 +14081,7 @@
 </file>
 
 <file path=ppt/slides/slide28.xml><?xml version="1.0" encoding="utf-8"?>
-<p:sld xmlns:a="http://schemas.openxmlformats.org/drawingml/2006/main" xmlns:p="http://schemas.openxmlformats.org/presentationml/2006/main" xmlns:r="http://schemas.openxmlformats.org/officeDocument/2006/relationships">
+<p:sld xmlns:a="http://schemas.openxmlformats.org/drawingml/2006/main" xmlns:r="http://schemas.openxmlformats.org/officeDocument/2006/relationships" xmlns:p="http://schemas.openxmlformats.org/presentationml/2006/main">
   <p:cSld>
     <p:spTree>
       <p:nvGrpSpPr>
@@ -13892,7 +14089,14 @@
         <p:cNvGrpSpPr/>
         <p:nvPr/>
       </p:nvGrpSpPr>
-      <p:grpSpPr/>
+      <p:grpSpPr>
+        <a:xfrm>
+          <a:off x="0" y="0"/>
+          <a:ext cx="0" cy="0"/>
+          <a:chOff x="0" y="0"/>
+          <a:chExt cx="0" cy="0"/>
+        </a:xfrm>
+      </p:grpSpPr>
       <p:sp>
         <p:nvSpPr>
           <p:cNvPr id="2" name="Rectangle 1"/>
@@ -13933,6 +14137,7 @@
           <a:lstStyle/>
           <a:p>
             <a:pPr algn="ctr"/>
+            <a:endParaRPr/>
           </a:p>
         </p:txBody>
       </p:sp>
@@ -13976,6 +14181,7 @@
           <a:lstStyle/>
           <a:p>
             <a:pPr algn="ctr"/>
+            <a:endParaRPr/>
           </a:p>
         </p:txBody>
       </p:sp>
@@ -14019,6 +14225,7 @@
           <a:lstStyle/>
           <a:p>
             <a:pPr algn="ctr"/>
+            <a:endParaRPr/>
           </a:p>
         </p:txBody>
       </p:sp>
@@ -14062,6 +14269,7 @@
           <a:lstStyle/>
           <a:p>
             <a:pPr algn="ctr"/>
+            <a:endParaRPr/>
           </a:p>
         </p:txBody>
       </p:sp>
@@ -14105,6 +14313,7 @@
           <a:lstStyle/>
           <a:p>
             <a:pPr algn="ctr"/>
+            <a:endParaRPr/>
           </a:p>
         </p:txBody>
       </p:sp>
@@ -14252,7 +14461,7 @@
 </file>
 
 <file path=ppt/slides/slide29.xml><?xml version="1.0" encoding="utf-8"?>
-<p:sld xmlns:a="http://schemas.openxmlformats.org/drawingml/2006/main" xmlns:p="http://schemas.openxmlformats.org/presentationml/2006/main" xmlns:r="http://schemas.openxmlformats.org/officeDocument/2006/relationships">
+<p:sld xmlns:a="http://schemas.openxmlformats.org/drawingml/2006/main" xmlns:r="http://schemas.openxmlformats.org/officeDocument/2006/relationships" xmlns:p="http://schemas.openxmlformats.org/presentationml/2006/main">
   <p:cSld>
     <p:spTree>
       <p:nvGrpSpPr>
@@ -14260,7 +14469,14 @@
         <p:cNvGrpSpPr/>
         <p:nvPr/>
       </p:nvGrpSpPr>
-      <p:grpSpPr/>
+      <p:grpSpPr>
+        <a:xfrm>
+          <a:off x="0" y="0"/>
+          <a:ext cx="0" cy="0"/>
+          <a:chOff x="0" y="0"/>
+          <a:chExt cx="0" cy="0"/>
+        </a:xfrm>
+      </p:grpSpPr>
       <p:sp>
         <p:nvSpPr>
           <p:cNvPr id="2" name="Rectangle 1"/>
@@ -14301,6 +14517,7 @@
           <a:lstStyle/>
           <a:p>
             <a:pPr algn="ctr"/>
+            <a:endParaRPr/>
           </a:p>
         </p:txBody>
       </p:sp>
@@ -14344,6 +14561,7 @@
           <a:lstStyle/>
           <a:p>
             <a:pPr algn="ctr"/>
+            <a:endParaRPr/>
           </a:p>
         </p:txBody>
       </p:sp>
@@ -14387,6 +14605,7 @@
           <a:lstStyle/>
           <a:p>
             <a:pPr algn="ctr"/>
+            <a:endParaRPr/>
           </a:p>
         </p:txBody>
       </p:sp>
@@ -14430,6 +14649,7 @@
           <a:lstStyle/>
           <a:p>
             <a:pPr algn="ctr"/>
+            <a:endParaRPr/>
           </a:p>
         </p:txBody>
       </p:sp>
@@ -14473,6 +14693,7 @@
           <a:lstStyle/>
           <a:p>
             <a:pPr algn="ctr"/>
+            <a:endParaRPr/>
           </a:p>
         </p:txBody>
       </p:sp>
@@ -14620,7 +14841,7 @@
 </file>
 
 <file path=ppt/slides/slide3.xml><?xml version="1.0" encoding="utf-8"?>
-<p:sld xmlns:a="http://schemas.openxmlformats.org/drawingml/2006/main" xmlns:p="http://schemas.openxmlformats.org/presentationml/2006/main" xmlns:r="http://schemas.openxmlformats.org/officeDocument/2006/relationships">
+<p:sld xmlns:a="http://schemas.openxmlformats.org/drawingml/2006/main" xmlns:r="http://schemas.openxmlformats.org/officeDocument/2006/relationships" xmlns:p="http://schemas.openxmlformats.org/presentationml/2006/main">
   <p:cSld>
     <p:spTree>
       <p:nvGrpSpPr>
@@ -14628,7 +14849,14 @@
         <p:cNvGrpSpPr/>
         <p:nvPr/>
       </p:nvGrpSpPr>
-      <p:grpSpPr/>
+      <p:grpSpPr>
+        <a:xfrm>
+          <a:off x="0" y="0"/>
+          <a:ext cx="0" cy="0"/>
+          <a:chOff x="0" y="0"/>
+          <a:chExt cx="0" cy="0"/>
+        </a:xfrm>
+      </p:grpSpPr>
       <p:sp>
         <p:nvSpPr>
           <p:cNvPr id="2" name="Rectangle 1"/>
@@ -14669,6 +14897,7 @@
           <a:lstStyle/>
           <a:p>
             <a:pPr algn="ctr"/>
+            <a:endParaRPr/>
           </a:p>
         </p:txBody>
       </p:sp>
@@ -14712,6 +14941,7 @@
           <a:lstStyle/>
           <a:p>
             <a:pPr algn="ctr"/>
+            <a:endParaRPr/>
           </a:p>
         </p:txBody>
       </p:sp>
@@ -14755,6 +14985,7 @@
           <a:lstStyle/>
           <a:p>
             <a:pPr algn="ctr"/>
+            <a:endParaRPr/>
           </a:p>
         </p:txBody>
       </p:sp>
@@ -14798,6 +15029,7 @@
           <a:lstStyle/>
           <a:p>
             <a:pPr algn="ctr"/>
+            <a:endParaRPr/>
           </a:p>
         </p:txBody>
       </p:sp>
@@ -14841,6 +15073,7 @@
           <a:lstStyle/>
           <a:p>
             <a:pPr algn="ctr"/>
+            <a:endParaRPr/>
           </a:p>
         </p:txBody>
       </p:sp>
@@ -14956,6 +15189,7 @@
           <a:lstStyle/>
           <a:p>
             <a:pPr algn="ctr"/>
+            <a:endParaRPr/>
           </a:p>
         </p:txBody>
       </p:sp>
@@ -14999,6 +15233,7 @@
           <a:lstStyle/>
           <a:p>
             <a:pPr algn="ctr"/>
+            <a:endParaRPr/>
           </a:p>
         </p:txBody>
       </p:sp>
@@ -15054,7 +15289,7 @@
           <a:noFill/>
         </p:spPr>
         <p:txBody>
-          <a:bodyPr wrap="square" anchor="t" lIns="38100" rIns="38100" tIns="25400" bIns="25400">
+          <a:bodyPr wrap="square" lIns="38100" tIns="25400" rIns="38100" bIns="25400" anchor="t">
             <a:noAutofit/>
           </a:bodyPr>
           <a:lstStyle/>
@@ -15076,9 +15311,6 @@
               </a:rPr>
               <a:t>Answers codebase questions with loaded file or directory context.</a:t>
             </a:r>
-            <a:endParaRPr sz="1500" b="0" i="0">
-              <a:latin typeface="Calibri"/>
-            </a:endParaRPr>
           </a:p>
           <a:p>
             <a:pPr>
@@ -15098,9 +15330,6 @@
               </a:rPr>
               <a:t>Uses hybrid retrieval to extract metadata, split content, rank source chunks, and respect context budgets.</a:t>
             </a:r>
-            <a:endParaRPr sz="1500" b="0" i="0">
-              <a:latin typeface="Calibri"/>
-            </a:endParaRPr>
           </a:p>
           <a:p>
             <a:pPr>
@@ -15120,9 +15349,6 @@
               </a:rPr>
               <a:t>Runs checked Multi-Turn requests through request-scoped planning, capability selection, tool calls, observations, monitoring, and final synthesis.</a:t>
             </a:r>
-            <a:endParaRPr sz="1500" b="0" i="0">
-              <a:latin typeface="Calibri"/>
-            </a:endParaRPr>
           </a:p>
         </p:txBody>
       </p:sp>
@@ -15168,6 +15394,7 @@
           <a:lstStyle/>
           <a:p>
             <a:pPr algn="ctr"/>
+            <a:endParaRPr/>
           </a:p>
         </p:txBody>
       </p:sp>
@@ -15211,6 +15438,7 @@
           <a:lstStyle/>
           <a:p>
             <a:pPr algn="ctr"/>
+            <a:endParaRPr/>
           </a:p>
         </p:txBody>
       </p:sp>
@@ -15266,7 +15494,7 @@
           <a:noFill/>
         </p:spPr>
         <p:txBody>
-          <a:bodyPr wrap="square" anchor="t" lIns="38100" rIns="38100" tIns="25400" bIns="25400">
+          <a:bodyPr wrap="square" lIns="38100" tIns="25400" rIns="38100" bIns="25400" anchor="t">
             <a:noAutofit/>
           </a:bodyPr>
           <a:lstStyle/>
@@ -15288,9 +15516,6 @@
               </a:rPr>
               <a:t>Launches wrapped copies of selected workflow agents in isolated runtime folders without mutating templates.</a:t>
             </a:r>
-            <a:endParaRPr sz="1500" b="0" i="0">
-              <a:latin typeface="Calibri"/>
-            </a:endParaRPr>
           </a:p>
           <a:p>
             <a:pPr>
@@ -15310,9 +15535,6 @@
               </a:rPr>
               <a:t>Lets users design, validate, save, pause, resume, and stop visual workflows through the Agentic Control Panel.</a:t>
             </a:r>
-            <a:endParaRPr sz="1500" b="0" i="0">
-              <a:latin typeface="Calibri"/>
-            </a:endParaRPr>
           </a:p>
         </p:txBody>
       </p:sp>
@@ -15358,6 +15580,7 @@
           <a:lstStyle/>
           <a:p>
             <a:pPr algn="ctr"/>
+            <a:endParaRPr/>
           </a:p>
         </p:txBody>
       </p:sp>
@@ -15401,6 +15624,7 @@
           <a:lstStyle/>
           <a:p>
             <a:pPr algn="ctr"/>
+            <a:endParaRPr/>
           </a:p>
         </p:txBody>
       </p:sp>
@@ -15456,7 +15680,7 @@
           <a:noFill/>
         </p:spPr>
         <p:txBody>
-          <a:bodyPr wrap="square" anchor="t" lIns="38100" rIns="38100" tIns="25400" bIns="25400">
+          <a:bodyPr wrap="square" lIns="38100" tIns="25400" rIns="38100" bIns="25400" anchor="t">
             <a:noAutofit/>
           </a:bodyPr>
           <a:lstStyle/>
@@ -15478,9 +15702,6 @@
               </a:rPr>
               <a:t>Turns successful Multi-Turn tool executions into starter `.flw` workflows that can be inspected and validated in ACP.</a:t>
             </a:r>
-            <a:endParaRPr sz="1500" b="0" i="0">
-              <a:latin typeface="Calibri"/>
-            </a:endParaRPr>
           </a:p>
           <a:p>
             <a:pPr>
@@ -15500,9 +15721,6 @@
               </a:rPr>
               <a:t>Packages the project into a distributable Windows release with installer and uninstaller tooling.</a:t>
             </a:r>
-            <a:endParaRPr sz="1500" b="0" i="0">
-              <a:latin typeface="Calibri"/>
-            </a:endParaRPr>
           </a:p>
         </p:txBody>
       </p:sp>
@@ -15515,7 +15733,7 @@
 </file>
 
 <file path=ppt/slides/slide30.xml><?xml version="1.0" encoding="utf-8"?>
-<p:sld xmlns:a="http://schemas.openxmlformats.org/drawingml/2006/main" xmlns:p="http://schemas.openxmlformats.org/presentationml/2006/main" xmlns:r="http://schemas.openxmlformats.org/officeDocument/2006/relationships">
+<p:sld xmlns:a="http://schemas.openxmlformats.org/drawingml/2006/main" xmlns:r="http://schemas.openxmlformats.org/officeDocument/2006/relationships" xmlns:p="http://schemas.openxmlformats.org/presentationml/2006/main">
   <p:cSld>
     <p:spTree>
       <p:nvGrpSpPr>
@@ -15523,7 +15741,14 @@
         <p:cNvGrpSpPr/>
         <p:nvPr/>
       </p:nvGrpSpPr>
-      <p:grpSpPr/>
+      <p:grpSpPr>
+        <a:xfrm>
+          <a:off x="0" y="0"/>
+          <a:ext cx="0" cy="0"/>
+          <a:chOff x="0" y="0"/>
+          <a:chExt cx="0" cy="0"/>
+        </a:xfrm>
+      </p:grpSpPr>
       <p:sp>
         <p:nvSpPr>
           <p:cNvPr id="2" name="Rectangle 1"/>
@@ -15564,6 +15789,7 @@
           <a:lstStyle/>
           <a:p>
             <a:pPr algn="ctr"/>
+            <a:endParaRPr/>
           </a:p>
         </p:txBody>
       </p:sp>
@@ -15607,6 +15833,7 @@
           <a:lstStyle/>
           <a:p>
             <a:pPr algn="ctr"/>
+            <a:endParaRPr/>
           </a:p>
         </p:txBody>
       </p:sp>
@@ -15650,6 +15877,7 @@
           <a:lstStyle/>
           <a:p>
             <a:pPr algn="ctr"/>
+            <a:endParaRPr/>
           </a:p>
         </p:txBody>
       </p:sp>
@@ -15693,6 +15921,7 @@
           <a:lstStyle/>
           <a:p>
             <a:pPr algn="ctr"/>
+            <a:endParaRPr/>
           </a:p>
         </p:txBody>
       </p:sp>
@@ -15736,6 +15965,7 @@
           <a:lstStyle/>
           <a:p>
             <a:pPr algn="ctr"/>
+            <a:endParaRPr/>
           </a:p>
         </p:txBody>
       </p:sp>
@@ -15883,7 +16113,7 @@
 </file>
 
 <file path=ppt/slides/slide31.xml><?xml version="1.0" encoding="utf-8"?>
-<p:sld xmlns:a="http://schemas.openxmlformats.org/drawingml/2006/main" xmlns:p="http://schemas.openxmlformats.org/presentationml/2006/main" xmlns:r="http://schemas.openxmlformats.org/officeDocument/2006/relationships">
+<p:sld xmlns:a="http://schemas.openxmlformats.org/drawingml/2006/main" xmlns:r="http://schemas.openxmlformats.org/officeDocument/2006/relationships" xmlns:p="http://schemas.openxmlformats.org/presentationml/2006/main">
   <p:cSld>
     <p:spTree>
       <p:nvGrpSpPr>
@@ -15891,7 +16121,14 @@
         <p:cNvGrpSpPr/>
         <p:nvPr/>
       </p:nvGrpSpPr>
-      <p:grpSpPr/>
+      <p:grpSpPr>
+        <a:xfrm>
+          <a:off x="0" y="0"/>
+          <a:ext cx="0" cy="0"/>
+          <a:chOff x="0" y="0"/>
+          <a:chExt cx="0" cy="0"/>
+        </a:xfrm>
+      </p:grpSpPr>
       <p:sp>
         <p:nvSpPr>
           <p:cNvPr id="2" name="Rectangle 1"/>
@@ -15932,6 +16169,7 @@
           <a:lstStyle/>
           <a:p>
             <a:pPr algn="ctr"/>
+            <a:endParaRPr/>
           </a:p>
         </p:txBody>
       </p:sp>
@@ -15975,6 +16213,7 @@
           <a:lstStyle/>
           <a:p>
             <a:pPr algn="ctr"/>
+            <a:endParaRPr/>
           </a:p>
         </p:txBody>
       </p:sp>
@@ -16018,6 +16257,7 @@
           <a:lstStyle/>
           <a:p>
             <a:pPr algn="ctr"/>
+            <a:endParaRPr/>
           </a:p>
         </p:txBody>
       </p:sp>
@@ -16061,6 +16301,7 @@
           <a:lstStyle/>
           <a:p>
             <a:pPr algn="ctr"/>
+            <a:endParaRPr/>
           </a:p>
         </p:txBody>
       </p:sp>
@@ -16104,6 +16345,7 @@
           <a:lstStyle/>
           <a:p>
             <a:pPr algn="ctr"/>
+            <a:endParaRPr/>
           </a:p>
         </p:txBody>
       </p:sp>
@@ -16225,7 +16467,7 @@
 </file>
 
 <file path=ppt/slides/slide32.xml><?xml version="1.0" encoding="utf-8"?>
-<p:sld xmlns:a="http://schemas.openxmlformats.org/drawingml/2006/main" xmlns:p="http://schemas.openxmlformats.org/presentationml/2006/main" xmlns:r="http://schemas.openxmlformats.org/officeDocument/2006/relationships">
+<p:sld xmlns:a="http://schemas.openxmlformats.org/drawingml/2006/main" xmlns:r="http://schemas.openxmlformats.org/officeDocument/2006/relationships" xmlns:p="http://schemas.openxmlformats.org/presentationml/2006/main">
   <p:cSld>
     <p:spTree>
       <p:nvGrpSpPr>
@@ -16233,7 +16475,14 @@
         <p:cNvGrpSpPr/>
         <p:nvPr/>
       </p:nvGrpSpPr>
-      <p:grpSpPr/>
+      <p:grpSpPr>
+        <a:xfrm>
+          <a:off x="0" y="0"/>
+          <a:ext cx="0" cy="0"/>
+          <a:chOff x="0" y="0"/>
+          <a:chExt cx="0" cy="0"/>
+        </a:xfrm>
+      </p:grpSpPr>
       <p:sp>
         <p:nvSpPr>
           <p:cNvPr id="2" name="Rectangle 1"/>
@@ -16274,6 +16523,7 @@
           <a:lstStyle/>
           <a:p>
             <a:pPr algn="ctr"/>
+            <a:endParaRPr/>
           </a:p>
         </p:txBody>
       </p:sp>
@@ -16317,6 +16567,7 @@
           <a:lstStyle/>
           <a:p>
             <a:pPr algn="ctr"/>
+            <a:endParaRPr/>
           </a:p>
         </p:txBody>
       </p:sp>
@@ -16360,6 +16611,7 @@
           <a:lstStyle/>
           <a:p>
             <a:pPr algn="ctr"/>
+            <a:endParaRPr/>
           </a:p>
         </p:txBody>
       </p:sp>
@@ -16403,6 +16655,7 @@
           <a:lstStyle/>
           <a:p>
             <a:pPr algn="ctr"/>
+            <a:endParaRPr/>
           </a:p>
         </p:txBody>
       </p:sp>
@@ -16446,6 +16699,7 @@
           <a:lstStyle/>
           <a:p>
             <a:pPr algn="ctr"/>
+            <a:endParaRPr/>
           </a:p>
         </p:txBody>
       </p:sp>
@@ -16561,6 +16815,7 @@
           <a:lstStyle/>
           <a:p>
             <a:pPr algn="ctr"/>
+            <a:endParaRPr/>
           </a:p>
         </p:txBody>
       </p:sp>
@@ -16604,6 +16859,7 @@
           <a:lstStyle/>
           <a:p>
             <a:pPr algn="ctr"/>
+            <a:endParaRPr/>
           </a:p>
         </p:txBody>
       </p:sp>
@@ -16659,7 +16915,7 @@
           <a:noFill/>
         </p:spPr>
         <p:txBody>
-          <a:bodyPr wrap="square" anchor="t" lIns="38100" rIns="38100" tIns="25400" bIns="25400">
+          <a:bodyPr wrap="square" lIns="38100" tIns="25400" rIns="38100" bIns="25400" anchor="t">
             <a:noAutofit/>
           </a:bodyPr>
           <a:lstStyle/>
@@ -16681,9 +16937,6 @@
               </a:rPr>
               <a:t>Regenerate the PDF and deck whenever README, architecture, agent catalog, line inventory, or packaging behavior changes.</a:t>
             </a:r>
-            <a:endParaRPr sz="1700" b="0" i="0">
-              <a:latin typeface="Calibri"/>
-            </a:endParaRPr>
           </a:p>
           <a:p>
             <a:pPr>
@@ -16703,9 +16956,6 @@
               </a:rPr>
               <a:t>Keep the PDF exhaustive and evidence-heavy; keep the PPT visual, split dense appendices, and audit geometry before delivery.</a:t>
             </a:r>
-            <a:endParaRPr sz="1700" b="0" i="0">
-              <a:latin typeface="Calibri"/>
-            </a:endParaRPr>
           </a:p>
           <a:p>
             <a:pPr>
@@ -16725,9 +16975,6 @@
               </a:rPr>
               <a:t>Use the new Skills in `.codex/skills/` so future refreshes follow the same no-overlap and full-dossier rules.</a:t>
             </a:r>
-            <a:endParaRPr sz="1700" b="0" i="0">
-              <a:latin typeface="Calibri"/>
-            </a:endParaRPr>
           </a:p>
         </p:txBody>
       </p:sp>
@@ -16740,7 +16987,7 @@
 </file>
 
 <file path=ppt/slides/slide4.xml><?xml version="1.0" encoding="utf-8"?>
-<p:sld xmlns:a="http://schemas.openxmlformats.org/drawingml/2006/main" xmlns:p="http://schemas.openxmlformats.org/presentationml/2006/main" xmlns:r="http://schemas.openxmlformats.org/officeDocument/2006/relationships">
+<p:sld xmlns:a="http://schemas.openxmlformats.org/drawingml/2006/main" xmlns:r="http://schemas.openxmlformats.org/officeDocument/2006/relationships" xmlns:p="http://schemas.openxmlformats.org/presentationml/2006/main">
   <p:cSld>
     <p:spTree>
       <p:nvGrpSpPr>
@@ -16748,7 +16995,14 @@
         <p:cNvGrpSpPr/>
         <p:nvPr/>
       </p:nvGrpSpPr>
-      <p:grpSpPr/>
+      <p:grpSpPr>
+        <a:xfrm>
+          <a:off x="0" y="0"/>
+          <a:ext cx="0" cy="0"/>
+          <a:chOff x="0" y="0"/>
+          <a:chExt cx="0" cy="0"/>
+        </a:xfrm>
+      </p:grpSpPr>
       <p:sp>
         <p:nvSpPr>
           <p:cNvPr id="2" name="Rectangle 1"/>
@@ -16789,6 +17043,7 @@
           <a:lstStyle/>
           <a:p>
             <a:pPr algn="ctr"/>
+            <a:endParaRPr/>
           </a:p>
         </p:txBody>
       </p:sp>
@@ -16832,6 +17087,7 @@
           <a:lstStyle/>
           <a:p>
             <a:pPr algn="ctr"/>
+            <a:endParaRPr/>
           </a:p>
         </p:txBody>
       </p:sp>
@@ -16875,6 +17131,7 @@
           <a:lstStyle/>
           <a:p>
             <a:pPr algn="ctr"/>
+            <a:endParaRPr/>
           </a:p>
         </p:txBody>
       </p:sp>
@@ -16918,6 +17175,7 @@
           <a:lstStyle/>
           <a:p>
             <a:pPr algn="ctr"/>
+            <a:endParaRPr/>
           </a:p>
         </p:txBody>
       </p:sp>
@@ -16961,6 +17219,7 @@
           <a:lstStyle/>
           <a:p>
             <a:pPr algn="ctr"/>
+            <a:endParaRPr/>
           </a:p>
         </p:txBody>
       </p:sp>
@@ -17076,6 +17335,7 @@
           <a:lstStyle/>
           <a:p>
             <a:pPr algn="ctr"/>
+            <a:endParaRPr/>
           </a:p>
         </p:txBody>
       </p:sp>
@@ -17191,6 +17451,7 @@
           <a:lstStyle/>
           <a:p>
             <a:pPr algn="ctr"/>
+            <a:endParaRPr/>
           </a:p>
         </p:txBody>
       </p:sp>
@@ -17306,6 +17567,7 @@
           <a:lstStyle/>
           <a:p>
             <a:pPr algn="ctr"/>
+            <a:endParaRPr/>
           </a:p>
         </p:txBody>
       </p:sp>
@@ -17421,6 +17683,7 @@
           <a:lstStyle/>
           <a:p>
             <a:pPr algn="ctr"/>
+            <a:endParaRPr/>
           </a:p>
         </p:txBody>
       </p:sp>
@@ -17536,6 +17799,7 @@
           <a:lstStyle/>
           <a:p>
             <a:pPr algn="ctr"/>
+            <a:endParaRPr/>
           </a:p>
         </p:txBody>
       </p:sp>
@@ -17651,6 +17915,7 @@
           <a:lstStyle/>
           <a:p>
             <a:pPr algn="ctr"/>
+            <a:endParaRPr/>
           </a:p>
         </p:txBody>
       </p:sp>
@@ -17697,8 +17962,8 @@
         </p:nvSpPr>
         <p:spPr>
           <a:xfrm>
-            <a:off x="713232" y="2971800"/>
-            <a:ext cx="5349240" cy="2788920"/>
+            <a:off x="713232" y="2991026"/>
+            <a:ext cx="5349240" cy="3053157"/>
           </a:xfrm>
           <a:prstGeom prst="roundRect">
             <a:avLst/>
@@ -17731,6 +17996,7 @@
           <a:lstStyle/>
           <a:p>
             <a:pPr algn="ctr"/>
+            <a:endParaRPr/>
           </a:p>
         </p:txBody>
       </p:sp>
@@ -17774,6 +18040,7 @@
           <a:lstStyle/>
           <a:p>
             <a:pPr algn="ctr"/>
+            <a:endParaRPr/>
           </a:p>
         </p:txBody>
       </p:sp>
@@ -17820,7 +18087,7 @@
         </p:nvSpPr>
         <p:spPr>
           <a:xfrm>
-            <a:off x="914400" y="3630168"/>
+            <a:off x="914400" y="3685032"/>
             <a:ext cx="4946903" cy="1984248"/>
           </a:xfrm>
           <a:prstGeom prst="rect">
@@ -17829,7 +18096,7 @@
           <a:noFill/>
         </p:spPr>
         <p:txBody>
-          <a:bodyPr wrap="square" anchor="t" lIns="38100" rIns="38100" tIns="25400" bIns="25400">
+          <a:bodyPr wrap="square" lIns="38100" tIns="25400" rIns="38100" bIns="25400" anchor="t">
             <a:noAutofit/>
           </a:bodyPr>
           <a:lstStyle/>
@@ -17851,9 +18118,6 @@
               </a:rPr>
               <a:t>Browser UI sends chat and workflow requests through Django views and Channels WebSockets.</a:t>
             </a:r>
-            <a:endParaRPr sz="1500" b="0" i="0">
-              <a:latin typeface="Calibri"/>
-            </a:endParaRPr>
           </a:p>
           <a:p>
             <a:pPr>
@@ -17873,9 +18137,6 @@
               </a:rPr>
               <a:t>RAG chains load selected file/directory context, retrieve relevant chunks, and build answer prompts.</a:t>
             </a:r>
-            <a:endParaRPr sz="1500" b="0" i="0">
-              <a:latin typeface="Calibri"/>
-            </a:endParaRPr>
           </a:p>
           <a:p>
             <a:pPr>
@@ -17895,9 +18156,6 @@
               </a:rPr>
               <a:t>When Multi-Turn is enabled, the global planner selects context and tool stages before the executor binds only the relevant tools.</a:t>
             </a:r>
-            <a:endParaRPr sz="1500" b="0" i="0">
-              <a:latin typeface="Calibri"/>
-            </a:endParaRPr>
           </a:p>
         </p:txBody>
       </p:sp>
@@ -17910,7 +18168,7 @@
         <p:spPr>
           <a:xfrm>
             <a:off x="6327648" y="2971800"/>
-            <a:ext cx="5074920" cy="2788920"/>
+            <a:ext cx="5074920" cy="3072384"/>
           </a:xfrm>
           <a:prstGeom prst="roundRect">
             <a:avLst/>
@@ -17943,6 +18201,7 @@
           <a:lstStyle/>
           <a:p>
             <a:pPr algn="ctr"/>
+            <a:endParaRPr/>
           </a:p>
         </p:txBody>
       </p:sp>
@@ -17986,6 +18245,7 @@
           <a:lstStyle/>
           <a:p>
             <a:pPr algn="ctr"/>
+            <a:endParaRPr/>
           </a:p>
         </p:txBody>
       </p:sp>
@@ -18041,7 +18301,7 @@
           <a:noFill/>
         </p:spPr>
         <p:txBody>
-          <a:bodyPr wrap="square" anchor="t" lIns="38100" rIns="38100" tIns="25400" bIns="25400">
+          <a:bodyPr wrap="square" lIns="38100" tIns="25400" rIns="38100" bIns="25400" anchor="t">
             <a:noAutofit/>
           </a:bodyPr>
           <a:lstStyle/>
@@ -18058,14 +18318,23 @@
               </a:defRPr>
             </a:pPr>
             <a:r>
-              <a:rPr sz="1500" b="0" i="0">
+              <a:rPr sz="1500" b="0" i="0" dirty="0">
                 <a:latin typeface="Calibri"/>
               </a:rPr>
-              <a:t>Tool calls execute in the backend, append observations, and may create wrapped runtime copies under `agent/agents/pools/_chat_runs_/`.</a:t>
-            </a:r>
-            <a:endParaRPr sz="1500" b="0" i="0">
-              <a:latin typeface="Calibri"/>
-            </a:endParaRPr>
+              <a:t>Tool calls execute in the backend, append observations, and may create wrapped runtime copies under `agent/agents/pools/_</a:t>
+            </a:r>
+            <a:r>
+              <a:rPr sz="1500" b="0" i="0" dirty="0" err="1">
+                <a:latin typeface="Calibri"/>
+              </a:rPr>
+              <a:t>chat_runs</a:t>
+            </a:r>
+            <a:r>
+              <a:rPr sz="1500" b="0" i="0" dirty="0">
+                <a:latin typeface="Calibri"/>
+              </a:rPr>
+              <a:t>_/`.</a:t>
+            </a:r>
           </a:p>
           <a:p>
             <a:pPr>
@@ -18080,14 +18349,23 @@
               </a:defRPr>
             </a:pPr>
             <a:r>
-              <a:rPr sz="1500" b="0" i="0">
+              <a:rPr sz="1500" b="0" i="0" dirty="0">
                 <a:latin typeface="Calibri"/>
               </a:rPr>
-              <a:t>ACP flows deploy session-scoped pool instances, wire config values, validate NxN graph rules, and execute through Starter-driven flow semantics.</a:t>
-            </a:r>
-            <a:endParaRPr sz="1500" b="0" i="0">
-              <a:latin typeface="Calibri"/>
-            </a:endParaRPr>
+              <a:t>ACP flows deploy session-scoped pool instances, wire config values, validate </a:t>
+            </a:r>
+            <a:r>
+              <a:rPr sz="1500" b="0" i="0" dirty="0" err="1">
+                <a:latin typeface="Calibri"/>
+              </a:rPr>
+              <a:t>NxN</a:t>
+            </a:r>
+            <a:r>
+              <a:rPr sz="1500" b="0" i="0" dirty="0">
+                <a:latin typeface="Calibri"/>
+              </a:rPr>
+              <a:t> graph rules, and execute through Starter-driven flow semantics.</a:t>
+            </a:r>
           </a:p>
           <a:p>
             <a:pPr>
@@ -18102,14 +18380,35 @@
               </a:defRPr>
             </a:pPr>
             <a:r>
-              <a:rPr sz="1500" b="0" i="0">
+              <a:rPr sz="1500" b="0" i="0" dirty="0">
                 <a:latin typeface="Calibri"/>
               </a:rPr>
-              <a:t>Build scripts collect static assets, bundle Django/Python resources, add agent templates, and assemble `pkg.zip`, `Uninstaller.exe`, and `dist/Tlamatini_Release/`.</a:t>
-            </a:r>
-            <a:endParaRPr sz="1500" b="0" i="0">
-              <a:latin typeface="Calibri"/>
-            </a:endParaRPr>
+              <a:t>Build scripts collect static assets, bundle Django/Python resources, add agent templates, and assemble `pkg.zip`, `Uninstaller.exe`, and `</a:t>
+            </a:r>
+            <a:r>
+              <a:rPr sz="1500" b="0" i="0" dirty="0" err="1">
+                <a:latin typeface="Calibri"/>
+              </a:rPr>
+              <a:t>dist</a:t>
+            </a:r>
+            <a:r>
+              <a:rPr sz="1500" b="0" i="0" dirty="0">
+                <a:latin typeface="Calibri"/>
+              </a:rPr>
+              <a:t>/</a:t>
+            </a:r>
+            <a:r>
+              <a:rPr sz="1500" b="0" i="0" dirty="0" err="1">
+                <a:latin typeface="Calibri"/>
+              </a:rPr>
+              <a:t>Tlamatini_Release</a:t>
+            </a:r>
+            <a:r>
+              <a:rPr sz="1500" b="0" i="0" dirty="0">
+                <a:latin typeface="Calibri"/>
+              </a:rPr>
+              <a:t>/`.</a:t>
+            </a:r>
           </a:p>
         </p:txBody>
       </p:sp>
@@ -18122,7 +18421,7 @@
 </file>
 
 <file path=ppt/slides/slide5.xml><?xml version="1.0" encoding="utf-8"?>
-<p:sld xmlns:a="http://schemas.openxmlformats.org/drawingml/2006/main" xmlns:p="http://schemas.openxmlformats.org/presentationml/2006/main" xmlns:r="http://schemas.openxmlformats.org/officeDocument/2006/relationships">
+<p:sld xmlns:a="http://schemas.openxmlformats.org/drawingml/2006/main" xmlns:r="http://schemas.openxmlformats.org/officeDocument/2006/relationships" xmlns:p="http://schemas.openxmlformats.org/presentationml/2006/main">
   <p:cSld>
     <p:spTree>
       <p:nvGrpSpPr>
@@ -18130,7 +18429,14 @@
         <p:cNvGrpSpPr/>
         <p:nvPr/>
       </p:nvGrpSpPr>
-      <p:grpSpPr/>
+      <p:grpSpPr>
+        <a:xfrm>
+          <a:off x="0" y="0"/>
+          <a:ext cx="0" cy="0"/>
+          <a:chOff x="0" y="0"/>
+          <a:chExt cx="0" cy="0"/>
+        </a:xfrm>
+      </p:grpSpPr>
       <p:sp>
         <p:nvSpPr>
           <p:cNvPr id="2" name="Rectangle 1"/>
@@ -18171,6 +18477,7 @@
           <a:lstStyle/>
           <a:p>
             <a:pPr algn="ctr"/>
+            <a:endParaRPr/>
           </a:p>
         </p:txBody>
       </p:sp>
@@ -18214,6 +18521,7 @@
           <a:lstStyle/>
           <a:p>
             <a:pPr algn="ctr"/>
+            <a:endParaRPr/>
           </a:p>
         </p:txBody>
       </p:sp>
@@ -18257,6 +18565,7 @@
           <a:lstStyle/>
           <a:p>
             <a:pPr algn="ctr"/>
+            <a:endParaRPr/>
           </a:p>
         </p:txBody>
       </p:sp>
@@ -18300,6 +18609,7 @@
           <a:lstStyle/>
           <a:p>
             <a:pPr algn="ctr"/>
+            <a:endParaRPr/>
           </a:p>
         </p:txBody>
       </p:sp>
@@ -18343,6 +18653,7 @@
           <a:lstStyle/>
           <a:p>
             <a:pPr algn="ctr"/>
+            <a:endParaRPr/>
           </a:p>
         </p:txBody>
       </p:sp>
@@ -18458,6 +18769,7 @@
           <a:lstStyle/>
           <a:p>
             <a:pPr algn="ctr"/>
+            <a:endParaRPr/>
           </a:p>
         </p:txBody>
       </p:sp>
@@ -18501,6 +18813,7 @@
           <a:lstStyle/>
           <a:p>
             <a:pPr algn="ctr"/>
+            <a:endParaRPr/>
           </a:p>
         </p:txBody>
       </p:sp>
@@ -18556,7 +18869,7 @@
           <a:noFill/>
         </p:spPr>
         <p:txBody>
-          <a:bodyPr wrap="square" anchor="t" lIns="38100" rIns="38100" tIns="25400" bIns="25400">
+          <a:bodyPr wrap="square" lIns="38100" tIns="25400" rIns="38100" bIns="25400" anchor="t">
             <a:noAutofit/>
           </a:bodyPr>
           <a:lstStyle/>
@@ -18578,9 +18891,6 @@
               </a:rPr>
               <a:t>Load selected file or directory context from the chat interface.</a:t>
             </a:r>
-            <a:endParaRPr sz="1500" b="0" i="0">
-              <a:latin typeface="Calibri"/>
-            </a:endParaRPr>
           </a:p>
           <a:p>
             <a:pPr>
@@ -18600,9 +18910,6 @@
               </a:rPr>
               <a:t>Extract metadata, split text, rank chunks with hybrid retrieval, and respect context budgets.</a:t>
             </a:r>
-            <a:endParaRPr sz="1500" b="0" i="0">
-              <a:latin typeface="Calibri"/>
-            </a:endParaRPr>
           </a:p>
           <a:p>
             <a:pPr>
@@ -18622,9 +18929,6 @@
               </a:rPr>
               <a:t>Fallback to explicit loaded files when retrieval cannot provide enough memory.</a:t>
             </a:r>
-            <a:endParaRPr sz="1500" b="0" i="0">
-              <a:latin typeface="Calibri"/>
-            </a:endParaRPr>
           </a:p>
           <a:p>
             <a:pPr>
@@ -18644,9 +18948,6 @@
               </a:rPr>
               <a:t>Preserve the difference between direct one-shot chat and checked Multi-Turn orchestration.</a:t>
             </a:r>
-            <a:endParaRPr sz="1500" b="0" i="0">
-              <a:latin typeface="Calibri"/>
-            </a:endParaRPr>
           </a:p>
         </p:txBody>
       </p:sp>
@@ -18692,6 +18993,7 @@
           <a:lstStyle/>
           <a:p>
             <a:pPr algn="ctr"/>
+            <a:endParaRPr/>
           </a:p>
         </p:txBody>
       </p:sp>
@@ -18735,6 +19037,7 @@
           <a:lstStyle/>
           <a:p>
             <a:pPr algn="ctr"/>
+            <a:endParaRPr/>
           </a:p>
         </p:txBody>
       </p:sp>
@@ -18790,7 +19093,7 @@
           <a:noFill/>
         </p:spPr>
         <p:txBody>
-          <a:bodyPr wrap="square" anchor="t" lIns="38100" rIns="38100" tIns="25400" bIns="25400">
+          <a:bodyPr wrap="square" lIns="38100" tIns="25400" rIns="38100" bIns="25400" anchor="t">
             <a:noAutofit/>
           </a:bodyPr>
           <a:lstStyle/>
@@ -18812,9 +19115,6 @@
               </a:rPr>
               <a:t>The assistant answers from project evidence instead of generic memory.</a:t>
             </a:r>
-            <a:endParaRPr sz="1600" b="0" i="0">
-              <a:latin typeface="Calibri"/>
-            </a:endParaRPr>
           </a:p>
           <a:p>
             <a:pPr>
@@ -18834,9 +19134,6 @@
               </a:rPr>
               <a:t>Large codebases remain navigable without injecting the whole repository into every prompt.</a:t>
             </a:r>
-            <a:endParaRPr sz="1600" b="0" i="0">
-              <a:latin typeface="Calibri"/>
-            </a:endParaRPr>
           </a:p>
           <a:p>
             <a:pPr>
@@ -18856,9 +19153,6 @@
               </a:rPr>
               <a:t>Multi-Turn can prefetch only the contexts required by the current execution plan.</a:t>
             </a:r>
-            <a:endParaRPr sz="1600" b="0" i="0">
-              <a:latin typeface="Calibri"/>
-            </a:endParaRPr>
           </a:p>
         </p:txBody>
       </p:sp>
@@ -18871,7 +19165,7 @@
 </file>
 
 <file path=ppt/slides/slide6.xml><?xml version="1.0" encoding="utf-8"?>
-<p:sld xmlns:a="http://schemas.openxmlformats.org/drawingml/2006/main" xmlns:p="http://schemas.openxmlformats.org/presentationml/2006/main" xmlns:r="http://schemas.openxmlformats.org/officeDocument/2006/relationships">
+<p:sld xmlns:a="http://schemas.openxmlformats.org/drawingml/2006/main" xmlns:r="http://schemas.openxmlformats.org/officeDocument/2006/relationships" xmlns:p="http://schemas.openxmlformats.org/presentationml/2006/main">
   <p:cSld>
     <p:spTree>
       <p:nvGrpSpPr>
@@ -18879,7 +19173,14 @@
         <p:cNvGrpSpPr/>
         <p:nvPr/>
       </p:nvGrpSpPr>
-      <p:grpSpPr/>
+      <p:grpSpPr>
+        <a:xfrm>
+          <a:off x="0" y="0"/>
+          <a:ext cx="0" cy="0"/>
+          <a:chOff x="0" y="0"/>
+          <a:chExt cx="0" cy="0"/>
+        </a:xfrm>
+      </p:grpSpPr>
       <p:sp>
         <p:nvSpPr>
           <p:cNvPr id="2" name="Rectangle 1"/>
@@ -18920,6 +19221,7 @@
           <a:lstStyle/>
           <a:p>
             <a:pPr algn="ctr"/>
+            <a:endParaRPr/>
           </a:p>
         </p:txBody>
       </p:sp>
@@ -18963,6 +19265,7 @@
           <a:lstStyle/>
           <a:p>
             <a:pPr algn="ctr"/>
+            <a:endParaRPr/>
           </a:p>
         </p:txBody>
       </p:sp>
@@ -19006,6 +19309,7 @@
           <a:lstStyle/>
           <a:p>
             <a:pPr algn="ctr"/>
+            <a:endParaRPr/>
           </a:p>
         </p:txBody>
       </p:sp>
@@ -19049,6 +19353,7 @@
           <a:lstStyle/>
           <a:p>
             <a:pPr algn="ctr"/>
+            <a:endParaRPr/>
           </a:p>
         </p:txBody>
       </p:sp>
@@ -19092,6 +19397,7 @@
           <a:lstStyle/>
           <a:p>
             <a:pPr algn="ctr"/>
+            <a:endParaRPr/>
           </a:p>
         </p:txBody>
       </p:sp>
@@ -19207,6 +19513,7 @@
           <a:lstStyle/>
           <a:p>
             <a:pPr algn="ctr"/>
+            <a:endParaRPr/>
           </a:p>
         </p:txBody>
       </p:sp>
@@ -19250,6 +19557,7 @@
           <a:lstStyle/>
           <a:p>
             <a:pPr algn="ctr"/>
+            <a:endParaRPr/>
           </a:p>
         </p:txBody>
       </p:sp>
@@ -19305,7 +19613,7 @@
           <a:noFill/>
         </p:spPr>
         <p:txBody>
-          <a:bodyPr wrap="square" anchor="t" lIns="38100" rIns="38100" tIns="25400" bIns="25400">
+          <a:bodyPr wrap="square" lIns="38100" tIns="25400" rIns="38100" bIns="25400" anchor="t">
             <a:noAutofit/>
           </a:bodyPr>
           <a:lstStyle/>
@@ -19327,9 +19635,6 @@
               </a:rPr>
               <a:t>Capability registry scores context providers, tools, and wrapped agents for the current request.</a:t>
             </a:r>
-            <a:endParaRPr sz="1500" b="0" i="0">
-              <a:latin typeface="Calibri"/>
-            </a:endParaRPr>
           </a:p>
           <a:p>
             <a:pPr>
@@ -19349,9 +19654,6 @@
               </a:rPr>
               <a:t>Global planner builds prefetch, execute, monitor, and answer stages.</a:t>
             </a:r>
-            <a:endParaRPr sz="1500" b="0" i="0">
-              <a:latin typeface="Calibri"/>
-            </a:endParaRPr>
           </a:p>
           <a:p>
             <a:pPr>
@@ -19371,9 +19673,6 @@
               </a:rPr>
               <a:t>Explicit tool loop runs tool calls, appends observations, and asks again until final answer or limit.</a:t>
             </a:r>
-            <a:endParaRPr sz="1500" b="0" i="0">
-              <a:latin typeface="Calibri"/>
-            </a:endParaRPr>
           </a:p>
           <a:p>
             <a:pPr>
@@ -19393,9 +19692,6 @@
               </a:rPr>
               <a:t>Answer Analizer classifies success so the UI can expose Create Flow only when useful.</a:t>
             </a:r>
-            <a:endParaRPr sz="1500" b="0" i="0">
-              <a:latin typeface="Calibri"/>
-            </a:endParaRPr>
           </a:p>
         </p:txBody>
       </p:sp>
@@ -19441,6 +19737,7 @@
           <a:lstStyle/>
           <a:p>
             <a:pPr algn="ctr"/>
+            <a:endParaRPr/>
           </a:p>
         </p:txBody>
       </p:sp>
@@ -19484,6 +19781,7 @@
           <a:lstStyle/>
           <a:p>
             <a:pPr algn="ctr"/>
+            <a:endParaRPr/>
           </a:p>
         </p:txBody>
       </p:sp>
@@ -19539,7 +19837,7 @@
           <a:noFill/>
         </p:spPr>
         <p:txBody>
-          <a:bodyPr wrap="square" anchor="t" lIns="38100" rIns="38100" tIns="25400" bIns="25400">
+          <a:bodyPr wrap="square" lIns="38100" tIns="25400" rIns="38100" bIns="25400" anchor="t">
             <a:noAutofit/>
           </a:bodyPr>
           <a:lstStyle/>
@@ -19561,9 +19859,6 @@
               </a:rPr>
               <a:t>Keeps the original prompt validation and legacy prefetch behavior.</a:t>
             </a:r>
-            <a:endParaRPr sz="1600" b="0" i="0">
-              <a:latin typeface="Calibri"/>
-            </a:endParaRPr>
           </a:p>
           <a:p>
             <a:pPr>
@@ -19583,9 +19878,6 @@
               </a:rPr>
               <a:t>Maintains compatibility for fast Q&amp;A and simple context-grounded answers.</a:t>
             </a:r>
-            <a:endParaRPr sz="1600" b="0" i="0">
-              <a:latin typeface="Calibri"/>
-            </a:endParaRPr>
           </a:p>
           <a:p>
             <a:pPr>
@@ -19605,9 +19897,6 @@
               </a:rPr>
               <a:t>Avoids forcing every chat request into agentic execution.</a:t>
             </a:r>
-            <a:endParaRPr sz="1600" b="0" i="0">
-              <a:latin typeface="Calibri"/>
-            </a:endParaRPr>
           </a:p>
         </p:txBody>
       </p:sp>
@@ -19620,7 +19909,7 @@
 </file>
 
 <file path=ppt/slides/slide7.xml><?xml version="1.0" encoding="utf-8"?>
-<p:sld xmlns:a="http://schemas.openxmlformats.org/drawingml/2006/main" xmlns:p="http://schemas.openxmlformats.org/presentationml/2006/main" xmlns:r="http://schemas.openxmlformats.org/officeDocument/2006/relationships">
+<p:sld xmlns:a="http://schemas.openxmlformats.org/drawingml/2006/main" xmlns:r="http://schemas.openxmlformats.org/officeDocument/2006/relationships" xmlns:p="http://schemas.openxmlformats.org/presentationml/2006/main">
   <p:cSld>
     <p:spTree>
       <p:nvGrpSpPr>
@@ -19628,7 +19917,14 @@
         <p:cNvGrpSpPr/>
         <p:nvPr/>
       </p:nvGrpSpPr>
-      <p:grpSpPr/>
+      <p:grpSpPr>
+        <a:xfrm>
+          <a:off x="0" y="0"/>
+          <a:ext cx="0" cy="0"/>
+          <a:chOff x="0" y="0"/>
+          <a:chExt cx="0" cy="0"/>
+        </a:xfrm>
+      </p:grpSpPr>
       <p:sp>
         <p:nvSpPr>
           <p:cNvPr id="2" name="Rectangle 1"/>
@@ -19669,6 +19965,7 @@
           <a:lstStyle/>
           <a:p>
             <a:pPr algn="ctr"/>
+            <a:endParaRPr/>
           </a:p>
         </p:txBody>
       </p:sp>
@@ -19712,6 +20009,7 @@
           <a:lstStyle/>
           <a:p>
             <a:pPr algn="ctr"/>
+            <a:endParaRPr/>
           </a:p>
         </p:txBody>
       </p:sp>
@@ -19755,6 +20053,7 @@
           <a:lstStyle/>
           <a:p>
             <a:pPr algn="ctr"/>
+            <a:endParaRPr/>
           </a:p>
         </p:txBody>
       </p:sp>
@@ -19798,6 +20097,7 @@
           <a:lstStyle/>
           <a:p>
             <a:pPr algn="ctr"/>
+            <a:endParaRPr/>
           </a:p>
         </p:txBody>
       </p:sp>
@@ -19841,6 +20141,7 @@
           <a:lstStyle/>
           <a:p>
             <a:pPr algn="ctr"/>
+            <a:endParaRPr/>
           </a:p>
         </p:txBody>
       </p:sp>
@@ -19956,6 +20257,7 @@
           <a:lstStyle/>
           <a:p>
             <a:pPr algn="ctr"/>
+            <a:endParaRPr/>
           </a:p>
         </p:txBody>
       </p:sp>
@@ -19999,6 +20301,7 @@
           <a:lstStyle/>
           <a:p>
             <a:pPr algn="ctr"/>
+            <a:endParaRPr/>
           </a:p>
         </p:txBody>
       </p:sp>
@@ -20054,7 +20357,7 @@
           <a:noFill/>
         </p:spPr>
         <p:txBody>
-          <a:bodyPr wrap="square" anchor="t" lIns="38100" rIns="38100" tIns="25400" bIns="25400">
+          <a:bodyPr wrap="square" lIns="38100" tIns="25400" rIns="38100" bIns="25400" anchor="t">
             <a:noAutofit/>
           </a:bodyPr>
           <a:lstStyle/>
@@ -20076,9 +20379,6 @@
               </a:rPr>
               <a:t>Drag prebuilt agents onto the canvas and connect them visually.</a:t>
             </a:r>
-            <a:endParaRPr sz="1500" b="0" i="0">
-              <a:latin typeface="Calibri"/>
-            </a:endParaRPr>
           </a:p>
           <a:p>
             <a:pPr>
@@ -20098,9 +20398,6 @@
               </a:rPr>
               <a:t>Configure deployed pool instances, not only static template folders.</a:t>
             </a:r>
-            <a:endParaRPr sz="1500" b="0" i="0">
-              <a:latin typeface="Calibri"/>
-            </a:endParaRPr>
           </a:p>
           <a:p>
             <a:pPr>
@@ -20120,9 +20417,6 @@
               </a:rPr>
               <a:t>Validate structural rules before execution.</a:t>
             </a:r>
-            <a:endParaRPr sz="1500" b="0" i="0">
-              <a:latin typeface="Calibri"/>
-            </a:endParaRPr>
           </a:p>
           <a:p>
             <a:pPr>
@@ -20142,9 +20436,6 @@
               </a:rPr>
               <a:t>Start through Starter, pause/resume through reanimation state, and stop through Ender semantics.</a:t>
             </a:r>
-            <a:endParaRPr sz="1500" b="0" i="0">
-              <a:latin typeface="Calibri"/>
-            </a:endParaRPr>
           </a:p>
         </p:txBody>
       </p:sp>
@@ -20190,6 +20481,7 @@
           <a:lstStyle/>
           <a:p>
             <a:pPr algn="ctr"/>
+            <a:endParaRPr/>
           </a:p>
         </p:txBody>
       </p:sp>
@@ -20233,6 +20525,7 @@
           <a:lstStyle/>
           <a:p>
             <a:pPr algn="ctr"/>
+            <a:endParaRPr/>
           </a:p>
         </p:txBody>
       </p:sp>
@@ -20288,7 +20581,7 @@
           <a:noFill/>
         </p:spPr>
         <p:txBody>
-          <a:bodyPr wrap="square" anchor="t" lIns="38100" rIns="38100" tIns="25400" bIns="25400">
+          <a:bodyPr wrap="square" lIns="38100" tIns="25400" rIns="38100" bIns="25400" anchor="t">
             <a:noAutofit/>
           </a:bodyPr>
           <a:lstStyle/>
@@ -20310,9 +20603,6 @@
               </a:rPr>
               <a:t>Workflows save and load as `.flw` files.</a:t>
             </a:r>
-            <a:endParaRPr sz="1600" b="0" i="0">
-              <a:latin typeface="Calibri"/>
-            </a:endParaRPr>
           </a:p>
           <a:p>
             <a:pPr>
@@ -20332,9 +20622,6 @@
               </a:rPr>
               <a:t>Generated flows from chat are starter drafts, not a replacement for ACP validation.</a:t>
             </a:r>
-            <a:endParaRPr sz="1600" b="0" i="0">
-              <a:latin typeface="Calibri"/>
-            </a:endParaRPr>
           </a:p>
           <a:p>
             <a:pPr>
@@ -20354,9 +20641,6 @@
               </a:rPr>
               <a:t>LED indicators and logs show runtime health across the session pool.</a:t>
             </a:r>
-            <a:endParaRPr sz="1600" b="0" i="0">
-              <a:latin typeface="Calibri"/>
-            </a:endParaRPr>
           </a:p>
         </p:txBody>
       </p:sp>
@@ -20369,7 +20653,7 @@
 </file>
 
 <file path=ppt/slides/slide8.xml><?xml version="1.0" encoding="utf-8"?>
-<p:sld xmlns:a="http://schemas.openxmlformats.org/drawingml/2006/main" xmlns:p="http://schemas.openxmlformats.org/presentationml/2006/main" xmlns:r="http://schemas.openxmlformats.org/officeDocument/2006/relationships">
+<p:sld xmlns:a="http://schemas.openxmlformats.org/drawingml/2006/main" xmlns:r="http://schemas.openxmlformats.org/officeDocument/2006/relationships" xmlns:p="http://schemas.openxmlformats.org/presentationml/2006/main">
   <p:cSld>
     <p:spTree>
       <p:nvGrpSpPr>
@@ -20377,7 +20661,14 @@
         <p:cNvGrpSpPr/>
         <p:nvPr/>
       </p:nvGrpSpPr>
-      <p:grpSpPr/>
+      <p:grpSpPr>
+        <a:xfrm>
+          <a:off x="0" y="0"/>
+          <a:ext cx="0" cy="0"/>
+          <a:chOff x="0" y="0"/>
+          <a:chExt cx="0" cy="0"/>
+        </a:xfrm>
+      </p:grpSpPr>
       <p:sp>
         <p:nvSpPr>
           <p:cNvPr id="2" name="Rectangle 1"/>
@@ -20418,6 +20709,7 @@
           <a:lstStyle/>
           <a:p>
             <a:pPr algn="ctr"/>
+            <a:endParaRPr/>
           </a:p>
         </p:txBody>
       </p:sp>
@@ -20461,6 +20753,7 @@
           <a:lstStyle/>
           <a:p>
             <a:pPr algn="ctr"/>
+            <a:endParaRPr/>
           </a:p>
         </p:txBody>
       </p:sp>
@@ -20504,6 +20797,7 @@
           <a:lstStyle/>
           <a:p>
             <a:pPr algn="ctr"/>
+            <a:endParaRPr/>
           </a:p>
         </p:txBody>
       </p:sp>
@@ -20547,6 +20841,7 @@
           <a:lstStyle/>
           <a:p>
             <a:pPr algn="ctr"/>
+            <a:endParaRPr/>
           </a:p>
         </p:txBody>
       </p:sp>
@@ -20590,6 +20885,7 @@
           <a:lstStyle/>
           <a:p>
             <a:pPr algn="ctr"/>
+            <a:endParaRPr/>
           </a:p>
         </p:txBody>
       </p:sp>
@@ -20705,6 +21001,7 @@
           <a:lstStyle/>
           <a:p>
             <a:pPr algn="ctr"/>
+            <a:endParaRPr/>
           </a:p>
         </p:txBody>
       </p:sp>
@@ -20748,6 +21045,7 @@
           <a:lstStyle/>
           <a:p>
             <a:pPr algn="ctr"/>
+            <a:endParaRPr/>
           </a:p>
         </p:txBody>
       </p:sp>
@@ -20803,7 +21101,7 @@
           <a:noFill/>
         </p:spPr>
         <p:txBody>
-          <a:bodyPr wrap="square" anchor="t" lIns="38100" rIns="38100" tIns="25400" bIns="25400">
+          <a:bodyPr wrap="square" lIns="38100" tIns="25400" rIns="38100" bIns="25400" anchor="t">
             <a:noAutofit/>
           </a:bodyPr>
           <a:lstStyle/>
@@ -20825,9 +21123,6 @@
               </a:rPr>
               <a:t>Control: starter, ender, stopper, cleaner, barrier, flowbacker</a:t>
             </a:r>
-            <a:endParaRPr sz="1300" b="0" i="0">
-              <a:latin typeface="Calibri"/>
-            </a:endParaRPr>
           </a:p>
           <a:p>
             <a:pPr>
@@ -20847,9 +21142,6 @@
               </a:rPr>
               <a:t>Execution and files: executer, pythonxer, pser, file_creator, file_extractor, file_interpreter, mover, deleter</a:t>
             </a:r>
-            <a:endParaRPr sz="1300" b="0" i="0">
-              <a:latin typeface="Calibri"/>
-            </a:endParaRPr>
           </a:p>
           <a:p>
             <a:pPr>
@@ -20869,9 +21161,6 @@
               </a:rPr>
               <a:t>DevOps and infra: gitter, dockerer, kuberneter, jenkinser, ssher, scper</a:t>
             </a:r>
-            <a:endParaRPr sz="1300" b="0" i="0">
-              <a:latin typeface="Calibri"/>
-            </a:endParaRPr>
           </a:p>
           <a:p>
             <a:pPr>
@@ -20891,9 +21180,6 @@
               </a:rPr>
               <a:t>Data and APIs: sqler, mongoxer, apirer, crawler, googler</a:t>
             </a:r>
-            <a:endParaRPr sz="1300" b="0" i="0">
-              <a:latin typeface="Calibri"/>
-            </a:endParaRPr>
           </a:p>
         </p:txBody>
       </p:sp>
@@ -20939,6 +21225,7 @@
           <a:lstStyle/>
           <a:p>
             <a:pPr algn="ctr"/>
+            <a:endParaRPr/>
           </a:p>
         </p:txBody>
       </p:sp>
@@ -20982,6 +21269,7 @@
           <a:lstStyle/>
           <a:p>
             <a:pPr algn="ctr"/>
+            <a:endParaRPr/>
           </a:p>
         </p:txBody>
       </p:sp>
@@ -21037,7 +21325,7 @@
           <a:noFill/>
         </p:spPr>
         <p:txBody>
-          <a:bodyPr wrap="square" anchor="t" lIns="38100" rIns="38100" tIns="25400" bIns="25400">
+          <a:bodyPr wrap="square" lIns="38100" tIns="25400" rIns="38100" bIns="25400" anchor="t">
             <a:noAutofit/>
           </a:bodyPr>
           <a:lstStyle/>
@@ -21059,9 +21347,6 @@
               </a:rPr>
               <a:t>Monitoring and routing: monitor_log, monitor_netstat, flowhypervisor, forker, asker, counter, and, or</a:t>
             </a:r>
-            <a:endParaRPr sz="1300" b="0" i="0">
-              <a:latin typeface="Calibri"/>
-            </a:endParaRPr>
           </a:p>
           <a:p>
             <a:pPr>
@@ -21081,9 +21366,6 @@
               </a:rPr>
               <a:t>Communication: notifier, emailer, recmailer, telegramer, telegramrx, whatsapper</a:t>
             </a:r>
-            <a:endParaRPr sz="1300" b="0" i="0">
-              <a:latin typeface="Calibri"/>
-            </a:endParaRPr>
           </a:p>
           <a:p>
             <a:pPr>
@@ -21103,9 +21385,6 @@
               </a:rPr>
               <a:t>Security and media: kyber_keygen, kyber_cipher, kyber_decipher, image_interpreter, shoter, j_decompiler</a:t>
             </a:r>
-            <a:endParaRPr sz="1300" b="0" i="0">
-              <a:latin typeface="Calibri"/>
-            </a:endParaRPr>
           </a:p>
           <a:p>
             <a:pPr>
@@ -21125,9 +21404,6 @@
               </a:rPr>
               <a:t>Workflow intelligence: flowcreator, gatewayer, gateway_relayer, node_manager, parametrizer, prompter, summarizer</a:t>
             </a:r>
-            <a:endParaRPr sz="1300" b="0" i="0">
-              <a:latin typeface="Calibri"/>
-            </a:endParaRPr>
           </a:p>
         </p:txBody>
       </p:sp>
@@ -21140,7 +21416,7 @@
 </file>
 
 <file path=ppt/slides/slide9.xml><?xml version="1.0" encoding="utf-8"?>
-<p:sld xmlns:a="http://schemas.openxmlformats.org/drawingml/2006/main" xmlns:p="http://schemas.openxmlformats.org/presentationml/2006/main" xmlns:r="http://schemas.openxmlformats.org/officeDocument/2006/relationships">
+<p:sld xmlns:a="http://schemas.openxmlformats.org/drawingml/2006/main" xmlns:r="http://schemas.openxmlformats.org/officeDocument/2006/relationships" xmlns:p="http://schemas.openxmlformats.org/presentationml/2006/main">
   <p:cSld>
     <p:spTree>
       <p:nvGrpSpPr>
@@ -21148,7 +21424,14 @@
         <p:cNvGrpSpPr/>
         <p:nvPr/>
       </p:nvGrpSpPr>
-      <p:grpSpPr/>
+      <p:grpSpPr>
+        <a:xfrm>
+          <a:off x="0" y="0"/>
+          <a:ext cx="0" cy="0"/>
+          <a:chOff x="0" y="0"/>
+          <a:chExt cx="0" cy="0"/>
+        </a:xfrm>
+      </p:grpSpPr>
       <p:sp>
         <p:nvSpPr>
           <p:cNvPr id="2" name="Rectangle 1"/>
@@ -21189,6 +21472,7 @@
           <a:lstStyle/>
           <a:p>
             <a:pPr algn="ctr"/>
+            <a:endParaRPr/>
           </a:p>
         </p:txBody>
       </p:sp>
@@ -21232,6 +21516,7 @@
           <a:lstStyle/>
           <a:p>
             <a:pPr algn="ctr"/>
+            <a:endParaRPr/>
           </a:p>
         </p:txBody>
       </p:sp>
@@ -21275,6 +21560,7 @@
           <a:lstStyle/>
           <a:p>
             <a:pPr algn="ctr"/>
+            <a:endParaRPr/>
           </a:p>
         </p:txBody>
       </p:sp>
@@ -21318,6 +21604,7 @@
           <a:lstStyle/>
           <a:p>
             <a:pPr algn="ctr"/>
+            <a:endParaRPr/>
           </a:p>
         </p:txBody>
       </p:sp>
@@ -21361,6 +21648,7 @@
           <a:lstStyle/>
           <a:p>
             <a:pPr algn="ctr"/>
+            <a:endParaRPr/>
           </a:p>
         </p:txBody>
       </p:sp>
@@ -21476,6 +21764,7 @@
           <a:lstStyle/>
           <a:p>
             <a:pPr algn="ctr"/>
+            <a:endParaRPr/>
           </a:p>
         </p:txBody>
       </p:sp>
@@ -21519,6 +21808,7 @@
           <a:lstStyle/>
           <a:p>
             <a:pPr algn="ctr"/>
+            <a:endParaRPr/>
           </a:p>
         </p:txBody>
       </p:sp>
@@ -21574,7 +21864,7 @@
           <a:noFill/>
         </p:spPr>
         <p:txBody>
-          <a:bodyPr wrap="square" anchor="t" lIns="38100" rIns="38100" tIns="25400" bIns="25400">
+          <a:bodyPr wrap="square" lIns="38100" tIns="25400" rIns="38100" bIns="25400" anchor="t">
             <a:noAutofit/>
           </a:bodyPr>
           <a:lstStyle/>
@@ -21596,9 +21886,6 @@
               </a:rPr>
               <a:t>Receives HTTP webhook events or optional folder-drop files.</a:t>
             </a:r>
-            <a:endParaRPr sz="1500" b="0" i="0">
-              <a:latin typeface="Calibri"/>
-            </a:endParaRPr>
           </a:p>
           <a:p>
             <a:pPr>
@@ -21618,9 +21905,6 @@
               </a:rPr>
               <a:t>Normalizes, persists, queues, and dispatches events into downstream workflow agents.</a:t>
             </a:r>
-            <a:endParaRPr sz="1500" b="0" i="0">
-              <a:latin typeface="Calibri"/>
-            </a:endParaRPr>
           </a:p>
           <a:p>
             <a:pPr>
@@ -21640,9 +21924,6 @@
               </a:rPr>
               <a:t>Supports bearer/HMAC-style auth patterns, IP allowlists, dedup files, and crash recovery state.</a:t>
             </a:r>
-            <a:endParaRPr sz="1500" b="0" i="0">
-              <a:latin typeface="Calibri"/>
-            </a:endParaRPr>
           </a:p>
         </p:txBody>
       </p:sp>
@@ -21688,6 +21969,7 @@
           <a:lstStyle/>
           <a:p>
             <a:pPr algn="ctr"/>
+            <a:endParaRPr/>
           </a:p>
         </p:txBody>
       </p:sp>
@@ -21731,6 +22013,7 @@
           <a:lstStyle/>
           <a:p>
             <a:pPr algn="ctr"/>
+            <a:endParaRPr/>
           </a:p>
         </p:txBody>
       </p:sp>
@@ -21786,7 +22069,7 @@
           <a:noFill/>
         </p:spPr>
         <p:txBody>
-          <a:bodyPr wrap="square" anchor="t" lIns="38100" rIns="38100" tIns="25400" bIns="25400">
+          <a:bodyPr wrap="square" lIns="38100" tIns="25400" rIns="38100" bIns="25400" anchor="t">
             <a:noAutofit/>
           </a:bodyPr>
           <a:lstStyle/>
@@ -21808,9 +22091,6 @@
               </a:rPr>
               <a:t>Gatewayer is a workflow trigger, not a chat-router clone.</a:t>
             </a:r>
-            <a:endParaRPr sz="1600" b="0" i="0">
-              <a:latin typeface="Calibri"/>
-            </a:endParaRPr>
           </a:p>
           <a:p>
             <a:pPr>
@@ -21830,9 +22110,6 @@
               </a:rPr>
               <a:t>Declared config fields are now documented with clear caveats where enforcement is not complete.</a:t>
             </a:r>
-            <a:endParaRPr sz="1600" b="0" i="0">
-              <a:latin typeface="Calibri"/>
-            </a:endParaRPr>
           </a:p>
           <a:p>
             <a:pPr>
@@ -21852,9 +22129,6 @@
               </a:rPr>
               <a:t>Stable log markers let Monitor Log and Summarizer watch gateway health.</a:t>
             </a:r>
-            <a:endParaRPr sz="1600" b="0" i="0">
-              <a:latin typeface="Calibri"/>
-            </a:endParaRPr>
           </a:p>
         </p:txBody>
       </p:sp>

--- a/Tlamatini_eXtended_Artificial_Intelligence_Humanly_Tempered.pptx
+++ b/Tlamatini_eXtended_Artificial_Intelligence_Humanly_Tempered.pptx
@@ -5,40 +5,40 @@
     <p:sldMasterId id="2147483648" r:id="rId1"/>
   </p:sldMasterIdLst>
   <p:sldIdLst>
-    <p:sldId id="256" r:id="rId2"/>
-    <p:sldId id="257" r:id="rId3"/>
-    <p:sldId id="258" r:id="rId4"/>
-    <p:sldId id="259" r:id="rId5"/>
-    <p:sldId id="260" r:id="rId6"/>
-    <p:sldId id="261" r:id="rId7"/>
-    <p:sldId id="262" r:id="rId8"/>
-    <p:sldId id="263" r:id="rId9"/>
-    <p:sldId id="264" r:id="rId10"/>
-    <p:sldId id="265" r:id="rId11"/>
-    <p:sldId id="266" r:id="rId12"/>
-    <p:sldId id="267" r:id="rId13"/>
-    <p:sldId id="268" r:id="rId14"/>
-    <p:sldId id="269" r:id="rId15"/>
-    <p:sldId id="270" r:id="rId16"/>
-    <p:sldId id="271" r:id="rId17"/>
-    <p:sldId id="272" r:id="rId18"/>
-    <p:sldId id="273" r:id="rId19"/>
-    <p:sldId id="274" r:id="rId20"/>
-    <p:sldId id="275" r:id="rId21"/>
-    <p:sldId id="276" r:id="rId22"/>
-    <p:sldId id="277" r:id="rId23"/>
-    <p:sldId id="278" r:id="rId24"/>
-    <p:sldId id="279" r:id="rId25"/>
-    <p:sldId id="280" r:id="rId26"/>
-    <p:sldId id="281" r:id="rId27"/>
-    <p:sldId id="282" r:id="rId28"/>
-    <p:sldId id="283" r:id="rId29"/>
-    <p:sldId id="284" r:id="rId30"/>
-    <p:sldId id="285" r:id="rId31"/>
-    <p:sldId id="286" r:id="rId32"/>
-    <p:sldId id="287" r:id="rId33"/>
+    <p:sldId id="256" r:id="rId7"/>
+    <p:sldId id="257" r:id="rId8"/>
+    <p:sldId id="258" r:id="rId9"/>
+    <p:sldId id="259" r:id="rId10"/>
+    <p:sldId id="260" r:id="rId11"/>
+    <p:sldId id="261" r:id="rId12"/>
+    <p:sldId id="262" r:id="rId13"/>
+    <p:sldId id="263" r:id="rId14"/>
+    <p:sldId id="264" r:id="rId15"/>
+    <p:sldId id="265" r:id="rId16"/>
+    <p:sldId id="266" r:id="rId17"/>
+    <p:sldId id="267" r:id="rId18"/>
+    <p:sldId id="268" r:id="rId19"/>
+    <p:sldId id="269" r:id="rId20"/>
+    <p:sldId id="270" r:id="rId21"/>
+    <p:sldId id="271" r:id="rId22"/>
+    <p:sldId id="272" r:id="rId23"/>
+    <p:sldId id="273" r:id="rId24"/>
+    <p:sldId id="274" r:id="rId25"/>
+    <p:sldId id="275" r:id="rId26"/>
+    <p:sldId id="276" r:id="rId27"/>
+    <p:sldId id="277" r:id="rId28"/>
+    <p:sldId id="278" r:id="rId29"/>
+    <p:sldId id="279" r:id="rId30"/>
+    <p:sldId id="280" r:id="rId31"/>
+    <p:sldId id="281" r:id="rId32"/>
+    <p:sldId id="282" r:id="rId33"/>
+    <p:sldId id="283" r:id="rId34"/>
+    <p:sldId id="284" r:id="rId35"/>
+    <p:sldId id="285" r:id="rId36"/>
+    <p:sldId id="286" r:id="rId37"/>
+    <p:sldId id="287" r:id="rId38"/>
   </p:sldIdLst>
-  <p:sldSz cx="12192000" cy="6858000"/>
+  <p:sldSz cx="12191695" cy="6858000" type="screen4x3"/>
   <p:notesSz cx="6858000" cy="9144000"/>
   <p:defaultTextStyle>
     <a:defPPr>
@@ -135,22 +135,6 @@
       </a:defRPr>
     </a:lvl9pPr>
   </p:defaultTextStyle>
-  <p:extLst>
-    <p:ext uri="{EFAFB233-063F-42B5-8137-9DF3F51BA10A}">
-      <p15:sldGuideLst xmlns:p15="http://schemas.microsoft.com/office/powerpoint/2012/main">
-        <p15:guide id="1" orient="horz" pos="2160">
-          <p15:clr>
-            <a:srgbClr val="A4A3A4"/>
-          </p15:clr>
-        </p15:guide>
-        <p15:guide id="2" pos="2880">
-          <p15:clr>
-            <a:srgbClr val="A4A3A4"/>
-          </p15:clr>
-        </p15:guide>
-      </p15:sldGuideLst>
-    </p:ext>
-  </p:extLst>
 </p:presentation>
 </file>
 
@@ -192,9 +176,10 @@
           <a:lstStyle/>
           <a:p>
             <a:r>
-              <a:rPr lang="en-US"/>
+              <a:rPr lang="en-US" smtClean="0"/>
               <a:t>Click to edit Master title style</a:t>
             </a:r>
+            <a:endParaRPr lang="en-US"/>
           </a:p>
         </p:txBody>
       </p:sp>
@@ -310,9 +295,10 @@
           </a:lstStyle>
           <a:p>
             <a:r>
-              <a:rPr lang="en-US"/>
+              <a:rPr lang="en-US" smtClean="0"/>
               <a:t>Click to edit Master subtitle style</a:t>
             </a:r>
+            <a:endParaRPr lang="en-US"/>
           </a:p>
         </p:txBody>
       </p:sp>
@@ -333,7 +319,7 @@
           <a:p>
             <a:fld id="{5BCAD085-E8A6-8845-BD4E-CB4CCA059FC4}" type="datetimeFigureOut">
               <a:rPr lang="en-US" smtClean="0"/>
-              <a:t>4/18/2026</a:t>
+              <a:t>1/27/13</a:t>
             </a:fld>
             <a:endParaRPr lang="en-US"/>
           </a:p>
@@ -427,9 +413,10 @@
           <a:lstStyle/>
           <a:p>
             <a:r>
-              <a:rPr lang="en-US"/>
+              <a:rPr lang="en-US" smtClean="0"/>
               <a:t>Click to edit Master title style</a:t>
             </a:r>
+            <a:endParaRPr lang="en-US"/>
           </a:p>
         </p:txBody>
       </p:sp>
@@ -450,37 +437,38 @@
           <a:p>
             <a:pPr lvl="0"/>
             <a:r>
-              <a:rPr lang="en-US"/>
+              <a:rPr lang="en-US" smtClean="0"/>
               <a:t>Click to edit Master text styles</a:t>
             </a:r>
           </a:p>
           <a:p>
             <a:pPr lvl="1"/>
             <a:r>
-              <a:rPr lang="en-US"/>
+              <a:rPr lang="en-US" smtClean="0"/>
               <a:t>Second level</a:t>
             </a:r>
           </a:p>
           <a:p>
             <a:pPr lvl="2"/>
             <a:r>
-              <a:rPr lang="en-US"/>
+              <a:rPr lang="en-US" smtClean="0"/>
               <a:t>Third level</a:t>
             </a:r>
           </a:p>
           <a:p>
             <a:pPr lvl="3"/>
             <a:r>
-              <a:rPr lang="en-US"/>
+              <a:rPr lang="en-US" smtClean="0"/>
               <a:t>Fourth level</a:t>
             </a:r>
           </a:p>
           <a:p>
             <a:pPr lvl="4"/>
             <a:r>
-              <a:rPr lang="en-US"/>
+              <a:rPr lang="en-US" smtClean="0"/>
               <a:t>Fifth level</a:t>
             </a:r>
+            <a:endParaRPr lang="en-US"/>
           </a:p>
         </p:txBody>
       </p:sp>
@@ -501,7 +489,7 @@
           <a:p>
             <a:fld id="{5BCAD085-E8A6-8845-BD4E-CB4CCA059FC4}" type="datetimeFigureOut">
               <a:rPr lang="en-US" smtClean="0"/>
-              <a:t>4/18/2026</a:t>
+              <a:t>1/27/13</a:t>
             </a:fld>
             <a:endParaRPr lang="en-US"/>
           </a:p>
@@ -600,9 +588,10 @@
           <a:lstStyle/>
           <a:p>
             <a:r>
-              <a:rPr lang="en-US"/>
+              <a:rPr lang="en-US" smtClean="0"/>
               <a:t>Click to edit Master title style</a:t>
             </a:r>
+            <a:endParaRPr lang="en-US"/>
           </a:p>
         </p:txBody>
       </p:sp>
@@ -628,37 +617,38 @@
           <a:p>
             <a:pPr lvl="0"/>
             <a:r>
-              <a:rPr lang="en-US"/>
+              <a:rPr lang="en-US" smtClean="0"/>
               <a:t>Click to edit Master text styles</a:t>
             </a:r>
           </a:p>
           <a:p>
             <a:pPr lvl="1"/>
             <a:r>
-              <a:rPr lang="en-US"/>
+              <a:rPr lang="en-US" smtClean="0"/>
               <a:t>Second level</a:t>
             </a:r>
           </a:p>
           <a:p>
             <a:pPr lvl="2"/>
             <a:r>
-              <a:rPr lang="en-US"/>
+              <a:rPr lang="en-US" smtClean="0"/>
               <a:t>Third level</a:t>
             </a:r>
           </a:p>
           <a:p>
             <a:pPr lvl="3"/>
             <a:r>
-              <a:rPr lang="en-US"/>
+              <a:rPr lang="en-US" smtClean="0"/>
               <a:t>Fourth level</a:t>
             </a:r>
           </a:p>
           <a:p>
             <a:pPr lvl="4"/>
             <a:r>
-              <a:rPr lang="en-US"/>
+              <a:rPr lang="en-US" smtClean="0"/>
               <a:t>Fifth level</a:t>
             </a:r>
+            <a:endParaRPr lang="en-US"/>
           </a:p>
         </p:txBody>
       </p:sp>
@@ -679,7 +669,7 @@
           <a:p>
             <a:fld id="{5BCAD085-E8A6-8845-BD4E-CB4CCA059FC4}" type="datetimeFigureOut">
               <a:rPr lang="en-US" smtClean="0"/>
-              <a:t>4/18/2026</a:t>
+              <a:t>1/27/13</a:t>
             </a:fld>
             <a:endParaRPr lang="en-US"/>
           </a:p>
@@ -773,9 +763,10 @@
           <a:lstStyle/>
           <a:p>
             <a:r>
-              <a:rPr lang="en-US"/>
+              <a:rPr lang="en-US" smtClean="0"/>
               <a:t>Click to edit Master title style</a:t>
             </a:r>
+            <a:endParaRPr lang="en-US"/>
           </a:p>
         </p:txBody>
       </p:sp>
@@ -796,37 +787,38 @@
           <a:p>
             <a:pPr lvl="0"/>
             <a:r>
-              <a:rPr lang="en-US"/>
+              <a:rPr lang="en-US" smtClean="0"/>
               <a:t>Click to edit Master text styles</a:t>
             </a:r>
           </a:p>
           <a:p>
             <a:pPr lvl="1"/>
             <a:r>
-              <a:rPr lang="en-US"/>
+              <a:rPr lang="en-US" smtClean="0"/>
               <a:t>Second level</a:t>
             </a:r>
           </a:p>
           <a:p>
             <a:pPr lvl="2"/>
             <a:r>
-              <a:rPr lang="en-US"/>
+              <a:rPr lang="en-US" smtClean="0"/>
               <a:t>Third level</a:t>
             </a:r>
           </a:p>
           <a:p>
             <a:pPr lvl="3"/>
             <a:r>
-              <a:rPr lang="en-US"/>
+              <a:rPr lang="en-US" smtClean="0"/>
               <a:t>Fourth level</a:t>
             </a:r>
           </a:p>
           <a:p>
             <a:pPr lvl="4"/>
             <a:r>
-              <a:rPr lang="en-US"/>
+              <a:rPr lang="en-US" smtClean="0"/>
               <a:t>Fifth level</a:t>
             </a:r>
+            <a:endParaRPr lang="en-US"/>
           </a:p>
         </p:txBody>
       </p:sp>
@@ -847,7 +839,7 @@
           <a:p>
             <a:fld id="{5BCAD085-E8A6-8845-BD4E-CB4CCA059FC4}" type="datetimeFigureOut">
               <a:rPr lang="en-US" smtClean="0"/>
-              <a:t>4/18/2026</a:t>
+              <a:t>1/27/13</a:t>
             </a:fld>
             <a:endParaRPr lang="en-US"/>
           </a:p>
@@ -950,9 +942,10 @@
           </a:lstStyle>
           <a:p>
             <a:r>
-              <a:rPr lang="en-US"/>
+              <a:rPr lang="en-US" smtClean="0"/>
               <a:t>Click to edit Master title style</a:t>
             </a:r>
+            <a:endParaRPr lang="en-US"/>
           </a:p>
         </p:txBody>
       </p:sp>
@@ -1069,7 +1062,7 @@
           <a:p>
             <a:pPr lvl="0"/>
             <a:r>
-              <a:rPr lang="en-US"/>
+              <a:rPr lang="en-US" smtClean="0"/>
               <a:t>Click to edit Master text styles</a:t>
             </a:r>
           </a:p>
@@ -1092,7 +1085,7 @@
           <a:p>
             <a:fld id="{5BCAD085-E8A6-8845-BD4E-CB4CCA059FC4}" type="datetimeFigureOut">
               <a:rPr lang="en-US" smtClean="0"/>
-              <a:t>4/18/2026</a:t>
+              <a:t>1/27/13</a:t>
             </a:fld>
             <a:endParaRPr lang="en-US"/>
           </a:p>
@@ -1186,9 +1179,10 @@
           <a:lstStyle/>
           <a:p>
             <a:r>
-              <a:rPr lang="en-US"/>
+              <a:rPr lang="en-US" smtClean="0"/>
               <a:t>Click to edit Master title style</a:t>
             </a:r>
+            <a:endParaRPr lang="en-US"/>
           </a:p>
         </p:txBody>
       </p:sp>
@@ -1242,37 +1236,38 @@
           <a:p>
             <a:pPr lvl="0"/>
             <a:r>
-              <a:rPr lang="en-US"/>
+              <a:rPr lang="en-US" smtClean="0"/>
               <a:t>Click to edit Master text styles</a:t>
             </a:r>
           </a:p>
           <a:p>
             <a:pPr lvl="1"/>
             <a:r>
-              <a:rPr lang="en-US"/>
+              <a:rPr lang="en-US" smtClean="0"/>
               <a:t>Second level</a:t>
             </a:r>
           </a:p>
           <a:p>
             <a:pPr lvl="2"/>
             <a:r>
-              <a:rPr lang="en-US"/>
+              <a:rPr lang="en-US" smtClean="0"/>
               <a:t>Third level</a:t>
             </a:r>
           </a:p>
           <a:p>
             <a:pPr lvl="3"/>
             <a:r>
-              <a:rPr lang="en-US"/>
+              <a:rPr lang="en-US" smtClean="0"/>
               <a:t>Fourth level</a:t>
             </a:r>
           </a:p>
           <a:p>
             <a:pPr lvl="4"/>
             <a:r>
-              <a:rPr lang="en-US"/>
+              <a:rPr lang="en-US" smtClean="0"/>
               <a:t>Fifth level</a:t>
             </a:r>
+            <a:endParaRPr lang="en-US"/>
           </a:p>
         </p:txBody>
       </p:sp>
@@ -1326,37 +1321,38 @@
           <a:p>
             <a:pPr lvl="0"/>
             <a:r>
-              <a:rPr lang="en-US"/>
+              <a:rPr lang="en-US" smtClean="0"/>
               <a:t>Click to edit Master text styles</a:t>
             </a:r>
           </a:p>
           <a:p>
             <a:pPr lvl="1"/>
             <a:r>
-              <a:rPr lang="en-US"/>
+              <a:rPr lang="en-US" smtClean="0"/>
               <a:t>Second level</a:t>
             </a:r>
           </a:p>
           <a:p>
             <a:pPr lvl="2"/>
             <a:r>
-              <a:rPr lang="en-US"/>
+              <a:rPr lang="en-US" smtClean="0"/>
               <a:t>Third level</a:t>
             </a:r>
           </a:p>
           <a:p>
             <a:pPr lvl="3"/>
             <a:r>
-              <a:rPr lang="en-US"/>
+              <a:rPr lang="en-US" smtClean="0"/>
               <a:t>Fourth level</a:t>
             </a:r>
           </a:p>
           <a:p>
             <a:pPr lvl="4"/>
             <a:r>
-              <a:rPr lang="en-US"/>
+              <a:rPr lang="en-US" smtClean="0"/>
               <a:t>Fifth level</a:t>
             </a:r>
+            <a:endParaRPr lang="en-US"/>
           </a:p>
         </p:txBody>
       </p:sp>
@@ -1377,7 +1373,7 @@
           <a:p>
             <a:fld id="{5BCAD085-E8A6-8845-BD4E-CB4CCA059FC4}" type="datetimeFigureOut">
               <a:rPr lang="en-US" smtClean="0"/>
-              <a:t>4/18/2026</a:t>
+              <a:t>1/27/13</a:t>
             </a:fld>
             <a:endParaRPr lang="en-US"/>
           </a:p>
@@ -1475,9 +1471,10 @@
           </a:lstStyle>
           <a:p>
             <a:r>
-              <a:rPr lang="en-US"/>
+              <a:rPr lang="en-US" smtClean="0"/>
               <a:t>Click to edit Master title style</a:t>
             </a:r>
+            <a:endParaRPr lang="en-US"/>
           </a:p>
         </p:txBody>
       </p:sp>
@@ -1540,7 +1537,7 @@
           <a:p>
             <a:pPr lvl="0"/>
             <a:r>
-              <a:rPr lang="en-US"/>
+              <a:rPr lang="en-US" smtClean="0"/>
               <a:t>Click to edit Master text styles</a:t>
             </a:r>
           </a:p>
@@ -1596,37 +1593,38 @@
           <a:p>
             <a:pPr lvl="0"/>
             <a:r>
-              <a:rPr lang="en-US"/>
+              <a:rPr lang="en-US" smtClean="0"/>
               <a:t>Click to edit Master text styles</a:t>
             </a:r>
           </a:p>
           <a:p>
             <a:pPr lvl="1"/>
             <a:r>
-              <a:rPr lang="en-US"/>
+              <a:rPr lang="en-US" smtClean="0"/>
               <a:t>Second level</a:t>
             </a:r>
           </a:p>
           <a:p>
             <a:pPr lvl="2"/>
             <a:r>
-              <a:rPr lang="en-US"/>
+              <a:rPr lang="en-US" smtClean="0"/>
               <a:t>Third level</a:t>
             </a:r>
           </a:p>
           <a:p>
             <a:pPr lvl="3"/>
             <a:r>
-              <a:rPr lang="en-US"/>
+              <a:rPr lang="en-US" smtClean="0"/>
               <a:t>Fourth level</a:t>
             </a:r>
           </a:p>
           <a:p>
             <a:pPr lvl="4"/>
             <a:r>
-              <a:rPr lang="en-US"/>
+              <a:rPr lang="en-US" smtClean="0"/>
               <a:t>Fifth level</a:t>
             </a:r>
+            <a:endParaRPr lang="en-US"/>
           </a:p>
         </p:txBody>
       </p:sp>
@@ -1689,7 +1687,7 @@
           <a:p>
             <a:pPr lvl="0"/>
             <a:r>
-              <a:rPr lang="en-US"/>
+              <a:rPr lang="en-US" smtClean="0"/>
               <a:t>Click to edit Master text styles</a:t>
             </a:r>
           </a:p>
@@ -1745,37 +1743,38 @@
           <a:p>
             <a:pPr lvl="0"/>
             <a:r>
-              <a:rPr lang="en-US"/>
+              <a:rPr lang="en-US" smtClean="0"/>
               <a:t>Click to edit Master text styles</a:t>
             </a:r>
           </a:p>
           <a:p>
             <a:pPr lvl="1"/>
             <a:r>
-              <a:rPr lang="en-US"/>
+              <a:rPr lang="en-US" smtClean="0"/>
               <a:t>Second level</a:t>
             </a:r>
           </a:p>
           <a:p>
             <a:pPr lvl="2"/>
             <a:r>
-              <a:rPr lang="en-US"/>
+              <a:rPr lang="en-US" smtClean="0"/>
               <a:t>Third level</a:t>
             </a:r>
           </a:p>
           <a:p>
             <a:pPr lvl="3"/>
             <a:r>
-              <a:rPr lang="en-US"/>
+              <a:rPr lang="en-US" smtClean="0"/>
               <a:t>Fourth level</a:t>
             </a:r>
           </a:p>
           <a:p>
             <a:pPr lvl="4"/>
             <a:r>
-              <a:rPr lang="en-US"/>
+              <a:rPr lang="en-US" smtClean="0"/>
               <a:t>Fifth level</a:t>
             </a:r>
+            <a:endParaRPr lang="en-US"/>
           </a:p>
         </p:txBody>
       </p:sp>
@@ -1796,7 +1795,7 @@
           <a:p>
             <a:fld id="{5BCAD085-E8A6-8845-BD4E-CB4CCA059FC4}" type="datetimeFigureOut">
               <a:rPr lang="en-US" smtClean="0"/>
-              <a:t>4/18/2026</a:t>
+              <a:t>1/27/13</a:t>
             </a:fld>
             <a:endParaRPr lang="en-US"/>
           </a:p>
@@ -1890,9 +1889,10 @@
           <a:lstStyle/>
           <a:p>
             <a:r>
-              <a:rPr lang="en-US"/>
+              <a:rPr lang="en-US" smtClean="0"/>
               <a:t>Click to edit Master title style</a:t>
             </a:r>
+            <a:endParaRPr lang="en-US"/>
           </a:p>
         </p:txBody>
       </p:sp>
@@ -1913,7 +1913,7 @@
           <a:p>
             <a:fld id="{5BCAD085-E8A6-8845-BD4E-CB4CCA059FC4}" type="datetimeFigureOut">
               <a:rPr lang="en-US" smtClean="0"/>
-              <a:t>4/18/2026</a:t>
+              <a:t>1/27/13</a:t>
             </a:fld>
             <a:endParaRPr lang="en-US"/>
           </a:p>
@@ -2008,7 +2008,7 @@
           <a:p>
             <a:fld id="{5BCAD085-E8A6-8845-BD4E-CB4CCA059FC4}" type="datetimeFigureOut">
               <a:rPr lang="en-US" smtClean="0"/>
-              <a:t>4/18/2026</a:t>
+              <a:t>1/27/13</a:t>
             </a:fld>
             <a:endParaRPr lang="en-US"/>
           </a:p>
@@ -2111,9 +2111,10 @@
           </a:lstStyle>
           <a:p>
             <a:r>
-              <a:rPr lang="en-US"/>
+              <a:rPr lang="en-US" smtClean="0"/>
               <a:t>Click to edit Master title style</a:t>
             </a:r>
+            <a:endParaRPr lang="en-US"/>
           </a:p>
         </p:txBody>
       </p:sp>
@@ -2167,37 +2168,38 @@
           <a:p>
             <a:pPr lvl="0"/>
             <a:r>
-              <a:rPr lang="en-US"/>
+              <a:rPr lang="en-US" smtClean="0"/>
               <a:t>Click to edit Master text styles</a:t>
             </a:r>
           </a:p>
           <a:p>
             <a:pPr lvl="1"/>
             <a:r>
-              <a:rPr lang="en-US"/>
+              <a:rPr lang="en-US" smtClean="0"/>
               <a:t>Second level</a:t>
             </a:r>
           </a:p>
           <a:p>
             <a:pPr lvl="2"/>
             <a:r>
-              <a:rPr lang="en-US"/>
+              <a:rPr lang="en-US" smtClean="0"/>
               <a:t>Third level</a:t>
             </a:r>
           </a:p>
           <a:p>
             <a:pPr lvl="3"/>
             <a:r>
-              <a:rPr lang="en-US"/>
+              <a:rPr lang="en-US" smtClean="0"/>
               <a:t>Fourth level</a:t>
             </a:r>
           </a:p>
           <a:p>
             <a:pPr lvl="4"/>
             <a:r>
-              <a:rPr lang="en-US"/>
+              <a:rPr lang="en-US" smtClean="0"/>
               <a:t>Fifth level</a:t>
             </a:r>
+            <a:endParaRPr lang="en-US"/>
           </a:p>
         </p:txBody>
       </p:sp>
@@ -2260,7 +2262,7 @@
           <a:p>
             <a:pPr lvl="0"/>
             <a:r>
-              <a:rPr lang="en-US"/>
+              <a:rPr lang="en-US" smtClean="0"/>
               <a:t>Click to edit Master text styles</a:t>
             </a:r>
           </a:p>
@@ -2283,7 +2285,7 @@
           <a:p>
             <a:fld id="{5BCAD085-E8A6-8845-BD4E-CB4CCA059FC4}" type="datetimeFigureOut">
               <a:rPr lang="en-US" smtClean="0"/>
-              <a:t>4/18/2026</a:t>
+              <a:t>1/27/13</a:t>
             </a:fld>
             <a:endParaRPr lang="en-US"/>
           </a:p>
@@ -2386,9 +2388,10 @@
           </a:lstStyle>
           <a:p>
             <a:r>
-              <a:rPr lang="en-US"/>
+              <a:rPr lang="en-US" smtClean="0"/>
               <a:t>Click to edit Master title style</a:t>
             </a:r>
+            <a:endParaRPr lang="en-US"/>
           </a:p>
         </p:txBody>
       </p:sp>
@@ -2512,7 +2515,7 @@
           <a:p>
             <a:pPr lvl="0"/>
             <a:r>
-              <a:rPr lang="en-US"/>
+              <a:rPr lang="en-US" smtClean="0"/>
               <a:t>Click to edit Master text styles</a:t>
             </a:r>
           </a:p>
@@ -2535,7 +2538,7 @@
           <a:p>
             <a:fld id="{5BCAD085-E8A6-8845-BD4E-CB4CCA059FC4}" type="datetimeFigureOut">
               <a:rPr lang="en-US" smtClean="0"/>
-              <a:t>4/18/2026</a:t>
+              <a:t>1/27/13</a:t>
             </a:fld>
             <a:endParaRPr lang="en-US"/>
           </a:p>
@@ -2644,9 +2647,10 @@
           <a:lstStyle/>
           <a:p>
             <a:r>
-              <a:rPr lang="en-US"/>
+              <a:rPr lang="en-US" smtClean="0"/>
               <a:t>Click to edit Master title style</a:t>
             </a:r>
+            <a:endParaRPr lang="en-US"/>
           </a:p>
         </p:txBody>
       </p:sp>
@@ -2677,37 +2681,38 @@
           <a:p>
             <a:pPr lvl="0"/>
             <a:r>
-              <a:rPr lang="en-US"/>
+              <a:rPr lang="en-US" smtClean="0"/>
               <a:t>Click to edit Master text styles</a:t>
             </a:r>
           </a:p>
           <a:p>
             <a:pPr lvl="1"/>
             <a:r>
-              <a:rPr lang="en-US"/>
+              <a:rPr lang="en-US" smtClean="0"/>
               <a:t>Second level</a:t>
             </a:r>
           </a:p>
           <a:p>
             <a:pPr lvl="2"/>
             <a:r>
-              <a:rPr lang="en-US"/>
+              <a:rPr lang="en-US" smtClean="0"/>
               <a:t>Third level</a:t>
             </a:r>
           </a:p>
           <a:p>
             <a:pPr lvl="3"/>
             <a:r>
-              <a:rPr lang="en-US"/>
+              <a:rPr lang="en-US" smtClean="0"/>
               <a:t>Fourth level</a:t>
             </a:r>
           </a:p>
           <a:p>
             <a:pPr lvl="4"/>
             <a:r>
-              <a:rPr lang="en-US"/>
+              <a:rPr lang="en-US" smtClean="0"/>
               <a:t>Fifth level</a:t>
             </a:r>
+            <a:endParaRPr lang="en-US"/>
           </a:p>
         </p:txBody>
       </p:sp>
@@ -2746,7 +2751,7 @@
           <a:p>
             <a:fld id="{5BCAD085-E8A6-8845-BD4E-CB4CCA059FC4}" type="datetimeFigureOut">
               <a:rPr lang="en-US" smtClean="0"/>
-              <a:t>4/18/2026</a:t>
+              <a:t>1/27/13</a:t>
             </a:fld>
             <a:endParaRPr lang="en-US"/>
           </a:p>
@@ -3105,7 +3110,7 @@
 </file>
 
 <file path=ppt/slides/slide1.xml><?xml version="1.0" encoding="utf-8"?>
-<p:sld xmlns:a="http://schemas.openxmlformats.org/drawingml/2006/main" xmlns:r="http://schemas.openxmlformats.org/officeDocument/2006/relationships" xmlns:p="http://schemas.openxmlformats.org/presentationml/2006/main">
+<p:sld xmlns:a="http://schemas.openxmlformats.org/drawingml/2006/main" xmlns:p="http://schemas.openxmlformats.org/presentationml/2006/main" xmlns:r="http://schemas.openxmlformats.org/officeDocument/2006/relationships">
   <p:cSld>
     <p:spTree>
       <p:nvGrpSpPr>
@@ -3113,14 +3118,7 @@
         <p:cNvGrpSpPr/>
         <p:nvPr/>
       </p:nvGrpSpPr>
-      <p:grpSpPr>
-        <a:xfrm>
-          <a:off x="0" y="0"/>
-          <a:ext cx="0" cy="0"/>
-          <a:chOff x="0" y="0"/>
-          <a:chExt cx="0" cy="0"/>
-        </a:xfrm>
-      </p:grpSpPr>
+      <p:grpSpPr/>
       <p:pic>
         <p:nvPicPr>
           <p:cNvPr id="2" name="Picture 1" descr="image-1-1.png"/>
@@ -3185,7 +3183,6 @@
           <a:lstStyle/>
           <a:p>
             <a:pPr algn="ctr"/>
-            <a:endParaRPr/>
           </a:p>
         </p:txBody>
       </p:sp>
@@ -3229,7 +3226,6 @@
           <a:lstStyle/>
           <a:p>
             <a:pPr algn="ctr"/>
-            <a:endParaRPr/>
           </a:p>
         </p:txBody>
       </p:sp>
@@ -3273,7 +3269,6 @@
           <a:lstStyle/>
           <a:p>
             <a:pPr algn="ctr"/>
-            <a:endParaRPr/>
           </a:p>
         </p:txBody>
       </p:sp>
@@ -3317,7 +3312,6 @@
           <a:lstStyle/>
           <a:p>
             <a:pPr algn="ctr"/>
-            <a:endParaRPr/>
           </a:p>
         </p:txBody>
       </p:sp>
@@ -3361,7 +3355,6 @@
           <a:lstStyle/>
           <a:p>
             <a:pPr algn="ctr"/>
-            <a:endParaRPr/>
           </a:p>
         </p:txBody>
       </p:sp>
@@ -3547,7 +3540,6 @@
           <a:lstStyle/>
           <a:p>
             <a:pPr algn="ctr"/>
-            <a:endParaRPr/>
           </a:p>
         </p:txBody>
       </p:sp>
@@ -3616,7 +3608,7 @@
                 </a:solidFill>
                 <a:latin typeface="Aptos"/>
               </a:rPr>
-              <a:t>347</a:t>
+              <a:t>348</a:t>
             </a:r>
           </a:p>
         </p:txBody>
@@ -3663,7 +3655,6 @@
           <a:lstStyle/>
           <a:p>
             <a:pPr algn="ctr"/>
-            <a:endParaRPr/>
           </a:p>
         </p:txBody>
       </p:sp>
@@ -3779,7 +3770,6 @@
           <a:lstStyle/>
           <a:p>
             <a:pPr algn="ctr"/>
-            <a:endParaRPr/>
           </a:p>
         </p:txBody>
       </p:sp>
@@ -3848,7 +3838,7 @@
                 </a:solidFill>
                 <a:latin typeface="Aptos"/>
               </a:rPr>
-              <a:t>71,382</a:t>
+              <a:t>71,562</a:t>
             </a:r>
           </a:p>
         </p:txBody>
@@ -3883,7 +3873,7 @@
                 </a:solidFill>
                 <a:latin typeface="Aptos"/>
               </a:rPr>
-              <a:t>Generated April 17, 2026 11:50 PM UTC-0600 at HEAD 3b6eb8e</a:t>
+              <a:t>Generated April 19, 2026 12:07 AM UTC-0600 at HEAD 6063109</a:t>
             </a:r>
           </a:p>
         </p:txBody>
@@ -3897,7 +3887,7 @@
 </file>
 
 <file path=ppt/slides/slide10.xml><?xml version="1.0" encoding="utf-8"?>
-<p:sld xmlns:a="http://schemas.openxmlformats.org/drawingml/2006/main" xmlns:r="http://schemas.openxmlformats.org/officeDocument/2006/relationships" xmlns:p="http://schemas.openxmlformats.org/presentationml/2006/main">
+<p:sld xmlns:a="http://schemas.openxmlformats.org/drawingml/2006/main" xmlns:p="http://schemas.openxmlformats.org/presentationml/2006/main" xmlns:r="http://schemas.openxmlformats.org/officeDocument/2006/relationships">
   <p:cSld>
     <p:spTree>
       <p:nvGrpSpPr>
@@ -3905,14 +3895,7 @@
         <p:cNvGrpSpPr/>
         <p:nvPr/>
       </p:nvGrpSpPr>
-      <p:grpSpPr>
-        <a:xfrm>
-          <a:off x="0" y="0"/>
-          <a:ext cx="0" cy="0"/>
-          <a:chOff x="0" y="0"/>
-          <a:chExt cx="0" cy="0"/>
-        </a:xfrm>
-      </p:grpSpPr>
+      <p:grpSpPr/>
       <p:sp>
         <p:nvSpPr>
           <p:cNvPr id="2" name="Rectangle 1"/>
@@ -3953,7 +3936,6 @@
           <a:lstStyle/>
           <a:p>
             <a:pPr algn="ctr"/>
-            <a:endParaRPr/>
           </a:p>
         </p:txBody>
       </p:sp>
@@ -3997,7 +3979,6 @@
           <a:lstStyle/>
           <a:p>
             <a:pPr algn="ctr"/>
-            <a:endParaRPr/>
           </a:p>
         </p:txBody>
       </p:sp>
@@ -4041,7 +4022,6 @@
           <a:lstStyle/>
           <a:p>
             <a:pPr algn="ctr"/>
-            <a:endParaRPr/>
           </a:p>
         </p:txBody>
       </p:sp>
@@ -4085,7 +4065,6 @@
           <a:lstStyle/>
           <a:p>
             <a:pPr algn="ctr"/>
-            <a:endParaRPr/>
           </a:p>
         </p:txBody>
       </p:sp>
@@ -4129,7 +4108,6 @@
           <a:lstStyle/>
           <a:p>
             <a:pPr algn="ctr"/>
-            <a:endParaRPr/>
           </a:p>
         </p:txBody>
       </p:sp>
@@ -4245,7 +4223,6 @@
           <a:lstStyle/>
           <a:p>
             <a:pPr algn="ctr"/>
-            <a:endParaRPr/>
           </a:p>
         </p:txBody>
       </p:sp>
@@ -4289,7 +4266,6 @@
           <a:lstStyle/>
           <a:p>
             <a:pPr algn="ctr"/>
-            <a:endParaRPr/>
           </a:p>
         </p:txBody>
       </p:sp>
@@ -4345,7 +4321,7 @@
           <a:noFill/>
         </p:spPr>
         <p:txBody>
-          <a:bodyPr wrap="square" lIns="38100" tIns="25400" rIns="38100" bIns="25400" anchor="t">
+          <a:bodyPr wrap="square" anchor="t" lIns="38100" rIns="38100" tIns="25400" bIns="25400">
             <a:noAutofit/>
           </a:bodyPr>
           <a:lstStyle/>
@@ -4367,6 +4343,9 @@
               </a:rPr>
               <a:t>Run from source: create a virtual environment, install requirements, migrate, create a superuser, collect static files, and start Django.</a:t>
             </a:r>
+            <a:endParaRPr sz="1500" b="0" i="0">
+              <a:latin typeface="Calibri"/>
+            </a:endParaRPr>
           </a:p>
           <a:p>
             <a:pPr>
@@ -4386,6 +4365,9 @@
               </a:rPr>
               <a:t>Open `/agent/` for chat. Load a file or directory context before asking codebase-specific questions.</a:t>
             </a:r>
+            <a:endParaRPr sz="1500" b="0" i="0">
+              <a:latin typeface="Calibri"/>
+            </a:endParaRPr>
           </a:p>
           <a:p>
             <a:pPr>
@@ -4405,6 +4387,9 @@
               </a:rPr>
               <a:t>Keep Multi-Turn unchecked for direct Q&amp;A; enable Multi-Turn for tasks that need tools, wrapped agents, monitoring, or workflow seeding.</a:t>
             </a:r>
+            <a:endParaRPr sz="1500" b="0" i="0">
+              <a:latin typeface="Calibri"/>
+            </a:endParaRPr>
           </a:p>
         </p:txBody>
       </p:sp>
@@ -4450,7 +4435,6 @@
           <a:lstStyle/>
           <a:p>
             <a:pPr algn="ctr"/>
-            <a:endParaRPr/>
           </a:p>
         </p:txBody>
       </p:sp>
@@ -4494,7 +4478,6 @@
           <a:lstStyle/>
           <a:p>
             <a:pPr algn="ctr"/>
-            <a:endParaRPr/>
           </a:p>
         </p:txBody>
       </p:sp>
@@ -4550,7 +4533,7 @@
           <a:noFill/>
         </p:spPr>
         <p:txBody>
-          <a:bodyPr wrap="square" lIns="38100" tIns="25400" rIns="38100" bIns="25400" anchor="t">
+          <a:bodyPr wrap="square" anchor="t" lIns="38100" rIns="38100" tIns="25400" bIns="25400">
             <a:noAutofit/>
           </a:bodyPr>
           <a:lstStyle/>
@@ -4572,6 +4555,9 @@
               </a:rPr>
               <a:t>Open `/agentic_control_panel/` to drag agents, connect them, configure each node, validate, start, pause/resume, stop, and save `.flw` workflows.</a:t>
             </a:r>
+            <a:endParaRPr sz="1500" b="0" i="0">
+              <a:latin typeface="Calibri"/>
+            </a:endParaRPr>
           </a:p>
           <a:p>
             <a:pPr>
@@ -4591,6 +4577,9 @@
               </a:rPr>
               <a:t>Use `python build.py`, `python build_uninstaller.py`, and `python build_installer.py` only when producing a packaged Windows release.</a:t>
             </a:r>
+            <a:endParaRPr sz="1500" b="0" i="0">
+              <a:latin typeface="Calibri"/>
+            </a:endParaRPr>
           </a:p>
         </p:txBody>
       </p:sp>
@@ -4603,7 +4592,7 @@
 </file>
 
 <file path=ppt/slides/slide11.xml><?xml version="1.0" encoding="utf-8"?>
-<p:sld xmlns:a="http://schemas.openxmlformats.org/drawingml/2006/main" xmlns:r="http://schemas.openxmlformats.org/officeDocument/2006/relationships" xmlns:p="http://schemas.openxmlformats.org/presentationml/2006/main">
+<p:sld xmlns:a="http://schemas.openxmlformats.org/drawingml/2006/main" xmlns:p="http://schemas.openxmlformats.org/presentationml/2006/main" xmlns:r="http://schemas.openxmlformats.org/officeDocument/2006/relationships">
   <p:cSld>
     <p:spTree>
       <p:nvGrpSpPr>
@@ -4611,14 +4600,7 @@
         <p:cNvGrpSpPr/>
         <p:nvPr/>
       </p:nvGrpSpPr>
-      <p:grpSpPr>
-        <a:xfrm>
-          <a:off x="0" y="0"/>
-          <a:ext cx="0" cy="0"/>
-          <a:chOff x="0" y="0"/>
-          <a:chExt cx="0" cy="0"/>
-        </a:xfrm>
-      </p:grpSpPr>
+      <p:grpSpPr/>
       <p:sp>
         <p:nvSpPr>
           <p:cNvPr id="2" name="Rectangle 1"/>
@@ -4659,7 +4641,6 @@
           <a:lstStyle/>
           <a:p>
             <a:pPr algn="ctr"/>
-            <a:endParaRPr/>
           </a:p>
         </p:txBody>
       </p:sp>
@@ -4703,7 +4684,6 @@
           <a:lstStyle/>
           <a:p>
             <a:pPr algn="ctr"/>
-            <a:endParaRPr/>
           </a:p>
         </p:txBody>
       </p:sp>
@@ -4747,7 +4727,6 @@
           <a:lstStyle/>
           <a:p>
             <a:pPr algn="ctr"/>
-            <a:endParaRPr/>
           </a:p>
         </p:txBody>
       </p:sp>
@@ -4791,7 +4770,6 @@
           <a:lstStyle/>
           <a:p>
             <a:pPr algn="ctr"/>
-            <a:endParaRPr/>
           </a:p>
         </p:txBody>
       </p:sp>
@@ -4835,7 +4813,6 @@
           <a:lstStyle/>
           <a:p>
             <a:pPr algn="ctr"/>
-            <a:endParaRPr/>
           </a:p>
         </p:txBody>
       </p:sp>
@@ -4992,7 +4969,6 @@
           <a:lstStyle/>
           <a:p>
             <a:pPr algn="ctr"/>
-            <a:endParaRPr/>
           </a:p>
         </p:txBody>
       </p:sp>
@@ -5036,7 +5012,6 @@
           <a:lstStyle/>
           <a:p>
             <a:pPr algn="ctr"/>
-            <a:endParaRPr/>
           </a:p>
         </p:txBody>
       </p:sp>
@@ -5092,7 +5067,7 @@
           <a:noFill/>
         </p:spPr>
         <p:txBody>
-          <a:bodyPr wrap="square" lIns="38100" tIns="25400" rIns="38100" bIns="25400" anchor="t">
+          <a:bodyPr wrap="square" anchor="t" lIns="38100" rIns="38100" tIns="25400" bIns="25400">
             <a:noAutofit/>
           </a:bodyPr>
           <a:lstStyle/>
@@ -5114,6 +5089,9 @@
               </a:rPr>
               <a:t>Open the browser, log in with your source-mode superuser, load a context path, and decide whether the task needs Multi-Turn.</a:t>
             </a:r>
+            <a:endParaRPr sz="1400" b="0" i="0">
+              <a:latin typeface="Calibri"/>
+            </a:endParaRPr>
           </a:p>
         </p:txBody>
       </p:sp>
@@ -5126,7 +5104,7 @@
 </file>
 
 <file path=ppt/slides/slide12.xml><?xml version="1.0" encoding="utf-8"?>
-<p:sld xmlns:a="http://schemas.openxmlformats.org/drawingml/2006/main" xmlns:r="http://schemas.openxmlformats.org/officeDocument/2006/relationships" xmlns:p="http://schemas.openxmlformats.org/presentationml/2006/main">
+<p:sld xmlns:a="http://schemas.openxmlformats.org/drawingml/2006/main" xmlns:p="http://schemas.openxmlformats.org/presentationml/2006/main" xmlns:r="http://schemas.openxmlformats.org/officeDocument/2006/relationships">
   <p:cSld>
     <p:spTree>
       <p:nvGrpSpPr>
@@ -5134,14 +5112,7 @@
         <p:cNvGrpSpPr/>
         <p:nvPr/>
       </p:nvGrpSpPr>
-      <p:grpSpPr>
-        <a:xfrm>
-          <a:off x="0" y="0"/>
-          <a:ext cx="0" cy="0"/>
-          <a:chOff x="0" y="0"/>
-          <a:chExt cx="0" cy="0"/>
-        </a:xfrm>
-      </p:grpSpPr>
+      <p:grpSpPr/>
       <p:sp>
         <p:nvSpPr>
           <p:cNvPr id="2" name="Rectangle 1"/>
@@ -5182,7 +5153,6 @@
           <a:lstStyle/>
           <a:p>
             <a:pPr algn="ctr"/>
-            <a:endParaRPr/>
           </a:p>
         </p:txBody>
       </p:sp>
@@ -5226,7 +5196,6 @@
           <a:lstStyle/>
           <a:p>
             <a:pPr algn="ctr"/>
-            <a:endParaRPr/>
           </a:p>
         </p:txBody>
       </p:sp>
@@ -5270,7 +5239,6 @@
           <a:lstStyle/>
           <a:p>
             <a:pPr algn="ctr"/>
-            <a:endParaRPr/>
           </a:p>
         </p:txBody>
       </p:sp>
@@ -5314,7 +5282,6 @@
           <a:lstStyle/>
           <a:p>
             <a:pPr algn="ctr"/>
-            <a:endParaRPr/>
           </a:p>
         </p:txBody>
       </p:sp>
@@ -5358,7 +5325,6 @@
           <a:lstStyle/>
           <a:p>
             <a:pPr algn="ctr"/>
-            <a:endParaRPr/>
           </a:p>
         </p:txBody>
       </p:sp>
@@ -5474,7 +5440,6 @@
           <a:lstStyle/>
           <a:p>
             <a:pPr algn="ctr"/>
-            <a:endParaRPr/>
           </a:p>
         </p:txBody>
       </p:sp>
@@ -5590,7 +5555,6 @@
           <a:lstStyle/>
           <a:p>
             <a:pPr algn="ctr"/>
-            <a:endParaRPr/>
           </a:p>
         </p:txBody>
       </p:sp>
@@ -5706,7 +5670,6 @@
           <a:lstStyle/>
           <a:p>
             <a:pPr algn="ctr"/>
-            <a:endParaRPr/>
           </a:p>
         </p:txBody>
       </p:sp>
@@ -5822,7 +5785,6 @@
           <a:lstStyle/>
           <a:p>
             <a:pPr algn="ctr"/>
-            <a:endParaRPr/>
           </a:p>
         </p:txBody>
       </p:sp>
@@ -5938,7 +5900,6 @@
           <a:lstStyle/>
           <a:p>
             <a:pPr algn="ctr"/>
-            <a:endParaRPr/>
           </a:p>
         </p:txBody>
       </p:sp>
@@ -6054,7 +6015,6 @@
           <a:lstStyle/>
           <a:p>
             <a:pPr algn="ctr"/>
-            <a:endParaRPr/>
           </a:p>
         </p:txBody>
       </p:sp>
@@ -6135,7 +6095,6 @@
           <a:lstStyle/>
           <a:p>
             <a:pPr algn="ctr"/>
-            <a:endParaRPr/>
           </a:p>
         </p:txBody>
       </p:sp>
@@ -6179,7 +6138,6 @@
           <a:lstStyle/>
           <a:p>
             <a:pPr algn="ctr"/>
-            <a:endParaRPr/>
           </a:p>
         </p:txBody>
       </p:sp>
@@ -6235,7 +6193,7 @@
           <a:noFill/>
         </p:spPr>
         <p:txBody>
-          <a:bodyPr wrap="square" lIns="38100" tIns="25400" rIns="38100" bIns="25400" anchor="t">
+          <a:bodyPr wrap="square" anchor="t" lIns="38100" rIns="38100" tIns="25400" bIns="25400">
             <a:noAutofit/>
           </a:bodyPr>
           <a:lstStyle/>
@@ -6257,6 +6215,9 @@
               </a:rPr>
               <a:t>Run packaging only when preparing a Windows distribution.</a:t>
             </a:r>
+            <a:endParaRPr sz="1600" b="0" i="0">
+              <a:latin typeface="Calibri"/>
+            </a:endParaRPr>
           </a:p>
           <a:p>
             <a:pPr>
@@ -6276,6 +6237,9 @@
               </a:rPr>
               <a:t>The final distributable is the full `dist/Tlamatini_Release/` folder, not one executable copied out of context.</a:t>
             </a:r>
+            <a:endParaRPr sz="1600" b="0" i="0">
+              <a:latin typeface="Calibri"/>
+            </a:endParaRPr>
           </a:p>
           <a:p>
             <a:pPr>
@@ -6295,6 +6259,9 @@
               </a:rPr>
               <a:t>Installer scripts register shortcuts and `.flw` file associations and place the uninstaller next to the app.</a:t>
             </a:r>
+            <a:endParaRPr sz="1600" b="0" i="0">
+              <a:latin typeface="Calibri"/>
+            </a:endParaRPr>
           </a:p>
         </p:txBody>
       </p:sp>
@@ -6307,7 +6274,7 @@
 </file>
 
 <file path=ppt/slides/slide13.xml><?xml version="1.0" encoding="utf-8"?>
-<p:sld xmlns:a="http://schemas.openxmlformats.org/drawingml/2006/main" xmlns:r="http://schemas.openxmlformats.org/officeDocument/2006/relationships" xmlns:p="http://schemas.openxmlformats.org/presentationml/2006/main">
+<p:sld xmlns:a="http://schemas.openxmlformats.org/drawingml/2006/main" xmlns:p="http://schemas.openxmlformats.org/presentationml/2006/main" xmlns:r="http://schemas.openxmlformats.org/officeDocument/2006/relationships">
   <p:cSld>
     <p:spTree>
       <p:nvGrpSpPr>
@@ -6315,14 +6282,7 @@
         <p:cNvGrpSpPr/>
         <p:nvPr/>
       </p:nvGrpSpPr>
-      <p:grpSpPr>
-        <a:xfrm>
-          <a:off x="0" y="0"/>
-          <a:ext cx="0" cy="0"/>
-          <a:chOff x="0" y="0"/>
-          <a:chExt cx="0" cy="0"/>
-        </a:xfrm>
-      </p:grpSpPr>
+      <p:grpSpPr/>
       <p:sp>
         <p:nvSpPr>
           <p:cNvPr id="2" name="Rectangle 1"/>
@@ -6363,7 +6323,6 @@
           <a:lstStyle/>
           <a:p>
             <a:pPr algn="ctr"/>
-            <a:endParaRPr/>
           </a:p>
         </p:txBody>
       </p:sp>
@@ -6407,7 +6366,6 @@
           <a:lstStyle/>
           <a:p>
             <a:pPr algn="ctr"/>
-            <a:endParaRPr/>
           </a:p>
         </p:txBody>
       </p:sp>
@@ -6451,7 +6409,6 @@
           <a:lstStyle/>
           <a:p>
             <a:pPr algn="ctr"/>
-            <a:endParaRPr/>
           </a:p>
         </p:txBody>
       </p:sp>
@@ -6495,7 +6452,6 @@
           <a:lstStyle/>
           <a:p>
             <a:pPr algn="ctr"/>
-            <a:endParaRPr/>
           </a:p>
         </p:txBody>
       </p:sp>
@@ -6539,7 +6495,6 @@
           <a:lstStyle/>
           <a:p>
             <a:pPr algn="ctr"/>
-            <a:endParaRPr/>
           </a:p>
         </p:txBody>
       </p:sp>
@@ -6655,7 +6610,6 @@
           <a:lstStyle/>
           <a:p>
             <a:pPr algn="ctr"/>
-            <a:endParaRPr/>
           </a:p>
         </p:txBody>
       </p:sp>
@@ -6724,7 +6678,7 @@
                 </a:solidFill>
                 <a:latin typeface="Aptos"/>
               </a:rPr>
-              <a:t>347</a:t>
+              <a:t>348</a:t>
             </a:r>
           </a:p>
         </p:txBody>
@@ -6771,7 +6725,6 @@
           <a:lstStyle/>
           <a:p>
             <a:pPr algn="ctr"/>
-            <a:endParaRPr/>
           </a:p>
         </p:txBody>
       </p:sp>
@@ -6887,7 +6840,6 @@
           <a:lstStyle/>
           <a:p>
             <a:pPr algn="ctr"/>
-            <a:endParaRPr/>
           </a:p>
         </p:txBody>
       </p:sp>
@@ -7003,7 +6955,6 @@
           <a:lstStyle/>
           <a:p>
             <a:pPr algn="ctr"/>
-            <a:endParaRPr/>
           </a:p>
         </p:txBody>
       </p:sp>
@@ -7119,7 +7070,6 @@
           <a:lstStyle/>
           <a:p>
             <a:pPr algn="ctr"/>
-            <a:endParaRPr/>
           </a:p>
         </p:txBody>
       </p:sp>
@@ -7235,7 +7185,6 @@
           <a:lstStyle/>
           <a:p>
             <a:pPr algn="ctr"/>
-            <a:endParaRPr/>
           </a:p>
         </p:txBody>
       </p:sp>
@@ -7351,7 +7300,6 @@
           <a:lstStyle/>
           <a:p>
             <a:pPr algn="ctr"/>
-            <a:endParaRPr/>
           </a:p>
         </p:txBody>
       </p:sp>
@@ -7395,7 +7343,6 @@
           <a:lstStyle/>
           <a:p>
             <a:pPr algn="ctr"/>
-            <a:endParaRPr/>
           </a:p>
         </p:txBody>
       </p:sp>
@@ -7451,7 +7398,7 @@
           <a:noFill/>
         </p:spPr>
         <p:txBody>
-          <a:bodyPr wrap="square" lIns="38100" tIns="25400" rIns="38100" bIns="25400" anchor="t">
+          <a:bodyPr wrap="square" anchor="t" lIns="38100" rIns="38100" tIns="25400" bIns="25400">
             <a:noAutofit/>
           </a:bodyPr>
           <a:lstStyle/>
@@ -7471,8 +7418,11 @@
               <a:rPr sz="1500" b="0" i="0">
                 <a:latin typeface="Calibri"/>
               </a:rPr>
-              <a:t>3b6eb8e - Way too improving the execution chain with now "Exec report"!!, by angelahack1</a:t>
-            </a:r>
+              <a:t>6063109 - Updating documentation, by angelahack1</a:t>
+            </a:r>
+            <a:endParaRPr sz="1500" b="0" i="0">
+              <a:latin typeface="Calibri"/>
+            </a:endParaRPr>
           </a:p>
           <a:p>
             <a:pPr>
@@ -7490,8 +7440,11 @@
               <a:rPr sz="1500" b="0" i="0">
                 <a:latin typeface="Calibri"/>
               </a:rPr>
-              <a:t>Generated on April 17, 2026 11:50 PM UTC-0600</a:t>
-            </a:r>
+              <a:t>Generated on April 19, 2026 12:07 AM UTC-0600</a:t>
+            </a:r>
+            <a:endParaRPr sz="1500" b="0" i="0">
+              <a:latin typeface="Calibri"/>
+            </a:endParaRPr>
           </a:p>
           <a:p>
             <a:pPr>
@@ -7509,8 +7462,11 @@
               <a:rPr sz="1500" b="0" i="0">
                 <a:latin typeface="Calibri"/>
               </a:rPr>
-              <a:t>Python requirements: 62; binary or asset tracked files skipped from line count: 13</a:t>
-            </a:r>
+              <a:t>Python requirements: 62; binary or asset tracked files skipped from line count: 14</a:t>
+            </a:r>
+            <a:endParaRPr sz="1500" b="0" i="0">
+              <a:latin typeface="Calibri"/>
+            </a:endParaRPr>
           </a:p>
         </p:txBody>
       </p:sp>
@@ -7523,7 +7479,7 @@
 </file>
 
 <file path=ppt/slides/slide14.xml><?xml version="1.0" encoding="utf-8"?>
-<p:sld xmlns:a="http://schemas.openxmlformats.org/drawingml/2006/main" xmlns:r="http://schemas.openxmlformats.org/officeDocument/2006/relationships" xmlns:p="http://schemas.openxmlformats.org/presentationml/2006/main">
+<p:sld xmlns:a="http://schemas.openxmlformats.org/drawingml/2006/main" xmlns:p="http://schemas.openxmlformats.org/presentationml/2006/main" xmlns:r="http://schemas.openxmlformats.org/officeDocument/2006/relationships">
   <p:cSld>
     <p:spTree>
       <p:nvGrpSpPr>
@@ -7531,14 +7487,7 @@
         <p:cNvGrpSpPr/>
         <p:nvPr/>
       </p:nvGrpSpPr>
-      <p:grpSpPr>
-        <a:xfrm>
-          <a:off x="0" y="0"/>
-          <a:ext cx="0" cy="0"/>
-          <a:chOff x="0" y="0"/>
-          <a:chExt cx="0" cy="0"/>
-        </a:xfrm>
-      </p:grpSpPr>
+      <p:grpSpPr/>
       <p:sp>
         <p:nvSpPr>
           <p:cNvPr id="2" name="Rectangle 1"/>
@@ -7579,7 +7528,6 @@
           <a:lstStyle/>
           <a:p>
             <a:pPr algn="ctr"/>
-            <a:endParaRPr/>
           </a:p>
         </p:txBody>
       </p:sp>
@@ -7623,7 +7571,6 @@
           <a:lstStyle/>
           <a:p>
             <a:pPr algn="ctr"/>
-            <a:endParaRPr/>
           </a:p>
         </p:txBody>
       </p:sp>
@@ -7667,7 +7614,6 @@
           <a:lstStyle/>
           <a:p>
             <a:pPr algn="ctr"/>
-            <a:endParaRPr/>
           </a:p>
         </p:txBody>
       </p:sp>
@@ -7711,7 +7657,6 @@
           <a:lstStyle/>
           <a:p>
             <a:pPr algn="ctr"/>
-            <a:endParaRPr/>
           </a:p>
         </p:txBody>
       </p:sp>
@@ -7755,7 +7700,6 @@
           <a:lstStyle/>
           <a:p>
             <a:pPr algn="ctr"/>
-            <a:endParaRPr/>
           </a:p>
         </p:txBody>
       </p:sp>
@@ -7871,7 +7815,6 @@
           <a:lstStyle/>
           <a:p>
             <a:pPr algn="ctr"/>
-            <a:endParaRPr/>
           </a:p>
         </p:txBody>
       </p:sp>
@@ -7940,7 +7883,7 @@
                 </a:solidFill>
                 <a:latin typeface="Aptos"/>
               </a:rPr>
-              <a:t>71,382</a:t>
+              <a:t>71,562</a:t>
             </a:r>
           </a:p>
         </p:txBody>
@@ -7987,7 +7930,6 @@
           <a:lstStyle/>
           <a:p>
             <a:pPr algn="ctr"/>
-            <a:endParaRPr/>
           </a:p>
         </p:txBody>
       </p:sp>
@@ -8056,7 +7998,7 @@
                 </a:solidFill>
                 <a:latin typeface="Aptos"/>
               </a:rPr>
-              <a:t>96,784</a:t>
+              <a:t>97,039</a:t>
             </a:r>
           </a:p>
         </p:txBody>
@@ -8103,7 +8045,6 @@
           <a:lstStyle/>
           <a:p>
             <a:pPr algn="ctr"/>
-            <a:endParaRPr/>
           </a:p>
         </p:txBody>
       </p:sp>
@@ -8208,13 +8149,13 @@
                 <a:latin typeface="Cascadia Mono"/>
               </a:rPr>
               <a:t>LANGUAGE                 FILES   EFFECTIVE      TOTAL   SHARE
-Python                   208      46,433     64,687  65.0%
-JavaScript                24      10,412     13,187  14.6%
-Markdown                  13       8,375     10,568  11.7%
-CSS                        5       2,644      3,286   3.7%
+Python                   208      46,525     64,806  65.0%
+JavaScript                24      10,440     13,240  14.6%
+Markdown                  13       8,403     10,608  11.7%
+CSS                        5       2,674      3,327   3.7%
 Other text                 3         778        955   1.1%
 YAML                      59         753      1,709   1.1%
-HTML                       4         592        610   0.8%
+HTML                       4         594        612   0.8%
 PowerShell                 5         408        616   0.6%
 JavaScript module          1         323        390   0.5%
 Prompt template            2         272        341   0.4%
@@ -8235,7 +8176,7 @@
 </file>
 
 <file path=ppt/slides/slide15.xml><?xml version="1.0" encoding="utf-8"?>
-<p:sld xmlns:a="http://schemas.openxmlformats.org/drawingml/2006/main" xmlns:r="http://schemas.openxmlformats.org/officeDocument/2006/relationships" xmlns:p="http://schemas.openxmlformats.org/presentationml/2006/main">
+<p:sld xmlns:a="http://schemas.openxmlformats.org/drawingml/2006/main" xmlns:p="http://schemas.openxmlformats.org/presentationml/2006/main" xmlns:r="http://schemas.openxmlformats.org/officeDocument/2006/relationships">
   <p:cSld>
     <p:spTree>
       <p:nvGrpSpPr>
@@ -8243,14 +8184,7 @@
         <p:cNvGrpSpPr/>
         <p:nvPr/>
       </p:nvGrpSpPr>
-      <p:grpSpPr>
-        <a:xfrm>
-          <a:off x="0" y="0"/>
-          <a:ext cx="0" cy="0"/>
-          <a:chOff x="0" y="0"/>
-          <a:chExt cx="0" cy="0"/>
-        </a:xfrm>
-      </p:grpSpPr>
+      <p:grpSpPr/>
       <p:sp>
         <p:nvSpPr>
           <p:cNvPr id="2" name="Rectangle 1"/>
@@ -8291,7 +8225,6 @@
           <a:lstStyle/>
           <a:p>
             <a:pPr algn="ctr"/>
-            <a:endParaRPr/>
           </a:p>
         </p:txBody>
       </p:sp>
@@ -8335,7 +8268,6 @@
           <a:lstStyle/>
           <a:p>
             <a:pPr algn="ctr"/>
-            <a:endParaRPr/>
           </a:p>
         </p:txBody>
       </p:sp>
@@ -8379,7 +8311,6 @@
           <a:lstStyle/>
           <a:p>
             <a:pPr algn="ctr"/>
-            <a:endParaRPr/>
           </a:p>
         </p:txBody>
       </p:sp>
@@ -8423,7 +8354,6 @@
           <a:lstStyle/>
           <a:p>
             <a:pPr algn="ctr"/>
-            <a:endParaRPr/>
           </a:p>
         </p:txBody>
       </p:sp>
@@ -8467,7 +8397,6 @@
           <a:lstStyle/>
           <a:p>
             <a:pPr algn="ctr"/>
-            <a:endParaRPr/>
           </a:p>
         </p:txBody>
       </p:sp>
@@ -8573,18 +8502,18 @@
               </a:rPr>
               <a:t>PATH                                                     LANGUAGE     EFFECTIVE   TOTAL
 Tlamatini/agent/views.py                                Python         5,862   8,411
-README.md                                               Markdown       3,550   4,471
+README.md                                               Markdown       3,564   4,491
 Tlamatini/agent/tools.py                                Python         1,841   2,483
 Tlamatini/agent/agents/flowcreator/agentic_skill.md     Markdown       1,694   1,889
-Tlamatini/agent/tests.py                                Python         1,574   1,927
-...ini/agent/static/agent/css/agentic_control_panel.css CSS            1,551   2,018
-Tlamatini/agent/static/agent/js/acp-canvas-core.js      JavaScript     1,235   1,529
+Tlamatini/agent/tests.py                                Python         1,666   2,042
+...ini/agent/static/agent/css/agentic_control_panel.css CSS            1,581   2,059
+Tlamatini/agent/static/agent/js/acp-canvas-core.js      JavaScript     1,233   1,538
 Tlamatini/agent/consumers.py                            Python         1,092   1,300
 Tlamatini/agent/doc_generation/complete_project_docs.py Python         1,040   1,191
 Tlamatini/agent/static/agent/js/acp-agent-connectors.js JavaScript     1,019   1,154
 Tlamatini/agent/static/agent/js/acp-control-buttons.js  JavaScript     1,000   1,301
 Tlamatini/agent/static/agent/css/agent_page.css         CSS              942   1,091
-Tlamatini/agent/static/agent/js/canvas_item_dialog.js   JavaScript       896   1,163
+Tlamatini/agent/static/agent/js/canvas_item_dialog.js   JavaScript       898   1,165
 Tlamatini/agent/agents/crawler/crawler.py               Python           881   1,261</a:t>
             </a:r>
           </a:p>
@@ -8599,7 +8528,7 @@
 </file>
 
 <file path=ppt/slides/slide16.xml><?xml version="1.0" encoding="utf-8"?>
-<p:sld xmlns:a="http://schemas.openxmlformats.org/drawingml/2006/main" xmlns:r="http://schemas.openxmlformats.org/officeDocument/2006/relationships" xmlns:p="http://schemas.openxmlformats.org/presentationml/2006/main">
+<p:sld xmlns:a="http://schemas.openxmlformats.org/drawingml/2006/main" xmlns:p="http://schemas.openxmlformats.org/presentationml/2006/main" xmlns:r="http://schemas.openxmlformats.org/officeDocument/2006/relationships">
   <p:cSld>
     <p:spTree>
       <p:nvGrpSpPr>
@@ -8607,14 +8536,7 @@
         <p:cNvGrpSpPr/>
         <p:nvPr/>
       </p:nvGrpSpPr>
-      <p:grpSpPr>
-        <a:xfrm>
-          <a:off x="0" y="0"/>
-          <a:ext cx="0" cy="0"/>
-          <a:chOff x="0" y="0"/>
-          <a:chExt cx="0" cy="0"/>
-        </a:xfrm>
-      </p:grpSpPr>
+      <p:grpSpPr/>
       <p:sp>
         <p:nvSpPr>
           <p:cNvPr id="2" name="Rectangle 1"/>
@@ -8655,7 +8577,6 @@
           <a:lstStyle/>
           <a:p>
             <a:pPr algn="ctr"/>
-            <a:endParaRPr/>
           </a:p>
         </p:txBody>
       </p:sp>
@@ -8699,7 +8620,6 @@
           <a:lstStyle/>
           <a:p>
             <a:pPr algn="ctr"/>
-            <a:endParaRPr/>
           </a:p>
         </p:txBody>
       </p:sp>
@@ -8743,7 +8663,6 @@
           <a:lstStyle/>
           <a:p>
             <a:pPr algn="ctr"/>
-            <a:endParaRPr/>
           </a:p>
         </p:txBody>
       </p:sp>
@@ -8787,7 +8706,6 @@
           <a:lstStyle/>
           <a:p>
             <a:pPr algn="ctr"/>
-            <a:endParaRPr/>
           </a:p>
         </p:txBody>
       </p:sp>
@@ -8831,7 +8749,6 @@
           <a:lstStyle/>
           <a:p>
             <a:pPr algn="ctr"/>
-            <a:endParaRPr/>
           </a:p>
         </p:txBody>
       </p:sp>
@@ -8947,7 +8864,6 @@
           <a:lstStyle/>
           <a:p>
             <a:pPr algn="ctr"/>
-            <a:endParaRPr/>
           </a:p>
         </p:txBody>
       </p:sp>
@@ -8991,7 +8907,6 @@
           <a:lstStyle/>
           <a:p>
             <a:pPr algn="ctr"/>
-            <a:endParaRPr/>
           </a:p>
         </p:txBody>
       </p:sp>
@@ -9047,7 +8962,7 @@
           <a:noFill/>
         </p:spPr>
         <p:txBody>
-          <a:bodyPr wrap="square" lIns="38100" tIns="25400" rIns="38100" bIns="25400" anchor="t">
+          <a:bodyPr wrap="square" anchor="t" lIns="38100" rIns="38100" tIns="25400" bIns="25400">
             <a:noAutofit/>
           </a:bodyPr>
           <a:lstStyle/>
@@ -9067,8 +8982,11 @@
               <a:rPr sz="1300" b="0" i="0">
                 <a:latin typeface="Calibri"/>
               </a:rPr>
-              <a:t>2026-04-17 | 3b6eb8e | Way too improving the execution chain with now "Exec report"!!, by angelahack1</a:t>
-            </a:r>
+              <a:t>2026-04-19 | 6063109 | Updating documentation, by angelahack1</a:t>
+            </a:r>
+            <a:endParaRPr sz="1300" b="0" i="0">
+              <a:latin typeface="Calibri"/>
+            </a:endParaRPr>
           </a:p>
           <a:p>
             <a:pPr>
@@ -9086,8 +9004,11 @@
               <a:rPr sz="1300" b="0" i="0">
                 <a:latin typeface="Calibri"/>
               </a:rPr>
-              <a:t>2026-04-17 | d46ddbb | Fixing some drawbacks in frozen Tlamatini's runtime execution.</a:t>
-            </a:r>
+              <a:t>2026-04-18 | 9249349 | Implementing scrolling in agentic_control_panel.html's canvas, by angelahack1</a:t>
+            </a:r>
+            <a:endParaRPr sz="1300" b="0" i="0">
+              <a:latin typeface="Calibri"/>
+            </a:endParaRPr>
           </a:p>
           <a:p>
             <a:pPr>
@@ -9105,8 +9026,11 @@
               <a:rPr sz="1300" b="0" i="0">
                 <a:latin typeface="Calibri"/>
               </a:rPr>
-              <a:t>2026-04-17 | 17d5760 | Updating to a more graphical documentation</a:t>
-            </a:r>
+              <a:t>2026-04-18 | e99d2b8 | Making Multi-turn execution tables persistent, by angelahack1</a:t>
+            </a:r>
+            <a:endParaRPr sz="1300" b="0" i="0">
+              <a:latin typeface="Calibri"/>
+            </a:endParaRPr>
           </a:p>
           <a:p>
             <a:pPr>
@@ -9124,8 +9048,11 @@
               <a:rPr sz="1300" b="0" i="0">
                 <a:latin typeface="Calibri"/>
               </a:rPr>
-              <a:t>2026-04-17 | d7a8e66 | Update documentation with the laatest fixings, by angelahack1</a:t>
-            </a:r>
+              <a:t>2026-04-18 | fad8002 | Just sompptx framing, by angelahack1</a:t>
+            </a:r>
+            <a:endParaRPr sz="1300" b="0" i="0">
+              <a:latin typeface="Calibri"/>
+            </a:endParaRPr>
           </a:p>
           <a:p>
             <a:pPr>
@@ -9143,8 +9070,11 @@
               <a:rPr sz="1300" b="0" i="0">
                 <a:latin typeface="Calibri"/>
               </a:rPr>
-              <a:t>2026-04-16 | 0249c76 | Improving multiturn, tested for installing assets, and added a new video, by angelahack1</a:t>
-            </a:r>
+              <a:t>2026-04-17 | 4e2a51b | Documentation updates, with automation, by angelahack1</a:t>
+            </a:r>
+            <a:endParaRPr sz="1300" b="0" i="0">
+              <a:latin typeface="Calibri"/>
+            </a:endParaRPr>
           </a:p>
           <a:p>
             <a:pPr>
@@ -9162,8 +9092,11 @@
               <a:rPr sz="1300" b="0" i="0">
                 <a:latin typeface="Calibri"/>
               </a:rPr>
-              <a:t>2026-04-15 | 9abade4 | Adding video links to README.md, by angelahack1</a:t>
-            </a:r>
+              <a:t>2026-04-17 | 3b6eb8e | Way too improving the execution chain with now "Exec report"!!, by angelahack1</a:t>
+            </a:r>
+            <a:endParaRPr sz="1300" b="0" i="0">
+              <a:latin typeface="Calibri"/>
+            </a:endParaRPr>
           </a:p>
         </p:txBody>
       </p:sp>
@@ -9176,7 +9109,7 @@
 </file>
 
 <file path=ppt/slides/slide17.xml><?xml version="1.0" encoding="utf-8"?>
-<p:sld xmlns:a="http://schemas.openxmlformats.org/drawingml/2006/main" xmlns:r="http://schemas.openxmlformats.org/officeDocument/2006/relationships" xmlns:p="http://schemas.openxmlformats.org/presentationml/2006/main">
+<p:sld xmlns:a="http://schemas.openxmlformats.org/drawingml/2006/main" xmlns:p="http://schemas.openxmlformats.org/presentationml/2006/main" xmlns:r="http://schemas.openxmlformats.org/officeDocument/2006/relationships">
   <p:cSld>
     <p:spTree>
       <p:nvGrpSpPr>
@@ -9184,14 +9117,7 @@
         <p:cNvGrpSpPr/>
         <p:nvPr/>
       </p:nvGrpSpPr>
-      <p:grpSpPr>
-        <a:xfrm>
-          <a:off x="0" y="0"/>
-          <a:ext cx="0" cy="0"/>
-          <a:chOff x="0" y="0"/>
-          <a:chExt cx="0" cy="0"/>
-        </a:xfrm>
-      </p:grpSpPr>
+      <p:grpSpPr/>
       <p:sp>
         <p:nvSpPr>
           <p:cNvPr id="2" name="Rectangle 1"/>
@@ -9232,7 +9158,6 @@
           <a:lstStyle/>
           <a:p>
             <a:pPr algn="ctr"/>
-            <a:endParaRPr/>
           </a:p>
         </p:txBody>
       </p:sp>
@@ -9276,7 +9201,6 @@
           <a:lstStyle/>
           <a:p>
             <a:pPr algn="ctr"/>
-            <a:endParaRPr/>
           </a:p>
         </p:txBody>
       </p:sp>
@@ -9320,7 +9244,6 @@
           <a:lstStyle/>
           <a:p>
             <a:pPr algn="ctr"/>
-            <a:endParaRPr/>
           </a:p>
         </p:txBody>
       </p:sp>
@@ -9364,7 +9287,6 @@
           <a:lstStyle/>
           <a:p>
             <a:pPr algn="ctr"/>
-            <a:endParaRPr/>
           </a:p>
         </p:txBody>
       </p:sp>
@@ -9408,7 +9330,6 @@
           <a:lstStyle/>
           <a:p>
             <a:pPr algn="ctr"/>
-            <a:endParaRPr/>
           </a:p>
         </p:txBody>
       </p:sp>
@@ -9525,6 +9446,7 @@
 |-- install.py
 |-- LICENSE
 |-- mouse_mover.py
+|-- multi-turn-flowFMODInstallation.flw
 |-- NEW_AGENT_RECOMMENDATIONS.md
 |-- package.json
 |-- prompts_example.txt
@@ -9541,8 +9463,7 @@
 |-- uninstall.py
 |-- unregister_flw.ps1
 |-- .codex/
-|   `-- skills/
-|       |-- full-project-pdf-dossier/</a:t>
+|   `-- skills/</a:t>
             </a:r>
           </a:p>
         </p:txBody>
@@ -9556,7 +9477,7 @@
 </file>
 
 <file path=ppt/slides/slide18.xml><?xml version="1.0" encoding="utf-8"?>
-<p:sld xmlns:a="http://schemas.openxmlformats.org/drawingml/2006/main" xmlns:r="http://schemas.openxmlformats.org/officeDocument/2006/relationships" xmlns:p="http://schemas.openxmlformats.org/presentationml/2006/main">
+<p:sld xmlns:a="http://schemas.openxmlformats.org/drawingml/2006/main" xmlns:p="http://schemas.openxmlformats.org/presentationml/2006/main" xmlns:r="http://schemas.openxmlformats.org/officeDocument/2006/relationships">
   <p:cSld>
     <p:spTree>
       <p:nvGrpSpPr>
@@ -9564,14 +9485,7 @@
         <p:cNvGrpSpPr/>
         <p:nvPr/>
       </p:nvGrpSpPr>
-      <p:grpSpPr>
-        <a:xfrm>
-          <a:off x="0" y="0"/>
-          <a:ext cx="0" cy="0"/>
-          <a:chOff x="0" y="0"/>
-          <a:chExt cx="0" cy="0"/>
-        </a:xfrm>
-      </p:grpSpPr>
+      <p:grpSpPr/>
       <p:sp>
         <p:nvSpPr>
           <p:cNvPr id="2" name="Rectangle 1"/>
@@ -9612,7 +9526,6 @@
           <a:lstStyle/>
           <a:p>
             <a:pPr algn="ctr"/>
-            <a:endParaRPr/>
           </a:p>
         </p:txBody>
       </p:sp>
@@ -9656,7 +9569,6 @@
           <a:lstStyle/>
           <a:p>
             <a:pPr algn="ctr"/>
-            <a:endParaRPr/>
           </a:p>
         </p:txBody>
       </p:sp>
@@ -9700,7 +9612,6 @@
           <a:lstStyle/>
           <a:p>
             <a:pPr algn="ctr"/>
-            <a:endParaRPr/>
           </a:p>
         </p:txBody>
       </p:sp>
@@ -9744,7 +9655,6 @@
           <a:lstStyle/>
           <a:p>
             <a:pPr algn="ctr"/>
-            <a:endParaRPr/>
           </a:p>
         </p:txBody>
       </p:sp>
@@ -9788,7 +9698,6 @@
           <a:lstStyle/>
           <a:p>
             <a:pPr algn="ctr"/>
-            <a:endParaRPr/>
           </a:p>
         </p:txBody>
       </p:sp>
@@ -9892,7 +9801,8 @@
                 </a:solidFill>
                 <a:latin typeface="Cascadia Mono"/>
               </a:rPr>
-              <a:t>|       |   `-- SKILL.md
+              <a:t>|       |-- full-project-pdf-dossier/
+|       |   `-- SKILL.md
 |       `-- overlap-safe-pptx-dossier/
 |           `-- SKILL.md
 |-- pyinstaller_hooks/
@@ -9921,8 +9831,7 @@
     |   |-- constants.py
     |   |-- consumers.py
     |   |-- filesearch.proto
-    |   |-- filesearch_pb2.py
-    |   |-- filesearch_pb2_grpc.py</a:t>
+    |   |-- filesearch_pb2.py</a:t>
             </a:r>
           </a:p>
         </p:txBody>
@@ -9936,7 +9845,7 @@
 </file>
 
 <file path=ppt/slides/slide19.xml><?xml version="1.0" encoding="utf-8"?>
-<p:sld xmlns:a="http://schemas.openxmlformats.org/drawingml/2006/main" xmlns:r="http://schemas.openxmlformats.org/officeDocument/2006/relationships" xmlns:p="http://schemas.openxmlformats.org/presentationml/2006/main">
+<p:sld xmlns:a="http://schemas.openxmlformats.org/drawingml/2006/main" xmlns:p="http://schemas.openxmlformats.org/presentationml/2006/main" xmlns:r="http://schemas.openxmlformats.org/officeDocument/2006/relationships">
   <p:cSld>
     <p:spTree>
       <p:nvGrpSpPr>
@@ -9944,14 +9853,7 @@
         <p:cNvGrpSpPr/>
         <p:nvPr/>
       </p:nvGrpSpPr>
-      <p:grpSpPr>
-        <a:xfrm>
-          <a:off x="0" y="0"/>
-          <a:ext cx="0" cy="0"/>
-          <a:chOff x="0" y="0"/>
-          <a:chExt cx="0" cy="0"/>
-        </a:xfrm>
-      </p:grpSpPr>
+      <p:grpSpPr/>
       <p:sp>
         <p:nvSpPr>
           <p:cNvPr id="2" name="Rectangle 1"/>
@@ -9992,7 +9894,6 @@
           <a:lstStyle/>
           <a:p>
             <a:pPr algn="ctr"/>
-            <a:endParaRPr/>
           </a:p>
         </p:txBody>
       </p:sp>
@@ -10036,7 +9937,6 @@
           <a:lstStyle/>
           <a:p>
             <a:pPr algn="ctr"/>
-            <a:endParaRPr/>
           </a:p>
         </p:txBody>
       </p:sp>
@@ -10080,7 +9980,6 @@
           <a:lstStyle/>
           <a:p>
             <a:pPr algn="ctr"/>
-            <a:endParaRPr/>
           </a:p>
         </p:txBody>
       </p:sp>
@@ -10124,7 +10023,6 @@
           <a:lstStyle/>
           <a:p>
             <a:pPr algn="ctr"/>
-            <a:endParaRPr/>
           </a:p>
         </p:txBody>
       </p:sp>
@@ -10168,7 +10066,6 @@
           <a:lstStyle/>
           <a:p>
             <a:pPr algn="ctr"/>
-            <a:endParaRPr/>
           </a:p>
         </p:txBody>
       </p:sp>
@@ -10272,7 +10169,8 @@
                 </a:solidFill>
                 <a:latin typeface="Cascadia Mono"/>
               </a:rPr>
-              <a:t>    |   |-- global_execution_planner.py
+              <a:t>    |   |-- filesearch_pb2_grpc.py
+    |   |-- global_execution_planner.py
     |   |-- global_state.py
     |   |-- inet_determiner.py
     |   |-- mcp_agent.py
@@ -10301,8 +10199,7 @@
     |   |   |   |-- asker.py
     |   |   |   `-- config.yaml
     |   |   |-- barrier/
-    |   |   |   |-- barrier.py
-    |   |   |   |-- config.yaml</a:t>
+    |   |   |   |-- barrier.py</a:t>
             </a:r>
           </a:p>
         </p:txBody>
@@ -10316,7 +10213,7 @@
 </file>
 
 <file path=ppt/slides/slide2.xml><?xml version="1.0" encoding="utf-8"?>
-<p:sld xmlns:a="http://schemas.openxmlformats.org/drawingml/2006/main" xmlns:r="http://schemas.openxmlformats.org/officeDocument/2006/relationships" xmlns:p="http://schemas.openxmlformats.org/presentationml/2006/main">
+<p:sld xmlns:a="http://schemas.openxmlformats.org/drawingml/2006/main" xmlns:p="http://schemas.openxmlformats.org/presentationml/2006/main" xmlns:r="http://schemas.openxmlformats.org/officeDocument/2006/relationships">
   <p:cSld>
     <p:spTree>
       <p:nvGrpSpPr>
@@ -10324,14 +10221,7 @@
         <p:cNvGrpSpPr/>
         <p:nvPr/>
       </p:nvGrpSpPr>
-      <p:grpSpPr>
-        <a:xfrm>
-          <a:off x="0" y="0"/>
-          <a:ext cx="0" cy="0"/>
-          <a:chOff x="0" y="0"/>
-          <a:chExt cx="0" cy="0"/>
-        </a:xfrm>
-      </p:grpSpPr>
+      <p:grpSpPr/>
       <p:sp>
         <p:nvSpPr>
           <p:cNvPr id="2" name="Rectangle 1"/>
@@ -10372,7 +10262,6 @@
           <a:lstStyle/>
           <a:p>
             <a:pPr algn="ctr"/>
-            <a:endParaRPr/>
           </a:p>
         </p:txBody>
       </p:sp>
@@ -10416,7 +10305,6 @@
           <a:lstStyle/>
           <a:p>
             <a:pPr algn="ctr"/>
-            <a:endParaRPr/>
           </a:p>
         </p:txBody>
       </p:sp>
@@ -10460,7 +10348,6 @@
           <a:lstStyle/>
           <a:p>
             <a:pPr algn="ctr"/>
-            <a:endParaRPr/>
           </a:p>
         </p:txBody>
       </p:sp>
@@ -10504,7 +10391,6 @@
           <a:lstStyle/>
           <a:p>
             <a:pPr algn="ctr"/>
-            <a:endParaRPr/>
           </a:p>
         </p:txBody>
       </p:sp>
@@ -10548,7 +10434,6 @@
           <a:lstStyle/>
           <a:p>
             <a:pPr algn="ctr"/>
-            <a:endParaRPr/>
           </a:p>
         </p:txBody>
       </p:sp>
@@ -10664,7 +10549,6 @@
           <a:lstStyle/>
           <a:p>
             <a:pPr algn="ctr"/>
-            <a:endParaRPr/>
           </a:p>
         </p:txBody>
       </p:sp>
@@ -10708,7 +10592,6 @@
           <a:lstStyle/>
           <a:p>
             <a:pPr algn="ctr"/>
-            <a:endParaRPr/>
           </a:p>
         </p:txBody>
       </p:sp>
@@ -10764,7 +10647,7 @@
           <a:noFill/>
         </p:spPr>
         <p:txBody>
-          <a:bodyPr wrap="square" lIns="38100" tIns="25400" rIns="38100" bIns="25400" anchor="t">
+          <a:bodyPr wrap="square" anchor="t" lIns="38100" rIns="38100" tIns="25400" bIns="25400">
             <a:noAutofit/>
           </a:bodyPr>
           <a:lstStyle/>
@@ -10786,6 +10669,9 @@
               </a:rPr>
               <a:t>Tlamatini is a local-first AI developer assistant built with Django, Django Channels, LangChain, LangGraph, FAISS/BM25 retrieval, and a large in-repository agent application.</a:t>
             </a:r>
+            <a:endParaRPr sz="1600" b="0" i="0">
+              <a:latin typeface="Calibri"/>
+            </a:endParaRPr>
           </a:p>
           <a:p>
             <a:pPr>
@@ -10805,6 +10691,9 @@
               </a:rPr>
               <a:t>It combines a browser chat surface, a Retrieval-Augmented Generation stack, a Multi-Turn tool executor, MCP-backed context providers, wrapped chat-agent runtimes, and a visual Agentic Control Panel for workflow design.</a:t>
             </a:r>
+            <a:endParaRPr sz="1600" b="0" i="0">
+              <a:latin typeface="Calibri"/>
+            </a:endParaRPr>
           </a:p>
           <a:p>
             <a:pPr>
@@ -10824,6 +10713,9 @@
               </a:rPr>
               <a:t>The platform is designed for development operations: codebase analysis, file and directory context, command execution, Python execution, screenshots, web/search helpers, notifications, DevOps tools, local model operation, and Windows packaging.</a:t>
             </a:r>
+            <a:endParaRPr sz="1600" b="0" i="0">
+              <a:latin typeface="Calibri"/>
+            </a:endParaRPr>
           </a:p>
         </p:txBody>
       </p:sp>
@@ -10869,7 +10761,6 @@
           <a:lstStyle/>
           <a:p>
             <a:pPr algn="ctr"/>
-            <a:endParaRPr/>
           </a:p>
         </p:txBody>
       </p:sp>
@@ -10913,7 +10804,6 @@
           <a:lstStyle/>
           <a:p>
             <a:pPr algn="ctr"/>
-            <a:endParaRPr/>
           </a:p>
         </p:txBody>
       </p:sp>
@@ -10969,7 +10859,7 @@
           <a:noFill/>
         </p:spPr>
         <p:txBody>
-          <a:bodyPr wrap="square" lIns="38100" tIns="25400" rIns="38100" bIns="25400" anchor="t">
+          <a:bodyPr wrap="square" anchor="t" lIns="38100" rIns="38100" tIns="25400" bIns="25400">
             <a:noAutofit/>
           </a:bodyPr>
           <a:lstStyle/>
@@ -10991,6 +10881,9 @@
               </a:rPr>
               <a:t>Chat page at `/agent/` for context-grounded Q&amp;A, code generation, tool calls, and Multi-Turn execution.</a:t>
             </a:r>
+            <a:endParaRPr sz="1600" b="0" i="0">
+              <a:latin typeface="Calibri"/>
+            </a:endParaRPr>
           </a:p>
           <a:p>
             <a:pPr>
@@ -11010,6 +10903,9 @@
               </a:rPr>
               <a:t>Agentic Control Panel at `/agentic_control_panel/` for visual workflow design.</a:t>
             </a:r>
+            <a:endParaRPr sz="1600" b="0" i="0">
+              <a:latin typeface="Calibri"/>
+            </a:endParaRPr>
           </a:p>
           <a:p>
             <a:pPr>
@@ -11029,6 +10925,9 @@
               </a:rPr>
               <a:t>Django admin and config dialogs for MCPs, tools, agents, users, and persistent settings.</a:t>
             </a:r>
+            <a:endParaRPr sz="1600" b="0" i="0">
+              <a:latin typeface="Calibri"/>
+            </a:endParaRPr>
           </a:p>
         </p:txBody>
       </p:sp>
@@ -11041,7 +10940,7 @@
 </file>
 
 <file path=ppt/slides/slide20.xml><?xml version="1.0" encoding="utf-8"?>
-<p:sld xmlns:a="http://schemas.openxmlformats.org/drawingml/2006/main" xmlns:r="http://schemas.openxmlformats.org/officeDocument/2006/relationships" xmlns:p="http://schemas.openxmlformats.org/presentationml/2006/main">
+<p:sld xmlns:a="http://schemas.openxmlformats.org/drawingml/2006/main" xmlns:p="http://schemas.openxmlformats.org/presentationml/2006/main" xmlns:r="http://schemas.openxmlformats.org/officeDocument/2006/relationships">
   <p:cSld>
     <p:spTree>
       <p:nvGrpSpPr>
@@ -11049,14 +10948,7 @@
         <p:cNvGrpSpPr/>
         <p:nvPr/>
       </p:nvGrpSpPr>
-      <p:grpSpPr>
-        <a:xfrm>
-          <a:off x="0" y="0"/>
-          <a:ext cx="0" cy="0"/>
-          <a:chOff x="0" y="0"/>
-          <a:chExt cx="0" cy="0"/>
-        </a:xfrm>
-      </p:grpSpPr>
+      <p:grpSpPr/>
       <p:sp>
         <p:nvSpPr>
           <p:cNvPr id="2" name="Rectangle 1"/>
@@ -11097,7 +10989,6 @@
           <a:lstStyle/>
           <a:p>
             <a:pPr algn="ctr"/>
-            <a:endParaRPr/>
           </a:p>
         </p:txBody>
       </p:sp>
@@ -11141,7 +11032,6 @@
           <a:lstStyle/>
           <a:p>
             <a:pPr algn="ctr"/>
-            <a:endParaRPr/>
           </a:p>
         </p:txBody>
       </p:sp>
@@ -11185,7 +11075,6 @@
           <a:lstStyle/>
           <a:p>
             <a:pPr algn="ctr"/>
-            <a:endParaRPr/>
           </a:p>
         </p:txBody>
       </p:sp>
@@ -11229,7 +11118,6 @@
           <a:lstStyle/>
           <a:p>
             <a:pPr algn="ctr"/>
-            <a:endParaRPr/>
           </a:p>
         </p:txBody>
       </p:sp>
@@ -11273,7 +11161,6 @@
           <a:lstStyle/>
           <a:p>
             <a:pPr algn="ctr"/>
-            <a:endParaRPr/>
           </a:p>
         </p:txBody>
       </p:sp>
@@ -11377,7 +11264,8 @@
                 </a:solidFill>
                 <a:latin typeface="Cascadia Mono"/>
               </a:rPr>
-              <a:t>    |   |   |   `-- test_barrier.py
+              <a:t>    |   |   |   |-- config.yaml
+    |   |   |   `-- test_barrier.py
     |   |   |-- cleaner/
     |   |   |   |-- __init__.py
     |   |   |   |-- cleaner.py
@@ -11406,8 +11294,7 @@
     |   |   |-- executer/
     |   |   |   |-- config.yaml
     |   |   |   `-- executer.py
-    |   |   |-- file_creator/
-    |   |   |   |-- config.yaml</a:t>
+    |   |   |-- file_creator/</a:t>
             </a:r>
           </a:p>
         </p:txBody>
@@ -11421,7 +11308,7 @@
 </file>
 
 <file path=ppt/slides/slide21.xml><?xml version="1.0" encoding="utf-8"?>
-<p:sld xmlns:a="http://schemas.openxmlformats.org/drawingml/2006/main" xmlns:r="http://schemas.openxmlformats.org/officeDocument/2006/relationships" xmlns:p="http://schemas.openxmlformats.org/presentationml/2006/main">
+<p:sld xmlns:a="http://schemas.openxmlformats.org/drawingml/2006/main" xmlns:p="http://schemas.openxmlformats.org/presentationml/2006/main" xmlns:r="http://schemas.openxmlformats.org/officeDocument/2006/relationships">
   <p:cSld>
     <p:spTree>
       <p:nvGrpSpPr>
@@ -11429,14 +11316,7 @@
         <p:cNvGrpSpPr/>
         <p:nvPr/>
       </p:nvGrpSpPr>
-      <p:grpSpPr>
-        <a:xfrm>
-          <a:off x="0" y="0"/>
-          <a:ext cx="0" cy="0"/>
-          <a:chOff x="0" y="0"/>
-          <a:chExt cx="0" cy="0"/>
-        </a:xfrm>
-      </p:grpSpPr>
+      <p:grpSpPr/>
       <p:sp>
         <p:nvSpPr>
           <p:cNvPr id="2" name="Rectangle 1"/>
@@ -11477,7 +11357,6 @@
           <a:lstStyle/>
           <a:p>
             <a:pPr algn="ctr"/>
-            <a:endParaRPr/>
           </a:p>
         </p:txBody>
       </p:sp>
@@ -11521,7 +11400,6 @@
           <a:lstStyle/>
           <a:p>
             <a:pPr algn="ctr"/>
-            <a:endParaRPr/>
           </a:p>
         </p:txBody>
       </p:sp>
@@ -11565,7 +11443,6 @@
           <a:lstStyle/>
           <a:p>
             <a:pPr algn="ctr"/>
-            <a:endParaRPr/>
           </a:p>
         </p:txBody>
       </p:sp>
@@ -11609,7 +11486,6 @@
           <a:lstStyle/>
           <a:p>
             <a:pPr algn="ctr"/>
-            <a:endParaRPr/>
           </a:p>
         </p:txBody>
       </p:sp>
@@ -11653,7 +11529,6 @@
           <a:lstStyle/>
           <a:p>
             <a:pPr algn="ctr"/>
-            <a:endParaRPr/>
           </a:p>
         </p:txBody>
       </p:sp>
@@ -11757,7 +11632,8 @@
                 </a:solidFill>
                 <a:latin typeface="Cascadia Mono"/>
               </a:rPr>
-              <a:t>    |   |   |   `-- file_creator.py
+              <a:t>    |   |   |   |-- config.yaml
+    |   |   |   `-- file_creator.py
     |   |   |-- file_extractor/
     |   |   |   |-- config.yaml
     |   |   |   `-- file_extractor.py
@@ -11786,8 +11662,7 @@
     |   |   |-- gatewayer/
     |   |   |   |-- config.yaml
     |   |   |   |-- gatewayer.md
-    |   |   |   |-- gatewayer.py
-    |   |   |   `-- gatewayer_explanation.md</a:t>
+    |   |   |   |-- gatewayer.py</a:t>
             </a:r>
           </a:p>
         </p:txBody>
@@ -11801,7 +11676,7 @@
 </file>
 
 <file path=ppt/slides/slide22.xml><?xml version="1.0" encoding="utf-8"?>
-<p:sld xmlns:a="http://schemas.openxmlformats.org/drawingml/2006/main" xmlns:r="http://schemas.openxmlformats.org/officeDocument/2006/relationships" xmlns:p="http://schemas.openxmlformats.org/presentationml/2006/main">
+<p:sld xmlns:a="http://schemas.openxmlformats.org/drawingml/2006/main" xmlns:p="http://schemas.openxmlformats.org/presentationml/2006/main" xmlns:r="http://schemas.openxmlformats.org/officeDocument/2006/relationships">
   <p:cSld>
     <p:spTree>
       <p:nvGrpSpPr>
@@ -11809,14 +11684,7 @@
         <p:cNvGrpSpPr/>
         <p:nvPr/>
       </p:nvGrpSpPr>
-      <p:grpSpPr>
-        <a:xfrm>
-          <a:off x="0" y="0"/>
-          <a:ext cx="0" cy="0"/>
-          <a:chOff x="0" y="0"/>
-          <a:chExt cx="0" cy="0"/>
-        </a:xfrm>
-      </p:grpSpPr>
+      <p:grpSpPr/>
       <p:sp>
         <p:nvSpPr>
           <p:cNvPr id="2" name="Rectangle 1"/>
@@ -11857,7 +11725,6 @@
           <a:lstStyle/>
           <a:p>
             <a:pPr algn="ctr"/>
-            <a:endParaRPr/>
           </a:p>
         </p:txBody>
       </p:sp>
@@ -11901,7 +11768,6 @@
           <a:lstStyle/>
           <a:p>
             <a:pPr algn="ctr"/>
-            <a:endParaRPr/>
           </a:p>
         </p:txBody>
       </p:sp>
@@ -11945,7 +11811,6 @@
           <a:lstStyle/>
           <a:p>
             <a:pPr algn="ctr"/>
-            <a:endParaRPr/>
           </a:p>
         </p:txBody>
       </p:sp>
@@ -11989,7 +11854,6 @@
           <a:lstStyle/>
           <a:p>
             <a:pPr algn="ctr"/>
-            <a:endParaRPr/>
           </a:p>
         </p:txBody>
       </p:sp>
@@ -12033,7 +11897,6 @@
           <a:lstStyle/>
           <a:p>
             <a:pPr algn="ctr"/>
-            <a:endParaRPr/>
           </a:p>
         </p:txBody>
       </p:sp>
@@ -12137,7 +12000,8 @@
                 </a:solidFill>
                 <a:latin typeface="Cascadia Mono"/>
               </a:rPr>
-              <a:t>    |   |   |-- gitter/
+              <a:t>    |   |   |   `-- gatewayer_explanation.md
+    |   |   |-- gitter/
     |   |   |   |-- config.yaml
     |   |   |   `-- gitter.py
     |   |   |-- googler/
@@ -12166,8 +12030,7 @@
     |   |   |   `-- kyber_decipher.py
     |   |   |-- kyber_keygen/
     |   |   |   |-- config.yaml
-    |   |   |   `-- kyber_keygen.py
-    |   |   |-- mongoxer/</a:t>
+    |   |   |   `-- kyber_keygen.py</a:t>
             </a:r>
           </a:p>
         </p:txBody>
@@ -12181,7 +12044,7 @@
 </file>
 
 <file path=ppt/slides/slide23.xml><?xml version="1.0" encoding="utf-8"?>
-<p:sld xmlns:a="http://schemas.openxmlformats.org/drawingml/2006/main" xmlns:r="http://schemas.openxmlformats.org/officeDocument/2006/relationships" xmlns:p="http://schemas.openxmlformats.org/presentationml/2006/main">
+<p:sld xmlns:a="http://schemas.openxmlformats.org/drawingml/2006/main" xmlns:p="http://schemas.openxmlformats.org/presentationml/2006/main" xmlns:r="http://schemas.openxmlformats.org/officeDocument/2006/relationships">
   <p:cSld>
     <p:spTree>
       <p:nvGrpSpPr>
@@ -12189,14 +12052,7 @@
         <p:cNvGrpSpPr/>
         <p:nvPr/>
       </p:nvGrpSpPr>
-      <p:grpSpPr>
-        <a:xfrm>
-          <a:off x="0" y="0"/>
-          <a:ext cx="0" cy="0"/>
-          <a:chOff x="0" y="0"/>
-          <a:chExt cx="0" cy="0"/>
-        </a:xfrm>
-      </p:grpSpPr>
+      <p:grpSpPr/>
       <p:sp>
         <p:nvSpPr>
           <p:cNvPr id="2" name="Rectangle 1"/>
@@ -12237,7 +12093,6 @@
           <a:lstStyle/>
           <a:p>
             <a:pPr algn="ctr"/>
-            <a:endParaRPr/>
           </a:p>
         </p:txBody>
       </p:sp>
@@ -12281,7 +12136,6 @@
           <a:lstStyle/>
           <a:p>
             <a:pPr algn="ctr"/>
-            <a:endParaRPr/>
           </a:p>
         </p:txBody>
       </p:sp>
@@ -12325,7 +12179,6 @@
           <a:lstStyle/>
           <a:p>
             <a:pPr algn="ctr"/>
-            <a:endParaRPr/>
           </a:p>
         </p:txBody>
       </p:sp>
@@ -12369,7 +12222,6 @@
           <a:lstStyle/>
           <a:p>
             <a:pPr algn="ctr"/>
-            <a:endParaRPr/>
           </a:p>
         </p:txBody>
       </p:sp>
@@ -12413,7 +12265,6 @@
           <a:lstStyle/>
           <a:p>
             <a:pPr algn="ctr"/>
-            <a:endParaRPr/>
           </a:p>
         </p:txBody>
       </p:sp>
@@ -12517,7 +12368,8 @@
                 </a:solidFill>
                 <a:latin typeface="Cascadia Mono"/>
               </a:rPr>
-              <a:t>    |   |   |   |-- config.yaml
+              <a:t>    |   |   |-- mongoxer/
+    |   |   |   |-- config.yaml
     |   |   |   `-- mongoxer.py
     |   |   |-- monitor_log/
     |   |   |   |-- config.yaml
@@ -12546,8 +12398,7 @@
     |   |   |-- parametrizer/
     |   |   |   |-- config.yaml
     |   |   |   `-- parametrizer.py
-    |   |   |-- prompter/
-    |   |   |   |-- config.yaml</a:t>
+    |   |   |-- prompter/</a:t>
             </a:r>
           </a:p>
         </p:txBody>
@@ -12561,7 +12412,7 @@
 </file>
 
 <file path=ppt/slides/slide24.xml><?xml version="1.0" encoding="utf-8"?>
-<p:sld xmlns:a="http://schemas.openxmlformats.org/drawingml/2006/main" xmlns:r="http://schemas.openxmlformats.org/officeDocument/2006/relationships" xmlns:p="http://schemas.openxmlformats.org/presentationml/2006/main">
+<p:sld xmlns:a="http://schemas.openxmlformats.org/drawingml/2006/main" xmlns:p="http://schemas.openxmlformats.org/presentationml/2006/main" xmlns:r="http://schemas.openxmlformats.org/officeDocument/2006/relationships">
   <p:cSld>
     <p:spTree>
       <p:nvGrpSpPr>
@@ -12569,14 +12420,7 @@
         <p:cNvGrpSpPr/>
         <p:nvPr/>
       </p:nvGrpSpPr>
-      <p:grpSpPr>
-        <a:xfrm>
-          <a:off x="0" y="0"/>
-          <a:ext cx="0" cy="0"/>
-          <a:chOff x="0" y="0"/>
-          <a:chExt cx="0" cy="0"/>
-        </a:xfrm>
-      </p:grpSpPr>
+      <p:grpSpPr/>
       <p:sp>
         <p:nvSpPr>
           <p:cNvPr id="2" name="Rectangle 1"/>
@@ -12617,7 +12461,6 @@
           <a:lstStyle/>
           <a:p>
             <a:pPr algn="ctr"/>
-            <a:endParaRPr/>
           </a:p>
         </p:txBody>
       </p:sp>
@@ -12661,7 +12504,6 @@
           <a:lstStyle/>
           <a:p>
             <a:pPr algn="ctr"/>
-            <a:endParaRPr/>
           </a:p>
         </p:txBody>
       </p:sp>
@@ -12705,7 +12547,6 @@
           <a:lstStyle/>
           <a:p>
             <a:pPr algn="ctr"/>
-            <a:endParaRPr/>
           </a:p>
         </p:txBody>
       </p:sp>
@@ -12749,7 +12590,6 @@
           <a:lstStyle/>
           <a:p>
             <a:pPr algn="ctr"/>
-            <a:endParaRPr/>
           </a:p>
         </p:txBody>
       </p:sp>
@@ -12793,7 +12633,6 @@
           <a:lstStyle/>
           <a:p>
             <a:pPr algn="ctr"/>
-            <a:endParaRPr/>
           </a:p>
         </p:txBody>
       </p:sp>
@@ -12897,7 +12736,8 @@
                 </a:solidFill>
                 <a:latin typeface="Cascadia Mono"/>
               </a:rPr>
-              <a:t>    |   |   |   `-- prompter.py
+              <a:t>    |   |   |   |-- config.yaml
+    |   |   |   `-- prompter.py
     |   |   |-- pser/
     |   |   |   |-- config.yaml
     |   |   |   `-- pser.py
@@ -12926,8 +12766,7 @@
     |   |   |   |-- config.yaml
     |   |   |   `-- ssher.py
     |   |   |-- starter/
-    |   |   |   |-- config.yaml
-    |   |   |   `-- starter.py</a:t>
+    |   |   |   |-- config.yaml</a:t>
             </a:r>
           </a:p>
         </p:txBody>
@@ -12941,7 +12780,7 @@
 </file>
 
 <file path=ppt/slides/slide25.xml><?xml version="1.0" encoding="utf-8"?>
-<p:sld xmlns:a="http://schemas.openxmlformats.org/drawingml/2006/main" xmlns:r="http://schemas.openxmlformats.org/officeDocument/2006/relationships" xmlns:p="http://schemas.openxmlformats.org/presentationml/2006/main">
+<p:sld xmlns:a="http://schemas.openxmlformats.org/drawingml/2006/main" xmlns:p="http://schemas.openxmlformats.org/presentationml/2006/main" xmlns:r="http://schemas.openxmlformats.org/officeDocument/2006/relationships">
   <p:cSld>
     <p:spTree>
       <p:nvGrpSpPr>
@@ -12949,14 +12788,7 @@
         <p:cNvGrpSpPr/>
         <p:nvPr/>
       </p:nvGrpSpPr>
-      <p:grpSpPr>
-        <a:xfrm>
-          <a:off x="0" y="0"/>
-          <a:ext cx="0" cy="0"/>
-          <a:chOff x="0" y="0"/>
-          <a:chExt cx="0" cy="0"/>
-        </a:xfrm>
-      </p:grpSpPr>
+      <p:grpSpPr/>
       <p:sp>
         <p:nvSpPr>
           <p:cNvPr id="2" name="Rectangle 1"/>
@@ -12997,7 +12829,6 @@
           <a:lstStyle/>
           <a:p>
             <a:pPr algn="ctr"/>
-            <a:endParaRPr/>
           </a:p>
         </p:txBody>
       </p:sp>
@@ -13041,7 +12872,6 @@
           <a:lstStyle/>
           <a:p>
             <a:pPr algn="ctr"/>
-            <a:endParaRPr/>
           </a:p>
         </p:txBody>
       </p:sp>
@@ -13085,7 +12915,6 @@
           <a:lstStyle/>
           <a:p>
             <a:pPr algn="ctr"/>
-            <a:endParaRPr/>
           </a:p>
         </p:txBody>
       </p:sp>
@@ -13129,7 +12958,6 @@
           <a:lstStyle/>
           <a:p>
             <a:pPr algn="ctr"/>
-            <a:endParaRPr/>
           </a:p>
         </p:txBody>
       </p:sp>
@@ -13173,7 +13001,6 @@
           <a:lstStyle/>
           <a:p>
             <a:pPr algn="ctr"/>
-            <a:endParaRPr/>
           </a:p>
         </p:txBody>
       </p:sp>
@@ -13277,7 +13104,8 @@
                 </a:solidFill>
                 <a:latin typeface="Cascadia Mono"/>
               </a:rPr>
-              <a:t>    |   |   |-- stopper/
+              <a:t>    |   |   |   `-- starter.py
+    |   |   |-- stopper/
     |   |   |   |-- config.yaml
     |   |   |   `-- stopper.py
     |   |   |-- summarizer/
@@ -13306,8 +13134,7 @@
     |   |   |-- image_interpreter.py
     |   |   `-- screenshot.py
     |   |-- management/
-    |   |   |-- __init__.py
-    |   |   `-- commands/</a:t>
+    |   |   |-- __init__.py</a:t>
             </a:r>
           </a:p>
         </p:txBody>
@@ -13321,7 +13148,7 @@
 </file>
 
 <file path=ppt/slides/slide26.xml><?xml version="1.0" encoding="utf-8"?>
-<p:sld xmlns:a="http://schemas.openxmlformats.org/drawingml/2006/main" xmlns:r="http://schemas.openxmlformats.org/officeDocument/2006/relationships" xmlns:p="http://schemas.openxmlformats.org/presentationml/2006/main">
+<p:sld xmlns:a="http://schemas.openxmlformats.org/drawingml/2006/main" xmlns:p="http://schemas.openxmlformats.org/presentationml/2006/main" xmlns:r="http://schemas.openxmlformats.org/officeDocument/2006/relationships">
   <p:cSld>
     <p:spTree>
       <p:nvGrpSpPr>
@@ -13329,14 +13156,7 @@
         <p:cNvGrpSpPr/>
         <p:nvPr/>
       </p:nvGrpSpPr>
-      <p:grpSpPr>
-        <a:xfrm>
-          <a:off x="0" y="0"/>
-          <a:ext cx="0" cy="0"/>
-          <a:chOff x="0" y="0"/>
-          <a:chExt cx="0" cy="0"/>
-        </a:xfrm>
-      </p:grpSpPr>
+      <p:grpSpPr/>
       <p:sp>
         <p:nvSpPr>
           <p:cNvPr id="2" name="Rectangle 1"/>
@@ -13377,7 +13197,6 @@
           <a:lstStyle/>
           <a:p>
             <a:pPr algn="ctr"/>
-            <a:endParaRPr/>
           </a:p>
         </p:txBody>
       </p:sp>
@@ -13421,7 +13240,6 @@
           <a:lstStyle/>
           <a:p>
             <a:pPr algn="ctr"/>
-            <a:endParaRPr/>
           </a:p>
         </p:txBody>
       </p:sp>
@@ -13465,7 +13283,6 @@
           <a:lstStyle/>
           <a:p>
             <a:pPr algn="ctr"/>
-            <a:endParaRPr/>
           </a:p>
         </p:txBody>
       </p:sp>
@@ -13509,7 +13326,6 @@
           <a:lstStyle/>
           <a:p>
             <a:pPr algn="ctr"/>
-            <a:endParaRPr/>
           </a:p>
         </p:txBody>
       </p:sp>
@@ -13553,7 +13369,6 @@
           <a:lstStyle/>
           <a:p>
             <a:pPr algn="ctr"/>
-            <a:endParaRPr/>
           </a:p>
         </p:txBody>
       </p:sp>
@@ -13657,7 +13472,8 @@
                 </a:solidFill>
                 <a:latin typeface="Cascadia Mono"/>
               </a:rPr>
-              <a:t>    |   |       `-- startserver.py
+              <a:t>    |   |   `-- commands/
+    |   |       `-- startserver.py
     |   |-- migrations/
     |   |   |-- 0001_initial.py
     |   |   |-- 0002_populate_db.py
@@ -13686,8 +13502,7 @@
     |   |   |-- 0025_add_telegramer.py
     |   |   |-- 0026_repopulate_all_agents.py
     |   |   |-- 0027_add_sqler.py
-    |   |   |-- 0028_repopulate_all_agents.py
-    |   |   |-- 0029_add_prompter.py</a:t>
+    |   |   |-- 0028_repopulate_all_agents.py</a:t>
             </a:r>
           </a:p>
         </p:txBody>
@@ -13701,7 +13516,7 @@
 </file>
 
 <file path=ppt/slides/slide27.xml><?xml version="1.0" encoding="utf-8"?>
-<p:sld xmlns:a="http://schemas.openxmlformats.org/drawingml/2006/main" xmlns:r="http://schemas.openxmlformats.org/officeDocument/2006/relationships" xmlns:p="http://schemas.openxmlformats.org/presentationml/2006/main">
+<p:sld xmlns:a="http://schemas.openxmlformats.org/drawingml/2006/main" xmlns:p="http://schemas.openxmlformats.org/presentationml/2006/main" xmlns:r="http://schemas.openxmlformats.org/officeDocument/2006/relationships">
   <p:cSld>
     <p:spTree>
       <p:nvGrpSpPr>
@@ -13709,14 +13524,7 @@
         <p:cNvGrpSpPr/>
         <p:nvPr/>
       </p:nvGrpSpPr>
-      <p:grpSpPr>
-        <a:xfrm>
-          <a:off x="0" y="0"/>
-          <a:ext cx="0" cy="0"/>
-          <a:chOff x="0" y="0"/>
-          <a:chExt cx="0" cy="0"/>
-        </a:xfrm>
-      </p:grpSpPr>
+      <p:grpSpPr/>
       <p:sp>
         <p:nvSpPr>
           <p:cNvPr id="2" name="Rectangle 1"/>
@@ -13757,7 +13565,6 @@
           <a:lstStyle/>
           <a:p>
             <a:pPr algn="ctr"/>
-            <a:endParaRPr/>
           </a:p>
         </p:txBody>
       </p:sp>
@@ -13801,7 +13608,6 @@
           <a:lstStyle/>
           <a:p>
             <a:pPr algn="ctr"/>
-            <a:endParaRPr/>
           </a:p>
         </p:txBody>
       </p:sp>
@@ -13845,7 +13651,6 @@
           <a:lstStyle/>
           <a:p>
             <a:pPr algn="ctr"/>
-            <a:endParaRPr/>
           </a:p>
         </p:txBody>
       </p:sp>
@@ -13889,7 +13694,6 @@
           <a:lstStyle/>
           <a:p>
             <a:pPr algn="ctr"/>
-            <a:endParaRPr/>
           </a:p>
         </p:txBody>
       </p:sp>
@@ -13933,7 +13737,6 @@
           <a:lstStyle/>
           <a:p>
             <a:pPr algn="ctr"/>
-            <a:endParaRPr/>
           </a:p>
         </p:txBody>
       </p:sp>
@@ -14037,7 +13840,8 @@
                 </a:solidFill>
                 <a:latin typeface="Cascadia Mono"/>
               </a:rPr>
-              <a:t>    |   |   |-- 0030_repopulate_all_agents.py
+              <a:t>    |   |   |-- 0029_add_prompter.py
+    |   |   |-- 0030_repopulate_all_agents.py
     |   |   |-- 0031_add_flowcreator.py
     |   |   |-- 0032_repopulate_all_agents.py
     |   |   |-- 0033_add_gitter.py
@@ -14066,8 +13870,7 @@
     |   |   |-- 0056_add_parametrizer.py
     |   |   |-- 0057_add_flowbacker.py
     |   |   |-- 0058_add_barrier.py
-    |   |   |-- 0059_add_j_decompiler.py
-    |   |   |-- 0060_add_agent_parametrizer_tool.py</a:t>
+    |   |   |-- 0059_add_j_decompiler.py</a:t>
             </a:r>
           </a:p>
         </p:txBody>
@@ -14081,7 +13884,7 @@
 </file>
 
 <file path=ppt/slides/slide28.xml><?xml version="1.0" encoding="utf-8"?>
-<p:sld xmlns:a="http://schemas.openxmlformats.org/drawingml/2006/main" xmlns:r="http://schemas.openxmlformats.org/officeDocument/2006/relationships" xmlns:p="http://schemas.openxmlformats.org/presentationml/2006/main">
+<p:sld xmlns:a="http://schemas.openxmlformats.org/drawingml/2006/main" xmlns:p="http://schemas.openxmlformats.org/presentationml/2006/main" xmlns:r="http://schemas.openxmlformats.org/officeDocument/2006/relationships">
   <p:cSld>
     <p:spTree>
       <p:nvGrpSpPr>
@@ -14089,14 +13892,7 @@
         <p:cNvGrpSpPr/>
         <p:nvPr/>
       </p:nvGrpSpPr>
-      <p:grpSpPr>
-        <a:xfrm>
-          <a:off x="0" y="0"/>
-          <a:ext cx="0" cy="0"/>
-          <a:chOff x="0" y="0"/>
-          <a:chExt cx="0" cy="0"/>
-        </a:xfrm>
-      </p:grpSpPr>
+      <p:grpSpPr/>
       <p:sp>
         <p:nvSpPr>
           <p:cNvPr id="2" name="Rectangle 1"/>
@@ -14137,7 +13933,6 @@
           <a:lstStyle/>
           <a:p>
             <a:pPr algn="ctr"/>
-            <a:endParaRPr/>
           </a:p>
         </p:txBody>
       </p:sp>
@@ -14181,7 +13976,6 @@
           <a:lstStyle/>
           <a:p>
             <a:pPr algn="ctr"/>
-            <a:endParaRPr/>
           </a:p>
         </p:txBody>
       </p:sp>
@@ -14225,7 +14019,6 @@
           <a:lstStyle/>
           <a:p>
             <a:pPr algn="ctr"/>
-            <a:endParaRPr/>
           </a:p>
         </p:txBody>
       </p:sp>
@@ -14269,7 +14062,6 @@
           <a:lstStyle/>
           <a:p>
             <a:pPr algn="ctr"/>
-            <a:endParaRPr/>
           </a:p>
         </p:txBody>
       </p:sp>
@@ -14313,7 +14105,6 @@
           <a:lstStyle/>
           <a:p>
             <a:pPr algn="ctr"/>
-            <a:endParaRPr/>
           </a:p>
         </p:txBody>
       </p:sp>
@@ -14417,7 +14208,8 @@
                 </a:solidFill>
                 <a:latin typeface="Cascadia Mono"/>
               </a:rPr>
-              <a:t>    |   |   |-- 0061_add_agent_starter_tool.py
+              <a:t>    |   |   |-- 0060_add_agent_parametrizer_tool.py
+    |   |   |-- 0061_add_agent_starter_tool.py
     |   |   |-- 0062_sync_agent_control_tools_and_prompts.py
     |   |   |-- 0063_add_agent_parametrizer_prompt.py
     |   |   |-- 0064_add_chat_agent_run_model.py
@@ -14446,8 +14238,7 @@
     |   |   |-- utils.py
     |   |   `-- chains/
     |   |       |-- base.py
-    |   |       |-- basic.py
-    |   |       |-- history_aware.py</a:t>
+    |   |       |-- basic.py</a:t>
             </a:r>
           </a:p>
         </p:txBody>
@@ -14461,7 +14252,7 @@
 </file>
 
 <file path=ppt/slides/slide29.xml><?xml version="1.0" encoding="utf-8"?>
-<p:sld xmlns:a="http://schemas.openxmlformats.org/drawingml/2006/main" xmlns:r="http://schemas.openxmlformats.org/officeDocument/2006/relationships" xmlns:p="http://schemas.openxmlformats.org/presentationml/2006/main">
+<p:sld xmlns:a="http://schemas.openxmlformats.org/drawingml/2006/main" xmlns:p="http://schemas.openxmlformats.org/presentationml/2006/main" xmlns:r="http://schemas.openxmlformats.org/officeDocument/2006/relationships">
   <p:cSld>
     <p:spTree>
       <p:nvGrpSpPr>
@@ -14469,14 +14260,7 @@
         <p:cNvGrpSpPr/>
         <p:nvPr/>
       </p:nvGrpSpPr>
-      <p:grpSpPr>
-        <a:xfrm>
-          <a:off x="0" y="0"/>
-          <a:ext cx="0" cy="0"/>
-          <a:chOff x="0" y="0"/>
-          <a:chExt cx="0" cy="0"/>
-        </a:xfrm>
-      </p:grpSpPr>
+      <p:grpSpPr/>
       <p:sp>
         <p:nvSpPr>
           <p:cNvPr id="2" name="Rectangle 1"/>
@@ -14517,7 +14301,6 @@
           <a:lstStyle/>
           <a:p>
             <a:pPr algn="ctr"/>
-            <a:endParaRPr/>
           </a:p>
         </p:txBody>
       </p:sp>
@@ -14561,7 +14344,6 @@
           <a:lstStyle/>
           <a:p>
             <a:pPr algn="ctr"/>
-            <a:endParaRPr/>
           </a:p>
         </p:txBody>
       </p:sp>
@@ -14605,7 +14387,6 @@
           <a:lstStyle/>
           <a:p>
             <a:pPr algn="ctr"/>
-            <a:endParaRPr/>
           </a:p>
         </p:txBody>
       </p:sp>
@@ -14649,7 +14430,6 @@
           <a:lstStyle/>
           <a:p>
             <a:pPr algn="ctr"/>
-            <a:endParaRPr/>
           </a:p>
         </p:txBody>
       </p:sp>
@@ -14693,7 +14473,6 @@
           <a:lstStyle/>
           <a:p>
             <a:pPr algn="ctr"/>
-            <a:endParaRPr/>
           </a:p>
         </p:txBody>
       </p:sp>
@@ -14797,7 +14576,8 @@
                 </a:solidFill>
                 <a:latin typeface="Cascadia Mono"/>
               </a:rPr>
-              <a:t>    |   |       `-- unified.py
+              <a:t>    |   |       |-- history_aware.py
+    |   |       `-- unified.py
     |   |-- services/
     |   |   |-- __init__.py
     |   |   |-- answer_analizer.py
@@ -14826,8 +14606,7 @@
     |   |       |   |-- acp-session.js
     |   |       |   |-- acp-undo-manager.js
     |   |       |   |-- acp-validate.js
-    |   |       |   |-- agent_page_canvas.js
-    |   |       |   |-- agent_page_chat.js</a:t>
+    |   |       |   |-- agent_page_canvas.js</a:t>
             </a:r>
           </a:p>
         </p:txBody>
@@ -14841,7 +14620,7 @@
 </file>
 
 <file path=ppt/slides/slide3.xml><?xml version="1.0" encoding="utf-8"?>
-<p:sld xmlns:a="http://schemas.openxmlformats.org/drawingml/2006/main" xmlns:r="http://schemas.openxmlformats.org/officeDocument/2006/relationships" xmlns:p="http://schemas.openxmlformats.org/presentationml/2006/main">
+<p:sld xmlns:a="http://schemas.openxmlformats.org/drawingml/2006/main" xmlns:p="http://schemas.openxmlformats.org/presentationml/2006/main" xmlns:r="http://schemas.openxmlformats.org/officeDocument/2006/relationships">
   <p:cSld>
     <p:spTree>
       <p:nvGrpSpPr>
@@ -14849,14 +14628,7 @@
         <p:cNvGrpSpPr/>
         <p:nvPr/>
       </p:nvGrpSpPr>
-      <p:grpSpPr>
-        <a:xfrm>
-          <a:off x="0" y="0"/>
-          <a:ext cx="0" cy="0"/>
-          <a:chOff x="0" y="0"/>
-          <a:chExt cx="0" cy="0"/>
-        </a:xfrm>
-      </p:grpSpPr>
+      <p:grpSpPr/>
       <p:sp>
         <p:nvSpPr>
           <p:cNvPr id="2" name="Rectangle 1"/>
@@ -14897,7 +14669,6 @@
           <a:lstStyle/>
           <a:p>
             <a:pPr algn="ctr"/>
-            <a:endParaRPr/>
           </a:p>
         </p:txBody>
       </p:sp>
@@ -14941,7 +14712,6 @@
           <a:lstStyle/>
           <a:p>
             <a:pPr algn="ctr"/>
-            <a:endParaRPr/>
           </a:p>
         </p:txBody>
       </p:sp>
@@ -14985,7 +14755,6 @@
           <a:lstStyle/>
           <a:p>
             <a:pPr algn="ctr"/>
-            <a:endParaRPr/>
           </a:p>
         </p:txBody>
       </p:sp>
@@ -15029,7 +14798,6 @@
           <a:lstStyle/>
           <a:p>
             <a:pPr algn="ctr"/>
-            <a:endParaRPr/>
           </a:p>
         </p:txBody>
       </p:sp>
@@ -15073,7 +14841,6 @@
           <a:lstStyle/>
           <a:p>
             <a:pPr algn="ctr"/>
-            <a:endParaRPr/>
           </a:p>
         </p:txBody>
       </p:sp>
@@ -15189,7 +14956,6 @@
           <a:lstStyle/>
           <a:p>
             <a:pPr algn="ctr"/>
-            <a:endParaRPr/>
           </a:p>
         </p:txBody>
       </p:sp>
@@ -15233,7 +14999,6 @@
           <a:lstStyle/>
           <a:p>
             <a:pPr algn="ctr"/>
-            <a:endParaRPr/>
           </a:p>
         </p:txBody>
       </p:sp>
@@ -15289,7 +15054,7 @@
           <a:noFill/>
         </p:spPr>
         <p:txBody>
-          <a:bodyPr wrap="square" lIns="38100" tIns="25400" rIns="38100" bIns="25400" anchor="t">
+          <a:bodyPr wrap="square" anchor="t" lIns="38100" rIns="38100" tIns="25400" bIns="25400">
             <a:noAutofit/>
           </a:bodyPr>
           <a:lstStyle/>
@@ -15311,6 +15076,9 @@
               </a:rPr>
               <a:t>Answers codebase questions with loaded file or directory context.</a:t>
             </a:r>
+            <a:endParaRPr sz="1500" b="0" i="0">
+              <a:latin typeface="Calibri"/>
+            </a:endParaRPr>
           </a:p>
           <a:p>
             <a:pPr>
@@ -15330,6 +15098,9 @@
               </a:rPr>
               <a:t>Uses hybrid retrieval to extract metadata, split content, rank source chunks, and respect context budgets.</a:t>
             </a:r>
+            <a:endParaRPr sz="1500" b="0" i="0">
+              <a:latin typeface="Calibri"/>
+            </a:endParaRPr>
           </a:p>
           <a:p>
             <a:pPr>
@@ -15349,6 +15120,9 @@
               </a:rPr>
               <a:t>Runs checked Multi-Turn requests through request-scoped planning, capability selection, tool calls, observations, monitoring, and final synthesis.</a:t>
             </a:r>
+            <a:endParaRPr sz="1500" b="0" i="0">
+              <a:latin typeface="Calibri"/>
+            </a:endParaRPr>
           </a:p>
         </p:txBody>
       </p:sp>
@@ -15394,7 +15168,6 @@
           <a:lstStyle/>
           <a:p>
             <a:pPr algn="ctr"/>
-            <a:endParaRPr/>
           </a:p>
         </p:txBody>
       </p:sp>
@@ -15438,7 +15211,6 @@
           <a:lstStyle/>
           <a:p>
             <a:pPr algn="ctr"/>
-            <a:endParaRPr/>
           </a:p>
         </p:txBody>
       </p:sp>
@@ -15494,7 +15266,7 @@
           <a:noFill/>
         </p:spPr>
         <p:txBody>
-          <a:bodyPr wrap="square" lIns="38100" tIns="25400" rIns="38100" bIns="25400" anchor="t">
+          <a:bodyPr wrap="square" anchor="t" lIns="38100" rIns="38100" tIns="25400" bIns="25400">
             <a:noAutofit/>
           </a:bodyPr>
           <a:lstStyle/>
@@ -15516,6 +15288,9 @@
               </a:rPr>
               <a:t>Launches wrapped copies of selected workflow agents in isolated runtime folders without mutating templates.</a:t>
             </a:r>
+            <a:endParaRPr sz="1500" b="0" i="0">
+              <a:latin typeface="Calibri"/>
+            </a:endParaRPr>
           </a:p>
           <a:p>
             <a:pPr>
@@ -15535,6 +15310,9 @@
               </a:rPr>
               <a:t>Lets users design, validate, save, pause, resume, and stop visual workflows through the Agentic Control Panel.</a:t>
             </a:r>
+            <a:endParaRPr sz="1500" b="0" i="0">
+              <a:latin typeface="Calibri"/>
+            </a:endParaRPr>
           </a:p>
         </p:txBody>
       </p:sp>
@@ -15580,7 +15358,6 @@
           <a:lstStyle/>
           <a:p>
             <a:pPr algn="ctr"/>
-            <a:endParaRPr/>
           </a:p>
         </p:txBody>
       </p:sp>
@@ -15624,7 +15401,6 @@
           <a:lstStyle/>
           <a:p>
             <a:pPr algn="ctr"/>
-            <a:endParaRPr/>
           </a:p>
         </p:txBody>
       </p:sp>
@@ -15680,7 +15456,7 @@
           <a:noFill/>
         </p:spPr>
         <p:txBody>
-          <a:bodyPr wrap="square" lIns="38100" tIns="25400" rIns="38100" bIns="25400" anchor="t">
+          <a:bodyPr wrap="square" anchor="t" lIns="38100" rIns="38100" tIns="25400" bIns="25400">
             <a:noAutofit/>
           </a:bodyPr>
           <a:lstStyle/>
@@ -15702,6 +15478,9 @@
               </a:rPr>
               <a:t>Turns successful Multi-Turn tool executions into starter `.flw` workflows that can be inspected and validated in ACP.</a:t>
             </a:r>
+            <a:endParaRPr sz="1500" b="0" i="0">
+              <a:latin typeface="Calibri"/>
+            </a:endParaRPr>
           </a:p>
           <a:p>
             <a:pPr>
@@ -15721,6 +15500,9 @@
               </a:rPr>
               <a:t>Packages the project into a distributable Windows release with installer and uninstaller tooling.</a:t>
             </a:r>
+            <a:endParaRPr sz="1500" b="0" i="0">
+              <a:latin typeface="Calibri"/>
+            </a:endParaRPr>
           </a:p>
         </p:txBody>
       </p:sp>
@@ -15733,7 +15515,7 @@
 </file>
 
 <file path=ppt/slides/slide30.xml><?xml version="1.0" encoding="utf-8"?>
-<p:sld xmlns:a="http://schemas.openxmlformats.org/drawingml/2006/main" xmlns:r="http://schemas.openxmlformats.org/officeDocument/2006/relationships" xmlns:p="http://schemas.openxmlformats.org/presentationml/2006/main">
+<p:sld xmlns:a="http://schemas.openxmlformats.org/drawingml/2006/main" xmlns:p="http://schemas.openxmlformats.org/presentationml/2006/main" xmlns:r="http://schemas.openxmlformats.org/officeDocument/2006/relationships">
   <p:cSld>
     <p:spTree>
       <p:nvGrpSpPr>
@@ -15741,14 +15523,7 @@
         <p:cNvGrpSpPr/>
         <p:nvPr/>
       </p:nvGrpSpPr>
-      <p:grpSpPr>
-        <a:xfrm>
-          <a:off x="0" y="0"/>
-          <a:ext cx="0" cy="0"/>
-          <a:chOff x="0" y="0"/>
-          <a:chExt cx="0" cy="0"/>
-        </a:xfrm>
-      </p:grpSpPr>
+      <p:grpSpPr/>
       <p:sp>
         <p:nvSpPr>
           <p:cNvPr id="2" name="Rectangle 1"/>
@@ -15789,7 +15564,6 @@
           <a:lstStyle/>
           <a:p>
             <a:pPr algn="ctr"/>
-            <a:endParaRPr/>
           </a:p>
         </p:txBody>
       </p:sp>
@@ -15833,7 +15607,6 @@
           <a:lstStyle/>
           <a:p>
             <a:pPr algn="ctr"/>
-            <a:endParaRPr/>
           </a:p>
         </p:txBody>
       </p:sp>
@@ -15877,7 +15650,6 @@
           <a:lstStyle/>
           <a:p>
             <a:pPr algn="ctr"/>
-            <a:endParaRPr/>
           </a:p>
         </p:txBody>
       </p:sp>
@@ -15921,7 +15693,6 @@
           <a:lstStyle/>
           <a:p>
             <a:pPr algn="ctr"/>
-            <a:endParaRPr/>
           </a:p>
         </p:txBody>
       </p:sp>
@@ -15965,7 +15736,6 @@
           <a:lstStyle/>
           <a:p>
             <a:pPr algn="ctr"/>
-            <a:endParaRPr/>
           </a:p>
         </p:txBody>
       </p:sp>
@@ -16069,7 +15839,8 @@
                 </a:solidFill>
                 <a:latin typeface="Cascadia Mono"/>
               </a:rPr>
-              <a:t>    |   |       |   |-- agent_page_context.js
+              <a:t>    |   |       |   |-- agent_page_chat.js
+    |   |       |   |-- agent_page_context.js
     |   |       |   |-- agent_page_dialogs.js
     |   |       |   |-- agent_page_init.js
     |   |       |   |-- agent_page_layout.js
@@ -16098,8 +15869,7 @@
     |   |-- jd-cli.bat
     |   `-- jd-cli.jar
     `-- tlamatini/
-        |-- __init__.py
-        |-- asgi.py</a:t>
+        |-- __init__.py</a:t>
             </a:r>
           </a:p>
         </p:txBody>
@@ -16113,7 +15883,7 @@
 </file>
 
 <file path=ppt/slides/slide31.xml><?xml version="1.0" encoding="utf-8"?>
-<p:sld xmlns:a="http://schemas.openxmlformats.org/drawingml/2006/main" xmlns:r="http://schemas.openxmlformats.org/officeDocument/2006/relationships" xmlns:p="http://schemas.openxmlformats.org/presentationml/2006/main">
+<p:sld xmlns:a="http://schemas.openxmlformats.org/drawingml/2006/main" xmlns:p="http://schemas.openxmlformats.org/presentationml/2006/main" xmlns:r="http://schemas.openxmlformats.org/officeDocument/2006/relationships">
   <p:cSld>
     <p:spTree>
       <p:nvGrpSpPr>
@@ -16121,14 +15891,7 @@
         <p:cNvGrpSpPr/>
         <p:nvPr/>
       </p:nvGrpSpPr>
-      <p:grpSpPr>
-        <a:xfrm>
-          <a:off x="0" y="0"/>
-          <a:ext cx="0" cy="0"/>
-          <a:chOff x="0" y="0"/>
-          <a:chExt cx="0" cy="0"/>
-        </a:xfrm>
-      </p:grpSpPr>
+      <p:grpSpPr/>
       <p:sp>
         <p:nvSpPr>
           <p:cNvPr id="2" name="Rectangle 1"/>
@@ -16169,7 +15932,6 @@
           <a:lstStyle/>
           <a:p>
             <a:pPr algn="ctr"/>
-            <a:endParaRPr/>
           </a:p>
         </p:txBody>
       </p:sp>
@@ -16213,7 +15975,6 @@
           <a:lstStyle/>
           <a:p>
             <a:pPr algn="ctr"/>
-            <a:endParaRPr/>
           </a:p>
         </p:txBody>
       </p:sp>
@@ -16257,7 +16018,6 @@
           <a:lstStyle/>
           <a:p>
             <a:pPr algn="ctr"/>
-            <a:endParaRPr/>
           </a:p>
         </p:txBody>
       </p:sp>
@@ -16301,7 +16061,6 @@
           <a:lstStyle/>
           <a:p>
             <a:pPr algn="ctr"/>
-            <a:endParaRPr/>
           </a:p>
         </p:txBody>
       </p:sp>
@@ -16345,7 +16104,6 @@
           <a:lstStyle/>
           <a:p>
             <a:pPr algn="ctr"/>
-            <a:endParaRPr/>
           </a:p>
         </p:txBody>
       </p:sp>
@@ -16449,7 +16207,8 @@
                 </a:solidFill>
                 <a:latin typeface="Cascadia Mono"/>
               </a:rPr>
-              <a:t>        |-- context_processors.py
+              <a:t>        |-- asgi.py
+        |-- context_processors.py
         |-- middleware.py
         |-- settings.py
         |-- urls.py
@@ -16467,7 +16226,7 @@
 </file>
 
 <file path=ppt/slides/slide32.xml><?xml version="1.0" encoding="utf-8"?>
-<p:sld xmlns:a="http://schemas.openxmlformats.org/drawingml/2006/main" xmlns:r="http://schemas.openxmlformats.org/officeDocument/2006/relationships" xmlns:p="http://schemas.openxmlformats.org/presentationml/2006/main">
+<p:sld xmlns:a="http://schemas.openxmlformats.org/drawingml/2006/main" xmlns:p="http://schemas.openxmlformats.org/presentationml/2006/main" xmlns:r="http://schemas.openxmlformats.org/officeDocument/2006/relationships">
   <p:cSld>
     <p:spTree>
       <p:nvGrpSpPr>
@@ -16475,14 +16234,7 @@
         <p:cNvGrpSpPr/>
         <p:nvPr/>
       </p:nvGrpSpPr>
-      <p:grpSpPr>
-        <a:xfrm>
-          <a:off x="0" y="0"/>
-          <a:ext cx="0" cy="0"/>
-          <a:chOff x="0" y="0"/>
-          <a:chExt cx="0" cy="0"/>
-        </a:xfrm>
-      </p:grpSpPr>
+      <p:grpSpPr/>
       <p:sp>
         <p:nvSpPr>
           <p:cNvPr id="2" name="Rectangle 1"/>
@@ -16523,7 +16275,6 @@
           <a:lstStyle/>
           <a:p>
             <a:pPr algn="ctr"/>
-            <a:endParaRPr/>
           </a:p>
         </p:txBody>
       </p:sp>
@@ -16567,7 +16318,6 @@
           <a:lstStyle/>
           <a:p>
             <a:pPr algn="ctr"/>
-            <a:endParaRPr/>
           </a:p>
         </p:txBody>
       </p:sp>
@@ -16611,7 +16361,6 @@
           <a:lstStyle/>
           <a:p>
             <a:pPr algn="ctr"/>
-            <a:endParaRPr/>
           </a:p>
         </p:txBody>
       </p:sp>
@@ -16655,7 +16404,6 @@
           <a:lstStyle/>
           <a:p>
             <a:pPr algn="ctr"/>
-            <a:endParaRPr/>
           </a:p>
         </p:txBody>
       </p:sp>
@@ -16699,7 +16447,6 @@
           <a:lstStyle/>
           <a:p>
             <a:pPr algn="ctr"/>
-            <a:endParaRPr/>
           </a:p>
         </p:txBody>
       </p:sp>
@@ -16815,7 +16562,6 @@
           <a:lstStyle/>
           <a:p>
             <a:pPr algn="ctr"/>
-            <a:endParaRPr/>
           </a:p>
         </p:txBody>
       </p:sp>
@@ -16859,7 +16605,6 @@
           <a:lstStyle/>
           <a:p>
             <a:pPr algn="ctr"/>
-            <a:endParaRPr/>
           </a:p>
         </p:txBody>
       </p:sp>
@@ -16915,7 +16660,7 @@
           <a:noFill/>
         </p:spPr>
         <p:txBody>
-          <a:bodyPr wrap="square" lIns="38100" tIns="25400" rIns="38100" bIns="25400" anchor="t">
+          <a:bodyPr wrap="square" anchor="t" lIns="38100" rIns="38100" tIns="25400" bIns="25400">
             <a:noAutofit/>
           </a:bodyPr>
           <a:lstStyle/>
@@ -16937,6 +16682,9 @@
               </a:rPr>
               <a:t>Regenerate the PDF and deck whenever README, architecture, agent catalog, line inventory, or packaging behavior changes.</a:t>
             </a:r>
+            <a:endParaRPr sz="1700" b="0" i="0">
+              <a:latin typeface="Calibri"/>
+            </a:endParaRPr>
           </a:p>
           <a:p>
             <a:pPr>
@@ -16956,6 +16704,9 @@
               </a:rPr>
               <a:t>Keep the PDF exhaustive and evidence-heavy; keep the PPT visual, split dense appendices, and audit geometry before delivery.</a:t>
             </a:r>
+            <a:endParaRPr sz="1700" b="0" i="0">
+              <a:latin typeface="Calibri"/>
+            </a:endParaRPr>
           </a:p>
           <a:p>
             <a:pPr>
@@ -16975,6 +16726,9 @@
               </a:rPr>
               <a:t>Use the new Skills in `.codex/skills/` so future refreshes follow the same no-overlap and full-dossier rules.</a:t>
             </a:r>
+            <a:endParaRPr sz="1700" b="0" i="0">
+              <a:latin typeface="Calibri"/>
+            </a:endParaRPr>
           </a:p>
         </p:txBody>
       </p:sp>
@@ -16987,7 +16741,7 @@
 </file>
 
 <file path=ppt/slides/slide4.xml><?xml version="1.0" encoding="utf-8"?>
-<p:sld xmlns:a="http://schemas.openxmlformats.org/drawingml/2006/main" xmlns:r="http://schemas.openxmlformats.org/officeDocument/2006/relationships" xmlns:p="http://schemas.openxmlformats.org/presentationml/2006/main">
+<p:sld xmlns:a="http://schemas.openxmlformats.org/drawingml/2006/main" xmlns:p="http://schemas.openxmlformats.org/presentationml/2006/main" xmlns:r="http://schemas.openxmlformats.org/officeDocument/2006/relationships">
   <p:cSld>
     <p:spTree>
       <p:nvGrpSpPr>
@@ -16995,14 +16749,7 @@
         <p:cNvGrpSpPr/>
         <p:nvPr/>
       </p:nvGrpSpPr>
-      <p:grpSpPr>
-        <a:xfrm>
-          <a:off x="0" y="0"/>
-          <a:ext cx="0" cy="0"/>
-          <a:chOff x="0" y="0"/>
-          <a:chExt cx="0" cy="0"/>
-        </a:xfrm>
-      </p:grpSpPr>
+      <p:grpSpPr/>
       <p:sp>
         <p:nvSpPr>
           <p:cNvPr id="2" name="Rectangle 1"/>
@@ -17043,7 +16790,6 @@
           <a:lstStyle/>
           <a:p>
             <a:pPr algn="ctr"/>
-            <a:endParaRPr/>
           </a:p>
         </p:txBody>
       </p:sp>
@@ -17087,7 +16833,6 @@
           <a:lstStyle/>
           <a:p>
             <a:pPr algn="ctr"/>
-            <a:endParaRPr/>
           </a:p>
         </p:txBody>
       </p:sp>
@@ -17131,7 +16876,6 @@
           <a:lstStyle/>
           <a:p>
             <a:pPr algn="ctr"/>
-            <a:endParaRPr/>
           </a:p>
         </p:txBody>
       </p:sp>
@@ -17175,7 +16919,6 @@
           <a:lstStyle/>
           <a:p>
             <a:pPr algn="ctr"/>
-            <a:endParaRPr/>
           </a:p>
         </p:txBody>
       </p:sp>
@@ -17219,7 +16962,6 @@
           <a:lstStyle/>
           <a:p>
             <a:pPr algn="ctr"/>
-            <a:endParaRPr/>
           </a:p>
         </p:txBody>
       </p:sp>
@@ -17335,7 +17077,6 @@
           <a:lstStyle/>
           <a:p>
             <a:pPr algn="ctr"/>
-            <a:endParaRPr/>
           </a:p>
         </p:txBody>
       </p:sp>
@@ -17451,7 +17192,6 @@
           <a:lstStyle/>
           <a:p>
             <a:pPr algn="ctr"/>
-            <a:endParaRPr/>
           </a:p>
         </p:txBody>
       </p:sp>
@@ -17567,7 +17307,6 @@
           <a:lstStyle/>
           <a:p>
             <a:pPr algn="ctr"/>
-            <a:endParaRPr/>
           </a:p>
         </p:txBody>
       </p:sp>
@@ -17683,7 +17422,6 @@
           <a:lstStyle/>
           <a:p>
             <a:pPr algn="ctr"/>
-            <a:endParaRPr/>
           </a:p>
         </p:txBody>
       </p:sp>
@@ -17799,7 +17537,6 @@
           <a:lstStyle/>
           <a:p>
             <a:pPr algn="ctr"/>
-            <a:endParaRPr/>
           </a:p>
         </p:txBody>
       </p:sp>
@@ -17915,7 +17652,6 @@
           <a:lstStyle/>
           <a:p>
             <a:pPr algn="ctr"/>
-            <a:endParaRPr/>
           </a:p>
         </p:txBody>
       </p:sp>
@@ -17962,8 +17698,8 @@
         </p:nvSpPr>
         <p:spPr>
           <a:xfrm>
-            <a:off x="713232" y="2991026"/>
-            <a:ext cx="5349240" cy="3053157"/>
+            <a:off x="713232" y="2971800"/>
+            <a:ext cx="5349240" cy="2788920"/>
           </a:xfrm>
           <a:prstGeom prst="roundRect">
             <a:avLst/>
@@ -17996,7 +17732,6 @@
           <a:lstStyle/>
           <a:p>
             <a:pPr algn="ctr"/>
-            <a:endParaRPr/>
           </a:p>
         </p:txBody>
       </p:sp>
@@ -18040,7 +17775,6 @@
           <a:lstStyle/>
           <a:p>
             <a:pPr algn="ctr"/>
-            <a:endParaRPr/>
           </a:p>
         </p:txBody>
       </p:sp>
@@ -18087,7 +17821,7 @@
         </p:nvSpPr>
         <p:spPr>
           <a:xfrm>
-            <a:off x="914400" y="3685032"/>
+            <a:off x="914400" y="3630168"/>
             <a:ext cx="4946903" cy="1984248"/>
           </a:xfrm>
           <a:prstGeom prst="rect">
@@ -18096,7 +17830,7 @@
           <a:noFill/>
         </p:spPr>
         <p:txBody>
-          <a:bodyPr wrap="square" lIns="38100" tIns="25400" rIns="38100" bIns="25400" anchor="t">
+          <a:bodyPr wrap="square" anchor="t" lIns="38100" rIns="38100" tIns="25400" bIns="25400">
             <a:noAutofit/>
           </a:bodyPr>
           <a:lstStyle/>
@@ -18118,6 +17852,9 @@
               </a:rPr>
               <a:t>Browser UI sends chat and workflow requests through Django views and Channels WebSockets.</a:t>
             </a:r>
+            <a:endParaRPr sz="1500" b="0" i="0">
+              <a:latin typeface="Calibri"/>
+            </a:endParaRPr>
           </a:p>
           <a:p>
             <a:pPr>
@@ -18137,6 +17874,9 @@
               </a:rPr>
               <a:t>RAG chains load selected file/directory context, retrieve relevant chunks, and build answer prompts.</a:t>
             </a:r>
+            <a:endParaRPr sz="1500" b="0" i="0">
+              <a:latin typeface="Calibri"/>
+            </a:endParaRPr>
           </a:p>
           <a:p>
             <a:pPr>
@@ -18156,6 +17896,9 @@
               </a:rPr>
               <a:t>When Multi-Turn is enabled, the global planner selects context and tool stages before the executor binds only the relevant tools.</a:t>
             </a:r>
+            <a:endParaRPr sz="1500" b="0" i="0">
+              <a:latin typeface="Calibri"/>
+            </a:endParaRPr>
           </a:p>
         </p:txBody>
       </p:sp>
@@ -18168,7 +17911,7 @@
         <p:spPr>
           <a:xfrm>
             <a:off x="6327648" y="2971800"/>
-            <a:ext cx="5074920" cy="3072384"/>
+            <a:ext cx="5074920" cy="2788920"/>
           </a:xfrm>
           <a:prstGeom prst="roundRect">
             <a:avLst/>
@@ -18201,7 +17944,6 @@
           <a:lstStyle/>
           <a:p>
             <a:pPr algn="ctr"/>
-            <a:endParaRPr/>
           </a:p>
         </p:txBody>
       </p:sp>
@@ -18245,7 +17987,6 @@
           <a:lstStyle/>
           <a:p>
             <a:pPr algn="ctr"/>
-            <a:endParaRPr/>
           </a:p>
         </p:txBody>
       </p:sp>
@@ -18301,7 +18042,7 @@
           <a:noFill/>
         </p:spPr>
         <p:txBody>
-          <a:bodyPr wrap="square" lIns="38100" tIns="25400" rIns="38100" bIns="25400" anchor="t">
+          <a:bodyPr wrap="square" anchor="t" lIns="38100" rIns="38100" tIns="25400" bIns="25400">
             <a:noAutofit/>
           </a:bodyPr>
           <a:lstStyle/>
@@ -18318,23 +18059,14 @@
               </a:defRPr>
             </a:pPr>
             <a:r>
-              <a:rPr sz="1500" b="0" i="0" dirty="0">
+              <a:rPr sz="1500" b="0" i="0">
                 <a:latin typeface="Calibri"/>
               </a:rPr>
-              <a:t>Tool calls execute in the backend, append observations, and may create wrapped runtime copies under `agent/agents/pools/_</a:t>
-            </a:r>
-            <a:r>
-              <a:rPr sz="1500" b="0" i="0" dirty="0" err="1">
-                <a:latin typeface="Calibri"/>
-              </a:rPr>
-              <a:t>chat_runs</a:t>
-            </a:r>
-            <a:r>
-              <a:rPr sz="1500" b="0" i="0" dirty="0">
-                <a:latin typeface="Calibri"/>
-              </a:rPr>
-              <a:t>_/`.</a:t>
-            </a:r>
+              <a:t>Tool calls execute in the backend, append observations, and may create wrapped runtime copies under `agent/agents/pools/_chat_runs_/`.</a:t>
+            </a:r>
+            <a:endParaRPr sz="1500" b="0" i="0">
+              <a:latin typeface="Calibri"/>
+            </a:endParaRPr>
           </a:p>
           <a:p>
             <a:pPr>
@@ -18349,23 +18081,14 @@
               </a:defRPr>
             </a:pPr>
             <a:r>
-              <a:rPr sz="1500" b="0" i="0" dirty="0">
+              <a:rPr sz="1500" b="0" i="0">
                 <a:latin typeface="Calibri"/>
               </a:rPr>
-              <a:t>ACP flows deploy session-scoped pool instances, wire config values, validate </a:t>
-            </a:r>
-            <a:r>
-              <a:rPr sz="1500" b="0" i="0" dirty="0" err="1">
-                <a:latin typeface="Calibri"/>
-              </a:rPr>
-              <a:t>NxN</a:t>
-            </a:r>
-            <a:r>
-              <a:rPr sz="1500" b="0" i="0" dirty="0">
-                <a:latin typeface="Calibri"/>
-              </a:rPr>
-              <a:t> graph rules, and execute through Starter-driven flow semantics.</a:t>
-            </a:r>
+              <a:t>ACP flows deploy session-scoped pool instances, wire config values, validate NxN graph rules, and execute through Starter-driven flow semantics.</a:t>
+            </a:r>
+            <a:endParaRPr sz="1500" b="0" i="0">
+              <a:latin typeface="Calibri"/>
+            </a:endParaRPr>
           </a:p>
           <a:p>
             <a:pPr>
@@ -18380,35 +18103,14 @@
               </a:defRPr>
             </a:pPr>
             <a:r>
-              <a:rPr sz="1500" b="0" i="0" dirty="0">
+              <a:rPr sz="1500" b="0" i="0">
                 <a:latin typeface="Calibri"/>
               </a:rPr>
-              <a:t>Build scripts collect static assets, bundle Django/Python resources, add agent templates, and assemble `pkg.zip`, `Uninstaller.exe`, and `</a:t>
-            </a:r>
-            <a:r>
-              <a:rPr sz="1500" b="0" i="0" dirty="0" err="1">
-                <a:latin typeface="Calibri"/>
-              </a:rPr>
-              <a:t>dist</a:t>
-            </a:r>
-            <a:r>
-              <a:rPr sz="1500" b="0" i="0" dirty="0">
-                <a:latin typeface="Calibri"/>
-              </a:rPr>
-              <a:t>/</a:t>
-            </a:r>
-            <a:r>
-              <a:rPr sz="1500" b="0" i="0" dirty="0" err="1">
-                <a:latin typeface="Calibri"/>
-              </a:rPr>
-              <a:t>Tlamatini_Release</a:t>
-            </a:r>
-            <a:r>
-              <a:rPr sz="1500" b="0" i="0" dirty="0">
-                <a:latin typeface="Calibri"/>
-              </a:rPr>
-              <a:t>/`.</a:t>
-            </a:r>
+              <a:t>Build scripts collect static assets, bundle Django/Python resources, add agent templates, and assemble `pkg.zip`, `Uninstaller.exe`, and `dist/Tlamatini_Release/`.</a:t>
+            </a:r>
+            <a:endParaRPr sz="1500" b="0" i="0">
+              <a:latin typeface="Calibri"/>
+            </a:endParaRPr>
           </a:p>
         </p:txBody>
       </p:sp>
@@ -18421,7 +18123,7 @@
 </file>
 
 <file path=ppt/slides/slide5.xml><?xml version="1.0" encoding="utf-8"?>
-<p:sld xmlns:a="http://schemas.openxmlformats.org/drawingml/2006/main" xmlns:r="http://schemas.openxmlformats.org/officeDocument/2006/relationships" xmlns:p="http://schemas.openxmlformats.org/presentationml/2006/main">
+<p:sld xmlns:a="http://schemas.openxmlformats.org/drawingml/2006/main" xmlns:p="http://schemas.openxmlformats.org/presentationml/2006/main" xmlns:r="http://schemas.openxmlformats.org/officeDocument/2006/relationships">
   <p:cSld>
     <p:spTree>
       <p:nvGrpSpPr>
@@ -18429,14 +18131,7 @@
         <p:cNvGrpSpPr/>
         <p:nvPr/>
       </p:nvGrpSpPr>
-      <p:grpSpPr>
-        <a:xfrm>
-          <a:off x="0" y="0"/>
-          <a:ext cx="0" cy="0"/>
-          <a:chOff x="0" y="0"/>
-          <a:chExt cx="0" cy="0"/>
-        </a:xfrm>
-      </p:grpSpPr>
+      <p:grpSpPr/>
       <p:sp>
         <p:nvSpPr>
           <p:cNvPr id="2" name="Rectangle 1"/>
@@ -18477,7 +18172,6 @@
           <a:lstStyle/>
           <a:p>
             <a:pPr algn="ctr"/>
-            <a:endParaRPr/>
           </a:p>
         </p:txBody>
       </p:sp>
@@ -18521,7 +18215,6 @@
           <a:lstStyle/>
           <a:p>
             <a:pPr algn="ctr"/>
-            <a:endParaRPr/>
           </a:p>
         </p:txBody>
       </p:sp>
@@ -18565,7 +18258,6 @@
           <a:lstStyle/>
           <a:p>
             <a:pPr algn="ctr"/>
-            <a:endParaRPr/>
           </a:p>
         </p:txBody>
       </p:sp>
@@ -18609,7 +18301,6 @@
           <a:lstStyle/>
           <a:p>
             <a:pPr algn="ctr"/>
-            <a:endParaRPr/>
           </a:p>
         </p:txBody>
       </p:sp>
@@ -18653,7 +18344,6 @@
           <a:lstStyle/>
           <a:p>
             <a:pPr algn="ctr"/>
-            <a:endParaRPr/>
           </a:p>
         </p:txBody>
       </p:sp>
@@ -18769,7 +18459,6 @@
           <a:lstStyle/>
           <a:p>
             <a:pPr algn="ctr"/>
-            <a:endParaRPr/>
           </a:p>
         </p:txBody>
       </p:sp>
@@ -18813,7 +18502,6 @@
           <a:lstStyle/>
           <a:p>
             <a:pPr algn="ctr"/>
-            <a:endParaRPr/>
           </a:p>
         </p:txBody>
       </p:sp>
@@ -18869,7 +18557,7 @@
           <a:noFill/>
         </p:spPr>
         <p:txBody>
-          <a:bodyPr wrap="square" lIns="38100" tIns="25400" rIns="38100" bIns="25400" anchor="t">
+          <a:bodyPr wrap="square" anchor="t" lIns="38100" rIns="38100" tIns="25400" bIns="25400">
             <a:noAutofit/>
           </a:bodyPr>
           <a:lstStyle/>
@@ -18891,6 +18579,9 @@
               </a:rPr>
               <a:t>Load selected file or directory context from the chat interface.</a:t>
             </a:r>
+            <a:endParaRPr sz="1500" b="0" i="0">
+              <a:latin typeface="Calibri"/>
+            </a:endParaRPr>
           </a:p>
           <a:p>
             <a:pPr>
@@ -18910,6 +18601,9 @@
               </a:rPr>
               <a:t>Extract metadata, split text, rank chunks with hybrid retrieval, and respect context budgets.</a:t>
             </a:r>
+            <a:endParaRPr sz="1500" b="0" i="0">
+              <a:latin typeface="Calibri"/>
+            </a:endParaRPr>
           </a:p>
           <a:p>
             <a:pPr>
@@ -18929,6 +18623,9 @@
               </a:rPr>
               <a:t>Fallback to explicit loaded files when retrieval cannot provide enough memory.</a:t>
             </a:r>
+            <a:endParaRPr sz="1500" b="0" i="0">
+              <a:latin typeface="Calibri"/>
+            </a:endParaRPr>
           </a:p>
           <a:p>
             <a:pPr>
@@ -18948,6 +18645,9 @@
               </a:rPr>
               <a:t>Preserve the difference between direct one-shot chat and checked Multi-Turn orchestration.</a:t>
             </a:r>
+            <a:endParaRPr sz="1500" b="0" i="0">
+              <a:latin typeface="Calibri"/>
+            </a:endParaRPr>
           </a:p>
         </p:txBody>
       </p:sp>
@@ -18993,7 +18693,6 @@
           <a:lstStyle/>
           <a:p>
             <a:pPr algn="ctr"/>
-            <a:endParaRPr/>
           </a:p>
         </p:txBody>
       </p:sp>
@@ -19037,7 +18736,6 @@
           <a:lstStyle/>
           <a:p>
             <a:pPr algn="ctr"/>
-            <a:endParaRPr/>
           </a:p>
         </p:txBody>
       </p:sp>
@@ -19093,7 +18791,7 @@
           <a:noFill/>
         </p:spPr>
         <p:txBody>
-          <a:bodyPr wrap="square" lIns="38100" tIns="25400" rIns="38100" bIns="25400" anchor="t">
+          <a:bodyPr wrap="square" anchor="t" lIns="38100" rIns="38100" tIns="25400" bIns="25400">
             <a:noAutofit/>
           </a:bodyPr>
           <a:lstStyle/>
@@ -19115,6 +18813,9 @@
               </a:rPr>
               <a:t>The assistant answers from project evidence instead of generic memory.</a:t>
             </a:r>
+            <a:endParaRPr sz="1600" b="0" i="0">
+              <a:latin typeface="Calibri"/>
+            </a:endParaRPr>
           </a:p>
           <a:p>
             <a:pPr>
@@ -19134,6 +18835,9 @@
               </a:rPr>
               <a:t>Large codebases remain navigable without injecting the whole repository into every prompt.</a:t>
             </a:r>
+            <a:endParaRPr sz="1600" b="0" i="0">
+              <a:latin typeface="Calibri"/>
+            </a:endParaRPr>
           </a:p>
           <a:p>
             <a:pPr>
@@ -19153,6 +18857,9 @@
               </a:rPr>
               <a:t>Multi-Turn can prefetch only the contexts required by the current execution plan.</a:t>
             </a:r>
+            <a:endParaRPr sz="1600" b="0" i="0">
+              <a:latin typeface="Calibri"/>
+            </a:endParaRPr>
           </a:p>
         </p:txBody>
       </p:sp>
@@ -19165,7 +18872,7 @@
 </file>
 
 <file path=ppt/slides/slide6.xml><?xml version="1.0" encoding="utf-8"?>
-<p:sld xmlns:a="http://schemas.openxmlformats.org/drawingml/2006/main" xmlns:r="http://schemas.openxmlformats.org/officeDocument/2006/relationships" xmlns:p="http://schemas.openxmlformats.org/presentationml/2006/main">
+<p:sld xmlns:a="http://schemas.openxmlformats.org/drawingml/2006/main" xmlns:p="http://schemas.openxmlformats.org/presentationml/2006/main" xmlns:r="http://schemas.openxmlformats.org/officeDocument/2006/relationships">
   <p:cSld>
     <p:spTree>
       <p:nvGrpSpPr>
@@ -19173,14 +18880,7 @@
         <p:cNvGrpSpPr/>
         <p:nvPr/>
       </p:nvGrpSpPr>
-      <p:grpSpPr>
-        <a:xfrm>
-          <a:off x="0" y="0"/>
-          <a:ext cx="0" cy="0"/>
-          <a:chOff x="0" y="0"/>
-          <a:chExt cx="0" cy="0"/>
-        </a:xfrm>
-      </p:grpSpPr>
+      <p:grpSpPr/>
       <p:sp>
         <p:nvSpPr>
           <p:cNvPr id="2" name="Rectangle 1"/>
@@ -19221,7 +18921,6 @@
           <a:lstStyle/>
           <a:p>
             <a:pPr algn="ctr"/>
-            <a:endParaRPr/>
           </a:p>
         </p:txBody>
       </p:sp>
@@ -19265,7 +18964,6 @@
           <a:lstStyle/>
           <a:p>
             <a:pPr algn="ctr"/>
-            <a:endParaRPr/>
           </a:p>
         </p:txBody>
       </p:sp>
@@ -19309,7 +19007,6 @@
           <a:lstStyle/>
           <a:p>
             <a:pPr algn="ctr"/>
-            <a:endParaRPr/>
           </a:p>
         </p:txBody>
       </p:sp>
@@ -19353,7 +19050,6 @@
           <a:lstStyle/>
           <a:p>
             <a:pPr algn="ctr"/>
-            <a:endParaRPr/>
           </a:p>
         </p:txBody>
       </p:sp>
@@ -19397,7 +19093,6 @@
           <a:lstStyle/>
           <a:p>
             <a:pPr algn="ctr"/>
-            <a:endParaRPr/>
           </a:p>
         </p:txBody>
       </p:sp>
@@ -19513,7 +19208,6 @@
           <a:lstStyle/>
           <a:p>
             <a:pPr algn="ctr"/>
-            <a:endParaRPr/>
           </a:p>
         </p:txBody>
       </p:sp>
@@ -19557,7 +19251,6 @@
           <a:lstStyle/>
           <a:p>
             <a:pPr algn="ctr"/>
-            <a:endParaRPr/>
           </a:p>
         </p:txBody>
       </p:sp>
@@ -19613,7 +19306,7 @@
           <a:noFill/>
         </p:spPr>
         <p:txBody>
-          <a:bodyPr wrap="square" lIns="38100" tIns="25400" rIns="38100" bIns="25400" anchor="t">
+          <a:bodyPr wrap="square" anchor="t" lIns="38100" rIns="38100" tIns="25400" bIns="25400">
             <a:noAutofit/>
           </a:bodyPr>
           <a:lstStyle/>
@@ -19635,6 +19328,9 @@
               </a:rPr>
               <a:t>Capability registry scores context providers, tools, and wrapped agents for the current request.</a:t>
             </a:r>
+            <a:endParaRPr sz="1500" b="0" i="0">
+              <a:latin typeface="Calibri"/>
+            </a:endParaRPr>
           </a:p>
           <a:p>
             <a:pPr>
@@ -19654,6 +19350,9 @@
               </a:rPr>
               <a:t>Global planner builds prefetch, execute, monitor, and answer stages.</a:t>
             </a:r>
+            <a:endParaRPr sz="1500" b="0" i="0">
+              <a:latin typeface="Calibri"/>
+            </a:endParaRPr>
           </a:p>
           <a:p>
             <a:pPr>
@@ -19673,6 +19372,9 @@
               </a:rPr>
               <a:t>Explicit tool loop runs tool calls, appends observations, and asks again until final answer or limit.</a:t>
             </a:r>
+            <a:endParaRPr sz="1500" b="0" i="0">
+              <a:latin typeface="Calibri"/>
+            </a:endParaRPr>
           </a:p>
           <a:p>
             <a:pPr>
@@ -19692,6 +19394,9 @@
               </a:rPr>
               <a:t>Answer Analizer classifies success so the UI can expose Create Flow only when useful.</a:t>
             </a:r>
+            <a:endParaRPr sz="1500" b="0" i="0">
+              <a:latin typeface="Calibri"/>
+            </a:endParaRPr>
           </a:p>
         </p:txBody>
       </p:sp>
@@ -19737,7 +19442,6 @@
           <a:lstStyle/>
           <a:p>
             <a:pPr algn="ctr"/>
-            <a:endParaRPr/>
           </a:p>
         </p:txBody>
       </p:sp>
@@ -19781,7 +19485,6 @@
           <a:lstStyle/>
           <a:p>
             <a:pPr algn="ctr"/>
-            <a:endParaRPr/>
           </a:p>
         </p:txBody>
       </p:sp>
@@ -19837,7 +19540,7 @@
           <a:noFill/>
         </p:spPr>
         <p:txBody>
-          <a:bodyPr wrap="square" lIns="38100" tIns="25400" rIns="38100" bIns="25400" anchor="t">
+          <a:bodyPr wrap="square" anchor="t" lIns="38100" rIns="38100" tIns="25400" bIns="25400">
             <a:noAutofit/>
           </a:bodyPr>
           <a:lstStyle/>
@@ -19859,6 +19562,9 @@
               </a:rPr>
               <a:t>Keeps the original prompt validation and legacy prefetch behavior.</a:t>
             </a:r>
+            <a:endParaRPr sz="1600" b="0" i="0">
+              <a:latin typeface="Calibri"/>
+            </a:endParaRPr>
           </a:p>
           <a:p>
             <a:pPr>
@@ -19878,6 +19584,9 @@
               </a:rPr>
               <a:t>Maintains compatibility for fast Q&amp;A and simple context-grounded answers.</a:t>
             </a:r>
+            <a:endParaRPr sz="1600" b="0" i="0">
+              <a:latin typeface="Calibri"/>
+            </a:endParaRPr>
           </a:p>
           <a:p>
             <a:pPr>
@@ -19897,6 +19606,9 @@
               </a:rPr>
               <a:t>Avoids forcing every chat request into agentic execution.</a:t>
             </a:r>
+            <a:endParaRPr sz="1600" b="0" i="0">
+              <a:latin typeface="Calibri"/>
+            </a:endParaRPr>
           </a:p>
         </p:txBody>
       </p:sp>
@@ -19909,7 +19621,7 @@
 </file>
 
 <file path=ppt/slides/slide7.xml><?xml version="1.0" encoding="utf-8"?>
-<p:sld xmlns:a="http://schemas.openxmlformats.org/drawingml/2006/main" xmlns:r="http://schemas.openxmlformats.org/officeDocument/2006/relationships" xmlns:p="http://schemas.openxmlformats.org/presentationml/2006/main">
+<p:sld xmlns:a="http://schemas.openxmlformats.org/drawingml/2006/main" xmlns:p="http://schemas.openxmlformats.org/presentationml/2006/main" xmlns:r="http://schemas.openxmlformats.org/officeDocument/2006/relationships">
   <p:cSld>
     <p:spTree>
       <p:nvGrpSpPr>
@@ -19917,14 +19629,7 @@
         <p:cNvGrpSpPr/>
         <p:nvPr/>
       </p:nvGrpSpPr>
-      <p:grpSpPr>
-        <a:xfrm>
-          <a:off x="0" y="0"/>
-          <a:ext cx="0" cy="0"/>
-          <a:chOff x="0" y="0"/>
-          <a:chExt cx="0" cy="0"/>
-        </a:xfrm>
-      </p:grpSpPr>
+      <p:grpSpPr/>
       <p:sp>
         <p:nvSpPr>
           <p:cNvPr id="2" name="Rectangle 1"/>
@@ -19965,7 +19670,6 @@
           <a:lstStyle/>
           <a:p>
             <a:pPr algn="ctr"/>
-            <a:endParaRPr/>
           </a:p>
         </p:txBody>
       </p:sp>
@@ -20009,7 +19713,6 @@
           <a:lstStyle/>
           <a:p>
             <a:pPr algn="ctr"/>
-            <a:endParaRPr/>
           </a:p>
         </p:txBody>
       </p:sp>
@@ -20053,7 +19756,6 @@
           <a:lstStyle/>
           <a:p>
             <a:pPr algn="ctr"/>
-            <a:endParaRPr/>
           </a:p>
         </p:txBody>
       </p:sp>
@@ -20097,7 +19799,6 @@
           <a:lstStyle/>
           <a:p>
             <a:pPr algn="ctr"/>
-            <a:endParaRPr/>
           </a:p>
         </p:txBody>
       </p:sp>
@@ -20141,7 +19842,6 @@
           <a:lstStyle/>
           <a:p>
             <a:pPr algn="ctr"/>
-            <a:endParaRPr/>
           </a:p>
         </p:txBody>
       </p:sp>
@@ -20257,7 +19957,6 @@
           <a:lstStyle/>
           <a:p>
             <a:pPr algn="ctr"/>
-            <a:endParaRPr/>
           </a:p>
         </p:txBody>
       </p:sp>
@@ -20301,7 +20000,6 @@
           <a:lstStyle/>
           <a:p>
             <a:pPr algn="ctr"/>
-            <a:endParaRPr/>
           </a:p>
         </p:txBody>
       </p:sp>
@@ -20357,7 +20055,7 @@
           <a:noFill/>
         </p:spPr>
         <p:txBody>
-          <a:bodyPr wrap="square" lIns="38100" tIns="25400" rIns="38100" bIns="25400" anchor="t">
+          <a:bodyPr wrap="square" anchor="t" lIns="38100" rIns="38100" tIns="25400" bIns="25400">
             <a:noAutofit/>
           </a:bodyPr>
           <a:lstStyle/>
@@ -20379,6 +20077,9 @@
               </a:rPr>
               <a:t>Drag prebuilt agents onto the canvas and connect them visually.</a:t>
             </a:r>
+            <a:endParaRPr sz="1500" b="0" i="0">
+              <a:latin typeface="Calibri"/>
+            </a:endParaRPr>
           </a:p>
           <a:p>
             <a:pPr>
@@ -20398,6 +20099,9 @@
               </a:rPr>
               <a:t>Configure deployed pool instances, not only static template folders.</a:t>
             </a:r>
+            <a:endParaRPr sz="1500" b="0" i="0">
+              <a:latin typeface="Calibri"/>
+            </a:endParaRPr>
           </a:p>
           <a:p>
             <a:pPr>
@@ -20417,6 +20121,9 @@
               </a:rPr>
               <a:t>Validate structural rules before execution.</a:t>
             </a:r>
+            <a:endParaRPr sz="1500" b="0" i="0">
+              <a:latin typeface="Calibri"/>
+            </a:endParaRPr>
           </a:p>
           <a:p>
             <a:pPr>
@@ -20436,6 +20143,9 @@
               </a:rPr>
               <a:t>Start through Starter, pause/resume through reanimation state, and stop through Ender semantics.</a:t>
             </a:r>
+            <a:endParaRPr sz="1500" b="0" i="0">
+              <a:latin typeface="Calibri"/>
+            </a:endParaRPr>
           </a:p>
         </p:txBody>
       </p:sp>
@@ -20481,7 +20191,6 @@
           <a:lstStyle/>
           <a:p>
             <a:pPr algn="ctr"/>
-            <a:endParaRPr/>
           </a:p>
         </p:txBody>
       </p:sp>
@@ -20525,7 +20234,6 @@
           <a:lstStyle/>
           <a:p>
             <a:pPr algn="ctr"/>
-            <a:endParaRPr/>
           </a:p>
         </p:txBody>
       </p:sp>
@@ -20581,7 +20289,7 @@
           <a:noFill/>
         </p:spPr>
         <p:txBody>
-          <a:bodyPr wrap="square" lIns="38100" tIns="25400" rIns="38100" bIns="25400" anchor="t">
+          <a:bodyPr wrap="square" anchor="t" lIns="38100" rIns="38100" tIns="25400" bIns="25400">
             <a:noAutofit/>
           </a:bodyPr>
           <a:lstStyle/>
@@ -20603,6 +20311,9 @@
               </a:rPr>
               <a:t>Workflows save and load as `.flw` files.</a:t>
             </a:r>
+            <a:endParaRPr sz="1600" b="0" i="0">
+              <a:latin typeface="Calibri"/>
+            </a:endParaRPr>
           </a:p>
           <a:p>
             <a:pPr>
@@ -20622,6 +20333,9 @@
               </a:rPr>
               <a:t>Generated flows from chat are starter drafts, not a replacement for ACP validation.</a:t>
             </a:r>
+            <a:endParaRPr sz="1600" b="0" i="0">
+              <a:latin typeface="Calibri"/>
+            </a:endParaRPr>
           </a:p>
           <a:p>
             <a:pPr>
@@ -20641,6 +20355,9 @@
               </a:rPr>
               <a:t>LED indicators and logs show runtime health across the session pool.</a:t>
             </a:r>
+            <a:endParaRPr sz="1600" b="0" i="0">
+              <a:latin typeface="Calibri"/>
+            </a:endParaRPr>
           </a:p>
         </p:txBody>
       </p:sp>
@@ -20653,7 +20370,7 @@
 </file>
 
 <file path=ppt/slides/slide8.xml><?xml version="1.0" encoding="utf-8"?>
-<p:sld xmlns:a="http://schemas.openxmlformats.org/drawingml/2006/main" xmlns:r="http://schemas.openxmlformats.org/officeDocument/2006/relationships" xmlns:p="http://schemas.openxmlformats.org/presentationml/2006/main">
+<p:sld xmlns:a="http://schemas.openxmlformats.org/drawingml/2006/main" xmlns:p="http://schemas.openxmlformats.org/presentationml/2006/main" xmlns:r="http://schemas.openxmlformats.org/officeDocument/2006/relationships">
   <p:cSld>
     <p:spTree>
       <p:nvGrpSpPr>
@@ -20661,14 +20378,7 @@
         <p:cNvGrpSpPr/>
         <p:nvPr/>
       </p:nvGrpSpPr>
-      <p:grpSpPr>
-        <a:xfrm>
-          <a:off x="0" y="0"/>
-          <a:ext cx="0" cy="0"/>
-          <a:chOff x="0" y="0"/>
-          <a:chExt cx="0" cy="0"/>
-        </a:xfrm>
-      </p:grpSpPr>
+      <p:grpSpPr/>
       <p:sp>
         <p:nvSpPr>
           <p:cNvPr id="2" name="Rectangle 1"/>
@@ -20709,7 +20419,6 @@
           <a:lstStyle/>
           <a:p>
             <a:pPr algn="ctr"/>
-            <a:endParaRPr/>
           </a:p>
         </p:txBody>
       </p:sp>
@@ -20753,7 +20462,6 @@
           <a:lstStyle/>
           <a:p>
             <a:pPr algn="ctr"/>
-            <a:endParaRPr/>
           </a:p>
         </p:txBody>
       </p:sp>
@@ -20797,7 +20505,6 @@
           <a:lstStyle/>
           <a:p>
             <a:pPr algn="ctr"/>
-            <a:endParaRPr/>
           </a:p>
         </p:txBody>
       </p:sp>
@@ -20841,7 +20548,6 @@
           <a:lstStyle/>
           <a:p>
             <a:pPr algn="ctr"/>
-            <a:endParaRPr/>
           </a:p>
         </p:txBody>
       </p:sp>
@@ -20885,7 +20591,6 @@
           <a:lstStyle/>
           <a:p>
             <a:pPr algn="ctr"/>
-            <a:endParaRPr/>
           </a:p>
         </p:txBody>
       </p:sp>
@@ -21001,7 +20706,6 @@
           <a:lstStyle/>
           <a:p>
             <a:pPr algn="ctr"/>
-            <a:endParaRPr/>
           </a:p>
         </p:txBody>
       </p:sp>
@@ -21045,7 +20749,6 @@
           <a:lstStyle/>
           <a:p>
             <a:pPr algn="ctr"/>
-            <a:endParaRPr/>
           </a:p>
         </p:txBody>
       </p:sp>
@@ -21101,7 +20804,7 @@
           <a:noFill/>
         </p:spPr>
         <p:txBody>
-          <a:bodyPr wrap="square" lIns="38100" tIns="25400" rIns="38100" bIns="25400" anchor="t">
+          <a:bodyPr wrap="square" anchor="t" lIns="38100" rIns="38100" tIns="25400" bIns="25400">
             <a:noAutofit/>
           </a:bodyPr>
           <a:lstStyle/>
@@ -21123,6 +20826,9 @@
               </a:rPr>
               <a:t>Control: starter, ender, stopper, cleaner, barrier, flowbacker</a:t>
             </a:r>
+            <a:endParaRPr sz="1300" b="0" i="0">
+              <a:latin typeface="Calibri"/>
+            </a:endParaRPr>
           </a:p>
           <a:p>
             <a:pPr>
@@ -21142,6 +20848,9 @@
               </a:rPr>
               <a:t>Execution and files: executer, pythonxer, pser, file_creator, file_extractor, file_interpreter, mover, deleter</a:t>
             </a:r>
+            <a:endParaRPr sz="1300" b="0" i="0">
+              <a:latin typeface="Calibri"/>
+            </a:endParaRPr>
           </a:p>
           <a:p>
             <a:pPr>
@@ -21161,6 +20870,9 @@
               </a:rPr>
               <a:t>DevOps and infra: gitter, dockerer, kuberneter, jenkinser, ssher, scper</a:t>
             </a:r>
+            <a:endParaRPr sz="1300" b="0" i="0">
+              <a:latin typeface="Calibri"/>
+            </a:endParaRPr>
           </a:p>
           <a:p>
             <a:pPr>
@@ -21180,6 +20892,9 @@
               </a:rPr>
               <a:t>Data and APIs: sqler, mongoxer, apirer, crawler, googler</a:t>
             </a:r>
+            <a:endParaRPr sz="1300" b="0" i="0">
+              <a:latin typeface="Calibri"/>
+            </a:endParaRPr>
           </a:p>
         </p:txBody>
       </p:sp>
@@ -21225,7 +20940,6 @@
           <a:lstStyle/>
           <a:p>
             <a:pPr algn="ctr"/>
-            <a:endParaRPr/>
           </a:p>
         </p:txBody>
       </p:sp>
@@ -21269,7 +20983,6 @@
           <a:lstStyle/>
           <a:p>
             <a:pPr algn="ctr"/>
-            <a:endParaRPr/>
           </a:p>
         </p:txBody>
       </p:sp>
@@ -21325,7 +21038,7 @@
           <a:noFill/>
         </p:spPr>
         <p:txBody>
-          <a:bodyPr wrap="square" lIns="38100" tIns="25400" rIns="38100" bIns="25400" anchor="t">
+          <a:bodyPr wrap="square" anchor="t" lIns="38100" rIns="38100" tIns="25400" bIns="25400">
             <a:noAutofit/>
           </a:bodyPr>
           <a:lstStyle/>
@@ -21347,6 +21060,9 @@
               </a:rPr>
               <a:t>Monitoring and routing: monitor_log, monitor_netstat, flowhypervisor, forker, asker, counter, and, or</a:t>
             </a:r>
+            <a:endParaRPr sz="1300" b="0" i="0">
+              <a:latin typeface="Calibri"/>
+            </a:endParaRPr>
           </a:p>
           <a:p>
             <a:pPr>
@@ -21366,6 +21082,9 @@
               </a:rPr>
               <a:t>Communication: notifier, emailer, recmailer, telegramer, telegramrx, whatsapper</a:t>
             </a:r>
+            <a:endParaRPr sz="1300" b="0" i="0">
+              <a:latin typeface="Calibri"/>
+            </a:endParaRPr>
           </a:p>
           <a:p>
             <a:pPr>
@@ -21385,6 +21104,9 @@
               </a:rPr>
               <a:t>Security and media: kyber_keygen, kyber_cipher, kyber_decipher, image_interpreter, shoter, j_decompiler</a:t>
             </a:r>
+            <a:endParaRPr sz="1300" b="0" i="0">
+              <a:latin typeface="Calibri"/>
+            </a:endParaRPr>
           </a:p>
           <a:p>
             <a:pPr>
@@ -21404,6 +21126,9 @@
               </a:rPr>
               <a:t>Workflow intelligence: flowcreator, gatewayer, gateway_relayer, node_manager, parametrizer, prompter, summarizer</a:t>
             </a:r>
+            <a:endParaRPr sz="1300" b="0" i="0">
+              <a:latin typeface="Calibri"/>
+            </a:endParaRPr>
           </a:p>
         </p:txBody>
       </p:sp>
@@ -21416,7 +21141,7 @@
 </file>
 
 <file path=ppt/slides/slide9.xml><?xml version="1.0" encoding="utf-8"?>
-<p:sld xmlns:a="http://schemas.openxmlformats.org/drawingml/2006/main" xmlns:r="http://schemas.openxmlformats.org/officeDocument/2006/relationships" xmlns:p="http://schemas.openxmlformats.org/presentationml/2006/main">
+<p:sld xmlns:a="http://schemas.openxmlformats.org/drawingml/2006/main" xmlns:p="http://schemas.openxmlformats.org/presentationml/2006/main" xmlns:r="http://schemas.openxmlformats.org/officeDocument/2006/relationships">
   <p:cSld>
     <p:spTree>
       <p:nvGrpSpPr>
@@ -21424,14 +21149,7 @@
         <p:cNvGrpSpPr/>
         <p:nvPr/>
       </p:nvGrpSpPr>
-      <p:grpSpPr>
-        <a:xfrm>
-          <a:off x="0" y="0"/>
-          <a:ext cx="0" cy="0"/>
-          <a:chOff x="0" y="0"/>
-          <a:chExt cx="0" cy="0"/>
-        </a:xfrm>
-      </p:grpSpPr>
+      <p:grpSpPr/>
       <p:sp>
         <p:nvSpPr>
           <p:cNvPr id="2" name="Rectangle 1"/>
@@ -21472,7 +21190,6 @@
           <a:lstStyle/>
           <a:p>
             <a:pPr algn="ctr"/>
-            <a:endParaRPr/>
           </a:p>
         </p:txBody>
       </p:sp>
@@ -21516,7 +21233,6 @@
           <a:lstStyle/>
           <a:p>
             <a:pPr algn="ctr"/>
-            <a:endParaRPr/>
           </a:p>
         </p:txBody>
       </p:sp>
@@ -21560,7 +21276,6 @@
           <a:lstStyle/>
           <a:p>
             <a:pPr algn="ctr"/>
-            <a:endParaRPr/>
           </a:p>
         </p:txBody>
       </p:sp>
@@ -21604,7 +21319,6 @@
           <a:lstStyle/>
           <a:p>
             <a:pPr algn="ctr"/>
-            <a:endParaRPr/>
           </a:p>
         </p:txBody>
       </p:sp>
@@ -21648,7 +21362,6 @@
           <a:lstStyle/>
           <a:p>
             <a:pPr algn="ctr"/>
-            <a:endParaRPr/>
           </a:p>
         </p:txBody>
       </p:sp>
@@ -21764,7 +21477,6 @@
           <a:lstStyle/>
           <a:p>
             <a:pPr algn="ctr"/>
-            <a:endParaRPr/>
           </a:p>
         </p:txBody>
       </p:sp>
@@ -21808,7 +21520,6 @@
           <a:lstStyle/>
           <a:p>
             <a:pPr algn="ctr"/>
-            <a:endParaRPr/>
           </a:p>
         </p:txBody>
       </p:sp>
@@ -21864,7 +21575,7 @@
           <a:noFill/>
         </p:spPr>
         <p:txBody>
-          <a:bodyPr wrap="square" lIns="38100" tIns="25400" rIns="38100" bIns="25400" anchor="t">
+          <a:bodyPr wrap="square" anchor="t" lIns="38100" rIns="38100" tIns="25400" bIns="25400">
             <a:noAutofit/>
           </a:bodyPr>
           <a:lstStyle/>
@@ -21886,6 +21597,9 @@
               </a:rPr>
               <a:t>Receives HTTP webhook events or optional folder-drop files.</a:t>
             </a:r>
+            <a:endParaRPr sz="1500" b="0" i="0">
+              <a:latin typeface="Calibri"/>
+            </a:endParaRPr>
           </a:p>
           <a:p>
             <a:pPr>
@@ -21905,6 +21619,9 @@
               </a:rPr>
               <a:t>Normalizes, persists, queues, and dispatches events into downstream workflow agents.</a:t>
             </a:r>
+            <a:endParaRPr sz="1500" b="0" i="0">
+              <a:latin typeface="Calibri"/>
+            </a:endParaRPr>
           </a:p>
           <a:p>
             <a:pPr>
@@ -21924,6 +21641,9 @@
               </a:rPr>
               <a:t>Supports bearer/HMAC-style auth patterns, IP allowlists, dedup files, and crash recovery state.</a:t>
             </a:r>
+            <a:endParaRPr sz="1500" b="0" i="0">
+              <a:latin typeface="Calibri"/>
+            </a:endParaRPr>
           </a:p>
         </p:txBody>
       </p:sp>
@@ -21969,7 +21689,6 @@
           <a:lstStyle/>
           <a:p>
             <a:pPr algn="ctr"/>
-            <a:endParaRPr/>
           </a:p>
         </p:txBody>
       </p:sp>
@@ -22013,7 +21732,6 @@
           <a:lstStyle/>
           <a:p>
             <a:pPr algn="ctr"/>
-            <a:endParaRPr/>
           </a:p>
         </p:txBody>
       </p:sp>
@@ -22069,7 +21787,7 @@
           <a:noFill/>
         </p:spPr>
         <p:txBody>
-          <a:bodyPr wrap="square" lIns="38100" tIns="25400" rIns="38100" bIns="25400" anchor="t">
+          <a:bodyPr wrap="square" anchor="t" lIns="38100" rIns="38100" tIns="25400" bIns="25400">
             <a:noAutofit/>
           </a:bodyPr>
           <a:lstStyle/>
@@ -22091,6 +21809,9 @@
               </a:rPr>
               <a:t>Gatewayer is a workflow trigger, not a chat-router clone.</a:t>
             </a:r>
+            <a:endParaRPr sz="1600" b="0" i="0">
+              <a:latin typeface="Calibri"/>
+            </a:endParaRPr>
           </a:p>
           <a:p>
             <a:pPr>
@@ -22110,6 +21831,9 @@
               </a:rPr>
               <a:t>Declared config fields are now documented with clear caveats where enforcement is not complete.</a:t>
             </a:r>
+            <a:endParaRPr sz="1600" b="0" i="0">
+              <a:latin typeface="Calibri"/>
+            </a:endParaRPr>
           </a:p>
           <a:p>
             <a:pPr>
@@ -22129,6 +21853,9 @@
               </a:rPr>
               <a:t>Stable log markers let Monitor Log and Summarizer watch gateway health.</a:t>
             </a:r>
+            <a:endParaRPr sz="1600" b="0" i="0">
+              <a:latin typeface="Calibri"/>
+            </a:endParaRPr>
           </a:p>
         </p:txBody>
       </p:sp>

--- a/Tlamatini_eXtended_Artificial_Intelligence_Humanly_Tempered.pptx
+++ b/Tlamatini_eXtended_Artificial_Intelligence_Humanly_Tempered.pptx
@@ -3600,7 +3600,7 @@
                 </a:solidFill>
                 <a:latin typeface="Aptos"/>
               </a:rPr>
-              <a:t>436</a:t>
+              <a:t>439</a:t>
             </a:r>
           </a:p>
         </p:txBody>
@@ -3830,7 +3830,7 @@
                 </a:solidFill>
                 <a:latin typeface="Aptos"/>
               </a:rPr>
-              <a:t>92,274</a:t>
+              <a:t>93,157</a:t>
             </a:r>
           </a:p>
         </p:txBody>
@@ -3865,7 +3865,7 @@
                 </a:solidFill>
                 <a:latin typeface="Aptos"/>
               </a:rPr>
-              <a:t>Generated May 14, 2026 05:19 PM UTC-0600 at HEAD e1d93ab</a:t>
+              <a:t>Generated May 15, 2026 12:08 PM UTC-0600 at HEAD 382e1a1</a:t>
             </a:r>
           </a:p>
         </p:txBody>
@@ -7663,7 +7663,7 @@
                 </a:solidFill>
                 <a:latin typeface="Aptos"/>
               </a:rPr>
-              <a:t>LOCAL MODEL SETUP ON WINDOWS</a:t>
+              <a:t>TODAY'S RELEASE-IDENTITY WORK</a:t>
             </a:r>
           </a:p>
         </p:txBody>
@@ -7698,21 +7698,109 @@
                 </a:solidFill>
                 <a:latin typeface="Aptos Display"/>
               </a:rPr>
-              <a:t>Ollama Without Admin Rights</a:t>
-            </a:r>
-          </a:p>
-        </p:txBody>
-      </p:sp>
-      <p:sp>
-        <p:nvSpPr>
-          <p:cNvPr id="9" name="TextBox 8"/>
+              <a:t>Versioning System</a:t>
+            </a:r>
+          </a:p>
+        </p:txBody>
+      </p:sp>
+      <p:sp>
+        <p:nvSpPr>
+          <p:cNvPr id="9" name="Rounded Rectangle 8"/>
+          <p:cNvSpPr/>
+          <p:nvPr/>
+        </p:nvSpPr>
+        <p:spPr>
+          <a:xfrm>
+            <a:off x="713232" y="1463040"/>
+            <a:ext cx="5394960" cy="4187952"/>
+          </a:xfrm>
+          <a:prstGeom prst="roundRect">
+            <a:avLst/>
+          </a:prstGeom>
+          <a:solidFill>
+            <a:srgbClr val="161A19"/>
+          </a:solidFill>
+          <a:ln>
+            <a:solidFill>
+              <a:srgbClr val="595F56"/>
+            </a:solidFill>
+          </a:ln>
+        </p:spPr>
+        <p:style>
+          <a:lnRef idx="1">
+            <a:schemeClr val="accent1"/>
+          </a:lnRef>
+          <a:fillRef idx="3">
+            <a:schemeClr val="accent1"/>
+          </a:fillRef>
+          <a:effectRef idx="2">
+            <a:schemeClr val="accent1"/>
+          </a:effectRef>
+          <a:fontRef idx="minor">
+            <a:schemeClr val="lt1"/>
+          </a:fontRef>
+        </p:style>
+        <p:txBody>
+          <a:bodyPr rtlCol="0" anchor="ctr"/>
+          <a:lstStyle/>
+          <a:p>
+            <a:pPr algn="ctr"/>
+          </a:p>
+        </p:txBody>
+      </p:sp>
+      <p:sp>
+        <p:nvSpPr>
+          <p:cNvPr id="10" name="Rectangle 9"/>
+          <p:cNvSpPr/>
+          <p:nvPr/>
+        </p:nvSpPr>
+        <p:spPr>
+          <a:xfrm>
+            <a:off x="713232" y="1463040"/>
+            <a:ext cx="5394960" cy="109728"/>
+          </a:xfrm>
+          <a:prstGeom prst="rect">
+            <a:avLst/>
+          </a:prstGeom>
+          <a:solidFill>
+            <a:srgbClr val="E0AB5D"/>
+          </a:solidFill>
+          <a:ln>
+            <a:noFill/>
+          </a:ln>
+        </p:spPr>
+        <p:style>
+          <a:lnRef idx="1">
+            <a:schemeClr val="accent1"/>
+          </a:lnRef>
+          <a:fillRef idx="3">
+            <a:schemeClr val="accent1"/>
+          </a:fillRef>
+          <a:effectRef idx="2">
+            <a:schemeClr val="accent1"/>
+          </a:effectRef>
+          <a:fontRef idx="minor">
+            <a:schemeClr val="lt1"/>
+          </a:fontRef>
+        </p:style>
+        <p:txBody>
+          <a:bodyPr rtlCol="0" anchor="ctr"/>
+          <a:lstStyle/>
+          <a:p>
+            <a:pPr algn="ctr"/>
+          </a:p>
+        </p:txBody>
+      </p:sp>
+      <p:sp>
+        <p:nvSpPr>
+          <p:cNvPr id="11" name="TextBox 10"/>
           <p:cNvSpPr txBox="1"/>
           <p:nvPr/>
         </p:nvSpPr>
         <p:spPr>
           <a:xfrm>
-            <a:off x="777240" y="1572768"/>
-            <a:ext cx="10561320" cy="3154680"/>
+            <a:off x="914400" y="1664208"/>
+            <a:ext cx="4992624" cy="310896"/>
           </a:xfrm>
           <a:prstGeom prst="rect">
             <a:avLst/>
@@ -7727,37 +7815,116 @@
           <a:p>
             <a:pPr algn="l"/>
             <a:r>
-              <a:rPr sz="900" b="0">
-                <a:solidFill>
-                  <a:srgbClr val="E8E8DE"/>
-                </a:solidFill>
-                <a:latin typeface="Cascadia Mono"/>
-              </a:rPr>
-              <a:t>$env:OLLAMA_INSTALL_DIR = "$env:LOCALAPPDATA\Programs\Ollama"
-irm https://ollama.com/install.ps1 | iex
-ollama --version
-ollama serve
-Invoke-WebRequest http://127.0.0.1:11434/api/tags -UseBasicParsing
-ollama pull qwen3-embedding:8b
-ollama pull glm-5:cloud
-ollama pull qwen3.5:cloud
-ollama pull gpt-oss:120b-cloud
-ollama pull qwen3.5:397b-cloud
-ollama pull llama3.2-vision:11b</a:t>
-            </a:r>
-          </a:p>
-        </p:txBody>
-      </p:sp>
-      <p:sp>
-        <p:nvSpPr>
-          <p:cNvPr id="10" name="Rounded Rectangle 9"/>
-          <p:cNvSpPr/>
-          <p:nvPr/>
-        </p:nvSpPr>
-        <p:spPr>
-          <a:xfrm>
-            <a:off x="777240" y="4864608"/>
-            <a:ext cx="10561320" cy="914400"/>
+              <a:rPr sz="1400" b="1">
+                <a:solidFill>
+                  <a:srgbClr val="E0AB5D"/>
+                </a:solidFill>
+                <a:latin typeface="Aptos"/>
+              </a:rPr>
+              <a:t>SemVer and resolver</a:t>
+            </a:r>
+          </a:p>
+        </p:txBody>
+      </p:sp>
+      <p:sp>
+        <p:nvSpPr>
+          <p:cNvPr id="12" name="TextBox 11"/>
+          <p:cNvSpPr txBox="1"/>
+          <p:nvPr/>
+        </p:nvSpPr>
+        <p:spPr>
+          <a:xfrm>
+            <a:off x="914400" y="2121408"/>
+            <a:ext cx="4992624" cy="3383280"/>
+          </a:xfrm>
+          <a:prstGeom prst="rect">
+            <a:avLst/>
+          </a:prstGeom>
+          <a:noFill/>
+        </p:spPr>
+        <p:txBody>
+          <a:bodyPr wrap="square" anchor="t" lIns="38100" rIns="38100" tIns="25400" bIns="25400">
+            <a:noAutofit/>
+          </a:bodyPr>
+          <a:lstStyle/>
+          <a:p>
+            <a:pPr>
+              <a:spcAft>
+                <a:spcPts val="600"/>
+              </a:spcAft>
+              <a:defRPr sz="1500">
+                <a:solidFill>
+                  <a:srgbClr val="B4BAAE"/>
+                </a:solidFill>
+                <a:latin typeface="Aptos"/>
+              </a:defRPr>
+            </a:pPr>
+            <a:r>
+              <a:rPr sz="1500" b="0" i="0">
+                <a:latin typeface="Calibri"/>
+              </a:rPr>
+              <a:t>Tlamatini now follows Semantic Versioning 2.0.0 with git tags as the single source of truth: you tag, then you build, instead of hand-editing version strings across files.</a:t>
+            </a:r>
+            <a:endParaRPr sz="1500" b="0" i="0">
+              <a:latin typeface="Calibri"/>
+            </a:endParaRPr>
+          </a:p>
+          <a:p>
+            <a:pPr>
+              <a:spcAft>
+                <a:spcPts val="600"/>
+              </a:spcAft>
+              <a:defRPr sz="1500">
+                <a:solidFill>
+                  <a:srgbClr val="B4BAAE"/>
+                </a:solidFill>
+                <a:latin typeface="Aptos"/>
+              </a:defRPr>
+            </a:pPr>
+            <a:r>
+              <a:rPr sz="1500" b="0" i="0">
+                <a:latin typeface="Calibri"/>
+              </a:rPr>
+              <a:t>The build path resolves a version once and propagates it into generated runtime metadata, Win32 VERSIONINFO resources, and the release-folder naming convention.</a:t>
+            </a:r>
+            <a:endParaRPr sz="1500" b="0" i="0">
+              <a:latin typeface="Calibri"/>
+            </a:endParaRPr>
+          </a:p>
+          <a:p>
+            <a:pPr>
+              <a:spcAft>
+                <a:spcPts val="600"/>
+              </a:spcAft>
+              <a:defRPr sz="1500">
+                <a:solidFill>
+                  <a:srgbClr val="B4BAAE"/>
+                </a:solidFill>
+                <a:latin typeface="Aptos"/>
+              </a:defRPr>
+            </a:pPr>
+            <a:r>
+              <a:rPr sz="1500" b="0" i="0">
+                <a:latin typeface="Calibri"/>
+              </a:rPr>
+              <a:t>On untagged commits the resolver falls back honestly to a git-derived development version instead of failing the build or lying about the release state.</a:t>
+            </a:r>
+            <a:endParaRPr sz="1500" b="0" i="0">
+              <a:latin typeface="Calibri"/>
+            </a:endParaRPr>
+          </a:p>
+        </p:txBody>
+      </p:sp>
+      <p:sp>
+        <p:nvSpPr>
+          <p:cNvPr id="13" name="Rounded Rectangle 12"/>
+          <p:cNvSpPr/>
+          <p:nvPr/>
+        </p:nvSpPr>
+        <p:spPr>
+          <a:xfrm>
+            <a:off x="6355080" y="1463040"/>
+            <a:ext cx="5074920" cy="4187952"/>
           </a:xfrm>
           <a:prstGeom prst="roundRect">
             <a:avLst/>
@@ -7795,20 +7962,20 @@
       </p:sp>
       <p:sp>
         <p:nvSpPr>
-          <p:cNvPr id="11" name="Rectangle 10"/>
-          <p:cNvSpPr/>
-          <p:nvPr/>
-        </p:nvSpPr>
-        <p:spPr>
-          <a:xfrm>
-            <a:off x="777240" y="4864608"/>
-            <a:ext cx="10561320" cy="109728"/>
-          </a:xfrm>
-          <a:prstGeom prst="rect">
-            <a:avLst/>
-          </a:prstGeom>
-          <a:solidFill>
-            <a:srgbClr val="E0AB5D"/>
+          <p:cNvPr id="14" name="Rectangle 13"/>
+          <p:cNvSpPr/>
+          <p:nvPr/>
+        </p:nvSpPr>
+        <p:spPr>
+          <a:xfrm>
+            <a:off x="6355080" y="1463040"/>
+            <a:ext cx="5074920" cy="109728"/>
+          </a:xfrm>
+          <a:prstGeom prst="rect">
+            <a:avLst/>
+          </a:prstGeom>
+          <a:solidFill>
+            <a:srgbClr val="48BF8F"/>
           </a:solidFill>
           <a:ln>
             <a:noFill/>
@@ -7838,14 +8005,14 @@
       </p:sp>
       <p:sp>
         <p:nvSpPr>
-          <p:cNvPr id="12" name="TextBox 11"/>
+          <p:cNvPr id="15" name="TextBox 14"/>
           <p:cNvSpPr txBox="1"/>
           <p:nvPr/>
         </p:nvSpPr>
         <p:spPr>
           <a:xfrm>
-            <a:off x="978408" y="5065776"/>
-            <a:ext cx="10158984" cy="310896"/>
+            <a:off x="6556248" y="1664208"/>
+            <a:ext cx="4672583" cy="310896"/>
           </a:xfrm>
           <a:prstGeom prst="rect">
             <a:avLst/>
@@ -7862,25 +8029,25 @@
             <a:r>
               <a:rPr sz="1400" b="1">
                 <a:solidFill>
-                  <a:srgbClr val="E0AB5D"/>
+                  <a:srgbClr val="48BF8F"/>
                 </a:solidFill>
                 <a:latin typeface="Aptos"/>
               </a:rPr>
-              <a:t>Checklist</a:t>
-            </a:r>
-          </a:p>
-        </p:txBody>
-      </p:sp>
-      <p:sp>
-        <p:nvSpPr>
-          <p:cNvPr id="13" name="TextBox 12"/>
+              <a:t>Where version appears</a:t>
+            </a:r>
+          </a:p>
+        </p:txBody>
+      </p:sp>
+      <p:sp>
+        <p:nvSpPr>
+          <p:cNvPr id="16" name="TextBox 15"/>
           <p:cNvSpPr txBox="1"/>
           <p:nvPr/>
         </p:nvSpPr>
         <p:spPr>
           <a:xfrm>
-            <a:off x="978408" y="5522976"/>
-            <a:ext cx="10158984" cy="109728"/>
+            <a:off x="6556248" y="2121408"/>
+            <a:ext cx="4672583" cy="3383280"/>
           </a:xfrm>
           <a:prstGeom prst="rect">
             <a:avLst/>
@@ -7905,12 +8072,12 @@
               </a:defRPr>
             </a:pPr>
             <a:r>
-              <a:rPr sz="400" b="0" i="0">
+              <a:rPr sz="1400" b="0" i="0">
                 <a:latin typeface="Calibri"/>
               </a:rPr>
-              <a:t>Open a normal PowerShell window, not an elevated one, for the safest no-admin Windows installation path.</a:t>
-            </a:r>
-            <a:endParaRPr sz="400" b="0" i="0">
+              <a:t>Operators can now see the running version in the About dialog, the startup banner, the open `GET /agent/version/` health-check endpoint, and Windows file properties on the built executables.</a:t>
+            </a:r>
+            <a:endParaRPr sz="1400" b="0" i="0">
               <a:latin typeface="Calibri"/>
             </a:endParaRPr>
           </a:p>
@@ -7927,14 +8094,71 @@
               </a:defRPr>
             </a:pPr>
             <a:r>
-              <a:rPr sz="400" b="0" i="0">
+              <a:rPr sz="1400" b="0" i="0">
                 <a:latin typeface="Calibri"/>
               </a:rPr>
-              <a:t>Install into `%LOCALAPPDATA%\Programs\Ollama` with the official PowerShell installer script and then reopen PowerShell so PATH updates are visible.</a:t>
-            </a:r>
-            <a:endParaRPr sz="400" b="0" i="0">
+              <a:t>The runtime resolver lives in `Tlamatini/agent/version.py`, while the build-oriented coordination logic lives in the repo-root `versioning.py` and the longer policy notes live in `VERSIONING.md`.</a:t>
+            </a:r>
+            <a:endParaRPr sz="1400" b="0" i="0">
               <a:latin typeface="Calibri"/>
             </a:endParaRPr>
+          </a:p>
+          <a:p>
+            <a:pPr>
+              <a:spcAft>
+                <a:spcPts val="600"/>
+              </a:spcAft>
+              <a:defRPr sz="1400">
+                <a:solidFill>
+                  <a:srgbClr val="B4BAAE"/>
+                </a:solidFill>
+                <a:latin typeface="Aptos"/>
+              </a:defRPr>
+            </a:pPr>
+            <a:r>
+              <a:rPr sz="1400" b="0" i="0">
+                <a:latin typeface="Calibri"/>
+              </a:rPr>
+              <a:t>Build overrides are supported in a predictable order: CLI `--version`, then `TLAMATINI_VERSION`, then git describe, then the sentinel `0.0.0+unknown`.</a:t>
+            </a:r>
+            <a:endParaRPr sz="1400" b="0" i="0">
+              <a:latin typeface="Calibri"/>
+            </a:endParaRPr>
+          </a:p>
+        </p:txBody>
+      </p:sp>
+      <p:sp>
+        <p:nvSpPr>
+          <p:cNvPr id="17" name="TextBox 16"/>
+          <p:cNvSpPr txBox="1"/>
+          <p:nvPr/>
+        </p:nvSpPr>
+        <p:spPr>
+          <a:xfrm>
+            <a:off x="841248" y="5797296"/>
+            <a:ext cx="10149840" cy="201168"/>
+          </a:xfrm>
+          <a:prstGeom prst="rect">
+            <a:avLst/>
+          </a:prstGeom>
+          <a:noFill/>
+        </p:spPr>
+        <p:txBody>
+          <a:bodyPr wrap="square" anchor="t">
+            <a:spAutoFit/>
+          </a:bodyPr>
+          <a:lstStyle/>
+          <a:p>
+            <a:pPr algn="l"/>
+            <a:r>
+              <a:rPr sz="900" b="0">
+                <a:solidFill>
+                  <a:srgbClr val="B4BAAE"/>
+                </a:solidFill>
+                <a:latin typeface="Cascadia Mono"/>
+              </a:rPr>
+              <a:t>Resolved current version: 1.0.0.dev0 | build: 1.0.0.dev0+g382e1a1.dirty</a:t>
+            </a:r>
           </a:p>
         </p:txBody>
       </p:sp>
@@ -8014,7 +8238,7 @@
             <a:avLst/>
           </a:prstGeom>
           <a:solidFill>
-            <a:srgbClr val="48BF8F"/>
+            <a:srgbClr val="E0AB5D"/>
           </a:solidFill>
           <a:ln>
             <a:noFill/>
@@ -8057,7 +8281,7 @@
             <a:avLst/>
           </a:prstGeom>
           <a:solidFill>
-            <a:srgbClr val="48BF8F"/>
+            <a:srgbClr val="E0AB5D"/>
           </a:solidFill>
           <a:ln>
             <a:noFill/>
@@ -8100,7 +8324,7 @@
             <a:avLst/>
           </a:prstGeom>
           <a:solidFill>
-            <a:srgbClr val="48BF8F"/>
+            <a:srgbClr val="E0AB5D"/>
           </a:solidFill>
           <a:ln>
             <a:noFill/>
@@ -8143,7 +8367,7 @@
             <a:avLst/>
           </a:prstGeom>
           <a:solidFill>
-            <a:srgbClr val="48BF8F"/>
+            <a:srgbClr val="E0AB5D"/>
           </a:solidFill>
           <a:ln>
             <a:noFill/>
@@ -8197,11 +8421,11 @@
             <a:r>
               <a:rPr sz="1000" b="1">
                 <a:solidFill>
-                  <a:srgbClr val="48BF8F"/>
+                  <a:srgbClr val="E0AB5D"/>
                 </a:solidFill>
                 <a:latin typeface="Aptos"/>
               </a:rPr>
-              <a:t>SERVICE, API, AND MODEL PULLS</a:t>
+              <a:t>LOCAL MODEL SETUP ON WINDOWS</a:t>
             </a:r>
           </a:p>
         </p:txBody>
@@ -8236,21 +8460,66 @@
                 </a:solidFill>
                 <a:latin typeface="Aptos Display"/>
               </a:rPr>
-              <a:t>Ollama Readiness</a:t>
-            </a:r>
-          </a:p>
-        </p:txBody>
-      </p:sp>
-      <p:sp>
-        <p:nvSpPr>
-          <p:cNvPr id="9" name="Rounded Rectangle 8"/>
-          <p:cNvSpPr/>
-          <p:nvPr/>
-        </p:nvSpPr>
-        <p:spPr>
-          <a:xfrm>
-            <a:off x="713232" y="1463040"/>
-            <a:ext cx="5394960" cy="4526280"/>
+              <a:t>Ollama Without Admin Rights</a:t>
+            </a:r>
+          </a:p>
+        </p:txBody>
+      </p:sp>
+      <p:sp>
+        <p:nvSpPr>
+          <p:cNvPr id="9" name="TextBox 8"/>
+          <p:cNvSpPr txBox="1"/>
+          <p:nvPr/>
+        </p:nvSpPr>
+        <p:spPr>
+          <a:xfrm>
+            <a:off x="777240" y="1572768"/>
+            <a:ext cx="10561320" cy="3154680"/>
+          </a:xfrm>
+          <a:prstGeom prst="rect">
+            <a:avLst/>
+          </a:prstGeom>
+          <a:noFill/>
+        </p:spPr>
+        <p:txBody>
+          <a:bodyPr wrap="square" anchor="t">
+            <a:spAutoFit/>
+          </a:bodyPr>
+          <a:lstStyle/>
+          <a:p>
+            <a:pPr algn="l"/>
+            <a:r>
+              <a:rPr sz="900" b="0">
+                <a:solidFill>
+                  <a:srgbClr val="E8E8DE"/>
+                </a:solidFill>
+                <a:latin typeface="Cascadia Mono"/>
+              </a:rPr>
+              <a:t>$env:OLLAMA_INSTALL_DIR = "$env:LOCALAPPDATA\Programs\Ollama"
+irm https://ollama.com/install.ps1 | iex
+ollama --version
+ollama serve
+Invoke-WebRequest http://127.0.0.1:11434/api/tags -UseBasicParsing
+ollama pull qwen3-embedding:8b
+ollama pull glm-5:cloud
+ollama pull qwen3.5:cloud
+ollama pull gpt-oss:120b-cloud
+ollama pull qwen3.5:397b-cloud
+ollama pull llama3.2-vision:11b</a:t>
+            </a:r>
+          </a:p>
+        </p:txBody>
+      </p:sp>
+      <p:sp>
+        <p:nvSpPr>
+          <p:cNvPr id="10" name="Rounded Rectangle 9"/>
+          <p:cNvSpPr/>
+          <p:nvPr/>
+        </p:nvSpPr>
+        <p:spPr>
+          <a:xfrm>
+            <a:off x="777240" y="4864608"/>
+            <a:ext cx="10561320" cy="914400"/>
           </a:xfrm>
           <a:prstGeom prst="roundRect">
             <a:avLst/>
@@ -8288,20 +8557,20 @@
       </p:sp>
       <p:sp>
         <p:nvSpPr>
-          <p:cNvPr id="10" name="Rectangle 9"/>
-          <p:cNvSpPr/>
-          <p:nvPr/>
-        </p:nvSpPr>
-        <p:spPr>
-          <a:xfrm>
-            <a:off x="713232" y="1463040"/>
-            <a:ext cx="5394960" cy="109728"/>
-          </a:xfrm>
-          <a:prstGeom prst="rect">
-            <a:avLst/>
-          </a:prstGeom>
-          <a:solidFill>
-            <a:srgbClr val="48BF8F"/>
+          <p:cNvPr id="11" name="Rectangle 10"/>
+          <p:cNvSpPr/>
+          <p:nvPr/>
+        </p:nvSpPr>
+        <p:spPr>
+          <a:xfrm>
+            <a:off x="777240" y="4864608"/>
+            <a:ext cx="10561320" cy="109728"/>
+          </a:xfrm>
+          <a:prstGeom prst="rect">
+            <a:avLst/>
+          </a:prstGeom>
+          <a:solidFill>
+            <a:srgbClr val="E0AB5D"/>
           </a:solidFill>
           <a:ln>
             <a:noFill/>
@@ -8331,14 +8600,14 @@
       </p:sp>
       <p:sp>
         <p:nvSpPr>
-          <p:cNvPr id="11" name="TextBox 10"/>
+          <p:cNvPr id="12" name="TextBox 11"/>
           <p:cNvSpPr txBox="1"/>
           <p:nvPr/>
         </p:nvSpPr>
         <p:spPr>
           <a:xfrm>
-            <a:off x="914400" y="1664208"/>
-            <a:ext cx="4992624" cy="310896"/>
+            <a:off x="978408" y="5065776"/>
+            <a:ext cx="10158984" cy="310896"/>
           </a:xfrm>
           <a:prstGeom prst="rect">
             <a:avLst/>
@@ -8355,25 +8624,25 @@
             <a:r>
               <a:rPr sz="1400" b="1">
                 <a:solidFill>
-                  <a:srgbClr val="48BF8F"/>
+                  <a:srgbClr val="E0AB5D"/>
                 </a:solidFill>
                 <a:latin typeface="Aptos"/>
               </a:rPr>
-              <a:t>Service and API</a:t>
-            </a:r>
-          </a:p>
-        </p:txBody>
-      </p:sp>
-      <p:sp>
-        <p:nvSpPr>
-          <p:cNvPr id="12" name="TextBox 11"/>
+              <a:t>Checklist</a:t>
+            </a:r>
+          </a:p>
+        </p:txBody>
+      </p:sp>
+      <p:sp>
+        <p:nvSpPr>
+          <p:cNvPr id="13" name="TextBox 12"/>
           <p:cNvSpPr txBox="1"/>
           <p:nvPr/>
         </p:nvSpPr>
         <p:spPr>
           <a:xfrm>
-            <a:off x="914400" y="2121408"/>
-            <a:ext cx="4992624" cy="3721608"/>
+            <a:off x="978408" y="5522976"/>
+            <a:ext cx="10158984" cy="109728"/>
           </a:xfrm>
           <a:prstGeom prst="rect">
             <a:avLst/>
@@ -8390,7 +8659,7 @@
               <a:spcAft>
                 <a:spcPts val="600"/>
               </a:spcAft>
-              <a:defRPr sz="1500">
+              <a:defRPr sz="1400">
                 <a:solidFill>
                   <a:srgbClr val="B4BAAE"/>
                 </a:solidFill>
@@ -8398,12 +8667,12 @@
               </a:defRPr>
             </a:pPr>
             <a:r>
-              <a:rPr sz="1500" b="0" i="0">
+              <a:rPr sz="400" b="0" i="0">
                 <a:latin typeface="Calibri"/>
               </a:rPr>
-              <a:t>Verify the CLI with `ollama --version`, start `ollama serve` if the background service is not already active, and confirm `http://127.0.0.1:11434/api/tags` responds.</a:t>
-            </a:r>
-            <a:endParaRPr sz="1500" b="0" i="0">
+              <a:t>Open a normal PowerShell window, not an elevated one, for the safest no-admin Windows installation path.</a:t>
+            </a:r>
+            <a:endParaRPr sz="400" b="0" i="0">
               <a:latin typeface="Calibri"/>
             </a:endParaRPr>
           </a:p>
@@ -8412,7 +8681,7 @@
               <a:spcAft>
                 <a:spcPts val="600"/>
               </a:spcAft>
-              <a:defRPr sz="1500">
+              <a:defRPr sz="1400">
                 <a:solidFill>
                   <a:srgbClr val="B4BAAE"/>
                 </a:solidFill>
@@ -8420,290 +8689,12 @@
               </a:defRPr>
             </a:pPr>
             <a:r>
-              <a:rPr sz="1500" b="0" i="0">
+              <a:rPr sz="400" b="0" i="0">
                 <a:latin typeface="Calibri"/>
               </a:rPr>
-              <a:t>Pull the default repository model tags exactly as written if you want the shipped config and agent templates to work unchanged.</a:t>
-            </a:r>
-            <a:endParaRPr sz="1500" b="0" i="0">
-              <a:latin typeface="Calibri"/>
-            </a:endParaRPr>
-          </a:p>
-        </p:txBody>
-      </p:sp>
-      <p:sp>
-        <p:nvSpPr>
-          <p:cNvPr id="13" name="Rounded Rectangle 12"/>
-          <p:cNvSpPr/>
-          <p:nvPr/>
-        </p:nvSpPr>
-        <p:spPr>
-          <a:xfrm>
-            <a:off x="6355080" y="1463040"/>
-            <a:ext cx="5074920" cy="4526280"/>
-          </a:xfrm>
-          <a:prstGeom prst="roundRect">
-            <a:avLst/>
-          </a:prstGeom>
-          <a:solidFill>
-            <a:srgbClr val="161A19"/>
-          </a:solidFill>
-          <a:ln>
-            <a:solidFill>
-              <a:srgbClr val="595F56"/>
-            </a:solidFill>
-          </a:ln>
-        </p:spPr>
-        <p:style>
-          <a:lnRef idx="1">
-            <a:schemeClr val="accent1"/>
-          </a:lnRef>
-          <a:fillRef idx="3">
-            <a:schemeClr val="accent1"/>
-          </a:fillRef>
-          <a:effectRef idx="2">
-            <a:schemeClr val="accent1"/>
-          </a:effectRef>
-          <a:fontRef idx="minor">
-            <a:schemeClr val="lt1"/>
-          </a:fontRef>
-        </p:style>
-        <p:txBody>
-          <a:bodyPr rtlCol="0" anchor="ctr"/>
-          <a:lstStyle/>
-          <a:p>
-            <a:pPr algn="ctr"/>
-          </a:p>
-        </p:txBody>
-      </p:sp>
-      <p:sp>
-        <p:nvSpPr>
-          <p:cNvPr id="14" name="Rectangle 13"/>
-          <p:cNvSpPr/>
-          <p:nvPr/>
-        </p:nvSpPr>
-        <p:spPr>
-          <a:xfrm>
-            <a:off x="6355080" y="1463040"/>
-            <a:ext cx="5074920" cy="109728"/>
-          </a:xfrm>
-          <a:prstGeom prst="rect">
-            <a:avLst/>
-          </a:prstGeom>
-          <a:solidFill>
-            <a:srgbClr val="C48052"/>
-          </a:solidFill>
-          <a:ln>
-            <a:noFill/>
-          </a:ln>
-        </p:spPr>
-        <p:style>
-          <a:lnRef idx="1">
-            <a:schemeClr val="accent1"/>
-          </a:lnRef>
-          <a:fillRef idx="3">
-            <a:schemeClr val="accent1"/>
-          </a:fillRef>
-          <a:effectRef idx="2">
-            <a:schemeClr val="accent1"/>
-          </a:effectRef>
-          <a:fontRef idx="minor">
-            <a:schemeClr val="lt1"/>
-          </a:fontRef>
-        </p:style>
-        <p:txBody>
-          <a:bodyPr rtlCol="0" anchor="ctr"/>
-          <a:lstStyle/>
-          <a:p>
-            <a:pPr algn="ctr"/>
-          </a:p>
-        </p:txBody>
-      </p:sp>
-      <p:sp>
-        <p:nvSpPr>
-          <p:cNvPr id="15" name="TextBox 14"/>
-          <p:cNvSpPr txBox="1"/>
-          <p:nvPr/>
-        </p:nvSpPr>
-        <p:spPr>
-          <a:xfrm>
-            <a:off x="6556248" y="1664208"/>
-            <a:ext cx="4672583" cy="310896"/>
-          </a:xfrm>
-          <a:prstGeom prst="rect">
-            <a:avLst/>
-          </a:prstGeom>
-          <a:noFill/>
-        </p:spPr>
-        <p:txBody>
-          <a:bodyPr wrap="square" anchor="t">
-            <a:spAutoFit/>
-          </a:bodyPr>
-          <a:lstStyle/>
-          <a:p>
-            <a:pPr algn="l"/>
-            <a:r>
-              <a:rPr sz="1400" b="1">
-                <a:solidFill>
-                  <a:srgbClr val="C48052"/>
-                </a:solidFill>
-                <a:latin typeface="Aptos"/>
-              </a:rPr>
-              <a:t>Default pull set</a:t>
-            </a:r>
-          </a:p>
-        </p:txBody>
-      </p:sp>
-      <p:sp>
-        <p:nvSpPr>
-          <p:cNvPr id="16" name="TextBox 15"/>
-          <p:cNvSpPr txBox="1"/>
-          <p:nvPr/>
-        </p:nvSpPr>
-        <p:spPr>
-          <a:xfrm>
-            <a:off x="6556248" y="2121408"/>
-            <a:ext cx="4672583" cy="3721608"/>
-          </a:xfrm>
-          <a:prstGeom prst="rect">
-            <a:avLst/>
-          </a:prstGeom>
-          <a:noFill/>
-        </p:spPr>
-        <p:txBody>
-          <a:bodyPr wrap="square" anchor="t" lIns="38100" rIns="38100" tIns="25400" bIns="25400">
-            <a:noAutofit/>
-          </a:bodyPr>
-          <a:lstStyle/>
-          <a:p>
-            <a:pPr>
-              <a:spcAft>
-                <a:spcPts val="600"/>
-              </a:spcAft>
-              <a:defRPr sz="1500">
-                <a:solidFill>
-                  <a:srgbClr val="B4BAAE"/>
-                </a:solidFill>
-                <a:latin typeface="Aptos"/>
-              </a:defRPr>
-            </a:pPr>
-            <a:r>
-              <a:rPr sz="1500" b="0" i="0">
-                <a:latin typeface="Calibri"/>
-              </a:rPr>
-              <a:t>qwen3-embedding:8b</a:t>
-            </a:r>
-            <a:endParaRPr sz="1500" b="0" i="0">
-              <a:latin typeface="Calibri"/>
-            </a:endParaRPr>
-          </a:p>
-          <a:p>
-            <a:pPr>
-              <a:spcAft>
-                <a:spcPts val="600"/>
-              </a:spcAft>
-              <a:defRPr sz="1500">
-                <a:solidFill>
-                  <a:srgbClr val="B4BAAE"/>
-                </a:solidFill>
-                <a:latin typeface="Aptos"/>
-              </a:defRPr>
-            </a:pPr>
-            <a:r>
-              <a:rPr sz="1500" b="0" i="0">
-                <a:latin typeface="Calibri"/>
-              </a:rPr>
-              <a:t>glm-5:cloud</a:t>
-            </a:r>
-            <a:endParaRPr sz="1500" b="0" i="0">
-              <a:latin typeface="Calibri"/>
-            </a:endParaRPr>
-          </a:p>
-          <a:p>
-            <a:pPr>
-              <a:spcAft>
-                <a:spcPts val="600"/>
-              </a:spcAft>
-              <a:defRPr sz="1500">
-                <a:solidFill>
-                  <a:srgbClr val="B4BAAE"/>
-                </a:solidFill>
-                <a:latin typeface="Aptos"/>
-              </a:defRPr>
-            </a:pPr>
-            <a:r>
-              <a:rPr sz="1500" b="0" i="0">
-                <a:latin typeface="Calibri"/>
-              </a:rPr>
-              <a:t>qwen3.5:cloud</a:t>
-            </a:r>
-            <a:endParaRPr sz="1500" b="0" i="0">
-              <a:latin typeface="Calibri"/>
-            </a:endParaRPr>
-          </a:p>
-          <a:p>
-            <a:pPr>
-              <a:spcAft>
-                <a:spcPts val="600"/>
-              </a:spcAft>
-              <a:defRPr sz="1500">
-                <a:solidFill>
-                  <a:srgbClr val="B4BAAE"/>
-                </a:solidFill>
-                <a:latin typeface="Aptos"/>
-              </a:defRPr>
-            </a:pPr>
-            <a:r>
-              <a:rPr sz="1500" b="0" i="0">
-                <a:latin typeface="Calibri"/>
-              </a:rPr>
-              <a:t>gpt-oss:120b-cloud</a:t>
-            </a:r>
-            <a:endParaRPr sz="1500" b="0" i="0">
-              <a:latin typeface="Calibri"/>
-            </a:endParaRPr>
-          </a:p>
-          <a:p>
-            <a:pPr>
-              <a:spcAft>
-                <a:spcPts val="600"/>
-              </a:spcAft>
-              <a:defRPr sz="1500">
-                <a:solidFill>
-                  <a:srgbClr val="B4BAAE"/>
-                </a:solidFill>
-                <a:latin typeface="Aptos"/>
-              </a:defRPr>
-            </a:pPr>
-            <a:r>
-              <a:rPr sz="1500" b="0" i="0">
-                <a:latin typeface="Calibri"/>
-              </a:rPr>
-              <a:t>qwen3.5:397b-cloud</a:t>
-            </a:r>
-            <a:endParaRPr sz="1500" b="0" i="0">
-              <a:latin typeface="Calibri"/>
-            </a:endParaRPr>
-          </a:p>
-          <a:p>
-            <a:pPr>
-              <a:spcAft>
-                <a:spcPts val="600"/>
-              </a:spcAft>
-              <a:defRPr sz="1500">
-                <a:solidFill>
-                  <a:srgbClr val="B4BAAE"/>
-                </a:solidFill>
-                <a:latin typeface="Aptos"/>
-              </a:defRPr>
-            </a:pPr>
-            <a:r>
-              <a:rPr sz="1500" b="0" i="0">
-                <a:latin typeface="Calibri"/>
-              </a:rPr>
-              <a:t>llama3.2-vision:11b</a:t>
-            </a:r>
-            <a:endParaRPr sz="1500" b="0" i="0">
+              <a:t>Install into `%LOCALAPPDATA%\Programs\Ollama` with the official PowerShell installer script and then reopen PowerShell so PATH updates are visible.</a:t>
+            </a:r>
+            <a:endParaRPr sz="400" b="0" i="0">
               <a:latin typeface="Calibri"/>
             </a:endParaRPr>
           </a:p>
@@ -8785,7 +8776,7 @@
             <a:avLst/>
           </a:prstGeom>
           <a:solidFill>
-            <a:srgbClr val="E0AB5D"/>
+            <a:srgbClr val="48BF8F"/>
           </a:solidFill>
           <a:ln>
             <a:noFill/>
@@ -8828,7 +8819,7 @@
             <a:avLst/>
           </a:prstGeom>
           <a:solidFill>
-            <a:srgbClr val="E0AB5D"/>
+            <a:srgbClr val="48BF8F"/>
           </a:solidFill>
           <a:ln>
             <a:noFill/>
@@ -8871,7 +8862,7 @@
             <a:avLst/>
           </a:prstGeom>
           <a:solidFill>
-            <a:srgbClr val="E0AB5D"/>
+            <a:srgbClr val="48BF8F"/>
           </a:solidFill>
           <a:ln>
             <a:noFill/>
@@ -8914,7 +8905,7 @@
             <a:avLst/>
           </a:prstGeom>
           <a:solidFill>
-            <a:srgbClr val="E0AB5D"/>
+            <a:srgbClr val="48BF8F"/>
           </a:solidFill>
           <a:ln>
             <a:noFill/>
@@ -8968,11 +8959,11 @@
             <a:r>
               <a:rPr sz="1000" b="1">
                 <a:solidFill>
-                  <a:srgbClr val="E0AB5D"/>
+                  <a:srgbClr val="48BF8F"/>
                 </a:solidFill>
                 <a:latin typeface="Aptos"/>
               </a:rPr>
-              <a:t>README AND BOOK DRIVEN OPERATOR SAFEGUARDS</a:t>
+              <a:t>SERVICE, API, AND MODEL PULLS</a:t>
             </a:r>
           </a:p>
         </p:txBody>
@@ -9007,7 +8998,7 @@
                 </a:solidFill>
                 <a:latin typeface="Aptos Display"/>
               </a:rPr>
-              <a:t>GPU Guard And Reconnect UX</a:t>
+              <a:t>Ollama Readiness</a:t>
             </a:r>
           </a:p>
         </p:txBody>
@@ -9072,7 +9063,7 @@
             <a:avLst/>
           </a:prstGeom>
           <a:solidFill>
-            <a:srgbClr val="E0AB5D"/>
+            <a:srgbClr val="48BF8F"/>
           </a:solidFill>
           <a:ln>
             <a:noFill/>
@@ -9126,11 +9117,11 @@
             <a:r>
               <a:rPr sz="1400" b="1">
                 <a:solidFill>
-                  <a:srgbClr val="E0AB5D"/>
+                  <a:srgbClr val="48BF8F"/>
                 </a:solidFill>
                 <a:latin typeface="Aptos"/>
               </a:rPr>
-              <a:t>Embedding-memory pre-flight guard</a:t>
+              <a:t>Service and API</a:t>
             </a:r>
           </a:p>
         </p:txBody>
@@ -9161,7 +9152,7 @@
               <a:spcAft>
                 <a:spcPts val="600"/>
               </a:spcAft>
-              <a:defRPr sz="1400">
+              <a:defRPr sz="1500">
                 <a:solidFill>
                   <a:srgbClr val="B4BAAE"/>
                 </a:solidFill>
@@ -9169,12 +9160,12 @@
               </a:defRPr>
             </a:pPr>
             <a:r>
-              <a:rPr sz="1400" b="0" i="0">
+              <a:rPr sz="1500" b="0" i="0">
                 <a:latin typeface="Calibri"/>
               </a:rPr>
-              <a:t>README and BookOfTlamatini now document an embedding-memory pre-flight guard for GPU hosts before a directory-context load starts its FAISS embedding burst.</a:t>
-            </a:r>
-            <a:endParaRPr sz="1400" b="0" i="0">
+              <a:t>Verify the CLI with `ollama --version`, start `ollama serve` if the background service is not already active, and confirm `http://127.0.0.1:11434/api/tags` responds.</a:t>
+            </a:r>
+            <a:endParaRPr sz="1500" b="0" i="0">
               <a:latin typeface="Calibri"/>
             </a:endParaRPr>
           </a:p>
@@ -9183,7 +9174,7 @@
               <a:spcAft>
                 <a:spcPts val="600"/>
               </a:spcAft>
-              <a:defRPr sz="1400">
+              <a:defRPr sz="1500">
                 <a:solidFill>
                   <a:srgbClr val="B4BAAE"/>
                 </a:solidFill>
@@ -9191,21 +9182,167 @@
               </a:defRPr>
             </a:pPr>
             <a:r>
-              <a:rPr sz="1400" b="0" i="0">
+              <a:rPr sz="1500" b="0" i="0">
                 <a:latin typeface="Calibri"/>
               </a:rPr>
-              <a:t>On supported NVIDIA hosts it estimates embedding-model VRAM pressure, and when the projected load is too high it emits a non-blocking warning chat bubble instead of silently letting RAM&lt;-&gt;VRAM thrash surprise the operator.</a:t>
-            </a:r>
-            <a:endParaRPr sz="1400" b="0" i="0">
+              <a:t>Pull the default repository model tags exactly as written if you want the shipped config and agent templates to work unchanged.</a:t>
+            </a:r>
+            <a:endParaRPr sz="1500" b="0" i="0">
               <a:latin typeface="Calibri"/>
             </a:endParaRPr>
           </a:p>
+        </p:txBody>
+      </p:sp>
+      <p:sp>
+        <p:nvSpPr>
+          <p:cNvPr id="13" name="Rounded Rectangle 12"/>
+          <p:cNvSpPr/>
+          <p:nvPr/>
+        </p:nvSpPr>
+        <p:spPr>
+          <a:xfrm>
+            <a:off x="6355080" y="1463040"/>
+            <a:ext cx="5074920" cy="4526280"/>
+          </a:xfrm>
+          <a:prstGeom prst="roundRect">
+            <a:avLst/>
+          </a:prstGeom>
+          <a:solidFill>
+            <a:srgbClr val="161A19"/>
+          </a:solidFill>
+          <a:ln>
+            <a:solidFill>
+              <a:srgbClr val="595F56"/>
+            </a:solidFill>
+          </a:ln>
+        </p:spPr>
+        <p:style>
+          <a:lnRef idx="1">
+            <a:schemeClr val="accent1"/>
+          </a:lnRef>
+          <a:fillRef idx="3">
+            <a:schemeClr val="accent1"/>
+          </a:fillRef>
+          <a:effectRef idx="2">
+            <a:schemeClr val="accent1"/>
+          </a:effectRef>
+          <a:fontRef idx="minor">
+            <a:schemeClr val="lt1"/>
+          </a:fontRef>
+        </p:style>
+        <p:txBody>
+          <a:bodyPr rtlCol="0" anchor="ctr"/>
+          <a:lstStyle/>
+          <a:p>
+            <a:pPr algn="ctr"/>
+          </a:p>
+        </p:txBody>
+      </p:sp>
+      <p:sp>
+        <p:nvSpPr>
+          <p:cNvPr id="14" name="Rectangle 13"/>
+          <p:cNvSpPr/>
+          <p:nvPr/>
+        </p:nvSpPr>
+        <p:spPr>
+          <a:xfrm>
+            <a:off x="6355080" y="1463040"/>
+            <a:ext cx="5074920" cy="109728"/>
+          </a:xfrm>
+          <a:prstGeom prst="rect">
+            <a:avLst/>
+          </a:prstGeom>
+          <a:solidFill>
+            <a:srgbClr val="C48052"/>
+          </a:solidFill>
+          <a:ln>
+            <a:noFill/>
+          </a:ln>
+        </p:spPr>
+        <p:style>
+          <a:lnRef idx="1">
+            <a:schemeClr val="accent1"/>
+          </a:lnRef>
+          <a:fillRef idx="3">
+            <a:schemeClr val="accent1"/>
+          </a:fillRef>
+          <a:effectRef idx="2">
+            <a:schemeClr val="accent1"/>
+          </a:effectRef>
+          <a:fontRef idx="minor">
+            <a:schemeClr val="lt1"/>
+          </a:fontRef>
+        </p:style>
+        <p:txBody>
+          <a:bodyPr rtlCol="0" anchor="ctr"/>
+          <a:lstStyle/>
+          <a:p>
+            <a:pPr algn="ctr"/>
+          </a:p>
+        </p:txBody>
+      </p:sp>
+      <p:sp>
+        <p:nvSpPr>
+          <p:cNvPr id="15" name="TextBox 14"/>
+          <p:cNvSpPr txBox="1"/>
+          <p:nvPr/>
+        </p:nvSpPr>
+        <p:spPr>
+          <a:xfrm>
+            <a:off x="6556248" y="1664208"/>
+            <a:ext cx="4672583" cy="310896"/>
+          </a:xfrm>
+          <a:prstGeom prst="rect">
+            <a:avLst/>
+          </a:prstGeom>
+          <a:noFill/>
+        </p:spPr>
+        <p:txBody>
+          <a:bodyPr wrap="square" anchor="t">
+            <a:spAutoFit/>
+          </a:bodyPr>
+          <a:lstStyle/>
+          <a:p>
+            <a:pPr algn="l"/>
+            <a:r>
+              <a:rPr sz="1400" b="1">
+                <a:solidFill>
+                  <a:srgbClr val="C48052"/>
+                </a:solidFill>
+                <a:latin typeface="Aptos"/>
+              </a:rPr>
+              <a:t>Default pull set</a:t>
+            </a:r>
+          </a:p>
+        </p:txBody>
+      </p:sp>
+      <p:sp>
+        <p:nvSpPr>
+          <p:cNvPr id="16" name="TextBox 15"/>
+          <p:cNvSpPr txBox="1"/>
+          <p:nvPr/>
+        </p:nvSpPr>
+        <p:spPr>
+          <a:xfrm>
+            <a:off x="6556248" y="2121408"/>
+            <a:ext cx="4672583" cy="3721608"/>
+          </a:xfrm>
+          <a:prstGeom prst="rect">
+            <a:avLst/>
+          </a:prstGeom>
+          <a:noFill/>
+        </p:spPr>
+        <p:txBody>
+          <a:bodyPr wrap="square" anchor="t" lIns="38100" rIns="38100" tIns="25400" bIns="25400">
+            <a:noAutofit/>
+          </a:bodyPr>
+          <a:lstStyle/>
           <a:p>
             <a:pPr>
               <a:spcAft>
                 <a:spcPts val="600"/>
               </a:spcAft>
-              <a:defRPr sz="1400">
+              <a:defRPr sz="1500">
                 <a:solidFill>
                   <a:srgbClr val="B4BAAE"/>
                 </a:solidFill>
@@ -9213,12 +9350,12 @@
               </a:defRPr>
             </a:pPr>
             <a:r>
-              <a:rPr sz="1400" b="0" i="0">
+              <a:rPr sz="1500" b="0" i="0">
                 <a:latin typeface="Calibri"/>
               </a:rPr>
-              <a:t>CPU-only, AMD, and Apple-Silicon hosts stay fail-open: the guard becomes a no-op when the NVIDIA probe does not apply.</a:t>
-            </a:r>
-            <a:endParaRPr sz="1400" b="0" i="0">
+              <a:t>qwen3-embedding:8b</a:t>
+            </a:r>
+            <a:endParaRPr sz="1500" b="0" i="0">
               <a:latin typeface="Calibri"/>
             </a:endParaRPr>
           </a:p>
@@ -9227,7 +9364,7 @@
               <a:spcAft>
                 <a:spcPts val="600"/>
               </a:spcAft>
-              <a:defRPr sz="1400">
+              <a:defRPr sz="1500">
                 <a:solidFill>
                   <a:srgbClr val="B4BAAE"/>
                 </a:solidFill>
@@ -9235,167 +9372,21 @@
               </a:defRPr>
             </a:pPr>
             <a:r>
-              <a:rPr sz="1400" b="0" i="0">
+              <a:rPr sz="1500" b="0" i="0">
                 <a:latin typeface="Calibri"/>
               </a:rPr>
-              <a:t>The practical operator response is straightforward: switch to a smaller embedding model, reconnect if needed, or proceed knowingly with the heavier model.</a:t>
-            </a:r>
-            <a:endParaRPr sz="1400" b="0" i="0">
+              <a:t>glm-5:cloud</a:t>
+            </a:r>
+            <a:endParaRPr sz="1500" b="0" i="0">
               <a:latin typeface="Calibri"/>
             </a:endParaRPr>
           </a:p>
-        </p:txBody>
-      </p:sp>
-      <p:sp>
-        <p:nvSpPr>
-          <p:cNvPr id="13" name="Rounded Rectangle 12"/>
-          <p:cNvSpPr/>
-          <p:nvPr/>
-        </p:nvSpPr>
-        <p:spPr>
-          <a:xfrm>
-            <a:off x="6355080" y="1463040"/>
-            <a:ext cx="5074920" cy="4526280"/>
-          </a:xfrm>
-          <a:prstGeom prst="roundRect">
-            <a:avLst/>
-          </a:prstGeom>
-          <a:solidFill>
-            <a:srgbClr val="161A19"/>
-          </a:solidFill>
-          <a:ln>
-            <a:solidFill>
-              <a:srgbClr val="595F56"/>
-            </a:solidFill>
-          </a:ln>
-        </p:spPr>
-        <p:style>
-          <a:lnRef idx="1">
-            <a:schemeClr val="accent1"/>
-          </a:lnRef>
-          <a:fillRef idx="3">
-            <a:schemeClr val="accent1"/>
-          </a:fillRef>
-          <a:effectRef idx="2">
-            <a:schemeClr val="accent1"/>
-          </a:effectRef>
-          <a:fontRef idx="minor">
-            <a:schemeClr val="lt1"/>
-          </a:fontRef>
-        </p:style>
-        <p:txBody>
-          <a:bodyPr rtlCol="0" anchor="ctr"/>
-          <a:lstStyle/>
-          <a:p>
-            <a:pPr algn="ctr"/>
-          </a:p>
-        </p:txBody>
-      </p:sp>
-      <p:sp>
-        <p:nvSpPr>
-          <p:cNvPr id="14" name="Rectangle 13"/>
-          <p:cNvSpPr/>
-          <p:nvPr/>
-        </p:nvSpPr>
-        <p:spPr>
-          <a:xfrm>
-            <a:off x="6355080" y="1463040"/>
-            <a:ext cx="5074920" cy="109728"/>
-          </a:xfrm>
-          <a:prstGeom prst="rect">
-            <a:avLst/>
-          </a:prstGeom>
-          <a:solidFill>
-            <a:srgbClr val="48BF8F"/>
-          </a:solidFill>
-          <a:ln>
-            <a:noFill/>
-          </a:ln>
-        </p:spPr>
-        <p:style>
-          <a:lnRef idx="1">
-            <a:schemeClr val="accent1"/>
-          </a:lnRef>
-          <a:fillRef idx="3">
-            <a:schemeClr val="accent1"/>
-          </a:fillRef>
-          <a:effectRef idx="2">
-            <a:schemeClr val="accent1"/>
-          </a:effectRef>
-          <a:fontRef idx="minor">
-            <a:schemeClr val="lt1"/>
-          </a:fontRef>
-        </p:style>
-        <p:txBody>
-          <a:bodyPr rtlCol="0" anchor="ctr"/>
-          <a:lstStyle/>
-          <a:p>
-            <a:pPr algn="ctr"/>
-          </a:p>
-        </p:txBody>
-      </p:sp>
-      <p:sp>
-        <p:nvSpPr>
-          <p:cNvPr id="15" name="TextBox 14"/>
-          <p:cNvSpPr txBox="1"/>
-          <p:nvPr/>
-        </p:nvSpPr>
-        <p:spPr>
-          <a:xfrm>
-            <a:off x="6556248" y="1664208"/>
-            <a:ext cx="4672583" cy="310896"/>
-          </a:xfrm>
-          <a:prstGeom prst="rect">
-            <a:avLst/>
-          </a:prstGeom>
-          <a:noFill/>
-        </p:spPr>
-        <p:txBody>
-          <a:bodyPr wrap="square" anchor="t">
-            <a:spAutoFit/>
-          </a:bodyPr>
-          <a:lstStyle/>
-          <a:p>
-            <a:pPr algn="l"/>
-            <a:r>
-              <a:rPr sz="1400" b="1">
-                <a:solidFill>
-                  <a:srgbClr val="48BF8F"/>
-                </a:solidFill>
-                <a:latin typeface="Aptos"/>
-              </a:rPr>
-              <a:t>Reconnect and restart safeguards</a:t>
-            </a:r>
-          </a:p>
-        </p:txBody>
-      </p:sp>
-      <p:sp>
-        <p:nvSpPr>
-          <p:cNvPr id="16" name="TextBox 15"/>
-          <p:cNvSpPr txBox="1"/>
-          <p:nvPr/>
-        </p:nvSpPr>
-        <p:spPr>
-          <a:xfrm>
-            <a:off x="6556248" y="2121408"/>
-            <a:ext cx="4672583" cy="3721608"/>
-          </a:xfrm>
-          <a:prstGeom prst="rect">
-            <a:avLst/>
-          </a:prstGeom>
-          <a:noFill/>
-        </p:spPr>
-        <p:txBody>
-          <a:bodyPr wrap="square" anchor="t" lIns="38100" rIns="38100" tIns="25400" bIns="25400">
-            <a:noAutofit/>
-          </a:bodyPr>
-          <a:lstStyle/>
           <a:p>
             <a:pPr>
               <a:spcAft>
                 <a:spcPts val="600"/>
               </a:spcAft>
-              <a:defRPr sz="1400">
+              <a:defRPr sz="1500">
                 <a:solidFill>
                   <a:srgbClr val="B4BAAE"/>
                 </a:solidFill>
@@ -9403,12 +9394,12 @@
               </a:defRPr>
             </a:pPr>
             <a:r>
-              <a:rPr sz="1400" b="0" i="0">
+              <a:rPr sz="1500" b="0" i="0">
                 <a:latin typeface="Calibri"/>
               </a:rPr>
-              <a:t>Config -&gt; Models and Config -&gt; URLs dialogs now track their pre-edit baseline and can show a reconnect-required dialog when the saved values change what the live chat session should trust.</a:t>
-            </a:r>
-            <a:endParaRPr sz="1400" b="0" i="0">
+              <a:t>qwen3.5:cloud</a:t>
+            </a:r>
+            <a:endParaRPr sz="1500" b="0" i="0">
               <a:latin typeface="Calibri"/>
             </a:endParaRPr>
           </a:p>
@@ -9417,7 +9408,7 @@
               <a:spcAft>
                 <a:spcPts val="600"/>
               </a:spcAft>
-              <a:defRPr sz="1400">
+              <a:defRPr sz="1500">
                 <a:solidFill>
                   <a:srgbClr val="B4BAAE"/>
                 </a:solidFill>
@@ -9425,12 +9416,12 @@
               </a:defRPr>
             </a:pPr>
             <a:r>
-              <a:rPr sz="1400" b="0" i="0">
+              <a:rPr sz="1500" b="0" i="0">
                 <a:latin typeface="Calibri"/>
               </a:rPr>
-              <a:t>The restored-session autoload path now buffers early WebSocket frames so context-loading spinners and disabled-input state are not lost during automatic reconnect/restore flows.</a:t>
-            </a:r>
-            <a:endParaRPr sz="1400" b="0" i="0">
+              <a:t>gpt-oss:120b-cloud</a:t>
+            </a:r>
+            <a:endParaRPr sz="1500" b="0" i="0">
               <a:latin typeface="Calibri"/>
             </a:endParaRPr>
           </a:p>
@@ -9439,7 +9430,7 @@
               <a:spcAft>
                 <a:spcPts val="600"/>
               </a:spcAft>
-              <a:defRPr sz="1400">
+              <a:defRPr sz="1500">
                 <a:solidFill>
                   <a:srgbClr val="B4BAAE"/>
                 </a:solidFill>
@@ -9447,12 +9438,34 @@
               </a:defRPr>
             </a:pPr>
             <a:r>
-              <a:rPr sz="1400" b="0" i="0">
+              <a:rPr sz="1500" b="0" i="0">
                 <a:latin typeface="Calibri"/>
               </a:rPr>
-              <a:t>Startup and restart behavior now also re-apply GPU performance and Ollama keep-alive hooks in the background on supported NVIDIA Windows hosts, improving warm-model readiness without blocking Django boot.</a:t>
-            </a:r>
-            <a:endParaRPr sz="1400" b="0" i="0">
+              <a:t>qwen3.5:397b-cloud</a:t>
+            </a:r>
+            <a:endParaRPr sz="1500" b="0" i="0">
+              <a:latin typeface="Calibri"/>
+            </a:endParaRPr>
+          </a:p>
+          <a:p>
+            <a:pPr>
+              <a:spcAft>
+                <a:spcPts val="600"/>
+              </a:spcAft>
+              <a:defRPr sz="1500">
+                <a:solidFill>
+                  <a:srgbClr val="B4BAAE"/>
+                </a:solidFill>
+                <a:latin typeface="Aptos"/>
+              </a:defRPr>
+            </a:pPr>
+            <a:r>
+              <a:rPr sz="1500" b="0" i="0">
+                <a:latin typeface="Calibri"/>
+              </a:rPr>
+              <a:t>llama3.2-vision:11b</a:t>
+            </a:r>
+            <a:endParaRPr sz="1500" b="0" i="0">
               <a:latin typeface="Calibri"/>
             </a:endParaRPr>
           </a:p>
@@ -9534,7 +9547,7 @@
             <a:avLst/>
           </a:prstGeom>
           <a:solidFill>
-            <a:srgbClr val="C48052"/>
+            <a:srgbClr val="E0AB5D"/>
           </a:solidFill>
           <a:ln>
             <a:noFill/>
@@ -9577,7 +9590,7 @@
             <a:avLst/>
           </a:prstGeom>
           <a:solidFill>
-            <a:srgbClr val="C48052"/>
+            <a:srgbClr val="E0AB5D"/>
           </a:solidFill>
           <a:ln>
             <a:noFill/>
@@ -9620,7 +9633,7 @@
             <a:avLst/>
           </a:prstGeom>
           <a:solidFill>
-            <a:srgbClr val="C48052"/>
+            <a:srgbClr val="E0AB5D"/>
           </a:solidFill>
           <a:ln>
             <a:noFill/>
@@ -9663,7 +9676,7 @@
             <a:avLst/>
           </a:prstGeom>
           <a:solidFill>
-            <a:srgbClr val="C48052"/>
+            <a:srgbClr val="E0AB5D"/>
           </a:solidFill>
           <a:ln>
             <a:noFill/>
@@ -9717,11 +9730,11 @@
             <a:r>
               <a:rPr sz="1000" b="1">
                 <a:solidFill>
-                  <a:srgbClr val="C48052"/>
+                  <a:srgbClr val="E0AB5D"/>
                 </a:solidFill>
                 <a:latin typeface="Aptos"/>
               </a:rPr>
-              <a:t>DEVELOPMENT, MCP BOOTSTRAP, AND ASGI</a:t>
+              <a:t>README AND BOOK DRIVEN OPERATOR SAFEGUARDS</a:t>
             </a:r>
           </a:p>
         </p:txBody>
@@ -9756,7 +9769,7 @@
                 </a:solidFill>
                 <a:latin typeface="Aptos Display"/>
               </a:rPr>
-              <a:t>Running Modes</a:t>
+              <a:t>GPU Guard And Reconnect UX</a:t>
             </a:r>
           </a:p>
         </p:txBody>
@@ -9821,7 +9834,7 @@
             <a:avLst/>
           </a:prstGeom>
           <a:solidFill>
-            <a:srgbClr val="C48052"/>
+            <a:srgbClr val="E0AB5D"/>
           </a:solidFill>
           <a:ln>
             <a:noFill/>
@@ -9875,11 +9888,11 @@
             <a:r>
               <a:rPr sz="1400" b="1">
                 <a:solidFill>
-                  <a:srgbClr val="C48052"/>
+                  <a:srgbClr val="E0AB5D"/>
                 </a:solidFill>
                 <a:latin typeface="Aptos"/>
               </a:rPr>
-              <a:t>How to run</a:t>
+              <a:t>Embedding-memory pre-flight guard</a:t>
             </a:r>
           </a:p>
         </p:txBody>
@@ -9910,7 +9923,7 @@
               <a:spcAft>
                 <a:spcPts val="600"/>
               </a:spcAft>
-              <a:defRPr sz="1500">
+              <a:defRPr sz="1400">
                 <a:solidFill>
                   <a:srgbClr val="B4BAAE"/>
                 </a:solidFill>
@@ -9918,12 +9931,12 @@
               </a:defRPr>
             </a:pPr>
             <a:r>
-              <a:rPr sz="1500" b="0" i="0">
+              <a:rPr sz="1400" b="0" i="0">
                 <a:latin typeface="Calibri"/>
               </a:rPr>
-              <a:t>Development server: `python Tlamatini/manage.py runserver --noreload`.</a:t>
-            </a:r>
-            <a:endParaRPr sz="1500" b="0" i="0">
+              <a:t>README and BookOfTlamatini now document an embedding-memory pre-flight guard for GPU hosts before a directory-context load starts its FAISS embedding burst.</a:t>
+            </a:r>
+            <a:endParaRPr sz="1400" b="0" i="0">
               <a:latin typeface="Calibri"/>
             </a:endParaRPr>
           </a:p>
@@ -9932,7 +9945,7 @@
               <a:spcAft>
                 <a:spcPts val="600"/>
               </a:spcAft>
-              <a:defRPr sz="1500">
+              <a:defRPr sz="1400">
                 <a:solidFill>
                   <a:srgbClr val="B4BAAE"/>
                 </a:solidFill>
@@ -9940,12 +9953,12 @@
               </a:defRPr>
             </a:pPr>
             <a:r>
-              <a:rPr sz="1500" b="0" i="0">
+              <a:rPr sz="1400" b="0" i="0">
                 <a:latin typeface="Calibri"/>
               </a:rPr>
-              <a:t>Preferred async/dev bootstrap: `python Tlamatini/manage.py startserver`, which starts MCP services before the Django server.</a:t>
-            </a:r>
-            <a:endParaRPr sz="1500" b="0" i="0">
+              <a:t>On supported NVIDIA hosts it estimates embedding-model VRAM pressure, and when the projected load is too high it emits a non-blocking warning chat bubble instead of silently letting RAM&lt;-&gt;VRAM thrash surprise the operator.</a:t>
+            </a:r>
+            <a:endParaRPr sz="1400" b="0" i="0">
               <a:latin typeface="Calibri"/>
             </a:endParaRPr>
           </a:p>
@@ -9954,7 +9967,7 @@
               <a:spcAft>
                 <a:spcPts val="600"/>
               </a:spcAft>
-              <a:defRPr sz="1500">
+              <a:defRPr sz="1400">
                 <a:solidFill>
                   <a:srgbClr val="B4BAAE"/>
                 </a:solidFill>
@@ -9962,12 +9975,12 @@
               </a:defRPr>
             </a:pPr>
             <a:r>
-              <a:rPr sz="1500" b="0" i="0">
+              <a:rPr sz="1400" b="0" i="0">
                 <a:latin typeface="Calibri"/>
               </a:rPr>
-              <a:t>Production-style ASGI entrypoint: `daphne -b 127.0.0.1 -p 8000 tlamatini.asgi:application`.</a:t>
-            </a:r>
-            <a:endParaRPr sz="1500" b="0" i="0">
+              <a:t>CPU-only, AMD, and Apple-Silicon hosts stay fail-open: the guard becomes a no-op when the NVIDIA probe does not apply.</a:t>
+            </a:r>
+            <a:endParaRPr sz="1400" b="0" i="0">
               <a:latin typeface="Calibri"/>
             </a:endParaRPr>
           </a:p>
@@ -9976,7 +9989,7 @@
               <a:spcAft>
                 <a:spcPts val="600"/>
               </a:spcAft>
-              <a:defRPr sz="1500">
+              <a:defRPr sz="1400">
                 <a:solidFill>
                   <a:srgbClr val="B4BAAE"/>
                 </a:solidFill>
@@ -9984,21 +9997,167 @@
               </a:defRPr>
             </a:pPr>
             <a:r>
-              <a:rPr sz="1500" b="0" i="0">
+              <a:rPr sz="1400" b="0" i="0">
                 <a:latin typeface="Calibri"/>
               </a:rPr>
-              <a:t>Current startup also re-applies GPU-performance / Ollama-pinning hooks in the background on supported NVIDIA Windows hosts, so restart-time behavior stays closer to the tuned development baseline.</a:t>
-            </a:r>
-            <a:endParaRPr sz="1500" b="0" i="0">
+              <a:t>The practical operator response is straightforward: switch to a smaller embedding model, reconnect if needed, or proceed knowingly with the heavier model.</a:t>
+            </a:r>
+            <a:endParaRPr sz="1400" b="0" i="0">
               <a:latin typeface="Calibri"/>
             </a:endParaRPr>
           </a:p>
+        </p:txBody>
+      </p:sp>
+      <p:sp>
+        <p:nvSpPr>
+          <p:cNvPr id="13" name="Rounded Rectangle 12"/>
+          <p:cNvSpPr/>
+          <p:nvPr/>
+        </p:nvSpPr>
+        <p:spPr>
+          <a:xfrm>
+            <a:off x="6355080" y="1463040"/>
+            <a:ext cx="5074920" cy="4526280"/>
+          </a:xfrm>
+          <a:prstGeom prst="roundRect">
+            <a:avLst/>
+          </a:prstGeom>
+          <a:solidFill>
+            <a:srgbClr val="161A19"/>
+          </a:solidFill>
+          <a:ln>
+            <a:solidFill>
+              <a:srgbClr val="595F56"/>
+            </a:solidFill>
+          </a:ln>
+        </p:spPr>
+        <p:style>
+          <a:lnRef idx="1">
+            <a:schemeClr val="accent1"/>
+          </a:lnRef>
+          <a:fillRef idx="3">
+            <a:schemeClr val="accent1"/>
+          </a:fillRef>
+          <a:effectRef idx="2">
+            <a:schemeClr val="accent1"/>
+          </a:effectRef>
+          <a:fontRef idx="minor">
+            <a:schemeClr val="lt1"/>
+          </a:fontRef>
+        </p:style>
+        <p:txBody>
+          <a:bodyPr rtlCol="0" anchor="ctr"/>
+          <a:lstStyle/>
+          <a:p>
+            <a:pPr algn="ctr"/>
+          </a:p>
+        </p:txBody>
+      </p:sp>
+      <p:sp>
+        <p:nvSpPr>
+          <p:cNvPr id="14" name="Rectangle 13"/>
+          <p:cNvSpPr/>
+          <p:nvPr/>
+        </p:nvSpPr>
+        <p:spPr>
+          <a:xfrm>
+            <a:off x="6355080" y="1463040"/>
+            <a:ext cx="5074920" cy="109728"/>
+          </a:xfrm>
+          <a:prstGeom prst="rect">
+            <a:avLst/>
+          </a:prstGeom>
+          <a:solidFill>
+            <a:srgbClr val="48BF8F"/>
+          </a:solidFill>
+          <a:ln>
+            <a:noFill/>
+          </a:ln>
+        </p:spPr>
+        <p:style>
+          <a:lnRef idx="1">
+            <a:schemeClr val="accent1"/>
+          </a:lnRef>
+          <a:fillRef idx="3">
+            <a:schemeClr val="accent1"/>
+          </a:fillRef>
+          <a:effectRef idx="2">
+            <a:schemeClr val="accent1"/>
+          </a:effectRef>
+          <a:fontRef idx="minor">
+            <a:schemeClr val="lt1"/>
+          </a:fontRef>
+        </p:style>
+        <p:txBody>
+          <a:bodyPr rtlCol="0" anchor="ctr"/>
+          <a:lstStyle/>
+          <a:p>
+            <a:pPr algn="ctr"/>
+          </a:p>
+        </p:txBody>
+      </p:sp>
+      <p:sp>
+        <p:nvSpPr>
+          <p:cNvPr id="15" name="TextBox 14"/>
+          <p:cNvSpPr txBox="1"/>
+          <p:nvPr/>
+        </p:nvSpPr>
+        <p:spPr>
+          <a:xfrm>
+            <a:off x="6556248" y="1664208"/>
+            <a:ext cx="4672583" cy="310896"/>
+          </a:xfrm>
+          <a:prstGeom prst="rect">
+            <a:avLst/>
+          </a:prstGeom>
+          <a:noFill/>
+        </p:spPr>
+        <p:txBody>
+          <a:bodyPr wrap="square" anchor="t">
+            <a:spAutoFit/>
+          </a:bodyPr>
+          <a:lstStyle/>
+          <a:p>
+            <a:pPr algn="l"/>
+            <a:r>
+              <a:rPr sz="1400" b="1">
+                <a:solidFill>
+                  <a:srgbClr val="48BF8F"/>
+                </a:solidFill>
+                <a:latin typeface="Aptos"/>
+              </a:rPr>
+              <a:t>Reconnect and restart safeguards</a:t>
+            </a:r>
+          </a:p>
+        </p:txBody>
+      </p:sp>
+      <p:sp>
+        <p:nvSpPr>
+          <p:cNvPr id="16" name="TextBox 15"/>
+          <p:cNvSpPr txBox="1"/>
+          <p:nvPr/>
+        </p:nvSpPr>
+        <p:spPr>
+          <a:xfrm>
+            <a:off x="6556248" y="2121408"/>
+            <a:ext cx="4672583" cy="3721608"/>
+          </a:xfrm>
+          <a:prstGeom prst="rect">
+            <a:avLst/>
+          </a:prstGeom>
+          <a:noFill/>
+        </p:spPr>
+        <p:txBody>
+          <a:bodyPr wrap="square" anchor="t" lIns="38100" rIns="38100" tIns="25400" bIns="25400">
+            <a:noAutofit/>
+          </a:bodyPr>
+          <a:lstStyle/>
           <a:p>
             <a:pPr>
               <a:spcAft>
                 <a:spcPts val="600"/>
               </a:spcAft>
-              <a:defRPr sz="1500">
+              <a:defRPr sz="1400">
                 <a:solidFill>
                   <a:srgbClr val="B4BAAE"/>
                 </a:solidFill>
@@ -10006,12 +10165,12 @@
               </a:defRPr>
             </a:pPr>
             <a:r>
-              <a:rPr sz="1500" b="0" i="0">
+              <a:rPr sz="1400" b="0" i="0">
                 <a:latin typeface="Calibri"/>
               </a:rPr>
-              <a:t>That same early startup window is also where a staged `DB/ToLoad/db.sqlite3` file is promoted into the live database path, before Django opens SQLite.</a:t>
-            </a:r>
-            <a:endParaRPr sz="1500" b="0" i="0">
+              <a:t>Config -&gt; Models and Config -&gt; URLs dialogs now track their pre-edit baseline and can show a reconnect-required dialog when the saved values change what the live chat session should trust.</a:t>
+            </a:r>
+            <a:endParaRPr sz="1400" b="0" i="0">
               <a:latin typeface="Calibri"/>
             </a:endParaRPr>
           </a:p>
@@ -10020,7 +10179,7 @@
               <a:spcAft>
                 <a:spcPts val="600"/>
               </a:spcAft>
-              <a:defRPr sz="1500">
+              <a:defRPr sz="1400">
                 <a:solidFill>
                   <a:srgbClr val="B4BAAE"/>
                 </a:solidFill>
@@ -10028,167 +10187,21 @@
               </a:defRPr>
             </a:pPr>
             <a:r>
-              <a:rPr sz="1500" b="0" i="0">
+              <a:rPr sz="1400" b="0" i="0">
                 <a:latin typeface="Calibri"/>
               </a:rPr>
-              <a:t>Startup cleans pool state, repopulates the agent registry, launches MCP metrics/file-search servers, and then serves HTTP plus WebSocket traffic.</a:t>
-            </a:r>
-            <a:endParaRPr sz="1500" b="0" i="0">
+              <a:t>The restored-session autoload path now buffers early WebSocket frames so context-loading spinners and disabled-input state are not lost during automatic reconnect/restore flows.</a:t>
+            </a:r>
+            <a:endParaRPr sz="1400" b="0" i="0">
               <a:latin typeface="Calibri"/>
             </a:endParaRPr>
           </a:p>
-        </p:txBody>
-      </p:sp>
-      <p:sp>
-        <p:nvSpPr>
-          <p:cNvPr id="13" name="Rounded Rectangle 12"/>
-          <p:cNvSpPr/>
-          <p:nvPr/>
-        </p:nvSpPr>
-        <p:spPr>
-          <a:xfrm>
-            <a:off x="6355080" y="1463040"/>
-            <a:ext cx="5074920" cy="4526280"/>
-          </a:xfrm>
-          <a:prstGeom prst="roundRect">
-            <a:avLst/>
-          </a:prstGeom>
-          <a:solidFill>
-            <a:srgbClr val="161A19"/>
-          </a:solidFill>
-          <a:ln>
-            <a:solidFill>
-              <a:srgbClr val="595F56"/>
-            </a:solidFill>
-          </a:ln>
-        </p:spPr>
-        <p:style>
-          <a:lnRef idx="1">
-            <a:schemeClr val="accent1"/>
-          </a:lnRef>
-          <a:fillRef idx="3">
-            <a:schemeClr val="accent1"/>
-          </a:fillRef>
-          <a:effectRef idx="2">
-            <a:schemeClr val="accent1"/>
-          </a:effectRef>
-          <a:fontRef idx="minor">
-            <a:schemeClr val="lt1"/>
-          </a:fontRef>
-        </p:style>
-        <p:txBody>
-          <a:bodyPr rtlCol="0" anchor="ctr"/>
-          <a:lstStyle/>
-          <a:p>
-            <a:pPr algn="ctr"/>
-          </a:p>
-        </p:txBody>
-      </p:sp>
-      <p:sp>
-        <p:nvSpPr>
-          <p:cNvPr id="14" name="Rectangle 13"/>
-          <p:cNvSpPr/>
-          <p:nvPr/>
-        </p:nvSpPr>
-        <p:spPr>
-          <a:xfrm>
-            <a:off x="6355080" y="1463040"/>
-            <a:ext cx="5074920" cy="109728"/>
-          </a:xfrm>
-          <a:prstGeom prst="rect">
-            <a:avLst/>
-          </a:prstGeom>
-          <a:solidFill>
-            <a:srgbClr val="48BF8F"/>
-          </a:solidFill>
-          <a:ln>
-            <a:noFill/>
-          </a:ln>
-        </p:spPr>
-        <p:style>
-          <a:lnRef idx="1">
-            <a:schemeClr val="accent1"/>
-          </a:lnRef>
-          <a:fillRef idx="3">
-            <a:schemeClr val="accent1"/>
-          </a:fillRef>
-          <a:effectRef idx="2">
-            <a:schemeClr val="accent1"/>
-          </a:effectRef>
-          <a:fontRef idx="minor">
-            <a:schemeClr val="lt1"/>
-          </a:fontRef>
-        </p:style>
-        <p:txBody>
-          <a:bodyPr rtlCol="0" anchor="ctr"/>
-          <a:lstStyle/>
-          <a:p>
-            <a:pPr algn="ctr"/>
-          </a:p>
-        </p:txBody>
-      </p:sp>
-      <p:sp>
-        <p:nvSpPr>
-          <p:cNvPr id="15" name="TextBox 14"/>
-          <p:cNvSpPr txBox="1"/>
-          <p:nvPr/>
-        </p:nvSpPr>
-        <p:spPr>
-          <a:xfrm>
-            <a:off x="6556248" y="1664208"/>
-            <a:ext cx="4672583" cy="310896"/>
-          </a:xfrm>
-          <a:prstGeom prst="rect">
-            <a:avLst/>
-          </a:prstGeom>
-          <a:noFill/>
-        </p:spPr>
-        <p:txBody>
-          <a:bodyPr wrap="square" anchor="t">
-            <a:spAutoFit/>
-          </a:bodyPr>
-          <a:lstStyle/>
-          <a:p>
-            <a:pPr algn="l"/>
-            <a:r>
-              <a:rPr sz="1400" b="1">
-                <a:solidFill>
-                  <a:srgbClr val="48BF8F"/>
-                </a:solidFill>
-                <a:latin typeface="Aptos"/>
-              </a:rPr>
-              <a:t>What startup does</a:t>
-            </a:r>
-          </a:p>
-        </p:txBody>
-      </p:sp>
-      <p:sp>
-        <p:nvSpPr>
-          <p:cNvPr id="16" name="TextBox 15"/>
-          <p:cNvSpPr txBox="1"/>
-          <p:nvPr/>
-        </p:nvSpPr>
-        <p:spPr>
-          <a:xfrm>
-            <a:off x="6556248" y="2121408"/>
-            <a:ext cx="4672583" cy="3721608"/>
-          </a:xfrm>
-          <a:prstGeom prst="rect">
-            <a:avLst/>
-          </a:prstGeom>
-          <a:noFill/>
-        </p:spPr>
-        <p:txBody>
-          <a:bodyPr wrap="square" anchor="t" lIns="38100" rIns="38100" tIns="25400" bIns="25400">
-            <a:noAutofit/>
-          </a:bodyPr>
-          <a:lstStyle/>
           <a:p>
             <a:pPr>
               <a:spcAft>
                 <a:spcPts val="600"/>
               </a:spcAft>
-              <a:defRPr sz="1500">
+              <a:defRPr sz="1400">
                 <a:solidFill>
                   <a:srgbClr val="B4BAAE"/>
                 </a:solidFill>
@@ -10196,78 +10209,12 @@
               </a:defRPr>
             </a:pPr>
             <a:r>
-              <a:rPr sz="1500" b="0" i="0">
+              <a:rPr sz="1400" b="0" i="0">
                 <a:latin typeface="Calibri"/>
               </a:rPr>
-              <a:t>Initializes Django and runtime guards in manage.py.</a:t>
-            </a:r>
-            <a:endParaRPr sz="1500" b="0" i="0">
-              <a:latin typeface="Calibri"/>
-            </a:endParaRPr>
-          </a:p>
-          <a:p>
-            <a:pPr>
-              <a:spcAft>
-                <a:spcPts val="600"/>
-              </a:spcAft>
-              <a:defRPr sz="1500">
-                <a:solidFill>
-                  <a:srgbClr val="B4BAAE"/>
-                </a:solidFill>
-                <a:latin typeface="Aptos"/>
-              </a:defRPr>
-            </a:pPr>
-            <a:r>
-              <a:rPr sz="1500" b="0" i="0">
-                <a:latin typeface="Calibri"/>
-              </a:rPr>
-              <a:t>Cleans pool state and repopulates the Agent table from current disk templates.</a:t>
-            </a:r>
-            <a:endParaRPr sz="1500" b="0" i="0">
-              <a:latin typeface="Calibri"/>
-            </a:endParaRPr>
-          </a:p>
-          <a:p>
-            <a:pPr>
-              <a:spcAft>
-                <a:spcPts val="600"/>
-              </a:spcAft>
-              <a:defRPr sz="1500">
-                <a:solidFill>
-                  <a:srgbClr val="B4BAAE"/>
-                </a:solidFill>
-                <a:latin typeface="Aptos"/>
-              </a:defRPr>
-            </a:pPr>
-            <a:r>
-              <a:rPr sz="1500" b="0" i="0">
-                <a:latin typeface="Calibri"/>
-              </a:rPr>
-              <a:t>Launches MCP metrics and gRPC file-search servers before steady-state traffic.</a:t>
-            </a:r>
-            <a:endParaRPr sz="1500" b="0" i="0">
-              <a:latin typeface="Calibri"/>
-            </a:endParaRPr>
-          </a:p>
-          <a:p>
-            <a:pPr>
-              <a:spcAft>
-                <a:spcPts val="600"/>
-              </a:spcAft>
-              <a:defRPr sz="1500">
-                <a:solidFill>
-                  <a:srgbClr val="B4BAAE"/>
-                </a:solidFill>
-                <a:latin typeface="Aptos"/>
-              </a:defRPr>
-            </a:pPr>
-            <a:r>
-              <a:rPr sz="1500" b="0" i="0">
-                <a:latin typeface="Calibri"/>
-              </a:rPr>
-              <a:t>Handles shutdown by killing tracked/untracked agent processes and clearing pool artifacts.</a:t>
-            </a:r>
-            <a:endParaRPr sz="1500" b="0" i="0">
+              <a:t>Startup and restart behavior now also re-apply GPU performance and Ollama keep-alive hooks in the background on supported NVIDIA Windows hosts, improving warm-model readiness without blocking Django boot.</a:t>
+            </a:r>
+            <a:endParaRPr sz="1400" b="0" i="0">
               <a:latin typeface="Calibri"/>
             </a:endParaRPr>
           </a:p>
@@ -10349,7 +10296,7 @@
             <a:avLst/>
           </a:prstGeom>
           <a:solidFill>
-            <a:srgbClr val="E0AB5D"/>
+            <a:srgbClr val="C48052"/>
           </a:solidFill>
           <a:ln>
             <a:noFill/>
@@ -10392,7 +10339,7 @@
             <a:avLst/>
           </a:prstGeom>
           <a:solidFill>
-            <a:srgbClr val="E0AB5D"/>
+            <a:srgbClr val="C48052"/>
           </a:solidFill>
           <a:ln>
             <a:noFill/>
@@ -10435,7 +10382,7 @@
             <a:avLst/>
           </a:prstGeom>
           <a:solidFill>
-            <a:srgbClr val="E0AB5D"/>
+            <a:srgbClr val="C48052"/>
           </a:solidFill>
           <a:ln>
             <a:noFill/>
@@ -10478,7 +10425,7 @@
             <a:avLst/>
           </a:prstGeom>
           <a:solidFill>
-            <a:srgbClr val="E0AB5D"/>
+            <a:srgbClr val="C48052"/>
           </a:solidFill>
           <a:ln>
             <a:noFill/>
@@ -10532,11 +10479,11 @@
             <a:r>
               <a:rPr sz="1000" b="1">
                 <a:solidFill>
-                  <a:srgbClr val="E0AB5D"/>
+                  <a:srgbClr val="C48052"/>
                 </a:solidFill>
                 <a:latin typeface="Aptos"/>
               </a:rPr>
-              <a:t>SOURCE USAGE IS SEPARATE FROM RELEASE BUILDING</a:t>
+              <a:t>DEVELOPMENT, MCP BOOTSTRAP, AND ASGI</a:t>
             </a:r>
           </a:p>
         </p:txBody>
@@ -10571,7 +10518,7 @@
                 </a:solidFill>
                 <a:latin typeface="Aptos Display"/>
               </a:rPr>
-              <a:t>Packaging Path</a:t>
+              <a:t>Running Modes</a:t>
             </a:r>
           </a:p>
         </p:txBody>
@@ -10584,18 +10531,18 @@
         </p:nvSpPr>
         <p:spPr>
           <a:xfrm>
-            <a:off x="1051560" y="1828800"/>
-            <a:ext cx="1591056" cy="685800"/>
+            <a:off x="713232" y="1463040"/>
+            <a:ext cx="5394960" cy="4526280"/>
           </a:xfrm>
           <a:prstGeom prst="roundRect">
             <a:avLst/>
           </a:prstGeom>
           <a:solidFill>
-            <a:srgbClr val="202322"/>
+            <a:srgbClr val="161A19"/>
           </a:solidFill>
           <a:ln>
             <a:solidFill>
-              <a:srgbClr val="E0AB5D"/>
+              <a:srgbClr val="595F56"/>
             </a:solidFill>
           </a:ln>
         </p:spPr>
@@ -10623,14 +10570,57 @@
       </p:sp>
       <p:sp>
         <p:nvSpPr>
-          <p:cNvPr id="10" name="TextBox 9"/>
+          <p:cNvPr id="10" name="Rectangle 9"/>
+          <p:cNvSpPr/>
+          <p:nvPr/>
+        </p:nvSpPr>
+        <p:spPr>
+          <a:xfrm>
+            <a:off x="713232" y="1463040"/>
+            <a:ext cx="5394960" cy="109728"/>
+          </a:xfrm>
+          <a:prstGeom prst="rect">
+            <a:avLst/>
+          </a:prstGeom>
+          <a:solidFill>
+            <a:srgbClr val="C48052"/>
+          </a:solidFill>
+          <a:ln>
+            <a:noFill/>
+          </a:ln>
+        </p:spPr>
+        <p:style>
+          <a:lnRef idx="1">
+            <a:schemeClr val="accent1"/>
+          </a:lnRef>
+          <a:fillRef idx="3">
+            <a:schemeClr val="accent1"/>
+          </a:fillRef>
+          <a:effectRef idx="2">
+            <a:schemeClr val="accent1"/>
+          </a:effectRef>
+          <a:fontRef idx="minor">
+            <a:schemeClr val="lt1"/>
+          </a:fontRef>
+        </p:style>
+        <p:txBody>
+          <a:bodyPr rtlCol="0" anchor="ctr"/>
+          <a:lstStyle/>
+          <a:p>
+            <a:pPr algn="ctr"/>
+          </a:p>
+        </p:txBody>
+      </p:sp>
+      <p:sp>
+        <p:nvSpPr>
+          <p:cNvPr id="11" name="TextBox 10"/>
           <p:cNvSpPr txBox="1"/>
           <p:nvPr/>
         </p:nvSpPr>
         <p:spPr>
           <a:xfrm>
-            <a:off x="1124712" y="1993392"/>
-            <a:ext cx="1444752" cy="256032"/>
+            <a:off x="914400" y="1664208"/>
+            <a:ext cx="4992624" cy="310896"/>
           </a:xfrm>
           <a:prstGeom prst="rect">
             <a:avLst/>
@@ -10643,727 +10633,29 @@
           </a:bodyPr>
           <a:lstStyle/>
           <a:p>
-            <a:pPr algn="ctr"/>
-            <a:r>
-              <a:rPr sz="1000" b="1">
-                <a:solidFill>
-                  <a:srgbClr val="E8E8DE"/>
+            <a:pPr algn="l"/>
+            <a:r>
+              <a:rPr sz="1400" b="1">
+                <a:solidFill>
+                  <a:srgbClr val="C48052"/>
                 </a:solidFill>
                 <a:latin typeface="Aptos"/>
               </a:rPr>
-              <a:t>build.py</a:t>
-            </a:r>
-          </a:p>
-        </p:txBody>
-      </p:sp>
-      <p:sp>
-        <p:nvSpPr>
-          <p:cNvPr id="11" name="TextBox 10"/>
+              <a:t>How to run</a:t>
+            </a:r>
+          </a:p>
+        </p:txBody>
+      </p:sp>
+      <p:sp>
+        <p:nvSpPr>
+          <p:cNvPr id="12" name="TextBox 11"/>
           <p:cNvSpPr txBox="1"/>
           <p:nvPr/>
         </p:nvSpPr>
         <p:spPr>
           <a:xfrm>
-            <a:off x="2642615" y="2002536"/>
-            <a:ext cx="246888" cy="182880"/>
-          </a:xfrm>
-          <a:prstGeom prst="rect">
-            <a:avLst/>
-          </a:prstGeom>
-          <a:noFill/>
-        </p:spPr>
-        <p:txBody>
-          <a:bodyPr wrap="square" anchor="t">
-            <a:spAutoFit/>
-          </a:bodyPr>
-          <a:lstStyle/>
-          <a:p>
-            <a:pPr algn="ctr"/>
-            <a:r>
-              <a:rPr sz="1200" b="1">
-                <a:solidFill>
-                  <a:srgbClr val="E0AB5D"/>
-                </a:solidFill>
-                <a:latin typeface="Aptos"/>
-              </a:rPr>
-              <a:t>&gt;</a:t>
-            </a:r>
-          </a:p>
-        </p:txBody>
-      </p:sp>
-      <p:sp>
-        <p:nvSpPr>
-          <p:cNvPr id="12" name="Rounded Rectangle 11"/>
-          <p:cNvSpPr/>
-          <p:nvPr/>
-        </p:nvSpPr>
-        <p:spPr>
-          <a:xfrm>
-            <a:off x="2889503" y="1828800"/>
-            <a:ext cx="1591056" cy="685800"/>
-          </a:xfrm>
-          <a:prstGeom prst="roundRect">
-            <a:avLst/>
-          </a:prstGeom>
-          <a:solidFill>
-            <a:srgbClr val="202322"/>
-          </a:solidFill>
-          <a:ln>
-            <a:solidFill>
-              <a:srgbClr val="E0AB5D"/>
-            </a:solidFill>
-          </a:ln>
-        </p:spPr>
-        <p:style>
-          <a:lnRef idx="1">
-            <a:schemeClr val="accent1"/>
-          </a:lnRef>
-          <a:fillRef idx="3">
-            <a:schemeClr val="accent1"/>
-          </a:fillRef>
-          <a:effectRef idx="2">
-            <a:schemeClr val="accent1"/>
-          </a:effectRef>
-          <a:fontRef idx="minor">
-            <a:schemeClr val="lt1"/>
-          </a:fontRef>
-        </p:style>
-        <p:txBody>
-          <a:bodyPr rtlCol="0" anchor="ctr"/>
-          <a:lstStyle/>
-          <a:p>
-            <a:pPr algn="ctr"/>
-          </a:p>
-        </p:txBody>
-      </p:sp>
-      <p:sp>
-        <p:nvSpPr>
-          <p:cNvPr id="13" name="TextBox 12"/>
-          <p:cNvSpPr txBox="1"/>
-          <p:nvPr/>
-        </p:nvSpPr>
-        <p:spPr>
-          <a:xfrm>
-            <a:off x="2962656" y="1993392"/>
-            <a:ext cx="1444752" cy="256032"/>
-          </a:xfrm>
-          <a:prstGeom prst="rect">
-            <a:avLst/>
-          </a:prstGeom>
-          <a:noFill/>
-        </p:spPr>
-        <p:txBody>
-          <a:bodyPr wrap="square" anchor="t">
-            <a:spAutoFit/>
-          </a:bodyPr>
-          <a:lstStyle/>
-          <a:p>
-            <a:pPr algn="ctr"/>
-            <a:r>
-              <a:rPr sz="1000" b="1">
-                <a:solidFill>
-                  <a:srgbClr val="E8E8DE"/>
-                </a:solidFill>
-                <a:latin typeface="Aptos"/>
-              </a:rPr>
-              <a:t>pkg.zip</a:t>
-            </a:r>
-          </a:p>
-        </p:txBody>
-      </p:sp>
-      <p:sp>
-        <p:nvSpPr>
-          <p:cNvPr id="14" name="TextBox 13"/>
-          <p:cNvSpPr txBox="1"/>
-          <p:nvPr/>
-        </p:nvSpPr>
-        <p:spPr>
-          <a:xfrm>
-            <a:off x="4480559" y="2002536"/>
-            <a:ext cx="246888" cy="182880"/>
-          </a:xfrm>
-          <a:prstGeom prst="rect">
-            <a:avLst/>
-          </a:prstGeom>
-          <a:noFill/>
-        </p:spPr>
-        <p:txBody>
-          <a:bodyPr wrap="square" anchor="t">
-            <a:spAutoFit/>
-          </a:bodyPr>
-          <a:lstStyle/>
-          <a:p>
-            <a:pPr algn="ctr"/>
-            <a:r>
-              <a:rPr sz="1200" b="1">
-                <a:solidFill>
-                  <a:srgbClr val="E0AB5D"/>
-                </a:solidFill>
-                <a:latin typeface="Aptos"/>
-              </a:rPr>
-              <a:t>&gt;</a:t>
-            </a:r>
-          </a:p>
-        </p:txBody>
-      </p:sp>
-      <p:sp>
-        <p:nvSpPr>
-          <p:cNvPr id="15" name="Rounded Rectangle 14"/>
-          <p:cNvSpPr/>
-          <p:nvPr/>
-        </p:nvSpPr>
-        <p:spPr>
-          <a:xfrm>
-            <a:off x="4727448" y="1828800"/>
-            <a:ext cx="1591056" cy="685800"/>
-          </a:xfrm>
-          <a:prstGeom prst="roundRect">
-            <a:avLst/>
-          </a:prstGeom>
-          <a:solidFill>
-            <a:srgbClr val="202322"/>
-          </a:solidFill>
-          <a:ln>
-            <a:solidFill>
-              <a:srgbClr val="E0AB5D"/>
-            </a:solidFill>
-          </a:ln>
-        </p:spPr>
-        <p:style>
-          <a:lnRef idx="1">
-            <a:schemeClr val="accent1"/>
-          </a:lnRef>
-          <a:fillRef idx="3">
-            <a:schemeClr val="accent1"/>
-          </a:fillRef>
-          <a:effectRef idx="2">
-            <a:schemeClr val="accent1"/>
-          </a:effectRef>
-          <a:fontRef idx="minor">
-            <a:schemeClr val="lt1"/>
-          </a:fontRef>
-        </p:style>
-        <p:txBody>
-          <a:bodyPr rtlCol="0" anchor="ctr"/>
-          <a:lstStyle/>
-          <a:p>
-            <a:pPr algn="ctr"/>
-          </a:p>
-        </p:txBody>
-      </p:sp>
-      <p:sp>
-        <p:nvSpPr>
-          <p:cNvPr id="16" name="TextBox 15"/>
-          <p:cNvSpPr txBox="1"/>
-          <p:nvPr/>
-        </p:nvSpPr>
-        <p:spPr>
-          <a:xfrm>
-            <a:off x="4800600" y="1993392"/>
-            <a:ext cx="1444752" cy="256032"/>
-          </a:xfrm>
-          <a:prstGeom prst="rect">
-            <a:avLst/>
-          </a:prstGeom>
-          <a:noFill/>
-        </p:spPr>
-        <p:txBody>
-          <a:bodyPr wrap="square" anchor="t">
-            <a:spAutoFit/>
-          </a:bodyPr>
-          <a:lstStyle/>
-          <a:p>
-            <a:pPr algn="ctr"/>
-            <a:r>
-              <a:rPr sz="1000" b="1">
-                <a:solidFill>
-                  <a:srgbClr val="E8E8DE"/>
-                </a:solidFill>
-                <a:latin typeface="Aptos"/>
-              </a:rPr>
-              <a:t>build_uninstaller</a:t>
-            </a:r>
-          </a:p>
-        </p:txBody>
-      </p:sp>
-      <p:sp>
-        <p:nvSpPr>
-          <p:cNvPr id="17" name="TextBox 16"/>
-          <p:cNvSpPr txBox="1"/>
-          <p:nvPr/>
-        </p:nvSpPr>
-        <p:spPr>
-          <a:xfrm>
-            <a:off x="6318504" y="2002536"/>
-            <a:ext cx="246888" cy="182880"/>
-          </a:xfrm>
-          <a:prstGeom prst="rect">
-            <a:avLst/>
-          </a:prstGeom>
-          <a:noFill/>
-        </p:spPr>
-        <p:txBody>
-          <a:bodyPr wrap="square" anchor="t">
-            <a:spAutoFit/>
-          </a:bodyPr>
-          <a:lstStyle/>
-          <a:p>
-            <a:pPr algn="ctr"/>
-            <a:r>
-              <a:rPr sz="1200" b="1">
-                <a:solidFill>
-                  <a:srgbClr val="E0AB5D"/>
-                </a:solidFill>
-                <a:latin typeface="Aptos"/>
-              </a:rPr>
-              <a:t>&gt;</a:t>
-            </a:r>
-          </a:p>
-        </p:txBody>
-      </p:sp>
-      <p:sp>
-        <p:nvSpPr>
-          <p:cNvPr id="18" name="Rounded Rectangle 17"/>
-          <p:cNvSpPr/>
-          <p:nvPr/>
-        </p:nvSpPr>
-        <p:spPr>
-          <a:xfrm>
-            <a:off x="6565392" y="1828800"/>
-            <a:ext cx="1591056" cy="685800"/>
-          </a:xfrm>
-          <a:prstGeom prst="roundRect">
-            <a:avLst/>
-          </a:prstGeom>
-          <a:solidFill>
-            <a:srgbClr val="202322"/>
-          </a:solidFill>
-          <a:ln>
-            <a:solidFill>
-              <a:srgbClr val="E0AB5D"/>
-            </a:solidFill>
-          </a:ln>
-        </p:spPr>
-        <p:style>
-          <a:lnRef idx="1">
-            <a:schemeClr val="accent1"/>
-          </a:lnRef>
-          <a:fillRef idx="3">
-            <a:schemeClr val="accent1"/>
-          </a:fillRef>
-          <a:effectRef idx="2">
-            <a:schemeClr val="accent1"/>
-          </a:effectRef>
-          <a:fontRef idx="minor">
-            <a:schemeClr val="lt1"/>
-          </a:fontRef>
-        </p:style>
-        <p:txBody>
-          <a:bodyPr rtlCol="0" anchor="ctr"/>
-          <a:lstStyle/>
-          <a:p>
-            <a:pPr algn="ctr"/>
-          </a:p>
-        </p:txBody>
-      </p:sp>
-      <p:sp>
-        <p:nvSpPr>
-          <p:cNvPr id="19" name="TextBox 18"/>
-          <p:cNvSpPr txBox="1"/>
-          <p:nvPr/>
-        </p:nvSpPr>
-        <p:spPr>
-          <a:xfrm>
-            <a:off x="6638544" y="1993392"/>
-            <a:ext cx="1444752" cy="256032"/>
-          </a:xfrm>
-          <a:prstGeom prst="rect">
-            <a:avLst/>
-          </a:prstGeom>
-          <a:noFill/>
-        </p:spPr>
-        <p:txBody>
-          <a:bodyPr wrap="square" anchor="t">
-            <a:spAutoFit/>
-          </a:bodyPr>
-          <a:lstStyle/>
-          <a:p>
-            <a:pPr algn="ctr"/>
-            <a:r>
-              <a:rPr sz="1000" b="1">
-                <a:solidFill>
-                  <a:srgbClr val="E8E8DE"/>
-                </a:solidFill>
-                <a:latin typeface="Aptos"/>
-              </a:rPr>
-              <a:t>Uninstaller</a:t>
-            </a:r>
-          </a:p>
-        </p:txBody>
-      </p:sp>
-      <p:sp>
-        <p:nvSpPr>
-          <p:cNvPr id="20" name="TextBox 19"/>
-          <p:cNvSpPr txBox="1"/>
-          <p:nvPr/>
-        </p:nvSpPr>
-        <p:spPr>
-          <a:xfrm>
-            <a:off x="8156448" y="2002536"/>
-            <a:ext cx="246888" cy="182880"/>
-          </a:xfrm>
-          <a:prstGeom prst="rect">
-            <a:avLst/>
-          </a:prstGeom>
-          <a:noFill/>
-        </p:spPr>
-        <p:txBody>
-          <a:bodyPr wrap="square" anchor="t">
-            <a:spAutoFit/>
-          </a:bodyPr>
-          <a:lstStyle/>
-          <a:p>
-            <a:pPr algn="ctr"/>
-            <a:r>
-              <a:rPr sz="1200" b="1">
-                <a:solidFill>
-                  <a:srgbClr val="E0AB5D"/>
-                </a:solidFill>
-                <a:latin typeface="Aptos"/>
-              </a:rPr>
-              <a:t>&gt;</a:t>
-            </a:r>
-          </a:p>
-        </p:txBody>
-      </p:sp>
-      <p:sp>
-        <p:nvSpPr>
-          <p:cNvPr id="21" name="Rounded Rectangle 20"/>
-          <p:cNvSpPr/>
-          <p:nvPr/>
-        </p:nvSpPr>
-        <p:spPr>
-          <a:xfrm>
-            <a:off x="8403336" y="1828800"/>
-            <a:ext cx="1591056" cy="685800"/>
-          </a:xfrm>
-          <a:prstGeom prst="roundRect">
-            <a:avLst/>
-          </a:prstGeom>
-          <a:solidFill>
-            <a:srgbClr val="202322"/>
-          </a:solidFill>
-          <a:ln>
-            <a:solidFill>
-              <a:srgbClr val="E0AB5D"/>
-            </a:solidFill>
-          </a:ln>
-        </p:spPr>
-        <p:style>
-          <a:lnRef idx="1">
-            <a:schemeClr val="accent1"/>
-          </a:lnRef>
-          <a:fillRef idx="3">
-            <a:schemeClr val="accent1"/>
-          </a:fillRef>
-          <a:effectRef idx="2">
-            <a:schemeClr val="accent1"/>
-          </a:effectRef>
-          <a:fontRef idx="minor">
-            <a:schemeClr val="lt1"/>
-          </a:fontRef>
-        </p:style>
-        <p:txBody>
-          <a:bodyPr rtlCol="0" anchor="ctr"/>
-          <a:lstStyle/>
-          <a:p>
-            <a:pPr algn="ctr"/>
-          </a:p>
-        </p:txBody>
-      </p:sp>
-      <p:sp>
-        <p:nvSpPr>
-          <p:cNvPr id="22" name="TextBox 21"/>
-          <p:cNvSpPr txBox="1"/>
-          <p:nvPr/>
-        </p:nvSpPr>
-        <p:spPr>
-          <a:xfrm>
-            <a:off x="8476488" y="1993392"/>
-            <a:ext cx="1444752" cy="256032"/>
-          </a:xfrm>
-          <a:prstGeom prst="rect">
-            <a:avLst/>
-          </a:prstGeom>
-          <a:noFill/>
-        </p:spPr>
-        <p:txBody>
-          <a:bodyPr wrap="square" anchor="t">
-            <a:spAutoFit/>
-          </a:bodyPr>
-          <a:lstStyle/>
-          <a:p>
-            <a:pPr algn="ctr"/>
-            <a:r>
-              <a:rPr sz="1000" b="1">
-                <a:solidFill>
-                  <a:srgbClr val="E8E8DE"/>
-                </a:solidFill>
-                <a:latin typeface="Aptos"/>
-              </a:rPr>
-              <a:t>build_installer</a:t>
-            </a:r>
-          </a:p>
-        </p:txBody>
-      </p:sp>
-      <p:sp>
-        <p:nvSpPr>
-          <p:cNvPr id="23" name="TextBox 22"/>
-          <p:cNvSpPr txBox="1"/>
-          <p:nvPr/>
-        </p:nvSpPr>
-        <p:spPr>
-          <a:xfrm>
-            <a:off x="9994392" y="2002536"/>
-            <a:ext cx="246888" cy="182880"/>
-          </a:xfrm>
-          <a:prstGeom prst="rect">
-            <a:avLst/>
-          </a:prstGeom>
-          <a:noFill/>
-        </p:spPr>
-        <p:txBody>
-          <a:bodyPr wrap="square" anchor="t">
-            <a:spAutoFit/>
-          </a:bodyPr>
-          <a:lstStyle/>
-          <a:p>
-            <a:pPr algn="ctr"/>
-            <a:r>
-              <a:rPr sz="1200" b="1">
-                <a:solidFill>
-                  <a:srgbClr val="E0AB5D"/>
-                </a:solidFill>
-                <a:latin typeface="Aptos"/>
-              </a:rPr>
-              <a:t>&gt;</a:t>
-            </a:r>
-          </a:p>
-        </p:txBody>
-      </p:sp>
-      <p:sp>
-        <p:nvSpPr>
-          <p:cNvPr id="24" name="Rounded Rectangle 23"/>
-          <p:cNvSpPr/>
-          <p:nvPr/>
-        </p:nvSpPr>
-        <p:spPr>
-          <a:xfrm>
-            <a:off x="10241280" y="1828800"/>
-            <a:ext cx="1591056" cy="685800"/>
-          </a:xfrm>
-          <a:prstGeom prst="roundRect">
-            <a:avLst/>
-          </a:prstGeom>
-          <a:solidFill>
-            <a:srgbClr val="202322"/>
-          </a:solidFill>
-          <a:ln>
-            <a:solidFill>
-              <a:srgbClr val="E0AB5D"/>
-            </a:solidFill>
-          </a:ln>
-        </p:spPr>
-        <p:style>
-          <a:lnRef idx="1">
-            <a:schemeClr val="accent1"/>
-          </a:lnRef>
-          <a:fillRef idx="3">
-            <a:schemeClr val="accent1"/>
-          </a:fillRef>
-          <a:effectRef idx="2">
-            <a:schemeClr val="accent1"/>
-          </a:effectRef>
-          <a:fontRef idx="minor">
-            <a:schemeClr val="lt1"/>
-          </a:fontRef>
-        </p:style>
-        <p:txBody>
-          <a:bodyPr rtlCol="0" anchor="ctr"/>
-          <a:lstStyle/>
-          <a:p>
-            <a:pPr algn="ctr"/>
-          </a:p>
-        </p:txBody>
-      </p:sp>
-      <p:sp>
-        <p:nvSpPr>
-          <p:cNvPr id="25" name="TextBox 24"/>
-          <p:cNvSpPr txBox="1"/>
-          <p:nvPr/>
-        </p:nvSpPr>
-        <p:spPr>
-          <a:xfrm>
-            <a:off x="10314432" y="1993392"/>
-            <a:ext cx="1444752" cy="256032"/>
-          </a:xfrm>
-          <a:prstGeom prst="rect">
-            <a:avLst/>
-          </a:prstGeom>
-          <a:noFill/>
-        </p:spPr>
-        <p:txBody>
-          <a:bodyPr wrap="square" anchor="t">
-            <a:spAutoFit/>
-          </a:bodyPr>
-          <a:lstStyle/>
-          <a:p>
-            <a:pPr algn="ctr"/>
-            <a:r>
-              <a:rPr sz="1000" b="1">
-                <a:solidFill>
-                  <a:srgbClr val="E8E8DE"/>
-                </a:solidFill>
-                <a:latin typeface="Aptos"/>
-              </a:rPr>
-              <a:t>Release</a:t>
-            </a:r>
-          </a:p>
-        </p:txBody>
-      </p:sp>
-      <p:sp>
-        <p:nvSpPr>
-          <p:cNvPr id="26" name="Rounded Rectangle 25"/>
-          <p:cNvSpPr/>
-          <p:nvPr/>
-        </p:nvSpPr>
-        <p:spPr>
-          <a:xfrm>
-            <a:off x="841248" y="3063240"/>
-            <a:ext cx="10378440" cy="2331720"/>
-          </a:xfrm>
-          <a:prstGeom prst="roundRect">
-            <a:avLst/>
-          </a:prstGeom>
-          <a:solidFill>
-            <a:srgbClr val="161A19"/>
-          </a:solidFill>
-          <a:ln>
-            <a:solidFill>
-              <a:srgbClr val="595F56"/>
-            </a:solidFill>
-          </a:ln>
-        </p:spPr>
-        <p:style>
-          <a:lnRef idx="1">
-            <a:schemeClr val="accent1"/>
-          </a:lnRef>
-          <a:fillRef idx="3">
-            <a:schemeClr val="accent1"/>
-          </a:fillRef>
-          <a:effectRef idx="2">
-            <a:schemeClr val="accent1"/>
-          </a:effectRef>
-          <a:fontRef idx="minor">
-            <a:schemeClr val="lt1"/>
-          </a:fontRef>
-        </p:style>
-        <p:txBody>
-          <a:bodyPr rtlCol="0" anchor="ctr"/>
-          <a:lstStyle/>
-          <a:p>
-            <a:pPr algn="ctr"/>
-          </a:p>
-        </p:txBody>
-      </p:sp>
-      <p:sp>
-        <p:nvSpPr>
-          <p:cNvPr id="27" name="Rectangle 26"/>
-          <p:cNvSpPr/>
-          <p:nvPr/>
-        </p:nvSpPr>
-        <p:spPr>
-          <a:xfrm>
-            <a:off x="841248" y="3063240"/>
-            <a:ext cx="10378440" cy="109728"/>
-          </a:xfrm>
-          <a:prstGeom prst="rect">
-            <a:avLst/>
-          </a:prstGeom>
-          <a:solidFill>
-            <a:srgbClr val="E0AB5D"/>
-          </a:solidFill>
-          <a:ln>
-            <a:noFill/>
-          </a:ln>
-        </p:spPr>
-        <p:style>
-          <a:lnRef idx="1">
-            <a:schemeClr val="accent1"/>
-          </a:lnRef>
-          <a:fillRef idx="3">
-            <a:schemeClr val="accent1"/>
-          </a:fillRef>
-          <a:effectRef idx="2">
-            <a:schemeClr val="accent1"/>
-          </a:effectRef>
-          <a:fontRef idx="minor">
-            <a:schemeClr val="lt1"/>
-          </a:fontRef>
-        </p:style>
-        <p:txBody>
-          <a:bodyPr rtlCol="0" anchor="ctr"/>
-          <a:lstStyle/>
-          <a:p>
-            <a:pPr algn="ctr"/>
-          </a:p>
-        </p:txBody>
-      </p:sp>
-      <p:sp>
-        <p:nvSpPr>
-          <p:cNvPr id="28" name="TextBox 27"/>
-          <p:cNvSpPr txBox="1"/>
-          <p:nvPr/>
-        </p:nvSpPr>
-        <p:spPr>
-          <a:xfrm>
-            <a:off x="1042416" y="3264408"/>
-            <a:ext cx="9976104" cy="310896"/>
-          </a:xfrm>
-          <a:prstGeom prst="rect">
-            <a:avLst/>
-          </a:prstGeom>
-          <a:noFill/>
-        </p:spPr>
-        <p:txBody>
-          <a:bodyPr wrap="square" anchor="t">
-            <a:spAutoFit/>
-          </a:bodyPr>
-          <a:lstStyle/>
-          <a:p>
-            <a:pPr algn="l"/>
-            <a:r>
-              <a:rPr sz="1400" b="1">
-                <a:solidFill>
-                  <a:srgbClr val="E0AB5D"/>
-                </a:solidFill>
-                <a:latin typeface="Aptos"/>
-              </a:rPr>
-              <a:t>Release rule</a:t>
-            </a:r>
-          </a:p>
-        </p:txBody>
-      </p:sp>
-      <p:sp>
-        <p:nvSpPr>
-          <p:cNvPr id="29" name="TextBox 28"/>
-          <p:cNvSpPr txBox="1"/>
-          <p:nvPr/>
-        </p:nvSpPr>
-        <p:spPr>
-          <a:xfrm>
-            <a:off x="1042416" y="3721608"/>
-            <a:ext cx="9976104" cy="1527048"/>
+            <a:off x="914400" y="2121408"/>
+            <a:ext cx="4992624" cy="3721608"/>
           </a:xfrm>
           <a:prstGeom prst="rect">
             <a:avLst/>
@@ -11380,7 +10672,7 @@
               <a:spcAft>
                 <a:spcPts val="600"/>
               </a:spcAft>
-              <a:defRPr sz="1600">
+              <a:defRPr sz="1500">
                 <a:solidFill>
                   <a:srgbClr val="B4BAAE"/>
                 </a:solidFill>
@@ -11388,12 +10680,12 @@
               </a:defRPr>
             </a:pPr>
             <a:r>
-              <a:rPr sz="1600" b="0" i="0">
+              <a:rPr sz="1500" b="0" i="0">
                 <a:latin typeface="Calibri"/>
               </a:rPr>
-              <a:t>Run packaging only when preparing a Windows distribution.</a:t>
-            </a:r>
-            <a:endParaRPr sz="1600" b="0" i="0">
+              <a:t>Development server: `python Tlamatini/manage.py runserver --noreload`.</a:t>
+            </a:r>
+            <a:endParaRPr sz="1500" b="0" i="0">
               <a:latin typeface="Calibri"/>
             </a:endParaRPr>
           </a:p>
@@ -11402,7 +10694,7 @@
               <a:spcAft>
                 <a:spcPts val="600"/>
               </a:spcAft>
-              <a:defRPr sz="1600">
+              <a:defRPr sz="1500">
                 <a:solidFill>
                   <a:srgbClr val="B4BAAE"/>
                 </a:solidFill>
@@ -11410,12 +10702,12 @@
               </a:defRPr>
             </a:pPr>
             <a:r>
-              <a:rPr sz="1600" b="0" i="0">
+              <a:rPr sz="1500" b="0" i="0">
                 <a:latin typeface="Calibri"/>
               </a:rPr>
-              <a:t>The final distributable is the full `dist/Tlamatini_Release/` folder, not one executable copied out of context.</a:t>
-            </a:r>
-            <a:endParaRPr sz="1600" b="0" i="0">
+              <a:t>Preferred async/dev bootstrap: `python Tlamatini/manage.py startserver`, which starts MCP services before the Django server.</a:t>
+            </a:r>
+            <a:endParaRPr sz="1500" b="0" i="0">
               <a:latin typeface="Calibri"/>
             </a:endParaRPr>
           </a:p>
@@ -11424,7 +10716,7 @@
               <a:spcAft>
                 <a:spcPts val="600"/>
               </a:spcAft>
-              <a:defRPr sz="1600">
+              <a:defRPr sz="1500">
                 <a:solidFill>
                   <a:srgbClr val="B4BAAE"/>
                 </a:solidFill>
@@ -11432,12 +10724,334 @@
               </a:defRPr>
             </a:pPr>
             <a:r>
-              <a:rPr sz="1600" b="0" i="0">
+              <a:rPr sz="1500" b="0" i="0">
                 <a:latin typeface="Calibri"/>
               </a:rPr>
-              <a:t>Installer scripts register shortcuts and `.flw` file associations and place the uninstaller next to the app.</a:t>
-            </a:r>
-            <a:endParaRPr sz="1600" b="0" i="0">
+              <a:t>Production-style ASGI entrypoint: `daphne -b 127.0.0.1 -p 8000 tlamatini.asgi:application`.</a:t>
+            </a:r>
+            <a:endParaRPr sz="1500" b="0" i="0">
+              <a:latin typeface="Calibri"/>
+            </a:endParaRPr>
+          </a:p>
+          <a:p>
+            <a:pPr>
+              <a:spcAft>
+                <a:spcPts val="600"/>
+              </a:spcAft>
+              <a:defRPr sz="1500">
+                <a:solidFill>
+                  <a:srgbClr val="B4BAAE"/>
+                </a:solidFill>
+                <a:latin typeface="Aptos"/>
+              </a:defRPr>
+            </a:pPr>
+            <a:r>
+              <a:rPr sz="1500" b="0" i="0">
+                <a:latin typeface="Calibri"/>
+              </a:rPr>
+              <a:t>Current startup also re-applies GPU-performance / Ollama-pinning hooks in the background on supported NVIDIA Windows hosts, so restart-time behavior stays closer to the tuned development baseline.</a:t>
+            </a:r>
+            <a:endParaRPr sz="1500" b="0" i="0">
+              <a:latin typeface="Calibri"/>
+            </a:endParaRPr>
+          </a:p>
+          <a:p>
+            <a:pPr>
+              <a:spcAft>
+                <a:spcPts val="600"/>
+              </a:spcAft>
+              <a:defRPr sz="1500">
+                <a:solidFill>
+                  <a:srgbClr val="B4BAAE"/>
+                </a:solidFill>
+                <a:latin typeface="Aptos"/>
+              </a:defRPr>
+            </a:pPr>
+            <a:r>
+              <a:rPr sz="1500" b="0" i="0">
+                <a:latin typeface="Calibri"/>
+              </a:rPr>
+              <a:t>That same early startup window is also where a staged `DB/ToLoad/db.sqlite3` file is promoted into the live database path, before Django opens SQLite.</a:t>
+            </a:r>
+            <a:endParaRPr sz="1500" b="0" i="0">
+              <a:latin typeface="Calibri"/>
+            </a:endParaRPr>
+          </a:p>
+          <a:p>
+            <a:pPr>
+              <a:spcAft>
+                <a:spcPts val="600"/>
+              </a:spcAft>
+              <a:defRPr sz="1500">
+                <a:solidFill>
+                  <a:srgbClr val="B4BAAE"/>
+                </a:solidFill>
+                <a:latin typeface="Aptos"/>
+              </a:defRPr>
+            </a:pPr>
+            <a:r>
+              <a:rPr sz="1500" b="0" i="0">
+                <a:latin typeface="Calibri"/>
+              </a:rPr>
+              <a:t>Startup now also prints a `--- [VERSION] Tlamatini ...` banner, making the running build visible in both the console and `tlamatini.log` without an HTTP call.</a:t>
+            </a:r>
+            <a:endParaRPr sz="1500" b="0" i="0">
+              <a:latin typeface="Calibri"/>
+            </a:endParaRPr>
+          </a:p>
+          <a:p>
+            <a:pPr>
+              <a:spcAft>
+                <a:spcPts val="600"/>
+              </a:spcAft>
+              <a:defRPr sz="1500">
+                <a:solidFill>
+                  <a:srgbClr val="B4BAAE"/>
+                </a:solidFill>
+                <a:latin typeface="Aptos"/>
+              </a:defRPr>
+            </a:pPr>
+            <a:r>
+              <a:rPr sz="1500" b="0" i="0">
+                <a:latin typeface="Calibri"/>
+              </a:rPr>
+              <a:t>Startup cleans pool state, repopulates the agent registry, launches MCP metrics/file-search servers, and then serves HTTP plus WebSocket traffic.</a:t>
+            </a:r>
+            <a:endParaRPr sz="1500" b="0" i="0">
+              <a:latin typeface="Calibri"/>
+            </a:endParaRPr>
+          </a:p>
+        </p:txBody>
+      </p:sp>
+      <p:sp>
+        <p:nvSpPr>
+          <p:cNvPr id="13" name="Rounded Rectangle 12"/>
+          <p:cNvSpPr/>
+          <p:nvPr/>
+        </p:nvSpPr>
+        <p:spPr>
+          <a:xfrm>
+            <a:off x="6355080" y="1463040"/>
+            <a:ext cx="5074920" cy="4526280"/>
+          </a:xfrm>
+          <a:prstGeom prst="roundRect">
+            <a:avLst/>
+          </a:prstGeom>
+          <a:solidFill>
+            <a:srgbClr val="161A19"/>
+          </a:solidFill>
+          <a:ln>
+            <a:solidFill>
+              <a:srgbClr val="595F56"/>
+            </a:solidFill>
+          </a:ln>
+        </p:spPr>
+        <p:style>
+          <a:lnRef idx="1">
+            <a:schemeClr val="accent1"/>
+          </a:lnRef>
+          <a:fillRef idx="3">
+            <a:schemeClr val="accent1"/>
+          </a:fillRef>
+          <a:effectRef idx="2">
+            <a:schemeClr val="accent1"/>
+          </a:effectRef>
+          <a:fontRef idx="minor">
+            <a:schemeClr val="lt1"/>
+          </a:fontRef>
+        </p:style>
+        <p:txBody>
+          <a:bodyPr rtlCol="0" anchor="ctr"/>
+          <a:lstStyle/>
+          <a:p>
+            <a:pPr algn="ctr"/>
+          </a:p>
+        </p:txBody>
+      </p:sp>
+      <p:sp>
+        <p:nvSpPr>
+          <p:cNvPr id="14" name="Rectangle 13"/>
+          <p:cNvSpPr/>
+          <p:nvPr/>
+        </p:nvSpPr>
+        <p:spPr>
+          <a:xfrm>
+            <a:off x="6355080" y="1463040"/>
+            <a:ext cx="5074920" cy="109728"/>
+          </a:xfrm>
+          <a:prstGeom prst="rect">
+            <a:avLst/>
+          </a:prstGeom>
+          <a:solidFill>
+            <a:srgbClr val="48BF8F"/>
+          </a:solidFill>
+          <a:ln>
+            <a:noFill/>
+          </a:ln>
+        </p:spPr>
+        <p:style>
+          <a:lnRef idx="1">
+            <a:schemeClr val="accent1"/>
+          </a:lnRef>
+          <a:fillRef idx="3">
+            <a:schemeClr val="accent1"/>
+          </a:fillRef>
+          <a:effectRef idx="2">
+            <a:schemeClr val="accent1"/>
+          </a:effectRef>
+          <a:fontRef idx="minor">
+            <a:schemeClr val="lt1"/>
+          </a:fontRef>
+        </p:style>
+        <p:txBody>
+          <a:bodyPr rtlCol="0" anchor="ctr"/>
+          <a:lstStyle/>
+          <a:p>
+            <a:pPr algn="ctr"/>
+          </a:p>
+        </p:txBody>
+      </p:sp>
+      <p:sp>
+        <p:nvSpPr>
+          <p:cNvPr id="15" name="TextBox 14"/>
+          <p:cNvSpPr txBox="1"/>
+          <p:nvPr/>
+        </p:nvSpPr>
+        <p:spPr>
+          <a:xfrm>
+            <a:off x="6556248" y="1664208"/>
+            <a:ext cx="4672583" cy="310896"/>
+          </a:xfrm>
+          <a:prstGeom prst="rect">
+            <a:avLst/>
+          </a:prstGeom>
+          <a:noFill/>
+        </p:spPr>
+        <p:txBody>
+          <a:bodyPr wrap="square" anchor="t">
+            <a:spAutoFit/>
+          </a:bodyPr>
+          <a:lstStyle/>
+          <a:p>
+            <a:pPr algn="l"/>
+            <a:r>
+              <a:rPr sz="1400" b="1">
+                <a:solidFill>
+                  <a:srgbClr val="48BF8F"/>
+                </a:solidFill>
+                <a:latin typeface="Aptos"/>
+              </a:rPr>
+              <a:t>What startup does</a:t>
+            </a:r>
+          </a:p>
+        </p:txBody>
+      </p:sp>
+      <p:sp>
+        <p:nvSpPr>
+          <p:cNvPr id="16" name="TextBox 15"/>
+          <p:cNvSpPr txBox="1"/>
+          <p:nvPr/>
+        </p:nvSpPr>
+        <p:spPr>
+          <a:xfrm>
+            <a:off x="6556248" y="2121408"/>
+            <a:ext cx="4672583" cy="3721608"/>
+          </a:xfrm>
+          <a:prstGeom prst="rect">
+            <a:avLst/>
+          </a:prstGeom>
+          <a:noFill/>
+        </p:spPr>
+        <p:txBody>
+          <a:bodyPr wrap="square" anchor="t" lIns="38100" rIns="38100" tIns="25400" bIns="25400">
+            <a:noAutofit/>
+          </a:bodyPr>
+          <a:lstStyle/>
+          <a:p>
+            <a:pPr>
+              <a:spcAft>
+                <a:spcPts val="600"/>
+              </a:spcAft>
+              <a:defRPr sz="1500">
+                <a:solidFill>
+                  <a:srgbClr val="B4BAAE"/>
+                </a:solidFill>
+                <a:latin typeface="Aptos"/>
+              </a:defRPr>
+            </a:pPr>
+            <a:r>
+              <a:rPr sz="1500" b="0" i="0">
+                <a:latin typeface="Calibri"/>
+              </a:rPr>
+              <a:t>Initializes Django and runtime guards in manage.py.</a:t>
+            </a:r>
+            <a:endParaRPr sz="1500" b="0" i="0">
+              <a:latin typeface="Calibri"/>
+            </a:endParaRPr>
+          </a:p>
+          <a:p>
+            <a:pPr>
+              <a:spcAft>
+                <a:spcPts val="600"/>
+              </a:spcAft>
+              <a:defRPr sz="1500">
+                <a:solidFill>
+                  <a:srgbClr val="B4BAAE"/>
+                </a:solidFill>
+                <a:latin typeface="Aptos"/>
+              </a:defRPr>
+            </a:pPr>
+            <a:r>
+              <a:rPr sz="1500" b="0" i="0">
+                <a:latin typeface="Calibri"/>
+              </a:rPr>
+              <a:t>Cleans pool state and repopulates the Agent table from current disk templates.</a:t>
+            </a:r>
+            <a:endParaRPr sz="1500" b="0" i="0">
+              <a:latin typeface="Calibri"/>
+            </a:endParaRPr>
+          </a:p>
+          <a:p>
+            <a:pPr>
+              <a:spcAft>
+                <a:spcPts val="600"/>
+              </a:spcAft>
+              <a:defRPr sz="1500">
+                <a:solidFill>
+                  <a:srgbClr val="B4BAAE"/>
+                </a:solidFill>
+                <a:latin typeface="Aptos"/>
+              </a:defRPr>
+            </a:pPr>
+            <a:r>
+              <a:rPr sz="1500" b="0" i="0">
+                <a:latin typeface="Calibri"/>
+              </a:rPr>
+              <a:t>Launches MCP metrics and gRPC file-search servers before steady-state traffic.</a:t>
+            </a:r>
+            <a:endParaRPr sz="1500" b="0" i="0">
+              <a:latin typeface="Calibri"/>
+            </a:endParaRPr>
+          </a:p>
+          <a:p>
+            <a:pPr>
+              <a:spcAft>
+                <a:spcPts val="600"/>
+              </a:spcAft>
+              <a:defRPr sz="1500">
+                <a:solidFill>
+                  <a:srgbClr val="B4BAAE"/>
+                </a:solidFill>
+                <a:latin typeface="Aptos"/>
+              </a:defRPr>
+            </a:pPr>
+            <a:r>
+              <a:rPr sz="1500" b="0" i="0">
+                <a:latin typeface="Calibri"/>
+              </a:rPr>
+              <a:t>Handles shutdown by killing tracked/untracked agent processes and clearing pool artifacts.</a:t>
+            </a:r>
+            <a:endParaRPr sz="1500" b="0" i="0">
               <a:latin typeface="Calibri"/>
             </a:endParaRPr>
           </a:p>
@@ -12246,7 +11860,7 @@
             <a:avLst/>
           </a:prstGeom>
           <a:solidFill>
-            <a:srgbClr val="48BF8F"/>
+            <a:srgbClr val="E0AB5D"/>
           </a:solidFill>
           <a:ln>
             <a:noFill/>
@@ -12289,7 +11903,7 @@
             <a:avLst/>
           </a:prstGeom>
           <a:solidFill>
-            <a:srgbClr val="48BF8F"/>
+            <a:srgbClr val="E0AB5D"/>
           </a:solidFill>
           <a:ln>
             <a:noFill/>
@@ -12332,7 +11946,7 @@
             <a:avLst/>
           </a:prstGeom>
           <a:solidFill>
-            <a:srgbClr val="48BF8F"/>
+            <a:srgbClr val="E0AB5D"/>
           </a:solidFill>
           <a:ln>
             <a:noFill/>
@@ -12375,7 +11989,7 @@
             <a:avLst/>
           </a:prstGeom>
           <a:solidFill>
-            <a:srgbClr val="48BF8F"/>
+            <a:srgbClr val="E0AB5D"/>
           </a:solidFill>
           <a:ln>
             <a:noFill/>
@@ -12429,11 +12043,11 @@
             <a:r>
               <a:rPr sz="1000" b="1">
                 <a:solidFill>
-                  <a:srgbClr val="48BF8F"/>
+                  <a:srgbClr val="E0AB5D"/>
                 </a:solidFill>
                 <a:latin typeface="Aptos"/>
               </a:rPr>
-              <a:t>SHOW-YOUR-WORK VISIBILITY FOR MULTI-TURN</a:t>
+              <a:t>SOURCE USAGE IS SEPARATE FROM RELEASE BUILDING</a:t>
             </a:r>
           </a:p>
         </p:txBody>
@@ -12468,7 +12082,7 @@
                 </a:solidFill>
                 <a:latin typeface="Aptos Display"/>
               </a:rPr>
-              <a:t>Exec Report</a:t>
+              <a:t>Packaging Path</a:t>
             </a:r>
           </a:p>
         </p:txBody>
@@ -12481,8 +12095,663 @@
         </p:nvSpPr>
         <p:spPr>
           <a:xfrm>
-            <a:off x="713232" y="1463040"/>
-            <a:ext cx="5394960" cy="4526280"/>
+            <a:off x="1051560" y="1828800"/>
+            <a:ext cx="1591056" cy="685800"/>
+          </a:xfrm>
+          <a:prstGeom prst="roundRect">
+            <a:avLst/>
+          </a:prstGeom>
+          <a:solidFill>
+            <a:srgbClr val="202322"/>
+          </a:solidFill>
+          <a:ln>
+            <a:solidFill>
+              <a:srgbClr val="E0AB5D"/>
+            </a:solidFill>
+          </a:ln>
+        </p:spPr>
+        <p:style>
+          <a:lnRef idx="1">
+            <a:schemeClr val="accent1"/>
+          </a:lnRef>
+          <a:fillRef idx="3">
+            <a:schemeClr val="accent1"/>
+          </a:fillRef>
+          <a:effectRef idx="2">
+            <a:schemeClr val="accent1"/>
+          </a:effectRef>
+          <a:fontRef idx="minor">
+            <a:schemeClr val="lt1"/>
+          </a:fontRef>
+        </p:style>
+        <p:txBody>
+          <a:bodyPr rtlCol="0" anchor="ctr"/>
+          <a:lstStyle/>
+          <a:p>
+            <a:pPr algn="ctr"/>
+          </a:p>
+        </p:txBody>
+      </p:sp>
+      <p:sp>
+        <p:nvSpPr>
+          <p:cNvPr id="10" name="TextBox 9"/>
+          <p:cNvSpPr txBox="1"/>
+          <p:nvPr/>
+        </p:nvSpPr>
+        <p:spPr>
+          <a:xfrm>
+            <a:off x="1124712" y="1993392"/>
+            <a:ext cx="1444752" cy="256032"/>
+          </a:xfrm>
+          <a:prstGeom prst="rect">
+            <a:avLst/>
+          </a:prstGeom>
+          <a:noFill/>
+        </p:spPr>
+        <p:txBody>
+          <a:bodyPr wrap="square" anchor="t">
+            <a:spAutoFit/>
+          </a:bodyPr>
+          <a:lstStyle/>
+          <a:p>
+            <a:pPr algn="ctr"/>
+            <a:r>
+              <a:rPr sz="1000" b="1">
+                <a:solidFill>
+                  <a:srgbClr val="E8E8DE"/>
+                </a:solidFill>
+                <a:latin typeface="Aptos"/>
+              </a:rPr>
+              <a:t>build.py</a:t>
+            </a:r>
+          </a:p>
+        </p:txBody>
+      </p:sp>
+      <p:sp>
+        <p:nvSpPr>
+          <p:cNvPr id="11" name="TextBox 10"/>
+          <p:cNvSpPr txBox="1"/>
+          <p:nvPr/>
+        </p:nvSpPr>
+        <p:spPr>
+          <a:xfrm>
+            <a:off x="2642615" y="2002536"/>
+            <a:ext cx="246888" cy="182880"/>
+          </a:xfrm>
+          <a:prstGeom prst="rect">
+            <a:avLst/>
+          </a:prstGeom>
+          <a:noFill/>
+        </p:spPr>
+        <p:txBody>
+          <a:bodyPr wrap="square" anchor="t">
+            <a:spAutoFit/>
+          </a:bodyPr>
+          <a:lstStyle/>
+          <a:p>
+            <a:pPr algn="ctr"/>
+            <a:r>
+              <a:rPr sz="1200" b="1">
+                <a:solidFill>
+                  <a:srgbClr val="E0AB5D"/>
+                </a:solidFill>
+                <a:latin typeface="Aptos"/>
+              </a:rPr>
+              <a:t>&gt;</a:t>
+            </a:r>
+          </a:p>
+        </p:txBody>
+      </p:sp>
+      <p:sp>
+        <p:nvSpPr>
+          <p:cNvPr id="12" name="Rounded Rectangle 11"/>
+          <p:cNvSpPr/>
+          <p:nvPr/>
+        </p:nvSpPr>
+        <p:spPr>
+          <a:xfrm>
+            <a:off x="2889503" y="1828800"/>
+            <a:ext cx="1591056" cy="685800"/>
+          </a:xfrm>
+          <a:prstGeom prst="roundRect">
+            <a:avLst/>
+          </a:prstGeom>
+          <a:solidFill>
+            <a:srgbClr val="202322"/>
+          </a:solidFill>
+          <a:ln>
+            <a:solidFill>
+              <a:srgbClr val="E0AB5D"/>
+            </a:solidFill>
+          </a:ln>
+        </p:spPr>
+        <p:style>
+          <a:lnRef idx="1">
+            <a:schemeClr val="accent1"/>
+          </a:lnRef>
+          <a:fillRef idx="3">
+            <a:schemeClr val="accent1"/>
+          </a:fillRef>
+          <a:effectRef idx="2">
+            <a:schemeClr val="accent1"/>
+          </a:effectRef>
+          <a:fontRef idx="minor">
+            <a:schemeClr val="lt1"/>
+          </a:fontRef>
+        </p:style>
+        <p:txBody>
+          <a:bodyPr rtlCol="0" anchor="ctr"/>
+          <a:lstStyle/>
+          <a:p>
+            <a:pPr algn="ctr"/>
+          </a:p>
+        </p:txBody>
+      </p:sp>
+      <p:sp>
+        <p:nvSpPr>
+          <p:cNvPr id="13" name="TextBox 12"/>
+          <p:cNvSpPr txBox="1"/>
+          <p:nvPr/>
+        </p:nvSpPr>
+        <p:spPr>
+          <a:xfrm>
+            <a:off x="2962656" y="1993392"/>
+            <a:ext cx="1444752" cy="256032"/>
+          </a:xfrm>
+          <a:prstGeom prst="rect">
+            <a:avLst/>
+          </a:prstGeom>
+          <a:noFill/>
+        </p:spPr>
+        <p:txBody>
+          <a:bodyPr wrap="square" anchor="t">
+            <a:spAutoFit/>
+          </a:bodyPr>
+          <a:lstStyle/>
+          <a:p>
+            <a:pPr algn="ctr"/>
+            <a:r>
+              <a:rPr sz="1000" b="1">
+                <a:solidFill>
+                  <a:srgbClr val="E8E8DE"/>
+                </a:solidFill>
+                <a:latin typeface="Aptos"/>
+              </a:rPr>
+              <a:t>pkg.zip</a:t>
+            </a:r>
+          </a:p>
+        </p:txBody>
+      </p:sp>
+      <p:sp>
+        <p:nvSpPr>
+          <p:cNvPr id="14" name="TextBox 13"/>
+          <p:cNvSpPr txBox="1"/>
+          <p:nvPr/>
+        </p:nvSpPr>
+        <p:spPr>
+          <a:xfrm>
+            <a:off x="4480559" y="2002536"/>
+            <a:ext cx="246888" cy="182880"/>
+          </a:xfrm>
+          <a:prstGeom prst="rect">
+            <a:avLst/>
+          </a:prstGeom>
+          <a:noFill/>
+        </p:spPr>
+        <p:txBody>
+          <a:bodyPr wrap="square" anchor="t">
+            <a:spAutoFit/>
+          </a:bodyPr>
+          <a:lstStyle/>
+          <a:p>
+            <a:pPr algn="ctr"/>
+            <a:r>
+              <a:rPr sz="1200" b="1">
+                <a:solidFill>
+                  <a:srgbClr val="E0AB5D"/>
+                </a:solidFill>
+                <a:latin typeface="Aptos"/>
+              </a:rPr>
+              <a:t>&gt;</a:t>
+            </a:r>
+          </a:p>
+        </p:txBody>
+      </p:sp>
+      <p:sp>
+        <p:nvSpPr>
+          <p:cNvPr id="15" name="Rounded Rectangle 14"/>
+          <p:cNvSpPr/>
+          <p:nvPr/>
+        </p:nvSpPr>
+        <p:spPr>
+          <a:xfrm>
+            <a:off x="4727448" y="1828800"/>
+            <a:ext cx="1591056" cy="685800"/>
+          </a:xfrm>
+          <a:prstGeom prst="roundRect">
+            <a:avLst/>
+          </a:prstGeom>
+          <a:solidFill>
+            <a:srgbClr val="202322"/>
+          </a:solidFill>
+          <a:ln>
+            <a:solidFill>
+              <a:srgbClr val="E0AB5D"/>
+            </a:solidFill>
+          </a:ln>
+        </p:spPr>
+        <p:style>
+          <a:lnRef idx="1">
+            <a:schemeClr val="accent1"/>
+          </a:lnRef>
+          <a:fillRef idx="3">
+            <a:schemeClr val="accent1"/>
+          </a:fillRef>
+          <a:effectRef idx="2">
+            <a:schemeClr val="accent1"/>
+          </a:effectRef>
+          <a:fontRef idx="minor">
+            <a:schemeClr val="lt1"/>
+          </a:fontRef>
+        </p:style>
+        <p:txBody>
+          <a:bodyPr rtlCol="0" anchor="ctr"/>
+          <a:lstStyle/>
+          <a:p>
+            <a:pPr algn="ctr"/>
+          </a:p>
+        </p:txBody>
+      </p:sp>
+      <p:sp>
+        <p:nvSpPr>
+          <p:cNvPr id="16" name="TextBox 15"/>
+          <p:cNvSpPr txBox="1"/>
+          <p:nvPr/>
+        </p:nvSpPr>
+        <p:spPr>
+          <a:xfrm>
+            <a:off x="4800600" y="1993392"/>
+            <a:ext cx="1444752" cy="256032"/>
+          </a:xfrm>
+          <a:prstGeom prst="rect">
+            <a:avLst/>
+          </a:prstGeom>
+          <a:noFill/>
+        </p:spPr>
+        <p:txBody>
+          <a:bodyPr wrap="square" anchor="t">
+            <a:spAutoFit/>
+          </a:bodyPr>
+          <a:lstStyle/>
+          <a:p>
+            <a:pPr algn="ctr"/>
+            <a:r>
+              <a:rPr sz="1000" b="1">
+                <a:solidFill>
+                  <a:srgbClr val="E8E8DE"/>
+                </a:solidFill>
+                <a:latin typeface="Aptos"/>
+              </a:rPr>
+              <a:t>build_uninstaller</a:t>
+            </a:r>
+          </a:p>
+        </p:txBody>
+      </p:sp>
+      <p:sp>
+        <p:nvSpPr>
+          <p:cNvPr id="17" name="TextBox 16"/>
+          <p:cNvSpPr txBox="1"/>
+          <p:nvPr/>
+        </p:nvSpPr>
+        <p:spPr>
+          <a:xfrm>
+            <a:off x="6318504" y="2002536"/>
+            <a:ext cx="246888" cy="182880"/>
+          </a:xfrm>
+          <a:prstGeom prst="rect">
+            <a:avLst/>
+          </a:prstGeom>
+          <a:noFill/>
+        </p:spPr>
+        <p:txBody>
+          <a:bodyPr wrap="square" anchor="t">
+            <a:spAutoFit/>
+          </a:bodyPr>
+          <a:lstStyle/>
+          <a:p>
+            <a:pPr algn="ctr"/>
+            <a:r>
+              <a:rPr sz="1200" b="1">
+                <a:solidFill>
+                  <a:srgbClr val="E0AB5D"/>
+                </a:solidFill>
+                <a:latin typeface="Aptos"/>
+              </a:rPr>
+              <a:t>&gt;</a:t>
+            </a:r>
+          </a:p>
+        </p:txBody>
+      </p:sp>
+      <p:sp>
+        <p:nvSpPr>
+          <p:cNvPr id="18" name="Rounded Rectangle 17"/>
+          <p:cNvSpPr/>
+          <p:nvPr/>
+        </p:nvSpPr>
+        <p:spPr>
+          <a:xfrm>
+            <a:off x="6565392" y="1828800"/>
+            <a:ext cx="1591056" cy="685800"/>
+          </a:xfrm>
+          <a:prstGeom prst="roundRect">
+            <a:avLst/>
+          </a:prstGeom>
+          <a:solidFill>
+            <a:srgbClr val="202322"/>
+          </a:solidFill>
+          <a:ln>
+            <a:solidFill>
+              <a:srgbClr val="E0AB5D"/>
+            </a:solidFill>
+          </a:ln>
+        </p:spPr>
+        <p:style>
+          <a:lnRef idx="1">
+            <a:schemeClr val="accent1"/>
+          </a:lnRef>
+          <a:fillRef idx="3">
+            <a:schemeClr val="accent1"/>
+          </a:fillRef>
+          <a:effectRef idx="2">
+            <a:schemeClr val="accent1"/>
+          </a:effectRef>
+          <a:fontRef idx="minor">
+            <a:schemeClr val="lt1"/>
+          </a:fontRef>
+        </p:style>
+        <p:txBody>
+          <a:bodyPr rtlCol="0" anchor="ctr"/>
+          <a:lstStyle/>
+          <a:p>
+            <a:pPr algn="ctr"/>
+          </a:p>
+        </p:txBody>
+      </p:sp>
+      <p:sp>
+        <p:nvSpPr>
+          <p:cNvPr id="19" name="TextBox 18"/>
+          <p:cNvSpPr txBox="1"/>
+          <p:nvPr/>
+        </p:nvSpPr>
+        <p:spPr>
+          <a:xfrm>
+            <a:off x="6638544" y="1993392"/>
+            <a:ext cx="1444752" cy="256032"/>
+          </a:xfrm>
+          <a:prstGeom prst="rect">
+            <a:avLst/>
+          </a:prstGeom>
+          <a:noFill/>
+        </p:spPr>
+        <p:txBody>
+          <a:bodyPr wrap="square" anchor="t">
+            <a:spAutoFit/>
+          </a:bodyPr>
+          <a:lstStyle/>
+          <a:p>
+            <a:pPr algn="ctr"/>
+            <a:r>
+              <a:rPr sz="1000" b="1">
+                <a:solidFill>
+                  <a:srgbClr val="E8E8DE"/>
+                </a:solidFill>
+                <a:latin typeface="Aptos"/>
+              </a:rPr>
+              <a:t>Uninstaller</a:t>
+            </a:r>
+          </a:p>
+        </p:txBody>
+      </p:sp>
+      <p:sp>
+        <p:nvSpPr>
+          <p:cNvPr id="20" name="TextBox 19"/>
+          <p:cNvSpPr txBox="1"/>
+          <p:nvPr/>
+        </p:nvSpPr>
+        <p:spPr>
+          <a:xfrm>
+            <a:off x="8156448" y="2002536"/>
+            <a:ext cx="246888" cy="182880"/>
+          </a:xfrm>
+          <a:prstGeom prst="rect">
+            <a:avLst/>
+          </a:prstGeom>
+          <a:noFill/>
+        </p:spPr>
+        <p:txBody>
+          <a:bodyPr wrap="square" anchor="t">
+            <a:spAutoFit/>
+          </a:bodyPr>
+          <a:lstStyle/>
+          <a:p>
+            <a:pPr algn="ctr"/>
+            <a:r>
+              <a:rPr sz="1200" b="1">
+                <a:solidFill>
+                  <a:srgbClr val="E0AB5D"/>
+                </a:solidFill>
+                <a:latin typeface="Aptos"/>
+              </a:rPr>
+              <a:t>&gt;</a:t>
+            </a:r>
+          </a:p>
+        </p:txBody>
+      </p:sp>
+      <p:sp>
+        <p:nvSpPr>
+          <p:cNvPr id="21" name="Rounded Rectangle 20"/>
+          <p:cNvSpPr/>
+          <p:nvPr/>
+        </p:nvSpPr>
+        <p:spPr>
+          <a:xfrm>
+            <a:off x="8403336" y="1828800"/>
+            <a:ext cx="1591056" cy="685800"/>
+          </a:xfrm>
+          <a:prstGeom prst="roundRect">
+            <a:avLst/>
+          </a:prstGeom>
+          <a:solidFill>
+            <a:srgbClr val="202322"/>
+          </a:solidFill>
+          <a:ln>
+            <a:solidFill>
+              <a:srgbClr val="E0AB5D"/>
+            </a:solidFill>
+          </a:ln>
+        </p:spPr>
+        <p:style>
+          <a:lnRef idx="1">
+            <a:schemeClr val="accent1"/>
+          </a:lnRef>
+          <a:fillRef idx="3">
+            <a:schemeClr val="accent1"/>
+          </a:fillRef>
+          <a:effectRef idx="2">
+            <a:schemeClr val="accent1"/>
+          </a:effectRef>
+          <a:fontRef idx="minor">
+            <a:schemeClr val="lt1"/>
+          </a:fontRef>
+        </p:style>
+        <p:txBody>
+          <a:bodyPr rtlCol="0" anchor="ctr"/>
+          <a:lstStyle/>
+          <a:p>
+            <a:pPr algn="ctr"/>
+          </a:p>
+        </p:txBody>
+      </p:sp>
+      <p:sp>
+        <p:nvSpPr>
+          <p:cNvPr id="22" name="TextBox 21"/>
+          <p:cNvSpPr txBox="1"/>
+          <p:nvPr/>
+        </p:nvSpPr>
+        <p:spPr>
+          <a:xfrm>
+            <a:off x="8476488" y="1993392"/>
+            <a:ext cx="1444752" cy="256032"/>
+          </a:xfrm>
+          <a:prstGeom prst="rect">
+            <a:avLst/>
+          </a:prstGeom>
+          <a:noFill/>
+        </p:spPr>
+        <p:txBody>
+          <a:bodyPr wrap="square" anchor="t">
+            <a:spAutoFit/>
+          </a:bodyPr>
+          <a:lstStyle/>
+          <a:p>
+            <a:pPr algn="ctr"/>
+            <a:r>
+              <a:rPr sz="1000" b="1">
+                <a:solidFill>
+                  <a:srgbClr val="E8E8DE"/>
+                </a:solidFill>
+                <a:latin typeface="Aptos"/>
+              </a:rPr>
+              <a:t>build_installer</a:t>
+            </a:r>
+          </a:p>
+        </p:txBody>
+      </p:sp>
+      <p:sp>
+        <p:nvSpPr>
+          <p:cNvPr id="23" name="TextBox 22"/>
+          <p:cNvSpPr txBox="1"/>
+          <p:nvPr/>
+        </p:nvSpPr>
+        <p:spPr>
+          <a:xfrm>
+            <a:off x="9994392" y="2002536"/>
+            <a:ext cx="246888" cy="182880"/>
+          </a:xfrm>
+          <a:prstGeom prst="rect">
+            <a:avLst/>
+          </a:prstGeom>
+          <a:noFill/>
+        </p:spPr>
+        <p:txBody>
+          <a:bodyPr wrap="square" anchor="t">
+            <a:spAutoFit/>
+          </a:bodyPr>
+          <a:lstStyle/>
+          <a:p>
+            <a:pPr algn="ctr"/>
+            <a:r>
+              <a:rPr sz="1200" b="1">
+                <a:solidFill>
+                  <a:srgbClr val="E0AB5D"/>
+                </a:solidFill>
+                <a:latin typeface="Aptos"/>
+              </a:rPr>
+              <a:t>&gt;</a:t>
+            </a:r>
+          </a:p>
+        </p:txBody>
+      </p:sp>
+      <p:sp>
+        <p:nvSpPr>
+          <p:cNvPr id="24" name="Rounded Rectangle 23"/>
+          <p:cNvSpPr/>
+          <p:nvPr/>
+        </p:nvSpPr>
+        <p:spPr>
+          <a:xfrm>
+            <a:off x="10241280" y="1828800"/>
+            <a:ext cx="1591056" cy="685800"/>
+          </a:xfrm>
+          <a:prstGeom prst="roundRect">
+            <a:avLst/>
+          </a:prstGeom>
+          <a:solidFill>
+            <a:srgbClr val="202322"/>
+          </a:solidFill>
+          <a:ln>
+            <a:solidFill>
+              <a:srgbClr val="E0AB5D"/>
+            </a:solidFill>
+          </a:ln>
+        </p:spPr>
+        <p:style>
+          <a:lnRef idx="1">
+            <a:schemeClr val="accent1"/>
+          </a:lnRef>
+          <a:fillRef idx="3">
+            <a:schemeClr val="accent1"/>
+          </a:fillRef>
+          <a:effectRef idx="2">
+            <a:schemeClr val="accent1"/>
+          </a:effectRef>
+          <a:fontRef idx="minor">
+            <a:schemeClr val="lt1"/>
+          </a:fontRef>
+        </p:style>
+        <p:txBody>
+          <a:bodyPr rtlCol="0" anchor="ctr"/>
+          <a:lstStyle/>
+          <a:p>
+            <a:pPr algn="ctr"/>
+          </a:p>
+        </p:txBody>
+      </p:sp>
+      <p:sp>
+        <p:nvSpPr>
+          <p:cNvPr id="25" name="TextBox 24"/>
+          <p:cNvSpPr txBox="1"/>
+          <p:nvPr/>
+        </p:nvSpPr>
+        <p:spPr>
+          <a:xfrm>
+            <a:off x="10314432" y="1993392"/>
+            <a:ext cx="1444752" cy="256032"/>
+          </a:xfrm>
+          <a:prstGeom prst="rect">
+            <a:avLst/>
+          </a:prstGeom>
+          <a:noFill/>
+        </p:spPr>
+        <p:txBody>
+          <a:bodyPr wrap="square" anchor="t">
+            <a:spAutoFit/>
+          </a:bodyPr>
+          <a:lstStyle/>
+          <a:p>
+            <a:pPr algn="ctr"/>
+            <a:r>
+              <a:rPr sz="1000" b="1">
+                <a:solidFill>
+                  <a:srgbClr val="E8E8DE"/>
+                </a:solidFill>
+                <a:latin typeface="Aptos"/>
+              </a:rPr>
+              <a:t>Release</a:t>
+            </a:r>
+          </a:p>
+        </p:txBody>
+      </p:sp>
+      <p:sp>
+        <p:nvSpPr>
+          <p:cNvPr id="26" name="Rounded Rectangle 25"/>
+          <p:cNvSpPr/>
+          <p:nvPr/>
+        </p:nvSpPr>
+        <p:spPr>
+          <a:xfrm>
+            <a:off x="841248" y="3063240"/>
+            <a:ext cx="10378440" cy="2331720"/>
           </a:xfrm>
           <a:prstGeom prst="roundRect">
             <a:avLst/>
@@ -12520,20 +12789,20 @@
       </p:sp>
       <p:sp>
         <p:nvSpPr>
-          <p:cNvPr id="10" name="Rectangle 9"/>
-          <p:cNvSpPr/>
-          <p:nvPr/>
-        </p:nvSpPr>
-        <p:spPr>
-          <a:xfrm>
-            <a:off x="713232" y="1463040"/>
-            <a:ext cx="5394960" cy="109728"/>
-          </a:xfrm>
-          <a:prstGeom prst="rect">
-            <a:avLst/>
-          </a:prstGeom>
-          <a:solidFill>
-            <a:srgbClr val="48BF8F"/>
+          <p:cNvPr id="27" name="Rectangle 26"/>
+          <p:cNvSpPr/>
+          <p:nvPr/>
+        </p:nvSpPr>
+        <p:spPr>
+          <a:xfrm>
+            <a:off x="841248" y="3063240"/>
+            <a:ext cx="10378440" cy="109728"/>
+          </a:xfrm>
+          <a:prstGeom prst="rect">
+            <a:avLst/>
+          </a:prstGeom>
+          <a:solidFill>
+            <a:srgbClr val="E0AB5D"/>
           </a:solidFill>
           <a:ln>
             <a:noFill/>
@@ -12563,14 +12832,14 @@
       </p:sp>
       <p:sp>
         <p:nvSpPr>
-          <p:cNvPr id="11" name="TextBox 10"/>
+          <p:cNvPr id="28" name="TextBox 27"/>
           <p:cNvSpPr txBox="1"/>
           <p:nvPr/>
         </p:nvSpPr>
         <p:spPr>
           <a:xfrm>
-            <a:off x="914400" y="1664208"/>
-            <a:ext cx="4992624" cy="310896"/>
+            <a:off x="1042416" y="3264408"/>
+            <a:ext cx="9976104" cy="310896"/>
           </a:xfrm>
           <a:prstGeom prst="rect">
             <a:avLst/>
@@ -12587,25 +12856,25 @@
             <a:r>
               <a:rPr sz="1400" b="1">
                 <a:solidFill>
-                  <a:srgbClr val="48BF8F"/>
+                  <a:srgbClr val="E0AB5D"/>
                 </a:solidFill>
                 <a:latin typeface="Aptos"/>
               </a:rPr>
-              <a:t>Why it exists</a:t>
-            </a:r>
-          </a:p>
-        </p:txBody>
-      </p:sp>
-      <p:sp>
-        <p:nvSpPr>
-          <p:cNvPr id="12" name="TextBox 11"/>
+              <a:t>Release rule</a:t>
+            </a:r>
+          </a:p>
+        </p:txBody>
+      </p:sp>
+      <p:sp>
+        <p:nvSpPr>
+          <p:cNvPr id="29" name="TextBox 28"/>
           <p:cNvSpPr txBox="1"/>
           <p:nvPr/>
         </p:nvSpPr>
         <p:spPr>
           <a:xfrm>
-            <a:off x="914400" y="2121408"/>
-            <a:ext cx="4992624" cy="3721608"/>
+            <a:off x="1042416" y="3721608"/>
+            <a:ext cx="9976104" cy="1527048"/>
           </a:xfrm>
           <a:prstGeom prst="rect">
             <a:avLst/>
@@ -12622,7 +12891,7 @@
               <a:spcAft>
                 <a:spcPts val="600"/>
               </a:spcAft>
-              <a:defRPr sz="1500">
+              <a:defRPr sz="1600">
                 <a:solidFill>
                   <a:srgbClr val="B4BAAE"/>
                 </a:solidFill>
@@ -12630,12 +12899,12 @@
               </a:defRPr>
             </a:pPr>
             <a:r>
-              <a:rPr sz="1500" b="0" i="0">
+              <a:rPr sz="1600" b="0" i="0">
                 <a:latin typeface="Calibri"/>
               </a:rPr>
-              <a:t>Exec Report is a Multi-Turn-only transparency layer that appends one operation table per state-changing agent family to the final answer.</a:t>
-            </a:r>
-            <a:endParaRPr sz="1500" b="0" i="0">
+              <a:t>Run packaging only when preparing a Windows distribution.</a:t>
+            </a:r>
+            <a:endParaRPr sz="1600" b="0" i="0">
               <a:latin typeface="Calibri"/>
             </a:endParaRPr>
           </a:p>
@@ -12644,7 +12913,7 @@
               <a:spcAft>
                 <a:spcPts val="600"/>
               </a:spcAft>
-              <a:defRPr sz="1500">
+              <a:defRPr sz="1600">
                 <a:solidFill>
                   <a:srgbClr val="B4BAAE"/>
                 </a:solidFill>
@@ -12652,12 +12921,12 @@
               </a:defRPr>
             </a:pPr>
             <a:r>
-              <a:rPr sz="1500" b="0" i="0">
+              <a:rPr sz="1600" b="0" i="0">
                 <a:latin typeface="Calibri"/>
               </a:rPr>
-              <a:t>Rows are recorded from the live tool-call stream rather than guessed from the LLM prose, so the report is the operational ground truth.</a:t>
-            </a:r>
-            <a:endParaRPr sz="1500" b="0" i="0">
+              <a:t>The final distributable is the full `dist/Tlamatini_Release/` folder, not one executable copied out of context.</a:t>
+            </a:r>
+            <a:endParaRPr sz="1600" b="0" i="0">
               <a:latin typeface="Calibri"/>
             </a:endParaRPr>
           </a:p>
@@ -12666,7 +12935,7 @@
               <a:spcAft>
                 <a:spcPts val="600"/>
               </a:spcAft>
-              <a:defRPr sz="1500">
+              <a:defRPr sz="1600">
                 <a:solidFill>
                   <a:srgbClr val="B4BAAE"/>
                 </a:solidFill>
@@ -12674,224 +12943,12 @@
               </a:defRPr>
             </a:pPr>
             <a:r>
-              <a:rPr sz="1500" b="0" i="0">
+              <a:rPr sz="1600" b="0" i="0">
                 <a:latin typeface="Calibri"/>
               </a:rPr>
-              <a:t>Each row receives a SUCCESS/FAILURE verdict from raw tool returns, making long installs, deployments, and remediations inspectable after the fact.</a:t>
-            </a:r>
-            <a:endParaRPr sz="1500" b="0" i="0">
-              <a:latin typeface="Calibri"/>
-            </a:endParaRPr>
-          </a:p>
-        </p:txBody>
-      </p:sp>
-      <p:sp>
-        <p:nvSpPr>
-          <p:cNvPr id="13" name="Rounded Rectangle 12"/>
-          <p:cNvSpPr/>
-          <p:nvPr/>
-        </p:nvSpPr>
-        <p:spPr>
-          <a:xfrm>
-            <a:off x="6355080" y="1463040"/>
-            <a:ext cx="5074920" cy="4526280"/>
-          </a:xfrm>
-          <a:prstGeom prst="roundRect">
-            <a:avLst/>
-          </a:prstGeom>
-          <a:solidFill>
-            <a:srgbClr val="161A19"/>
-          </a:solidFill>
-          <a:ln>
-            <a:solidFill>
-              <a:srgbClr val="595F56"/>
-            </a:solidFill>
-          </a:ln>
-        </p:spPr>
-        <p:style>
-          <a:lnRef idx="1">
-            <a:schemeClr val="accent1"/>
-          </a:lnRef>
-          <a:fillRef idx="3">
-            <a:schemeClr val="accent1"/>
-          </a:fillRef>
-          <a:effectRef idx="2">
-            <a:schemeClr val="accent1"/>
-          </a:effectRef>
-          <a:fontRef idx="minor">
-            <a:schemeClr val="lt1"/>
-          </a:fontRef>
-        </p:style>
-        <p:txBody>
-          <a:bodyPr rtlCol="0" anchor="ctr"/>
-          <a:lstStyle/>
-          <a:p>
-            <a:pPr algn="ctr"/>
-          </a:p>
-        </p:txBody>
-      </p:sp>
-      <p:sp>
-        <p:nvSpPr>
-          <p:cNvPr id="14" name="Rectangle 13"/>
-          <p:cNvSpPr/>
-          <p:nvPr/>
-        </p:nvSpPr>
-        <p:spPr>
-          <a:xfrm>
-            <a:off x="6355080" y="1463040"/>
-            <a:ext cx="5074920" cy="109728"/>
-          </a:xfrm>
-          <a:prstGeom prst="rect">
-            <a:avLst/>
-          </a:prstGeom>
-          <a:solidFill>
-            <a:srgbClr val="E0AB5D"/>
-          </a:solidFill>
-          <a:ln>
-            <a:noFill/>
-          </a:ln>
-        </p:spPr>
-        <p:style>
-          <a:lnRef idx="1">
-            <a:schemeClr val="accent1"/>
-          </a:lnRef>
-          <a:fillRef idx="3">
-            <a:schemeClr val="accent1"/>
-          </a:fillRef>
-          <a:effectRef idx="2">
-            <a:schemeClr val="accent1"/>
-          </a:effectRef>
-          <a:fontRef idx="minor">
-            <a:schemeClr val="lt1"/>
-          </a:fontRef>
-        </p:style>
-        <p:txBody>
-          <a:bodyPr rtlCol="0" anchor="ctr"/>
-          <a:lstStyle/>
-          <a:p>
-            <a:pPr algn="ctr"/>
-          </a:p>
-        </p:txBody>
-      </p:sp>
-      <p:sp>
-        <p:nvSpPr>
-          <p:cNvPr id="15" name="TextBox 14"/>
-          <p:cNvSpPr txBox="1"/>
-          <p:nvPr/>
-        </p:nvSpPr>
-        <p:spPr>
-          <a:xfrm>
-            <a:off x="6556248" y="1664208"/>
-            <a:ext cx="4672583" cy="310896"/>
-          </a:xfrm>
-          <a:prstGeom prst="rect">
-            <a:avLst/>
-          </a:prstGeom>
-          <a:noFill/>
-        </p:spPr>
-        <p:txBody>
-          <a:bodyPr wrap="square" anchor="t">
-            <a:spAutoFit/>
-          </a:bodyPr>
-          <a:lstStyle/>
-          <a:p>
-            <a:pPr algn="l"/>
-            <a:r>
-              <a:rPr sz="1400" b="1">
-                <a:solidFill>
-                  <a:srgbClr val="E0AB5D"/>
-                </a:solidFill>
-                <a:latin typeface="Aptos"/>
-              </a:rPr>
-              <a:t>Operator effect</a:t>
-            </a:r>
-          </a:p>
-        </p:txBody>
-      </p:sp>
-      <p:sp>
-        <p:nvSpPr>
-          <p:cNvPr id="16" name="TextBox 15"/>
-          <p:cNvSpPr txBox="1"/>
-          <p:nvPr/>
-        </p:nvSpPr>
-        <p:spPr>
-          <a:xfrm>
-            <a:off x="6556248" y="2121408"/>
-            <a:ext cx="4672583" cy="3721608"/>
-          </a:xfrm>
-          <a:prstGeom prst="rect">
-            <a:avLst/>
-          </a:prstGeom>
-          <a:noFill/>
-        </p:spPr>
-        <p:txBody>
-          <a:bodyPr wrap="square" anchor="t" lIns="38100" rIns="38100" tIns="25400" bIns="25400">
-            <a:noAutofit/>
-          </a:bodyPr>
-          <a:lstStyle/>
-          <a:p>
-            <a:pPr>
-              <a:spcAft>
-                <a:spcPts val="600"/>
-              </a:spcAft>
-              <a:defRPr sz="1500">
-                <a:solidFill>
-                  <a:srgbClr val="B4BAAE"/>
-                </a:solidFill>
-                <a:latin typeface="Aptos"/>
-              </a:defRPr>
-            </a:pPr>
-            <a:r>
-              <a:rPr sz="1500" b="0" i="0">
-                <a:latin typeface="Calibri"/>
-              </a:rPr>
-              <a:t>Tables appear only for state-changing agent families that actually fired.</a:t>
-            </a:r>
-            <a:endParaRPr sz="1500" b="0" i="0">
-              <a:latin typeface="Calibri"/>
-            </a:endParaRPr>
-          </a:p>
-          <a:p>
-            <a:pPr>
-              <a:spcAft>
-                <a:spcPts val="600"/>
-              </a:spcAft>
-              <a:defRPr sz="1500">
-                <a:solidFill>
-                  <a:srgbClr val="B4BAAE"/>
-                </a:solidFill>
-                <a:latin typeface="Aptos"/>
-              </a:defRPr>
-            </a:pPr>
-            <a:r>
-              <a:rPr sz="1500" b="0" i="0">
-                <a:latin typeface="Calibri"/>
-              </a:rPr>
-              <a:t>Verdicts are derived from real tool returns, not inferred from prose summaries.</a:t>
-            </a:r>
-            <a:endParaRPr sz="1500" b="0" i="0">
-              <a:latin typeface="Calibri"/>
-            </a:endParaRPr>
-          </a:p>
-          <a:p>
-            <a:pPr>
-              <a:spcAft>
-                <a:spcPts val="600"/>
-              </a:spcAft>
-              <a:defRPr sz="1500">
-                <a:solidFill>
-                  <a:srgbClr val="B4BAAE"/>
-                </a:solidFill>
-                <a:latin typeface="Aptos"/>
-              </a:defRPr>
-            </a:pPr>
-            <a:r>
-              <a:rPr sz="1500" b="0" i="0">
-                <a:latin typeface="Calibri"/>
-              </a:rPr>
-              <a:t>This is the audit surface that makes long jobs debuggable from the chat output itself.</a:t>
-            </a:r>
-            <a:endParaRPr sz="1500" b="0" i="0">
+              <a:t>Installer scripts register shortcuts and `.flw` file associations and place the uninstaller next to the app.</a:t>
+            </a:r>
+            <a:endParaRPr sz="1600" b="0" i="0">
               <a:latin typeface="Calibri"/>
             </a:endParaRPr>
           </a:p>
@@ -12973,7 +13030,7 @@
             <a:avLst/>
           </a:prstGeom>
           <a:solidFill>
-            <a:srgbClr val="C48052"/>
+            <a:srgbClr val="48BF8F"/>
           </a:solidFill>
           <a:ln>
             <a:noFill/>
@@ -13016,7 +13073,7 @@
             <a:avLst/>
           </a:prstGeom>
           <a:solidFill>
-            <a:srgbClr val="C48052"/>
+            <a:srgbClr val="48BF8F"/>
           </a:solidFill>
           <a:ln>
             <a:noFill/>
@@ -13059,7 +13116,7 @@
             <a:avLst/>
           </a:prstGeom>
           <a:solidFill>
-            <a:srgbClr val="C48052"/>
+            <a:srgbClr val="48BF8F"/>
           </a:solidFill>
           <a:ln>
             <a:noFill/>
@@ -13102,7 +13159,7 @@
             <a:avLst/>
           </a:prstGeom>
           <a:solidFill>
-            <a:srgbClr val="C48052"/>
+            <a:srgbClr val="48BF8F"/>
           </a:solidFill>
           <a:ln>
             <a:noFill/>
@@ -13156,11 +13213,11 @@
             <a:r>
               <a:rPr sz="1000" b="1">
                 <a:solidFill>
-                  <a:srgbClr val="C48052"/>
+                  <a:srgbClr val="48BF8F"/>
                 </a:solidFill>
                 <a:latin typeface="Aptos"/>
               </a:rPr>
-              <a:t>EXTERNAL CODING-AGENT RUNTIME</a:t>
+              <a:t>SHOW-YOUR-WORK VISIBILITY FOR MULTI-TURN</a:t>
             </a:r>
           </a:p>
         </p:txBody>
@@ -13195,7 +13252,7 @@
                 </a:solidFill>
                 <a:latin typeface="Aptos Display"/>
               </a:rPr>
-              <a:t>ACPX And Skills</a:t>
+              <a:t>Exec Report</a:t>
             </a:r>
           </a:p>
         </p:txBody>
@@ -13260,7 +13317,7 @@
             <a:avLst/>
           </a:prstGeom>
           <a:solidFill>
-            <a:srgbClr val="C48052"/>
+            <a:srgbClr val="48BF8F"/>
           </a:solidFill>
           <a:ln>
             <a:noFill/>
@@ -13314,11 +13371,11 @@
             <a:r>
               <a:rPr sz="1400" b="1">
                 <a:solidFill>
-                  <a:srgbClr val="C48052"/>
+                  <a:srgbClr val="48BF8F"/>
                 </a:solidFill>
                 <a:latin typeface="Aptos"/>
               </a:rPr>
-              <a:t>What ACPX adds</a:t>
+              <a:t>Why it exists</a:t>
             </a:r>
           </a:p>
         </p:txBody>
@@ -13360,7 +13417,7 @@
               <a:rPr sz="1500" b="0" i="0">
                 <a:latin typeface="Calibri"/>
               </a:rPr>
-              <a:t>ACPX lets Tlamatini spawn external coding-agent CLIs such as Codex, Claude Code, Cursor, Gemini, Qwen, and others as managed child processes.</a:t>
+              <a:t>Exec Report is a Multi-Turn-only transparency layer that appends one operation table per state-changing agent family to the final answer.</a:t>
             </a:r>
             <a:endParaRPr sz="1500" b="0" i="0">
               <a:latin typeface="Calibri"/>
@@ -13382,7 +13439,7 @@
               <a:rPr sz="1500" b="0" i="0">
                 <a:latin typeface="Calibri"/>
               </a:rPr>
-              <a:t>It pairs those agents with markdown-driven `SKILL.md` packages, validated I/O contracts, permission gating, and append-only audit logs.</a:t>
+              <a:t>Rows are recorded from the live tool-call stream rather than guessed from the LLM prose, so the report is the operational ground truth.</a:t>
             </a:r>
             <a:endParaRPr sz="1500" b="0" i="0">
               <a:latin typeface="Calibri"/>
@@ -13404,12 +13461,158 @@
               <a:rPr sz="1500" b="0" i="0">
                 <a:latin typeface="Calibri"/>
               </a:rPr>
-              <a:t>Transport-aware drain rules and bounded event bodies reduce latency while protecting the LLM context budget during external-agent relays.</a:t>
+              <a:t>Each row receives a SUCCESS/FAILURE verdict from raw tool returns, making long installs, deployments, and remediations inspectable after the fact.</a:t>
             </a:r>
             <a:endParaRPr sz="1500" b="0" i="0">
               <a:latin typeface="Calibri"/>
             </a:endParaRPr>
           </a:p>
+        </p:txBody>
+      </p:sp>
+      <p:sp>
+        <p:nvSpPr>
+          <p:cNvPr id="13" name="Rounded Rectangle 12"/>
+          <p:cNvSpPr/>
+          <p:nvPr/>
+        </p:nvSpPr>
+        <p:spPr>
+          <a:xfrm>
+            <a:off x="6355080" y="1463040"/>
+            <a:ext cx="5074920" cy="4526280"/>
+          </a:xfrm>
+          <a:prstGeom prst="roundRect">
+            <a:avLst/>
+          </a:prstGeom>
+          <a:solidFill>
+            <a:srgbClr val="161A19"/>
+          </a:solidFill>
+          <a:ln>
+            <a:solidFill>
+              <a:srgbClr val="595F56"/>
+            </a:solidFill>
+          </a:ln>
+        </p:spPr>
+        <p:style>
+          <a:lnRef idx="1">
+            <a:schemeClr val="accent1"/>
+          </a:lnRef>
+          <a:fillRef idx="3">
+            <a:schemeClr val="accent1"/>
+          </a:fillRef>
+          <a:effectRef idx="2">
+            <a:schemeClr val="accent1"/>
+          </a:effectRef>
+          <a:fontRef idx="minor">
+            <a:schemeClr val="lt1"/>
+          </a:fontRef>
+        </p:style>
+        <p:txBody>
+          <a:bodyPr rtlCol="0" anchor="ctr"/>
+          <a:lstStyle/>
+          <a:p>
+            <a:pPr algn="ctr"/>
+          </a:p>
+        </p:txBody>
+      </p:sp>
+      <p:sp>
+        <p:nvSpPr>
+          <p:cNvPr id="14" name="Rectangle 13"/>
+          <p:cNvSpPr/>
+          <p:nvPr/>
+        </p:nvSpPr>
+        <p:spPr>
+          <a:xfrm>
+            <a:off x="6355080" y="1463040"/>
+            <a:ext cx="5074920" cy="109728"/>
+          </a:xfrm>
+          <a:prstGeom prst="rect">
+            <a:avLst/>
+          </a:prstGeom>
+          <a:solidFill>
+            <a:srgbClr val="E0AB5D"/>
+          </a:solidFill>
+          <a:ln>
+            <a:noFill/>
+          </a:ln>
+        </p:spPr>
+        <p:style>
+          <a:lnRef idx="1">
+            <a:schemeClr val="accent1"/>
+          </a:lnRef>
+          <a:fillRef idx="3">
+            <a:schemeClr val="accent1"/>
+          </a:fillRef>
+          <a:effectRef idx="2">
+            <a:schemeClr val="accent1"/>
+          </a:effectRef>
+          <a:fontRef idx="minor">
+            <a:schemeClr val="lt1"/>
+          </a:fontRef>
+        </p:style>
+        <p:txBody>
+          <a:bodyPr rtlCol="0" anchor="ctr"/>
+          <a:lstStyle/>
+          <a:p>
+            <a:pPr algn="ctr"/>
+          </a:p>
+        </p:txBody>
+      </p:sp>
+      <p:sp>
+        <p:nvSpPr>
+          <p:cNvPr id="15" name="TextBox 14"/>
+          <p:cNvSpPr txBox="1"/>
+          <p:nvPr/>
+        </p:nvSpPr>
+        <p:spPr>
+          <a:xfrm>
+            <a:off x="6556248" y="1664208"/>
+            <a:ext cx="4672583" cy="310896"/>
+          </a:xfrm>
+          <a:prstGeom prst="rect">
+            <a:avLst/>
+          </a:prstGeom>
+          <a:noFill/>
+        </p:spPr>
+        <p:txBody>
+          <a:bodyPr wrap="square" anchor="t">
+            <a:spAutoFit/>
+          </a:bodyPr>
+          <a:lstStyle/>
+          <a:p>
+            <a:pPr algn="l"/>
+            <a:r>
+              <a:rPr sz="1400" b="1">
+                <a:solidFill>
+                  <a:srgbClr val="E0AB5D"/>
+                </a:solidFill>
+                <a:latin typeface="Aptos"/>
+              </a:rPr>
+              <a:t>Operator effect</a:t>
+            </a:r>
+          </a:p>
+        </p:txBody>
+      </p:sp>
+      <p:sp>
+        <p:nvSpPr>
+          <p:cNvPr id="16" name="TextBox 15"/>
+          <p:cNvSpPr txBox="1"/>
+          <p:nvPr/>
+        </p:nvSpPr>
+        <p:spPr>
+          <a:xfrm>
+            <a:off x="6556248" y="2121408"/>
+            <a:ext cx="4672583" cy="3721608"/>
+          </a:xfrm>
+          <a:prstGeom prst="rect">
+            <a:avLst/>
+          </a:prstGeom>
+          <a:noFill/>
+        </p:spPr>
+        <p:txBody>
+          <a:bodyPr wrap="square" anchor="t" lIns="38100" rIns="38100" tIns="25400" bIns="25400">
+            <a:noAutofit/>
+          </a:bodyPr>
+          <a:lstStyle/>
           <a:p>
             <a:pPr>
               <a:spcAft>
@@ -13426,158 +13629,12 @@
               <a:rPr sz="1500" b="0" i="0">
                 <a:latin typeface="Calibri"/>
               </a:rPr>
-              <a:t>The operator-facing references are `README.md` and `ACPX.md`, while the implementation lives under `agent/acpx/`, `agent/skills/`, and `agent/skills_pkg/`.</a:t>
+              <a:t>Tables appear only for state-changing agent families that actually fired.</a:t>
             </a:r>
             <a:endParaRPr sz="1500" b="0" i="0">
               <a:latin typeface="Calibri"/>
             </a:endParaRPr>
           </a:p>
-        </p:txBody>
-      </p:sp>
-      <p:sp>
-        <p:nvSpPr>
-          <p:cNvPr id="13" name="Rounded Rectangle 12"/>
-          <p:cNvSpPr/>
-          <p:nvPr/>
-        </p:nvSpPr>
-        <p:spPr>
-          <a:xfrm>
-            <a:off x="6355080" y="1463040"/>
-            <a:ext cx="5074920" cy="4526280"/>
-          </a:xfrm>
-          <a:prstGeom prst="roundRect">
-            <a:avLst/>
-          </a:prstGeom>
-          <a:solidFill>
-            <a:srgbClr val="161A19"/>
-          </a:solidFill>
-          <a:ln>
-            <a:solidFill>
-              <a:srgbClr val="595F56"/>
-            </a:solidFill>
-          </a:ln>
-        </p:spPr>
-        <p:style>
-          <a:lnRef idx="1">
-            <a:schemeClr val="accent1"/>
-          </a:lnRef>
-          <a:fillRef idx="3">
-            <a:schemeClr val="accent1"/>
-          </a:fillRef>
-          <a:effectRef idx="2">
-            <a:schemeClr val="accent1"/>
-          </a:effectRef>
-          <a:fontRef idx="minor">
-            <a:schemeClr val="lt1"/>
-          </a:fontRef>
-        </p:style>
-        <p:txBody>
-          <a:bodyPr rtlCol="0" anchor="ctr"/>
-          <a:lstStyle/>
-          <a:p>
-            <a:pPr algn="ctr"/>
-          </a:p>
-        </p:txBody>
-      </p:sp>
-      <p:sp>
-        <p:nvSpPr>
-          <p:cNvPr id="14" name="Rectangle 13"/>
-          <p:cNvSpPr/>
-          <p:nvPr/>
-        </p:nvSpPr>
-        <p:spPr>
-          <a:xfrm>
-            <a:off x="6355080" y="1463040"/>
-            <a:ext cx="5074920" cy="109728"/>
-          </a:xfrm>
-          <a:prstGeom prst="rect">
-            <a:avLst/>
-          </a:prstGeom>
-          <a:solidFill>
-            <a:srgbClr val="48BF8F"/>
-          </a:solidFill>
-          <a:ln>
-            <a:noFill/>
-          </a:ln>
-        </p:spPr>
-        <p:style>
-          <a:lnRef idx="1">
-            <a:schemeClr val="accent1"/>
-          </a:lnRef>
-          <a:fillRef idx="3">
-            <a:schemeClr val="accent1"/>
-          </a:fillRef>
-          <a:effectRef idx="2">
-            <a:schemeClr val="accent1"/>
-          </a:effectRef>
-          <a:fontRef idx="minor">
-            <a:schemeClr val="lt1"/>
-          </a:fontRef>
-        </p:style>
-        <p:txBody>
-          <a:bodyPr rtlCol="0" anchor="ctr"/>
-          <a:lstStyle/>
-          <a:p>
-            <a:pPr algn="ctr"/>
-          </a:p>
-        </p:txBody>
-      </p:sp>
-      <p:sp>
-        <p:nvSpPr>
-          <p:cNvPr id="15" name="TextBox 14"/>
-          <p:cNvSpPr txBox="1"/>
-          <p:nvPr/>
-        </p:nvSpPr>
-        <p:spPr>
-          <a:xfrm>
-            <a:off x="6556248" y="1664208"/>
-            <a:ext cx="4672583" cy="310896"/>
-          </a:xfrm>
-          <a:prstGeom prst="rect">
-            <a:avLst/>
-          </a:prstGeom>
-          <a:noFill/>
-        </p:spPr>
-        <p:txBody>
-          <a:bodyPr wrap="square" anchor="t">
-            <a:spAutoFit/>
-          </a:bodyPr>
-          <a:lstStyle/>
-          <a:p>
-            <a:pPr algn="l"/>
-            <a:r>
-              <a:rPr sz="1400" b="1">
-                <a:solidFill>
-                  <a:srgbClr val="48BF8F"/>
-                </a:solidFill>
-                <a:latin typeface="Aptos"/>
-              </a:rPr>
-              <a:t>Files and operator model</a:t>
-            </a:r>
-          </a:p>
-        </p:txBody>
-      </p:sp>
-      <p:sp>
-        <p:nvSpPr>
-          <p:cNvPr id="16" name="TextBox 15"/>
-          <p:cNvSpPr txBox="1"/>
-          <p:nvPr/>
-        </p:nvSpPr>
-        <p:spPr>
-          <a:xfrm>
-            <a:off x="6556248" y="2121408"/>
-            <a:ext cx="4672583" cy="3721608"/>
-          </a:xfrm>
-          <a:prstGeom prst="rect">
-            <a:avLst/>
-          </a:prstGeom>
-          <a:noFill/>
-        </p:spPr>
-        <p:txBody>
-          <a:bodyPr wrap="square" anchor="t" lIns="38100" rIns="38100" tIns="25400" bIns="25400">
-            <a:noAutofit/>
-          </a:bodyPr>
-          <a:lstStyle/>
           <a:p>
             <a:pPr>
               <a:spcAft>
@@ -13594,7 +13651,7 @@
               <a:rPr sz="1500" b="0" i="0">
                 <a:latin typeface="Calibri"/>
               </a:rPr>
-              <a:t>`agent/acpx/` hosts the runtime, permission gate, registry, and tools.</a:t>
+              <a:t>Verdicts are derived from real tool returns, not inferred from prose summaries.</a:t>
             </a:r>
             <a:endParaRPr sz="1500" b="0" i="0">
               <a:latin typeface="Calibri"/>
@@ -13616,29 +13673,7 @@
               <a:rPr sz="1500" b="0" i="0">
                 <a:latin typeface="Calibri"/>
               </a:rPr>
-              <a:t>`agent/skills/` and `agent/skills_pkg/` host the in-process skill harness and markdown catalog.</a:t>
-            </a:r>
-            <a:endParaRPr sz="1500" b="0" i="0">
-              <a:latin typeface="Calibri"/>
-            </a:endParaRPr>
-          </a:p>
-          <a:p>
-            <a:pPr>
-              <a:spcAft>
-                <a:spcPts val="600"/>
-              </a:spcAft>
-              <a:defRPr sz="1500">
-                <a:solidFill>
-                  <a:srgbClr val="B4BAAE"/>
-                </a:solidFill>
-                <a:latin typeface="Aptos"/>
-              </a:defRPr>
-            </a:pPr>
-            <a:r>
-              <a:rPr sz="1500" b="0" i="0">
-                <a:latin typeface="Calibri"/>
-              </a:rPr>
-              <a:t>Transcripts and audit logs are persisted so external delegation stays replayable.</a:t>
+              <a:t>This is the audit surface that makes long jobs debuggable from the chat output itself.</a:t>
             </a:r>
             <a:endParaRPr sz="1500" b="0" i="0">
               <a:latin typeface="Calibri"/>
@@ -13722,7 +13757,7 @@
             <a:avLst/>
           </a:prstGeom>
           <a:solidFill>
-            <a:srgbClr val="E0AB5D"/>
+            <a:srgbClr val="C48052"/>
           </a:solidFill>
           <a:ln>
             <a:noFill/>
@@ -13765,7 +13800,7 @@
             <a:avLst/>
           </a:prstGeom>
           <a:solidFill>
-            <a:srgbClr val="E0AB5D"/>
+            <a:srgbClr val="C48052"/>
           </a:solidFill>
           <a:ln>
             <a:noFill/>
@@ -13808,7 +13843,7 @@
             <a:avLst/>
           </a:prstGeom>
           <a:solidFill>
-            <a:srgbClr val="E0AB5D"/>
+            <a:srgbClr val="C48052"/>
           </a:solidFill>
           <a:ln>
             <a:noFill/>
@@ -13851,7 +13886,7 @@
             <a:avLst/>
           </a:prstGeom>
           <a:solidFill>
-            <a:srgbClr val="E0AB5D"/>
+            <a:srgbClr val="C48052"/>
           </a:solidFill>
           <a:ln>
             <a:noFill/>
@@ -13905,11 +13940,11 @@
             <a:r>
               <a:rPr sz="1000" b="1">
                 <a:solidFill>
-                  <a:srgbClr val="E0AB5D"/>
+                  <a:srgbClr val="C48052"/>
                 </a:solidFill>
                 <a:latin typeface="Aptos"/>
               </a:rPr>
-              <a:t>TLAMATINI.LOG AS FORENSIC TRUTH</a:t>
+              <a:t>EXTERNAL CODING-AGENT RUNTIME</a:t>
             </a:r>
           </a:p>
         </p:txBody>
@@ -13944,7 +13979,7 @@
                 </a:solidFill>
                 <a:latin typeface="Aptos Display"/>
               </a:rPr>
-              <a:t>Application Log</a:t>
+              <a:t>ACPX And Skills</a:t>
             </a:r>
           </a:p>
         </p:txBody>
@@ -13957,8 +13992,8 @@
         </p:nvSpPr>
         <p:spPr>
           <a:xfrm>
-            <a:off x="777240" y="1600200"/>
-            <a:ext cx="10469880" cy="4206240"/>
+            <a:off x="713232" y="1463040"/>
+            <a:ext cx="5394960" cy="4526280"/>
           </a:xfrm>
           <a:prstGeom prst="roundRect">
             <a:avLst/>
@@ -14002,14 +14037,14 @@
         </p:nvSpPr>
         <p:spPr>
           <a:xfrm>
-            <a:off x="777240" y="1600200"/>
-            <a:ext cx="10469880" cy="109728"/>
-          </a:xfrm>
-          <a:prstGeom prst="rect">
-            <a:avLst/>
-          </a:prstGeom>
-          <a:solidFill>
-            <a:srgbClr val="E0AB5D"/>
+            <a:off x="713232" y="1463040"/>
+            <a:ext cx="5394960" cy="109728"/>
+          </a:xfrm>
+          <a:prstGeom prst="rect">
+            <a:avLst/>
+          </a:prstGeom>
+          <a:solidFill>
+            <a:srgbClr val="C48052"/>
           </a:solidFill>
           <a:ln>
             <a:noFill/>
@@ -14045,8 +14080,8 @@
         </p:nvSpPr>
         <p:spPr>
           <a:xfrm>
-            <a:off x="978408" y="1801368"/>
-            <a:ext cx="10067544" cy="310896"/>
+            <a:off x="914400" y="1664208"/>
+            <a:ext cx="4992624" cy="310896"/>
           </a:xfrm>
           <a:prstGeom prst="rect">
             <a:avLst/>
@@ -14063,11 +14098,11 @@
             <a:r>
               <a:rPr sz="1400" b="1">
                 <a:solidFill>
-                  <a:srgbClr val="E0AB5D"/>
+                  <a:srgbClr val="C48052"/>
                 </a:solidFill>
                 <a:latin typeface="Aptos"/>
               </a:rPr>
-              <a:t>How the log works</a:t>
+              <a:t>What ACPX adds</a:t>
             </a:r>
           </a:p>
         </p:txBody>
@@ -14080,8 +14115,8 @@
         </p:nvSpPr>
         <p:spPr>
           <a:xfrm>
-            <a:off x="978408" y="2258568"/>
-            <a:ext cx="10067544" cy="3401568"/>
+            <a:off x="914400" y="2121408"/>
+            <a:ext cx="4992624" cy="3721608"/>
           </a:xfrm>
           <a:prstGeom prst="rect">
             <a:avLst/>
@@ -14098,7 +14133,7 @@
               <a:spcAft>
                 <a:spcPts val="600"/>
               </a:spcAft>
-              <a:defRPr sz="1700">
+              <a:defRPr sz="1500">
                 <a:solidFill>
                   <a:srgbClr val="B4BAAE"/>
                 </a:solidFill>
@@ -14106,12 +14141,12 @@
               </a:defRPr>
             </a:pPr>
             <a:r>
-              <a:rPr sz="1700" b="0" i="0">
+              <a:rPr sz="1500" b="0" i="0">
                 <a:latin typeface="Calibri"/>
               </a:rPr>
-              <a:t>The built-in `tlamatini.log` file captures both stdout and stderr through a tee stream initialized in `manage.py` before Django starts.</a:t>
-            </a:r>
-            <a:endParaRPr sz="1700" b="0" i="0">
+              <a:t>ACPX lets Tlamatini spawn external coding-agent CLIs such as Codex, Claude Code, Cursor, Gemini, Qwen, and others as managed child processes.</a:t>
+            </a:r>
+            <a:endParaRPr sz="1500" b="0" i="0">
               <a:latin typeface="Calibri"/>
             </a:endParaRPr>
           </a:p>
@@ -14120,7 +14155,7 @@
               <a:spcAft>
                 <a:spcPts val="600"/>
               </a:spcAft>
-              <a:defRPr sz="1700">
+              <a:defRPr sz="1500">
                 <a:solidFill>
                   <a:srgbClr val="B4BAAE"/>
                 </a:solidFill>
@@ -14128,12 +14163,12 @@
               </a:defRPr>
             </a:pPr>
             <a:r>
-              <a:rPr sz="1700" b="0" i="0">
+              <a:rPr sz="1500" b="0" i="0">
                 <a:latin typeface="Calibri"/>
               </a:rPr>
-              <a:t>In source mode the log sits next to `manage.py`; in frozen mode it lives next to the executable.</a:t>
-            </a:r>
-            <a:endParaRPr sz="1700" b="0" i="0">
+              <a:t>It pairs those agents with markdown-driven `SKILL.md` packages, validated I/O contracts, permission gating, and append-only audit logs.</a:t>
+            </a:r>
+            <a:endParaRPr sz="1500" b="0" i="0">
               <a:latin typeface="Calibri"/>
             </a:endParaRPr>
           </a:p>
@@ -14142,7 +14177,7 @@
               <a:spcAft>
                 <a:spcPts val="600"/>
               </a:spcAft>
-              <a:defRPr sz="1700">
+              <a:defRPr sz="1500">
                 <a:solidFill>
                   <a:srgbClr val="B4BAAE"/>
                 </a:solidFill>
@@ -14150,12 +14185,246 @@
               </a:defRPr>
             </a:pPr>
             <a:r>
-              <a:rPr sz="1700" b="0" i="0">
+              <a:rPr sz="1500" b="0" i="0">
                 <a:latin typeface="Calibri"/>
               </a:rPr>
-              <a:t>Immediate flush behavior makes the log the primary forensic artifact for startup problems, warnings, tracebacks, and runtime diagnostics.</a:t>
-            </a:r>
-            <a:endParaRPr sz="1700" b="0" i="0">
+              <a:t>Transport-aware drain rules and bounded event bodies reduce latency while protecting the LLM context budget during external-agent relays.</a:t>
+            </a:r>
+            <a:endParaRPr sz="1500" b="0" i="0">
+              <a:latin typeface="Calibri"/>
+            </a:endParaRPr>
+          </a:p>
+          <a:p>
+            <a:pPr>
+              <a:spcAft>
+                <a:spcPts val="600"/>
+              </a:spcAft>
+              <a:defRPr sz="1500">
+                <a:solidFill>
+                  <a:srgbClr val="B4BAAE"/>
+                </a:solidFill>
+                <a:latin typeface="Aptos"/>
+              </a:defRPr>
+            </a:pPr>
+            <a:r>
+              <a:rPr sz="1500" b="0" i="0">
+                <a:latin typeface="Calibri"/>
+              </a:rPr>
+              <a:t>The operator-facing references are `README.md` and `ACPX.md`, while the implementation lives under `agent/acpx/`, `agent/skills/`, and `agent/skills_pkg/`.</a:t>
+            </a:r>
+            <a:endParaRPr sz="1500" b="0" i="0">
+              <a:latin typeface="Calibri"/>
+            </a:endParaRPr>
+          </a:p>
+        </p:txBody>
+      </p:sp>
+      <p:sp>
+        <p:nvSpPr>
+          <p:cNvPr id="13" name="Rounded Rectangle 12"/>
+          <p:cNvSpPr/>
+          <p:nvPr/>
+        </p:nvSpPr>
+        <p:spPr>
+          <a:xfrm>
+            <a:off x="6355080" y="1463040"/>
+            <a:ext cx="5074920" cy="4526280"/>
+          </a:xfrm>
+          <a:prstGeom prst="roundRect">
+            <a:avLst/>
+          </a:prstGeom>
+          <a:solidFill>
+            <a:srgbClr val="161A19"/>
+          </a:solidFill>
+          <a:ln>
+            <a:solidFill>
+              <a:srgbClr val="595F56"/>
+            </a:solidFill>
+          </a:ln>
+        </p:spPr>
+        <p:style>
+          <a:lnRef idx="1">
+            <a:schemeClr val="accent1"/>
+          </a:lnRef>
+          <a:fillRef idx="3">
+            <a:schemeClr val="accent1"/>
+          </a:fillRef>
+          <a:effectRef idx="2">
+            <a:schemeClr val="accent1"/>
+          </a:effectRef>
+          <a:fontRef idx="minor">
+            <a:schemeClr val="lt1"/>
+          </a:fontRef>
+        </p:style>
+        <p:txBody>
+          <a:bodyPr rtlCol="0" anchor="ctr"/>
+          <a:lstStyle/>
+          <a:p>
+            <a:pPr algn="ctr"/>
+          </a:p>
+        </p:txBody>
+      </p:sp>
+      <p:sp>
+        <p:nvSpPr>
+          <p:cNvPr id="14" name="Rectangle 13"/>
+          <p:cNvSpPr/>
+          <p:nvPr/>
+        </p:nvSpPr>
+        <p:spPr>
+          <a:xfrm>
+            <a:off x="6355080" y="1463040"/>
+            <a:ext cx="5074920" cy="109728"/>
+          </a:xfrm>
+          <a:prstGeom prst="rect">
+            <a:avLst/>
+          </a:prstGeom>
+          <a:solidFill>
+            <a:srgbClr val="48BF8F"/>
+          </a:solidFill>
+          <a:ln>
+            <a:noFill/>
+          </a:ln>
+        </p:spPr>
+        <p:style>
+          <a:lnRef idx="1">
+            <a:schemeClr val="accent1"/>
+          </a:lnRef>
+          <a:fillRef idx="3">
+            <a:schemeClr val="accent1"/>
+          </a:fillRef>
+          <a:effectRef idx="2">
+            <a:schemeClr val="accent1"/>
+          </a:effectRef>
+          <a:fontRef idx="minor">
+            <a:schemeClr val="lt1"/>
+          </a:fontRef>
+        </p:style>
+        <p:txBody>
+          <a:bodyPr rtlCol="0" anchor="ctr"/>
+          <a:lstStyle/>
+          <a:p>
+            <a:pPr algn="ctr"/>
+          </a:p>
+        </p:txBody>
+      </p:sp>
+      <p:sp>
+        <p:nvSpPr>
+          <p:cNvPr id="15" name="TextBox 14"/>
+          <p:cNvSpPr txBox="1"/>
+          <p:nvPr/>
+        </p:nvSpPr>
+        <p:spPr>
+          <a:xfrm>
+            <a:off x="6556248" y="1664208"/>
+            <a:ext cx="4672583" cy="310896"/>
+          </a:xfrm>
+          <a:prstGeom prst="rect">
+            <a:avLst/>
+          </a:prstGeom>
+          <a:noFill/>
+        </p:spPr>
+        <p:txBody>
+          <a:bodyPr wrap="square" anchor="t">
+            <a:spAutoFit/>
+          </a:bodyPr>
+          <a:lstStyle/>
+          <a:p>
+            <a:pPr algn="l"/>
+            <a:r>
+              <a:rPr sz="1400" b="1">
+                <a:solidFill>
+                  <a:srgbClr val="48BF8F"/>
+                </a:solidFill>
+                <a:latin typeface="Aptos"/>
+              </a:rPr>
+              <a:t>Files and operator model</a:t>
+            </a:r>
+          </a:p>
+        </p:txBody>
+      </p:sp>
+      <p:sp>
+        <p:nvSpPr>
+          <p:cNvPr id="16" name="TextBox 15"/>
+          <p:cNvSpPr txBox="1"/>
+          <p:nvPr/>
+        </p:nvSpPr>
+        <p:spPr>
+          <a:xfrm>
+            <a:off x="6556248" y="2121408"/>
+            <a:ext cx="4672583" cy="3721608"/>
+          </a:xfrm>
+          <a:prstGeom prst="rect">
+            <a:avLst/>
+          </a:prstGeom>
+          <a:noFill/>
+        </p:spPr>
+        <p:txBody>
+          <a:bodyPr wrap="square" anchor="t" lIns="38100" rIns="38100" tIns="25400" bIns="25400">
+            <a:noAutofit/>
+          </a:bodyPr>
+          <a:lstStyle/>
+          <a:p>
+            <a:pPr>
+              <a:spcAft>
+                <a:spcPts val="600"/>
+              </a:spcAft>
+              <a:defRPr sz="1500">
+                <a:solidFill>
+                  <a:srgbClr val="B4BAAE"/>
+                </a:solidFill>
+                <a:latin typeface="Aptos"/>
+              </a:defRPr>
+            </a:pPr>
+            <a:r>
+              <a:rPr sz="1500" b="0" i="0">
+                <a:latin typeface="Calibri"/>
+              </a:rPr>
+              <a:t>`agent/acpx/` hosts the runtime, permission gate, registry, and tools.</a:t>
+            </a:r>
+            <a:endParaRPr sz="1500" b="0" i="0">
+              <a:latin typeface="Calibri"/>
+            </a:endParaRPr>
+          </a:p>
+          <a:p>
+            <a:pPr>
+              <a:spcAft>
+                <a:spcPts val="600"/>
+              </a:spcAft>
+              <a:defRPr sz="1500">
+                <a:solidFill>
+                  <a:srgbClr val="B4BAAE"/>
+                </a:solidFill>
+                <a:latin typeface="Aptos"/>
+              </a:defRPr>
+            </a:pPr>
+            <a:r>
+              <a:rPr sz="1500" b="0" i="0">
+                <a:latin typeface="Calibri"/>
+              </a:rPr>
+              <a:t>`agent/skills/` and `agent/skills_pkg/` host the in-process skill harness and markdown catalog.</a:t>
+            </a:r>
+            <a:endParaRPr sz="1500" b="0" i="0">
+              <a:latin typeface="Calibri"/>
+            </a:endParaRPr>
+          </a:p>
+          <a:p>
+            <a:pPr>
+              <a:spcAft>
+                <a:spcPts val="600"/>
+              </a:spcAft>
+              <a:defRPr sz="1500">
+                <a:solidFill>
+                  <a:srgbClr val="B4BAAE"/>
+                </a:solidFill>
+                <a:latin typeface="Aptos"/>
+              </a:defRPr>
+            </a:pPr>
+            <a:r>
+              <a:rPr sz="1500" b="0" i="0">
+                <a:latin typeface="Calibri"/>
+              </a:rPr>
+              <a:t>Transcripts and audit logs are persisted so external delegation stays replayable.</a:t>
+            </a:r>
+            <a:endParaRPr sz="1500" b="0" i="0">
               <a:latin typeface="Calibri"/>
             </a:endParaRPr>
           </a:p>
@@ -14237,7 +14506,7 @@
             <a:avLst/>
           </a:prstGeom>
           <a:solidFill>
-            <a:srgbClr val="48BF8F"/>
+            <a:srgbClr val="E0AB5D"/>
           </a:solidFill>
           <a:ln>
             <a:noFill/>
@@ -14280,7 +14549,7 @@
             <a:avLst/>
           </a:prstGeom>
           <a:solidFill>
-            <a:srgbClr val="48BF8F"/>
+            <a:srgbClr val="E0AB5D"/>
           </a:solidFill>
           <a:ln>
             <a:noFill/>
@@ -14323,7 +14592,7 @@
             <a:avLst/>
           </a:prstGeom>
           <a:solidFill>
-            <a:srgbClr val="48BF8F"/>
+            <a:srgbClr val="E0AB5D"/>
           </a:solidFill>
           <a:ln>
             <a:noFill/>
@@ -14366,7 +14635,7 @@
             <a:avLst/>
           </a:prstGeom>
           <a:solidFill>
-            <a:srgbClr val="48BF8F"/>
+            <a:srgbClr val="E0AB5D"/>
           </a:solidFill>
           <a:ln>
             <a:noFill/>
@@ -14420,11 +14689,11 @@
             <a:r>
               <a:rPr sz="1000" b="1">
                 <a:solidFill>
-                  <a:srgbClr val="48BF8F"/>
+                  <a:srgbClr val="E0AB5D"/>
                 </a:solidFill>
                 <a:latin typeface="Aptos"/>
               </a:rPr>
-              <a:t>CURRENT HEAD INVENTORY</a:t>
+              <a:t>TLAMATINI.LOG AS FORENSIC TRUTH</a:t>
             </a:r>
           </a:p>
         </p:txBody>
@@ -14459,7 +14728,7 @@
                 </a:solidFill>
                 <a:latin typeface="Aptos Display"/>
               </a:rPr>
-              <a:t>Repository Facts</a:t>
+              <a:t>Application Log</a:t>
             </a:r>
           </a:p>
         </p:txBody>
@@ -14472,18 +14741,18 @@
         </p:nvSpPr>
         <p:spPr>
           <a:xfrm>
-            <a:off x="749808" y="1600200"/>
-            <a:ext cx="1600200" cy="932688"/>
+            <a:off x="777240" y="1600200"/>
+            <a:ext cx="10469880" cy="4206240"/>
           </a:xfrm>
           <a:prstGeom prst="roundRect">
             <a:avLst/>
           </a:prstGeom>
           <a:solidFill>
-            <a:srgbClr val="222724"/>
+            <a:srgbClr val="161A19"/>
           </a:solidFill>
           <a:ln>
             <a:solidFill>
-              <a:srgbClr val="48BF8F"/>
+              <a:srgbClr val="595F56"/>
             </a:solidFill>
           </a:ln>
         </p:spPr>
@@ -14511,14 +14780,57 @@
       </p:sp>
       <p:sp>
         <p:nvSpPr>
-          <p:cNvPr id="10" name="TextBox 9"/>
+          <p:cNvPr id="10" name="Rectangle 9"/>
+          <p:cNvSpPr/>
+          <p:nvPr/>
+        </p:nvSpPr>
+        <p:spPr>
+          <a:xfrm>
+            <a:off x="777240" y="1600200"/>
+            <a:ext cx="10469880" cy="109728"/>
+          </a:xfrm>
+          <a:prstGeom prst="rect">
+            <a:avLst/>
+          </a:prstGeom>
+          <a:solidFill>
+            <a:srgbClr val="E0AB5D"/>
+          </a:solidFill>
+          <a:ln>
+            <a:noFill/>
+          </a:ln>
+        </p:spPr>
+        <p:style>
+          <a:lnRef idx="1">
+            <a:schemeClr val="accent1"/>
+          </a:lnRef>
+          <a:fillRef idx="3">
+            <a:schemeClr val="accent1"/>
+          </a:fillRef>
+          <a:effectRef idx="2">
+            <a:schemeClr val="accent1"/>
+          </a:effectRef>
+          <a:fontRef idx="minor">
+            <a:schemeClr val="lt1"/>
+          </a:fontRef>
+        </p:style>
+        <p:txBody>
+          <a:bodyPr rtlCol="0" anchor="ctr"/>
+          <a:lstStyle/>
+          <a:p>
+            <a:pPr algn="ctr"/>
+          </a:p>
+        </p:txBody>
+      </p:sp>
+      <p:sp>
+        <p:nvSpPr>
+          <p:cNvPr id="11" name="TextBox 10"/>
           <p:cNvSpPr txBox="1"/>
           <p:nvPr/>
         </p:nvSpPr>
         <p:spPr>
           <a:xfrm>
-            <a:off x="896112" y="1737360"/>
-            <a:ext cx="1307592" cy="219456"/>
+            <a:off x="978408" y="1801368"/>
+            <a:ext cx="10067544" cy="310896"/>
           </a:xfrm>
           <a:prstGeom prst="rect">
             <a:avLst/>
@@ -14533,760 +14845,27 @@
           <a:p>
             <a:pPr algn="l"/>
             <a:r>
-              <a:rPr sz="800" b="1">
-                <a:solidFill>
-                  <a:srgbClr val="48BF8F"/>
+              <a:rPr sz="1400" b="1">
+                <a:solidFill>
+                  <a:srgbClr val="E0AB5D"/>
                 </a:solidFill>
                 <a:latin typeface="Aptos"/>
               </a:rPr>
-              <a:t>TRACKED</a:t>
-            </a:r>
-          </a:p>
-        </p:txBody>
-      </p:sp>
-      <p:sp>
-        <p:nvSpPr>
-          <p:cNvPr id="11" name="TextBox 10"/>
+              <a:t>How the log works</a:t>
+            </a:r>
+          </a:p>
+        </p:txBody>
+      </p:sp>
+      <p:sp>
+        <p:nvSpPr>
+          <p:cNvPr id="12" name="TextBox 11"/>
           <p:cNvSpPr txBox="1"/>
           <p:nvPr/>
         </p:nvSpPr>
         <p:spPr>
           <a:xfrm>
-            <a:off x="896112" y="1984248"/>
-            <a:ext cx="1307592" cy="347472"/>
-          </a:xfrm>
-          <a:prstGeom prst="rect">
-            <a:avLst/>
-          </a:prstGeom>
-          <a:noFill/>
-        </p:spPr>
-        <p:txBody>
-          <a:bodyPr wrap="square" anchor="t">
-            <a:spAutoFit/>
-          </a:bodyPr>
-          <a:lstStyle/>
-          <a:p>
-            <a:pPr algn="l"/>
-            <a:r>
-              <a:rPr sz="2000" b="1">
-                <a:solidFill>
-                  <a:srgbClr val="E8E8DE"/>
-                </a:solidFill>
-                <a:latin typeface="Aptos"/>
-              </a:rPr>
-              <a:t>436</a:t>
-            </a:r>
-          </a:p>
-        </p:txBody>
-      </p:sp>
-      <p:sp>
-        <p:nvSpPr>
-          <p:cNvPr id="12" name="Rounded Rectangle 11"/>
-          <p:cNvSpPr/>
-          <p:nvPr/>
-        </p:nvSpPr>
-        <p:spPr>
-          <a:xfrm>
-            <a:off x="2624327" y="1600200"/>
-            <a:ext cx="1600200" cy="932688"/>
-          </a:xfrm>
-          <a:prstGeom prst="roundRect">
-            <a:avLst/>
-          </a:prstGeom>
-          <a:solidFill>
-            <a:srgbClr val="222724"/>
-          </a:solidFill>
-          <a:ln>
-            <a:solidFill>
-              <a:srgbClr val="C48052"/>
-            </a:solidFill>
-          </a:ln>
-        </p:spPr>
-        <p:style>
-          <a:lnRef idx="1">
-            <a:schemeClr val="accent1"/>
-          </a:lnRef>
-          <a:fillRef idx="3">
-            <a:schemeClr val="accent1"/>
-          </a:fillRef>
-          <a:effectRef idx="2">
-            <a:schemeClr val="accent1"/>
-          </a:effectRef>
-          <a:fontRef idx="minor">
-            <a:schemeClr val="lt1"/>
-          </a:fontRef>
-        </p:style>
-        <p:txBody>
-          <a:bodyPr rtlCol="0" anchor="ctr"/>
-          <a:lstStyle/>
-          <a:p>
-            <a:pPr algn="ctr"/>
-          </a:p>
-        </p:txBody>
-      </p:sp>
-      <p:sp>
-        <p:nvSpPr>
-          <p:cNvPr id="13" name="TextBox 12"/>
-          <p:cNvSpPr txBox="1"/>
-          <p:nvPr/>
-        </p:nvSpPr>
-        <p:spPr>
-          <a:xfrm>
-            <a:off x="2770632" y="1737360"/>
-            <a:ext cx="1307592" cy="219456"/>
-          </a:xfrm>
-          <a:prstGeom prst="rect">
-            <a:avLst/>
-          </a:prstGeom>
-          <a:noFill/>
-        </p:spPr>
-        <p:txBody>
-          <a:bodyPr wrap="square" anchor="t">
-            <a:spAutoFit/>
-          </a:bodyPr>
-          <a:lstStyle/>
-          <a:p>
-            <a:pPr algn="l"/>
-            <a:r>
-              <a:rPr sz="800" b="1">
-                <a:solidFill>
-                  <a:srgbClr val="C48052"/>
-                </a:solidFill>
-                <a:latin typeface="Aptos"/>
-              </a:rPr>
-              <a:t>AGENTS</a:t>
-            </a:r>
-          </a:p>
-        </p:txBody>
-      </p:sp>
-      <p:sp>
-        <p:nvSpPr>
-          <p:cNvPr id="14" name="TextBox 13"/>
-          <p:cNvSpPr txBox="1"/>
-          <p:nvPr/>
-        </p:nvSpPr>
-        <p:spPr>
-          <a:xfrm>
-            <a:off x="2770632" y="1984248"/>
-            <a:ext cx="1307592" cy="347472"/>
-          </a:xfrm>
-          <a:prstGeom prst="rect">
-            <a:avLst/>
-          </a:prstGeom>
-          <a:noFill/>
-        </p:spPr>
-        <p:txBody>
-          <a:bodyPr wrap="square" anchor="t">
-            <a:spAutoFit/>
-          </a:bodyPr>
-          <a:lstStyle/>
-          <a:p>
-            <a:pPr algn="l"/>
-            <a:r>
-              <a:rPr sz="2000" b="1">
-                <a:solidFill>
-                  <a:srgbClr val="E8E8DE"/>
-                </a:solidFill>
-                <a:latin typeface="Aptos"/>
-              </a:rPr>
-              <a:t>60</a:t>
-            </a:r>
-          </a:p>
-        </p:txBody>
-      </p:sp>
-      <p:sp>
-        <p:nvSpPr>
-          <p:cNvPr id="15" name="Rounded Rectangle 14"/>
-          <p:cNvSpPr/>
-          <p:nvPr/>
-        </p:nvSpPr>
-        <p:spPr>
-          <a:xfrm>
-            <a:off x="4498848" y="1600200"/>
-            <a:ext cx="1600200" cy="932688"/>
-          </a:xfrm>
-          <a:prstGeom prst="roundRect">
-            <a:avLst/>
-          </a:prstGeom>
-          <a:solidFill>
-            <a:srgbClr val="222724"/>
-          </a:solidFill>
-          <a:ln>
-            <a:solidFill>
-              <a:srgbClr val="48BF8F"/>
-            </a:solidFill>
-          </a:ln>
-        </p:spPr>
-        <p:style>
-          <a:lnRef idx="1">
-            <a:schemeClr val="accent1"/>
-          </a:lnRef>
-          <a:fillRef idx="3">
-            <a:schemeClr val="accent1"/>
-          </a:fillRef>
-          <a:effectRef idx="2">
-            <a:schemeClr val="accent1"/>
-          </a:effectRef>
-          <a:fontRef idx="minor">
-            <a:schemeClr val="lt1"/>
-          </a:fontRef>
-        </p:style>
-        <p:txBody>
-          <a:bodyPr rtlCol="0" anchor="ctr"/>
-          <a:lstStyle/>
-          <a:p>
-            <a:pPr algn="ctr"/>
-          </a:p>
-        </p:txBody>
-      </p:sp>
-      <p:sp>
-        <p:nvSpPr>
-          <p:cNvPr id="16" name="TextBox 15"/>
-          <p:cNvSpPr txBox="1"/>
-          <p:nvPr/>
-        </p:nvSpPr>
-        <p:spPr>
-          <a:xfrm>
-            <a:off x="4645152" y="1737360"/>
-            <a:ext cx="1307592" cy="219456"/>
-          </a:xfrm>
-          <a:prstGeom prst="rect">
-            <a:avLst/>
-          </a:prstGeom>
-          <a:noFill/>
-        </p:spPr>
-        <p:txBody>
-          <a:bodyPr wrap="square" anchor="t">
-            <a:spAutoFit/>
-          </a:bodyPr>
-          <a:lstStyle/>
-          <a:p>
-            <a:pPr algn="l"/>
-            <a:r>
-              <a:rPr sz="800" b="1">
-                <a:solidFill>
-                  <a:srgbClr val="48BF8F"/>
-                </a:solidFill>
-                <a:latin typeface="Aptos"/>
-              </a:rPr>
-              <a:t>MIGRATIONS</a:t>
-            </a:r>
-          </a:p>
-        </p:txBody>
-      </p:sp>
-      <p:sp>
-        <p:nvSpPr>
-          <p:cNvPr id="17" name="TextBox 16"/>
-          <p:cNvSpPr txBox="1"/>
-          <p:nvPr/>
-        </p:nvSpPr>
-        <p:spPr>
-          <a:xfrm>
-            <a:off x="4645152" y="1984248"/>
-            <a:ext cx="1307592" cy="347472"/>
-          </a:xfrm>
-          <a:prstGeom prst="rect">
-            <a:avLst/>
-          </a:prstGeom>
-          <a:noFill/>
-        </p:spPr>
-        <p:txBody>
-          <a:bodyPr wrap="square" anchor="t">
-            <a:spAutoFit/>
-          </a:bodyPr>
-          <a:lstStyle/>
-          <a:p>
-            <a:pPr algn="l"/>
-            <a:r>
-              <a:rPr sz="2000" b="1">
-                <a:solidFill>
-                  <a:srgbClr val="E8E8DE"/>
-                </a:solidFill>
-                <a:latin typeface="Aptos"/>
-              </a:rPr>
-              <a:t>82</a:t>
-            </a:r>
-          </a:p>
-        </p:txBody>
-      </p:sp>
-      <p:sp>
-        <p:nvSpPr>
-          <p:cNvPr id="18" name="Rounded Rectangle 17"/>
-          <p:cNvSpPr/>
-          <p:nvPr/>
-        </p:nvSpPr>
-        <p:spPr>
-          <a:xfrm>
-            <a:off x="6373368" y="1600200"/>
-            <a:ext cx="1600200" cy="932688"/>
-          </a:xfrm>
-          <a:prstGeom prst="roundRect">
-            <a:avLst/>
-          </a:prstGeom>
-          <a:solidFill>
-            <a:srgbClr val="222724"/>
-          </a:solidFill>
-          <a:ln>
-            <a:solidFill>
-              <a:srgbClr val="C48052"/>
-            </a:solidFill>
-          </a:ln>
-        </p:spPr>
-        <p:style>
-          <a:lnRef idx="1">
-            <a:schemeClr val="accent1"/>
-          </a:lnRef>
-          <a:fillRef idx="3">
-            <a:schemeClr val="accent1"/>
-          </a:fillRef>
-          <a:effectRef idx="2">
-            <a:schemeClr val="accent1"/>
-          </a:effectRef>
-          <a:fontRef idx="minor">
-            <a:schemeClr val="lt1"/>
-          </a:fontRef>
-        </p:style>
-        <p:txBody>
-          <a:bodyPr rtlCol="0" anchor="ctr"/>
-          <a:lstStyle/>
-          <a:p>
-            <a:pPr algn="ctr"/>
-          </a:p>
-        </p:txBody>
-      </p:sp>
-      <p:sp>
-        <p:nvSpPr>
-          <p:cNvPr id="19" name="TextBox 18"/>
-          <p:cNvSpPr txBox="1"/>
-          <p:nvPr/>
-        </p:nvSpPr>
-        <p:spPr>
-          <a:xfrm>
-            <a:off x="6519672" y="1737360"/>
-            <a:ext cx="1307592" cy="219456"/>
-          </a:xfrm>
-          <a:prstGeom prst="rect">
-            <a:avLst/>
-          </a:prstGeom>
-          <a:noFill/>
-        </p:spPr>
-        <p:txBody>
-          <a:bodyPr wrap="square" anchor="t">
-            <a:spAutoFit/>
-          </a:bodyPr>
-          <a:lstStyle/>
-          <a:p>
-            <a:pPr algn="l"/>
-            <a:r>
-              <a:rPr sz="800" b="1">
-                <a:solidFill>
-                  <a:srgbClr val="C48052"/>
-                </a:solidFill>
-                <a:latin typeface="Aptos"/>
-              </a:rPr>
-              <a:t>JS</a:t>
-            </a:r>
-          </a:p>
-        </p:txBody>
-      </p:sp>
-      <p:sp>
-        <p:nvSpPr>
-          <p:cNvPr id="20" name="TextBox 19"/>
-          <p:cNvSpPr txBox="1"/>
-          <p:nvPr/>
-        </p:nvSpPr>
-        <p:spPr>
-          <a:xfrm>
-            <a:off x="6519672" y="1984248"/>
-            <a:ext cx="1307592" cy="347472"/>
-          </a:xfrm>
-          <a:prstGeom prst="rect">
-            <a:avLst/>
-          </a:prstGeom>
-          <a:noFill/>
-        </p:spPr>
-        <p:txBody>
-          <a:bodyPr wrap="square" anchor="t">
-            <a:spAutoFit/>
-          </a:bodyPr>
-          <a:lstStyle/>
-          <a:p>
-            <a:pPr algn="l"/>
-            <a:r>
-              <a:rPr sz="2000" b="1">
-                <a:solidFill>
-                  <a:srgbClr val="E8E8DE"/>
-                </a:solidFill>
-                <a:latin typeface="Aptos"/>
-              </a:rPr>
-              <a:t>27</a:t>
-            </a:r>
-          </a:p>
-        </p:txBody>
-      </p:sp>
-      <p:sp>
-        <p:nvSpPr>
-          <p:cNvPr id="21" name="Rounded Rectangle 20"/>
-          <p:cNvSpPr/>
-          <p:nvPr/>
-        </p:nvSpPr>
-        <p:spPr>
-          <a:xfrm>
-            <a:off x="8247888" y="1600200"/>
-            <a:ext cx="1600200" cy="932688"/>
-          </a:xfrm>
-          <a:prstGeom prst="roundRect">
-            <a:avLst/>
-          </a:prstGeom>
-          <a:solidFill>
-            <a:srgbClr val="222724"/>
-          </a:solidFill>
-          <a:ln>
-            <a:solidFill>
-              <a:srgbClr val="48BF8F"/>
-            </a:solidFill>
-          </a:ln>
-        </p:spPr>
-        <p:style>
-          <a:lnRef idx="1">
-            <a:schemeClr val="accent1"/>
-          </a:lnRef>
-          <a:fillRef idx="3">
-            <a:schemeClr val="accent1"/>
-          </a:fillRef>
-          <a:effectRef idx="2">
-            <a:schemeClr val="accent1"/>
-          </a:effectRef>
-          <a:fontRef idx="minor">
-            <a:schemeClr val="lt1"/>
-          </a:fontRef>
-        </p:style>
-        <p:txBody>
-          <a:bodyPr rtlCol="0" anchor="ctr"/>
-          <a:lstStyle/>
-          <a:p>
-            <a:pPr algn="ctr"/>
-          </a:p>
-        </p:txBody>
-      </p:sp>
-      <p:sp>
-        <p:nvSpPr>
-          <p:cNvPr id="22" name="TextBox 21"/>
-          <p:cNvSpPr txBox="1"/>
-          <p:nvPr/>
-        </p:nvSpPr>
-        <p:spPr>
-          <a:xfrm>
-            <a:off x="8394192" y="1737360"/>
-            <a:ext cx="1307592" cy="219456"/>
-          </a:xfrm>
-          <a:prstGeom prst="rect">
-            <a:avLst/>
-          </a:prstGeom>
-          <a:noFill/>
-        </p:spPr>
-        <p:txBody>
-          <a:bodyPr wrap="square" anchor="t">
-            <a:spAutoFit/>
-          </a:bodyPr>
-          <a:lstStyle/>
-          <a:p>
-            <a:pPr algn="l"/>
-            <a:r>
-              <a:rPr sz="800" b="1">
-                <a:solidFill>
-                  <a:srgbClr val="48BF8F"/>
-                </a:solidFill>
-                <a:latin typeface="Aptos"/>
-              </a:rPr>
-              <a:t>CSS</a:t>
-            </a:r>
-          </a:p>
-        </p:txBody>
-      </p:sp>
-      <p:sp>
-        <p:nvSpPr>
-          <p:cNvPr id="23" name="TextBox 22"/>
-          <p:cNvSpPr txBox="1"/>
-          <p:nvPr/>
-        </p:nvSpPr>
-        <p:spPr>
-          <a:xfrm>
-            <a:off x="8394192" y="1984248"/>
-            <a:ext cx="1307592" cy="347472"/>
-          </a:xfrm>
-          <a:prstGeom prst="rect">
-            <a:avLst/>
-          </a:prstGeom>
-          <a:noFill/>
-        </p:spPr>
-        <p:txBody>
-          <a:bodyPr wrap="square" anchor="t">
-            <a:spAutoFit/>
-          </a:bodyPr>
-          <a:lstStyle/>
-          <a:p>
-            <a:pPr algn="l"/>
-            <a:r>
-              <a:rPr sz="2000" b="1">
-                <a:solidFill>
-                  <a:srgbClr val="E8E8DE"/>
-                </a:solidFill>
-                <a:latin typeface="Aptos"/>
-              </a:rPr>
-              <a:t>5</a:t>
-            </a:r>
-          </a:p>
-        </p:txBody>
-      </p:sp>
-      <p:sp>
-        <p:nvSpPr>
-          <p:cNvPr id="24" name="Rounded Rectangle 23"/>
-          <p:cNvSpPr/>
-          <p:nvPr/>
-        </p:nvSpPr>
-        <p:spPr>
-          <a:xfrm>
-            <a:off x="10122408" y="1600200"/>
-            <a:ext cx="1600200" cy="932688"/>
-          </a:xfrm>
-          <a:prstGeom prst="roundRect">
-            <a:avLst/>
-          </a:prstGeom>
-          <a:solidFill>
-            <a:srgbClr val="222724"/>
-          </a:solidFill>
-          <a:ln>
-            <a:solidFill>
-              <a:srgbClr val="C48052"/>
-            </a:solidFill>
-          </a:ln>
-        </p:spPr>
-        <p:style>
-          <a:lnRef idx="1">
-            <a:schemeClr val="accent1"/>
-          </a:lnRef>
-          <a:fillRef idx="3">
-            <a:schemeClr val="accent1"/>
-          </a:fillRef>
-          <a:effectRef idx="2">
-            <a:schemeClr val="accent1"/>
-          </a:effectRef>
-          <a:fontRef idx="minor">
-            <a:schemeClr val="lt1"/>
-          </a:fontRef>
-        </p:style>
-        <p:txBody>
-          <a:bodyPr rtlCol="0" anchor="ctr"/>
-          <a:lstStyle/>
-          <a:p>
-            <a:pPr algn="ctr"/>
-          </a:p>
-        </p:txBody>
-      </p:sp>
-      <p:sp>
-        <p:nvSpPr>
-          <p:cNvPr id="25" name="TextBox 24"/>
-          <p:cNvSpPr txBox="1"/>
-          <p:nvPr/>
-        </p:nvSpPr>
-        <p:spPr>
-          <a:xfrm>
-            <a:off x="10268712" y="1737360"/>
-            <a:ext cx="1307592" cy="219456"/>
-          </a:xfrm>
-          <a:prstGeom prst="rect">
-            <a:avLst/>
-          </a:prstGeom>
-          <a:noFill/>
-        </p:spPr>
-        <p:txBody>
-          <a:bodyPr wrap="square" anchor="t">
-            <a:spAutoFit/>
-          </a:bodyPr>
-          <a:lstStyle/>
-          <a:p>
-            <a:pPr algn="l"/>
-            <a:r>
-              <a:rPr sz="800" b="1">
-                <a:solidFill>
-                  <a:srgbClr val="C48052"/>
-                </a:solidFill>
-                <a:latin typeface="Aptos"/>
-              </a:rPr>
-              <a:t>HTML</a:t>
-            </a:r>
-          </a:p>
-        </p:txBody>
-      </p:sp>
-      <p:sp>
-        <p:nvSpPr>
-          <p:cNvPr id="26" name="TextBox 25"/>
-          <p:cNvSpPr txBox="1"/>
-          <p:nvPr/>
-        </p:nvSpPr>
-        <p:spPr>
-          <a:xfrm>
-            <a:off x="10268712" y="1984248"/>
-            <a:ext cx="1307592" cy="347472"/>
-          </a:xfrm>
-          <a:prstGeom prst="rect">
-            <a:avLst/>
-          </a:prstGeom>
-          <a:noFill/>
-        </p:spPr>
-        <p:txBody>
-          <a:bodyPr wrap="square" anchor="t">
-            <a:spAutoFit/>
-          </a:bodyPr>
-          <a:lstStyle/>
-          <a:p>
-            <a:pPr algn="l"/>
-            <a:r>
-              <a:rPr sz="2000" b="1">
-                <a:solidFill>
-                  <a:srgbClr val="E8E8DE"/>
-                </a:solidFill>
-                <a:latin typeface="Aptos"/>
-              </a:rPr>
-              <a:t>4</a:t>
-            </a:r>
-          </a:p>
-        </p:txBody>
-      </p:sp>
-      <p:sp>
-        <p:nvSpPr>
-          <p:cNvPr id="27" name="Rounded Rectangle 26"/>
-          <p:cNvSpPr/>
-          <p:nvPr/>
-        </p:nvSpPr>
-        <p:spPr>
-          <a:xfrm>
-            <a:off x="960120" y="3246120"/>
-            <a:ext cx="9921240" cy="1874519"/>
-          </a:xfrm>
-          <a:prstGeom prst="roundRect">
-            <a:avLst/>
-          </a:prstGeom>
-          <a:solidFill>
-            <a:srgbClr val="161A19"/>
-          </a:solidFill>
-          <a:ln>
-            <a:solidFill>
-              <a:srgbClr val="595F56"/>
-            </a:solidFill>
-          </a:ln>
-        </p:spPr>
-        <p:style>
-          <a:lnRef idx="1">
-            <a:schemeClr val="accent1"/>
-          </a:lnRef>
-          <a:fillRef idx="3">
-            <a:schemeClr val="accent1"/>
-          </a:fillRef>
-          <a:effectRef idx="2">
-            <a:schemeClr val="accent1"/>
-          </a:effectRef>
-          <a:fontRef idx="minor">
-            <a:schemeClr val="lt1"/>
-          </a:fontRef>
-        </p:style>
-        <p:txBody>
-          <a:bodyPr rtlCol="0" anchor="ctr"/>
-          <a:lstStyle/>
-          <a:p>
-            <a:pPr algn="ctr"/>
-          </a:p>
-        </p:txBody>
-      </p:sp>
-      <p:sp>
-        <p:nvSpPr>
-          <p:cNvPr id="28" name="Rectangle 27"/>
-          <p:cNvSpPr/>
-          <p:nvPr/>
-        </p:nvSpPr>
-        <p:spPr>
-          <a:xfrm>
-            <a:off x="960120" y="3246120"/>
-            <a:ext cx="9921240" cy="109728"/>
-          </a:xfrm>
-          <a:prstGeom prst="rect">
-            <a:avLst/>
-          </a:prstGeom>
-          <a:solidFill>
-            <a:srgbClr val="E0AB5D"/>
-          </a:solidFill>
-          <a:ln>
-            <a:noFill/>
-          </a:ln>
-        </p:spPr>
-        <p:style>
-          <a:lnRef idx="1">
-            <a:schemeClr val="accent1"/>
-          </a:lnRef>
-          <a:fillRef idx="3">
-            <a:schemeClr val="accent1"/>
-          </a:fillRef>
-          <a:effectRef idx="2">
-            <a:schemeClr val="accent1"/>
-          </a:effectRef>
-          <a:fontRef idx="minor">
-            <a:schemeClr val="lt1"/>
-          </a:fontRef>
-        </p:style>
-        <p:txBody>
-          <a:bodyPr rtlCol="0" anchor="ctr"/>
-          <a:lstStyle/>
-          <a:p>
-            <a:pPr algn="ctr"/>
-          </a:p>
-        </p:txBody>
-      </p:sp>
-      <p:sp>
-        <p:nvSpPr>
-          <p:cNvPr id="29" name="TextBox 28"/>
-          <p:cNvSpPr txBox="1"/>
-          <p:nvPr/>
-        </p:nvSpPr>
-        <p:spPr>
-          <a:xfrm>
-            <a:off x="1161288" y="3447288"/>
-            <a:ext cx="9518904" cy="310896"/>
-          </a:xfrm>
-          <a:prstGeom prst="rect">
-            <a:avLst/>
-          </a:prstGeom>
-          <a:noFill/>
-        </p:spPr>
-        <p:txBody>
-          <a:bodyPr wrap="square" anchor="t">
-            <a:spAutoFit/>
-          </a:bodyPr>
-          <a:lstStyle/>
-          <a:p>
-            <a:pPr algn="l"/>
-            <a:r>
-              <a:rPr sz="1400" b="1">
-                <a:solidFill>
-                  <a:srgbClr val="E0AB5D"/>
-                </a:solidFill>
-                <a:latin typeface="Aptos"/>
-              </a:rPr>
-              <a:t>Current HEAD</a:t>
-            </a:r>
-          </a:p>
-        </p:txBody>
-      </p:sp>
-      <p:sp>
-        <p:nvSpPr>
-          <p:cNvPr id="30" name="TextBox 29"/>
-          <p:cNvSpPr txBox="1"/>
-          <p:nvPr/>
-        </p:nvSpPr>
-        <p:spPr>
-          <a:xfrm>
-            <a:off x="1161288" y="3904487"/>
-            <a:ext cx="9518904" cy="1069848"/>
+            <a:off x="978408" y="2258568"/>
+            <a:ext cx="10067544" cy="3401568"/>
           </a:xfrm>
           <a:prstGeom prst="rect">
             <a:avLst/>
@@ -15303,7 +14882,7 @@
               <a:spcAft>
                 <a:spcPts val="600"/>
               </a:spcAft>
-              <a:defRPr sz="1500">
+              <a:defRPr sz="1700">
                 <a:solidFill>
                   <a:srgbClr val="B4BAAE"/>
                 </a:solidFill>
@@ -15311,12 +14890,12 @@
               </a:defRPr>
             </a:pPr>
             <a:r>
-              <a:rPr sz="1500" b="0" i="0">
+              <a:rPr sz="1700" b="0" i="0">
                 <a:latin typeface="Calibri"/>
               </a:rPr>
-              <a:t>e1d93ab - Added Browse buttons to new dialogs of menu DB entry, by Tlamatini's-AutoBot.</a:t>
-            </a:r>
-            <a:endParaRPr sz="1500" b="0" i="0">
+              <a:t>The built-in `tlamatini.log` file captures both stdout and stderr through a tee stream initialized in `manage.py` before Django starts.</a:t>
+            </a:r>
+            <a:endParaRPr sz="1700" b="0" i="0">
               <a:latin typeface="Calibri"/>
             </a:endParaRPr>
           </a:p>
@@ -15325,7 +14904,7 @@
               <a:spcAft>
                 <a:spcPts val="600"/>
               </a:spcAft>
-              <a:defRPr sz="1500">
+              <a:defRPr sz="1700">
                 <a:solidFill>
                   <a:srgbClr val="B4BAAE"/>
                 </a:solidFill>
@@ -15333,12 +14912,12 @@
               </a:defRPr>
             </a:pPr>
             <a:r>
-              <a:rPr sz="1500" b="0" i="0">
+              <a:rPr sz="1700" b="0" i="0">
                 <a:latin typeface="Calibri"/>
               </a:rPr>
-              <a:t>Generated on May 14, 2026 05:19 PM UTC-0600</a:t>
-            </a:r>
-            <a:endParaRPr sz="1500" b="0" i="0">
+              <a:t>In source mode the log sits next to `manage.py`; in frozen mode it lives next to the executable.</a:t>
+            </a:r>
+            <a:endParaRPr sz="1700" b="0" i="0">
               <a:latin typeface="Calibri"/>
             </a:endParaRPr>
           </a:p>
@@ -15347,7 +14926,7 @@
               <a:spcAft>
                 <a:spcPts val="600"/>
               </a:spcAft>
-              <a:defRPr sz="1500">
+              <a:defRPr sz="1700">
                 <a:solidFill>
                   <a:srgbClr val="B4BAAE"/>
                 </a:solidFill>
@@ -15355,12 +14934,12 @@
               </a:defRPr>
             </a:pPr>
             <a:r>
-              <a:rPr sz="1500" b="0" i="0">
+              <a:rPr sz="1700" b="0" i="0">
                 <a:latin typeface="Calibri"/>
               </a:rPr>
-              <a:t>Python requirements: 62; binary or asset tracked files skipped from line count: 15</a:t>
-            </a:r>
-            <a:endParaRPr sz="1500" b="0" i="0">
+              <a:t>Immediate flush behavior makes the log the primary forensic artifact for startup problems, warnings, tracebacks, and runtime diagnostics.</a:t>
+            </a:r>
+            <a:endParaRPr sz="1700" b="0" i="0">
               <a:latin typeface="Calibri"/>
             </a:endParaRPr>
           </a:p>
@@ -15442,7 +15021,7 @@
             <a:avLst/>
           </a:prstGeom>
           <a:solidFill>
-            <a:srgbClr val="C48052"/>
+            <a:srgbClr val="48BF8F"/>
           </a:solidFill>
           <a:ln>
             <a:noFill/>
@@ -15485,7 +15064,7 @@
             <a:avLst/>
           </a:prstGeom>
           <a:solidFill>
-            <a:srgbClr val="C48052"/>
+            <a:srgbClr val="48BF8F"/>
           </a:solidFill>
           <a:ln>
             <a:noFill/>
@@ -15528,7 +15107,7 @@
             <a:avLst/>
           </a:prstGeom>
           <a:solidFill>
-            <a:srgbClr val="C48052"/>
+            <a:srgbClr val="48BF8F"/>
           </a:solidFill>
           <a:ln>
             <a:noFill/>
@@ -15571,7 +15150,7 @@
             <a:avLst/>
           </a:prstGeom>
           <a:solidFill>
-            <a:srgbClr val="C48052"/>
+            <a:srgbClr val="48BF8F"/>
           </a:solidFill>
           <a:ln>
             <a:noFill/>
@@ -15625,11 +15204,11 @@
             <a:r>
               <a:rPr sz="1000" b="1">
                 <a:solidFill>
-                  <a:srgbClr val="C48052"/>
+                  <a:srgbClr val="48BF8F"/>
                 </a:solidFill>
                 <a:latin typeface="Aptos"/>
               </a:rPr>
-              <a:t>NO COMMENTS, NO BLANKS</a:t>
+              <a:t>CURRENT HEAD INVENTORY</a:t>
             </a:r>
           </a:p>
         </p:txBody>
@@ -15664,7 +15243,7 @@
                 </a:solidFill>
                 <a:latin typeface="Aptos Display"/>
               </a:rPr>
-              <a:t>Effective Lines By Language</a:t>
+              <a:t>Repository Facts</a:t>
             </a:r>
           </a:p>
         </p:txBody>
@@ -15677,8 +15256,123 @@
         </p:nvSpPr>
         <p:spPr>
           <a:xfrm>
-            <a:off x="822960" y="1499616"/>
-            <a:ext cx="2148840" cy="932688"/>
+            <a:off x="749808" y="1600200"/>
+            <a:ext cx="1600200" cy="932688"/>
+          </a:xfrm>
+          <a:prstGeom prst="roundRect">
+            <a:avLst/>
+          </a:prstGeom>
+          <a:solidFill>
+            <a:srgbClr val="222724"/>
+          </a:solidFill>
+          <a:ln>
+            <a:solidFill>
+              <a:srgbClr val="48BF8F"/>
+            </a:solidFill>
+          </a:ln>
+        </p:spPr>
+        <p:style>
+          <a:lnRef idx="1">
+            <a:schemeClr val="accent1"/>
+          </a:lnRef>
+          <a:fillRef idx="3">
+            <a:schemeClr val="accent1"/>
+          </a:fillRef>
+          <a:effectRef idx="2">
+            <a:schemeClr val="accent1"/>
+          </a:effectRef>
+          <a:fontRef idx="minor">
+            <a:schemeClr val="lt1"/>
+          </a:fontRef>
+        </p:style>
+        <p:txBody>
+          <a:bodyPr rtlCol="0" anchor="ctr"/>
+          <a:lstStyle/>
+          <a:p>
+            <a:pPr algn="ctr"/>
+          </a:p>
+        </p:txBody>
+      </p:sp>
+      <p:sp>
+        <p:nvSpPr>
+          <p:cNvPr id="10" name="TextBox 9"/>
+          <p:cNvSpPr txBox="1"/>
+          <p:nvPr/>
+        </p:nvSpPr>
+        <p:spPr>
+          <a:xfrm>
+            <a:off x="896112" y="1737360"/>
+            <a:ext cx="1307592" cy="219456"/>
+          </a:xfrm>
+          <a:prstGeom prst="rect">
+            <a:avLst/>
+          </a:prstGeom>
+          <a:noFill/>
+        </p:spPr>
+        <p:txBody>
+          <a:bodyPr wrap="square" anchor="t">
+            <a:spAutoFit/>
+          </a:bodyPr>
+          <a:lstStyle/>
+          <a:p>
+            <a:pPr algn="l"/>
+            <a:r>
+              <a:rPr sz="800" b="1">
+                <a:solidFill>
+                  <a:srgbClr val="48BF8F"/>
+                </a:solidFill>
+                <a:latin typeface="Aptos"/>
+              </a:rPr>
+              <a:t>TRACKED</a:t>
+            </a:r>
+          </a:p>
+        </p:txBody>
+      </p:sp>
+      <p:sp>
+        <p:nvSpPr>
+          <p:cNvPr id="11" name="TextBox 10"/>
+          <p:cNvSpPr txBox="1"/>
+          <p:nvPr/>
+        </p:nvSpPr>
+        <p:spPr>
+          <a:xfrm>
+            <a:off x="896112" y="1984248"/>
+            <a:ext cx="1307592" cy="347472"/>
+          </a:xfrm>
+          <a:prstGeom prst="rect">
+            <a:avLst/>
+          </a:prstGeom>
+          <a:noFill/>
+        </p:spPr>
+        <p:txBody>
+          <a:bodyPr wrap="square" anchor="t">
+            <a:spAutoFit/>
+          </a:bodyPr>
+          <a:lstStyle/>
+          <a:p>
+            <a:pPr algn="l"/>
+            <a:r>
+              <a:rPr sz="2000" b="1">
+                <a:solidFill>
+                  <a:srgbClr val="E8E8DE"/>
+                </a:solidFill>
+                <a:latin typeface="Aptos"/>
+              </a:rPr>
+              <a:t>439</a:t>
+            </a:r>
+          </a:p>
+        </p:txBody>
+      </p:sp>
+      <p:sp>
+        <p:nvSpPr>
+          <p:cNvPr id="12" name="Rounded Rectangle 11"/>
+          <p:cNvSpPr/>
+          <p:nvPr/>
+        </p:nvSpPr>
+        <p:spPr>
+          <a:xfrm>
+            <a:off x="2624327" y="1600200"/>
+            <a:ext cx="1600200" cy="932688"/>
           </a:xfrm>
           <a:prstGeom prst="roundRect">
             <a:avLst/>
@@ -15716,14 +15410,14 @@
       </p:sp>
       <p:sp>
         <p:nvSpPr>
-          <p:cNvPr id="10" name="TextBox 9"/>
+          <p:cNvPr id="13" name="TextBox 12"/>
           <p:cNvSpPr txBox="1"/>
           <p:nvPr/>
         </p:nvSpPr>
         <p:spPr>
           <a:xfrm>
-            <a:off x="969264" y="1636775"/>
-            <a:ext cx="1856232" cy="219456"/>
+            <a:off x="2770632" y="1737360"/>
+            <a:ext cx="1307592" cy="219456"/>
           </a:xfrm>
           <a:prstGeom prst="rect">
             <a:avLst/>
@@ -15744,21 +15438,21 @@
                 </a:solidFill>
                 <a:latin typeface="Aptos"/>
               </a:rPr>
-              <a:t>TOTAL EFFECTIVE</a:t>
-            </a:r>
-          </a:p>
-        </p:txBody>
-      </p:sp>
-      <p:sp>
-        <p:nvSpPr>
-          <p:cNvPr id="11" name="TextBox 10"/>
+              <a:t>AGENTS</a:t>
+            </a:r>
+          </a:p>
+        </p:txBody>
+      </p:sp>
+      <p:sp>
+        <p:nvSpPr>
+          <p:cNvPr id="14" name="TextBox 13"/>
           <p:cNvSpPr txBox="1"/>
           <p:nvPr/>
         </p:nvSpPr>
         <p:spPr>
           <a:xfrm>
-            <a:off x="969264" y="1883664"/>
-            <a:ext cx="1856232" cy="347472"/>
+            <a:off x="2770632" y="1984248"/>
+            <a:ext cx="1307592" cy="347472"/>
           </a:xfrm>
           <a:prstGeom prst="rect">
             <a:avLst/>
@@ -15779,21 +15473,21 @@
                 </a:solidFill>
                 <a:latin typeface="Aptos"/>
               </a:rPr>
-              <a:t>92,274</a:t>
-            </a:r>
-          </a:p>
-        </p:txBody>
-      </p:sp>
-      <p:sp>
-        <p:nvSpPr>
-          <p:cNvPr id="12" name="Rounded Rectangle 11"/>
-          <p:cNvSpPr/>
-          <p:nvPr/>
-        </p:nvSpPr>
-        <p:spPr>
-          <a:xfrm>
-            <a:off x="3246120" y="1499616"/>
-            <a:ext cx="2148840" cy="932688"/>
+              <a:t>60</a:t>
+            </a:r>
+          </a:p>
+        </p:txBody>
+      </p:sp>
+      <p:sp>
+        <p:nvSpPr>
+          <p:cNvPr id="15" name="Rounded Rectangle 14"/>
+          <p:cNvSpPr/>
+          <p:nvPr/>
+        </p:nvSpPr>
+        <p:spPr>
+          <a:xfrm>
+            <a:off x="4498848" y="1600200"/>
+            <a:ext cx="1600200" cy="932688"/>
           </a:xfrm>
           <a:prstGeom prst="roundRect">
             <a:avLst/>
@@ -15831,14 +15525,14 @@
       </p:sp>
       <p:sp>
         <p:nvSpPr>
-          <p:cNvPr id="13" name="TextBox 12"/>
+          <p:cNvPr id="16" name="TextBox 15"/>
           <p:cNvSpPr txBox="1"/>
           <p:nvPr/>
         </p:nvSpPr>
         <p:spPr>
           <a:xfrm>
-            <a:off x="3392424" y="1636775"/>
-            <a:ext cx="1856232" cy="219456"/>
+            <a:off x="4645152" y="1737360"/>
+            <a:ext cx="1307592" cy="219456"/>
           </a:xfrm>
           <a:prstGeom prst="rect">
             <a:avLst/>
@@ -15859,21 +15553,21 @@
                 </a:solidFill>
                 <a:latin typeface="Aptos"/>
               </a:rPr>
-              <a:t>TOTAL PHYSICAL</a:t>
-            </a:r>
-          </a:p>
-        </p:txBody>
-      </p:sp>
-      <p:sp>
-        <p:nvSpPr>
-          <p:cNvPr id="14" name="TextBox 13"/>
+              <a:t>MIGRATIONS</a:t>
+            </a:r>
+          </a:p>
+        </p:txBody>
+      </p:sp>
+      <p:sp>
+        <p:nvSpPr>
+          <p:cNvPr id="17" name="TextBox 16"/>
           <p:cNvSpPr txBox="1"/>
           <p:nvPr/>
         </p:nvSpPr>
         <p:spPr>
           <a:xfrm>
-            <a:off x="3392424" y="1883664"/>
-            <a:ext cx="1856232" cy="347472"/>
+            <a:off x="4645152" y="1984248"/>
+            <a:ext cx="1307592" cy="347472"/>
           </a:xfrm>
           <a:prstGeom prst="rect">
             <a:avLst/>
@@ -15894,21 +15588,21 @@
                 </a:solidFill>
                 <a:latin typeface="Aptos"/>
               </a:rPr>
-              <a:t>125,137</a:t>
-            </a:r>
-          </a:p>
-        </p:txBody>
-      </p:sp>
-      <p:sp>
-        <p:nvSpPr>
-          <p:cNvPr id="15" name="Rounded Rectangle 14"/>
-          <p:cNvSpPr/>
-          <p:nvPr/>
-        </p:nvSpPr>
-        <p:spPr>
-          <a:xfrm>
-            <a:off x="5669280" y="1499616"/>
-            <a:ext cx="2148840" cy="932688"/>
+              <a:t>82</a:t>
+            </a:r>
+          </a:p>
+        </p:txBody>
+      </p:sp>
+      <p:sp>
+        <p:nvSpPr>
+          <p:cNvPr id="18" name="Rounded Rectangle 17"/>
+          <p:cNvSpPr/>
+          <p:nvPr/>
+        </p:nvSpPr>
+        <p:spPr>
+          <a:xfrm>
+            <a:off x="6373368" y="1600200"/>
+            <a:ext cx="1600200" cy="932688"/>
           </a:xfrm>
           <a:prstGeom prst="roundRect">
             <a:avLst/>
@@ -15918,7 +15612,7 @@
           </a:solidFill>
           <a:ln>
             <a:solidFill>
-              <a:srgbClr val="E0AB5D"/>
+              <a:srgbClr val="C48052"/>
             </a:solidFill>
           </a:ln>
         </p:spPr>
@@ -15946,14 +15640,14 @@
       </p:sp>
       <p:sp>
         <p:nvSpPr>
-          <p:cNvPr id="16" name="TextBox 15"/>
+          <p:cNvPr id="19" name="TextBox 18"/>
           <p:cNvSpPr txBox="1"/>
           <p:nvPr/>
         </p:nvSpPr>
         <p:spPr>
           <a:xfrm>
-            <a:off x="5815584" y="1636775"/>
-            <a:ext cx="1856232" cy="219456"/>
+            <a:off x="6519672" y="1737360"/>
+            <a:ext cx="1307592" cy="219456"/>
           </a:xfrm>
           <a:prstGeom prst="rect">
             <a:avLst/>
@@ -15970,25 +15664,25 @@
             <a:r>
               <a:rPr sz="800" b="1">
                 <a:solidFill>
-                  <a:srgbClr val="E0AB5D"/>
+                  <a:srgbClr val="C48052"/>
                 </a:solidFill>
                 <a:latin typeface="Aptos"/>
               </a:rPr>
-              <a:t>TEXT LANGUAGES</a:t>
-            </a:r>
-          </a:p>
-        </p:txBody>
-      </p:sp>
-      <p:sp>
-        <p:nvSpPr>
-          <p:cNvPr id="17" name="TextBox 16"/>
+              <a:t>JS</a:t>
+            </a:r>
+          </a:p>
+        </p:txBody>
+      </p:sp>
+      <p:sp>
+        <p:nvSpPr>
+          <p:cNvPr id="20" name="TextBox 19"/>
           <p:cNvSpPr txBox="1"/>
           <p:nvPr/>
         </p:nvSpPr>
         <p:spPr>
           <a:xfrm>
-            <a:off x="5815584" y="1883664"/>
-            <a:ext cx="1856232" cy="347472"/>
+            <a:off x="6519672" y="1984248"/>
+            <a:ext cx="1307592" cy="347472"/>
           </a:xfrm>
           <a:prstGeom prst="rect">
             <a:avLst/>
@@ -16009,21 +15703,66 @@
                 </a:solidFill>
                 <a:latin typeface="Aptos"/>
               </a:rPr>
-              <a:t>14</a:t>
-            </a:r>
-          </a:p>
-        </p:txBody>
-      </p:sp>
-      <p:sp>
-        <p:nvSpPr>
-          <p:cNvPr id="18" name="TextBox 17"/>
+              <a:t>27</a:t>
+            </a:r>
+          </a:p>
+        </p:txBody>
+      </p:sp>
+      <p:sp>
+        <p:nvSpPr>
+          <p:cNvPr id="21" name="Rounded Rectangle 20"/>
+          <p:cNvSpPr/>
+          <p:nvPr/>
+        </p:nvSpPr>
+        <p:spPr>
+          <a:xfrm>
+            <a:off x="8247888" y="1600200"/>
+            <a:ext cx="1600200" cy="932688"/>
+          </a:xfrm>
+          <a:prstGeom prst="roundRect">
+            <a:avLst/>
+          </a:prstGeom>
+          <a:solidFill>
+            <a:srgbClr val="222724"/>
+          </a:solidFill>
+          <a:ln>
+            <a:solidFill>
+              <a:srgbClr val="48BF8F"/>
+            </a:solidFill>
+          </a:ln>
+        </p:spPr>
+        <p:style>
+          <a:lnRef idx="1">
+            <a:schemeClr val="accent1"/>
+          </a:lnRef>
+          <a:fillRef idx="3">
+            <a:schemeClr val="accent1"/>
+          </a:fillRef>
+          <a:effectRef idx="2">
+            <a:schemeClr val="accent1"/>
+          </a:effectRef>
+          <a:fontRef idx="minor">
+            <a:schemeClr val="lt1"/>
+          </a:fontRef>
+        </p:style>
+        <p:txBody>
+          <a:bodyPr rtlCol="0" anchor="ctr"/>
+          <a:lstStyle/>
+          <a:p>
+            <a:pPr algn="ctr"/>
+          </a:p>
+        </p:txBody>
+      </p:sp>
+      <p:sp>
+        <p:nvSpPr>
+          <p:cNvPr id="22" name="TextBox 21"/>
           <p:cNvSpPr txBox="1"/>
           <p:nvPr/>
         </p:nvSpPr>
         <p:spPr>
           <a:xfrm>
-            <a:off x="841248" y="2788920"/>
-            <a:ext cx="10378440" cy="2926080"/>
+            <a:off x="8394192" y="1737360"/>
+            <a:ext cx="1307592" cy="219456"/>
           </a:xfrm>
           <a:prstGeom prst="rect">
             <a:avLst/>
@@ -16038,28 +15777,398 @@
           <a:p>
             <a:pPr algn="l"/>
             <a:r>
-              <a:rPr sz="800" b="0">
+              <a:rPr sz="800" b="1">
+                <a:solidFill>
+                  <a:srgbClr val="48BF8F"/>
+                </a:solidFill>
+                <a:latin typeface="Aptos"/>
+              </a:rPr>
+              <a:t>CSS</a:t>
+            </a:r>
+          </a:p>
+        </p:txBody>
+      </p:sp>
+      <p:sp>
+        <p:nvSpPr>
+          <p:cNvPr id="23" name="TextBox 22"/>
+          <p:cNvSpPr txBox="1"/>
+          <p:nvPr/>
+        </p:nvSpPr>
+        <p:spPr>
+          <a:xfrm>
+            <a:off x="8394192" y="1984248"/>
+            <a:ext cx="1307592" cy="347472"/>
+          </a:xfrm>
+          <a:prstGeom prst="rect">
+            <a:avLst/>
+          </a:prstGeom>
+          <a:noFill/>
+        </p:spPr>
+        <p:txBody>
+          <a:bodyPr wrap="square" anchor="t">
+            <a:spAutoFit/>
+          </a:bodyPr>
+          <a:lstStyle/>
+          <a:p>
+            <a:pPr algn="l"/>
+            <a:r>
+              <a:rPr sz="2000" b="1">
                 <a:solidFill>
                   <a:srgbClr val="E8E8DE"/>
                 </a:solidFill>
-                <a:latin typeface="Cascadia Mono"/>
-              </a:rPr>
-              <a:t>LANGUAGE                 FILES   EFFECTIVE      TOTAL   SHARE
-Python                   250      61,408     85,340  66.5%
-JavaScript                27      12,330     15,560  13.4%
-Markdown                  49      10,790     13,803  11.7%
-CSS                        5       3,027      3,793   3.3%
-YAML                      64       1,342      2,639   1.5%
-Other text                 3         780        957   0.8%
-HTML                       4         780        798   0.8%
-PowerShell                 5         506        752   0.5%
-Prompt template            2         403        477   0.4%
-JSON                       5         383        383   0.4%
-JavaScript module          1         377        444   0.4%
-Text                       4         115        134   0.1%
-Protocol Buffers           1          20         33   0.0%
-Batch                      1          13         24   0.0%</a:t>
-            </a:r>
+                <a:latin typeface="Aptos"/>
+              </a:rPr>
+              <a:t>5</a:t>
+            </a:r>
+          </a:p>
+        </p:txBody>
+      </p:sp>
+      <p:sp>
+        <p:nvSpPr>
+          <p:cNvPr id="24" name="Rounded Rectangle 23"/>
+          <p:cNvSpPr/>
+          <p:nvPr/>
+        </p:nvSpPr>
+        <p:spPr>
+          <a:xfrm>
+            <a:off x="10122408" y="1600200"/>
+            <a:ext cx="1600200" cy="932688"/>
+          </a:xfrm>
+          <a:prstGeom prst="roundRect">
+            <a:avLst/>
+          </a:prstGeom>
+          <a:solidFill>
+            <a:srgbClr val="222724"/>
+          </a:solidFill>
+          <a:ln>
+            <a:solidFill>
+              <a:srgbClr val="C48052"/>
+            </a:solidFill>
+          </a:ln>
+        </p:spPr>
+        <p:style>
+          <a:lnRef idx="1">
+            <a:schemeClr val="accent1"/>
+          </a:lnRef>
+          <a:fillRef idx="3">
+            <a:schemeClr val="accent1"/>
+          </a:fillRef>
+          <a:effectRef idx="2">
+            <a:schemeClr val="accent1"/>
+          </a:effectRef>
+          <a:fontRef idx="minor">
+            <a:schemeClr val="lt1"/>
+          </a:fontRef>
+        </p:style>
+        <p:txBody>
+          <a:bodyPr rtlCol="0" anchor="ctr"/>
+          <a:lstStyle/>
+          <a:p>
+            <a:pPr algn="ctr"/>
+          </a:p>
+        </p:txBody>
+      </p:sp>
+      <p:sp>
+        <p:nvSpPr>
+          <p:cNvPr id="25" name="TextBox 24"/>
+          <p:cNvSpPr txBox="1"/>
+          <p:nvPr/>
+        </p:nvSpPr>
+        <p:spPr>
+          <a:xfrm>
+            <a:off x="10268712" y="1737360"/>
+            <a:ext cx="1307592" cy="219456"/>
+          </a:xfrm>
+          <a:prstGeom prst="rect">
+            <a:avLst/>
+          </a:prstGeom>
+          <a:noFill/>
+        </p:spPr>
+        <p:txBody>
+          <a:bodyPr wrap="square" anchor="t">
+            <a:spAutoFit/>
+          </a:bodyPr>
+          <a:lstStyle/>
+          <a:p>
+            <a:pPr algn="l"/>
+            <a:r>
+              <a:rPr sz="800" b="1">
+                <a:solidFill>
+                  <a:srgbClr val="C48052"/>
+                </a:solidFill>
+                <a:latin typeface="Aptos"/>
+              </a:rPr>
+              <a:t>HTML</a:t>
+            </a:r>
+          </a:p>
+        </p:txBody>
+      </p:sp>
+      <p:sp>
+        <p:nvSpPr>
+          <p:cNvPr id="26" name="TextBox 25"/>
+          <p:cNvSpPr txBox="1"/>
+          <p:nvPr/>
+        </p:nvSpPr>
+        <p:spPr>
+          <a:xfrm>
+            <a:off x="10268712" y="1984248"/>
+            <a:ext cx="1307592" cy="347472"/>
+          </a:xfrm>
+          <a:prstGeom prst="rect">
+            <a:avLst/>
+          </a:prstGeom>
+          <a:noFill/>
+        </p:spPr>
+        <p:txBody>
+          <a:bodyPr wrap="square" anchor="t">
+            <a:spAutoFit/>
+          </a:bodyPr>
+          <a:lstStyle/>
+          <a:p>
+            <a:pPr algn="l"/>
+            <a:r>
+              <a:rPr sz="2000" b="1">
+                <a:solidFill>
+                  <a:srgbClr val="E8E8DE"/>
+                </a:solidFill>
+                <a:latin typeface="Aptos"/>
+              </a:rPr>
+              <a:t>4</a:t>
+            </a:r>
+          </a:p>
+        </p:txBody>
+      </p:sp>
+      <p:sp>
+        <p:nvSpPr>
+          <p:cNvPr id="27" name="Rounded Rectangle 26"/>
+          <p:cNvSpPr/>
+          <p:nvPr/>
+        </p:nvSpPr>
+        <p:spPr>
+          <a:xfrm>
+            <a:off x="960120" y="3246120"/>
+            <a:ext cx="9921240" cy="1874519"/>
+          </a:xfrm>
+          <a:prstGeom prst="roundRect">
+            <a:avLst/>
+          </a:prstGeom>
+          <a:solidFill>
+            <a:srgbClr val="161A19"/>
+          </a:solidFill>
+          <a:ln>
+            <a:solidFill>
+              <a:srgbClr val="595F56"/>
+            </a:solidFill>
+          </a:ln>
+        </p:spPr>
+        <p:style>
+          <a:lnRef idx="1">
+            <a:schemeClr val="accent1"/>
+          </a:lnRef>
+          <a:fillRef idx="3">
+            <a:schemeClr val="accent1"/>
+          </a:fillRef>
+          <a:effectRef idx="2">
+            <a:schemeClr val="accent1"/>
+          </a:effectRef>
+          <a:fontRef idx="minor">
+            <a:schemeClr val="lt1"/>
+          </a:fontRef>
+        </p:style>
+        <p:txBody>
+          <a:bodyPr rtlCol="0" anchor="ctr"/>
+          <a:lstStyle/>
+          <a:p>
+            <a:pPr algn="ctr"/>
+          </a:p>
+        </p:txBody>
+      </p:sp>
+      <p:sp>
+        <p:nvSpPr>
+          <p:cNvPr id="28" name="Rectangle 27"/>
+          <p:cNvSpPr/>
+          <p:nvPr/>
+        </p:nvSpPr>
+        <p:spPr>
+          <a:xfrm>
+            <a:off x="960120" y="3246120"/>
+            <a:ext cx="9921240" cy="109728"/>
+          </a:xfrm>
+          <a:prstGeom prst="rect">
+            <a:avLst/>
+          </a:prstGeom>
+          <a:solidFill>
+            <a:srgbClr val="E0AB5D"/>
+          </a:solidFill>
+          <a:ln>
+            <a:noFill/>
+          </a:ln>
+        </p:spPr>
+        <p:style>
+          <a:lnRef idx="1">
+            <a:schemeClr val="accent1"/>
+          </a:lnRef>
+          <a:fillRef idx="3">
+            <a:schemeClr val="accent1"/>
+          </a:fillRef>
+          <a:effectRef idx="2">
+            <a:schemeClr val="accent1"/>
+          </a:effectRef>
+          <a:fontRef idx="minor">
+            <a:schemeClr val="lt1"/>
+          </a:fontRef>
+        </p:style>
+        <p:txBody>
+          <a:bodyPr rtlCol="0" anchor="ctr"/>
+          <a:lstStyle/>
+          <a:p>
+            <a:pPr algn="ctr"/>
+          </a:p>
+        </p:txBody>
+      </p:sp>
+      <p:sp>
+        <p:nvSpPr>
+          <p:cNvPr id="29" name="TextBox 28"/>
+          <p:cNvSpPr txBox="1"/>
+          <p:nvPr/>
+        </p:nvSpPr>
+        <p:spPr>
+          <a:xfrm>
+            <a:off x="1161288" y="3447288"/>
+            <a:ext cx="9518904" cy="310896"/>
+          </a:xfrm>
+          <a:prstGeom prst="rect">
+            <a:avLst/>
+          </a:prstGeom>
+          <a:noFill/>
+        </p:spPr>
+        <p:txBody>
+          <a:bodyPr wrap="square" anchor="t">
+            <a:spAutoFit/>
+          </a:bodyPr>
+          <a:lstStyle/>
+          <a:p>
+            <a:pPr algn="l"/>
+            <a:r>
+              <a:rPr sz="1400" b="1">
+                <a:solidFill>
+                  <a:srgbClr val="E0AB5D"/>
+                </a:solidFill>
+                <a:latin typeface="Aptos"/>
+              </a:rPr>
+              <a:t>Current HEAD</a:t>
+            </a:r>
+          </a:p>
+        </p:txBody>
+      </p:sp>
+      <p:sp>
+        <p:nvSpPr>
+          <p:cNvPr id="30" name="TextBox 29"/>
+          <p:cNvSpPr txBox="1"/>
+          <p:nvPr/>
+        </p:nvSpPr>
+        <p:spPr>
+          <a:xfrm>
+            <a:off x="1161288" y="3904487"/>
+            <a:ext cx="9518904" cy="1069848"/>
+          </a:xfrm>
+          <a:prstGeom prst="rect">
+            <a:avLst/>
+          </a:prstGeom>
+          <a:noFill/>
+        </p:spPr>
+        <p:txBody>
+          <a:bodyPr wrap="square" anchor="t" lIns="38100" rIns="38100" tIns="25400" bIns="25400">
+            <a:noAutofit/>
+          </a:bodyPr>
+          <a:lstStyle/>
+          <a:p>
+            <a:pPr>
+              <a:spcAft>
+                <a:spcPts val="600"/>
+              </a:spcAft>
+              <a:defRPr sz="1500">
+                <a:solidFill>
+                  <a:srgbClr val="B4BAAE"/>
+                </a:solidFill>
+                <a:latin typeface="Aptos"/>
+              </a:defRPr>
+            </a:pPr>
+            <a:r>
+              <a:rPr sz="1500" b="0" i="0">
+                <a:latin typeface="Calibri"/>
+              </a:rPr>
+              <a:t>382e1a1 - Implementing the professional way every worldwide system is gnerated, by angelahack1</a:t>
+            </a:r>
+            <a:endParaRPr sz="1500" b="0" i="0">
+              <a:latin typeface="Calibri"/>
+            </a:endParaRPr>
+          </a:p>
+          <a:p>
+            <a:pPr>
+              <a:spcAft>
+                <a:spcPts val="600"/>
+              </a:spcAft>
+              <a:defRPr sz="1500">
+                <a:solidFill>
+                  <a:srgbClr val="B4BAAE"/>
+                </a:solidFill>
+                <a:latin typeface="Aptos"/>
+              </a:defRPr>
+            </a:pPr>
+            <a:r>
+              <a:rPr sz="1500" b="0" i="0">
+                <a:latin typeface="Calibri"/>
+              </a:rPr>
+              <a:t>Resolved version: 1.0.0.dev0 (git)</a:t>
+            </a:r>
+            <a:endParaRPr sz="1500" b="0" i="0">
+              <a:latin typeface="Calibri"/>
+            </a:endParaRPr>
+          </a:p>
+          <a:p>
+            <a:pPr>
+              <a:spcAft>
+                <a:spcPts val="600"/>
+              </a:spcAft>
+              <a:defRPr sz="1500">
+                <a:solidFill>
+                  <a:srgbClr val="B4BAAE"/>
+                </a:solidFill>
+                <a:latin typeface="Aptos"/>
+              </a:defRPr>
+            </a:pPr>
+            <a:r>
+              <a:rPr sz="1500" b="0" i="0">
+                <a:latin typeface="Calibri"/>
+              </a:rPr>
+              <a:t>Generated on May 15, 2026 12:08 PM UTC-0600</a:t>
+            </a:r>
+            <a:endParaRPr sz="1500" b="0" i="0">
+              <a:latin typeface="Calibri"/>
+            </a:endParaRPr>
+          </a:p>
+          <a:p>
+            <a:pPr>
+              <a:spcAft>
+                <a:spcPts val="600"/>
+              </a:spcAft>
+              <a:defRPr sz="1500">
+                <a:solidFill>
+                  <a:srgbClr val="B4BAAE"/>
+                </a:solidFill>
+                <a:latin typeface="Aptos"/>
+              </a:defRPr>
+            </a:pPr>
+            <a:r>
+              <a:rPr sz="1500" b="0" i="0">
+                <a:latin typeface="Calibri"/>
+              </a:rPr>
+              <a:t>Python requirements: 62; binary or asset tracked files skipped from line count: 15</a:t>
+            </a:r>
+            <a:endParaRPr sz="1500" b="0" i="0">
+              <a:latin typeface="Calibri"/>
+            </a:endParaRPr>
           </a:p>
         </p:txBody>
       </p:sp>
@@ -16139,7 +16248,7 @@
             <a:avLst/>
           </a:prstGeom>
           <a:solidFill>
-            <a:srgbClr val="48BF8F"/>
+            <a:srgbClr val="C48052"/>
           </a:solidFill>
           <a:ln>
             <a:noFill/>
@@ -16182,7 +16291,7 @@
             <a:avLst/>
           </a:prstGeom>
           <a:solidFill>
-            <a:srgbClr val="48BF8F"/>
+            <a:srgbClr val="C48052"/>
           </a:solidFill>
           <a:ln>
             <a:noFill/>
@@ -16225,7 +16334,7 @@
             <a:avLst/>
           </a:prstGeom>
           <a:solidFill>
-            <a:srgbClr val="48BF8F"/>
+            <a:srgbClr val="C48052"/>
           </a:solidFill>
           <a:ln>
             <a:noFill/>
@@ -16268,7 +16377,7 @@
             <a:avLst/>
           </a:prstGeom>
           <a:solidFill>
-            <a:srgbClr val="48BF8F"/>
+            <a:srgbClr val="C48052"/>
           </a:solidFill>
           <a:ln>
             <a:noFill/>
@@ -16322,11 +16431,11 @@
             <a:r>
               <a:rPr sz="1000" b="1">
                 <a:solidFill>
-                  <a:srgbClr val="48BF8F"/>
+                  <a:srgbClr val="C48052"/>
                 </a:solidFill>
                 <a:latin typeface="Aptos"/>
               </a:rPr>
-              <a:t>WHERE MOST AUTHORED TEXT LIVES</a:t>
+              <a:t>NO COMMENTS, NO BLANKS</a:t>
             </a:r>
           </a:p>
         </p:txBody>
@@ -16361,21 +16470,66 @@
                 </a:solidFill>
                 <a:latin typeface="Aptos Display"/>
               </a:rPr>
-              <a:t>Largest Files By Effective Lines</a:t>
-            </a:r>
-          </a:p>
-        </p:txBody>
-      </p:sp>
-      <p:sp>
-        <p:nvSpPr>
-          <p:cNvPr id="9" name="TextBox 8"/>
+              <a:t>Effective Lines By Language</a:t>
+            </a:r>
+          </a:p>
+        </p:txBody>
+      </p:sp>
+      <p:sp>
+        <p:nvSpPr>
+          <p:cNvPr id="9" name="Rounded Rectangle 8"/>
+          <p:cNvSpPr/>
+          <p:nvPr/>
+        </p:nvSpPr>
+        <p:spPr>
+          <a:xfrm>
+            <a:off x="822960" y="1499616"/>
+            <a:ext cx="2148840" cy="932688"/>
+          </a:xfrm>
+          <a:prstGeom prst="roundRect">
+            <a:avLst/>
+          </a:prstGeom>
+          <a:solidFill>
+            <a:srgbClr val="222724"/>
+          </a:solidFill>
+          <a:ln>
+            <a:solidFill>
+              <a:srgbClr val="C48052"/>
+            </a:solidFill>
+          </a:ln>
+        </p:spPr>
+        <p:style>
+          <a:lnRef idx="1">
+            <a:schemeClr val="accent1"/>
+          </a:lnRef>
+          <a:fillRef idx="3">
+            <a:schemeClr val="accent1"/>
+          </a:fillRef>
+          <a:effectRef idx="2">
+            <a:schemeClr val="accent1"/>
+          </a:effectRef>
+          <a:fontRef idx="minor">
+            <a:schemeClr val="lt1"/>
+          </a:fontRef>
+        </p:style>
+        <p:txBody>
+          <a:bodyPr rtlCol="0" anchor="ctr"/>
+          <a:lstStyle/>
+          <a:p>
+            <a:pPr algn="ctr"/>
+          </a:p>
+        </p:txBody>
+      </p:sp>
+      <p:sp>
+        <p:nvSpPr>
+          <p:cNvPr id="10" name="TextBox 9"/>
           <p:cNvSpPr txBox="1"/>
           <p:nvPr/>
         </p:nvSpPr>
         <p:spPr>
           <a:xfrm>
-            <a:off x="777240" y="1572768"/>
-            <a:ext cx="10698480" cy="4434840"/>
+            <a:off x="969264" y="1636775"/>
+            <a:ext cx="1856232" cy="219456"/>
           </a:xfrm>
           <a:prstGeom prst="rect">
             <a:avLst/>
@@ -16390,27 +16544,327 @@
           <a:p>
             <a:pPr algn="l"/>
             <a:r>
+              <a:rPr sz="800" b="1">
+                <a:solidFill>
+                  <a:srgbClr val="C48052"/>
+                </a:solidFill>
+                <a:latin typeface="Aptos"/>
+              </a:rPr>
+              <a:t>TOTAL EFFECTIVE</a:t>
+            </a:r>
+          </a:p>
+        </p:txBody>
+      </p:sp>
+      <p:sp>
+        <p:nvSpPr>
+          <p:cNvPr id="11" name="TextBox 10"/>
+          <p:cNvSpPr txBox="1"/>
+          <p:nvPr/>
+        </p:nvSpPr>
+        <p:spPr>
+          <a:xfrm>
+            <a:off x="969264" y="1883664"/>
+            <a:ext cx="1856232" cy="347472"/>
+          </a:xfrm>
+          <a:prstGeom prst="rect">
+            <a:avLst/>
+          </a:prstGeom>
+          <a:noFill/>
+        </p:spPr>
+        <p:txBody>
+          <a:bodyPr wrap="square" anchor="t">
+            <a:spAutoFit/>
+          </a:bodyPr>
+          <a:lstStyle/>
+          <a:p>
+            <a:pPr algn="l"/>
+            <a:r>
+              <a:rPr sz="2000" b="1">
+                <a:solidFill>
+                  <a:srgbClr val="E8E8DE"/>
+                </a:solidFill>
+                <a:latin typeface="Aptos"/>
+              </a:rPr>
+              <a:t>93,157</a:t>
+            </a:r>
+          </a:p>
+        </p:txBody>
+      </p:sp>
+      <p:sp>
+        <p:nvSpPr>
+          <p:cNvPr id="12" name="Rounded Rectangle 11"/>
+          <p:cNvSpPr/>
+          <p:nvPr/>
+        </p:nvSpPr>
+        <p:spPr>
+          <a:xfrm>
+            <a:off x="3246120" y="1499616"/>
+            <a:ext cx="2148840" cy="932688"/>
+          </a:xfrm>
+          <a:prstGeom prst="roundRect">
+            <a:avLst/>
+          </a:prstGeom>
+          <a:solidFill>
+            <a:srgbClr val="222724"/>
+          </a:solidFill>
+          <a:ln>
+            <a:solidFill>
+              <a:srgbClr val="48BF8F"/>
+            </a:solidFill>
+          </a:ln>
+        </p:spPr>
+        <p:style>
+          <a:lnRef idx="1">
+            <a:schemeClr val="accent1"/>
+          </a:lnRef>
+          <a:fillRef idx="3">
+            <a:schemeClr val="accent1"/>
+          </a:fillRef>
+          <a:effectRef idx="2">
+            <a:schemeClr val="accent1"/>
+          </a:effectRef>
+          <a:fontRef idx="minor">
+            <a:schemeClr val="lt1"/>
+          </a:fontRef>
+        </p:style>
+        <p:txBody>
+          <a:bodyPr rtlCol="0" anchor="ctr"/>
+          <a:lstStyle/>
+          <a:p>
+            <a:pPr algn="ctr"/>
+          </a:p>
+        </p:txBody>
+      </p:sp>
+      <p:sp>
+        <p:nvSpPr>
+          <p:cNvPr id="13" name="TextBox 12"/>
+          <p:cNvSpPr txBox="1"/>
+          <p:nvPr/>
+        </p:nvSpPr>
+        <p:spPr>
+          <a:xfrm>
+            <a:off x="3392424" y="1636775"/>
+            <a:ext cx="1856232" cy="219456"/>
+          </a:xfrm>
+          <a:prstGeom prst="rect">
+            <a:avLst/>
+          </a:prstGeom>
+          <a:noFill/>
+        </p:spPr>
+        <p:txBody>
+          <a:bodyPr wrap="square" anchor="t">
+            <a:spAutoFit/>
+          </a:bodyPr>
+          <a:lstStyle/>
+          <a:p>
+            <a:pPr algn="l"/>
+            <a:r>
+              <a:rPr sz="800" b="1">
+                <a:solidFill>
+                  <a:srgbClr val="48BF8F"/>
+                </a:solidFill>
+                <a:latin typeface="Aptos"/>
+              </a:rPr>
+              <a:t>TOTAL PHYSICAL</a:t>
+            </a:r>
+          </a:p>
+        </p:txBody>
+      </p:sp>
+      <p:sp>
+        <p:nvSpPr>
+          <p:cNvPr id="14" name="TextBox 13"/>
+          <p:cNvSpPr txBox="1"/>
+          <p:nvPr/>
+        </p:nvSpPr>
+        <p:spPr>
+          <a:xfrm>
+            <a:off x="3392424" y="1883664"/>
+            <a:ext cx="1856232" cy="347472"/>
+          </a:xfrm>
+          <a:prstGeom prst="rect">
+            <a:avLst/>
+          </a:prstGeom>
+          <a:noFill/>
+        </p:spPr>
+        <p:txBody>
+          <a:bodyPr wrap="square" anchor="t">
+            <a:spAutoFit/>
+          </a:bodyPr>
+          <a:lstStyle/>
+          <a:p>
+            <a:pPr algn="l"/>
+            <a:r>
+              <a:rPr sz="2000" b="1">
+                <a:solidFill>
+                  <a:srgbClr val="E8E8DE"/>
+                </a:solidFill>
+                <a:latin typeface="Aptos"/>
+              </a:rPr>
+              <a:t>126,477</a:t>
+            </a:r>
+          </a:p>
+        </p:txBody>
+      </p:sp>
+      <p:sp>
+        <p:nvSpPr>
+          <p:cNvPr id="15" name="Rounded Rectangle 14"/>
+          <p:cNvSpPr/>
+          <p:nvPr/>
+        </p:nvSpPr>
+        <p:spPr>
+          <a:xfrm>
+            <a:off x="5669280" y="1499616"/>
+            <a:ext cx="2148840" cy="932688"/>
+          </a:xfrm>
+          <a:prstGeom prst="roundRect">
+            <a:avLst/>
+          </a:prstGeom>
+          <a:solidFill>
+            <a:srgbClr val="222724"/>
+          </a:solidFill>
+          <a:ln>
+            <a:solidFill>
+              <a:srgbClr val="E0AB5D"/>
+            </a:solidFill>
+          </a:ln>
+        </p:spPr>
+        <p:style>
+          <a:lnRef idx="1">
+            <a:schemeClr val="accent1"/>
+          </a:lnRef>
+          <a:fillRef idx="3">
+            <a:schemeClr val="accent1"/>
+          </a:fillRef>
+          <a:effectRef idx="2">
+            <a:schemeClr val="accent1"/>
+          </a:effectRef>
+          <a:fontRef idx="minor">
+            <a:schemeClr val="lt1"/>
+          </a:fontRef>
+        </p:style>
+        <p:txBody>
+          <a:bodyPr rtlCol="0" anchor="ctr"/>
+          <a:lstStyle/>
+          <a:p>
+            <a:pPr algn="ctr"/>
+          </a:p>
+        </p:txBody>
+      </p:sp>
+      <p:sp>
+        <p:nvSpPr>
+          <p:cNvPr id="16" name="TextBox 15"/>
+          <p:cNvSpPr txBox="1"/>
+          <p:nvPr/>
+        </p:nvSpPr>
+        <p:spPr>
+          <a:xfrm>
+            <a:off x="5815584" y="1636775"/>
+            <a:ext cx="1856232" cy="219456"/>
+          </a:xfrm>
+          <a:prstGeom prst="rect">
+            <a:avLst/>
+          </a:prstGeom>
+          <a:noFill/>
+        </p:spPr>
+        <p:txBody>
+          <a:bodyPr wrap="square" anchor="t">
+            <a:spAutoFit/>
+          </a:bodyPr>
+          <a:lstStyle/>
+          <a:p>
+            <a:pPr algn="l"/>
+            <a:r>
+              <a:rPr sz="800" b="1">
+                <a:solidFill>
+                  <a:srgbClr val="E0AB5D"/>
+                </a:solidFill>
+                <a:latin typeface="Aptos"/>
+              </a:rPr>
+              <a:t>TEXT LANGUAGES</a:t>
+            </a:r>
+          </a:p>
+        </p:txBody>
+      </p:sp>
+      <p:sp>
+        <p:nvSpPr>
+          <p:cNvPr id="17" name="TextBox 16"/>
+          <p:cNvSpPr txBox="1"/>
+          <p:nvPr/>
+        </p:nvSpPr>
+        <p:spPr>
+          <a:xfrm>
+            <a:off x="5815584" y="1883664"/>
+            <a:ext cx="1856232" cy="347472"/>
+          </a:xfrm>
+          <a:prstGeom prst="rect">
+            <a:avLst/>
+          </a:prstGeom>
+          <a:noFill/>
+        </p:spPr>
+        <p:txBody>
+          <a:bodyPr wrap="square" anchor="t">
+            <a:spAutoFit/>
+          </a:bodyPr>
+          <a:lstStyle/>
+          <a:p>
+            <a:pPr algn="l"/>
+            <a:r>
+              <a:rPr sz="2000" b="1">
+                <a:solidFill>
+                  <a:srgbClr val="E8E8DE"/>
+                </a:solidFill>
+                <a:latin typeface="Aptos"/>
+              </a:rPr>
+              <a:t>14</a:t>
+            </a:r>
+          </a:p>
+        </p:txBody>
+      </p:sp>
+      <p:sp>
+        <p:nvSpPr>
+          <p:cNvPr id="18" name="TextBox 17"/>
+          <p:cNvSpPr txBox="1"/>
+          <p:nvPr/>
+        </p:nvSpPr>
+        <p:spPr>
+          <a:xfrm>
+            <a:off x="841248" y="2788920"/>
+            <a:ext cx="10378440" cy="2926080"/>
+          </a:xfrm>
+          <a:prstGeom prst="rect">
+            <a:avLst/>
+          </a:prstGeom>
+          <a:noFill/>
+        </p:spPr>
+        <p:txBody>
+          <a:bodyPr wrap="square" anchor="t">
+            <a:spAutoFit/>
+          </a:bodyPr>
+          <a:lstStyle/>
+          <a:p>
+            <a:pPr algn="l"/>
+            <a:r>
               <a:rPr sz="800" b="0">
                 <a:solidFill>
                   <a:srgbClr val="E8E8DE"/>
                 </a:solidFill>
                 <a:latin typeface="Cascadia Mono"/>
               </a:rPr>
-              <a:t>PATH                                                     LANGUAGE     EFFECTIVE   TOTAL
-Tlamatini/agent/views.py                                Python         6,622   9,561
-Tlamatini/agent/tests.py                                Python         3,886   4,963
-Tlamatini/agent/tools.py                                Python         2,201   3,094
-Tlamatini/agent/agents/flowcreator/agentic_skill.md     Markdown       1,778   1,981
-BookOfTlamatini.md                                      Markdown       1,662   2,328
-...ini/agent/static/agent/css/agentic_control_panel.css CSS            1,631   2,140
-Tlamatini/agent/doc_generation/complete_project_docs.py Python         1,346   1,531
-Tlamatini/agent/static/agent/js/agent_page_init.js      JavaScript     1,306   1,503
-Tlamatini/agent/static/agent/js/acp-canvas-core.js      JavaScript     1,256   1,566
-Tlamatini/agent/static/agent/css/agent_page.css         CSS            1,143   1,362
-Tlamatini/agent/consumers.py                            Python         1,121   1,350
-Tlamatini/agent/static/agent/js/acp-agent-connectors.js JavaScript     1,073   1,211
-Tlamatini/agent/agents/whatstlamatini/whatstlamatini.py Python         1,044   1,300
-Tlamatini/agent/static/agent/js/acp-control-buttons.js  JavaScript     1,036   1,344</a:t>
+              <a:t>LANGUAGE                 FILES   EFFECTIVE      TOTAL   SHARE
+Python                   252      61,927     86,172  66.5%
+JavaScript                27      12,330     15,560  13.2%
+Markdown                  50      11,145     14,301  12.0%
+CSS                        5       3,027      3,793   3.2%
+YAML                      64       1,342      2,639   1.4%
+Other text                 3         789        967   0.8%
+HTML                       4         780        798   0.8%
+PowerShell                 5         506        752   0.5%
+Prompt template            2         403        477   0.4%
+JSON                       5         383        383   0.4%
+JavaScript module          1         377        444   0.4%
+Text                       4         115        134   0.1%
+Protocol Buffers           1          20         33   0.0%
+Batch                      1          13         24   0.0%</a:t>
             </a:r>
           </a:p>
         </p:txBody>
@@ -16491,7 +16945,7 @@
             <a:avLst/>
           </a:prstGeom>
           <a:solidFill>
-            <a:srgbClr val="E0AB5D"/>
+            <a:srgbClr val="48BF8F"/>
           </a:solidFill>
           <a:ln>
             <a:noFill/>
@@ -16534,7 +16988,7 @@
             <a:avLst/>
           </a:prstGeom>
           <a:solidFill>
-            <a:srgbClr val="E0AB5D"/>
+            <a:srgbClr val="48BF8F"/>
           </a:solidFill>
           <a:ln>
             <a:noFill/>
@@ -16577,7 +17031,7 @@
             <a:avLst/>
           </a:prstGeom>
           <a:solidFill>
-            <a:srgbClr val="E0AB5D"/>
+            <a:srgbClr val="48BF8F"/>
           </a:solidFill>
           <a:ln>
             <a:noFill/>
@@ -16620,7 +17074,7 @@
             <a:avLst/>
           </a:prstGeom>
           <a:solidFill>
-            <a:srgbClr val="E0AB5D"/>
+            <a:srgbClr val="48BF8F"/>
           </a:solidFill>
           <a:ln>
             <a:noFill/>
@@ -16674,11 +17128,11 @@
             <a:r>
               <a:rPr sz="1000" b="1">
                 <a:solidFill>
-                  <a:srgbClr val="E0AB5D"/>
+                  <a:srgbClr val="48BF8F"/>
                 </a:solidFill>
                 <a:latin typeface="Aptos"/>
               </a:rPr>
-              <a:t>RECENT CHANGES ACCORDING TO GIT HISTORY</a:t>
+              <a:t>WHERE MOST AUTHORED TEXT LIVES</a:t>
             </a:r>
           </a:p>
         </p:txBody>
@@ -16713,109 +17167,21 @@
                 </a:solidFill>
                 <a:latin typeface="Aptos Display"/>
               </a:rPr>
-              <a:t>Last 2 Days In Git</a:t>
-            </a:r>
-          </a:p>
-        </p:txBody>
-      </p:sp>
-      <p:sp>
-        <p:nvSpPr>
-          <p:cNvPr id="9" name="Rounded Rectangle 8"/>
-          <p:cNvSpPr/>
-          <p:nvPr/>
-        </p:nvSpPr>
-        <p:spPr>
-          <a:xfrm>
-            <a:off x="749808" y="1508760"/>
-            <a:ext cx="10561320" cy="4480560"/>
-          </a:xfrm>
-          <a:prstGeom prst="roundRect">
-            <a:avLst/>
-          </a:prstGeom>
-          <a:solidFill>
-            <a:srgbClr val="161A19"/>
-          </a:solidFill>
-          <a:ln>
-            <a:solidFill>
-              <a:srgbClr val="595F56"/>
-            </a:solidFill>
-          </a:ln>
-        </p:spPr>
-        <p:style>
-          <a:lnRef idx="1">
-            <a:schemeClr val="accent1"/>
-          </a:lnRef>
-          <a:fillRef idx="3">
-            <a:schemeClr val="accent1"/>
-          </a:fillRef>
-          <a:effectRef idx="2">
-            <a:schemeClr val="accent1"/>
-          </a:effectRef>
-          <a:fontRef idx="minor">
-            <a:schemeClr val="lt1"/>
-          </a:fontRef>
-        </p:style>
-        <p:txBody>
-          <a:bodyPr rtlCol="0" anchor="ctr"/>
-          <a:lstStyle/>
-          <a:p>
-            <a:pPr algn="ctr"/>
-          </a:p>
-        </p:txBody>
-      </p:sp>
-      <p:sp>
-        <p:nvSpPr>
-          <p:cNvPr id="10" name="Rectangle 9"/>
-          <p:cNvSpPr/>
-          <p:nvPr/>
-        </p:nvSpPr>
-        <p:spPr>
-          <a:xfrm>
-            <a:off x="749808" y="1508760"/>
-            <a:ext cx="10561320" cy="109728"/>
-          </a:xfrm>
-          <a:prstGeom prst="rect">
-            <a:avLst/>
-          </a:prstGeom>
-          <a:solidFill>
-            <a:srgbClr val="E0AB5D"/>
-          </a:solidFill>
-          <a:ln>
-            <a:noFill/>
-          </a:ln>
-        </p:spPr>
-        <p:style>
-          <a:lnRef idx="1">
-            <a:schemeClr val="accent1"/>
-          </a:lnRef>
-          <a:fillRef idx="3">
-            <a:schemeClr val="accent1"/>
-          </a:fillRef>
-          <a:effectRef idx="2">
-            <a:schemeClr val="accent1"/>
-          </a:effectRef>
-          <a:fontRef idx="minor">
-            <a:schemeClr val="lt1"/>
-          </a:fontRef>
-        </p:style>
-        <p:txBody>
-          <a:bodyPr rtlCol="0" anchor="ctr"/>
-          <a:lstStyle/>
-          <a:p>
-            <a:pPr algn="ctr"/>
-          </a:p>
-        </p:txBody>
-      </p:sp>
-      <p:sp>
-        <p:nvSpPr>
-          <p:cNvPr id="11" name="TextBox 10"/>
+              <a:t>Largest Files By Effective Lines</a:t>
+            </a:r>
+          </a:p>
+        </p:txBody>
+      </p:sp>
+      <p:sp>
+        <p:nvSpPr>
+          <p:cNvPr id="9" name="TextBox 8"/>
           <p:cNvSpPr txBox="1"/>
           <p:nvPr/>
         </p:nvSpPr>
         <p:spPr>
           <a:xfrm>
-            <a:off x="950976" y="1709928"/>
-            <a:ext cx="10158984" cy="310896"/>
+            <a:off x="777240" y="1572768"/>
+            <a:ext cx="10698480" cy="4434840"/>
           </a:xfrm>
           <a:prstGeom prst="rect">
             <a:avLst/>
@@ -16830,125 +17196,28 @@
           <a:p>
             <a:pPr algn="l"/>
             <a:r>
-              <a:rPr sz="1400" b="1">
-                <a:solidFill>
-                  <a:srgbClr val="E0AB5D"/>
-                </a:solidFill>
-                <a:latin typeface="Aptos"/>
-              </a:rPr>
-              <a:t>2-day highlights</a:t>
-            </a:r>
-          </a:p>
-        </p:txBody>
-      </p:sp>
-      <p:sp>
-        <p:nvSpPr>
-          <p:cNvPr id="12" name="TextBox 11"/>
-          <p:cNvSpPr txBox="1"/>
-          <p:nvPr/>
-        </p:nvSpPr>
-        <p:spPr>
-          <a:xfrm>
-            <a:off x="950976" y="2167128"/>
-            <a:ext cx="10158984" cy="3675888"/>
-          </a:xfrm>
-          <a:prstGeom prst="rect">
-            <a:avLst/>
-          </a:prstGeom>
-          <a:noFill/>
-        </p:spPr>
-        <p:txBody>
-          <a:bodyPr wrap="square" anchor="t" lIns="38100" rIns="38100" tIns="25400" bIns="25400">
-            <a:noAutofit/>
-          </a:bodyPr>
-          <a:lstStyle/>
-          <a:p>
-            <a:pPr>
-              <a:spcAft>
-                <a:spcPts val="600"/>
-              </a:spcAft>
-              <a:defRPr sz="1500">
-                <a:solidFill>
-                  <a:srgbClr val="B4BAAE"/>
-                </a:solidFill>
-                <a:latin typeface="Aptos"/>
-              </a:defRPr>
-            </a:pPr>
-            <a:r>
-              <a:rPr sz="1500" b="0" i="0">
-                <a:latin typeface="Calibri"/>
-              </a:rPr>
-              <a:t>Today’s operator-facing work is dominated by the new DB dropdown: backup, Set DB staging for the next start-up, startup swap-in/rollback mechanics, and native Browse buttons on both dialogs.</a:t>
-            </a:r>
-            <a:endParaRPr sz="1500" b="0" i="0">
-              <a:latin typeface="Calibri"/>
-            </a:endParaRPr>
-          </a:p>
-          <a:p>
-            <a:pPr>
-              <a:spcAft>
-                <a:spcPts val="600"/>
-              </a:spcAft>
-              <a:defRPr sz="1500">
-                <a:solidFill>
-                  <a:srgbClr val="B4BAAE"/>
-                </a:solidFill>
-                <a:latin typeface="Aptos"/>
-              </a:defRPr>
-            </a:pPr>
-            <a:r>
-              <a:rPr sz="1500" b="0" i="0">
-                <a:latin typeface="Calibri"/>
-              </a:rPr>
-              <a:t>The current Git window still shows the flow compiler / agent-contract direction influencing how chat-created and ACP-created workflows converge.</a:t>
-            </a:r>
-            <a:endParaRPr sz="1500" b="0" i="0">
-              <a:latin typeface="Calibri"/>
-            </a:endParaRPr>
-          </a:p>
-          <a:p>
-            <a:pPr>
-              <a:spcAft>
-                <a:spcPts val="600"/>
-              </a:spcAft>
-              <a:defRPr sz="1500">
-                <a:solidFill>
-                  <a:srgbClr val="B4BAAE"/>
-                </a:solidFill>
-                <a:latin typeface="Aptos"/>
-              </a:defRPr>
-            </a:pPr>
-            <a:r>
-              <a:rPr sz="1500" b="0" i="0">
-                <a:latin typeface="Calibri"/>
-              </a:rPr>
-              <a:t>Multi-Turn behavior kept evolving across the period through quota tuning, execution-table persistence, autonomous-action improvements, and broader tool enablement.</a:t>
-            </a:r>
-            <a:endParaRPr sz="1500" b="0" i="0">
-              <a:latin typeface="Calibri"/>
-            </a:endParaRPr>
-          </a:p>
-          <a:p>
-            <a:pPr>
-              <a:spcAft>
-                <a:spcPts val="600"/>
-              </a:spcAft>
-              <a:defRPr sz="1500">
-                <a:solidFill>
-                  <a:srgbClr val="B4BAAE"/>
-                </a:solidFill>
-                <a:latin typeface="Aptos"/>
-              </a:defRPr>
-            </a:pPr>
-            <a:r>
-              <a:rPr sz="1500" b="0" i="0">
-                <a:latin typeface="Calibri"/>
-              </a:rPr>
-              <a:t>Documentation itself changed during the last 2 days, so the regenerated dossier is part of the tracked operator surface rather than an external afterthought.</a:t>
-            </a:r>
-            <a:endParaRPr sz="1500" b="0" i="0">
-              <a:latin typeface="Calibri"/>
-            </a:endParaRPr>
+              <a:rPr sz="800" b="0">
+                <a:solidFill>
+                  <a:srgbClr val="E8E8DE"/>
+                </a:solidFill>
+                <a:latin typeface="Cascadia Mono"/>
+              </a:rPr>
+              <a:t>PATH                                                     LANGUAGE     EFFECTIVE   TOTAL
+Tlamatini/agent/views.py                                Python         6,638   9,595
+Tlamatini/agent/tests.py                                Python         3,886   4,963
+Tlamatini/agent/tools.py                                Python         2,201   3,094
+Tlamatini/agent/agents/flowcreator/agentic_skill.md     Markdown       1,778   1,981
+BookOfTlamatini.md                                      Markdown       1,704   2,391
+...ini/agent/static/agent/css/agentic_control_panel.css CSS            1,631   2,140
+Tlamatini/agent/doc_generation/complete_project_docs.py Python         1,441   1,633
+Tlamatini/agent/static/agent/js/agent_page_init.js      JavaScript     1,306   1,503
+Tlamatini/agent/static/agent/js/acp-canvas-core.js      JavaScript     1,256   1,566
+Tlamatini/agent/static/agent/css/agent_page.css         CSS            1,143   1,362
+Tlamatini/agent/consumers.py                            Python         1,121   1,350
+Tlamatini/agent/static/agent/js/acp-agent-connectors.js JavaScript     1,073   1,211
+Tlamatini/agent/agents/whatstlamatini/whatstlamatini.py Python         1,044   1,300
+Tlamatini/agent/static/agent/js/acp-control-buttons.js  JavaScript     1,036   1,344</a:t>
+            </a:r>
           </a:p>
         </p:txBody>
       </p:sp>
@@ -17028,7 +17297,7 @@
             <a:avLst/>
           </a:prstGeom>
           <a:solidFill>
-            <a:srgbClr val="C48052"/>
+            <a:srgbClr val="E0AB5D"/>
           </a:solidFill>
           <a:ln>
             <a:noFill/>
@@ -17071,7 +17340,7 @@
             <a:avLst/>
           </a:prstGeom>
           <a:solidFill>
-            <a:srgbClr val="C48052"/>
+            <a:srgbClr val="E0AB5D"/>
           </a:solidFill>
           <a:ln>
             <a:noFill/>
@@ -17114,7 +17383,7 @@
             <a:avLst/>
           </a:prstGeom>
           <a:solidFill>
-            <a:srgbClr val="C48052"/>
+            <a:srgbClr val="E0AB5D"/>
           </a:solidFill>
           <a:ln>
             <a:noFill/>
@@ -17157,7 +17426,7 @@
             <a:avLst/>
           </a:prstGeom>
           <a:solidFill>
-            <a:srgbClr val="C48052"/>
+            <a:srgbClr val="E0AB5D"/>
           </a:solidFill>
           <a:ln>
             <a:noFill/>
@@ -17211,11 +17480,11 @@
             <a:r>
               <a:rPr sz="1000" b="1">
                 <a:solidFill>
-                  <a:srgbClr val="C48052"/>
+                  <a:srgbClr val="E0AB5D"/>
                 </a:solidFill>
                 <a:latin typeface="Aptos"/>
               </a:rPr>
-              <a:t>ALL COMMITS FROM THE LAST 2 DAYS ACCORDING TO GIT</a:t>
+              <a:t>RECENT CHANGES ACCORDING TO GIT HISTORY</a:t>
             </a:r>
           </a:p>
         </p:txBody>
@@ -17250,7 +17519,7 @@
                 </a:solidFill>
                 <a:latin typeface="Aptos Display"/>
               </a:rPr>
-              <a:t>2-Day Commit Appendix 1/2</a:t>
+              <a:t>Today In Git</a:t>
             </a:r>
           </a:p>
         </p:txBody>
@@ -17263,8 +17532,8 @@
         </p:nvSpPr>
         <p:spPr>
           <a:xfrm>
-            <a:off x="749808" y="1536192"/>
-            <a:ext cx="10561320" cy="4443984"/>
+            <a:off x="749808" y="1508760"/>
+            <a:ext cx="10561320" cy="4480560"/>
           </a:xfrm>
           <a:prstGeom prst="roundRect">
             <a:avLst/>
@@ -17308,14 +17577,14 @@
         </p:nvSpPr>
         <p:spPr>
           <a:xfrm>
-            <a:off x="749808" y="1536192"/>
+            <a:off x="749808" y="1508760"/>
             <a:ext cx="10561320" cy="109728"/>
           </a:xfrm>
           <a:prstGeom prst="rect">
             <a:avLst/>
           </a:prstGeom>
           <a:solidFill>
-            <a:srgbClr val="C48052"/>
+            <a:srgbClr val="E0AB5D"/>
           </a:solidFill>
           <a:ln>
             <a:noFill/>
@@ -17351,7 +17620,7 @@
         </p:nvSpPr>
         <p:spPr>
           <a:xfrm>
-            <a:off x="950976" y="1737360"/>
+            <a:off x="950976" y="1709928"/>
             <a:ext cx="10158984" cy="310896"/>
           </a:xfrm>
           <a:prstGeom prst="rect">
@@ -17369,11 +17638,11 @@
             <a:r>
               <a:rPr sz="1400" b="1">
                 <a:solidFill>
-                  <a:srgbClr val="C48052"/>
+                  <a:srgbClr val="E0AB5D"/>
                 </a:solidFill>
                 <a:latin typeface="Aptos"/>
               </a:rPr>
-              <a:t>Commit timeline</a:t>
+              <a:t>today's highlights</a:t>
             </a:r>
           </a:p>
         </p:txBody>
@@ -17386,8 +17655,8 @@
         </p:nvSpPr>
         <p:spPr>
           <a:xfrm>
-            <a:off x="950976" y="2194560"/>
-            <a:ext cx="10158984" cy="3639312"/>
+            <a:off x="950976" y="2167128"/>
+            <a:ext cx="10158984" cy="3675888"/>
           </a:xfrm>
           <a:prstGeom prst="rect">
             <a:avLst/>
@@ -17404,7 +17673,7 @@
               <a:spcAft>
                 <a:spcPts val="600"/>
               </a:spcAft>
-              <a:defRPr sz="1200">
+              <a:defRPr sz="1500">
                 <a:solidFill>
                   <a:srgbClr val="B4BAAE"/>
                 </a:solidFill>
@@ -17412,122 +17681,12 @@
               </a:defRPr>
             </a:pPr>
             <a:r>
-              <a:rPr sz="1200" b="0" i="0">
+              <a:rPr sz="1500" b="0" i="0">
                 <a:latin typeface="Calibri"/>
               </a:rPr>
-              <a:t>2026-05-14 | e1d93ab | Added Browse buttons to new dialogs of menu DB entry, by Tlamatini's-AutoBot.</a:t>
-            </a:r>
-            <a:endParaRPr sz="1200" b="0" i="0">
-              <a:latin typeface="Calibri"/>
-            </a:endParaRPr>
-          </a:p>
-          <a:p>
-            <a:pPr>
-              <a:spcAft>
-                <a:spcPts val="600"/>
-              </a:spcAft>
-              <a:defRPr sz="1200">
-                <a:solidFill>
-                  <a:srgbClr val="B4BAAE"/>
-                </a:solidFill>
-                <a:latin typeface="Aptos"/>
-              </a:defRPr>
-            </a:pPr>
-            <a:r>
-              <a:rPr sz="1200" b="0" i="0">
-                <a:latin typeface="Calibri"/>
-              </a:rPr>
-              <a:t>2026-05-14 | 1c38970 | Updating documentation, by Tlamatini's-AutoBot.</a:t>
-            </a:r>
-            <a:endParaRPr sz="1200" b="0" i="0">
-              <a:latin typeface="Calibri"/>
-            </a:endParaRPr>
-          </a:p>
-          <a:p>
-            <a:pPr>
-              <a:spcAft>
-                <a:spcPts val="600"/>
-              </a:spcAft>
-              <a:defRPr sz="1200">
-                <a:solidFill>
-                  <a:srgbClr val="B4BAAE"/>
-                </a:solidFill>
-                <a:latin typeface="Aptos"/>
-              </a:defRPr>
-            </a:pPr>
-            <a:r>
-              <a:rPr sz="1200" b="0" i="0">
-                <a:latin typeface="Calibri"/>
-              </a:rPr>
-              <a:t>2026-05-14 | 70a6cd8 | Implemented the new menu DB, to backup and restore databases of Tlamatini, by Tlamatini's-AutoBot.</a:t>
-            </a:r>
-            <a:endParaRPr sz="1200" b="0" i="0">
-              <a:latin typeface="Calibri"/>
-            </a:endParaRPr>
-          </a:p>
-          <a:p>
-            <a:pPr>
-              <a:spcAft>
-                <a:spcPts val="600"/>
-              </a:spcAft>
-              <a:defRPr sz="1200">
-                <a:solidFill>
-                  <a:srgbClr val="B4BAAE"/>
-                </a:solidFill>
-                <a:latin typeface="Aptos"/>
-              </a:defRPr>
-            </a:pPr>
-            <a:r>
-              <a:rPr sz="1200" b="0" i="0">
-                <a:latin typeface="Calibri"/>
-              </a:rPr>
-              <a:t>2026-05-14 | 47df564 | Tlamatini's operation database backup mechanics, by Tlamatini's-AutoBot.</a:t>
-            </a:r>
-            <a:endParaRPr sz="1200" b="0" i="0">
-              <a:latin typeface="Calibri"/>
-            </a:endParaRPr>
-          </a:p>
-          <a:p>
-            <a:pPr>
-              <a:spcAft>
-                <a:spcPts val="600"/>
-              </a:spcAft>
-              <a:defRPr sz="1200">
-                <a:solidFill>
-                  <a:srgbClr val="B4BAAE"/>
-                </a:solidFill>
-                <a:latin typeface="Aptos"/>
-              </a:defRPr>
-            </a:pPr>
-            <a:r>
-              <a:rPr sz="1200" b="0" i="0">
-                <a:latin typeface="Calibri"/>
-              </a:rPr>
-              <a:t>2026-05-13 | b73ee03 | Enabling J-Decompiler as Multi-turn agent, by Tlamatini's-AutoBot.</a:t>
-            </a:r>
-            <a:endParaRPr sz="1200" b="0" i="0">
-              <a:latin typeface="Calibri"/>
-            </a:endParaRPr>
-          </a:p>
-          <a:p>
-            <a:pPr>
-              <a:spcAft>
-                <a:spcPts val="600"/>
-              </a:spcAft>
-              <a:defRPr sz="1200">
-                <a:solidFill>
-                  <a:srgbClr val="B4BAAE"/>
-                </a:solidFill>
-                <a:latin typeface="Aptos"/>
-              </a:defRPr>
-            </a:pPr>
-            <a:r>
-              <a:rPr sz="1200" b="0" i="0">
-                <a:latin typeface="Calibri"/>
-              </a:rPr>
-              <a:t>2026-05-12 | d7509c9 | Update README.md</a:t>
-            </a:r>
-            <a:endParaRPr sz="1200" b="0" i="0">
+              <a:t>Today’s headline change is the new versioning system: SemVer policy, git-tag sourcing, runtime version surfaces, and build-time embedding across the Windows artefacts.</a:t>
+            </a:r>
+            <a:endParaRPr sz="1500" b="0" i="0">
               <a:latin typeface="Calibri"/>
             </a:endParaRPr>
           </a:p>
@@ -17609,7 +17768,7 @@
             <a:avLst/>
           </a:prstGeom>
           <a:solidFill>
-            <a:srgbClr val="48BF8F"/>
+            <a:srgbClr val="C48052"/>
           </a:solidFill>
           <a:ln>
             <a:noFill/>
@@ -17652,7 +17811,7 @@
             <a:avLst/>
           </a:prstGeom>
           <a:solidFill>
-            <a:srgbClr val="48BF8F"/>
+            <a:srgbClr val="C48052"/>
           </a:solidFill>
           <a:ln>
             <a:noFill/>
@@ -17695,7 +17854,7 @@
             <a:avLst/>
           </a:prstGeom>
           <a:solidFill>
-            <a:srgbClr val="48BF8F"/>
+            <a:srgbClr val="C48052"/>
           </a:solidFill>
           <a:ln>
             <a:noFill/>
@@ -17738,7 +17897,7 @@
             <a:avLst/>
           </a:prstGeom>
           <a:solidFill>
-            <a:srgbClr val="48BF8F"/>
+            <a:srgbClr val="C48052"/>
           </a:solidFill>
           <a:ln>
             <a:noFill/>
@@ -17792,11 +17951,11 @@
             <a:r>
               <a:rPr sz="1000" b="1">
                 <a:solidFill>
-                  <a:srgbClr val="48BF8F"/>
+                  <a:srgbClr val="C48052"/>
                 </a:solidFill>
                 <a:latin typeface="Aptos"/>
               </a:rPr>
-              <a:t>ALL COMMITS FROM THE LAST 2 DAYS ACCORDING TO GIT</a:t>
+              <a:t>ALL COMMITS FROM TODAY ACCORDING TO GIT</a:t>
             </a:r>
           </a:p>
         </p:txBody>
@@ -17831,7 +17990,7 @@
                 </a:solidFill>
                 <a:latin typeface="Aptos Display"/>
               </a:rPr>
-              <a:t>2-Day Commit Appendix 2/2</a:t>
+              <a:t>Today's Commit Appendix 1/1</a:t>
             </a:r>
           </a:p>
         </p:txBody>
@@ -17896,7 +18055,7 @@
             <a:avLst/>
           </a:prstGeom>
           <a:solidFill>
-            <a:srgbClr val="48BF8F"/>
+            <a:srgbClr val="C48052"/>
           </a:solidFill>
           <a:ln>
             <a:noFill/>
@@ -17950,7 +18109,7 @@
             <a:r>
               <a:rPr sz="1400" b="1">
                 <a:solidFill>
-                  <a:srgbClr val="48BF8F"/>
+                  <a:srgbClr val="C48052"/>
                 </a:solidFill>
                 <a:latin typeface="Aptos"/>
               </a:rPr>
@@ -17996,7 +18155,7 @@
               <a:rPr sz="1200" b="0" i="0">
                 <a:latin typeface="Calibri"/>
               </a:rPr>
-              <a:t>2026-05-12 | 65319a6 | Adding the reference to a new video!, by angelahack1</a:t>
+              <a:t>2026-05-15 | 382e1a1 | Implementing the professional way every worldwide system is gnerated, by angelahack1</a:t>
             </a:r>
             <a:endParaRPr sz="1200" b="0" i="0">
               <a:latin typeface="Calibri"/>
@@ -19069,7 +19228,7 @@
               <a:rPr sz="1500" b="0" i="0">
                 <a:latin typeface="Calibri"/>
               </a:rPr>
-              <a:t>Runs checked Multi-Turn requests through request-scoped planning, capability selection, tool calls, observations, monitoring, and final synthesis.</a:t>
+              <a:t>Exposes a coherent versioning surface across builds, runtime UI, logs, and an open health-check endpoint.</a:t>
             </a:r>
             <a:endParaRPr sz="1500" b="0" i="0">
               <a:latin typeface="Calibri"/>
@@ -19221,6 +19380,28 @@
             <a:noAutofit/>
           </a:bodyPr>
           <a:lstStyle/>
+          <a:p>
+            <a:pPr>
+              <a:spcAft>
+                <a:spcPts val="600"/>
+              </a:spcAft>
+              <a:defRPr sz="1500">
+                <a:solidFill>
+                  <a:srgbClr val="B4BAAE"/>
+                </a:solidFill>
+                <a:latin typeface="Aptos"/>
+              </a:defRPr>
+            </a:pPr>
+            <a:r>
+              <a:rPr sz="1500" b="0" i="0">
+                <a:latin typeface="Calibri"/>
+              </a:rPr>
+              <a:t>Runs checked Multi-Turn requests through request-scoped planning, capability selection, tool calls, observations, monitoring, and final synthesis.</a:t>
+            </a:r>
+            <a:endParaRPr sz="1500" b="0" i="0">
+              <a:latin typeface="Calibri"/>
+            </a:endParaRPr>
+          </a:p>
           <a:p>
             <a:pPr>
               <a:spcAft>
@@ -19645,6 +19826,8 @@
                 <a:latin typeface="Cascadia Mono"/>
               </a:rPr>
               <a:t>|-- unregister_flw.ps1
+|-- VERSIONING.md
+|-- versioning.py
 |-- .codex/
 |   `-- skills/
 |       |-- full-project-pdf-dossier/
@@ -19672,9 +19855,7 @@
     |-- manage.py
     |-- .agents/
     |   `-- workflows/
-    |       `-- create_new_agent.md
-    |-- .mcps/
-    |   `-- create_new_mcp.md</a:t>
+    |       `-- create_new_agent.md</a:t>
             </a:r>
           </a:p>
         </p:txBody>
@@ -20012,7 +20193,9 @@
                 </a:solidFill>
                 <a:latin typeface="Cascadia Mono"/>
               </a:rPr>
-              <a:t>    |-- agent/
+              <a:t>    |-- .mcps/
+    |   `-- create_new_mcp.md
+    |-- agent/
     |   |-- __init__.py
     |   |-- admin.py
     |   |-- apps.py
@@ -20040,9 +20223,7 @@
     |   |-- mcp_files_search_server.py
     |   |-- mcp_system_client.py
     |   |-- mcp_system_server.py
-    |   |-- models.py
-    |   |-- path_guard.py
-    |   |-- prompt.pmt</a:t>
+    |   |-- models.py</a:t>
             </a:r>
           </a:p>
         </p:txBody>
@@ -20380,7 +20561,9 @@
                 </a:solidFill>
                 <a:latin typeface="Cascadia Mono"/>
               </a:rPr>
-              <a:t>    |   |-- rag_enhancements.py
+              <a:t>    |   |-- path_guard.py
+    |   |-- prompt.pmt
+    |   |-- rag_enhancements.py
     |   |-- routing.py
     |   |-- test_embedding_memory_guard.py
     |   |-- test_flow_contracts.py
@@ -20388,6 +20571,7 @@
     |   |-- tests.py
     |   |-- tools.py
     |   |-- urls.py
+    |   |-- version.py
     |   |-- views.py
     |   |-- web_search_llm.py
     |   |-- acpx/
@@ -20407,9 +20591,6 @@
     |   |   |   `-- config.yaml
     |   |   |-- and/
     |   |   |   |-- and.py
-    |   |   |   `-- config.yaml
-    |   |   |-- apirer/
-    |   |   |   |-- apirer.py
     |   |   |   `-- config.yaml</a:t>
             </a:r>
           </a:p>
@@ -20748,7 +20929,10 @@
                 </a:solidFill>
                 <a:latin typeface="Cascadia Mono"/>
               </a:rPr>
-              <a:t>    |   |   |-- asker/
+              <a:t>    |   |   |-- apirer/
+    |   |   |   |-- apirer.py
+    |   |   |   `-- config.yaml
+    |   |   |-- asker/
     |   |   |   |-- asker.py
     |   |   |   `-- config.yaml
     |   |   |-- barrier/
@@ -20775,9 +20959,6 @@
     |   |   |   |-- config.yaml
     |   |   |   `-- dockerer.py
     |   |   |-- emailer/
-    |   |   |   |-- config.yaml
-    |   |   |   `-- emailer.py
-    |   |   |-- ender/
     |   |   |   |-- config.yaml</a:t>
             </a:r>
           </a:p>
@@ -21116,7 +21297,10 @@
                 </a:solidFill>
                 <a:latin typeface="Cascadia Mono"/>
               </a:rPr>
-              <a:t>    |   |   |   `-- ender.py
+              <a:t>    |   |   |   `-- emailer.py
+    |   |   |-- ender/
+    |   |   |   |-- config.yaml
+    |   |   |   `-- ender.py
     |   |   |-- executer/
     |   |   |   |-- config.yaml
     |   |   |   `-- executer.py
@@ -21143,10 +21327,7 @@
     |   |   |   `-- monitoring-prompt.pmt
     |   |   |-- forker/
     |   |   |   |-- config.yaml
-    |   |   |   `-- forker.py
-    |   |   |-- gateway_relayer/
-    |   |   |   |-- config.yaml
-    |   |   |   |-- gateway_relayer.md</a:t>
+    |   |   |   `-- forker.py</a:t>
             </a:r>
           </a:p>
         </p:txBody>
@@ -21484,7 +21665,10 @@
                 </a:solidFill>
                 <a:latin typeface="Cascadia Mono"/>
               </a:rPr>
-              <a:t>    |   |   |   `-- gateway_relayer.py
+              <a:t>    |   |   |-- gateway_relayer/
+    |   |   |   |-- config.yaml
+    |   |   |   |-- gateway_relayer.md
+    |   |   |   `-- gateway_relayer.py
     |   |   |-- gatewayer/
     |   |   |   |-- config.yaml
     |   |   |   |-- gatewayer.md
@@ -21511,10 +21695,7 @@
     |   |   |-- kuberneter/
     |   |   |   |-- config.yaml
     |   |   |   `-- kuberneter.py
-    |   |   |-- kyber_cipher/
-    |   |   |   |-- config.yaml
-    |   |   |   `-- kyber_cipher.py
-    |   |   |-- kyber_decipher/</a:t>
+    |   |   |-- kyber_cipher/</a:t>
             </a:r>
           </a:p>
         </p:txBody>
@@ -21853,6 +22034,9 @@
                 <a:latin typeface="Cascadia Mono"/>
               </a:rPr>
               <a:t>    |   |   |   |-- config.yaml
+    |   |   |   `-- kyber_cipher.py
+    |   |   |-- kyber_decipher/
+    |   |   |   |-- config.yaml
     |   |   |   `-- kyber_decipher.py
     |   |   |-- kyber_keygen/
     |   |   |   |-- config.yaml
@@ -21879,9 +22063,6 @@
     |   |   |   |-- nodes_example.json
     |   |   |   `-- nodes_example.yaml
     |   |   |-- notifier/
-    |   |   |   |-- config.yaml
-    |   |   |   `-- notifier.py
-    |   |   |-- or/
     |   |   |   |-- config.yaml</a:t>
             </a:r>
           </a:p>
@@ -22220,7 +22401,10 @@
                 </a:solidFill>
                 <a:latin typeface="Cascadia Mono"/>
               </a:rPr>
-              <a:t>    |   |   |   `-- or.py
+              <a:t>    |   |   |   `-- notifier.py
+    |   |   |-- or/
+    |   |   |   |-- config.yaml
+    |   |   |   `-- or.py
     |   |   |-- parametrizer/
     |   |   |   |-- config.yaml
     |   |   |   `-- parametrizer.py
@@ -22247,10 +22431,7 @@
     |   |   |   `-- shoter.py
     |   |   |-- sleeper/
     |   |   |   |-- config.yaml
-    |   |   |   `-- sleeper.py
-    |   |   |-- sqler/
-    |   |   |   |-- config.yaml
-    |   |   |   `-- sqler.py</a:t>
+    |   |   |   `-- sleeper.py</a:t>
             </a:r>
           </a:p>
         </p:txBody>
@@ -22588,7 +22769,10 @@
                 </a:solidFill>
                 <a:latin typeface="Cascadia Mono"/>
               </a:rPr>
-              <a:t>    |   |   |-- ssher/
+              <a:t>    |   |   |-- sqler/
+    |   |   |   |-- config.yaml
+    |   |   |   `-- sqler.py
+    |   |   |-- ssher/
     |   |   |   |-- config.yaml
     |   |   |   `-- ssher.py
     |   |   |-- starter/
@@ -22615,10 +22799,7 @@
     |   |   `-- whatstlamatini/
     |   |       |-- config.yaml
     |   |       `-- whatstlamatini.py
-    |   |-- doc_generation/
-    |   |   |-- complete_project_docs.py
-    |   |   |-- mardown_to_pdf.py
-    |   |   |-- refresh_project_docs.py</a:t>
+    |   |-- doc_generation/</a:t>
             </a:r>
           </a:p>
         </p:txBody>
@@ -22956,7 +23137,10 @@
                 </a:solidFill>
                 <a:latin typeface="Cascadia Mono"/>
               </a:rPr>
-              <a:t>    |   |   `-- test_output.pdf
+              <a:t>    |   |   |-- complete_project_docs.py
+    |   |   |-- mardown_to_pdf.py
+    |   |   |-- refresh_project_docs.py
+    |   |   `-- test_output.pdf
     |   |-- images/
     |   |   |-- mockup.jpg
     |   |   |-- TlamatiniAbout.jpg
@@ -22983,10 +23167,7 @@
     |   |   |-- 0010_add_pythonxer.py
     |   |   |-- 0011_add_asker.py
     |   |   |-- 0012_repopulate_all_agents.py
-    |   |   |-- 0013_add_forker.py
-    |   |   |-- 0014_repopulate_all_agents.py
-    |   |   |-- 0015_add_shoter.py
-    |   |   |-- 0016_repopulate_all_agents.py</a:t>
+    |   |   |-- 0013_add_forker.py</a:t>
             </a:r>
           </a:p>
         </p:txBody>
@@ -24343,6 +24524,28 @@
               <a:rPr sz="1100" b="0" i="0">
                 <a:latin typeface="Calibri"/>
               </a:rPr>
+              <a:t>Version resolution now flows through git tags, a runtime resolver module, generated build artefacts, and an open `/agent/version/` endpoint.</a:t>
+            </a:r>
+            <a:endParaRPr sz="1100" b="0" i="0">
+              <a:latin typeface="Calibri"/>
+            </a:endParaRPr>
+          </a:p>
+          <a:p>
+            <a:pPr>
+              <a:spcAft>
+                <a:spcPts val="600"/>
+              </a:spcAft>
+              <a:defRPr sz="1500">
+                <a:solidFill>
+                  <a:srgbClr val="B4BAAE"/>
+                </a:solidFill>
+                <a:latin typeface="Aptos"/>
+              </a:defRPr>
+            </a:pPr>
+            <a:r>
+              <a:rPr sz="1100" b="0" i="0">
+                <a:latin typeface="Calibri"/>
+              </a:rPr>
               <a:t>When Multi-Turn is enabled, the global planner selects context and tool stages before the executor binds only the relevant tools.</a:t>
             </a:r>
             <a:endParaRPr sz="1100" b="0" i="0">
@@ -24772,7 +24975,10 @@
                 </a:solidFill>
                 <a:latin typeface="Cascadia Mono"/>
               </a:rPr>
-              <a:t>    |   |   |-- 0017_add_ssher.py
+              <a:t>    |   |   |-- 0014_repopulate_all_agents.py
+    |   |   |-- 0015_add_shoter.py
+    |   |   |-- 0016_repopulate_all_agents.py
+    |   |   |-- 0017_add_ssher.py
     |   |   |-- 0018_repopulate_all_agents.py
     |   |   |-- 0019_add_scper.py
     |   |   |-- 0020_repopulate_all_agents.py
@@ -24799,10 +25005,7 @@
     |   |   |-- 0041_add_flowhypervisor.py
     |   |   |-- 0042_add_mouser.py
     |   |   |-- 0043_agentmessage_conversation_user.py
-    |   |   |-- 0044_add_counter.py
-    |   |   |-- 0045_add_file_interpreter.py
-    |   |   |-- 0046_add_image_interpreter.py
-    |   |   |-- 0047_add_gatewayer.py</a:t>
+    |   |   |-- 0044_add_counter.py</a:t>
             </a:r>
           </a:p>
         </p:txBody>
@@ -25140,7 +25343,10 @@
                 </a:solidFill>
                 <a:latin typeface="Cascadia Mono"/>
               </a:rPr>
-              <a:t>    |   |   |-- 0048_add_gateway_relayer.py
+              <a:t>    |   |   |-- 0045_add_file_interpreter.py
+    |   |   |-- 0046_add_image_interpreter.py
+    |   |   |-- 0047_add_gatewayer.py
+    |   |   |-- 0048_add_gateway_relayer.py
     |   |   |-- 0049_add_node_manager.py
     |   |   |-- 0050_add_file_creator.py
     |   |   |-- 0051_add_file_extractor.py
@@ -25167,10 +25373,7 @@
     |   |   |-- 0072_add_acpx_demo_prompts.py
     |   |   |-- 0073_acpx_demo_gemini_uplift.py
     |   |   |-- 0074_simplify_demo_prompts.py
-    |   |   |-- 0075_add_acpx_tool_surface.py
-    |   |   |-- 0076_add_acpxer.py
-    |   |   |-- 0077_add_whatstlamatini.py
-    |   |   |-- 0078_add_chat_agent_keyboarder_tool.py</a:t>
+    |   |   |-- 0075_add_acpx_tool_surface.py</a:t>
             </a:r>
           </a:p>
         </p:txBody>
@@ -25508,7 +25711,10 @@
                 </a:solidFill>
                 <a:latin typeface="Cascadia Mono"/>
               </a:rPr>
-              <a:t>    |   |   |-- 0079_add_chat_agent_mouser_tool.py
+              <a:t>    |   |   |-- 0076_add_acpxer.py
+    |   |   |-- 0077_add_whatstlamatini.py
+    |   |   |-- 0078_add_chat_agent_keyboarder_tool.py
+    |   |   |-- 0079_add_chat_agent_mouser_tool.py
     |   |   |-- 0080_add_chat_agent_sleeper_tool.py
     |   |   |-- 0081_add_window_present_and_run_wait_tools.py
     |   |   |-- 0082_add_chat_agent_j_decompiler_tool.py
@@ -25535,10 +25741,7 @@
     |   |       |-- basic.py
     |   |       |-- history_aware.py
     |   |       `-- unified.py
-    |   |-- services/
-    |   |   |-- __init__.py
-    |   |   |-- agent_contracts.py
-    |   |   |-- agent_paths.py</a:t>
+    |   |-- services/</a:t>
             </a:r>
           </a:p>
         </p:txBody>
@@ -25876,7 +26079,10 @@
                 </a:solidFill>
                 <a:latin typeface="Cascadia Mono"/>
               </a:rPr>
-              <a:t>    |   |   |-- answer_analizer.py
+              <a:t>    |   |   |-- __init__.py
+    |   |   |-- agent_contracts.py
+    |   |   |-- agent_paths.py
+    |   |   |-- answer_analizer.py
     |   |   |-- filesystem.py
     |   |   |-- flow_compiler.py
     |   |   |-- flow_spec.py
@@ -25903,10 +26109,7 @@
     |   |   |   `-- SKILL.md
     |   |   |-- notion/
     |   |   |   `-- SKILL.md
-    |   |   |-- setup_new_acpx_key/
-    |   |   |   `-- SKILL.md
-    |   |   |-- skill_creator/
-    |   |   |   |-- SKILL.md</a:t>
+    |   |   |-- setup_new_acpx_key/</a:t>
             </a:r>
           </a:p>
         </p:txBody>
@@ -26244,7 +26447,10 @@
                 </a:solidFill>
                 <a:latin typeface="Cascadia Mono"/>
               </a:rPr>
-              <a:t>    |   |   |   `-- scripts/
+              <a:t>    |   |   |   `-- SKILL.md
+    |   |   |-- skill_creator/
+    |   |   |   |-- SKILL.md
+    |   |   |   `-- scripts/
     |   |   |       `-- quick_validate.py
     |   |   |-- slack/
     |   |   |   `-- SKILL.md
@@ -26271,10 +26477,7 @@
     |   |   |-- trello/
     |   |   |   `-- SKILL.md
     |   |   `-- weather/
-    |   |       `-- SKILL.md
-    |   |-- static/
-    |   |   `-- agent/
-    |   |       |-- css/</a:t>
+    |   |       `-- SKILL.md</a:t>
             </a:r>
           </a:p>
         </p:txBody>
@@ -26612,7 +26815,10 @@
                 </a:solidFill>
                 <a:latin typeface="Cascadia Mono"/>
               </a:rPr>
-              <a:t>    |   |       |   |-- agent_page.css
+              <a:t>    |   |-- static/
+    |   |   `-- agent/
+    |   |       |-- css/
+    |   |       |   |-- agent_page.css
     |   |       |   |-- agentic_control_panel.css
     |   |       |   |-- login.css
     |   |       |   |-- tools_dialog.css
@@ -26639,10 +26845,7 @@
     |   |       |   |-- agent_page_context.js
     |   |       |   |-- agent_page_dialogs.js
     |   |       |   |-- agent_page_init.js
-    |   |       |   |-- agent_page_layout.js
-    |   |       |   |-- agent_page_state.js
-    |   |       |   |-- agent_page_ui.js
-    |   |       |   |-- agentic_control_panel.js</a:t>
+    |   |       |   |-- agent_page_layout.js</a:t>
             </a:r>
           </a:p>
         </p:txBody>
@@ -26980,7 +27183,10 @@
                 </a:solidFill>
                 <a:latin typeface="Cascadia Mono"/>
               </a:rPr>
-              <a:t>    |   |       |   |-- canvas_item_dialog.js
+              <a:t>    |   |       |   |-- agent_page_state.js
+    |   |       |   |-- agent_page_ui.js
+    |   |       |   |-- agentic_control_panel.js
+    |   |       |   |-- canvas_item_dialog.js
     |   |       |   |-- chat_page_runtime_poller.js
     |   |       |   |-- contextual_menus.js
     |   |       |   |-- shared-runtime-dialogs.js
@@ -27007,10 +27213,7 @@
     |       `-- README.md
     |-- jd-cli/
     |   |-- jd-cli.bat
-    |   `-- jd-cli.jar
-    `-- tlamatini/
-        |-- __init__.py
-        |-- asgi.py</a:t>
+    |   `-- jd-cli.jar</a:t>
             </a:r>
           </a:p>
         </p:txBody>
@@ -27348,7 +27551,10 @@
                 </a:solidFill>
                 <a:latin typeface="Cascadia Mono"/>
               </a:rPr>
-              <a:t>        |-- context_processors.py
+              <a:t>    `-- tlamatini/
+        |-- __init__.py
+        |-- asgi.py
+        |-- context_processors.py
         |-- logging_filters.py
         |-- middleware.py
         |-- settings.py

--- a/Tlamatini_eXtended_Artificial_Intelligence_Humanly_Tempered.pptx
+++ b/Tlamatini_eXtended_Artificial_Intelligence_Humanly_Tempered.pptx
@@ -53,7 +53,6 @@
     <p:sldId id="301" r:id="rId52"/>
     <p:sldId id="302" r:id="rId53"/>
     <p:sldId id="303" r:id="rId54"/>
-    <p:sldId id="304" r:id="rId55"/>
   </p:sldIdLst>
   <p:sldSz cx="12191695" cy="6858000" type="screen4x3"/>
   <p:notesSz cx="6858000" cy="9144000"/>
@@ -3831,7 +3830,7 @@
                 </a:solidFill>
                 <a:latin typeface="Aptos"/>
               </a:rPr>
-              <a:t>94,376</a:t>
+              <a:t>94,350</a:t>
             </a:r>
           </a:p>
         </p:txBody>
@@ -3866,7 +3865,7 @@
                 </a:solidFill>
                 <a:latin typeface="Aptos"/>
               </a:rPr>
-              <a:t>Generated May 15, 2026 09:44 PM UTC-0600 at HEAD 0adcd1f</a:t>
+              <a:t>Generated May 16, 2026 08:48 AM UTC-0600 at HEAD c0a1bf4</a:t>
             </a:r>
           </a:p>
         </p:txBody>
@@ -8180,7 +8179,7 @@
                 </a:solidFill>
                 <a:latin typeface="Cascadia Mono"/>
               </a:rPr>
-              <a:t>Resolved current version: 1.1.1.dev0 | build: 1.1.1.dev0+g0adcd1f.dirty</a:t>
+              <a:t>Resolved current version: 1.1.1 | build: 1.1.1</a:t>
             </a:r>
           </a:p>
         </p:txBody>
@@ -16848,7 +16847,7 @@
               <a:rPr sz="1500" b="0" i="0">
                 <a:latin typeface="Calibri"/>
               </a:rPr>
-              <a:t>0adcd1f - Patched requirements.txt due to new De-Compresser agent, by angelahack1</a:t>
+              <a:t>c0a1bf4 - Updating documentation, by angelahack1</a:t>
             </a:r>
             <a:endParaRPr sz="1500" b="0" i="0">
               <a:latin typeface="Calibri"/>
@@ -16870,7 +16869,7 @@
               <a:rPr sz="1500" b="0" i="0">
                 <a:latin typeface="Calibri"/>
               </a:rPr>
-              <a:t>Resolved version: 1.1.1.dev0 (git)</a:t>
+              <a:t>Resolved version: 1.1.1 (git)</a:t>
             </a:r>
             <a:endParaRPr sz="1500" b="0" i="0">
               <a:latin typeface="Calibri"/>
@@ -16892,7 +16891,7 @@
               <a:rPr sz="1500" b="0" i="0">
                 <a:latin typeface="Calibri"/>
               </a:rPr>
-              <a:t>Generated on May 15, 2026 09:44 PM UTC-0600</a:t>
+              <a:t>Generated on May 16, 2026 08:48 AM UTC-0600</a:t>
             </a:r>
             <a:endParaRPr sz="1500" b="0" i="0">
               <a:latin typeface="Calibri"/>
@@ -17335,7 +17334,7 @@
                 </a:solidFill>
                 <a:latin typeface="Aptos"/>
               </a:rPr>
-              <a:t>94,376</a:t>
+              <a:t>94,350</a:t>
             </a:r>
           </a:p>
         </p:txBody>
@@ -17450,7 +17449,7 @@
                 </a:solidFill>
                 <a:latin typeface="Aptos"/>
               </a:rPr>
-              <a:t>128,242</a:t>
+              <a:t>128,213</a:t>
             </a:r>
           </a:p>
         </p:txBody>
@@ -17601,9 +17600,9 @@
                 <a:latin typeface="Cascadia Mono"/>
               </a:rPr>
               <a:t>LANGUAGE                 FILES   EFFECTIVE      TOTAL   SHARE
-Python                   256      63,015     87,746  66.8%
+Python                   256      62,993     87,721  66.8%
 JavaScript                27      12,375     15,612  13.1%
-Markdown                  50      11,169     14,327  11.8%
+Markdown                  50      11,165     14,323  11.8%
 CSS                        5       3,043      3,831   3.2%
 YAML                      65       1,347      2,665   1.4%
 Other text                 3         789        967   0.8%
@@ -18434,51 +18433,7 @@
               <a:rPr sz="1500" b="0" i="0">
                 <a:latin typeface="Calibri"/>
               </a:rPr>
-              <a:t>Today’s headline change is the new De-Compresser agent: deterministic archive compression/decompression, Multi-Turn exposure, ACP canvas wiring, and a requirements patch that adds the `py7zr` fallback path.</a:t>
-            </a:r>
-            <a:endParaRPr sz="1500" b="0" i="0">
-              <a:latin typeface="Calibri"/>
-            </a:endParaRPr>
-          </a:p>
-          <a:p>
-            <a:pPr>
-              <a:spcAft>
-                <a:spcPts val="600"/>
-              </a:spcAft>
-              <a:defRPr sz="1500">
-                <a:solidFill>
-                  <a:srgbClr val="B4BAAE"/>
-                </a:solidFill>
-                <a:latin typeface="Aptos"/>
-              </a:defRPr>
-            </a:pPr>
-            <a:r>
-              <a:rPr sz="1500" b="0" i="0">
-                <a:latin typeface="Calibri"/>
-              </a:rPr>
-              <a:t>Today’s headline change is the new versioning system: SemVer policy, git-tag sourcing, runtime version surfaces, and build-time embedding across the Windows artefacts.</a:t>
-            </a:r>
-            <a:endParaRPr sz="1500" b="0" i="0">
-              <a:latin typeface="Calibri"/>
-            </a:endParaRPr>
-          </a:p>
-          <a:p>
-            <a:pPr>
-              <a:spcAft>
-                <a:spcPts val="600"/>
-              </a:spcAft>
-              <a:defRPr sz="1500">
-                <a:solidFill>
-                  <a:srgbClr val="B4BAAE"/>
-                </a:solidFill>
-                <a:latin typeface="Aptos"/>
-              </a:defRPr>
-            </a:pPr>
-            <a:r>
-              <a:rPr sz="1500" b="0" i="0">
-                <a:latin typeface="Calibri"/>
-              </a:rPr>
-              <a:t>Multi-Turn behavior kept evolving across the period through quota tuning, execution-table persistence, autonomous-action improvements, and broader tool enablement.</a:t>
+              <a:t>Git history today shows focused maintenance across the operator surface, release mechanics, and runtime behavior.</a:t>
             </a:r>
             <a:endParaRPr sz="1500" b="0" i="0">
               <a:latin typeface="Calibri"/>
@@ -18495,1504 +18450,6 @@
 </file>
 
 <file path=ppt/slides/slide29.xml><?xml version="1.0" encoding="utf-8"?>
-<p:sld xmlns:a="http://schemas.openxmlformats.org/drawingml/2006/main" xmlns:p="http://schemas.openxmlformats.org/presentationml/2006/main" xmlns:r="http://schemas.openxmlformats.org/officeDocument/2006/relationships">
-  <p:cSld>
-    <p:spTree>
-      <p:nvGrpSpPr>
-        <p:cNvPr id="1" name=""/>
-        <p:cNvGrpSpPr/>
-        <p:nvPr/>
-      </p:nvGrpSpPr>
-      <p:grpSpPr/>
-      <p:sp>
-        <p:nvSpPr>
-          <p:cNvPr id="2" name="Rectangle 1"/>
-          <p:cNvSpPr/>
-          <p:nvPr/>
-        </p:nvSpPr>
-        <p:spPr>
-          <a:xfrm>
-            <a:off x="0" y="0"/>
-            <a:ext cx="12191695" cy="6858000"/>
-          </a:xfrm>
-          <a:prstGeom prst="rect">
-            <a:avLst/>
-          </a:prstGeom>
-          <a:solidFill>
-            <a:srgbClr val="080D0D"/>
-          </a:solidFill>
-          <a:ln>
-            <a:noFill/>
-          </a:ln>
-        </p:spPr>
-        <p:style>
-          <a:lnRef idx="1">
-            <a:schemeClr val="accent1"/>
-          </a:lnRef>
-          <a:fillRef idx="3">
-            <a:schemeClr val="accent1"/>
-          </a:fillRef>
-          <a:effectRef idx="2">
-            <a:schemeClr val="accent1"/>
-          </a:effectRef>
-          <a:fontRef idx="minor">
-            <a:schemeClr val="lt1"/>
-          </a:fontRef>
-        </p:style>
-        <p:txBody>
-          <a:bodyPr rtlCol="0" anchor="ctr"/>
-          <a:lstStyle/>
-          <a:p>
-            <a:pPr algn="ctr"/>
-          </a:p>
-        </p:txBody>
-      </p:sp>
-      <p:sp>
-        <p:nvSpPr>
-          <p:cNvPr id="3" name="Rectangle 2"/>
-          <p:cNvSpPr/>
-          <p:nvPr/>
-        </p:nvSpPr>
-        <p:spPr>
-          <a:xfrm>
-            <a:off x="320040" y="384048"/>
-            <a:ext cx="36576" cy="6080760"/>
-          </a:xfrm>
-          <a:prstGeom prst="rect">
-            <a:avLst/>
-          </a:prstGeom>
-          <a:solidFill>
-            <a:srgbClr val="C48052"/>
-          </a:solidFill>
-          <a:ln>
-            <a:noFill/>
-          </a:ln>
-        </p:spPr>
-        <p:style>
-          <a:lnRef idx="1">
-            <a:schemeClr val="accent1"/>
-          </a:lnRef>
-          <a:fillRef idx="3">
-            <a:schemeClr val="accent1"/>
-          </a:fillRef>
-          <a:effectRef idx="2">
-            <a:schemeClr val="accent1"/>
-          </a:effectRef>
-          <a:fontRef idx="minor">
-            <a:schemeClr val="lt1"/>
-          </a:fontRef>
-        </p:style>
-        <p:txBody>
-          <a:bodyPr rtlCol="0" anchor="ctr"/>
-          <a:lstStyle/>
-          <a:p>
-            <a:pPr algn="ctr"/>
-          </a:p>
-        </p:txBody>
-      </p:sp>
-      <p:sp>
-        <p:nvSpPr>
-          <p:cNvPr id="4" name="Rectangle 3"/>
-          <p:cNvSpPr/>
-          <p:nvPr/>
-        </p:nvSpPr>
-        <p:spPr>
-          <a:xfrm>
-            <a:off x="11716207" y="384048"/>
-            <a:ext cx="36576" cy="6080760"/>
-          </a:xfrm>
-          <a:prstGeom prst="rect">
-            <a:avLst/>
-          </a:prstGeom>
-          <a:solidFill>
-            <a:srgbClr val="C48052"/>
-          </a:solidFill>
-          <a:ln>
-            <a:noFill/>
-          </a:ln>
-        </p:spPr>
-        <p:style>
-          <a:lnRef idx="1">
-            <a:schemeClr val="accent1"/>
-          </a:lnRef>
-          <a:fillRef idx="3">
-            <a:schemeClr val="accent1"/>
-          </a:fillRef>
-          <a:effectRef idx="2">
-            <a:schemeClr val="accent1"/>
-          </a:effectRef>
-          <a:fontRef idx="minor">
-            <a:schemeClr val="lt1"/>
-          </a:fontRef>
-        </p:style>
-        <p:txBody>
-          <a:bodyPr rtlCol="0" anchor="ctr"/>
-          <a:lstStyle/>
-          <a:p>
-            <a:pPr algn="ctr"/>
-          </a:p>
-        </p:txBody>
-      </p:sp>
-      <p:sp>
-        <p:nvSpPr>
-          <p:cNvPr id="5" name="Rectangle 4"/>
-          <p:cNvSpPr/>
-          <p:nvPr/>
-        </p:nvSpPr>
-        <p:spPr>
-          <a:xfrm>
-            <a:off x="502920" y="384048"/>
-            <a:ext cx="11155680" cy="27432"/>
-          </a:xfrm>
-          <a:prstGeom prst="rect">
-            <a:avLst/>
-          </a:prstGeom>
-          <a:solidFill>
-            <a:srgbClr val="C48052"/>
-          </a:solidFill>
-          <a:ln>
-            <a:noFill/>
-          </a:ln>
-        </p:spPr>
-        <p:style>
-          <a:lnRef idx="1">
-            <a:schemeClr val="accent1"/>
-          </a:lnRef>
-          <a:fillRef idx="3">
-            <a:schemeClr val="accent1"/>
-          </a:fillRef>
-          <a:effectRef idx="2">
-            <a:schemeClr val="accent1"/>
-          </a:effectRef>
-          <a:fontRef idx="minor">
-            <a:schemeClr val="lt1"/>
-          </a:fontRef>
-        </p:style>
-        <p:txBody>
-          <a:bodyPr rtlCol="0" anchor="ctr"/>
-          <a:lstStyle/>
-          <a:p>
-            <a:pPr algn="ctr"/>
-          </a:p>
-        </p:txBody>
-      </p:sp>
-      <p:sp>
-        <p:nvSpPr>
-          <p:cNvPr id="6" name="Rectangle 5"/>
-          <p:cNvSpPr/>
-          <p:nvPr/>
-        </p:nvSpPr>
-        <p:spPr>
-          <a:xfrm>
-            <a:off x="502920" y="6437376"/>
-            <a:ext cx="11155680" cy="27432"/>
-          </a:xfrm>
-          <a:prstGeom prst="rect">
-            <a:avLst/>
-          </a:prstGeom>
-          <a:solidFill>
-            <a:srgbClr val="C48052"/>
-          </a:solidFill>
-          <a:ln>
-            <a:noFill/>
-          </a:ln>
-        </p:spPr>
-        <p:style>
-          <a:lnRef idx="1">
-            <a:schemeClr val="accent1"/>
-          </a:lnRef>
-          <a:fillRef idx="3">
-            <a:schemeClr val="accent1"/>
-          </a:fillRef>
-          <a:effectRef idx="2">
-            <a:schemeClr val="accent1"/>
-          </a:effectRef>
-          <a:fontRef idx="minor">
-            <a:schemeClr val="lt1"/>
-          </a:fontRef>
-        </p:style>
-        <p:txBody>
-          <a:bodyPr rtlCol="0" anchor="ctr"/>
-          <a:lstStyle/>
-          <a:p>
-            <a:pPr algn="ctr"/>
-          </a:p>
-        </p:txBody>
-      </p:sp>
-      <p:sp>
-        <p:nvSpPr>
-          <p:cNvPr id="7" name="TextBox 6"/>
-          <p:cNvSpPr txBox="1"/>
-          <p:nvPr/>
-        </p:nvSpPr>
-        <p:spPr>
-          <a:xfrm>
-            <a:off x="713232" y="548640"/>
-            <a:ext cx="10698480" cy="301752"/>
-          </a:xfrm>
-          <a:prstGeom prst="rect">
-            <a:avLst/>
-          </a:prstGeom>
-          <a:noFill/>
-        </p:spPr>
-        <p:txBody>
-          <a:bodyPr wrap="square" anchor="t">
-            <a:spAutoFit/>
-          </a:bodyPr>
-          <a:lstStyle/>
-          <a:p>
-            <a:pPr algn="l"/>
-            <a:r>
-              <a:rPr sz="1000" b="1">
-                <a:solidFill>
-                  <a:srgbClr val="C48052"/>
-                </a:solidFill>
-                <a:latin typeface="Aptos"/>
-              </a:rPr>
-              <a:t>ALL COMMITS FROM TODAY ACCORDING TO GIT</a:t>
-            </a:r>
-          </a:p>
-        </p:txBody>
-      </p:sp>
-      <p:sp>
-        <p:nvSpPr>
-          <p:cNvPr id="8" name="TextBox 7"/>
-          <p:cNvSpPr txBox="1"/>
-          <p:nvPr/>
-        </p:nvSpPr>
-        <p:spPr>
-          <a:xfrm>
-            <a:off x="694944" y="850392"/>
-            <a:ext cx="10881360" cy="566928"/>
-          </a:xfrm>
-          <a:prstGeom prst="rect">
-            <a:avLst/>
-          </a:prstGeom>
-          <a:noFill/>
-        </p:spPr>
-        <p:txBody>
-          <a:bodyPr wrap="square" anchor="t">
-            <a:spAutoFit/>
-          </a:bodyPr>
-          <a:lstStyle/>
-          <a:p>
-            <a:pPr algn="l"/>
-            <a:r>
-              <a:rPr sz="2700" b="0">
-                <a:solidFill>
-                  <a:srgbClr val="E8E8DE"/>
-                </a:solidFill>
-                <a:latin typeface="Aptos Display"/>
-              </a:rPr>
-              <a:t>Today's Commit Appendix 1/1</a:t>
-            </a:r>
-          </a:p>
-        </p:txBody>
-      </p:sp>
-      <p:sp>
-        <p:nvSpPr>
-          <p:cNvPr id="9" name="Rounded Rectangle 8"/>
-          <p:cNvSpPr/>
-          <p:nvPr/>
-        </p:nvSpPr>
-        <p:spPr>
-          <a:xfrm>
-            <a:off x="749808" y="1536192"/>
-            <a:ext cx="10561320" cy="4443984"/>
-          </a:xfrm>
-          <a:prstGeom prst="roundRect">
-            <a:avLst/>
-          </a:prstGeom>
-          <a:solidFill>
-            <a:srgbClr val="161A19"/>
-          </a:solidFill>
-          <a:ln>
-            <a:solidFill>
-              <a:srgbClr val="595F56"/>
-            </a:solidFill>
-          </a:ln>
-        </p:spPr>
-        <p:style>
-          <a:lnRef idx="1">
-            <a:schemeClr val="accent1"/>
-          </a:lnRef>
-          <a:fillRef idx="3">
-            <a:schemeClr val="accent1"/>
-          </a:fillRef>
-          <a:effectRef idx="2">
-            <a:schemeClr val="accent1"/>
-          </a:effectRef>
-          <a:fontRef idx="minor">
-            <a:schemeClr val="lt1"/>
-          </a:fontRef>
-        </p:style>
-        <p:txBody>
-          <a:bodyPr rtlCol="0" anchor="ctr"/>
-          <a:lstStyle/>
-          <a:p>
-            <a:pPr algn="ctr"/>
-          </a:p>
-        </p:txBody>
-      </p:sp>
-      <p:sp>
-        <p:nvSpPr>
-          <p:cNvPr id="10" name="Rectangle 9"/>
-          <p:cNvSpPr/>
-          <p:nvPr/>
-        </p:nvSpPr>
-        <p:spPr>
-          <a:xfrm>
-            <a:off x="749808" y="1536192"/>
-            <a:ext cx="10561320" cy="109728"/>
-          </a:xfrm>
-          <a:prstGeom prst="rect">
-            <a:avLst/>
-          </a:prstGeom>
-          <a:solidFill>
-            <a:srgbClr val="C48052"/>
-          </a:solidFill>
-          <a:ln>
-            <a:noFill/>
-          </a:ln>
-        </p:spPr>
-        <p:style>
-          <a:lnRef idx="1">
-            <a:schemeClr val="accent1"/>
-          </a:lnRef>
-          <a:fillRef idx="3">
-            <a:schemeClr val="accent1"/>
-          </a:fillRef>
-          <a:effectRef idx="2">
-            <a:schemeClr val="accent1"/>
-          </a:effectRef>
-          <a:fontRef idx="minor">
-            <a:schemeClr val="lt1"/>
-          </a:fontRef>
-        </p:style>
-        <p:txBody>
-          <a:bodyPr rtlCol="0" anchor="ctr"/>
-          <a:lstStyle/>
-          <a:p>
-            <a:pPr algn="ctr"/>
-          </a:p>
-        </p:txBody>
-      </p:sp>
-      <p:sp>
-        <p:nvSpPr>
-          <p:cNvPr id="11" name="TextBox 10"/>
-          <p:cNvSpPr txBox="1"/>
-          <p:nvPr/>
-        </p:nvSpPr>
-        <p:spPr>
-          <a:xfrm>
-            <a:off x="950976" y="1737360"/>
-            <a:ext cx="10158984" cy="310896"/>
-          </a:xfrm>
-          <a:prstGeom prst="rect">
-            <a:avLst/>
-          </a:prstGeom>
-          <a:noFill/>
-        </p:spPr>
-        <p:txBody>
-          <a:bodyPr wrap="square" anchor="t">
-            <a:spAutoFit/>
-          </a:bodyPr>
-          <a:lstStyle/>
-          <a:p>
-            <a:pPr algn="l"/>
-            <a:r>
-              <a:rPr sz="1400" b="1">
-                <a:solidFill>
-                  <a:srgbClr val="C48052"/>
-                </a:solidFill>
-                <a:latin typeface="Aptos"/>
-              </a:rPr>
-              <a:t>Commit timeline</a:t>
-            </a:r>
-          </a:p>
-        </p:txBody>
-      </p:sp>
-      <p:sp>
-        <p:nvSpPr>
-          <p:cNvPr id="12" name="TextBox 11"/>
-          <p:cNvSpPr txBox="1"/>
-          <p:nvPr/>
-        </p:nvSpPr>
-        <p:spPr>
-          <a:xfrm>
-            <a:off x="950976" y="2194560"/>
-            <a:ext cx="10158984" cy="3639312"/>
-          </a:xfrm>
-          <a:prstGeom prst="rect">
-            <a:avLst/>
-          </a:prstGeom>
-          <a:noFill/>
-        </p:spPr>
-        <p:txBody>
-          <a:bodyPr wrap="square" anchor="t" lIns="38100" rIns="38100" tIns="25400" bIns="25400">
-            <a:noAutofit/>
-          </a:bodyPr>
-          <a:lstStyle/>
-          <a:p>
-            <a:pPr>
-              <a:spcAft>
-                <a:spcPts val="600"/>
-              </a:spcAft>
-              <a:defRPr sz="1200">
-                <a:solidFill>
-                  <a:srgbClr val="B4BAAE"/>
-                </a:solidFill>
-                <a:latin typeface="Aptos"/>
-              </a:defRPr>
-            </a:pPr>
-            <a:r>
-              <a:rPr sz="1200" b="0" i="0">
-                <a:latin typeface="Calibri"/>
-              </a:rPr>
-              <a:t>2026-05-15 | 0adcd1f | Patched requirements.txt due to new De-Compresser agent, by angelahack1</a:t>
-            </a:r>
-            <a:endParaRPr sz="1200" b="0" i="0">
-              <a:latin typeface="Calibri"/>
-            </a:endParaRPr>
-          </a:p>
-          <a:p>
-            <a:pPr>
-              <a:spcAft>
-                <a:spcPts val="600"/>
-              </a:spcAft>
-              <a:defRPr sz="1200">
-                <a:solidFill>
-                  <a:srgbClr val="B4BAAE"/>
-                </a:solidFill>
-                <a:latin typeface="Aptos"/>
-              </a:defRPr>
-            </a:pPr>
-            <a:r>
-              <a:rPr sz="1200" b="0" i="0">
-                <a:latin typeface="Calibri"/>
-              </a:rPr>
-              <a:t>2026-05-15 | 2002314 | De-Compresser agent and added to multi-turn, by angelahack1</a:t>
-            </a:r>
-            <a:endParaRPr sz="1200" b="0" i="0">
-              <a:latin typeface="Calibri"/>
-            </a:endParaRPr>
-          </a:p>
-          <a:p>
-            <a:pPr>
-              <a:spcAft>
-                <a:spcPts val="600"/>
-              </a:spcAft>
-              <a:defRPr sz="1200">
-                <a:solidFill>
-                  <a:srgbClr val="B4BAAE"/>
-                </a:solidFill>
-                <a:latin typeface="Aptos"/>
-              </a:defRPr>
-            </a:pPr>
-            <a:r>
-              <a:rPr sz="1200" b="0" i="0">
-                <a:latin typeface="Calibri"/>
-              </a:rPr>
-              <a:t>2026-05-15 | d2da4a4 | Updating and linting, by Tlamatini's-AutoBot.</a:t>
-            </a:r>
-            <a:endParaRPr sz="1200" b="0" i="0">
-              <a:latin typeface="Calibri"/>
-            </a:endParaRPr>
-          </a:p>
-          <a:p>
-            <a:pPr>
-              <a:spcAft>
-                <a:spcPts val="600"/>
-              </a:spcAft>
-              <a:defRPr sz="1200">
-                <a:solidFill>
-                  <a:srgbClr val="B4BAAE"/>
-                </a:solidFill>
-                <a:latin typeface="Aptos"/>
-              </a:defRPr>
-            </a:pPr>
-            <a:r>
-              <a:rPr sz="1200" b="0" i="0">
-                <a:latin typeface="Calibri"/>
-              </a:rPr>
-              <a:t>2026-05-15 | 382e1a1 | Implementing the professional way every worldwide system is gnerated, by angelahack1</a:t>
-            </a:r>
-            <a:endParaRPr sz="1200" b="0" i="0">
-              <a:latin typeface="Calibri"/>
-            </a:endParaRPr>
-          </a:p>
-        </p:txBody>
-      </p:sp>
-    </p:spTree>
-  </p:cSld>
-  <p:clrMapOvr>
-    <a:masterClrMapping/>
-  </p:clrMapOvr>
-</p:sld>
-</file>
-
-<file path=ppt/slides/slide3.xml><?xml version="1.0" encoding="utf-8"?>
-<p:sld xmlns:a="http://schemas.openxmlformats.org/drawingml/2006/main" xmlns:p="http://schemas.openxmlformats.org/presentationml/2006/main" xmlns:r="http://schemas.openxmlformats.org/officeDocument/2006/relationships">
-  <p:cSld>
-    <p:spTree>
-      <p:nvGrpSpPr>
-        <p:cNvPr id="1" name=""/>
-        <p:cNvGrpSpPr/>
-        <p:nvPr/>
-      </p:nvGrpSpPr>
-      <p:grpSpPr/>
-      <p:sp>
-        <p:nvSpPr>
-          <p:cNvPr id="2" name="Rectangle 1"/>
-          <p:cNvSpPr/>
-          <p:nvPr/>
-        </p:nvSpPr>
-        <p:spPr>
-          <a:xfrm>
-            <a:off x="0" y="0"/>
-            <a:ext cx="12191695" cy="6858000"/>
-          </a:xfrm>
-          <a:prstGeom prst="rect">
-            <a:avLst/>
-          </a:prstGeom>
-          <a:solidFill>
-            <a:srgbClr val="080D0D"/>
-          </a:solidFill>
-          <a:ln>
-            <a:noFill/>
-          </a:ln>
-        </p:spPr>
-        <p:style>
-          <a:lnRef idx="1">
-            <a:schemeClr val="accent1"/>
-          </a:lnRef>
-          <a:fillRef idx="3">
-            <a:schemeClr val="accent1"/>
-          </a:fillRef>
-          <a:effectRef idx="2">
-            <a:schemeClr val="accent1"/>
-          </a:effectRef>
-          <a:fontRef idx="minor">
-            <a:schemeClr val="lt1"/>
-          </a:fontRef>
-        </p:style>
-        <p:txBody>
-          <a:bodyPr rtlCol="0" anchor="ctr"/>
-          <a:lstStyle/>
-          <a:p>
-            <a:pPr algn="ctr"/>
-          </a:p>
-        </p:txBody>
-      </p:sp>
-      <p:sp>
-        <p:nvSpPr>
-          <p:cNvPr id="3" name="Rectangle 2"/>
-          <p:cNvSpPr/>
-          <p:nvPr/>
-        </p:nvSpPr>
-        <p:spPr>
-          <a:xfrm>
-            <a:off x="320040" y="384048"/>
-            <a:ext cx="36576" cy="6080760"/>
-          </a:xfrm>
-          <a:prstGeom prst="rect">
-            <a:avLst/>
-          </a:prstGeom>
-          <a:solidFill>
-            <a:srgbClr val="C48052"/>
-          </a:solidFill>
-          <a:ln>
-            <a:noFill/>
-          </a:ln>
-        </p:spPr>
-        <p:style>
-          <a:lnRef idx="1">
-            <a:schemeClr val="accent1"/>
-          </a:lnRef>
-          <a:fillRef idx="3">
-            <a:schemeClr val="accent1"/>
-          </a:fillRef>
-          <a:effectRef idx="2">
-            <a:schemeClr val="accent1"/>
-          </a:effectRef>
-          <a:fontRef idx="minor">
-            <a:schemeClr val="lt1"/>
-          </a:fontRef>
-        </p:style>
-        <p:txBody>
-          <a:bodyPr rtlCol="0" anchor="ctr"/>
-          <a:lstStyle/>
-          <a:p>
-            <a:pPr algn="ctr"/>
-          </a:p>
-        </p:txBody>
-      </p:sp>
-      <p:sp>
-        <p:nvSpPr>
-          <p:cNvPr id="4" name="Rectangle 3"/>
-          <p:cNvSpPr/>
-          <p:nvPr/>
-        </p:nvSpPr>
-        <p:spPr>
-          <a:xfrm>
-            <a:off x="11716207" y="384048"/>
-            <a:ext cx="36576" cy="6080760"/>
-          </a:xfrm>
-          <a:prstGeom prst="rect">
-            <a:avLst/>
-          </a:prstGeom>
-          <a:solidFill>
-            <a:srgbClr val="C48052"/>
-          </a:solidFill>
-          <a:ln>
-            <a:noFill/>
-          </a:ln>
-        </p:spPr>
-        <p:style>
-          <a:lnRef idx="1">
-            <a:schemeClr val="accent1"/>
-          </a:lnRef>
-          <a:fillRef idx="3">
-            <a:schemeClr val="accent1"/>
-          </a:fillRef>
-          <a:effectRef idx="2">
-            <a:schemeClr val="accent1"/>
-          </a:effectRef>
-          <a:fontRef idx="minor">
-            <a:schemeClr val="lt1"/>
-          </a:fontRef>
-        </p:style>
-        <p:txBody>
-          <a:bodyPr rtlCol="0" anchor="ctr"/>
-          <a:lstStyle/>
-          <a:p>
-            <a:pPr algn="ctr"/>
-          </a:p>
-        </p:txBody>
-      </p:sp>
-      <p:sp>
-        <p:nvSpPr>
-          <p:cNvPr id="5" name="Rectangle 4"/>
-          <p:cNvSpPr/>
-          <p:nvPr/>
-        </p:nvSpPr>
-        <p:spPr>
-          <a:xfrm>
-            <a:off x="502920" y="384048"/>
-            <a:ext cx="11155680" cy="27432"/>
-          </a:xfrm>
-          <a:prstGeom prst="rect">
-            <a:avLst/>
-          </a:prstGeom>
-          <a:solidFill>
-            <a:srgbClr val="C48052"/>
-          </a:solidFill>
-          <a:ln>
-            <a:noFill/>
-          </a:ln>
-        </p:spPr>
-        <p:style>
-          <a:lnRef idx="1">
-            <a:schemeClr val="accent1"/>
-          </a:lnRef>
-          <a:fillRef idx="3">
-            <a:schemeClr val="accent1"/>
-          </a:fillRef>
-          <a:effectRef idx="2">
-            <a:schemeClr val="accent1"/>
-          </a:effectRef>
-          <a:fontRef idx="minor">
-            <a:schemeClr val="lt1"/>
-          </a:fontRef>
-        </p:style>
-        <p:txBody>
-          <a:bodyPr rtlCol="0" anchor="ctr"/>
-          <a:lstStyle/>
-          <a:p>
-            <a:pPr algn="ctr"/>
-          </a:p>
-        </p:txBody>
-      </p:sp>
-      <p:sp>
-        <p:nvSpPr>
-          <p:cNvPr id="6" name="Rectangle 5"/>
-          <p:cNvSpPr/>
-          <p:nvPr/>
-        </p:nvSpPr>
-        <p:spPr>
-          <a:xfrm>
-            <a:off x="502920" y="6437376"/>
-            <a:ext cx="11155680" cy="27432"/>
-          </a:xfrm>
-          <a:prstGeom prst="rect">
-            <a:avLst/>
-          </a:prstGeom>
-          <a:solidFill>
-            <a:srgbClr val="C48052"/>
-          </a:solidFill>
-          <a:ln>
-            <a:noFill/>
-          </a:ln>
-        </p:spPr>
-        <p:style>
-          <a:lnRef idx="1">
-            <a:schemeClr val="accent1"/>
-          </a:lnRef>
-          <a:fillRef idx="3">
-            <a:schemeClr val="accent1"/>
-          </a:fillRef>
-          <a:effectRef idx="2">
-            <a:schemeClr val="accent1"/>
-          </a:effectRef>
-          <a:fontRef idx="minor">
-            <a:schemeClr val="lt1"/>
-          </a:fontRef>
-        </p:style>
-        <p:txBody>
-          <a:bodyPr rtlCol="0" anchor="ctr"/>
-          <a:lstStyle/>
-          <a:p>
-            <a:pPr algn="ctr"/>
-          </a:p>
-        </p:txBody>
-      </p:sp>
-      <p:sp>
-        <p:nvSpPr>
-          <p:cNvPr id="7" name="TextBox 6"/>
-          <p:cNvSpPr txBox="1"/>
-          <p:nvPr/>
-        </p:nvSpPr>
-        <p:spPr>
-          <a:xfrm>
-            <a:off x="713232" y="548640"/>
-            <a:ext cx="10698480" cy="301752"/>
-          </a:xfrm>
-          <a:prstGeom prst="rect">
-            <a:avLst/>
-          </a:prstGeom>
-          <a:noFill/>
-        </p:spPr>
-        <p:txBody>
-          <a:bodyPr wrap="square" anchor="t">
-            <a:spAutoFit/>
-          </a:bodyPr>
-          <a:lstStyle/>
-          <a:p>
-            <a:pPr algn="l"/>
-            <a:r>
-              <a:rPr sz="1000" b="1">
-                <a:solidFill>
-                  <a:srgbClr val="C48052"/>
-                </a:solidFill>
-                <a:latin typeface="Aptos"/>
-              </a:rPr>
-              <a:t>CAPABILITY MAP</a:t>
-            </a:r>
-          </a:p>
-        </p:txBody>
-      </p:sp>
-      <p:sp>
-        <p:nvSpPr>
-          <p:cNvPr id="8" name="TextBox 7"/>
-          <p:cNvSpPr txBox="1"/>
-          <p:nvPr/>
-        </p:nvSpPr>
-        <p:spPr>
-          <a:xfrm>
-            <a:off x="694944" y="850392"/>
-            <a:ext cx="10881360" cy="566928"/>
-          </a:xfrm>
-          <a:prstGeom prst="rect">
-            <a:avLst/>
-          </a:prstGeom>
-          <a:noFill/>
-        </p:spPr>
-        <p:txBody>
-          <a:bodyPr wrap="square" anchor="t">
-            <a:spAutoFit/>
-          </a:bodyPr>
-          <a:lstStyle/>
-          <a:p>
-            <a:pPr algn="l"/>
-            <a:r>
-              <a:rPr sz="2700" b="0">
-                <a:solidFill>
-                  <a:srgbClr val="E8E8DE"/>
-                </a:solidFill>
-                <a:latin typeface="Aptos Display"/>
-              </a:rPr>
-              <a:t>What The System Does</a:t>
-            </a:r>
-          </a:p>
-        </p:txBody>
-      </p:sp>
-      <p:sp>
-        <p:nvSpPr>
-          <p:cNvPr id="9" name="Rounded Rectangle 8"/>
-          <p:cNvSpPr/>
-          <p:nvPr/>
-        </p:nvSpPr>
-        <p:spPr>
-          <a:xfrm>
-            <a:off x="658368" y="1426464"/>
-            <a:ext cx="3520440" cy="4526280"/>
-          </a:xfrm>
-          <a:prstGeom prst="roundRect">
-            <a:avLst/>
-          </a:prstGeom>
-          <a:solidFill>
-            <a:srgbClr val="161A19"/>
-          </a:solidFill>
-          <a:ln>
-            <a:solidFill>
-              <a:srgbClr val="595F56"/>
-            </a:solidFill>
-          </a:ln>
-        </p:spPr>
-        <p:style>
-          <a:lnRef idx="1">
-            <a:schemeClr val="accent1"/>
-          </a:lnRef>
-          <a:fillRef idx="3">
-            <a:schemeClr val="accent1"/>
-          </a:fillRef>
-          <a:effectRef idx="2">
-            <a:schemeClr val="accent1"/>
-          </a:effectRef>
-          <a:fontRef idx="minor">
-            <a:schemeClr val="lt1"/>
-          </a:fontRef>
-        </p:style>
-        <p:txBody>
-          <a:bodyPr rtlCol="0" anchor="ctr"/>
-          <a:lstStyle/>
-          <a:p>
-            <a:pPr algn="ctr"/>
-          </a:p>
-        </p:txBody>
-      </p:sp>
-      <p:sp>
-        <p:nvSpPr>
-          <p:cNvPr id="10" name="Rectangle 9"/>
-          <p:cNvSpPr/>
-          <p:nvPr/>
-        </p:nvSpPr>
-        <p:spPr>
-          <a:xfrm>
-            <a:off x="658368" y="1426464"/>
-            <a:ext cx="3520440" cy="109728"/>
-          </a:xfrm>
-          <a:prstGeom prst="rect">
-            <a:avLst/>
-          </a:prstGeom>
-          <a:solidFill>
-            <a:srgbClr val="48BF8F"/>
-          </a:solidFill>
-          <a:ln>
-            <a:noFill/>
-          </a:ln>
-        </p:spPr>
-        <p:style>
-          <a:lnRef idx="1">
-            <a:schemeClr val="accent1"/>
-          </a:lnRef>
-          <a:fillRef idx="3">
-            <a:schemeClr val="accent1"/>
-          </a:fillRef>
-          <a:effectRef idx="2">
-            <a:schemeClr val="accent1"/>
-          </a:effectRef>
-          <a:fontRef idx="minor">
-            <a:schemeClr val="lt1"/>
-          </a:fontRef>
-        </p:style>
-        <p:txBody>
-          <a:bodyPr rtlCol="0" anchor="ctr"/>
-          <a:lstStyle/>
-          <a:p>
-            <a:pPr algn="ctr"/>
-          </a:p>
-        </p:txBody>
-      </p:sp>
-      <p:sp>
-        <p:nvSpPr>
-          <p:cNvPr id="11" name="TextBox 10"/>
-          <p:cNvSpPr txBox="1"/>
-          <p:nvPr/>
-        </p:nvSpPr>
-        <p:spPr>
-          <a:xfrm>
-            <a:off x="859536" y="1627632"/>
-            <a:ext cx="3118104" cy="310896"/>
-          </a:xfrm>
-          <a:prstGeom prst="rect">
-            <a:avLst/>
-          </a:prstGeom>
-          <a:noFill/>
-        </p:spPr>
-        <p:txBody>
-          <a:bodyPr wrap="square" anchor="t">
-            <a:spAutoFit/>
-          </a:bodyPr>
-          <a:lstStyle/>
-          <a:p>
-            <a:pPr algn="l"/>
-            <a:r>
-              <a:rPr sz="1400" b="1">
-                <a:solidFill>
-                  <a:srgbClr val="48BF8F"/>
-                </a:solidFill>
-                <a:latin typeface="Aptos"/>
-              </a:rPr>
-              <a:t>Knowledge</a:t>
-            </a:r>
-          </a:p>
-        </p:txBody>
-      </p:sp>
-      <p:sp>
-        <p:nvSpPr>
-          <p:cNvPr id="12" name="TextBox 11"/>
-          <p:cNvSpPr txBox="1"/>
-          <p:nvPr/>
-        </p:nvSpPr>
-        <p:spPr>
-          <a:xfrm>
-            <a:off x="859536" y="2084832"/>
-            <a:ext cx="3118104" cy="3721608"/>
-          </a:xfrm>
-          <a:prstGeom prst="rect">
-            <a:avLst/>
-          </a:prstGeom>
-          <a:noFill/>
-        </p:spPr>
-        <p:txBody>
-          <a:bodyPr wrap="square" anchor="t" lIns="38100" rIns="38100" tIns="25400" bIns="25400">
-            <a:noAutofit/>
-          </a:bodyPr>
-          <a:lstStyle/>
-          <a:p>
-            <a:pPr>
-              <a:spcAft>
-                <a:spcPts val="600"/>
-              </a:spcAft>
-              <a:defRPr sz="1500">
-                <a:solidFill>
-                  <a:srgbClr val="B4BAAE"/>
-                </a:solidFill>
-                <a:latin typeface="Aptos"/>
-              </a:defRPr>
-            </a:pPr>
-            <a:r>
-              <a:rPr sz="1500" b="0" i="0">
-                <a:latin typeface="Calibri"/>
-              </a:rPr>
-              <a:t>Answers codebase questions with loaded file or directory context.</a:t>
-            </a:r>
-            <a:endParaRPr sz="1500" b="0" i="0">
-              <a:latin typeface="Calibri"/>
-            </a:endParaRPr>
-          </a:p>
-          <a:p>
-            <a:pPr>
-              <a:spcAft>
-                <a:spcPts val="600"/>
-              </a:spcAft>
-              <a:defRPr sz="1500">
-                <a:solidFill>
-                  <a:srgbClr val="B4BAAE"/>
-                </a:solidFill>
-                <a:latin typeface="Aptos"/>
-              </a:defRPr>
-            </a:pPr>
-            <a:r>
-              <a:rPr sz="1500" b="0" i="0">
-                <a:latin typeface="Calibri"/>
-              </a:rPr>
-              <a:t>Uses hybrid retrieval to extract metadata, split content, rank source chunks, and respect context budgets.</a:t>
-            </a:r>
-            <a:endParaRPr sz="1500" b="0" i="0">
-              <a:latin typeface="Calibri"/>
-            </a:endParaRPr>
-          </a:p>
-          <a:p>
-            <a:pPr>
-              <a:spcAft>
-                <a:spcPts val="600"/>
-              </a:spcAft>
-              <a:defRPr sz="1500">
-                <a:solidFill>
-                  <a:srgbClr val="B4BAAE"/>
-                </a:solidFill>
-                <a:latin typeface="Aptos"/>
-              </a:defRPr>
-            </a:pPr>
-            <a:r>
-              <a:rPr sz="1500" b="0" i="0">
-                <a:latin typeface="Calibri"/>
-              </a:rPr>
-              <a:t>Gives operators GUI-first database maintenance through the new DB dropdown for backup and staged database replacement.</a:t>
-            </a:r>
-            <a:endParaRPr sz="1500" b="0" i="0">
-              <a:latin typeface="Calibri"/>
-            </a:endParaRPr>
-          </a:p>
-        </p:txBody>
-      </p:sp>
-      <p:sp>
-        <p:nvSpPr>
-          <p:cNvPr id="13" name="Rounded Rectangle 12"/>
-          <p:cNvSpPr/>
-          <p:nvPr/>
-        </p:nvSpPr>
-        <p:spPr>
-          <a:xfrm>
-            <a:off x="4443984" y="1426464"/>
-            <a:ext cx="3520440" cy="4526280"/>
-          </a:xfrm>
-          <a:prstGeom prst="roundRect">
-            <a:avLst/>
-          </a:prstGeom>
-          <a:solidFill>
-            <a:srgbClr val="161A19"/>
-          </a:solidFill>
-          <a:ln>
-            <a:solidFill>
-              <a:srgbClr val="595F56"/>
-            </a:solidFill>
-          </a:ln>
-        </p:spPr>
-        <p:style>
-          <a:lnRef idx="1">
-            <a:schemeClr val="accent1"/>
-          </a:lnRef>
-          <a:fillRef idx="3">
-            <a:schemeClr val="accent1"/>
-          </a:fillRef>
-          <a:effectRef idx="2">
-            <a:schemeClr val="accent1"/>
-          </a:effectRef>
-          <a:fontRef idx="minor">
-            <a:schemeClr val="lt1"/>
-          </a:fontRef>
-        </p:style>
-        <p:txBody>
-          <a:bodyPr rtlCol="0" anchor="ctr"/>
-          <a:lstStyle/>
-          <a:p>
-            <a:pPr algn="ctr"/>
-          </a:p>
-        </p:txBody>
-      </p:sp>
-      <p:sp>
-        <p:nvSpPr>
-          <p:cNvPr id="14" name="Rectangle 13"/>
-          <p:cNvSpPr/>
-          <p:nvPr/>
-        </p:nvSpPr>
-        <p:spPr>
-          <a:xfrm>
-            <a:off x="4443984" y="1426464"/>
-            <a:ext cx="3520440" cy="109728"/>
-          </a:xfrm>
-          <a:prstGeom prst="rect">
-            <a:avLst/>
-          </a:prstGeom>
-          <a:solidFill>
-            <a:srgbClr val="C48052"/>
-          </a:solidFill>
-          <a:ln>
-            <a:noFill/>
-          </a:ln>
-        </p:spPr>
-        <p:style>
-          <a:lnRef idx="1">
-            <a:schemeClr val="accent1"/>
-          </a:lnRef>
-          <a:fillRef idx="3">
-            <a:schemeClr val="accent1"/>
-          </a:fillRef>
-          <a:effectRef idx="2">
-            <a:schemeClr val="accent1"/>
-          </a:effectRef>
-          <a:fontRef idx="minor">
-            <a:schemeClr val="lt1"/>
-          </a:fontRef>
-        </p:style>
-        <p:txBody>
-          <a:bodyPr rtlCol="0" anchor="ctr"/>
-          <a:lstStyle/>
-          <a:p>
-            <a:pPr algn="ctr"/>
-          </a:p>
-        </p:txBody>
-      </p:sp>
-      <p:sp>
-        <p:nvSpPr>
-          <p:cNvPr id="15" name="TextBox 14"/>
-          <p:cNvSpPr txBox="1"/>
-          <p:nvPr/>
-        </p:nvSpPr>
-        <p:spPr>
-          <a:xfrm>
-            <a:off x="4645152" y="1627632"/>
-            <a:ext cx="3118104" cy="310896"/>
-          </a:xfrm>
-          <a:prstGeom prst="rect">
-            <a:avLst/>
-          </a:prstGeom>
-          <a:noFill/>
-        </p:spPr>
-        <p:txBody>
-          <a:bodyPr wrap="square" anchor="t">
-            <a:spAutoFit/>
-          </a:bodyPr>
-          <a:lstStyle/>
-          <a:p>
-            <a:pPr algn="l"/>
-            <a:r>
-              <a:rPr sz="1400" b="1">
-                <a:solidFill>
-                  <a:srgbClr val="C48052"/>
-                </a:solidFill>
-                <a:latin typeface="Aptos"/>
-              </a:rPr>
-              <a:t>Action</a:t>
-            </a:r>
-          </a:p>
-        </p:txBody>
-      </p:sp>
-      <p:sp>
-        <p:nvSpPr>
-          <p:cNvPr id="16" name="TextBox 15"/>
-          <p:cNvSpPr txBox="1"/>
-          <p:nvPr/>
-        </p:nvSpPr>
-        <p:spPr>
-          <a:xfrm>
-            <a:off x="4645152" y="2084832"/>
-            <a:ext cx="3118104" cy="3721608"/>
-          </a:xfrm>
-          <a:prstGeom prst="rect">
-            <a:avLst/>
-          </a:prstGeom>
-          <a:noFill/>
-        </p:spPr>
-        <p:txBody>
-          <a:bodyPr wrap="square" anchor="t" lIns="38100" rIns="38100" tIns="25400" bIns="25400">
-            <a:noAutofit/>
-          </a:bodyPr>
-          <a:lstStyle/>
-          <a:p>
-            <a:pPr>
-              <a:spcAft>
-                <a:spcPts val="600"/>
-              </a:spcAft>
-              <a:defRPr sz="1500">
-                <a:solidFill>
-                  <a:srgbClr val="B4BAAE"/>
-                </a:solidFill>
-                <a:latin typeface="Aptos"/>
-              </a:defRPr>
-            </a:pPr>
-            <a:r>
-              <a:rPr sz="1500" b="0" i="0">
-                <a:latin typeface="Calibri"/>
-              </a:rPr>
-              <a:t>Warns GPU-host operators before a directory-context load is likely to saturate VRAM and degrade embedding throughput.</a:t>
-            </a:r>
-            <a:endParaRPr sz="1500" b="0" i="0">
-              <a:latin typeface="Calibri"/>
-            </a:endParaRPr>
-          </a:p>
-          <a:p>
-            <a:pPr>
-              <a:spcAft>
-                <a:spcPts val="600"/>
-              </a:spcAft>
-              <a:defRPr sz="1500">
-                <a:solidFill>
-                  <a:srgbClr val="B4BAAE"/>
-                </a:solidFill>
-                <a:latin typeface="Aptos"/>
-              </a:defRPr>
-            </a:pPr>
-            <a:r>
-              <a:rPr sz="1500" b="0" i="0">
-                <a:latin typeface="Calibri"/>
-              </a:rPr>
-              <a:t>Exposes a coherent versioning surface across builds, runtime UI, logs, and an open health-check endpoint.</a:t>
-            </a:r>
-            <a:endParaRPr sz="1500" b="0" i="0">
-              <a:latin typeface="Calibri"/>
-            </a:endParaRPr>
-          </a:p>
-        </p:txBody>
-      </p:sp>
-      <p:sp>
-        <p:nvSpPr>
-          <p:cNvPr id="17" name="Rounded Rectangle 16"/>
-          <p:cNvSpPr/>
-          <p:nvPr/>
-        </p:nvSpPr>
-        <p:spPr>
-          <a:xfrm>
-            <a:off x="8229600" y="1426464"/>
-            <a:ext cx="3063240" cy="4526280"/>
-          </a:xfrm>
-          <a:prstGeom prst="roundRect">
-            <a:avLst/>
-          </a:prstGeom>
-          <a:solidFill>
-            <a:srgbClr val="161A19"/>
-          </a:solidFill>
-          <a:ln>
-            <a:solidFill>
-              <a:srgbClr val="595F56"/>
-            </a:solidFill>
-          </a:ln>
-        </p:spPr>
-        <p:style>
-          <a:lnRef idx="1">
-            <a:schemeClr val="accent1"/>
-          </a:lnRef>
-          <a:fillRef idx="3">
-            <a:schemeClr val="accent1"/>
-          </a:fillRef>
-          <a:effectRef idx="2">
-            <a:schemeClr val="accent1"/>
-          </a:effectRef>
-          <a:fontRef idx="minor">
-            <a:schemeClr val="lt1"/>
-          </a:fontRef>
-        </p:style>
-        <p:txBody>
-          <a:bodyPr rtlCol="0" anchor="ctr"/>
-          <a:lstStyle/>
-          <a:p>
-            <a:pPr algn="ctr"/>
-          </a:p>
-        </p:txBody>
-      </p:sp>
-      <p:sp>
-        <p:nvSpPr>
-          <p:cNvPr id="18" name="Rectangle 17"/>
-          <p:cNvSpPr/>
-          <p:nvPr/>
-        </p:nvSpPr>
-        <p:spPr>
-          <a:xfrm>
-            <a:off x="8229600" y="1426464"/>
-            <a:ext cx="3063240" cy="109728"/>
-          </a:xfrm>
-          <a:prstGeom prst="rect">
-            <a:avLst/>
-          </a:prstGeom>
-          <a:solidFill>
-            <a:srgbClr val="E0AB5D"/>
-          </a:solidFill>
-          <a:ln>
-            <a:noFill/>
-          </a:ln>
-        </p:spPr>
-        <p:style>
-          <a:lnRef idx="1">
-            <a:schemeClr val="accent1"/>
-          </a:lnRef>
-          <a:fillRef idx="3">
-            <a:schemeClr val="accent1"/>
-          </a:fillRef>
-          <a:effectRef idx="2">
-            <a:schemeClr val="accent1"/>
-          </a:effectRef>
-          <a:fontRef idx="minor">
-            <a:schemeClr val="lt1"/>
-          </a:fontRef>
-        </p:style>
-        <p:txBody>
-          <a:bodyPr rtlCol="0" anchor="ctr"/>
-          <a:lstStyle/>
-          <a:p>
-            <a:pPr algn="ctr"/>
-          </a:p>
-        </p:txBody>
-      </p:sp>
-      <p:sp>
-        <p:nvSpPr>
-          <p:cNvPr id="19" name="TextBox 18"/>
-          <p:cNvSpPr txBox="1"/>
-          <p:nvPr/>
-        </p:nvSpPr>
-        <p:spPr>
-          <a:xfrm>
-            <a:off x="8430768" y="1627632"/>
-            <a:ext cx="2660904" cy="310896"/>
-          </a:xfrm>
-          <a:prstGeom prst="rect">
-            <a:avLst/>
-          </a:prstGeom>
-          <a:noFill/>
-        </p:spPr>
-        <p:txBody>
-          <a:bodyPr wrap="square" anchor="t">
-            <a:spAutoFit/>
-          </a:bodyPr>
-          <a:lstStyle/>
-          <a:p>
-            <a:pPr algn="l"/>
-            <a:r>
-              <a:rPr sz="1400" b="1">
-                <a:solidFill>
-                  <a:srgbClr val="E0AB5D"/>
-                </a:solidFill>
-                <a:latin typeface="Aptos"/>
-              </a:rPr>
-              <a:t>Delivery</a:t>
-            </a:r>
-          </a:p>
-        </p:txBody>
-      </p:sp>
-      <p:sp>
-        <p:nvSpPr>
-          <p:cNvPr id="20" name="TextBox 19"/>
-          <p:cNvSpPr txBox="1"/>
-          <p:nvPr/>
-        </p:nvSpPr>
-        <p:spPr>
-          <a:xfrm>
-            <a:off x="8430768" y="2084832"/>
-            <a:ext cx="2660904" cy="3721608"/>
-          </a:xfrm>
-          <a:prstGeom prst="rect">
-            <a:avLst/>
-          </a:prstGeom>
-          <a:noFill/>
-        </p:spPr>
-        <p:txBody>
-          <a:bodyPr wrap="square" anchor="t" lIns="38100" rIns="38100" tIns="25400" bIns="25400">
-            <a:noAutofit/>
-          </a:bodyPr>
-          <a:lstStyle/>
-          <a:p>
-            <a:pPr>
-              <a:spcAft>
-                <a:spcPts val="600"/>
-              </a:spcAft>
-              <a:defRPr sz="1500">
-                <a:solidFill>
-                  <a:srgbClr val="B4BAAE"/>
-                </a:solidFill>
-                <a:latin typeface="Aptos"/>
-              </a:defRPr>
-            </a:pPr>
-            <a:r>
-              <a:rPr sz="1500" b="0" i="0">
-                <a:latin typeface="Calibri"/>
-              </a:rPr>
-              <a:t>Runs checked Multi-Turn requests through request-scoped planning, capability selection, tool calls, observations, monitoring, and final synthesis.</a:t>
-            </a:r>
-            <a:endParaRPr sz="1500" b="0" i="0">
-              <a:latin typeface="Calibri"/>
-            </a:endParaRPr>
-          </a:p>
-          <a:p>
-            <a:pPr>
-              <a:spcAft>
-                <a:spcPts val="600"/>
-              </a:spcAft>
-              <a:defRPr sz="1500">
-                <a:solidFill>
-                  <a:srgbClr val="B4BAAE"/>
-                </a:solidFill>
-                <a:latin typeface="Aptos"/>
-              </a:defRPr>
-            </a:pPr>
-            <a:r>
-              <a:rPr sz="1500" b="0" i="0">
-                <a:latin typeface="Calibri"/>
-              </a:rPr>
-              <a:t>Launches wrapped copies of selected workflow agents in isolated runtime folders without mutating templates.</a:t>
-            </a:r>
-            <a:endParaRPr sz="1500" b="0" i="0">
-              <a:latin typeface="Calibri"/>
-            </a:endParaRPr>
-          </a:p>
-          <a:p>
-            <a:pPr>
-              <a:spcAft>
-                <a:spcPts val="600"/>
-              </a:spcAft>
-              <a:defRPr sz="1500">
-                <a:solidFill>
-                  <a:srgbClr val="B4BAAE"/>
-                </a:solidFill>
-                <a:latin typeface="Aptos"/>
-              </a:defRPr>
-            </a:pPr>
-            <a:r>
-              <a:rPr sz="1500" b="0" i="0">
-                <a:latin typeface="Calibri"/>
-              </a:rPr>
-              <a:t>Lets users design, validate, save, pause, resume, and stop visual workflows through the Agentic Control Panel.</a:t>
-            </a:r>
-            <a:endParaRPr sz="1500" b="0" i="0">
-              <a:latin typeface="Calibri"/>
-            </a:endParaRPr>
-          </a:p>
-          <a:p>
-            <a:pPr>
-              <a:spcAft>
-                <a:spcPts val="600"/>
-              </a:spcAft>
-              <a:defRPr sz="1500">
-                <a:solidFill>
-                  <a:srgbClr val="B4BAAE"/>
-                </a:solidFill>
-                <a:latin typeface="Aptos"/>
-              </a:defRPr>
-            </a:pPr>
-            <a:r>
-              <a:rPr sz="1500" b="0" i="0">
-                <a:latin typeface="Calibri"/>
-              </a:rPr>
-              <a:t>Turns successful Multi-Turn tool executions into starter `.flw` workflows that can be inspected and validated in ACP.</a:t>
-            </a:r>
-            <a:endParaRPr sz="1500" b="0" i="0">
-              <a:latin typeface="Calibri"/>
-            </a:endParaRPr>
-          </a:p>
-          <a:p>
-            <a:pPr>
-              <a:spcAft>
-                <a:spcPts val="600"/>
-              </a:spcAft>
-              <a:defRPr sz="1500">
-                <a:solidFill>
-                  <a:srgbClr val="B4BAAE"/>
-                </a:solidFill>
-                <a:latin typeface="Aptos"/>
-              </a:defRPr>
-            </a:pPr>
-            <a:r>
-              <a:rPr sz="1500" b="0" i="0">
-                <a:latin typeface="Calibri"/>
-              </a:rPr>
-              <a:t>Packages the project into a distributable Windows release with installer and uninstaller tooling.</a:t>
-            </a:r>
-            <a:endParaRPr sz="1500" b="0" i="0">
-              <a:latin typeface="Calibri"/>
-            </a:endParaRPr>
-          </a:p>
-        </p:txBody>
-      </p:sp>
-    </p:spTree>
-  </p:cSld>
-  <p:clrMapOvr>
-    <a:masterClrMapping/>
-  </p:clrMapOvr>
-</p:sld>
-</file>
-
-<file path=ppt/slides/slide30.xml><?xml version="1.0" encoding="utf-8"?>
 <p:sld xmlns:a="http://schemas.openxmlformats.org/drawingml/2006/main" xmlns:p="http://schemas.openxmlformats.org/presentationml/2006/main" xmlns:r="http://schemas.openxmlformats.org/officeDocument/2006/relationships">
   <p:cSld>
     <p:spTree>
@@ -20360,7 +18817,968 @@
 </p:sld>
 </file>
 
-<file path=ppt/slides/slide31.xml><?xml version="1.0" encoding="utf-8"?>
+<file path=ppt/slides/slide3.xml><?xml version="1.0" encoding="utf-8"?>
+<p:sld xmlns:a="http://schemas.openxmlformats.org/drawingml/2006/main" xmlns:p="http://schemas.openxmlformats.org/presentationml/2006/main" xmlns:r="http://schemas.openxmlformats.org/officeDocument/2006/relationships">
+  <p:cSld>
+    <p:spTree>
+      <p:nvGrpSpPr>
+        <p:cNvPr id="1" name=""/>
+        <p:cNvGrpSpPr/>
+        <p:nvPr/>
+      </p:nvGrpSpPr>
+      <p:grpSpPr/>
+      <p:sp>
+        <p:nvSpPr>
+          <p:cNvPr id="2" name="Rectangle 1"/>
+          <p:cNvSpPr/>
+          <p:nvPr/>
+        </p:nvSpPr>
+        <p:spPr>
+          <a:xfrm>
+            <a:off x="0" y="0"/>
+            <a:ext cx="12191695" cy="6858000"/>
+          </a:xfrm>
+          <a:prstGeom prst="rect">
+            <a:avLst/>
+          </a:prstGeom>
+          <a:solidFill>
+            <a:srgbClr val="080D0D"/>
+          </a:solidFill>
+          <a:ln>
+            <a:noFill/>
+          </a:ln>
+        </p:spPr>
+        <p:style>
+          <a:lnRef idx="1">
+            <a:schemeClr val="accent1"/>
+          </a:lnRef>
+          <a:fillRef idx="3">
+            <a:schemeClr val="accent1"/>
+          </a:fillRef>
+          <a:effectRef idx="2">
+            <a:schemeClr val="accent1"/>
+          </a:effectRef>
+          <a:fontRef idx="minor">
+            <a:schemeClr val="lt1"/>
+          </a:fontRef>
+        </p:style>
+        <p:txBody>
+          <a:bodyPr rtlCol="0" anchor="ctr"/>
+          <a:lstStyle/>
+          <a:p>
+            <a:pPr algn="ctr"/>
+          </a:p>
+        </p:txBody>
+      </p:sp>
+      <p:sp>
+        <p:nvSpPr>
+          <p:cNvPr id="3" name="Rectangle 2"/>
+          <p:cNvSpPr/>
+          <p:nvPr/>
+        </p:nvSpPr>
+        <p:spPr>
+          <a:xfrm>
+            <a:off x="320040" y="384048"/>
+            <a:ext cx="36576" cy="6080760"/>
+          </a:xfrm>
+          <a:prstGeom prst="rect">
+            <a:avLst/>
+          </a:prstGeom>
+          <a:solidFill>
+            <a:srgbClr val="C48052"/>
+          </a:solidFill>
+          <a:ln>
+            <a:noFill/>
+          </a:ln>
+        </p:spPr>
+        <p:style>
+          <a:lnRef idx="1">
+            <a:schemeClr val="accent1"/>
+          </a:lnRef>
+          <a:fillRef idx="3">
+            <a:schemeClr val="accent1"/>
+          </a:fillRef>
+          <a:effectRef idx="2">
+            <a:schemeClr val="accent1"/>
+          </a:effectRef>
+          <a:fontRef idx="minor">
+            <a:schemeClr val="lt1"/>
+          </a:fontRef>
+        </p:style>
+        <p:txBody>
+          <a:bodyPr rtlCol="0" anchor="ctr"/>
+          <a:lstStyle/>
+          <a:p>
+            <a:pPr algn="ctr"/>
+          </a:p>
+        </p:txBody>
+      </p:sp>
+      <p:sp>
+        <p:nvSpPr>
+          <p:cNvPr id="4" name="Rectangle 3"/>
+          <p:cNvSpPr/>
+          <p:nvPr/>
+        </p:nvSpPr>
+        <p:spPr>
+          <a:xfrm>
+            <a:off x="11716207" y="384048"/>
+            <a:ext cx="36576" cy="6080760"/>
+          </a:xfrm>
+          <a:prstGeom prst="rect">
+            <a:avLst/>
+          </a:prstGeom>
+          <a:solidFill>
+            <a:srgbClr val="C48052"/>
+          </a:solidFill>
+          <a:ln>
+            <a:noFill/>
+          </a:ln>
+        </p:spPr>
+        <p:style>
+          <a:lnRef idx="1">
+            <a:schemeClr val="accent1"/>
+          </a:lnRef>
+          <a:fillRef idx="3">
+            <a:schemeClr val="accent1"/>
+          </a:fillRef>
+          <a:effectRef idx="2">
+            <a:schemeClr val="accent1"/>
+          </a:effectRef>
+          <a:fontRef idx="minor">
+            <a:schemeClr val="lt1"/>
+          </a:fontRef>
+        </p:style>
+        <p:txBody>
+          <a:bodyPr rtlCol="0" anchor="ctr"/>
+          <a:lstStyle/>
+          <a:p>
+            <a:pPr algn="ctr"/>
+          </a:p>
+        </p:txBody>
+      </p:sp>
+      <p:sp>
+        <p:nvSpPr>
+          <p:cNvPr id="5" name="Rectangle 4"/>
+          <p:cNvSpPr/>
+          <p:nvPr/>
+        </p:nvSpPr>
+        <p:spPr>
+          <a:xfrm>
+            <a:off x="502920" y="384048"/>
+            <a:ext cx="11155680" cy="27432"/>
+          </a:xfrm>
+          <a:prstGeom prst="rect">
+            <a:avLst/>
+          </a:prstGeom>
+          <a:solidFill>
+            <a:srgbClr val="C48052"/>
+          </a:solidFill>
+          <a:ln>
+            <a:noFill/>
+          </a:ln>
+        </p:spPr>
+        <p:style>
+          <a:lnRef idx="1">
+            <a:schemeClr val="accent1"/>
+          </a:lnRef>
+          <a:fillRef idx="3">
+            <a:schemeClr val="accent1"/>
+          </a:fillRef>
+          <a:effectRef idx="2">
+            <a:schemeClr val="accent1"/>
+          </a:effectRef>
+          <a:fontRef idx="minor">
+            <a:schemeClr val="lt1"/>
+          </a:fontRef>
+        </p:style>
+        <p:txBody>
+          <a:bodyPr rtlCol="0" anchor="ctr"/>
+          <a:lstStyle/>
+          <a:p>
+            <a:pPr algn="ctr"/>
+          </a:p>
+        </p:txBody>
+      </p:sp>
+      <p:sp>
+        <p:nvSpPr>
+          <p:cNvPr id="6" name="Rectangle 5"/>
+          <p:cNvSpPr/>
+          <p:nvPr/>
+        </p:nvSpPr>
+        <p:spPr>
+          <a:xfrm>
+            <a:off x="502920" y="6437376"/>
+            <a:ext cx="11155680" cy="27432"/>
+          </a:xfrm>
+          <a:prstGeom prst="rect">
+            <a:avLst/>
+          </a:prstGeom>
+          <a:solidFill>
+            <a:srgbClr val="C48052"/>
+          </a:solidFill>
+          <a:ln>
+            <a:noFill/>
+          </a:ln>
+        </p:spPr>
+        <p:style>
+          <a:lnRef idx="1">
+            <a:schemeClr val="accent1"/>
+          </a:lnRef>
+          <a:fillRef idx="3">
+            <a:schemeClr val="accent1"/>
+          </a:fillRef>
+          <a:effectRef idx="2">
+            <a:schemeClr val="accent1"/>
+          </a:effectRef>
+          <a:fontRef idx="minor">
+            <a:schemeClr val="lt1"/>
+          </a:fontRef>
+        </p:style>
+        <p:txBody>
+          <a:bodyPr rtlCol="0" anchor="ctr"/>
+          <a:lstStyle/>
+          <a:p>
+            <a:pPr algn="ctr"/>
+          </a:p>
+        </p:txBody>
+      </p:sp>
+      <p:sp>
+        <p:nvSpPr>
+          <p:cNvPr id="7" name="TextBox 6"/>
+          <p:cNvSpPr txBox="1"/>
+          <p:nvPr/>
+        </p:nvSpPr>
+        <p:spPr>
+          <a:xfrm>
+            <a:off x="713232" y="548640"/>
+            <a:ext cx="10698480" cy="301752"/>
+          </a:xfrm>
+          <a:prstGeom prst="rect">
+            <a:avLst/>
+          </a:prstGeom>
+          <a:noFill/>
+        </p:spPr>
+        <p:txBody>
+          <a:bodyPr wrap="square" anchor="t">
+            <a:spAutoFit/>
+          </a:bodyPr>
+          <a:lstStyle/>
+          <a:p>
+            <a:pPr algn="l"/>
+            <a:r>
+              <a:rPr sz="1000" b="1">
+                <a:solidFill>
+                  <a:srgbClr val="C48052"/>
+                </a:solidFill>
+                <a:latin typeface="Aptos"/>
+              </a:rPr>
+              <a:t>CAPABILITY MAP</a:t>
+            </a:r>
+          </a:p>
+        </p:txBody>
+      </p:sp>
+      <p:sp>
+        <p:nvSpPr>
+          <p:cNvPr id="8" name="TextBox 7"/>
+          <p:cNvSpPr txBox="1"/>
+          <p:nvPr/>
+        </p:nvSpPr>
+        <p:spPr>
+          <a:xfrm>
+            <a:off x="694944" y="850392"/>
+            <a:ext cx="10881360" cy="566928"/>
+          </a:xfrm>
+          <a:prstGeom prst="rect">
+            <a:avLst/>
+          </a:prstGeom>
+          <a:noFill/>
+        </p:spPr>
+        <p:txBody>
+          <a:bodyPr wrap="square" anchor="t">
+            <a:spAutoFit/>
+          </a:bodyPr>
+          <a:lstStyle/>
+          <a:p>
+            <a:pPr algn="l"/>
+            <a:r>
+              <a:rPr sz="2700" b="0">
+                <a:solidFill>
+                  <a:srgbClr val="E8E8DE"/>
+                </a:solidFill>
+                <a:latin typeface="Aptos Display"/>
+              </a:rPr>
+              <a:t>What The System Does</a:t>
+            </a:r>
+          </a:p>
+        </p:txBody>
+      </p:sp>
+      <p:sp>
+        <p:nvSpPr>
+          <p:cNvPr id="9" name="Rounded Rectangle 8"/>
+          <p:cNvSpPr/>
+          <p:nvPr/>
+        </p:nvSpPr>
+        <p:spPr>
+          <a:xfrm>
+            <a:off x="658368" y="1426464"/>
+            <a:ext cx="3520440" cy="4526280"/>
+          </a:xfrm>
+          <a:prstGeom prst="roundRect">
+            <a:avLst/>
+          </a:prstGeom>
+          <a:solidFill>
+            <a:srgbClr val="161A19"/>
+          </a:solidFill>
+          <a:ln>
+            <a:solidFill>
+              <a:srgbClr val="595F56"/>
+            </a:solidFill>
+          </a:ln>
+        </p:spPr>
+        <p:style>
+          <a:lnRef idx="1">
+            <a:schemeClr val="accent1"/>
+          </a:lnRef>
+          <a:fillRef idx="3">
+            <a:schemeClr val="accent1"/>
+          </a:fillRef>
+          <a:effectRef idx="2">
+            <a:schemeClr val="accent1"/>
+          </a:effectRef>
+          <a:fontRef idx="minor">
+            <a:schemeClr val="lt1"/>
+          </a:fontRef>
+        </p:style>
+        <p:txBody>
+          <a:bodyPr rtlCol="0" anchor="ctr"/>
+          <a:lstStyle/>
+          <a:p>
+            <a:pPr algn="ctr"/>
+          </a:p>
+        </p:txBody>
+      </p:sp>
+      <p:sp>
+        <p:nvSpPr>
+          <p:cNvPr id="10" name="Rectangle 9"/>
+          <p:cNvSpPr/>
+          <p:nvPr/>
+        </p:nvSpPr>
+        <p:spPr>
+          <a:xfrm>
+            <a:off x="658368" y="1426464"/>
+            <a:ext cx="3520440" cy="109728"/>
+          </a:xfrm>
+          <a:prstGeom prst="rect">
+            <a:avLst/>
+          </a:prstGeom>
+          <a:solidFill>
+            <a:srgbClr val="48BF8F"/>
+          </a:solidFill>
+          <a:ln>
+            <a:noFill/>
+          </a:ln>
+        </p:spPr>
+        <p:style>
+          <a:lnRef idx="1">
+            <a:schemeClr val="accent1"/>
+          </a:lnRef>
+          <a:fillRef idx="3">
+            <a:schemeClr val="accent1"/>
+          </a:fillRef>
+          <a:effectRef idx="2">
+            <a:schemeClr val="accent1"/>
+          </a:effectRef>
+          <a:fontRef idx="minor">
+            <a:schemeClr val="lt1"/>
+          </a:fontRef>
+        </p:style>
+        <p:txBody>
+          <a:bodyPr rtlCol="0" anchor="ctr"/>
+          <a:lstStyle/>
+          <a:p>
+            <a:pPr algn="ctr"/>
+          </a:p>
+        </p:txBody>
+      </p:sp>
+      <p:sp>
+        <p:nvSpPr>
+          <p:cNvPr id="11" name="TextBox 10"/>
+          <p:cNvSpPr txBox="1"/>
+          <p:nvPr/>
+        </p:nvSpPr>
+        <p:spPr>
+          <a:xfrm>
+            <a:off x="859536" y="1627632"/>
+            <a:ext cx="3118104" cy="310896"/>
+          </a:xfrm>
+          <a:prstGeom prst="rect">
+            <a:avLst/>
+          </a:prstGeom>
+          <a:noFill/>
+        </p:spPr>
+        <p:txBody>
+          <a:bodyPr wrap="square" anchor="t">
+            <a:spAutoFit/>
+          </a:bodyPr>
+          <a:lstStyle/>
+          <a:p>
+            <a:pPr algn="l"/>
+            <a:r>
+              <a:rPr sz="1400" b="1">
+                <a:solidFill>
+                  <a:srgbClr val="48BF8F"/>
+                </a:solidFill>
+                <a:latin typeface="Aptos"/>
+              </a:rPr>
+              <a:t>Knowledge</a:t>
+            </a:r>
+          </a:p>
+        </p:txBody>
+      </p:sp>
+      <p:sp>
+        <p:nvSpPr>
+          <p:cNvPr id="12" name="TextBox 11"/>
+          <p:cNvSpPr txBox="1"/>
+          <p:nvPr/>
+        </p:nvSpPr>
+        <p:spPr>
+          <a:xfrm>
+            <a:off x="859536" y="2084832"/>
+            <a:ext cx="3118104" cy="3721608"/>
+          </a:xfrm>
+          <a:prstGeom prst="rect">
+            <a:avLst/>
+          </a:prstGeom>
+          <a:noFill/>
+        </p:spPr>
+        <p:txBody>
+          <a:bodyPr wrap="square" anchor="t" lIns="38100" rIns="38100" tIns="25400" bIns="25400">
+            <a:noAutofit/>
+          </a:bodyPr>
+          <a:lstStyle/>
+          <a:p>
+            <a:pPr>
+              <a:spcAft>
+                <a:spcPts val="600"/>
+              </a:spcAft>
+              <a:defRPr sz="1500">
+                <a:solidFill>
+                  <a:srgbClr val="B4BAAE"/>
+                </a:solidFill>
+                <a:latin typeface="Aptos"/>
+              </a:defRPr>
+            </a:pPr>
+            <a:r>
+              <a:rPr sz="1500" b="0" i="0">
+                <a:latin typeface="Calibri"/>
+              </a:rPr>
+              <a:t>Answers codebase questions with loaded file or directory context.</a:t>
+            </a:r>
+            <a:endParaRPr sz="1500" b="0" i="0">
+              <a:latin typeface="Calibri"/>
+            </a:endParaRPr>
+          </a:p>
+          <a:p>
+            <a:pPr>
+              <a:spcAft>
+                <a:spcPts val="600"/>
+              </a:spcAft>
+              <a:defRPr sz="1500">
+                <a:solidFill>
+                  <a:srgbClr val="B4BAAE"/>
+                </a:solidFill>
+                <a:latin typeface="Aptos"/>
+              </a:defRPr>
+            </a:pPr>
+            <a:r>
+              <a:rPr sz="1500" b="0" i="0">
+                <a:latin typeface="Calibri"/>
+              </a:rPr>
+              <a:t>Uses hybrid retrieval to extract metadata, split content, rank source chunks, and respect context budgets.</a:t>
+            </a:r>
+            <a:endParaRPr sz="1500" b="0" i="0">
+              <a:latin typeface="Calibri"/>
+            </a:endParaRPr>
+          </a:p>
+          <a:p>
+            <a:pPr>
+              <a:spcAft>
+                <a:spcPts val="600"/>
+              </a:spcAft>
+              <a:defRPr sz="1500">
+                <a:solidFill>
+                  <a:srgbClr val="B4BAAE"/>
+                </a:solidFill>
+                <a:latin typeface="Aptos"/>
+              </a:defRPr>
+            </a:pPr>
+            <a:r>
+              <a:rPr sz="1500" b="0" i="0">
+                <a:latin typeface="Calibri"/>
+              </a:rPr>
+              <a:t>Gives operators GUI-first database maintenance through the new DB dropdown for backup and staged database replacement.</a:t>
+            </a:r>
+            <a:endParaRPr sz="1500" b="0" i="0">
+              <a:latin typeface="Calibri"/>
+            </a:endParaRPr>
+          </a:p>
+        </p:txBody>
+      </p:sp>
+      <p:sp>
+        <p:nvSpPr>
+          <p:cNvPr id="13" name="Rounded Rectangle 12"/>
+          <p:cNvSpPr/>
+          <p:nvPr/>
+        </p:nvSpPr>
+        <p:spPr>
+          <a:xfrm>
+            <a:off x="4443984" y="1426464"/>
+            <a:ext cx="3520440" cy="4526280"/>
+          </a:xfrm>
+          <a:prstGeom prst="roundRect">
+            <a:avLst/>
+          </a:prstGeom>
+          <a:solidFill>
+            <a:srgbClr val="161A19"/>
+          </a:solidFill>
+          <a:ln>
+            <a:solidFill>
+              <a:srgbClr val="595F56"/>
+            </a:solidFill>
+          </a:ln>
+        </p:spPr>
+        <p:style>
+          <a:lnRef idx="1">
+            <a:schemeClr val="accent1"/>
+          </a:lnRef>
+          <a:fillRef idx="3">
+            <a:schemeClr val="accent1"/>
+          </a:fillRef>
+          <a:effectRef idx="2">
+            <a:schemeClr val="accent1"/>
+          </a:effectRef>
+          <a:fontRef idx="minor">
+            <a:schemeClr val="lt1"/>
+          </a:fontRef>
+        </p:style>
+        <p:txBody>
+          <a:bodyPr rtlCol="0" anchor="ctr"/>
+          <a:lstStyle/>
+          <a:p>
+            <a:pPr algn="ctr"/>
+          </a:p>
+        </p:txBody>
+      </p:sp>
+      <p:sp>
+        <p:nvSpPr>
+          <p:cNvPr id="14" name="Rectangle 13"/>
+          <p:cNvSpPr/>
+          <p:nvPr/>
+        </p:nvSpPr>
+        <p:spPr>
+          <a:xfrm>
+            <a:off x="4443984" y="1426464"/>
+            <a:ext cx="3520440" cy="109728"/>
+          </a:xfrm>
+          <a:prstGeom prst="rect">
+            <a:avLst/>
+          </a:prstGeom>
+          <a:solidFill>
+            <a:srgbClr val="C48052"/>
+          </a:solidFill>
+          <a:ln>
+            <a:noFill/>
+          </a:ln>
+        </p:spPr>
+        <p:style>
+          <a:lnRef idx="1">
+            <a:schemeClr val="accent1"/>
+          </a:lnRef>
+          <a:fillRef idx="3">
+            <a:schemeClr val="accent1"/>
+          </a:fillRef>
+          <a:effectRef idx="2">
+            <a:schemeClr val="accent1"/>
+          </a:effectRef>
+          <a:fontRef idx="minor">
+            <a:schemeClr val="lt1"/>
+          </a:fontRef>
+        </p:style>
+        <p:txBody>
+          <a:bodyPr rtlCol="0" anchor="ctr"/>
+          <a:lstStyle/>
+          <a:p>
+            <a:pPr algn="ctr"/>
+          </a:p>
+        </p:txBody>
+      </p:sp>
+      <p:sp>
+        <p:nvSpPr>
+          <p:cNvPr id="15" name="TextBox 14"/>
+          <p:cNvSpPr txBox="1"/>
+          <p:nvPr/>
+        </p:nvSpPr>
+        <p:spPr>
+          <a:xfrm>
+            <a:off x="4645152" y="1627632"/>
+            <a:ext cx="3118104" cy="310896"/>
+          </a:xfrm>
+          <a:prstGeom prst="rect">
+            <a:avLst/>
+          </a:prstGeom>
+          <a:noFill/>
+        </p:spPr>
+        <p:txBody>
+          <a:bodyPr wrap="square" anchor="t">
+            <a:spAutoFit/>
+          </a:bodyPr>
+          <a:lstStyle/>
+          <a:p>
+            <a:pPr algn="l"/>
+            <a:r>
+              <a:rPr sz="1400" b="1">
+                <a:solidFill>
+                  <a:srgbClr val="C48052"/>
+                </a:solidFill>
+                <a:latin typeface="Aptos"/>
+              </a:rPr>
+              <a:t>Action</a:t>
+            </a:r>
+          </a:p>
+        </p:txBody>
+      </p:sp>
+      <p:sp>
+        <p:nvSpPr>
+          <p:cNvPr id="16" name="TextBox 15"/>
+          <p:cNvSpPr txBox="1"/>
+          <p:nvPr/>
+        </p:nvSpPr>
+        <p:spPr>
+          <a:xfrm>
+            <a:off x="4645152" y="2084832"/>
+            <a:ext cx="3118104" cy="3721608"/>
+          </a:xfrm>
+          <a:prstGeom prst="rect">
+            <a:avLst/>
+          </a:prstGeom>
+          <a:noFill/>
+        </p:spPr>
+        <p:txBody>
+          <a:bodyPr wrap="square" anchor="t" lIns="38100" rIns="38100" tIns="25400" bIns="25400">
+            <a:noAutofit/>
+          </a:bodyPr>
+          <a:lstStyle/>
+          <a:p>
+            <a:pPr>
+              <a:spcAft>
+                <a:spcPts val="600"/>
+              </a:spcAft>
+              <a:defRPr sz="1500">
+                <a:solidFill>
+                  <a:srgbClr val="B4BAAE"/>
+                </a:solidFill>
+                <a:latin typeface="Aptos"/>
+              </a:defRPr>
+            </a:pPr>
+            <a:r>
+              <a:rPr sz="1500" b="0" i="0">
+                <a:latin typeface="Calibri"/>
+              </a:rPr>
+              <a:t>Warns GPU-host operators before a directory-context load is likely to saturate VRAM and degrade embedding throughput.</a:t>
+            </a:r>
+            <a:endParaRPr sz="1500" b="0" i="0">
+              <a:latin typeface="Calibri"/>
+            </a:endParaRPr>
+          </a:p>
+          <a:p>
+            <a:pPr>
+              <a:spcAft>
+                <a:spcPts val="600"/>
+              </a:spcAft>
+              <a:defRPr sz="1500">
+                <a:solidFill>
+                  <a:srgbClr val="B4BAAE"/>
+                </a:solidFill>
+                <a:latin typeface="Aptos"/>
+              </a:defRPr>
+            </a:pPr>
+            <a:r>
+              <a:rPr sz="1500" b="0" i="0">
+                <a:latin typeface="Calibri"/>
+              </a:rPr>
+              <a:t>Exposes a coherent versioning surface across builds, runtime UI, logs, and an open health-check endpoint.</a:t>
+            </a:r>
+            <a:endParaRPr sz="1500" b="0" i="0">
+              <a:latin typeface="Calibri"/>
+            </a:endParaRPr>
+          </a:p>
+        </p:txBody>
+      </p:sp>
+      <p:sp>
+        <p:nvSpPr>
+          <p:cNvPr id="17" name="Rounded Rectangle 16"/>
+          <p:cNvSpPr/>
+          <p:nvPr/>
+        </p:nvSpPr>
+        <p:spPr>
+          <a:xfrm>
+            <a:off x="8229600" y="1426464"/>
+            <a:ext cx="3063240" cy="4526280"/>
+          </a:xfrm>
+          <a:prstGeom prst="roundRect">
+            <a:avLst/>
+          </a:prstGeom>
+          <a:solidFill>
+            <a:srgbClr val="161A19"/>
+          </a:solidFill>
+          <a:ln>
+            <a:solidFill>
+              <a:srgbClr val="595F56"/>
+            </a:solidFill>
+          </a:ln>
+        </p:spPr>
+        <p:style>
+          <a:lnRef idx="1">
+            <a:schemeClr val="accent1"/>
+          </a:lnRef>
+          <a:fillRef idx="3">
+            <a:schemeClr val="accent1"/>
+          </a:fillRef>
+          <a:effectRef idx="2">
+            <a:schemeClr val="accent1"/>
+          </a:effectRef>
+          <a:fontRef idx="minor">
+            <a:schemeClr val="lt1"/>
+          </a:fontRef>
+        </p:style>
+        <p:txBody>
+          <a:bodyPr rtlCol="0" anchor="ctr"/>
+          <a:lstStyle/>
+          <a:p>
+            <a:pPr algn="ctr"/>
+          </a:p>
+        </p:txBody>
+      </p:sp>
+      <p:sp>
+        <p:nvSpPr>
+          <p:cNvPr id="18" name="Rectangle 17"/>
+          <p:cNvSpPr/>
+          <p:nvPr/>
+        </p:nvSpPr>
+        <p:spPr>
+          <a:xfrm>
+            <a:off x="8229600" y="1426464"/>
+            <a:ext cx="3063240" cy="109728"/>
+          </a:xfrm>
+          <a:prstGeom prst="rect">
+            <a:avLst/>
+          </a:prstGeom>
+          <a:solidFill>
+            <a:srgbClr val="E0AB5D"/>
+          </a:solidFill>
+          <a:ln>
+            <a:noFill/>
+          </a:ln>
+        </p:spPr>
+        <p:style>
+          <a:lnRef idx="1">
+            <a:schemeClr val="accent1"/>
+          </a:lnRef>
+          <a:fillRef idx="3">
+            <a:schemeClr val="accent1"/>
+          </a:fillRef>
+          <a:effectRef idx="2">
+            <a:schemeClr val="accent1"/>
+          </a:effectRef>
+          <a:fontRef idx="minor">
+            <a:schemeClr val="lt1"/>
+          </a:fontRef>
+        </p:style>
+        <p:txBody>
+          <a:bodyPr rtlCol="0" anchor="ctr"/>
+          <a:lstStyle/>
+          <a:p>
+            <a:pPr algn="ctr"/>
+          </a:p>
+        </p:txBody>
+      </p:sp>
+      <p:sp>
+        <p:nvSpPr>
+          <p:cNvPr id="19" name="TextBox 18"/>
+          <p:cNvSpPr txBox="1"/>
+          <p:nvPr/>
+        </p:nvSpPr>
+        <p:spPr>
+          <a:xfrm>
+            <a:off x="8430768" y="1627632"/>
+            <a:ext cx="2660904" cy="310896"/>
+          </a:xfrm>
+          <a:prstGeom prst="rect">
+            <a:avLst/>
+          </a:prstGeom>
+          <a:noFill/>
+        </p:spPr>
+        <p:txBody>
+          <a:bodyPr wrap="square" anchor="t">
+            <a:spAutoFit/>
+          </a:bodyPr>
+          <a:lstStyle/>
+          <a:p>
+            <a:pPr algn="l"/>
+            <a:r>
+              <a:rPr sz="1400" b="1">
+                <a:solidFill>
+                  <a:srgbClr val="E0AB5D"/>
+                </a:solidFill>
+                <a:latin typeface="Aptos"/>
+              </a:rPr>
+              <a:t>Delivery</a:t>
+            </a:r>
+          </a:p>
+        </p:txBody>
+      </p:sp>
+      <p:sp>
+        <p:nvSpPr>
+          <p:cNvPr id="20" name="TextBox 19"/>
+          <p:cNvSpPr txBox="1"/>
+          <p:nvPr/>
+        </p:nvSpPr>
+        <p:spPr>
+          <a:xfrm>
+            <a:off x="8430768" y="2084832"/>
+            <a:ext cx="2660904" cy="3721608"/>
+          </a:xfrm>
+          <a:prstGeom prst="rect">
+            <a:avLst/>
+          </a:prstGeom>
+          <a:noFill/>
+        </p:spPr>
+        <p:txBody>
+          <a:bodyPr wrap="square" anchor="t" lIns="38100" rIns="38100" tIns="25400" bIns="25400">
+            <a:noAutofit/>
+          </a:bodyPr>
+          <a:lstStyle/>
+          <a:p>
+            <a:pPr>
+              <a:spcAft>
+                <a:spcPts val="600"/>
+              </a:spcAft>
+              <a:defRPr sz="1500">
+                <a:solidFill>
+                  <a:srgbClr val="B4BAAE"/>
+                </a:solidFill>
+                <a:latin typeface="Aptos"/>
+              </a:defRPr>
+            </a:pPr>
+            <a:r>
+              <a:rPr sz="1500" b="0" i="0">
+                <a:latin typeface="Calibri"/>
+              </a:rPr>
+              <a:t>Runs checked Multi-Turn requests through request-scoped planning, capability selection, tool calls, observations, monitoring, and final synthesis.</a:t>
+            </a:r>
+            <a:endParaRPr sz="1500" b="0" i="0">
+              <a:latin typeface="Calibri"/>
+            </a:endParaRPr>
+          </a:p>
+          <a:p>
+            <a:pPr>
+              <a:spcAft>
+                <a:spcPts val="600"/>
+              </a:spcAft>
+              <a:defRPr sz="1500">
+                <a:solidFill>
+                  <a:srgbClr val="B4BAAE"/>
+                </a:solidFill>
+                <a:latin typeface="Aptos"/>
+              </a:defRPr>
+            </a:pPr>
+            <a:r>
+              <a:rPr sz="1500" b="0" i="0">
+                <a:latin typeface="Calibri"/>
+              </a:rPr>
+              <a:t>Launches wrapped copies of selected workflow agents in isolated runtime folders without mutating templates.</a:t>
+            </a:r>
+            <a:endParaRPr sz="1500" b="0" i="0">
+              <a:latin typeface="Calibri"/>
+            </a:endParaRPr>
+          </a:p>
+          <a:p>
+            <a:pPr>
+              <a:spcAft>
+                <a:spcPts val="600"/>
+              </a:spcAft>
+              <a:defRPr sz="1500">
+                <a:solidFill>
+                  <a:srgbClr val="B4BAAE"/>
+                </a:solidFill>
+                <a:latin typeface="Aptos"/>
+              </a:defRPr>
+            </a:pPr>
+            <a:r>
+              <a:rPr sz="1500" b="0" i="0">
+                <a:latin typeface="Calibri"/>
+              </a:rPr>
+              <a:t>Lets users design, validate, save, pause, resume, and stop visual workflows through the Agentic Control Panel.</a:t>
+            </a:r>
+            <a:endParaRPr sz="1500" b="0" i="0">
+              <a:latin typeface="Calibri"/>
+            </a:endParaRPr>
+          </a:p>
+          <a:p>
+            <a:pPr>
+              <a:spcAft>
+                <a:spcPts val="600"/>
+              </a:spcAft>
+              <a:defRPr sz="1500">
+                <a:solidFill>
+                  <a:srgbClr val="B4BAAE"/>
+                </a:solidFill>
+                <a:latin typeface="Aptos"/>
+              </a:defRPr>
+            </a:pPr>
+            <a:r>
+              <a:rPr sz="1500" b="0" i="0">
+                <a:latin typeface="Calibri"/>
+              </a:rPr>
+              <a:t>Turns successful Multi-Turn tool executions into starter `.flw` workflows that can be inspected and validated in ACP.</a:t>
+            </a:r>
+            <a:endParaRPr sz="1500" b="0" i="0">
+              <a:latin typeface="Calibri"/>
+            </a:endParaRPr>
+          </a:p>
+          <a:p>
+            <a:pPr>
+              <a:spcAft>
+                <a:spcPts val="600"/>
+              </a:spcAft>
+              <a:defRPr sz="1500">
+                <a:solidFill>
+                  <a:srgbClr val="B4BAAE"/>
+                </a:solidFill>
+                <a:latin typeface="Aptos"/>
+              </a:defRPr>
+            </a:pPr>
+            <a:r>
+              <a:rPr sz="1500" b="0" i="0">
+                <a:latin typeface="Calibri"/>
+              </a:rPr>
+              <a:t>Packages the project into a distributable Windows release with installer and uninstaller tooling.</a:t>
+            </a:r>
+            <a:endParaRPr sz="1500" b="0" i="0">
+              <a:latin typeface="Calibri"/>
+            </a:endParaRPr>
+          </a:p>
+        </p:txBody>
+      </p:sp>
+    </p:spTree>
+  </p:cSld>
+  <p:clrMapOvr>
+    <a:masterClrMapping/>
+  </p:clrMapOvr>
+</p:sld>
+</file>
+
+<file path=ppt/slides/slide30.xml><?xml version="1.0" encoding="utf-8"?>
 <p:sld xmlns:a="http://schemas.openxmlformats.org/drawingml/2006/main" xmlns:p="http://schemas.openxmlformats.org/presentationml/2006/main" xmlns:r="http://schemas.openxmlformats.org/officeDocument/2006/relationships">
   <p:cSld>
     <p:spTree>
@@ -20728,7 +20146,7 @@
 </p:sld>
 </file>
 
-<file path=ppt/slides/slide32.xml><?xml version="1.0" encoding="utf-8"?>
+<file path=ppt/slides/slide31.xml><?xml version="1.0" encoding="utf-8"?>
 <p:sld xmlns:a="http://schemas.openxmlformats.org/drawingml/2006/main" xmlns:p="http://schemas.openxmlformats.org/presentationml/2006/main" xmlns:r="http://schemas.openxmlformats.org/officeDocument/2006/relationships">
   <p:cSld>
     <p:spTree>
@@ -21096,7 +20514,7 @@
 </p:sld>
 </file>
 
-<file path=ppt/slides/slide33.xml><?xml version="1.0" encoding="utf-8"?>
+<file path=ppt/slides/slide32.xml><?xml version="1.0" encoding="utf-8"?>
 <p:sld xmlns:a="http://schemas.openxmlformats.org/drawingml/2006/main" xmlns:p="http://schemas.openxmlformats.org/presentationml/2006/main" xmlns:r="http://schemas.openxmlformats.org/officeDocument/2006/relationships">
   <p:cSld>
     <p:spTree>
@@ -21464,7 +20882,7 @@
 </p:sld>
 </file>
 
-<file path=ppt/slides/slide34.xml><?xml version="1.0" encoding="utf-8"?>
+<file path=ppt/slides/slide33.xml><?xml version="1.0" encoding="utf-8"?>
 <p:sld xmlns:a="http://schemas.openxmlformats.org/drawingml/2006/main" xmlns:p="http://schemas.openxmlformats.org/presentationml/2006/main" xmlns:r="http://schemas.openxmlformats.org/officeDocument/2006/relationships">
   <p:cSld>
     <p:spTree>
@@ -21832,7 +21250,7 @@
 </p:sld>
 </file>
 
-<file path=ppt/slides/slide35.xml><?xml version="1.0" encoding="utf-8"?>
+<file path=ppt/slides/slide34.xml><?xml version="1.0" encoding="utf-8"?>
 <p:sld xmlns:a="http://schemas.openxmlformats.org/drawingml/2006/main" xmlns:p="http://schemas.openxmlformats.org/presentationml/2006/main" xmlns:r="http://schemas.openxmlformats.org/officeDocument/2006/relationships">
   <p:cSld>
     <p:spTree>
@@ -22200,7 +21618,7 @@
 </p:sld>
 </file>
 
-<file path=ppt/slides/slide36.xml><?xml version="1.0" encoding="utf-8"?>
+<file path=ppt/slides/slide35.xml><?xml version="1.0" encoding="utf-8"?>
 <p:sld xmlns:a="http://schemas.openxmlformats.org/drawingml/2006/main" xmlns:p="http://schemas.openxmlformats.org/presentationml/2006/main" xmlns:r="http://schemas.openxmlformats.org/officeDocument/2006/relationships">
   <p:cSld>
     <p:spTree>
@@ -22568,7 +21986,7 @@
 </p:sld>
 </file>
 
-<file path=ppt/slides/slide37.xml><?xml version="1.0" encoding="utf-8"?>
+<file path=ppt/slides/slide36.xml><?xml version="1.0" encoding="utf-8"?>
 <p:sld xmlns:a="http://schemas.openxmlformats.org/drawingml/2006/main" xmlns:p="http://schemas.openxmlformats.org/presentationml/2006/main" xmlns:r="http://schemas.openxmlformats.org/officeDocument/2006/relationships">
   <p:cSld>
     <p:spTree>
@@ -22936,7 +22354,7 @@
 </p:sld>
 </file>
 
-<file path=ppt/slides/slide38.xml><?xml version="1.0" encoding="utf-8"?>
+<file path=ppt/slides/slide37.xml><?xml version="1.0" encoding="utf-8"?>
 <p:sld xmlns:a="http://schemas.openxmlformats.org/drawingml/2006/main" xmlns:p="http://schemas.openxmlformats.org/presentationml/2006/main" xmlns:r="http://schemas.openxmlformats.org/officeDocument/2006/relationships">
   <p:cSld>
     <p:spTree>
@@ -23304,7 +22722,7 @@
 </p:sld>
 </file>
 
-<file path=ppt/slides/slide39.xml><?xml version="1.0" encoding="utf-8"?>
+<file path=ppt/slides/slide38.xml><?xml version="1.0" encoding="utf-8"?>
 <p:sld xmlns:a="http://schemas.openxmlformats.org/drawingml/2006/main" xmlns:p="http://schemas.openxmlformats.org/presentationml/2006/main" xmlns:r="http://schemas.openxmlformats.org/officeDocument/2006/relationships">
   <p:cSld>
     <p:spTree>
@@ -23672,1477 +23090,7 @@
 </p:sld>
 </file>
 
-<file path=ppt/slides/slide4.xml><?xml version="1.0" encoding="utf-8"?>
-<p:sld xmlns:a="http://schemas.openxmlformats.org/drawingml/2006/main" xmlns:p="http://schemas.openxmlformats.org/presentationml/2006/main" xmlns:r="http://schemas.openxmlformats.org/officeDocument/2006/relationships">
-  <p:cSld>
-    <p:spTree>
-      <p:nvGrpSpPr>
-        <p:cNvPr id="1" name=""/>
-        <p:cNvGrpSpPr/>
-        <p:nvPr/>
-      </p:nvGrpSpPr>
-      <p:grpSpPr/>
-      <p:sp>
-        <p:nvSpPr>
-          <p:cNvPr id="2" name="Rectangle 1"/>
-          <p:cNvSpPr/>
-          <p:nvPr/>
-        </p:nvSpPr>
-        <p:spPr>
-          <a:xfrm>
-            <a:off x="0" y="0"/>
-            <a:ext cx="12191695" cy="6858000"/>
-          </a:xfrm>
-          <a:prstGeom prst="rect">
-            <a:avLst/>
-          </a:prstGeom>
-          <a:solidFill>
-            <a:srgbClr val="080D0D"/>
-          </a:solidFill>
-          <a:ln>
-            <a:noFill/>
-          </a:ln>
-        </p:spPr>
-        <p:style>
-          <a:lnRef idx="1">
-            <a:schemeClr val="accent1"/>
-          </a:lnRef>
-          <a:fillRef idx="3">
-            <a:schemeClr val="accent1"/>
-          </a:fillRef>
-          <a:effectRef idx="2">
-            <a:schemeClr val="accent1"/>
-          </a:effectRef>
-          <a:fontRef idx="minor">
-            <a:schemeClr val="lt1"/>
-          </a:fontRef>
-        </p:style>
-        <p:txBody>
-          <a:bodyPr rtlCol="0" anchor="ctr"/>
-          <a:lstStyle/>
-          <a:p>
-            <a:pPr algn="ctr"/>
-          </a:p>
-        </p:txBody>
-      </p:sp>
-      <p:sp>
-        <p:nvSpPr>
-          <p:cNvPr id="3" name="Rectangle 2"/>
-          <p:cNvSpPr/>
-          <p:nvPr/>
-        </p:nvSpPr>
-        <p:spPr>
-          <a:xfrm>
-            <a:off x="320040" y="384048"/>
-            <a:ext cx="36576" cy="6080760"/>
-          </a:xfrm>
-          <a:prstGeom prst="rect">
-            <a:avLst/>
-          </a:prstGeom>
-          <a:solidFill>
-            <a:srgbClr val="48BF8F"/>
-          </a:solidFill>
-          <a:ln>
-            <a:noFill/>
-          </a:ln>
-        </p:spPr>
-        <p:style>
-          <a:lnRef idx="1">
-            <a:schemeClr val="accent1"/>
-          </a:lnRef>
-          <a:fillRef idx="3">
-            <a:schemeClr val="accent1"/>
-          </a:fillRef>
-          <a:effectRef idx="2">
-            <a:schemeClr val="accent1"/>
-          </a:effectRef>
-          <a:fontRef idx="minor">
-            <a:schemeClr val="lt1"/>
-          </a:fontRef>
-        </p:style>
-        <p:txBody>
-          <a:bodyPr rtlCol="0" anchor="ctr"/>
-          <a:lstStyle/>
-          <a:p>
-            <a:pPr algn="ctr"/>
-          </a:p>
-        </p:txBody>
-      </p:sp>
-      <p:sp>
-        <p:nvSpPr>
-          <p:cNvPr id="4" name="Rectangle 3"/>
-          <p:cNvSpPr/>
-          <p:nvPr/>
-        </p:nvSpPr>
-        <p:spPr>
-          <a:xfrm>
-            <a:off x="11716207" y="384048"/>
-            <a:ext cx="36576" cy="6080760"/>
-          </a:xfrm>
-          <a:prstGeom prst="rect">
-            <a:avLst/>
-          </a:prstGeom>
-          <a:solidFill>
-            <a:srgbClr val="48BF8F"/>
-          </a:solidFill>
-          <a:ln>
-            <a:noFill/>
-          </a:ln>
-        </p:spPr>
-        <p:style>
-          <a:lnRef idx="1">
-            <a:schemeClr val="accent1"/>
-          </a:lnRef>
-          <a:fillRef idx="3">
-            <a:schemeClr val="accent1"/>
-          </a:fillRef>
-          <a:effectRef idx="2">
-            <a:schemeClr val="accent1"/>
-          </a:effectRef>
-          <a:fontRef idx="minor">
-            <a:schemeClr val="lt1"/>
-          </a:fontRef>
-        </p:style>
-        <p:txBody>
-          <a:bodyPr rtlCol="0" anchor="ctr"/>
-          <a:lstStyle/>
-          <a:p>
-            <a:pPr algn="ctr"/>
-          </a:p>
-        </p:txBody>
-      </p:sp>
-      <p:sp>
-        <p:nvSpPr>
-          <p:cNvPr id="5" name="Rectangle 4"/>
-          <p:cNvSpPr/>
-          <p:nvPr/>
-        </p:nvSpPr>
-        <p:spPr>
-          <a:xfrm>
-            <a:off x="502920" y="384048"/>
-            <a:ext cx="11155680" cy="27432"/>
-          </a:xfrm>
-          <a:prstGeom prst="rect">
-            <a:avLst/>
-          </a:prstGeom>
-          <a:solidFill>
-            <a:srgbClr val="48BF8F"/>
-          </a:solidFill>
-          <a:ln>
-            <a:noFill/>
-          </a:ln>
-        </p:spPr>
-        <p:style>
-          <a:lnRef idx="1">
-            <a:schemeClr val="accent1"/>
-          </a:lnRef>
-          <a:fillRef idx="3">
-            <a:schemeClr val="accent1"/>
-          </a:fillRef>
-          <a:effectRef idx="2">
-            <a:schemeClr val="accent1"/>
-          </a:effectRef>
-          <a:fontRef idx="minor">
-            <a:schemeClr val="lt1"/>
-          </a:fontRef>
-        </p:style>
-        <p:txBody>
-          <a:bodyPr rtlCol="0" anchor="ctr"/>
-          <a:lstStyle/>
-          <a:p>
-            <a:pPr algn="ctr"/>
-          </a:p>
-        </p:txBody>
-      </p:sp>
-      <p:sp>
-        <p:nvSpPr>
-          <p:cNvPr id="6" name="Rectangle 5"/>
-          <p:cNvSpPr/>
-          <p:nvPr/>
-        </p:nvSpPr>
-        <p:spPr>
-          <a:xfrm>
-            <a:off x="502920" y="6437376"/>
-            <a:ext cx="11155680" cy="27432"/>
-          </a:xfrm>
-          <a:prstGeom prst="rect">
-            <a:avLst/>
-          </a:prstGeom>
-          <a:solidFill>
-            <a:srgbClr val="48BF8F"/>
-          </a:solidFill>
-          <a:ln>
-            <a:noFill/>
-          </a:ln>
-        </p:spPr>
-        <p:style>
-          <a:lnRef idx="1">
-            <a:schemeClr val="accent1"/>
-          </a:lnRef>
-          <a:fillRef idx="3">
-            <a:schemeClr val="accent1"/>
-          </a:fillRef>
-          <a:effectRef idx="2">
-            <a:schemeClr val="accent1"/>
-          </a:effectRef>
-          <a:fontRef idx="minor">
-            <a:schemeClr val="lt1"/>
-          </a:fontRef>
-        </p:style>
-        <p:txBody>
-          <a:bodyPr rtlCol="0" anchor="ctr"/>
-          <a:lstStyle/>
-          <a:p>
-            <a:pPr algn="ctr"/>
-          </a:p>
-        </p:txBody>
-      </p:sp>
-      <p:sp>
-        <p:nvSpPr>
-          <p:cNvPr id="7" name="TextBox 6"/>
-          <p:cNvSpPr txBox="1"/>
-          <p:nvPr/>
-        </p:nvSpPr>
-        <p:spPr>
-          <a:xfrm>
-            <a:off x="713232" y="548640"/>
-            <a:ext cx="10698480" cy="301752"/>
-          </a:xfrm>
-          <a:prstGeom prst="rect">
-            <a:avLst/>
-          </a:prstGeom>
-          <a:noFill/>
-        </p:spPr>
-        <p:txBody>
-          <a:bodyPr wrap="square" anchor="t">
-            <a:spAutoFit/>
-          </a:bodyPr>
-          <a:lstStyle/>
-          <a:p>
-            <a:pPr algn="l"/>
-            <a:r>
-              <a:rPr sz="1000" b="1">
-                <a:solidFill>
-                  <a:srgbClr val="48BF8F"/>
-                </a:solidFill>
-                <a:latin typeface="Aptos"/>
-              </a:rPr>
-              <a:t>EXECUTION PIPELINE</a:t>
-            </a:r>
-          </a:p>
-        </p:txBody>
-      </p:sp>
-      <p:sp>
-        <p:nvSpPr>
-          <p:cNvPr id="8" name="TextBox 7"/>
-          <p:cNvSpPr txBox="1"/>
-          <p:nvPr/>
-        </p:nvSpPr>
-        <p:spPr>
-          <a:xfrm>
-            <a:off x="694944" y="850392"/>
-            <a:ext cx="10881360" cy="566928"/>
-          </a:xfrm>
-          <a:prstGeom prst="rect">
-            <a:avLst/>
-          </a:prstGeom>
-          <a:noFill/>
-        </p:spPr>
-        <p:txBody>
-          <a:bodyPr wrap="square" anchor="t">
-            <a:spAutoFit/>
-          </a:bodyPr>
-          <a:lstStyle/>
-          <a:p>
-            <a:pPr algn="l"/>
-            <a:r>
-              <a:rPr sz="2700" b="0">
-                <a:solidFill>
-                  <a:srgbClr val="E8E8DE"/>
-                </a:solidFill>
-                <a:latin typeface="Aptos Display"/>
-              </a:rPr>
-              <a:t>How It Works</a:t>
-            </a:r>
-          </a:p>
-        </p:txBody>
-      </p:sp>
-      <p:sp>
-        <p:nvSpPr>
-          <p:cNvPr id="9" name="Rounded Rectangle 8"/>
-          <p:cNvSpPr/>
-          <p:nvPr/>
-        </p:nvSpPr>
-        <p:spPr>
-          <a:xfrm>
-            <a:off x="749808" y="1828800"/>
-            <a:ext cx="1591056" cy="685800"/>
-          </a:xfrm>
-          <a:prstGeom prst="roundRect">
-            <a:avLst/>
-          </a:prstGeom>
-          <a:solidFill>
-            <a:srgbClr val="202322"/>
-          </a:solidFill>
-          <a:ln>
-            <a:solidFill>
-              <a:srgbClr val="48BF8F"/>
-            </a:solidFill>
-          </a:ln>
-        </p:spPr>
-        <p:style>
-          <a:lnRef idx="1">
-            <a:schemeClr val="accent1"/>
-          </a:lnRef>
-          <a:fillRef idx="3">
-            <a:schemeClr val="accent1"/>
-          </a:fillRef>
-          <a:effectRef idx="2">
-            <a:schemeClr val="accent1"/>
-          </a:effectRef>
-          <a:fontRef idx="minor">
-            <a:schemeClr val="lt1"/>
-          </a:fontRef>
-        </p:style>
-        <p:txBody>
-          <a:bodyPr rtlCol="0" anchor="ctr"/>
-          <a:lstStyle/>
-          <a:p>
-            <a:pPr algn="ctr"/>
-          </a:p>
-        </p:txBody>
-      </p:sp>
-      <p:sp>
-        <p:nvSpPr>
-          <p:cNvPr id="10" name="TextBox 9"/>
-          <p:cNvSpPr txBox="1"/>
-          <p:nvPr/>
-        </p:nvSpPr>
-        <p:spPr>
-          <a:xfrm>
-            <a:off x="822959" y="1993392"/>
-            <a:ext cx="1444752" cy="256032"/>
-          </a:xfrm>
-          <a:prstGeom prst="rect">
-            <a:avLst/>
-          </a:prstGeom>
-          <a:noFill/>
-        </p:spPr>
-        <p:txBody>
-          <a:bodyPr wrap="square" anchor="t">
-            <a:spAutoFit/>
-          </a:bodyPr>
-          <a:lstStyle/>
-          <a:p>
-            <a:pPr algn="ctr"/>
-            <a:r>
-              <a:rPr sz="1000" b="1">
-                <a:solidFill>
-                  <a:srgbClr val="E8E8DE"/>
-                </a:solidFill>
-                <a:latin typeface="Aptos"/>
-              </a:rPr>
-              <a:t>Browser</a:t>
-            </a:r>
-          </a:p>
-        </p:txBody>
-      </p:sp>
-      <p:sp>
-        <p:nvSpPr>
-          <p:cNvPr id="11" name="TextBox 10"/>
-          <p:cNvSpPr txBox="1"/>
-          <p:nvPr/>
-        </p:nvSpPr>
-        <p:spPr>
-          <a:xfrm>
-            <a:off x="2340864" y="2002536"/>
-            <a:ext cx="246888" cy="182880"/>
-          </a:xfrm>
-          <a:prstGeom prst="rect">
-            <a:avLst/>
-          </a:prstGeom>
-          <a:noFill/>
-        </p:spPr>
-        <p:txBody>
-          <a:bodyPr wrap="square" anchor="t">
-            <a:spAutoFit/>
-          </a:bodyPr>
-          <a:lstStyle/>
-          <a:p>
-            <a:pPr algn="ctr"/>
-            <a:r>
-              <a:rPr sz="1200" b="1">
-                <a:solidFill>
-                  <a:srgbClr val="48BF8F"/>
-                </a:solidFill>
-                <a:latin typeface="Aptos"/>
-              </a:rPr>
-              <a:t>&gt;</a:t>
-            </a:r>
-          </a:p>
-        </p:txBody>
-      </p:sp>
-      <p:sp>
-        <p:nvSpPr>
-          <p:cNvPr id="12" name="Rounded Rectangle 11"/>
-          <p:cNvSpPr/>
-          <p:nvPr/>
-        </p:nvSpPr>
-        <p:spPr>
-          <a:xfrm>
-            <a:off x="2587751" y="1828800"/>
-            <a:ext cx="1591056" cy="685800"/>
-          </a:xfrm>
-          <a:prstGeom prst="roundRect">
-            <a:avLst/>
-          </a:prstGeom>
-          <a:solidFill>
-            <a:srgbClr val="202322"/>
-          </a:solidFill>
-          <a:ln>
-            <a:solidFill>
-              <a:srgbClr val="48BF8F"/>
-            </a:solidFill>
-          </a:ln>
-        </p:spPr>
-        <p:style>
-          <a:lnRef idx="1">
-            <a:schemeClr val="accent1"/>
-          </a:lnRef>
-          <a:fillRef idx="3">
-            <a:schemeClr val="accent1"/>
-          </a:fillRef>
-          <a:effectRef idx="2">
-            <a:schemeClr val="accent1"/>
-          </a:effectRef>
-          <a:fontRef idx="minor">
-            <a:schemeClr val="lt1"/>
-          </a:fontRef>
-        </p:style>
-        <p:txBody>
-          <a:bodyPr rtlCol="0" anchor="ctr"/>
-          <a:lstStyle/>
-          <a:p>
-            <a:pPr algn="ctr"/>
-          </a:p>
-        </p:txBody>
-      </p:sp>
-      <p:sp>
-        <p:nvSpPr>
-          <p:cNvPr id="13" name="TextBox 12"/>
-          <p:cNvSpPr txBox="1"/>
-          <p:nvPr/>
-        </p:nvSpPr>
-        <p:spPr>
-          <a:xfrm>
-            <a:off x="2660903" y="1993392"/>
-            <a:ext cx="1444752" cy="256032"/>
-          </a:xfrm>
-          <a:prstGeom prst="rect">
-            <a:avLst/>
-          </a:prstGeom>
-          <a:noFill/>
-        </p:spPr>
-        <p:txBody>
-          <a:bodyPr wrap="square" anchor="t">
-            <a:spAutoFit/>
-          </a:bodyPr>
-          <a:lstStyle/>
-          <a:p>
-            <a:pPr algn="ctr"/>
-            <a:r>
-              <a:rPr sz="1000" b="1">
-                <a:solidFill>
-                  <a:srgbClr val="E8E8DE"/>
-                </a:solidFill>
-                <a:latin typeface="Aptos"/>
-              </a:rPr>
-              <a:t>Channels</a:t>
-            </a:r>
-          </a:p>
-        </p:txBody>
-      </p:sp>
-      <p:sp>
-        <p:nvSpPr>
-          <p:cNvPr id="14" name="TextBox 13"/>
-          <p:cNvSpPr txBox="1"/>
-          <p:nvPr/>
-        </p:nvSpPr>
-        <p:spPr>
-          <a:xfrm>
-            <a:off x="4178807" y="2002536"/>
-            <a:ext cx="246888" cy="182880"/>
-          </a:xfrm>
-          <a:prstGeom prst="rect">
-            <a:avLst/>
-          </a:prstGeom>
-          <a:noFill/>
-        </p:spPr>
-        <p:txBody>
-          <a:bodyPr wrap="square" anchor="t">
-            <a:spAutoFit/>
-          </a:bodyPr>
-          <a:lstStyle/>
-          <a:p>
-            <a:pPr algn="ctr"/>
-            <a:r>
-              <a:rPr sz="1200" b="1">
-                <a:solidFill>
-                  <a:srgbClr val="48BF8F"/>
-                </a:solidFill>
-                <a:latin typeface="Aptos"/>
-              </a:rPr>
-              <a:t>&gt;</a:t>
-            </a:r>
-          </a:p>
-        </p:txBody>
-      </p:sp>
-      <p:sp>
-        <p:nvSpPr>
-          <p:cNvPr id="15" name="Rounded Rectangle 14"/>
-          <p:cNvSpPr/>
-          <p:nvPr/>
-        </p:nvSpPr>
-        <p:spPr>
-          <a:xfrm>
-            <a:off x="4425696" y="1828800"/>
-            <a:ext cx="1591056" cy="685800"/>
-          </a:xfrm>
-          <a:prstGeom prst="roundRect">
-            <a:avLst/>
-          </a:prstGeom>
-          <a:solidFill>
-            <a:srgbClr val="202322"/>
-          </a:solidFill>
-          <a:ln>
-            <a:solidFill>
-              <a:srgbClr val="48BF8F"/>
-            </a:solidFill>
-          </a:ln>
-        </p:spPr>
-        <p:style>
-          <a:lnRef idx="1">
-            <a:schemeClr val="accent1"/>
-          </a:lnRef>
-          <a:fillRef idx="3">
-            <a:schemeClr val="accent1"/>
-          </a:fillRef>
-          <a:effectRef idx="2">
-            <a:schemeClr val="accent1"/>
-          </a:effectRef>
-          <a:fontRef idx="minor">
-            <a:schemeClr val="lt1"/>
-          </a:fontRef>
-        </p:style>
-        <p:txBody>
-          <a:bodyPr rtlCol="0" anchor="ctr"/>
-          <a:lstStyle/>
-          <a:p>
-            <a:pPr algn="ctr"/>
-          </a:p>
-        </p:txBody>
-      </p:sp>
-      <p:sp>
-        <p:nvSpPr>
-          <p:cNvPr id="16" name="TextBox 15"/>
-          <p:cNvSpPr txBox="1"/>
-          <p:nvPr/>
-        </p:nvSpPr>
-        <p:spPr>
-          <a:xfrm>
-            <a:off x="4498848" y="1993392"/>
-            <a:ext cx="1444752" cy="256032"/>
-          </a:xfrm>
-          <a:prstGeom prst="rect">
-            <a:avLst/>
-          </a:prstGeom>
-          <a:noFill/>
-        </p:spPr>
-        <p:txBody>
-          <a:bodyPr wrap="square" anchor="t">
-            <a:spAutoFit/>
-          </a:bodyPr>
-          <a:lstStyle/>
-          <a:p>
-            <a:pPr algn="ctr"/>
-            <a:r>
-              <a:rPr sz="1000" b="1">
-                <a:solidFill>
-                  <a:srgbClr val="E8E8DE"/>
-                </a:solidFill>
-                <a:latin typeface="Aptos"/>
-              </a:rPr>
-              <a:t>RAG</a:t>
-            </a:r>
-          </a:p>
-        </p:txBody>
-      </p:sp>
-      <p:sp>
-        <p:nvSpPr>
-          <p:cNvPr id="17" name="TextBox 16"/>
-          <p:cNvSpPr txBox="1"/>
-          <p:nvPr/>
-        </p:nvSpPr>
-        <p:spPr>
-          <a:xfrm>
-            <a:off x="6016752" y="2002536"/>
-            <a:ext cx="246888" cy="182880"/>
-          </a:xfrm>
-          <a:prstGeom prst="rect">
-            <a:avLst/>
-          </a:prstGeom>
-          <a:noFill/>
-        </p:spPr>
-        <p:txBody>
-          <a:bodyPr wrap="square" anchor="t">
-            <a:spAutoFit/>
-          </a:bodyPr>
-          <a:lstStyle/>
-          <a:p>
-            <a:pPr algn="ctr"/>
-            <a:r>
-              <a:rPr sz="1200" b="1">
-                <a:solidFill>
-                  <a:srgbClr val="48BF8F"/>
-                </a:solidFill>
-                <a:latin typeface="Aptos"/>
-              </a:rPr>
-              <a:t>&gt;</a:t>
-            </a:r>
-          </a:p>
-        </p:txBody>
-      </p:sp>
-      <p:sp>
-        <p:nvSpPr>
-          <p:cNvPr id="18" name="Rounded Rectangle 17"/>
-          <p:cNvSpPr/>
-          <p:nvPr/>
-        </p:nvSpPr>
-        <p:spPr>
-          <a:xfrm>
-            <a:off x="6263640" y="1828800"/>
-            <a:ext cx="1591056" cy="685800"/>
-          </a:xfrm>
-          <a:prstGeom prst="roundRect">
-            <a:avLst/>
-          </a:prstGeom>
-          <a:solidFill>
-            <a:srgbClr val="202322"/>
-          </a:solidFill>
-          <a:ln>
-            <a:solidFill>
-              <a:srgbClr val="48BF8F"/>
-            </a:solidFill>
-          </a:ln>
-        </p:spPr>
-        <p:style>
-          <a:lnRef idx="1">
-            <a:schemeClr val="accent1"/>
-          </a:lnRef>
-          <a:fillRef idx="3">
-            <a:schemeClr val="accent1"/>
-          </a:fillRef>
-          <a:effectRef idx="2">
-            <a:schemeClr val="accent1"/>
-          </a:effectRef>
-          <a:fontRef idx="minor">
-            <a:schemeClr val="lt1"/>
-          </a:fontRef>
-        </p:style>
-        <p:txBody>
-          <a:bodyPr rtlCol="0" anchor="ctr"/>
-          <a:lstStyle/>
-          <a:p>
-            <a:pPr algn="ctr"/>
-          </a:p>
-        </p:txBody>
-      </p:sp>
-      <p:sp>
-        <p:nvSpPr>
-          <p:cNvPr id="19" name="TextBox 18"/>
-          <p:cNvSpPr txBox="1"/>
-          <p:nvPr/>
-        </p:nvSpPr>
-        <p:spPr>
-          <a:xfrm>
-            <a:off x="6336792" y="1993392"/>
-            <a:ext cx="1444752" cy="256032"/>
-          </a:xfrm>
-          <a:prstGeom prst="rect">
-            <a:avLst/>
-          </a:prstGeom>
-          <a:noFill/>
-        </p:spPr>
-        <p:txBody>
-          <a:bodyPr wrap="square" anchor="t">
-            <a:spAutoFit/>
-          </a:bodyPr>
-          <a:lstStyle/>
-          <a:p>
-            <a:pPr algn="ctr"/>
-            <a:r>
-              <a:rPr sz="1000" b="1">
-                <a:solidFill>
-                  <a:srgbClr val="E8E8DE"/>
-                </a:solidFill>
-                <a:latin typeface="Aptos"/>
-              </a:rPr>
-              <a:t>Planner</a:t>
-            </a:r>
-          </a:p>
-        </p:txBody>
-      </p:sp>
-      <p:sp>
-        <p:nvSpPr>
-          <p:cNvPr id="20" name="TextBox 19"/>
-          <p:cNvSpPr txBox="1"/>
-          <p:nvPr/>
-        </p:nvSpPr>
-        <p:spPr>
-          <a:xfrm>
-            <a:off x="7854696" y="2002536"/>
-            <a:ext cx="246888" cy="182880"/>
-          </a:xfrm>
-          <a:prstGeom prst="rect">
-            <a:avLst/>
-          </a:prstGeom>
-          <a:noFill/>
-        </p:spPr>
-        <p:txBody>
-          <a:bodyPr wrap="square" anchor="t">
-            <a:spAutoFit/>
-          </a:bodyPr>
-          <a:lstStyle/>
-          <a:p>
-            <a:pPr algn="ctr"/>
-            <a:r>
-              <a:rPr sz="1200" b="1">
-                <a:solidFill>
-                  <a:srgbClr val="48BF8F"/>
-                </a:solidFill>
-                <a:latin typeface="Aptos"/>
-              </a:rPr>
-              <a:t>&gt;</a:t>
-            </a:r>
-          </a:p>
-        </p:txBody>
-      </p:sp>
-      <p:sp>
-        <p:nvSpPr>
-          <p:cNvPr id="21" name="Rounded Rectangle 20"/>
-          <p:cNvSpPr/>
-          <p:nvPr/>
-        </p:nvSpPr>
-        <p:spPr>
-          <a:xfrm>
-            <a:off x="8101583" y="1828800"/>
-            <a:ext cx="1591056" cy="685800"/>
-          </a:xfrm>
-          <a:prstGeom prst="roundRect">
-            <a:avLst/>
-          </a:prstGeom>
-          <a:solidFill>
-            <a:srgbClr val="202322"/>
-          </a:solidFill>
-          <a:ln>
-            <a:solidFill>
-              <a:srgbClr val="48BF8F"/>
-            </a:solidFill>
-          </a:ln>
-        </p:spPr>
-        <p:style>
-          <a:lnRef idx="1">
-            <a:schemeClr val="accent1"/>
-          </a:lnRef>
-          <a:fillRef idx="3">
-            <a:schemeClr val="accent1"/>
-          </a:fillRef>
-          <a:effectRef idx="2">
-            <a:schemeClr val="accent1"/>
-          </a:effectRef>
-          <a:fontRef idx="minor">
-            <a:schemeClr val="lt1"/>
-          </a:fontRef>
-        </p:style>
-        <p:txBody>
-          <a:bodyPr rtlCol="0" anchor="ctr"/>
-          <a:lstStyle/>
-          <a:p>
-            <a:pPr algn="ctr"/>
-          </a:p>
-        </p:txBody>
-      </p:sp>
-      <p:sp>
-        <p:nvSpPr>
-          <p:cNvPr id="22" name="TextBox 21"/>
-          <p:cNvSpPr txBox="1"/>
-          <p:nvPr/>
-        </p:nvSpPr>
-        <p:spPr>
-          <a:xfrm>
-            <a:off x="8174736" y="1993392"/>
-            <a:ext cx="1444752" cy="256032"/>
-          </a:xfrm>
-          <a:prstGeom prst="rect">
-            <a:avLst/>
-          </a:prstGeom>
-          <a:noFill/>
-        </p:spPr>
-        <p:txBody>
-          <a:bodyPr wrap="square" anchor="t">
-            <a:spAutoFit/>
-          </a:bodyPr>
-          <a:lstStyle/>
-          <a:p>
-            <a:pPr algn="ctr"/>
-            <a:r>
-              <a:rPr sz="1000" b="1">
-                <a:solidFill>
-                  <a:srgbClr val="E8E8DE"/>
-                </a:solidFill>
-                <a:latin typeface="Aptos"/>
-              </a:rPr>
-              <a:t>Tools</a:t>
-            </a:r>
-          </a:p>
-        </p:txBody>
-      </p:sp>
-      <p:sp>
-        <p:nvSpPr>
-          <p:cNvPr id="23" name="TextBox 22"/>
-          <p:cNvSpPr txBox="1"/>
-          <p:nvPr/>
-        </p:nvSpPr>
-        <p:spPr>
-          <a:xfrm>
-            <a:off x="9692640" y="2002536"/>
-            <a:ext cx="246888" cy="182880"/>
-          </a:xfrm>
-          <a:prstGeom prst="rect">
-            <a:avLst/>
-          </a:prstGeom>
-          <a:noFill/>
-        </p:spPr>
-        <p:txBody>
-          <a:bodyPr wrap="square" anchor="t">
-            <a:spAutoFit/>
-          </a:bodyPr>
-          <a:lstStyle/>
-          <a:p>
-            <a:pPr algn="ctr"/>
-            <a:r>
-              <a:rPr sz="1200" b="1">
-                <a:solidFill>
-                  <a:srgbClr val="48BF8F"/>
-                </a:solidFill>
-                <a:latin typeface="Aptos"/>
-              </a:rPr>
-              <a:t>&gt;</a:t>
-            </a:r>
-          </a:p>
-        </p:txBody>
-      </p:sp>
-      <p:sp>
-        <p:nvSpPr>
-          <p:cNvPr id="24" name="Rounded Rectangle 23"/>
-          <p:cNvSpPr/>
-          <p:nvPr/>
-        </p:nvSpPr>
-        <p:spPr>
-          <a:xfrm>
-            <a:off x="9939528" y="1828800"/>
-            <a:ext cx="1591056" cy="685800"/>
-          </a:xfrm>
-          <a:prstGeom prst="roundRect">
-            <a:avLst/>
-          </a:prstGeom>
-          <a:solidFill>
-            <a:srgbClr val="202322"/>
-          </a:solidFill>
-          <a:ln>
-            <a:solidFill>
-              <a:srgbClr val="48BF8F"/>
-            </a:solidFill>
-          </a:ln>
-        </p:spPr>
-        <p:style>
-          <a:lnRef idx="1">
-            <a:schemeClr val="accent1"/>
-          </a:lnRef>
-          <a:fillRef idx="3">
-            <a:schemeClr val="accent1"/>
-          </a:fillRef>
-          <a:effectRef idx="2">
-            <a:schemeClr val="accent1"/>
-          </a:effectRef>
-          <a:fontRef idx="minor">
-            <a:schemeClr val="lt1"/>
-          </a:fontRef>
-        </p:style>
-        <p:txBody>
-          <a:bodyPr rtlCol="0" anchor="ctr"/>
-          <a:lstStyle/>
-          <a:p>
-            <a:pPr algn="ctr"/>
-          </a:p>
-        </p:txBody>
-      </p:sp>
-      <p:sp>
-        <p:nvSpPr>
-          <p:cNvPr id="25" name="TextBox 24"/>
-          <p:cNvSpPr txBox="1"/>
-          <p:nvPr/>
-        </p:nvSpPr>
-        <p:spPr>
-          <a:xfrm>
-            <a:off x="10012680" y="1993392"/>
-            <a:ext cx="1444752" cy="256032"/>
-          </a:xfrm>
-          <a:prstGeom prst="rect">
-            <a:avLst/>
-          </a:prstGeom>
-          <a:noFill/>
-        </p:spPr>
-        <p:txBody>
-          <a:bodyPr wrap="square" anchor="t">
-            <a:spAutoFit/>
-          </a:bodyPr>
-          <a:lstStyle/>
-          <a:p>
-            <a:pPr algn="ctr"/>
-            <a:r>
-              <a:rPr sz="1000" b="1">
-                <a:solidFill>
-                  <a:srgbClr val="E8E8DE"/>
-                </a:solidFill>
-                <a:latin typeface="Aptos"/>
-              </a:rPr>
-              <a:t>Answer</a:t>
-            </a:r>
-          </a:p>
-        </p:txBody>
-      </p:sp>
-      <p:sp>
-        <p:nvSpPr>
-          <p:cNvPr id="26" name="Rounded Rectangle 25"/>
-          <p:cNvSpPr/>
-          <p:nvPr/>
-        </p:nvSpPr>
-        <p:spPr>
-          <a:xfrm>
-            <a:off x="713232" y="2971800"/>
-            <a:ext cx="5349240" cy="2788920"/>
-          </a:xfrm>
-          <a:prstGeom prst="roundRect">
-            <a:avLst/>
-          </a:prstGeom>
-          <a:solidFill>
-            <a:srgbClr val="161A19"/>
-          </a:solidFill>
-          <a:ln>
-            <a:solidFill>
-              <a:srgbClr val="595F56"/>
-            </a:solidFill>
-          </a:ln>
-        </p:spPr>
-        <p:style>
-          <a:lnRef idx="1">
-            <a:schemeClr val="accent1"/>
-          </a:lnRef>
-          <a:fillRef idx="3">
-            <a:schemeClr val="accent1"/>
-          </a:fillRef>
-          <a:effectRef idx="2">
-            <a:schemeClr val="accent1"/>
-          </a:effectRef>
-          <a:fontRef idx="minor">
-            <a:schemeClr val="lt1"/>
-          </a:fontRef>
-        </p:style>
-        <p:txBody>
-          <a:bodyPr rtlCol="0" anchor="ctr"/>
-          <a:lstStyle/>
-          <a:p>
-            <a:pPr algn="ctr"/>
-          </a:p>
-        </p:txBody>
-      </p:sp>
-      <p:sp>
-        <p:nvSpPr>
-          <p:cNvPr id="27" name="Rectangle 26"/>
-          <p:cNvSpPr/>
-          <p:nvPr/>
-        </p:nvSpPr>
-        <p:spPr>
-          <a:xfrm>
-            <a:off x="713232" y="2971800"/>
-            <a:ext cx="5349240" cy="109728"/>
-          </a:xfrm>
-          <a:prstGeom prst="rect">
-            <a:avLst/>
-          </a:prstGeom>
-          <a:solidFill>
-            <a:srgbClr val="48BF8F"/>
-          </a:solidFill>
-          <a:ln>
-            <a:noFill/>
-          </a:ln>
-        </p:spPr>
-        <p:style>
-          <a:lnRef idx="1">
-            <a:schemeClr val="accent1"/>
-          </a:lnRef>
-          <a:fillRef idx="3">
-            <a:schemeClr val="accent1"/>
-          </a:fillRef>
-          <a:effectRef idx="2">
-            <a:schemeClr val="accent1"/>
-          </a:effectRef>
-          <a:fontRef idx="minor">
-            <a:schemeClr val="lt1"/>
-          </a:fontRef>
-        </p:style>
-        <p:txBody>
-          <a:bodyPr rtlCol="0" anchor="ctr"/>
-          <a:lstStyle/>
-          <a:p>
-            <a:pPr algn="ctr"/>
-          </a:p>
-        </p:txBody>
-      </p:sp>
-      <p:sp>
-        <p:nvSpPr>
-          <p:cNvPr id="28" name="TextBox 27"/>
-          <p:cNvSpPr txBox="1"/>
-          <p:nvPr/>
-        </p:nvSpPr>
-        <p:spPr>
-          <a:xfrm>
-            <a:off x="914400" y="3172968"/>
-            <a:ext cx="4946903" cy="310896"/>
-          </a:xfrm>
-          <a:prstGeom prst="rect">
-            <a:avLst/>
-          </a:prstGeom>
-          <a:noFill/>
-        </p:spPr>
-        <p:txBody>
-          <a:bodyPr wrap="square" anchor="t">
-            <a:spAutoFit/>
-          </a:bodyPr>
-          <a:lstStyle/>
-          <a:p>
-            <a:pPr algn="l"/>
-            <a:r>
-              <a:rPr sz="1400" b="1">
-                <a:solidFill>
-                  <a:srgbClr val="48BF8F"/>
-                </a:solidFill>
-                <a:latin typeface="Aptos"/>
-              </a:rPr>
-              <a:t>Request path</a:t>
-            </a:r>
-          </a:p>
-        </p:txBody>
-      </p:sp>
-      <p:sp>
-        <p:nvSpPr>
-          <p:cNvPr id="29" name="TextBox 28"/>
-          <p:cNvSpPr txBox="1"/>
-          <p:nvPr/>
-        </p:nvSpPr>
-        <p:spPr>
-          <a:xfrm>
-            <a:off x="914400" y="3630168"/>
-            <a:ext cx="4946903" cy="1984248"/>
-          </a:xfrm>
-          <a:prstGeom prst="rect">
-            <a:avLst/>
-          </a:prstGeom>
-          <a:noFill/>
-        </p:spPr>
-        <p:txBody>
-          <a:bodyPr wrap="square" anchor="t" lIns="38100" rIns="38100" tIns="25400" bIns="25400">
-            <a:noAutofit/>
-          </a:bodyPr>
-          <a:lstStyle/>
-          <a:p>
-            <a:pPr>
-              <a:spcAft>
-                <a:spcPts val="600"/>
-              </a:spcAft>
-              <a:defRPr sz="1500">
-                <a:solidFill>
-                  <a:srgbClr val="B4BAAE"/>
-                </a:solidFill>
-                <a:latin typeface="Aptos"/>
-              </a:defRPr>
-            </a:pPr>
-            <a:r>
-              <a:rPr sz="1500" b="0" i="0">
-                <a:latin typeface="Calibri"/>
-              </a:rPr>
-              <a:t>Browser UI sends chat and workflow requests through Django views and Channels WebSockets.</a:t>
-            </a:r>
-            <a:endParaRPr sz="1500" b="0" i="0">
-              <a:latin typeface="Calibri"/>
-            </a:endParaRPr>
-          </a:p>
-          <a:p>
-            <a:pPr>
-              <a:spcAft>
-                <a:spcPts val="600"/>
-              </a:spcAft>
-              <a:defRPr sz="1500">
-                <a:solidFill>
-                  <a:srgbClr val="B4BAAE"/>
-                </a:solidFill>
-                <a:latin typeface="Aptos"/>
-              </a:defRPr>
-            </a:pPr>
-            <a:r>
-              <a:rPr sz="1500" b="0" i="0">
-                <a:latin typeface="Calibri"/>
-              </a:rPr>
-              <a:t>RAG chains load selected file/directory context, retrieve relevant chunks, and build answer prompts.</a:t>
-            </a:r>
-            <a:endParaRPr sz="1500" b="0" i="0">
-              <a:latin typeface="Calibri"/>
-            </a:endParaRPr>
-          </a:p>
-          <a:p>
-            <a:pPr>
-              <a:spcAft>
-                <a:spcPts val="600"/>
-              </a:spcAft>
-              <a:defRPr sz="1500">
-                <a:solidFill>
-                  <a:srgbClr val="B4BAAE"/>
-                </a:solidFill>
-                <a:latin typeface="Aptos"/>
-              </a:defRPr>
-            </a:pPr>
-            <a:r>
-              <a:rPr sz="1500" b="0" i="0">
-                <a:latin typeface="Calibri"/>
-              </a:rPr>
-              <a:t>DB-menu actions validate directories or SQLite files in the browser, then call Django views that either copy the live database out or stage a replacement into `DB/ToLoad/db.sqlite3`.</a:t>
-            </a:r>
-            <a:endParaRPr sz="1500" b="0" i="0">
-              <a:latin typeface="Calibri"/>
-            </a:endParaRPr>
-          </a:p>
-        </p:txBody>
-      </p:sp>
-      <p:sp>
-        <p:nvSpPr>
-          <p:cNvPr id="30" name="Rounded Rectangle 29"/>
-          <p:cNvSpPr/>
-          <p:nvPr/>
-        </p:nvSpPr>
-        <p:spPr>
-          <a:xfrm>
-            <a:off x="6327648" y="2971800"/>
-            <a:ext cx="5074920" cy="2788920"/>
-          </a:xfrm>
-          <a:prstGeom prst="roundRect">
-            <a:avLst/>
-          </a:prstGeom>
-          <a:solidFill>
-            <a:srgbClr val="161A19"/>
-          </a:solidFill>
-          <a:ln>
-            <a:solidFill>
-              <a:srgbClr val="595F56"/>
-            </a:solidFill>
-          </a:ln>
-        </p:spPr>
-        <p:style>
-          <a:lnRef idx="1">
-            <a:schemeClr val="accent1"/>
-          </a:lnRef>
-          <a:fillRef idx="3">
-            <a:schemeClr val="accent1"/>
-          </a:fillRef>
-          <a:effectRef idx="2">
-            <a:schemeClr val="accent1"/>
-          </a:effectRef>
-          <a:fontRef idx="minor">
-            <a:schemeClr val="lt1"/>
-          </a:fontRef>
-        </p:style>
-        <p:txBody>
-          <a:bodyPr rtlCol="0" anchor="ctr"/>
-          <a:lstStyle/>
-          <a:p>
-            <a:pPr algn="ctr"/>
-          </a:p>
-        </p:txBody>
-      </p:sp>
-      <p:sp>
-        <p:nvSpPr>
-          <p:cNvPr id="31" name="Rectangle 30"/>
-          <p:cNvSpPr/>
-          <p:nvPr/>
-        </p:nvSpPr>
-        <p:spPr>
-          <a:xfrm>
-            <a:off x="6327648" y="2971800"/>
-            <a:ext cx="5074920" cy="109728"/>
-          </a:xfrm>
-          <a:prstGeom prst="rect">
-            <a:avLst/>
-          </a:prstGeom>
-          <a:solidFill>
-            <a:srgbClr val="C48052"/>
-          </a:solidFill>
-          <a:ln>
-            <a:noFill/>
-          </a:ln>
-        </p:spPr>
-        <p:style>
-          <a:lnRef idx="1">
-            <a:schemeClr val="accent1"/>
-          </a:lnRef>
-          <a:fillRef idx="3">
-            <a:schemeClr val="accent1"/>
-          </a:fillRef>
-          <a:effectRef idx="2">
-            <a:schemeClr val="accent1"/>
-          </a:effectRef>
-          <a:fontRef idx="minor">
-            <a:schemeClr val="lt1"/>
-          </a:fontRef>
-        </p:style>
-        <p:txBody>
-          <a:bodyPr rtlCol="0" anchor="ctr"/>
-          <a:lstStyle/>
-          <a:p>
-            <a:pPr algn="ctr"/>
-          </a:p>
-        </p:txBody>
-      </p:sp>
-      <p:sp>
-        <p:nvSpPr>
-          <p:cNvPr id="32" name="TextBox 31"/>
-          <p:cNvSpPr txBox="1"/>
-          <p:nvPr/>
-        </p:nvSpPr>
-        <p:spPr>
-          <a:xfrm>
-            <a:off x="6528816" y="3172968"/>
-            <a:ext cx="4672583" cy="310896"/>
-          </a:xfrm>
-          <a:prstGeom prst="rect">
-            <a:avLst/>
-          </a:prstGeom>
-          <a:noFill/>
-        </p:spPr>
-        <p:txBody>
-          <a:bodyPr wrap="square" anchor="t">
-            <a:spAutoFit/>
-          </a:bodyPr>
-          <a:lstStyle/>
-          <a:p>
-            <a:pPr algn="l"/>
-            <a:r>
-              <a:rPr sz="1400" b="1">
-                <a:solidFill>
-                  <a:srgbClr val="C48052"/>
-                </a:solidFill>
-                <a:latin typeface="Aptos"/>
-              </a:rPr>
-              <a:t>Runtime path</a:t>
-            </a:r>
-          </a:p>
-        </p:txBody>
-      </p:sp>
-      <p:sp>
-        <p:nvSpPr>
-          <p:cNvPr id="33" name="TextBox 32"/>
-          <p:cNvSpPr txBox="1"/>
-          <p:nvPr/>
-        </p:nvSpPr>
-        <p:spPr>
-          <a:xfrm>
-            <a:off x="6528816" y="3630168"/>
-            <a:ext cx="4672583" cy="1984248"/>
-          </a:xfrm>
-          <a:prstGeom prst="rect">
-            <a:avLst/>
-          </a:prstGeom>
-          <a:noFill/>
-        </p:spPr>
-        <p:txBody>
-          <a:bodyPr wrap="square" anchor="t" lIns="38100" rIns="38100" tIns="25400" bIns="25400">
-            <a:noAutofit/>
-          </a:bodyPr>
-          <a:lstStyle/>
-          <a:p>
-            <a:pPr>
-              <a:spcAft>
-                <a:spcPts val="600"/>
-              </a:spcAft>
-              <a:defRPr sz="1500">
-                <a:solidFill>
-                  <a:srgbClr val="B4BAAE"/>
-                </a:solidFill>
-                <a:latin typeface="Aptos"/>
-              </a:defRPr>
-            </a:pPr>
-            <a:r>
-              <a:rPr sz="1100" b="0" i="0">
-                <a:latin typeface="Calibri"/>
-              </a:rPr>
-              <a:t>Before a heavy directory embedding run on supported NVIDIA hosts, a fail-open pre-flight guard can estimate VRAM pressure and surface a non-blocking warning in chat.</a:t>
-            </a:r>
-            <a:endParaRPr sz="1100" b="0" i="0">
-              <a:latin typeface="Calibri"/>
-            </a:endParaRPr>
-          </a:p>
-          <a:p>
-            <a:pPr>
-              <a:spcAft>
-                <a:spcPts val="600"/>
-              </a:spcAft>
-              <a:defRPr sz="1500">
-                <a:solidFill>
-                  <a:srgbClr val="B4BAAE"/>
-                </a:solidFill>
-                <a:latin typeface="Aptos"/>
-              </a:defRPr>
-            </a:pPr>
-            <a:r>
-              <a:rPr sz="1100" b="0" i="0">
-                <a:latin typeface="Calibri"/>
-              </a:rPr>
-              <a:t>Version resolution now flows through git tags, a runtime resolver module, generated build artefacts, and an open `/agent/version/` endpoint.</a:t>
-            </a:r>
-            <a:endParaRPr sz="1100" b="0" i="0">
-              <a:latin typeface="Calibri"/>
-            </a:endParaRPr>
-          </a:p>
-          <a:p>
-            <a:pPr>
-              <a:spcAft>
-                <a:spcPts val="600"/>
-              </a:spcAft>
-              <a:defRPr sz="1500">
-                <a:solidFill>
-                  <a:srgbClr val="B4BAAE"/>
-                </a:solidFill>
-                <a:latin typeface="Aptos"/>
-              </a:defRPr>
-            </a:pPr>
-            <a:r>
-              <a:rPr sz="1100" b="0" i="0">
-                <a:latin typeface="Calibri"/>
-              </a:rPr>
-              <a:t>When Multi-Turn is enabled, the global planner selects context and tool stages before the executor binds only the relevant tools, including wrapped deterministic agents such as De-Compresser.</a:t>
-            </a:r>
-            <a:endParaRPr sz="1100" b="0" i="0">
-              <a:latin typeface="Calibri"/>
-            </a:endParaRPr>
-          </a:p>
-          <a:p>
-            <a:pPr>
-              <a:spcAft>
-                <a:spcPts val="600"/>
-              </a:spcAft>
-              <a:defRPr sz="1500">
-                <a:solidFill>
-                  <a:srgbClr val="B4BAAE"/>
-                </a:solidFill>
-                <a:latin typeface="Aptos"/>
-              </a:defRPr>
-            </a:pPr>
-            <a:r>
-              <a:rPr sz="1100" b="0" i="0">
-                <a:latin typeface="Calibri"/>
-              </a:rPr>
-              <a:t>Tool calls execute in the backend, append observations, and may create wrapped runtime copies under `agent/agents/pools/_chat_runs_/`.</a:t>
-            </a:r>
-            <a:endParaRPr sz="1100" b="0" i="0">
-              <a:latin typeface="Calibri"/>
-            </a:endParaRPr>
-          </a:p>
-          <a:p>
-            <a:pPr>
-              <a:spcAft>
-                <a:spcPts val="600"/>
-              </a:spcAft>
-              <a:defRPr sz="1500">
-                <a:solidFill>
-                  <a:srgbClr val="B4BAAE"/>
-                </a:solidFill>
-                <a:latin typeface="Aptos"/>
-              </a:defRPr>
-            </a:pPr>
-            <a:r>
-              <a:rPr sz="1100" b="0" i="0">
-                <a:latin typeface="Calibri"/>
-              </a:rPr>
-              <a:t>On the next full start-up, `manage.py` can swap a staged database into place before Django imports, while archiving the previous live database under `DB/Older/&lt;timestamp&gt;/`.</a:t>
-            </a:r>
-            <a:endParaRPr sz="1100" b="0" i="0">
-              <a:latin typeface="Calibri"/>
-            </a:endParaRPr>
-          </a:p>
-          <a:p>
-            <a:pPr>
-              <a:spcAft>
-                <a:spcPts val="600"/>
-              </a:spcAft>
-              <a:defRPr sz="1500">
-                <a:solidFill>
-                  <a:srgbClr val="B4BAAE"/>
-                </a:solidFill>
-                <a:latin typeface="Aptos"/>
-              </a:defRPr>
-            </a:pPr>
-            <a:r>
-              <a:rPr sz="1100" b="0" i="0">
-                <a:latin typeface="Calibri"/>
-              </a:rPr>
-              <a:t>ACP flows deploy session-scoped pool instances, wire config values, validate NxN graph rules, and execute through Starter-driven flow semantics.</a:t>
-            </a:r>
-            <a:endParaRPr sz="1100" b="0" i="0">
-              <a:latin typeface="Calibri"/>
-            </a:endParaRPr>
-          </a:p>
-          <a:p>
-            <a:pPr>
-              <a:spcAft>
-                <a:spcPts val="600"/>
-              </a:spcAft>
-              <a:defRPr sz="1500">
-                <a:solidFill>
-                  <a:srgbClr val="B4BAAE"/>
-                </a:solidFill>
-                <a:latin typeface="Aptos"/>
-              </a:defRPr>
-            </a:pPr>
-            <a:r>
-              <a:rPr sz="1100" b="0" i="0">
-                <a:latin typeface="Calibri"/>
-              </a:rPr>
-              <a:t>Build scripts collect static assets, bundle Django/Python resources, add agent templates, and assemble `pkg.zip`, `Uninstaller.exe`, and `dist/Tlamatini_Release/`.</a:t>
-            </a:r>
-            <a:endParaRPr sz="1100" b="0" i="0">
-              <a:latin typeface="Calibri"/>
-            </a:endParaRPr>
-          </a:p>
-        </p:txBody>
-      </p:sp>
-    </p:spTree>
-  </p:cSld>
-  <p:clrMapOvr>
-    <a:masterClrMapping/>
-  </p:clrMapOvr>
-</p:sld>
-</file>
-
-<file path=ppt/slides/slide40.xml><?xml version="1.0" encoding="utf-8"?>
+<file path=ppt/slides/slide39.xml><?xml version="1.0" encoding="utf-8"?>
 <p:sld xmlns:a="http://schemas.openxmlformats.org/drawingml/2006/main" xmlns:p="http://schemas.openxmlformats.org/presentationml/2006/main" xmlns:r="http://schemas.openxmlformats.org/officeDocument/2006/relationships">
   <p:cSld>
     <p:spTree>
@@ -25510,7 +23458,1477 @@
 </p:sld>
 </file>
 
-<file path=ppt/slides/slide41.xml><?xml version="1.0" encoding="utf-8"?>
+<file path=ppt/slides/slide4.xml><?xml version="1.0" encoding="utf-8"?>
+<p:sld xmlns:a="http://schemas.openxmlformats.org/drawingml/2006/main" xmlns:p="http://schemas.openxmlformats.org/presentationml/2006/main" xmlns:r="http://schemas.openxmlformats.org/officeDocument/2006/relationships">
+  <p:cSld>
+    <p:spTree>
+      <p:nvGrpSpPr>
+        <p:cNvPr id="1" name=""/>
+        <p:cNvGrpSpPr/>
+        <p:nvPr/>
+      </p:nvGrpSpPr>
+      <p:grpSpPr/>
+      <p:sp>
+        <p:nvSpPr>
+          <p:cNvPr id="2" name="Rectangle 1"/>
+          <p:cNvSpPr/>
+          <p:nvPr/>
+        </p:nvSpPr>
+        <p:spPr>
+          <a:xfrm>
+            <a:off x="0" y="0"/>
+            <a:ext cx="12191695" cy="6858000"/>
+          </a:xfrm>
+          <a:prstGeom prst="rect">
+            <a:avLst/>
+          </a:prstGeom>
+          <a:solidFill>
+            <a:srgbClr val="080D0D"/>
+          </a:solidFill>
+          <a:ln>
+            <a:noFill/>
+          </a:ln>
+        </p:spPr>
+        <p:style>
+          <a:lnRef idx="1">
+            <a:schemeClr val="accent1"/>
+          </a:lnRef>
+          <a:fillRef idx="3">
+            <a:schemeClr val="accent1"/>
+          </a:fillRef>
+          <a:effectRef idx="2">
+            <a:schemeClr val="accent1"/>
+          </a:effectRef>
+          <a:fontRef idx="minor">
+            <a:schemeClr val="lt1"/>
+          </a:fontRef>
+        </p:style>
+        <p:txBody>
+          <a:bodyPr rtlCol="0" anchor="ctr"/>
+          <a:lstStyle/>
+          <a:p>
+            <a:pPr algn="ctr"/>
+          </a:p>
+        </p:txBody>
+      </p:sp>
+      <p:sp>
+        <p:nvSpPr>
+          <p:cNvPr id="3" name="Rectangle 2"/>
+          <p:cNvSpPr/>
+          <p:nvPr/>
+        </p:nvSpPr>
+        <p:spPr>
+          <a:xfrm>
+            <a:off x="320040" y="384048"/>
+            <a:ext cx="36576" cy="6080760"/>
+          </a:xfrm>
+          <a:prstGeom prst="rect">
+            <a:avLst/>
+          </a:prstGeom>
+          <a:solidFill>
+            <a:srgbClr val="48BF8F"/>
+          </a:solidFill>
+          <a:ln>
+            <a:noFill/>
+          </a:ln>
+        </p:spPr>
+        <p:style>
+          <a:lnRef idx="1">
+            <a:schemeClr val="accent1"/>
+          </a:lnRef>
+          <a:fillRef idx="3">
+            <a:schemeClr val="accent1"/>
+          </a:fillRef>
+          <a:effectRef idx="2">
+            <a:schemeClr val="accent1"/>
+          </a:effectRef>
+          <a:fontRef idx="minor">
+            <a:schemeClr val="lt1"/>
+          </a:fontRef>
+        </p:style>
+        <p:txBody>
+          <a:bodyPr rtlCol="0" anchor="ctr"/>
+          <a:lstStyle/>
+          <a:p>
+            <a:pPr algn="ctr"/>
+          </a:p>
+        </p:txBody>
+      </p:sp>
+      <p:sp>
+        <p:nvSpPr>
+          <p:cNvPr id="4" name="Rectangle 3"/>
+          <p:cNvSpPr/>
+          <p:nvPr/>
+        </p:nvSpPr>
+        <p:spPr>
+          <a:xfrm>
+            <a:off x="11716207" y="384048"/>
+            <a:ext cx="36576" cy="6080760"/>
+          </a:xfrm>
+          <a:prstGeom prst="rect">
+            <a:avLst/>
+          </a:prstGeom>
+          <a:solidFill>
+            <a:srgbClr val="48BF8F"/>
+          </a:solidFill>
+          <a:ln>
+            <a:noFill/>
+          </a:ln>
+        </p:spPr>
+        <p:style>
+          <a:lnRef idx="1">
+            <a:schemeClr val="accent1"/>
+          </a:lnRef>
+          <a:fillRef idx="3">
+            <a:schemeClr val="accent1"/>
+          </a:fillRef>
+          <a:effectRef idx="2">
+            <a:schemeClr val="accent1"/>
+          </a:effectRef>
+          <a:fontRef idx="minor">
+            <a:schemeClr val="lt1"/>
+          </a:fontRef>
+        </p:style>
+        <p:txBody>
+          <a:bodyPr rtlCol="0" anchor="ctr"/>
+          <a:lstStyle/>
+          <a:p>
+            <a:pPr algn="ctr"/>
+          </a:p>
+        </p:txBody>
+      </p:sp>
+      <p:sp>
+        <p:nvSpPr>
+          <p:cNvPr id="5" name="Rectangle 4"/>
+          <p:cNvSpPr/>
+          <p:nvPr/>
+        </p:nvSpPr>
+        <p:spPr>
+          <a:xfrm>
+            <a:off x="502920" y="384048"/>
+            <a:ext cx="11155680" cy="27432"/>
+          </a:xfrm>
+          <a:prstGeom prst="rect">
+            <a:avLst/>
+          </a:prstGeom>
+          <a:solidFill>
+            <a:srgbClr val="48BF8F"/>
+          </a:solidFill>
+          <a:ln>
+            <a:noFill/>
+          </a:ln>
+        </p:spPr>
+        <p:style>
+          <a:lnRef idx="1">
+            <a:schemeClr val="accent1"/>
+          </a:lnRef>
+          <a:fillRef idx="3">
+            <a:schemeClr val="accent1"/>
+          </a:fillRef>
+          <a:effectRef idx="2">
+            <a:schemeClr val="accent1"/>
+          </a:effectRef>
+          <a:fontRef idx="minor">
+            <a:schemeClr val="lt1"/>
+          </a:fontRef>
+        </p:style>
+        <p:txBody>
+          <a:bodyPr rtlCol="0" anchor="ctr"/>
+          <a:lstStyle/>
+          <a:p>
+            <a:pPr algn="ctr"/>
+          </a:p>
+        </p:txBody>
+      </p:sp>
+      <p:sp>
+        <p:nvSpPr>
+          <p:cNvPr id="6" name="Rectangle 5"/>
+          <p:cNvSpPr/>
+          <p:nvPr/>
+        </p:nvSpPr>
+        <p:spPr>
+          <a:xfrm>
+            <a:off x="502920" y="6437376"/>
+            <a:ext cx="11155680" cy="27432"/>
+          </a:xfrm>
+          <a:prstGeom prst="rect">
+            <a:avLst/>
+          </a:prstGeom>
+          <a:solidFill>
+            <a:srgbClr val="48BF8F"/>
+          </a:solidFill>
+          <a:ln>
+            <a:noFill/>
+          </a:ln>
+        </p:spPr>
+        <p:style>
+          <a:lnRef idx="1">
+            <a:schemeClr val="accent1"/>
+          </a:lnRef>
+          <a:fillRef idx="3">
+            <a:schemeClr val="accent1"/>
+          </a:fillRef>
+          <a:effectRef idx="2">
+            <a:schemeClr val="accent1"/>
+          </a:effectRef>
+          <a:fontRef idx="minor">
+            <a:schemeClr val="lt1"/>
+          </a:fontRef>
+        </p:style>
+        <p:txBody>
+          <a:bodyPr rtlCol="0" anchor="ctr"/>
+          <a:lstStyle/>
+          <a:p>
+            <a:pPr algn="ctr"/>
+          </a:p>
+        </p:txBody>
+      </p:sp>
+      <p:sp>
+        <p:nvSpPr>
+          <p:cNvPr id="7" name="TextBox 6"/>
+          <p:cNvSpPr txBox="1"/>
+          <p:nvPr/>
+        </p:nvSpPr>
+        <p:spPr>
+          <a:xfrm>
+            <a:off x="713232" y="548640"/>
+            <a:ext cx="10698480" cy="301752"/>
+          </a:xfrm>
+          <a:prstGeom prst="rect">
+            <a:avLst/>
+          </a:prstGeom>
+          <a:noFill/>
+        </p:spPr>
+        <p:txBody>
+          <a:bodyPr wrap="square" anchor="t">
+            <a:spAutoFit/>
+          </a:bodyPr>
+          <a:lstStyle/>
+          <a:p>
+            <a:pPr algn="l"/>
+            <a:r>
+              <a:rPr sz="1000" b="1">
+                <a:solidFill>
+                  <a:srgbClr val="48BF8F"/>
+                </a:solidFill>
+                <a:latin typeface="Aptos"/>
+              </a:rPr>
+              <a:t>EXECUTION PIPELINE</a:t>
+            </a:r>
+          </a:p>
+        </p:txBody>
+      </p:sp>
+      <p:sp>
+        <p:nvSpPr>
+          <p:cNvPr id="8" name="TextBox 7"/>
+          <p:cNvSpPr txBox="1"/>
+          <p:nvPr/>
+        </p:nvSpPr>
+        <p:spPr>
+          <a:xfrm>
+            <a:off x="694944" y="850392"/>
+            <a:ext cx="10881360" cy="566928"/>
+          </a:xfrm>
+          <a:prstGeom prst="rect">
+            <a:avLst/>
+          </a:prstGeom>
+          <a:noFill/>
+        </p:spPr>
+        <p:txBody>
+          <a:bodyPr wrap="square" anchor="t">
+            <a:spAutoFit/>
+          </a:bodyPr>
+          <a:lstStyle/>
+          <a:p>
+            <a:pPr algn="l"/>
+            <a:r>
+              <a:rPr sz="2700" b="0">
+                <a:solidFill>
+                  <a:srgbClr val="E8E8DE"/>
+                </a:solidFill>
+                <a:latin typeface="Aptos Display"/>
+              </a:rPr>
+              <a:t>How It Works</a:t>
+            </a:r>
+          </a:p>
+        </p:txBody>
+      </p:sp>
+      <p:sp>
+        <p:nvSpPr>
+          <p:cNvPr id="9" name="Rounded Rectangle 8"/>
+          <p:cNvSpPr/>
+          <p:nvPr/>
+        </p:nvSpPr>
+        <p:spPr>
+          <a:xfrm>
+            <a:off x="749808" y="1828800"/>
+            <a:ext cx="1591056" cy="685800"/>
+          </a:xfrm>
+          <a:prstGeom prst="roundRect">
+            <a:avLst/>
+          </a:prstGeom>
+          <a:solidFill>
+            <a:srgbClr val="202322"/>
+          </a:solidFill>
+          <a:ln>
+            <a:solidFill>
+              <a:srgbClr val="48BF8F"/>
+            </a:solidFill>
+          </a:ln>
+        </p:spPr>
+        <p:style>
+          <a:lnRef idx="1">
+            <a:schemeClr val="accent1"/>
+          </a:lnRef>
+          <a:fillRef idx="3">
+            <a:schemeClr val="accent1"/>
+          </a:fillRef>
+          <a:effectRef idx="2">
+            <a:schemeClr val="accent1"/>
+          </a:effectRef>
+          <a:fontRef idx="minor">
+            <a:schemeClr val="lt1"/>
+          </a:fontRef>
+        </p:style>
+        <p:txBody>
+          <a:bodyPr rtlCol="0" anchor="ctr"/>
+          <a:lstStyle/>
+          <a:p>
+            <a:pPr algn="ctr"/>
+          </a:p>
+        </p:txBody>
+      </p:sp>
+      <p:sp>
+        <p:nvSpPr>
+          <p:cNvPr id="10" name="TextBox 9"/>
+          <p:cNvSpPr txBox="1"/>
+          <p:nvPr/>
+        </p:nvSpPr>
+        <p:spPr>
+          <a:xfrm>
+            <a:off x="822959" y="1993392"/>
+            <a:ext cx="1444752" cy="256032"/>
+          </a:xfrm>
+          <a:prstGeom prst="rect">
+            <a:avLst/>
+          </a:prstGeom>
+          <a:noFill/>
+        </p:spPr>
+        <p:txBody>
+          <a:bodyPr wrap="square" anchor="t">
+            <a:spAutoFit/>
+          </a:bodyPr>
+          <a:lstStyle/>
+          <a:p>
+            <a:pPr algn="ctr"/>
+            <a:r>
+              <a:rPr sz="1000" b="1">
+                <a:solidFill>
+                  <a:srgbClr val="E8E8DE"/>
+                </a:solidFill>
+                <a:latin typeface="Aptos"/>
+              </a:rPr>
+              <a:t>Browser</a:t>
+            </a:r>
+          </a:p>
+        </p:txBody>
+      </p:sp>
+      <p:sp>
+        <p:nvSpPr>
+          <p:cNvPr id="11" name="TextBox 10"/>
+          <p:cNvSpPr txBox="1"/>
+          <p:nvPr/>
+        </p:nvSpPr>
+        <p:spPr>
+          <a:xfrm>
+            <a:off x="2340864" y="2002536"/>
+            <a:ext cx="246888" cy="182880"/>
+          </a:xfrm>
+          <a:prstGeom prst="rect">
+            <a:avLst/>
+          </a:prstGeom>
+          <a:noFill/>
+        </p:spPr>
+        <p:txBody>
+          <a:bodyPr wrap="square" anchor="t">
+            <a:spAutoFit/>
+          </a:bodyPr>
+          <a:lstStyle/>
+          <a:p>
+            <a:pPr algn="ctr"/>
+            <a:r>
+              <a:rPr sz="1200" b="1">
+                <a:solidFill>
+                  <a:srgbClr val="48BF8F"/>
+                </a:solidFill>
+                <a:latin typeface="Aptos"/>
+              </a:rPr>
+              <a:t>&gt;</a:t>
+            </a:r>
+          </a:p>
+        </p:txBody>
+      </p:sp>
+      <p:sp>
+        <p:nvSpPr>
+          <p:cNvPr id="12" name="Rounded Rectangle 11"/>
+          <p:cNvSpPr/>
+          <p:nvPr/>
+        </p:nvSpPr>
+        <p:spPr>
+          <a:xfrm>
+            <a:off x="2587751" y="1828800"/>
+            <a:ext cx="1591056" cy="685800"/>
+          </a:xfrm>
+          <a:prstGeom prst="roundRect">
+            <a:avLst/>
+          </a:prstGeom>
+          <a:solidFill>
+            <a:srgbClr val="202322"/>
+          </a:solidFill>
+          <a:ln>
+            <a:solidFill>
+              <a:srgbClr val="48BF8F"/>
+            </a:solidFill>
+          </a:ln>
+        </p:spPr>
+        <p:style>
+          <a:lnRef idx="1">
+            <a:schemeClr val="accent1"/>
+          </a:lnRef>
+          <a:fillRef idx="3">
+            <a:schemeClr val="accent1"/>
+          </a:fillRef>
+          <a:effectRef idx="2">
+            <a:schemeClr val="accent1"/>
+          </a:effectRef>
+          <a:fontRef idx="minor">
+            <a:schemeClr val="lt1"/>
+          </a:fontRef>
+        </p:style>
+        <p:txBody>
+          <a:bodyPr rtlCol="0" anchor="ctr"/>
+          <a:lstStyle/>
+          <a:p>
+            <a:pPr algn="ctr"/>
+          </a:p>
+        </p:txBody>
+      </p:sp>
+      <p:sp>
+        <p:nvSpPr>
+          <p:cNvPr id="13" name="TextBox 12"/>
+          <p:cNvSpPr txBox="1"/>
+          <p:nvPr/>
+        </p:nvSpPr>
+        <p:spPr>
+          <a:xfrm>
+            <a:off x="2660903" y="1993392"/>
+            <a:ext cx="1444752" cy="256032"/>
+          </a:xfrm>
+          <a:prstGeom prst="rect">
+            <a:avLst/>
+          </a:prstGeom>
+          <a:noFill/>
+        </p:spPr>
+        <p:txBody>
+          <a:bodyPr wrap="square" anchor="t">
+            <a:spAutoFit/>
+          </a:bodyPr>
+          <a:lstStyle/>
+          <a:p>
+            <a:pPr algn="ctr"/>
+            <a:r>
+              <a:rPr sz="1000" b="1">
+                <a:solidFill>
+                  <a:srgbClr val="E8E8DE"/>
+                </a:solidFill>
+                <a:latin typeface="Aptos"/>
+              </a:rPr>
+              <a:t>Channels</a:t>
+            </a:r>
+          </a:p>
+        </p:txBody>
+      </p:sp>
+      <p:sp>
+        <p:nvSpPr>
+          <p:cNvPr id="14" name="TextBox 13"/>
+          <p:cNvSpPr txBox="1"/>
+          <p:nvPr/>
+        </p:nvSpPr>
+        <p:spPr>
+          <a:xfrm>
+            <a:off x="4178807" y="2002536"/>
+            <a:ext cx="246888" cy="182880"/>
+          </a:xfrm>
+          <a:prstGeom prst="rect">
+            <a:avLst/>
+          </a:prstGeom>
+          <a:noFill/>
+        </p:spPr>
+        <p:txBody>
+          <a:bodyPr wrap="square" anchor="t">
+            <a:spAutoFit/>
+          </a:bodyPr>
+          <a:lstStyle/>
+          <a:p>
+            <a:pPr algn="ctr"/>
+            <a:r>
+              <a:rPr sz="1200" b="1">
+                <a:solidFill>
+                  <a:srgbClr val="48BF8F"/>
+                </a:solidFill>
+                <a:latin typeface="Aptos"/>
+              </a:rPr>
+              <a:t>&gt;</a:t>
+            </a:r>
+          </a:p>
+        </p:txBody>
+      </p:sp>
+      <p:sp>
+        <p:nvSpPr>
+          <p:cNvPr id="15" name="Rounded Rectangle 14"/>
+          <p:cNvSpPr/>
+          <p:nvPr/>
+        </p:nvSpPr>
+        <p:spPr>
+          <a:xfrm>
+            <a:off x="4425696" y="1828800"/>
+            <a:ext cx="1591056" cy="685800"/>
+          </a:xfrm>
+          <a:prstGeom prst="roundRect">
+            <a:avLst/>
+          </a:prstGeom>
+          <a:solidFill>
+            <a:srgbClr val="202322"/>
+          </a:solidFill>
+          <a:ln>
+            <a:solidFill>
+              <a:srgbClr val="48BF8F"/>
+            </a:solidFill>
+          </a:ln>
+        </p:spPr>
+        <p:style>
+          <a:lnRef idx="1">
+            <a:schemeClr val="accent1"/>
+          </a:lnRef>
+          <a:fillRef idx="3">
+            <a:schemeClr val="accent1"/>
+          </a:fillRef>
+          <a:effectRef idx="2">
+            <a:schemeClr val="accent1"/>
+          </a:effectRef>
+          <a:fontRef idx="minor">
+            <a:schemeClr val="lt1"/>
+          </a:fontRef>
+        </p:style>
+        <p:txBody>
+          <a:bodyPr rtlCol="0" anchor="ctr"/>
+          <a:lstStyle/>
+          <a:p>
+            <a:pPr algn="ctr"/>
+          </a:p>
+        </p:txBody>
+      </p:sp>
+      <p:sp>
+        <p:nvSpPr>
+          <p:cNvPr id="16" name="TextBox 15"/>
+          <p:cNvSpPr txBox="1"/>
+          <p:nvPr/>
+        </p:nvSpPr>
+        <p:spPr>
+          <a:xfrm>
+            <a:off x="4498848" y="1993392"/>
+            <a:ext cx="1444752" cy="256032"/>
+          </a:xfrm>
+          <a:prstGeom prst="rect">
+            <a:avLst/>
+          </a:prstGeom>
+          <a:noFill/>
+        </p:spPr>
+        <p:txBody>
+          <a:bodyPr wrap="square" anchor="t">
+            <a:spAutoFit/>
+          </a:bodyPr>
+          <a:lstStyle/>
+          <a:p>
+            <a:pPr algn="ctr"/>
+            <a:r>
+              <a:rPr sz="1000" b="1">
+                <a:solidFill>
+                  <a:srgbClr val="E8E8DE"/>
+                </a:solidFill>
+                <a:latin typeface="Aptos"/>
+              </a:rPr>
+              <a:t>RAG</a:t>
+            </a:r>
+          </a:p>
+        </p:txBody>
+      </p:sp>
+      <p:sp>
+        <p:nvSpPr>
+          <p:cNvPr id="17" name="TextBox 16"/>
+          <p:cNvSpPr txBox="1"/>
+          <p:nvPr/>
+        </p:nvSpPr>
+        <p:spPr>
+          <a:xfrm>
+            <a:off x="6016752" y="2002536"/>
+            <a:ext cx="246888" cy="182880"/>
+          </a:xfrm>
+          <a:prstGeom prst="rect">
+            <a:avLst/>
+          </a:prstGeom>
+          <a:noFill/>
+        </p:spPr>
+        <p:txBody>
+          <a:bodyPr wrap="square" anchor="t">
+            <a:spAutoFit/>
+          </a:bodyPr>
+          <a:lstStyle/>
+          <a:p>
+            <a:pPr algn="ctr"/>
+            <a:r>
+              <a:rPr sz="1200" b="1">
+                <a:solidFill>
+                  <a:srgbClr val="48BF8F"/>
+                </a:solidFill>
+                <a:latin typeface="Aptos"/>
+              </a:rPr>
+              <a:t>&gt;</a:t>
+            </a:r>
+          </a:p>
+        </p:txBody>
+      </p:sp>
+      <p:sp>
+        <p:nvSpPr>
+          <p:cNvPr id="18" name="Rounded Rectangle 17"/>
+          <p:cNvSpPr/>
+          <p:nvPr/>
+        </p:nvSpPr>
+        <p:spPr>
+          <a:xfrm>
+            <a:off x="6263640" y="1828800"/>
+            <a:ext cx="1591056" cy="685800"/>
+          </a:xfrm>
+          <a:prstGeom prst="roundRect">
+            <a:avLst/>
+          </a:prstGeom>
+          <a:solidFill>
+            <a:srgbClr val="202322"/>
+          </a:solidFill>
+          <a:ln>
+            <a:solidFill>
+              <a:srgbClr val="48BF8F"/>
+            </a:solidFill>
+          </a:ln>
+        </p:spPr>
+        <p:style>
+          <a:lnRef idx="1">
+            <a:schemeClr val="accent1"/>
+          </a:lnRef>
+          <a:fillRef idx="3">
+            <a:schemeClr val="accent1"/>
+          </a:fillRef>
+          <a:effectRef idx="2">
+            <a:schemeClr val="accent1"/>
+          </a:effectRef>
+          <a:fontRef idx="minor">
+            <a:schemeClr val="lt1"/>
+          </a:fontRef>
+        </p:style>
+        <p:txBody>
+          <a:bodyPr rtlCol="0" anchor="ctr"/>
+          <a:lstStyle/>
+          <a:p>
+            <a:pPr algn="ctr"/>
+          </a:p>
+        </p:txBody>
+      </p:sp>
+      <p:sp>
+        <p:nvSpPr>
+          <p:cNvPr id="19" name="TextBox 18"/>
+          <p:cNvSpPr txBox="1"/>
+          <p:nvPr/>
+        </p:nvSpPr>
+        <p:spPr>
+          <a:xfrm>
+            <a:off x="6336792" y="1993392"/>
+            <a:ext cx="1444752" cy="256032"/>
+          </a:xfrm>
+          <a:prstGeom prst="rect">
+            <a:avLst/>
+          </a:prstGeom>
+          <a:noFill/>
+        </p:spPr>
+        <p:txBody>
+          <a:bodyPr wrap="square" anchor="t">
+            <a:spAutoFit/>
+          </a:bodyPr>
+          <a:lstStyle/>
+          <a:p>
+            <a:pPr algn="ctr"/>
+            <a:r>
+              <a:rPr sz="1000" b="1">
+                <a:solidFill>
+                  <a:srgbClr val="E8E8DE"/>
+                </a:solidFill>
+                <a:latin typeface="Aptos"/>
+              </a:rPr>
+              <a:t>Planner</a:t>
+            </a:r>
+          </a:p>
+        </p:txBody>
+      </p:sp>
+      <p:sp>
+        <p:nvSpPr>
+          <p:cNvPr id="20" name="TextBox 19"/>
+          <p:cNvSpPr txBox="1"/>
+          <p:nvPr/>
+        </p:nvSpPr>
+        <p:spPr>
+          <a:xfrm>
+            <a:off x="7854696" y="2002536"/>
+            <a:ext cx="246888" cy="182880"/>
+          </a:xfrm>
+          <a:prstGeom prst="rect">
+            <a:avLst/>
+          </a:prstGeom>
+          <a:noFill/>
+        </p:spPr>
+        <p:txBody>
+          <a:bodyPr wrap="square" anchor="t">
+            <a:spAutoFit/>
+          </a:bodyPr>
+          <a:lstStyle/>
+          <a:p>
+            <a:pPr algn="ctr"/>
+            <a:r>
+              <a:rPr sz="1200" b="1">
+                <a:solidFill>
+                  <a:srgbClr val="48BF8F"/>
+                </a:solidFill>
+                <a:latin typeface="Aptos"/>
+              </a:rPr>
+              <a:t>&gt;</a:t>
+            </a:r>
+          </a:p>
+        </p:txBody>
+      </p:sp>
+      <p:sp>
+        <p:nvSpPr>
+          <p:cNvPr id="21" name="Rounded Rectangle 20"/>
+          <p:cNvSpPr/>
+          <p:nvPr/>
+        </p:nvSpPr>
+        <p:spPr>
+          <a:xfrm>
+            <a:off x="8101583" y="1828800"/>
+            <a:ext cx="1591056" cy="685800"/>
+          </a:xfrm>
+          <a:prstGeom prst="roundRect">
+            <a:avLst/>
+          </a:prstGeom>
+          <a:solidFill>
+            <a:srgbClr val="202322"/>
+          </a:solidFill>
+          <a:ln>
+            <a:solidFill>
+              <a:srgbClr val="48BF8F"/>
+            </a:solidFill>
+          </a:ln>
+        </p:spPr>
+        <p:style>
+          <a:lnRef idx="1">
+            <a:schemeClr val="accent1"/>
+          </a:lnRef>
+          <a:fillRef idx="3">
+            <a:schemeClr val="accent1"/>
+          </a:fillRef>
+          <a:effectRef idx="2">
+            <a:schemeClr val="accent1"/>
+          </a:effectRef>
+          <a:fontRef idx="minor">
+            <a:schemeClr val="lt1"/>
+          </a:fontRef>
+        </p:style>
+        <p:txBody>
+          <a:bodyPr rtlCol="0" anchor="ctr"/>
+          <a:lstStyle/>
+          <a:p>
+            <a:pPr algn="ctr"/>
+          </a:p>
+        </p:txBody>
+      </p:sp>
+      <p:sp>
+        <p:nvSpPr>
+          <p:cNvPr id="22" name="TextBox 21"/>
+          <p:cNvSpPr txBox="1"/>
+          <p:nvPr/>
+        </p:nvSpPr>
+        <p:spPr>
+          <a:xfrm>
+            <a:off x="8174736" y="1993392"/>
+            <a:ext cx="1444752" cy="256032"/>
+          </a:xfrm>
+          <a:prstGeom prst="rect">
+            <a:avLst/>
+          </a:prstGeom>
+          <a:noFill/>
+        </p:spPr>
+        <p:txBody>
+          <a:bodyPr wrap="square" anchor="t">
+            <a:spAutoFit/>
+          </a:bodyPr>
+          <a:lstStyle/>
+          <a:p>
+            <a:pPr algn="ctr"/>
+            <a:r>
+              <a:rPr sz="1000" b="1">
+                <a:solidFill>
+                  <a:srgbClr val="E8E8DE"/>
+                </a:solidFill>
+                <a:latin typeface="Aptos"/>
+              </a:rPr>
+              <a:t>Tools</a:t>
+            </a:r>
+          </a:p>
+        </p:txBody>
+      </p:sp>
+      <p:sp>
+        <p:nvSpPr>
+          <p:cNvPr id="23" name="TextBox 22"/>
+          <p:cNvSpPr txBox="1"/>
+          <p:nvPr/>
+        </p:nvSpPr>
+        <p:spPr>
+          <a:xfrm>
+            <a:off x="9692640" y="2002536"/>
+            <a:ext cx="246888" cy="182880"/>
+          </a:xfrm>
+          <a:prstGeom prst="rect">
+            <a:avLst/>
+          </a:prstGeom>
+          <a:noFill/>
+        </p:spPr>
+        <p:txBody>
+          <a:bodyPr wrap="square" anchor="t">
+            <a:spAutoFit/>
+          </a:bodyPr>
+          <a:lstStyle/>
+          <a:p>
+            <a:pPr algn="ctr"/>
+            <a:r>
+              <a:rPr sz="1200" b="1">
+                <a:solidFill>
+                  <a:srgbClr val="48BF8F"/>
+                </a:solidFill>
+                <a:latin typeface="Aptos"/>
+              </a:rPr>
+              <a:t>&gt;</a:t>
+            </a:r>
+          </a:p>
+        </p:txBody>
+      </p:sp>
+      <p:sp>
+        <p:nvSpPr>
+          <p:cNvPr id="24" name="Rounded Rectangle 23"/>
+          <p:cNvSpPr/>
+          <p:nvPr/>
+        </p:nvSpPr>
+        <p:spPr>
+          <a:xfrm>
+            <a:off x="9939528" y="1828800"/>
+            <a:ext cx="1591056" cy="685800"/>
+          </a:xfrm>
+          <a:prstGeom prst="roundRect">
+            <a:avLst/>
+          </a:prstGeom>
+          <a:solidFill>
+            <a:srgbClr val="202322"/>
+          </a:solidFill>
+          <a:ln>
+            <a:solidFill>
+              <a:srgbClr val="48BF8F"/>
+            </a:solidFill>
+          </a:ln>
+        </p:spPr>
+        <p:style>
+          <a:lnRef idx="1">
+            <a:schemeClr val="accent1"/>
+          </a:lnRef>
+          <a:fillRef idx="3">
+            <a:schemeClr val="accent1"/>
+          </a:fillRef>
+          <a:effectRef idx="2">
+            <a:schemeClr val="accent1"/>
+          </a:effectRef>
+          <a:fontRef idx="minor">
+            <a:schemeClr val="lt1"/>
+          </a:fontRef>
+        </p:style>
+        <p:txBody>
+          <a:bodyPr rtlCol="0" anchor="ctr"/>
+          <a:lstStyle/>
+          <a:p>
+            <a:pPr algn="ctr"/>
+          </a:p>
+        </p:txBody>
+      </p:sp>
+      <p:sp>
+        <p:nvSpPr>
+          <p:cNvPr id="25" name="TextBox 24"/>
+          <p:cNvSpPr txBox="1"/>
+          <p:nvPr/>
+        </p:nvSpPr>
+        <p:spPr>
+          <a:xfrm>
+            <a:off x="10012680" y="1993392"/>
+            <a:ext cx="1444752" cy="256032"/>
+          </a:xfrm>
+          <a:prstGeom prst="rect">
+            <a:avLst/>
+          </a:prstGeom>
+          <a:noFill/>
+        </p:spPr>
+        <p:txBody>
+          <a:bodyPr wrap="square" anchor="t">
+            <a:spAutoFit/>
+          </a:bodyPr>
+          <a:lstStyle/>
+          <a:p>
+            <a:pPr algn="ctr"/>
+            <a:r>
+              <a:rPr sz="1000" b="1">
+                <a:solidFill>
+                  <a:srgbClr val="E8E8DE"/>
+                </a:solidFill>
+                <a:latin typeface="Aptos"/>
+              </a:rPr>
+              <a:t>Answer</a:t>
+            </a:r>
+          </a:p>
+        </p:txBody>
+      </p:sp>
+      <p:sp>
+        <p:nvSpPr>
+          <p:cNvPr id="26" name="Rounded Rectangle 25"/>
+          <p:cNvSpPr/>
+          <p:nvPr/>
+        </p:nvSpPr>
+        <p:spPr>
+          <a:xfrm>
+            <a:off x="713232" y="2971800"/>
+            <a:ext cx="5349240" cy="2788920"/>
+          </a:xfrm>
+          <a:prstGeom prst="roundRect">
+            <a:avLst/>
+          </a:prstGeom>
+          <a:solidFill>
+            <a:srgbClr val="161A19"/>
+          </a:solidFill>
+          <a:ln>
+            <a:solidFill>
+              <a:srgbClr val="595F56"/>
+            </a:solidFill>
+          </a:ln>
+        </p:spPr>
+        <p:style>
+          <a:lnRef idx="1">
+            <a:schemeClr val="accent1"/>
+          </a:lnRef>
+          <a:fillRef idx="3">
+            <a:schemeClr val="accent1"/>
+          </a:fillRef>
+          <a:effectRef idx="2">
+            <a:schemeClr val="accent1"/>
+          </a:effectRef>
+          <a:fontRef idx="minor">
+            <a:schemeClr val="lt1"/>
+          </a:fontRef>
+        </p:style>
+        <p:txBody>
+          <a:bodyPr rtlCol="0" anchor="ctr"/>
+          <a:lstStyle/>
+          <a:p>
+            <a:pPr algn="ctr"/>
+          </a:p>
+        </p:txBody>
+      </p:sp>
+      <p:sp>
+        <p:nvSpPr>
+          <p:cNvPr id="27" name="Rectangle 26"/>
+          <p:cNvSpPr/>
+          <p:nvPr/>
+        </p:nvSpPr>
+        <p:spPr>
+          <a:xfrm>
+            <a:off x="713232" y="2971800"/>
+            <a:ext cx="5349240" cy="109728"/>
+          </a:xfrm>
+          <a:prstGeom prst="rect">
+            <a:avLst/>
+          </a:prstGeom>
+          <a:solidFill>
+            <a:srgbClr val="48BF8F"/>
+          </a:solidFill>
+          <a:ln>
+            <a:noFill/>
+          </a:ln>
+        </p:spPr>
+        <p:style>
+          <a:lnRef idx="1">
+            <a:schemeClr val="accent1"/>
+          </a:lnRef>
+          <a:fillRef idx="3">
+            <a:schemeClr val="accent1"/>
+          </a:fillRef>
+          <a:effectRef idx="2">
+            <a:schemeClr val="accent1"/>
+          </a:effectRef>
+          <a:fontRef idx="minor">
+            <a:schemeClr val="lt1"/>
+          </a:fontRef>
+        </p:style>
+        <p:txBody>
+          <a:bodyPr rtlCol="0" anchor="ctr"/>
+          <a:lstStyle/>
+          <a:p>
+            <a:pPr algn="ctr"/>
+          </a:p>
+        </p:txBody>
+      </p:sp>
+      <p:sp>
+        <p:nvSpPr>
+          <p:cNvPr id="28" name="TextBox 27"/>
+          <p:cNvSpPr txBox="1"/>
+          <p:nvPr/>
+        </p:nvSpPr>
+        <p:spPr>
+          <a:xfrm>
+            <a:off x="914400" y="3172968"/>
+            <a:ext cx="4946903" cy="310896"/>
+          </a:xfrm>
+          <a:prstGeom prst="rect">
+            <a:avLst/>
+          </a:prstGeom>
+          <a:noFill/>
+        </p:spPr>
+        <p:txBody>
+          <a:bodyPr wrap="square" anchor="t">
+            <a:spAutoFit/>
+          </a:bodyPr>
+          <a:lstStyle/>
+          <a:p>
+            <a:pPr algn="l"/>
+            <a:r>
+              <a:rPr sz="1400" b="1">
+                <a:solidFill>
+                  <a:srgbClr val="48BF8F"/>
+                </a:solidFill>
+                <a:latin typeface="Aptos"/>
+              </a:rPr>
+              <a:t>Request path</a:t>
+            </a:r>
+          </a:p>
+        </p:txBody>
+      </p:sp>
+      <p:sp>
+        <p:nvSpPr>
+          <p:cNvPr id="29" name="TextBox 28"/>
+          <p:cNvSpPr txBox="1"/>
+          <p:nvPr/>
+        </p:nvSpPr>
+        <p:spPr>
+          <a:xfrm>
+            <a:off x="914400" y="3630168"/>
+            <a:ext cx="4946903" cy="1984248"/>
+          </a:xfrm>
+          <a:prstGeom prst="rect">
+            <a:avLst/>
+          </a:prstGeom>
+          <a:noFill/>
+        </p:spPr>
+        <p:txBody>
+          <a:bodyPr wrap="square" anchor="t" lIns="38100" rIns="38100" tIns="25400" bIns="25400">
+            <a:noAutofit/>
+          </a:bodyPr>
+          <a:lstStyle/>
+          <a:p>
+            <a:pPr>
+              <a:spcAft>
+                <a:spcPts val="600"/>
+              </a:spcAft>
+              <a:defRPr sz="1500">
+                <a:solidFill>
+                  <a:srgbClr val="B4BAAE"/>
+                </a:solidFill>
+                <a:latin typeface="Aptos"/>
+              </a:defRPr>
+            </a:pPr>
+            <a:r>
+              <a:rPr sz="1500" b="0" i="0">
+                <a:latin typeface="Calibri"/>
+              </a:rPr>
+              <a:t>Browser UI sends chat and workflow requests through Django views and Channels WebSockets.</a:t>
+            </a:r>
+            <a:endParaRPr sz="1500" b="0" i="0">
+              <a:latin typeface="Calibri"/>
+            </a:endParaRPr>
+          </a:p>
+          <a:p>
+            <a:pPr>
+              <a:spcAft>
+                <a:spcPts val="600"/>
+              </a:spcAft>
+              <a:defRPr sz="1500">
+                <a:solidFill>
+                  <a:srgbClr val="B4BAAE"/>
+                </a:solidFill>
+                <a:latin typeface="Aptos"/>
+              </a:defRPr>
+            </a:pPr>
+            <a:r>
+              <a:rPr sz="1500" b="0" i="0">
+                <a:latin typeface="Calibri"/>
+              </a:rPr>
+              <a:t>RAG chains load selected file/directory context, retrieve relevant chunks, and build answer prompts.</a:t>
+            </a:r>
+            <a:endParaRPr sz="1500" b="0" i="0">
+              <a:latin typeface="Calibri"/>
+            </a:endParaRPr>
+          </a:p>
+          <a:p>
+            <a:pPr>
+              <a:spcAft>
+                <a:spcPts val="600"/>
+              </a:spcAft>
+              <a:defRPr sz="1500">
+                <a:solidFill>
+                  <a:srgbClr val="B4BAAE"/>
+                </a:solidFill>
+                <a:latin typeface="Aptos"/>
+              </a:defRPr>
+            </a:pPr>
+            <a:r>
+              <a:rPr sz="1500" b="0" i="0">
+                <a:latin typeface="Calibri"/>
+              </a:rPr>
+              <a:t>DB-menu actions validate directories or SQLite files in the browser, then call Django views that either copy the live database out or stage a replacement into `DB/ToLoad/db.sqlite3`.</a:t>
+            </a:r>
+            <a:endParaRPr sz="1500" b="0" i="0">
+              <a:latin typeface="Calibri"/>
+            </a:endParaRPr>
+          </a:p>
+        </p:txBody>
+      </p:sp>
+      <p:sp>
+        <p:nvSpPr>
+          <p:cNvPr id="30" name="Rounded Rectangle 29"/>
+          <p:cNvSpPr/>
+          <p:nvPr/>
+        </p:nvSpPr>
+        <p:spPr>
+          <a:xfrm>
+            <a:off x="6327648" y="2971800"/>
+            <a:ext cx="5074920" cy="2788920"/>
+          </a:xfrm>
+          <a:prstGeom prst="roundRect">
+            <a:avLst/>
+          </a:prstGeom>
+          <a:solidFill>
+            <a:srgbClr val="161A19"/>
+          </a:solidFill>
+          <a:ln>
+            <a:solidFill>
+              <a:srgbClr val="595F56"/>
+            </a:solidFill>
+          </a:ln>
+        </p:spPr>
+        <p:style>
+          <a:lnRef idx="1">
+            <a:schemeClr val="accent1"/>
+          </a:lnRef>
+          <a:fillRef idx="3">
+            <a:schemeClr val="accent1"/>
+          </a:fillRef>
+          <a:effectRef idx="2">
+            <a:schemeClr val="accent1"/>
+          </a:effectRef>
+          <a:fontRef idx="minor">
+            <a:schemeClr val="lt1"/>
+          </a:fontRef>
+        </p:style>
+        <p:txBody>
+          <a:bodyPr rtlCol="0" anchor="ctr"/>
+          <a:lstStyle/>
+          <a:p>
+            <a:pPr algn="ctr"/>
+          </a:p>
+        </p:txBody>
+      </p:sp>
+      <p:sp>
+        <p:nvSpPr>
+          <p:cNvPr id="31" name="Rectangle 30"/>
+          <p:cNvSpPr/>
+          <p:nvPr/>
+        </p:nvSpPr>
+        <p:spPr>
+          <a:xfrm>
+            <a:off x="6327648" y="2971800"/>
+            <a:ext cx="5074920" cy="109728"/>
+          </a:xfrm>
+          <a:prstGeom prst="rect">
+            <a:avLst/>
+          </a:prstGeom>
+          <a:solidFill>
+            <a:srgbClr val="C48052"/>
+          </a:solidFill>
+          <a:ln>
+            <a:noFill/>
+          </a:ln>
+        </p:spPr>
+        <p:style>
+          <a:lnRef idx="1">
+            <a:schemeClr val="accent1"/>
+          </a:lnRef>
+          <a:fillRef idx="3">
+            <a:schemeClr val="accent1"/>
+          </a:fillRef>
+          <a:effectRef idx="2">
+            <a:schemeClr val="accent1"/>
+          </a:effectRef>
+          <a:fontRef idx="minor">
+            <a:schemeClr val="lt1"/>
+          </a:fontRef>
+        </p:style>
+        <p:txBody>
+          <a:bodyPr rtlCol="0" anchor="ctr"/>
+          <a:lstStyle/>
+          <a:p>
+            <a:pPr algn="ctr"/>
+          </a:p>
+        </p:txBody>
+      </p:sp>
+      <p:sp>
+        <p:nvSpPr>
+          <p:cNvPr id="32" name="TextBox 31"/>
+          <p:cNvSpPr txBox="1"/>
+          <p:nvPr/>
+        </p:nvSpPr>
+        <p:spPr>
+          <a:xfrm>
+            <a:off x="6528816" y="3172968"/>
+            <a:ext cx="4672583" cy="310896"/>
+          </a:xfrm>
+          <a:prstGeom prst="rect">
+            <a:avLst/>
+          </a:prstGeom>
+          <a:noFill/>
+        </p:spPr>
+        <p:txBody>
+          <a:bodyPr wrap="square" anchor="t">
+            <a:spAutoFit/>
+          </a:bodyPr>
+          <a:lstStyle/>
+          <a:p>
+            <a:pPr algn="l"/>
+            <a:r>
+              <a:rPr sz="1400" b="1">
+                <a:solidFill>
+                  <a:srgbClr val="C48052"/>
+                </a:solidFill>
+                <a:latin typeface="Aptos"/>
+              </a:rPr>
+              <a:t>Runtime path</a:t>
+            </a:r>
+          </a:p>
+        </p:txBody>
+      </p:sp>
+      <p:sp>
+        <p:nvSpPr>
+          <p:cNvPr id="33" name="TextBox 32"/>
+          <p:cNvSpPr txBox="1"/>
+          <p:nvPr/>
+        </p:nvSpPr>
+        <p:spPr>
+          <a:xfrm>
+            <a:off x="6528816" y="3630168"/>
+            <a:ext cx="4672583" cy="1984248"/>
+          </a:xfrm>
+          <a:prstGeom prst="rect">
+            <a:avLst/>
+          </a:prstGeom>
+          <a:noFill/>
+        </p:spPr>
+        <p:txBody>
+          <a:bodyPr wrap="square" anchor="t" lIns="38100" rIns="38100" tIns="25400" bIns="25400">
+            <a:noAutofit/>
+          </a:bodyPr>
+          <a:lstStyle/>
+          <a:p>
+            <a:pPr>
+              <a:spcAft>
+                <a:spcPts val="600"/>
+              </a:spcAft>
+              <a:defRPr sz="1500">
+                <a:solidFill>
+                  <a:srgbClr val="B4BAAE"/>
+                </a:solidFill>
+                <a:latin typeface="Aptos"/>
+              </a:defRPr>
+            </a:pPr>
+            <a:r>
+              <a:rPr sz="1100" b="0" i="0">
+                <a:latin typeface="Calibri"/>
+              </a:rPr>
+              <a:t>Before a heavy directory embedding run on supported NVIDIA hosts, a fail-open pre-flight guard can estimate VRAM pressure and surface a non-blocking warning in chat.</a:t>
+            </a:r>
+            <a:endParaRPr sz="1100" b="0" i="0">
+              <a:latin typeface="Calibri"/>
+            </a:endParaRPr>
+          </a:p>
+          <a:p>
+            <a:pPr>
+              <a:spcAft>
+                <a:spcPts val="600"/>
+              </a:spcAft>
+              <a:defRPr sz="1500">
+                <a:solidFill>
+                  <a:srgbClr val="B4BAAE"/>
+                </a:solidFill>
+                <a:latin typeface="Aptos"/>
+              </a:defRPr>
+            </a:pPr>
+            <a:r>
+              <a:rPr sz="1100" b="0" i="0">
+                <a:latin typeface="Calibri"/>
+              </a:rPr>
+              <a:t>Version resolution now flows through git tags, a runtime resolver module, generated build artefacts, and an open `/agent/version/` endpoint.</a:t>
+            </a:r>
+            <a:endParaRPr sz="1100" b="0" i="0">
+              <a:latin typeface="Calibri"/>
+            </a:endParaRPr>
+          </a:p>
+          <a:p>
+            <a:pPr>
+              <a:spcAft>
+                <a:spcPts val="600"/>
+              </a:spcAft>
+              <a:defRPr sz="1500">
+                <a:solidFill>
+                  <a:srgbClr val="B4BAAE"/>
+                </a:solidFill>
+                <a:latin typeface="Aptos"/>
+              </a:defRPr>
+            </a:pPr>
+            <a:r>
+              <a:rPr sz="1100" b="0" i="0">
+                <a:latin typeface="Calibri"/>
+              </a:rPr>
+              <a:t>When Multi-Turn is enabled, the global planner selects context and tool stages before the executor binds only the relevant tools, including wrapped deterministic agents such as De-Compresser.</a:t>
+            </a:r>
+            <a:endParaRPr sz="1100" b="0" i="0">
+              <a:latin typeface="Calibri"/>
+            </a:endParaRPr>
+          </a:p>
+          <a:p>
+            <a:pPr>
+              <a:spcAft>
+                <a:spcPts val="600"/>
+              </a:spcAft>
+              <a:defRPr sz="1500">
+                <a:solidFill>
+                  <a:srgbClr val="B4BAAE"/>
+                </a:solidFill>
+                <a:latin typeface="Aptos"/>
+              </a:defRPr>
+            </a:pPr>
+            <a:r>
+              <a:rPr sz="1100" b="0" i="0">
+                <a:latin typeface="Calibri"/>
+              </a:rPr>
+              <a:t>Tool calls execute in the backend, append observations, and may create wrapped runtime copies under `agent/agents/pools/_chat_runs_/`.</a:t>
+            </a:r>
+            <a:endParaRPr sz="1100" b="0" i="0">
+              <a:latin typeface="Calibri"/>
+            </a:endParaRPr>
+          </a:p>
+          <a:p>
+            <a:pPr>
+              <a:spcAft>
+                <a:spcPts val="600"/>
+              </a:spcAft>
+              <a:defRPr sz="1500">
+                <a:solidFill>
+                  <a:srgbClr val="B4BAAE"/>
+                </a:solidFill>
+                <a:latin typeface="Aptos"/>
+              </a:defRPr>
+            </a:pPr>
+            <a:r>
+              <a:rPr sz="1100" b="0" i="0">
+                <a:latin typeface="Calibri"/>
+              </a:rPr>
+              <a:t>On the next full start-up, `manage.py` can swap a staged database into place before Django imports, while archiving the previous live database under `DB/Older/&lt;timestamp&gt;/`.</a:t>
+            </a:r>
+            <a:endParaRPr sz="1100" b="0" i="0">
+              <a:latin typeface="Calibri"/>
+            </a:endParaRPr>
+          </a:p>
+          <a:p>
+            <a:pPr>
+              <a:spcAft>
+                <a:spcPts val="600"/>
+              </a:spcAft>
+              <a:defRPr sz="1500">
+                <a:solidFill>
+                  <a:srgbClr val="B4BAAE"/>
+                </a:solidFill>
+                <a:latin typeface="Aptos"/>
+              </a:defRPr>
+            </a:pPr>
+            <a:r>
+              <a:rPr sz="1100" b="0" i="0">
+                <a:latin typeface="Calibri"/>
+              </a:rPr>
+              <a:t>ACP flows deploy session-scoped pool instances, wire config values, validate NxN graph rules, and execute through Starter-driven flow semantics.</a:t>
+            </a:r>
+            <a:endParaRPr sz="1100" b="0" i="0">
+              <a:latin typeface="Calibri"/>
+            </a:endParaRPr>
+          </a:p>
+          <a:p>
+            <a:pPr>
+              <a:spcAft>
+                <a:spcPts val="600"/>
+              </a:spcAft>
+              <a:defRPr sz="1500">
+                <a:solidFill>
+                  <a:srgbClr val="B4BAAE"/>
+                </a:solidFill>
+                <a:latin typeface="Aptos"/>
+              </a:defRPr>
+            </a:pPr>
+            <a:r>
+              <a:rPr sz="1100" b="0" i="0">
+                <a:latin typeface="Calibri"/>
+              </a:rPr>
+              <a:t>Build scripts collect static assets, bundle Django/Python resources, add agent templates, and assemble `pkg.zip`, `Uninstaller.exe`, and `dist/Tlamatini_Release/`.</a:t>
+            </a:r>
+            <a:endParaRPr sz="1100" b="0" i="0">
+              <a:latin typeface="Calibri"/>
+            </a:endParaRPr>
+          </a:p>
+        </p:txBody>
+      </p:sp>
+    </p:spTree>
+  </p:cSld>
+  <p:clrMapOvr>
+    <a:masterClrMapping/>
+  </p:clrMapOvr>
+</p:sld>
+</file>
+
+<file path=ppt/slides/slide40.xml><?xml version="1.0" encoding="utf-8"?>
 <p:sld xmlns:a="http://schemas.openxmlformats.org/drawingml/2006/main" xmlns:p="http://schemas.openxmlformats.org/presentationml/2006/main" xmlns:r="http://schemas.openxmlformats.org/officeDocument/2006/relationships">
   <p:cSld>
     <p:spTree>
@@ -25878,7 +25296,7 @@
 </p:sld>
 </file>
 
-<file path=ppt/slides/slide42.xml><?xml version="1.0" encoding="utf-8"?>
+<file path=ppt/slides/slide41.xml><?xml version="1.0" encoding="utf-8"?>
 <p:sld xmlns:a="http://schemas.openxmlformats.org/drawingml/2006/main" xmlns:p="http://schemas.openxmlformats.org/presentationml/2006/main" xmlns:r="http://schemas.openxmlformats.org/officeDocument/2006/relationships">
   <p:cSld>
     <p:spTree>
@@ -26246,7 +25664,7 @@
 </p:sld>
 </file>
 
-<file path=ppt/slides/slide43.xml><?xml version="1.0" encoding="utf-8"?>
+<file path=ppt/slides/slide42.xml><?xml version="1.0" encoding="utf-8"?>
 <p:sld xmlns:a="http://schemas.openxmlformats.org/drawingml/2006/main" xmlns:p="http://schemas.openxmlformats.org/presentationml/2006/main" xmlns:r="http://schemas.openxmlformats.org/officeDocument/2006/relationships">
   <p:cSld>
     <p:spTree>
@@ -26614,7 +26032,7 @@
 </p:sld>
 </file>
 
-<file path=ppt/slides/slide44.xml><?xml version="1.0" encoding="utf-8"?>
+<file path=ppt/slides/slide43.xml><?xml version="1.0" encoding="utf-8"?>
 <p:sld xmlns:a="http://schemas.openxmlformats.org/drawingml/2006/main" xmlns:p="http://schemas.openxmlformats.org/presentationml/2006/main" xmlns:r="http://schemas.openxmlformats.org/officeDocument/2006/relationships">
   <p:cSld>
     <p:spTree>
@@ -26982,7 +26400,7 @@
 </p:sld>
 </file>
 
-<file path=ppt/slides/slide45.xml><?xml version="1.0" encoding="utf-8"?>
+<file path=ppt/slides/slide44.xml><?xml version="1.0" encoding="utf-8"?>
 <p:sld xmlns:a="http://schemas.openxmlformats.org/drawingml/2006/main" xmlns:p="http://schemas.openxmlformats.org/presentationml/2006/main" xmlns:r="http://schemas.openxmlformats.org/officeDocument/2006/relationships">
   <p:cSld>
     <p:spTree>
@@ -27350,7 +26768,7 @@
 </p:sld>
 </file>
 
-<file path=ppt/slides/slide46.xml><?xml version="1.0" encoding="utf-8"?>
+<file path=ppt/slides/slide45.xml><?xml version="1.0" encoding="utf-8"?>
 <p:sld xmlns:a="http://schemas.openxmlformats.org/drawingml/2006/main" xmlns:p="http://schemas.openxmlformats.org/presentationml/2006/main" xmlns:r="http://schemas.openxmlformats.org/officeDocument/2006/relationships">
   <p:cSld>
     <p:spTree>
@@ -27718,7 +27136,7 @@
 </p:sld>
 </file>
 
-<file path=ppt/slides/slide47.xml><?xml version="1.0" encoding="utf-8"?>
+<file path=ppt/slides/slide46.xml><?xml version="1.0" encoding="utf-8"?>
 <p:sld xmlns:a="http://schemas.openxmlformats.org/drawingml/2006/main" xmlns:p="http://schemas.openxmlformats.org/presentationml/2006/main" xmlns:r="http://schemas.openxmlformats.org/officeDocument/2006/relationships">
   <p:cSld>
     <p:spTree>
@@ -28086,7 +27504,7 @@
 </p:sld>
 </file>
 
-<file path=ppt/slides/slide48.xml><?xml version="1.0" encoding="utf-8"?>
+<file path=ppt/slides/slide47.xml><?xml version="1.0" encoding="utf-8"?>
 <p:sld xmlns:a="http://schemas.openxmlformats.org/drawingml/2006/main" xmlns:p="http://schemas.openxmlformats.org/presentationml/2006/main" xmlns:r="http://schemas.openxmlformats.org/officeDocument/2006/relationships">
   <p:cSld>
     <p:spTree>
@@ -28439,7 +27857,7 @@
 </p:sld>
 </file>
 
-<file path=ppt/slides/slide49.xml><?xml version="1.0" encoding="utf-8"?>
+<file path=ppt/slides/slide48.xml><?xml version="1.0" encoding="utf-8"?>
 <p:sld xmlns:a="http://schemas.openxmlformats.org/drawingml/2006/main" xmlns:p="http://schemas.openxmlformats.org/presentationml/2006/main" xmlns:r="http://schemas.openxmlformats.org/officeDocument/2006/relationships">
   <p:cSld>
     <p:spTree>

--- a/Tlamatini_eXtended_Artificial_Intelligence_Humanly_Tempered.pptx
+++ b/Tlamatini_eXtended_Artificial_Intelligence_Humanly_Tempered.pptx
@@ -56,7 +56,6 @@
     <p:sldId id="304" r:id="rId55"/>
     <p:sldId id="305" r:id="rId56"/>
     <p:sldId id="306" r:id="rId57"/>
-    <p:sldId id="307" r:id="rId58"/>
   </p:sldIdLst>
   <p:sldSz cx="12191695" cy="6858000" type="screen4x3"/>
   <p:notesSz cx="6858000" cy="9144000"/>
@@ -3834,7 +3833,7 @@
                 </a:solidFill>
                 <a:latin typeface="Aptos"/>
               </a:rPr>
-              <a:t>97,195</a:t>
+              <a:t>97,919</a:t>
             </a:r>
           </a:p>
         </p:txBody>
@@ -3869,7 +3868,7 @@
                 </a:solidFill>
                 <a:latin typeface="Aptos"/>
               </a:rPr>
-              <a:t>Generated May 16, 2026 10:18 PM UTC-0600 at HEAD 309f8ec</a:t>
+              <a:t>Generated May 17, 2026 03:50 PM UTC-0600 at HEAD 6be0102</a:t>
             </a:r>
           </a:p>
         </p:txBody>
@@ -17998,7 +17997,7 @@
                 </a:solidFill>
                 <a:latin typeface="Aptos"/>
               </a:rPr>
-              <a:t>27</a:t>
+              <a:t>28</a:t>
             </a:r>
           </a:p>
         </p:txBody>
@@ -18113,7 +18112,7 @@
                 </a:solidFill>
                 <a:latin typeface="Aptos"/>
               </a:rPr>
-              <a:t>5</a:t>
+              <a:t>6</a:t>
             </a:r>
           </a:p>
         </p:txBody>
@@ -18393,7 +18392,7 @@
               <a:rPr sz="1500" b="0" i="0">
                 <a:latin typeface="Calibri"/>
               </a:rPr>
-              <a:t>309f8ec - Implementing Unreal-Engine MCP!!!, so now Tlamatini is Unreal Engine Enabled!!, by angelahack1</a:t>
+              <a:t>6be0102 - Some improvements in Unrealer agent in sending commands and normalization, by angelahack1</a:t>
             </a:r>
             <a:endParaRPr sz="1500" b="0" i="0">
               <a:latin typeface="Calibri"/>
@@ -18437,7 +18436,7 @@
               <a:rPr sz="1500" b="0" i="0">
                 <a:latin typeface="Calibri"/>
               </a:rPr>
-              <a:t>Generated on May 16, 2026 10:18 PM UTC-0600</a:t>
+              <a:t>Generated on May 17, 2026 03:50 PM UTC-0600</a:t>
             </a:r>
             <a:endParaRPr sz="1500" b="0" i="0">
               <a:latin typeface="Calibri"/>
@@ -18880,7 +18879,7 @@
                 </a:solidFill>
                 <a:latin typeface="Aptos"/>
               </a:rPr>
-              <a:t>97,195</a:t>
+              <a:t>97,919</a:t>
             </a:r>
           </a:p>
         </p:txBody>
@@ -18995,7 +18994,7 @@
                 </a:solidFill>
                 <a:latin typeface="Aptos"/>
               </a:rPr>
-              <a:t>132,391</a:t>
+              <a:t>133,394</a:t>
             </a:r>
           </a:p>
         </p:txBody>
@@ -19146,17 +19145,17 @@
                 <a:latin typeface="Cascadia Mono"/>
               </a:rPr>
               <a:t>LANGUAGE                 FILES   EFFECTIVE      TOTAL   SHARE
-Python                   262      65,352     91,203  67.2%
-JavaScript                27      12,446     15,694  12.8%
-Markdown                  50      11,528     14,835  11.9%
+Python                   262      65,779     91,803  67.2%
+JavaScript                27      12,519     15,781  12.8%
+Markdown                  50      11,691     15,086  11.9%
 CSS                        5       3,061      3,858   3.1%
-YAML                      66       1,380      2,739   1.4%
+YAML                      66       1,387      2,750   1.4%
+HTML                       4         823        841   0.8%
 Other text                 3         789        967   0.8%
-HTML                       4         780        798   0.8%
 PowerShell                 5         506        752   0.5%
 Prompt template            2         409        483   0.4%
+JavaScript module          1         389        456   0.4%
 JSON                       5         383        383   0.4%
-JavaScript module          1         378        445   0.4%
 Text                       5         150        177   0.2%
 Protocol Buffers           1          20         33   0.0%
 Batch                      1          13         24   0.0%</a:t>
@@ -19498,18 +19497,18 @@
                 <a:latin typeface="Cascadia Mono"/>
               </a:rPr>
               <a:t>PATH                                                     LANGUAGE     EFFECTIVE   TOTAL
-Tlamatini/agent/views.py                                Python         6,776   9,774
-Tlamatini/agent/tests.py                                Python         3,886   4,963
+Tlamatini/agent/views.py                                Python         6,917   9,972
+Tlamatini/agent/tests.py                                Python         4,034   5,153
 Tlamatini/agent/tools.py                                Python         2,201   3,094
-BookOfTlamatini.md                                      Markdown       1,845   2,589
+BookOfTlamatini.md                                      Markdown       1,882   2,652
 Tlamatini/agent/agents/flowcreator/agentic_skill.md     Markdown       1,813   2,018
 ...ini/agent/static/agent/css/agentic_control_panel.css CSS            1,653   2,187
 Tlamatini/agent/doc_generation/complete_project_docs.py Python         1,541   1,743
-Tlamatini/agent/static/agent/js/agent_page_init.js      JavaScript     1,306   1,503
+Tlamatini/agent/static/agent/js/agent_page_init.js      JavaScript     1,360   1,568
 Tlamatini/agent/static/agent/js/acp-canvas-core.js      JavaScript     1,270   1,580
-Tlamatini/agent/consumers.py                            Python         1,173   1,444
+Tlamatini/agent/consumers.py                            Python         1,240   1,545
+README.md                                               Markdown       1,155   1,625
 Tlamatini/agent/static/agent/css/agent_page.css         CSS            1,155   1,380
-README.md                                               Markdown       1,124   1,572
 Tlamatini/agent/static/agent/js/acp-agent-connectors.js JavaScript     1,109   1,249
 Tlamatini/agent/agents/whatstlamatini/whatstlamatini.py Python         1,059   1,323</a:t>
             </a:r>
@@ -20990,94 +20989,6 @@
               <a:latin typeface="Calibri"/>
             </a:endParaRPr>
           </a:p>
-          <a:p>
-            <a:pPr>
-              <a:spcAft>
-                <a:spcPts val="600"/>
-              </a:spcAft>
-              <a:defRPr sz="1500">
-                <a:solidFill>
-                  <a:srgbClr val="B4BAAE"/>
-                </a:solidFill>
-                <a:latin typeface="Aptos"/>
-              </a:defRPr>
-            </a:pPr>
-            <a:r>
-              <a:rPr sz="1500" b="0" i="0">
-                <a:latin typeface="Calibri"/>
-              </a:rPr>
-              <a:t>Today’s headline change is orphan-process cleanup on Windows: a three-tier reaper, hardened detached spawn sites, ACPX process-tree termination, and user-visible survivor reporting when anything truly refuses to die.</a:t>
-            </a:r>
-            <a:endParaRPr sz="1500" b="0" i="0">
-              <a:latin typeface="Calibri"/>
-            </a:endParaRPr>
-          </a:p>
-          <a:p>
-            <a:pPr>
-              <a:spcAft>
-                <a:spcPts val="600"/>
-              </a:spcAft>
-              <a:defRPr sz="1500">
-                <a:solidFill>
-                  <a:srgbClr val="B4BAAE"/>
-                </a:solidFill>
-                <a:latin typeface="Aptos"/>
-              </a:defRPr>
-            </a:pPr>
-            <a:r>
-              <a:rPr sz="1500" b="0" i="0">
-                <a:latin typeface="Calibri"/>
-              </a:rPr>
-              <a:t>Today’s headline change is the new De-Compresser agent: deterministic archive compression/decompression, Multi-Turn exposure, ACP canvas wiring, and a requirements patch that adds the `py7zr` fallback path.</a:t>
-            </a:r>
-            <a:endParaRPr sz="1500" b="0" i="0">
-              <a:latin typeface="Calibri"/>
-            </a:endParaRPr>
-          </a:p>
-          <a:p>
-            <a:pPr>
-              <a:spcAft>
-                <a:spcPts val="600"/>
-              </a:spcAft>
-              <a:defRPr sz="1500">
-                <a:solidFill>
-                  <a:srgbClr val="B4BAAE"/>
-                </a:solidFill>
-                <a:latin typeface="Aptos"/>
-              </a:defRPr>
-            </a:pPr>
-            <a:r>
-              <a:rPr sz="1500" b="0" i="0">
-                <a:latin typeface="Calibri"/>
-              </a:rPr>
-              <a:t>Today’s headline change is the new versioning system: SemVer policy, git-tag sourcing, runtime version surfaces, and build-time embedding across the Windows artefacts.</a:t>
-            </a:r>
-            <a:endParaRPr sz="1500" b="0" i="0">
-              <a:latin typeface="Calibri"/>
-            </a:endParaRPr>
-          </a:p>
-          <a:p>
-            <a:pPr>
-              <a:spcAft>
-                <a:spcPts val="600"/>
-              </a:spcAft>
-              <a:defRPr sz="1500">
-                <a:solidFill>
-                  <a:srgbClr val="B4BAAE"/>
-                </a:solidFill>
-                <a:latin typeface="Aptos"/>
-              </a:defRPr>
-            </a:pPr>
-            <a:r>
-              <a:rPr sz="1500" b="0" i="0">
-                <a:latin typeface="Calibri"/>
-              </a:rPr>
-              <a:t>Documentation itself changed today, so the regenerated dossier is part of the tracked operator surface rather than an external afterthought.</a:t>
-            </a:r>
-            <a:endParaRPr sz="1500" b="0" i="0">
-              <a:latin typeface="Calibri"/>
-            </a:endParaRPr>
-          </a:p>
         </p:txBody>
       </p:sp>
     </p:spTree>
@@ -21378,7 +21289,7 @@
                 </a:solidFill>
                 <a:latin typeface="Aptos Display"/>
               </a:rPr>
-              <a:t>Today's Commit Appendix 1/2</a:t>
+              <a:t>Today's Commit Appendix 1/1</a:t>
             </a:r>
           </a:p>
         </p:txBody>
@@ -21543,7 +21454,7 @@
               <a:rPr sz="1200" b="0" i="0">
                 <a:latin typeface="Calibri"/>
               </a:rPr>
-              <a:t>2026-05-16 | 309f8ec | Implementing Unreal-Engine MCP!!!, so now Tlamatini is Unreal Engine Enabled!!, by angelahack1</a:t>
+              <a:t>2026-05-17 | 6be0102 | Some improvements in Unrealer agent in sending commands and normalization, by angelahack1</a:t>
             </a:r>
             <a:endParaRPr sz="1200" b="0" i="0">
               <a:latin typeface="Calibri"/>
@@ -21565,95 +21476,7 @@
               <a:rPr sz="1200" b="0" i="0">
                 <a:latin typeface="Calibri"/>
               </a:rPr>
-              <a:t>2026-05-16 | 9353d57 | Trying to fix the Browse button Tkinter issue in DB dialogs, by angelahack1</a:t>
-            </a:r>
-            <a:endParaRPr sz="1200" b="0" i="0">
-              <a:latin typeface="Calibri"/>
-            </a:endParaRPr>
-          </a:p>
-          <a:p>
-            <a:pPr>
-              <a:spcAft>
-                <a:spcPts val="600"/>
-              </a:spcAft>
-              <a:defRPr sz="1200">
-                <a:solidFill>
-                  <a:srgbClr val="B4BAAE"/>
-                </a:solidFill>
-                <a:latin typeface="Aptos"/>
-              </a:defRPr>
-            </a:pPr>
-            <a:r>
-              <a:rPr sz="1200" b="0" i="0">
-                <a:latin typeface="Calibri"/>
-              </a:rPr>
-              <a:t>2026-05-16 | aada5bb | Making passwordless false so the use of password is by default in De-Compresser agent, by angelahack1</a:t>
-            </a:r>
-            <a:endParaRPr sz="1200" b="0" i="0">
-              <a:latin typeface="Calibri"/>
-            </a:endParaRPr>
-          </a:p>
-          <a:p>
-            <a:pPr>
-              <a:spcAft>
-                <a:spcPts val="600"/>
-              </a:spcAft>
-              <a:defRPr sz="1200">
-                <a:solidFill>
-                  <a:srgbClr val="B4BAAE"/>
-                </a:solidFill>
-                <a:latin typeface="Aptos"/>
-              </a:defRPr>
-            </a:pPr>
-            <a:r>
-              <a:rPr sz="1200" b="0" i="0">
-                <a:latin typeface="Calibri"/>
-              </a:rPr>
-              <a:t>2026-05-16 | 8bc6d29 | Updating visual assets about Orphaned-Process Cleanup, by angelahack1</a:t>
-            </a:r>
-            <a:endParaRPr sz="1200" b="0" i="0">
-              <a:latin typeface="Calibri"/>
-            </a:endParaRPr>
-          </a:p>
-          <a:p>
-            <a:pPr>
-              <a:spcAft>
-                <a:spcPts val="600"/>
-              </a:spcAft>
-              <a:defRPr sz="1200">
-                <a:solidFill>
-                  <a:srgbClr val="B4BAAE"/>
-                </a:solidFill>
-                <a:latin typeface="Aptos"/>
-              </a:defRPr>
-            </a:pPr>
-            <a:r>
-              <a:rPr sz="1200" b="0" i="0">
-                <a:latin typeface="Calibri"/>
-              </a:rPr>
-              <a:t>2026-05-16 | ba9b18a | Updating documentation acording Orphan-Process Cleanup, by angelahack1</a:t>
-            </a:r>
-            <a:endParaRPr sz="1200" b="0" i="0">
-              <a:latin typeface="Calibri"/>
-            </a:endParaRPr>
-          </a:p>
-          <a:p>
-            <a:pPr>
-              <a:spcAft>
-                <a:spcPts val="600"/>
-              </a:spcAft>
-              <a:defRPr sz="1200">
-                <a:solidFill>
-                  <a:srgbClr val="B4BAAE"/>
-                </a:solidFill>
-                <a:latin typeface="Aptos"/>
-              </a:defRPr>
-            </a:pPr>
-            <a:r>
-              <a:rPr sz="1200" b="0" i="0">
-                <a:latin typeface="Calibri"/>
-              </a:rPr>
-              <a:t>2026-05-16 | dcd1613 | Hope this sec/perf enhancment works very well, I'll stay testing it, by angelahack1</a:t>
+              <a:t>2026-05-17 | f39104f | Just a fix into Unrealer yaml, by angelahack1</a:t>
             </a:r>
             <a:endParaRPr sz="1200" b="0" i="0">
               <a:latin typeface="Calibri"/>
@@ -21670,477 +21493,6 @@
 </file>
 
 <file path=ppt/slides/slide32.xml><?xml version="1.0" encoding="utf-8"?>
-<p:sld xmlns:a="http://schemas.openxmlformats.org/drawingml/2006/main" xmlns:p="http://schemas.openxmlformats.org/presentationml/2006/main" xmlns:r="http://schemas.openxmlformats.org/officeDocument/2006/relationships">
-  <p:cSld>
-    <p:spTree>
-      <p:nvGrpSpPr>
-        <p:cNvPr id="1" name=""/>
-        <p:cNvGrpSpPr/>
-        <p:nvPr/>
-      </p:nvGrpSpPr>
-      <p:grpSpPr/>
-      <p:sp>
-        <p:nvSpPr>
-          <p:cNvPr id="2" name="Rectangle 1"/>
-          <p:cNvSpPr/>
-          <p:nvPr/>
-        </p:nvSpPr>
-        <p:spPr>
-          <a:xfrm>
-            <a:off x="0" y="0"/>
-            <a:ext cx="12191695" cy="6858000"/>
-          </a:xfrm>
-          <a:prstGeom prst="rect">
-            <a:avLst/>
-          </a:prstGeom>
-          <a:solidFill>
-            <a:srgbClr val="080D0D"/>
-          </a:solidFill>
-          <a:ln>
-            <a:noFill/>
-          </a:ln>
-        </p:spPr>
-        <p:style>
-          <a:lnRef idx="1">
-            <a:schemeClr val="accent1"/>
-          </a:lnRef>
-          <a:fillRef idx="3">
-            <a:schemeClr val="accent1"/>
-          </a:fillRef>
-          <a:effectRef idx="2">
-            <a:schemeClr val="accent1"/>
-          </a:effectRef>
-          <a:fontRef idx="minor">
-            <a:schemeClr val="lt1"/>
-          </a:fontRef>
-        </p:style>
-        <p:txBody>
-          <a:bodyPr rtlCol="0" anchor="ctr"/>
-          <a:lstStyle/>
-          <a:p>
-            <a:pPr algn="ctr"/>
-          </a:p>
-        </p:txBody>
-      </p:sp>
-      <p:sp>
-        <p:nvSpPr>
-          <p:cNvPr id="3" name="Rectangle 2"/>
-          <p:cNvSpPr/>
-          <p:nvPr/>
-        </p:nvSpPr>
-        <p:spPr>
-          <a:xfrm>
-            <a:off x="320040" y="384048"/>
-            <a:ext cx="36576" cy="6080760"/>
-          </a:xfrm>
-          <a:prstGeom prst="rect">
-            <a:avLst/>
-          </a:prstGeom>
-          <a:solidFill>
-            <a:srgbClr val="48BF8F"/>
-          </a:solidFill>
-          <a:ln>
-            <a:noFill/>
-          </a:ln>
-        </p:spPr>
-        <p:style>
-          <a:lnRef idx="1">
-            <a:schemeClr val="accent1"/>
-          </a:lnRef>
-          <a:fillRef idx="3">
-            <a:schemeClr val="accent1"/>
-          </a:fillRef>
-          <a:effectRef idx="2">
-            <a:schemeClr val="accent1"/>
-          </a:effectRef>
-          <a:fontRef idx="minor">
-            <a:schemeClr val="lt1"/>
-          </a:fontRef>
-        </p:style>
-        <p:txBody>
-          <a:bodyPr rtlCol="0" anchor="ctr"/>
-          <a:lstStyle/>
-          <a:p>
-            <a:pPr algn="ctr"/>
-          </a:p>
-        </p:txBody>
-      </p:sp>
-      <p:sp>
-        <p:nvSpPr>
-          <p:cNvPr id="4" name="Rectangle 3"/>
-          <p:cNvSpPr/>
-          <p:nvPr/>
-        </p:nvSpPr>
-        <p:spPr>
-          <a:xfrm>
-            <a:off x="11716207" y="384048"/>
-            <a:ext cx="36576" cy="6080760"/>
-          </a:xfrm>
-          <a:prstGeom prst="rect">
-            <a:avLst/>
-          </a:prstGeom>
-          <a:solidFill>
-            <a:srgbClr val="48BF8F"/>
-          </a:solidFill>
-          <a:ln>
-            <a:noFill/>
-          </a:ln>
-        </p:spPr>
-        <p:style>
-          <a:lnRef idx="1">
-            <a:schemeClr val="accent1"/>
-          </a:lnRef>
-          <a:fillRef idx="3">
-            <a:schemeClr val="accent1"/>
-          </a:fillRef>
-          <a:effectRef idx="2">
-            <a:schemeClr val="accent1"/>
-          </a:effectRef>
-          <a:fontRef idx="minor">
-            <a:schemeClr val="lt1"/>
-          </a:fontRef>
-        </p:style>
-        <p:txBody>
-          <a:bodyPr rtlCol="0" anchor="ctr"/>
-          <a:lstStyle/>
-          <a:p>
-            <a:pPr algn="ctr"/>
-          </a:p>
-        </p:txBody>
-      </p:sp>
-      <p:sp>
-        <p:nvSpPr>
-          <p:cNvPr id="5" name="Rectangle 4"/>
-          <p:cNvSpPr/>
-          <p:nvPr/>
-        </p:nvSpPr>
-        <p:spPr>
-          <a:xfrm>
-            <a:off x="502920" y="384048"/>
-            <a:ext cx="11155680" cy="27432"/>
-          </a:xfrm>
-          <a:prstGeom prst="rect">
-            <a:avLst/>
-          </a:prstGeom>
-          <a:solidFill>
-            <a:srgbClr val="48BF8F"/>
-          </a:solidFill>
-          <a:ln>
-            <a:noFill/>
-          </a:ln>
-        </p:spPr>
-        <p:style>
-          <a:lnRef idx="1">
-            <a:schemeClr val="accent1"/>
-          </a:lnRef>
-          <a:fillRef idx="3">
-            <a:schemeClr val="accent1"/>
-          </a:fillRef>
-          <a:effectRef idx="2">
-            <a:schemeClr val="accent1"/>
-          </a:effectRef>
-          <a:fontRef idx="minor">
-            <a:schemeClr val="lt1"/>
-          </a:fontRef>
-        </p:style>
-        <p:txBody>
-          <a:bodyPr rtlCol="0" anchor="ctr"/>
-          <a:lstStyle/>
-          <a:p>
-            <a:pPr algn="ctr"/>
-          </a:p>
-        </p:txBody>
-      </p:sp>
-      <p:sp>
-        <p:nvSpPr>
-          <p:cNvPr id="6" name="Rectangle 5"/>
-          <p:cNvSpPr/>
-          <p:nvPr/>
-        </p:nvSpPr>
-        <p:spPr>
-          <a:xfrm>
-            <a:off x="502920" y="6437376"/>
-            <a:ext cx="11155680" cy="27432"/>
-          </a:xfrm>
-          <a:prstGeom prst="rect">
-            <a:avLst/>
-          </a:prstGeom>
-          <a:solidFill>
-            <a:srgbClr val="48BF8F"/>
-          </a:solidFill>
-          <a:ln>
-            <a:noFill/>
-          </a:ln>
-        </p:spPr>
-        <p:style>
-          <a:lnRef idx="1">
-            <a:schemeClr val="accent1"/>
-          </a:lnRef>
-          <a:fillRef idx="3">
-            <a:schemeClr val="accent1"/>
-          </a:fillRef>
-          <a:effectRef idx="2">
-            <a:schemeClr val="accent1"/>
-          </a:effectRef>
-          <a:fontRef idx="minor">
-            <a:schemeClr val="lt1"/>
-          </a:fontRef>
-        </p:style>
-        <p:txBody>
-          <a:bodyPr rtlCol="0" anchor="ctr"/>
-          <a:lstStyle/>
-          <a:p>
-            <a:pPr algn="ctr"/>
-          </a:p>
-        </p:txBody>
-      </p:sp>
-      <p:sp>
-        <p:nvSpPr>
-          <p:cNvPr id="7" name="TextBox 6"/>
-          <p:cNvSpPr txBox="1"/>
-          <p:nvPr/>
-        </p:nvSpPr>
-        <p:spPr>
-          <a:xfrm>
-            <a:off x="713232" y="548640"/>
-            <a:ext cx="10698480" cy="301752"/>
-          </a:xfrm>
-          <a:prstGeom prst="rect">
-            <a:avLst/>
-          </a:prstGeom>
-          <a:noFill/>
-        </p:spPr>
-        <p:txBody>
-          <a:bodyPr wrap="square" anchor="t">
-            <a:spAutoFit/>
-          </a:bodyPr>
-          <a:lstStyle/>
-          <a:p>
-            <a:pPr algn="l"/>
-            <a:r>
-              <a:rPr sz="1000" b="1">
-                <a:solidFill>
-                  <a:srgbClr val="48BF8F"/>
-                </a:solidFill>
-                <a:latin typeface="Aptos"/>
-              </a:rPr>
-              <a:t>ALL COMMITS FROM TODAY ACCORDING TO GIT</a:t>
-            </a:r>
-          </a:p>
-        </p:txBody>
-      </p:sp>
-      <p:sp>
-        <p:nvSpPr>
-          <p:cNvPr id="8" name="TextBox 7"/>
-          <p:cNvSpPr txBox="1"/>
-          <p:nvPr/>
-        </p:nvSpPr>
-        <p:spPr>
-          <a:xfrm>
-            <a:off x="694944" y="850392"/>
-            <a:ext cx="10881360" cy="566928"/>
-          </a:xfrm>
-          <a:prstGeom prst="rect">
-            <a:avLst/>
-          </a:prstGeom>
-          <a:noFill/>
-        </p:spPr>
-        <p:txBody>
-          <a:bodyPr wrap="square" anchor="t">
-            <a:spAutoFit/>
-          </a:bodyPr>
-          <a:lstStyle/>
-          <a:p>
-            <a:pPr algn="l"/>
-            <a:r>
-              <a:rPr sz="2700" b="0">
-                <a:solidFill>
-                  <a:srgbClr val="E8E8DE"/>
-                </a:solidFill>
-                <a:latin typeface="Aptos Display"/>
-              </a:rPr>
-              <a:t>Today's Commit Appendix 2/2</a:t>
-            </a:r>
-          </a:p>
-        </p:txBody>
-      </p:sp>
-      <p:sp>
-        <p:nvSpPr>
-          <p:cNvPr id="9" name="Rounded Rectangle 8"/>
-          <p:cNvSpPr/>
-          <p:nvPr/>
-        </p:nvSpPr>
-        <p:spPr>
-          <a:xfrm>
-            <a:off x="749808" y="1536192"/>
-            <a:ext cx="10561320" cy="4443984"/>
-          </a:xfrm>
-          <a:prstGeom prst="roundRect">
-            <a:avLst/>
-          </a:prstGeom>
-          <a:solidFill>
-            <a:srgbClr val="161A19"/>
-          </a:solidFill>
-          <a:ln>
-            <a:solidFill>
-              <a:srgbClr val="595F56"/>
-            </a:solidFill>
-          </a:ln>
-        </p:spPr>
-        <p:style>
-          <a:lnRef idx="1">
-            <a:schemeClr val="accent1"/>
-          </a:lnRef>
-          <a:fillRef idx="3">
-            <a:schemeClr val="accent1"/>
-          </a:fillRef>
-          <a:effectRef idx="2">
-            <a:schemeClr val="accent1"/>
-          </a:effectRef>
-          <a:fontRef idx="minor">
-            <a:schemeClr val="lt1"/>
-          </a:fontRef>
-        </p:style>
-        <p:txBody>
-          <a:bodyPr rtlCol="0" anchor="ctr"/>
-          <a:lstStyle/>
-          <a:p>
-            <a:pPr algn="ctr"/>
-          </a:p>
-        </p:txBody>
-      </p:sp>
-      <p:sp>
-        <p:nvSpPr>
-          <p:cNvPr id="10" name="Rectangle 9"/>
-          <p:cNvSpPr/>
-          <p:nvPr/>
-        </p:nvSpPr>
-        <p:spPr>
-          <a:xfrm>
-            <a:off x="749808" y="1536192"/>
-            <a:ext cx="10561320" cy="109728"/>
-          </a:xfrm>
-          <a:prstGeom prst="rect">
-            <a:avLst/>
-          </a:prstGeom>
-          <a:solidFill>
-            <a:srgbClr val="48BF8F"/>
-          </a:solidFill>
-          <a:ln>
-            <a:noFill/>
-          </a:ln>
-        </p:spPr>
-        <p:style>
-          <a:lnRef idx="1">
-            <a:schemeClr val="accent1"/>
-          </a:lnRef>
-          <a:fillRef idx="3">
-            <a:schemeClr val="accent1"/>
-          </a:fillRef>
-          <a:effectRef idx="2">
-            <a:schemeClr val="accent1"/>
-          </a:effectRef>
-          <a:fontRef idx="minor">
-            <a:schemeClr val="lt1"/>
-          </a:fontRef>
-        </p:style>
-        <p:txBody>
-          <a:bodyPr rtlCol="0" anchor="ctr"/>
-          <a:lstStyle/>
-          <a:p>
-            <a:pPr algn="ctr"/>
-          </a:p>
-        </p:txBody>
-      </p:sp>
-      <p:sp>
-        <p:nvSpPr>
-          <p:cNvPr id="11" name="TextBox 10"/>
-          <p:cNvSpPr txBox="1"/>
-          <p:nvPr/>
-        </p:nvSpPr>
-        <p:spPr>
-          <a:xfrm>
-            <a:off x="950976" y="1737360"/>
-            <a:ext cx="10158984" cy="310896"/>
-          </a:xfrm>
-          <a:prstGeom prst="rect">
-            <a:avLst/>
-          </a:prstGeom>
-          <a:noFill/>
-        </p:spPr>
-        <p:txBody>
-          <a:bodyPr wrap="square" anchor="t">
-            <a:spAutoFit/>
-          </a:bodyPr>
-          <a:lstStyle/>
-          <a:p>
-            <a:pPr algn="l"/>
-            <a:r>
-              <a:rPr sz="1400" b="1">
-                <a:solidFill>
-                  <a:srgbClr val="48BF8F"/>
-                </a:solidFill>
-                <a:latin typeface="Aptos"/>
-              </a:rPr>
-              <a:t>Commit timeline</a:t>
-            </a:r>
-          </a:p>
-        </p:txBody>
-      </p:sp>
-      <p:sp>
-        <p:nvSpPr>
-          <p:cNvPr id="12" name="TextBox 11"/>
-          <p:cNvSpPr txBox="1"/>
-          <p:nvPr/>
-        </p:nvSpPr>
-        <p:spPr>
-          <a:xfrm>
-            <a:off x="950976" y="2194560"/>
-            <a:ext cx="10158984" cy="3639312"/>
-          </a:xfrm>
-          <a:prstGeom prst="rect">
-            <a:avLst/>
-          </a:prstGeom>
-          <a:noFill/>
-        </p:spPr>
-        <p:txBody>
-          <a:bodyPr wrap="square" anchor="t" lIns="38100" rIns="38100" tIns="25400" bIns="25400">
-            <a:noAutofit/>
-          </a:bodyPr>
-          <a:lstStyle/>
-          <a:p>
-            <a:pPr>
-              <a:spcAft>
-                <a:spcPts val="600"/>
-              </a:spcAft>
-              <a:defRPr sz="1200">
-                <a:solidFill>
-                  <a:srgbClr val="B4BAAE"/>
-                </a:solidFill>
-                <a:latin typeface="Aptos"/>
-              </a:defRPr>
-            </a:pPr>
-            <a:r>
-              <a:rPr sz="1200" b="0" i="0">
-                <a:latin typeface="Calibri"/>
-              </a:rPr>
-              <a:t>2026-05-16 | b2eacef | Establishing version 1.1.1, by angelahack1</a:t>
-            </a:r>
-            <a:endParaRPr sz="1200" b="0" i="0">
-              <a:latin typeface="Calibri"/>
-            </a:endParaRPr>
-          </a:p>
-        </p:txBody>
-      </p:sp>
-    </p:spTree>
-  </p:cSld>
-  <p:clrMapOvr>
-    <a:masterClrMapping/>
-  </p:clrMapOvr>
-</p:sld>
-</file>
-
-<file path=ppt/slides/slide33.xml><?xml version="1.0" encoding="utf-8"?>
 <p:sld xmlns:a="http://schemas.openxmlformats.org/drawingml/2006/main" xmlns:p="http://schemas.openxmlformats.org/presentationml/2006/main" xmlns:r="http://schemas.openxmlformats.org/officeDocument/2006/relationships">
   <p:cSld>
     <p:spTree>
@@ -22508,7 +21860,7 @@
 </p:sld>
 </file>
 
-<file path=ppt/slides/slide34.xml><?xml version="1.0" encoding="utf-8"?>
+<file path=ppt/slides/slide33.xml><?xml version="1.0" encoding="utf-8"?>
 <p:sld xmlns:a="http://schemas.openxmlformats.org/drawingml/2006/main" xmlns:p="http://schemas.openxmlformats.org/presentationml/2006/main" xmlns:r="http://schemas.openxmlformats.org/officeDocument/2006/relationships">
   <p:cSld>
     <p:spTree>
@@ -22876,7 +22228,7 @@
 </p:sld>
 </file>
 
-<file path=ppt/slides/slide35.xml><?xml version="1.0" encoding="utf-8"?>
+<file path=ppt/slides/slide34.xml><?xml version="1.0" encoding="utf-8"?>
 <p:sld xmlns:a="http://schemas.openxmlformats.org/drawingml/2006/main" xmlns:p="http://schemas.openxmlformats.org/presentationml/2006/main" xmlns:r="http://schemas.openxmlformats.org/officeDocument/2006/relationships">
   <p:cSld>
     <p:spTree>
@@ -23244,7 +22596,7 @@
 </p:sld>
 </file>
 
-<file path=ppt/slides/slide36.xml><?xml version="1.0" encoding="utf-8"?>
+<file path=ppt/slides/slide35.xml><?xml version="1.0" encoding="utf-8"?>
 <p:sld xmlns:a="http://schemas.openxmlformats.org/drawingml/2006/main" xmlns:p="http://schemas.openxmlformats.org/presentationml/2006/main" xmlns:r="http://schemas.openxmlformats.org/officeDocument/2006/relationships">
   <p:cSld>
     <p:spTree>
@@ -23612,7 +22964,7 @@
 </p:sld>
 </file>
 
-<file path=ppt/slides/slide37.xml><?xml version="1.0" encoding="utf-8"?>
+<file path=ppt/slides/slide36.xml><?xml version="1.0" encoding="utf-8"?>
 <p:sld xmlns:a="http://schemas.openxmlformats.org/drawingml/2006/main" xmlns:p="http://schemas.openxmlformats.org/presentationml/2006/main" xmlns:r="http://schemas.openxmlformats.org/officeDocument/2006/relationships">
   <p:cSld>
     <p:spTree>
@@ -23980,7 +23332,7 @@
 </p:sld>
 </file>
 
-<file path=ppt/slides/slide38.xml><?xml version="1.0" encoding="utf-8"?>
+<file path=ppt/slides/slide37.xml><?xml version="1.0" encoding="utf-8"?>
 <p:sld xmlns:a="http://schemas.openxmlformats.org/drawingml/2006/main" xmlns:p="http://schemas.openxmlformats.org/presentationml/2006/main" xmlns:r="http://schemas.openxmlformats.org/officeDocument/2006/relationships">
   <p:cSld>
     <p:spTree>
@@ -24348,7 +23700,7 @@
 </p:sld>
 </file>
 
-<file path=ppt/slides/slide39.xml><?xml version="1.0" encoding="utf-8"?>
+<file path=ppt/slides/slide38.xml><?xml version="1.0" encoding="utf-8"?>
 <p:sld xmlns:a="http://schemas.openxmlformats.org/drawingml/2006/main" xmlns:p="http://schemas.openxmlformats.org/presentationml/2006/main" xmlns:r="http://schemas.openxmlformats.org/officeDocument/2006/relationships">
   <p:cSld>
     <p:spTree>
@@ -24716,1521 +24068,7 @@
 </p:sld>
 </file>
 
-<file path=ppt/slides/slide4.xml><?xml version="1.0" encoding="utf-8"?>
-<p:sld xmlns:a="http://schemas.openxmlformats.org/drawingml/2006/main" xmlns:p="http://schemas.openxmlformats.org/presentationml/2006/main" xmlns:r="http://schemas.openxmlformats.org/officeDocument/2006/relationships">
-  <p:cSld>
-    <p:spTree>
-      <p:nvGrpSpPr>
-        <p:cNvPr id="1" name=""/>
-        <p:cNvGrpSpPr/>
-        <p:nvPr/>
-      </p:nvGrpSpPr>
-      <p:grpSpPr/>
-      <p:sp>
-        <p:nvSpPr>
-          <p:cNvPr id="2" name="Rectangle 1"/>
-          <p:cNvSpPr/>
-          <p:nvPr/>
-        </p:nvSpPr>
-        <p:spPr>
-          <a:xfrm>
-            <a:off x="0" y="0"/>
-            <a:ext cx="12191695" cy="6858000"/>
-          </a:xfrm>
-          <a:prstGeom prst="rect">
-            <a:avLst/>
-          </a:prstGeom>
-          <a:solidFill>
-            <a:srgbClr val="080D0D"/>
-          </a:solidFill>
-          <a:ln>
-            <a:noFill/>
-          </a:ln>
-        </p:spPr>
-        <p:style>
-          <a:lnRef idx="1">
-            <a:schemeClr val="accent1"/>
-          </a:lnRef>
-          <a:fillRef idx="3">
-            <a:schemeClr val="accent1"/>
-          </a:fillRef>
-          <a:effectRef idx="2">
-            <a:schemeClr val="accent1"/>
-          </a:effectRef>
-          <a:fontRef idx="minor">
-            <a:schemeClr val="lt1"/>
-          </a:fontRef>
-        </p:style>
-        <p:txBody>
-          <a:bodyPr rtlCol="0" anchor="ctr"/>
-          <a:lstStyle/>
-          <a:p>
-            <a:pPr algn="ctr"/>
-          </a:p>
-        </p:txBody>
-      </p:sp>
-      <p:sp>
-        <p:nvSpPr>
-          <p:cNvPr id="3" name="Rectangle 2"/>
-          <p:cNvSpPr/>
-          <p:nvPr/>
-        </p:nvSpPr>
-        <p:spPr>
-          <a:xfrm>
-            <a:off x="320040" y="384048"/>
-            <a:ext cx="36576" cy="6080760"/>
-          </a:xfrm>
-          <a:prstGeom prst="rect">
-            <a:avLst/>
-          </a:prstGeom>
-          <a:solidFill>
-            <a:srgbClr val="48BF8F"/>
-          </a:solidFill>
-          <a:ln>
-            <a:noFill/>
-          </a:ln>
-        </p:spPr>
-        <p:style>
-          <a:lnRef idx="1">
-            <a:schemeClr val="accent1"/>
-          </a:lnRef>
-          <a:fillRef idx="3">
-            <a:schemeClr val="accent1"/>
-          </a:fillRef>
-          <a:effectRef idx="2">
-            <a:schemeClr val="accent1"/>
-          </a:effectRef>
-          <a:fontRef idx="minor">
-            <a:schemeClr val="lt1"/>
-          </a:fontRef>
-        </p:style>
-        <p:txBody>
-          <a:bodyPr rtlCol="0" anchor="ctr"/>
-          <a:lstStyle/>
-          <a:p>
-            <a:pPr algn="ctr"/>
-          </a:p>
-        </p:txBody>
-      </p:sp>
-      <p:sp>
-        <p:nvSpPr>
-          <p:cNvPr id="4" name="Rectangle 3"/>
-          <p:cNvSpPr/>
-          <p:nvPr/>
-        </p:nvSpPr>
-        <p:spPr>
-          <a:xfrm>
-            <a:off x="11716207" y="384048"/>
-            <a:ext cx="36576" cy="6080760"/>
-          </a:xfrm>
-          <a:prstGeom prst="rect">
-            <a:avLst/>
-          </a:prstGeom>
-          <a:solidFill>
-            <a:srgbClr val="48BF8F"/>
-          </a:solidFill>
-          <a:ln>
-            <a:noFill/>
-          </a:ln>
-        </p:spPr>
-        <p:style>
-          <a:lnRef idx="1">
-            <a:schemeClr val="accent1"/>
-          </a:lnRef>
-          <a:fillRef idx="3">
-            <a:schemeClr val="accent1"/>
-          </a:fillRef>
-          <a:effectRef idx="2">
-            <a:schemeClr val="accent1"/>
-          </a:effectRef>
-          <a:fontRef idx="minor">
-            <a:schemeClr val="lt1"/>
-          </a:fontRef>
-        </p:style>
-        <p:txBody>
-          <a:bodyPr rtlCol="0" anchor="ctr"/>
-          <a:lstStyle/>
-          <a:p>
-            <a:pPr algn="ctr"/>
-          </a:p>
-        </p:txBody>
-      </p:sp>
-      <p:sp>
-        <p:nvSpPr>
-          <p:cNvPr id="5" name="Rectangle 4"/>
-          <p:cNvSpPr/>
-          <p:nvPr/>
-        </p:nvSpPr>
-        <p:spPr>
-          <a:xfrm>
-            <a:off x="502920" y="384048"/>
-            <a:ext cx="11155680" cy="27432"/>
-          </a:xfrm>
-          <a:prstGeom prst="rect">
-            <a:avLst/>
-          </a:prstGeom>
-          <a:solidFill>
-            <a:srgbClr val="48BF8F"/>
-          </a:solidFill>
-          <a:ln>
-            <a:noFill/>
-          </a:ln>
-        </p:spPr>
-        <p:style>
-          <a:lnRef idx="1">
-            <a:schemeClr val="accent1"/>
-          </a:lnRef>
-          <a:fillRef idx="3">
-            <a:schemeClr val="accent1"/>
-          </a:fillRef>
-          <a:effectRef idx="2">
-            <a:schemeClr val="accent1"/>
-          </a:effectRef>
-          <a:fontRef idx="minor">
-            <a:schemeClr val="lt1"/>
-          </a:fontRef>
-        </p:style>
-        <p:txBody>
-          <a:bodyPr rtlCol="0" anchor="ctr"/>
-          <a:lstStyle/>
-          <a:p>
-            <a:pPr algn="ctr"/>
-          </a:p>
-        </p:txBody>
-      </p:sp>
-      <p:sp>
-        <p:nvSpPr>
-          <p:cNvPr id="6" name="Rectangle 5"/>
-          <p:cNvSpPr/>
-          <p:nvPr/>
-        </p:nvSpPr>
-        <p:spPr>
-          <a:xfrm>
-            <a:off x="502920" y="6437376"/>
-            <a:ext cx="11155680" cy="27432"/>
-          </a:xfrm>
-          <a:prstGeom prst="rect">
-            <a:avLst/>
-          </a:prstGeom>
-          <a:solidFill>
-            <a:srgbClr val="48BF8F"/>
-          </a:solidFill>
-          <a:ln>
-            <a:noFill/>
-          </a:ln>
-        </p:spPr>
-        <p:style>
-          <a:lnRef idx="1">
-            <a:schemeClr val="accent1"/>
-          </a:lnRef>
-          <a:fillRef idx="3">
-            <a:schemeClr val="accent1"/>
-          </a:fillRef>
-          <a:effectRef idx="2">
-            <a:schemeClr val="accent1"/>
-          </a:effectRef>
-          <a:fontRef idx="minor">
-            <a:schemeClr val="lt1"/>
-          </a:fontRef>
-        </p:style>
-        <p:txBody>
-          <a:bodyPr rtlCol="0" anchor="ctr"/>
-          <a:lstStyle/>
-          <a:p>
-            <a:pPr algn="ctr"/>
-          </a:p>
-        </p:txBody>
-      </p:sp>
-      <p:sp>
-        <p:nvSpPr>
-          <p:cNvPr id="7" name="TextBox 6"/>
-          <p:cNvSpPr txBox="1"/>
-          <p:nvPr/>
-        </p:nvSpPr>
-        <p:spPr>
-          <a:xfrm>
-            <a:off x="713232" y="548640"/>
-            <a:ext cx="10698480" cy="301752"/>
-          </a:xfrm>
-          <a:prstGeom prst="rect">
-            <a:avLst/>
-          </a:prstGeom>
-          <a:noFill/>
-        </p:spPr>
-        <p:txBody>
-          <a:bodyPr wrap="square" anchor="t">
-            <a:spAutoFit/>
-          </a:bodyPr>
-          <a:lstStyle/>
-          <a:p>
-            <a:pPr algn="l"/>
-            <a:r>
-              <a:rPr sz="1000" b="1">
-                <a:solidFill>
-                  <a:srgbClr val="48BF8F"/>
-                </a:solidFill>
-                <a:latin typeface="Aptos"/>
-              </a:rPr>
-              <a:t>EXECUTION PIPELINE</a:t>
-            </a:r>
-          </a:p>
-        </p:txBody>
-      </p:sp>
-      <p:sp>
-        <p:nvSpPr>
-          <p:cNvPr id="8" name="TextBox 7"/>
-          <p:cNvSpPr txBox="1"/>
-          <p:nvPr/>
-        </p:nvSpPr>
-        <p:spPr>
-          <a:xfrm>
-            <a:off x="694944" y="850392"/>
-            <a:ext cx="10881360" cy="566928"/>
-          </a:xfrm>
-          <a:prstGeom prst="rect">
-            <a:avLst/>
-          </a:prstGeom>
-          <a:noFill/>
-        </p:spPr>
-        <p:txBody>
-          <a:bodyPr wrap="square" anchor="t">
-            <a:spAutoFit/>
-          </a:bodyPr>
-          <a:lstStyle/>
-          <a:p>
-            <a:pPr algn="l"/>
-            <a:r>
-              <a:rPr sz="2700" b="0">
-                <a:solidFill>
-                  <a:srgbClr val="E8E8DE"/>
-                </a:solidFill>
-                <a:latin typeface="Aptos Display"/>
-              </a:rPr>
-              <a:t>How It Works</a:t>
-            </a:r>
-          </a:p>
-        </p:txBody>
-      </p:sp>
-      <p:sp>
-        <p:nvSpPr>
-          <p:cNvPr id="9" name="Rounded Rectangle 8"/>
-          <p:cNvSpPr/>
-          <p:nvPr/>
-        </p:nvSpPr>
-        <p:spPr>
-          <a:xfrm>
-            <a:off x="749808" y="1828800"/>
-            <a:ext cx="1591056" cy="685800"/>
-          </a:xfrm>
-          <a:prstGeom prst="roundRect">
-            <a:avLst/>
-          </a:prstGeom>
-          <a:solidFill>
-            <a:srgbClr val="202322"/>
-          </a:solidFill>
-          <a:ln>
-            <a:solidFill>
-              <a:srgbClr val="48BF8F"/>
-            </a:solidFill>
-          </a:ln>
-        </p:spPr>
-        <p:style>
-          <a:lnRef idx="1">
-            <a:schemeClr val="accent1"/>
-          </a:lnRef>
-          <a:fillRef idx="3">
-            <a:schemeClr val="accent1"/>
-          </a:fillRef>
-          <a:effectRef idx="2">
-            <a:schemeClr val="accent1"/>
-          </a:effectRef>
-          <a:fontRef idx="minor">
-            <a:schemeClr val="lt1"/>
-          </a:fontRef>
-        </p:style>
-        <p:txBody>
-          <a:bodyPr rtlCol="0" anchor="ctr"/>
-          <a:lstStyle/>
-          <a:p>
-            <a:pPr algn="ctr"/>
-          </a:p>
-        </p:txBody>
-      </p:sp>
-      <p:sp>
-        <p:nvSpPr>
-          <p:cNvPr id="10" name="TextBox 9"/>
-          <p:cNvSpPr txBox="1"/>
-          <p:nvPr/>
-        </p:nvSpPr>
-        <p:spPr>
-          <a:xfrm>
-            <a:off x="822959" y="1993392"/>
-            <a:ext cx="1444752" cy="256032"/>
-          </a:xfrm>
-          <a:prstGeom prst="rect">
-            <a:avLst/>
-          </a:prstGeom>
-          <a:noFill/>
-        </p:spPr>
-        <p:txBody>
-          <a:bodyPr wrap="square" anchor="t">
-            <a:spAutoFit/>
-          </a:bodyPr>
-          <a:lstStyle/>
-          <a:p>
-            <a:pPr algn="ctr"/>
-            <a:r>
-              <a:rPr sz="1000" b="1">
-                <a:solidFill>
-                  <a:srgbClr val="E8E8DE"/>
-                </a:solidFill>
-                <a:latin typeface="Aptos"/>
-              </a:rPr>
-              <a:t>Browser</a:t>
-            </a:r>
-          </a:p>
-        </p:txBody>
-      </p:sp>
-      <p:sp>
-        <p:nvSpPr>
-          <p:cNvPr id="11" name="TextBox 10"/>
-          <p:cNvSpPr txBox="1"/>
-          <p:nvPr/>
-        </p:nvSpPr>
-        <p:spPr>
-          <a:xfrm>
-            <a:off x="2340864" y="2002536"/>
-            <a:ext cx="246888" cy="182880"/>
-          </a:xfrm>
-          <a:prstGeom prst="rect">
-            <a:avLst/>
-          </a:prstGeom>
-          <a:noFill/>
-        </p:spPr>
-        <p:txBody>
-          <a:bodyPr wrap="square" anchor="t">
-            <a:spAutoFit/>
-          </a:bodyPr>
-          <a:lstStyle/>
-          <a:p>
-            <a:pPr algn="ctr"/>
-            <a:r>
-              <a:rPr sz="1200" b="1">
-                <a:solidFill>
-                  <a:srgbClr val="48BF8F"/>
-                </a:solidFill>
-                <a:latin typeface="Aptos"/>
-              </a:rPr>
-              <a:t>&gt;</a:t>
-            </a:r>
-          </a:p>
-        </p:txBody>
-      </p:sp>
-      <p:sp>
-        <p:nvSpPr>
-          <p:cNvPr id="12" name="Rounded Rectangle 11"/>
-          <p:cNvSpPr/>
-          <p:nvPr/>
-        </p:nvSpPr>
-        <p:spPr>
-          <a:xfrm>
-            <a:off x="2587751" y="1828800"/>
-            <a:ext cx="1591056" cy="685800"/>
-          </a:xfrm>
-          <a:prstGeom prst="roundRect">
-            <a:avLst/>
-          </a:prstGeom>
-          <a:solidFill>
-            <a:srgbClr val="202322"/>
-          </a:solidFill>
-          <a:ln>
-            <a:solidFill>
-              <a:srgbClr val="48BF8F"/>
-            </a:solidFill>
-          </a:ln>
-        </p:spPr>
-        <p:style>
-          <a:lnRef idx="1">
-            <a:schemeClr val="accent1"/>
-          </a:lnRef>
-          <a:fillRef idx="3">
-            <a:schemeClr val="accent1"/>
-          </a:fillRef>
-          <a:effectRef idx="2">
-            <a:schemeClr val="accent1"/>
-          </a:effectRef>
-          <a:fontRef idx="minor">
-            <a:schemeClr val="lt1"/>
-          </a:fontRef>
-        </p:style>
-        <p:txBody>
-          <a:bodyPr rtlCol="0" anchor="ctr"/>
-          <a:lstStyle/>
-          <a:p>
-            <a:pPr algn="ctr"/>
-          </a:p>
-        </p:txBody>
-      </p:sp>
-      <p:sp>
-        <p:nvSpPr>
-          <p:cNvPr id="13" name="TextBox 12"/>
-          <p:cNvSpPr txBox="1"/>
-          <p:nvPr/>
-        </p:nvSpPr>
-        <p:spPr>
-          <a:xfrm>
-            <a:off x="2660903" y="1993392"/>
-            <a:ext cx="1444752" cy="256032"/>
-          </a:xfrm>
-          <a:prstGeom prst="rect">
-            <a:avLst/>
-          </a:prstGeom>
-          <a:noFill/>
-        </p:spPr>
-        <p:txBody>
-          <a:bodyPr wrap="square" anchor="t">
-            <a:spAutoFit/>
-          </a:bodyPr>
-          <a:lstStyle/>
-          <a:p>
-            <a:pPr algn="ctr"/>
-            <a:r>
-              <a:rPr sz="1000" b="1">
-                <a:solidFill>
-                  <a:srgbClr val="E8E8DE"/>
-                </a:solidFill>
-                <a:latin typeface="Aptos"/>
-              </a:rPr>
-              <a:t>Channels</a:t>
-            </a:r>
-          </a:p>
-        </p:txBody>
-      </p:sp>
-      <p:sp>
-        <p:nvSpPr>
-          <p:cNvPr id="14" name="TextBox 13"/>
-          <p:cNvSpPr txBox="1"/>
-          <p:nvPr/>
-        </p:nvSpPr>
-        <p:spPr>
-          <a:xfrm>
-            <a:off x="4178807" y="2002536"/>
-            <a:ext cx="246888" cy="182880"/>
-          </a:xfrm>
-          <a:prstGeom prst="rect">
-            <a:avLst/>
-          </a:prstGeom>
-          <a:noFill/>
-        </p:spPr>
-        <p:txBody>
-          <a:bodyPr wrap="square" anchor="t">
-            <a:spAutoFit/>
-          </a:bodyPr>
-          <a:lstStyle/>
-          <a:p>
-            <a:pPr algn="ctr"/>
-            <a:r>
-              <a:rPr sz="1200" b="1">
-                <a:solidFill>
-                  <a:srgbClr val="48BF8F"/>
-                </a:solidFill>
-                <a:latin typeface="Aptos"/>
-              </a:rPr>
-              <a:t>&gt;</a:t>
-            </a:r>
-          </a:p>
-        </p:txBody>
-      </p:sp>
-      <p:sp>
-        <p:nvSpPr>
-          <p:cNvPr id="15" name="Rounded Rectangle 14"/>
-          <p:cNvSpPr/>
-          <p:nvPr/>
-        </p:nvSpPr>
-        <p:spPr>
-          <a:xfrm>
-            <a:off x="4425696" y="1828800"/>
-            <a:ext cx="1591056" cy="685800"/>
-          </a:xfrm>
-          <a:prstGeom prst="roundRect">
-            <a:avLst/>
-          </a:prstGeom>
-          <a:solidFill>
-            <a:srgbClr val="202322"/>
-          </a:solidFill>
-          <a:ln>
-            <a:solidFill>
-              <a:srgbClr val="48BF8F"/>
-            </a:solidFill>
-          </a:ln>
-        </p:spPr>
-        <p:style>
-          <a:lnRef idx="1">
-            <a:schemeClr val="accent1"/>
-          </a:lnRef>
-          <a:fillRef idx="3">
-            <a:schemeClr val="accent1"/>
-          </a:fillRef>
-          <a:effectRef idx="2">
-            <a:schemeClr val="accent1"/>
-          </a:effectRef>
-          <a:fontRef idx="minor">
-            <a:schemeClr val="lt1"/>
-          </a:fontRef>
-        </p:style>
-        <p:txBody>
-          <a:bodyPr rtlCol="0" anchor="ctr"/>
-          <a:lstStyle/>
-          <a:p>
-            <a:pPr algn="ctr"/>
-          </a:p>
-        </p:txBody>
-      </p:sp>
-      <p:sp>
-        <p:nvSpPr>
-          <p:cNvPr id="16" name="TextBox 15"/>
-          <p:cNvSpPr txBox="1"/>
-          <p:nvPr/>
-        </p:nvSpPr>
-        <p:spPr>
-          <a:xfrm>
-            <a:off x="4498848" y="1993392"/>
-            <a:ext cx="1444752" cy="256032"/>
-          </a:xfrm>
-          <a:prstGeom prst="rect">
-            <a:avLst/>
-          </a:prstGeom>
-          <a:noFill/>
-        </p:spPr>
-        <p:txBody>
-          <a:bodyPr wrap="square" anchor="t">
-            <a:spAutoFit/>
-          </a:bodyPr>
-          <a:lstStyle/>
-          <a:p>
-            <a:pPr algn="ctr"/>
-            <a:r>
-              <a:rPr sz="1000" b="1">
-                <a:solidFill>
-                  <a:srgbClr val="E8E8DE"/>
-                </a:solidFill>
-                <a:latin typeface="Aptos"/>
-              </a:rPr>
-              <a:t>RAG</a:t>
-            </a:r>
-          </a:p>
-        </p:txBody>
-      </p:sp>
-      <p:sp>
-        <p:nvSpPr>
-          <p:cNvPr id="17" name="TextBox 16"/>
-          <p:cNvSpPr txBox="1"/>
-          <p:nvPr/>
-        </p:nvSpPr>
-        <p:spPr>
-          <a:xfrm>
-            <a:off x="6016752" y="2002536"/>
-            <a:ext cx="246888" cy="182880"/>
-          </a:xfrm>
-          <a:prstGeom prst="rect">
-            <a:avLst/>
-          </a:prstGeom>
-          <a:noFill/>
-        </p:spPr>
-        <p:txBody>
-          <a:bodyPr wrap="square" anchor="t">
-            <a:spAutoFit/>
-          </a:bodyPr>
-          <a:lstStyle/>
-          <a:p>
-            <a:pPr algn="ctr"/>
-            <a:r>
-              <a:rPr sz="1200" b="1">
-                <a:solidFill>
-                  <a:srgbClr val="48BF8F"/>
-                </a:solidFill>
-                <a:latin typeface="Aptos"/>
-              </a:rPr>
-              <a:t>&gt;</a:t>
-            </a:r>
-          </a:p>
-        </p:txBody>
-      </p:sp>
-      <p:sp>
-        <p:nvSpPr>
-          <p:cNvPr id="18" name="Rounded Rectangle 17"/>
-          <p:cNvSpPr/>
-          <p:nvPr/>
-        </p:nvSpPr>
-        <p:spPr>
-          <a:xfrm>
-            <a:off x="6263640" y="1828800"/>
-            <a:ext cx="1591056" cy="685800"/>
-          </a:xfrm>
-          <a:prstGeom prst="roundRect">
-            <a:avLst/>
-          </a:prstGeom>
-          <a:solidFill>
-            <a:srgbClr val="202322"/>
-          </a:solidFill>
-          <a:ln>
-            <a:solidFill>
-              <a:srgbClr val="48BF8F"/>
-            </a:solidFill>
-          </a:ln>
-        </p:spPr>
-        <p:style>
-          <a:lnRef idx="1">
-            <a:schemeClr val="accent1"/>
-          </a:lnRef>
-          <a:fillRef idx="3">
-            <a:schemeClr val="accent1"/>
-          </a:fillRef>
-          <a:effectRef idx="2">
-            <a:schemeClr val="accent1"/>
-          </a:effectRef>
-          <a:fontRef idx="minor">
-            <a:schemeClr val="lt1"/>
-          </a:fontRef>
-        </p:style>
-        <p:txBody>
-          <a:bodyPr rtlCol="0" anchor="ctr"/>
-          <a:lstStyle/>
-          <a:p>
-            <a:pPr algn="ctr"/>
-          </a:p>
-        </p:txBody>
-      </p:sp>
-      <p:sp>
-        <p:nvSpPr>
-          <p:cNvPr id="19" name="TextBox 18"/>
-          <p:cNvSpPr txBox="1"/>
-          <p:nvPr/>
-        </p:nvSpPr>
-        <p:spPr>
-          <a:xfrm>
-            <a:off x="6336792" y="1993392"/>
-            <a:ext cx="1444752" cy="256032"/>
-          </a:xfrm>
-          <a:prstGeom prst="rect">
-            <a:avLst/>
-          </a:prstGeom>
-          <a:noFill/>
-        </p:spPr>
-        <p:txBody>
-          <a:bodyPr wrap="square" anchor="t">
-            <a:spAutoFit/>
-          </a:bodyPr>
-          <a:lstStyle/>
-          <a:p>
-            <a:pPr algn="ctr"/>
-            <a:r>
-              <a:rPr sz="1000" b="1">
-                <a:solidFill>
-                  <a:srgbClr val="E8E8DE"/>
-                </a:solidFill>
-                <a:latin typeface="Aptos"/>
-              </a:rPr>
-              <a:t>Planner</a:t>
-            </a:r>
-          </a:p>
-        </p:txBody>
-      </p:sp>
-      <p:sp>
-        <p:nvSpPr>
-          <p:cNvPr id="20" name="TextBox 19"/>
-          <p:cNvSpPr txBox="1"/>
-          <p:nvPr/>
-        </p:nvSpPr>
-        <p:spPr>
-          <a:xfrm>
-            <a:off x="7854696" y="2002536"/>
-            <a:ext cx="246888" cy="182880"/>
-          </a:xfrm>
-          <a:prstGeom prst="rect">
-            <a:avLst/>
-          </a:prstGeom>
-          <a:noFill/>
-        </p:spPr>
-        <p:txBody>
-          <a:bodyPr wrap="square" anchor="t">
-            <a:spAutoFit/>
-          </a:bodyPr>
-          <a:lstStyle/>
-          <a:p>
-            <a:pPr algn="ctr"/>
-            <a:r>
-              <a:rPr sz="1200" b="1">
-                <a:solidFill>
-                  <a:srgbClr val="48BF8F"/>
-                </a:solidFill>
-                <a:latin typeface="Aptos"/>
-              </a:rPr>
-              <a:t>&gt;</a:t>
-            </a:r>
-          </a:p>
-        </p:txBody>
-      </p:sp>
-      <p:sp>
-        <p:nvSpPr>
-          <p:cNvPr id="21" name="Rounded Rectangle 20"/>
-          <p:cNvSpPr/>
-          <p:nvPr/>
-        </p:nvSpPr>
-        <p:spPr>
-          <a:xfrm>
-            <a:off x="8101583" y="1828800"/>
-            <a:ext cx="1591056" cy="685800"/>
-          </a:xfrm>
-          <a:prstGeom prst="roundRect">
-            <a:avLst/>
-          </a:prstGeom>
-          <a:solidFill>
-            <a:srgbClr val="202322"/>
-          </a:solidFill>
-          <a:ln>
-            <a:solidFill>
-              <a:srgbClr val="48BF8F"/>
-            </a:solidFill>
-          </a:ln>
-        </p:spPr>
-        <p:style>
-          <a:lnRef idx="1">
-            <a:schemeClr val="accent1"/>
-          </a:lnRef>
-          <a:fillRef idx="3">
-            <a:schemeClr val="accent1"/>
-          </a:fillRef>
-          <a:effectRef idx="2">
-            <a:schemeClr val="accent1"/>
-          </a:effectRef>
-          <a:fontRef idx="minor">
-            <a:schemeClr val="lt1"/>
-          </a:fontRef>
-        </p:style>
-        <p:txBody>
-          <a:bodyPr rtlCol="0" anchor="ctr"/>
-          <a:lstStyle/>
-          <a:p>
-            <a:pPr algn="ctr"/>
-          </a:p>
-        </p:txBody>
-      </p:sp>
-      <p:sp>
-        <p:nvSpPr>
-          <p:cNvPr id="22" name="TextBox 21"/>
-          <p:cNvSpPr txBox="1"/>
-          <p:nvPr/>
-        </p:nvSpPr>
-        <p:spPr>
-          <a:xfrm>
-            <a:off x="8174736" y="1993392"/>
-            <a:ext cx="1444752" cy="256032"/>
-          </a:xfrm>
-          <a:prstGeom prst="rect">
-            <a:avLst/>
-          </a:prstGeom>
-          <a:noFill/>
-        </p:spPr>
-        <p:txBody>
-          <a:bodyPr wrap="square" anchor="t">
-            <a:spAutoFit/>
-          </a:bodyPr>
-          <a:lstStyle/>
-          <a:p>
-            <a:pPr algn="ctr"/>
-            <a:r>
-              <a:rPr sz="1000" b="1">
-                <a:solidFill>
-                  <a:srgbClr val="E8E8DE"/>
-                </a:solidFill>
-                <a:latin typeface="Aptos"/>
-              </a:rPr>
-              <a:t>Tools</a:t>
-            </a:r>
-          </a:p>
-        </p:txBody>
-      </p:sp>
-      <p:sp>
-        <p:nvSpPr>
-          <p:cNvPr id="23" name="TextBox 22"/>
-          <p:cNvSpPr txBox="1"/>
-          <p:nvPr/>
-        </p:nvSpPr>
-        <p:spPr>
-          <a:xfrm>
-            <a:off x="9692640" y="2002536"/>
-            <a:ext cx="246888" cy="182880"/>
-          </a:xfrm>
-          <a:prstGeom prst="rect">
-            <a:avLst/>
-          </a:prstGeom>
-          <a:noFill/>
-        </p:spPr>
-        <p:txBody>
-          <a:bodyPr wrap="square" anchor="t">
-            <a:spAutoFit/>
-          </a:bodyPr>
-          <a:lstStyle/>
-          <a:p>
-            <a:pPr algn="ctr"/>
-            <a:r>
-              <a:rPr sz="1200" b="1">
-                <a:solidFill>
-                  <a:srgbClr val="48BF8F"/>
-                </a:solidFill>
-                <a:latin typeface="Aptos"/>
-              </a:rPr>
-              <a:t>&gt;</a:t>
-            </a:r>
-          </a:p>
-        </p:txBody>
-      </p:sp>
-      <p:sp>
-        <p:nvSpPr>
-          <p:cNvPr id="24" name="Rounded Rectangle 23"/>
-          <p:cNvSpPr/>
-          <p:nvPr/>
-        </p:nvSpPr>
-        <p:spPr>
-          <a:xfrm>
-            <a:off x="9939528" y="1828800"/>
-            <a:ext cx="1591056" cy="685800"/>
-          </a:xfrm>
-          <a:prstGeom prst="roundRect">
-            <a:avLst/>
-          </a:prstGeom>
-          <a:solidFill>
-            <a:srgbClr val="202322"/>
-          </a:solidFill>
-          <a:ln>
-            <a:solidFill>
-              <a:srgbClr val="48BF8F"/>
-            </a:solidFill>
-          </a:ln>
-        </p:spPr>
-        <p:style>
-          <a:lnRef idx="1">
-            <a:schemeClr val="accent1"/>
-          </a:lnRef>
-          <a:fillRef idx="3">
-            <a:schemeClr val="accent1"/>
-          </a:fillRef>
-          <a:effectRef idx="2">
-            <a:schemeClr val="accent1"/>
-          </a:effectRef>
-          <a:fontRef idx="minor">
-            <a:schemeClr val="lt1"/>
-          </a:fontRef>
-        </p:style>
-        <p:txBody>
-          <a:bodyPr rtlCol="0" anchor="ctr"/>
-          <a:lstStyle/>
-          <a:p>
-            <a:pPr algn="ctr"/>
-          </a:p>
-        </p:txBody>
-      </p:sp>
-      <p:sp>
-        <p:nvSpPr>
-          <p:cNvPr id="25" name="TextBox 24"/>
-          <p:cNvSpPr txBox="1"/>
-          <p:nvPr/>
-        </p:nvSpPr>
-        <p:spPr>
-          <a:xfrm>
-            <a:off x="10012680" y="1993392"/>
-            <a:ext cx="1444752" cy="256032"/>
-          </a:xfrm>
-          <a:prstGeom prst="rect">
-            <a:avLst/>
-          </a:prstGeom>
-          <a:noFill/>
-        </p:spPr>
-        <p:txBody>
-          <a:bodyPr wrap="square" anchor="t">
-            <a:spAutoFit/>
-          </a:bodyPr>
-          <a:lstStyle/>
-          <a:p>
-            <a:pPr algn="ctr"/>
-            <a:r>
-              <a:rPr sz="1000" b="1">
-                <a:solidFill>
-                  <a:srgbClr val="E8E8DE"/>
-                </a:solidFill>
-                <a:latin typeface="Aptos"/>
-              </a:rPr>
-              <a:t>Answer</a:t>
-            </a:r>
-          </a:p>
-        </p:txBody>
-      </p:sp>
-      <p:sp>
-        <p:nvSpPr>
-          <p:cNvPr id="26" name="Rounded Rectangle 25"/>
-          <p:cNvSpPr/>
-          <p:nvPr/>
-        </p:nvSpPr>
-        <p:spPr>
-          <a:xfrm>
-            <a:off x="713232" y="2971800"/>
-            <a:ext cx="5349240" cy="2788920"/>
-          </a:xfrm>
-          <a:prstGeom prst="roundRect">
-            <a:avLst/>
-          </a:prstGeom>
-          <a:solidFill>
-            <a:srgbClr val="161A19"/>
-          </a:solidFill>
-          <a:ln>
-            <a:solidFill>
-              <a:srgbClr val="595F56"/>
-            </a:solidFill>
-          </a:ln>
-        </p:spPr>
-        <p:style>
-          <a:lnRef idx="1">
-            <a:schemeClr val="accent1"/>
-          </a:lnRef>
-          <a:fillRef idx="3">
-            <a:schemeClr val="accent1"/>
-          </a:fillRef>
-          <a:effectRef idx="2">
-            <a:schemeClr val="accent1"/>
-          </a:effectRef>
-          <a:fontRef idx="minor">
-            <a:schemeClr val="lt1"/>
-          </a:fontRef>
-        </p:style>
-        <p:txBody>
-          <a:bodyPr rtlCol="0" anchor="ctr"/>
-          <a:lstStyle/>
-          <a:p>
-            <a:pPr algn="ctr"/>
-          </a:p>
-        </p:txBody>
-      </p:sp>
-      <p:sp>
-        <p:nvSpPr>
-          <p:cNvPr id="27" name="Rectangle 26"/>
-          <p:cNvSpPr/>
-          <p:nvPr/>
-        </p:nvSpPr>
-        <p:spPr>
-          <a:xfrm>
-            <a:off x="713232" y="2971800"/>
-            <a:ext cx="5349240" cy="109728"/>
-          </a:xfrm>
-          <a:prstGeom prst="rect">
-            <a:avLst/>
-          </a:prstGeom>
-          <a:solidFill>
-            <a:srgbClr val="48BF8F"/>
-          </a:solidFill>
-          <a:ln>
-            <a:noFill/>
-          </a:ln>
-        </p:spPr>
-        <p:style>
-          <a:lnRef idx="1">
-            <a:schemeClr val="accent1"/>
-          </a:lnRef>
-          <a:fillRef idx="3">
-            <a:schemeClr val="accent1"/>
-          </a:fillRef>
-          <a:effectRef idx="2">
-            <a:schemeClr val="accent1"/>
-          </a:effectRef>
-          <a:fontRef idx="minor">
-            <a:schemeClr val="lt1"/>
-          </a:fontRef>
-        </p:style>
-        <p:txBody>
-          <a:bodyPr rtlCol="0" anchor="ctr"/>
-          <a:lstStyle/>
-          <a:p>
-            <a:pPr algn="ctr"/>
-          </a:p>
-        </p:txBody>
-      </p:sp>
-      <p:sp>
-        <p:nvSpPr>
-          <p:cNvPr id="28" name="TextBox 27"/>
-          <p:cNvSpPr txBox="1"/>
-          <p:nvPr/>
-        </p:nvSpPr>
-        <p:spPr>
-          <a:xfrm>
-            <a:off x="914400" y="3172968"/>
-            <a:ext cx="4946903" cy="310896"/>
-          </a:xfrm>
-          <a:prstGeom prst="rect">
-            <a:avLst/>
-          </a:prstGeom>
-          <a:noFill/>
-        </p:spPr>
-        <p:txBody>
-          <a:bodyPr wrap="square" anchor="t">
-            <a:spAutoFit/>
-          </a:bodyPr>
-          <a:lstStyle/>
-          <a:p>
-            <a:pPr algn="l"/>
-            <a:r>
-              <a:rPr sz="1400" b="1">
-                <a:solidFill>
-                  <a:srgbClr val="48BF8F"/>
-                </a:solidFill>
-                <a:latin typeface="Aptos"/>
-              </a:rPr>
-              <a:t>Request path</a:t>
-            </a:r>
-          </a:p>
-        </p:txBody>
-      </p:sp>
-      <p:sp>
-        <p:nvSpPr>
-          <p:cNvPr id="29" name="TextBox 28"/>
-          <p:cNvSpPr txBox="1"/>
-          <p:nvPr/>
-        </p:nvSpPr>
-        <p:spPr>
-          <a:xfrm>
-            <a:off x="914400" y="3630168"/>
-            <a:ext cx="4946903" cy="1984248"/>
-          </a:xfrm>
-          <a:prstGeom prst="rect">
-            <a:avLst/>
-          </a:prstGeom>
-          <a:noFill/>
-        </p:spPr>
-        <p:txBody>
-          <a:bodyPr wrap="square" anchor="t" lIns="38100" rIns="38100" tIns="25400" bIns="25400">
-            <a:noAutofit/>
-          </a:bodyPr>
-          <a:lstStyle/>
-          <a:p>
-            <a:pPr>
-              <a:spcAft>
-                <a:spcPts val="600"/>
-              </a:spcAft>
-              <a:defRPr sz="1500">
-                <a:solidFill>
-                  <a:srgbClr val="B4BAAE"/>
-                </a:solidFill>
-                <a:latin typeface="Aptos"/>
-              </a:defRPr>
-            </a:pPr>
-            <a:r>
-              <a:rPr sz="1500" b="0" i="0">
-                <a:latin typeface="Calibri"/>
-              </a:rPr>
-              <a:t>Browser UI sends chat and workflow requests through Django views and Channels WebSockets.</a:t>
-            </a:r>
-            <a:endParaRPr sz="1500" b="0" i="0">
-              <a:latin typeface="Calibri"/>
-            </a:endParaRPr>
-          </a:p>
-          <a:p>
-            <a:pPr>
-              <a:spcAft>
-                <a:spcPts val="600"/>
-              </a:spcAft>
-              <a:defRPr sz="1500">
-                <a:solidFill>
-                  <a:srgbClr val="B4BAAE"/>
-                </a:solidFill>
-                <a:latin typeface="Aptos"/>
-              </a:defRPr>
-            </a:pPr>
-            <a:r>
-              <a:rPr sz="1500" b="0" i="0">
-                <a:latin typeface="Calibri"/>
-              </a:rPr>
-              <a:t>RAG chains load selected file/directory context, retrieve relevant chunks, and build answer prompts.</a:t>
-            </a:r>
-            <a:endParaRPr sz="1500" b="0" i="0">
-              <a:latin typeface="Calibri"/>
-            </a:endParaRPr>
-          </a:p>
-          <a:p>
-            <a:pPr>
-              <a:spcAft>
-                <a:spcPts val="600"/>
-              </a:spcAft>
-              <a:defRPr sz="1500">
-                <a:solidFill>
-                  <a:srgbClr val="B4BAAE"/>
-                </a:solidFill>
-                <a:latin typeface="Aptos"/>
-              </a:defRPr>
-            </a:pPr>
-            <a:r>
-              <a:rPr sz="1500" b="0" i="0">
-                <a:latin typeface="Calibri"/>
-              </a:rPr>
-              <a:t>DB-menu actions validate directories or SQLite files in the browser, then call Django views that either copy the live database out or stage a replacement into `DB/ToLoad/db.sqlite3`.</a:t>
-            </a:r>
-            <a:endParaRPr sz="1500" b="0" i="0">
-              <a:latin typeface="Calibri"/>
-            </a:endParaRPr>
-          </a:p>
-        </p:txBody>
-      </p:sp>
-      <p:sp>
-        <p:nvSpPr>
-          <p:cNvPr id="30" name="Rounded Rectangle 29"/>
-          <p:cNvSpPr/>
-          <p:nvPr/>
-        </p:nvSpPr>
-        <p:spPr>
-          <a:xfrm>
-            <a:off x="6327648" y="2971800"/>
-            <a:ext cx="5074920" cy="2788920"/>
-          </a:xfrm>
-          <a:prstGeom prst="roundRect">
-            <a:avLst/>
-          </a:prstGeom>
-          <a:solidFill>
-            <a:srgbClr val="161A19"/>
-          </a:solidFill>
-          <a:ln>
-            <a:solidFill>
-              <a:srgbClr val="595F56"/>
-            </a:solidFill>
-          </a:ln>
-        </p:spPr>
-        <p:style>
-          <a:lnRef idx="1">
-            <a:schemeClr val="accent1"/>
-          </a:lnRef>
-          <a:fillRef idx="3">
-            <a:schemeClr val="accent1"/>
-          </a:fillRef>
-          <a:effectRef idx="2">
-            <a:schemeClr val="accent1"/>
-          </a:effectRef>
-          <a:fontRef idx="minor">
-            <a:schemeClr val="lt1"/>
-          </a:fontRef>
-        </p:style>
-        <p:txBody>
-          <a:bodyPr rtlCol="0" anchor="ctr"/>
-          <a:lstStyle/>
-          <a:p>
-            <a:pPr algn="ctr"/>
-          </a:p>
-        </p:txBody>
-      </p:sp>
-      <p:sp>
-        <p:nvSpPr>
-          <p:cNvPr id="31" name="Rectangle 30"/>
-          <p:cNvSpPr/>
-          <p:nvPr/>
-        </p:nvSpPr>
-        <p:spPr>
-          <a:xfrm>
-            <a:off x="6327648" y="2971800"/>
-            <a:ext cx="5074920" cy="109728"/>
-          </a:xfrm>
-          <a:prstGeom prst="rect">
-            <a:avLst/>
-          </a:prstGeom>
-          <a:solidFill>
-            <a:srgbClr val="C48052"/>
-          </a:solidFill>
-          <a:ln>
-            <a:noFill/>
-          </a:ln>
-        </p:spPr>
-        <p:style>
-          <a:lnRef idx="1">
-            <a:schemeClr val="accent1"/>
-          </a:lnRef>
-          <a:fillRef idx="3">
-            <a:schemeClr val="accent1"/>
-          </a:fillRef>
-          <a:effectRef idx="2">
-            <a:schemeClr val="accent1"/>
-          </a:effectRef>
-          <a:fontRef idx="minor">
-            <a:schemeClr val="lt1"/>
-          </a:fontRef>
-        </p:style>
-        <p:txBody>
-          <a:bodyPr rtlCol="0" anchor="ctr"/>
-          <a:lstStyle/>
-          <a:p>
-            <a:pPr algn="ctr"/>
-          </a:p>
-        </p:txBody>
-      </p:sp>
-      <p:sp>
-        <p:nvSpPr>
-          <p:cNvPr id="32" name="TextBox 31"/>
-          <p:cNvSpPr txBox="1"/>
-          <p:nvPr/>
-        </p:nvSpPr>
-        <p:spPr>
-          <a:xfrm>
-            <a:off x="6528816" y="3172968"/>
-            <a:ext cx="4672583" cy="310896"/>
-          </a:xfrm>
-          <a:prstGeom prst="rect">
-            <a:avLst/>
-          </a:prstGeom>
-          <a:noFill/>
-        </p:spPr>
-        <p:txBody>
-          <a:bodyPr wrap="square" anchor="t">
-            <a:spAutoFit/>
-          </a:bodyPr>
-          <a:lstStyle/>
-          <a:p>
-            <a:pPr algn="l"/>
-            <a:r>
-              <a:rPr sz="1400" b="1">
-                <a:solidFill>
-                  <a:srgbClr val="C48052"/>
-                </a:solidFill>
-                <a:latin typeface="Aptos"/>
-              </a:rPr>
-              <a:t>Runtime path</a:t>
-            </a:r>
-          </a:p>
-        </p:txBody>
-      </p:sp>
-      <p:sp>
-        <p:nvSpPr>
-          <p:cNvPr id="33" name="TextBox 32"/>
-          <p:cNvSpPr txBox="1"/>
-          <p:nvPr/>
-        </p:nvSpPr>
-        <p:spPr>
-          <a:xfrm>
-            <a:off x="6528816" y="3630168"/>
-            <a:ext cx="4672583" cy="1984248"/>
-          </a:xfrm>
-          <a:prstGeom prst="rect">
-            <a:avLst/>
-          </a:prstGeom>
-          <a:noFill/>
-        </p:spPr>
-        <p:txBody>
-          <a:bodyPr wrap="square" anchor="t" lIns="38100" rIns="38100" tIns="25400" bIns="25400">
-            <a:noAutofit/>
-          </a:bodyPr>
-          <a:lstStyle/>
-          <a:p>
-            <a:pPr>
-              <a:spcAft>
-                <a:spcPts val="600"/>
-              </a:spcAft>
-              <a:defRPr sz="1500">
-                <a:solidFill>
-                  <a:srgbClr val="B4BAAE"/>
-                </a:solidFill>
-                <a:latin typeface="Aptos"/>
-              </a:defRPr>
-            </a:pPr>
-            <a:r>
-              <a:rPr sz="1000" b="0" i="0">
-                <a:latin typeface="Calibri"/>
-              </a:rPr>
-              <a:t>Before a heavy directory embedding run on supported NVIDIA hosts, a fail-open pre-flight guard can estimate VRAM pressure and surface a non-blocking warning in chat.</a:t>
-            </a:r>
-            <a:endParaRPr sz="1000" b="0" i="0">
-              <a:latin typeface="Calibri"/>
-            </a:endParaRPr>
-          </a:p>
-          <a:p>
-            <a:pPr>
-              <a:spcAft>
-                <a:spcPts val="600"/>
-              </a:spcAft>
-              <a:defRPr sz="1500">
-                <a:solidFill>
-                  <a:srgbClr val="B4BAAE"/>
-                </a:solidFill>
-                <a:latin typeface="Aptos"/>
-              </a:defRPr>
-            </a:pPr>
-            <a:r>
-              <a:rPr sz="1000" b="0" i="0">
-                <a:latin typeface="Calibri"/>
-              </a:rPr>
-              <a:t>Version resolution now flows through git tags, a runtime resolver module, generated build artefacts, and an open `/agent/version/` endpoint.</a:t>
-            </a:r>
-            <a:endParaRPr sz="1000" b="0" i="0">
-              <a:latin typeface="Calibri"/>
-            </a:endParaRPr>
-          </a:p>
-          <a:p>
-            <a:pPr>
-              <a:spcAft>
-                <a:spcPts val="600"/>
-              </a:spcAft>
-              <a:defRPr sz="1500">
-                <a:solidFill>
-                  <a:srgbClr val="B4BAAE"/>
-                </a:solidFill>
-                <a:latin typeface="Aptos"/>
-              </a:defRPr>
-            </a:pPr>
-            <a:r>
-              <a:rPr sz="1000" b="0" i="0">
-                <a:latin typeface="Calibri"/>
-              </a:rPr>
-              <a:t>When Multi-Turn is enabled, the global planner selects context and tool stages before the executor binds only the relevant tools, including wrapped deterministic agents such as De-Compresser.</a:t>
-            </a:r>
-            <a:endParaRPr sz="1000" b="0" i="0">
-              <a:latin typeface="Calibri"/>
-            </a:endParaRPr>
-          </a:p>
-          <a:p>
-            <a:pPr>
-              <a:spcAft>
-                <a:spcPts val="600"/>
-              </a:spcAft>
-              <a:defRPr sz="1500">
-                <a:solidFill>
-                  <a:srgbClr val="B4BAAE"/>
-                </a:solidFill>
-                <a:latin typeface="Aptos"/>
-              </a:defRPr>
-            </a:pPr>
-            <a:r>
-              <a:rPr sz="1000" b="0" i="0">
-                <a:latin typeface="Calibri"/>
-              </a:rPr>
-              <a:t>The Unrealer path opens a TCP socket to the Unreal MCP plugin, sends one `{"type": command, "params": {...}}` payload, captures the JSON reply, and emits one `INI_SECTION_UNREALER` block for downstream logic.</a:t>
-            </a:r>
-            <a:endParaRPr sz="1000" b="0" i="0">
-              <a:latin typeface="Calibri"/>
-            </a:endParaRPr>
-          </a:p>
-          <a:p>
-            <a:pPr>
-              <a:spcAft>
-                <a:spcPts val="600"/>
-              </a:spcAft>
-              <a:defRPr sz="1500">
-                <a:solidFill>
-                  <a:srgbClr val="B4BAAE"/>
-                </a:solidFill>
-                <a:latin typeface="Aptos"/>
-              </a:defRPr>
-            </a:pPr>
-            <a:r>
-              <a:rPr sz="1000" b="0" i="0">
-                <a:latin typeface="Calibri"/>
-              </a:rPr>
-              <a:t>After spawn-capable tool calls and again after the final answer, the orphan reaper can sweep dead descendants, orphaned `conhost.exe` companions, and stale pool-linked processes without ever raising into the chat path.</a:t>
-            </a:r>
-            <a:endParaRPr sz="1000" b="0" i="0">
-              <a:latin typeface="Calibri"/>
-            </a:endParaRPr>
-          </a:p>
-          <a:p>
-            <a:pPr>
-              <a:spcAft>
-                <a:spcPts val="600"/>
-              </a:spcAft>
-              <a:defRPr sz="1500">
-                <a:solidFill>
-                  <a:srgbClr val="B4BAAE"/>
-                </a:solidFill>
-                <a:latin typeface="Aptos"/>
-              </a:defRPr>
-            </a:pPr>
-            <a:r>
-              <a:rPr sz="1000" b="0" i="0">
-                <a:latin typeface="Calibri"/>
-              </a:rPr>
-              <a:t>Tool calls execute in the backend, append observations, and may create wrapped runtime copies under `agent/agents/pools/_chat_runs_/`.</a:t>
-            </a:r>
-            <a:endParaRPr sz="1000" b="0" i="0">
-              <a:latin typeface="Calibri"/>
-            </a:endParaRPr>
-          </a:p>
-          <a:p>
-            <a:pPr>
-              <a:spcAft>
-                <a:spcPts val="600"/>
-              </a:spcAft>
-              <a:defRPr sz="1500">
-                <a:solidFill>
-                  <a:srgbClr val="B4BAAE"/>
-                </a:solidFill>
-                <a:latin typeface="Aptos"/>
-              </a:defRPr>
-            </a:pPr>
-            <a:r>
-              <a:rPr sz="1000" b="0" i="0">
-                <a:latin typeface="Calibri"/>
-              </a:rPr>
-              <a:t>On the next full start-up, `manage.py` can swap a staged database into place before Django imports, while archiving the previous live database under `DB/Older/&lt;timestamp&gt;/`.</a:t>
-            </a:r>
-            <a:endParaRPr sz="1000" b="0" i="0">
-              <a:latin typeface="Calibri"/>
-            </a:endParaRPr>
-          </a:p>
-          <a:p>
-            <a:pPr>
-              <a:spcAft>
-                <a:spcPts val="600"/>
-              </a:spcAft>
-              <a:defRPr sz="1500">
-                <a:solidFill>
-                  <a:srgbClr val="B4BAAE"/>
-                </a:solidFill>
-                <a:latin typeface="Aptos"/>
-              </a:defRPr>
-            </a:pPr>
-            <a:r>
-              <a:rPr sz="1000" b="0" i="0">
-                <a:latin typeface="Calibri"/>
-              </a:rPr>
-              <a:t>ACP flows deploy session-scoped pool instances, wire config values, validate NxN graph rules, and execute through Starter-driven flow semantics.</a:t>
-            </a:r>
-            <a:endParaRPr sz="1000" b="0" i="0">
-              <a:latin typeface="Calibri"/>
-            </a:endParaRPr>
-          </a:p>
-          <a:p>
-            <a:pPr>
-              <a:spcAft>
-                <a:spcPts val="600"/>
-              </a:spcAft>
-              <a:defRPr sz="1500">
-                <a:solidFill>
-                  <a:srgbClr val="B4BAAE"/>
-                </a:solidFill>
-                <a:latin typeface="Aptos"/>
-              </a:defRPr>
-            </a:pPr>
-            <a:r>
-              <a:rPr sz="1000" b="0" i="0">
-                <a:latin typeface="Calibri"/>
-              </a:rPr>
-              <a:t>Build scripts collect static assets, bundle Django/Python resources, add agent templates, and assemble `pkg.zip`, `Uninstaller.exe`, and `dist/Tlamatini_Release/`.</a:t>
-            </a:r>
-            <a:endParaRPr sz="1000" b="0" i="0">
-              <a:latin typeface="Calibri"/>
-            </a:endParaRPr>
-          </a:p>
-        </p:txBody>
-      </p:sp>
-    </p:spTree>
-  </p:cSld>
-  <p:clrMapOvr>
-    <a:masterClrMapping/>
-  </p:clrMapOvr>
-</p:sld>
-</file>
-
-<file path=ppt/slides/slide40.xml><?xml version="1.0" encoding="utf-8"?>
+<file path=ppt/slides/slide39.xml><?xml version="1.0" encoding="utf-8"?>
 <p:sld xmlns:a="http://schemas.openxmlformats.org/drawingml/2006/main" xmlns:p="http://schemas.openxmlformats.org/presentationml/2006/main" xmlns:r="http://schemas.openxmlformats.org/officeDocument/2006/relationships">
   <p:cSld>
     <p:spTree>
@@ -26598,7 +24436,1521 @@
 </p:sld>
 </file>
 
-<file path=ppt/slides/slide41.xml><?xml version="1.0" encoding="utf-8"?>
+<file path=ppt/slides/slide4.xml><?xml version="1.0" encoding="utf-8"?>
+<p:sld xmlns:a="http://schemas.openxmlformats.org/drawingml/2006/main" xmlns:p="http://schemas.openxmlformats.org/presentationml/2006/main" xmlns:r="http://schemas.openxmlformats.org/officeDocument/2006/relationships">
+  <p:cSld>
+    <p:spTree>
+      <p:nvGrpSpPr>
+        <p:cNvPr id="1" name=""/>
+        <p:cNvGrpSpPr/>
+        <p:nvPr/>
+      </p:nvGrpSpPr>
+      <p:grpSpPr/>
+      <p:sp>
+        <p:nvSpPr>
+          <p:cNvPr id="2" name="Rectangle 1"/>
+          <p:cNvSpPr/>
+          <p:nvPr/>
+        </p:nvSpPr>
+        <p:spPr>
+          <a:xfrm>
+            <a:off x="0" y="0"/>
+            <a:ext cx="12191695" cy="6858000"/>
+          </a:xfrm>
+          <a:prstGeom prst="rect">
+            <a:avLst/>
+          </a:prstGeom>
+          <a:solidFill>
+            <a:srgbClr val="080D0D"/>
+          </a:solidFill>
+          <a:ln>
+            <a:noFill/>
+          </a:ln>
+        </p:spPr>
+        <p:style>
+          <a:lnRef idx="1">
+            <a:schemeClr val="accent1"/>
+          </a:lnRef>
+          <a:fillRef idx="3">
+            <a:schemeClr val="accent1"/>
+          </a:fillRef>
+          <a:effectRef idx="2">
+            <a:schemeClr val="accent1"/>
+          </a:effectRef>
+          <a:fontRef idx="minor">
+            <a:schemeClr val="lt1"/>
+          </a:fontRef>
+        </p:style>
+        <p:txBody>
+          <a:bodyPr rtlCol="0" anchor="ctr"/>
+          <a:lstStyle/>
+          <a:p>
+            <a:pPr algn="ctr"/>
+          </a:p>
+        </p:txBody>
+      </p:sp>
+      <p:sp>
+        <p:nvSpPr>
+          <p:cNvPr id="3" name="Rectangle 2"/>
+          <p:cNvSpPr/>
+          <p:nvPr/>
+        </p:nvSpPr>
+        <p:spPr>
+          <a:xfrm>
+            <a:off x="320040" y="384048"/>
+            <a:ext cx="36576" cy="6080760"/>
+          </a:xfrm>
+          <a:prstGeom prst="rect">
+            <a:avLst/>
+          </a:prstGeom>
+          <a:solidFill>
+            <a:srgbClr val="48BF8F"/>
+          </a:solidFill>
+          <a:ln>
+            <a:noFill/>
+          </a:ln>
+        </p:spPr>
+        <p:style>
+          <a:lnRef idx="1">
+            <a:schemeClr val="accent1"/>
+          </a:lnRef>
+          <a:fillRef idx="3">
+            <a:schemeClr val="accent1"/>
+          </a:fillRef>
+          <a:effectRef idx="2">
+            <a:schemeClr val="accent1"/>
+          </a:effectRef>
+          <a:fontRef idx="minor">
+            <a:schemeClr val="lt1"/>
+          </a:fontRef>
+        </p:style>
+        <p:txBody>
+          <a:bodyPr rtlCol="0" anchor="ctr"/>
+          <a:lstStyle/>
+          <a:p>
+            <a:pPr algn="ctr"/>
+          </a:p>
+        </p:txBody>
+      </p:sp>
+      <p:sp>
+        <p:nvSpPr>
+          <p:cNvPr id="4" name="Rectangle 3"/>
+          <p:cNvSpPr/>
+          <p:nvPr/>
+        </p:nvSpPr>
+        <p:spPr>
+          <a:xfrm>
+            <a:off x="11716207" y="384048"/>
+            <a:ext cx="36576" cy="6080760"/>
+          </a:xfrm>
+          <a:prstGeom prst="rect">
+            <a:avLst/>
+          </a:prstGeom>
+          <a:solidFill>
+            <a:srgbClr val="48BF8F"/>
+          </a:solidFill>
+          <a:ln>
+            <a:noFill/>
+          </a:ln>
+        </p:spPr>
+        <p:style>
+          <a:lnRef idx="1">
+            <a:schemeClr val="accent1"/>
+          </a:lnRef>
+          <a:fillRef idx="3">
+            <a:schemeClr val="accent1"/>
+          </a:fillRef>
+          <a:effectRef idx="2">
+            <a:schemeClr val="accent1"/>
+          </a:effectRef>
+          <a:fontRef idx="minor">
+            <a:schemeClr val="lt1"/>
+          </a:fontRef>
+        </p:style>
+        <p:txBody>
+          <a:bodyPr rtlCol="0" anchor="ctr"/>
+          <a:lstStyle/>
+          <a:p>
+            <a:pPr algn="ctr"/>
+          </a:p>
+        </p:txBody>
+      </p:sp>
+      <p:sp>
+        <p:nvSpPr>
+          <p:cNvPr id="5" name="Rectangle 4"/>
+          <p:cNvSpPr/>
+          <p:nvPr/>
+        </p:nvSpPr>
+        <p:spPr>
+          <a:xfrm>
+            <a:off x="502920" y="384048"/>
+            <a:ext cx="11155680" cy="27432"/>
+          </a:xfrm>
+          <a:prstGeom prst="rect">
+            <a:avLst/>
+          </a:prstGeom>
+          <a:solidFill>
+            <a:srgbClr val="48BF8F"/>
+          </a:solidFill>
+          <a:ln>
+            <a:noFill/>
+          </a:ln>
+        </p:spPr>
+        <p:style>
+          <a:lnRef idx="1">
+            <a:schemeClr val="accent1"/>
+          </a:lnRef>
+          <a:fillRef idx="3">
+            <a:schemeClr val="accent1"/>
+          </a:fillRef>
+          <a:effectRef idx="2">
+            <a:schemeClr val="accent1"/>
+          </a:effectRef>
+          <a:fontRef idx="minor">
+            <a:schemeClr val="lt1"/>
+          </a:fontRef>
+        </p:style>
+        <p:txBody>
+          <a:bodyPr rtlCol="0" anchor="ctr"/>
+          <a:lstStyle/>
+          <a:p>
+            <a:pPr algn="ctr"/>
+          </a:p>
+        </p:txBody>
+      </p:sp>
+      <p:sp>
+        <p:nvSpPr>
+          <p:cNvPr id="6" name="Rectangle 5"/>
+          <p:cNvSpPr/>
+          <p:nvPr/>
+        </p:nvSpPr>
+        <p:spPr>
+          <a:xfrm>
+            <a:off x="502920" y="6437376"/>
+            <a:ext cx="11155680" cy="27432"/>
+          </a:xfrm>
+          <a:prstGeom prst="rect">
+            <a:avLst/>
+          </a:prstGeom>
+          <a:solidFill>
+            <a:srgbClr val="48BF8F"/>
+          </a:solidFill>
+          <a:ln>
+            <a:noFill/>
+          </a:ln>
+        </p:spPr>
+        <p:style>
+          <a:lnRef idx="1">
+            <a:schemeClr val="accent1"/>
+          </a:lnRef>
+          <a:fillRef idx="3">
+            <a:schemeClr val="accent1"/>
+          </a:fillRef>
+          <a:effectRef idx="2">
+            <a:schemeClr val="accent1"/>
+          </a:effectRef>
+          <a:fontRef idx="minor">
+            <a:schemeClr val="lt1"/>
+          </a:fontRef>
+        </p:style>
+        <p:txBody>
+          <a:bodyPr rtlCol="0" anchor="ctr"/>
+          <a:lstStyle/>
+          <a:p>
+            <a:pPr algn="ctr"/>
+          </a:p>
+        </p:txBody>
+      </p:sp>
+      <p:sp>
+        <p:nvSpPr>
+          <p:cNvPr id="7" name="TextBox 6"/>
+          <p:cNvSpPr txBox="1"/>
+          <p:nvPr/>
+        </p:nvSpPr>
+        <p:spPr>
+          <a:xfrm>
+            <a:off x="713232" y="548640"/>
+            <a:ext cx="10698480" cy="301752"/>
+          </a:xfrm>
+          <a:prstGeom prst="rect">
+            <a:avLst/>
+          </a:prstGeom>
+          <a:noFill/>
+        </p:spPr>
+        <p:txBody>
+          <a:bodyPr wrap="square" anchor="t">
+            <a:spAutoFit/>
+          </a:bodyPr>
+          <a:lstStyle/>
+          <a:p>
+            <a:pPr algn="l"/>
+            <a:r>
+              <a:rPr sz="1000" b="1">
+                <a:solidFill>
+                  <a:srgbClr val="48BF8F"/>
+                </a:solidFill>
+                <a:latin typeface="Aptos"/>
+              </a:rPr>
+              <a:t>EXECUTION PIPELINE</a:t>
+            </a:r>
+          </a:p>
+        </p:txBody>
+      </p:sp>
+      <p:sp>
+        <p:nvSpPr>
+          <p:cNvPr id="8" name="TextBox 7"/>
+          <p:cNvSpPr txBox="1"/>
+          <p:nvPr/>
+        </p:nvSpPr>
+        <p:spPr>
+          <a:xfrm>
+            <a:off x="694944" y="850392"/>
+            <a:ext cx="10881360" cy="566928"/>
+          </a:xfrm>
+          <a:prstGeom prst="rect">
+            <a:avLst/>
+          </a:prstGeom>
+          <a:noFill/>
+        </p:spPr>
+        <p:txBody>
+          <a:bodyPr wrap="square" anchor="t">
+            <a:spAutoFit/>
+          </a:bodyPr>
+          <a:lstStyle/>
+          <a:p>
+            <a:pPr algn="l"/>
+            <a:r>
+              <a:rPr sz="2700" b="0">
+                <a:solidFill>
+                  <a:srgbClr val="E8E8DE"/>
+                </a:solidFill>
+                <a:latin typeface="Aptos Display"/>
+              </a:rPr>
+              <a:t>How It Works</a:t>
+            </a:r>
+          </a:p>
+        </p:txBody>
+      </p:sp>
+      <p:sp>
+        <p:nvSpPr>
+          <p:cNvPr id="9" name="Rounded Rectangle 8"/>
+          <p:cNvSpPr/>
+          <p:nvPr/>
+        </p:nvSpPr>
+        <p:spPr>
+          <a:xfrm>
+            <a:off x="749808" y="1828800"/>
+            <a:ext cx="1591056" cy="685800"/>
+          </a:xfrm>
+          <a:prstGeom prst="roundRect">
+            <a:avLst/>
+          </a:prstGeom>
+          <a:solidFill>
+            <a:srgbClr val="202322"/>
+          </a:solidFill>
+          <a:ln>
+            <a:solidFill>
+              <a:srgbClr val="48BF8F"/>
+            </a:solidFill>
+          </a:ln>
+        </p:spPr>
+        <p:style>
+          <a:lnRef idx="1">
+            <a:schemeClr val="accent1"/>
+          </a:lnRef>
+          <a:fillRef idx="3">
+            <a:schemeClr val="accent1"/>
+          </a:fillRef>
+          <a:effectRef idx="2">
+            <a:schemeClr val="accent1"/>
+          </a:effectRef>
+          <a:fontRef idx="minor">
+            <a:schemeClr val="lt1"/>
+          </a:fontRef>
+        </p:style>
+        <p:txBody>
+          <a:bodyPr rtlCol="0" anchor="ctr"/>
+          <a:lstStyle/>
+          <a:p>
+            <a:pPr algn="ctr"/>
+          </a:p>
+        </p:txBody>
+      </p:sp>
+      <p:sp>
+        <p:nvSpPr>
+          <p:cNvPr id="10" name="TextBox 9"/>
+          <p:cNvSpPr txBox="1"/>
+          <p:nvPr/>
+        </p:nvSpPr>
+        <p:spPr>
+          <a:xfrm>
+            <a:off x="822959" y="1993392"/>
+            <a:ext cx="1444752" cy="256032"/>
+          </a:xfrm>
+          <a:prstGeom prst="rect">
+            <a:avLst/>
+          </a:prstGeom>
+          <a:noFill/>
+        </p:spPr>
+        <p:txBody>
+          <a:bodyPr wrap="square" anchor="t">
+            <a:spAutoFit/>
+          </a:bodyPr>
+          <a:lstStyle/>
+          <a:p>
+            <a:pPr algn="ctr"/>
+            <a:r>
+              <a:rPr sz="1000" b="1">
+                <a:solidFill>
+                  <a:srgbClr val="E8E8DE"/>
+                </a:solidFill>
+                <a:latin typeface="Aptos"/>
+              </a:rPr>
+              <a:t>Browser</a:t>
+            </a:r>
+          </a:p>
+        </p:txBody>
+      </p:sp>
+      <p:sp>
+        <p:nvSpPr>
+          <p:cNvPr id="11" name="TextBox 10"/>
+          <p:cNvSpPr txBox="1"/>
+          <p:nvPr/>
+        </p:nvSpPr>
+        <p:spPr>
+          <a:xfrm>
+            <a:off x="2340864" y="2002536"/>
+            <a:ext cx="246888" cy="182880"/>
+          </a:xfrm>
+          <a:prstGeom prst="rect">
+            <a:avLst/>
+          </a:prstGeom>
+          <a:noFill/>
+        </p:spPr>
+        <p:txBody>
+          <a:bodyPr wrap="square" anchor="t">
+            <a:spAutoFit/>
+          </a:bodyPr>
+          <a:lstStyle/>
+          <a:p>
+            <a:pPr algn="ctr"/>
+            <a:r>
+              <a:rPr sz="1200" b="1">
+                <a:solidFill>
+                  <a:srgbClr val="48BF8F"/>
+                </a:solidFill>
+                <a:latin typeface="Aptos"/>
+              </a:rPr>
+              <a:t>&gt;</a:t>
+            </a:r>
+          </a:p>
+        </p:txBody>
+      </p:sp>
+      <p:sp>
+        <p:nvSpPr>
+          <p:cNvPr id="12" name="Rounded Rectangle 11"/>
+          <p:cNvSpPr/>
+          <p:nvPr/>
+        </p:nvSpPr>
+        <p:spPr>
+          <a:xfrm>
+            <a:off x="2587751" y="1828800"/>
+            <a:ext cx="1591056" cy="685800"/>
+          </a:xfrm>
+          <a:prstGeom prst="roundRect">
+            <a:avLst/>
+          </a:prstGeom>
+          <a:solidFill>
+            <a:srgbClr val="202322"/>
+          </a:solidFill>
+          <a:ln>
+            <a:solidFill>
+              <a:srgbClr val="48BF8F"/>
+            </a:solidFill>
+          </a:ln>
+        </p:spPr>
+        <p:style>
+          <a:lnRef idx="1">
+            <a:schemeClr val="accent1"/>
+          </a:lnRef>
+          <a:fillRef idx="3">
+            <a:schemeClr val="accent1"/>
+          </a:fillRef>
+          <a:effectRef idx="2">
+            <a:schemeClr val="accent1"/>
+          </a:effectRef>
+          <a:fontRef idx="minor">
+            <a:schemeClr val="lt1"/>
+          </a:fontRef>
+        </p:style>
+        <p:txBody>
+          <a:bodyPr rtlCol="0" anchor="ctr"/>
+          <a:lstStyle/>
+          <a:p>
+            <a:pPr algn="ctr"/>
+          </a:p>
+        </p:txBody>
+      </p:sp>
+      <p:sp>
+        <p:nvSpPr>
+          <p:cNvPr id="13" name="TextBox 12"/>
+          <p:cNvSpPr txBox="1"/>
+          <p:nvPr/>
+        </p:nvSpPr>
+        <p:spPr>
+          <a:xfrm>
+            <a:off x="2660903" y="1993392"/>
+            <a:ext cx="1444752" cy="256032"/>
+          </a:xfrm>
+          <a:prstGeom prst="rect">
+            <a:avLst/>
+          </a:prstGeom>
+          <a:noFill/>
+        </p:spPr>
+        <p:txBody>
+          <a:bodyPr wrap="square" anchor="t">
+            <a:spAutoFit/>
+          </a:bodyPr>
+          <a:lstStyle/>
+          <a:p>
+            <a:pPr algn="ctr"/>
+            <a:r>
+              <a:rPr sz="1000" b="1">
+                <a:solidFill>
+                  <a:srgbClr val="E8E8DE"/>
+                </a:solidFill>
+                <a:latin typeface="Aptos"/>
+              </a:rPr>
+              <a:t>Channels</a:t>
+            </a:r>
+          </a:p>
+        </p:txBody>
+      </p:sp>
+      <p:sp>
+        <p:nvSpPr>
+          <p:cNvPr id="14" name="TextBox 13"/>
+          <p:cNvSpPr txBox="1"/>
+          <p:nvPr/>
+        </p:nvSpPr>
+        <p:spPr>
+          <a:xfrm>
+            <a:off x="4178807" y="2002536"/>
+            <a:ext cx="246888" cy="182880"/>
+          </a:xfrm>
+          <a:prstGeom prst="rect">
+            <a:avLst/>
+          </a:prstGeom>
+          <a:noFill/>
+        </p:spPr>
+        <p:txBody>
+          <a:bodyPr wrap="square" anchor="t">
+            <a:spAutoFit/>
+          </a:bodyPr>
+          <a:lstStyle/>
+          <a:p>
+            <a:pPr algn="ctr"/>
+            <a:r>
+              <a:rPr sz="1200" b="1">
+                <a:solidFill>
+                  <a:srgbClr val="48BF8F"/>
+                </a:solidFill>
+                <a:latin typeface="Aptos"/>
+              </a:rPr>
+              <a:t>&gt;</a:t>
+            </a:r>
+          </a:p>
+        </p:txBody>
+      </p:sp>
+      <p:sp>
+        <p:nvSpPr>
+          <p:cNvPr id="15" name="Rounded Rectangle 14"/>
+          <p:cNvSpPr/>
+          <p:nvPr/>
+        </p:nvSpPr>
+        <p:spPr>
+          <a:xfrm>
+            <a:off x="4425696" y="1828800"/>
+            <a:ext cx="1591056" cy="685800"/>
+          </a:xfrm>
+          <a:prstGeom prst="roundRect">
+            <a:avLst/>
+          </a:prstGeom>
+          <a:solidFill>
+            <a:srgbClr val="202322"/>
+          </a:solidFill>
+          <a:ln>
+            <a:solidFill>
+              <a:srgbClr val="48BF8F"/>
+            </a:solidFill>
+          </a:ln>
+        </p:spPr>
+        <p:style>
+          <a:lnRef idx="1">
+            <a:schemeClr val="accent1"/>
+          </a:lnRef>
+          <a:fillRef idx="3">
+            <a:schemeClr val="accent1"/>
+          </a:fillRef>
+          <a:effectRef idx="2">
+            <a:schemeClr val="accent1"/>
+          </a:effectRef>
+          <a:fontRef idx="minor">
+            <a:schemeClr val="lt1"/>
+          </a:fontRef>
+        </p:style>
+        <p:txBody>
+          <a:bodyPr rtlCol="0" anchor="ctr"/>
+          <a:lstStyle/>
+          <a:p>
+            <a:pPr algn="ctr"/>
+          </a:p>
+        </p:txBody>
+      </p:sp>
+      <p:sp>
+        <p:nvSpPr>
+          <p:cNvPr id="16" name="TextBox 15"/>
+          <p:cNvSpPr txBox="1"/>
+          <p:nvPr/>
+        </p:nvSpPr>
+        <p:spPr>
+          <a:xfrm>
+            <a:off x="4498848" y="1993392"/>
+            <a:ext cx="1444752" cy="256032"/>
+          </a:xfrm>
+          <a:prstGeom prst="rect">
+            <a:avLst/>
+          </a:prstGeom>
+          <a:noFill/>
+        </p:spPr>
+        <p:txBody>
+          <a:bodyPr wrap="square" anchor="t">
+            <a:spAutoFit/>
+          </a:bodyPr>
+          <a:lstStyle/>
+          <a:p>
+            <a:pPr algn="ctr"/>
+            <a:r>
+              <a:rPr sz="1000" b="1">
+                <a:solidFill>
+                  <a:srgbClr val="E8E8DE"/>
+                </a:solidFill>
+                <a:latin typeface="Aptos"/>
+              </a:rPr>
+              <a:t>RAG</a:t>
+            </a:r>
+          </a:p>
+        </p:txBody>
+      </p:sp>
+      <p:sp>
+        <p:nvSpPr>
+          <p:cNvPr id="17" name="TextBox 16"/>
+          <p:cNvSpPr txBox="1"/>
+          <p:nvPr/>
+        </p:nvSpPr>
+        <p:spPr>
+          <a:xfrm>
+            <a:off x="6016752" y="2002536"/>
+            <a:ext cx="246888" cy="182880"/>
+          </a:xfrm>
+          <a:prstGeom prst="rect">
+            <a:avLst/>
+          </a:prstGeom>
+          <a:noFill/>
+        </p:spPr>
+        <p:txBody>
+          <a:bodyPr wrap="square" anchor="t">
+            <a:spAutoFit/>
+          </a:bodyPr>
+          <a:lstStyle/>
+          <a:p>
+            <a:pPr algn="ctr"/>
+            <a:r>
+              <a:rPr sz="1200" b="1">
+                <a:solidFill>
+                  <a:srgbClr val="48BF8F"/>
+                </a:solidFill>
+                <a:latin typeface="Aptos"/>
+              </a:rPr>
+              <a:t>&gt;</a:t>
+            </a:r>
+          </a:p>
+        </p:txBody>
+      </p:sp>
+      <p:sp>
+        <p:nvSpPr>
+          <p:cNvPr id="18" name="Rounded Rectangle 17"/>
+          <p:cNvSpPr/>
+          <p:nvPr/>
+        </p:nvSpPr>
+        <p:spPr>
+          <a:xfrm>
+            <a:off x="6263640" y="1828800"/>
+            <a:ext cx="1591056" cy="685800"/>
+          </a:xfrm>
+          <a:prstGeom prst="roundRect">
+            <a:avLst/>
+          </a:prstGeom>
+          <a:solidFill>
+            <a:srgbClr val="202322"/>
+          </a:solidFill>
+          <a:ln>
+            <a:solidFill>
+              <a:srgbClr val="48BF8F"/>
+            </a:solidFill>
+          </a:ln>
+        </p:spPr>
+        <p:style>
+          <a:lnRef idx="1">
+            <a:schemeClr val="accent1"/>
+          </a:lnRef>
+          <a:fillRef idx="3">
+            <a:schemeClr val="accent1"/>
+          </a:fillRef>
+          <a:effectRef idx="2">
+            <a:schemeClr val="accent1"/>
+          </a:effectRef>
+          <a:fontRef idx="minor">
+            <a:schemeClr val="lt1"/>
+          </a:fontRef>
+        </p:style>
+        <p:txBody>
+          <a:bodyPr rtlCol="0" anchor="ctr"/>
+          <a:lstStyle/>
+          <a:p>
+            <a:pPr algn="ctr"/>
+          </a:p>
+        </p:txBody>
+      </p:sp>
+      <p:sp>
+        <p:nvSpPr>
+          <p:cNvPr id="19" name="TextBox 18"/>
+          <p:cNvSpPr txBox="1"/>
+          <p:nvPr/>
+        </p:nvSpPr>
+        <p:spPr>
+          <a:xfrm>
+            <a:off x="6336792" y="1993392"/>
+            <a:ext cx="1444752" cy="256032"/>
+          </a:xfrm>
+          <a:prstGeom prst="rect">
+            <a:avLst/>
+          </a:prstGeom>
+          <a:noFill/>
+        </p:spPr>
+        <p:txBody>
+          <a:bodyPr wrap="square" anchor="t">
+            <a:spAutoFit/>
+          </a:bodyPr>
+          <a:lstStyle/>
+          <a:p>
+            <a:pPr algn="ctr"/>
+            <a:r>
+              <a:rPr sz="1000" b="1">
+                <a:solidFill>
+                  <a:srgbClr val="E8E8DE"/>
+                </a:solidFill>
+                <a:latin typeface="Aptos"/>
+              </a:rPr>
+              <a:t>Planner</a:t>
+            </a:r>
+          </a:p>
+        </p:txBody>
+      </p:sp>
+      <p:sp>
+        <p:nvSpPr>
+          <p:cNvPr id="20" name="TextBox 19"/>
+          <p:cNvSpPr txBox="1"/>
+          <p:nvPr/>
+        </p:nvSpPr>
+        <p:spPr>
+          <a:xfrm>
+            <a:off x="7854696" y="2002536"/>
+            <a:ext cx="246888" cy="182880"/>
+          </a:xfrm>
+          <a:prstGeom prst="rect">
+            <a:avLst/>
+          </a:prstGeom>
+          <a:noFill/>
+        </p:spPr>
+        <p:txBody>
+          <a:bodyPr wrap="square" anchor="t">
+            <a:spAutoFit/>
+          </a:bodyPr>
+          <a:lstStyle/>
+          <a:p>
+            <a:pPr algn="ctr"/>
+            <a:r>
+              <a:rPr sz="1200" b="1">
+                <a:solidFill>
+                  <a:srgbClr val="48BF8F"/>
+                </a:solidFill>
+                <a:latin typeface="Aptos"/>
+              </a:rPr>
+              <a:t>&gt;</a:t>
+            </a:r>
+          </a:p>
+        </p:txBody>
+      </p:sp>
+      <p:sp>
+        <p:nvSpPr>
+          <p:cNvPr id="21" name="Rounded Rectangle 20"/>
+          <p:cNvSpPr/>
+          <p:nvPr/>
+        </p:nvSpPr>
+        <p:spPr>
+          <a:xfrm>
+            <a:off x="8101583" y="1828800"/>
+            <a:ext cx="1591056" cy="685800"/>
+          </a:xfrm>
+          <a:prstGeom prst="roundRect">
+            <a:avLst/>
+          </a:prstGeom>
+          <a:solidFill>
+            <a:srgbClr val="202322"/>
+          </a:solidFill>
+          <a:ln>
+            <a:solidFill>
+              <a:srgbClr val="48BF8F"/>
+            </a:solidFill>
+          </a:ln>
+        </p:spPr>
+        <p:style>
+          <a:lnRef idx="1">
+            <a:schemeClr val="accent1"/>
+          </a:lnRef>
+          <a:fillRef idx="3">
+            <a:schemeClr val="accent1"/>
+          </a:fillRef>
+          <a:effectRef idx="2">
+            <a:schemeClr val="accent1"/>
+          </a:effectRef>
+          <a:fontRef idx="minor">
+            <a:schemeClr val="lt1"/>
+          </a:fontRef>
+        </p:style>
+        <p:txBody>
+          <a:bodyPr rtlCol="0" anchor="ctr"/>
+          <a:lstStyle/>
+          <a:p>
+            <a:pPr algn="ctr"/>
+          </a:p>
+        </p:txBody>
+      </p:sp>
+      <p:sp>
+        <p:nvSpPr>
+          <p:cNvPr id="22" name="TextBox 21"/>
+          <p:cNvSpPr txBox="1"/>
+          <p:nvPr/>
+        </p:nvSpPr>
+        <p:spPr>
+          <a:xfrm>
+            <a:off x="8174736" y="1993392"/>
+            <a:ext cx="1444752" cy="256032"/>
+          </a:xfrm>
+          <a:prstGeom prst="rect">
+            <a:avLst/>
+          </a:prstGeom>
+          <a:noFill/>
+        </p:spPr>
+        <p:txBody>
+          <a:bodyPr wrap="square" anchor="t">
+            <a:spAutoFit/>
+          </a:bodyPr>
+          <a:lstStyle/>
+          <a:p>
+            <a:pPr algn="ctr"/>
+            <a:r>
+              <a:rPr sz="1000" b="1">
+                <a:solidFill>
+                  <a:srgbClr val="E8E8DE"/>
+                </a:solidFill>
+                <a:latin typeface="Aptos"/>
+              </a:rPr>
+              <a:t>Tools</a:t>
+            </a:r>
+          </a:p>
+        </p:txBody>
+      </p:sp>
+      <p:sp>
+        <p:nvSpPr>
+          <p:cNvPr id="23" name="TextBox 22"/>
+          <p:cNvSpPr txBox="1"/>
+          <p:nvPr/>
+        </p:nvSpPr>
+        <p:spPr>
+          <a:xfrm>
+            <a:off x="9692640" y="2002536"/>
+            <a:ext cx="246888" cy="182880"/>
+          </a:xfrm>
+          <a:prstGeom prst="rect">
+            <a:avLst/>
+          </a:prstGeom>
+          <a:noFill/>
+        </p:spPr>
+        <p:txBody>
+          <a:bodyPr wrap="square" anchor="t">
+            <a:spAutoFit/>
+          </a:bodyPr>
+          <a:lstStyle/>
+          <a:p>
+            <a:pPr algn="ctr"/>
+            <a:r>
+              <a:rPr sz="1200" b="1">
+                <a:solidFill>
+                  <a:srgbClr val="48BF8F"/>
+                </a:solidFill>
+                <a:latin typeface="Aptos"/>
+              </a:rPr>
+              <a:t>&gt;</a:t>
+            </a:r>
+          </a:p>
+        </p:txBody>
+      </p:sp>
+      <p:sp>
+        <p:nvSpPr>
+          <p:cNvPr id="24" name="Rounded Rectangle 23"/>
+          <p:cNvSpPr/>
+          <p:nvPr/>
+        </p:nvSpPr>
+        <p:spPr>
+          <a:xfrm>
+            <a:off x="9939528" y="1828800"/>
+            <a:ext cx="1591056" cy="685800"/>
+          </a:xfrm>
+          <a:prstGeom prst="roundRect">
+            <a:avLst/>
+          </a:prstGeom>
+          <a:solidFill>
+            <a:srgbClr val="202322"/>
+          </a:solidFill>
+          <a:ln>
+            <a:solidFill>
+              <a:srgbClr val="48BF8F"/>
+            </a:solidFill>
+          </a:ln>
+        </p:spPr>
+        <p:style>
+          <a:lnRef idx="1">
+            <a:schemeClr val="accent1"/>
+          </a:lnRef>
+          <a:fillRef idx="3">
+            <a:schemeClr val="accent1"/>
+          </a:fillRef>
+          <a:effectRef idx="2">
+            <a:schemeClr val="accent1"/>
+          </a:effectRef>
+          <a:fontRef idx="minor">
+            <a:schemeClr val="lt1"/>
+          </a:fontRef>
+        </p:style>
+        <p:txBody>
+          <a:bodyPr rtlCol="0" anchor="ctr"/>
+          <a:lstStyle/>
+          <a:p>
+            <a:pPr algn="ctr"/>
+          </a:p>
+        </p:txBody>
+      </p:sp>
+      <p:sp>
+        <p:nvSpPr>
+          <p:cNvPr id="25" name="TextBox 24"/>
+          <p:cNvSpPr txBox="1"/>
+          <p:nvPr/>
+        </p:nvSpPr>
+        <p:spPr>
+          <a:xfrm>
+            <a:off x="10012680" y="1993392"/>
+            <a:ext cx="1444752" cy="256032"/>
+          </a:xfrm>
+          <a:prstGeom prst="rect">
+            <a:avLst/>
+          </a:prstGeom>
+          <a:noFill/>
+        </p:spPr>
+        <p:txBody>
+          <a:bodyPr wrap="square" anchor="t">
+            <a:spAutoFit/>
+          </a:bodyPr>
+          <a:lstStyle/>
+          <a:p>
+            <a:pPr algn="ctr"/>
+            <a:r>
+              <a:rPr sz="1000" b="1">
+                <a:solidFill>
+                  <a:srgbClr val="E8E8DE"/>
+                </a:solidFill>
+                <a:latin typeface="Aptos"/>
+              </a:rPr>
+              <a:t>Answer</a:t>
+            </a:r>
+          </a:p>
+        </p:txBody>
+      </p:sp>
+      <p:sp>
+        <p:nvSpPr>
+          <p:cNvPr id="26" name="Rounded Rectangle 25"/>
+          <p:cNvSpPr/>
+          <p:nvPr/>
+        </p:nvSpPr>
+        <p:spPr>
+          <a:xfrm>
+            <a:off x="713232" y="2971800"/>
+            <a:ext cx="5349240" cy="2788920"/>
+          </a:xfrm>
+          <a:prstGeom prst="roundRect">
+            <a:avLst/>
+          </a:prstGeom>
+          <a:solidFill>
+            <a:srgbClr val="161A19"/>
+          </a:solidFill>
+          <a:ln>
+            <a:solidFill>
+              <a:srgbClr val="595F56"/>
+            </a:solidFill>
+          </a:ln>
+        </p:spPr>
+        <p:style>
+          <a:lnRef idx="1">
+            <a:schemeClr val="accent1"/>
+          </a:lnRef>
+          <a:fillRef idx="3">
+            <a:schemeClr val="accent1"/>
+          </a:fillRef>
+          <a:effectRef idx="2">
+            <a:schemeClr val="accent1"/>
+          </a:effectRef>
+          <a:fontRef idx="minor">
+            <a:schemeClr val="lt1"/>
+          </a:fontRef>
+        </p:style>
+        <p:txBody>
+          <a:bodyPr rtlCol="0" anchor="ctr"/>
+          <a:lstStyle/>
+          <a:p>
+            <a:pPr algn="ctr"/>
+          </a:p>
+        </p:txBody>
+      </p:sp>
+      <p:sp>
+        <p:nvSpPr>
+          <p:cNvPr id="27" name="Rectangle 26"/>
+          <p:cNvSpPr/>
+          <p:nvPr/>
+        </p:nvSpPr>
+        <p:spPr>
+          <a:xfrm>
+            <a:off x="713232" y="2971800"/>
+            <a:ext cx="5349240" cy="109728"/>
+          </a:xfrm>
+          <a:prstGeom prst="rect">
+            <a:avLst/>
+          </a:prstGeom>
+          <a:solidFill>
+            <a:srgbClr val="48BF8F"/>
+          </a:solidFill>
+          <a:ln>
+            <a:noFill/>
+          </a:ln>
+        </p:spPr>
+        <p:style>
+          <a:lnRef idx="1">
+            <a:schemeClr val="accent1"/>
+          </a:lnRef>
+          <a:fillRef idx="3">
+            <a:schemeClr val="accent1"/>
+          </a:fillRef>
+          <a:effectRef idx="2">
+            <a:schemeClr val="accent1"/>
+          </a:effectRef>
+          <a:fontRef idx="minor">
+            <a:schemeClr val="lt1"/>
+          </a:fontRef>
+        </p:style>
+        <p:txBody>
+          <a:bodyPr rtlCol="0" anchor="ctr"/>
+          <a:lstStyle/>
+          <a:p>
+            <a:pPr algn="ctr"/>
+          </a:p>
+        </p:txBody>
+      </p:sp>
+      <p:sp>
+        <p:nvSpPr>
+          <p:cNvPr id="28" name="TextBox 27"/>
+          <p:cNvSpPr txBox="1"/>
+          <p:nvPr/>
+        </p:nvSpPr>
+        <p:spPr>
+          <a:xfrm>
+            <a:off x="914400" y="3172968"/>
+            <a:ext cx="4946903" cy="310896"/>
+          </a:xfrm>
+          <a:prstGeom prst="rect">
+            <a:avLst/>
+          </a:prstGeom>
+          <a:noFill/>
+        </p:spPr>
+        <p:txBody>
+          <a:bodyPr wrap="square" anchor="t">
+            <a:spAutoFit/>
+          </a:bodyPr>
+          <a:lstStyle/>
+          <a:p>
+            <a:pPr algn="l"/>
+            <a:r>
+              <a:rPr sz="1400" b="1">
+                <a:solidFill>
+                  <a:srgbClr val="48BF8F"/>
+                </a:solidFill>
+                <a:latin typeface="Aptos"/>
+              </a:rPr>
+              <a:t>Request path</a:t>
+            </a:r>
+          </a:p>
+        </p:txBody>
+      </p:sp>
+      <p:sp>
+        <p:nvSpPr>
+          <p:cNvPr id="29" name="TextBox 28"/>
+          <p:cNvSpPr txBox="1"/>
+          <p:nvPr/>
+        </p:nvSpPr>
+        <p:spPr>
+          <a:xfrm>
+            <a:off x="914400" y="3630168"/>
+            <a:ext cx="4946903" cy="1984248"/>
+          </a:xfrm>
+          <a:prstGeom prst="rect">
+            <a:avLst/>
+          </a:prstGeom>
+          <a:noFill/>
+        </p:spPr>
+        <p:txBody>
+          <a:bodyPr wrap="square" anchor="t" lIns="38100" rIns="38100" tIns="25400" bIns="25400">
+            <a:noAutofit/>
+          </a:bodyPr>
+          <a:lstStyle/>
+          <a:p>
+            <a:pPr>
+              <a:spcAft>
+                <a:spcPts val="600"/>
+              </a:spcAft>
+              <a:defRPr sz="1500">
+                <a:solidFill>
+                  <a:srgbClr val="B4BAAE"/>
+                </a:solidFill>
+                <a:latin typeface="Aptos"/>
+              </a:defRPr>
+            </a:pPr>
+            <a:r>
+              <a:rPr sz="1500" b="0" i="0">
+                <a:latin typeface="Calibri"/>
+              </a:rPr>
+              <a:t>Browser UI sends chat and workflow requests through Django views and Channels WebSockets.</a:t>
+            </a:r>
+            <a:endParaRPr sz="1500" b="0" i="0">
+              <a:latin typeface="Calibri"/>
+            </a:endParaRPr>
+          </a:p>
+          <a:p>
+            <a:pPr>
+              <a:spcAft>
+                <a:spcPts val="600"/>
+              </a:spcAft>
+              <a:defRPr sz="1500">
+                <a:solidFill>
+                  <a:srgbClr val="B4BAAE"/>
+                </a:solidFill>
+                <a:latin typeface="Aptos"/>
+              </a:defRPr>
+            </a:pPr>
+            <a:r>
+              <a:rPr sz="1500" b="0" i="0">
+                <a:latin typeface="Calibri"/>
+              </a:rPr>
+              <a:t>RAG chains load selected file/directory context, retrieve relevant chunks, and build answer prompts.</a:t>
+            </a:r>
+            <a:endParaRPr sz="1500" b="0" i="0">
+              <a:latin typeface="Calibri"/>
+            </a:endParaRPr>
+          </a:p>
+          <a:p>
+            <a:pPr>
+              <a:spcAft>
+                <a:spcPts val="600"/>
+              </a:spcAft>
+              <a:defRPr sz="1500">
+                <a:solidFill>
+                  <a:srgbClr val="B4BAAE"/>
+                </a:solidFill>
+                <a:latin typeface="Aptos"/>
+              </a:defRPr>
+            </a:pPr>
+            <a:r>
+              <a:rPr sz="1500" b="0" i="0">
+                <a:latin typeface="Calibri"/>
+              </a:rPr>
+              <a:t>DB-menu actions validate directories or SQLite files in the browser, then call Django views that either copy the live database out or stage a replacement into `DB/ToLoad/db.sqlite3`.</a:t>
+            </a:r>
+            <a:endParaRPr sz="1500" b="0" i="0">
+              <a:latin typeface="Calibri"/>
+            </a:endParaRPr>
+          </a:p>
+        </p:txBody>
+      </p:sp>
+      <p:sp>
+        <p:nvSpPr>
+          <p:cNvPr id="30" name="Rounded Rectangle 29"/>
+          <p:cNvSpPr/>
+          <p:nvPr/>
+        </p:nvSpPr>
+        <p:spPr>
+          <a:xfrm>
+            <a:off x="6327648" y="2971800"/>
+            <a:ext cx="5074920" cy="2788920"/>
+          </a:xfrm>
+          <a:prstGeom prst="roundRect">
+            <a:avLst/>
+          </a:prstGeom>
+          <a:solidFill>
+            <a:srgbClr val="161A19"/>
+          </a:solidFill>
+          <a:ln>
+            <a:solidFill>
+              <a:srgbClr val="595F56"/>
+            </a:solidFill>
+          </a:ln>
+        </p:spPr>
+        <p:style>
+          <a:lnRef idx="1">
+            <a:schemeClr val="accent1"/>
+          </a:lnRef>
+          <a:fillRef idx="3">
+            <a:schemeClr val="accent1"/>
+          </a:fillRef>
+          <a:effectRef idx="2">
+            <a:schemeClr val="accent1"/>
+          </a:effectRef>
+          <a:fontRef idx="minor">
+            <a:schemeClr val="lt1"/>
+          </a:fontRef>
+        </p:style>
+        <p:txBody>
+          <a:bodyPr rtlCol="0" anchor="ctr"/>
+          <a:lstStyle/>
+          <a:p>
+            <a:pPr algn="ctr"/>
+          </a:p>
+        </p:txBody>
+      </p:sp>
+      <p:sp>
+        <p:nvSpPr>
+          <p:cNvPr id="31" name="Rectangle 30"/>
+          <p:cNvSpPr/>
+          <p:nvPr/>
+        </p:nvSpPr>
+        <p:spPr>
+          <a:xfrm>
+            <a:off x="6327648" y="2971800"/>
+            <a:ext cx="5074920" cy="109728"/>
+          </a:xfrm>
+          <a:prstGeom prst="rect">
+            <a:avLst/>
+          </a:prstGeom>
+          <a:solidFill>
+            <a:srgbClr val="C48052"/>
+          </a:solidFill>
+          <a:ln>
+            <a:noFill/>
+          </a:ln>
+        </p:spPr>
+        <p:style>
+          <a:lnRef idx="1">
+            <a:schemeClr val="accent1"/>
+          </a:lnRef>
+          <a:fillRef idx="3">
+            <a:schemeClr val="accent1"/>
+          </a:fillRef>
+          <a:effectRef idx="2">
+            <a:schemeClr val="accent1"/>
+          </a:effectRef>
+          <a:fontRef idx="minor">
+            <a:schemeClr val="lt1"/>
+          </a:fontRef>
+        </p:style>
+        <p:txBody>
+          <a:bodyPr rtlCol="0" anchor="ctr"/>
+          <a:lstStyle/>
+          <a:p>
+            <a:pPr algn="ctr"/>
+          </a:p>
+        </p:txBody>
+      </p:sp>
+      <p:sp>
+        <p:nvSpPr>
+          <p:cNvPr id="32" name="TextBox 31"/>
+          <p:cNvSpPr txBox="1"/>
+          <p:nvPr/>
+        </p:nvSpPr>
+        <p:spPr>
+          <a:xfrm>
+            <a:off x="6528816" y="3172968"/>
+            <a:ext cx="4672583" cy="310896"/>
+          </a:xfrm>
+          <a:prstGeom prst="rect">
+            <a:avLst/>
+          </a:prstGeom>
+          <a:noFill/>
+        </p:spPr>
+        <p:txBody>
+          <a:bodyPr wrap="square" anchor="t">
+            <a:spAutoFit/>
+          </a:bodyPr>
+          <a:lstStyle/>
+          <a:p>
+            <a:pPr algn="l"/>
+            <a:r>
+              <a:rPr sz="1400" b="1">
+                <a:solidFill>
+                  <a:srgbClr val="C48052"/>
+                </a:solidFill>
+                <a:latin typeface="Aptos"/>
+              </a:rPr>
+              <a:t>Runtime path</a:t>
+            </a:r>
+          </a:p>
+        </p:txBody>
+      </p:sp>
+      <p:sp>
+        <p:nvSpPr>
+          <p:cNvPr id="33" name="TextBox 32"/>
+          <p:cNvSpPr txBox="1"/>
+          <p:nvPr/>
+        </p:nvSpPr>
+        <p:spPr>
+          <a:xfrm>
+            <a:off x="6528816" y="3630168"/>
+            <a:ext cx="4672583" cy="1984248"/>
+          </a:xfrm>
+          <a:prstGeom prst="rect">
+            <a:avLst/>
+          </a:prstGeom>
+          <a:noFill/>
+        </p:spPr>
+        <p:txBody>
+          <a:bodyPr wrap="square" anchor="t" lIns="38100" rIns="38100" tIns="25400" bIns="25400">
+            <a:noAutofit/>
+          </a:bodyPr>
+          <a:lstStyle/>
+          <a:p>
+            <a:pPr>
+              <a:spcAft>
+                <a:spcPts val="600"/>
+              </a:spcAft>
+              <a:defRPr sz="1500">
+                <a:solidFill>
+                  <a:srgbClr val="B4BAAE"/>
+                </a:solidFill>
+                <a:latin typeface="Aptos"/>
+              </a:defRPr>
+            </a:pPr>
+            <a:r>
+              <a:rPr sz="1000" b="0" i="0">
+                <a:latin typeface="Calibri"/>
+              </a:rPr>
+              <a:t>Before a heavy directory embedding run on supported NVIDIA hosts, a fail-open pre-flight guard can estimate VRAM pressure and surface a non-blocking warning in chat.</a:t>
+            </a:r>
+            <a:endParaRPr sz="1000" b="0" i="0">
+              <a:latin typeface="Calibri"/>
+            </a:endParaRPr>
+          </a:p>
+          <a:p>
+            <a:pPr>
+              <a:spcAft>
+                <a:spcPts val="600"/>
+              </a:spcAft>
+              <a:defRPr sz="1500">
+                <a:solidFill>
+                  <a:srgbClr val="B4BAAE"/>
+                </a:solidFill>
+                <a:latin typeface="Aptos"/>
+              </a:defRPr>
+            </a:pPr>
+            <a:r>
+              <a:rPr sz="1000" b="0" i="0">
+                <a:latin typeface="Calibri"/>
+              </a:rPr>
+              <a:t>Version resolution now flows through git tags, a runtime resolver module, generated build artefacts, and an open `/agent/version/` endpoint.</a:t>
+            </a:r>
+            <a:endParaRPr sz="1000" b="0" i="0">
+              <a:latin typeface="Calibri"/>
+            </a:endParaRPr>
+          </a:p>
+          <a:p>
+            <a:pPr>
+              <a:spcAft>
+                <a:spcPts val="600"/>
+              </a:spcAft>
+              <a:defRPr sz="1500">
+                <a:solidFill>
+                  <a:srgbClr val="B4BAAE"/>
+                </a:solidFill>
+                <a:latin typeface="Aptos"/>
+              </a:defRPr>
+            </a:pPr>
+            <a:r>
+              <a:rPr sz="1000" b="0" i="0">
+                <a:latin typeface="Calibri"/>
+              </a:rPr>
+              <a:t>When Multi-Turn is enabled, the global planner selects context and tool stages before the executor binds only the relevant tools, including wrapped deterministic agents such as De-Compresser.</a:t>
+            </a:r>
+            <a:endParaRPr sz="1000" b="0" i="0">
+              <a:latin typeface="Calibri"/>
+            </a:endParaRPr>
+          </a:p>
+          <a:p>
+            <a:pPr>
+              <a:spcAft>
+                <a:spcPts val="600"/>
+              </a:spcAft>
+              <a:defRPr sz="1500">
+                <a:solidFill>
+                  <a:srgbClr val="B4BAAE"/>
+                </a:solidFill>
+                <a:latin typeface="Aptos"/>
+              </a:defRPr>
+            </a:pPr>
+            <a:r>
+              <a:rPr sz="1000" b="0" i="0">
+                <a:latin typeface="Calibri"/>
+              </a:rPr>
+              <a:t>The Unrealer path opens a TCP socket to the Unreal MCP plugin, sends one `{"type": command, "params": {...}}` payload, captures the JSON reply, and emits one `INI_SECTION_UNREALER` block for downstream logic.</a:t>
+            </a:r>
+            <a:endParaRPr sz="1000" b="0" i="0">
+              <a:latin typeface="Calibri"/>
+            </a:endParaRPr>
+          </a:p>
+          <a:p>
+            <a:pPr>
+              <a:spcAft>
+                <a:spcPts val="600"/>
+              </a:spcAft>
+              <a:defRPr sz="1500">
+                <a:solidFill>
+                  <a:srgbClr val="B4BAAE"/>
+                </a:solidFill>
+                <a:latin typeface="Aptos"/>
+              </a:defRPr>
+            </a:pPr>
+            <a:r>
+              <a:rPr sz="1000" b="0" i="0">
+                <a:latin typeface="Calibri"/>
+              </a:rPr>
+              <a:t>After spawn-capable tool calls and again after the final answer, the orphan reaper can sweep dead descendants, orphaned `conhost.exe` companions, and stale pool-linked processes without ever raising into the chat path.</a:t>
+            </a:r>
+            <a:endParaRPr sz="1000" b="0" i="0">
+              <a:latin typeface="Calibri"/>
+            </a:endParaRPr>
+          </a:p>
+          <a:p>
+            <a:pPr>
+              <a:spcAft>
+                <a:spcPts val="600"/>
+              </a:spcAft>
+              <a:defRPr sz="1500">
+                <a:solidFill>
+                  <a:srgbClr val="B4BAAE"/>
+                </a:solidFill>
+                <a:latin typeface="Aptos"/>
+              </a:defRPr>
+            </a:pPr>
+            <a:r>
+              <a:rPr sz="1000" b="0" i="0">
+                <a:latin typeface="Calibri"/>
+              </a:rPr>
+              <a:t>Tool calls execute in the backend, append observations, and may create wrapped runtime copies under `agent/agents/pools/_chat_runs_/`.</a:t>
+            </a:r>
+            <a:endParaRPr sz="1000" b="0" i="0">
+              <a:latin typeface="Calibri"/>
+            </a:endParaRPr>
+          </a:p>
+          <a:p>
+            <a:pPr>
+              <a:spcAft>
+                <a:spcPts val="600"/>
+              </a:spcAft>
+              <a:defRPr sz="1500">
+                <a:solidFill>
+                  <a:srgbClr val="B4BAAE"/>
+                </a:solidFill>
+                <a:latin typeface="Aptos"/>
+              </a:defRPr>
+            </a:pPr>
+            <a:r>
+              <a:rPr sz="1000" b="0" i="0">
+                <a:latin typeface="Calibri"/>
+              </a:rPr>
+              <a:t>On the next full start-up, `manage.py` can swap a staged database into place before Django imports, while archiving the previous live database under `DB/Older/&lt;timestamp&gt;/`.</a:t>
+            </a:r>
+            <a:endParaRPr sz="1000" b="0" i="0">
+              <a:latin typeface="Calibri"/>
+            </a:endParaRPr>
+          </a:p>
+          <a:p>
+            <a:pPr>
+              <a:spcAft>
+                <a:spcPts val="600"/>
+              </a:spcAft>
+              <a:defRPr sz="1500">
+                <a:solidFill>
+                  <a:srgbClr val="B4BAAE"/>
+                </a:solidFill>
+                <a:latin typeface="Aptos"/>
+              </a:defRPr>
+            </a:pPr>
+            <a:r>
+              <a:rPr sz="1000" b="0" i="0">
+                <a:latin typeface="Calibri"/>
+              </a:rPr>
+              <a:t>ACP flows deploy session-scoped pool instances, wire config values, validate NxN graph rules, and execute through Starter-driven flow semantics.</a:t>
+            </a:r>
+            <a:endParaRPr sz="1000" b="0" i="0">
+              <a:latin typeface="Calibri"/>
+            </a:endParaRPr>
+          </a:p>
+          <a:p>
+            <a:pPr>
+              <a:spcAft>
+                <a:spcPts val="600"/>
+              </a:spcAft>
+              <a:defRPr sz="1500">
+                <a:solidFill>
+                  <a:srgbClr val="B4BAAE"/>
+                </a:solidFill>
+                <a:latin typeface="Aptos"/>
+              </a:defRPr>
+            </a:pPr>
+            <a:r>
+              <a:rPr sz="1000" b="0" i="0">
+                <a:latin typeface="Calibri"/>
+              </a:rPr>
+              <a:t>Build scripts collect static assets, bundle Django/Python resources, add agent templates, and assemble `pkg.zip`, `Uninstaller.exe`, and `dist/Tlamatini_Release/`.</a:t>
+            </a:r>
+            <a:endParaRPr sz="1000" b="0" i="0">
+              <a:latin typeface="Calibri"/>
+            </a:endParaRPr>
+          </a:p>
+        </p:txBody>
+      </p:sp>
+    </p:spTree>
+  </p:cSld>
+  <p:clrMapOvr>
+    <a:masterClrMapping/>
+  </p:clrMapOvr>
+</p:sld>
+</file>
+
+<file path=ppt/slides/slide40.xml><?xml version="1.0" encoding="utf-8"?>
 <p:sld xmlns:a="http://schemas.openxmlformats.org/drawingml/2006/main" xmlns:p="http://schemas.openxmlformats.org/presentationml/2006/main" xmlns:r="http://schemas.openxmlformats.org/officeDocument/2006/relationships">
   <p:cSld>
     <p:spTree>
@@ -26966,7 +26318,7 @@
 </p:sld>
 </file>
 
-<file path=ppt/slides/slide42.xml><?xml version="1.0" encoding="utf-8"?>
+<file path=ppt/slides/slide41.xml><?xml version="1.0" encoding="utf-8"?>
 <p:sld xmlns:a="http://schemas.openxmlformats.org/drawingml/2006/main" xmlns:p="http://schemas.openxmlformats.org/presentationml/2006/main" xmlns:r="http://schemas.openxmlformats.org/officeDocument/2006/relationships">
   <p:cSld>
     <p:spTree>
@@ -27334,7 +26686,7 @@
 </p:sld>
 </file>
 
-<file path=ppt/slides/slide43.xml><?xml version="1.0" encoding="utf-8"?>
+<file path=ppt/slides/slide42.xml><?xml version="1.0" encoding="utf-8"?>
 <p:sld xmlns:a="http://schemas.openxmlformats.org/drawingml/2006/main" xmlns:p="http://schemas.openxmlformats.org/presentationml/2006/main" xmlns:r="http://schemas.openxmlformats.org/officeDocument/2006/relationships">
   <p:cSld>
     <p:spTree>
@@ -27702,7 +27054,7 @@
 </p:sld>
 </file>
 
-<file path=ppt/slides/slide44.xml><?xml version="1.0" encoding="utf-8"?>
+<file path=ppt/slides/slide43.xml><?xml version="1.0" encoding="utf-8"?>
 <p:sld xmlns:a="http://schemas.openxmlformats.org/drawingml/2006/main" xmlns:p="http://schemas.openxmlformats.org/presentationml/2006/main" xmlns:r="http://schemas.openxmlformats.org/officeDocument/2006/relationships">
   <p:cSld>
     <p:spTree>
@@ -28070,7 +27422,7 @@
 </p:sld>
 </file>
 
-<file path=ppt/slides/slide45.xml><?xml version="1.0" encoding="utf-8"?>
+<file path=ppt/slides/slide44.xml><?xml version="1.0" encoding="utf-8"?>
 <p:sld xmlns:a="http://schemas.openxmlformats.org/drawingml/2006/main" xmlns:p="http://schemas.openxmlformats.org/presentationml/2006/main" xmlns:r="http://schemas.openxmlformats.org/officeDocument/2006/relationships">
   <p:cSld>
     <p:spTree>
@@ -28438,7 +27790,7 @@
 </p:sld>
 </file>
 
-<file path=ppt/slides/slide46.xml><?xml version="1.0" encoding="utf-8"?>
+<file path=ppt/slides/slide45.xml><?xml version="1.0" encoding="utf-8"?>
 <p:sld xmlns:a="http://schemas.openxmlformats.org/drawingml/2006/main" xmlns:p="http://schemas.openxmlformats.org/presentationml/2006/main" xmlns:r="http://schemas.openxmlformats.org/officeDocument/2006/relationships">
   <p:cSld>
     <p:spTree>
@@ -28806,7 +28158,7 @@
 </p:sld>
 </file>
 
-<file path=ppt/slides/slide47.xml><?xml version="1.0" encoding="utf-8"?>
+<file path=ppt/slides/slide46.xml><?xml version="1.0" encoding="utf-8"?>
 <p:sld xmlns:a="http://schemas.openxmlformats.org/drawingml/2006/main" xmlns:p="http://schemas.openxmlformats.org/presentationml/2006/main" xmlns:r="http://schemas.openxmlformats.org/officeDocument/2006/relationships">
   <p:cSld>
     <p:spTree>
@@ -29174,7 +28526,7 @@
 </p:sld>
 </file>
 
-<file path=ppt/slides/slide48.xml><?xml version="1.0" encoding="utf-8"?>
+<file path=ppt/slides/slide47.xml><?xml version="1.0" encoding="utf-8"?>
 <p:sld xmlns:a="http://schemas.openxmlformats.org/drawingml/2006/main" xmlns:p="http://schemas.openxmlformats.org/presentationml/2006/main" xmlns:r="http://schemas.openxmlformats.org/officeDocument/2006/relationships">
   <p:cSld>
     <p:spTree>
@@ -29542,7 +28894,7 @@
 </p:sld>
 </file>
 
-<file path=ppt/slides/slide49.xml><?xml version="1.0" encoding="utf-8"?>
+<file path=ppt/slides/slide48.xml><?xml version="1.0" encoding="utf-8"?>
 <p:sld xmlns:a="http://schemas.openxmlformats.org/drawingml/2006/main" xmlns:p="http://schemas.openxmlformats.org/presentationml/2006/main" xmlns:r="http://schemas.openxmlformats.org/officeDocument/2006/relationships">
   <p:cSld>
     <p:spTree>
@@ -29910,588 +29262,7 @@
 </p:sld>
 </file>
 
-<file path=ppt/slides/slide5.xml><?xml version="1.0" encoding="utf-8"?>
-<p:sld xmlns:a="http://schemas.openxmlformats.org/drawingml/2006/main" xmlns:p="http://schemas.openxmlformats.org/presentationml/2006/main" xmlns:r="http://schemas.openxmlformats.org/officeDocument/2006/relationships">
-  <p:cSld>
-    <p:spTree>
-      <p:nvGrpSpPr>
-        <p:cNvPr id="1" name=""/>
-        <p:cNvGrpSpPr/>
-        <p:nvPr/>
-      </p:nvGrpSpPr>
-      <p:grpSpPr/>
-      <p:sp>
-        <p:nvSpPr>
-          <p:cNvPr id="2" name="Rectangle 1"/>
-          <p:cNvSpPr/>
-          <p:nvPr/>
-        </p:nvSpPr>
-        <p:spPr>
-          <a:xfrm>
-            <a:off x="0" y="0"/>
-            <a:ext cx="12191695" cy="6858000"/>
-          </a:xfrm>
-          <a:prstGeom prst="rect">
-            <a:avLst/>
-          </a:prstGeom>
-          <a:solidFill>
-            <a:srgbClr val="080D0D"/>
-          </a:solidFill>
-          <a:ln>
-            <a:noFill/>
-          </a:ln>
-        </p:spPr>
-        <p:style>
-          <a:lnRef idx="1">
-            <a:schemeClr val="accent1"/>
-          </a:lnRef>
-          <a:fillRef idx="3">
-            <a:schemeClr val="accent1"/>
-          </a:fillRef>
-          <a:effectRef idx="2">
-            <a:schemeClr val="accent1"/>
-          </a:effectRef>
-          <a:fontRef idx="minor">
-            <a:schemeClr val="lt1"/>
-          </a:fontRef>
-        </p:style>
-        <p:txBody>
-          <a:bodyPr rtlCol="0" anchor="ctr"/>
-          <a:lstStyle/>
-          <a:p>
-            <a:pPr algn="ctr"/>
-          </a:p>
-        </p:txBody>
-      </p:sp>
-      <p:sp>
-        <p:nvSpPr>
-          <p:cNvPr id="3" name="Rectangle 2"/>
-          <p:cNvSpPr/>
-          <p:nvPr/>
-        </p:nvSpPr>
-        <p:spPr>
-          <a:xfrm>
-            <a:off x="320040" y="384048"/>
-            <a:ext cx="36576" cy="6080760"/>
-          </a:xfrm>
-          <a:prstGeom prst="rect">
-            <a:avLst/>
-          </a:prstGeom>
-          <a:solidFill>
-            <a:srgbClr val="E0AB5D"/>
-          </a:solidFill>
-          <a:ln>
-            <a:noFill/>
-          </a:ln>
-        </p:spPr>
-        <p:style>
-          <a:lnRef idx="1">
-            <a:schemeClr val="accent1"/>
-          </a:lnRef>
-          <a:fillRef idx="3">
-            <a:schemeClr val="accent1"/>
-          </a:fillRef>
-          <a:effectRef idx="2">
-            <a:schemeClr val="accent1"/>
-          </a:effectRef>
-          <a:fontRef idx="minor">
-            <a:schemeClr val="lt1"/>
-          </a:fontRef>
-        </p:style>
-        <p:txBody>
-          <a:bodyPr rtlCol="0" anchor="ctr"/>
-          <a:lstStyle/>
-          <a:p>
-            <a:pPr algn="ctr"/>
-          </a:p>
-        </p:txBody>
-      </p:sp>
-      <p:sp>
-        <p:nvSpPr>
-          <p:cNvPr id="4" name="Rectangle 3"/>
-          <p:cNvSpPr/>
-          <p:nvPr/>
-        </p:nvSpPr>
-        <p:spPr>
-          <a:xfrm>
-            <a:off x="11716207" y="384048"/>
-            <a:ext cx="36576" cy="6080760"/>
-          </a:xfrm>
-          <a:prstGeom prst="rect">
-            <a:avLst/>
-          </a:prstGeom>
-          <a:solidFill>
-            <a:srgbClr val="E0AB5D"/>
-          </a:solidFill>
-          <a:ln>
-            <a:noFill/>
-          </a:ln>
-        </p:spPr>
-        <p:style>
-          <a:lnRef idx="1">
-            <a:schemeClr val="accent1"/>
-          </a:lnRef>
-          <a:fillRef idx="3">
-            <a:schemeClr val="accent1"/>
-          </a:fillRef>
-          <a:effectRef idx="2">
-            <a:schemeClr val="accent1"/>
-          </a:effectRef>
-          <a:fontRef idx="minor">
-            <a:schemeClr val="lt1"/>
-          </a:fontRef>
-        </p:style>
-        <p:txBody>
-          <a:bodyPr rtlCol="0" anchor="ctr"/>
-          <a:lstStyle/>
-          <a:p>
-            <a:pPr algn="ctr"/>
-          </a:p>
-        </p:txBody>
-      </p:sp>
-      <p:sp>
-        <p:nvSpPr>
-          <p:cNvPr id="5" name="Rectangle 4"/>
-          <p:cNvSpPr/>
-          <p:nvPr/>
-        </p:nvSpPr>
-        <p:spPr>
-          <a:xfrm>
-            <a:off x="502920" y="384048"/>
-            <a:ext cx="11155680" cy="27432"/>
-          </a:xfrm>
-          <a:prstGeom prst="rect">
-            <a:avLst/>
-          </a:prstGeom>
-          <a:solidFill>
-            <a:srgbClr val="E0AB5D"/>
-          </a:solidFill>
-          <a:ln>
-            <a:noFill/>
-          </a:ln>
-        </p:spPr>
-        <p:style>
-          <a:lnRef idx="1">
-            <a:schemeClr val="accent1"/>
-          </a:lnRef>
-          <a:fillRef idx="3">
-            <a:schemeClr val="accent1"/>
-          </a:fillRef>
-          <a:effectRef idx="2">
-            <a:schemeClr val="accent1"/>
-          </a:effectRef>
-          <a:fontRef idx="minor">
-            <a:schemeClr val="lt1"/>
-          </a:fontRef>
-        </p:style>
-        <p:txBody>
-          <a:bodyPr rtlCol="0" anchor="ctr"/>
-          <a:lstStyle/>
-          <a:p>
-            <a:pPr algn="ctr"/>
-          </a:p>
-        </p:txBody>
-      </p:sp>
-      <p:sp>
-        <p:nvSpPr>
-          <p:cNvPr id="6" name="Rectangle 5"/>
-          <p:cNvSpPr/>
-          <p:nvPr/>
-        </p:nvSpPr>
-        <p:spPr>
-          <a:xfrm>
-            <a:off x="502920" y="6437376"/>
-            <a:ext cx="11155680" cy="27432"/>
-          </a:xfrm>
-          <a:prstGeom prst="rect">
-            <a:avLst/>
-          </a:prstGeom>
-          <a:solidFill>
-            <a:srgbClr val="E0AB5D"/>
-          </a:solidFill>
-          <a:ln>
-            <a:noFill/>
-          </a:ln>
-        </p:spPr>
-        <p:style>
-          <a:lnRef idx="1">
-            <a:schemeClr val="accent1"/>
-          </a:lnRef>
-          <a:fillRef idx="3">
-            <a:schemeClr val="accent1"/>
-          </a:fillRef>
-          <a:effectRef idx="2">
-            <a:schemeClr val="accent1"/>
-          </a:effectRef>
-          <a:fontRef idx="minor">
-            <a:schemeClr val="lt1"/>
-          </a:fontRef>
-        </p:style>
-        <p:txBody>
-          <a:bodyPr rtlCol="0" anchor="ctr"/>
-          <a:lstStyle/>
-          <a:p>
-            <a:pPr algn="ctr"/>
-          </a:p>
-        </p:txBody>
-      </p:sp>
-      <p:sp>
-        <p:nvSpPr>
-          <p:cNvPr id="7" name="TextBox 6"/>
-          <p:cNvSpPr txBox="1"/>
-          <p:nvPr/>
-        </p:nvSpPr>
-        <p:spPr>
-          <a:xfrm>
-            <a:off x="713232" y="548640"/>
-            <a:ext cx="10698480" cy="301752"/>
-          </a:xfrm>
-          <a:prstGeom prst="rect">
-            <a:avLst/>
-          </a:prstGeom>
-          <a:noFill/>
-        </p:spPr>
-        <p:txBody>
-          <a:bodyPr wrap="square" anchor="t">
-            <a:spAutoFit/>
-          </a:bodyPr>
-          <a:lstStyle/>
-          <a:p>
-            <a:pPr algn="l"/>
-            <a:r>
-              <a:rPr sz="1000" b="1">
-                <a:solidFill>
-                  <a:srgbClr val="E0AB5D"/>
-                </a:solidFill>
-                <a:latin typeface="Aptos"/>
-              </a:rPr>
-              <a:t>HOW THE SOFTWARE IS SHAPED</a:t>
-            </a:r>
-          </a:p>
-        </p:txBody>
-      </p:sp>
-      <p:sp>
-        <p:nvSpPr>
-          <p:cNvPr id="8" name="TextBox 7"/>
-          <p:cNvSpPr txBox="1"/>
-          <p:nvPr/>
-        </p:nvSpPr>
-        <p:spPr>
-          <a:xfrm>
-            <a:off x="694944" y="850392"/>
-            <a:ext cx="10881360" cy="566928"/>
-          </a:xfrm>
-          <a:prstGeom prst="rect">
-            <a:avLst/>
-          </a:prstGeom>
-          <a:noFill/>
-        </p:spPr>
-        <p:txBody>
-          <a:bodyPr wrap="square" anchor="t">
-            <a:spAutoFit/>
-          </a:bodyPr>
-          <a:lstStyle/>
-          <a:p>
-            <a:pPr algn="l"/>
-            <a:r>
-              <a:rPr sz="2700" b="0">
-                <a:solidFill>
-                  <a:srgbClr val="E8E8DE"/>
-                </a:solidFill>
-                <a:latin typeface="Aptos Display"/>
-              </a:rPr>
-              <a:t>Design Principles</a:t>
-            </a:r>
-          </a:p>
-        </p:txBody>
-      </p:sp>
-      <p:sp>
-        <p:nvSpPr>
-          <p:cNvPr id="9" name="Rounded Rectangle 8"/>
-          <p:cNvSpPr/>
-          <p:nvPr/>
-        </p:nvSpPr>
-        <p:spPr>
-          <a:xfrm>
-            <a:off x="749808" y="1572768"/>
-            <a:ext cx="10561320" cy="4343400"/>
-          </a:xfrm>
-          <a:prstGeom prst="roundRect">
-            <a:avLst/>
-          </a:prstGeom>
-          <a:solidFill>
-            <a:srgbClr val="161A19"/>
-          </a:solidFill>
-          <a:ln>
-            <a:solidFill>
-              <a:srgbClr val="595F56"/>
-            </a:solidFill>
-          </a:ln>
-        </p:spPr>
-        <p:style>
-          <a:lnRef idx="1">
-            <a:schemeClr val="accent1"/>
-          </a:lnRef>
-          <a:fillRef idx="3">
-            <a:schemeClr val="accent1"/>
-          </a:fillRef>
-          <a:effectRef idx="2">
-            <a:schemeClr val="accent1"/>
-          </a:effectRef>
-          <a:fontRef idx="minor">
-            <a:schemeClr val="lt1"/>
-          </a:fontRef>
-        </p:style>
-        <p:txBody>
-          <a:bodyPr rtlCol="0" anchor="ctr"/>
-          <a:lstStyle/>
-          <a:p>
-            <a:pPr algn="ctr"/>
-          </a:p>
-        </p:txBody>
-      </p:sp>
-      <p:sp>
-        <p:nvSpPr>
-          <p:cNvPr id="10" name="Rectangle 9"/>
-          <p:cNvSpPr/>
-          <p:nvPr/>
-        </p:nvSpPr>
-        <p:spPr>
-          <a:xfrm>
-            <a:off x="749808" y="1572768"/>
-            <a:ext cx="10561320" cy="109728"/>
-          </a:xfrm>
-          <a:prstGeom prst="rect">
-            <a:avLst/>
-          </a:prstGeom>
-          <a:solidFill>
-            <a:srgbClr val="E0AB5D"/>
-          </a:solidFill>
-          <a:ln>
-            <a:noFill/>
-          </a:ln>
-        </p:spPr>
-        <p:style>
-          <a:lnRef idx="1">
-            <a:schemeClr val="accent1"/>
-          </a:lnRef>
-          <a:fillRef idx="3">
-            <a:schemeClr val="accent1"/>
-          </a:fillRef>
-          <a:effectRef idx="2">
-            <a:schemeClr val="accent1"/>
-          </a:effectRef>
-          <a:fontRef idx="minor">
-            <a:schemeClr val="lt1"/>
-          </a:fontRef>
-        </p:style>
-        <p:txBody>
-          <a:bodyPr rtlCol="0" anchor="ctr"/>
-          <a:lstStyle/>
-          <a:p>
-            <a:pPr algn="ctr"/>
-          </a:p>
-        </p:txBody>
-      </p:sp>
-      <p:sp>
-        <p:nvSpPr>
-          <p:cNvPr id="11" name="TextBox 10"/>
-          <p:cNvSpPr txBox="1"/>
-          <p:nvPr/>
-        </p:nvSpPr>
-        <p:spPr>
-          <a:xfrm>
-            <a:off x="950976" y="1773936"/>
-            <a:ext cx="10158984" cy="310896"/>
-          </a:xfrm>
-          <a:prstGeom prst="rect">
-            <a:avLst/>
-          </a:prstGeom>
-          <a:noFill/>
-        </p:spPr>
-        <p:txBody>
-          <a:bodyPr wrap="square" anchor="t">
-            <a:spAutoFit/>
-          </a:bodyPr>
-          <a:lstStyle/>
-          <a:p>
-            <a:pPr algn="l"/>
-            <a:r>
-              <a:rPr sz="1400" b="1">
-                <a:solidFill>
-                  <a:srgbClr val="E0AB5D"/>
-                </a:solidFill>
-                <a:latin typeface="Aptos"/>
-              </a:rPr>
-              <a:t>Core design choices</a:t>
-            </a:r>
-          </a:p>
-        </p:txBody>
-      </p:sp>
-      <p:sp>
-        <p:nvSpPr>
-          <p:cNvPr id="12" name="TextBox 11"/>
-          <p:cNvSpPr txBox="1"/>
-          <p:nvPr/>
-        </p:nvSpPr>
-        <p:spPr>
-          <a:xfrm>
-            <a:off x="950976" y="2231136"/>
-            <a:ext cx="10158984" cy="3538728"/>
-          </a:xfrm>
-          <a:prstGeom prst="rect">
-            <a:avLst/>
-          </a:prstGeom>
-          <a:noFill/>
-        </p:spPr>
-        <p:txBody>
-          <a:bodyPr wrap="square" anchor="t" lIns="38100" rIns="38100" tIns="25400" bIns="25400">
-            <a:noAutofit/>
-          </a:bodyPr>
-          <a:lstStyle/>
-          <a:p>
-            <a:pPr>
-              <a:spcAft>
-                <a:spcPts val="600"/>
-              </a:spcAft>
-              <a:defRPr sz="1600">
-                <a:solidFill>
-                  <a:srgbClr val="B4BAAE"/>
-                </a:solidFill>
-                <a:latin typeface="Aptos"/>
-              </a:defRPr>
-            </a:pPr>
-            <a:r>
-              <a:rPr sz="1600" b="0" i="0">
-                <a:latin typeface="Calibri"/>
-              </a:rPr>
-              <a:t>Evidence-first answers: Tlamatini grounds responses in selected project context and hybrid retrieval rather than freeform model memory.</a:t>
-            </a:r>
-            <a:endParaRPr sz="1600" b="0" i="0">
-              <a:latin typeface="Calibri"/>
-            </a:endParaRPr>
-          </a:p>
-          <a:p>
-            <a:pPr>
-              <a:spcAft>
-                <a:spcPts val="600"/>
-              </a:spcAft>
-              <a:defRPr sz="1600">
-                <a:solidFill>
-                  <a:srgbClr val="B4BAAE"/>
-                </a:solidFill>
-                <a:latin typeface="Aptos"/>
-              </a:defRPr>
-            </a:pPr>
-            <a:r>
-              <a:rPr sz="1600" b="0" i="0">
-                <a:latin typeface="Calibri"/>
-              </a:rPr>
-              <a:t>Explicit orchestration: checked Multi-Turn uses a visible tool loop, capability scoring, and staged planning instead of a single opaque call.</a:t>
-            </a:r>
-            <a:endParaRPr sz="1600" b="0" i="0">
-              <a:latin typeface="Calibri"/>
-            </a:endParaRPr>
-          </a:p>
-          <a:p>
-            <a:pPr>
-              <a:spcAft>
-                <a:spcPts val="600"/>
-              </a:spcAft>
-              <a:defRPr sz="1600">
-                <a:solidFill>
-                  <a:srgbClr val="B4BAAE"/>
-                </a:solidFill>
-                <a:latin typeface="Aptos"/>
-              </a:defRPr>
-            </a:pPr>
-            <a:r>
-              <a:rPr sz="1600" b="0" i="0">
-                <a:latin typeface="Calibri"/>
-              </a:rPr>
-              <a:t>Operational reversibility: risky changes such as database replacement are staged, archived, and delayed to the only safe window instead of hot-swapped mid-session.</a:t>
-            </a:r>
-            <a:endParaRPr sz="1600" b="0" i="0">
-              <a:latin typeface="Calibri"/>
-            </a:endParaRPr>
-          </a:p>
-          <a:p>
-            <a:pPr>
-              <a:spcAft>
-                <a:spcPts val="600"/>
-              </a:spcAft>
-              <a:defRPr sz="1600">
-                <a:solidFill>
-                  <a:srgbClr val="B4BAAE"/>
-                </a:solidFill>
-                <a:latin typeface="Aptos"/>
-              </a:defRPr>
-            </a:pPr>
-            <a:r>
-              <a:rPr sz="1600" b="0" i="0">
-                <a:latin typeface="Calibri"/>
-              </a:rPr>
-              <a:t>Fail-open diagnostics: GPU pressure probes and session-restore safeguards warn early without breaking CPU-only or degraded environments.</a:t>
-            </a:r>
-            <a:endParaRPr sz="1600" b="0" i="0">
-              <a:latin typeface="Calibri"/>
-            </a:endParaRPr>
-          </a:p>
-          <a:p>
-            <a:pPr>
-              <a:spcAft>
-                <a:spcPts val="600"/>
-              </a:spcAft>
-              <a:defRPr sz="1600">
-                <a:solidFill>
-                  <a:srgbClr val="B4BAAE"/>
-                </a:solidFill>
-                <a:latin typeface="Aptos"/>
-              </a:defRPr>
-            </a:pPr>
-            <a:r>
-              <a:rPr sz="1600" b="0" i="0">
-                <a:latin typeface="Calibri"/>
-              </a:rPr>
-              <a:t>Runtime isolation: wrapped chat-agent copies run in session-scoped folders so template agents remain pristine while live runs stay inspectable.</a:t>
-            </a:r>
-            <a:endParaRPr sz="1600" b="0" i="0">
-              <a:latin typeface="Calibri"/>
-            </a:endParaRPr>
-          </a:p>
-          <a:p>
-            <a:pPr>
-              <a:spcAft>
-                <a:spcPts val="600"/>
-              </a:spcAft>
-              <a:defRPr sz="1600">
-                <a:solidFill>
-                  <a:srgbClr val="B4BAAE"/>
-                </a:solidFill>
-                <a:latin typeface="Aptos"/>
-              </a:defRPr>
-            </a:pPr>
-            <a:r>
-              <a:rPr sz="1600" b="0" i="0">
-                <a:latin typeface="Calibri"/>
-              </a:rPr>
-              <a:t>Operator truth over vibes: Exec Report tables, tlamatini.log, skill audits, and ACPX transcripts make the system auditable after execution.</a:t>
-            </a:r>
-            <a:endParaRPr sz="1600" b="0" i="0">
-              <a:latin typeface="Calibri"/>
-            </a:endParaRPr>
-          </a:p>
-        </p:txBody>
-      </p:sp>
-    </p:spTree>
-  </p:cSld>
-  <p:clrMapOvr>
-    <a:masterClrMapping/>
-  </p:clrMapOvr>
-</p:sld>
-</file>
-
-<file path=ppt/slides/slide50.xml><?xml version="1.0" encoding="utf-8"?>
+<file path=ppt/slides/slide49.xml><?xml version="1.0" encoding="utf-8"?>
 <p:sld xmlns:a="http://schemas.openxmlformats.org/drawingml/2006/main" xmlns:p="http://schemas.openxmlformats.org/presentationml/2006/main" xmlns:r="http://schemas.openxmlformats.org/officeDocument/2006/relationships">
   <p:cSld>
     <p:spTree>
@@ -30859,7 +29630,588 @@
 </p:sld>
 </file>
 
-<file path=ppt/slides/slide51.xml><?xml version="1.0" encoding="utf-8"?>
+<file path=ppt/slides/slide5.xml><?xml version="1.0" encoding="utf-8"?>
+<p:sld xmlns:a="http://schemas.openxmlformats.org/drawingml/2006/main" xmlns:p="http://schemas.openxmlformats.org/presentationml/2006/main" xmlns:r="http://schemas.openxmlformats.org/officeDocument/2006/relationships">
+  <p:cSld>
+    <p:spTree>
+      <p:nvGrpSpPr>
+        <p:cNvPr id="1" name=""/>
+        <p:cNvGrpSpPr/>
+        <p:nvPr/>
+      </p:nvGrpSpPr>
+      <p:grpSpPr/>
+      <p:sp>
+        <p:nvSpPr>
+          <p:cNvPr id="2" name="Rectangle 1"/>
+          <p:cNvSpPr/>
+          <p:nvPr/>
+        </p:nvSpPr>
+        <p:spPr>
+          <a:xfrm>
+            <a:off x="0" y="0"/>
+            <a:ext cx="12191695" cy="6858000"/>
+          </a:xfrm>
+          <a:prstGeom prst="rect">
+            <a:avLst/>
+          </a:prstGeom>
+          <a:solidFill>
+            <a:srgbClr val="080D0D"/>
+          </a:solidFill>
+          <a:ln>
+            <a:noFill/>
+          </a:ln>
+        </p:spPr>
+        <p:style>
+          <a:lnRef idx="1">
+            <a:schemeClr val="accent1"/>
+          </a:lnRef>
+          <a:fillRef idx="3">
+            <a:schemeClr val="accent1"/>
+          </a:fillRef>
+          <a:effectRef idx="2">
+            <a:schemeClr val="accent1"/>
+          </a:effectRef>
+          <a:fontRef idx="minor">
+            <a:schemeClr val="lt1"/>
+          </a:fontRef>
+        </p:style>
+        <p:txBody>
+          <a:bodyPr rtlCol="0" anchor="ctr"/>
+          <a:lstStyle/>
+          <a:p>
+            <a:pPr algn="ctr"/>
+          </a:p>
+        </p:txBody>
+      </p:sp>
+      <p:sp>
+        <p:nvSpPr>
+          <p:cNvPr id="3" name="Rectangle 2"/>
+          <p:cNvSpPr/>
+          <p:nvPr/>
+        </p:nvSpPr>
+        <p:spPr>
+          <a:xfrm>
+            <a:off x="320040" y="384048"/>
+            <a:ext cx="36576" cy="6080760"/>
+          </a:xfrm>
+          <a:prstGeom prst="rect">
+            <a:avLst/>
+          </a:prstGeom>
+          <a:solidFill>
+            <a:srgbClr val="E0AB5D"/>
+          </a:solidFill>
+          <a:ln>
+            <a:noFill/>
+          </a:ln>
+        </p:spPr>
+        <p:style>
+          <a:lnRef idx="1">
+            <a:schemeClr val="accent1"/>
+          </a:lnRef>
+          <a:fillRef idx="3">
+            <a:schemeClr val="accent1"/>
+          </a:fillRef>
+          <a:effectRef idx="2">
+            <a:schemeClr val="accent1"/>
+          </a:effectRef>
+          <a:fontRef idx="minor">
+            <a:schemeClr val="lt1"/>
+          </a:fontRef>
+        </p:style>
+        <p:txBody>
+          <a:bodyPr rtlCol="0" anchor="ctr"/>
+          <a:lstStyle/>
+          <a:p>
+            <a:pPr algn="ctr"/>
+          </a:p>
+        </p:txBody>
+      </p:sp>
+      <p:sp>
+        <p:nvSpPr>
+          <p:cNvPr id="4" name="Rectangle 3"/>
+          <p:cNvSpPr/>
+          <p:nvPr/>
+        </p:nvSpPr>
+        <p:spPr>
+          <a:xfrm>
+            <a:off x="11716207" y="384048"/>
+            <a:ext cx="36576" cy="6080760"/>
+          </a:xfrm>
+          <a:prstGeom prst="rect">
+            <a:avLst/>
+          </a:prstGeom>
+          <a:solidFill>
+            <a:srgbClr val="E0AB5D"/>
+          </a:solidFill>
+          <a:ln>
+            <a:noFill/>
+          </a:ln>
+        </p:spPr>
+        <p:style>
+          <a:lnRef idx="1">
+            <a:schemeClr val="accent1"/>
+          </a:lnRef>
+          <a:fillRef idx="3">
+            <a:schemeClr val="accent1"/>
+          </a:fillRef>
+          <a:effectRef idx="2">
+            <a:schemeClr val="accent1"/>
+          </a:effectRef>
+          <a:fontRef idx="minor">
+            <a:schemeClr val="lt1"/>
+          </a:fontRef>
+        </p:style>
+        <p:txBody>
+          <a:bodyPr rtlCol="0" anchor="ctr"/>
+          <a:lstStyle/>
+          <a:p>
+            <a:pPr algn="ctr"/>
+          </a:p>
+        </p:txBody>
+      </p:sp>
+      <p:sp>
+        <p:nvSpPr>
+          <p:cNvPr id="5" name="Rectangle 4"/>
+          <p:cNvSpPr/>
+          <p:nvPr/>
+        </p:nvSpPr>
+        <p:spPr>
+          <a:xfrm>
+            <a:off x="502920" y="384048"/>
+            <a:ext cx="11155680" cy="27432"/>
+          </a:xfrm>
+          <a:prstGeom prst="rect">
+            <a:avLst/>
+          </a:prstGeom>
+          <a:solidFill>
+            <a:srgbClr val="E0AB5D"/>
+          </a:solidFill>
+          <a:ln>
+            <a:noFill/>
+          </a:ln>
+        </p:spPr>
+        <p:style>
+          <a:lnRef idx="1">
+            <a:schemeClr val="accent1"/>
+          </a:lnRef>
+          <a:fillRef idx="3">
+            <a:schemeClr val="accent1"/>
+          </a:fillRef>
+          <a:effectRef idx="2">
+            <a:schemeClr val="accent1"/>
+          </a:effectRef>
+          <a:fontRef idx="minor">
+            <a:schemeClr val="lt1"/>
+          </a:fontRef>
+        </p:style>
+        <p:txBody>
+          <a:bodyPr rtlCol="0" anchor="ctr"/>
+          <a:lstStyle/>
+          <a:p>
+            <a:pPr algn="ctr"/>
+          </a:p>
+        </p:txBody>
+      </p:sp>
+      <p:sp>
+        <p:nvSpPr>
+          <p:cNvPr id="6" name="Rectangle 5"/>
+          <p:cNvSpPr/>
+          <p:nvPr/>
+        </p:nvSpPr>
+        <p:spPr>
+          <a:xfrm>
+            <a:off x="502920" y="6437376"/>
+            <a:ext cx="11155680" cy="27432"/>
+          </a:xfrm>
+          <a:prstGeom prst="rect">
+            <a:avLst/>
+          </a:prstGeom>
+          <a:solidFill>
+            <a:srgbClr val="E0AB5D"/>
+          </a:solidFill>
+          <a:ln>
+            <a:noFill/>
+          </a:ln>
+        </p:spPr>
+        <p:style>
+          <a:lnRef idx="1">
+            <a:schemeClr val="accent1"/>
+          </a:lnRef>
+          <a:fillRef idx="3">
+            <a:schemeClr val="accent1"/>
+          </a:fillRef>
+          <a:effectRef idx="2">
+            <a:schemeClr val="accent1"/>
+          </a:effectRef>
+          <a:fontRef idx="minor">
+            <a:schemeClr val="lt1"/>
+          </a:fontRef>
+        </p:style>
+        <p:txBody>
+          <a:bodyPr rtlCol="0" anchor="ctr"/>
+          <a:lstStyle/>
+          <a:p>
+            <a:pPr algn="ctr"/>
+          </a:p>
+        </p:txBody>
+      </p:sp>
+      <p:sp>
+        <p:nvSpPr>
+          <p:cNvPr id="7" name="TextBox 6"/>
+          <p:cNvSpPr txBox="1"/>
+          <p:nvPr/>
+        </p:nvSpPr>
+        <p:spPr>
+          <a:xfrm>
+            <a:off x="713232" y="548640"/>
+            <a:ext cx="10698480" cy="301752"/>
+          </a:xfrm>
+          <a:prstGeom prst="rect">
+            <a:avLst/>
+          </a:prstGeom>
+          <a:noFill/>
+        </p:spPr>
+        <p:txBody>
+          <a:bodyPr wrap="square" anchor="t">
+            <a:spAutoFit/>
+          </a:bodyPr>
+          <a:lstStyle/>
+          <a:p>
+            <a:pPr algn="l"/>
+            <a:r>
+              <a:rPr sz="1000" b="1">
+                <a:solidFill>
+                  <a:srgbClr val="E0AB5D"/>
+                </a:solidFill>
+                <a:latin typeface="Aptos"/>
+              </a:rPr>
+              <a:t>HOW THE SOFTWARE IS SHAPED</a:t>
+            </a:r>
+          </a:p>
+        </p:txBody>
+      </p:sp>
+      <p:sp>
+        <p:nvSpPr>
+          <p:cNvPr id="8" name="TextBox 7"/>
+          <p:cNvSpPr txBox="1"/>
+          <p:nvPr/>
+        </p:nvSpPr>
+        <p:spPr>
+          <a:xfrm>
+            <a:off x="694944" y="850392"/>
+            <a:ext cx="10881360" cy="566928"/>
+          </a:xfrm>
+          <a:prstGeom prst="rect">
+            <a:avLst/>
+          </a:prstGeom>
+          <a:noFill/>
+        </p:spPr>
+        <p:txBody>
+          <a:bodyPr wrap="square" anchor="t">
+            <a:spAutoFit/>
+          </a:bodyPr>
+          <a:lstStyle/>
+          <a:p>
+            <a:pPr algn="l"/>
+            <a:r>
+              <a:rPr sz="2700" b="0">
+                <a:solidFill>
+                  <a:srgbClr val="E8E8DE"/>
+                </a:solidFill>
+                <a:latin typeface="Aptos Display"/>
+              </a:rPr>
+              <a:t>Design Principles</a:t>
+            </a:r>
+          </a:p>
+        </p:txBody>
+      </p:sp>
+      <p:sp>
+        <p:nvSpPr>
+          <p:cNvPr id="9" name="Rounded Rectangle 8"/>
+          <p:cNvSpPr/>
+          <p:nvPr/>
+        </p:nvSpPr>
+        <p:spPr>
+          <a:xfrm>
+            <a:off x="749808" y="1572768"/>
+            <a:ext cx="10561320" cy="4343400"/>
+          </a:xfrm>
+          <a:prstGeom prst="roundRect">
+            <a:avLst/>
+          </a:prstGeom>
+          <a:solidFill>
+            <a:srgbClr val="161A19"/>
+          </a:solidFill>
+          <a:ln>
+            <a:solidFill>
+              <a:srgbClr val="595F56"/>
+            </a:solidFill>
+          </a:ln>
+        </p:spPr>
+        <p:style>
+          <a:lnRef idx="1">
+            <a:schemeClr val="accent1"/>
+          </a:lnRef>
+          <a:fillRef idx="3">
+            <a:schemeClr val="accent1"/>
+          </a:fillRef>
+          <a:effectRef idx="2">
+            <a:schemeClr val="accent1"/>
+          </a:effectRef>
+          <a:fontRef idx="minor">
+            <a:schemeClr val="lt1"/>
+          </a:fontRef>
+        </p:style>
+        <p:txBody>
+          <a:bodyPr rtlCol="0" anchor="ctr"/>
+          <a:lstStyle/>
+          <a:p>
+            <a:pPr algn="ctr"/>
+          </a:p>
+        </p:txBody>
+      </p:sp>
+      <p:sp>
+        <p:nvSpPr>
+          <p:cNvPr id="10" name="Rectangle 9"/>
+          <p:cNvSpPr/>
+          <p:nvPr/>
+        </p:nvSpPr>
+        <p:spPr>
+          <a:xfrm>
+            <a:off x="749808" y="1572768"/>
+            <a:ext cx="10561320" cy="109728"/>
+          </a:xfrm>
+          <a:prstGeom prst="rect">
+            <a:avLst/>
+          </a:prstGeom>
+          <a:solidFill>
+            <a:srgbClr val="E0AB5D"/>
+          </a:solidFill>
+          <a:ln>
+            <a:noFill/>
+          </a:ln>
+        </p:spPr>
+        <p:style>
+          <a:lnRef idx="1">
+            <a:schemeClr val="accent1"/>
+          </a:lnRef>
+          <a:fillRef idx="3">
+            <a:schemeClr val="accent1"/>
+          </a:fillRef>
+          <a:effectRef idx="2">
+            <a:schemeClr val="accent1"/>
+          </a:effectRef>
+          <a:fontRef idx="minor">
+            <a:schemeClr val="lt1"/>
+          </a:fontRef>
+        </p:style>
+        <p:txBody>
+          <a:bodyPr rtlCol="0" anchor="ctr"/>
+          <a:lstStyle/>
+          <a:p>
+            <a:pPr algn="ctr"/>
+          </a:p>
+        </p:txBody>
+      </p:sp>
+      <p:sp>
+        <p:nvSpPr>
+          <p:cNvPr id="11" name="TextBox 10"/>
+          <p:cNvSpPr txBox="1"/>
+          <p:nvPr/>
+        </p:nvSpPr>
+        <p:spPr>
+          <a:xfrm>
+            <a:off x="950976" y="1773936"/>
+            <a:ext cx="10158984" cy="310896"/>
+          </a:xfrm>
+          <a:prstGeom prst="rect">
+            <a:avLst/>
+          </a:prstGeom>
+          <a:noFill/>
+        </p:spPr>
+        <p:txBody>
+          <a:bodyPr wrap="square" anchor="t">
+            <a:spAutoFit/>
+          </a:bodyPr>
+          <a:lstStyle/>
+          <a:p>
+            <a:pPr algn="l"/>
+            <a:r>
+              <a:rPr sz="1400" b="1">
+                <a:solidFill>
+                  <a:srgbClr val="E0AB5D"/>
+                </a:solidFill>
+                <a:latin typeface="Aptos"/>
+              </a:rPr>
+              <a:t>Core design choices</a:t>
+            </a:r>
+          </a:p>
+        </p:txBody>
+      </p:sp>
+      <p:sp>
+        <p:nvSpPr>
+          <p:cNvPr id="12" name="TextBox 11"/>
+          <p:cNvSpPr txBox="1"/>
+          <p:nvPr/>
+        </p:nvSpPr>
+        <p:spPr>
+          <a:xfrm>
+            <a:off x="950976" y="2231136"/>
+            <a:ext cx="10158984" cy="3538728"/>
+          </a:xfrm>
+          <a:prstGeom prst="rect">
+            <a:avLst/>
+          </a:prstGeom>
+          <a:noFill/>
+        </p:spPr>
+        <p:txBody>
+          <a:bodyPr wrap="square" anchor="t" lIns="38100" rIns="38100" tIns="25400" bIns="25400">
+            <a:noAutofit/>
+          </a:bodyPr>
+          <a:lstStyle/>
+          <a:p>
+            <a:pPr>
+              <a:spcAft>
+                <a:spcPts val="600"/>
+              </a:spcAft>
+              <a:defRPr sz="1600">
+                <a:solidFill>
+                  <a:srgbClr val="B4BAAE"/>
+                </a:solidFill>
+                <a:latin typeface="Aptos"/>
+              </a:defRPr>
+            </a:pPr>
+            <a:r>
+              <a:rPr sz="1600" b="0" i="0">
+                <a:latin typeface="Calibri"/>
+              </a:rPr>
+              <a:t>Evidence-first answers: Tlamatini grounds responses in selected project context and hybrid retrieval rather than freeform model memory.</a:t>
+            </a:r>
+            <a:endParaRPr sz="1600" b="0" i="0">
+              <a:latin typeface="Calibri"/>
+            </a:endParaRPr>
+          </a:p>
+          <a:p>
+            <a:pPr>
+              <a:spcAft>
+                <a:spcPts val="600"/>
+              </a:spcAft>
+              <a:defRPr sz="1600">
+                <a:solidFill>
+                  <a:srgbClr val="B4BAAE"/>
+                </a:solidFill>
+                <a:latin typeface="Aptos"/>
+              </a:defRPr>
+            </a:pPr>
+            <a:r>
+              <a:rPr sz="1600" b="0" i="0">
+                <a:latin typeface="Calibri"/>
+              </a:rPr>
+              <a:t>Explicit orchestration: checked Multi-Turn uses a visible tool loop, capability scoring, and staged planning instead of a single opaque call.</a:t>
+            </a:r>
+            <a:endParaRPr sz="1600" b="0" i="0">
+              <a:latin typeface="Calibri"/>
+            </a:endParaRPr>
+          </a:p>
+          <a:p>
+            <a:pPr>
+              <a:spcAft>
+                <a:spcPts val="600"/>
+              </a:spcAft>
+              <a:defRPr sz="1600">
+                <a:solidFill>
+                  <a:srgbClr val="B4BAAE"/>
+                </a:solidFill>
+                <a:latin typeface="Aptos"/>
+              </a:defRPr>
+            </a:pPr>
+            <a:r>
+              <a:rPr sz="1600" b="0" i="0">
+                <a:latin typeface="Calibri"/>
+              </a:rPr>
+              <a:t>Operational reversibility: risky changes such as database replacement are staged, archived, and delayed to the only safe window instead of hot-swapped mid-session.</a:t>
+            </a:r>
+            <a:endParaRPr sz="1600" b="0" i="0">
+              <a:latin typeface="Calibri"/>
+            </a:endParaRPr>
+          </a:p>
+          <a:p>
+            <a:pPr>
+              <a:spcAft>
+                <a:spcPts val="600"/>
+              </a:spcAft>
+              <a:defRPr sz="1600">
+                <a:solidFill>
+                  <a:srgbClr val="B4BAAE"/>
+                </a:solidFill>
+                <a:latin typeface="Aptos"/>
+              </a:defRPr>
+            </a:pPr>
+            <a:r>
+              <a:rPr sz="1600" b="0" i="0">
+                <a:latin typeface="Calibri"/>
+              </a:rPr>
+              <a:t>Fail-open diagnostics: GPU pressure probes and session-restore safeguards warn early without breaking CPU-only or degraded environments.</a:t>
+            </a:r>
+            <a:endParaRPr sz="1600" b="0" i="0">
+              <a:latin typeface="Calibri"/>
+            </a:endParaRPr>
+          </a:p>
+          <a:p>
+            <a:pPr>
+              <a:spcAft>
+                <a:spcPts val="600"/>
+              </a:spcAft>
+              <a:defRPr sz="1600">
+                <a:solidFill>
+                  <a:srgbClr val="B4BAAE"/>
+                </a:solidFill>
+                <a:latin typeface="Aptos"/>
+              </a:defRPr>
+            </a:pPr>
+            <a:r>
+              <a:rPr sz="1600" b="0" i="0">
+                <a:latin typeface="Calibri"/>
+              </a:rPr>
+              <a:t>Runtime isolation: wrapped chat-agent copies run in session-scoped folders so template agents remain pristine while live runs stay inspectable.</a:t>
+            </a:r>
+            <a:endParaRPr sz="1600" b="0" i="0">
+              <a:latin typeface="Calibri"/>
+            </a:endParaRPr>
+          </a:p>
+          <a:p>
+            <a:pPr>
+              <a:spcAft>
+                <a:spcPts val="600"/>
+              </a:spcAft>
+              <a:defRPr sz="1600">
+                <a:solidFill>
+                  <a:srgbClr val="B4BAAE"/>
+                </a:solidFill>
+                <a:latin typeface="Aptos"/>
+              </a:defRPr>
+            </a:pPr>
+            <a:r>
+              <a:rPr sz="1600" b="0" i="0">
+                <a:latin typeface="Calibri"/>
+              </a:rPr>
+              <a:t>Operator truth over vibes: Exec Report tables, tlamatini.log, skill audits, and ACPX transcripts make the system auditable after execution.</a:t>
+            </a:r>
+            <a:endParaRPr sz="1600" b="0" i="0">
+              <a:latin typeface="Calibri"/>
+            </a:endParaRPr>
+          </a:p>
+        </p:txBody>
+      </p:sp>
+    </p:spTree>
+  </p:cSld>
+  <p:clrMapOvr>
+    <a:masterClrMapping/>
+  </p:clrMapOvr>
+</p:sld>
+</file>
+
+<file path=ppt/slides/slide50.xml><?xml version="1.0" encoding="utf-8"?>
 <p:sld xmlns:a="http://schemas.openxmlformats.org/drawingml/2006/main" xmlns:p="http://schemas.openxmlformats.org/presentationml/2006/main" xmlns:r="http://schemas.openxmlformats.org/officeDocument/2006/relationships">
   <p:cSld>
     <p:spTree>
@@ -31220,7 +30572,7 @@
 </p:sld>
 </file>
 
-<file path=ppt/slides/slide52.xml><?xml version="1.0" encoding="utf-8"?>
+<file path=ppt/slides/slide51.xml><?xml version="1.0" encoding="utf-8"?>
 <p:sld xmlns:a="http://schemas.openxmlformats.org/drawingml/2006/main" xmlns:p="http://schemas.openxmlformats.org/presentationml/2006/main" xmlns:r="http://schemas.openxmlformats.org/officeDocument/2006/relationships">
   <p:cSld>
     <p:spTree>

--- a/Tlamatini_eXtended_Artificial_Intelligence_Humanly_Tempered.pptx
+++ b/Tlamatini_eXtended_Artificial_Intelligence_Humanly_Tempered.pptx
@@ -3834,7 +3834,7 @@
                 </a:solidFill>
                 <a:latin typeface="Aptos"/>
               </a:rPr>
-              <a:t>98,593</a:t>
+              <a:t>98,624</a:t>
             </a:r>
           </a:p>
         </p:txBody>
@@ -3869,7 +3869,7 @@
                 </a:solidFill>
                 <a:latin typeface="Aptos"/>
               </a:rPr>
-              <a:t>Generated May 17, 2026 07:27 PM UTC-0600 at HEAD b4d29c0</a:t>
+              <a:t>Generated May 18, 2026 12:52 AM UTC-0600 at HEAD 2c707e3</a:t>
             </a:r>
           </a:p>
         </p:txBody>
@@ -8954,7 +8954,7 @@
                 </a:solidFill>
                 <a:latin typeface="Cascadia Mono"/>
               </a:rPr>
-              <a:t>Resolved current version: 1.3.0 | build: 1.3.0</a:t>
+              <a:t>Resolved current version: 1.3.1 | build: 1.3.1</a:t>
             </a:r>
           </a:p>
         </p:txBody>
@@ -19120,7 +19120,7 @@
               <a:rPr sz="1500" b="0" i="0">
                 <a:latin typeface="Calibri"/>
               </a:rPr>
-              <a:t>b4d29c0 - Caping gaps in number and descriptions of agents in markdowns and monitoring_prompt, by angelahack1</a:t>
+              <a:t>2c707e3 - Patching Ruff availability all along Multi-turn execution., by angelahack1</a:t>
             </a:r>
             <a:endParaRPr sz="1500" b="0" i="0">
               <a:latin typeface="Calibri"/>
@@ -19142,7 +19142,7 @@
               <a:rPr sz="1500" b="0" i="0">
                 <a:latin typeface="Calibri"/>
               </a:rPr>
-              <a:t>Resolved version: 1.3.0 (git)</a:t>
+              <a:t>Resolved version: 1.3.1 (git)</a:t>
             </a:r>
             <a:endParaRPr sz="1500" b="0" i="0">
               <a:latin typeface="Calibri"/>
@@ -19164,7 +19164,7 @@
               <a:rPr sz="1500" b="0" i="0">
                 <a:latin typeface="Calibri"/>
               </a:rPr>
-              <a:t>Generated on May 17, 2026 07:27 PM UTC-0600</a:t>
+              <a:t>Generated on May 18, 2026 12:52 AM UTC-0600</a:t>
             </a:r>
             <a:endParaRPr sz="1500" b="0" i="0">
               <a:latin typeface="Calibri"/>
@@ -19629,7 +19629,7 @@
                 </a:solidFill>
                 <a:latin typeface="Aptos"/>
               </a:rPr>
-              <a:t>98,593</a:t>
+              <a:t>98,624</a:t>
             </a:r>
           </a:p>
         </p:txBody>
@@ -19744,7 +19744,7 @@
                 </a:solidFill>
                 <a:latin typeface="Aptos"/>
               </a:rPr>
-              <a:t>134,198</a:t>
+              <a:t>134,246</a:t>
             </a:r>
           </a:p>
         </p:txBody>
@@ -19895,7 +19895,7 @@
                 <a:latin typeface="Cascadia Mono"/>
               </a:rPr>
               <a:t>LANGUAGE                 FILES   EFFECTIVE      TOTAL   SHARE
-Python                   262      65,822     91,851  66.8%
+Python                   262      65,853     91,899  66.8%
 JavaScript                28      12,824     16,161  13.0%
 Markdown                  50      11,708     15,104  11.9%
 CSS                        6       3,338      4,183   3.4%
@@ -21254,7 +21254,7 @@
               <a:t>PATH                                                     LANGUAGE     EFFECTIVE   TOTAL
 Tlamatini/agent/views.py                                Python         6,917   9,972
 Tlamatini/agent/tests.py                                Python         4,034   5,153
-Tlamatini/agent/tools.py                                Python         2,201   3,094
+Tlamatini/agent/tools.py                                Python         2,201   3,097
 BookOfTlamatini.md                                      Markdown       1,884   2,654
 Tlamatini/agent/agents/flowcreator/agentic_skill.md     Markdown       1,825   2,031
 ...ini/agent/static/agent/css/agentic_control_panel.css CSS            1,653   2,187
@@ -21733,51 +21733,7 @@
               <a:rPr sz="1500" b="0" i="0">
                 <a:latin typeface="Calibri"/>
               </a:rPr>
-              <a:t>Today’s headline change is agent-catalog consistency: the live count, the markdown bestiaries, the flow-creator skill catalog, and the sidebar-description source were brought back into alignment around the same 62-agent inventory.</a:t>
-            </a:r>
-            <a:endParaRPr sz="1500" b="0" i="0">
-              <a:latin typeface="Calibri"/>
-            </a:endParaRPr>
-          </a:p>
-          <a:p>
-            <a:pPr>
-              <a:spcAft>
-                <a:spcPts val="600"/>
-              </a:spcAft>
-              <a:defRPr sz="1500">
-                <a:solidFill>
-                  <a:srgbClr val="B4BAAE"/>
-                </a:solidFill>
-                <a:latin typeface="Aptos"/>
-              </a:defRPr>
-            </a:pPr>
-            <a:r>
-              <a:rPr sz="1500" b="0" i="0">
-                <a:latin typeface="Calibri"/>
-              </a:rPr>
-              <a:t>Today’s headline change is Unreal MCP support: the new Unrealer agent, a chat-wrapped `chat_agent_unrealer` tool, canvas wiring, a seeded end-to-end demo prompt, and a direct TCP bridge into a live Unreal Engine 5 editor.</a:t>
-            </a:r>
-            <a:endParaRPr sz="1500" b="0" i="0">
-              <a:latin typeface="Calibri"/>
-            </a:endParaRPr>
-          </a:p>
-          <a:p>
-            <a:pPr>
-              <a:spcAft>
-                <a:spcPts val="600"/>
-              </a:spcAft>
-              <a:defRPr sz="1500">
-                <a:solidFill>
-                  <a:srgbClr val="B4BAAE"/>
-                </a:solidFill>
-                <a:latin typeface="Aptos"/>
-              </a:defRPr>
-            </a:pPr>
-            <a:r>
-              <a:rPr sz="1500" b="0" i="0">
-                <a:latin typeface="Calibri"/>
-              </a:rPr>
-              <a:t>ACPX-related work remained visible during the today: runtime, documentation, or operator-surface changes were still part of the active maintenance stream.</a:t>
+              <a:t>Multi-Turn behavior kept evolving across the period through quota tuning, execution-table persistence, autonomous-action improvements, and broader tool enablement.</a:t>
             </a:r>
             <a:endParaRPr sz="1500" b="0" i="0">
               <a:latin typeface="Calibri"/>
@@ -22248,117 +22204,7 @@
               <a:rPr sz="1200" b="0" i="0">
                 <a:latin typeface="Calibri"/>
               </a:rPr>
-              <a:t>2026-05-17 | b4d29c0 | Caping gaps in number and descriptions of agents in markdowns and monitoring_prompt, by angelahack1</a:t>
-            </a:r>
-            <a:endParaRPr sz="1200" b="0" i="0">
-              <a:latin typeface="Calibri"/>
-            </a:endParaRPr>
-          </a:p>
-          <a:p>
-            <a:pPr>
-              <a:spcAft>
-                <a:spcPts val="600"/>
-              </a:spcAft>
-              <a:defRPr sz="1200">
-                <a:solidFill>
-                  <a:srgbClr val="B4BAAE"/>
-                </a:solidFill>
-                <a:latin typeface="Aptos"/>
-              </a:defRPr>
-            </a:pPr>
-            <a:r>
-              <a:rPr sz="1200" b="0" i="0">
-                <a:latin typeface="Calibri"/>
-              </a:rPr>
-              <a:t>2026-05-17 | 221d20f | Caping gaps in number and descriptions of agents in agentic_skill.md, by angelahack1</a:t>
-            </a:r>
-            <a:endParaRPr sz="1200" b="0" i="0">
-              <a:latin typeface="Calibri"/>
-            </a:endParaRPr>
-          </a:p>
-          <a:p>
-            <a:pPr>
-              <a:spcAft>
-                <a:spcPts val="600"/>
-              </a:spcAft>
-              <a:defRPr sz="1200">
-                <a:solidFill>
-                  <a:srgbClr val="B4BAAE"/>
-                </a:solidFill>
-                <a:latin typeface="Aptos"/>
-              </a:defRPr>
-            </a:pPr>
-            <a:r>
-              <a:rPr sz="1200" b="0" i="0">
-                <a:latin typeface="Calibri"/>
-              </a:rPr>
-              <a:t>2026-05-17 | 27dd4d5 | Caping gaps in number and descriptions of agents, by angelahack1</a:t>
-            </a:r>
-            <a:endParaRPr sz="1200" b="0" i="0">
-              <a:latin typeface="Calibri"/>
-            </a:endParaRPr>
-          </a:p>
-          <a:p>
-            <a:pPr>
-              <a:spcAft>
-                <a:spcPts val="600"/>
-              </a:spcAft>
-              <a:defRPr sz="1200">
-                <a:solidFill>
-                  <a:srgbClr val="B4BAAE"/>
-                </a:solidFill>
-                <a:latin typeface="Aptos"/>
-              </a:defRPr>
-            </a:pPr>
-            <a:r>
-              <a:rPr sz="1200" b="0" i="0">
-                <a:latin typeface="Calibri"/>
-              </a:rPr>
-              <a:t>2026-05-17 | 05060c3 | Implementing configuration menu entry of ACPX-Skills, by angelahack1</a:t>
-            </a:r>
-            <a:endParaRPr sz="1200" b="0" i="0">
-              <a:latin typeface="Calibri"/>
-            </a:endParaRPr>
-          </a:p>
-          <a:p>
-            <a:pPr>
-              <a:spcAft>
-                <a:spcPts val="600"/>
-              </a:spcAft>
-              <a:defRPr sz="1200">
-                <a:solidFill>
-                  <a:srgbClr val="B4BAAE"/>
-                </a:solidFill>
-                <a:latin typeface="Aptos"/>
-              </a:defRPr>
-            </a:pPr>
-            <a:r>
-              <a:rPr sz="1200" b="0" i="0">
-                <a:latin typeface="Calibri"/>
-              </a:rPr>
-              <a:t>2026-05-17 | 6be0102 | Some improvements in Unrealer agent in sending commands and normalization, by angelahack1</a:t>
-            </a:r>
-            <a:endParaRPr sz="1200" b="0" i="0">
-              <a:latin typeface="Calibri"/>
-            </a:endParaRPr>
-          </a:p>
-          <a:p>
-            <a:pPr>
-              <a:spcAft>
-                <a:spcPts val="600"/>
-              </a:spcAft>
-              <a:defRPr sz="1200">
-                <a:solidFill>
-                  <a:srgbClr val="B4BAAE"/>
-                </a:solidFill>
-                <a:latin typeface="Aptos"/>
-              </a:defRPr>
-            </a:pPr>
-            <a:r>
-              <a:rPr sz="1200" b="0" i="0">
-                <a:latin typeface="Calibri"/>
-              </a:rPr>
-              <a:t>2026-05-17 | f39104f | Just a fix into Unrealer yaml, by angelahack1</a:t>
+              <a:t>2026-05-18 | 2c707e3 | Patching Ruff availability all along Multi-turn execution., by angelahack1</a:t>
             </a:r>
             <a:endParaRPr sz="1200" b="0" i="0">
               <a:latin typeface="Calibri"/>

--- a/Tlamatini_eXtended_Artificial_Intelligence_Humanly_Tempered.pptx
+++ b/Tlamatini_eXtended_Artificial_Intelligence_Humanly_Tempered.pptx
@@ -63,8 +63,6 @@
     <p:sldId id="311" r:id="rId62"/>
     <p:sldId id="312" r:id="rId63"/>
     <p:sldId id="313" r:id="rId64"/>
-    <p:sldId id="314" r:id="rId65"/>
-    <p:sldId id="315" r:id="rId66"/>
   </p:sldIdLst>
   <p:sldSz cx="12191695" cy="6858000" type="screen4x3"/>
   <p:notesSz cx="6858000" cy="9144000"/>
@@ -3877,7 +3875,7 @@
                 </a:solidFill>
                 <a:latin typeface="Aptos"/>
               </a:rPr>
-              <a:t>Generated May 20, 2026 10:17 PM UTC-0600 at HEAD cc7b917</a:t>
+              <a:t>Generated May 21, 2026 07:59 AM UTC-0600 at HEAD 172df1e</a:t>
             </a:r>
           </a:p>
         </p:txBody>
@@ -24561,7 +24559,7 @@
               <a:rPr sz="1500" b="0" i="0">
                 <a:latin typeface="Calibri"/>
               </a:rPr>
-              <a:t>cc7b917 - Add Playwrighter agent (#65): scripted Playwright browser automation for canvas + Multi-Turn (v1.5.0)</a:t>
+              <a:t>172df1e - Bump version-string surfaces to 1.5.0 (badge + release/runtime examples)</a:t>
             </a:r>
             <a:endParaRPr sz="1500" b="0" i="0">
               <a:latin typeface="Calibri"/>
@@ -24605,7 +24603,7 @@
               <a:rPr sz="1500" b="0" i="0">
                 <a:latin typeface="Calibri"/>
               </a:rPr>
-              <a:t>Generated on May 20, 2026 10:17 PM UTC-0600</a:t>
+              <a:t>Generated on May 21, 2026 07:59 AM UTC-0600</a:t>
             </a:r>
             <a:endParaRPr sz="1500" b="0" i="0">
               <a:latin typeface="Calibri"/>
@@ -26169,161 +26167,7 @@
               <a:rPr sz="1500" b="0" i="0">
                 <a:latin typeface="Calibri"/>
               </a:rPr>
-              <a:t>Today’s headline change is the new Playwrighter agent in `v1.5.0`: Tlamatini now adds its 65th workflow agent and a real-browser automation surface for scripted Playwright flows from both Multi-Turn chat and the visual canvas.</a:t>
-            </a:r>
-            <a:endParaRPr sz="1500" b="0" i="0">
-              <a:latin typeface="Calibri"/>
-            </a:endParaRPr>
-          </a:p>
-          <a:p>
-            <a:pPr>
-              <a:spcAft>
-                <a:spcPts val="600"/>
-              </a:spcAft>
-              <a:defRPr sz="1500">
-                <a:solidFill>
-                  <a:srgbClr val="B4BAAE"/>
-                </a:solidFill>
-                <a:latin typeface="Aptos"/>
-              </a:defRPr>
-            </a:pPr>
-            <a:r>
-              <a:rPr sz="1500" b="0" i="0">
-                <a:latin typeface="Calibri"/>
-              </a:rPr>
-              <a:t>The immediately previous stability pass is still visible in Git too: Tkinter was removed from the unstable runtime-facing dialog path in favor of native Windows dialog helpers, reducing UI instability around file and folder picking while keeping the browser/operator flow intact.</a:t>
-            </a:r>
-            <a:endParaRPr sz="1500" b="0" i="0">
-              <a:latin typeface="Calibri"/>
-            </a:endParaRPr>
-          </a:p>
-          <a:p>
-            <a:pPr>
-              <a:spcAft>
-                <a:spcPts val="600"/>
-              </a:spcAft>
-              <a:defRPr sz="1500">
-                <a:solidFill>
-                  <a:srgbClr val="B4BAAE"/>
-                </a:solidFill>
-                <a:latin typeface="Aptos"/>
-              </a:defRPr>
-            </a:pPr>
-            <a:r>
-              <a:rPr sz="1500" b="0" i="0">
-                <a:latin typeface="Calibri"/>
-              </a:rPr>
-              <a:t>Reporting-table layout was also tightened during the same window, improving readability of generated execution/reporting surfaces without changing the underlying operational data.</a:t>
-            </a:r>
-            <a:endParaRPr sz="1500" b="0" i="0">
-              <a:latin typeface="Calibri"/>
-            </a:endParaRPr>
-          </a:p>
-          <a:p>
-            <a:pPr>
-              <a:spcAft>
-                <a:spcPts val="600"/>
-              </a:spcAft>
-              <a:defRPr sz="1500">
-                <a:solidFill>
-                  <a:srgbClr val="B4BAAE"/>
-                </a:solidFill>
-                <a:latin typeface="Aptos"/>
-              </a:defRPr>
-            </a:pPr>
-            <a:r>
-              <a:rPr sz="1500" b="0" i="0">
-                <a:latin typeface="Calibri"/>
-              </a:rPr>
-              <a:t>Today’s reviewer follow-up is a behavioral-accuracy patch: the review prompt now distinguishes uncommitted working-tree diffs from committed history and teaches the model Tlamatini’s managed-secret scrub convention, reducing false positives around local credentials in config files.</a:t>
-            </a:r>
-            <a:endParaRPr sz="1500" b="0" i="0">
-              <a:latin typeface="Calibri"/>
-            </a:endParaRPr>
-          </a:p>
-          <a:p>
-            <a:pPr>
-              <a:spcAft>
-                <a:spcPts val="600"/>
-              </a:spcAft>
-              <a:defRPr sz="1500">
-                <a:solidFill>
-                  <a:srgbClr val="B4BAAE"/>
-                </a:solidFill>
-                <a:latin typeface="Aptos"/>
-              </a:defRPr>
-            </a:pPr>
-            <a:r>
-              <a:rPr sz="1500" b="0" i="0">
-                <a:latin typeface="Calibri"/>
-              </a:rPr>
-              <a:t>Today’s headline change is the new Reviewer and Analyzer surfaces: the workflow-agent catalog now reaches 64 templates, the seed-skill catalog reaches 23 packages, and code review plus deterministic security scanning are now available from both the canvas and the skill layer.</a:t>
-            </a:r>
-            <a:endParaRPr sz="1500" b="0" i="0">
-              <a:latin typeface="Calibri"/>
-            </a:endParaRPr>
-          </a:p>
-          <a:p>
-            <a:pPr>
-              <a:spcAft>
-                <a:spcPts val="600"/>
-              </a:spcAft>
-              <a:defRPr sz="1500">
-                <a:solidFill>
-                  <a:srgbClr val="B4BAAE"/>
-                </a:solidFill>
-                <a:latin typeface="Aptos"/>
-              </a:defRPr>
-            </a:pPr>
-            <a:r>
-              <a:rPr sz="1500" b="0" i="0">
-                <a:latin typeface="Calibri"/>
-              </a:rPr>
-              <a:t>Today’s headline change is the new versioning system: SemVer policy, git-tag sourcing, runtime version surfaces, and build-time embedding across the Windows artefacts.</a:t>
-            </a:r>
-            <a:endParaRPr sz="1500" b="0" i="0">
-              <a:latin typeface="Calibri"/>
-            </a:endParaRPr>
-          </a:p>
-          <a:p>
-            <a:pPr>
-              <a:spcAft>
-                <a:spcPts val="600"/>
-              </a:spcAft>
-              <a:defRPr sz="1500">
-                <a:solidFill>
-                  <a:srgbClr val="B4BAAE"/>
-                </a:solidFill>
-                <a:latin typeface="Aptos"/>
-              </a:defRPr>
-            </a:pPr>
-            <a:r>
-              <a:rPr sz="1500" b="0" i="0">
-                <a:latin typeface="Calibri"/>
-              </a:rPr>
-              <a:t>Multi-Turn behavior kept evolving across the period through quota tuning, execution-table persistence, autonomous-action improvements, and broader tool enablement.</a:t>
-            </a:r>
-            <a:endParaRPr sz="1500" b="0" i="0">
-              <a:latin typeface="Calibri"/>
-            </a:endParaRPr>
-          </a:p>
-          <a:p>
-            <a:pPr>
-              <a:spcAft>
-                <a:spcPts val="600"/>
-              </a:spcAft>
-              <a:defRPr sz="1500">
-                <a:solidFill>
-                  <a:srgbClr val="B4BAAE"/>
-                </a:solidFill>
-                <a:latin typeface="Aptos"/>
-              </a:defRPr>
-            </a:pPr>
-            <a:r>
-              <a:rPr sz="1500" b="0" i="0">
-                <a:latin typeface="Calibri"/>
-              </a:rPr>
-              <a:t>Documentation itself changed today, so the regenerated dossier is part of the tracked operator surface rather than an external afterthought.</a:t>
+              <a:t>Git history today shows focused maintenance across the operator surface, release mechanics, and runtime behavior.</a:t>
             </a:r>
             <a:endParaRPr sz="1500" b="0" i="0">
               <a:latin typeface="Calibri"/>
@@ -26340,2682 +26184,6 @@
 </file>
 
 <file path=ppt/slides/slide38.xml><?xml version="1.0" encoding="utf-8"?>
-<p:sld xmlns:a="http://schemas.openxmlformats.org/drawingml/2006/main" xmlns:p="http://schemas.openxmlformats.org/presentationml/2006/main" xmlns:r="http://schemas.openxmlformats.org/officeDocument/2006/relationships">
-  <p:cSld>
-    <p:spTree>
-      <p:nvGrpSpPr>
-        <p:cNvPr id="1" name=""/>
-        <p:cNvGrpSpPr/>
-        <p:nvPr/>
-      </p:nvGrpSpPr>
-      <p:grpSpPr/>
-      <p:sp>
-        <p:nvSpPr>
-          <p:cNvPr id="2" name="Rectangle 1"/>
-          <p:cNvSpPr/>
-          <p:nvPr/>
-        </p:nvSpPr>
-        <p:spPr>
-          <a:xfrm>
-            <a:off x="0" y="0"/>
-            <a:ext cx="12191695" cy="6858000"/>
-          </a:xfrm>
-          <a:prstGeom prst="rect">
-            <a:avLst/>
-          </a:prstGeom>
-          <a:solidFill>
-            <a:srgbClr val="080D0D"/>
-          </a:solidFill>
-          <a:ln>
-            <a:noFill/>
-          </a:ln>
-        </p:spPr>
-        <p:style>
-          <a:lnRef idx="1">
-            <a:schemeClr val="accent1"/>
-          </a:lnRef>
-          <a:fillRef idx="3">
-            <a:schemeClr val="accent1"/>
-          </a:fillRef>
-          <a:effectRef idx="2">
-            <a:schemeClr val="accent1"/>
-          </a:effectRef>
-          <a:fontRef idx="minor">
-            <a:schemeClr val="lt1"/>
-          </a:fontRef>
-        </p:style>
-        <p:txBody>
-          <a:bodyPr rtlCol="0" anchor="ctr"/>
-          <a:lstStyle/>
-          <a:p>
-            <a:pPr algn="ctr"/>
-          </a:p>
-        </p:txBody>
-      </p:sp>
-      <p:sp>
-        <p:nvSpPr>
-          <p:cNvPr id="3" name="Rectangle 2"/>
-          <p:cNvSpPr/>
-          <p:nvPr/>
-        </p:nvSpPr>
-        <p:spPr>
-          <a:xfrm>
-            <a:off x="320040" y="384048"/>
-            <a:ext cx="36576" cy="6080760"/>
-          </a:xfrm>
-          <a:prstGeom prst="rect">
-            <a:avLst/>
-          </a:prstGeom>
-          <a:solidFill>
-            <a:srgbClr val="C48052"/>
-          </a:solidFill>
-          <a:ln>
-            <a:noFill/>
-          </a:ln>
-        </p:spPr>
-        <p:style>
-          <a:lnRef idx="1">
-            <a:schemeClr val="accent1"/>
-          </a:lnRef>
-          <a:fillRef idx="3">
-            <a:schemeClr val="accent1"/>
-          </a:fillRef>
-          <a:effectRef idx="2">
-            <a:schemeClr val="accent1"/>
-          </a:effectRef>
-          <a:fontRef idx="minor">
-            <a:schemeClr val="lt1"/>
-          </a:fontRef>
-        </p:style>
-        <p:txBody>
-          <a:bodyPr rtlCol="0" anchor="ctr"/>
-          <a:lstStyle/>
-          <a:p>
-            <a:pPr algn="ctr"/>
-          </a:p>
-        </p:txBody>
-      </p:sp>
-      <p:sp>
-        <p:nvSpPr>
-          <p:cNvPr id="4" name="Rectangle 3"/>
-          <p:cNvSpPr/>
-          <p:nvPr/>
-        </p:nvSpPr>
-        <p:spPr>
-          <a:xfrm>
-            <a:off x="11716207" y="384048"/>
-            <a:ext cx="36576" cy="6080760"/>
-          </a:xfrm>
-          <a:prstGeom prst="rect">
-            <a:avLst/>
-          </a:prstGeom>
-          <a:solidFill>
-            <a:srgbClr val="C48052"/>
-          </a:solidFill>
-          <a:ln>
-            <a:noFill/>
-          </a:ln>
-        </p:spPr>
-        <p:style>
-          <a:lnRef idx="1">
-            <a:schemeClr val="accent1"/>
-          </a:lnRef>
-          <a:fillRef idx="3">
-            <a:schemeClr val="accent1"/>
-          </a:fillRef>
-          <a:effectRef idx="2">
-            <a:schemeClr val="accent1"/>
-          </a:effectRef>
-          <a:fontRef idx="minor">
-            <a:schemeClr val="lt1"/>
-          </a:fontRef>
-        </p:style>
-        <p:txBody>
-          <a:bodyPr rtlCol="0" anchor="ctr"/>
-          <a:lstStyle/>
-          <a:p>
-            <a:pPr algn="ctr"/>
-          </a:p>
-        </p:txBody>
-      </p:sp>
-      <p:sp>
-        <p:nvSpPr>
-          <p:cNvPr id="5" name="Rectangle 4"/>
-          <p:cNvSpPr/>
-          <p:nvPr/>
-        </p:nvSpPr>
-        <p:spPr>
-          <a:xfrm>
-            <a:off x="502920" y="384048"/>
-            <a:ext cx="11155680" cy="27432"/>
-          </a:xfrm>
-          <a:prstGeom prst="rect">
-            <a:avLst/>
-          </a:prstGeom>
-          <a:solidFill>
-            <a:srgbClr val="C48052"/>
-          </a:solidFill>
-          <a:ln>
-            <a:noFill/>
-          </a:ln>
-        </p:spPr>
-        <p:style>
-          <a:lnRef idx="1">
-            <a:schemeClr val="accent1"/>
-          </a:lnRef>
-          <a:fillRef idx="3">
-            <a:schemeClr val="accent1"/>
-          </a:fillRef>
-          <a:effectRef idx="2">
-            <a:schemeClr val="accent1"/>
-          </a:effectRef>
-          <a:fontRef idx="minor">
-            <a:schemeClr val="lt1"/>
-          </a:fontRef>
-        </p:style>
-        <p:txBody>
-          <a:bodyPr rtlCol="0" anchor="ctr"/>
-          <a:lstStyle/>
-          <a:p>
-            <a:pPr algn="ctr"/>
-          </a:p>
-        </p:txBody>
-      </p:sp>
-      <p:sp>
-        <p:nvSpPr>
-          <p:cNvPr id="6" name="Rectangle 5"/>
-          <p:cNvSpPr/>
-          <p:nvPr/>
-        </p:nvSpPr>
-        <p:spPr>
-          <a:xfrm>
-            <a:off x="502920" y="6437376"/>
-            <a:ext cx="11155680" cy="27432"/>
-          </a:xfrm>
-          <a:prstGeom prst="rect">
-            <a:avLst/>
-          </a:prstGeom>
-          <a:solidFill>
-            <a:srgbClr val="C48052"/>
-          </a:solidFill>
-          <a:ln>
-            <a:noFill/>
-          </a:ln>
-        </p:spPr>
-        <p:style>
-          <a:lnRef idx="1">
-            <a:schemeClr val="accent1"/>
-          </a:lnRef>
-          <a:fillRef idx="3">
-            <a:schemeClr val="accent1"/>
-          </a:fillRef>
-          <a:effectRef idx="2">
-            <a:schemeClr val="accent1"/>
-          </a:effectRef>
-          <a:fontRef idx="minor">
-            <a:schemeClr val="lt1"/>
-          </a:fontRef>
-        </p:style>
-        <p:txBody>
-          <a:bodyPr rtlCol="0" anchor="ctr"/>
-          <a:lstStyle/>
-          <a:p>
-            <a:pPr algn="ctr"/>
-          </a:p>
-        </p:txBody>
-      </p:sp>
-      <p:sp>
-        <p:nvSpPr>
-          <p:cNvPr id="7" name="TextBox 6"/>
-          <p:cNvSpPr txBox="1"/>
-          <p:nvPr/>
-        </p:nvSpPr>
-        <p:spPr>
-          <a:xfrm>
-            <a:off x="713232" y="548640"/>
-            <a:ext cx="10698480" cy="301752"/>
-          </a:xfrm>
-          <a:prstGeom prst="rect">
-            <a:avLst/>
-          </a:prstGeom>
-          <a:noFill/>
-        </p:spPr>
-        <p:txBody>
-          <a:bodyPr wrap="square" anchor="t">
-            <a:spAutoFit/>
-          </a:bodyPr>
-          <a:lstStyle/>
-          <a:p>
-            <a:pPr algn="l"/>
-            <a:r>
-              <a:rPr sz="1000" b="1">
-                <a:solidFill>
-                  <a:srgbClr val="C48052"/>
-                </a:solidFill>
-                <a:latin typeface="Aptos"/>
-              </a:rPr>
-              <a:t>ALL COMMITS FROM TODAY ACCORDING TO GIT</a:t>
-            </a:r>
-          </a:p>
-        </p:txBody>
-      </p:sp>
-      <p:sp>
-        <p:nvSpPr>
-          <p:cNvPr id="8" name="TextBox 7"/>
-          <p:cNvSpPr txBox="1"/>
-          <p:nvPr/>
-        </p:nvSpPr>
-        <p:spPr>
-          <a:xfrm>
-            <a:off x="694944" y="850392"/>
-            <a:ext cx="10881360" cy="566928"/>
-          </a:xfrm>
-          <a:prstGeom prst="rect">
-            <a:avLst/>
-          </a:prstGeom>
-          <a:noFill/>
-        </p:spPr>
-        <p:txBody>
-          <a:bodyPr wrap="square" anchor="t">
-            <a:spAutoFit/>
-          </a:bodyPr>
-          <a:lstStyle/>
-          <a:p>
-            <a:pPr algn="l"/>
-            <a:r>
-              <a:rPr sz="2700" b="0">
-                <a:solidFill>
-                  <a:srgbClr val="E8E8DE"/>
-                </a:solidFill>
-                <a:latin typeface="Aptos Display"/>
-              </a:rPr>
-              <a:t>Today's Commit Appendix 1/2</a:t>
-            </a:r>
-          </a:p>
-        </p:txBody>
-      </p:sp>
-      <p:sp>
-        <p:nvSpPr>
-          <p:cNvPr id="9" name="Rounded Rectangle 8"/>
-          <p:cNvSpPr/>
-          <p:nvPr/>
-        </p:nvSpPr>
-        <p:spPr>
-          <a:xfrm>
-            <a:off x="749808" y="1536192"/>
-            <a:ext cx="10561320" cy="4443984"/>
-          </a:xfrm>
-          <a:prstGeom prst="roundRect">
-            <a:avLst/>
-          </a:prstGeom>
-          <a:solidFill>
-            <a:srgbClr val="161A19"/>
-          </a:solidFill>
-          <a:ln>
-            <a:solidFill>
-              <a:srgbClr val="595F56"/>
-            </a:solidFill>
-          </a:ln>
-        </p:spPr>
-        <p:style>
-          <a:lnRef idx="1">
-            <a:schemeClr val="accent1"/>
-          </a:lnRef>
-          <a:fillRef idx="3">
-            <a:schemeClr val="accent1"/>
-          </a:fillRef>
-          <a:effectRef idx="2">
-            <a:schemeClr val="accent1"/>
-          </a:effectRef>
-          <a:fontRef idx="minor">
-            <a:schemeClr val="lt1"/>
-          </a:fontRef>
-        </p:style>
-        <p:txBody>
-          <a:bodyPr rtlCol="0" anchor="ctr"/>
-          <a:lstStyle/>
-          <a:p>
-            <a:pPr algn="ctr"/>
-          </a:p>
-        </p:txBody>
-      </p:sp>
-      <p:sp>
-        <p:nvSpPr>
-          <p:cNvPr id="10" name="Rectangle 9"/>
-          <p:cNvSpPr/>
-          <p:nvPr/>
-        </p:nvSpPr>
-        <p:spPr>
-          <a:xfrm>
-            <a:off x="749808" y="1536192"/>
-            <a:ext cx="10561320" cy="109728"/>
-          </a:xfrm>
-          <a:prstGeom prst="rect">
-            <a:avLst/>
-          </a:prstGeom>
-          <a:solidFill>
-            <a:srgbClr val="C48052"/>
-          </a:solidFill>
-          <a:ln>
-            <a:noFill/>
-          </a:ln>
-        </p:spPr>
-        <p:style>
-          <a:lnRef idx="1">
-            <a:schemeClr val="accent1"/>
-          </a:lnRef>
-          <a:fillRef idx="3">
-            <a:schemeClr val="accent1"/>
-          </a:fillRef>
-          <a:effectRef idx="2">
-            <a:schemeClr val="accent1"/>
-          </a:effectRef>
-          <a:fontRef idx="minor">
-            <a:schemeClr val="lt1"/>
-          </a:fontRef>
-        </p:style>
-        <p:txBody>
-          <a:bodyPr rtlCol="0" anchor="ctr"/>
-          <a:lstStyle/>
-          <a:p>
-            <a:pPr algn="ctr"/>
-          </a:p>
-        </p:txBody>
-      </p:sp>
-      <p:sp>
-        <p:nvSpPr>
-          <p:cNvPr id="11" name="TextBox 10"/>
-          <p:cNvSpPr txBox="1"/>
-          <p:nvPr/>
-        </p:nvSpPr>
-        <p:spPr>
-          <a:xfrm>
-            <a:off x="950976" y="1737360"/>
-            <a:ext cx="10158984" cy="310896"/>
-          </a:xfrm>
-          <a:prstGeom prst="rect">
-            <a:avLst/>
-          </a:prstGeom>
-          <a:noFill/>
-        </p:spPr>
-        <p:txBody>
-          <a:bodyPr wrap="square" anchor="t">
-            <a:spAutoFit/>
-          </a:bodyPr>
-          <a:lstStyle/>
-          <a:p>
-            <a:pPr algn="l"/>
-            <a:r>
-              <a:rPr sz="1400" b="1">
-                <a:solidFill>
-                  <a:srgbClr val="C48052"/>
-                </a:solidFill>
-                <a:latin typeface="Aptos"/>
-              </a:rPr>
-              <a:t>Commit timeline</a:t>
-            </a:r>
-          </a:p>
-        </p:txBody>
-      </p:sp>
-      <p:sp>
-        <p:nvSpPr>
-          <p:cNvPr id="12" name="TextBox 11"/>
-          <p:cNvSpPr txBox="1"/>
-          <p:nvPr/>
-        </p:nvSpPr>
-        <p:spPr>
-          <a:xfrm>
-            <a:off x="950976" y="2194560"/>
-            <a:ext cx="10158984" cy="3639312"/>
-          </a:xfrm>
-          <a:prstGeom prst="rect">
-            <a:avLst/>
-          </a:prstGeom>
-          <a:noFill/>
-        </p:spPr>
-        <p:txBody>
-          <a:bodyPr wrap="square" anchor="t" lIns="38100" rIns="38100" tIns="25400" bIns="25400">
-            <a:noAutofit/>
-          </a:bodyPr>
-          <a:lstStyle/>
-          <a:p>
-            <a:pPr>
-              <a:spcAft>
-                <a:spcPts val="600"/>
-              </a:spcAft>
-              <a:defRPr sz="1200">
-                <a:solidFill>
-                  <a:srgbClr val="B4BAAE"/>
-                </a:solidFill>
-                <a:latin typeface="Aptos"/>
-              </a:defRPr>
-            </a:pPr>
-            <a:r>
-              <a:rPr sz="1200" b="0" i="0">
-                <a:latin typeface="Calibri"/>
-              </a:rPr>
-              <a:t>2026-05-20 | cc7b917 | Add Playwrighter agent (#65): scripted Playwright browser automation for canvas + Multi-Turn (v1.5.0)</a:t>
-            </a:r>
-            <a:endParaRPr sz="1200" b="0" i="0">
-              <a:latin typeface="Calibri"/>
-            </a:endParaRPr>
-          </a:p>
-          <a:p>
-            <a:pPr>
-              <a:spcAft>
-                <a:spcPts val="600"/>
-              </a:spcAft>
-              <a:defRPr sz="1200">
-                <a:solidFill>
-                  <a:srgbClr val="B4BAAE"/>
-                </a:solidFill>
-                <a:latin typeface="Aptos"/>
-              </a:defRPr>
-            </a:pPr>
-            <a:r>
-              <a:rPr sz="1200" b="0" i="0">
-                <a:latin typeface="Calibri"/>
-              </a:rPr>
-              <a:t>2026-05-20 | 303d467 | Enhance the interpretation of images avoiding the throw of windows showing them, by angelahack1</a:t>
-            </a:r>
-            <a:endParaRPr sz="1200" b="0" i="0">
-              <a:latin typeface="Calibri"/>
-            </a:endParaRPr>
-          </a:p>
-          <a:p>
-            <a:pPr>
-              <a:spcAft>
-                <a:spcPts val="600"/>
-              </a:spcAft>
-              <a:defRPr sz="1200">
-                <a:solidFill>
-                  <a:srgbClr val="B4BAAE"/>
-                </a:solidFill>
-                <a:latin typeface="Aptos"/>
-              </a:defRPr>
-            </a:pPr>
-            <a:r>
-              <a:rPr sz="1200" b="0" i="0">
-                <a:latin typeface="Calibri"/>
-              </a:rPr>
-              <a:t>2026-05-20 | 9636335 | Update complete_project_docs.y and visual assets  by Codex to 1.4.2 version, by Tlamatini's-AutoBot.</a:t>
-            </a:r>
-            <a:endParaRPr sz="1200" b="0" i="0">
-              <a:latin typeface="Calibri"/>
-            </a:endParaRPr>
-          </a:p>
-          <a:p>
-            <a:pPr>
-              <a:spcAft>
-                <a:spcPts val="600"/>
-              </a:spcAft>
-              <a:defRPr sz="1200">
-                <a:solidFill>
-                  <a:srgbClr val="B4BAAE"/>
-                </a:solidFill>
-                <a:latin typeface="Aptos"/>
-              </a:defRPr>
-            </a:pPr>
-            <a:r>
-              <a:rPr sz="1200" b="0" i="0">
-                <a:latin typeface="Calibri"/>
-              </a:rPr>
-              <a:t>2026-05-20 | 7fc048d | Update assets to 1.4.2 version, by Tlamatini's-AutoBot.</a:t>
-            </a:r>
-            <a:endParaRPr sz="1200" b="0" i="0">
-              <a:latin typeface="Calibri"/>
-            </a:endParaRPr>
-          </a:p>
-          <a:p>
-            <a:pPr>
-              <a:spcAft>
-                <a:spcPts val="600"/>
-              </a:spcAft>
-              <a:defRPr sz="1200">
-                <a:solidFill>
-                  <a:srgbClr val="B4BAAE"/>
-                </a:solidFill>
-                <a:latin typeface="Aptos"/>
-              </a:defRPr>
-            </a:pPr>
-            <a:r>
-              <a:rPr sz="1200" b="0" i="0">
-                <a:latin typeface="Calibri"/>
-              </a:rPr>
-              <a:t>2026-05-20 | f27b119 | Getting rid of Tkinter 'cause makes the systems turn unstable, byt Tlamatini's-AutoBot.,</a:t>
-            </a:r>
-            <a:endParaRPr sz="1200" b="0" i="0">
-              <a:latin typeface="Calibri"/>
-            </a:endParaRPr>
-          </a:p>
-          <a:p>
-            <a:pPr>
-              <a:spcAft>
-                <a:spcPts val="600"/>
-              </a:spcAft>
-              <a:defRPr sz="1200">
-                <a:solidFill>
-                  <a:srgbClr val="B4BAAE"/>
-                </a:solidFill>
-                <a:latin typeface="Aptos"/>
-              </a:defRPr>
-            </a:pPr>
-            <a:r>
-              <a:rPr sz="1200" b="0" i="0">
-                <a:latin typeface="Calibri"/>
-              </a:rPr>
-              <a:t>2026-05-20 | 2c7a706 | Updating just the header of README.md, by Tlamatini's-AutoBot.</a:t>
-            </a:r>
-            <a:endParaRPr sz="1200" b="0" i="0">
-              <a:latin typeface="Calibri"/>
-            </a:endParaRPr>
-          </a:p>
-        </p:txBody>
-      </p:sp>
-    </p:spTree>
-  </p:cSld>
-  <p:clrMapOvr>
-    <a:masterClrMapping/>
-  </p:clrMapOvr>
-</p:sld>
-</file>
-
-<file path=ppt/slides/slide39.xml><?xml version="1.0" encoding="utf-8"?>
-<p:sld xmlns:a="http://schemas.openxmlformats.org/drawingml/2006/main" xmlns:p="http://schemas.openxmlformats.org/presentationml/2006/main" xmlns:r="http://schemas.openxmlformats.org/officeDocument/2006/relationships">
-  <p:cSld>
-    <p:spTree>
-      <p:nvGrpSpPr>
-        <p:cNvPr id="1" name=""/>
-        <p:cNvGrpSpPr/>
-        <p:nvPr/>
-      </p:nvGrpSpPr>
-      <p:grpSpPr/>
-      <p:sp>
-        <p:nvSpPr>
-          <p:cNvPr id="2" name="Rectangle 1"/>
-          <p:cNvSpPr/>
-          <p:nvPr/>
-        </p:nvSpPr>
-        <p:spPr>
-          <a:xfrm>
-            <a:off x="0" y="0"/>
-            <a:ext cx="12191695" cy="6858000"/>
-          </a:xfrm>
-          <a:prstGeom prst="rect">
-            <a:avLst/>
-          </a:prstGeom>
-          <a:solidFill>
-            <a:srgbClr val="080D0D"/>
-          </a:solidFill>
-          <a:ln>
-            <a:noFill/>
-          </a:ln>
-        </p:spPr>
-        <p:style>
-          <a:lnRef idx="1">
-            <a:schemeClr val="accent1"/>
-          </a:lnRef>
-          <a:fillRef idx="3">
-            <a:schemeClr val="accent1"/>
-          </a:fillRef>
-          <a:effectRef idx="2">
-            <a:schemeClr val="accent1"/>
-          </a:effectRef>
-          <a:fontRef idx="minor">
-            <a:schemeClr val="lt1"/>
-          </a:fontRef>
-        </p:style>
-        <p:txBody>
-          <a:bodyPr rtlCol="0" anchor="ctr"/>
-          <a:lstStyle/>
-          <a:p>
-            <a:pPr algn="ctr"/>
-          </a:p>
-        </p:txBody>
-      </p:sp>
-      <p:sp>
-        <p:nvSpPr>
-          <p:cNvPr id="3" name="Rectangle 2"/>
-          <p:cNvSpPr/>
-          <p:nvPr/>
-        </p:nvSpPr>
-        <p:spPr>
-          <a:xfrm>
-            <a:off x="320040" y="384048"/>
-            <a:ext cx="36576" cy="6080760"/>
-          </a:xfrm>
-          <a:prstGeom prst="rect">
-            <a:avLst/>
-          </a:prstGeom>
-          <a:solidFill>
-            <a:srgbClr val="48BF8F"/>
-          </a:solidFill>
-          <a:ln>
-            <a:noFill/>
-          </a:ln>
-        </p:spPr>
-        <p:style>
-          <a:lnRef idx="1">
-            <a:schemeClr val="accent1"/>
-          </a:lnRef>
-          <a:fillRef idx="3">
-            <a:schemeClr val="accent1"/>
-          </a:fillRef>
-          <a:effectRef idx="2">
-            <a:schemeClr val="accent1"/>
-          </a:effectRef>
-          <a:fontRef idx="minor">
-            <a:schemeClr val="lt1"/>
-          </a:fontRef>
-        </p:style>
-        <p:txBody>
-          <a:bodyPr rtlCol="0" anchor="ctr"/>
-          <a:lstStyle/>
-          <a:p>
-            <a:pPr algn="ctr"/>
-          </a:p>
-        </p:txBody>
-      </p:sp>
-      <p:sp>
-        <p:nvSpPr>
-          <p:cNvPr id="4" name="Rectangle 3"/>
-          <p:cNvSpPr/>
-          <p:nvPr/>
-        </p:nvSpPr>
-        <p:spPr>
-          <a:xfrm>
-            <a:off x="11716207" y="384048"/>
-            <a:ext cx="36576" cy="6080760"/>
-          </a:xfrm>
-          <a:prstGeom prst="rect">
-            <a:avLst/>
-          </a:prstGeom>
-          <a:solidFill>
-            <a:srgbClr val="48BF8F"/>
-          </a:solidFill>
-          <a:ln>
-            <a:noFill/>
-          </a:ln>
-        </p:spPr>
-        <p:style>
-          <a:lnRef idx="1">
-            <a:schemeClr val="accent1"/>
-          </a:lnRef>
-          <a:fillRef idx="3">
-            <a:schemeClr val="accent1"/>
-          </a:fillRef>
-          <a:effectRef idx="2">
-            <a:schemeClr val="accent1"/>
-          </a:effectRef>
-          <a:fontRef idx="minor">
-            <a:schemeClr val="lt1"/>
-          </a:fontRef>
-        </p:style>
-        <p:txBody>
-          <a:bodyPr rtlCol="0" anchor="ctr"/>
-          <a:lstStyle/>
-          <a:p>
-            <a:pPr algn="ctr"/>
-          </a:p>
-        </p:txBody>
-      </p:sp>
-      <p:sp>
-        <p:nvSpPr>
-          <p:cNvPr id="5" name="Rectangle 4"/>
-          <p:cNvSpPr/>
-          <p:nvPr/>
-        </p:nvSpPr>
-        <p:spPr>
-          <a:xfrm>
-            <a:off x="502920" y="384048"/>
-            <a:ext cx="11155680" cy="27432"/>
-          </a:xfrm>
-          <a:prstGeom prst="rect">
-            <a:avLst/>
-          </a:prstGeom>
-          <a:solidFill>
-            <a:srgbClr val="48BF8F"/>
-          </a:solidFill>
-          <a:ln>
-            <a:noFill/>
-          </a:ln>
-        </p:spPr>
-        <p:style>
-          <a:lnRef idx="1">
-            <a:schemeClr val="accent1"/>
-          </a:lnRef>
-          <a:fillRef idx="3">
-            <a:schemeClr val="accent1"/>
-          </a:fillRef>
-          <a:effectRef idx="2">
-            <a:schemeClr val="accent1"/>
-          </a:effectRef>
-          <a:fontRef idx="minor">
-            <a:schemeClr val="lt1"/>
-          </a:fontRef>
-        </p:style>
-        <p:txBody>
-          <a:bodyPr rtlCol="0" anchor="ctr"/>
-          <a:lstStyle/>
-          <a:p>
-            <a:pPr algn="ctr"/>
-          </a:p>
-        </p:txBody>
-      </p:sp>
-      <p:sp>
-        <p:nvSpPr>
-          <p:cNvPr id="6" name="Rectangle 5"/>
-          <p:cNvSpPr/>
-          <p:nvPr/>
-        </p:nvSpPr>
-        <p:spPr>
-          <a:xfrm>
-            <a:off x="502920" y="6437376"/>
-            <a:ext cx="11155680" cy="27432"/>
-          </a:xfrm>
-          <a:prstGeom prst="rect">
-            <a:avLst/>
-          </a:prstGeom>
-          <a:solidFill>
-            <a:srgbClr val="48BF8F"/>
-          </a:solidFill>
-          <a:ln>
-            <a:noFill/>
-          </a:ln>
-        </p:spPr>
-        <p:style>
-          <a:lnRef idx="1">
-            <a:schemeClr val="accent1"/>
-          </a:lnRef>
-          <a:fillRef idx="3">
-            <a:schemeClr val="accent1"/>
-          </a:fillRef>
-          <a:effectRef idx="2">
-            <a:schemeClr val="accent1"/>
-          </a:effectRef>
-          <a:fontRef idx="minor">
-            <a:schemeClr val="lt1"/>
-          </a:fontRef>
-        </p:style>
-        <p:txBody>
-          <a:bodyPr rtlCol="0" anchor="ctr"/>
-          <a:lstStyle/>
-          <a:p>
-            <a:pPr algn="ctr"/>
-          </a:p>
-        </p:txBody>
-      </p:sp>
-      <p:sp>
-        <p:nvSpPr>
-          <p:cNvPr id="7" name="TextBox 6"/>
-          <p:cNvSpPr txBox="1"/>
-          <p:nvPr/>
-        </p:nvSpPr>
-        <p:spPr>
-          <a:xfrm>
-            <a:off x="713232" y="548640"/>
-            <a:ext cx="10698480" cy="301752"/>
-          </a:xfrm>
-          <a:prstGeom prst="rect">
-            <a:avLst/>
-          </a:prstGeom>
-          <a:noFill/>
-        </p:spPr>
-        <p:txBody>
-          <a:bodyPr wrap="square" anchor="t">
-            <a:spAutoFit/>
-          </a:bodyPr>
-          <a:lstStyle/>
-          <a:p>
-            <a:pPr algn="l"/>
-            <a:r>
-              <a:rPr sz="1000" b="1">
-                <a:solidFill>
-                  <a:srgbClr val="48BF8F"/>
-                </a:solidFill>
-                <a:latin typeface="Aptos"/>
-              </a:rPr>
-              <a:t>ALL COMMITS FROM TODAY ACCORDING TO GIT</a:t>
-            </a:r>
-          </a:p>
-        </p:txBody>
-      </p:sp>
-      <p:sp>
-        <p:nvSpPr>
-          <p:cNvPr id="8" name="TextBox 7"/>
-          <p:cNvSpPr txBox="1"/>
-          <p:nvPr/>
-        </p:nvSpPr>
-        <p:spPr>
-          <a:xfrm>
-            <a:off x="694944" y="850392"/>
-            <a:ext cx="10881360" cy="566928"/>
-          </a:xfrm>
-          <a:prstGeom prst="rect">
-            <a:avLst/>
-          </a:prstGeom>
-          <a:noFill/>
-        </p:spPr>
-        <p:txBody>
-          <a:bodyPr wrap="square" anchor="t">
-            <a:spAutoFit/>
-          </a:bodyPr>
-          <a:lstStyle/>
-          <a:p>
-            <a:pPr algn="l"/>
-            <a:r>
-              <a:rPr sz="2700" b="0">
-                <a:solidFill>
-                  <a:srgbClr val="E8E8DE"/>
-                </a:solidFill>
-                <a:latin typeface="Aptos Display"/>
-              </a:rPr>
-              <a:t>Today's Commit Appendix 2/2</a:t>
-            </a:r>
-          </a:p>
-        </p:txBody>
-      </p:sp>
-      <p:sp>
-        <p:nvSpPr>
-          <p:cNvPr id="9" name="Rounded Rectangle 8"/>
-          <p:cNvSpPr/>
-          <p:nvPr/>
-        </p:nvSpPr>
-        <p:spPr>
-          <a:xfrm>
-            <a:off x="749808" y="1536192"/>
-            <a:ext cx="10561320" cy="4443984"/>
-          </a:xfrm>
-          <a:prstGeom prst="roundRect">
-            <a:avLst/>
-          </a:prstGeom>
-          <a:solidFill>
-            <a:srgbClr val="161A19"/>
-          </a:solidFill>
-          <a:ln>
-            <a:solidFill>
-              <a:srgbClr val="595F56"/>
-            </a:solidFill>
-          </a:ln>
-        </p:spPr>
-        <p:style>
-          <a:lnRef idx="1">
-            <a:schemeClr val="accent1"/>
-          </a:lnRef>
-          <a:fillRef idx="3">
-            <a:schemeClr val="accent1"/>
-          </a:fillRef>
-          <a:effectRef idx="2">
-            <a:schemeClr val="accent1"/>
-          </a:effectRef>
-          <a:fontRef idx="minor">
-            <a:schemeClr val="lt1"/>
-          </a:fontRef>
-        </p:style>
-        <p:txBody>
-          <a:bodyPr rtlCol="0" anchor="ctr"/>
-          <a:lstStyle/>
-          <a:p>
-            <a:pPr algn="ctr"/>
-          </a:p>
-        </p:txBody>
-      </p:sp>
-      <p:sp>
-        <p:nvSpPr>
-          <p:cNvPr id="10" name="Rectangle 9"/>
-          <p:cNvSpPr/>
-          <p:nvPr/>
-        </p:nvSpPr>
-        <p:spPr>
-          <a:xfrm>
-            <a:off x="749808" y="1536192"/>
-            <a:ext cx="10561320" cy="109728"/>
-          </a:xfrm>
-          <a:prstGeom prst="rect">
-            <a:avLst/>
-          </a:prstGeom>
-          <a:solidFill>
-            <a:srgbClr val="48BF8F"/>
-          </a:solidFill>
-          <a:ln>
-            <a:noFill/>
-          </a:ln>
-        </p:spPr>
-        <p:style>
-          <a:lnRef idx="1">
-            <a:schemeClr val="accent1"/>
-          </a:lnRef>
-          <a:fillRef idx="3">
-            <a:schemeClr val="accent1"/>
-          </a:fillRef>
-          <a:effectRef idx="2">
-            <a:schemeClr val="accent1"/>
-          </a:effectRef>
-          <a:fontRef idx="minor">
-            <a:schemeClr val="lt1"/>
-          </a:fontRef>
-        </p:style>
-        <p:txBody>
-          <a:bodyPr rtlCol="0" anchor="ctr"/>
-          <a:lstStyle/>
-          <a:p>
-            <a:pPr algn="ctr"/>
-          </a:p>
-        </p:txBody>
-      </p:sp>
-      <p:sp>
-        <p:nvSpPr>
-          <p:cNvPr id="11" name="TextBox 10"/>
-          <p:cNvSpPr txBox="1"/>
-          <p:nvPr/>
-        </p:nvSpPr>
-        <p:spPr>
-          <a:xfrm>
-            <a:off x="950976" y="1737360"/>
-            <a:ext cx="10158984" cy="310896"/>
-          </a:xfrm>
-          <a:prstGeom prst="rect">
-            <a:avLst/>
-          </a:prstGeom>
-          <a:noFill/>
-        </p:spPr>
-        <p:txBody>
-          <a:bodyPr wrap="square" anchor="t">
-            <a:spAutoFit/>
-          </a:bodyPr>
-          <a:lstStyle/>
-          <a:p>
-            <a:pPr algn="l"/>
-            <a:r>
-              <a:rPr sz="1400" b="1">
-                <a:solidFill>
-                  <a:srgbClr val="48BF8F"/>
-                </a:solidFill>
-                <a:latin typeface="Aptos"/>
-              </a:rPr>
-              <a:t>Commit timeline</a:t>
-            </a:r>
-          </a:p>
-        </p:txBody>
-      </p:sp>
-      <p:sp>
-        <p:nvSpPr>
-          <p:cNvPr id="12" name="TextBox 11"/>
-          <p:cNvSpPr txBox="1"/>
-          <p:nvPr/>
-        </p:nvSpPr>
-        <p:spPr>
-          <a:xfrm>
-            <a:off x="950976" y="2194560"/>
-            <a:ext cx="10158984" cy="3639312"/>
-          </a:xfrm>
-          <a:prstGeom prst="rect">
-            <a:avLst/>
-          </a:prstGeom>
-          <a:noFill/>
-        </p:spPr>
-        <p:txBody>
-          <a:bodyPr wrap="square" anchor="t" lIns="38100" rIns="38100" tIns="25400" bIns="25400">
-            <a:noAutofit/>
-          </a:bodyPr>
-          <a:lstStyle/>
-          <a:p>
-            <a:pPr>
-              <a:spcAft>
-                <a:spcPts val="600"/>
-              </a:spcAft>
-              <a:defRPr sz="1200">
-                <a:solidFill>
-                  <a:srgbClr val="B4BAAE"/>
-                </a:solidFill>
-                <a:latin typeface="Aptos"/>
-              </a:defRPr>
-            </a:pPr>
-            <a:r>
-              <a:rPr sz="1200" b="0" i="0">
-                <a:latin typeface="Calibri"/>
-              </a:rPr>
-              <a:t>2026-05-20 | c212162 | Fixing widths of reporting tables, by Tlamatini's-AutoBot.</a:t>
-            </a:r>
-            <a:endParaRPr sz="1200" b="0" i="0">
-              <a:latin typeface="Calibri"/>
-            </a:endParaRPr>
-          </a:p>
-          <a:p>
-            <a:pPr>
-              <a:spcAft>
-                <a:spcPts val="600"/>
-              </a:spcAft>
-              <a:defRPr sz="1200">
-                <a:solidFill>
-                  <a:srgbClr val="B4BAAE"/>
-                </a:solidFill>
-                <a:latin typeface="Aptos"/>
-              </a:defRPr>
-            </a:pPr>
-            <a:r>
-              <a:rPr sz="1200" b="0" i="0">
-                <a:latin typeface="Calibri"/>
-              </a:rPr>
-              <a:t>2026-05-20 | 0b23469 | Updating documentation and some source code related to versioning according to version 1.4.1, by Tlamatini's-AutoBot.</a:t>
-            </a:r>
-            <a:endParaRPr sz="1200" b="0" i="0">
-              <a:latin typeface="Calibri"/>
-            </a:endParaRPr>
-          </a:p>
-          <a:p>
-            <a:pPr>
-              <a:spcAft>
-                <a:spcPts val="600"/>
-              </a:spcAft>
-              <a:defRPr sz="1200">
-                <a:solidFill>
-                  <a:srgbClr val="B4BAAE"/>
-                </a:solidFill>
-                <a:latin typeface="Aptos"/>
-              </a:defRPr>
-            </a:pPr>
-            <a:r>
-              <a:rPr sz="1200" b="0" i="0">
-                <a:latin typeface="Calibri"/>
-              </a:rPr>
-              <a:t>2026-05-20 | 2e1c2d0 | Patching state hadling in Reviewer infra, by Tlamatini's-AutoBot.</a:t>
-            </a:r>
-            <a:endParaRPr sz="1200" b="0" i="0">
-              <a:latin typeface="Calibri"/>
-            </a:endParaRPr>
-          </a:p>
-          <a:p>
-            <a:pPr>
-              <a:spcAft>
-                <a:spcPts val="600"/>
-              </a:spcAft>
-              <a:defRPr sz="1200">
-                <a:solidFill>
-                  <a:srgbClr val="B4BAAE"/>
-                </a:solidFill>
-                <a:latin typeface="Aptos"/>
-              </a:defRPr>
-            </a:pPr>
-            <a:r>
-              <a:rPr sz="1200" b="0" i="0">
-                <a:latin typeface="Calibri"/>
-              </a:rPr>
-              <a:t>2026-05-20 | 546735f | Updating documentation based on the last changes, by angelahack1</a:t>
-            </a:r>
-            <a:endParaRPr sz="1200" b="0" i="0">
-              <a:latin typeface="Calibri"/>
-            </a:endParaRPr>
-          </a:p>
-          <a:p>
-            <a:pPr>
-              <a:spcAft>
-                <a:spcPts val="600"/>
-              </a:spcAft>
-              <a:defRPr sz="1200">
-                <a:solidFill>
-                  <a:srgbClr val="B4BAAE"/>
-                </a:solidFill>
-                <a:latin typeface="Aptos"/>
-              </a:defRPr>
-            </a:pPr>
-            <a:r>
-              <a:rPr sz="1200" b="0" i="0">
-                <a:latin typeface="Calibri"/>
-              </a:rPr>
-              <a:t>2026-05-20 | efb8c13 | Analyzer and Reviewer agents!!!, by angelahack1</a:t>
-            </a:r>
-            <a:endParaRPr sz="1200" b="0" i="0">
-              <a:latin typeface="Calibri"/>
-            </a:endParaRPr>
-          </a:p>
-        </p:txBody>
-      </p:sp>
-    </p:spTree>
-  </p:cSld>
-  <p:clrMapOvr>
-    <a:masterClrMapping/>
-  </p:clrMapOvr>
-</p:sld>
-</file>
-
-<file path=ppt/slides/slide4.xml><?xml version="1.0" encoding="utf-8"?>
-<p:sld xmlns:a="http://schemas.openxmlformats.org/drawingml/2006/main" xmlns:p="http://schemas.openxmlformats.org/presentationml/2006/main" xmlns:r="http://schemas.openxmlformats.org/officeDocument/2006/relationships">
-  <p:cSld>
-    <p:spTree>
-      <p:nvGrpSpPr>
-        <p:cNvPr id="1" name=""/>
-        <p:cNvGrpSpPr/>
-        <p:nvPr/>
-      </p:nvGrpSpPr>
-      <p:grpSpPr/>
-      <p:sp>
-        <p:nvSpPr>
-          <p:cNvPr id="2" name="Rectangle 1"/>
-          <p:cNvSpPr/>
-          <p:nvPr/>
-        </p:nvSpPr>
-        <p:spPr>
-          <a:xfrm>
-            <a:off x="0" y="0"/>
-            <a:ext cx="12191695" cy="6858000"/>
-          </a:xfrm>
-          <a:prstGeom prst="rect">
-            <a:avLst/>
-          </a:prstGeom>
-          <a:solidFill>
-            <a:srgbClr val="080D0D"/>
-          </a:solidFill>
-          <a:ln>
-            <a:noFill/>
-          </a:ln>
-        </p:spPr>
-        <p:style>
-          <a:lnRef idx="1">
-            <a:schemeClr val="accent1"/>
-          </a:lnRef>
-          <a:fillRef idx="3">
-            <a:schemeClr val="accent1"/>
-          </a:fillRef>
-          <a:effectRef idx="2">
-            <a:schemeClr val="accent1"/>
-          </a:effectRef>
-          <a:fontRef idx="minor">
-            <a:schemeClr val="lt1"/>
-          </a:fontRef>
-        </p:style>
-        <p:txBody>
-          <a:bodyPr rtlCol="0" anchor="ctr"/>
-          <a:lstStyle/>
-          <a:p>
-            <a:pPr algn="ctr"/>
-          </a:p>
-        </p:txBody>
-      </p:sp>
-      <p:sp>
-        <p:nvSpPr>
-          <p:cNvPr id="3" name="Rectangle 2"/>
-          <p:cNvSpPr/>
-          <p:nvPr/>
-        </p:nvSpPr>
-        <p:spPr>
-          <a:xfrm>
-            <a:off x="320040" y="384048"/>
-            <a:ext cx="36576" cy="6080760"/>
-          </a:xfrm>
-          <a:prstGeom prst="rect">
-            <a:avLst/>
-          </a:prstGeom>
-          <a:solidFill>
-            <a:srgbClr val="48BF8F"/>
-          </a:solidFill>
-          <a:ln>
-            <a:noFill/>
-          </a:ln>
-        </p:spPr>
-        <p:style>
-          <a:lnRef idx="1">
-            <a:schemeClr val="accent1"/>
-          </a:lnRef>
-          <a:fillRef idx="3">
-            <a:schemeClr val="accent1"/>
-          </a:fillRef>
-          <a:effectRef idx="2">
-            <a:schemeClr val="accent1"/>
-          </a:effectRef>
-          <a:fontRef idx="minor">
-            <a:schemeClr val="lt1"/>
-          </a:fontRef>
-        </p:style>
-        <p:txBody>
-          <a:bodyPr rtlCol="0" anchor="ctr"/>
-          <a:lstStyle/>
-          <a:p>
-            <a:pPr algn="ctr"/>
-          </a:p>
-        </p:txBody>
-      </p:sp>
-      <p:sp>
-        <p:nvSpPr>
-          <p:cNvPr id="4" name="Rectangle 3"/>
-          <p:cNvSpPr/>
-          <p:nvPr/>
-        </p:nvSpPr>
-        <p:spPr>
-          <a:xfrm>
-            <a:off x="11716207" y="384048"/>
-            <a:ext cx="36576" cy="6080760"/>
-          </a:xfrm>
-          <a:prstGeom prst="rect">
-            <a:avLst/>
-          </a:prstGeom>
-          <a:solidFill>
-            <a:srgbClr val="48BF8F"/>
-          </a:solidFill>
-          <a:ln>
-            <a:noFill/>
-          </a:ln>
-        </p:spPr>
-        <p:style>
-          <a:lnRef idx="1">
-            <a:schemeClr val="accent1"/>
-          </a:lnRef>
-          <a:fillRef idx="3">
-            <a:schemeClr val="accent1"/>
-          </a:fillRef>
-          <a:effectRef idx="2">
-            <a:schemeClr val="accent1"/>
-          </a:effectRef>
-          <a:fontRef idx="minor">
-            <a:schemeClr val="lt1"/>
-          </a:fontRef>
-        </p:style>
-        <p:txBody>
-          <a:bodyPr rtlCol="0" anchor="ctr"/>
-          <a:lstStyle/>
-          <a:p>
-            <a:pPr algn="ctr"/>
-          </a:p>
-        </p:txBody>
-      </p:sp>
-      <p:sp>
-        <p:nvSpPr>
-          <p:cNvPr id="5" name="Rectangle 4"/>
-          <p:cNvSpPr/>
-          <p:nvPr/>
-        </p:nvSpPr>
-        <p:spPr>
-          <a:xfrm>
-            <a:off x="502920" y="384048"/>
-            <a:ext cx="11155680" cy="27432"/>
-          </a:xfrm>
-          <a:prstGeom prst="rect">
-            <a:avLst/>
-          </a:prstGeom>
-          <a:solidFill>
-            <a:srgbClr val="48BF8F"/>
-          </a:solidFill>
-          <a:ln>
-            <a:noFill/>
-          </a:ln>
-        </p:spPr>
-        <p:style>
-          <a:lnRef idx="1">
-            <a:schemeClr val="accent1"/>
-          </a:lnRef>
-          <a:fillRef idx="3">
-            <a:schemeClr val="accent1"/>
-          </a:fillRef>
-          <a:effectRef idx="2">
-            <a:schemeClr val="accent1"/>
-          </a:effectRef>
-          <a:fontRef idx="minor">
-            <a:schemeClr val="lt1"/>
-          </a:fontRef>
-        </p:style>
-        <p:txBody>
-          <a:bodyPr rtlCol="0" anchor="ctr"/>
-          <a:lstStyle/>
-          <a:p>
-            <a:pPr algn="ctr"/>
-          </a:p>
-        </p:txBody>
-      </p:sp>
-      <p:sp>
-        <p:nvSpPr>
-          <p:cNvPr id="6" name="Rectangle 5"/>
-          <p:cNvSpPr/>
-          <p:nvPr/>
-        </p:nvSpPr>
-        <p:spPr>
-          <a:xfrm>
-            <a:off x="502920" y="6437376"/>
-            <a:ext cx="11155680" cy="27432"/>
-          </a:xfrm>
-          <a:prstGeom prst="rect">
-            <a:avLst/>
-          </a:prstGeom>
-          <a:solidFill>
-            <a:srgbClr val="48BF8F"/>
-          </a:solidFill>
-          <a:ln>
-            <a:noFill/>
-          </a:ln>
-        </p:spPr>
-        <p:style>
-          <a:lnRef idx="1">
-            <a:schemeClr val="accent1"/>
-          </a:lnRef>
-          <a:fillRef idx="3">
-            <a:schemeClr val="accent1"/>
-          </a:fillRef>
-          <a:effectRef idx="2">
-            <a:schemeClr val="accent1"/>
-          </a:effectRef>
-          <a:fontRef idx="minor">
-            <a:schemeClr val="lt1"/>
-          </a:fontRef>
-        </p:style>
-        <p:txBody>
-          <a:bodyPr rtlCol="0" anchor="ctr"/>
-          <a:lstStyle/>
-          <a:p>
-            <a:pPr algn="ctr"/>
-          </a:p>
-        </p:txBody>
-      </p:sp>
-      <p:sp>
-        <p:nvSpPr>
-          <p:cNvPr id="7" name="TextBox 6"/>
-          <p:cNvSpPr txBox="1"/>
-          <p:nvPr/>
-        </p:nvSpPr>
-        <p:spPr>
-          <a:xfrm>
-            <a:off x="713232" y="548640"/>
-            <a:ext cx="10698480" cy="301752"/>
-          </a:xfrm>
-          <a:prstGeom prst="rect">
-            <a:avLst/>
-          </a:prstGeom>
-          <a:noFill/>
-        </p:spPr>
-        <p:txBody>
-          <a:bodyPr wrap="square" anchor="t">
-            <a:spAutoFit/>
-          </a:bodyPr>
-          <a:lstStyle/>
-          <a:p>
-            <a:pPr algn="l"/>
-            <a:r>
-              <a:rPr sz="1000" b="1">
-                <a:solidFill>
-                  <a:srgbClr val="48BF8F"/>
-                </a:solidFill>
-                <a:latin typeface="Aptos"/>
-              </a:rPr>
-              <a:t>EXECUTION PIPELINE</a:t>
-            </a:r>
-          </a:p>
-        </p:txBody>
-      </p:sp>
-      <p:sp>
-        <p:nvSpPr>
-          <p:cNvPr id="8" name="TextBox 7"/>
-          <p:cNvSpPr txBox="1"/>
-          <p:nvPr/>
-        </p:nvSpPr>
-        <p:spPr>
-          <a:xfrm>
-            <a:off x="694944" y="850392"/>
-            <a:ext cx="10881360" cy="566928"/>
-          </a:xfrm>
-          <a:prstGeom prst="rect">
-            <a:avLst/>
-          </a:prstGeom>
-          <a:noFill/>
-        </p:spPr>
-        <p:txBody>
-          <a:bodyPr wrap="square" anchor="t">
-            <a:spAutoFit/>
-          </a:bodyPr>
-          <a:lstStyle/>
-          <a:p>
-            <a:pPr algn="l"/>
-            <a:r>
-              <a:rPr sz="2700" b="0">
-                <a:solidFill>
-                  <a:srgbClr val="E8E8DE"/>
-                </a:solidFill>
-                <a:latin typeface="Aptos Display"/>
-              </a:rPr>
-              <a:t>How It Works</a:t>
-            </a:r>
-          </a:p>
-        </p:txBody>
-      </p:sp>
-      <p:sp>
-        <p:nvSpPr>
-          <p:cNvPr id="9" name="Rounded Rectangle 8"/>
-          <p:cNvSpPr/>
-          <p:nvPr/>
-        </p:nvSpPr>
-        <p:spPr>
-          <a:xfrm>
-            <a:off x="749808" y="1828800"/>
-            <a:ext cx="1591056" cy="685800"/>
-          </a:xfrm>
-          <a:prstGeom prst="roundRect">
-            <a:avLst/>
-          </a:prstGeom>
-          <a:solidFill>
-            <a:srgbClr val="202322"/>
-          </a:solidFill>
-          <a:ln>
-            <a:solidFill>
-              <a:srgbClr val="48BF8F"/>
-            </a:solidFill>
-          </a:ln>
-        </p:spPr>
-        <p:style>
-          <a:lnRef idx="1">
-            <a:schemeClr val="accent1"/>
-          </a:lnRef>
-          <a:fillRef idx="3">
-            <a:schemeClr val="accent1"/>
-          </a:fillRef>
-          <a:effectRef idx="2">
-            <a:schemeClr val="accent1"/>
-          </a:effectRef>
-          <a:fontRef idx="minor">
-            <a:schemeClr val="lt1"/>
-          </a:fontRef>
-        </p:style>
-        <p:txBody>
-          <a:bodyPr rtlCol="0" anchor="ctr"/>
-          <a:lstStyle/>
-          <a:p>
-            <a:pPr algn="ctr"/>
-          </a:p>
-        </p:txBody>
-      </p:sp>
-      <p:sp>
-        <p:nvSpPr>
-          <p:cNvPr id="10" name="TextBox 9"/>
-          <p:cNvSpPr txBox="1"/>
-          <p:nvPr/>
-        </p:nvSpPr>
-        <p:spPr>
-          <a:xfrm>
-            <a:off x="822959" y="1993392"/>
-            <a:ext cx="1444752" cy="256032"/>
-          </a:xfrm>
-          <a:prstGeom prst="rect">
-            <a:avLst/>
-          </a:prstGeom>
-          <a:noFill/>
-        </p:spPr>
-        <p:txBody>
-          <a:bodyPr wrap="square" anchor="t">
-            <a:spAutoFit/>
-          </a:bodyPr>
-          <a:lstStyle/>
-          <a:p>
-            <a:pPr algn="ctr"/>
-            <a:r>
-              <a:rPr sz="1000" b="1">
-                <a:solidFill>
-                  <a:srgbClr val="E8E8DE"/>
-                </a:solidFill>
-                <a:latin typeface="Aptos"/>
-              </a:rPr>
-              <a:t>Browser</a:t>
-            </a:r>
-          </a:p>
-        </p:txBody>
-      </p:sp>
-      <p:sp>
-        <p:nvSpPr>
-          <p:cNvPr id="11" name="TextBox 10"/>
-          <p:cNvSpPr txBox="1"/>
-          <p:nvPr/>
-        </p:nvSpPr>
-        <p:spPr>
-          <a:xfrm>
-            <a:off x="2340864" y="2002536"/>
-            <a:ext cx="246888" cy="182880"/>
-          </a:xfrm>
-          <a:prstGeom prst="rect">
-            <a:avLst/>
-          </a:prstGeom>
-          <a:noFill/>
-        </p:spPr>
-        <p:txBody>
-          <a:bodyPr wrap="square" anchor="t">
-            <a:spAutoFit/>
-          </a:bodyPr>
-          <a:lstStyle/>
-          <a:p>
-            <a:pPr algn="ctr"/>
-            <a:r>
-              <a:rPr sz="1200" b="1">
-                <a:solidFill>
-                  <a:srgbClr val="48BF8F"/>
-                </a:solidFill>
-                <a:latin typeface="Aptos"/>
-              </a:rPr>
-              <a:t>&gt;</a:t>
-            </a:r>
-          </a:p>
-        </p:txBody>
-      </p:sp>
-      <p:sp>
-        <p:nvSpPr>
-          <p:cNvPr id="12" name="Rounded Rectangle 11"/>
-          <p:cNvSpPr/>
-          <p:nvPr/>
-        </p:nvSpPr>
-        <p:spPr>
-          <a:xfrm>
-            <a:off x="2587751" y="1828800"/>
-            <a:ext cx="1591056" cy="685800"/>
-          </a:xfrm>
-          <a:prstGeom prst="roundRect">
-            <a:avLst/>
-          </a:prstGeom>
-          <a:solidFill>
-            <a:srgbClr val="202322"/>
-          </a:solidFill>
-          <a:ln>
-            <a:solidFill>
-              <a:srgbClr val="48BF8F"/>
-            </a:solidFill>
-          </a:ln>
-        </p:spPr>
-        <p:style>
-          <a:lnRef idx="1">
-            <a:schemeClr val="accent1"/>
-          </a:lnRef>
-          <a:fillRef idx="3">
-            <a:schemeClr val="accent1"/>
-          </a:fillRef>
-          <a:effectRef idx="2">
-            <a:schemeClr val="accent1"/>
-          </a:effectRef>
-          <a:fontRef idx="minor">
-            <a:schemeClr val="lt1"/>
-          </a:fontRef>
-        </p:style>
-        <p:txBody>
-          <a:bodyPr rtlCol="0" anchor="ctr"/>
-          <a:lstStyle/>
-          <a:p>
-            <a:pPr algn="ctr"/>
-          </a:p>
-        </p:txBody>
-      </p:sp>
-      <p:sp>
-        <p:nvSpPr>
-          <p:cNvPr id="13" name="TextBox 12"/>
-          <p:cNvSpPr txBox="1"/>
-          <p:nvPr/>
-        </p:nvSpPr>
-        <p:spPr>
-          <a:xfrm>
-            <a:off x="2660903" y="1993392"/>
-            <a:ext cx="1444752" cy="256032"/>
-          </a:xfrm>
-          <a:prstGeom prst="rect">
-            <a:avLst/>
-          </a:prstGeom>
-          <a:noFill/>
-        </p:spPr>
-        <p:txBody>
-          <a:bodyPr wrap="square" anchor="t">
-            <a:spAutoFit/>
-          </a:bodyPr>
-          <a:lstStyle/>
-          <a:p>
-            <a:pPr algn="ctr"/>
-            <a:r>
-              <a:rPr sz="1000" b="1">
-                <a:solidFill>
-                  <a:srgbClr val="E8E8DE"/>
-                </a:solidFill>
-                <a:latin typeface="Aptos"/>
-              </a:rPr>
-              <a:t>Channels</a:t>
-            </a:r>
-          </a:p>
-        </p:txBody>
-      </p:sp>
-      <p:sp>
-        <p:nvSpPr>
-          <p:cNvPr id="14" name="TextBox 13"/>
-          <p:cNvSpPr txBox="1"/>
-          <p:nvPr/>
-        </p:nvSpPr>
-        <p:spPr>
-          <a:xfrm>
-            <a:off x="4178807" y="2002536"/>
-            <a:ext cx="246888" cy="182880"/>
-          </a:xfrm>
-          <a:prstGeom prst="rect">
-            <a:avLst/>
-          </a:prstGeom>
-          <a:noFill/>
-        </p:spPr>
-        <p:txBody>
-          <a:bodyPr wrap="square" anchor="t">
-            <a:spAutoFit/>
-          </a:bodyPr>
-          <a:lstStyle/>
-          <a:p>
-            <a:pPr algn="ctr"/>
-            <a:r>
-              <a:rPr sz="1200" b="1">
-                <a:solidFill>
-                  <a:srgbClr val="48BF8F"/>
-                </a:solidFill>
-                <a:latin typeface="Aptos"/>
-              </a:rPr>
-              <a:t>&gt;</a:t>
-            </a:r>
-          </a:p>
-        </p:txBody>
-      </p:sp>
-      <p:sp>
-        <p:nvSpPr>
-          <p:cNvPr id="15" name="Rounded Rectangle 14"/>
-          <p:cNvSpPr/>
-          <p:nvPr/>
-        </p:nvSpPr>
-        <p:spPr>
-          <a:xfrm>
-            <a:off x="4425696" y="1828800"/>
-            <a:ext cx="1591056" cy="685800"/>
-          </a:xfrm>
-          <a:prstGeom prst="roundRect">
-            <a:avLst/>
-          </a:prstGeom>
-          <a:solidFill>
-            <a:srgbClr val="202322"/>
-          </a:solidFill>
-          <a:ln>
-            <a:solidFill>
-              <a:srgbClr val="48BF8F"/>
-            </a:solidFill>
-          </a:ln>
-        </p:spPr>
-        <p:style>
-          <a:lnRef idx="1">
-            <a:schemeClr val="accent1"/>
-          </a:lnRef>
-          <a:fillRef idx="3">
-            <a:schemeClr val="accent1"/>
-          </a:fillRef>
-          <a:effectRef idx="2">
-            <a:schemeClr val="accent1"/>
-          </a:effectRef>
-          <a:fontRef idx="minor">
-            <a:schemeClr val="lt1"/>
-          </a:fontRef>
-        </p:style>
-        <p:txBody>
-          <a:bodyPr rtlCol="0" anchor="ctr"/>
-          <a:lstStyle/>
-          <a:p>
-            <a:pPr algn="ctr"/>
-          </a:p>
-        </p:txBody>
-      </p:sp>
-      <p:sp>
-        <p:nvSpPr>
-          <p:cNvPr id="16" name="TextBox 15"/>
-          <p:cNvSpPr txBox="1"/>
-          <p:nvPr/>
-        </p:nvSpPr>
-        <p:spPr>
-          <a:xfrm>
-            <a:off x="4498848" y="1993392"/>
-            <a:ext cx="1444752" cy="256032"/>
-          </a:xfrm>
-          <a:prstGeom prst="rect">
-            <a:avLst/>
-          </a:prstGeom>
-          <a:noFill/>
-        </p:spPr>
-        <p:txBody>
-          <a:bodyPr wrap="square" anchor="t">
-            <a:spAutoFit/>
-          </a:bodyPr>
-          <a:lstStyle/>
-          <a:p>
-            <a:pPr algn="ctr"/>
-            <a:r>
-              <a:rPr sz="1000" b="1">
-                <a:solidFill>
-                  <a:srgbClr val="E8E8DE"/>
-                </a:solidFill>
-                <a:latin typeface="Aptos"/>
-              </a:rPr>
-              <a:t>RAG</a:t>
-            </a:r>
-          </a:p>
-        </p:txBody>
-      </p:sp>
-      <p:sp>
-        <p:nvSpPr>
-          <p:cNvPr id="17" name="TextBox 16"/>
-          <p:cNvSpPr txBox="1"/>
-          <p:nvPr/>
-        </p:nvSpPr>
-        <p:spPr>
-          <a:xfrm>
-            <a:off x="6016752" y="2002536"/>
-            <a:ext cx="246888" cy="182880"/>
-          </a:xfrm>
-          <a:prstGeom prst="rect">
-            <a:avLst/>
-          </a:prstGeom>
-          <a:noFill/>
-        </p:spPr>
-        <p:txBody>
-          <a:bodyPr wrap="square" anchor="t">
-            <a:spAutoFit/>
-          </a:bodyPr>
-          <a:lstStyle/>
-          <a:p>
-            <a:pPr algn="ctr"/>
-            <a:r>
-              <a:rPr sz="1200" b="1">
-                <a:solidFill>
-                  <a:srgbClr val="48BF8F"/>
-                </a:solidFill>
-                <a:latin typeface="Aptos"/>
-              </a:rPr>
-              <a:t>&gt;</a:t>
-            </a:r>
-          </a:p>
-        </p:txBody>
-      </p:sp>
-      <p:sp>
-        <p:nvSpPr>
-          <p:cNvPr id="18" name="Rounded Rectangle 17"/>
-          <p:cNvSpPr/>
-          <p:nvPr/>
-        </p:nvSpPr>
-        <p:spPr>
-          <a:xfrm>
-            <a:off x="6263640" y="1828800"/>
-            <a:ext cx="1591056" cy="685800"/>
-          </a:xfrm>
-          <a:prstGeom prst="roundRect">
-            <a:avLst/>
-          </a:prstGeom>
-          <a:solidFill>
-            <a:srgbClr val="202322"/>
-          </a:solidFill>
-          <a:ln>
-            <a:solidFill>
-              <a:srgbClr val="48BF8F"/>
-            </a:solidFill>
-          </a:ln>
-        </p:spPr>
-        <p:style>
-          <a:lnRef idx="1">
-            <a:schemeClr val="accent1"/>
-          </a:lnRef>
-          <a:fillRef idx="3">
-            <a:schemeClr val="accent1"/>
-          </a:fillRef>
-          <a:effectRef idx="2">
-            <a:schemeClr val="accent1"/>
-          </a:effectRef>
-          <a:fontRef idx="minor">
-            <a:schemeClr val="lt1"/>
-          </a:fontRef>
-        </p:style>
-        <p:txBody>
-          <a:bodyPr rtlCol="0" anchor="ctr"/>
-          <a:lstStyle/>
-          <a:p>
-            <a:pPr algn="ctr"/>
-          </a:p>
-        </p:txBody>
-      </p:sp>
-      <p:sp>
-        <p:nvSpPr>
-          <p:cNvPr id="19" name="TextBox 18"/>
-          <p:cNvSpPr txBox="1"/>
-          <p:nvPr/>
-        </p:nvSpPr>
-        <p:spPr>
-          <a:xfrm>
-            <a:off x="6336792" y="1993392"/>
-            <a:ext cx="1444752" cy="256032"/>
-          </a:xfrm>
-          <a:prstGeom prst="rect">
-            <a:avLst/>
-          </a:prstGeom>
-          <a:noFill/>
-        </p:spPr>
-        <p:txBody>
-          <a:bodyPr wrap="square" anchor="t">
-            <a:spAutoFit/>
-          </a:bodyPr>
-          <a:lstStyle/>
-          <a:p>
-            <a:pPr algn="ctr"/>
-            <a:r>
-              <a:rPr sz="1000" b="1">
-                <a:solidFill>
-                  <a:srgbClr val="E8E8DE"/>
-                </a:solidFill>
-                <a:latin typeface="Aptos"/>
-              </a:rPr>
-              <a:t>Planner</a:t>
-            </a:r>
-          </a:p>
-        </p:txBody>
-      </p:sp>
-      <p:sp>
-        <p:nvSpPr>
-          <p:cNvPr id="20" name="TextBox 19"/>
-          <p:cNvSpPr txBox="1"/>
-          <p:nvPr/>
-        </p:nvSpPr>
-        <p:spPr>
-          <a:xfrm>
-            <a:off x="7854696" y="2002536"/>
-            <a:ext cx="246888" cy="182880"/>
-          </a:xfrm>
-          <a:prstGeom prst="rect">
-            <a:avLst/>
-          </a:prstGeom>
-          <a:noFill/>
-        </p:spPr>
-        <p:txBody>
-          <a:bodyPr wrap="square" anchor="t">
-            <a:spAutoFit/>
-          </a:bodyPr>
-          <a:lstStyle/>
-          <a:p>
-            <a:pPr algn="ctr"/>
-            <a:r>
-              <a:rPr sz="1200" b="1">
-                <a:solidFill>
-                  <a:srgbClr val="48BF8F"/>
-                </a:solidFill>
-                <a:latin typeface="Aptos"/>
-              </a:rPr>
-              <a:t>&gt;</a:t>
-            </a:r>
-          </a:p>
-        </p:txBody>
-      </p:sp>
-      <p:sp>
-        <p:nvSpPr>
-          <p:cNvPr id="21" name="Rounded Rectangle 20"/>
-          <p:cNvSpPr/>
-          <p:nvPr/>
-        </p:nvSpPr>
-        <p:spPr>
-          <a:xfrm>
-            <a:off x="8101583" y="1828800"/>
-            <a:ext cx="1591056" cy="685800"/>
-          </a:xfrm>
-          <a:prstGeom prst="roundRect">
-            <a:avLst/>
-          </a:prstGeom>
-          <a:solidFill>
-            <a:srgbClr val="202322"/>
-          </a:solidFill>
-          <a:ln>
-            <a:solidFill>
-              <a:srgbClr val="48BF8F"/>
-            </a:solidFill>
-          </a:ln>
-        </p:spPr>
-        <p:style>
-          <a:lnRef idx="1">
-            <a:schemeClr val="accent1"/>
-          </a:lnRef>
-          <a:fillRef idx="3">
-            <a:schemeClr val="accent1"/>
-          </a:fillRef>
-          <a:effectRef idx="2">
-            <a:schemeClr val="accent1"/>
-          </a:effectRef>
-          <a:fontRef idx="minor">
-            <a:schemeClr val="lt1"/>
-          </a:fontRef>
-        </p:style>
-        <p:txBody>
-          <a:bodyPr rtlCol="0" anchor="ctr"/>
-          <a:lstStyle/>
-          <a:p>
-            <a:pPr algn="ctr"/>
-          </a:p>
-        </p:txBody>
-      </p:sp>
-      <p:sp>
-        <p:nvSpPr>
-          <p:cNvPr id="22" name="TextBox 21"/>
-          <p:cNvSpPr txBox="1"/>
-          <p:nvPr/>
-        </p:nvSpPr>
-        <p:spPr>
-          <a:xfrm>
-            <a:off x="8174736" y="1993392"/>
-            <a:ext cx="1444752" cy="256032"/>
-          </a:xfrm>
-          <a:prstGeom prst="rect">
-            <a:avLst/>
-          </a:prstGeom>
-          <a:noFill/>
-        </p:spPr>
-        <p:txBody>
-          <a:bodyPr wrap="square" anchor="t">
-            <a:spAutoFit/>
-          </a:bodyPr>
-          <a:lstStyle/>
-          <a:p>
-            <a:pPr algn="ctr"/>
-            <a:r>
-              <a:rPr sz="1000" b="1">
-                <a:solidFill>
-                  <a:srgbClr val="E8E8DE"/>
-                </a:solidFill>
-                <a:latin typeface="Aptos"/>
-              </a:rPr>
-              <a:t>Tools</a:t>
-            </a:r>
-          </a:p>
-        </p:txBody>
-      </p:sp>
-      <p:sp>
-        <p:nvSpPr>
-          <p:cNvPr id="23" name="TextBox 22"/>
-          <p:cNvSpPr txBox="1"/>
-          <p:nvPr/>
-        </p:nvSpPr>
-        <p:spPr>
-          <a:xfrm>
-            <a:off x="9692640" y="2002536"/>
-            <a:ext cx="246888" cy="182880"/>
-          </a:xfrm>
-          <a:prstGeom prst="rect">
-            <a:avLst/>
-          </a:prstGeom>
-          <a:noFill/>
-        </p:spPr>
-        <p:txBody>
-          <a:bodyPr wrap="square" anchor="t">
-            <a:spAutoFit/>
-          </a:bodyPr>
-          <a:lstStyle/>
-          <a:p>
-            <a:pPr algn="ctr"/>
-            <a:r>
-              <a:rPr sz="1200" b="1">
-                <a:solidFill>
-                  <a:srgbClr val="48BF8F"/>
-                </a:solidFill>
-                <a:latin typeface="Aptos"/>
-              </a:rPr>
-              <a:t>&gt;</a:t>
-            </a:r>
-          </a:p>
-        </p:txBody>
-      </p:sp>
-      <p:sp>
-        <p:nvSpPr>
-          <p:cNvPr id="24" name="Rounded Rectangle 23"/>
-          <p:cNvSpPr/>
-          <p:nvPr/>
-        </p:nvSpPr>
-        <p:spPr>
-          <a:xfrm>
-            <a:off x="9939528" y="1828800"/>
-            <a:ext cx="1591056" cy="685800"/>
-          </a:xfrm>
-          <a:prstGeom prst="roundRect">
-            <a:avLst/>
-          </a:prstGeom>
-          <a:solidFill>
-            <a:srgbClr val="202322"/>
-          </a:solidFill>
-          <a:ln>
-            <a:solidFill>
-              <a:srgbClr val="48BF8F"/>
-            </a:solidFill>
-          </a:ln>
-        </p:spPr>
-        <p:style>
-          <a:lnRef idx="1">
-            <a:schemeClr val="accent1"/>
-          </a:lnRef>
-          <a:fillRef idx="3">
-            <a:schemeClr val="accent1"/>
-          </a:fillRef>
-          <a:effectRef idx="2">
-            <a:schemeClr val="accent1"/>
-          </a:effectRef>
-          <a:fontRef idx="minor">
-            <a:schemeClr val="lt1"/>
-          </a:fontRef>
-        </p:style>
-        <p:txBody>
-          <a:bodyPr rtlCol="0" anchor="ctr"/>
-          <a:lstStyle/>
-          <a:p>
-            <a:pPr algn="ctr"/>
-          </a:p>
-        </p:txBody>
-      </p:sp>
-      <p:sp>
-        <p:nvSpPr>
-          <p:cNvPr id="25" name="TextBox 24"/>
-          <p:cNvSpPr txBox="1"/>
-          <p:nvPr/>
-        </p:nvSpPr>
-        <p:spPr>
-          <a:xfrm>
-            <a:off x="10012680" y="1993392"/>
-            <a:ext cx="1444752" cy="256032"/>
-          </a:xfrm>
-          <a:prstGeom prst="rect">
-            <a:avLst/>
-          </a:prstGeom>
-          <a:noFill/>
-        </p:spPr>
-        <p:txBody>
-          <a:bodyPr wrap="square" anchor="t">
-            <a:spAutoFit/>
-          </a:bodyPr>
-          <a:lstStyle/>
-          <a:p>
-            <a:pPr algn="ctr"/>
-            <a:r>
-              <a:rPr sz="1000" b="1">
-                <a:solidFill>
-                  <a:srgbClr val="E8E8DE"/>
-                </a:solidFill>
-                <a:latin typeface="Aptos"/>
-              </a:rPr>
-              <a:t>Answer</a:t>
-            </a:r>
-          </a:p>
-        </p:txBody>
-      </p:sp>
-      <p:sp>
-        <p:nvSpPr>
-          <p:cNvPr id="26" name="Rounded Rectangle 25"/>
-          <p:cNvSpPr/>
-          <p:nvPr/>
-        </p:nvSpPr>
-        <p:spPr>
-          <a:xfrm>
-            <a:off x="713232" y="2971800"/>
-            <a:ext cx="5349240" cy="2788920"/>
-          </a:xfrm>
-          <a:prstGeom prst="roundRect">
-            <a:avLst/>
-          </a:prstGeom>
-          <a:solidFill>
-            <a:srgbClr val="161A19"/>
-          </a:solidFill>
-          <a:ln>
-            <a:solidFill>
-              <a:srgbClr val="595F56"/>
-            </a:solidFill>
-          </a:ln>
-        </p:spPr>
-        <p:style>
-          <a:lnRef idx="1">
-            <a:schemeClr val="accent1"/>
-          </a:lnRef>
-          <a:fillRef idx="3">
-            <a:schemeClr val="accent1"/>
-          </a:fillRef>
-          <a:effectRef idx="2">
-            <a:schemeClr val="accent1"/>
-          </a:effectRef>
-          <a:fontRef idx="minor">
-            <a:schemeClr val="lt1"/>
-          </a:fontRef>
-        </p:style>
-        <p:txBody>
-          <a:bodyPr rtlCol="0" anchor="ctr"/>
-          <a:lstStyle/>
-          <a:p>
-            <a:pPr algn="ctr"/>
-          </a:p>
-        </p:txBody>
-      </p:sp>
-      <p:sp>
-        <p:nvSpPr>
-          <p:cNvPr id="27" name="Rectangle 26"/>
-          <p:cNvSpPr/>
-          <p:nvPr/>
-        </p:nvSpPr>
-        <p:spPr>
-          <a:xfrm>
-            <a:off x="713232" y="2971800"/>
-            <a:ext cx="5349240" cy="109728"/>
-          </a:xfrm>
-          <a:prstGeom prst="rect">
-            <a:avLst/>
-          </a:prstGeom>
-          <a:solidFill>
-            <a:srgbClr val="48BF8F"/>
-          </a:solidFill>
-          <a:ln>
-            <a:noFill/>
-          </a:ln>
-        </p:spPr>
-        <p:style>
-          <a:lnRef idx="1">
-            <a:schemeClr val="accent1"/>
-          </a:lnRef>
-          <a:fillRef idx="3">
-            <a:schemeClr val="accent1"/>
-          </a:fillRef>
-          <a:effectRef idx="2">
-            <a:schemeClr val="accent1"/>
-          </a:effectRef>
-          <a:fontRef idx="minor">
-            <a:schemeClr val="lt1"/>
-          </a:fontRef>
-        </p:style>
-        <p:txBody>
-          <a:bodyPr rtlCol="0" anchor="ctr"/>
-          <a:lstStyle/>
-          <a:p>
-            <a:pPr algn="ctr"/>
-          </a:p>
-        </p:txBody>
-      </p:sp>
-      <p:sp>
-        <p:nvSpPr>
-          <p:cNvPr id="28" name="TextBox 27"/>
-          <p:cNvSpPr txBox="1"/>
-          <p:nvPr/>
-        </p:nvSpPr>
-        <p:spPr>
-          <a:xfrm>
-            <a:off x="914400" y="3172968"/>
-            <a:ext cx="4946903" cy="310896"/>
-          </a:xfrm>
-          <a:prstGeom prst="rect">
-            <a:avLst/>
-          </a:prstGeom>
-          <a:noFill/>
-        </p:spPr>
-        <p:txBody>
-          <a:bodyPr wrap="square" anchor="t">
-            <a:spAutoFit/>
-          </a:bodyPr>
-          <a:lstStyle/>
-          <a:p>
-            <a:pPr algn="l"/>
-            <a:r>
-              <a:rPr sz="1400" b="1">
-                <a:solidFill>
-                  <a:srgbClr val="48BF8F"/>
-                </a:solidFill>
-                <a:latin typeface="Aptos"/>
-              </a:rPr>
-              <a:t>Request path</a:t>
-            </a:r>
-          </a:p>
-        </p:txBody>
-      </p:sp>
-      <p:sp>
-        <p:nvSpPr>
-          <p:cNvPr id="29" name="TextBox 28"/>
-          <p:cNvSpPr txBox="1"/>
-          <p:nvPr/>
-        </p:nvSpPr>
-        <p:spPr>
-          <a:xfrm>
-            <a:off x="914400" y="3630168"/>
-            <a:ext cx="4946903" cy="1984248"/>
-          </a:xfrm>
-          <a:prstGeom prst="rect">
-            <a:avLst/>
-          </a:prstGeom>
-          <a:noFill/>
-        </p:spPr>
-        <p:txBody>
-          <a:bodyPr wrap="square" anchor="t" lIns="38100" rIns="38100" tIns="25400" bIns="25400">
-            <a:noAutofit/>
-          </a:bodyPr>
-          <a:lstStyle/>
-          <a:p>
-            <a:pPr>
-              <a:spcAft>
-                <a:spcPts val="600"/>
-              </a:spcAft>
-              <a:defRPr sz="1500">
-                <a:solidFill>
-                  <a:srgbClr val="B4BAAE"/>
-                </a:solidFill>
-                <a:latin typeface="Aptos"/>
-              </a:defRPr>
-            </a:pPr>
-            <a:r>
-              <a:rPr sz="1500" b="0" i="0">
-                <a:latin typeface="Calibri"/>
-              </a:rPr>
-              <a:t>Browser UI sends chat and workflow requests through Django views and Channels WebSockets.</a:t>
-            </a:r>
-            <a:endParaRPr sz="1500" b="0" i="0">
-              <a:latin typeface="Calibri"/>
-            </a:endParaRPr>
-          </a:p>
-          <a:p>
-            <a:pPr>
-              <a:spcAft>
-                <a:spcPts val="600"/>
-              </a:spcAft>
-              <a:defRPr sz="1500">
-                <a:solidFill>
-                  <a:srgbClr val="B4BAAE"/>
-                </a:solidFill>
-                <a:latin typeface="Aptos"/>
-              </a:defRPr>
-            </a:pPr>
-            <a:r>
-              <a:rPr sz="1500" b="0" i="0">
-                <a:latin typeface="Calibri"/>
-              </a:rPr>
-              <a:t>RAG chains load selected file/directory context, retrieve relevant chunks, and build answer prompts.</a:t>
-            </a:r>
-            <a:endParaRPr sz="1500" b="0" i="0">
-              <a:latin typeface="Calibri"/>
-            </a:endParaRPr>
-          </a:p>
-          <a:p>
-            <a:pPr>
-              <a:spcAft>
-                <a:spcPts val="600"/>
-              </a:spcAft>
-              <a:defRPr sz="1500">
-                <a:solidFill>
-                  <a:srgbClr val="B4BAAE"/>
-                </a:solidFill>
-                <a:latin typeface="Aptos"/>
-              </a:defRPr>
-            </a:pPr>
-            <a:r>
-              <a:rPr sz="1500" b="0" i="0">
-                <a:latin typeface="Calibri"/>
-              </a:rPr>
-              <a:t>DB-menu actions validate directories or SQLite files in the browser, then call Django views that either copy the live database out or stage a replacement into `DB/ToLoad/db.sqlite3`.</a:t>
-            </a:r>
-            <a:endParaRPr sz="1500" b="0" i="0">
-              <a:latin typeface="Calibri"/>
-            </a:endParaRPr>
-          </a:p>
-        </p:txBody>
-      </p:sp>
-      <p:sp>
-        <p:nvSpPr>
-          <p:cNvPr id="30" name="Rounded Rectangle 29"/>
-          <p:cNvSpPr/>
-          <p:nvPr/>
-        </p:nvSpPr>
-        <p:spPr>
-          <a:xfrm>
-            <a:off x="6327648" y="2971800"/>
-            <a:ext cx="5074920" cy="2788920"/>
-          </a:xfrm>
-          <a:prstGeom prst="roundRect">
-            <a:avLst/>
-          </a:prstGeom>
-          <a:solidFill>
-            <a:srgbClr val="161A19"/>
-          </a:solidFill>
-          <a:ln>
-            <a:solidFill>
-              <a:srgbClr val="595F56"/>
-            </a:solidFill>
-          </a:ln>
-        </p:spPr>
-        <p:style>
-          <a:lnRef idx="1">
-            <a:schemeClr val="accent1"/>
-          </a:lnRef>
-          <a:fillRef idx="3">
-            <a:schemeClr val="accent1"/>
-          </a:fillRef>
-          <a:effectRef idx="2">
-            <a:schemeClr val="accent1"/>
-          </a:effectRef>
-          <a:fontRef idx="minor">
-            <a:schemeClr val="lt1"/>
-          </a:fontRef>
-        </p:style>
-        <p:txBody>
-          <a:bodyPr rtlCol="0" anchor="ctr"/>
-          <a:lstStyle/>
-          <a:p>
-            <a:pPr algn="ctr"/>
-          </a:p>
-        </p:txBody>
-      </p:sp>
-      <p:sp>
-        <p:nvSpPr>
-          <p:cNvPr id="31" name="Rectangle 30"/>
-          <p:cNvSpPr/>
-          <p:nvPr/>
-        </p:nvSpPr>
-        <p:spPr>
-          <a:xfrm>
-            <a:off x="6327648" y="2971800"/>
-            <a:ext cx="5074920" cy="109728"/>
-          </a:xfrm>
-          <a:prstGeom prst="rect">
-            <a:avLst/>
-          </a:prstGeom>
-          <a:solidFill>
-            <a:srgbClr val="C48052"/>
-          </a:solidFill>
-          <a:ln>
-            <a:noFill/>
-          </a:ln>
-        </p:spPr>
-        <p:style>
-          <a:lnRef idx="1">
-            <a:schemeClr val="accent1"/>
-          </a:lnRef>
-          <a:fillRef idx="3">
-            <a:schemeClr val="accent1"/>
-          </a:fillRef>
-          <a:effectRef idx="2">
-            <a:schemeClr val="accent1"/>
-          </a:effectRef>
-          <a:fontRef idx="minor">
-            <a:schemeClr val="lt1"/>
-          </a:fontRef>
-        </p:style>
-        <p:txBody>
-          <a:bodyPr rtlCol="0" anchor="ctr"/>
-          <a:lstStyle/>
-          <a:p>
-            <a:pPr algn="ctr"/>
-          </a:p>
-        </p:txBody>
-      </p:sp>
-      <p:sp>
-        <p:nvSpPr>
-          <p:cNvPr id="32" name="TextBox 31"/>
-          <p:cNvSpPr txBox="1"/>
-          <p:nvPr/>
-        </p:nvSpPr>
-        <p:spPr>
-          <a:xfrm>
-            <a:off x="6528816" y="3172968"/>
-            <a:ext cx="4672583" cy="310896"/>
-          </a:xfrm>
-          <a:prstGeom prst="rect">
-            <a:avLst/>
-          </a:prstGeom>
-          <a:noFill/>
-        </p:spPr>
-        <p:txBody>
-          <a:bodyPr wrap="square" anchor="t">
-            <a:spAutoFit/>
-          </a:bodyPr>
-          <a:lstStyle/>
-          <a:p>
-            <a:pPr algn="l"/>
-            <a:r>
-              <a:rPr sz="1400" b="1">
-                <a:solidFill>
-                  <a:srgbClr val="C48052"/>
-                </a:solidFill>
-                <a:latin typeface="Aptos"/>
-              </a:rPr>
-              <a:t>Runtime path</a:t>
-            </a:r>
-          </a:p>
-        </p:txBody>
-      </p:sp>
-      <p:sp>
-        <p:nvSpPr>
-          <p:cNvPr id="33" name="TextBox 32"/>
-          <p:cNvSpPr txBox="1"/>
-          <p:nvPr/>
-        </p:nvSpPr>
-        <p:spPr>
-          <a:xfrm>
-            <a:off x="6528816" y="3630168"/>
-            <a:ext cx="4672583" cy="1984248"/>
-          </a:xfrm>
-          <a:prstGeom prst="rect">
-            <a:avLst/>
-          </a:prstGeom>
-          <a:noFill/>
-        </p:spPr>
-        <p:txBody>
-          <a:bodyPr wrap="square" anchor="t" lIns="38100" rIns="38100" tIns="25400" bIns="25400">
-            <a:noAutofit/>
-          </a:bodyPr>
-          <a:lstStyle/>
-          <a:p>
-            <a:pPr>
-              <a:spcAft>
-                <a:spcPts val="600"/>
-              </a:spcAft>
-              <a:defRPr sz="1500">
-                <a:solidFill>
-                  <a:srgbClr val="B4BAAE"/>
-                </a:solidFill>
-                <a:latin typeface="Aptos"/>
-              </a:defRPr>
-            </a:pPr>
-            <a:r>
-              <a:rPr sz="800" b="0" i="0">
-                <a:latin typeface="Calibri"/>
-              </a:rPr>
-              <a:t>Before a heavy directory embedding run on supported NVIDIA hosts, a fail-open pre-flight guard can estimate VRAM pressure and surface a non-blocking warning in chat.</a:t>
-            </a:r>
-            <a:endParaRPr sz="800" b="0" i="0">
-              <a:latin typeface="Calibri"/>
-            </a:endParaRPr>
-          </a:p>
-          <a:p>
-            <a:pPr>
-              <a:spcAft>
-                <a:spcPts val="600"/>
-              </a:spcAft>
-              <a:defRPr sz="1500">
-                <a:solidFill>
-                  <a:srgbClr val="B4BAAE"/>
-                </a:solidFill>
-                <a:latin typeface="Aptos"/>
-              </a:defRPr>
-            </a:pPr>
-            <a:r>
-              <a:rPr sz="800" b="0" i="0">
-                <a:latin typeface="Calibri"/>
-              </a:rPr>
-              <a:t>Version resolution now flows through git tags, a runtime resolver module, generated build artefacts, and an open `/agent/version/` endpoint.</a:t>
-            </a:r>
-            <a:endParaRPr sz="800" b="0" i="0">
-              <a:latin typeface="Calibri"/>
-            </a:endParaRPr>
-          </a:p>
-          <a:p>
-            <a:pPr>
-              <a:spcAft>
-                <a:spcPts val="600"/>
-              </a:spcAft>
-              <a:defRPr sz="1500">
-                <a:solidFill>
-                  <a:srgbClr val="B4BAAE"/>
-                </a:solidFill>
-                <a:latin typeface="Aptos"/>
-              </a:defRPr>
-            </a:pPr>
-            <a:r>
-              <a:rPr sz="800" b="0" i="0">
-                <a:latin typeface="Calibri"/>
-              </a:rPr>
-              <a:t>When Multi-Turn is enabled, the global planner selects context and tool stages before the executor binds only the relevant tools, including wrapped deterministic agents such as De-Compresser.</a:t>
-            </a:r>
-            <a:endParaRPr sz="800" b="0" i="0">
-              <a:latin typeface="Calibri"/>
-            </a:endParaRPr>
-          </a:p>
-          <a:p>
-            <a:pPr>
-              <a:spcAft>
-                <a:spcPts val="600"/>
-              </a:spcAft>
-              <a:defRPr sz="1500">
-                <a:solidFill>
-                  <a:srgbClr val="B4BAAE"/>
-                </a:solidFill>
-                <a:latin typeface="Aptos"/>
-              </a:defRPr>
-            </a:pPr>
-            <a:r>
-              <a:rPr sz="800" b="0" i="0">
-                <a:latin typeface="Calibri"/>
-              </a:rPr>
-              <a:t>The Playwrighter path loads a declarative step list, drives Playwright against Chromium/Firefox/WebKit, and emits one atomic `INI_SECTION_PLAYWRIGHTER` block with status, assertions, extracted values, and the final URL.</a:t>
-            </a:r>
-            <a:endParaRPr sz="800" b="0" i="0">
-              <a:latin typeface="Calibri"/>
-            </a:endParaRPr>
-          </a:p>
-          <a:p>
-            <a:pPr>
-              <a:spcAft>
-                <a:spcPts val="600"/>
-              </a:spcAft>
-              <a:defRPr sz="1500">
-                <a:solidFill>
-                  <a:srgbClr val="B4BAAE"/>
-                </a:solidFill>
-                <a:latin typeface="Aptos"/>
-              </a:defRPr>
-            </a:pPr>
-            <a:r>
-              <a:rPr sz="800" b="0" i="0">
-                <a:latin typeface="Calibri"/>
-              </a:rPr>
-              <a:t>The Unrealer path opens a TCP socket to the Unreal MCP plugin, sends one `{"type": command, "params": {...}}` payload, captures the JSON reply, and emits one `INI_SECTION_UNREALER` block for downstream logic.</a:t>
-            </a:r>
-            <a:endParaRPr sz="800" b="0" i="0">
-              <a:latin typeface="Calibri"/>
-            </a:endParaRPr>
-          </a:p>
-          <a:p>
-            <a:pPr>
-              <a:spcAft>
-                <a:spcPts val="600"/>
-              </a:spcAft>
-              <a:defRPr sz="1500">
-                <a:solidFill>
-                  <a:srgbClr val="B4BAAE"/>
-                </a:solidFill>
-                <a:latin typeface="Aptos"/>
-              </a:defRPr>
-            </a:pPr>
-            <a:r>
-              <a:rPr sz="800" b="0" i="0">
-                <a:latin typeface="Calibri"/>
-              </a:rPr>
-              <a:t>After spawn-capable tool calls and again after the final answer, the orphan reaper can sweep dead descendants, orphaned `conhost.exe` companions, and stale pool-linked processes without ever raising into the chat path.</a:t>
-            </a:r>
-            <a:endParaRPr sz="800" b="0" i="0">
-              <a:latin typeface="Calibri"/>
-            </a:endParaRPr>
-          </a:p>
-          <a:p>
-            <a:pPr>
-              <a:spcAft>
-                <a:spcPts val="600"/>
-              </a:spcAft>
-              <a:defRPr sz="1500">
-                <a:solidFill>
-                  <a:srgbClr val="B4BAAE"/>
-                </a:solidFill>
-                <a:latin typeface="Aptos"/>
-              </a:defRPr>
-            </a:pPr>
-            <a:r>
-              <a:rPr sz="800" b="0" i="0">
-                <a:latin typeface="Calibri"/>
-              </a:rPr>
-              <a:t>Tool calls execute in the backend, append observations, and may create wrapped runtime copies under `agent/agents/pools/_chat_runs_/`.</a:t>
-            </a:r>
-            <a:endParaRPr sz="800" b="0" i="0">
-              <a:latin typeface="Calibri"/>
-            </a:endParaRPr>
-          </a:p>
-          <a:p>
-            <a:pPr>
-              <a:spcAft>
-                <a:spcPts val="600"/>
-              </a:spcAft>
-              <a:defRPr sz="1500">
-                <a:solidFill>
-                  <a:srgbClr val="B4BAAE"/>
-                </a:solidFill>
-                <a:latin typeface="Aptos"/>
-              </a:defRPr>
-            </a:pPr>
-            <a:r>
-              <a:rPr sz="800" b="0" i="0">
-                <a:latin typeface="Calibri"/>
-              </a:rPr>
-              <a:t>On the next full start-up, `manage.py` can swap a staged database into place before Django imports, while archiving the previous live database under `DB/Older/&lt;timestamp&gt;/`.</a:t>
-            </a:r>
-            <a:endParaRPr sz="800" b="0" i="0">
-              <a:latin typeface="Calibri"/>
-            </a:endParaRPr>
-          </a:p>
-          <a:p>
-            <a:pPr>
-              <a:spcAft>
-                <a:spcPts val="600"/>
-              </a:spcAft>
-              <a:defRPr sz="1500">
-                <a:solidFill>
-                  <a:srgbClr val="B4BAAE"/>
-                </a:solidFill>
-                <a:latin typeface="Aptos"/>
-              </a:defRPr>
-            </a:pPr>
-            <a:r>
-              <a:rPr sz="800" b="0" i="0">
-                <a:latin typeface="Calibri"/>
-              </a:rPr>
-              <a:t>ACP flows deploy session-scoped pool instances, wire config values, validate NxN graph rules, and execute through Starter-driven flow semantics.</a:t>
-            </a:r>
-            <a:endParaRPr sz="800" b="0" i="0">
-              <a:latin typeface="Calibri"/>
-            </a:endParaRPr>
-          </a:p>
-          <a:p>
-            <a:pPr>
-              <a:spcAft>
-                <a:spcPts val="600"/>
-              </a:spcAft>
-              <a:defRPr sz="1500">
-                <a:solidFill>
-                  <a:srgbClr val="B4BAAE"/>
-                </a:solidFill>
-                <a:latin typeface="Aptos"/>
-              </a:defRPr>
-            </a:pPr>
-            <a:r>
-              <a:rPr sz="800" b="0" i="0">
-                <a:latin typeface="Calibri"/>
-              </a:rPr>
-              <a:t>Build scripts collect static assets, bundle Django/Python resources, add agent templates, and assemble `pkg.zip`, `Uninstaller.exe`, and `dist/Tlamatini_Release/`.</a:t>
-            </a:r>
-            <a:endParaRPr sz="800" b="0" i="0">
-              <a:latin typeface="Calibri"/>
-            </a:endParaRPr>
-          </a:p>
-        </p:txBody>
-      </p:sp>
-    </p:spTree>
-  </p:cSld>
-  <p:clrMapOvr>
-    <a:masterClrMapping/>
-  </p:clrMapOvr>
-</p:sld>
-</file>
-
-<file path=ppt/slides/slide40.xml><?xml version="1.0" encoding="utf-8"?>
 <p:sld xmlns:a="http://schemas.openxmlformats.org/drawingml/2006/main" xmlns:p="http://schemas.openxmlformats.org/presentationml/2006/main" xmlns:r="http://schemas.openxmlformats.org/officeDocument/2006/relationships">
   <p:cSld>
     <p:spTree>
@@ -29383,7 +26551,7 @@
 </p:sld>
 </file>
 
-<file path=ppt/slides/slide41.xml><?xml version="1.0" encoding="utf-8"?>
+<file path=ppt/slides/slide39.xml><?xml version="1.0" encoding="utf-8"?>
 <p:sld xmlns:a="http://schemas.openxmlformats.org/drawingml/2006/main" xmlns:p="http://schemas.openxmlformats.org/presentationml/2006/main" xmlns:r="http://schemas.openxmlformats.org/officeDocument/2006/relationships">
   <p:cSld>
     <p:spTree>
@@ -29751,7 +26919,1543 @@
 </p:sld>
 </file>
 
-<file path=ppt/slides/slide42.xml><?xml version="1.0" encoding="utf-8"?>
+<file path=ppt/slides/slide4.xml><?xml version="1.0" encoding="utf-8"?>
+<p:sld xmlns:a="http://schemas.openxmlformats.org/drawingml/2006/main" xmlns:p="http://schemas.openxmlformats.org/presentationml/2006/main" xmlns:r="http://schemas.openxmlformats.org/officeDocument/2006/relationships">
+  <p:cSld>
+    <p:spTree>
+      <p:nvGrpSpPr>
+        <p:cNvPr id="1" name=""/>
+        <p:cNvGrpSpPr/>
+        <p:nvPr/>
+      </p:nvGrpSpPr>
+      <p:grpSpPr/>
+      <p:sp>
+        <p:nvSpPr>
+          <p:cNvPr id="2" name="Rectangle 1"/>
+          <p:cNvSpPr/>
+          <p:nvPr/>
+        </p:nvSpPr>
+        <p:spPr>
+          <a:xfrm>
+            <a:off x="0" y="0"/>
+            <a:ext cx="12191695" cy="6858000"/>
+          </a:xfrm>
+          <a:prstGeom prst="rect">
+            <a:avLst/>
+          </a:prstGeom>
+          <a:solidFill>
+            <a:srgbClr val="080D0D"/>
+          </a:solidFill>
+          <a:ln>
+            <a:noFill/>
+          </a:ln>
+        </p:spPr>
+        <p:style>
+          <a:lnRef idx="1">
+            <a:schemeClr val="accent1"/>
+          </a:lnRef>
+          <a:fillRef idx="3">
+            <a:schemeClr val="accent1"/>
+          </a:fillRef>
+          <a:effectRef idx="2">
+            <a:schemeClr val="accent1"/>
+          </a:effectRef>
+          <a:fontRef idx="minor">
+            <a:schemeClr val="lt1"/>
+          </a:fontRef>
+        </p:style>
+        <p:txBody>
+          <a:bodyPr rtlCol="0" anchor="ctr"/>
+          <a:lstStyle/>
+          <a:p>
+            <a:pPr algn="ctr"/>
+          </a:p>
+        </p:txBody>
+      </p:sp>
+      <p:sp>
+        <p:nvSpPr>
+          <p:cNvPr id="3" name="Rectangle 2"/>
+          <p:cNvSpPr/>
+          <p:nvPr/>
+        </p:nvSpPr>
+        <p:spPr>
+          <a:xfrm>
+            <a:off x="320040" y="384048"/>
+            <a:ext cx="36576" cy="6080760"/>
+          </a:xfrm>
+          <a:prstGeom prst="rect">
+            <a:avLst/>
+          </a:prstGeom>
+          <a:solidFill>
+            <a:srgbClr val="48BF8F"/>
+          </a:solidFill>
+          <a:ln>
+            <a:noFill/>
+          </a:ln>
+        </p:spPr>
+        <p:style>
+          <a:lnRef idx="1">
+            <a:schemeClr val="accent1"/>
+          </a:lnRef>
+          <a:fillRef idx="3">
+            <a:schemeClr val="accent1"/>
+          </a:fillRef>
+          <a:effectRef idx="2">
+            <a:schemeClr val="accent1"/>
+          </a:effectRef>
+          <a:fontRef idx="minor">
+            <a:schemeClr val="lt1"/>
+          </a:fontRef>
+        </p:style>
+        <p:txBody>
+          <a:bodyPr rtlCol="0" anchor="ctr"/>
+          <a:lstStyle/>
+          <a:p>
+            <a:pPr algn="ctr"/>
+          </a:p>
+        </p:txBody>
+      </p:sp>
+      <p:sp>
+        <p:nvSpPr>
+          <p:cNvPr id="4" name="Rectangle 3"/>
+          <p:cNvSpPr/>
+          <p:nvPr/>
+        </p:nvSpPr>
+        <p:spPr>
+          <a:xfrm>
+            <a:off x="11716207" y="384048"/>
+            <a:ext cx="36576" cy="6080760"/>
+          </a:xfrm>
+          <a:prstGeom prst="rect">
+            <a:avLst/>
+          </a:prstGeom>
+          <a:solidFill>
+            <a:srgbClr val="48BF8F"/>
+          </a:solidFill>
+          <a:ln>
+            <a:noFill/>
+          </a:ln>
+        </p:spPr>
+        <p:style>
+          <a:lnRef idx="1">
+            <a:schemeClr val="accent1"/>
+          </a:lnRef>
+          <a:fillRef idx="3">
+            <a:schemeClr val="accent1"/>
+          </a:fillRef>
+          <a:effectRef idx="2">
+            <a:schemeClr val="accent1"/>
+          </a:effectRef>
+          <a:fontRef idx="minor">
+            <a:schemeClr val="lt1"/>
+          </a:fontRef>
+        </p:style>
+        <p:txBody>
+          <a:bodyPr rtlCol="0" anchor="ctr"/>
+          <a:lstStyle/>
+          <a:p>
+            <a:pPr algn="ctr"/>
+          </a:p>
+        </p:txBody>
+      </p:sp>
+      <p:sp>
+        <p:nvSpPr>
+          <p:cNvPr id="5" name="Rectangle 4"/>
+          <p:cNvSpPr/>
+          <p:nvPr/>
+        </p:nvSpPr>
+        <p:spPr>
+          <a:xfrm>
+            <a:off x="502920" y="384048"/>
+            <a:ext cx="11155680" cy="27432"/>
+          </a:xfrm>
+          <a:prstGeom prst="rect">
+            <a:avLst/>
+          </a:prstGeom>
+          <a:solidFill>
+            <a:srgbClr val="48BF8F"/>
+          </a:solidFill>
+          <a:ln>
+            <a:noFill/>
+          </a:ln>
+        </p:spPr>
+        <p:style>
+          <a:lnRef idx="1">
+            <a:schemeClr val="accent1"/>
+          </a:lnRef>
+          <a:fillRef idx="3">
+            <a:schemeClr val="accent1"/>
+          </a:fillRef>
+          <a:effectRef idx="2">
+            <a:schemeClr val="accent1"/>
+          </a:effectRef>
+          <a:fontRef idx="minor">
+            <a:schemeClr val="lt1"/>
+          </a:fontRef>
+        </p:style>
+        <p:txBody>
+          <a:bodyPr rtlCol="0" anchor="ctr"/>
+          <a:lstStyle/>
+          <a:p>
+            <a:pPr algn="ctr"/>
+          </a:p>
+        </p:txBody>
+      </p:sp>
+      <p:sp>
+        <p:nvSpPr>
+          <p:cNvPr id="6" name="Rectangle 5"/>
+          <p:cNvSpPr/>
+          <p:nvPr/>
+        </p:nvSpPr>
+        <p:spPr>
+          <a:xfrm>
+            <a:off x="502920" y="6437376"/>
+            <a:ext cx="11155680" cy="27432"/>
+          </a:xfrm>
+          <a:prstGeom prst="rect">
+            <a:avLst/>
+          </a:prstGeom>
+          <a:solidFill>
+            <a:srgbClr val="48BF8F"/>
+          </a:solidFill>
+          <a:ln>
+            <a:noFill/>
+          </a:ln>
+        </p:spPr>
+        <p:style>
+          <a:lnRef idx="1">
+            <a:schemeClr val="accent1"/>
+          </a:lnRef>
+          <a:fillRef idx="3">
+            <a:schemeClr val="accent1"/>
+          </a:fillRef>
+          <a:effectRef idx="2">
+            <a:schemeClr val="accent1"/>
+          </a:effectRef>
+          <a:fontRef idx="minor">
+            <a:schemeClr val="lt1"/>
+          </a:fontRef>
+        </p:style>
+        <p:txBody>
+          <a:bodyPr rtlCol="0" anchor="ctr"/>
+          <a:lstStyle/>
+          <a:p>
+            <a:pPr algn="ctr"/>
+          </a:p>
+        </p:txBody>
+      </p:sp>
+      <p:sp>
+        <p:nvSpPr>
+          <p:cNvPr id="7" name="TextBox 6"/>
+          <p:cNvSpPr txBox="1"/>
+          <p:nvPr/>
+        </p:nvSpPr>
+        <p:spPr>
+          <a:xfrm>
+            <a:off x="713232" y="548640"/>
+            <a:ext cx="10698480" cy="301752"/>
+          </a:xfrm>
+          <a:prstGeom prst="rect">
+            <a:avLst/>
+          </a:prstGeom>
+          <a:noFill/>
+        </p:spPr>
+        <p:txBody>
+          <a:bodyPr wrap="square" anchor="t">
+            <a:spAutoFit/>
+          </a:bodyPr>
+          <a:lstStyle/>
+          <a:p>
+            <a:pPr algn="l"/>
+            <a:r>
+              <a:rPr sz="1000" b="1">
+                <a:solidFill>
+                  <a:srgbClr val="48BF8F"/>
+                </a:solidFill>
+                <a:latin typeface="Aptos"/>
+              </a:rPr>
+              <a:t>EXECUTION PIPELINE</a:t>
+            </a:r>
+          </a:p>
+        </p:txBody>
+      </p:sp>
+      <p:sp>
+        <p:nvSpPr>
+          <p:cNvPr id="8" name="TextBox 7"/>
+          <p:cNvSpPr txBox="1"/>
+          <p:nvPr/>
+        </p:nvSpPr>
+        <p:spPr>
+          <a:xfrm>
+            <a:off x="694944" y="850392"/>
+            <a:ext cx="10881360" cy="566928"/>
+          </a:xfrm>
+          <a:prstGeom prst="rect">
+            <a:avLst/>
+          </a:prstGeom>
+          <a:noFill/>
+        </p:spPr>
+        <p:txBody>
+          <a:bodyPr wrap="square" anchor="t">
+            <a:spAutoFit/>
+          </a:bodyPr>
+          <a:lstStyle/>
+          <a:p>
+            <a:pPr algn="l"/>
+            <a:r>
+              <a:rPr sz="2700" b="0">
+                <a:solidFill>
+                  <a:srgbClr val="E8E8DE"/>
+                </a:solidFill>
+                <a:latin typeface="Aptos Display"/>
+              </a:rPr>
+              <a:t>How It Works</a:t>
+            </a:r>
+          </a:p>
+        </p:txBody>
+      </p:sp>
+      <p:sp>
+        <p:nvSpPr>
+          <p:cNvPr id="9" name="Rounded Rectangle 8"/>
+          <p:cNvSpPr/>
+          <p:nvPr/>
+        </p:nvSpPr>
+        <p:spPr>
+          <a:xfrm>
+            <a:off x="749808" y="1828800"/>
+            <a:ext cx="1591056" cy="685800"/>
+          </a:xfrm>
+          <a:prstGeom prst="roundRect">
+            <a:avLst/>
+          </a:prstGeom>
+          <a:solidFill>
+            <a:srgbClr val="202322"/>
+          </a:solidFill>
+          <a:ln>
+            <a:solidFill>
+              <a:srgbClr val="48BF8F"/>
+            </a:solidFill>
+          </a:ln>
+        </p:spPr>
+        <p:style>
+          <a:lnRef idx="1">
+            <a:schemeClr val="accent1"/>
+          </a:lnRef>
+          <a:fillRef idx="3">
+            <a:schemeClr val="accent1"/>
+          </a:fillRef>
+          <a:effectRef idx="2">
+            <a:schemeClr val="accent1"/>
+          </a:effectRef>
+          <a:fontRef idx="minor">
+            <a:schemeClr val="lt1"/>
+          </a:fontRef>
+        </p:style>
+        <p:txBody>
+          <a:bodyPr rtlCol="0" anchor="ctr"/>
+          <a:lstStyle/>
+          <a:p>
+            <a:pPr algn="ctr"/>
+          </a:p>
+        </p:txBody>
+      </p:sp>
+      <p:sp>
+        <p:nvSpPr>
+          <p:cNvPr id="10" name="TextBox 9"/>
+          <p:cNvSpPr txBox="1"/>
+          <p:nvPr/>
+        </p:nvSpPr>
+        <p:spPr>
+          <a:xfrm>
+            <a:off x="822959" y="1993392"/>
+            <a:ext cx="1444752" cy="256032"/>
+          </a:xfrm>
+          <a:prstGeom prst="rect">
+            <a:avLst/>
+          </a:prstGeom>
+          <a:noFill/>
+        </p:spPr>
+        <p:txBody>
+          <a:bodyPr wrap="square" anchor="t">
+            <a:spAutoFit/>
+          </a:bodyPr>
+          <a:lstStyle/>
+          <a:p>
+            <a:pPr algn="ctr"/>
+            <a:r>
+              <a:rPr sz="1000" b="1">
+                <a:solidFill>
+                  <a:srgbClr val="E8E8DE"/>
+                </a:solidFill>
+                <a:latin typeface="Aptos"/>
+              </a:rPr>
+              <a:t>Browser</a:t>
+            </a:r>
+          </a:p>
+        </p:txBody>
+      </p:sp>
+      <p:sp>
+        <p:nvSpPr>
+          <p:cNvPr id="11" name="TextBox 10"/>
+          <p:cNvSpPr txBox="1"/>
+          <p:nvPr/>
+        </p:nvSpPr>
+        <p:spPr>
+          <a:xfrm>
+            <a:off x="2340864" y="2002536"/>
+            <a:ext cx="246888" cy="182880"/>
+          </a:xfrm>
+          <a:prstGeom prst="rect">
+            <a:avLst/>
+          </a:prstGeom>
+          <a:noFill/>
+        </p:spPr>
+        <p:txBody>
+          <a:bodyPr wrap="square" anchor="t">
+            <a:spAutoFit/>
+          </a:bodyPr>
+          <a:lstStyle/>
+          <a:p>
+            <a:pPr algn="ctr"/>
+            <a:r>
+              <a:rPr sz="1200" b="1">
+                <a:solidFill>
+                  <a:srgbClr val="48BF8F"/>
+                </a:solidFill>
+                <a:latin typeface="Aptos"/>
+              </a:rPr>
+              <a:t>&gt;</a:t>
+            </a:r>
+          </a:p>
+        </p:txBody>
+      </p:sp>
+      <p:sp>
+        <p:nvSpPr>
+          <p:cNvPr id="12" name="Rounded Rectangle 11"/>
+          <p:cNvSpPr/>
+          <p:nvPr/>
+        </p:nvSpPr>
+        <p:spPr>
+          <a:xfrm>
+            <a:off x="2587751" y="1828800"/>
+            <a:ext cx="1591056" cy="685800"/>
+          </a:xfrm>
+          <a:prstGeom prst="roundRect">
+            <a:avLst/>
+          </a:prstGeom>
+          <a:solidFill>
+            <a:srgbClr val="202322"/>
+          </a:solidFill>
+          <a:ln>
+            <a:solidFill>
+              <a:srgbClr val="48BF8F"/>
+            </a:solidFill>
+          </a:ln>
+        </p:spPr>
+        <p:style>
+          <a:lnRef idx="1">
+            <a:schemeClr val="accent1"/>
+          </a:lnRef>
+          <a:fillRef idx="3">
+            <a:schemeClr val="accent1"/>
+          </a:fillRef>
+          <a:effectRef idx="2">
+            <a:schemeClr val="accent1"/>
+          </a:effectRef>
+          <a:fontRef idx="minor">
+            <a:schemeClr val="lt1"/>
+          </a:fontRef>
+        </p:style>
+        <p:txBody>
+          <a:bodyPr rtlCol="0" anchor="ctr"/>
+          <a:lstStyle/>
+          <a:p>
+            <a:pPr algn="ctr"/>
+          </a:p>
+        </p:txBody>
+      </p:sp>
+      <p:sp>
+        <p:nvSpPr>
+          <p:cNvPr id="13" name="TextBox 12"/>
+          <p:cNvSpPr txBox="1"/>
+          <p:nvPr/>
+        </p:nvSpPr>
+        <p:spPr>
+          <a:xfrm>
+            <a:off x="2660903" y="1993392"/>
+            <a:ext cx="1444752" cy="256032"/>
+          </a:xfrm>
+          <a:prstGeom prst="rect">
+            <a:avLst/>
+          </a:prstGeom>
+          <a:noFill/>
+        </p:spPr>
+        <p:txBody>
+          <a:bodyPr wrap="square" anchor="t">
+            <a:spAutoFit/>
+          </a:bodyPr>
+          <a:lstStyle/>
+          <a:p>
+            <a:pPr algn="ctr"/>
+            <a:r>
+              <a:rPr sz="1000" b="1">
+                <a:solidFill>
+                  <a:srgbClr val="E8E8DE"/>
+                </a:solidFill>
+                <a:latin typeface="Aptos"/>
+              </a:rPr>
+              <a:t>Channels</a:t>
+            </a:r>
+          </a:p>
+        </p:txBody>
+      </p:sp>
+      <p:sp>
+        <p:nvSpPr>
+          <p:cNvPr id="14" name="TextBox 13"/>
+          <p:cNvSpPr txBox="1"/>
+          <p:nvPr/>
+        </p:nvSpPr>
+        <p:spPr>
+          <a:xfrm>
+            <a:off x="4178807" y="2002536"/>
+            <a:ext cx="246888" cy="182880"/>
+          </a:xfrm>
+          <a:prstGeom prst="rect">
+            <a:avLst/>
+          </a:prstGeom>
+          <a:noFill/>
+        </p:spPr>
+        <p:txBody>
+          <a:bodyPr wrap="square" anchor="t">
+            <a:spAutoFit/>
+          </a:bodyPr>
+          <a:lstStyle/>
+          <a:p>
+            <a:pPr algn="ctr"/>
+            <a:r>
+              <a:rPr sz="1200" b="1">
+                <a:solidFill>
+                  <a:srgbClr val="48BF8F"/>
+                </a:solidFill>
+                <a:latin typeface="Aptos"/>
+              </a:rPr>
+              <a:t>&gt;</a:t>
+            </a:r>
+          </a:p>
+        </p:txBody>
+      </p:sp>
+      <p:sp>
+        <p:nvSpPr>
+          <p:cNvPr id="15" name="Rounded Rectangle 14"/>
+          <p:cNvSpPr/>
+          <p:nvPr/>
+        </p:nvSpPr>
+        <p:spPr>
+          <a:xfrm>
+            <a:off x="4425696" y="1828800"/>
+            <a:ext cx="1591056" cy="685800"/>
+          </a:xfrm>
+          <a:prstGeom prst="roundRect">
+            <a:avLst/>
+          </a:prstGeom>
+          <a:solidFill>
+            <a:srgbClr val="202322"/>
+          </a:solidFill>
+          <a:ln>
+            <a:solidFill>
+              <a:srgbClr val="48BF8F"/>
+            </a:solidFill>
+          </a:ln>
+        </p:spPr>
+        <p:style>
+          <a:lnRef idx="1">
+            <a:schemeClr val="accent1"/>
+          </a:lnRef>
+          <a:fillRef idx="3">
+            <a:schemeClr val="accent1"/>
+          </a:fillRef>
+          <a:effectRef idx="2">
+            <a:schemeClr val="accent1"/>
+          </a:effectRef>
+          <a:fontRef idx="minor">
+            <a:schemeClr val="lt1"/>
+          </a:fontRef>
+        </p:style>
+        <p:txBody>
+          <a:bodyPr rtlCol="0" anchor="ctr"/>
+          <a:lstStyle/>
+          <a:p>
+            <a:pPr algn="ctr"/>
+          </a:p>
+        </p:txBody>
+      </p:sp>
+      <p:sp>
+        <p:nvSpPr>
+          <p:cNvPr id="16" name="TextBox 15"/>
+          <p:cNvSpPr txBox="1"/>
+          <p:nvPr/>
+        </p:nvSpPr>
+        <p:spPr>
+          <a:xfrm>
+            <a:off x="4498848" y="1993392"/>
+            <a:ext cx="1444752" cy="256032"/>
+          </a:xfrm>
+          <a:prstGeom prst="rect">
+            <a:avLst/>
+          </a:prstGeom>
+          <a:noFill/>
+        </p:spPr>
+        <p:txBody>
+          <a:bodyPr wrap="square" anchor="t">
+            <a:spAutoFit/>
+          </a:bodyPr>
+          <a:lstStyle/>
+          <a:p>
+            <a:pPr algn="ctr"/>
+            <a:r>
+              <a:rPr sz="1000" b="1">
+                <a:solidFill>
+                  <a:srgbClr val="E8E8DE"/>
+                </a:solidFill>
+                <a:latin typeface="Aptos"/>
+              </a:rPr>
+              <a:t>RAG</a:t>
+            </a:r>
+          </a:p>
+        </p:txBody>
+      </p:sp>
+      <p:sp>
+        <p:nvSpPr>
+          <p:cNvPr id="17" name="TextBox 16"/>
+          <p:cNvSpPr txBox="1"/>
+          <p:nvPr/>
+        </p:nvSpPr>
+        <p:spPr>
+          <a:xfrm>
+            <a:off x="6016752" y="2002536"/>
+            <a:ext cx="246888" cy="182880"/>
+          </a:xfrm>
+          <a:prstGeom prst="rect">
+            <a:avLst/>
+          </a:prstGeom>
+          <a:noFill/>
+        </p:spPr>
+        <p:txBody>
+          <a:bodyPr wrap="square" anchor="t">
+            <a:spAutoFit/>
+          </a:bodyPr>
+          <a:lstStyle/>
+          <a:p>
+            <a:pPr algn="ctr"/>
+            <a:r>
+              <a:rPr sz="1200" b="1">
+                <a:solidFill>
+                  <a:srgbClr val="48BF8F"/>
+                </a:solidFill>
+                <a:latin typeface="Aptos"/>
+              </a:rPr>
+              <a:t>&gt;</a:t>
+            </a:r>
+          </a:p>
+        </p:txBody>
+      </p:sp>
+      <p:sp>
+        <p:nvSpPr>
+          <p:cNvPr id="18" name="Rounded Rectangle 17"/>
+          <p:cNvSpPr/>
+          <p:nvPr/>
+        </p:nvSpPr>
+        <p:spPr>
+          <a:xfrm>
+            <a:off x="6263640" y="1828800"/>
+            <a:ext cx="1591056" cy="685800"/>
+          </a:xfrm>
+          <a:prstGeom prst="roundRect">
+            <a:avLst/>
+          </a:prstGeom>
+          <a:solidFill>
+            <a:srgbClr val="202322"/>
+          </a:solidFill>
+          <a:ln>
+            <a:solidFill>
+              <a:srgbClr val="48BF8F"/>
+            </a:solidFill>
+          </a:ln>
+        </p:spPr>
+        <p:style>
+          <a:lnRef idx="1">
+            <a:schemeClr val="accent1"/>
+          </a:lnRef>
+          <a:fillRef idx="3">
+            <a:schemeClr val="accent1"/>
+          </a:fillRef>
+          <a:effectRef idx="2">
+            <a:schemeClr val="accent1"/>
+          </a:effectRef>
+          <a:fontRef idx="minor">
+            <a:schemeClr val="lt1"/>
+          </a:fontRef>
+        </p:style>
+        <p:txBody>
+          <a:bodyPr rtlCol="0" anchor="ctr"/>
+          <a:lstStyle/>
+          <a:p>
+            <a:pPr algn="ctr"/>
+          </a:p>
+        </p:txBody>
+      </p:sp>
+      <p:sp>
+        <p:nvSpPr>
+          <p:cNvPr id="19" name="TextBox 18"/>
+          <p:cNvSpPr txBox="1"/>
+          <p:nvPr/>
+        </p:nvSpPr>
+        <p:spPr>
+          <a:xfrm>
+            <a:off x="6336792" y="1993392"/>
+            <a:ext cx="1444752" cy="256032"/>
+          </a:xfrm>
+          <a:prstGeom prst="rect">
+            <a:avLst/>
+          </a:prstGeom>
+          <a:noFill/>
+        </p:spPr>
+        <p:txBody>
+          <a:bodyPr wrap="square" anchor="t">
+            <a:spAutoFit/>
+          </a:bodyPr>
+          <a:lstStyle/>
+          <a:p>
+            <a:pPr algn="ctr"/>
+            <a:r>
+              <a:rPr sz="1000" b="1">
+                <a:solidFill>
+                  <a:srgbClr val="E8E8DE"/>
+                </a:solidFill>
+                <a:latin typeface="Aptos"/>
+              </a:rPr>
+              <a:t>Planner</a:t>
+            </a:r>
+          </a:p>
+        </p:txBody>
+      </p:sp>
+      <p:sp>
+        <p:nvSpPr>
+          <p:cNvPr id="20" name="TextBox 19"/>
+          <p:cNvSpPr txBox="1"/>
+          <p:nvPr/>
+        </p:nvSpPr>
+        <p:spPr>
+          <a:xfrm>
+            <a:off x="7854696" y="2002536"/>
+            <a:ext cx="246888" cy="182880"/>
+          </a:xfrm>
+          <a:prstGeom prst="rect">
+            <a:avLst/>
+          </a:prstGeom>
+          <a:noFill/>
+        </p:spPr>
+        <p:txBody>
+          <a:bodyPr wrap="square" anchor="t">
+            <a:spAutoFit/>
+          </a:bodyPr>
+          <a:lstStyle/>
+          <a:p>
+            <a:pPr algn="ctr"/>
+            <a:r>
+              <a:rPr sz="1200" b="1">
+                <a:solidFill>
+                  <a:srgbClr val="48BF8F"/>
+                </a:solidFill>
+                <a:latin typeface="Aptos"/>
+              </a:rPr>
+              <a:t>&gt;</a:t>
+            </a:r>
+          </a:p>
+        </p:txBody>
+      </p:sp>
+      <p:sp>
+        <p:nvSpPr>
+          <p:cNvPr id="21" name="Rounded Rectangle 20"/>
+          <p:cNvSpPr/>
+          <p:nvPr/>
+        </p:nvSpPr>
+        <p:spPr>
+          <a:xfrm>
+            <a:off x="8101583" y="1828800"/>
+            <a:ext cx="1591056" cy="685800"/>
+          </a:xfrm>
+          <a:prstGeom prst="roundRect">
+            <a:avLst/>
+          </a:prstGeom>
+          <a:solidFill>
+            <a:srgbClr val="202322"/>
+          </a:solidFill>
+          <a:ln>
+            <a:solidFill>
+              <a:srgbClr val="48BF8F"/>
+            </a:solidFill>
+          </a:ln>
+        </p:spPr>
+        <p:style>
+          <a:lnRef idx="1">
+            <a:schemeClr val="accent1"/>
+          </a:lnRef>
+          <a:fillRef idx="3">
+            <a:schemeClr val="accent1"/>
+          </a:fillRef>
+          <a:effectRef idx="2">
+            <a:schemeClr val="accent1"/>
+          </a:effectRef>
+          <a:fontRef idx="minor">
+            <a:schemeClr val="lt1"/>
+          </a:fontRef>
+        </p:style>
+        <p:txBody>
+          <a:bodyPr rtlCol="0" anchor="ctr"/>
+          <a:lstStyle/>
+          <a:p>
+            <a:pPr algn="ctr"/>
+          </a:p>
+        </p:txBody>
+      </p:sp>
+      <p:sp>
+        <p:nvSpPr>
+          <p:cNvPr id="22" name="TextBox 21"/>
+          <p:cNvSpPr txBox="1"/>
+          <p:nvPr/>
+        </p:nvSpPr>
+        <p:spPr>
+          <a:xfrm>
+            <a:off x="8174736" y="1993392"/>
+            <a:ext cx="1444752" cy="256032"/>
+          </a:xfrm>
+          <a:prstGeom prst="rect">
+            <a:avLst/>
+          </a:prstGeom>
+          <a:noFill/>
+        </p:spPr>
+        <p:txBody>
+          <a:bodyPr wrap="square" anchor="t">
+            <a:spAutoFit/>
+          </a:bodyPr>
+          <a:lstStyle/>
+          <a:p>
+            <a:pPr algn="ctr"/>
+            <a:r>
+              <a:rPr sz="1000" b="1">
+                <a:solidFill>
+                  <a:srgbClr val="E8E8DE"/>
+                </a:solidFill>
+                <a:latin typeface="Aptos"/>
+              </a:rPr>
+              <a:t>Tools</a:t>
+            </a:r>
+          </a:p>
+        </p:txBody>
+      </p:sp>
+      <p:sp>
+        <p:nvSpPr>
+          <p:cNvPr id="23" name="TextBox 22"/>
+          <p:cNvSpPr txBox="1"/>
+          <p:nvPr/>
+        </p:nvSpPr>
+        <p:spPr>
+          <a:xfrm>
+            <a:off x="9692640" y="2002536"/>
+            <a:ext cx="246888" cy="182880"/>
+          </a:xfrm>
+          <a:prstGeom prst="rect">
+            <a:avLst/>
+          </a:prstGeom>
+          <a:noFill/>
+        </p:spPr>
+        <p:txBody>
+          <a:bodyPr wrap="square" anchor="t">
+            <a:spAutoFit/>
+          </a:bodyPr>
+          <a:lstStyle/>
+          <a:p>
+            <a:pPr algn="ctr"/>
+            <a:r>
+              <a:rPr sz="1200" b="1">
+                <a:solidFill>
+                  <a:srgbClr val="48BF8F"/>
+                </a:solidFill>
+                <a:latin typeface="Aptos"/>
+              </a:rPr>
+              <a:t>&gt;</a:t>
+            </a:r>
+          </a:p>
+        </p:txBody>
+      </p:sp>
+      <p:sp>
+        <p:nvSpPr>
+          <p:cNvPr id="24" name="Rounded Rectangle 23"/>
+          <p:cNvSpPr/>
+          <p:nvPr/>
+        </p:nvSpPr>
+        <p:spPr>
+          <a:xfrm>
+            <a:off x="9939528" y="1828800"/>
+            <a:ext cx="1591056" cy="685800"/>
+          </a:xfrm>
+          <a:prstGeom prst="roundRect">
+            <a:avLst/>
+          </a:prstGeom>
+          <a:solidFill>
+            <a:srgbClr val="202322"/>
+          </a:solidFill>
+          <a:ln>
+            <a:solidFill>
+              <a:srgbClr val="48BF8F"/>
+            </a:solidFill>
+          </a:ln>
+        </p:spPr>
+        <p:style>
+          <a:lnRef idx="1">
+            <a:schemeClr val="accent1"/>
+          </a:lnRef>
+          <a:fillRef idx="3">
+            <a:schemeClr val="accent1"/>
+          </a:fillRef>
+          <a:effectRef idx="2">
+            <a:schemeClr val="accent1"/>
+          </a:effectRef>
+          <a:fontRef idx="minor">
+            <a:schemeClr val="lt1"/>
+          </a:fontRef>
+        </p:style>
+        <p:txBody>
+          <a:bodyPr rtlCol="0" anchor="ctr"/>
+          <a:lstStyle/>
+          <a:p>
+            <a:pPr algn="ctr"/>
+          </a:p>
+        </p:txBody>
+      </p:sp>
+      <p:sp>
+        <p:nvSpPr>
+          <p:cNvPr id="25" name="TextBox 24"/>
+          <p:cNvSpPr txBox="1"/>
+          <p:nvPr/>
+        </p:nvSpPr>
+        <p:spPr>
+          <a:xfrm>
+            <a:off x="10012680" y="1993392"/>
+            <a:ext cx="1444752" cy="256032"/>
+          </a:xfrm>
+          <a:prstGeom prst="rect">
+            <a:avLst/>
+          </a:prstGeom>
+          <a:noFill/>
+        </p:spPr>
+        <p:txBody>
+          <a:bodyPr wrap="square" anchor="t">
+            <a:spAutoFit/>
+          </a:bodyPr>
+          <a:lstStyle/>
+          <a:p>
+            <a:pPr algn="ctr"/>
+            <a:r>
+              <a:rPr sz="1000" b="1">
+                <a:solidFill>
+                  <a:srgbClr val="E8E8DE"/>
+                </a:solidFill>
+                <a:latin typeface="Aptos"/>
+              </a:rPr>
+              <a:t>Answer</a:t>
+            </a:r>
+          </a:p>
+        </p:txBody>
+      </p:sp>
+      <p:sp>
+        <p:nvSpPr>
+          <p:cNvPr id="26" name="Rounded Rectangle 25"/>
+          <p:cNvSpPr/>
+          <p:nvPr/>
+        </p:nvSpPr>
+        <p:spPr>
+          <a:xfrm>
+            <a:off x="713232" y="2971800"/>
+            <a:ext cx="5349240" cy="2788920"/>
+          </a:xfrm>
+          <a:prstGeom prst="roundRect">
+            <a:avLst/>
+          </a:prstGeom>
+          <a:solidFill>
+            <a:srgbClr val="161A19"/>
+          </a:solidFill>
+          <a:ln>
+            <a:solidFill>
+              <a:srgbClr val="595F56"/>
+            </a:solidFill>
+          </a:ln>
+        </p:spPr>
+        <p:style>
+          <a:lnRef idx="1">
+            <a:schemeClr val="accent1"/>
+          </a:lnRef>
+          <a:fillRef idx="3">
+            <a:schemeClr val="accent1"/>
+          </a:fillRef>
+          <a:effectRef idx="2">
+            <a:schemeClr val="accent1"/>
+          </a:effectRef>
+          <a:fontRef idx="minor">
+            <a:schemeClr val="lt1"/>
+          </a:fontRef>
+        </p:style>
+        <p:txBody>
+          <a:bodyPr rtlCol="0" anchor="ctr"/>
+          <a:lstStyle/>
+          <a:p>
+            <a:pPr algn="ctr"/>
+          </a:p>
+        </p:txBody>
+      </p:sp>
+      <p:sp>
+        <p:nvSpPr>
+          <p:cNvPr id="27" name="Rectangle 26"/>
+          <p:cNvSpPr/>
+          <p:nvPr/>
+        </p:nvSpPr>
+        <p:spPr>
+          <a:xfrm>
+            <a:off x="713232" y="2971800"/>
+            <a:ext cx="5349240" cy="109728"/>
+          </a:xfrm>
+          <a:prstGeom prst="rect">
+            <a:avLst/>
+          </a:prstGeom>
+          <a:solidFill>
+            <a:srgbClr val="48BF8F"/>
+          </a:solidFill>
+          <a:ln>
+            <a:noFill/>
+          </a:ln>
+        </p:spPr>
+        <p:style>
+          <a:lnRef idx="1">
+            <a:schemeClr val="accent1"/>
+          </a:lnRef>
+          <a:fillRef idx="3">
+            <a:schemeClr val="accent1"/>
+          </a:fillRef>
+          <a:effectRef idx="2">
+            <a:schemeClr val="accent1"/>
+          </a:effectRef>
+          <a:fontRef idx="minor">
+            <a:schemeClr val="lt1"/>
+          </a:fontRef>
+        </p:style>
+        <p:txBody>
+          <a:bodyPr rtlCol="0" anchor="ctr"/>
+          <a:lstStyle/>
+          <a:p>
+            <a:pPr algn="ctr"/>
+          </a:p>
+        </p:txBody>
+      </p:sp>
+      <p:sp>
+        <p:nvSpPr>
+          <p:cNvPr id="28" name="TextBox 27"/>
+          <p:cNvSpPr txBox="1"/>
+          <p:nvPr/>
+        </p:nvSpPr>
+        <p:spPr>
+          <a:xfrm>
+            <a:off x="914400" y="3172968"/>
+            <a:ext cx="4946903" cy="310896"/>
+          </a:xfrm>
+          <a:prstGeom prst="rect">
+            <a:avLst/>
+          </a:prstGeom>
+          <a:noFill/>
+        </p:spPr>
+        <p:txBody>
+          <a:bodyPr wrap="square" anchor="t">
+            <a:spAutoFit/>
+          </a:bodyPr>
+          <a:lstStyle/>
+          <a:p>
+            <a:pPr algn="l"/>
+            <a:r>
+              <a:rPr sz="1400" b="1">
+                <a:solidFill>
+                  <a:srgbClr val="48BF8F"/>
+                </a:solidFill>
+                <a:latin typeface="Aptos"/>
+              </a:rPr>
+              <a:t>Request path</a:t>
+            </a:r>
+          </a:p>
+        </p:txBody>
+      </p:sp>
+      <p:sp>
+        <p:nvSpPr>
+          <p:cNvPr id="29" name="TextBox 28"/>
+          <p:cNvSpPr txBox="1"/>
+          <p:nvPr/>
+        </p:nvSpPr>
+        <p:spPr>
+          <a:xfrm>
+            <a:off x="914400" y="3630168"/>
+            <a:ext cx="4946903" cy="1984248"/>
+          </a:xfrm>
+          <a:prstGeom prst="rect">
+            <a:avLst/>
+          </a:prstGeom>
+          <a:noFill/>
+        </p:spPr>
+        <p:txBody>
+          <a:bodyPr wrap="square" anchor="t" lIns="38100" rIns="38100" tIns="25400" bIns="25400">
+            <a:noAutofit/>
+          </a:bodyPr>
+          <a:lstStyle/>
+          <a:p>
+            <a:pPr>
+              <a:spcAft>
+                <a:spcPts val="600"/>
+              </a:spcAft>
+              <a:defRPr sz="1500">
+                <a:solidFill>
+                  <a:srgbClr val="B4BAAE"/>
+                </a:solidFill>
+                <a:latin typeface="Aptos"/>
+              </a:defRPr>
+            </a:pPr>
+            <a:r>
+              <a:rPr sz="1500" b="0" i="0">
+                <a:latin typeface="Calibri"/>
+              </a:rPr>
+              <a:t>Browser UI sends chat and workflow requests through Django views and Channels WebSockets.</a:t>
+            </a:r>
+            <a:endParaRPr sz="1500" b="0" i="0">
+              <a:latin typeface="Calibri"/>
+            </a:endParaRPr>
+          </a:p>
+          <a:p>
+            <a:pPr>
+              <a:spcAft>
+                <a:spcPts val="600"/>
+              </a:spcAft>
+              <a:defRPr sz="1500">
+                <a:solidFill>
+                  <a:srgbClr val="B4BAAE"/>
+                </a:solidFill>
+                <a:latin typeface="Aptos"/>
+              </a:defRPr>
+            </a:pPr>
+            <a:r>
+              <a:rPr sz="1500" b="0" i="0">
+                <a:latin typeface="Calibri"/>
+              </a:rPr>
+              <a:t>RAG chains load selected file/directory context, retrieve relevant chunks, and build answer prompts.</a:t>
+            </a:r>
+            <a:endParaRPr sz="1500" b="0" i="0">
+              <a:latin typeface="Calibri"/>
+            </a:endParaRPr>
+          </a:p>
+          <a:p>
+            <a:pPr>
+              <a:spcAft>
+                <a:spcPts val="600"/>
+              </a:spcAft>
+              <a:defRPr sz="1500">
+                <a:solidFill>
+                  <a:srgbClr val="B4BAAE"/>
+                </a:solidFill>
+                <a:latin typeface="Aptos"/>
+              </a:defRPr>
+            </a:pPr>
+            <a:r>
+              <a:rPr sz="1500" b="0" i="0">
+                <a:latin typeface="Calibri"/>
+              </a:rPr>
+              <a:t>DB-menu actions validate directories or SQLite files in the browser, then call Django views that either copy the live database out or stage a replacement into `DB/ToLoad/db.sqlite3`.</a:t>
+            </a:r>
+            <a:endParaRPr sz="1500" b="0" i="0">
+              <a:latin typeface="Calibri"/>
+            </a:endParaRPr>
+          </a:p>
+        </p:txBody>
+      </p:sp>
+      <p:sp>
+        <p:nvSpPr>
+          <p:cNvPr id="30" name="Rounded Rectangle 29"/>
+          <p:cNvSpPr/>
+          <p:nvPr/>
+        </p:nvSpPr>
+        <p:spPr>
+          <a:xfrm>
+            <a:off x="6327648" y="2971800"/>
+            <a:ext cx="5074920" cy="2788920"/>
+          </a:xfrm>
+          <a:prstGeom prst="roundRect">
+            <a:avLst/>
+          </a:prstGeom>
+          <a:solidFill>
+            <a:srgbClr val="161A19"/>
+          </a:solidFill>
+          <a:ln>
+            <a:solidFill>
+              <a:srgbClr val="595F56"/>
+            </a:solidFill>
+          </a:ln>
+        </p:spPr>
+        <p:style>
+          <a:lnRef idx="1">
+            <a:schemeClr val="accent1"/>
+          </a:lnRef>
+          <a:fillRef idx="3">
+            <a:schemeClr val="accent1"/>
+          </a:fillRef>
+          <a:effectRef idx="2">
+            <a:schemeClr val="accent1"/>
+          </a:effectRef>
+          <a:fontRef idx="minor">
+            <a:schemeClr val="lt1"/>
+          </a:fontRef>
+        </p:style>
+        <p:txBody>
+          <a:bodyPr rtlCol="0" anchor="ctr"/>
+          <a:lstStyle/>
+          <a:p>
+            <a:pPr algn="ctr"/>
+          </a:p>
+        </p:txBody>
+      </p:sp>
+      <p:sp>
+        <p:nvSpPr>
+          <p:cNvPr id="31" name="Rectangle 30"/>
+          <p:cNvSpPr/>
+          <p:nvPr/>
+        </p:nvSpPr>
+        <p:spPr>
+          <a:xfrm>
+            <a:off x="6327648" y="2971800"/>
+            <a:ext cx="5074920" cy="109728"/>
+          </a:xfrm>
+          <a:prstGeom prst="rect">
+            <a:avLst/>
+          </a:prstGeom>
+          <a:solidFill>
+            <a:srgbClr val="C48052"/>
+          </a:solidFill>
+          <a:ln>
+            <a:noFill/>
+          </a:ln>
+        </p:spPr>
+        <p:style>
+          <a:lnRef idx="1">
+            <a:schemeClr val="accent1"/>
+          </a:lnRef>
+          <a:fillRef idx="3">
+            <a:schemeClr val="accent1"/>
+          </a:fillRef>
+          <a:effectRef idx="2">
+            <a:schemeClr val="accent1"/>
+          </a:effectRef>
+          <a:fontRef idx="minor">
+            <a:schemeClr val="lt1"/>
+          </a:fontRef>
+        </p:style>
+        <p:txBody>
+          <a:bodyPr rtlCol="0" anchor="ctr"/>
+          <a:lstStyle/>
+          <a:p>
+            <a:pPr algn="ctr"/>
+          </a:p>
+        </p:txBody>
+      </p:sp>
+      <p:sp>
+        <p:nvSpPr>
+          <p:cNvPr id="32" name="TextBox 31"/>
+          <p:cNvSpPr txBox="1"/>
+          <p:nvPr/>
+        </p:nvSpPr>
+        <p:spPr>
+          <a:xfrm>
+            <a:off x="6528816" y="3172968"/>
+            <a:ext cx="4672583" cy="310896"/>
+          </a:xfrm>
+          <a:prstGeom prst="rect">
+            <a:avLst/>
+          </a:prstGeom>
+          <a:noFill/>
+        </p:spPr>
+        <p:txBody>
+          <a:bodyPr wrap="square" anchor="t">
+            <a:spAutoFit/>
+          </a:bodyPr>
+          <a:lstStyle/>
+          <a:p>
+            <a:pPr algn="l"/>
+            <a:r>
+              <a:rPr sz="1400" b="1">
+                <a:solidFill>
+                  <a:srgbClr val="C48052"/>
+                </a:solidFill>
+                <a:latin typeface="Aptos"/>
+              </a:rPr>
+              <a:t>Runtime path</a:t>
+            </a:r>
+          </a:p>
+        </p:txBody>
+      </p:sp>
+      <p:sp>
+        <p:nvSpPr>
+          <p:cNvPr id="33" name="TextBox 32"/>
+          <p:cNvSpPr txBox="1"/>
+          <p:nvPr/>
+        </p:nvSpPr>
+        <p:spPr>
+          <a:xfrm>
+            <a:off x="6528816" y="3630168"/>
+            <a:ext cx="4672583" cy="1984248"/>
+          </a:xfrm>
+          <a:prstGeom prst="rect">
+            <a:avLst/>
+          </a:prstGeom>
+          <a:noFill/>
+        </p:spPr>
+        <p:txBody>
+          <a:bodyPr wrap="square" anchor="t" lIns="38100" rIns="38100" tIns="25400" bIns="25400">
+            <a:noAutofit/>
+          </a:bodyPr>
+          <a:lstStyle/>
+          <a:p>
+            <a:pPr>
+              <a:spcAft>
+                <a:spcPts val="600"/>
+              </a:spcAft>
+              <a:defRPr sz="1500">
+                <a:solidFill>
+                  <a:srgbClr val="B4BAAE"/>
+                </a:solidFill>
+                <a:latin typeface="Aptos"/>
+              </a:defRPr>
+            </a:pPr>
+            <a:r>
+              <a:rPr sz="800" b="0" i="0">
+                <a:latin typeface="Calibri"/>
+              </a:rPr>
+              <a:t>Before a heavy directory embedding run on supported NVIDIA hosts, a fail-open pre-flight guard can estimate VRAM pressure and surface a non-blocking warning in chat.</a:t>
+            </a:r>
+            <a:endParaRPr sz="800" b="0" i="0">
+              <a:latin typeface="Calibri"/>
+            </a:endParaRPr>
+          </a:p>
+          <a:p>
+            <a:pPr>
+              <a:spcAft>
+                <a:spcPts val="600"/>
+              </a:spcAft>
+              <a:defRPr sz="1500">
+                <a:solidFill>
+                  <a:srgbClr val="B4BAAE"/>
+                </a:solidFill>
+                <a:latin typeface="Aptos"/>
+              </a:defRPr>
+            </a:pPr>
+            <a:r>
+              <a:rPr sz="800" b="0" i="0">
+                <a:latin typeface="Calibri"/>
+              </a:rPr>
+              <a:t>Version resolution now flows through git tags, a runtime resolver module, generated build artefacts, and an open `/agent/version/` endpoint.</a:t>
+            </a:r>
+            <a:endParaRPr sz="800" b="0" i="0">
+              <a:latin typeface="Calibri"/>
+            </a:endParaRPr>
+          </a:p>
+          <a:p>
+            <a:pPr>
+              <a:spcAft>
+                <a:spcPts val="600"/>
+              </a:spcAft>
+              <a:defRPr sz="1500">
+                <a:solidFill>
+                  <a:srgbClr val="B4BAAE"/>
+                </a:solidFill>
+                <a:latin typeface="Aptos"/>
+              </a:defRPr>
+            </a:pPr>
+            <a:r>
+              <a:rPr sz="800" b="0" i="0">
+                <a:latin typeface="Calibri"/>
+              </a:rPr>
+              <a:t>When Multi-Turn is enabled, the global planner selects context and tool stages before the executor binds only the relevant tools, including wrapped deterministic agents such as De-Compresser.</a:t>
+            </a:r>
+            <a:endParaRPr sz="800" b="0" i="0">
+              <a:latin typeface="Calibri"/>
+            </a:endParaRPr>
+          </a:p>
+          <a:p>
+            <a:pPr>
+              <a:spcAft>
+                <a:spcPts val="600"/>
+              </a:spcAft>
+              <a:defRPr sz="1500">
+                <a:solidFill>
+                  <a:srgbClr val="B4BAAE"/>
+                </a:solidFill>
+                <a:latin typeface="Aptos"/>
+              </a:defRPr>
+            </a:pPr>
+            <a:r>
+              <a:rPr sz="800" b="0" i="0">
+                <a:latin typeface="Calibri"/>
+              </a:rPr>
+              <a:t>The Playwrighter path loads a declarative step list, drives Playwright against Chromium/Firefox/WebKit, and emits one atomic `INI_SECTION_PLAYWRIGHTER` block with status, assertions, extracted values, and the final URL.</a:t>
+            </a:r>
+            <a:endParaRPr sz="800" b="0" i="0">
+              <a:latin typeface="Calibri"/>
+            </a:endParaRPr>
+          </a:p>
+          <a:p>
+            <a:pPr>
+              <a:spcAft>
+                <a:spcPts val="600"/>
+              </a:spcAft>
+              <a:defRPr sz="1500">
+                <a:solidFill>
+                  <a:srgbClr val="B4BAAE"/>
+                </a:solidFill>
+                <a:latin typeface="Aptos"/>
+              </a:defRPr>
+            </a:pPr>
+            <a:r>
+              <a:rPr sz="800" b="0" i="0">
+                <a:latin typeface="Calibri"/>
+              </a:rPr>
+              <a:t>The Unrealer path opens a TCP socket to the Unreal MCP plugin, sends one `{"type": command, "params": {...}}` payload, captures the JSON reply, and emits one `INI_SECTION_UNREALER` block for downstream logic.</a:t>
+            </a:r>
+            <a:endParaRPr sz="800" b="0" i="0">
+              <a:latin typeface="Calibri"/>
+            </a:endParaRPr>
+          </a:p>
+          <a:p>
+            <a:pPr>
+              <a:spcAft>
+                <a:spcPts val="600"/>
+              </a:spcAft>
+              <a:defRPr sz="1500">
+                <a:solidFill>
+                  <a:srgbClr val="B4BAAE"/>
+                </a:solidFill>
+                <a:latin typeface="Aptos"/>
+              </a:defRPr>
+            </a:pPr>
+            <a:r>
+              <a:rPr sz="800" b="0" i="0">
+                <a:latin typeface="Calibri"/>
+              </a:rPr>
+              <a:t>After spawn-capable tool calls and again after the final answer, the orphan reaper can sweep dead descendants, orphaned `conhost.exe` companions, and stale pool-linked processes without ever raising into the chat path.</a:t>
+            </a:r>
+            <a:endParaRPr sz="800" b="0" i="0">
+              <a:latin typeface="Calibri"/>
+            </a:endParaRPr>
+          </a:p>
+          <a:p>
+            <a:pPr>
+              <a:spcAft>
+                <a:spcPts val="600"/>
+              </a:spcAft>
+              <a:defRPr sz="1500">
+                <a:solidFill>
+                  <a:srgbClr val="B4BAAE"/>
+                </a:solidFill>
+                <a:latin typeface="Aptos"/>
+              </a:defRPr>
+            </a:pPr>
+            <a:r>
+              <a:rPr sz="800" b="0" i="0">
+                <a:latin typeface="Calibri"/>
+              </a:rPr>
+              <a:t>Tool calls execute in the backend, append observations, and may create wrapped runtime copies under `agent/agents/pools/_chat_runs_/`.</a:t>
+            </a:r>
+            <a:endParaRPr sz="800" b="0" i="0">
+              <a:latin typeface="Calibri"/>
+            </a:endParaRPr>
+          </a:p>
+          <a:p>
+            <a:pPr>
+              <a:spcAft>
+                <a:spcPts val="600"/>
+              </a:spcAft>
+              <a:defRPr sz="1500">
+                <a:solidFill>
+                  <a:srgbClr val="B4BAAE"/>
+                </a:solidFill>
+                <a:latin typeface="Aptos"/>
+              </a:defRPr>
+            </a:pPr>
+            <a:r>
+              <a:rPr sz="800" b="0" i="0">
+                <a:latin typeface="Calibri"/>
+              </a:rPr>
+              <a:t>On the next full start-up, `manage.py` can swap a staged database into place before Django imports, while archiving the previous live database under `DB/Older/&lt;timestamp&gt;/`.</a:t>
+            </a:r>
+            <a:endParaRPr sz="800" b="0" i="0">
+              <a:latin typeface="Calibri"/>
+            </a:endParaRPr>
+          </a:p>
+          <a:p>
+            <a:pPr>
+              <a:spcAft>
+                <a:spcPts val="600"/>
+              </a:spcAft>
+              <a:defRPr sz="1500">
+                <a:solidFill>
+                  <a:srgbClr val="B4BAAE"/>
+                </a:solidFill>
+                <a:latin typeface="Aptos"/>
+              </a:defRPr>
+            </a:pPr>
+            <a:r>
+              <a:rPr sz="800" b="0" i="0">
+                <a:latin typeface="Calibri"/>
+              </a:rPr>
+              <a:t>ACP flows deploy session-scoped pool instances, wire config values, validate NxN graph rules, and execute through Starter-driven flow semantics.</a:t>
+            </a:r>
+            <a:endParaRPr sz="800" b="0" i="0">
+              <a:latin typeface="Calibri"/>
+            </a:endParaRPr>
+          </a:p>
+          <a:p>
+            <a:pPr>
+              <a:spcAft>
+                <a:spcPts val="600"/>
+              </a:spcAft>
+              <a:defRPr sz="1500">
+                <a:solidFill>
+                  <a:srgbClr val="B4BAAE"/>
+                </a:solidFill>
+                <a:latin typeface="Aptos"/>
+              </a:defRPr>
+            </a:pPr>
+            <a:r>
+              <a:rPr sz="800" b="0" i="0">
+                <a:latin typeface="Calibri"/>
+              </a:rPr>
+              <a:t>Build scripts collect static assets, bundle Django/Python resources, add agent templates, and assemble `pkg.zip`, `Uninstaller.exe`, and `dist/Tlamatini_Release/`.</a:t>
+            </a:r>
+            <a:endParaRPr sz="800" b="0" i="0">
+              <a:latin typeface="Calibri"/>
+            </a:endParaRPr>
+          </a:p>
+        </p:txBody>
+      </p:sp>
+    </p:spTree>
+  </p:cSld>
+  <p:clrMapOvr>
+    <a:masterClrMapping/>
+  </p:clrMapOvr>
+</p:sld>
+</file>
+
+<file path=ppt/slides/slide40.xml><?xml version="1.0" encoding="utf-8"?>
 <p:sld xmlns:a="http://schemas.openxmlformats.org/drawingml/2006/main" xmlns:p="http://schemas.openxmlformats.org/presentationml/2006/main" xmlns:r="http://schemas.openxmlformats.org/officeDocument/2006/relationships">
   <p:cSld>
     <p:spTree>
@@ -30119,7 +28823,7 @@
 </p:sld>
 </file>
 
-<file path=ppt/slides/slide43.xml><?xml version="1.0" encoding="utf-8"?>
+<file path=ppt/slides/slide41.xml><?xml version="1.0" encoding="utf-8"?>
 <p:sld xmlns:a="http://schemas.openxmlformats.org/drawingml/2006/main" xmlns:p="http://schemas.openxmlformats.org/presentationml/2006/main" xmlns:r="http://schemas.openxmlformats.org/officeDocument/2006/relationships">
   <p:cSld>
     <p:spTree>
@@ -30487,7 +29191,7 @@
 </p:sld>
 </file>
 
-<file path=ppt/slides/slide44.xml><?xml version="1.0" encoding="utf-8"?>
+<file path=ppt/slides/slide42.xml><?xml version="1.0" encoding="utf-8"?>
 <p:sld xmlns:a="http://schemas.openxmlformats.org/drawingml/2006/main" xmlns:p="http://schemas.openxmlformats.org/presentationml/2006/main" xmlns:r="http://schemas.openxmlformats.org/officeDocument/2006/relationships">
   <p:cSld>
     <p:spTree>
@@ -30855,7 +29559,7 @@
 </p:sld>
 </file>
 
-<file path=ppt/slides/slide45.xml><?xml version="1.0" encoding="utf-8"?>
+<file path=ppt/slides/slide43.xml><?xml version="1.0" encoding="utf-8"?>
 <p:sld xmlns:a="http://schemas.openxmlformats.org/drawingml/2006/main" xmlns:p="http://schemas.openxmlformats.org/presentationml/2006/main" xmlns:r="http://schemas.openxmlformats.org/officeDocument/2006/relationships">
   <p:cSld>
     <p:spTree>
@@ -31223,7 +29927,7 @@
 </p:sld>
 </file>
 
-<file path=ppt/slides/slide46.xml><?xml version="1.0" encoding="utf-8"?>
+<file path=ppt/slides/slide44.xml><?xml version="1.0" encoding="utf-8"?>
 <p:sld xmlns:a="http://schemas.openxmlformats.org/drawingml/2006/main" xmlns:p="http://schemas.openxmlformats.org/presentationml/2006/main" xmlns:r="http://schemas.openxmlformats.org/officeDocument/2006/relationships">
   <p:cSld>
     <p:spTree>
@@ -31591,7 +30295,7 @@
 </p:sld>
 </file>
 
-<file path=ppt/slides/slide47.xml><?xml version="1.0" encoding="utf-8"?>
+<file path=ppt/slides/slide45.xml><?xml version="1.0" encoding="utf-8"?>
 <p:sld xmlns:a="http://schemas.openxmlformats.org/drawingml/2006/main" xmlns:p="http://schemas.openxmlformats.org/presentationml/2006/main" xmlns:r="http://schemas.openxmlformats.org/officeDocument/2006/relationships">
   <p:cSld>
     <p:spTree>
@@ -31959,7 +30663,7 @@
 </p:sld>
 </file>
 
-<file path=ppt/slides/slide48.xml><?xml version="1.0" encoding="utf-8"?>
+<file path=ppt/slides/slide46.xml><?xml version="1.0" encoding="utf-8"?>
 <p:sld xmlns:a="http://schemas.openxmlformats.org/drawingml/2006/main" xmlns:p="http://schemas.openxmlformats.org/presentationml/2006/main" xmlns:r="http://schemas.openxmlformats.org/officeDocument/2006/relationships">
   <p:cSld>
     <p:spTree>
@@ -32327,7 +31031,7 @@
 </p:sld>
 </file>
 
-<file path=ppt/slides/slide49.xml><?xml version="1.0" encoding="utf-8"?>
+<file path=ppt/slides/slide47.xml><?xml version="1.0" encoding="utf-8"?>
 <p:sld xmlns:a="http://schemas.openxmlformats.org/drawingml/2006/main" xmlns:p="http://schemas.openxmlformats.org/presentationml/2006/main" xmlns:r="http://schemas.openxmlformats.org/officeDocument/2006/relationships">
   <p:cSld>
     <p:spTree>
@@ -32695,588 +31399,7 @@
 </p:sld>
 </file>
 
-<file path=ppt/slides/slide5.xml><?xml version="1.0" encoding="utf-8"?>
-<p:sld xmlns:a="http://schemas.openxmlformats.org/drawingml/2006/main" xmlns:p="http://schemas.openxmlformats.org/presentationml/2006/main" xmlns:r="http://schemas.openxmlformats.org/officeDocument/2006/relationships">
-  <p:cSld>
-    <p:spTree>
-      <p:nvGrpSpPr>
-        <p:cNvPr id="1" name=""/>
-        <p:cNvGrpSpPr/>
-        <p:nvPr/>
-      </p:nvGrpSpPr>
-      <p:grpSpPr/>
-      <p:sp>
-        <p:nvSpPr>
-          <p:cNvPr id="2" name="Rectangle 1"/>
-          <p:cNvSpPr/>
-          <p:nvPr/>
-        </p:nvSpPr>
-        <p:spPr>
-          <a:xfrm>
-            <a:off x="0" y="0"/>
-            <a:ext cx="12191695" cy="6858000"/>
-          </a:xfrm>
-          <a:prstGeom prst="rect">
-            <a:avLst/>
-          </a:prstGeom>
-          <a:solidFill>
-            <a:srgbClr val="080D0D"/>
-          </a:solidFill>
-          <a:ln>
-            <a:noFill/>
-          </a:ln>
-        </p:spPr>
-        <p:style>
-          <a:lnRef idx="1">
-            <a:schemeClr val="accent1"/>
-          </a:lnRef>
-          <a:fillRef idx="3">
-            <a:schemeClr val="accent1"/>
-          </a:fillRef>
-          <a:effectRef idx="2">
-            <a:schemeClr val="accent1"/>
-          </a:effectRef>
-          <a:fontRef idx="minor">
-            <a:schemeClr val="lt1"/>
-          </a:fontRef>
-        </p:style>
-        <p:txBody>
-          <a:bodyPr rtlCol="0" anchor="ctr"/>
-          <a:lstStyle/>
-          <a:p>
-            <a:pPr algn="ctr"/>
-          </a:p>
-        </p:txBody>
-      </p:sp>
-      <p:sp>
-        <p:nvSpPr>
-          <p:cNvPr id="3" name="Rectangle 2"/>
-          <p:cNvSpPr/>
-          <p:nvPr/>
-        </p:nvSpPr>
-        <p:spPr>
-          <a:xfrm>
-            <a:off x="320040" y="384048"/>
-            <a:ext cx="36576" cy="6080760"/>
-          </a:xfrm>
-          <a:prstGeom prst="rect">
-            <a:avLst/>
-          </a:prstGeom>
-          <a:solidFill>
-            <a:srgbClr val="E0AB5D"/>
-          </a:solidFill>
-          <a:ln>
-            <a:noFill/>
-          </a:ln>
-        </p:spPr>
-        <p:style>
-          <a:lnRef idx="1">
-            <a:schemeClr val="accent1"/>
-          </a:lnRef>
-          <a:fillRef idx="3">
-            <a:schemeClr val="accent1"/>
-          </a:fillRef>
-          <a:effectRef idx="2">
-            <a:schemeClr val="accent1"/>
-          </a:effectRef>
-          <a:fontRef idx="minor">
-            <a:schemeClr val="lt1"/>
-          </a:fontRef>
-        </p:style>
-        <p:txBody>
-          <a:bodyPr rtlCol="0" anchor="ctr"/>
-          <a:lstStyle/>
-          <a:p>
-            <a:pPr algn="ctr"/>
-          </a:p>
-        </p:txBody>
-      </p:sp>
-      <p:sp>
-        <p:nvSpPr>
-          <p:cNvPr id="4" name="Rectangle 3"/>
-          <p:cNvSpPr/>
-          <p:nvPr/>
-        </p:nvSpPr>
-        <p:spPr>
-          <a:xfrm>
-            <a:off x="11716207" y="384048"/>
-            <a:ext cx="36576" cy="6080760"/>
-          </a:xfrm>
-          <a:prstGeom prst="rect">
-            <a:avLst/>
-          </a:prstGeom>
-          <a:solidFill>
-            <a:srgbClr val="E0AB5D"/>
-          </a:solidFill>
-          <a:ln>
-            <a:noFill/>
-          </a:ln>
-        </p:spPr>
-        <p:style>
-          <a:lnRef idx="1">
-            <a:schemeClr val="accent1"/>
-          </a:lnRef>
-          <a:fillRef idx="3">
-            <a:schemeClr val="accent1"/>
-          </a:fillRef>
-          <a:effectRef idx="2">
-            <a:schemeClr val="accent1"/>
-          </a:effectRef>
-          <a:fontRef idx="minor">
-            <a:schemeClr val="lt1"/>
-          </a:fontRef>
-        </p:style>
-        <p:txBody>
-          <a:bodyPr rtlCol="0" anchor="ctr"/>
-          <a:lstStyle/>
-          <a:p>
-            <a:pPr algn="ctr"/>
-          </a:p>
-        </p:txBody>
-      </p:sp>
-      <p:sp>
-        <p:nvSpPr>
-          <p:cNvPr id="5" name="Rectangle 4"/>
-          <p:cNvSpPr/>
-          <p:nvPr/>
-        </p:nvSpPr>
-        <p:spPr>
-          <a:xfrm>
-            <a:off x="502920" y="384048"/>
-            <a:ext cx="11155680" cy="27432"/>
-          </a:xfrm>
-          <a:prstGeom prst="rect">
-            <a:avLst/>
-          </a:prstGeom>
-          <a:solidFill>
-            <a:srgbClr val="E0AB5D"/>
-          </a:solidFill>
-          <a:ln>
-            <a:noFill/>
-          </a:ln>
-        </p:spPr>
-        <p:style>
-          <a:lnRef idx="1">
-            <a:schemeClr val="accent1"/>
-          </a:lnRef>
-          <a:fillRef idx="3">
-            <a:schemeClr val="accent1"/>
-          </a:fillRef>
-          <a:effectRef idx="2">
-            <a:schemeClr val="accent1"/>
-          </a:effectRef>
-          <a:fontRef idx="minor">
-            <a:schemeClr val="lt1"/>
-          </a:fontRef>
-        </p:style>
-        <p:txBody>
-          <a:bodyPr rtlCol="0" anchor="ctr"/>
-          <a:lstStyle/>
-          <a:p>
-            <a:pPr algn="ctr"/>
-          </a:p>
-        </p:txBody>
-      </p:sp>
-      <p:sp>
-        <p:nvSpPr>
-          <p:cNvPr id="6" name="Rectangle 5"/>
-          <p:cNvSpPr/>
-          <p:nvPr/>
-        </p:nvSpPr>
-        <p:spPr>
-          <a:xfrm>
-            <a:off x="502920" y="6437376"/>
-            <a:ext cx="11155680" cy="27432"/>
-          </a:xfrm>
-          <a:prstGeom prst="rect">
-            <a:avLst/>
-          </a:prstGeom>
-          <a:solidFill>
-            <a:srgbClr val="E0AB5D"/>
-          </a:solidFill>
-          <a:ln>
-            <a:noFill/>
-          </a:ln>
-        </p:spPr>
-        <p:style>
-          <a:lnRef idx="1">
-            <a:schemeClr val="accent1"/>
-          </a:lnRef>
-          <a:fillRef idx="3">
-            <a:schemeClr val="accent1"/>
-          </a:fillRef>
-          <a:effectRef idx="2">
-            <a:schemeClr val="accent1"/>
-          </a:effectRef>
-          <a:fontRef idx="minor">
-            <a:schemeClr val="lt1"/>
-          </a:fontRef>
-        </p:style>
-        <p:txBody>
-          <a:bodyPr rtlCol="0" anchor="ctr"/>
-          <a:lstStyle/>
-          <a:p>
-            <a:pPr algn="ctr"/>
-          </a:p>
-        </p:txBody>
-      </p:sp>
-      <p:sp>
-        <p:nvSpPr>
-          <p:cNvPr id="7" name="TextBox 6"/>
-          <p:cNvSpPr txBox="1"/>
-          <p:nvPr/>
-        </p:nvSpPr>
-        <p:spPr>
-          <a:xfrm>
-            <a:off x="713232" y="548640"/>
-            <a:ext cx="10698480" cy="301752"/>
-          </a:xfrm>
-          <a:prstGeom prst="rect">
-            <a:avLst/>
-          </a:prstGeom>
-          <a:noFill/>
-        </p:spPr>
-        <p:txBody>
-          <a:bodyPr wrap="square" anchor="t">
-            <a:spAutoFit/>
-          </a:bodyPr>
-          <a:lstStyle/>
-          <a:p>
-            <a:pPr algn="l"/>
-            <a:r>
-              <a:rPr sz="1000" b="1">
-                <a:solidFill>
-                  <a:srgbClr val="E0AB5D"/>
-                </a:solidFill>
-                <a:latin typeface="Aptos"/>
-              </a:rPr>
-              <a:t>HOW THE SOFTWARE IS SHAPED</a:t>
-            </a:r>
-          </a:p>
-        </p:txBody>
-      </p:sp>
-      <p:sp>
-        <p:nvSpPr>
-          <p:cNvPr id="8" name="TextBox 7"/>
-          <p:cNvSpPr txBox="1"/>
-          <p:nvPr/>
-        </p:nvSpPr>
-        <p:spPr>
-          <a:xfrm>
-            <a:off x="694944" y="850392"/>
-            <a:ext cx="10881360" cy="566928"/>
-          </a:xfrm>
-          <a:prstGeom prst="rect">
-            <a:avLst/>
-          </a:prstGeom>
-          <a:noFill/>
-        </p:spPr>
-        <p:txBody>
-          <a:bodyPr wrap="square" anchor="t">
-            <a:spAutoFit/>
-          </a:bodyPr>
-          <a:lstStyle/>
-          <a:p>
-            <a:pPr algn="l"/>
-            <a:r>
-              <a:rPr sz="2700" b="0">
-                <a:solidFill>
-                  <a:srgbClr val="E8E8DE"/>
-                </a:solidFill>
-                <a:latin typeface="Aptos Display"/>
-              </a:rPr>
-              <a:t>Design Principles</a:t>
-            </a:r>
-          </a:p>
-        </p:txBody>
-      </p:sp>
-      <p:sp>
-        <p:nvSpPr>
-          <p:cNvPr id="9" name="Rounded Rectangle 8"/>
-          <p:cNvSpPr/>
-          <p:nvPr/>
-        </p:nvSpPr>
-        <p:spPr>
-          <a:xfrm>
-            <a:off x="749808" y="1572768"/>
-            <a:ext cx="10561320" cy="4343400"/>
-          </a:xfrm>
-          <a:prstGeom prst="roundRect">
-            <a:avLst/>
-          </a:prstGeom>
-          <a:solidFill>
-            <a:srgbClr val="161A19"/>
-          </a:solidFill>
-          <a:ln>
-            <a:solidFill>
-              <a:srgbClr val="595F56"/>
-            </a:solidFill>
-          </a:ln>
-        </p:spPr>
-        <p:style>
-          <a:lnRef idx="1">
-            <a:schemeClr val="accent1"/>
-          </a:lnRef>
-          <a:fillRef idx="3">
-            <a:schemeClr val="accent1"/>
-          </a:fillRef>
-          <a:effectRef idx="2">
-            <a:schemeClr val="accent1"/>
-          </a:effectRef>
-          <a:fontRef idx="minor">
-            <a:schemeClr val="lt1"/>
-          </a:fontRef>
-        </p:style>
-        <p:txBody>
-          <a:bodyPr rtlCol="0" anchor="ctr"/>
-          <a:lstStyle/>
-          <a:p>
-            <a:pPr algn="ctr"/>
-          </a:p>
-        </p:txBody>
-      </p:sp>
-      <p:sp>
-        <p:nvSpPr>
-          <p:cNvPr id="10" name="Rectangle 9"/>
-          <p:cNvSpPr/>
-          <p:nvPr/>
-        </p:nvSpPr>
-        <p:spPr>
-          <a:xfrm>
-            <a:off x="749808" y="1572768"/>
-            <a:ext cx="10561320" cy="109728"/>
-          </a:xfrm>
-          <a:prstGeom prst="rect">
-            <a:avLst/>
-          </a:prstGeom>
-          <a:solidFill>
-            <a:srgbClr val="E0AB5D"/>
-          </a:solidFill>
-          <a:ln>
-            <a:noFill/>
-          </a:ln>
-        </p:spPr>
-        <p:style>
-          <a:lnRef idx="1">
-            <a:schemeClr val="accent1"/>
-          </a:lnRef>
-          <a:fillRef idx="3">
-            <a:schemeClr val="accent1"/>
-          </a:fillRef>
-          <a:effectRef idx="2">
-            <a:schemeClr val="accent1"/>
-          </a:effectRef>
-          <a:fontRef idx="minor">
-            <a:schemeClr val="lt1"/>
-          </a:fontRef>
-        </p:style>
-        <p:txBody>
-          <a:bodyPr rtlCol="0" anchor="ctr"/>
-          <a:lstStyle/>
-          <a:p>
-            <a:pPr algn="ctr"/>
-          </a:p>
-        </p:txBody>
-      </p:sp>
-      <p:sp>
-        <p:nvSpPr>
-          <p:cNvPr id="11" name="TextBox 10"/>
-          <p:cNvSpPr txBox="1"/>
-          <p:nvPr/>
-        </p:nvSpPr>
-        <p:spPr>
-          <a:xfrm>
-            <a:off x="950976" y="1773936"/>
-            <a:ext cx="10158984" cy="310896"/>
-          </a:xfrm>
-          <a:prstGeom prst="rect">
-            <a:avLst/>
-          </a:prstGeom>
-          <a:noFill/>
-        </p:spPr>
-        <p:txBody>
-          <a:bodyPr wrap="square" anchor="t">
-            <a:spAutoFit/>
-          </a:bodyPr>
-          <a:lstStyle/>
-          <a:p>
-            <a:pPr algn="l"/>
-            <a:r>
-              <a:rPr sz="1400" b="1">
-                <a:solidFill>
-                  <a:srgbClr val="E0AB5D"/>
-                </a:solidFill>
-                <a:latin typeface="Aptos"/>
-              </a:rPr>
-              <a:t>Core design choices</a:t>
-            </a:r>
-          </a:p>
-        </p:txBody>
-      </p:sp>
-      <p:sp>
-        <p:nvSpPr>
-          <p:cNvPr id="12" name="TextBox 11"/>
-          <p:cNvSpPr txBox="1"/>
-          <p:nvPr/>
-        </p:nvSpPr>
-        <p:spPr>
-          <a:xfrm>
-            <a:off x="950976" y="2231136"/>
-            <a:ext cx="10158984" cy="3538728"/>
-          </a:xfrm>
-          <a:prstGeom prst="rect">
-            <a:avLst/>
-          </a:prstGeom>
-          <a:noFill/>
-        </p:spPr>
-        <p:txBody>
-          <a:bodyPr wrap="square" anchor="t" lIns="38100" rIns="38100" tIns="25400" bIns="25400">
-            <a:noAutofit/>
-          </a:bodyPr>
-          <a:lstStyle/>
-          <a:p>
-            <a:pPr>
-              <a:spcAft>
-                <a:spcPts val="600"/>
-              </a:spcAft>
-              <a:defRPr sz="1600">
-                <a:solidFill>
-                  <a:srgbClr val="B4BAAE"/>
-                </a:solidFill>
-                <a:latin typeface="Aptos"/>
-              </a:defRPr>
-            </a:pPr>
-            <a:r>
-              <a:rPr sz="1600" b="0" i="0">
-                <a:latin typeface="Calibri"/>
-              </a:rPr>
-              <a:t>Evidence-first answers: Tlamatini grounds responses in selected project context and hybrid retrieval rather than freeform model memory.</a:t>
-            </a:r>
-            <a:endParaRPr sz="1600" b="0" i="0">
-              <a:latin typeface="Calibri"/>
-            </a:endParaRPr>
-          </a:p>
-          <a:p>
-            <a:pPr>
-              <a:spcAft>
-                <a:spcPts val="600"/>
-              </a:spcAft>
-              <a:defRPr sz="1600">
-                <a:solidFill>
-                  <a:srgbClr val="B4BAAE"/>
-                </a:solidFill>
-                <a:latin typeface="Aptos"/>
-              </a:defRPr>
-            </a:pPr>
-            <a:r>
-              <a:rPr sz="1600" b="0" i="0">
-                <a:latin typeface="Calibri"/>
-              </a:rPr>
-              <a:t>Explicit orchestration: checked Multi-Turn uses a visible tool loop, capability scoring, and staged planning instead of a single opaque call.</a:t>
-            </a:r>
-            <a:endParaRPr sz="1600" b="0" i="0">
-              <a:latin typeface="Calibri"/>
-            </a:endParaRPr>
-          </a:p>
-          <a:p>
-            <a:pPr>
-              <a:spcAft>
-                <a:spcPts val="600"/>
-              </a:spcAft>
-              <a:defRPr sz="1600">
-                <a:solidFill>
-                  <a:srgbClr val="B4BAAE"/>
-                </a:solidFill>
-                <a:latin typeface="Aptos"/>
-              </a:defRPr>
-            </a:pPr>
-            <a:r>
-              <a:rPr sz="1600" b="0" i="0">
-                <a:latin typeface="Calibri"/>
-              </a:rPr>
-              <a:t>Operational reversibility: risky changes such as database replacement are staged, archived, and delayed to the only safe window instead of hot-swapped mid-session.</a:t>
-            </a:r>
-            <a:endParaRPr sz="1600" b="0" i="0">
-              <a:latin typeface="Calibri"/>
-            </a:endParaRPr>
-          </a:p>
-          <a:p>
-            <a:pPr>
-              <a:spcAft>
-                <a:spcPts val="600"/>
-              </a:spcAft>
-              <a:defRPr sz="1600">
-                <a:solidFill>
-                  <a:srgbClr val="B4BAAE"/>
-                </a:solidFill>
-                <a:latin typeface="Aptos"/>
-              </a:defRPr>
-            </a:pPr>
-            <a:r>
-              <a:rPr sz="1600" b="0" i="0">
-                <a:latin typeface="Calibri"/>
-              </a:rPr>
-              <a:t>Fail-open diagnostics: GPU pressure probes and session-restore safeguards warn early without breaking CPU-only or degraded environments.</a:t>
-            </a:r>
-            <a:endParaRPr sz="1600" b="0" i="0">
-              <a:latin typeface="Calibri"/>
-            </a:endParaRPr>
-          </a:p>
-          <a:p>
-            <a:pPr>
-              <a:spcAft>
-                <a:spcPts val="600"/>
-              </a:spcAft>
-              <a:defRPr sz="1600">
-                <a:solidFill>
-                  <a:srgbClr val="B4BAAE"/>
-                </a:solidFill>
-                <a:latin typeface="Aptos"/>
-              </a:defRPr>
-            </a:pPr>
-            <a:r>
-              <a:rPr sz="1600" b="0" i="0">
-                <a:latin typeface="Calibri"/>
-              </a:rPr>
-              <a:t>Runtime isolation: wrapped chat-agent copies run in session-scoped folders so template agents remain pristine while live runs stay inspectable.</a:t>
-            </a:r>
-            <a:endParaRPr sz="1600" b="0" i="0">
-              <a:latin typeface="Calibri"/>
-            </a:endParaRPr>
-          </a:p>
-          <a:p>
-            <a:pPr>
-              <a:spcAft>
-                <a:spcPts val="600"/>
-              </a:spcAft>
-              <a:defRPr sz="1600">
-                <a:solidFill>
-                  <a:srgbClr val="B4BAAE"/>
-                </a:solidFill>
-                <a:latin typeface="Aptos"/>
-              </a:defRPr>
-            </a:pPr>
-            <a:r>
-              <a:rPr sz="1600" b="0" i="0">
-                <a:latin typeface="Calibri"/>
-              </a:rPr>
-              <a:t>Operator truth over vibes: Exec Report tables, tlamatini.log, skill audits, and ACPX transcripts make the system auditable after execution.</a:t>
-            </a:r>
-            <a:endParaRPr sz="1600" b="0" i="0">
-              <a:latin typeface="Calibri"/>
-            </a:endParaRPr>
-          </a:p>
-        </p:txBody>
-      </p:sp>
-    </p:spTree>
-  </p:cSld>
-  <p:clrMapOvr>
-    <a:masterClrMapping/>
-  </p:clrMapOvr>
-</p:sld>
-</file>
-
-<file path=ppt/slides/slide50.xml><?xml version="1.0" encoding="utf-8"?>
+<file path=ppt/slides/slide48.xml><?xml version="1.0" encoding="utf-8"?>
 <p:sld xmlns:a="http://schemas.openxmlformats.org/drawingml/2006/main" xmlns:p="http://schemas.openxmlformats.org/presentationml/2006/main" xmlns:r="http://schemas.openxmlformats.org/officeDocument/2006/relationships">
   <p:cSld>
     <p:spTree>
@@ -33644,7 +31767,7 @@
 </p:sld>
 </file>
 
-<file path=ppt/slides/slide51.xml><?xml version="1.0" encoding="utf-8"?>
+<file path=ppt/slides/slide49.xml><?xml version="1.0" encoding="utf-8"?>
 <p:sld xmlns:a="http://schemas.openxmlformats.org/drawingml/2006/main" xmlns:p="http://schemas.openxmlformats.org/presentationml/2006/main" xmlns:r="http://schemas.openxmlformats.org/officeDocument/2006/relationships">
   <p:cSld>
     <p:spTree>
@@ -34012,7 +32135,588 @@
 </p:sld>
 </file>
 
-<file path=ppt/slides/slide52.xml><?xml version="1.0" encoding="utf-8"?>
+<file path=ppt/slides/slide5.xml><?xml version="1.0" encoding="utf-8"?>
+<p:sld xmlns:a="http://schemas.openxmlformats.org/drawingml/2006/main" xmlns:p="http://schemas.openxmlformats.org/presentationml/2006/main" xmlns:r="http://schemas.openxmlformats.org/officeDocument/2006/relationships">
+  <p:cSld>
+    <p:spTree>
+      <p:nvGrpSpPr>
+        <p:cNvPr id="1" name=""/>
+        <p:cNvGrpSpPr/>
+        <p:nvPr/>
+      </p:nvGrpSpPr>
+      <p:grpSpPr/>
+      <p:sp>
+        <p:nvSpPr>
+          <p:cNvPr id="2" name="Rectangle 1"/>
+          <p:cNvSpPr/>
+          <p:nvPr/>
+        </p:nvSpPr>
+        <p:spPr>
+          <a:xfrm>
+            <a:off x="0" y="0"/>
+            <a:ext cx="12191695" cy="6858000"/>
+          </a:xfrm>
+          <a:prstGeom prst="rect">
+            <a:avLst/>
+          </a:prstGeom>
+          <a:solidFill>
+            <a:srgbClr val="080D0D"/>
+          </a:solidFill>
+          <a:ln>
+            <a:noFill/>
+          </a:ln>
+        </p:spPr>
+        <p:style>
+          <a:lnRef idx="1">
+            <a:schemeClr val="accent1"/>
+          </a:lnRef>
+          <a:fillRef idx="3">
+            <a:schemeClr val="accent1"/>
+          </a:fillRef>
+          <a:effectRef idx="2">
+            <a:schemeClr val="accent1"/>
+          </a:effectRef>
+          <a:fontRef idx="minor">
+            <a:schemeClr val="lt1"/>
+          </a:fontRef>
+        </p:style>
+        <p:txBody>
+          <a:bodyPr rtlCol="0" anchor="ctr"/>
+          <a:lstStyle/>
+          <a:p>
+            <a:pPr algn="ctr"/>
+          </a:p>
+        </p:txBody>
+      </p:sp>
+      <p:sp>
+        <p:nvSpPr>
+          <p:cNvPr id="3" name="Rectangle 2"/>
+          <p:cNvSpPr/>
+          <p:nvPr/>
+        </p:nvSpPr>
+        <p:spPr>
+          <a:xfrm>
+            <a:off x="320040" y="384048"/>
+            <a:ext cx="36576" cy="6080760"/>
+          </a:xfrm>
+          <a:prstGeom prst="rect">
+            <a:avLst/>
+          </a:prstGeom>
+          <a:solidFill>
+            <a:srgbClr val="E0AB5D"/>
+          </a:solidFill>
+          <a:ln>
+            <a:noFill/>
+          </a:ln>
+        </p:spPr>
+        <p:style>
+          <a:lnRef idx="1">
+            <a:schemeClr val="accent1"/>
+          </a:lnRef>
+          <a:fillRef idx="3">
+            <a:schemeClr val="accent1"/>
+          </a:fillRef>
+          <a:effectRef idx="2">
+            <a:schemeClr val="accent1"/>
+          </a:effectRef>
+          <a:fontRef idx="minor">
+            <a:schemeClr val="lt1"/>
+          </a:fontRef>
+        </p:style>
+        <p:txBody>
+          <a:bodyPr rtlCol="0" anchor="ctr"/>
+          <a:lstStyle/>
+          <a:p>
+            <a:pPr algn="ctr"/>
+          </a:p>
+        </p:txBody>
+      </p:sp>
+      <p:sp>
+        <p:nvSpPr>
+          <p:cNvPr id="4" name="Rectangle 3"/>
+          <p:cNvSpPr/>
+          <p:nvPr/>
+        </p:nvSpPr>
+        <p:spPr>
+          <a:xfrm>
+            <a:off x="11716207" y="384048"/>
+            <a:ext cx="36576" cy="6080760"/>
+          </a:xfrm>
+          <a:prstGeom prst="rect">
+            <a:avLst/>
+          </a:prstGeom>
+          <a:solidFill>
+            <a:srgbClr val="E0AB5D"/>
+          </a:solidFill>
+          <a:ln>
+            <a:noFill/>
+          </a:ln>
+        </p:spPr>
+        <p:style>
+          <a:lnRef idx="1">
+            <a:schemeClr val="accent1"/>
+          </a:lnRef>
+          <a:fillRef idx="3">
+            <a:schemeClr val="accent1"/>
+          </a:fillRef>
+          <a:effectRef idx="2">
+            <a:schemeClr val="accent1"/>
+          </a:effectRef>
+          <a:fontRef idx="minor">
+            <a:schemeClr val="lt1"/>
+          </a:fontRef>
+        </p:style>
+        <p:txBody>
+          <a:bodyPr rtlCol="0" anchor="ctr"/>
+          <a:lstStyle/>
+          <a:p>
+            <a:pPr algn="ctr"/>
+          </a:p>
+        </p:txBody>
+      </p:sp>
+      <p:sp>
+        <p:nvSpPr>
+          <p:cNvPr id="5" name="Rectangle 4"/>
+          <p:cNvSpPr/>
+          <p:nvPr/>
+        </p:nvSpPr>
+        <p:spPr>
+          <a:xfrm>
+            <a:off x="502920" y="384048"/>
+            <a:ext cx="11155680" cy="27432"/>
+          </a:xfrm>
+          <a:prstGeom prst="rect">
+            <a:avLst/>
+          </a:prstGeom>
+          <a:solidFill>
+            <a:srgbClr val="E0AB5D"/>
+          </a:solidFill>
+          <a:ln>
+            <a:noFill/>
+          </a:ln>
+        </p:spPr>
+        <p:style>
+          <a:lnRef idx="1">
+            <a:schemeClr val="accent1"/>
+          </a:lnRef>
+          <a:fillRef idx="3">
+            <a:schemeClr val="accent1"/>
+          </a:fillRef>
+          <a:effectRef idx="2">
+            <a:schemeClr val="accent1"/>
+          </a:effectRef>
+          <a:fontRef idx="minor">
+            <a:schemeClr val="lt1"/>
+          </a:fontRef>
+        </p:style>
+        <p:txBody>
+          <a:bodyPr rtlCol="0" anchor="ctr"/>
+          <a:lstStyle/>
+          <a:p>
+            <a:pPr algn="ctr"/>
+          </a:p>
+        </p:txBody>
+      </p:sp>
+      <p:sp>
+        <p:nvSpPr>
+          <p:cNvPr id="6" name="Rectangle 5"/>
+          <p:cNvSpPr/>
+          <p:nvPr/>
+        </p:nvSpPr>
+        <p:spPr>
+          <a:xfrm>
+            <a:off x="502920" y="6437376"/>
+            <a:ext cx="11155680" cy="27432"/>
+          </a:xfrm>
+          <a:prstGeom prst="rect">
+            <a:avLst/>
+          </a:prstGeom>
+          <a:solidFill>
+            <a:srgbClr val="E0AB5D"/>
+          </a:solidFill>
+          <a:ln>
+            <a:noFill/>
+          </a:ln>
+        </p:spPr>
+        <p:style>
+          <a:lnRef idx="1">
+            <a:schemeClr val="accent1"/>
+          </a:lnRef>
+          <a:fillRef idx="3">
+            <a:schemeClr val="accent1"/>
+          </a:fillRef>
+          <a:effectRef idx="2">
+            <a:schemeClr val="accent1"/>
+          </a:effectRef>
+          <a:fontRef idx="minor">
+            <a:schemeClr val="lt1"/>
+          </a:fontRef>
+        </p:style>
+        <p:txBody>
+          <a:bodyPr rtlCol="0" anchor="ctr"/>
+          <a:lstStyle/>
+          <a:p>
+            <a:pPr algn="ctr"/>
+          </a:p>
+        </p:txBody>
+      </p:sp>
+      <p:sp>
+        <p:nvSpPr>
+          <p:cNvPr id="7" name="TextBox 6"/>
+          <p:cNvSpPr txBox="1"/>
+          <p:nvPr/>
+        </p:nvSpPr>
+        <p:spPr>
+          <a:xfrm>
+            <a:off x="713232" y="548640"/>
+            <a:ext cx="10698480" cy="301752"/>
+          </a:xfrm>
+          <a:prstGeom prst="rect">
+            <a:avLst/>
+          </a:prstGeom>
+          <a:noFill/>
+        </p:spPr>
+        <p:txBody>
+          <a:bodyPr wrap="square" anchor="t">
+            <a:spAutoFit/>
+          </a:bodyPr>
+          <a:lstStyle/>
+          <a:p>
+            <a:pPr algn="l"/>
+            <a:r>
+              <a:rPr sz="1000" b="1">
+                <a:solidFill>
+                  <a:srgbClr val="E0AB5D"/>
+                </a:solidFill>
+                <a:latin typeface="Aptos"/>
+              </a:rPr>
+              <a:t>HOW THE SOFTWARE IS SHAPED</a:t>
+            </a:r>
+          </a:p>
+        </p:txBody>
+      </p:sp>
+      <p:sp>
+        <p:nvSpPr>
+          <p:cNvPr id="8" name="TextBox 7"/>
+          <p:cNvSpPr txBox="1"/>
+          <p:nvPr/>
+        </p:nvSpPr>
+        <p:spPr>
+          <a:xfrm>
+            <a:off x="694944" y="850392"/>
+            <a:ext cx="10881360" cy="566928"/>
+          </a:xfrm>
+          <a:prstGeom prst="rect">
+            <a:avLst/>
+          </a:prstGeom>
+          <a:noFill/>
+        </p:spPr>
+        <p:txBody>
+          <a:bodyPr wrap="square" anchor="t">
+            <a:spAutoFit/>
+          </a:bodyPr>
+          <a:lstStyle/>
+          <a:p>
+            <a:pPr algn="l"/>
+            <a:r>
+              <a:rPr sz="2700" b="0">
+                <a:solidFill>
+                  <a:srgbClr val="E8E8DE"/>
+                </a:solidFill>
+                <a:latin typeface="Aptos Display"/>
+              </a:rPr>
+              <a:t>Design Principles</a:t>
+            </a:r>
+          </a:p>
+        </p:txBody>
+      </p:sp>
+      <p:sp>
+        <p:nvSpPr>
+          <p:cNvPr id="9" name="Rounded Rectangle 8"/>
+          <p:cNvSpPr/>
+          <p:nvPr/>
+        </p:nvSpPr>
+        <p:spPr>
+          <a:xfrm>
+            <a:off x="749808" y="1572768"/>
+            <a:ext cx="10561320" cy="4343400"/>
+          </a:xfrm>
+          <a:prstGeom prst="roundRect">
+            <a:avLst/>
+          </a:prstGeom>
+          <a:solidFill>
+            <a:srgbClr val="161A19"/>
+          </a:solidFill>
+          <a:ln>
+            <a:solidFill>
+              <a:srgbClr val="595F56"/>
+            </a:solidFill>
+          </a:ln>
+        </p:spPr>
+        <p:style>
+          <a:lnRef idx="1">
+            <a:schemeClr val="accent1"/>
+          </a:lnRef>
+          <a:fillRef idx="3">
+            <a:schemeClr val="accent1"/>
+          </a:fillRef>
+          <a:effectRef idx="2">
+            <a:schemeClr val="accent1"/>
+          </a:effectRef>
+          <a:fontRef idx="minor">
+            <a:schemeClr val="lt1"/>
+          </a:fontRef>
+        </p:style>
+        <p:txBody>
+          <a:bodyPr rtlCol="0" anchor="ctr"/>
+          <a:lstStyle/>
+          <a:p>
+            <a:pPr algn="ctr"/>
+          </a:p>
+        </p:txBody>
+      </p:sp>
+      <p:sp>
+        <p:nvSpPr>
+          <p:cNvPr id="10" name="Rectangle 9"/>
+          <p:cNvSpPr/>
+          <p:nvPr/>
+        </p:nvSpPr>
+        <p:spPr>
+          <a:xfrm>
+            <a:off x="749808" y="1572768"/>
+            <a:ext cx="10561320" cy="109728"/>
+          </a:xfrm>
+          <a:prstGeom prst="rect">
+            <a:avLst/>
+          </a:prstGeom>
+          <a:solidFill>
+            <a:srgbClr val="E0AB5D"/>
+          </a:solidFill>
+          <a:ln>
+            <a:noFill/>
+          </a:ln>
+        </p:spPr>
+        <p:style>
+          <a:lnRef idx="1">
+            <a:schemeClr val="accent1"/>
+          </a:lnRef>
+          <a:fillRef idx="3">
+            <a:schemeClr val="accent1"/>
+          </a:fillRef>
+          <a:effectRef idx="2">
+            <a:schemeClr val="accent1"/>
+          </a:effectRef>
+          <a:fontRef idx="minor">
+            <a:schemeClr val="lt1"/>
+          </a:fontRef>
+        </p:style>
+        <p:txBody>
+          <a:bodyPr rtlCol="0" anchor="ctr"/>
+          <a:lstStyle/>
+          <a:p>
+            <a:pPr algn="ctr"/>
+          </a:p>
+        </p:txBody>
+      </p:sp>
+      <p:sp>
+        <p:nvSpPr>
+          <p:cNvPr id="11" name="TextBox 10"/>
+          <p:cNvSpPr txBox="1"/>
+          <p:nvPr/>
+        </p:nvSpPr>
+        <p:spPr>
+          <a:xfrm>
+            <a:off x="950976" y="1773936"/>
+            <a:ext cx="10158984" cy="310896"/>
+          </a:xfrm>
+          <a:prstGeom prst="rect">
+            <a:avLst/>
+          </a:prstGeom>
+          <a:noFill/>
+        </p:spPr>
+        <p:txBody>
+          <a:bodyPr wrap="square" anchor="t">
+            <a:spAutoFit/>
+          </a:bodyPr>
+          <a:lstStyle/>
+          <a:p>
+            <a:pPr algn="l"/>
+            <a:r>
+              <a:rPr sz="1400" b="1">
+                <a:solidFill>
+                  <a:srgbClr val="E0AB5D"/>
+                </a:solidFill>
+                <a:latin typeface="Aptos"/>
+              </a:rPr>
+              <a:t>Core design choices</a:t>
+            </a:r>
+          </a:p>
+        </p:txBody>
+      </p:sp>
+      <p:sp>
+        <p:nvSpPr>
+          <p:cNvPr id="12" name="TextBox 11"/>
+          <p:cNvSpPr txBox="1"/>
+          <p:nvPr/>
+        </p:nvSpPr>
+        <p:spPr>
+          <a:xfrm>
+            <a:off x="950976" y="2231136"/>
+            <a:ext cx="10158984" cy="3538728"/>
+          </a:xfrm>
+          <a:prstGeom prst="rect">
+            <a:avLst/>
+          </a:prstGeom>
+          <a:noFill/>
+        </p:spPr>
+        <p:txBody>
+          <a:bodyPr wrap="square" anchor="t" lIns="38100" rIns="38100" tIns="25400" bIns="25400">
+            <a:noAutofit/>
+          </a:bodyPr>
+          <a:lstStyle/>
+          <a:p>
+            <a:pPr>
+              <a:spcAft>
+                <a:spcPts val="600"/>
+              </a:spcAft>
+              <a:defRPr sz="1600">
+                <a:solidFill>
+                  <a:srgbClr val="B4BAAE"/>
+                </a:solidFill>
+                <a:latin typeface="Aptos"/>
+              </a:defRPr>
+            </a:pPr>
+            <a:r>
+              <a:rPr sz="1600" b="0" i="0">
+                <a:latin typeface="Calibri"/>
+              </a:rPr>
+              <a:t>Evidence-first answers: Tlamatini grounds responses in selected project context and hybrid retrieval rather than freeform model memory.</a:t>
+            </a:r>
+            <a:endParaRPr sz="1600" b="0" i="0">
+              <a:latin typeface="Calibri"/>
+            </a:endParaRPr>
+          </a:p>
+          <a:p>
+            <a:pPr>
+              <a:spcAft>
+                <a:spcPts val="600"/>
+              </a:spcAft>
+              <a:defRPr sz="1600">
+                <a:solidFill>
+                  <a:srgbClr val="B4BAAE"/>
+                </a:solidFill>
+                <a:latin typeface="Aptos"/>
+              </a:defRPr>
+            </a:pPr>
+            <a:r>
+              <a:rPr sz="1600" b="0" i="0">
+                <a:latin typeface="Calibri"/>
+              </a:rPr>
+              <a:t>Explicit orchestration: checked Multi-Turn uses a visible tool loop, capability scoring, and staged planning instead of a single opaque call.</a:t>
+            </a:r>
+            <a:endParaRPr sz="1600" b="0" i="0">
+              <a:latin typeface="Calibri"/>
+            </a:endParaRPr>
+          </a:p>
+          <a:p>
+            <a:pPr>
+              <a:spcAft>
+                <a:spcPts val="600"/>
+              </a:spcAft>
+              <a:defRPr sz="1600">
+                <a:solidFill>
+                  <a:srgbClr val="B4BAAE"/>
+                </a:solidFill>
+                <a:latin typeface="Aptos"/>
+              </a:defRPr>
+            </a:pPr>
+            <a:r>
+              <a:rPr sz="1600" b="0" i="0">
+                <a:latin typeface="Calibri"/>
+              </a:rPr>
+              <a:t>Operational reversibility: risky changes such as database replacement are staged, archived, and delayed to the only safe window instead of hot-swapped mid-session.</a:t>
+            </a:r>
+            <a:endParaRPr sz="1600" b="0" i="0">
+              <a:latin typeface="Calibri"/>
+            </a:endParaRPr>
+          </a:p>
+          <a:p>
+            <a:pPr>
+              <a:spcAft>
+                <a:spcPts val="600"/>
+              </a:spcAft>
+              <a:defRPr sz="1600">
+                <a:solidFill>
+                  <a:srgbClr val="B4BAAE"/>
+                </a:solidFill>
+                <a:latin typeface="Aptos"/>
+              </a:defRPr>
+            </a:pPr>
+            <a:r>
+              <a:rPr sz="1600" b="0" i="0">
+                <a:latin typeface="Calibri"/>
+              </a:rPr>
+              <a:t>Fail-open diagnostics: GPU pressure probes and session-restore safeguards warn early without breaking CPU-only or degraded environments.</a:t>
+            </a:r>
+            <a:endParaRPr sz="1600" b="0" i="0">
+              <a:latin typeface="Calibri"/>
+            </a:endParaRPr>
+          </a:p>
+          <a:p>
+            <a:pPr>
+              <a:spcAft>
+                <a:spcPts val="600"/>
+              </a:spcAft>
+              <a:defRPr sz="1600">
+                <a:solidFill>
+                  <a:srgbClr val="B4BAAE"/>
+                </a:solidFill>
+                <a:latin typeface="Aptos"/>
+              </a:defRPr>
+            </a:pPr>
+            <a:r>
+              <a:rPr sz="1600" b="0" i="0">
+                <a:latin typeface="Calibri"/>
+              </a:rPr>
+              <a:t>Runtime isolation: wrapped chat-agent copies run in session-scoped folders so template agents remain pristine while live runs stay inspectable.</a:t>
+            </a:r>
+            <a:endParaRPr sz="1600" b="0" i="0">
+              <a:latin typeface="Calibri"/>
+            </a:endParaRPr>
+          </a:p>
+          <a:p>
+            <a:pPr>
+              <a:spcAft>
+                <a:spcPts val="600"/>
+              </a:spcAft>
+              <a:defRPr sz="1600">
+                <a:solidFill>
+                  <a:srgbClr val="B4BAAE"/>
+                </a:solidFill>
+                <a:latin typeface="Aptos"/>
+              </a:defRPr>
+            </a:pPr>
+            <a:r>
+              <a:rPr sz="1600" b="0" i="0">
+                <a:latin typeface="Calibri"/>
+              </a:rPr>
+              <a:t>Operator truth over vibes: Exec Report tables, tlamatini.log, skill audits, and ACPX transcripts make the system auditable after execution.</a:t>
+            </a:r>
+            <a:endParaRPr sz="1600" b="0" i="0">
+              <a:latin typeface="Calibri"/>
+            </a:endParaRPr>
+          </a:p>
+        </p:txBody>
+      </p:sp>
+    </p:spTree>
+  </p:cSld>
+  <p:clrMapOvr>
+    <a:masterClrMapping/>
+  </p:clrMapOvr>
+</p:sld>
+</file>
+
+<file path=ppt/slides/slide50.xml><?xml version="1.0" encoding="utf-8"?>
 <p:sld xmlns:a="http://schemas.openxmlformats.org/drawingml/2006/main" xmlns:p="http://schemas.openxmlformats.org/presentationml/2006/main" xmlns:r="http://schemas.openxmlformats.org/officeDocument/2006/relationships">
   <p:cSld>
     <p:spTree>
@@ -34380,7 +33084,7 @@
 </p:sld>
 </file>
 
-<file path=ppt/slides/slide53.xml><?xml version="1.0" encoding="utf-8"?>
+<file path=ppt/slides/slide51.xml><?xml version="1.0" encoding="utf-8"?>
 <p:sld xmlns:a="http://schemas.openxmlformats.org/drawingml/2006/main" xmlns:p="http://schemas.openxmlformats.org/presentationml/2006/main" xmlns:r="http://schemas.openxmlformats.org/officeDocument/2006/relationships">
   <p:cSld>
     <p:spTree>
@@ -34748,7 +33452,7 @@
 </p:sld>
 </file>
 
-<file path=ppt/slides/slide54.xml><?xml version="1.0" encoding="utf-8"?>
+<file path=ppt/slides/slide52.xml><?xml version="1.0" encoding="utf-8"?>
 <p:sld xmlns:a="http://schemas.openxmlformats.org/drawingml/2006/main" xmlns:p="http://schemas.openxmlformats.org/presentationml/2006/main" xmlns:r="http://schemas.openxmlformats.org/officeDocument/2006/relationships">
   <p:cSld>
     <p:spTree>
@@ -35116,7 +33820,7 @@
 </p:sld>
 </file>
 
-<file path=ppt/slides/slide55.xml><?xml version="1.0" encoding="utf-8"?>
+<file path=ppt/slides/slide53.xml><?xml version="1.0" encoding="utf-8"?>
 <p:sld xmlns:a="http://schemas.openxmlformats.org/drawingml/2006/main" xmlns:p="http://schemas.openxmlformats.org/presentationml/2006/main" xmlns:r="http://schemas.openxmlformats.org/officeDocument/2006/relationships">
   <p:cSld>
     <p:spTree>
@@ -35484,7 +34188,7 @@
 </p:sld>
 </file>
 
-<file path=ppt/slides/slide56.xml><?xml version="1.0" encoding="utf-8"?>
+<file path=ppt/slides/slide54.xml><?xml version="1.0" encoding="utf-8"?>
 <p:sld xmlns:a="http://schemas.openxmlformats.org/drawingml/2006/main" xmlns:p="http://schemas.openxmlformats.org/presentationml/2006/main" xmlns:r="http://schemas.openxmlformats.org/officeDocument/2006/relationships">
   <p:cSld>
     <p:spTree>
@@ -35852,7 +34556,7 @@
 </p:sld>
 </file>
 
-<file path=ppt/slides/slide57.xml><?xml version="1.0" encoding="utf-8"?>
+<file path=ppt/slides/slide55.xml><?xml version="1.0" encoding="utf-8"?>
 <p:sld xmlns:a="http://schemas.openxmlformats.org/drawingml/2006/main" xmlns:p="http://schemas.openxmlformats.org/presentationml/2006/main" xmlns:r="http://schemas.openxmlformats.org/officeDocument/2006/relationships">
   <p:cSld>
     <p:spTree>
@@ -36220,7 +34924,7 @@
 </p:sld>
 </file>
 
-<file path=ppt/slides/slide58.xml><?xml version="1.0" encoding="utf-8"?>
+<file path=ppt/slides/slide56.xml><?xml version="1.0" encoding="utf-8"?>
 <p:sld xmlns:a="http://schemas.openxmlformats.org/drawingml/2006/main" xmlns:p="http://schemas.openxmlformats.org/presentationml/2006/main" xmlns:r="http://schemas.openxmlformats.org/officeDocument/2006/relationships">
   <p:cSld>
     <p:spTree>
@@ -36588,7 +35292,7 @@
 </p:sld>
 </file>
 
-<file path=ppt/slides/slide59.xml><?xml version="1.0" encoding="utf-8"?>
+<file path=ppt/slides/slide57.xml><?xml version="1.0" encoding="utf-8"?>
 <p:sld xmlns:a="http://schemas.openxmlformats.org/drawingml/2006/main" xmlns:p="http://schemas.openxmlformats.org/presentationml/2006/main" xmlns:r="http://schemas.openxmlformats.org/officeDocument/2006/relationships">
   <p:cSld>
     <p:spTree>
@@ -36929,6 +35633,521 @@
         |-- urls.py
         `-- wsgi.py</a:t>
             </a:r>
+          </a:p>
+        </p:txBody>
+      </p:sp>
+    </p:spTree>
+  </p:cSld>
+  <p:clrMapOvr>
+    <a:masterClrMapping/>
+  </p:clrMapOvr>
+</p:sld>
+</file>
+
+<file path=ppt/slides/slide58.xml><?xml version="1.0" encoding="utf-8"?>
+<p:sld xmlns:a="http://schemas.openxmlformats.org/drawingml/2006/main" xmlns:p="http://schemas.openxmlformats.org/presentationml/2006/main" xmlns:r="http://schemas.openxmlformats.org/officeDocument/2006/relationships">
+  <p:cSld>
+    <p:spTree>
+      <p:nvGrpSpPr>
+        <p:cNvPr id="1" name=""/>
+        <p:cNvGrpSpPr/>
+        <p:nvPr/>
+      </p:nvGrpSpPr>
+      <p:grpSpPr/>
+      <p:sp>
+        <p:nvSpPr>
+          <p:cNvPr id="2" name="Rectangle 1"/>
+          <p:cNvSpPr/>
+          <p:nvPr/>
+        </p:nvSpPr>
+        <p:spPr>
+          <a:xfrm>
+            <a:off x="0" y="0"/>
+            <a:ext cx="12191695" cy="6858000"/>
+          </a:xfrm>
+          <a:prstGeom prst="rect">
+            <a:avLst/>
+          </a:prstGeom>
+          <a:solidFill>
+            <a:srgbClr val="080D0D"/>
+          </a:solidFill>
+          <a:ln>
+            <a:noFill/>
+          </a:ln>
+        </p:spPr>
+        <p:style>
+          <a:lnRef idx="1">
+            <a:schemeClr val="accent1"/>
+          </a:lnRef>
+          <a:fillRef idx="3">
+            <a:schemeClr val="accent1"/>
+          </a:fillRef>
+          <a:effectRef idx="2">
+            <a:schemeClr val="accent1"/>
+          </a:effectRef>
+          <a:fontRef idx="minor">
+            <a:schemeClr val="lt1"/>
+          </a:fontRef>
+        </p:style>
+        <p:txBody>
+          <a:bodyPr rtlCol="0" anchor="ctr"/>
+          <a:lstStyle/>
+          <a:p>
+            <a:pPr algn="ctr"/>
+          </a:p>
+        </p:txBody>
+      </p:sp>
+      <p:sp>
+        <p:nvSpPr>
+          <p:cNvPr id="3" name="Rectangle 2"/>
+          <p:cNvSpPr/>
+          <p:nvPr/>
+        </p:nvSpPr>
+        <p:spPr>
+          <a:xfrm>
+            <a:off x="320040" y="384048"/>
+            <a:ext cx="36576" cy="6080760"/>
+          </a:xfrm>
+          <a:prstGeom prst="rect">
+            <a:avLst/>
+          </a:prstGeom>
+          <a:solidFill>
+            <a:srgbClr val="C48052"/>
+          </a:solidFill>
+          <a:ln>
+            <a:noFill/>
+          </a:ln>
+        </p:spPr>
+        <p:style>
+          <a:lnRef idx="1">
+            <a:schemeClr val="accent1"/>
+          </a:lnRef>
+          <a:fillRef idx="3">
+            <a:schemeClr val="accent1"/>
+          </a:fillRef>
+          <a:effectRef idx="2">
+            <a:schemeClr val="accent1"/>
+          </a:effectRef>
+          <a:fontRef idx="minor">
+            <a:schemeClr val="lt1"/>
+          </a:fontRef>
+        </p:style>
+        <p:txBody>
+          <a:bodyPr rtlCol="0" anchor="ctr"/>
+          <a:lstStyle/>
+          <a:p>
+            <a:pPr algn="ctr"/>
+          </a:p>
+        </p:txBody>
+      </p:sp>
+      <p:sp>
+        <p:nvSpPr>
+          <p:cNvPr id="4" name="Rectangle 3"/>
+          <p:cNvSpPr/>
+          <p:nvPr/>
+        </p:nvSpPr>
+        <p:spPr>
+          <a:xfrm>
+            <a:off x="11716207" y="384048"/>
+            <a:ext cx="36576" cy="6080760"/>
+          </a:xfrm>
+          <a:prstGeom prst="rect">
+            <a:avLst/>
+          </a:prstGeom>
+          <a:solidFill>
+            <a:srgbClr val="C48052"/>
+          </a:solidFill>
+          <a:ln>
+            <a:noFill/>
+          </a:ln>
+        </p:spPr>
+        <p:style>
+          <a:lnRef idx="1">
+            <a:schemeClr val="accent1"/>
+          </a:lnRef>
+          <a:fillRef idx="3">
+            <a:schemeClr val="accent1"/>
+          </a:fillRef>
+          <a:effectRef idx="2">
+            <a:schemeClr val="accent1"/>
+          </a:effectRef>
+          <a:fontRef idx="minor">
+            <a:schemeClr val="lt1"/>
+          </a:fontRef>
+        </p:style>
+        <p:txBody>
+          <a:bodyPr rtlCol="0" anchor="ctr"/>
+          <a:lstStyle/>
+          <a:p>
+            <a:pPr algn="ctr"/>
+          </a:p>
+        </p:txBody>
+      </p:sp>
+      <p:sp>
+        <p:nvSpPr>
+          <p:cNvPr id="5" name="Rectangle 4"/>
+          <p:cNvSpPr/>
+          <p:nvPr/>
+        </p:nvSpPr>
+        <p:spPr>
+          <a:xfrm>
+            <a:off x="502920" y="384048"/>
+            <a:ext cx="11155680" cy="27432"/>
+          </a:xfrm>
+          <a:prstGeom prst="rect">
+            <a:avLst/>
+          </a:prstGeom>
+          <a:solidFill>
+            <a:srgbClr val="C48052"/>
+          </a:solidFill>
+          <a:ln>
+            <a:noFill/>
+          </a:ln>
+        </p:spPr>
+        <p:style>
+          <a:lnRef idx="1">
+            <a:schemeClr val="accent1"/>
+          </a:lnRef>
+          <a:fillRef idx="3">
+            <a:schemeClr val="accent1"/>
+          </a:fillRef>
+          <a:effectRef idx="2">
+            <a:schemeClr val="accent1"/>
+          </a:effectRef>
+          <a:fontRef idx="minor">
+            <a:schemeClr val="lt1"/>
+          </a:fontRef>
+        </p:style>
+        <p:txBody>
+          <a:bodyPr rtlCol="0" anchor="ctr"/>
+          <a:lstStyle/>
+          <a:p>
+            <a:pPr algn="ctr"/>
+          </a:p>
+        </p:txBody>
+      </p:sp>
+      <p:sp>
+        <p:nvSpPr>
+          <p:cNvPr id="6" name="Rectangle 5"/>
+          <p:cNvSpPr/>
+          <p:nvPr/>
+        </p:nvSpPr>
+        <p:spPr>
+          <a:xfrm>
+            <a:off x="502920" y="6437376"/>
+            <a:ext cx="11155680" cy="27432"/>
+          </a:xfrm>
+          <a:prstGeom prst="rect">
+            <a:avLst/>
+          </a:prstGeom>
+          <a:solidFill>
+            <a:srgbClr val="C48052"/>
+          </a:solidFill>
+          <a:ln>
+            <a:noFill/>
+          </a:ln>
+        </p:spPr>
+        <p:style>
+          <a:lnRef idx="1">
+            <a:schemeClr val="accent1"/>
+          </a:lnRef>
+          <a:fillRef idx="3">
+            <a:schemeClr val="accent1"/>
+          </a:fillRef>
+          <a:effectRef idx="2">
+            <a:schemeClr val="accent1"/>
+          </a:effectRef>
+          <a:fontRef idx="minor">
+            <a:schemeClr val="lt1"/>
+          </a:fontRef>
+        </p:style>
+        <p:txBody>
+          <a:bodyPr rtlCol="0" anchor="ctr"/>
+          <a:lstStyle/>
+          <a:p>
+            <a:pPr algn="ctr"/>
+          </a:p>
+        </p:txBody>
+      </p:sp>
+      <p:sp>
+        <p:nvSpPr>
+          <p:cNvPr id="7" name="TextBox 6"/>
+          <p:cNvSpPr txBox="1"/>
+          <p:nvPr/>
+        </p:nvSpPr>
+        <p:spPr>
+          <a:xfrm>
+            <a:off x="713232" y="548640"/>
+            <a:ext cx="10698480" cy="301752"/>
+          </a:xfrm>
+          <a:prstGeom prst="rect">
+            <a:avLst/>
+          </a:prstGeom>
+          <a:noFill/>
+        </p:spPr>
+        <p:txBody>
+          <a:bodyPr wrap="square" anchor="t">
+            <a:spAutoFit/>
+          </a:bodyPr>
+          <a:lstStyle/>
+          <a:p>
+            <a:pPr algn="l"/>
+            <a:r>
+              <a:rPr sz="1000" b="1">
+                <a:solidFill>
+                  <a:srgbClr val="C48052"/>
+                </a:solidFill>
+                <a:latin typeface="Aptos"/>
+              </a:rPr>
+              <a:t>FUTURE REFRESH DISCIPLINE</a:t>
+            </a:r>
+          </a:p>
+        </p:txBody>
+      </p:sp>
+      <p:sp>
+        <p:nvSpPr>
+          <p:cNvPr id="8" name="TextBox 7"/>
+          <p:cNvSpPr txBox="1"/>
+          <p:nvPr/>
+        </p:nvSpPr>
+        <p:spPr>
+          <a:xfrm>
+            <a:off x="694944" y="850392"/>
+            <a:ext cx="10881360" cy="566928"/>
+          </a:xfrm>
+          <a:prstGeom prst="rect">
+            <a:avLst/>
+          </a:prstGeom>
+          <a:noFill/>
+        </p:spPr>
+        <p:txBody>
+          <a:bodyPr wrap="square" anchor="t">
+            <a:spAutoFit/>
+          </a:bodyPr>
+          <a:lstStyle/>
+          <a:p>
+            <a:pPr algn="l"/>
+            <a:r>
+              <a:rPr sz="2700" b="0">
+                <a:solidFill>
+                  <a:srgbClr val="E8E8DE"/>
+                </a:solidFill>
+                <a:latin typeface="Aptos Display"/>
+              </a:rPr>
+              <a:t>How To Keep Docs Excellent</a:t>
+            </a:r>
+          </a:p>
+        </p:txBody>
+      </p:sp>
+      <p:sp>
+        <p:nvSpPr>
+          <p:cNvPr id="9" name="Rounded Rectangle 8"/>
+          <p:cNvSpPr/>
+          <p:nvPr/>
+        </p:nvSpPr>
+        <p:spPr>
+          <a:xfrm>
+            <a:off x="777240" y="1600200"/>
+            <a:ext cx="10561320" cy="4206240"/>
+          </a:xfrm>
+          <a:prstGeom prst="roundRect">
+            <a:avLst/>
+          </a:prstGeom>
+          <a:solidFill>
+            <a:srgbClr val="161A19"/>
+          </a:solidFill>
+          <a:ln>
+            <a:solidFill>
+              <a:srgbClr val="595F56"/>
+            </a:solidFill>
+          </a:ln>
+        </p:spPr>
+        <p:style>
+          <a:lnRef idx="1">
+            <a:schemeClr val="accent1"/>
+          </a:lnRef>
+          <a:fillRef idx="3">
+            <a:schemeClr val="accent1"/>
+          </a:fillRef>
+          <a:effectRef idx="2">
+            <a:schemeClr val="accent1"/>
+          </a:effectRef>
+          <a:fontRef idx="minor">
+            <a:schemeClr val="lt1"/>
+          </a:fontRef>
+        </p:style>
+        <p:txBody>
+          <a:bodyPr rtlCol="0" anchor="ctr"/>
+          <a:lstStyle/>
+          <a:p>
+            <a:pPr algn="ctr"/>
+          </a:p>
+        </p:txBody>
+      </p:sp>
+      <p:sp>
+        <p:nvSpPr>
+          <p:cNvPr id="10" name="Rectangle 9"/>
+          <p:cNvSpPr/>
+          <p:nvPr/>
+        </p:nvSpPr>
+        <p:spPr>
+          <a:xfrm>
+            <a:off x="777240" y="1600200"/>
+            <a:ext cx="10561320" cy="109728"/>
+          </a:xfrm>
+          <a:prstGeom prst="rect">
+            <a:avLst/>
+          </a:prstGeom>
+          <a:solidFill>
+            <a:srgbClr val="C48052"/>
+          </a:solidFill>
+          <a:ln>
+            <a:noFill/>
+          </a:ln>
+        </p:spPr>
+        <p:style>
+          <a:lnRef idx="1">
+            <a:schemeClr val="accent1"/>
+          </a:lnRef>
+          <a:fillRef idx="3">
+            <a:schemeClr val="accent1"/>
+          </a:fillRef>
+          <a:effectRef idx="2">
+            <a:schemeClr val="accent1"/>
+          </a:effectRef>
+          <a:fontRef idx="minor">
+            <a:schemeClr val="lt1"/>
+          </a:fontRef>
+        </p:style>
+        <p:txBody>
+          <a:bodyPr rtlCol="0" anchor="ctr"/>
+          <a:lstStyle/>
+          <a:p>
+            <a:pPr algn="ctr"/>
+          </a:p>
+        </p:txBody>
+      </p:sp>
+      <p:sp>
+        <p:nvSpPr>
+          <p:cNvPr id="11" name="TextBox 10"/>
+          <p:cNvSpPr txBox="1"/>
+          <p:nvPr/>
+        </p:nvSpPr>
+        <p:spPr>
+          <a:xfrm>
+            <a:off x="978408" y="1801368"/>
+            <a:ext cx="10158984" cy="310896"/>
+          </a:xfrm>
+          <a:prstGeom prst="rect">
+            <a:avLst/>
+          </a:prstGeom>
+          <a:noFill/>
+        </p:spPr>
+        <p:txBody>
+          <a:bodyPr wrap="square" anchor="t">
+            <a:spAutoFit/>
+          </a:bodyPr>
+          <a:lstStyle/>
+          <a:p>
+            <a:pPr algn="l"/>
+            <a:r>
+              <a:rPr sz="1400" b="1">
+                <a:solidFill>
+                  <a:srgbClr val="C48052"/>
+                </a:solidFill>
+                <a:latin typeface="Aptos"/>
+              </a:rPr>
+              <a:t>Recommended practice</a:t>
+            </a:r>
+          </a:p>
+        </p:txBody>
+      </p:sp>
+      <p:sp>
+        <p:nvSpPr>
+          <p:cNvPr id="12" name="TextBox 11"/>
+          <p:cNvSpPr txBox="1"/>
+          <p:nvPr/>
+        </p:nvSpPr>
+        <p:spPr>
+          <a:xfrm>
+            <a:off x="978408" y="2258568"/>
+            <a:ext cx="10158984" cy="3401568"/>
+          </a:xfrm>
+          <a:prstGeom prst="rect">
+            <a:avLst/>
+          </a:prstGeom>
+          <a:noFill/>
+        </p:spPr>
+        <p:txBody>
+          <a:bodyPr wrap="square" anchor="t" lIns="38100" rIns="38100" tIns="25400" bIns="25400">
+            <a:noAutofit/>
+          </a:bodyPr>
+          <a:lstStyle/>
+          <a:p>
+            <a:pPr>
+              <a:spcAft>
+                <a:spcPts val="600"/>
+              </a:spcAft>
+              <a:defRPr sz="1700">
+                <a:solidFill>
+                  <a:srgbClr val="B4BAAE"/>
+                </a:solidFill>
+                <a:latin typeface="Aptos"/>
+              </a:defRPr>
+            </a:pPr>
+            <a:r>
+              <a:rPr sz="1700" b="0" i="0">
+                <a:latin typeface="Calibri"/>
+              </a:rPr>
+              <a:t>Regenerate the PDF and deck whenever README, architecture, agent catalog, line inventory, or packaging behavior changes.</a:t>
+            </a:r>
+            <a:endParaRPr sz="1700" b="0" i="0">
+              <a:latin typeface="Calibri"/>
+            </a:endParaRPr>
+          </a:p>
+          <a:p>
+            <a:pPr>
+              <a:spcAft>
+                <a:spcPts val="600"/>
+              </a:spcAft>
+              <a:defRPr sz="1700">
+                <a:solidFill>
+                  <a:srgbClr val="B4BAAE"/>
+                </a:solidFill>
+                <a:latin typeface="Aptos"/>
+              </a:defRPr>
+            </a:pPr>
+            <a:r>
+              <a:rPr sz="1700" b="0" i="0">
+                <a:latin typeface="Calibri"/>
+              </a:rPr>
+              <a:t>Keep the PDF exhaustive and evidence-heavy; keep the PPT visual, split dense appendices, and audit geometry before delivery.</a:t>
+            </a:r>
+            <a:endParaRPr sz="1700" b="0" i="0">
+              <a:latin typeface="Calibri"/>
+            </a:endParaRPr>
+          </a:p>
+          <a:p>
+            <a:pPr>
+              <a:spcAft>
+                <a:spcPts val="600"/>
+              </a:spcAft>
+              <a:defRPr sz="1700">
+                <a:solidFill>
+                  <a:srgbClr val="B4BAAE"/>
+                </a:solidFill>
+                <a:latin typeface="Aptos"/>
+              </a:defRPr>
+            </a:pPr>
+            <a:r>
+              <a:rPr sz="1700" b="0" i="0">
+                <a:latin typeface="Calibri"/>
+              </a:rPr>
+              <a:t>Use the new Skills in `.codex/skills/` so future refreshes follow the same no-overlap and full-dossier rules.</a:t>
+            </a:r>
+            <a:endParaRPr sz="1700" b="0" i="0">
+              <a:latin typeface="Calibri"/>
+            </a:endParaRPr>
           </a:p>
         </p:txBody>
       </p:sp>
@@ -37676,521 +36895,6 @@
               <a:t>Multi-Turn can prefetch only the contexts required by the current execution plan.</a:t>
             </a:r>
             <a:endParaRPr sz="1600" b="0" i="0">
-              <a:latin typeface="Calibri"/>
-            </a:endParaRPr>
-          </a:p>
-        </p:txBody>
-      </p:sp>
-    </p:spTree>
-  </p:cSld>
-  <p:clrMapOvr>
-    <a:masterClrMapping/>
-  </p:clrMapOvr>
-</p:sld>
-</file>
-
-<file path=ppt/slides/slide60.xml><?xml version="1.0" encoding="utf-8"?>
-<p:sld xmlns:a="http://schemas.openxmlformats.org/drawingml/2006/main" xmlns:p="http://schemas.openxmlformats.org/presentationml/2006/main" xmlns:r="http://schemas.openxmlformats.org/officeDocument/2006/relationships">
-  <p:cSld>
-    <p:spTree>
-      <p:nvGrpSpPr>
-        <p:cNvPr id="1" name=""/>
-        <p:cNvGrpSpPr/>
-        <p:nvPr/>
-      </p:nvGrpSpPr>
-      <p:grpSpPr/>
-      <p:sp>
-        <p:nvSpPr>
-          <p:cNvPr id="2" name="Rectangle 1"/>
-          <p:cNvSpPr/>
-          <p:nvPr/>
-        </p:nvSpPr>
-        <p:spPr>
-          <a:xfrm>
-            <a:off x="0" y="0"/>
-            <a:ext cx="12191695" cy="6858000"/>
-          </a:xfrm>
-          <a:prstGeom prst="rect">
-            <a:avLst/>
-          </a:prstGeom>
-          <a:solidFill>
-            <a:srgbClr val="080D0D"/>
-          </a:solidFill>
-          <a:ln>
-            <a:noFill/>
-          </a:ln>
-        </p:spPr>
-        <p:style>
-          <a:lnRef idx="1">
-            <a:schemeClr val="accent1"/>
-          </a:lnRef>
-          <a:fillRef idx="3">
-            <a:schemeClr val="accent1"/>
-          </a:fillRef>
-          <a:effectRef idx="2">
-            <a:schemeClr val="accent1"/>
-          </a:effectRef>
-          <a:fontRef idx="minor">
-            <a:schemeClr val="lt1"/>
-          </a:fontRef>
-        </p:style>
-        <p:txBody>
-          <a:bodyPr rtlCol="0" anchor="ctr"/>
-          <a:lstStyle/>
-          <a:p>
-            <a:pPr algn="ctr"/>
-          </a:p>
-        </p:txBody>
-      </p:sp>
-      <p:sp>
-        <p:nvSpPr>
-          <p:cNvPr id="3" name="Rectangle 2"/>
-          <p:cNvSpPr/>
-          <p:nvPr/>
-        </p:nvSpPr>
-        <p:spPr>
-          <a:xfrm>
-            <a:off x="320040" y="384048"/>
-            <a:ext cx="36576" cy="6080760"/>
-          </a:xfrm>
-          <a:prstGeom prst="rect">
-            <a:avLst/>
-          </a:prstGeom>
-          <a:solidFill>
-            <a:srgbClr val="C48052"/>
-          </a:solidFill>
-          <a:ln>
-            <a:noFill/>
-          </a:ln>
-        </p:spPr>
-        <p:style>
-          <a:lnRef idx="1">
-            <a:schemeClr val="accent1"/>
-          </a:lnRef>
-          <a:fillRef idx="3">
-            <a:schemeClr val="accent1"/>
-          </a:fillRef>
-          <a:effectRef idx="2">
-            <a:schemeClr val="accent1"/>
-          </a:effectRef>
-          <a:fontRef idx="minor">
-            <a:schemeClr val="lt1"/>
-          </a:fontRef>
-        </p:style>
-        <p:txBody>
-          <a:bodyPr rtlCol="0" anchor="ctr"/>
-          <a:lstStyle/>
-          <a:p>
-            <a:pPr algn="ctr"/>
-          </a:p>
-        </p:txBody>
-      </p:sp>
-      <p:sp>
-        <p:nvSpPr>
-          <p:cNvPr id="4" name="Rectangle 3"/>
-          <p:cNvSpPr/>
-          <p:nvPr/>
-        </p:nvSpPr>
-        <p:spPr>
-          <a:xfrm>
-            <a:off x="11716207" y="384048"/>
-            <a:ext cx="36576" cy="6080760"/>
-          </a:xfrm>
-          <a:prstGeom prst="rect">
-            <a:avLst/>
-          </a:prstGeom>
-          <a:solidFill>
-            <a:srgbClr val="C48052"/>
-          </a:solidFill>
-          <a:ln>
-            <a:noFill/>
-          </a:ln>
-        </p:spPr>
-        <p:style>
-          <a:lnRef idx="1">
-            <a:schemeClr val="accent1"/>
-          </a:lnRef>
-          <a:fillRef idx="3">
-            <a:schemeClr val="accent1"/>
-          </a:fillRef>
-          <a:effectRef idx="2">
-            <a:schemeClr val="accent1"/>
-          </a:effectRef>
-          <a:fontRef idx="minor">
-            <a:schemeClr val="lt1"/>
-          </a:fontRef>
-        </p:style>
-        <p:txBody>
-          <a:bodyPr rtlCol="0" anchor="ctr"/>
-          <a:lstStyle/>
-          <a:p>
-            <a:pPr algn="ctr"/>
-          </a:p>
-        </p:txBody>
-      </p:sp>
-      <p:sp>
-        <p:nvSpPr>
-          <p:cNvPr id="5" name="Rectangle 4"/>
-          <p:cNvSpPr/>
-          <p:nvPr/>
-        </p:nvSpPr>
-        <p:spPr>
-          <a:xfrm>
-            <a:off x="502920" y="384048"/>
-            <a:ext cx="11155680" cy="27432"/>
-          </a:xfrm>
-          <a:prstGeom prst="rect">
-            <a:avLst/>
-          </a:prstGeom>
-          <a:solidFill>
-            <a:srgbClr val="C48052"/>
-          </a:solidFill>
-          <a:ln>
-            <a:noFill/>
-          </a:ln>
-        </p:spPr>
-        <p:style>
-          <a:lnRef idx="1">
-            <a:schemeClr val="accent1"/>
-          </a:lnRef>
-          <a:fillRef idx="3">
-            <a:schemeClr val="accent1"/>
-          </a:fillRef>
-          <a:effectRef idx="2">
-            <a:schemeClr val="accent1"/>
-          </a:effectRef>
-          <a:fontRef idx="minor">
-            <a:schemeClr val="lt1"/>
-          </a:fontRef>
-        </p:style>
-        <p:txBody>
-          <a:bodyPr rtlCol="0" anchor="ctr"/>
-          <a:lstStyle/>
-          <a:p>
-            <a:pPr algn="ctr"/>
-          </a:p>
-        </p:txBody>
-      </p:sp>
-      <p:sp>
-        <p:nvSpPr>
-          <p:cNvPr id="6" name="Rectangle 5"/>
-          <p:cNvSpPr/>
-          <p:nvPr/>
-        </p:nvSpPr>
-        <p:spPr>
-          <a:xfrm>
-            <a:off x="502920" y="6437376"/>
-            <a:ext cx="11155680" cy="27432"/>
-          </a:xfrm>
-          <a:prstGeom prst="rect">
-            <a:avLst/>
-          </a:prstGeom>
-          <a:solidFill>
-            <a:srgbClr val="C48052"/>
-          </a:solidFill>
-          <a:ln>
-            <a:noFill/>
-          </a:ln>
-        </p:spPr>
-        <p:style>
-          <a:lnRef idx="1">
-            <a:schemeClr val="accent1"/>
-          </a:lnRef>
-          <a:fillRef idx="3">
-            <a:schemeClr val="accent1"/>
-          </a:fillRef>
-          <a:effectRef idx="2">
-            <a:schemeClr val="accent1"/>
-          </a:effectRef>
-          <a:fontRef idx="minor">
-            <a:schemeClr val="lt1"/>
-          </a:fontRef>
-        </p:style>
-        <p:txBody>
-          <a:bodyPr rtlCol="0" anchor="ctr"/>
-          <a:lstStyle/>
-          <a:p>
-            <a:pPr algn="ctr"/>
-          </a:p>
-        </p:txBody>
-      </p:sp>
-      <p:sp>
-        <p:nvSpPr>
-          <p:cNvPr id="7" name="TextBox 6"/>
-          <p:cNvSpPr txBox="1"/>
-          <p:nvPr/>
-        </p:nvSpPr>
-        <p:spPr>
-          <a:xfrm>
-            <a:off x="713232" y="548640"/>
-            <a:ext cx="10698480" cy="301752"/>
-          </a:xfrm>
-          <a:prstGeom prst="rect">
-            <a:avLst/>
-          </a:prstGeom>
-          <a:noFill/>
-        </p:spPr>
-        <p:txBody>
-          <a:bodyPr wrap="square" anchor="t">
-            <a:spAutoFit/>
-          </a:bodyPr>
-          <a:lstStyle/>
-          <a:p>
-            <a:pPr algn="l"/>
-            <a:r>
-              <a:rPr sz="1000" b="1">
-                <a:solidFill>
-                  <a:srgbClr val="C48052"/>
-                </a:solidFill>
-                <a:latin typeface="Aptos"/>
-              </a:rPr>
-              <a:t>FUTURE REFRESH DISCIPLINE</a:t>
-            </a:r>
-          </a:p>
-        </p:txBody>
-      </p:sp>
-      <p:sp>
-        <p:nvSpPr>
-          <p:cNvPr id="8" name="TextBox 7"/>
-          <p:cNvSpPr txBox="1"/>
-          <p:nvPr/>
-        </p:nvSpPr>
-        <p:spPr>
-          <a:xfrm>
-            <a:off x="694944" y="850392"/>
-            <a:ext cx="10881360" cy="566928"/>
-          </a:xfrm>
-          <a:prstGeom prst="rect">
-            <a:avLst/>
-          </a:prstGeom>
-          <a:noFill/>
-        </p:spPr>
-        <p:txBody>
-          <a:bodyPr wrap="square" anchor="t">
-            <a:spAutoFit/>
-          </a:bodyPr>
-          <a:lstStyle/>
-          <a:p>
-            <a:pPr algn="l"/>
-            <a:r>
-              <a:rPr sz="2700" b="0">
-                <a:solidFill>
-                  <a:srgbClr val="E8E8DE"/>
-                </a:solidFill>
-                <a:latin typeface="Aptos Display"/>
-              </a:rPr>
-              <a:t>How To Keep Docs Excellent</a:t>
-            </a:r>
-          </a:p>
-        </p:txBody>
-      </p:sp>
-      <p:sp>
-        <p:nvSpPr>
-          <p:cNvPr id="9" name="Rounded Rectangle 8"/>
-          <p:cNvSpPr/>
-          <p:nvPr/>
-        </p:nvSpPr>
-        <p:spPr>
-          <a:xfrm>
-            <a:off x="777240" y="1600200"/>
-            <a:ext cx="10561320" cy="4206240"/>
-          </a:xfrm>
-          <a:prstGeom prst="roundRect">
-            <a:avLst/>
-          </a:prstGeom>
-          <a:solidFill>
-            <a:srgbClr val="161A19"/>
-          </a:solidFill>
-          <a:ln>
-            <a:solidFill>
-              <a:srgbClr val="595F56"/>
-            </a:solidFill>
-          </a:ln>
-        </p:spPr>
-        <p:style>
-          <a:lnRef idx="1">
-            <a:schemeClr val="accent1"/>
-          </a:lnRef>
-          <a:fillRef idx="3">
-            <a:schemeClr val="accent1"/>
-          </a:fillRef>
-          <a:effectRef idx="2">
-            <a:schemeClr val="accent1"/>
-          </a:effectRef>
-          <a:fontRef idx="minor">
-            <a:schemeClr val="lt1"/>
-          </a:fontRef>
-        </p:style>
-        <p:txBody>
-          <a:bodyPr rtlCol="0" anchor="ctr"/>
-          <a:lstStyle/>
-          <a:p>
-            <a:pPr algn="ctr"/>
-          </a:p>
-        </p:txBody>
-      </p:sp>
-      <p:sp>
-        <p:nvSpPr>
-          <p:cNvPr id="10" name="Rectangle 9"/>
-          <p:cNvSpPr/>
-          <p:nvPr/>
-        </p:nvSpPr>
-        <p:spPr>
-          <a:xfrm>
-            <a:off x="777240" y="1600200"/>
-            <a:ext cx="10561320" cy="109728"/>
-          </a:xfrm>
-          <a:prstGeom prst="rect">
-            <a:avLst/>
-          </a:prstGeom>
-          <a:solidFill>
-            <a:srgbClr val="C48052"/>
-          </a:solidFill>
-          <a:ln>
-            <a:noFill/>
-          </a:ln>
-        </p:spPr>
-        <p:style>
-          <a:lnRef idx="1">
-            <a:schemeClr val="accent1"/>
-          </a:lnRef>
-          <a:fillRef idx="3">
-            <a:schemeClr val="accent1"/>
-          </a:fillRef>
-          <a:effectRef idx="2">
-            <a:schemeClr val="accent1"/>
-          </a:effectRef>
-          <a:fontRef idx="minor">
-            <a:schemeClr val="lt1"/>
-          </a:fontRef>
-        </p:style>
-        <p:txBody>
-          <a:bodyPr rtlCol="0" anchor="ctr"/>
-          <a:lstStyle/>
-          <a:p>
-            <a:pPr algn="ctr"/>
-          </a:p>
-        </p:txBody>
-      </p:sp>
-      <p:sp>
-        <p:nvSpPr>
-          <p:cNvPr id="11" name="TextBox 10"/>
-          <p:cNvSpPr txBox="1"/>
-          <p:nvPr/>
-        </p:nvSpPr>
-        <p:spPr>
-          <a:xfrm>
-            <a:off x="978408" y="1801368"/>
-            <a:ext cx="10158984" cy="310896"/>
-          </a:xfrm>
-          <a:prstGeom prst="rect">
-            <a:avLst/>
-          </a:prstGeom>
-          <a:noFill/>
-        </p:spPr>
-        <p:txBody>
-          <a:bodyPr wrap="square" anchor="t">
-            <a:spAutoFit/>
-          </a:bodyPr>
-          <a:lstStyle/>
-          <a:p>
-            <a:pPr algn="l"/>
-            <a:r>
-              <a:rPr sz="1400" b="1">
-                <a:solidFill>
-                  <a:srgbClr val="C48052"/>
-                </a:solidFill>
-                <a:latin typeface="Aptos"/>
-              </a:rPr>
-              <a:t>Recommended practice</a:t>
-            </a:r>
-          </a:p>
-        </p:txBody>
-      </p:sp>
-      <p:sp>
-        <p:nvSpPr>
-          <p:cNvPr id="12" name="TextBox 11"/>
-          <p:cNvSpPr txBox="1"/>
-          <p:nvPr/>
-        </p:nvSpPr>
-        <p:spPr>
-          <a:xfrm>
-            <a:off x="978408" y="2258568"/>
-            <a:ext cx="10158984" cy="3401568"/>
-          </a:xfrm>
-          <a:prstGeom prst="rect">
-            <a:avLst/>
-          </a:prstGeom>
-          <a:noFill/>
-        </p:spPr>
-        <p:txBody>
-          <a:bodyPr wrap="square" anchor="t" lIns="38100" rIns="38100" tIns="25400" bIns="25400">
-            <a:noAutofit/>
-          </a:bodyPr>
-          <a:lstStyle/>
-          <a:p>
-            <a:pPr>
-              <a:spcAft>
-                <a:spcPts val="600"/>
-              </a:spcAft>
-              <a:defRPr sz="1700">
-                <a:solidFill>
-                  <a:srgbClr val="B4BAAE"/>
-                </a:solidFill>
-                <a:latin typeface="Aptos"/>
-              </a:defRPr>
-            </a:pPr>
-            <a:r>
-              <a:rPr sz="1700" b="0" i="0">
-                <a:latin typeface="Calibri"/>
-              </a:rPr>
-              <a:t>Regenerate the PDF and deck whenever README, architecture, agent catalog, line inventory, or packaging behavior changes.</a:t>
-            </a:r>
-            <a:endParaRPr sz="1700" b="0" i="0">
-              <a:latin typeface="Calibri"/>
-            </a:endParaRPr>
-          </a:p>
-          <a:p>
-            <a:pPr>
-              <a:spcAft>
-                <a:spcPts val="600"/>
-              </a:spcAft>
-              <a:defRPr sz="1700">
-                <a:solidFill>
-                  <a:srgbClr val="B4BAAE"/>
-                </a:solidFill>
-                <a:latin typeface="Aptos"/>
-              </a:defRPr>
-            </a:pPr>
-            <a:r>
-              <a:rPr sz="1700" b="0" i="0">
-                <a:latin typeface="Calibri"/>
-              </a:rPr>
-              <a:t>Keep the PDF exhaustive and evidence-heavy; keep the PPT visual, split dense appendices, and audit geometry before delivery.</a:t>
-            </a:r>
-            <a:endParaRPr sz="1700" b="0" i="0">
-              <a:latin typeface="Calibri"/>
-            </a:endParaRPr>
-          </a:p>
-          <a:p>
-            <a:pPr>
-              <a:spcAft>
-                <a:spcPts val="600"/>
-              </a:spcAft>
-              <a:defRPr sz="1700">
-                <a:solidFill>
-                  <a:srgbClr val="B4BAAE"/>
-                </a:solidFill>
-                <a:latin typeface="Aptos"/>
-              </a:defRPr>
-            </a:pPr>
-            <a:r>
-              <a:rPr sz="1700" b="0" i="0">
-                <a:latin typeface="Calibri"/>
-              </a:rPr>
-              <a:t>Use the new Skills in `.codex/skills/` so future refreshes follow the same no-overlap and full-dossier rules.</a:t>
-            </a:r>
-            <a:endParaRPr sz="1700" b="0" i="0">
               <a:latin typeface="Calibri"/>
             </a:endParaRPr>
           </a:p>

--- a/Tlamatini_eXtended_Artificial_Intelligence_Humanly_Tempered.pptx
+++ b/Tlamatini_eXtended_Artificial_Intelligence_Humanly_Tempered.pptx
@@ -3612,7 +3612,7 @@
                 </a:solidFill>
                 <a:latin typeface="Aptos"/>
               </a:rPr>
-              <a:t>469</a:t>
+              <a:t>476</a:t>
             </a:r>
           </a:p>
         </p:txBody>
@@ -3842,7 +3842,7 @@
                 </a:solidFill>
                 <a:latin typeface="Aptos"/>
               </a:rPr>
-              <a:t>102,103</a:t>
+              <a:t>103,895</a:t>
             </a:r>
           </a:p>
         </p:txBody>
@@ -3877,7 +3877,7 @@
                 </a:solidFill>
                 <a:latin typeface="Aptos"/>
               </a:rPr>
-              <a:t>Generated May 21, 2026 04:26 PM UTC-0600 at HEAD d05e6a9</a:t>
+              <a:t>Generated May 21, 2026 04:54 PM UTC-0600 at HEAD 82e2fd4</a:t>
             </a:r>
           </a:p>
         </p:txBody>
@@ -13330,7 +13330,7 @@
               <a:rPr sz="1300" b="0" i="0">
                 <a:latin typeface="Calibri"/>
               </a:rPr>
-              <a:t>Those readability rules remain in force in the current documentation set, and the newer `v1.5.0` release state keeps the version badge, runtime surfaces, and operator handbook aligned.</a:t>
+              <a:t>Those readability rules remain in force in the current documentation set, and the newer `v1.6.0` release state keeps the version badge, runtime surfaces, and operator handbook aligned.</a:t>
             </a:r>
             <a:endParaRPr sz="1300" b="0" i="0">
               <a:latin typeface="Calibri"/>
@@ -14844,7 +14844,7 @@
                 </a:solidFill>
                 <a:latin typeface="Cascadia Mono"/>
               </a:rPr>
-              <a:t>Resolved current version: 1.5.0 | build: 1.5.0</a:t>
+              <a:t>Resolved current version: 1.6.0 | build: 1.6.0</a:t>
             </a:r>
           </a:p>
         </p:txBody>
@@ -24592,7 +24592,7 @@
                 </a:solidFill>
                 <a:latin typeface="Aptos"/>
               </a:rPr>
-              <a:t>469</a:t>
+              <a:t>476</a:t>
             </a:r>
           </a:p>
         </p:txBody>
@@ -25332,7 +25332,7 @@
               <a:rPr sz="1500" b="0" i="0">
                 <a:latin typeface="Calibri"/>
               </a:rPr>
-              <a:t>d05e6a9 - Updating visual assets, by angelahack1</a:t>
+              <a:t>82e2fd4 - Updating to version 1.6.0 of Tlamatini, by Tlamatini's-AutoBot.</a:t>
             </a:r>
             <a:endParaRPr sz="1500" b="0" i="0">
               <a:latin typeface="Calibri"/>
@@ -25354,7 +25354,7 @@
               <a:rPr sz="1500" b="0" i="0">
                 <a:latin typeface="Calibri"/>
               </a:rPr>
-              <a:t>Resolved version: 1.5.0 (git)</a:t>
+              <a:t>Resolved version: 1.6.0 (git)</a:t>
             </a:r>
             <a:endParaRPr sz="1500" b="0" i="0">
               <a:latin typeface="Calibri"/>
@@ -25376,7 +25376,7 @@
               <a:rPr sz="1500" b="0" i="0">
                 <a:latin typeface="Calibri"/>
               </a:rPr>
-              <a:t>Generated on May 21, 2026 04:26 PM UTC-0600</a:t>
+              <a:t>Generated on May 21, 2026 04:54 PM UTC-0600</a:t>
             </a:r>
             <a:endParaRPr sz="1500" b="0" i="0">
               <a:latin typeface="Calibri"/>
@@ -25841,7 +25841,7 @@
                 </a:solidFill>
                 <a:latin typeface="Aptos"/>
               </a:rPr>
-              <a:t>102,103</a:t>
+              <a:t>103,895</a:t>
             </a:r>
           </a:p>
         </p:txBody>
@@ -25956,7 +25956,7 @@
                 </a:solidFill>
                 <a:latin typeface="Aptos"/>
               </a:rPr>
-              <a:t>139,073</a:t>
+              <a:t>141,579</a:t>
             </a:r>
           </a:p>
         </p:txBody>
@@ -26107,11 +26107,11 @@
                 <a:latin typeface="Cascadia Mono"/>
               </a:rPr>
               <a:t>LANGUAGE                 FILES   EFFECTIVE      TOTAL   SHARE
-Python                   272      68,475     95,619  67.1%
-JavaScript                28      13,028     16,393  12.8%
-Markdown                  52      12,069     15,512  11.8%
+Python                   278      70,255     98,048  67.6%
+JavaScript                28      13,028     16,393  12.5%
+Markdown                  52      12,069     15,512  11.6%
 CSS                        6       3,398      4,282   3.3%
-YAML                      69       1,420      2,879   1.4%
+YAML                      70       1,432      2,956   1.4%
 HTML                       4         823        841   0.8%
 Other text                 3         789        967   0.8%
 Prompt template            2         607        719   0.6%
@@ -26940,7 +26940,73 @@
               <a:rPr sz="1500" b="0" i="0">
                 <a:latin typeface="Calibri"/>
               </a:rPr>
-              <a:t>Git history today shows focused maintenance across the operator surface, release mechanics, and runtime behavior.</a:t>
+              <a:t>Today’s headline change is the new Windower agent: Tlamatini now reaches 66 workflow agents and adds a deterministic Win32 window-manager surface for focusing, tiling, resizing, listing, and closing windows from both Multi-Turn chat and the visual canvas.</a:t>
+            </a:r>
+            <a:endParaRPr sz="1500" b="0" i="0">
+              <a:latin typeface="Calibri"/>
+            </a:endParaRPr>
+          </a:p>
+          <a:p>
+            <a:pPr>
+              <a:spcAft>
+                <a:spcPts val="600"/>
+              </a:spcAft>
+              <a:defRPr sz="1500">
+                <a:solidFill>
+                  <a:srgbClr val="B4BAAE"/>
+                </a:solidFill>
+                <a:latin typeface="Aptos"/>
+              </a:defRPr>
+            </a:pPr>
+            <a:r>
+              <a:rPr sz="1500" b="0" i="0">
+                <a:latin typeface="Calibri"/>
+              </a:rPr>
+              <a:t>Today’s headline change is the new Playwrighter agent in `v1.5.0`: Tlamatini now adds its 65th workflow agent and a real-browser automation surface for scripted Playwright flows from both Multi-Turn chat and the visual canvas.</a:t>
+            </a:r>
+            <a:endParaRPr sz="1500" b="0" i="0">
+              <a:latin typeface="Calibri"/>
+            </a:endParaRPr>
+          </a:p>
+          <a:p>
+            <a:pPr>
+              <a:spcAft>
+                <a:spcPts val="600"/>
+              </a:spcAft>
+              <a:defRPr sz="1500">
+                <a:solidFill>
+                  <a:srgbClr val="B4BAAE"/>
+                </a:solidFill>
+                <a:latin typeface="Aptos"/>
+              </a:defRPr>
+            </a:pPr>
+            <a:r>
+              <a:rPr sz="1500" b="0" i="0">
+                <a:latin typeface="Calibri"/>
+              </a:rPr>
+              <a:t>Today’s headline change is the new versioning system: SemVer policy, git-tag sourcing, runtime version surfaces, and build-time embedding across the Windows artefacts.</a:t>
+            </a:r>
+            <a:endParaRPr sz="1500" b="0" i="0">
+              <a:latin typeface="Calibri"/>
+            </a:endParaRPr>
+          </a:p>
+          <a:p>
+            <a:pPr>
+              <a:spcAft>
+                <a:spcPts val="600"/>
+              </a:spcAft>
+              <a:defRPr sz="1500">
+                <a:solidFill>
+                  <a:srgbClr val="B4BAAE"/>
+                </a:solidFill>
+                <a:latin typeface="Aptos"/>
+              </a:defRPr>
+            </a:pPr>
+            <a:r>
+              <a:rPr sz="1500" b="0" i="0">
+                <a:latin typeface="Calibri"/>
+              </a:rPr>
+              <a:t>Documentation itself changed today, so the regenerated dossier is part of the tracked operator surface rather than an external afterthought.</a:t>
             </a:r>
             <a:endParaRPr sz="1500" b="0" i="0">
               <a:latin typeface="Calibri"/>
@@ -27395,6 +27461,50 @@
             <a:noAutofit/>
           </a:bodyPr>
           <a:lstStyle/>
+          <a:p>
+            <a:pPr>
+              <a:spcAft>
+                <a:spcPts val="600"/>
+              </a:spcAft>
+              <a:defRPr sz="1200">
+                <a:solidFill>
+                  <a:srgbClr val="B4BAAE"/>
+                </a:solidFill>
+                <a:latin typeface="Aptos"/>
+              </a:defRPr>
+            </a:pPr>
+            <a:r>
+              <a:rPr sz="1200" b="0" i="0">
+                <a:latin typeface="Calibri"/>
+              </a:rPr>
+              <a:t>2026-05-21 | 82e2fd4 | Updating to version 1.6.0 of Tlamatini, by Tlamatini's-AutoBot.</a:t>
+            </a:r>
+            <a:endParaRPr sz="1200" b="0" i="0">
+              <a:latin typeface="Calibri"/>
+            </a:endParaRPr>
+          </a:p>
+          <a:p>
+            <a:pPr>
+              <a:spcAft>
+                <a:spcPts val="600"/>
+              </a:spcAft>
+              <a:defRPr sz="1200">
+                <a:solidFill>
+                  <a:srgbClr val="B4BAAE"/>
+                </a:solidFill>
+                <a:latin typeface="Aptos"/>
+              </a:defRPr>
+            </a:pPr>
+            <a:r>
+              <a:rPr sz="1200" b="0" i="0">
+                <a:latin typeface="Calibri"/>
+              </a:rPr>
+              <a:t>2026-05-21 | b8fd51e | Implementing Playwrighter and Windower completely in source code and documentation, by Tlamatini's-AutoBot.</a:t>
+            </a:r>
+            <a:endParaRPr sz="1200" b="0" i="0">
+              <a:latin typeface="Calibri"/>
+            </a:endParaRPr>
+          </a:p>
           <a:p>
             <a:pPr>
               <a:spcAft>
@@ -30427,6 +30537,8 @@
     |   |-- test_native_dialogs.py
     |   |-- test_orphan_reaper.py
     |   |-- test_password_quoting.py
+    |   |-- test_playwrighter_agent.py
+    |   |-- test_windower_agent.py
     |   |-- tests.py
     |   |-- tools.py
     |   |-- urls.py
@@ -30442,9 +30554,7 @@
     |   |   |-- service.py
     |   |   |-- session_store.py
     |   |   |-- tests.py
-    |   |   |-- tools.py
-    |   |   `-- windows_spawn.py
-    |   |-- agents/</a:t>
+    |   |   |-- tools.py</a:t>
             </a:r>
           </a:p>
         </p:txBody>
@@ -30782,7 +30892,9 @@
                 </a:solidFill>
                 <a:latin typeface="Cascadia Mono"/>
               </a:rPr>
-              <a:t>    |   |   |-- acpxer/
+              <a:t>    |   |   `-- windows_spawn.py
+    |   |-- agents/
+    |   |   |-- acpxer/
     |   |   |   |-- acpxer.py
     |   |   |   `-- config.yaml
     |   |   |-- analyzer/
@@ -30810,9 +30922,7 @@
     |   |   |   `-- counter.py
     |   |   |-- crawler/
     |   |   |   |-- config.yaml
-    |   |   |   `-- crawler.py
-    |   |   |-- croner/
-    |   |   |   |-- config.yaml</a:t>
+    |   |   |   `-- crawler.py</a:t>
             </a:r>
           </a:p>
         </p:txBody>
@@ -31150,7 +31260,9 @@
                 </a:solidFill>
                 <a:latin typeface="Cascadia Mono"/>
               </a:rPr>
-              <a:t>    |   |   |   `-- croner.py
+              <a:t>    |   |   |-- croner/
+    |   |   |   |-- config.yaml
+    |   |   |   `-- croner.py
     |   |   |-- de_compresser/
     |   |   |   |-- config.yaml
     |   |   |   `-- de_compresser.py
@@ -31178,9 +31290,7 @@
     |   |   |-- file_interpreter/
     |   |   |   |-- config.yaml
     |   |   |   `-- file_interpreter.py
-    |   |   |-- flowbacker/
-    |   |   |   |-- config.yaml
-    |   |   |   `-- flowbacker.py</a:t>
+    |   |   |-- flowbacker/</a:t>
             </a:r>
           </a:p>
         </p:txBody>
@@ -31518,7 +31628,9 @@
                 </a:solidFill>
                 <a:latin typeface="Cascadia Mono"/>
               </a:rPr>
-              <a:t>    |   |   |-- flowcreator/
+              <a:t>    |   |   |   |-- config.yaml
+    |   |   |   `-- flowbacker.py
+    |   |   |-- flowcreator/
     |   |   |   |-- agentic_skill.md
     |   |   |   |-- config.yaml
     |   |   |   `-- flowcreator.py
@@ -31546,9 +31658,7 @@
     |   |   |   |-- config.yaml
     |   |   |   `-- googler.py
     |   |   |-- image_interpreter/
-    |   |   |   |-- config.yaml
-    |   |   |   `-- image_interpreter.py
-    |   |   |-- j_decompiler/</a:t>
+    |   |   |   |-- config.yaml</a:t>
             </a:r>
           </a:p>
         </p:txBody>
@@ -31886,7 +31996,9 @@
                 </a:solidFill>
                 <a:latin typeface="Cascadia Mono"/>
               </a:rPr>
-              <a:t>    |   |   |   |-- config.yaml
+              <a:t>    |   |   |   `-- image_interpreter.py
+    |   |   |-- j_decompiler/
+    |   |   |   |-- config.yaml
     |   |   |   `-- j_decompiler.py
     |   |   |-- jenkinser/
     |   |   |   |-- config.yaml
@@ -31914,9 +32026,7 @@
     |   |   |   `-- monitor_log.py
     |   |   |-- monitor_netstat/
     |   |   |   |-- config.yaml
-    |   |   |   `-- monitor_netstat.py
-    |   |   |-- mouser/
-    |   |   |   |-- config.yaml</a:t>
+    |   |   |   `-- monitor_netstat.py</a:t>
             </a:r>
           </a:p>
         </p:txBody>
@@ -32254,7 +32364,9 @@
                 </a:solidFill>
                 <a:latin typeface="Cascadia Mono"/>
               </a:rPr>
-              <a:t>    |   |   |   `-- mouser.py
+              <a:t>    |   |   |-- mouser/
+    |   |   |   |-- config.yaml
+    |   |   |   `-- mouser.py
     |   |   |-- mover/
     |   |   |   |-- config.yaml
     |   |   |   `-- mover.py
@@ -32282,9 +32394,7 @@
     |   |   |-- pser/
     |   |   |   |-- config.yaml
     |   |   |   `-- pser.py
-    |   |   |-- pythonxer/
-    |   |   |   |-- config.yaml
-    |   |   |   `-- pythonxer.py</a:t>
+    |   |   |-- pythonxer/</a:t>
             </a:r>
           </a:p>
         </p:txBody>
@@ -32622,7 +32732,9 @@
                 </a:solidFill>
                 <a:latin typeface="Cascadia Mono"/>
               </a:rPr>
-              <a:t>    |   |   |-- raiser/
+              <a:t>    |   |   |   |-- config.yaml
+    |   |   |   `-- pythonxer.py
+    |   |   |-- raiser/
     |   |   |   |-- config.yaml
     |   |   |   `-- raiser.py
     |   |   |-- recmailer/
@@ -32650,9 +32762,7 @@
     |   |   |   |-- config.yaml
     |   |   |   `-- starter.py
     |   |   |-- stopper/
-    |   |   |   |-- config.yaml
-    |   |   |   `-- stopper.py
-    |   |   |-- summarizer/</a:t>
+    |   |   |   |-- config.yaml</a:t>
             </a:r>
           </a:p>
         </p:txBody>
@@ -33571,7 +33681,9 @@
                 </a:solidFill>
                 <a:latin typeface="Cascadia Mono"/>
               </a:rPr>
-              <a:t>    |   |   |   |-- config.yaml
+              <a:t>    |   |   |   `-- stopper.py
+    |   |   |-- summarizer/
+    |   |   |   |-- config.yaml
     |   |   |   `-- summarizer.py
     |   |   |-- telegramer/
     |   |   |   |-- config.yaml
@@ -33588,20 +33700,18 @@
     |   |   |-- whatsapper/
     |   |   |   |-- config.yaml
     |   |   |   `-- whatsapper.py
-    |   |   `-- whatstlamatini/
+    |   |   |-- whatstlamatini/
+    |   |   |   |-- config.yaml
+    |   |   |   `-- whatstlamatini.py
+    |   |   `-- windower/
     |   |       |-- config.yaml
-    |   |       `-- whatstlamatini.py
+    |   |       `-- windower.py
     |   |-- doc_generation/
     |   |   |-- complete_project_docs.py
     |   |   |-- mardown_to_pdf.py
     |   |   |-- refresh_project_docs.py
     |   |   `-- test_output.pdf
-    |   |-- images/
-    |   |   |-- mockup.jpg
-    |   |   |-- TlamatiniAbout.jpg
-    |   |   `-- XAIHT-Tlamatini.mp4
-    |   |-- imaging/
-    |   |   |-- converter.py</a:t>
+    |   |-- images/</a:t>
             </a:r>
           </a:p>
         </p:txBody>
@@ -33939,7 +34049,12 @@
                 </a:solidFill>
                 <a:latin typeface="Cascadia Mono"/>
               </a:rPr>
-              <a:t>    |   |   |-- image_interpreter.py
+              <a:t>    |   |   |-- mockup.jpg
+    |   |   |-- TlamatiniAbout.jpg
+    |   |   `-- XAIHT-Tlamatini.mp4
+    |   |-- imaging/
+    |   |   |-- converter.py
+    |   |   |-- image_interpreter.py
     |   |   `-- screenshot.py
     |   |-- management/
     |   |   |-- __init__.py
@@ -33964,12 +34079,7 @@
     |   |   |-- 0015_add_shoter.py
     |   |   |-- 0016_repopulate_all_agents.py
     |   |   |-- 0017_add_ssher.py
-    |   |   |-- 0018_repopulate_all_agents.py
-    |   |   |-- 0019_add_scper.py
-    |   |   |-- 0020_repopulate_all_agents.py
-    |   |   |-- 0021_add_telegramrx.py
-    |   |   |-- 0022_repopulate_all_agents.py
-    |   |   |-- 0023_add_mongoxer.py</a:t>
+    |   |   |-- 0018_repopulate_all_agents.py</a:t>
             </a:r>
           </a:p>
         </p:txBody>
@@ -34307,7 +34417,12 @@
                 </a:solidFill>
                 <a:latin typeface="Cascadia Mono"/>
               </a:rPr>
-              <a:t>    |   |   |-- 0024_repopulate_all_agents.py
+              <a:t>    |   |   |-- 0019_add_scper.py
+    |   |   |-- 0020_repopulate_all_agents.py
+    |   |   |-- 0021_add_telegramrx.py
+    |   |   |-- 0022_repopulate_all_agents.py
+    |   |   |-- 0023_add_mongoxer.py
+    |   |   |-- 0024_repopulate_all_agents.py
     |   |   |-- 0025_add_telegramer.py
     |   |   |-- 0026_repopulate_all_agents.py
     |   |   |-- 0027_add_sqler.py
@@ -34332,12 +34447,7 @@
     |   |   |-- 0046_add_image_interpreter.py
     |   |   |-- 0047_add_gatewayer.py
     |   |   |-- 0048_add_gateway_relayer.py
-    |   |   |-- 0049_add_node_manager.py
-    |   |   |-- 0050_add_file_creator.py
-    |   |   |-- 0051_add_file_extractor.py
-    |   |   |-- 0052_add_kyber_keygen.py
-    |   |   |-- 0053_add_kyber_cipher.py
-    |   |   |-- 0054_add_kyber_decipher.py</a:t>
+    |   |   |-- 0049_add_node_manager.py</a:t>
             </a:r>
           </a:p>
         </p:txBody>
@@ -34675,7 +34785,12 @@
                 </a:solidFill>
                 <a:latin typeface="Cascadia Mono"/>
               </a:rPr>
-              <a:t>    |   |   |-- 0055_fix_kyber_cipher_names.py
+              <a:t>    |   |   |-- 0050_add_file_creator.py
+    |   |   |-- 0051_add_file_extractor.py
+    |   |   |-- 0052_add_kyber_keygen.py
+    |   |   |-- 0053_add_kyber_cipher.py
+    |   |   |-- 0054_add_kyber_decipher.py
+    |   |   |-- 0055_fix_kyber_cipher_names.py
     |   |   |-- 0056_add_parametrizer.py
     |   |   |-- 0057_add_flowbacker.py
     |   |   |-- 0058_add_barrier.py
@@ -34700,12 +34815,7 @@
     |   |   |-- 0077_add_whatstlamatini.py
     |   |   |-- 0078_add_chat_agent_keyboarder_tool.py
     |   |   |-- 0079_add_chat_agent_mouser_tool.py
-    |   |   |-- 0080_add_chat_agent_sleeper_tool.py
-    |   |   |-- 0081_add_window_present_and_run_wait_tools.py
-    |   |   |-- 0082_add_chat_agent_j_decompiler_tool.py
-    |   |   |-- 0083_add_de_compresser.py
-    |   |   |-- 0084_add_chat_agent_de_compresser_tool.py
-    |   |   |-- 0085_add_unrealer.py</a:t>
+    |   |   |-- 0080_add_chat_agent_sleeper_tool.py</a:t>
             </a:r>
           </a:p>
         </p:txBody>
@@ -35043,13 +35153,21 @@
                 </a:solidFill>
                 <a:latin typeface="Cascadia Mono"/>
               </a:rPr>
-              <a:t>    |   |   |-- 0086_add_chat_agent_unrealer_tool.py
+              <a:t>    |   |   |-- 0081_add_window_present_and_run_wait_tools.py
+    |   |   |-- 0082_add_chat_agent_j_decompiler_tool.py
+    |   |   |-- 0083_add_de_compresser.py
+    |   |   |-- 0084_add_chat_agent_de_compresser_tool.py
+    |   |   |-- 0085_add_unrealer.py
+    |   |   |-- 0086_add_chat_agent_unrealer_tool.py
     |   |   |-- 0087_add_unrealer_demo_prompt.py
     |   |   |-- 0088_add_reviewer.py
     |   |   |-- 0089_add_analyzer.py
     |   |   |-- 0090_add_reviewer_analyzer_demo_prompts.py
     |   |   |-- 0091_add_playwrighter.py
     |   |   |-- 0092_add_chat_agent_playwrighter_tool.py
+    |   |   |-- 0093_add_windower.py
+    |   |   |-- 0094_add_chat_agent_windower_tool.py
+    |   |   |-- 0095_add_windower_playwrighter_demo_prompts.py
     |   |   `-- __init__.py
     |   |-- monitors/
     |   |   `-- monitor_sql.py
@@ -35065,15 +35183,7 @@
     |   |   |-- interface.py
     |   |   |-- loaders.py
     |   |   |-- prompts.py
-    |   |   |-- retrieval.py
-    |   |   |-- splitters.py
-    |   |   |-- utils.py
-    |   |   `-- chains/
-    |   |       |-- base.py
-    |   |       |-- basic.py
-    |   |       |-- history_aware.py
-    |   |       `-- unified.py
-    |   |-- services/</a:t>
+    |   |   |-- retrieval.py</a:t>
             </a:r>
           </a:p>
         </p:txBody>
@@ -35411,7 +35521,15 @@
                 </a:solidFill>
                 <a:latin typeface="Cascadia Mono"/>
               </a:rPr>
-              <a:t>    |   |   |-- __init__.py
+              <a:t>    |   |   |-- splitters.py
+    |   |   |-- utils.py
+    |   |   `-- chains/
+    |   |       |-- base.py
+    |   |       |-- basic.py
+    |   |       |-- history_aware.py
+    |   |       `-- unified.py
+    |   |-- services/
+    |   |   |-- __init__.py
     |   |   |-- agent_contracts.py
     |   |   |-- agent_paths.py
     |   |   |-- answer_analizer.py
@@ -35433,15 +35551,7 @@
     |   |   |   `-- SKILL.md
     |   |   |-- code_review/
     |   |   |   `-- SKILL.md
-    |   |   |-- github/
-    |   |   |   `-- SKILL.md
-    |   |   |-- gmail/
-    |   |   |   `-- SKILL.md
-    |   |   |-- hello_world/
-    |   |   |   `-- SKILL.md
-    |   |   |-- jira/
-    |   |   |   `-- SKILL.md
-    |   |   |-- notion/</a:t>
+    |   |   |-- github/</a:t>
             </a:r>
           </a:p>
         </p:txBody>
@@ -35780,6 +35890,14 @@
                 <a:latin typeface="Cascadia Mono"/>
               </a:rPr>
               <a:t>    |   |   |   `-- SKILL.md
+    |   |   |-- gmail/
+    |   |   |   `-- SKILL.md
+    |   |   |-- hello_world/
+    |   |   |   `-- SKILL.md
+    |   |   |-- jira/
+    |   |   |   `-- SKILL.md
+    |   |   |-- notion/
+    |   |   |   `-- SKILL.md
     |   |   |-- security_audit/
     |   |   |   `-- SKILL.md
     |   |   |-- setup_new_acpx_key/
@@ -35801,14 +35919,6 @@
     |   |   |-- tlamatini_flow_from_objective/
     |   |   |   `-- SKILL.md
     |   |   |-- tlamatini_flw_doctor/
-    |   |   |   `-- SKILL.md
-    |   |   |-- tlamatini_new_acp_agent/
-    |   |   |   `-- SKILL.md
-    |   |   |-- tlamatini_planner_trace_replay/
-    |   |   |   `-- SKILL.md
-    |   |   |-- tlamatini_static_version_bumper/
-    |   |   |   `-- SKILL.md
-    |   |   |-- todoist/
     |   |   |   `-- SKILL.md</a:t>
             </a:r>
           </a:p>
@@ -36147,7 +36257,15 @@
                 </a:solidFill>
                 <a:latin typeface="Cascadia Mono"/>
               </a:rPr>
-              <a:t>    |   |   |-- trello/
+              <a:t>    |   |   |-- tlamatini_new_acp_agent/
+    |   |   |   `-- SKILL.md
+    |   |   |-- tlamatini_planner_trace_replay/
+    |   |   |   `-- SKILL.md
+    |   |   |-- tlamatini_static_version_bumper/
+    |   |   |   `-- SKILL.md
+    |   |   |-- todoist/
+    |   |   |   `-- SKILL.md
+    |   |   |-- trello/
     |   |   |   `-- SKILL.md
     |   |   `-- weather/
     |   |       `-- SKILL.md
@@ -36169,15 +36287,7 @@
     |   |       |   |-- acp-canvas-undo.js
     |   |       |   |-- acp-control-buttons.js
     |   |       |   |-- acp-file-io.js
-    |   |       |   |-- acp-flow-snapshot.js
-    |   |       |   |-- acp-globals.js
-    |   |       |   |-- acp-layout.js
-    |   |       |   |-- acp-parametrizer-dialog.js
-    |   |       |   |-- acp-running-state.js
-    |   |       |   |-- acp-session.js
-    |   |       |   |-- acp-undo-manager.js
-    |   |       |   |-- acp-validate.js
-    |   |       |   |-- agent_page_canvas.js</a:t>
+    |   |       |   |-- acp-flow-snapshot.js</a:t>
             </a:r>
           </a:p>
         </p:txBody>
@@ -36515,7 +36625,15 @@
                 </a:solidFill>
                 <a:latin typeface="Cascadia Mono"/>
               </a:rPr>
-              <a:t>    |   |       |   |-- agent_page_chat.js
+              <a:t>    |   |       |   |-- acp-globals.js
+    |   |       |   |-- acp-layout.js
+    |   |       |   |-- acp-parametrizer-dialog.js
+    |   |       |   |-- acp-running-state.js
+    |   |       |   |-- acp-session.js
+    |   |       |   |-- acp-undo-manager.js
+    |   |       |   |-- acp-validate.js
+    |   |       |   |-- agent_page_canvas.js
+    |   |       |   |-- agent_page_chat.js
     |   |       |   |-- agent_page_context.js
     |   |       |   |-- agent_page_dialogs.js
     |   |       |   |-- agent_page_init.js
@@ -36537,15 +36655,7 @@
     |   |-- telegram/
     |   |   |-- AztecTlamatini.txt
     |   |   |-- config.yaml
-    |   |   `-- telegram_receiver.py
-    |   `-- templates/
-    |       `-- agent/
-    |           |-- agent_page.html
-    |           |-- agentic_control_panel.html
-    |           |-- login.html
-    |           `-- welcome.html
-    |-- DB/
-    |   |-- Older/</a:t>
+    |   |   `-- telegram_receiver.py</a:t>
             </a:r>
           </a:p>
         </p:txBody>
@@ -36883,7 +36993,15 @@
                 </a:solidFill>
                 <a:latin typeface="Cascadia Mono"/>
               </a:rPr>
-              <a:t>    |   |   `-- README.md
+              <a:t>    |   `-- templates/
+    |       `-- agent/
+    |           |-- agent_page.html
+    |           |-- agentic_control_panel.html
+    |           |-- login.html
+    |           `-- welcome.html
+    |-- DB/
+    |   |-- Older/
+    |   |   `-- README.md
     |   `-- ToLoad/
     |       `-- README.md
     |-- jd-cli/

--- a/Tlamatini_eXtended_Artificial_Intelligence_Humanly_Tempered.pptx
+++ b/Tlamatini_eXtended_Artificial_Intelligence_Humanly_Tempered.pptx
@@ -3614,7 +3614,7 @@
                 </a:solidFill>
                 <a:latin typeface="Aptos"/>
               </a:rPr>
-              <a:t>485</a:t>
+              <a:t>487</a:t>
             </a:r>
           </a:p>
         </p:txBody>
@@ -3844,7 +3844,7 @@
                 </a:solidFill>
                 <a:latin typeface="Aptos"/>
               </a:rPr>
-              <a:t>105,973</a:t>
+              <a:t>107,128</a:t>
             </a:r>
           </a:p>
         </p:txBody>
@@ -3879,7 +3879,7 @@
                 </a:solidFill>
                 <a:latin typeface="Aptos"/>
               </a:rPr>
-              <a:t>Generated May 22, 2026 09:20 PM UTC-0600 at HEAD e908dc9</a:t>
+              <a:t>Generated May 24, 2026 11:16 AM UTC-0600 at HEAD 413b1eb</a:t>
             </a:r>
           </a:p>
         </p:txBody>
@@ -5845,7 +5845,7 @@
               <a:rPr sz="1300" b="0" i="0">
                 <a:latin typeface="Calibri"/>
               </a:rPr>
-              <a:t>Some README lines still show the pre-Kalier 73-tool figure, so this dossier prefers the newer Book/git/live-registry state while preserving the rest of the README operator guidance.</a:t>
+              <a:t>README.md and BookOfTlamatini.md now agree on those counts, so the dossier can mirror the docs and the live registry without reconciliation footnotes.</a:t>
             </a:r>
             <a:endParaRPr sz="1300" b="0" i="0">
               <a:latin typeface="Calibri"/>
@@ -6350,7 +6350,7 @@
                 </a:solidFill>
                 <a:latin typeface="Aptos"/>
               </a:rPr>
-              <a:t>KALI LINUX CONTROL FOR CHAT AND CANVAS</a:t>
+              <a:t>EMBEDDED-CLIENT KALI LINUX CONTROL FOR CHAT AND CANVAS</a:t>
             </a:r>
           </a:p>
         </p:txBody>
@@ -6385,7 +6385,7 @@
                 </a:solidFill>
                 <a:latin typeface="Aptos Display"/>
               </a:rPr>
-              <a:t>Kalier In v1.7.0</a:t>
+              <a:t>Kalier In v1.7.1</a:t>
             </a:r>
           </a:p>
         </p:txBody>
@@ -6550,7 +6550,7 @@
               <a:rPr sz="1300" b="0" i="0">
                 <a:latin typeface="Calibri"/>
               </a:rPr>
-              <a:t>Kalier is the new 67th workflow agent in `v1.7.0`: a deterministic bridge from Tlamatini into Kali Linux offensive-security tooling through MCP-Kali-Server.</a:t>
+              <a:t>Kalier remains the 67th workflow agent in `v1.7.1`, but its newest upgrade is usability: Tlamatini now acts as the embedded MCP-Kali-Server client for chat-side runs.</a:t>
             </a:r>
             <a:endParaRPr sz="1300" b="0" i="0">
               <a:latin typeface="Calibri"/>
@@ -6600,152 +6600,6 @@
               <a:latin typeface="Calibri"/>
             </a:endParaRPr>
           </a:p>
-        </p:txBody>
-      </p:sp>
-      <p:sp>
-        <p:nvSpPr>
-          <p:cNvPr id="13" name="Rounded Rectangle 12"/>
-          <p:cNvSpPr/>
-          <p:nvPr/>
-        </p:nvSpPr>
-        <p:spPr>
-          <a:xfrm>
-            <a:off x="6355080" y="1463040"/>
-            <a:ext cx="5074920" cy="4526280"/>
-          </a:xfrm>
-          <a:prstGeom prst="roundRect">
-            <a:avLst/>
-          </a:prstGeom>
-          <a:solidFill>
-            <a:srgbClr val="161A19"/>
-          </a:solidFill>
-          <a:ln>
-            <a:solidFill>
-              <a:srgbClr val="595F56"/>
-            </a:solidFill>
-          </a:ln>
-        </p:spPr>
-        <p:style>
-          <a:lnRef idx="1">
-            <a:schemeClr val="accent1"/>
-          </a:lnRef>
-          <a:fillRef idx="3">
-            <a:schemeClr val="accent1"/>
-          </a:fillRef>
-          <a:effectRef idx="2">
-            <a:schemeClr val="accent1"/>
-          </a:effectRef>
-          <a:fontRef idx="minor">
-            <a:schemeClr val="lt1"/>
-          </a:fontRef>
-        </p:style>
-        <p:txBody>
-          <a:bodyPr rtlCol="0" anchor="ctr"/>
-          <a:lstStyle/>
-          <a:p>
-            <a:pPr algn="ctr"/>
-          </a:p>
-        </p:txBody>
-      </p:sp>
-      <p:sp>
-        <p:nvSpPr>
-          <p:cNvPr id="14" name="Rectangle 13"/>
-          <p:cNvSpPr/>
-          <p:nvPr/>
-        </p:nvSpPr>
-        <p:spPr>
-          <a:xfrm>
-            <a:off x="6355080" y="1463040"/>
-            <a:ext cx="5074920" cy="109728"/>
-          </a:xfrm>
-          <a:prstGeom prst="rect">
-            <a:avLst/>
-          </a:prstGeom>
-          <a:solidFill>
-            <a:srgbClr val="E0AB5D"/>
-          </a:solidFill>
-          <a:ln>
-            <a:noFill/>
-          </a:ln>
-        </p:spPr>
-        <p:style>
-          <a:lnRef idx="1">
-            <a:schemeClr val="accent1"/>
-          </a:lnRef>
-          <a:fillRef idx="3">
-            <a:schemeClr val="accent1"/>
-          </a:fillRef>
-          <a:effectRef idx="2">
-            <a:schemeClr val="accent1"/>
-          </a:effectRef>
-          <a:fontRef idx="minor">
-            <a:schemeClr val="lt1"/>
-          </a:fontRef>
-        </p:style>
-        <p:txBody>
-          <a:bodyPr rtlCol="0" anchor="ctr"/>
-          <a:lstStyle/>
-          <a:p>
-            <a:pPr algn="ctr"/>
-          </a:p>
-        </p:txBody>
-      </p:sp>
-      <p:sp>
-        <p:nvSpPr>
-          <p:cNvPr id="15" name="TextBox 14"/>
-          <p:cNvSpPr txBox="1"/>
-          <p:nvPr/>
-        </p:nvSpPr>
-        <p:spPr>
-          <a:xfrm>
-            <a:off x="6556248" y="1664208"/>
-            <a:ext cx="4672583" cy="310896"/>
-          </a:xfrm>
-          <a:prstGeom prst="rect">
-            <a:avLst/>
-          </a:prstGeom>
-          <a:noFill/>
-        </p:spPr>
-        <p:txBody>
-          <a:bodyPr wrap="square" anchor="t">
-            <a:spAutoFit/>
-          </a:bodyPr>
-          <a:lstStyle/>
-          <a:p>
-            <a:pPr algn="l"/>
-            <a:r>
-              <a:rPr sz="1400" b="1">
-                <a:solidFill>
-                  <a:srgbClr val="E0AB5D"/>
-                </a:solidFill>
-                <a:latin typeface="Aptos"/>
-              </a:rPr>
-              <a:t>How operators reach it</a:t>
-            </a:r>
-          </a:p>
-        </p:txBody>
-      </p:sp>
-      <p:sp>
-        <p:nvSpPr>
-          <p:cNvPr id="16" name="TextBox 15"/>
-          <p:cNvSpPr txBox="1"/>
-          <p:nvPr/>
-        </p:nvSpPr>
-        <p:spPr>
-          <a:xfrm>
-            <a:off x="6556248" y="2121408"/>
-            <a:ext cx="4672583" cy="3721608"/>
-          </a:xfrm>
-          <a:prstGeom prst="rect">
-            <a:avLst/>
-          </a:prstGeom>
-          <a:noFill/>
-        </p:spPr>
-        <p:txBody>
-          <a:bodyPr wrap="square" anchor="t" lIns="38100" rIns="38100" tIns="25400" bIns="25400">
-            <a:noAutofit/>
-          </a:bodyPr>
-          <a:lstStyle/>
           <a:p>
             <a:pPr>
               <a:spcAft>
@@ -6762,12 +6616,158 @@
               <a:rPr sz="1300" b="0" i="0">
                 <a:latin typeface="Calibri"/>
               </a:rPr>
-              <a:t>Two operator surfaces ship in lock-step: the wrapped Multi-Turn tool `chat_agent_kalier` accepts free-form key=value requests, while the visual Kalier canvas node stores the same operation fields in YAML.</a:t>
+              <a:t>The practical operator result is simpler prompts: after the Kali box URL is configured once, normal Multi-Turn requests no longer repeat `server_url` unless you intentionally override it for a one-off target.</a:t>
             </a:r>
             <a:endParaRPr sz="1300" b="0" i="0">
               <a:latin typeface="Calibri"/>
             </a:endParaRPr>
           </a:p>
+        </p:txBody>
+      </p:sp>
+      <p:sp>
+        <p:nvSpPr>
+          <p:cNvPr id="13" name="Rounded Rectangle 12"/>
+          <p:cNvSpPr/>
+          <p:nvPr/>
+        </p:nvSpPr>
+        <p:spPr>
+          <a:xfrm>
+            <a:off x="6355080" y="1463040"/>
+            <a:ext cx="5074920" cy="4526280"/>
+          </a:xfrm>
+          <a:prstGeom prst="roundRect">
+            <a:avLst/>
+          </a:prstGeom>
+          <a:solidFill>
+            <a:srgbClr val="161A19"/>
+          </a:solidFill>
+          <a:ln>
+            <a:solidFill>
+              <a:srgbClr val="595F56"/>
+            </a:solidFill>
+          </a:ln>
+        </p:spPr>
+        <p:style>
+          <a:lnRef idx="1">
+            <a:schemeClr val="accent1"/>
+          </a:lnRef>
+          <a:fillRef idx="3">
+            <a:schemeClr val="accent1"/>
+          </a:fillRef>
+          <a:effectRef idx="2">
+            <a:schemeClr val="accent1"/>
+          </a:effectRef>
+          <a:fontRef idx="minor">
+            <a:schemeClr val="lt1"/>
+          </a:fontRef>
+        </p:style>
+        <p:txBody>
+          <a:bodyPr rtlCol="0" anchor="ctr"/>
+          <a:lstStyle/>
+          <a:p>
+            <a:pPr algn="ctr"/>
+          </a:p>
+        </p:txBody>
+      </p:sp>
+      <p:sp>
+        <p:nvSpPr>
+          <p:cNvPr id="14" name="Rectangle 13"/>
+          <p:cNvSpPr/>
+          <p:nvPr/>
+        </p:nvSpPr>
+        <p:spPr>
+          <a:xfrm>
+            <a:off x="6355080" y="1463040"/>
+            <a:ext cx="5074920" cy="109728"/>
+          </a:xfrm>
+          <a:prstGeom prst="rect">
+            <a:avLst/>
+          </a:prstGeom>
+          <a:solidFill>
+            <a:srgbClr val="E0AB5D"/>
+          </a:solidFill>
+          <a:ln>
+            <a:noFill/>
+          </a:ln>
+        </p:spPr>
+        <p:style>
+          <a:lnRef idx="1">
+            <a:schemeClr val="accent1"/>
+          </a:lnRef>
+          <a:fillRef idx="3">
+            <a:schemeClr val="accent1"/>
+          </a:fillRef>
+          <a:effectRef idx="2">
+            <a:schemeClr val="accent1"/>
+          </a:effectRef>
+          <a:fontRef idx="minor">
+            <a:schemeClr val="lt1"/>
+          </a:fontRef>
+        </p:style>
+        <p:txBody>
+          <a:bodyPr rtlCol="0" anchor="ctr"/>
+          <a:lstStyle/>
+          <a:p>
+            <a:pPr algn="ctr"/>
+          </a:p>
+        </p:txBody>
+      </p:sp>
+      <p:sp>
+        <p:nvSpPr>
+          <p:cNvPr id="15" name="TextBox 14"/>
+          <p:cNvSpPr txBox="1"/>
+          <p:nvPr/>
+        </p:nvSpPr>
+        <p:spPr>
+          <a:xfrm>
+            <a:off x="6556248" y="1664208"/>
+            <a:ext cx="4672583" cy="310896"/>
+          </a:xfrm>
+          <a:prstGeom prst="rect">
+            <a:avLst/>
+          </a:prstGeom>
+          <a:noFill/>
+        </p:spPr>
+        <p:txBody>
+          <a:bodyPr wrap="square" anchor="t">
+            <a:spAutoFit/>
+          </a:bodyPr>
+          <a:lstStyle/>
+          <a:p>
+            <a:pPr algn="l"/>
+            <a:r>
+              <a:rPr sz="1400" b="1">
+                <a:solidFill>
+                  <a:srgbClr val="E0AB5D"/>
+                </a:solidFill>
+                <a:latin typeface="Aptos"/>
+              </a:rPr>
+              <a:t>How operators reach it</a:t>
+            </a:r>
+          </a:p>
+        </p:txBody>
+      </p:sp>
+      <p:sp>
+        <p:nvSpPr>
+          <p:cNvPr id="16" name="TextBox 15"/>
+          <p:cNvSpPr txBox="1"/>
+          <p:nvPr/>
+        </p:nvSpPr>
+        <p:spPr>
+          <a:xfrm>
+            <a:off x="6556248" y="2121408"/>
+            <a:ext cx="4672583" cy="3721608"/>
+          </a:xfrm>
+          <a:prstGeom prst="rect">
+            <a:avLst/>
+          </a:prstGeom>
+          <a:noFill/>
+        </p:spPr>
+        <p:txBody>
+          <a:bodyPr wrap="square" anchor="t" lIns="38100" rIns="38100" tIns="25400" bIns="25400">
+            <a:noAutofit/>
+          </a:bodyPr>
+          <a:lstStyle/>
           <a:p>
             <a:pPr>
               <a:spcAft>
@@ -6784,7 +6784,7 @@
               <a:rPr sz="1300" b="0" i="0">
                 <a:latin typeface="Calibri"/>
               </a:rPr>
-              <a:t>Kalier talks straight to the Kali-side Flask API over HTTP using Python-stdlib `urllib`, so it stays self-contained in the pool subprocess and works the same in source or frozen builds.</a:t>
+              <a:t>Two operator surfaces ship in lock-step: the wrapped Multi-Turn tool `chat_agent_kalier` now auto-injects the configured `kali_server_url`, while the visual Kalier canvas node still stores `server_url` explicitly in YAML per node.</a:t>
             </a:r>
             <a:endParaRPr sz="1300" b="0" i="0">
               <a:latin typeface="Calibri"/>
@@ -6806,7 +6806,29 @@
               <a:rPr sz="1300" b="0" i="0">
                 <a:latin typeface="Calibri"/>
               </a:rPr>
-              <a:t>Authorized use only: the intended operator flow is an in-scope lab, CTF, or permitted engagement, often with `ssh -L 5000:localhost:5000 user@KALI_IP` tunneling a remote Kali box back to `http://127.0.0.1:5000`.</a:t>
+              <a:t>Kalier talks straight to the Kali-side Flask API over HTTP using Python-stdlib `urllib`, so it stays self-contained in the pool subprocess and works the same in source or frozen builds; the embedded-client injection fails open if the config value is blank or unreadable.</a:t>
+            </a:r>
+            <a:endParaRPr sz="1300" b="0" i="0">
+              <a:latin typeface="Calibri"/>
+            </a:endParaRPr>
+          </a:p>
+          <a:p>
+            <a:pPr>
+              <a:spcAft>
+                <a:spcPts val="600"/>
+              </a:spcAft>
+              <a:defRPr sz="1300">
+                <a:solidFill>
+                  <a:srgbClr val="B4BAAE"/>
+                </a:solidFill>
+                <a:latin typeface="Aptos"/>
+              </a:defRPr>
+            </a:pPr>
+            <a:r>
+              <a:rPr sz="1300" b="0" i="0">
+                <a:latin typeface="Calibri"/>
+              </a:rPr>
+              <a:t>Authorized use only: the intended operator flow is an in-scope lab, CTF, or permitted engagement, often with `ssh -L 5000:localhost:5000 user@KALI_IP` tunneling a remote Kali box back to `http://127.0.0.1:5000`, and the repo now includes `Tlamatini-Kali-Setup.md` for the zero-client walkthrough.</a:t>
             </a:r>
             <a:endParaRPr sz="1300" b="0" i="0">
               <a:latin typeface="Calibri"/>
@@ -11124,7 +11146,7 @@
               <a:rPr sz="1300" b="0" i="0">
                 <a:latin typeface="Calibri"/>
               </a:rPr>
-              <a:t>For authorized Kali Linux assessments, run MCP-Kali-Server on the Kali box, expose it locally or through an SSH tunnel, and call `chat_agent_kalier` from Multi-Turn with the desired `action`, `target`, and `server_url`.</a:t>
+              <a:t>For authorized Kali Linux assessments, run MCP-Kali-Server on the Kali box, set `Config -&gt; URLs -&gt; Kali server (Kalier)` once, and then call `chat_agent_kalier` from Multi-Turn with the desired `action` and `target` without repeating the box URL each turn.</a:t>
             </a:r>
             <a:endParaRPr sz="1300" b="0" i="0">
               <a:latin typeface="Calibri"/>
@@ -13310,6 +13332,28 @@
               <a:rPr sz="1500" b="0" i="0">
                 <a:latin typeface="Calibri"/>
               </a:rPr>
+              <a:t>URL configuration now also includes `kali_server_url`, edited from `Config -&gt; URLs -&gt; Kali server (Kalier)`, which is the default box that chat-side Kalier runs inherit automatically.</a:t>
+            </a:r>
+            <a:endParaRPr sz="1500" b="0" i="0">
+              <a:latin typeface="Calibri"/>
+            </a:endParaRPr>
+          </a:p>
+          <a:p>
+            <a:pPr>
+              <a:spcAft>
+                <a:spcPts val="600"/>
+              </a:spcAft>
+              <a:defRPr sz="1500">
+                <a:solidFill>
+                  <a:srgbClr val="B4BAAE"/>
+                </a:solidFill>
+                <a:latin typeface="Aptos"/>
+              </a:defRPr>
+            </a:pPr>
+            <a:r>
+              <a:rPr sz="1500" b="0" i="0">
+                <a:latin typeface="Calibri"/>
+              </a:rPr>
               <a:t>The chat-side Config -&gt; Models and Config -&gt; URLs dialogs are now first-class configuration surfaces, and they can explicitly ask the operator to reconnect when saved values change live-session assumptions.</a:t>
             </a:r>
             <a:endParaRPr sz="1500" b="0" i="0">
@@ -14103,7 +14147,7 @@
               <a:rPr sz="1300" b="0" i="0">
                 <a:latin typeface="Calibri"/>
               </a:rPr>
-              <a:t>Those readability rules remain in force in the current documentation set, and the newer `v1.7.0` release state keeps the version badge, runtime surfaces, and operator handbook aligned.</a:t>
+              <a:t>Those readability rules remain in force in the current documentation set, and the newer `v1.7.1` release state keeps the version badge, runtime surfaces, and operator handbook aligned.</a:t>
             </a:r>
             <a:endParaRPr sz="1300" b="0" i="0">
               <a:latin typeface="Calibri"/>
@@ -15617,7 +15661,7 @@
                 </a:solidFill>
                 <a:latin typeface="Cascadia Mono"/>
               </a:rPr>
-              <a:t>Resolved current version: 1.7.0 | build: 1.7.0</a:t>
+              <a:t>Resolved current version: 1.7.1 | build: 1.7.1</a:t>
             </a:r>
           </a:p>
         </p:txBody>
@@ -25387,7 +25431,7 @@
                 </a:solidFill>
                 <a:latin typeface="Aptos"/>
               </a:rPr>
-              <a:t>485</a:t>
+              <a:t>487</a:t>
             </a:r>
           </a:p>
         </p:txBody>
@@ -26127,7 +26171,7 @@
               <a:rPr sz="1500" b="0" i="0">
                 <a:latin typeface="Calibri"/>
               </a:rPr>
-              <a:t>e908dc9 - Setting version to documentation as 1.7.0, by Tlamatini's-AutoBot.</a:t>
+              <a:t>413b1eb - Updating markdown documentation to align them to v1.7.1, by angelahack1</a:t>
             </a:r>
             <a:endParaRPr sz="1500" b="0" i="0">
               <a:latin typeface="Calibri"/>
@@ -26149,7 +26193,7 @@
               <a:rPr sz="1500" b="0" i="0">
                 <a:latin typeface="Calibri"/>
               </a:rPr>
-              <a:t>Resolved version: 1.7.0 (git)</a:t>
+              <a:t>Resolved version: 1.7.1 (git)</a:t>
             </a:r>
             <a:endParaRPr sz="1500" b="0" i="0">
               <a:latin typeface="Calibri"/>
@@ -26171,7 +26215,7 @@
               <a:rPr sz="1500" b="0" i="0">
                 <a:latin typeface="Calibri"/>
               </a:rPr>
-              <a:t>Generated on May 22, 2026 09:20 PM UTC-0600</a:t>
+              <a:t>Generated on May 24, 2026 11:16 AM UTC-0600</a:t>
             </a:r>
             <a:endParaRPr sz="1500" b="0" i="0">
               <a:latin typeface="Calibri"/>
@@ -26658,7 +26702,7 @@
                 </a:solidFill>
                 <a:latin typeface="Aptos"/>
               </a:rPr>
-              <a:t>105,973</a:t>
+              <a:t>107,128</a:t>
             </a:r>
           </a:p>
         </p:txBody>
@@ -26773,7 +26817,7 @@
                 </a:solidFill>
                 <a:latin typeface="Aptos"/>
               </a:rPr>
-              <a:t>144,418</a:t>
+              <a:t>145,853</a:t>
             </a:r>
           </a:p>
         </p:txBody>
@@ -26924,17 +26968,17 @@
                 <a:latin typeface="Cascadia Mono"/>
               </a:rPr>
               <a:t>LANGUAGE                 FILES   EFFECTIVE      TOTAL   SHARE
-Python                   284      72,022    100,448  68.0%
-JavaScript                28      13,092     16,465  12.4%
-Markdown                  54      12,250     15,726  11.6%
+Python                   284      72,246    100,776  67.4%
+Markdown                  56      13,173     16,819  12.3%
+JavaScript                28      13,092     16,465  12.2%
 CSS                        6       3,414      4,317   3.2%
-YAML                      71       1,457      3,048   1.4%
-HTML                       4         823        841   0.8%
+YAML                      71       1,457      3,054   1.4%
+HTML                       4         829        847   0.8%
 Other text                 3         789        967   0.7%
 Prompt template            2         632        745   0.6%
 PowerShell                 5         506        752   0.5%
 JavaScript module          1         393        460   0.4%
-JSON                       5         383        383   0.4%
+JSON                       5         385        385   0.4%
 Text                       5         179        209   0.2%
 Protocol Buffers           1          20         33   0.0%
 Batch                      1          13         24   0.0%</a:t>
@@ -27276,12 +27320,12 @@
                 <a:latin typeface="Cascadia Mono"/>
               </a:rPr>
               <a:t>PATH                                                     LANGUAGE     EFFECTIVE   TOTAL
-Tlamatini/agent/views.py                                Python         7,218  10,426
+Tlamatini/agent/views.py                                Python         7,220  10,431
 Tlamatini/agent/tests.py                                Python         4,034   5,153
-Tlamatini/agent/tools.py                                Python         2,201   3,121
+Tlamatini/agent/tools.py                                Python         2,219   3,158
 Tlamatini/agent/agents/flowcreator/agentic_skill.md     Markdown       1,936   2,148
-BookOfTlamatini.md                                      Markdown       1,903   2,683
-Tlamatini/agent/doc_generation/complete_project_docs.py Python         1,816   2,048
+BookOfTlamatini.md                                      Markdown       1,905   2,686
+Tlamatini/agent/doc_generation/complete_project_docs.py Python         1,818   2,050
 ...ini/agent/static/agent/css/agentic_control_panel.css CSS            1,709   2,279
 Tlamatini/agent/static/agent/js/agent_page_init.js      JavaScript     1,374   1,591
 Tlamatini/agent/static/agent/js/acp-canvas-core.js      JavaScript     1,299   1,609
@@ -27757,94 +27801,6 @@
               <a:rPr sz="1500" b="0" i="0">
                 <a:latin typeface="Calibri"/>
               </a:rPr>
-              <a:t>Today’s headline change is the new Kalier agent in `v1.7.0`: Tlamatini now reaches 67 workflow agents and adds a direct bridge into Kali Linux offensive-security tooling through MCP-Kali-Server, available from both Multi-Turn chat and the visual canvas.</a:t>
-            </a:r>
-            <a:endParaRPr sz="1500" b="0" i="0">
-              <a:latin typeface="Calibri"/>
-            </a:endParaRPr>
-          </a:p>
-          <a:p>
-            <a:pPr>
-              <a:spcAft>
-                <a:spcPts val="600"/>
-              </a:spcAft>
-              <a:defRPr sz="1500">
-                <a:solidFill>
-                  <a:srgbClr val="B4BAAE"/>
-                </a:solidFill>
-                <a:latin typeface="Aptos"/>
-              </a:defRPr>
-            </a:pPr>
-            <a:r>
-              <a:rPr sz="1500" b="0" i="0">
-                <a:latin typeface="Calibri"/>
-              </a:rPr>
-              <a:t>Today’s headline change is the new Windower agent: Tlamatini now reaches 66 workflow agents and adds a deterministic Win32 window-manager surface for focusing, tiling, resizing, listing, and closing windows from both Multi-Turn chat and the visual canvas.</a:t>
-            </a:r>
-            <a:endParaRPr sz="1500" b="0" i="0">
-              <a:latin typeface="Calibri"/>
-            </a:endParaRPr>
-          </a:p>
-          <a:p>
-            <a:pPr>
-              <a:spcAft>
-                <a:spcPts val="600"/>
-              </a:spcAft>
-              <a:defRPr sz="1500">
-                <a:solidFill>
-                  <a:srgbClr val="B4BAAE"/>
-                </a:solidFill>
-                <a:latin typeface="Aptos"/>
-              </a:defRPr>
-            </a:pPr>
-            <a:r>
-              <a:rPr sz="1500" b="0" i="0">
-                <a:latin typeface="Calibri"/>
-              </a:rPr>
-              <a:t>Today’s headline change is the new Playwrighter agent in `v1.5.0`: Tlamatini now adds its 65th workflow agent and a real-browser automation surface for scripted Playwright flows from both Multi-Turn chat and the visual canvas.</a:t>
-            </a:r>
-            <a:endParaRPr sz="1500" b="0" i="0">
-              <a:latin typeface="Calibri"/>
-            </a:endParaRPr>
-          </a:p>
-          <a:p>
-            <a:pPr>
-              <a:spcAft>
-                <a:spcPts val="600"/>
-              </a:spcAft>
-              <a:defRPr sz="1500">
-                <a:solidFill>
-                  <a:srgbClr val="B4BAAE"/>
-                </a:solidFill>
-                <a:latin typeface="Aptos"/>
-              </a:defRPr>
-            </a:pPr>
-            <a:r>
-              <a:rPr sz="1500" b="0" i="0">
-                <a:latin typeface="Calibri"/>
-              </a:rPr>
-              <a:t>Today’s headline change is the new versioning system: SemVer policy, git-tag sourcing, runtime version surfaces, and build-time embedding across the Windows artefacts.</a:t>
-            </a:r>
-            <a:endParaRPr sz="1500" b="0" i="0">
-              <a:latin typeface="Calibri"/>
-            </a:endParaRPr>
-          </a:p>
-          <a:p>
-            <a:pPr>
-              <a:spcAft>
-                <a:spcPts val="600"/>
-              </a:spcAft>
-              <a:defRPr sz="1500">
-                <a:solidFill>
-                  <a:srgbClr val="B4BAAE"/>
-                </a:solidFill>
-                <a:latin typeface="Aptos"/>
-              </a:defRPr>
-            </a:pPr>
-            <a:r>
-              <a:rPr sz="1500" b="0" i="0">
-                <a:latin typeface="Calibri"/>
-              </a:rPr>
               <a:t>Documentation itself changed today, so the regenerated dossier is part of the tracked operator surface rather than an external afterthought.</a:t>
             </a:r>
             <a:endParaRPr sz="1500" b="0" i="0">
@@ -29180,12 +29136,12 @@
               </a:defRPr>
             </a:pPr>
             <a:r>
-              <a:rPr sz="800" b="0" i="0">
+              <a:rPr sz="700" b="0" i="0">
                 <a:latin typeface="Calibri"/>
               </a:rPr>
               <a:t>Before a heavy directory embedding run on supported NVIDIA hosts, a fail-open pre-flight guard can estimate VRAM pressure and surface a non-blocking warning in chat.</a:t>
             </a:r>
-            <a:endParaRPr sz="800" b="0" i="0">
+            <a:endParaRPr sz="700" b="0" i="0">
               <a:latin typeface="Calibri"/>
             </a:endParaRPr>
           </a:p>
@@ -29202,12 +29158,12 @@
               </a:defRPr>
             </a:pPr>
             <a:r>
-              <a:rPr sz="800" b="0" i="0">
+              <a:rPr sz="700" b="0" i="0">
                 <a:latin typeface="Calibri"/>
               </a:rPr>
               <a:t>Version resolution now flows through git tags, a runtime resolver module, generated build artefacts, and an open `/agent/version/` endpoint.</a:t>
             </a:r>
-            <a:endParaRPr sz="800" b="0" i="0">
+            <a:endParaRPr sz="700" b="0" i="0">
               <a:latin typeface="Calibri"/>
             </a:endParaRPr>
           </a:p>
@@ -29224,12 +29180,12 @@
               </a:defRPr>
             </a:pPr>
             <a:r>
-              <a:rPr sz="800" b="0" i="0">
+              <a:rPr sz="700" b="0" i="0">
                 <a:latin typeface="Calibri"/>
               </a:rPr>
               <a:t>When Multi-Turn is enabled, the global planner selects context and tool stages before the executor binds only the relevant tools, including wrapped deterministic agents such as De-Compresser.</a:t>
             </a:r>
-            <a:endParaRPr sz="800" b="0" i="0">
+            <a:endParaRPr sz="700" b="0" i="0">
               <a:latin typeface="Calibri"/>
             </a:endParaRPr>
           </a:p>
@@ -29246,12 +29202,12 @@
               </a:defRPr>
             </a:pPr>
             <a:r>
-              <a:rPr sz="800" b="0" i="0">
+              <a:rPr sz="700" b="0" i="0">
                 <a:latin typeface="Calibri"/>
               </a:rPr>
-              <a:t>The Kalier path talks directly to the MCP-Kali-Server Flask API over HTTP with Python-stdlib `urllib`, choosing one offensive-security capability per call and capturing the result in one atomic `INI_SECTION_KALIER` block.</a:t>
-            </a:r>
-            <a:endParaRPr sz="800" b="0" i="0">
+              <a:t>The Kalier path talks directly to the MCP-Kali-Server Flask API over HTTP with Python-stdlib `urllib`, auto-seeding the default box from `kali_server_url` in Config -&gt; URLs before any one-off per-call override is applied, and captures one atomic `INI_SECTION_KALIER` block per run.</a:t>
+            </a:r>
+            <a:endParaRPr sz="700" b="0" i="0">
               <a:latin typeface="Calibri"/>
             </a:endParaRPr>
           </a:p>
@@ -29268,12 +29224,12 @@
               </a:defRPr>
             </a:pPr>
             <a:r>
-              <a:rPr sz="800" b="0" i="0">
+              <a:rPr sz="700" b="0" i="0">
                 <a:latin typeface="Calibri"/>
               </a:rPr>
               <a:t>The Windower path uses Win32 APIs plus the cross-process `AttachThreadInput` focus-transfer dance to locate windows by title and apply one lifecycle action while still returning structured geometry/state fields.</a:t>
             </a:r>
-            <a:endParaRPr sz="800" b="0" i="0">
+            <a:endParaRPr sz="700" b="0" i="0">
               <a:latin typeface="Calibri"/>
             </a:endParaRPr>
           </a:p>
@@ -29290,12 +29246,12 @@
               </a:defRPr>
             </a:pPr>
             <a:r>
-              <a:rPr sz="800" b="0" i="0">
+              <a:rPr sz="700" b="0" i="0">
                 <a:latin typeface="Calibri"/>
               </a:rPr>
               <a:t>The Playwrighter path loads a declarative step list, drives Playwright against Chromium/Firefox/WebKit, and emits one atomic `INI_SECTION_PLAYWRIGHTER` block with status, assertions, extracted values, and the final URL.</a:t>
             </a:r>
-            <a:endParaRPr sz="800" b="0" i="0">
+            <a:endParaRPr sz="700" b="0" i="0">
               <a:latin typeface="Calibri"/>
             </a:endParaRPr>
           </a:p>
@@ -29312,12 +29268,12 @@
               </a:defRPr>
             </a:pPr>
             <a:r>
-              <a:rPr sz="800" b="0" i="0">
+              <a:rPr sz="700" b="0" i="0">
                 <a:latin typeface="Calibri"/>
               </a:rPr>
               <a:t>The Unrealer path opens a TCP socket to the Unreal MCP plugin, sends one `{"type": command, "params": {...}}` payload, captures the JSON reply, and emits one `INI_SECTION_UNREALER` block for downstream logic.</a:t>
             </a:r>
-            <a:endParaRPr sz="800" b="0" i="0">
+            <a:endParaRPr sz="700" b="0" i="0">
               <a:latin typeface="Calibri"/>
             </a:endParaRPr>
           </a:p>
@@ -29334,12 +29290,12 @@
               </a:defRPr>
             </a:pPr>
             <a:r>
-              <a:rPr sz="800" b="0" i="0">
+              <a:rPr sz="700" b="0" i="0">
                 <a:latin typeface="Calibri"/>
               </a:rPr>
               <a:t>After spawn-capable tool calls and again after the final answer, the orphan reaper can sweep dead descendants, orphaned `conhost.exe` companions, and stale pool-linked processes without ever raising into the chat path.</a:t>
             </a:r>
-            <a:endParaRPr sz="800" b="0" i="0">
+            <a:endParaRPr sz="700" b="0" i="0">
               <a:latin typeface="Calibri"/>
             </a:endParaRPr>
           </a:p>
@@ -29356,12 +29312,12 @@
               </a:defRPr>
             </a:pPr>
             <a:r>
-              <a:rPr sz="800" b="0" i="0">
+              <a:rPr sz="700" b="0" i="0">
                 <a:latin typeface="Calibri"/>
               </a:rPr>
               <a:t>Tool calls execute in the backend, append observations, and may create wrapped runtime copies under `agent/agents/pools/_chat_runs_/`.</a:t>
             </a:r>
-            <a:endParaRPr sz="800" b="0" i="0">
+            <a:endParaRPr sz="700" b="0" i="0">
               <a:latin typeface="Calibri"/>
             </a:endParaRPr>
           </a:p>
@@ -29378,12 +29334,12 @@
               </a:defRPr>
             </a:pPr>
             <a:r>
-              <a:rPr sz="800" b="0" i="0">
+              <a:rPr sz="700" b="0" i="0">
                 <a:latin typeface="Calibri"/>
               </a:rPr>
               <a:t>On the next full start-up, `manage.py` can swap a staged database into place before Django imports, while archiving the previous live database under `DB/Older/&lt;timestamp&gt;/`.</a:t>
             </a:r>
-            <a:endParaRPr sz="800" b="0" i="0">
+            <a:endParaRPr sz="700" b="0" i="0">
               <a:latin typeface="Calibri"/>
             </a:endParaRPr>
           </a:p>
@@ -29400,12 +29356,12 @@
               </a:defRPr>
             </a:pPr>
             <a:r>
-              <a:rPr sz="800" b="0" i="0">
+              <a:rPr sz="700" b="0" i="0">
                 <a:latin typeface="Calibri"/>
               </a:rPr>
               <a:t>ACP flows deploy session-scoped pool instances, wire config values, validate NxN graph rules, and execute through Starter-driven flow semantics.</a:t>
             </a:r>
-            <a:endParaRPr sz="800" b="0" i="0">
+            <a:endParaRPr sz="700" b="0" i="0">
               <a:latin typeface="Calibri"/>
             </a:endParaRPr>
           </a:p>
@@ -29422,12 +29378,12 @@
               </a:defRPr>
             </a:pPr>
             <a:r>
-              <a:rPr sz="800" b="0" i="0">
+              <a:rPr sz="700" b="0" i="0">
                 <a:latin typeface="Calibri"/>
               </a:rPr>
               <a:t>Build scripts collect static assets, bundle Django/Python resources, add agent templates, and assemble `pkg.zip`, `Uninstaller.exe`, and `dist/Tlamatini_Release/`.</a:t>
             </a:r>
-            <a:endParaRPr sz="800" b="0" i="0">
+            <a:endParaRPr sz="700" b="0" i="0">
               <a:latin typeface="Calibri"/>
             </a:endParaRPr>
           </a:p>
@@ -29896,51 +29852,7 @@
               <a:rPr sz="1200" b="0" i="0">
                 <a:latin typeface="Calibri"/>
               </a:rPr>
-              <a:t>2026-05-22 | e908dc9 | Setting version to documentation as 1.7.0, by Tlamatini's-AutoBot.</a:t>
-            </a:r>
-            <a:endParaRPr sz="1200" b="0" i="0">
-              <a:latin typeface="Calibri"/>
-            </a:endParaRPr>
-          </a:p>
-          <a:p>
-            <a:pPr>
-              <a:spcAft>
-                <a:spcPts val="600"/>
-              </a:spcAft>
-              <a:defRPr sz="1200">
-                <a:solidFill>
-                  <a:srgbClr val="B4BAAE"/>
-                </a:solidFill>
-                <a:latin typeface="Aptos"/>
-              </a:defRPr>
-            </a:pPr>
-            <a:r>
-              <a:rPr sz="1200" b="0" i="0">
-                <a:latin typeface="Calibri"/>
-              </a:rPr>
-              <a:t>2026-05-22 | adca0b7 | Kalier agent added to make strong a powerfull assessments with Kali Linux!!!, by Tlamatini's-AutoBot.</a:t>
-            </a:r>
-            <a:endParaRPr sz="1200" b="0" i="0">
-              <a:latin typeface="Calibri"/>
-            </a:endParaRPr>
-          </a:p>
-          <a:p>
-            <a:pPr>
-              <a:spcAft>
-                <a:spcPts val="600"/>
-              </a:spcAft>
-              <a:defRPr sz="1200">
-                <a:solidFill>
-                  <a:srgbClr val="B4BAAE"/>
-                </a:solidFill>
-                <a:latin typeface="Aptos"/>
-              </a:defRPr>
-            </a:pPr>
-            <a:r>
-              <a:rPr sz="1200" b="0" i="0">
-                <a:latin typeface="Calibri"/>
-              </a:rPr>
-              <a:t>2026-05-22 | d697e7e | Some new sample prompts for Playwrighter and Windower, by Tlamatini's-AutoBot.</a:t>
+              <a:t>2026-05-24 | 413b1eb | Updating markdown documentation to align them to v1.7.1, by angelahack1</a:t>
             </a:r>
             <a:endParaRPr sz="1200" b="0" i="0">
               <a:latin typeface="Calibri"/>
@@ -30290,6 +30202,7 @@
 |-- build.py
 |-- build_installer.py
 |-- build_uninstaller.py
+|-- Claude-Desktop-KALI-MCP-Session.md
 |-- CLAUDE.md
 |-- CreateShortcut.json
 |-- CreateShortcut.ps1
@@ -30307,11 +30220,10 @@
 |-- register_flw.ps1
 |-- RemoveShortcut.ps1
 |-- requirements.txt
+|-- Tlamatini-Kali-Setup.md
 |-- Tlamatini.ico
 |-- Tlamatini.jpg
-|-- Tlamatini.ps1
-|-- tlamatini_app_summary.pdf
-|-- Tlamatini_eXtended_Artificial_Intelligence_Humanly_Tempered.pptx</a:t>
+|-- Tlamatini.ps1</a:t>
             </a:r>
           </a:p>
         </p:txBody>
@@ -30649,7 +30561,9 @@
                 </a:solidFill>
                 <a:latin typeface="Cascadia Mono"/>
               </a:rPr>
-              <a:t>|-- uninstall.py
+              <a:t>|-- tlamatini_app_summary.pdf
+|-- Tlamatini_eXtended_Artificial_Intelligence_Humanly_Tempered.pptx
+|-- uninstall.py
 |-- unregister_flw.ps1
 |-- VERSIONING.md
 |-- versioning.py
@@ -30677,9 +30591,7 @@
 |-- pyinstaller_hooks/
 |   `-- hook-numpy.py
 `-- Tlamatini/
-    |-- cat_art.py
-    |-- manage.py
-    |-- .agents/</a:t>
+    |-- cat_art.py</a:t>
             </a:r>
           </a:p>
         </p:txBody>
@@ -31017,7 +30929,9 @@
                 </a:solidFill>
                 <a:latin typeface="Cascadia Mono"/>
               </a:rPr>
-              <a:t>    |   `-- workflows/
+              <a:t>    |-- manage.py
+    |-- .agents/
+    |   `-- workflows/
     |       `-- create_new_agent.md
     |-- .mcps/
     |   `-- create_new_mcp.md
@@ -31045,9 +30959,7 @@
     |   |-- gpu_perf.py
     |   |-- inet_determiner.py
     |   |-- mcp_agent.py
-    |   |-- mcp_files_search_client.py
-    |   |-- mcp_files_search_server.py
-    |   |-- mcp_system_client.py</a:t>
+    |   |-- mcp_files_search_client.py</a:t>
             </a:r>
           </a:p>
         </p:txBody>
@@ -31385,7 +31297,9 @@
                 </a:solidFill>
                 <a:latin typeface="Cascadia Mono"/>
               </a:rPr>
-              <a:t>    |   |-- mcp_system_server.py
+              <a:t>    |   |-- mcp_files_search_server.py
+    |   |-- mcp_system_client.py
+    |   |-- mcp_system_server.py
     |   |-- models.py
     |   |-- native_dialogs.py
     |   |-- orphan_reaper.py
@@ -31413,9 +31327,7 @@
     |   |   |-- agent_registry.py
     |   |   |-- config.py
     |   |   |-- permissions.py
-    |   |   |-- runtime.py
-    |   |   |-- service.py
-    |   |   |-- session_store.py</a:t>
+    |   |   |-- runtime.py</a:t>
             </a:r>
           </a:p>
         </p:txBody>
@@ -31753,7 +31665,9 @@
                 </a:solidFill>
                 <a:latin typeface="Cascadia Mono"/>
               </a:rPr>
-              <a:t>    |   |   |-- tests.py
+              <a:t>    |   |   |-- service.py
+    |   |   |-- session_store.py
+    |   |   |-- tests.py
     |   |   |-- tools.py
     |   |   `-- windows_spawn.py
     |   |-- agents/
@@ -31781,9 +31695,7 @@
     |   |   |   |-- cleaner.py
     |   |   |   `-- config.yaml
     |   |   |-- counter/
-    |   |   |   |-- config.yaml
-    |   |   |   `-- counter.py
-    |   |   |-- crawler/</a:t>
+    |   |   |   |-- config.yaml</a:t>
             </a:r>
           </a:p>
         </p:txBody>
@@ -32121,7 +32033,9 @@
                 </a:solidFill>
                 <a:latin typeface="Cascadia Mono"/>
               </a:rPr>
-              <a:t>    |   |   |   |-- config.yaml
+              <a:t>    |   |   |   `-- counter.py
+    |   |   |-- crawler/
+    |   |   |   |-- config.yaml
     |   |   |   `-- crawler.py
     |   |   |-- croner/
     |   |   |   |-- config.yaml
@@ -32149,9 +32063,7 @@
     |   |   |   `-- file_creator.py
     |   |   |-- file_extractor/
     |   |   |   |-- config.yaml
-    |   |   |   `-- file_extractor.py
-    |   |   |-- file_interpreter/
-    |   |   |   |-- config.yaml</a:t>
+    |   |   |   `-- file_extractor.py</a:t>
             </a:r>
           </a:p>
         </p:txBody>
@@ -32489,7 +32401,9 @@
                 </a:solidFill>
                 <a:latin typeface="Cascadia Mono"/>
               </a:rPr>
-              <a:t>    |   |   |   `-- file_interpreter.py
+              <a:t>    |   |   |-- file_interpreter/
+    |   |   |   |-- config.yaml
+    |   |   |   `-- file_interpreter.py
     |   |   |-- flowbacker/
     |   |   |   |-- config.yaml
     |   |   |   `-- flowbacker.py
@@ -32517,9 +32431,7 @@
     |   |   |-- gitter/
     |   |   |   |-- config.yaml
     |   |   |   `-- gitter.py
-    |   |   |-- googler/
-    |   |   |   |-- config.yaml
-    |   |   |   `-- googler.py</a:t>
+    |   |   |-- googler/</a:t>
             </a:r>
           </a:p>
         </p:txBody>
@@ -32857,7 +32769,9 @@
                 </a:solidFill>
                 <a:latin typeface="Cascadia Mono"/>
               </a:rPr>
-              <a:t>    |   |   |-- image_interpreter/
+              <a:t>    |   |   |   |-- config.yaml
+    |   |   |   `-- googler.py
+    |   |   |-- image_interpreter/
     |   |   |   |-- config.yaml
     |   |   |   `-- image_interpreter.py
     |   |   |-- j_decompiler/
@@ -32885,9 +32799,7 @@
     |   |   |   |-- config.yaml
     |   |   |   `-- kyber_keygen.py
     |   |   |-- mongoxer/
-    |   |   |   |-- config.yaml
-    |   |   |   `-- mongoxer.py
-    |   |   |-- monitor_log/</a:t>
+    |   |   |   |-- config.yaml</a:t>
             </a:r>
           </a:p>
         </p:txBody>
@@ -33225,7 +33137,9 @@
                 </a:solidFill>
                 <a:latin typeface="Cascadia Mono"/>
               </a:rPr>
-              <a:t>    |   |   |   |-- config.yaml
+              <a:t>    |   |   |   `-- mongoxer.py
+    |   |   |-- monitor_log/
+    |   |   |   |-- config.yaml
     |   |   |   `-- monitor_log.py
     |   |   |-- monitor_netstat/
     |   |   |   |-- config.yaml
@@ -33253,9 +33167,7 @@
     |   |   |   `-- parametrizer.py
     |   |   |-- playwrighter/
     |   |   |   |-- config.yaml
-    |   |   |   `-- playwrighter.py
-    |   |   |-- prompter/
-    |   |   |   |-- config.yaml</a:t>
+    |   |   |   `-- playwrighter.py</a:t>
             </a:r>
           </a:p>
         </p:txBody>
@@ -34174,7 +34086,9 @@
                 </a:solidFill>
                 <a:latin typeface="Cascadia Mono"/>
               </a:rPr>
-              <a:t>    |   |   |   `-- prompter.py
+              <a:t>    |   |   |-- prompter/
+    |   |   |   |-- config.yaml
+    |   |   |   `-- prompter.py
     |   |   |-- pser/
     |   |   |   |-- config.yaml
     |   |   |   `-- pser.py
@@ -34202,9 +34116,7 @@
     |   |   |-- sqler/
     |   |   |   |-- config.yaml
     |   |   |   `-- sqler.py
-    |   |   |-- ssher/
-    |   |   |   |-- config.yaml
-    |   |   |   `-- ssher.py</a:t>
+    |   |   |-- ssher/</a:t>
             </a:r>
           </a:p>
         </p:txBody>
@@ -34542,7 +34454,9 @@
                 </a:solidFill>
                 <a:latin typeface="Cascadia Mono"/>
               </a:rPr>
-              <a:t>    |   |   |-- starter/
+              <a:t>    |   |   |   |-- config.yaml
+    |   |   |   `-- ssher.py
+    |   |   |-- starter/
     |   |   |   |-- config.yaml
     |   |   |   `-- starter.py
     |   |   |-- stopper/
@@ -34570,9 +34484,7 @@
     |   |   |   |-- config.yaml
     |   |   |   `-- whatstlamatini.py
     |   |   `-- windower/
-    |   |       |-- config.yaml
-    |   |       `-- windower.py
-    |   |-- doc_generation/</a:t>
+    |   |       |-- config.yaml</a:t>
             </a:r>
           </a:p>
         </p:txBody>
@@ -34910,7 +34822,9 @@
                 </a:solidFill>
                 <a:latin typeface="Cascadia Mono"/>
               </a:rPr>
-              <a:t>    |   |   |-- complete_project_docs.py
+              <a:t>    |   |       `-- windower.py
+    |   |-- doc_generation/
+    |   |   |-- complete_project_docs.py
     |   |   |-- mardown_to_pdf.py
     |   |   |-- refresh_project_docs.py
     |   |   `-- test_output.pdf
@@ -34938,9 +34852,7 @@
     |   |   |-- 0008_add_recmailer.py
     |   |   |-- 0009_add_whatsapper.py
     |   |   |-- 0010_add_pythonxer.py
-    |   |   |-- 0011_add_asker.py
-    |   |   |-- 0012_repopulate_all_agents.py
-    |   |   |-- 0013_add_forker.py</a:t>
+    |   |   |-- 0011_add_asker.py</a:t>
             </a:r>
           </a:p>
         </p:txBody>
@@ -35278,7 +35190,9 @@
                 </a:solidFill>
                 <a:latin typeface="Cascadia Mono"/>
               </a:rPr>
-              <a:t>    |   |   |-- 0014_repopulate_all_agents.py
+              <a:t>    |   |   |-- 0012_repopulate_all_agents.py
+    |   |   |-- 0013_add_forker.py
+    |   |   |-- 0014_repopulate_all_agents.py
     |   |   |-- 0015_add_shoter.py
     |   |   |-- 0016_repopulate_all_agents.py
     |   |   |-- 0017_add_ssher.py
@@ -35306,9 +35220,7 @@
     |   |   |-- 0039_add_crawler.py
     |   |   |-- 0040_add_summarizer.py
     |   |   |-- 0041_add_flowhypervisor.py
-    |   |   |-- 0042_add_mouser.py
-    |   |   |-- 0043_agentmessage_conversation_user.py
-    |   |   |-- 0044_add_counter.py</a:t>
+    |   |   |-- 0042_add_mouser.py</a:t>
             </a:r>
           </a:p>
         </p:txBody>
@@ -35646,7 +35558,9 @@
                 </a:solidFill>
                 <a:latin typeface="Cascadia Mono"/>
               </a:rPr>
-              <a:t>    |   |   |-- 0045_add_file_interpreter.py
+              <a:t>    |   |   |-- 0043_agentmessage_conversation_user.py
+    |   |   |-- 0044_add_counter.py
+    |   |   |-- 0045_add_file_interpreter.py
     |   |   |-- 0046_add_image_interpreter.py
     |   |   |-- 0047_add_gatewayer.py
     |   |   |-- 0048_add_gateway_relayer.py
@@ -35674,9 +35588,7 @@
     |   |   |-- 0070_add_teletlamatini.py
     |   |   |-- 0071_acpx_skills.py
     |   |   |-- 0072_add_acpx_demo_prompts.py
-    |   |   |-- 0073_acpx_demo_gemini_uplift.py
-    |   |   |-- 0074_simplify_demo_prompts.py
-    |   |   |-- 0075_add_acpx_tool_surface.py</a:t>
+    |   |   |-- 0073_acpx_demo_gemini_uplift.py</a:t>
             </a:r>
           </a:p>
         </p:txBody>
@@ -36014,7 +35926,9 @@
                 </a:solidFill>
                 <a:latin typeface="Cascadia Mono"/>
               </a:rPr>
-              <a:t>    |   |   |-- 0076_add_acpxer.py
+              <a:t>    |   |   |-- 0074_simplify_demo_prompts.py
+    |   |   |-- 0075_add_acpx_tool_surface.py
+    |   |   |-- 0076_add_acpxer.py
     |   |   |-- 0077_add_whatstlamatini.py
     |   |   |-- 0078_add_chat_agent_keyboarder_tool.py
     |   |   |-- 0079_add_chat_agent_mouser_tool.py
@@ -36042,9 +35956,7 @@
     |   |-- monitors/
     |   |   `-- monitor_sql.py
     |   |-- opus_client/
-    |   |   |-- claude_opus_client.py
-    |   |   |-- examples.py
-    |   |   `-- README.md</a:t>
+    |   |   |-- claude_opus_client.py</a:t>
             </a:r>
           </a:p>
         </p:txBody>
@@ -36382,7 +36294,9 @@
                 </a:solidFill>
                 <a:latin typeface="Cascadia Mono"/>
               </a:rPr>
-              <a:t>    |   |-- rag/
+              <a:t>    |   |   |-- examples.py
+    |   |   `-- README.md
+    |   |-- rag/
     |   |   |-- __init__.py
     |   |   |-- config.py
     |   |   |-- factory.py
@@ -36410,9 +36324,7 @@
     |   |-- skills/
     |   |   |-- __init__.py
     |   |   |-- frontmatter.py
-    |   |   |-- harness.py
-    |   |   |-- io_contract.py
-    |   |   `-- registry.py</a:t>
+    |   |   |-- harness.py</a:t>
             </a:r>
           </a:p>
         </p:txBody>
@@ -36750,7 +36662,9 @@
                 </a:solidFill>
                 <a:latin typeface="Cascadia Mono"/>
               </a:rPr>
-              <a:t>    |   |-- skills_pkg/
+              <a:t>    |   |   |-- io_contract.py
+    |   |   `-- registry.py
+    |   |-- skills_pkg/
     |   |   |-- _meta/
     |   |   |   |-- lint.py
     |   |   |   `-- schema.json
@@ -36778,9 +36692,7 @@
     |   |   |   |-- SKILL.md
     |   |   |   `-- scripts/
     |   |   |       `-- quick_validate.py
-    |   |   |-- slack/
-    |   |   |   `-- SKILL.md
-    |   |   |-- summarize/</a:t>
+    |   |   |-- slack/</a:t>
             </a:r>
           </a:p>
         </p:txBody>
@@ -37119,6 +37031,8 @@
                 <a:latin typeface="Cascadia Mono"/>
               </a:rPr>
               <a:t>    |   |   |   `-- SKILL.md
+    |   |   |-- summarize/
+    |   |   |   `-- SKILL.md
     |   |   |-- tlamatini_allowed_hosts_tighten/
     |   |   |   `-- SKILL.md
     |   |   |-- tlamatini_csrf_exempt_audit/
@@ -37146,9 +37060,7 @@
     |   |       |-- css/
     |   |       |   |-- agent_page.css
     |   |       |   |-- agentic_control_panel.css
-    |   |       |   |-- login.css
-    |   |       |   |-- skills_dialog.css
-    |   |       |   |-- tools_dialog.css</a:t>
+    |   |       |   |-- login.css</a:t>
             </a:r>
           </a:p>
         </p:txBody>
@@ -37486,7 +37398,9 @@
                 </a:solidFill>
                 <a:latin typeface="Cascadia Mono"/>
               </a:rPr>
-              <a:t>    |   |       |   `-- welcome.css
+              <a:t>    |   |       |   |-- skills_dialog.css
+    |   |       |   |-- tools_dialog.css
+    |   |       |   `-- welcome.css
     |   |       |-- img/
     |   |       |   |-- spinner.svg
     |   |       |   `-- Tlamatini.ico
@@ -37514,9 +37428,7 @@
     |   |       |   |-- agent_page_ui.js
     |   |       |   |-- agentic_control_panel.js
     |   |       |   |-- canvas_item_dialog.js
-    |   |       |   |-- chat_page_runtime_poller.js
-    |   |       |   |-- contextual_menus.js
-    |   |       |   |-- shared-runtime-dialogs.js</a:t>
+    |   |       |   |-- chat_page_runtime_poller.js</a:t>
             </a:r>
           </a:p>
         </p:txBody>
@@ -38603,7 +38515,9 @@
                 </a:solidFill>
                 <a:latin typeface="Cascadia Mono"/>
               </a:rPr>
-              <a:t>    |   |       |   |-- skills_dialog.js
+              <a:t>    |   |       |   |-- contextual_menus.js
+    |   |       |   |-- shared-runtime-dialogs.js
+    |   |       |   |-- skills_dialog.js
     |   |       |   `-- tools_dialog.js
     |   |       |-- sounds/
     |   |       |   |-- hypervisor_alert.wav
@@ -38631,9 +38545,7 @@
     `-- tlamatini/
         |-- __init__.py
         |-- asgi.py
-        |-- context_processors.py
-        |-- logging_filters.py
-        |-- middleware.py</a:t>
+        |-- context_processors.py</a:t>
             </a:r>
           </a:p>
         </p:txBody>
@@ -38971,7 +38883,9 @@
                 </a:solidFill>
                 <a:latin typeface="Cascadia Mono"/>
               </a:rPr>
-              <a:t>        |-- settings.py
+              <a:t>        |-- logging_filters.py
+        |-- middleware.py
+        |-- settings.py
         |-- urls.py
         `-- wsgi.py</a:t>
             </a:r>

--- a/Tlamatini_eXtended_Artificial_Intelligence_Humanly_Tempered.pptx
+++ b/Tlamatini_eXtended_Artificial_Intelligence_Humanly_Tempered.pptx
@@ -73,8 +73,6 @@
     <p:sldId id="321" r:id="rId72"/>
     <p:sldId id="322" r:id="rId73"/>
     <p:sldId id="323" r:id="rId74"/>
-    <p:sldId id="324" r:id="rId75"/>
-    <p:sldId id="325" r:id="rId76"/>
   </p:sldIdLst>
   <p:sldSz cx="12191695" cy="6858000" type="screen4x3"/>
   <p:notesSz cx="6858000" cy="9144000"/>
@@ -3887,7 +3885,7 @@
                 </a:solidFill>
                 <a:latin typeface="Aptos"/>
               </a:rPr>
-              <a:t>Generated May 29, 2026 11:08 AM UTC-0600 at HEAD 80baef9</a:t>
+              <a:t>Generated May 29, 2026 11:09 AM UTC-0600 at HEAD 011d166</a:t>
             </a:r>
           </a:p>
         </p:txBody>
@@ -6580,7 +6578,7 @@
               <a:rPr sz="1300" b="0" i="0">
                 <a:latin typeface="Calibri"/>
               </a:rPr>
-              <a:t>The live operator surface now stands at 68 workflow agents, 75 Multi-Turn tools, 12 ACPX tools, and 24 skills.</a:t>
+              <a:t>The live operator surface now stands at 68 workflow agents, 75 Multi-Turn tools, 12 ACPX tools, and 26 skills.</a:t>
             </a:r>
             <a:endParaRPr sz="1300" b="0" i="0">
               <a:latin typeface="Calibri"/>
@@ -6624,7 +6622,7 @@
               <a:rPr sz="1300" b="0" i="0">
                 <a:latin typeface="Calibri"/>
               </a:rPr>
-              <a:t>README.md and BookOfTlamatini.md now agree on those counts, so the dossier can mirror the docs and the live registry without reconciliation footnotes.</a:t>
+              <a:t>The workflow-agent and wrapped-tool totals align cleanly with the handbooks, while the skill total is validated from the on-disk `agent/skills_pkg/` catalog so the dossier stays honest even when a simplified markdown summary lags behind the live tree.</a:t>
             </a:r>
             <a:endParaRPr sz="1300" b="0" i="0">
               <a:latin typeface="Calibri"/>
@@ -31085,7 +31083,7 @@
               <a:rPr sz="1500" b="0" i="0">
                 <a:latin typeface="Calibri"/>
               </a:rPr>
-              <a:t>80baef9 - Implementation of Asking on the chain of Multi-turn, by Tlamatini's-AutoBot.</a:t>
+              <a:t>011d166 - Chain the mail default model to kimi-k2.6:cloud, by Tlamatini's-AutoBot.</a:t>
             </a:r>
             <a:endParaRPr sz="1500" b="0" i="0">
               <a:latin typeface="Calibri"/>
@@ -31129,7 +31127,7 @@
               <a:rPr sz="1500" b="0" i="0">
                 <a:latin typeface="Calibri"/>
               </a:rPr>
-              <a:t>Generated on May 29, 2026 11:08 AM UTC-0600</a:t>
+              <a:t>Generated on May 29, 2026 11:09 AM UTC-0600</a:t>
             </a:r>
             <a:endParaRPr sz="1500" b="0" i="0">
               <a:latin typeface="Calibri"/>
@@ -31666,7 +31664,7 @@
               <a:rPr sz="1300" b="0" i="0">
                 <a:latin typeface="Calibri"/>
               </a:rPr>
-              <a:t>1e8be49 on 2026-05-26</a:t>
+              <a:t>011d166 on 2026-05-29</a:t>
             </a:r>
             <a:endParaRPr sz="1300" b="0" i="0">
               <a:latin typeface="Calibri"/>
@@ -31688,7 +31686,7 @@
               <a:rPr sz="1300" b="0" i="0">
                 <a:latin typeface="Calibri"/>
               </a:rPr>
-              <a:t>Visual documentation updated for STMer agent, by angelahack1</a:t>
+              <a:t>Chain the mail default model to kimi-k2.6:cloud, by Tlamatini's-AutoBot.</a:t>
             </a:r>
             <a:endParaRPr sz="1300" b="0" i="0">
               <a:latin typeface="Calibri"/>
@@ -31710,7 +31708,7 @@
               <a:rPr sz="1300" b="0" i="0">
                 <a:latin typeface="Calibri"/>
               </a:rPr>
-              <a:t>Commits since then: 9</a:t>
+              <a:t>Commits since then: 0</a:t>
             </a:r>
             <a:endParaRPr sz="1300" b="0" i="0">
               <a:latin typeface="Calibri"/>
@@ -31878,51 +31876,7 @@
               <a:rPr sz="1300" b="0" i="0">
                 <a:latin typeface="Calibri"/>
               </a:rPr>
-              <a:t>Since the last committed PDF/PPTX refresh, `v1.10.0` added the Ask Execs checkbox: she can now block before each state-changing Multi-Turn execution, wait for a browser Proceed or Deny decision through `ExecPermissionBroker`, and stop the whole chain safely with a persisted red denial banner.</a:t>
-            </a:r>
-            <a:endParaRPr sz="1300" b="0" i="0">
-              <a:latin typeface="Calibri"/>
-            </a:endParaRPr>
-          </a:p>
-          <a:p>
-            <a:pPr>
-              <a:spcAft>
-                <a:spcPts val="600"/>
-              </a:spcAft>
-              <a:defRPr sz="1300">
-                <a:solidFill>
-                  <a:srgbClr val="B4BAAE"/>
-                </a:solidFill>
-                <a:latin typeface="Aptos"/>
-              </a:defRPr>
-            </a:pPr>
-            <a:r>
-              <a:rPr sz="1300" b="0" i="0">
-                <a:latin typeface="Calibri"/>
-              </a:rPr>
-              <a:t>Since the last committed PDF/PPTX refresh, `v1.9.0` added STM32er as the 68th workflow agent and `chat_agent_stm32er` as the new firmware-control surface: she now bridges the `STM32 Template Project MCP` to scaffold, build, flash, observe, and reset STM32F4 projects with a fail-safe hardware preflight.</a:t>
-            </a:r>
-            <a:endParaRPr sz="1300" b="0" i="0">
-              <a:latin typeface="Calibri"/>
-            </a:endParaRPr>
-          </a:p>
-          <a:p>
-            <a:pPr>
-              <a:spcAft>
-                <a:spcPts val="600"/>
-              </a:spcAft>
-              <a:defRPr sz="1300">
-                <a:solidFill>
-                  <a:srgbClr val="B4BAAE"/>
-                </a:solidFill>
-                <a:latin typeface="Aptos"/>
-              </a:defRPr>
-            </a:pPr>
-            <a:r>
-              <a:rPr sz="1300" b="0" i="0">
-                <a:latin typeface="Calibri"/>
-              </a:rPr>
-              <a:t>The same span also refined the shipped operating baseline: handbook simplification, a `kimi-k2.6:cloud` checked-in default, stronger execution logging, Pythonxer downstream fixes, Windows forked-process polish, and cleaner project-skill loading.</a:t>
+              <a:t>Since the last committed PDF/PPTX refresh, Git shows focused platform evolution across autonomy, operator ergonomics, runtime self-knowledge, and documentation fidelity.</a:t>
             </a:r>
             <a:endParaRPr sz="1300" b="0" i="0">
               <a:latin typeface="Calibri"/>
@@ -33592,7 +33546,7 @@
             <a:avLst/>
           </a:prstGeom>
           <a:solidFill>
-            <a:srgbClr val="48BF8F"/>
+            <a:srgbClr val="C48052"/>
           </a:solidFill>
           <a:ln>
             <a:noFill/>
@@ -33635,7 +33589,7 @@
             <a:avLst/>
           </a:prstGeom>
           <a:solidFill>
-            <a:srgbClr val="48BF8F"/>
+            <a:srgbClr val="C48052"/>
           </a:solidFill>
           <a:ln>
             <a:noFill/>
@@ -33678,7 +33632,7 @@
             <a:avLst/>
           </a:prstGeom>
           <a:solidFill>
-            <a:srgbClr val="48BF8F"/>
+            <a:srgbClr val="C48052"/>
           </a:solidFill>
           <a:ln>
             <a:noFill/>
@@ -33721,7 +33675,7 @@
             <a:avLst/>
           </a:prstGeom>
           <a:solidFill>
-            <a:srgbClr val="48BF8F"/>
+            <a:srgbClr val="C48052"/>
           </a:solidFill>
           <a:ln>
             <a:noFill/>
@@ -33775,11 +33729,11 @@
             <a:r>
               <a:rPr sz="1000" b="1">
                 <a:solidFill>
-                  <a:srgbClr val="48BF8F"/>
-                </a:solidFill>
-                <a:latin typeface="Aptos"/>
-              </a:rPr>
-              <a:t>COMMITS SINCE THE LAST COMMITTED PDF/PPTX REFRESH</a:t>
+                  <a:srgbClr val="C48052"/>
+                </a:solidFill>
+                <a:latin typeface="Aptos"/>
+              </a:rPr>
+              <a:t>ALL COMMITS FROM TODAY ACCORDING TO GIT</a:t>
             </a:r>
           </a:p>
         </p:txBody>
@@ -33814,7 +33768,7 @@
                 </a:solidFill>
                 <a:latin typeface="Aptos Display"/>
               </a:rPr>
-              <a:t>Visual Dossier Change Appendix 1/2</a:t>
+              <a:t>Today's Commit Appendix 1/1</a:t>
             </a:r>
           </a:p>
         </p:txBody>
@@ -33879,7 +33833,7 @@
             <a:avLst/>
           </a:prstGeom>
           <a:solidFill>
-            <a:srgbClr val="48BF8F"/>
+            <a:srgbClr val="C48052"/>
           </a:solidFill>
           <a:ln>
             <a:noFill/>
@@ -33933,7 +33887,7 @@
             <a:r>
               <a:rPr sz="1400" b="1">
                 <a:solidFill>
-                  <a:srgbClr val="48BF8F"/>
+                  <a:srgbClr val="C48052"/>
                 </a:solidFill>
                 <a:latin typeface="Aptos"/>
               </a:rPr>
@@ -33979,7 +33933,7 @@
               <a:rPr sz="1200" b="0" i="0">
                 <a:latin typeface="Calibri"/>
               </a:rPr>
-              <a:t>2026-05-29 | 80baef9 | Implementation of Asking on the chain of Multi-turn, by Tlamatini's-AutoBot.</a:t>
+              <a:t>2026-05-29 | 011d166 | Chain the mail default model to kimi-k2.6:cloud, by Tlamatini's-AutoBot.</a:t>
             </a:r>
             <a:endParaRPr sz="1200" b="0" i="0">
               <a:latin typeface="Calibri"/>
@@ -34001,7 +33955,7 @@
               <a:rPr sz="1200" b="0" i="0">
                 <a:latin typeface="Calibri"/>
               </a:rPr>
-              <a:t>2026-05-29 | ee592fd | Setting kimi-k2.6:cloud as default in config.json, by Tlamatini's-AutoBot.</a:t>
+              <a:t>2026-05-29 | 80baef9 | Implementation of Asking on the chain of Multi-turn, by Tlamatini's-AutoBot.</a:t>
             </a:r>
             <a:endParaRPr sz="1200" b="0" i="0">
               <a:latin typeface="Calibri"/>
@@ -34023,7 +33977,7 @@
               <a:rPr sz="1200" b="0" i="0">
                 <a:latin typeface="Calibri"/>
               </a:rPr>
-              <a:t>2026-05-29 | d1cd7e9 | Making minimal improvements in Pythonxer downstream execution, by angelahack1</a:t>
+              <a:t>2026-05-29 | ee592fd | Setting kimi-k2.6:cloud as default in config.json, by Tlamatini's-AutoBot.</a:t>
             </a:r>
             <a:endParaRPr sz="1200" b="0" i="0">
               <a:latin typeface="Calibri"/>
@@ -34045,7 +33999,7 @@
               <a:rPr sz="1200" b="0" i="0">
                 <a:latin typeface="Calibri"/>
               </a:rPr>
-              <a:t>2026-05-29 | 1174d79 | Making minimal improvements in forked windows execution, bya angelahack1</a:t>
+              <a:t>2026-05-29 | d1cd7e9 | Making minimal improvements in Pythonxer downstream execution, by angelahack1</a:t>
             </a:r>
             <a:endParaRPr sz="1200" b="0" i="0">
               <a:latin typeface="Calibri"/>
@@ -34067,29 +34021,7 @@
               <a:rPr sz="1200" b="0" i="0">
                 <a:latin typeface="Calibri"/>
               </a:rPr>
-              <a:t>2026-05-28 | 1a40123 | Addding som improvements reporting on the log file more detail about executions, by angelahack1</a:t>
-            </a:r>
-            <a:endParaRPr sz="1200" b="0" i="0">
-              <a:latin typeface="Calibri"/>
-            </a:endParaRPr>
-          </a:p>
-          <a:p>
-            <a:pPr>
-              <a:spcAft>
-                <a:spcPts val="600"/>
-              </a:spcAft>
-              <a:defRPr sz="1200">
-                <a:solidFill>
-                  <a:srgbClr val="B4BAAE"/>
-                </a:solidFill>
-                <a:latin typeface="Aptos"/>
-              </a:defRPr>
-            </a:pPr>
-            <a:r>
-              <a:rPr sz="1200" b="0" i="0">
-                <a:latin typeface="Calibri"/>
-              </a:rPr>
-              <a:t>2026-05-28 | 781a1b6 | Improvingloading of project skills, by Tlamatini's-AutoBot.</a:t>
+              <a:t>2026-05-29 | 1174d79 | Making minimal improvements in forked windows execution, bya angelahack1</a:t>
             </a:r>
             <a:endParaRPr sz="1200" b="0" i="0">
               <a:latin typeface="Calibri"/>
@@ -34106,1058 +34038,6 @@
 </file>
 
 <file path=ppt/slides/slide46.xml><?xml version="1.0" encoding="utf-8"?>
-<p:sld xmlns:a="http://schemas.openxmlformats.org/drawingml/2006/main" xmlns:p="http://schemas.openxmlformats.org/presentationml/2006/main" xmlns:r="http://schemas.openxmlformats.org/officeDocument/2006/relationships">
-  <p:cSld>
-    <p:spTree>
-      <p:nvGrpSpPr>
-        <p:cNvPr id="1" name=""/>
-        <p:cNvGrpSpPr/>
-        <p:nvPr/>
-      </p:nvGrpSpPr>
-      <p:grpSpPr/>
-      <p:sp>
-        <p:nvSpPr>
-          <p:cNvPr id="2" name="Rectangle 1"/>
-          <p:cNvSpPr/>
-          <p:nvPr/>
-        </p:nvSpPr>
-        <p:spPr>
-          <a:xfrm>
-            <a:off x="0" y="0"/>
-            <a:ext cx="12191695" cy="6858000"/>
-          </a:xfrm>
-          <a:prstGeom prst="rect">
-            <a:avLst/>
-          </a:prstGeom>
-          <a:solidFill>
-            <a:srgbClr val="080D0D"/>
-          </a:solidFill>
-          <a:ln>
-            <a:noFill/>
-          </a:ln>
-        </p:spPr>
-        <p:style>
-          <a:lnRef idx="1">
-            <a:schemeClr val="accent1"/>
-          </a:lnRef>
-          <a:fillRef idx="3">
-            <a:schemeClr val="accent1"/>
-          </a:fillRef>
-          <a:effectRef idx="2">
-            <a:schemeClr val="accent1"/>
-          </a:effectRef>
-          <a:fontRef idx="minor">
-            <a:schemeClr val="lt1"/>
-          </a:fontRef>
-        </p:style>
-        <p:txBody>
-          <a:bodyPr rtlCol="0" anchor="ctr"/>
-          <a:lstStyle/>
-          <a:p>
-            <a:pPr algn="ctr"/>
-          </a:p>
-        </p:txBody>
-      </p:sp>
-      <p:sp>
-        <p:nvSpPr>
-          <p:cNvPr id="3" name="Rectangle 2"/>
-          <p:cNvSpPr/>
-          <p:nvPr/>
-        </p:nvSpPr>
-        <p:spPr>
-          <a:xfrm>
-            <a:off x="320040" y="384048"/>
-            <a:ext cx="36576" cy="6080760"/>
-          </a:xfrm>
-          <a:prstGeom prst="rect">
-            <a:avLst/>
-          </a:prstGeom>
-          <a:solidFill>
-            <a:srgbClr val="C48052"/>
-          </a:solidFill>
-          <a:ln>
-            <a:noFill/>
-          </a:ln>
-        </p:spPr>
-        <p:style>
-          <a:lnRef idx="1">
-            <a:schemeClr val="accent1"/>
-          </a:lnRef>
-          <a:fillRef idx="3">
-            <a:schemeClr val="accent1"/>
-          </a:fillRef>
-          <a:effectRef idx="2">
-            <a:schemeClr val="accent1"/>
-          </a:effectRef>
-          <a:fontRef idx="minor">
-            <a:schemeClr val="lt1"/>
-          </a:fontRef>
-        </p:style>
-        <p:txBody>
-          <a:bodyPr rtlCol="0" anchor="ctr"/>
-          <a:lstStyle/>
-          <a:p>
-            <a:pPr algn="ctr"/>
-          </a:p>
-        </p:txBody>
-      </p:sp>
-      <p:sp>
-        <p:nvSpPr>
-          <p:cNvPr id="4" name="Rectangle 3"/>
-          <p:cNvSpPr/>
-          <p:nvPr/>
-        </p:nvSpPr>
-        <p:spPr>
-          <a:xfrm>
-            <a:off x="11716207" y="384048"/>
-            <a:ext cx="36576" cy="6080760"/>
-          </a:xfrm>
-          <a:prstGeom prst="rect">
-            <a:avLst/>
-          </a:prstGeom>
-          <a:solidFill>
-            <a:srgbClr val="C48052"/>
-          </a:solidFill>
-          <a:ln>
-            <a:noFill/>
-          </a:ln>
-        </p:spPr>
-        <p:style>
-          <a:lnRef idx="1">
-            <a:schemeClr val="accent1"/>
-          </a:lnRef>
-          <a:fillRef idx="3">
-            <a:schemeClr val="accent1"/>
-          </a:fillRef>
-          <a:effectRef idx="2">
-            <a:schemeClr val="accent1"/>
-          </a:effectRef>
-          <a:fontRef idx="minor">
-            <a:schemeClr val="lt1"/>
-          </a:fontRef>
-        </p:style>
-        <p:txBody>
-          <a:bodyPr rtlCol="0" anchor="ctr"/>
-          <a:lstStyle/>
-          <a:p>
-            <a:pPr algn="ctr"/>
-          </a:p>
-        </p:txBody>
-      </p:sp>
-      <p:sp>
-        <p:nvSpPr>
-          <p:cNvPr id="5" name="Rectangle 4"/>
-          <p:cNvSpPr/>
-          <p:nvPr/>
-        </p:nvSpPr>
-        <p:spPr>
-          <a:xfrm>
-            <a:off x="502920" y="384048"/>
-            <a:ext cx="11155680" cy="27432"/>
-          </a:xfrm>
-          <a:prstGeom prst="rect">
-            <a:avLst/>
-          </a:prstGeom>
-          <a:solidFill>
-            <a:srgbClr val="C48052"/>
-          </a:solidFill>
-          <a:ln>
-            <a:noFill/>
-          </a:ln>
-        </p:spPr>
-        <p:style>
-          <a:lnRef idx="1">
-            <a:schemeClr val="accent1"/>
-          </a:lnRef>
-          <a:fillRef idx="3">
-            <a:schemeClr val="accent1"/>
-          </a:fillRef>
-          <a:effectRef idx="2">
-            <a:schemeClr val="accent1"/>
-          </a:effectRef>
-          <a:fontRef idx="minor">
-            <a:schemeClr val="lt1"/>
-          </a:fontRef>
-        </p:style>
-        <p:txBody>
-          <a:bodyPr rtlCol="0" anchor="ctr"/>
-          <a:lstStyle/>
-          <a:p>
-            <a:pPr algn="ctr"/>
-          </a:p>
-        </p:txBody>
-      </p:sp>
-      <p:sp>
-        <p:nvSpPr>
-          <p:cNvPr id="6" name="Rectangle 5"/>
-          <p:cNvSpPr/>
-          <p:nvPr/>
-        </p:nvSpPr>
-        <p:spPr>
-          <a:xfrm>
-            <a:off x="502920" y="6437376"/>
-            <a:ext cx="11155680" cy="27432"/>
-          </a:xfrm>
-          <a:prstGeom prst="rect">
-            <a:avLst/>
-          </a:prstGeom>
-          <a:solidFill>
-            <a:srgbClr val="C48052"/>
-          </a:solidFill>
-          <a:ln>
-            <a:noFill/>
-          </a:ln>
-        </p:spPr>
-        <p:style>
-          <a:lnRef idx="1">
-            <a:schemeClr val="accent1"/>
-          </a:lnRef>
-          <a:fillRef idx="3">
-            <a:schemeClr val="accent1"/>
-          </a:fillRef>
-          <a:effectRef idx="2">
-            <a:schemeClr val="accent1"/>
-          </a:effectRef>
-          <a:fontRef idx="minor">
-            <a:schemeClr val="lt1"/>
-          </a:fontRef>
-        </p:style>
-        <p:txBody>
-          <a:bodyPr rtlCol="0" anchor="ctr"/>
-          <a:lstStyle/>
-          <a:p>
-            <a:pPr algn="ctr"/>
-          </a:p>
-        </p:txBody>
-      </p:sp>
-      <p:sp>
-        <p:nvSpPr>
-          <p:cNvPr id="7" name="TextBox 6"/>
-          <p:cNvSpPr txBox="1"/>
-          <p:nvPr/>
-        </p:nvSpPr>
-        <p:spPr>
-          <a:xfrm>
-            <a:off x="713232" y="548640"/>
-            <a:ext cx="10698480" cy="301752"/>
-          </a:xfrm>
-          <a:prstGeom prst="rect">
-            <a:avLst/>
-          </a:prstGeom>
-          <a:noFill/>
-        </p:spPr>
-        <p:txBody>
-          <a:bodyPr wrap="square" anchor="t">
-            <a:spAutoFit/>
-          </a:bodyPr>
-          <a:lstStyle/>
-          <a:p>
-            <a:pPr algn="l"/>
-            <a:r>
-              <a:rPr sz="1000" b="1">
-                <a:solidFill>
-                  <a:srgbClr val="C48052"/>
-                </a:solidFill>
-                <a:latin typeface="Aptos"/>
-              </a:rPr>
-              <a:t>COMMITS SINCE THE LAST COMMITTED PDF/PPTX REFRESH</a:t>
-            </a:r>
-          </a:p>
-        </p:txBody>
-      </p:sp>
-      <p:sp>
-        <p:nvSpPr>
-          <p:cNvPr id="8" name="TextBox 7"/>
-          <p:cNvSpPr txBox="1"/>
-          <p:nvPr/>
-        </p:nvSpPr>
-        <p:spPr>
-          <a:xfrm>
-            <a:off x="694944" y="850392"/>
-            <a:ext cx="10881360" cy="566928"/>
-          </a:xfrm>
-          <a:prstGeom prst="rect">
-            <a:avLst/>
-          </a:prstGeom>
-          <a:noFill/>
-        </p:spPr>
-        <p:txBody>
-          <a:bodyPr wrap="square" anchor="t">
-            <a:spAutoFit/>
-          </a:bodyPr>
-          <a:lstStyle/>
-          <a:p>
-            <a:pPr algn="l"/>
-            <a:r>
-              <a:rPr sz="2700" b="0">
-                <a:solidFill>
-                  <a:srgbClr val="E8E8DE"/>
-                </a:solidFill>
-                <a:latin typeface="Aptos Display"/>
-              </a:rPr>
-              <a:t>Visual Dossier Change Appendix 2/2</a:t>
-            </a:r>
-          </a:p>
-        </p:txBody>
-      </p:sp>
-      <p:sp>
-        <p:nvSpPr>
-          <p:cNvPr id="9" name="Rounded Rectangle 8"/>
-          <p:cNvSpPr/>
-          <p:nvPr/>
-        </p:nvSpPr>
-        <p:spPr>
-          <a:xfrm>
-            <a:off x="749808" y="1536192"/>
-            <a:ext cx="10561320" cy="4443984"/>
-          </a:xfrm>
-          <a:prstGeom prst="roundRect">
-            <a:avLst/>
-          </a:prstGeom>
-          <a:solidFill>
-            <a:srgbClr val="161A19"/>
-          </a:solidFill>
-          <a:ln>
-            <a:solidFill>
-              <a:srgbClr val="595F56"/>
-            </a:solidFill>
-          </a:ln>
-        </p:spPr>
-        <p:style>
-          <a:lnRef idx="1">
-            <a:schemeClr val="accent1"/>
-          </a:lnRef>
-          <a:fillRef idx="3">
-            <a:schemeClr val="accent1"/>
-          </a:fillRef>
-          <a:effectRef idx="2">
-            <a:schemeClr val="accent1"/>
-          </a:effectRef>
-          <a:fontRef idx="minor">
-            <a:schemeClr val="lt1"/>
-          </a:fontRef>
-        </p:style>
-        <p:txBody>
-          <a:bodyPr rtlCol="0" anchor="ctr"/>
-          <a:lstStyle/>
-          <a:p>
-            <a:pPr algn="ctr"/>
-          </a:p>
-        </p:txBody>
-      </p:sp>
-      <p:sp>
-        <p:nvSpPr>
-          <p:cNvPr id="10" name="Rectangle 9"/>
-          <p:cNvSpPr/>
-          <p:nvPr/>
-        </p:nvSpPr>
-        <p:spPr>
-          <a:xfrm>
-            <a:off x="749808" y="1536192"/>
-            <a:ext cx="10561320" cy="109728"/>
-          </a:xfrm>
-          <a:prstGeom prst="rect">
-            <a:avLst/>
-          </a:prstGeom>
-          <a:solidFill>
-            <a:srgbClr val="C48052"/>
-          </a:solidFill>
-          <a:ln>
-            <a:noFill/>
-          </a:ln>
-        </p:spPr>
-        <p:style>
-          <a:lnRef idx="1">
-            <a:schemeClr val="accent1"/>
-          </a:lnRef>
-          <a:fillRef idx="3">
-            <a:schemeClr val="accent1"/>
-          </a:fillRef>
-          <a:effectRef idx="2">
-            <a:schemeClr val="accent1"/>
-          </a:effectRef>
-          <a:fontRef idx="minor">
-            <a:schemeClr val="lt1"/>
-          </a:fontRef>
-        </p:style>
-        <p:txBody>
-          <a:bodyPr rtlCol="0" anchor="ctr"/>
-          <a:lstStyle/>
-          <a:p>
-            <a:pPr algn="ctr"/>
-          </a:p>
-        </p:txBody>
-      </p:sp>
-      <p:sp>
-        <p:nvSpPr>
-          <p:cNvPr id="11" name="TextBox 10"/>
-          <p:cNvSpPr txBox="1"/>
-          <p:nvPr/>
-        </p:nvSpPr>
-        <p:spPr>
-          <a:xfrm>
-            <a:off x="950976" y="1737360"/>
-            <a:ext cx="10158984" cy="310896"/>
-          </a:xfrm>
-          <a:prstGeom prst="rect">
-            <a:avLst/>
-          </a:prstGeom>
-          <a:noFill/>
-        </p:spPr>
-        <p:txBody>
-          <a:bodyPr wrap="square" anchor="t">
-            <a:spAutoFit/>
-          </a:bodyPr>
-          <a:lstStyle/>
-          <a:p>
-            <a:pPr algn="l"/>
-            <a:r>
-              <a:rPr sz="1400" b="1">
-                <a:solidFill>
-                  <a:srgbClr val="C48052"/>
-                </a:solidFill>
-                <a:latin typeface="Aptos"/>
-              </a:rPr>
-              <a:t>Commit timeline</a:t>
-            </a:r>
-          </a:p>
-        </p:txBody>
-      </p:sp>
-      <p:sp>
-        <p:nvSpPr>
-          <p:cNvPr id="12" name="TextBox 11"/>
-          <p:cNvSpPr txBox="1"/>
-          <p:nvPr/>
-        </p:nvSpPr>
-        <p:spPr>
-          <a:xfrm>
-            <a:off x="950976" y="2194560"/>
-            <a:ext cx="10158984" cy="3639312"/>
-          </a:xfrm>
-          <a:prstGeom prst="rect">
-            <a:avLst/>
-          </a:prstGeom>
-          <a:noFill/>
-        </p:spPr>
-        <p:txBody>
-          <a:bodyPr wrap="square" anchor="t" lIns="38100" rIns="38100" tIns="25400" bIns="25400">
-            <a:noAutofit/>
-          </a:bodyPr>
-          <a:lstStyle/>
-          <a:p>
-            <a:pPr>
-              <a:spcAft>
-                <a:spcPts val="600"/>
-              </a:spcAft>
-              <a:defRPr sz="1200">
-                <a:solidFill>
-                  <a:srgbClr val="B4BAAE"/>
-                </a:solidFill>
-                <a:latin typeface="Aptos"/>
-              </a:defRPr>
-            </a:pPr>
-            <a:r>
-              <a:rPr sz="1200" b="0" i="0">
-                <a:latin typeface="Calibri"/>
-              </a:rPr>
-              <a:t>2026-05-28 | 56333b7 | Improving some skills, by Tlamatini's-AutoBot.</a:t>
-            </a:r>
-            <a:endParaRPr sz="1200" b="0" i="0">
-              <a:latin typeface="Calibri"/>
-            </a:endParaRPr>
-          </a:p>
-          <a:p>
-            <a:pPr>
-              <a:spcAft>
-                <a:spcPts val="600"/>
-              </a:spcAft>
-              <a:defRPr sz="1200">
-                <a:solidFill>
-                  <a:srgbClr val="B4BAAE"/>
-                </a:solidFill>
-                <a:latin typeface="Aptos"/>
-              </a:defRPr>
-            </a:pPr>
-            <a:r>
-              <a:rPr sz="1200" b="0" i="0">
-                <a:latin typeface="Calibri"/>
-              </a:rPr>
-              <a:t>2026-05-27 | c969ffc | Making a simpler README.md, by angelahack1</a:t>
-            </a:r>
-            <a:endParaRPr sz="1200" b="0" i="0">
-              <a:latin typeface="Calibri"/>
-            </a:endParaRPr>
-          </a:p>
-          <a:p>
-            <a:pPr>
-              <a:spcAft>
-                <a:spcPts val="600"/>
-              </a:spcAft>
-              <a:defRPr sz="1200">
-                <a:solidFill>
-                  <a:srgbClr val="B4BAAE"/>
-                </a:solidFill>
-                <a:latin typeface="Aptos"/>
-              </a:defRPr>
-            </a:pPr>
-            <a:r>
-              <a:rPr sz="1200" b="0" i="0">
-                <a:latin typeface="Calibri"/>
-              </a:rPr>
-              <a:t>2026-05-27 | 6dabb4f | Just improving the prompt sample #3 for STM32er multi-turn example, by angelahack1</a:t>
-            </a:r>
-            <a:endParaRPr sz="1200" b="0" i="0">
-              <a:latin typeface="Calibri"/>
-            </a:endParaRPr>
-          </a:p>
-        </p:txBody>
-      </p:sp>
-    </p:spTree>
-  </p:cSld>
-  <p:clrMapOvr>
-    <a:masterClrMapping/>
-  </p:clrMapOvr>
-</p:sld>
-</file>
-
-<file path=ppt/slides/slide47.xml><?xml version="1.0" encoding="utf-8"?>
-<p:sld xmlns:a="http://schemas.openxmlformats.org/drawingml/2006/main" xmlns:p="http://schemas.openxmlformats.org/presentationml/2006/main" xmlns:r="http://schemas.openxmlformats.org/officeDocument/2006/relationships">
-  <p:cSld>
-    <p:spTree>
-      <p:nvGrpSpPr>
-        <p:cNvPr id="1" name=""/>
-        <p:cNvGrpSpPr/>
-        <p:nvPr/>
-      </p:nvGrpSpPr>
-      <p:grpSpPr/>
-      <p:sp>
-        <p:nvSpPr>
-          <p:cNvPr id="2" name="Rectangle 1"/>
-          <p:cNvSpPr/>
-          <p:nvPr/>
-        </p:nvSpPr>
-        <p:spPr>
-          <a:xfrm>
-            <a:off x="0" y="0"/>
-            <a:ext cx="12191695" cy="6858000"/>
-          </a:xfrm>
-          <a:prstGeom prst="rect">
-            <a:avLst/>
-          </a:prstGeom>
-          <a:solidFill>
-            <a:srgbClr val="080D0D"/>
-          </a:solidFill>
-          <a:ln>
-            <a:noFill/>
-          </a:ln>
-        </p:spPr>
-        <p:style>
-          <a:lnRef idx="1">
-            <a:schemeClr val="accent1"/>
-          </a:lnRef>
-          <a:fillRef idx="3">
-            <a:schemeClr val="accent1"/>
-          </a:fillRef>
-          <a:effectRef idx="2">
-            <a:schemeClr val="accent1"/>
-          </a:effectRef>
-          <a:fontRef idx="minor">
-            <a:schemeClr val="lt1"/>
-          </a:fontRef>
-        </p:style>
-        <p:txBody>
-          <a:bodyPr rtlCol="0" anchor="ctr"/>
-          <a:lstStyle/>
-          <a:p>
-            <a:pPr algn="ctr"/>
-          </a:p>
-        </p:txBody>
-      </p:sp>
-      <p:sp>
-        <p:nvSpPr>
-          <p:cNvPr id="3" name="Rectangle 2"/>
-          <p:cNvSpPr/>
-          <p:nvPr/>
-        </p:nvSpPr>
-        <p:spPr>
-          <a:xfrm>
-            <a:off x="320040" y="384048"/>
-            <a:ext cx="36576" cy="6080760"/>
-          </a:xfrm>
-          <a:prstGeom prst="rect">
-            <a:avLst/>
-          </a:prstGeom>
-          <a:solidFill>
-            <a:srgbClr val="C48052"/>
-          </a:solidFill>
-          <a:ln>
-            <a:noFill/>
-          </a:ln>
-        </p:spPr>
-        <p:style>
-          <a:lnRef idx="1">
-            <a:schemeClr val="accent1"/>
-          </a:lnRef>
-          <a:fillRef idx="3">
-            <a:schemeClr val="accent1"/>
-          </a:fillRef>
-          <a:effectRef idx="2">
-            <a:schemeClr val="accent1"/>
-          </a:effectRef>
-          <a:fontRef idx="minor">
-            <a:schemeClr val="lt1"/>
-          </a:fontRef>
-        </p:style>
-        <p:txBody>
-          <a:bodyPr rtlCol="0" anchor="ctr"/>
-          <a:lstStyle/>
-          <a:p>
-            <a:pPr algn="ctr"/>
-          </a:p>
-        </p:txBody>
-      </p:sp>
-      <p:sp>
-        <p:nvSpPr>
-          <p:cNvPr id="4" name="Rectangle 3"/>
-          <p:cNvSpPr/>
-          <p:nvPr/>
-        </p:nvSpPr>
-        <p:spPr>
-          <a:xfrm>
-            <a:off x="11716207" y="384048"/>
-            <a:ext cx="36576" cy="6080760"/>
-          </a:xfrm>
-          <a:prstGeom prst="rect">
-            <a:avLst/>
-          </a:prstGeom>
-          <a:solidFill>
-            <a:srgbClr val="C48052"/>
-          </a:solidFill>
-          <a:ln>
-            <a:noFill/>
-          </a:ln>
-        </p:spPr>
-        <p:style>
-          <a:lnRef idx="1">
-            <a:schemeClr val="accent1"/>
-          </a:lnRef>
-          <a:fillRef idx="3">
-            <a:schemeClr val="accent1"/>
-          </a:fillRef>
-          <a:effectRef idx="2">
-            <a:schemeClr val="accent1"/>
-          </a:effectRef>
-          <a:fontRef idx="minor">
-            <a:schemeClr val="lt1"/>
-          </a:fontRef>
-        </p:style>
-        <p:txBody>
-          <a:bodyPr rtlCol="0" anchor="ctr"/>
-          <a:lstStyle/>
-          <a:p>
-            <a:pPr algn="ctr"/>
-          </a:p>
-        </p:txBody>
-      </p:sp>
-      <p:sp>
-        <p:nvSpPr>
-          <p:cNvPr id="5" name="Rectangle 4"/>
-          <p:cNvSpPr/>
-          <p:nvPr/>
-        </p:nvSpPr>
-        <p:spPr>
-          <a:xfrm>
-            <a:off x="502920" y="384048"/>
-            <a:ext cx="11155680" cy="27432"/>
-          </a:xfrm>
-          <a:prstGeom prst="rect">
-            <a:avLst/>
-          </a:prstGeom>
-          <a:solidFill>
-            <a:srgbClr val="C48052"/>
-          </a:solidFill>
-          <a:ln>
-            <a:noFill/>
-          </a:ln>
-        </p:spPr>
-        <p:style>
-          <a:lnRef idx="1">
-            <a:schemeClr val="accent1"/>
-          </a:lnRef>
-          <a:fillRef idx="3">
-            <a:schemeClr val="accent1"/>
-          </a:fillRef>
-          <a:effectRef idx="2">
-            <a:schemeClr val="accent1"/>
-          </a:effectRef>
-          <a:fontRef idx="minor">
-            <a:schemeClr val="lt1"/>
-          </a:fontRef>
-        </p:style>
-        <p:txBody>
-          <a:bodyPr rtlCol="0" anchor="ctr"/>
-          <a:lstStyle/>
-          <a:p>
-            <a:pPr algn="ctr"/>
-          </a:p>
-        </p:txBody>
-      </p:sp>
-      <p:sp>
-        <p:nvSpPr>
-          <p:cNvPr id="6" name="Rectangle 5"/>
-          <p:cNvSpPr/>
-          <p:nvPr/>
-        </p:nvSpPr>
-        <p:spPr>
-          <a:xfrm>
-            <a:off x="502920" y="6437376"/>
-            <a:ext cx="11155680" cy="27432"/>
-          </a:xfrm>
-          <a:prstGeom prst="rect">
-            <a:avLst/>
-          </a:prstGeom>
-          <a:solidFill>
-            <a:srgbClr val="C48052"/>
-          </a:solidFill>
-          <a:ln>
-            <a:noFill/>
-          </a:ln>
-        </p:spPr>
-        <p:style>
-          <a:lnRef idx="1">
-            <a:schemeClr val="accent1"/>
-          </a:lnRef>
-          <a:fillRef idx="3">
-            <a:schemeClr val="accent1"/>
-          </a:fillRef>
-          <a:effectRef idx="2">
-            <a:schemeClr val="accent1"/>
-          </a:effectRef>
-          <a:fontRef idx="minor">
-            <a:schemeClr val="lt1"/>
-          </a:fontRef>
-        </p:style>
-        <p:txBody>
-          <a:bodyPr rtlCol="0" anchor="ctr"/>
-          <a:lstStyle/>
-          <a:p>
-            <a:pPr algn="ctr"/>
-          </a:p>
-        </p:txBody>
-      </p:sp>
-      <p:sp>
-        <p:nvSpPr>
-          <p:cNvPr id="7" name="TextBox 6"/>
-          <p:cNvSpPr txBox="1"/>
-          <p:nvPr/>
-        </p:nvSpPr>
-        <p:spPr>
-          <a:xfrm>
-            <a:off x="713232" y="548640"/>
-            <a:ext cx="10698480" cy="301752"/>
-          </a:xfrm>
-          <a:prstGeom prst="rect">
-            <a:avLst/>
-          </a:prstGeom>
-          <a:noFill/>
-        </p:spPr>
-        <p:txBody>
-          <a:bodyPr wrap="square" anchor="t">
-            <a:spAutoFit/>
-          </a:bodyPr>
-          <a:lstStyle/>
-          <a:p>
-            <a:pPr algn="l"/>
-            <a:r>
-              <a:rPr sz="1000" b="1">
-                <a:solidFill>
-                  <a:srgbClr val="C48052"/>
-                </a:solidFill>
-                <a:latin typeface="Aptos"/>
-              </a:rPr>
-              <a:t>ALL COMMITS FROM TODAY ACCORDING TO GIT</a:t>
-            </a:r>
-          </a:p>
-        </p:txBody>
-      </p:sp>
-      <p:sp>
-        <p:nvSpPr>
-          <p:cNvPr id="8" name="TextBox 7"/>
-          <p:cNvSpPr txBox="1"/>
-          <p:nvPr/>
-        </p:nvSpPr>
-        <p:spPr>
-          <a:xfrm>
-            <a:off x="694944" y="850392"/>
-            <a:ext cx="10881360" cy="566928"/>
-          </a:xfrm>
-          <a:prstGeom prst="rect">
-            <a:avLst/>
-          </a:prstGeom>
-          <a:noFill/>
-        </p:spPr>
-        <p:txBody>
-          <a:bodyPr wrap="square" anchor="t">
-            <a:spAutoFit/>
-          </a:bodyPr>
-          <a:lstStyle/>
-          <a:p>
-            <a:pPr algn="l"/>
-            <a:r>
-              <a:rPr sz="2700" b="0">
-                <a:solidFill>
-                  <a:srgbClr val="E8E8DE"/>
-                </a:solidFill>
-                <a:latin typeface="Aptos Display"/>
-              </a:rPr>
-              <a:t>Today's Commit Appendix 1/1</a:t>
-            </a:r>
-          </a:p>
-        </p:txBody>
-      </p:sp>
-      <p:sp>
-        <p:nvSpPr>
-          <p:cNvPr id="9" name="Rounded Rectangle 8"/>
-          <p:cNvSpPr/>
-          <p:nvPr/>
-        </p:nvSpPr>
-        <p:spPr>
-          <a:xfrm>
-            <a:off x="749808" y="1536192"/>
-            <a:ext cx="10561320" cy="4443984"/>
-          </a:xfrm>
-          <a:prstGeom prst="roundRect">
-            <a:avLst/>
-          </a:prstGeom>
-          <a:solidFill>
-            <a:srgbClr val="161A19"/>
-          </a:solidFill>
-          <a:ln>
-            <a:solidFill>
-              <a:srgbClr val="595F56"/>
-            </a:solidFill>
-          </a:ln>
-        </p:spPr>
-        <p:style>
-          <a:lnRef idx="1">
-            <a:schemeClr val="accent1"/>
-          </a:lnRef>
-          <a:fillRef idx="3">
-            <a:schemeClr val="accent1"/>
-          </a:fillRef>
-          <a:effectRef idx="2">
-            <a:schemeClr val="accent1"/>
-          </a:effectRef>
-          <a:fontRef idx="minor">
-            <a:schemeClr val="lt1"/>
-          </a:fontRef>
-        </p:style>
-        <p:txBody>
-          <a:bodyPr rtlCol="0" anchor="ctr"/>
-          <a:lstStyle/>
-          <a:p>
-            <a:pPr algn="ctr"/>
-          </a:p>
-        </p:txBody>
-      </p:sp>
-      <p:sp>
-        <p:nvSpPr>
-          <p:cNvPr id="10" name="Rectangle 9"/>
-          <p:cNvSpPr/>
-          <p:nvPr/>
-        </p:nvSpPr>
-        <p:spPr>
-          <a:xfrm>
-            <a:off x="749808" y="1536192"/>
-            <a:ext cx="10561320" cy="109728"/>
-          </a:xfrm>
-          <a:prstGeom prst="rect">
-            <a:avLst/>
-          </a:prstGeom>
-          <a:solidFill>
-            <a:srgbClr val="C48052"/>
-          </a:solidFill>
-          <a:ln>
-            <a:noFill/>
-          </a:ln>
-        </p:spPr>
-        <p:style>
-          <a:lnRef idx="1">
-            <a:schemeClr val="accent1"/>
-          </a:lnRef>
-          <a:fillRef idx="3">
-            <a:schemeClr val="accent1"/>
-          </a:fillRef>
-          <a:effectRef idx="2">
-            <a:schemeClr val="accent1"/>
-          </a:effectRef>
-          <a:fontRef idx="minor">
-            <a:schemeClr val="lt1"/>
-          </a:fontRef>
-        </p:style>
-        <p:txBody>
-          <a:bodyPr rtlCol="0" anchor="ctr"/>
-          <a:lstStyle/>
-          <a:p>
-            <a:pPr algn="ctr"/>
-          </a:p>
-        </p:txBody>
-      </p:sp>
-      <p:sp>
-        <p:nvSpPr>
-          <p:cNvPr id="11" name="TextBox 10"/>
-          <p:cNvSpPr txBox="1"/>
-          <p:nvPr/>
-        </p:nvSpPr>
-        <p:spPr>
-          <a:xfrm>
-            <a:off x="950976" y="1737360"/>
-            <a:ext cx="10158984" cy="310896"/>
-          </a:xfrm>
-          <a:prstGeom prst="rect">
-            <a:avLst/>
-          </a:prstGeom>
-          <a:noFill/>
-        </p:spPr>
-        <p:txBody>
-          <a:bodyPr wrap="square" anchor="t">
-            <a:spAutoFit/>
-          </a:bodyPr>
-          <a:lstStyle/>
-          <a:p>
-            <a:pPr algn="l"/>
-            <a:r>
-              <a:rPr sz="1400" b="1">
-                <a:solidFill>
-                  <a:srgbClr val="C48052"/>
-                </a:solidFill>
-                <a:latin typeface="Aptos"/>
-              </a:rPr>
-              <a:t>Commit timeline</a:t>
-            </a:r>
-          </a:p>
-        </p:txBody>
-      </p:sp>
-      <p:sp>
-        <p:nvSpPr>
-          <p:cNvPr id="12" name="TextBox 11"/>
-          <p:cNvSpPr txBox="1"/>
-          <p:nvPr/>
-        </p:nvSpPr>
-        <p:spPr>
-          <a:xfrm>
-            <a:off x="950976" y="2194560"/>
-            <a:ext cx="10158984" cy="3639312"/>
-          </a:xfrm>
-          <a:prstGeom prst="rect">
-            <a:avLst/>
-          </a:prstGeom>
-          <a:noFill/>
-        </p:spPr>
-        <p:txBody>
-          <a:bodyPr wrap="square" anchor="t" lIns="38100" rIns="38100" tIns="25400" bIns="25400">
-            <a:noAutofit/>
-          </a:bodyPr>
-          <a:lstStyle/>
-          <a:p>
-            <a:pPr>
-              <a:spcAft>
-                <a:spcPts val="600"/>
-              </a:spcAft>
-              <a:defRPr sz="1200">
-                <a:solidFill>
-                  <a:srgbClr val="B4BAAE"/>
-                </a:solidFill>
-                <a:latin typeface="Aptos"/>
-              </a:defRPr>
-            </a:pPr>
-            <a:r>
-              <a:rPr sz="1200" b="0" i="0">
-                <a:latin typeface="Calibri"/>
-              </a:rPr>
-              <a:t>2026-05-29 | 80baef9 | Implementation of Asking on the chain of Multi-turn, by Tlamatini's-AutoBot.</a:t>
-            </a:r>
-            <a:endParaRPr sz="1200" b="0" i="0">
-              <a:latin typeface="Calibri"/>
-            </a:endParaRPr>
-          </a:p>
-          <a:p>
-            <a:pPr>
-              <a:spcAft>
-                <a:spcPts val="600"/>
-              </a:spcAft>
-              <a:defRPr sz="1200">
-                <a:solidFill>
-                  <a:srgbClr val="B4BAAE"/>
-                </a:solidFill>
-                <a:latin typeface="Aptos"/>
-              </a:defRPr>
-            </a:pPr>
-            <a:r>
-              <a:rPr sz="1200" b="0" i="0">
-                <a:latin typeface="Calibri"/>
-              </a:rPr>
-              <a:t>2026-05-29 | ee592fd | Setting kimi-k2.6:cloud as default in config.json, by Tlamatini's-AutoBot.</a:t>
-            </a:r>
-            <a:endParaRPr sz="1200" b="0" i="0">
-              <a:latin typeface="Calibri"/>
-            </a:endParaRPr>
-          </a:p>
-          <a:p>
-            <a:pPr>
-              <a:spcAft>
-                <a:spcPts val="600"/>
-              </a:spcAft>
-              <a:defRPr sz="1200">
-                <a:solidFill>
-                  <a:srgbClr val="B4BAAE"/>
-                </a:solidFill>
-                <a:latin typeface="Aptos"/>
-              </a:defRPr>
-            </a:pPr>
-            <a:r>
-              <a:rPr sz="1200" b="0" i="0">
-                <a:latin typeface="Calibri"/>
-              </a:rPr>
-              <a:t>2026-05-29 | d1cd7e9 | Making minimal improvements in Pythonxer downstream execution, by angelahack1</a:t>
-            </a:r>
-            <a:endParaRPr sz="1200" b="0" i="0">
-              <a:latin typeface="Calibri"/>
-            </a:endParaRPr>
-          </a:p>
-          <a:p>
-            <a:pPr>
-              <a:spcAft>
-                <a:spcPts val="600"/>
-              </a:spcAft>
-              <a:defRPr sz="1200">
-                <a:solidFill>
-                  <a:srgbClr val="B4BAAE"/>
-                </a:solidFill>
-                <a:latin typeface="Aptos"/>
-              </a:defRPr>
-            </a:pPr>
-            <a:r>
-              <a:rPr sz="1200" b="0" i="0">
-                <a:latin typeface="Calibri"/>
-              </a:rPr>
-              <a:t>2026-05-29 | 1174d79 | Making minimal improvements in forked windows execution, bya angelahack1</a:t>
-            </a:r>
-            <a:endParaRPr sz="1200" b="0" i="0">
-              <a:latin typeface="Calibri"/>
-            </a:endParaRPr>
-          </a:p>
-        </p:txBody>
-      </p:sp>
-    </p:spTree>
-  </p:cSld>
-  <p:clrMapOvr>
-    <a:masterClrMapping/>
-  </p:clrMapOvr>
-</p:sld>
-</file>
-
-<file path=ppt/slides/slide48.xml><?xml version="1.0" encoding="utf-8"?>
 <p:sld xmlns:a="http://schemas.openxmlformats.org/drawingml/2006/main" xmlns:p="http://schemas.openxmlformats.org/presentationml/2006/main" xmlns:r="http://schemas.openxmlformats.org/officeDocument/2006/relationships">
   <p:cSld>
     <p:spTree>
@@ -35525,7 +34405,7 @@
 </p:sld>
 </file>
 
-<file path=ppt/slides/slide49.xml><?xml version="1.0" encoding="utf-8"?>
+<file path=ppt/slides/slide47.xml><?xml version="1.0" encoding="utf-8"?>
 <p:sld xmlns:a="http://schemas.openxmlformats.org/drawingml/2006/main" xmlns:p="http://schemas.openxmlformats.org/presentationml/2006/main" xmlns:r="http://schemas.openxmlformats.org/officeDocument/2006/relationships">
   <p:cSld>
     <p:spTree>
@@ -35893,610 +34773,7 @@
 </p:sld>
 </file>
 
-<file path=ppt/slides/slide5.xml><?xml version="1.0" encoding="utf-8"?>
-<p:sld xmlns:a="http://schemas.openxmlformats.org/drawingml/2006/main" xmlns:p="http://schemas.openxmlformats.org/presentationml/2006/main" xmlns:r="http://schemas.openxmlformats.org/officeDocument/2006/relationships">
-  <p:cSld>
-    <p:spTree>
-      <p:nvGrpSpPr>
-        <p:cNvPr id="1" name=""/>
-        <p:cNvGrpSpPr/>
-        <p:nvPr/>
-      </p:nvGrpSpPr>
-      <p:grpSpPr/>
-      <p:sp>
-        <p:nvSpPr>
-          <p:cNvPr id="2" name="Rectangle 1"/>
-          <p:cNvSpPr/>
-          <p:nvPr/>
-        </p:nvSpPr>
-        <p:spPr>
-          <a:xfrm>
-            <a:off x="0" y="0"/>
-            <a:ext cx="12191695" cy="6858000"/>
-          </a:xfrm>
-          <a:prstGeom prst="rect">
-            <a:avLst/>
-          </a:prstGeom>
-          <a:solidFill>
-            <a:srgbClr val="080D0D"/>
-          </a:solidFill>
-          <a:ln>
-            <a:noFill/>
-          </a:ln>
-        </p:spPr>
-        <p:style>
-          <a:lnRef idx="1">
-            <a:schemeClr val="accent1"/>
-          </a:lnRef>
-          <a:fillRef idx="3">
-            <a:schemeClr val="accent1"/>
-          </a:fillRef>
-          <a:effectRef idx="2">
-            <a:schemeClr val="accent1"/>
-          </a:effectRef>
-          <a:fontRef idx="minor">
-            <a:schemeClr val="lt1"/>
-          </a:fontRef>
-        </p:style>
-        <p:txBody>
-          <a:bodyPr rtlCol="0" anchor="ctr"/>
-          <a:lstStyle/>
-          <a:p>
-            <a:pPr algn="ctr"/>
-          </a:p>
-        </p:txBody>
-      </p:sp>
-      <p:sp>
-        <p:nvSpPr>
-          <p:cNvPr id="3" name="Rectangle 2"/>
-          <p:cNvSpPr/>
-          <p:nvPr/>
-        </p:nvSpPr>
-        <p:spPr>
-          <a:xfrm>
-            <a:off x="320040" y="384048"/>
-            <a:ext cx="36576" cy="6080760"/>
-          </a:xfrm>
-          <a:prstGeom prst="rect">
-            <a:avLst/>
-          </a:prstGeom>
-          <a:solidFill>
-            <a:srgbClr val="E0AB5D"/>
-          </a:solidFill>
-          <a:ln>
-            <a:noFill/>
-          </a:ln>
-        </p:spPr>
-        <p:style>
-          <a:lnRef idx="1">
-            <a:schemeClr val="accent1"/>
-          </a:lnRef>
-          <a:fillRef idx="3">
-            <a:schemeClr val="accent1"/>
-          </a:fillRef>
-          <a:effectRef idx="2">
-            <a:schemeClr val="accent1"/>
-          </a:effectRef>
-          <a:fontRef idx="minor">
-            <a:schemeClr val="lt1"/>
-          </a:fontRef>
-        </p:style>
-        <p:txBody>
-          <a:bodyPr rtlCol="0" anchor="ctr"/>
-          <a:lstStyle/>
-          <a:p>
-            <a:pPr algn="ctr"/>
-          </a:p>
-        </p:txBody>
-      </p:sp>
-      <p:sp>
-        <p:nvSpPr>
-          <p:cNvPr id="4" name="Rectangle 3"/>
-          <p:cNvSpPr/>
-          <p:nvPr/>
-        </p:nvSpPr>
-        <p:spPr>
-          <a:xfrm>
-            <a:off x="11716207" y="384048"/>
-            <a:ext cx="36576" cy="6080760"/>
-          </a:xfrm>
-          <a:prstGeom prst="rect">
-            <a:avLst/>
-          </a:prstGeom>
-          <a:solidFill>
-            <a:srgbClr val="E0AB5D"/>
-          </a:solidFill>
-          <a:ln>
-            <a:noFill/>
-          </a:ln>
-        </p:spPr>
-        <p:style>
-          <a:lnRef idx="1">
-            <a:schemeClr val="accent1"/>
-          </a:lnRef>
-          <a:fillRef idx="3">
-            <a:schemeClr val="accent1"/>
-          </a:fillRef>
-          <a:effectRef idx="2">
-            <a:schemeClr val="accent1"/>
-          </a:effectRef>
-          <a:fontRef idx="minor">
-            <a:schemeClr val="lt1"/>
-          </a:fontRef>
-        </p:style>
-        <p:txBody>
-          <a:bodyPr rtlCol="0" anchor="ctr"/>
-          <a:lstStyle/>
-          <a:p>
-            <a:pPr algn="ctr"/>
-          </a:p>
-        </p:txBody>
-      </p:sp>
-      <p:sp>
-        <p:nvSpPr>
-          <p:cNvPr id="5" name="Rectangle 4"/>
-          <p:cNvSpPr/>
-          <p:nvPr/>
-        </p:nvSpPr>
-        <p:spPr>
-          <a:xfrm>
-            <a:off x="502920" y="384048"/>
-            <a:ext cx="11155680" cy="27432"/>
-          </a:xfrm>
-          <a:prstGeom prst="rect">
-            <a:avLst/>
-          </a:prstGeom>
-          <a:solidFill>
-            <a:srgbClr val="E0AB5D"/>
-          </a:solidFill>
-          <a:ln>
-            <a:noFill/>
-          </a:ln>
-        </p:spPr>
-        <p:style>
-          <a:lnRef idx="1">
-            <a:schemeClr val="accent1"/>
-          </a:lnRef>
-          <a:fillRef idx="3">
-            <a:schemeClr val="accent1"/>
-          </a:fillRef>
-          <a:effectRef idx="2">
-            <a:schemeClr val="accent1"/>
-          </a:effectRef>
-          <a:fontRef idx="minor">
-            <a:schemeClr val="lt1"/>
-          </a:fontRef>
-        </p:style>
-        <p:txBody>
-          <a:bodyPr rtlCol="0" anchor="ctr"/>
-          <a:lstStyle/>
-          <a:p>
-            <a:pPr algn="ctr"/>
-          </a:p>
-        </p:txBody>
-      </p:sp>
-      <p:sp>
-        <p:nvSpPr>
-          <p:cNvPr id="6" name="Rectangle 5"/>
-          <p:cNvSpPr/>
-          <p:nvPr/>
-        </p:nvSpPr>
-        <p:spPr>
-          <a:xfrm>
-            <a:off x="502920" y="6437376"/>
-            <a:ext cx="11155680" cy="27432"/>
-          </a:xfrm>
-          <a:prstGeom prst="rect">
-            <a:avLst/>
-          </a:prstGeom>
-          <a:solidFill>
-            <a:srgbClr val="E0AB5D"/>
-          </a:solidFill>
-          <a:ln>
-            <a:noFill/>
-          </a:ln>
-        </p:spPr>
-        <p:style>
-          <a:lnRef idx="1">
-            <a:schemeClr val="accent1"/>
-          </a:lnRef>
-          <a:fillRef idx="3">
-            <a:schemeClr val="accent1"/>
-          </a:fillRef>
-          <a:effectRef idx="2">
-            <a:schemeClr val="accent1"/>
-          </a:effectRef>
-          <a:fontRef idx="minor">
-            <a:schemeClr val="lt1"/>
-          </a:fontRef>
-        </p:style>
-        <p:txBody>
-          <a:bodyPr rtlCol="0" anchor="ctr"/>
-          <a:lstStyle/>
-          <a:p>
-            <a:pPr algn="ctr"/>
-          </a:p>
-        </p:txBody>
-      </p:sp>
-      <p:sp>
-        <p:nvSpPr>
-          <p:cNvPr id="7" name="TextBox 6"/>
-          <p:cNvSpPr txBox="1"/>
-          <p:nvPr/>
-        </p:nvSpPr>
-        <p:spPr>
-          <a:xfrm>
-            <a:off x="713232" y="548640"/>
-            <a:ext cx="10698480" cy="301752"/>
-          </a:xfrm>
-          <a:prstGeom prst="rect">
-            <a:avLst/>
-          </a:prstGeom>
-          <a:noFill/>
-        </p:spPr>
-        <p:txBody>
-          <a:bodyPr wrap="square" anchor="t">
-            <a:spAutoFit/>
-          </a:bodyPr>
-          <a:lstStyle/>
-          <a:p>
-            <a:pPr algn="l"/>
-            <a:r>
-              <a:rPr sz="1000" b="1">
-                <a:solidFill>
-                  <a:srgbClr val="E0AB5D"/>
-                </a:solidFill>
-                <a:latin typeface="Aptos"/>
-              </a:rPr>
-              <a:t>HOW THE SOFTWARE IS SHAPED</a:t>
-            </a:r>
-          </a:p>
-        </p:txBody>
-      </p:sp>
-      <p:sp>
-        <p:nvSpPr>
-          <p:cNvPr id="8" name="TextBox 7"/>
-          <p:cNvSpPr txBox="1"/>
-          <p:nvPr/>
-        </p:nvSpPr>
-        <p:spPr>
-          <a:xfrm>
-            <a:off x="694944" y="850392"/>
-            <a:ext cx="10881360" cy="566928"/>
-          </a:xfrm>
-          <a:prstGeom prst="rect">
-            <a:avLst/>
-          </a:prstGeom>
-          <a:noFill/>
-        </p:spPr>
-        <p:txBody>
-          <a:bodyPr wrap="square" anchor="t">
-            <a:spAutoFit/>
-          </a:bodyPr>
-          <a:lstStyle/>
-          <a:p>
-            <a:pPr algn="l"/>
-            <a:r>
-              <a:rPr sz="2700" b="0">
-                <a:solidFill>
-                  <a:srgbClr val="E8E8DE"/>
-                </a:solidFill>
-                <a:latin typeface="Aptos Display"/>
-              </a:rPr>
-              <a:t>Design Principles</a:t>
-            </a:r>
-          </a:p>
-        </p:txBody>
-      </p:sp>
-      <p:sp>
-        <p:nvSpPr>
-          <p:cNvPr id="9" name="Rounded Rectangle 8"/>
-          <p:cNvSpPr/>
-          <p:nvPr/>
-        </p:nvSpPr>
-        <p:spPr>
-          <a:xfrm>
-            <a:off x="749808" y="1572768"/>
-            <a:ext cx="10561320" cy="4343400"/>
-          </a:xfrm>
-          <a:prstGeom prst="roundRect">
-            <a:avLst/>
-          </a:prstGeom>
-          <a:solidFill>
-            <a:srgbClr val="161A19"/>
-          </a:solidFill>
-          <a:ln>
-            <a:solidFill>
-              <a:srgbClr val="595F56"/>
-            </a:solidFill>
-          </a:ln>
-        </p:spPr>
-        <p:style>
-          <a:lnRef idx="1">
-            <a:schemeClr val="accent1"/>
-          </a:lnRef>
-          <a:fillRef idx="3">
-            <a:schemeClr val="accent1"/>
-          </a:fillRef>
-          <a:effectRef idx="2">
-            <a:schemeClr val="accent1"/>
-          </a:effectRef>
-          <a:fontRef idx="minor">
-            <a:schemeClr val="lt1"/>
-          </a:fontRef>
-        </p:style>
-        <p:txBody>
-          <a:bodyPr rtlCol="0" anchor="ctr"/>
-          <a:lstStyle/>
-          <a:p>
-            <a:pPr algn="ctr"/>
-          </a:p>
-        </p:txBody>
-      </p:sp>
-      <p:sp>
-        <p:nvSpPr>
-          <p:cNvPr id="10" name="Rectangle 9"/>
-          <p:cNvSpPr/>
-          <p:nvPr/>
-        </p:nvSpPr>
-        <p:spPr>
-          <a:xfrm>
-            <a:off x="749808" y="1572768"/>
-            <a:ext cx="10561320" cy="109728"/>
-          </a:xfrm>
-          <a:prstGeom prst="rect">
-            <a:avLst/>
-          </a:prstGeom>
-          <a:solidFill>
-            <a:srgbClr val="E0AB5D"/>
-          </a:solidFill>
-          <a:ln>
-            <a:noFill/>
-          </a:ln>
-        </p:spPr>
-        <p:style>
-          <a:lnRef idx="1">
-            <a:schemeClr val="accent1"/>
-          </a:lnRef>
-          <a:fillRef idx="3">
-            <a:schemeClr val="accent1"/>
-          </a:fillRef>
-          <a:effectRef idx="2">
-            <a:schemeClr val="accent1"/>
-          </a:effectRef>
-          <a:fontRef idx="minor">
-            <a:schemeClr val="lt1"/>
-          </a:fontRef>
-        </p:style>
-        <p:txBody>
-          <a:bodyPr rtlCol="0" anchor="ctr"/>
-          <a:lstStyle/>
-          <a:p>
-            <a:pPr algn="ctr"/>
-          </a:p>
-        </p:txBody>
-      </p:sp>
-      <p:sp>
-        <p:nvSpPr>
-          <p:cNvPr id="11" name="TextBox 10"/>
-          <p:cNvSpPr txBox="1"/>
-          <p:nvPr/>
-        </p:nvSpPr>
-        <p:spPr>
-          <a:xfrm>
-            <a:off x="950976" y="1773936"/>
-            <a:ext cx="10158984" cy="310896"/>
-          </a:xfrm>
-          <a:prstGeom prst="rect">
-            <a:avLst/>
-          </a:prstGeom>
-          <a:noFill/>
-        </p:spPr>
-        <p:txBody>
-          <a:bodyPr wrap="square" anchor="t">
-            <a:spAutoFit/>
-          </a:bodyPr>
-          <a:lstStyle/>
-          <a:p>
-            <a:pPr algn="l"/>
-            <a:r>
-              <a:rPr sz="1400" b="1">
-                <a:solidFill>
-                  <a:srgbClr val="E0AB5D"/>
-                </a:solidFill>
-                <a:latin typeface="Aptos"/>
-              </a:rPr>
-              <a:t>Core design choices</a:t>
-            </a:r>
-          </a:p>
-        </p:txBody>
-      </p:sp>
-      <p:sp>
-        <p:nvSpPr>
-          <p:cNvPr id="12" name="TextBox 11"/>
-          <p:cNvSpPr txBox="1"/>
-          <p:nvPr/>
-        </p:nvSpPr>
-        <p:spPr>
-          <a:xfrm>
-            <a:off x="950976" y="2231136"/>
-            <a:ext cx="10158984" cy="3538728"/>
-          </a:xfrm>
-          <a:prstGeom prst="rect">
-            <a:avLst/>
-          </a:prstGeom>
-          <a:noFill/>
-        </p:spPr>
-        <p:txBody>
-          <a:bodyPr wrap="square" anchor="t" lIns="38100" rIns="38100" tIns="25400" bIns="25400">
-            <a:noAutofit/>
-          </a:bodyPr>
-          <a:lstStyle/>
-          <a:p>
-            <a:pPr>
-              <a:spcAft>
-                <a:spcPts val="600"/>
-              </a:spcAft>
-              <a:defRPr sz="1600">
-                <a:solidFill>
-                  <a:srgbClr val="B4BAAE"/>
-                </a:solidFill>
-                <a:latin typeface="Aptos"/>
-              </a:defRPr>
-            </a:pPr>
-            <a:r>
-              <a:rPr sz="1600" b="0" i="0">
-                <a:latin typeface="Calibri"/>
-              </a:rPr>
-              <a:t>Evidence-first answers: Tlamatini grounds responses in selected project context and hybrid retrieval rather than freeform model memory.</a:t>
-            </a:r>
-            <a:endParaRPr sz="1600" b="0" i="0">
-              <a:latin typeface="Calibri"/>
-            </a:endParaRPr>
-          </a:p>
-          <a:p>
-            <a:pPr>
-              <a:spcAft>
-                <a:spcPts val="600"/>
-              </a:spcAft>
-              <a:defRPr sz="1600">
-                <a:solidFill>
-                  <a:srgbClr val="B4BAAE"/>
-                </a:solidFill>
-                <a:latin typeface="Aptos"/>
-              </a:defRPr>
-            </a:pPr>
-            <a:r>
-              <a:rPr sz="1600" b="0" i="0">
-                <a:latin typeface="Calibri"/>
-              </a:rPr>
-              <a:t>Explicit orchestration: checked Multi-Turn uses a visible tool loop, capability scoring, and staged planning instead of a single opaque call.</a:t>
-            </a:r>
-            <a:endParaRPr sz="1600" b="0" i="0">
-              <a:latin typeface="Calibri"/>
-            </a:endParaRPr>
-          </a:p>
-          <a:p>
-            <a:pPr>
-              <a:spcAft>
-                <a:spcPts val="600"/>
-              </a:spcAft>
-              <a:defRPr sz="1600">
-                <a:solidFill>
-                  <a:srgbClr val="B4BAAE"/>
-                </a:solidFill>
-                <a:latin typeface="Aptos"/>
-              </a:defRPr>
-            </a:pPr>
-            <a:r>
-              <a:rPr sz="1600" b="0" i="0">
-                <a:latin typeface="Calibri"/>
-              </a:rPr>
-              <a:t>Operational reversibility: risky changes such as database replacement are staged, archived, and delayed to the only safe window instead of hot-swapped mid-session.</a:t>
-            </a:r>
-            <a:endParaRPr sz="1600" b="0" i="0">
-              <a:latin typeface="Calibri"/>
-            </a:endParaRPr>
-          </a:p>
-          <a:p>
-            <a:pPr>
-              <a:spcAft>
-                <a:spcPts val="600"/>
-              </a:spcAft>
-              <a:defRPr sz="1600">
-                <a:solidFill>
-                  <a:srgbClr val="B4BAAE"/>
-                </a:solidFill>
-                <a:latin typeface="Aptos"/>
-              </a:defRPr>
-            </a:pPr>
-            <a:r>
-              <a:rPr sz="1600" b="0" i="0">
-                <a:latin typeface="Calibri"/>
-              </a:rPr>
-              <a:t>Fail-open diagnostics: GPU pressure probes and session-restore safeguards warn early without breaking CPU-only or degraded environments.</a:t>
-            </a:r>
-            <a:endParaRPr sz="1600" b="0" i="0">
-              <a:latin typeface="Calibri"/>
-            </a:endParaRPr>
-          </a:p>
-          <a:p>
-            <a:pPr>
-              <a:spcAft>
-                <a:spcPts val="600"/>
-              </a:spcAft>
-              <a:defRPr sz="1600">
-                <a:solidFill>
-                  <a:srgbClr val="B4BAAE"/>
-                </a:solidFill>
-                <a:latin typeface="Aptos"/>
-              </a:defRPr>
-            </a:pPr>
-            <a:r>
-              <a:rPr sz="1600" b="0" i="0">
-                <a:latin typeface="Calibri"/>
-              </a:rPr>
-              <a:t>Runtime isolation: wrapped chat-agent copies run in session-scoped folders so template agents remain pristine while live runs stay inspectable.</a:t>
-            </a:r>
-            <a:endParaRPr sz="1600" b="0" i="0">
-              <a:latin typeface="Calibri"/>
-            </a:endParaRPr>
-          </a:p>
-          <a:p>
-            <a:pPr>
-              <a:spcAft>
-                <a:spcPts val="600"/>
-              </a:spcAft>
-              <a:defRPr sz="1600">
-                <a:solidFill>
-                  <a:srgbClr val="B4BAAE"/>
-                </a:solidFill>
-                <a:latin typeface="Aptos"/>
-              </a:defRPr>
-            </a:pPr>
-            <a:r>
-              <a:rPr sz="1600" b="0" i="0">
-                <a:latin typeface="Calibri"/>
-              </a:rPr>
-              <a:t>Self-knowledge with scope discipline: she can talk accurately about herself without letting self-reference override a user-loaded project context.</a:t>
-            </a:r>
-            <a:endParaRPr sz="1600" b="0" i="0">
-              <a:latin typeface="Calibri"/>
-            </a:endParaRPr>
-          </a:p>
-          <a:p>
-            <a:pPr>
-              <a:spcAft>
-                <a:spcPts val="600"/>
-              </a:spcAft>
-              <a:defRPr sz="1600">
-                <a:solidFill>
-                  <a:srgbClr val="B4BAAE"/>
-                </a:solidFill>
-                <a:latin typeface="Aptos"/>
-              </a:defRPr>
-            </a:pPr>
-            <a:r>
-              <a:rPr sz="1600" b="0" i="0">
-                <a:latin typeface="Calibri"/>
-              </a:rPr>
-              <a:t>Operator truth over vibes: Exec Report tables, tlamatini.log, skill audits, and ACPX transcripts make the system auditable after execution.</a:t>
-            </a:r>
-            <a:endParaRPr sz="1600" b="0" i="0">
-              <a:latin typeface="Calibri"/>
-            </a:endParaRPr>
-          </a:p>
-        </p:txBody>
-      </p:sp>
-    </p:spTree>
-  </p:cSld>
-  <p:clrMapOvr>
-    <a:masterClrMapping/>
-  </p:clrMapOvr>
-</p:sld>
-</file>
-
-<file path=ppt/slides/slide50.xml><?xml version="1.0" encoding="utf-8"?>
+<file path=ppt/slides/slide48.xml><?xml version="1.0" encoding="utf-8"?>
 <p:sld xmlns:a="http://schemas.openxmlformats.org/drawingml/2006/main" xmlns:p="http://schemas.openxmlformats.org/presentationml/2006/main" xmlns:r="http://schemas.openxmlformats.org/officeDocument/2006/relationships">
   <p:cSld>
     <p:spTree>
@@ -36864,7 +35141,7 @@
 </p:sld>
 </file>
 
-<file path=ppt/slides/slide51.xml><?xml version="1.0" encoding="utf-8"?>
+<file path=ppt/slides/slide49.xml><?xml version="1.0" encoding="utf-8"?>
 <p:sld xmlns:a="http://schemas.openxmlformats.org/drawingml/2006/main" xmlns:p="http://schemas.openxmlformats.org/presentationml/2006/main" xmlns:r="http://schemas.openxmlformats.org/officeDocument/2006/relationships">
   <p:cSld>
     <p:spTree>
@@ -37232,7 +35509,610 @@
 </p:sld>
 </file>
 
-<file path=ppt/slides/slide52.xml><?xml version="1.0" encoding="utf-8"?>
+<file path=ppt/slides/slide5.xml><?xml version="1.0" encoding="utf-8"?>
+<p:sld xmlns:a="http://schemas.openxmlformats.org/drawingml/2006/main" xmlns:p="http://schemas.openxmlformats.org/presentationml/2006/main" xmlns:r="http://schemas.openxmlformats.org/officeDocument/2006/relationships">
+  <p:cSld>
+    <p:spTree>
+      <p:nvGrpSpPr>
+        <p:cNvPr id="1" name=""/>
+        <p:cNvGrpSpPr/>
+        <p:nvPr/>
+      </p:nvGrpSpPr>
+      <p:grpSpPr/>
+      <p:sp>
+        <p:nvSpPr>
+          <p:cNvPr id="2" name="Rectangle 1"/>
+          <p:cNvSpPr/>
+          <p:nvPr/>
+        </p:nvSpPr>
+        <p:spPr>
+          <a:xfrm>
+            <a:off x="0" y="0"/>
+            <a:ext cx="12191695" cy="6858000"/>
+          </a:xfrm>
+          <a:prstGeom prst="rect">
+            <a:avLst/>
+          </a:prstGeom>
+          <a:solidFill>
+            <a:srgbClr val="080D0D"/>
+          </a:solidFill>
+          <a:ln>
+            <a:noFill/>
+          </a:ln>
+        </p:spPr>
+        <p:style>
+          <a:lnRef idx="1">
+            <a:schemeClr val="accent1"/>
+          </a:lnRef>
+          <a:fillRef idx="3">
+            <a:schemeClr val="accent1"/>
+          </a:fillRef>
+          <a:effectRef idx="2">
+            <a:schemeClr val="accent1"/>
+          </a:effectRef>
+          <a:fontRef idx="minor">
+            <a:schemeClr val="lt1"/>
+          </a:fontRef>
+        </p:style>
+        <p:txBody>
+          <a:bodyPr rtlCol="0" anchor="ctr"/>
+          <a:lstStyle/>
+          <a:p>
+            <a:pPr algn="ctr"/>
+          </a:p>
+        </p:txBody>
+      </p:sp>
+      <p:sp>
+        <p:nvSpPr>
+          <p:cNvPr id="3" name="Rectangle 2"/>
+          <p:cNvSpPr/>
+          <p:nvPr/>
+        </p:nvSpPr>
+        <p:spPr>
+          <a:xfrm>
+            <a:off x="320040" y="384048"/>
+            <a:ext cx="36576" cy="6080760"/>
+          </a:xfrm>
+          <a:prstGeom prst="rect">
+            <a:avLst/>
+          </a:prstGeom>
+          <a:solidFill>
+            <a:srgbClr val="E0AB5D"/>
+          </a:solidFill>
+          <a:ln>
+            <a:noFill/>
+          </a:ln>
+        </p:spPr>
+        <p:style>
+          <a:lnRef idx="1">
+            <a:schemeClr val="accent1"/>
+          </a:lnRef>
+          <a:fillRef idx="3">
+            <a:schemeClr val="accent1"/>
+          </a:fillRef>
+          <a:effectRef idx="2">
+            <a:schemeClr val="accent1"/>
+          </a:effectRef>
+          <a:fontRef idx="minor">
+            <a:schemeClr val="lt1"/>
+          </a:fontRef>
+        </p:style>
+        <p:txBody>
+          <a:bodyPr rtlCol="0" anchor="ctr"/>
+          <a:lstStyle/>
+          <a:p>
+            <a:pPr algn="ctr"/>
+          </a:p>
+        </p:txBody>
+      </p:sp>
+      <p:sp>
+        <p:nvSpPr>
+          <p:cNvPr id="4" name="Rectangle 3"/>
+          <p:cNvSpPr/>
+          <p:nvPr/>
+        </p:nvSpPr>
+        <p:spPr>
+          <a:xfrm>
+            <a:off x="11716207" y="384048"/>
+            <a:ext cx="36576" cy="6080760"/>
+          </a:xfrm>
+          <a:prstGeom prst="rect">
+            <a:avLst/>
+          </a:prstGeom>
+          <a:solidFill>
+            <a:srgbClr val="E0AB5D"/>
+          </a:solidFill>
+          <a:ln>
+            <a:noFill/>
+          </a:ln>
+        </p:spPr>
+        <p:style>
+          <a:lnRef idx="1">
+            <a:schemeClr val="accent1"/>
+          </a:lnRef>
+          <a:fillRef idx="3">
+            <a:schemeClr val="accent1"/>
+          </a:fillRef>
+          <a:effectRef idx="2">
+            <a:schemeClr val="accent1"/>
+          </a:effectRef>
+          <a:fontRef idx="minor">
+            <a:schemeClr val="lt1"/>
+          </a:fontRef>
+        </p:style>
+        <p:txBody>
+          <a:bodyPr rtlCol="0" anchor="ctr"/>
+          <a:lstStyle/>
+          <a:p>
+            <a:pPr algn="ctr"/>
+          </a:p>
+        </p:txBody>
+      </p:sp>
+      <p:sp>
+        <p:nvSpPr>
+          <p:cNvPr id="5" name="Rectangle 4"/>
+          <p:cNvSpPr/>
+          <p:nvPr/>
+        </p:nvSpPr>
+        <p:spPr>
+          <a:xfrm>
+            <a:off x="502920" y="384048"/>
+            <a:ext cx="11155680" cy="27432"/>
+          </a:xfrm>
+          <a:prstGeom prst="rect">
+            <a:avLst/>
+          </a:prstGeom>
+          <a:solidFill>
+            <a:srgbClr val="E0AB5D"/>
+          </a:solidFill>
+          <a:ln>
+            <a:noFill/>
+          </a:ln>
+        </p:spPr>
+        <p:style>
+          <a:lnRef idx="1">
+            <a:schemeClr val="accent1"/>
+          </a:lnRef>
+          <a:fillRef idx="3">
+            <a:schemeClr val="accent1"/>
+          </a:fillRef>
+          <a:effectRef idx="2">
+            <a:schemeClr val="accent1"/>
+          </a:effectRef>
+          <a:fontRef idx="minor">
+            <a:schemeClr val="lt1"/>
+          </a:fontRef>
+        </p:style>
+        <p:txBody>
+          <a:bodyPr rtlCol="0" anchor="ctr"/>
+          <a:lstStyle/>
+          <a:p>
+            <a:pPr algn="ctr"/>
+          </a:p>
+        </p:txBody>
+      </p:sp>
+      <p:sp>
+        <p:nvSpPr>
+          <p:cNvPr id="6" name="Rectangle 5"/>
+          <p:cNvSpPr/>
+          <p:nvPr/>
+        </p:nvSpPr>
+        <p:spPr>
+          <a:xfrm>
+            <a:off x="502920" y="6437376"/>
+            <a:ext cx="11155680" cy="27432"/>
+          </a:xfrm>
+          <a:prstGeom prst="rect">
+            <a:avLst/>
+          </a:prstGeom>
+          <a:solidFill>
+            <a:srgbClr val="E0AB5D"/>
+          </a:solidFill>
+          <a:ln>
+            <a:noFill/>
+          </a:ln>
+        </p:spPr>
+        <p:style>
+          <a:lnRef idx="1">
+            <a:schemeClr val="accent1"/>
+          </a:lnRef>
+          <a:fillRef idx="3">
+            <a:schemeClr val="accent1"/>
+          </a:fillRef>
+          <a:effectRef idx="2">
+            <a:schemeClr val="accent1"/>
+          </a:effectRef>
+          <a:fontRef idx="minor">
+            <a:schemeClr val="lt1"/>
+          </a:fontRef>
+        </p:style>
+        <p:txBody>
+          <a:bodyPr rtlCol="0" anchor="ctr"/>
+          <a:lstStyle/>
+          <a:p>
+            <a:pPr algn="ctr"/>
+          </a:p>
+        </p:txBody>
+      </p:sp>
+      <p:sp>
+        <p:nvSpPr>
+          <p:cNvPr id="7" name="TextBox 6"/>
+          <p:cNvSpPr txBox="1"/>
+          <p:nvPr/>
+        </p:nvSpPr>
+        <p:spPr>
+          <a:xfrm>
+            <a:off x="713232" y="548640"/>
+            <a:ext cx="10698480" cy="301752"/>
+          </a:xfrm>
+          <a:prstGeom prst="rect">
+            <a:avLst/>
+          </a:prstGeom>
+          <a:noFill/>
+        </p:spPr>
+        <p:txBody>
+          <a:bodyPr wrap="square" anchor="t">
+            <a:spAutoFit/>
+          </a:bodyPr>
+          <a:lstStyle/>
+          <a:p>
+            <a:pPr algn="l"/>
+            <a:r>
+              <a:rPr sz="1000" b="1">
+                <a:solidFill>
+                  <a:srgbClr val="E0AB5D"/>
+                </a:solidFill>
+                <a:latin typeface="Aptos"/>
+              </a:rPr>
+              <a:t>HOW THE SOFTWARE IS SHAPED</a:t>
+            </a:r>
+          </a:p>
+        </p:txBody>
+      </p:sp>
+      <p:sp>
+        <p:nvSpPr>
+          <p:cNvPr id="8" name="TextBox 7"/>
+          <p:cNvSpPr txBox="1"/>
+          <p:nvPr/>
+        </p:nvSpPr>
+        <p:spPr>
+          <a:xfrm>
+            <a:off x="694944" y="850392"/>
+            <a:ext cx="10881360" cy="566928"/>
+          </a:xfrm>
+          <a:prstGeom prst="rect">
+            <a:avLst/>
+          </a:prstGeom>
+          <a:noFill/>
+        </p:spPr>
+        <p:txBody>
+          <a:bodyPr wrap="square" anchor="t">
+            <a:spAutoFit/>
+          </a:bodyPr>
+          <a:lstStyle/>
+          <a:p>
+            <a:pPr algn="l"/>
+            <a:r>
+              <a:rPr sz="2700" b="0">
+                <a:solidFill>
+                  <a:srgbClr val="E8E8DE"/>
+                </a:solidFill>
+                <a:latin typeface="Aptos Display"/>
+              </a:rPr>
+              <a:t>Design Principles</a:t>
+            </a:r>
+          </a:p>
+        </p:txBody>
+      </p:sp>
+      <p:sp>
+        <p:nvSpPr>
+          <p:cNvPr id="9" name="Rounded Rectangle 8"/>
+          <p:cNvSpPr/>
+          <p:nvPr/>
+        </p:nvSpPr>
+        <p:spPr>
+          <a:xfrm>
+            <a:off x="749808" y="1572768"/>
+            <a:ext cx="10561320" cy="4343400"/>
+          </a:xfrm>
+          <a:prstGeom prst="roundRect">
+            <a:avLst/>
+          </a:prstGeom>
+          <a:solidFill>
+            <a:srgbClr val="161A19"/>
+          </a:solidFill>
+          <a:ln>
+            <a:solidFill>
+              <a:srgbClr val="595F56"/>
+            </a:solidFill>
+          </a:ln>
+        </p:spPr>
+        <p:style>
+          <a:lnRef idx="1">
+            <a:schemeClr val="accent1"/>
+          </a:lnRef>
+          <a:fillRef idx="3">
+            <a:schemeClr val="accent1"/>
+          </a:fillRef>
+          <a:effectRef idx="2">
+            <a:schemeClr val="accent1"/>
+          </a:effectRef>
+          <a:fontRef idx="minor">
+            <a:schemeClr val="lt1"/>
+          </a:fontRef>
+        </p:style>
+        <p:txBody>
+          <a:bodyPr rtlCol="0" anchor="ctr"/>
+          <a:lstStyle/>
+          <a:p>
+            <a:pPr algn="ctr"/>
+          </a:p>
+        </p:txBody>
+      </p:sp>
+      <p:sp>
+        <p:nvSpPr>
+          <p:cNvPr id="10" name="Rectangle 9"/>
+          <p:cNvSpPr/>
+          <p:nvPr/>
+        </p:nvSpPr>
+        <p:spPr>
+          <a:xfrm>
+            <a:off x="749808" y="1572768"/>
+            <a:ext cx="10561320" cy="109728"/>
+          </a:xfrm>
+          <a:prstGeom prst="rect">
+            <a:avLst/>
+          </a:prstGeom>
+          <a:solidFill>
+            <a:srgbClr val="E0AB5D"/>
+          </a:solidFill>
+          <a:ln>
+            <a:noFill/>
+          </a:ln>
+        </p:spPr>
+        <p:style>
+          <a:lnRef idx="1">
+            <a:schemeClr val="accent1"/>
+          </a:lnRef>
+          <a:fillRef idx="3">
+            <a:schemeClr val="accent1"/>
+          </a:fillRef>
+          <a:effectRef idx="2">
+            <a:schemeClr val="accent1"/>
+          </a:effectRef>
+          <a:fontRef idx="minor">
+            <a:schemeClr val="lt1"/>
+          </a:fontRef>
+        </p:style>
+        <p:txBody>
+          <a:bodyPr rtlCol="0" anchor="ctr"/>
+          <a:lstStyle/>
+          <a:p>
+            <a:pPr algn="ctr"/>
+          </a:p>
+        </p:txBody>
+      </p:sp>
+      <p:sp>
+        <p:nvSpPr>
+          <p:cNvPr id="11" name="TextBox 10"/>
+          <p:cNvSpPr txBox="1"/>
+          <p:nvPr/>
+        </p:nvSpPr>
+        <p:spPr>
+          <a:xfrm>
+            <a:off x="950976" y="1773936"/>
+            <a:ext cx="10158984" cy="310896"/>
+          </a:xfrm>
+          <a:prstGeom prst="rect">
+            <a:avLst/>
+          </a:prstGeom>
+          <a:noFill/>
+        </p:spPr>
+        <p:txBody>
+          <a:bodyPr wrap="square" anchor="t">
+            <a:spAutoFit/>
+          </a:bodyPr>
+          <a:lstStyle/>
+          <a:p>
+            <a:pPr algn="l"/>
+            <a:r>
+              <a:rPr sz="1400" b="1">
+                <a:solidFill>
+                  <a:srgbClr val="E0AB5D"/>
+                </a:solidFill>
+                <a:latin typeface="Aptos"/>
+              </a:rPr>
+              <a:t>Core design choices</a:t>
+            </a:r>
+          </a:p>
+        </p:txBody>
+      </p:sp>
+      <p:sp>
+        <p:nvSpPr>
+          <p:cNvPr id="12" name="TextBox 11"/>
+          <p:cNvSpPr txBox="1"/>
+          <p:nvPr/>
+        </p:nvSpPr>
+        <p:spPr>
+          <a:xfrm>
+            <a:off x="950976" y="2231136"/>
+            <a:ext cx="10158984" cy="3538728"/>
+          </a:xfrm>
+          <a:prstGeom prst="rect">
+            <a:avLst/>
+          </a:prstGeom>
+          <a:noFill/>
+        </p:spPr>
+        <p:txBody>
+          <a:bodyPr wrap="square" anchor="t" lIns="38100" rIns="38100" tIns="25400" bIns="25400">
+            <a:noAutofit/>
+          </a:bodyPr>
+          <a:lstStyle/>
+          <a:p>
+            <a:pPr>
+              <a:spcAft>
+                <a:spcPts val="600"/>
+              </a:spcAft>
+              <a:defRPr sz="1600">
+                <a:solidFill>
+                  <a:srgbClr val="B4BAAE"/>
+                </a:solidFill>
+                <a:latin typeface="Aptos"/>
+              </a:defRPr>
+            </a:pPr>
+            <a:r>
+              <a:rPr sz="1600" b="0" i="0">
+                <a:latin typeface="Calibri"/>
+              </a:rPr>
+              <a:t>Evidence-first answers: Tlamatini grounds responses in selected project context and hybrid retrieval rather than freeform model memory.</a:t>
+            </a:r>
+            <a:endParaRPr sz="1600" b="0" i="0">
+              <a:latin typeface="Calibri"/>
+            </a:endParaRPr>
+          </a:p>
+          <a:p>
+            <a:pPr>
+              <a:spcAft>
+                <a:spcPts val="600"/>
+              </a:spcAft>
+              <a:defRPr sz="1600">
+                <a:solidFill>
+                  <a:srgbClr val="B4BAAE"/>
+                </a:solidFill>
+                <a:latin typeface="Aptos"/>
+              </a:defRPr>
+            </a:pPr>
+            <a:r>
+              <a:rPr sz="1600" b="0" i="0">
+                <a:latin typeface="Calibri"/>
+              </a:rPr>
+              <a:t>Explicit orchestration: checked Multi-Turn uses a visible tool loop, capability scoring, and staged planning instead of a single opaque call.</a:t>
+            </a:r>
+            <a:endParaRPr sz="1600" b="0" i="0">
+              <a:latin typeface="Calibri"/>
+            </a:endParaRPr>
+          </a:p>
+          <a:p>
+            <a:pPr>
+              <a:spcAft>
+                <a:spcPts val="600"/>
+              </a:spcAft>
+              <a:defRPr sz="1600">
+                <a:solidFill>
+                  <a:srgbClr val="B4BAAE"/>
+                </a:solidFill>
+                <a:latin typeface="Aptos"/>
+              </a:defRPr>
+            </a:pPr>
+            <a:r>
+              <a:rPr sz="1600" b="0" i="0">
+                <a:latin typeface="Calibri"/>
+              </a:rPr>
+              <a:t>Operational reversibility: risky changes such as database replacement are staged, archived, and delayed to the only safe window instead of hot-swapped mid-session.</a:t>
+            </a:r>
+            <a:endParaRPr sz="1600" b="0" i="0">
+              <a:latin typeface="Calibri"/>
+            </a:endParaRPr>
+          </a:p>
+          <a:p>
+            <a:pPr>
+              <a:spcAft>
+                <a:spcPts val="600"/>
+              </a:spcAft>
+              <a:defRPr sz="1600">
+                <a:solidFill>
+                  <a:srgbClr val="B4BAAE"/>
+                </a:solidFill>
+                <a:latin typeface="Aptos"/>
+              </a:defRPr>
+            </a:pPr>
+            <a:r>
+              <a:rPr sz="1600" b="0" i="0">
+                <a:latin typeface="Calibri"/>
+              </a:rPr>
+              <a:t>Fail-open diagnostics: GPU pressure probes and session-restore safeguards warn early without breaking CPU-only or degraded environments.</a:t>
+            </a:r>
+            <a:endParaRPr sz="1600" b="0" i="0">
+              <a:latin typeface="Calibri"/>
+            </a:endParaRPr>
+          </a:p>
+          <a:p>
+            <a:pPr>
+              <a:spcAft>
+                <a:spcPts val="600"/>
+              </a:spcAft>
+              <a:defRPr sz="1600">
+                <a:solidFill>
+                  <a:srgbClr val="B4BAAE"/>
+                </a:solidFill>
+                <a:latin typeface="Aptos"/>
+              </a:defRPr>
+            </a:pPr>
+            <a:r>
+              <a:rPr sz="1600" b="0" i="0">
+                <a:latin typeface="Calibri"/>
+              </a:rPr>
+              <a:t>Runtime isolation: wrapped chat-agent copies run in session-scoped folders so template agents remain pristine while live runs stay inspectable.</a:t>
+            </a:r>
+            <a:endParaRPr sz="1600" b="0" i="0">
+              <a:latin typeface="Calibri"/>
+            </a:endParaRPr>
+          </a:p>
+          <a:p>
+            <a:pPr>
+              <a:spcAft>
+                <a:spcPts val="600"/>
+              </a:spcAft>
+              <a:defRPr sz="1600">
+                <a:solidFill>
+                  <a:srgbClr val="B4BAAE"/>
+                </a:solidFill>
+                <a:latin typeface="Aptos"/>
+              </a:defRPr>
+            </a:pPr>
+            <a:r>
+              <a:rPr sz="1600" b="0" i="0">
+                <a:latin typeface="Calibri"/>
+              </a:rPr>
+              <a:t>Self-knowledge with scope discipline: she can talk accurately about herself without letting self-reference override a user-loaded project context.</a:t>
+            </a:r>
+            <a:endParaRPr sz="1600" b="0" i="0">
+              <a:latin typeface="Calibri"/>
+            </a:endParaRPr>
+          </a:p>
+          <a:p>
+            <a:pPr>
+              <a:spcAft>
+                <a:spcPts val="600"/>
+              </a:spcAft>
+              <a:defRPr sz="1600">
+                <a:solidFill>
+                  <a:srgbClr val="B4BAAE"/>
+                </a:solidFill>
+                <a:latin typeface="Aptos"/>
+              </a:defRPr>
+            </a:pPr>
+            <a:r>
+              <a:rPr sz="1600" b="0" i="0">
+                <a:latin typeface="Calibri"/>
+              </a:rPr>
+              <a:t>Operator truth over vibes: Exec Report tables, tlamatini.log, skill audits, and ACPX transcripts make the system auditable after execution.</a:t>
+            </a:r>
+            <a:endParaRPr sz="1600" b="0" i="0">
+              <a:latin typeface="Calibri"/>
+            </a:endParaRPr>
+          </a:p>
+        </p:txBody>
+      </p:sp>
+    </p:spTree>
+  </p:cSld>
+  <p:clrMapOvr>
+    <a:masterClrMapping/>
+  </p:clrMapOvr>
+</p:sld>
+</file>
+
+<file path=ppt/slides/slide50.xml><?xml version="1.0" encoding="utf-8"?>
 <p:sld xmlns:a="http://schemas.openxmlformats.org/drawingml/2006/main" xmlns:p="http://schemas.openxmlformats.org/presentationml/2006/main" xmlns:r="http://schemas.openxmlformats.org/officeDocument/2006/relationships">
   <p:cSld>
     <p:spTree>
@@ -37600,7 +36480,7 @@
 </p:sld>
 </file>
 
-<file path=ppt/slides/slide53.xml><?xml version="1.0" encoding="utf-8"?>
+<file path=ppt/slides/slide51.xml><?xml version="1.0" encoding="utf-8"?>
 <p:sld xmlns:a="http://schemas.openxmlformats.org/drawingml/2006/main" xmlns:p="http://schemas.openxmlformats.org/presentationml/2006/main" xmlns:r="http://schemas.openxmlformats.org/officeDocument/2006/relationships">
   <p:cSld>
     <p:spTree>
@@ -37968,7 +36848,7 @@
 </p:sld>
 </file>
 
-<file path=ppt/slides/slide54.xml><?xml version="1.0" encoding="utf-8"?>
+<file path=ppt/slides/slide52.xml><?xml version="1.0" encoding="utf-8"?>
 <p:sld xmlns:a="http://schemas.openxmlformats.org/drawingml/2006/main" xmlns:p="http://schemas.openxmlformats.org/presentationml/2006/main" xmlns:r="http://schemas.openxmlformats.org/officeDocument/2006/relationships">
   <p:cSld>
     <p:spTree>
@@ -38336,7 +37216,7 @@
 </p:sld>
 </file>
 
-<file path=ppt/slides/slide55.xml><?xml version="1.0" encoding="utf-8"?>
+<file path=ppt/slides/slide53.xml><?xml version="1.0" encoding="utf-8"?>
 <p:sld xmlns:a="http://schemas.openxmlformats.org/drawingml/2006/main" xmlns:p="http://schemas.openxmlformats.org/presentationml/2006/main" xmlns:r="http://schemas.openxmlformats.org/officeDocument/2006/relationships">
   <p:cSld>
     <p:spTree>
@@ -38704,7 +37584,7 @@
 </p:sld>
 </file>
 
-<file path=ppt/slides/slide56.xml><?xml version="1.0" encoding="utf-8"?>
+<file path=ppt/slides/slide54.xml><?xml version="1.0" encoding="utf-8"?>
 <p:sld xmlns:a="http://schemas.openxmlformats.org/drawingml/2006/main" xmlns:p="http://schemas.openxmlformats.org/presentationml/2006/main" xmlns:r="http://schemas.openxmlformats.org/officeDocument/2006/relationships">
   <p:cSld>
     <p:spTree>
@@ -39072,7 +37952,7 @@
 </p:sld>
 </file>
 
-<file path=ppt/slides/slide57.xml><?xml version="1.0" encoding="utf-8"?>
+<file path=ppt/slides/slide55.xml><?xml version="1.0" encoding="utf-8"?>
 <p:sld xmlns:a="http://schemas.openxmlformats.org/drawingml/2006/main" xmlns:p="http://schemas.openxmlformats.org/presentationml/2006/main" xmlns:r="http://schemas.openxmlformats.org/officeDocument/2006/relationships">
   <p:cSld>
     <p:spTree>
@@ -39440,7 +38320,7 @@
 </p:sld>
 </file>
 
-<file path=ppt/slides/slide58.xml><?xml version="1.0" encoding="utf-8"?>
+<file path=ppt/slides/slide56.xml><?xml version="1.0" encoding="utf-8"?>
 <p:sld xmlns:a="http://schemas.openxmlformats.org/drawingml/2006/main" xmlns:p="http://schemas.openxmlformats.org/presentationml/2006/main" xmlns:r="http://schemas.openxmlformats.org/officeDocument/2006/relationships">
   <p:cSld>
     <p:spTree>
@@ -39808,7 +38688,7 @@
 </p:sld>
 </file>
 
-<file path=ppt/slides/slide59.xml><?xml version="1.0" encoding="utf-8"?>
+<file path=ppt/slides/slide57.xml><?xml version="1.0" encoding="utf-8"?>
 <p:sld xmlns:a="http://schemas.openxmlformats.org/drawingml/2006/main" xmlns:p="http://schemas.openxmlformats.org/presentationml/2006/main" xmlns:r="htt